--- a/Presentation/Announcement.pptx
+++ b/Presentation/Announcement.pptx
@@ -8,10 +8,10 @@
     <p:notesMasterId r:id="rId14"/>
   </p:notesMasterIdLst>
   <p:sldIdLst>
-    <p:sldId id="276" r:id="rId2"/>
-    <p:sldId id="278" r:id="rId3"/>
-    <p:sldId id="281" r:id="rId4"/>
-    <p:sldId id="286" r:id="rId5"/>
+    <p:sldId id="286" r:id="rId2"/>
+    <p:sldId id="276" r:id="rId3"/>
+    <p:sldId id="278" r:id="rId4"/>
+    <p:sldId id="281" r:id="rId5"/>
     <p:sldId id="287" r:id="rId6"/>
     <p:sldId id="285" r:id="rId7"/>
     <p:sldId id="284" r:id="rId8"/>
@@ -739,7 +739,13 @@
   <p:cSld>
     <p:spTree>
       <p:nvGrpSpPr>
-        <p:cNvPr id="1" name="Shape 320"/>
+        <p:cNvPr id="1" name="Shape 320">
+          <a:extLst>
+            <a:ext uri="{FF2B5EF4-FFF2-40B4-BE49-F238E27FC236}">
+              <a16:creationId xmlns:a16="http://schemas.microsoft.com/office/drawing/2014/main" id="{5E82D901-7A14-0382-4365-722182C687A8}"/>
+            </a:ext>
+          </a:extLst>
+        </p:cNvPr>
         <p:cNvGrpSpPr/>
         <p:nvPr/>
       </p:nvGrpSpPr>
@@ -753,7 +759,13 @@
       </p:grpSpPr>
       <p:sp>
         <p:nvSpPr>
-          <p:cNvPr id="321" name="Google Shape;321;g8f52c9b70a_3_0:notes"/>
+          <p:cNvPr id="321" name="Google Shape;321;g8f52c9b70a_3_0:notes">
+            <a:extLst>
+              <a:ext uri="{FF2B5EF4-FFF2-40B4-BE49-F238E27FC236}">
+                <a16:creationId xmlns:a16="http://schemas.microsoft.com/office/drawing/2014/main" id="{B8D16220-AF50-7601-71A9-4952749D32CB}"/>
+              </a:ext>
+            </a:extLst>
+          </p:cNvPr>
           <p:cNvSpPr>
             <a:spLocks noGrp="1" noRot="1" noChangeAspect="1"/>
           </p:cNvSpPr>
@@ -794,7 +806,13 @@
       </p:sp>
       <p:sp>
         <p:nvSpPr>
-          <p:cNvPr id="322" name="Google Shape;322;g8f52c9b70a_3_0:notes"/>
+          <p:cNvPr id="322" name="Google Shape;322;g8f52c9b70a_3_0:notes">
+            <a:extLst>
+              <a:ext uri="{FF2B5EF4-FFF2-40B4-BE49-F238E27FC236}">
+                <a16:creationId xmlns:a16="http://schemas.microsoft.com/office/drawing/2014/main" id="{AEA302D2-52D7-97D7-BF6C-781234E92D43}"/>
+              </a:ext>
+            </a:extLst>
+          </p:cNvPr>
           <p:cNvSpPr txBox="1">
             <a:spLocks noGrp="1"/>
           </p:cNvSpPr>
@@ -825,6 +843,11 @@
         </p:txBody>
       </p:sp>
     </p:spTree>
+    <p:extLst>
+      <p:ext uri="{BB962C8B-B14F-4D97-AF65-F5344CB8AC3E}">
+        <p14:creationId xmlns:p14="http://schemas.microsoft.com/office/powerpoint/2010/main" val="2483524941"/>
+      </p:ext>
+    </p:extLst>
   </p:cSld>
   <p:clrMapOvr>
     <a:masterClrMapping/>
@@ -1232,11 +1255,6 @@
         </p:txBody>
       </p:sp>
     </p:spTree>
-    <p:extLst>
-      <p:ext uri="{BB962C8B-B14F-4D97-AF65-F5344CB8AC3E}">
-        <p14:creationId xmlns:p14="http://schemas.microsoft.com/office/powerpoint/2010/main" val="4097390636"/>
-      </p:ext>
-    </p:extLst>
   </p:cSld>
   <p:clrMapOvr>
     <a:masterClrMapping/>
@@ -1337,7 +1355,7 @@
     </p:spTree>
     <p:extLst>
       <p:ext uri="{BB962C8B-B14F-4D97-AF65-F5344CB8AC3E}">
-        <p14:creationId xmlns:p14="http://schemas.microsoft.com/office/powerpoint/2010/main" val="2158134825"/>
+        <p14:creationId xmlns:p14="http://schemas.microsoft.com/office/powerpoint/2010/main" val="4097390636"/>
       </p:ext>
     </p:extLst>
   </p:cSld>
@@ -1352,13 +1370,7 @@
   <p:cSld>
     <p:spTree>
       <p:nvGrpSpPr>
-        <p:cNvPr id="1" name="Shape 320">
-          <a:extLst>
-            <a:ext uri="{FF2B5EF4-FFF2-40B4-BE49-F238E27FC236}">
-              <a16:creationId xmlns:a16="http://schemas.microsoft.com/office/drawing/2014/main" id="{5E82D901-7A14-0382-4365-722182C687A8}"/>
-            </a:ext>
-          </a:extLst>
-        </p:cNvPr>
+        <p:cNvPr id="1" name="Shape 320"/>
         <p:cNvGrpSpPr/>
         <p:nvPr/>
       </p:nvGrpSpPr>
@@ -1372,13 +1384,7 @@
       </p:grpSpPr>
       <p:sp>
         <p:nvSpPr>
-          <p:cNvPr id="321" name="Google Shape;321;g8f52c9b70a_3_0:notes">
-            <a:extLst>
-              <a:ext uri="{FF2B5EF4-FFF2-40B4-BE49-F238E27FC236}">
-                <a16:creationId xmlns:a16="http://schemas.microsoft.com/office/drawing/2014/main" id="{B8D16220-AF50-7601-71A9-4952749D32CB}"/>
-              </a:ext>
-            </a:extLst>
-          </p:cNvPr>
+          <p:cNvPr id="321" name="Google Shape;321;g8f52c9b70a_3_0:notes"/>
           <p:cNvSpPr>
             <a:spLocks noGrp="1" noRot="1" noChangeAspect="1"/>
           </p:cNvSpPr>
@@ -1419,13 +1425,7 @@
       </p:sp>
       <p:sp>
         <p:nvSpPr>
-          <p:cNvPr id="322" name="Google Shape;322;g8f52c9b70a_3_0:notes">
-            <a:extLst>
-              <a:ext uri="{FF2B5EF4-FFF2-40B4-BE49-F238E27FC236}">
-                <a16:creationId xmlns:a16="http://schemas.microsoft.com/office/drawing/2014/main" id="{AEA302D2-52D7-97D7-BF6C-781234E92D43}"/>
-              </a:ext>
-            </a:extLst>
-          </p:cNvPr>
+          <p:cNvPr id="322" name="Google Shape;322;g8f52c9b70a_3_0:notes"/>
           <p:cNvSpPr txBox="1">
             <a:spLocks noGrp="1"/>
           </p:cNvSpPr>
@@ -1458,7 +1458,7 @@
     </p:spTree>
     <p:extLst>
       <p:ext uri="{BB962C8B-B14F-4D97-AF65-F5344CB8AC3E}">
-        <p14:creationId xmlns:p14="http://schemas.microsoft.com/office/powerpoint/2010/main" val="2483524941"/>
+        <p14:creationId xmlns:p14="http://schemas.microsoft.com/office/powerpoint/2010/main" val="2158134825"/>
       </p:ext>
     </p:extLst>
   </p:cSld>
@@ -6529,6 +6529,1379 @@
   <p:cSld>
     <p:spTree>
       <p:nvGrpSpPr>
+        <p:cNvPr id="1" name="Shape 323">
+          <a:extLst>
+            <a:ext uri="{FF2B5EF4-FFF2-40B4-BE49-F238E27FC236}">
+              <a16:creationId xmlns:a16="http://schemas.microsoft.com/office/drawing/2014/main" id="{19512066-5980-8A8B-BE30-C4FB3AC72235}"/>
+            </a:ext>
+          </a:extLst>
+        </p:cNvPr>
+        <p:cNvGrpSpPr/>
+        <p:nvPr/>
+      </p:nvGrpSpPr>
+      <p:grpSpPr>
+        <a:xfrm>
+          <a:off x="0" y="0"/>
+          <a:ext cx="0" cy="0"/>
+          <a:chOff x="0" y="0"/>
+          <a:chExt cx="0" cy="0"/>
+        </a:xfrm>
+      </p:grpSpPr>
+      <p:sp>
+        <p:nvSpPr>
+          <p:cNvPr id="324" name="Google Shape;324;p47">
+            <a:extLst>
+              <a:ext uri="{FF2B5EF4-FFF2-40B4-BE49-F238E27FC236}">
+                <a16:creationId xmlns:a16="http://schemas.microsoft.com/office/drawing/2014/main" id="{CDF56279-13BE-3C44-BBEF-E7DC5D1E88D2}"/>
+              </a:ext>
+            </a:extLst>
+          </p:cNvPr>
+          <p:cNvSpPr txBox="1">
+            <a:spLocks noGrp="1"/>
+          </p:cNvSpPr>
+          <p:nvPr>
+            <p:ph type="title"/>
+          </p:nvPr>
+        </p:nvSpPr>
+        <p:spPr>
+          <a:xfrm>
+            <a:off x="300016" y="269197"/>
+            <a:ext cx="8520600" cy="623700"/>
+          </a:xfrm>
+          <a:prstGeom prst="rect">
+            <a:avLst/>
+          </a:prstGeom>
+        </p:spPr>
+        <p:txBody>
+          <a:bodyPr spcFirstLastPara="1" wrap="square" lIns="91425" tIns="91425" rIns="91425" bIns="91425" anchor="t" anchorCtr="0">
+            <a:noAutofit/>
+          </a:bodyPr>
+          <a:lstStyle/>
+          <a:p>
+            <a:pPr marL="0" lvl="0" indent="0" algn="ctr" rtl="0">
+              <a:spcBef>
+                <a:spcPts val="0"/>
+              </a:spcBef>
+              <a:spcAft>
+                <a:spcPts val="0"/>
+              </a:spcAft>
+              <a:buNone/>
+            </a:pPr>
+            <a:r>
+              <a:rPr lang="en-US" dirty="0"/>
+              <a:t>GCIS – Software Development and Problem Solving</a:t>
+            </a:r>
+            <a:endParaRPr dirty="0"/>
+          </a:p>
+        </p:txBody>
+      </p:sp>
+      <p:sp>
+        <p:nvSpPr>
+          <p:cNvPr id="325" name="Google Shape;325;p47">
+            <a:extLst>
+              <a:ext uri="{FF2B5EF4-FFF2-40B4-BE49-F238E27FC236}">
+                <a16:creationId xmlns:a16="http://schemas.microsoft.com/office/drawing/2014/main" id="{5A9661D1-8430-BF80-279A-41B28CA04273}"/>
+              </a:ext>
+            </a:extLst>
+          </p:cNvPr>
+          <p:cNvSpPr txBox="1">
+            <a:spLocks noGrp="1"/>
+          </p:cNvSpPr>
+          <p:nvPr>
+            <p:ph type="body" idx="1"/>
+          </p:nvPr>
+        </p:nvSpPr>
+        <p:spPr>
+          <a:xfrm>
+            <a:off x="91445" y="1758316"/>
+            <a:ext cx="4000496" cy="1378401"/>
+          </a:xfrm>
+          <a:prstGeom prst="rect">
+            <a:avLst/>
+          </a:prstGeom>
+        </p:spPr>
+        <p:txBody>
+          <a:bodyPr spcFirstLastPara="1" wrap="square" lIns="91425" tIns="91425" rIns="91425" bIns="91425" anchor="ctr" anchorCtr="0">
+            <a:noAutofit/>
+          </a:bodyPr>
+          <a:lstStyle/>
+          <a:p>
+            <a:pPr marL="146050" indent="0">
+              <a:buNone/>
+            </a:pPr>
+            <a:r>
+              <a:rPr lang="en-US" sz="1600" dirty="0"/>
+              <a:t>Take Quiz 1.2: Testing Array &amp; Exception</a:t>
+            </a:r>
+          </a:p>
+          <a:p>
+            <a:pPr marL="146050" indent="0">
+              <a:buNone/>
+            </a:pPr>
+            <a:r>
+              <a:rPr lang="en-US" sz="1600" dirty="0">
+                <a:solidFill>
+                  <a:schemeClr val="tx1"/>
+                </a:solidFill>
+              </a:rPr>
+              <a:t>Password – camelCase</a:t>
+            </a:r>
+            <a:endParaRPr sz="1600" dirty="0">
+              <a:solidFill>
+                <a:schemeClr val="tx1"/>
+              </a:solidFill>
+            </a:endParaRPr>
+          </a:p>
+        </p:txBody>
+      </p:sp>
+      <p:sp>
+        <p:nvSpPr>
+          <p:cNvPr id="326" name="Google Shape;326;p47">
+            <a:extLst>
+              <a:ext uri="{FF2B5EF4-FFF2-40B4-BE49-F238E27FC236}">
+                <a16:creationId xmlns:a16="http://schemas.microsoft.com/office/drawing/2014/main" id="{8A14E227-935A-FBD8-6BD5-CBCE8D13EE84}"/>
+              </a:ext>
+            </a:extLst>
+          </p:cNvPr>
+          <p:cNvSpPr txBox="1">
+            <a:spLocks noGrp="1"/>
+          </p:cNvSpPr>
+          <p:nvPr>
+            <p:ph type="sldNum" idx="12"/>
+          </p:nvPr>
+        </p:nvSpPr>
+        <p:spPr>
+          <a:xfrm>
+            <a:off x="8472458" y="4663217"/>
+            <a:ext cx="548700" cy="393600"/>
+          </a:xfrm>
+          <a:prstGeom prst="rect">
+            <a:avLst/>
+          </a:prstGeom>
+        </p:spPr>
+        <p:txBody>
+          <a:bodyPr spcFirstLastPara="1" wrap="square" lIns="91425" tIns="91425" rIns="91425" bIns="91425" anchor="ctr" anchorCtr="0">
+            <a:noAutofit/>
+          </a:bodyPr>
+          <a:lstStyle/>
+          <a:p>
+            <a:pPr marL="0" lvl="0" indent="0" algn="r" rtl="0">
+              <a:spcBef>
+                <a:spcPts val="0"/>
+              </a:spcBef>
+              <a:spcAft>
+                <a:spcPts val="0"/>
+              </a:spcAft>
+              <a:buNone/>
+            </a:pPr>
+            <a:fld id="{00000000-1234-1234-1234-123412341234}" type="slidenum">
+              <a:rPr lang="en"/>
+              <a:t>1</a:t>
+            </a:fld>
+            <a:endParaRPr/>
+          </a:p>
+        </p:txBody>
+      </p:sp>
+      <p:sp>
+        <p:nvSpPr>
+          <p:cNvPr id="2" name="TextBox 1">
+            <a:extLst>
+              <a:ext uri="{FF2B5EF4-FFF2-40B4-BE49-F238E27FC236}">
+                <a16:creationId xmlns:a16="http://schemas.microsoft.com/office/drawing/2014/main" id="{AE960589-7B12-D7F7-6452-D45441D8CA95}"/>
+              </a:ext>
+            </a:extLst>
+          </p:cNvPr>
+          <p:cNvSpPr txBox="1"/>
+          <p:nvPr/>
+        </p:nvSpPr>
+        <p:spPr>
+          <a:xfrm>
+            <a:off x="-11684" y="1287037"/>
+            <a:ext cx="9144000" cy="338555"/>
+          </a:xfrm>
+          <a:prstGeom prst="rect">
+            <a:avLst/>
+          </a:prstGeom>
+          <a:solidFill>
+            <a:srgbClr val="FFC000"/>
+          </a:solidFill>
+        </p:spPr>
+        <p:txBody>
+          <a:bodyPr wrap="square" rtlCol="0">
+            <a:spAutoFit/>
+          </a:bodyPr>
+          <a:lstStyle/>
+          <a:p>
+            <a:r>
+              <a:rPr lang="en-US" dirty="0"/>
+              <a:t>Quiz</a:t>
+            </a:r>
+          </a:p>
+        </p:txBody>
+      </p:sp>
+      <p:sp>
+        <p:nvSpPr>
+          <p:cNvPr id="3" name="TextBox 2">
+            <a:extLst>
+              <a:ext uri="{FF2B5EF4-FFF2-40B4-BE49-F238E27FC236}">
+                <a16:creationId xmlns:a16="http://schemas.microsoft.com/office/drawing/2014/main" id="{4FD526CA-3FDB-A5C2-36D9-69A3252D5E9A}"/>
+              </a:ext>
+            </a:extLst>
+          </p:cNvPr>
+          <p:cNvSpPr txBox="1"/>
+          <p:nvPr/>
+        </p:nvSpPr>
+        <p:spPr>
+          <a:xfrm>
+            <a:off x="0" y="3507404"/>
+            <a:ext cx="9144000" cy="307777"/>
+          </a:xfrm>
+          <a:prstGeom prst="rect">
+            <a:avLst/>
+          </a:prstGeom>
+          <a:solidFill>
+            <a:srgbClr val="FFC000"/>
+          </a:solidFill>
+        </p:spPr>
+        <p:txBody>
+          <a:bodyPr wrap="square" rtlCol="0">
+            <a:spAutoFit/>
+          </a:bodyPr>
+          <a:lstStyle/>
+          <a:p>
+            <a:r>
+              <a:rPr lang="en-US" dirty="0"/>
+              <a:t>Next </a:t>
+            </a:r>
+            <a:r>
+              <a:rPr lang="en-US" dirty="0">
+                <a:sym typeface="Wingdings" panose="05000000000000000000" pitchFamily="2" charset="2"/>
+              </a:rPr>
+              <a:t> </a:t>
+            </a:r>
+            <a:endParaRPr lang="en-US" dirty="0"/>
+          </a:p>
+        </p:txBody>
+      </p:sp>
+      <p:sp>
+        <p:nvSpPr>
+          <p:cNvPr id="4" name="Google Shape;325;p47">
+            <a:extLst>
+              <a:ext uri="{FF2B5EF4-FFF2-40B4-BE49-F238E27FC236}">
+                <a16:creationId xmlns:a16="http://schemas.microsoft.com/office/drawing/2014/main" id="{DC50CCB1-5AFE-1F52-8B22-87EB927965B4}"/>
+              </a:ext>
+            </a:extLst>
+          </p:cNvPr>
+          <p:cNvSpPr txBox="1">
+            <a:spLocks/>
+          </p:cNvSpPr>
+          <p:nvPr/>
+        </p:nvSpPr>
+        <p:spPr>
+          <a:xfrm>
+            <a:off x="-5842" y="3848100"/>
+            <a:ext cx="9149842" cy="1208717"/>
+          </a:xfrm>
+          <a:prstGeom prst="rect">
+            <a:avLst/>
+          </a:prstGeom>
+          <a:noFill/>
+          <a:ln>
+            <a:noFill/>
+          </a:ln>
+        </p:spPr>
+        <p:txBody>
+          <a:bodyPr spcFirstLastPara="1" wrap="square" lIns="91425" tIns="91425" rIns="91425" bIns="91425" anchor="ctr" anchorCtr="0">
+            <a:noAutofit/>
+          </a:bodyPr>
+          <a:lstStyle>
+            <a:defPPr marR="0" lvl="0" algn="l" rtl="0">
+              <a:lnSpc>
+                <a:spcPct val="100000"/>
+              </a:lnSpc>
+              <a:spcBef>
+                <a:spcPts val="0"/>
+              </a:spcBef>
+              <a:spcAft>
+                <a:spcPts val="0"/>
+              </a:spcAft>
+            </a:defPPr>
+            <a:lvl1pPr marL="457200" marR="0" lvl="0" indent="-311150" algn="l" rtl="0">
+              <a:lnSpc>
+                <a:spcPct val="115000"/>
+              </a:lnSpc>
+              <a:spcBef>
+                <a:spcPts val="0"/>
+              </a:spcBef>
+              <a:spcAft>
+                <a:spcPts val="0"/>
+              </a:spcAft>
+              <a:buClr>
+                <a:schemeClr val="dk2"/>
+              </a:buClr>
+              <a:buSzPts val="1300"/>
+              <a:buFont typeface="Roboto"/>
+              <a:buChar char="●"/>
+              <a:defRPr sz="1300" b="0" i="0" u="none" strike="noStrike" cap="none">
+                <a:solidFill>
+                  <a:schemeClr val="dk2"/>
+                </a:solidFill>
+                <a:latin typeface="Roboto"/>
+                <a:ea typeface="Roboto"/>
+                <a:cs typeface="Roboto"/>
+                <a:sym typeface="Roboto"/>
+              </a:defRPr>
+            </a:lvl1pPr>
+            <a:lvl2pPr marL="914400" marR="0" lvl="1" indent="-298450" algn="l" rtl="0">
+              <a:lnSpc>
+                <a:spcPct val="115000"/>
+              </a:lnSpc>
+              <a:spcBef>
+                <a:spcPts val="1600"/>
+              </a:spcBef>
+              <a:spcAft>
+                <a:spcPts val="0"/>
+              </a:spcAft>
+              <a:buClr>
+                <a:schemeClr val="dk2"/>
+              </a:buClr>
+              <a:buSzPts val="1100"/>
+              <a:buFont typeface="Roboto"/>
+              <a:buChar char="○"/>
+              <a:defRPr sz="1100" b="0" i="0" u="none" strike="noStrike" cap="none">
+                <a:solidFill>
+                  <a:schemeClr val="dk2"/>
+                </a:solidFill>
+                <a:latin typeface="Roboto"/>
+                <a:ea typeface="Roboto"/>
+                <a:cs typeface="Roboto"/>
+                <a:sym typeface="Roboto"/>
+              </a:defRPr>
+            </a:lvl2pPr>
+            <a:lvl3pPr marL="1371600" marR="0" lvl="2" indent="-298450" algn="l" rtl="0">
+              <a:lnSpc>
+                <a:spcPct val="115000"/>
+              </a:lnSpc>
+              <a:spcBef>
+                <a:spcPts val="1600"/>
+              </a:spcBef>
+              <a:spcAft>
+                <a:spcPts val="0"/>
+              </a:spcAft>
+              <a:buClr>
+                <a:schemeClr val="dk2"/>
+              </a:buClr>
+              <a:buSzPts val="1100"/>
+              <a:buFont typeface="Roboto"/>
+              <a:buChar char="■"/>
+              <a:defRPr sz="1100" b="0" i="0" u="none" strike="noStrike" cap="none">
+                <a:solidFill>
+                  <a:schemeClr val="dk2"/>
+                </a:solidFill>
+                <a:latin typeface="Roboto"/>
+                <a:ea typeface="Roboto"/>
+                <a:cs typeface="Roboto"/>
+                <a:sym typeface="Roboto"/>
+              </a:defRPr>
+            </a:lvl3pPr>
+            <a:lvl4pPr marL="1828800" marR="0" lvl="3" indent="-298450" algn="l" rtl="0">
+              <a:lnSpc>
+                <a:spcPct val="115000"/>
+              </a:lnSpc>
+              <a:spcBef>
+                <a:spcPts val="1600"/>
+              </a:spcBef>
+              <a:spcAft>
+                <a:spcPts val="0"/>
+              </a:spcAft>
+              <a:buClr>
+                <a:schemeClr val="dk2"/>
+              </a:buClr>
+              <a:buSzPts val="1100"/>
+              <a:buFont typeface="Roboto"/>
+              <a:buChar char="●"/>
+              <a:defRPr sz="1100" b="0" i="0" u="none" strike="noStrike" cap="none">
+                <a:solidFill>
+                  <a:schemeClr val="dk2"/>
+                </a:solidFill>
+                <a:latin typeface="Roboto"/>
+                <a:ea typeface="Roboto"/>
+                <a:cs typeface="Roboto"/>
+                <a:sym typeface="Roboto"/>
+              </a:defRPr>
+            </a:lvl4pPr>
+            <a:lvl5pPr marL="2286000" marR="0" lvl="4" indent="-298450" algn="l" rtl="0">
+              <a:lnSpc>
+                <a:spcPct val="115000"/>
+              </a:lnSpc>
+              <a:spcBef>
+                <a:spcPts val="1600"/>
+              </a:spcBef>
+              <a:spcAft>
+                <a:spcPts val="0"/>
+              </a:spcAft>
+              <a:buClr>
+                <a:schemeClr val="dk2"/>
+              </a:buClr>
+              <a:buSzPts val="1100"/>
+              <a:buFont typeface="Roboto"/>
+              <a:buChar char="○"/>
+              <a:defRPr sz="1100" b="0" i="0" u="none" strike="noStrike" cap="none">
+                <a:solidFill>
+                  <a:schemeClr val="dk2"/>
+                </a:solidFill>
+                <a:latin typeface="Roboto"/>
+                <a:ea typeface="Roboto"/>
+                <a:cs typeface="Roboto"/>
+                <a:sym typeface="Roboto"/>
+              </a:defRPr>
+            </a:lvl5pPr>
+            <a:lvl6pPr marL="2743200" marR="0" lvl="5" indent="-298450" algn="l" rtl="0">
+              <a:lnSpc>
+                <a:spcPct val="115000"/>
+              </a:lnSpc>
+              <a:spcBef>
+                <a:spcPts val="1600"/>
+              </a:spcBef>
+              <a:spcAft>
+                <a:spcPts val="0"/>
+              </a:spcAft>
+              <a:buClr>
+                <a:schemeClr val="dk2"/>
+              </a:buClr>
+              <a:buSzPts val="1100"/>
+              <a:buFont typeface="Roboto"/>
+              <a:buChar char="■"/>
+              <a:defRPr sz="1100" b="0" i="0" u="none" strike="noStrike" cap="none">
+                <a:solidFill>
+                  <a:schemeClr val="dk2"/>
+                </a:solidFill>
+                <a:latin typeface="Roboto"/>
+                <a:ea typeface="Roboto"/>
+                <a:cs typeface="Roboto"/>
+                <a:sym typeface="Roboto"/>
+              </a:defRPr>
+            </a:lvl6pPr>
+            <a:lvl7pPr marL="3200400" marR="0" lvl="6" indent="-298450" algn="l" rtl="0">
+              <a:lnSpc>
+                <a:spcPct val="115000"/>
+              </a:lnSpc>
+              <a:spcBef>
+                <a:spcPts val="1600"/>
+              </a:spcBef>
+              <a:spcAft>
+                <a:spcPts val="0"/>
+              </a:spcAft>
+              <a:buClr>
+                <a:schemeClr val="dk2"/>
+              </a:buClr>
+              <a:buSzPts val="1100"/>
+              <a:buFont typeface="Roboto"/>
+              <a:buChar char="●"/>
+              <a:defRPr sz="1100" b="0" i="0" u="none" strike="noStrike" cap="none">
+                <a:solidFill>
+                  <a:schemeClr val="dk2"/>
+                </a:solidFill>
+                <a:latin typeface="Roboto"/>
+                <a:ea typeface="Roboto"/>
+                <a:cs typeface="Roboto"/>
+                <a:sym typeface="Roboto"/>
+              </a:defRPr>
+            </a:lvl7pPr>
+            <a:lvl8pPr marL="3657600" marR="0" lvl="7" indent="-298450" algn="l" rtl="0">
+              <a:lnSpc>
+                <a:spcPct val="115000"/>
+              </a:lnSpc>
+              <a:spcBef>
+                <a:spcPts val="1600"/>
+              </a:spcBef>
+              <a:spcAft>
+                <a:spcPts val="0"/>
+              </a:spcAft>
+              <a:buClr>
+                <a:schemeClr val="dk2"/>
+              </a:buClr>
+              <a:buSzPts val="1100"/>
+              <a:buFont typeface="Roboto"/>
+              <a:buChar char="○"/>
+              <a:defRPr sz="1100" b="0" i="0" u="none" strike="noStrike" cap="none">
+                <a:solidFill>
+                  <a:schemeClr val="dk2"/>
+                </a:solidFill>
+                <a:latin typeface="Roboto"/>
+                <a:ea typeface="Roboto"/>
+                <a:cs typeface="Roboto"/>
+                <a:sym typeface="Roboto"/>
+              </a:defRPr>
+            </a:lvl8pPr>
+            <a:lvl9pPr marL="4114800" marR="0" lvl="8" indent="-298450" algn="l" rtl="0">
+              <a:lnSpc>
+                <a:spcPct val="115000"/>
+              </a:lnSpc>
+              <a:spcBef>
+                <a:spcPts val="1600"/>
+              </a:spcBef>
+              <a:spcAft>
+                <a:spcPts val="1600"/>
+              </a:spcAft>
+              <a:buClr>
+                <a:schemeClr val="dk2"/>
+              </a:buClr>
+              <a:buSzPts val="1100"/>
+              <a:buFont typeface="Roboto"/>
+              <a:buChar char="■"/>
+              <a:defRPr sz="1100" b="0" i="0" u="none" strike="noStrike" cap="none">
+                <a:solidFill>
+                  <a:schemeClr val="dk2"/>
+                </a:solidFill>
+                <a:latin typeface="Roboto"/>
+                <a:ea typeface="Roboto"/>
+                <a:cs typeface="Roboto"/>
+                <a:sym typeface="Roboto"/>
+              </a:defRPr>
+            </a:lvl9pPr>
+          </a:lstStyle>
+          <a:p>
+            <a:pPr marL="0" indent="0">
+              <a:spcAft>
+                <a:spcPts val="1600"/>
+              </a:spcAft>
+              <a:buNone/>
+            </a:pPr>
+            <a:r>
+              <a:rPr lang="en-US" sz="1400" dirty="0"/>
+              <a:t>After completing the Quiz </a:t>
+            </a:r>
+          </a:p>
+          <a:p>
+            <a:pPr marL="342900" indent="-342900">
+              <a:spcAft>
+                <a:spcPts val="1600"/>
+              </a:spcAft>
+            </a:pPr>
+            <a:r>
+              <a:rPr lang="en-US" sz="1200" dirty="0"/>
+              <a:t>Accept GitHub Classroom Assignment for Unit 02</a:t>
+            </a:r>
+          </a:p>
+          <a:p>
+            <a:pPr marL="342900" indent="-342900">
+              <a:spcAft>
+                <a:spcPts val="1600"/>
+              </a:spcAft>
+            </a:pPr>
+            <a:r>
+              <a:rPr lang="en-US" sz="1200" dirty="0"/>
+              <a:t>Clone/pull GitHub classroom repo for Unit 02 under </a:t>
+            </a:r>
+            <a:r>
+              <a:rPr lang="en-US" sz="1200" dirty="0" err="1"/>
+              <a:t>softdevII</a:t>
+            </a:r>
+            <a:r>
+              <a:rPr lang="en-US" sz="1200" dirty="0"/>
+              <a:t> folder</a:t>
+            </a:r>
+            <a:endParaRPr lang="en-US" sz="1200" dirty="0">
+              <a:solidFill>
+                <a:schemeClr val="tx1"/>
+              </a:solidFill>
+            </a:endParaRPr>
+          </a:p>
+        </p:txBody>
+      </p:sp>
+      <p:sp>
+        <p:nvSpPr>
+          <p:cNvPr id="5" name="Google Shape;325;p47">
+            <a:extLst>
+              <a:ext uri="{FF2B5EF4-FFF2-40B4-BE49-F238E27FC236}">
+                <a16:creationId xmlns:a16="http://schemas.microsoft.com/office/drawing/2014/main" id="{7B85466C-6200-EE66-9396-7DECA70CDF53}"/>
+              </a:ext>
+            </a:extLst>
+          </p:cNvPr>
+          <p:cNvSpPr txBox="1">
+            <a:spLocks/>
+          </p:cNvSpPr>
+          <p:nvPr/>
+        </p:nvSpPr>
+        <p:spPr>
+          <a:xfrm>
+            <a:off x="4303618" y="1737005"/>
+            <a:ext cx="4516998" cy="1378400"/>
+          </a:xfrm>
+          <a:prstGeom prst="rect">
+            <a:avLst/>
+          </a:prstGeom>
+          <a:noFill/>
+          <a:ln>
+            <a:noFill/>
+          </a:ln>
+        </p:spPr>
+        <p:txBody>
+          <a:bodyPr spcFirstLastPara="1" wrap="square" lIns="91425" tIns="91425" rIns="91425" bIns="91425" anchor="ctr" anchorCtr="0">
+            <a:noAutofit/>
+          </a:bodyPr>
+          <a:lstStyle>
+            <a:defPPr marR="0" lvl="0" algn="l" rtl="0">
+              <a:lnSpc>
+                <a:spcPct val="100000"/>
+              </a:lnSpc>
+              <a:spcBef>
+                <a:spcPts val="0"/>
+              </a:spcBef>
+              <a:spcAft>
+                <a:spcPts val="0"/>
+              </a:spcAft>
+            </a:defPPr>
+            <a:lvl1pPr marL="457200" marR="0" lvl="0" indent="-311150" algn="l" rtl="0">
+              <a:lnSpc>
+                <a:spcPct val="115000"/>
+              </a:lnSpc>
+              <a:spcBef>
+                <a:spcPts val="0"/>
+              </a:spcBef>
+              <a:spcAft>
+                <a:spcPts val="0"/>
+              </a:spcAft>
+              <a:buClr>
+                <a:schemeClr val="dk2"/>
+              </a:buClr>
+              <a:buSzPts val="1300"/>
+              <a:buFont typeface="Roboto"/>
+              <a:buChar char="●"/>
+              <a:defRPr sz="1300" b="0" i="0" u="none" strike="noStrike" cap="none">
+                <a:solidFill>
+                  <a:schemeClr val="dk2"/>
+                </a:solidFill>
+                <a:latin typeface="Roboto"/>
+                <a:ea typeface="Roboto"/>
+                <a:cs typeface="Roboto"/>
+                <a:sym typeface="Roboto"/>
+              </a:defRPr>
+            </a:lvl1pPr>
+            <a:lvl2pPr marL="914400" marR="0" lvl="1" indent="-298450" algn="l" rtl="0">
+              <a:lnSpc>
+                <a:spcPct val="115000"/>
+              </a:lnSpc>
+              <a:spcBef>
+                <a:spcPts val="1600"/>
+              </a:spcBef>
+              <a:spcAft>
+                <a:spcPts val="0"/>
+              </a:spcAft>
+              <a:buClr>
+                <a:schemeClr val="dk2"/>
+              </a:buClr>
+              <a:buSzPts val="1100"/>
+              <a:buFont typeface="Roboto"/>
+              <a:buChar char="○"/>
+              <a:defRPr sz="1100" b="0" i="0" u="none" strike="noStrike" cap="none">
+                <a:solidFill>
+                  <a:schemeClr val="dk2"/>
+                </a:solidFill>
+                <a:latin typeface="Roboto"/>
+                <a:ea typeface="Roboto"/>
+                <a:cs typeface="Roboto"/>
+                <a:sym typeface="Roboto"/>
+              </a:defRPr>
+            </a:lvl2pPr>
+            <a:lvl3pPr marL="1371600" marR="0" lvl="2" indent="-298450" algn="l" rtl="0">
+              <a:lnSpc>
+                <a:spcPct val="115000"/>
+              </a:lnSpc>
+              <a:spcBef>
+                <a:spcPts val="1600"/>
+              </a:spcBef>
+              <a:spcAft>
+                <a:spcPts val="0"/>
+              </a:spcAft>
+              <a:buClr>
+                <a:schemeClr val="dk2"/>
+              </a:buClr>
+              <a:buSzPts val="1100"/>
+              <a:buFont typeface="Roboto"/>
+              <a:buChar char="■"/>
+              <a:defRPr sz="1100" b="0" i="0" u="none" strike="noStrike" cap="none">
+                <a:solidFill>
+                  <a:schemeClr val="dk2"/>
+                </a:solidFill>
+                <a:latin typeface="Roboto"/>
+                <a:ea typeface="Roboto"/>
+                <a:cs typeface="Roboto"/>
+                <a:sym typeface="Roboto"/>
+              </a:defRPr>
+            </a:lvl3pPr>
+            <a:lvl4pPr marL="1828800" marR="0" lvl="3" indent="-298450" algn="l" rtl="0">
+              <a:lnSpc>
+                <a:spcPct val="115000"/>
+              </a:lnSpc>
+              <a:spcBef>
+                <a:spcPts val="1600"/>
+              </a:spcBef>
+              <a:spcAft>
+                <a:spcPts val="0"/>
+              </a:spcAft>
+              <a:buClr>
+                <a:schemeClr val="dk2"/>
+              </a:buClr>
+              <a:buSzPts val="1100"/>
+              <a:buFont typeface="Roboto"/>
+              <a:buChar char="●"/>
+              <a:defRPr sz="1100" b="0" i="0" u="none" strike="noStrike" cap="none">
+                <a:solidFill>
+                  <a:schemeClr val="dk2"/>
+                </a:solidFill>
+                <a:latin typeface="Roboto"/>
+                <a:ea typeface="Roboto"/>
+                <a:cs typeface="Roboto"/>
+                <a:sym typeface="Roboto"/>
+              </a:defRPr>
+            </a:lvl4pPr>
+            <a:lvl5pPr marL="2286000" marR="0" lvl="4" indent="-298450" algn="l" rtl="0">
+              <a:lnSpc>
+                <a:spcPct val="115000"/>
+              </a:lnSpc>
+              <a:spcBef>
+                <a:spcPts val="1600"/>
+              </a:spcBef>
+              <a:spcAft>
+                <a:spcPts val="0"/>
+              </a:spcAft>
+              <a:buClr>
+                <a:schemeClr val="dk2"/>
+              </a:buClr>
+              <a:buSzPts val="1100"/>
+              <a:buFont typeface="Roboto"/>
+              <a:buChar char="○"/>
+              <a:defRPr sz="1100" b="0" i="0" u="none" strike="noStrike" cap="none">
+                <a:solidFill>
+                  <a:schemeClr val="dk2"/>
+                </a:solidFill>
+                <a:latin typeface="Roboto"/>
+                <a:ea typeface="Roboto"/>
+                <a:cs typeface="Roboto"/>
+                <a:sym typeface="Roboto"/>
+              </a:defRPr>
+            </a:lvl5pPr>
+            <a:lvl6pPr marL="2743200" marR="0" lvl="5" indent="-298450" algn="l" rtl="0">
+              <a:lnSpc>
+                <a:spcPct val="115000"/>
+              </a:lnSpc>
+              <a:spcBef>
+                <a:spcPts val="1600"/>
+              </a:spcBef>
+              <a:spcAft>
+                <a:spcPts val="0"/>
+              </a:spcAft>
+              <a:buClr>
+                <a:schemeClr val="dk2"/>
+              </a:buClr>
+              <a:buSzPts val="1100"/>
+              <a:buFont typeface="Roboto"/>
+              <a:buChar char="■"/>
+              <a:defRPr sz="1100" b="0" i="0" u="none" strike="noStrike" cap="none">
+                <a:solidFill>
+                  <a:schemeClr val="dk2"/>
+                </a:solidFill>
+                <a:latin typeface="Roboto"/>
+                <a:ea typeface="Roboto"/>
+                <a:cs typeface="Roboto"/>
+                <a:sym typeface="Roboto"/>
+              </a:defRPr>
+            </a:lvl6pPr>
+            <a:lvl7pPr marL="3200400" marR="0" lvl="6" indent="-298450" algn="l" rtl="0">
+              <a:lnSpc>
+                <a:spcPct val="115000"/>
+              </a:lnSpc>
+              <a:spcBef>
+                <a:spcPts val="1600"/>
+              </a:spcBef>
+              <a:spcAft>
+                <a:spcPts val="0"/>
+              </a:spcAft>
+              <a:buClr>
+                <a:schemeClr val="dk2"/>
+              </a:buClr>
+              <a:buSzPts val="1100"/>
+              <a:buFont typeface="Roboto"/>
+              <a:buChar char="●"/>
+              <a:defRPr sz="1100" b="0" i="0" u="none" strike="noStrike" cap="none">
+                <a:solidFill>
+                  <a:schemeClr val="dk2"/>
+                </a:solidFill>
+                <a:latin typeface="Roboto"/>
+                <a:ea typeface="Roboto"/>
+                <a:cs typeface="Roboto"/>
+                <a:sym typeface="Roboto"/>
+              </a:defRPr>
+            </a:lvl7pPr>
+            <a:lvl8pPr marL="3657600" marR="0" lvl="7" indent="-298450" algn="l" rtl="0">
+              <a:lnSpc>
+                <a:spcPct val="115000"/>
+              </a:lnSpc>
+              <a:spcBef>
+                <a:spcPts val="1600"/>
+              </a:spcBef>
+              <a:spcAft>
+                <a:spcPts val="0"/>
+              </a:spcAft>
+              <a:buClr>
+                <a:schemeClr val="dk2"/>
+              </a:buClr>
+              <a:buSzPts val="1100"/>
+              <a:buFont typeface="Roboto"/>
+              <a:buChar char="○"/>
+              <a:defRPr sz="1100" b="0" i="0" u="none" strike="noStrike" cap="none">
+                <a:solidFill>
+                  <a:schemeClr val="dk2"/>
+                </a:solidFill>
+                <a:latin typeface="Roboto"/>
+                <a:ea typeface="Roboto"/>
+                <a:cs typeface="Roboto"/>
+                <a:sym typeface="Roboto"/>
+              </a:defRPr>
+            </a:lvl8pPr>
+            <a:lvl9pPr marL="4114800" marR="0" lvl="8" indent="-298450" algn="l" rtl="0">
+              <a:lnSpc>
+                <a:spcPct val="115000"/>
+              </a:lnSpc>
+              <a:spcBef>
+                <a:spcPts val="1600"/>
+              </a:spcBef>
+              <a:spcAft>
+                <a:spcPts val="1600"/>
+              </a:spcAft>
+              <a:buClr>
+                <a:schemeClr val="dk2"/>
+              </a:buClr>
+              <a:buSzPts val="1100"/>
+              <a:buFont typeface="Roboto"/>
+              <a:buChar char="■"/>
+              <a:defRPr sz="1100" b="0" i="0" u="none" strike="noStrike" cap="none">
+                <a:solidFill>
+                  <a:schemeClr val="dk2"/>
+                </a:solidFill>
+                <a:latin typeface="Roboto"/>
+                <a:ea typeface="Roboto"/>
+                <a:cs typeface="Roboto"/>
+                <a:sym typeface="Roboto"/>
+              </a:defRPr>
+            </a:lvl9pPr>
+          </a:lstStyle>
+          <a:p>
+            <a:pPr marL="146050" indent="0">
+              <a:buNone/>
+            </a:pPr>
+            <a:r>
+              <a:rPr lang="en-US" sz="1600" dirty="0"/>
+              <a:t>Quiz 1.3 Java Classes</a:t>
+            </a:r>
+          </a:p>
+          <a:p>
+            <a:pPr marL="146050" indent="0">
+              <a:buNone/>
+            </a:pPr>
+            <a:r>
+              <a:rPr lang="en-US" sz="1600" dirty="0">
+                <a:solidFill>
+                  <a:schemeClr val="tx1"/>
+                </a:solidFill>
+              </a:rPr>
+              <a:t>Password - </a:t>
+            </a:r>
+            <a:r>
+              <a:rPr lang="en-US" sz="1600" dirty="0" err="1">
+                <a:solidFill>
+                  <a:schemeClr val="tx1"/>
+                </a:solidFill>
+              </a:rPr>
+              <a:t>goTo</a:t>
+            </a:r>
+            <a:r>
+              <a:rPr lang="en-US" sz="1600" dirty="0">
+                <a:solidFill>
+                  <a:schemeClr val="tx1"/>
+                </a:solidFill>
+              </a:rPr>
+              <a:t>(Java)Class</a:t>
+            </a:r>
+          </a:p>
+        </p:txBody>
+      </p:sp>
+    </p:spTree>
+    <p:extLst>
+      <p:ext uri="{BB962C8B-B14F-4D97-AF65-F5344CB8AC3E}">
+        <p14:creationId xmlns:p14="http://schemas.microsoft.com/office/powerpoint/2010/main" val="674272117"/>
+      </p:ext>
+    </p:extLst>
+  </p:cSld>
+  <p:clrMapOvr>
+    <a:masterClrMapping/>
+  </p:clrMapOvr>
+</p:sld>
+</file>
+
+<file path=ppt/slides/slide10.xml><?xml version="1.0" encoding="utf-8"?>
+<p:sld xmlns:a="http://schemas.openxmlformats.org/drawingml/2006/main" xmlns:r="http://schemas.openxmlformats.org/officeDocument/2006/relationships" xmlns:p="http://schemas.openxmlformats.org/presentationml/2006/main" show="0">
+  <p:cSld>
+    <p:spTree>
+      <p:nvGrpSpPr>
+        <p:cNvPr id="1" name="Shape 323"/>
+        <p:cNvGrpSpPr/>
+        <p:nvPr/>
+      </p:nvGrpSpPr>
+      <p:grpSpPr>
+        <a:xfrm>
+          <a:off x="0" y="0"/>
+          <a:ext cx="0" cy="0"/>
+          <a:chOff x="0" y="0"/>
+          <a:chExt cx="0" cy="0"/>
+        </a:xfrm>
+      </p:grpSpPr>
+      <p:sp>
+        <p:nvSpPr>
+          <p:cNvPr id="324" name="Google Shape;324;p47"/>
+          <p:cNvSpPr txBox="1">
+            <a:spLocks noGrp="1"/>
+          </p:cNvSpPr>
+          <p:nvPr>
+            <p:ph type="title"/>
+          </p:nvPr>
+        </p:nvSpPr>
+        <p:spPr>
+          <a:xfrm>
+            <a:off x="226208" y="1"/>
+            <a:ext cx="8520600" cy="464980"/>
+          </a:xfrm>
+          <a:prstGeom prst="rect">
+            <a:avLst/>
+          </a:prstGeom>
+        </p:spPr>
+        <p:txBody>
+          <a:bodyPr spcFirstLastPara="1" wrap="square" lIns="91425" tIns="91425" rIns="91425" bIns="91425" anchor="t" anchorCtr="0">
+            <a:noAutofit/>
+          </a:bodyPr>
+          <a:lstStyle/>
+          <a:p>
+            <a:pPr marL="0" lvl="0" indent="0" algn="ctr" rtl="0">
+              <a:spcBef>
+                <a:spcPts val="0"/>
+              </a:spcBef>
+              <a:spcAft>
+                <a:spcPts val="0"/>
+              </a:spcAft>
+              <a:buNone/>
+            </a:pPr>
+            <a:r>
+              <a:rPr lang="en-US" dirty="0"/>
+              <a:t>Use </a:t>
+            </a:r>
+            <a:r>
+              <a:rPr lang="en-US" sz="2400" dirty="0"/>
+              <a:t>Assigned</a:t>
+            </a:r>
+            <a:r>
+              <a:rPr lang="en-US" dirty="0"/>
+              <a:t> Seat</a:t>
+            </a:r>
+            <a:endParaRPr dirty="0"/>
+          </a:p>
+        </p:txBody>
+      </p:sp>
+      <p:sp>
+        <p:nvSpPr>
+          <p:cNvPr id="326" name="Google Shape;326;p47"/>
+          <p:cNvSpPr txBox="1">
+            <a:spLocks noGrp="1"/>
+          </p:cNvSpPr>
+          <p:nvPr>
+            <p:ph type="sldNum" idx="12"/>
+          </p:nvPr>
+        </p:nvSpPr>
+        <p:spPr>
+          <a:xfrm>
+            <a:off x="8472458" y="4663217"/>
+            <a:ext cx="548700" cy="393600"/>
+          </a:xfrm>
+          <a:prstGeom prst="rect">
+            <a:avLst/>
+          </a:prstGeom>
+        </p:spPr>
+        <p:txBody>
+          <a:bodyPr spcFirstLastPara="1" wrap="square" lIns="91425" tIns="91425" rIns="91425" bIns="91425" anchor="ctr" anchorCtr="0">
+            <a:noAutofit/>
+          </a:bodyPr>
+          <a:lstStyle/>
+          <a:p>
+            <a:pPr marL="0" lvl="0" indent="0" algn="r" rtl="0">
+              <a:spcBef>
+                <a:spcPts val="0"/>
+              </a:spcBef>
+              <a:spcAft>
+                <a:spcPts val="0"/>
+              </a:spcAft>
+              <a:buNone/>
+            </a:pPr>
+            <a:fld id="{00000000-1234-1234-1234-123412341234}" type="slidenum">
+              <a:rPr lang="en"/>
+              <a:t>10</a:t>
+            </a:fld>
+            <a:endParaRPr/>
+          </a:p>
+        </p:txBody>
+      </p:sp>
+      <p:pic>
+        <p:nvPicPr>
+          <p:cNvPr id="6" name="Picture 5">
+            <a:extLst>
+              <a:ext uri="{FF2B5EF4-FFF2-40B4-BE49-F238E27FC236}">
+                <a16:creationId xmlns:a16="http://schemas.microsoft.com/office/drawing/2014/main" id="{DED32793-7C09-E3A3-94E5-B5D46727A1D0}"/>
+              </a:ext>
+            </a:extLst>
+          </p:cNvPr>
+          <p:cNvPicPr>
+            <a:picLocks noChangeAspect="1"/>
+          </p:cNvPicPr>
+          <p:nvPr/>
+        </p:nvPicPr>
+        <p:blipFill>
+          <a:blip r:embed="rId3"/>
+          <a:stretch>
+            <a:fillRect/>
+          </a:stretch>
+        </p:blipFill>
+        <p:spPr>
+          <a:xfrm>
+            <a:off x="-1" y="551663"/>
+            <a:ext cx="9144001" cy="4591837"/>
+          </a:xfrm>
+          <a:prstGeom prst="rect">
+            <a:avLst/>
+          </a:prstGeom>
+        </p:spPr>
+      </p:pic>
+    </p:spTree>
+    <p:extLst>
+      <p:ext uri="{BB962C8B-B14F-4D97-AF65-F5344CB8AC3E}">
+        <p14:creationId xmlns:p14="http://schemas.microsoft.com/office/powerpoint/2010/main" val="4226348449"/>
+      </p:ext>
+    </p:extLst>
+  </p:cSld>
+  <p:clrMapOvr>
+    <a:masterClrMapping/>
+  </p:clrMapOvr>
+</p:sld>
+</file>
+
+<file path=ppt/slides/slide11.xml><?xml version="1.0" encoding="utf-8"?>
+<p:sld xmlns:a="http://schemas.openxmlformats.org/drawingml/2006/main" xmlns:r="http://schemas.openxmlformats.org/officeDocument/2006/relationships" xmlns:p="http://schemas.openxmlformats.org/presentationml/2006/main" show="0">
+  <p:cSld>
+    <p:spTree>
+      <p:nvGrpSpPr>
+        <p:cNvPr id="1" name="Shape 323"/>
+        <p:cNvGrpSpPr/>
+        <p:nvPr/>
+      </p:nvGrpSpPr>
+      <p:grpSpPr>
+        <a:xfrm>
+          <a:off x="0" y="0"/>
+          <a:ext cx="0" cy="0"/>
+          <a:chOff x="0" y="0"/>
+          <a:chExt cx="0" cy="0"/>
+        </a:xfrm>
+      </p:grpSpPr>
+      <p:sp>
+        <p:nvSpPr>
+          <p:cNvPr id="324" name="Google Shape;324;p47"/>
+          <p:cNvSpPr txBox="1">
+            <a:spLocks noGrp="1"/>
+          </p:cNvSpPr>
+          <p:nvPr>
+            <p:ph type="title"/>
+          </p:nvPr>
+        </p:nvSpPr>
+        <p:spPr>
+          <a:xfrm>
+            <a:off x="226208" y="1"/>
+            <a:ext cx="8520600" cy="464980"/>
+          </a:xfrm>
+          <a:prstGeom prst="rect">
+            <a:avLst/>
+          </a:prstGeom>
+        </p:spPr>
+        <p:txBody>
+          <a:bodyPr spcFirstLastPara="1" wrap="square" lIns="91425" tIns="91425" rIns="91425" bIns="91425" anchor="t" anchorCtr="0">
+            <a:noAutofit/>
+          </a:bodyPr>
+          <a:lstStyle/>
+          <a:p>
+            <a:pPr marL="0" lvl="0" indent="0" algn="ctr" rtl="0">
+              <a:spcBef>
+                <a:spcPts val="0"/>
+              </a:spcBef>
+              <a:spcAft>
+                <a:spcPts val="0"/>
+              </a:spcAft>
+              <a:buNone/>
+            </a:pPr>
+            <a:r>
+              <a:rPr lang="en-US" dirty="0"/>
+              <a:t>Use </a:t>
+            </a:r>
+            <a:r>
+              <a:rPr lang="en-US" sz="2400" dirty="0"/>
+              <a:t>Assigned</a:t>
+            </a:r>
+            <a:r>
+              <a:rPr lang="en-US" dirty="0"/>
+              <a:t> Seat</a:t>
+            </a:r>
+            <a:endParaRPr dirty="0"/>
+          </a:p>
+        </p:txBody>
+      </p:sp>
+      <p:sp>
+        <p:nvSpPr>
+          <p:cNvPr id="326" name="Google Shape;326;p47"/>
+          <p:cNvSpPr txBox="1">
+            <a:spLocks noGrp="1"/>
+          </p:cNvSpPr>
+          <p:nvPr>
+            <p:ph type="sldNum" idx="12"/>
+          </p:nvPr>
+        </p:nvSpPr>
+        <p:spPr>
+          <a:xfrm>
+            <a:off x="8472458" y="4663217"/>
+            <a:ext cx="548700" cy="393600"/>
+          </a:xfrm>
+          <a:prstGeom prst="rect">
+            <a:avLst/>
+          </a:prstGeom>
+        </p:spPr>
+        <p:txBody>
+          <a:bodyPr spcFirstLastPara="1" wrap="square" lIns="91425" tIns="91425" rIns="91425" bIns="91425" anchor="ctr" anchorCtr="0">
+            <a:noAutofit/>
+          </a:bodyPr>
+          <a:lstStyle/>
+          <a:p>
+            <a:pPr marL="0" lvl="0" indent="0" algn="r" rtl="0">
+              <a:spcBef>
+                <a:spcPts val="0"/>
+              </a:spcBef>
+              <a:spcAft>
+                <a:spcPts val="0"/>
+              </a:spcAft>
+              <a:buNone/>
+            </a:pPr>
+            <a:fld id="{00000000-1234-1234-1234-123412341234}" type="slidenum">
+              <a:rPr lang="en"/>
+              <a:t>11</a:t>
+            </a:fld>
+            <a:endParaRPr/>
+          </a:p>
+        </p:txBody>
+      </p:sp>
+      <p:pic>
+        <p:nvPicPr>
+          <p:cNvPr id="3" name="Picture 2">
+            <a:extLst>
+              <a:ext uri="{FF2B5EF4-FFF2-40B4-BE49-F238E27FC236}">
+                <a16:creationId xmlns:a16="http://schemas.microsoft.com/office/drawing/2014/main" id="{92DE4AAC-70FE-A114-5258-F5B22EDDED45}"/>
+              </a:ext>
+            </a:extLst>
+          </p:cNvPr>
+          <p:cNvPicPr>
+            <a:picLocks noChangeAspect="1"/>
+          </p:cNvPicPr>
+          <p:nvPr/>
+        </p:nvPicPr>
+        <p:blipFill>
+          <a:blip r:embed="rId3"/>
+          <a:stretch>
+            <a:fillRect/>
+          </a:stretch>
+        </p:blipFill>
+        <p:spPr>
+          <a:xfrm>
+            <a:off x="0" y="716280"/>
+            <a:ext cx="9144000" cy="4427218"/>
+          </a:xfrm>
+          <a:prstGeom prst="rect">
+            <a:avLst/>
+          </a:prstGeom>
+        </p:spPr>
+      </p:pic>
+    </p:spTree>
+    <p:extLst>
+      <p:ext uri="{BB962C8B-B14F-4D97-AF65-F5344CB8AC3E}">
+        <p14:creationId xmlns:p14="http://schemas.microsoft.com/office/powerpoint/2010/main" val="1976403023"/>
+      </p:ext>
+    </p:extLst>
+  </p:cSld>
+  <p:clrMapOvr>
+    <a:masterClrMapping/>
+  </p:clrMapOvr>
+</p:sld>
+</file>
+
+<file path=ppt/slides/slide12.xml><?xml version="1.0" encoding="utf-8"?>
+<p:sld xmlns:a="http://schemas.openxmlformats.org/drawingml/2006/main" xmlns:r="http://schemas.openxmlformats.org/officeDocument/2006/relationships" xmlns:p="http://schemas.openxmlformats.org/presentationml/2006/main" show="0">
+  <p:cSld>
+    <p:spTree>
+      <p:nvGrpSpPr>
+        <p:cNvPr id="1" name="Shape 323"/>
+        <p:cNvGrpSpPr/>
+        <p:nvPr/>
+      </p:nvGrpSpPr>
+      <p:grpSpPr>
+        <a:xfrm>
+          <a:off x="0" y="0"/>
+          <a:ext cx="0" cy="0"/>
+          <a:chOff x="0" y="0"/>
+          <a:chExt cx="0" cy="0"/>
+        </a:xfrm>
+      </p:grpSpPr>
+      <p:sp>
+        <p:nvSpPr>
+          <p:cNvPr id="324" name="Google Shape;324;p47"/>
+          <p:cNvSpPr txBox="1">
+            <a:spLocks noGrp="1"/>
+          </p:cNvSpPr>
+          <p:nvPr>
+            <p:ph type="title"/>
+          </p:nvPr>
+        </p:nvSpPr>
+        <p:spPr>
+          <a:xfrm>
+            <a:off x="226208" y="1"/>
+            <a:ext cx="8520600" cy="464980"/>
+          </a:xfrm>
+          <a:prstGeom prst="rect">
+            <a:avLst/>
+          </a:prstGeom>
+        </p:spPr>
+        <p:txBody>
+          <a:bodyPr spcFirstLastPara="1" wrap="square" lIns="91425" tIns="91425" rIns="91425" bIns="91425" anchor="t" anchorCtr="0">
+            <a:noAutofit/>
+          </a:bodyPr>
+          <a:lstStyle/>
+          <a:p>
+            <a:pPr marL="0" lvl="0" indent="0" algn="ctr" rtl="0">
+              <a:spcBef>
+                <a:spcPts val="0"/>
+              </a:spcBef>
+              <a:spcAft>
+                <a:spcPts val="0"/>
+              </a:spcAft>
+              <a:buNone/>
+            </a:pPr>
+            <a:r>
+              <a:rPr lang="en-US" dirty="0"/>
+              <a:t>Use </a:t>
+            </a:r>
+            <a:r>
+              <a:rPr lang="en-US" sz="2400" dirty="0"/>
+              <a:t>Assigned</a:t>
+            </a:r>
+            <a:r>
+              <a:rPr lang="en-US" dirty="0"/>
+              <a:t> Seat</a:t>
+            </a:r>
+            <a:endParaRPr dirty="0"/>
+          </a:p>
+        </p:txBody>
+      </p:sp>
+      <p:sp>
+        <p:nvSpPr>
+          <p:cNvPr id="326" name="Google Shape;326;p47"/>
+          <p:cNvSpPr txBox="1">
+            <a:spLocks noGrp="1"/>
+          </p:cNvSpPr>
+          <p:nvPr>
+            <p:ph type="sldNum" idx="12"/>
+          </p:nvPr>
+        </p:nvSpPr>
+        <p:spPr>
+          <a:xfrm>
+            <a:off x="8472458" y="4663217"/>
+            <a:ext cx="548700" cy="393600"/>
+          </a:xfrm>
+          <a:prstGeom prst="rect">
+            <a:avLst/>
+          </a:prstGeom>
+        </p:spPr>
+        <p:txBody>
+          <a:bodyPr spcFirstLastPara="1" wrap="square" lIns="91425" tIns="91425" rIns="91425" bIns="91425" anchor="ctr" anchorCtr="0">
+            <a:noAutofit/>
+          </a:bodyPr>
+          <a:lstStyle/>
+          <a:p>
+            <a:pPr marL="0" lvl="0" indent="0" algn="r" rtl="0">
+              <a:spcBef>
+                <a:spcPts val="0"/>
+              </a:spcBef>
+              <a:spcAft>
+                <a:spcPts val="0"/>
+              </a:spcAft>
+              <a:buNone/>
+            </a:pPr>
+            <a:fld id="{00000000-1234-1234-1234-123412341234}" type="slidenum">
+              <a:rPr lang="en"/>
+              <a:t>12</a:t>
+            </a:fld>
+            <a:endParaRPr/>
+          </a:p>
+        </p:txBody>
+      </p:sp>
+      <p:pic>
+        <p:nvPicPr>
+          <p:cNvPr id="4" name="Picture 3">
+            <a:extLst>
+              <a:ext uri="{FF2B5EF4-FFF2-40B4-BE49-F238E27FC236}">
+                <a16:creationId xmlns:a16="http://schemas.microsoft.com/office/drawing/2014/main" id="{DCD752B9-EFAE-AFC1-7D39-6763B89DE8D3}"/>
+              </a:ext>
+            </a:extLst>
+          </p:cNvPr>
+          <p:cNvPicPr>
+            <a:picLocks noChangeAspect="1"/>
+          </p:cNvPicPr>
+          <p:nvPr/>
+        </p:nvPicPr>
+        <p:blipFill>
+          <a:blip r:embed="rId3"/>
+          <a:stretch>
+            <a:fillRect/>
+          </a:stretch>
+        </p:blipFill>
+        <p:spPr>
+          <a:xfrm>
+            <a:off x="0" y="652130"/>
+            <a:ext cx="9144000" cy="4491369"/>
+          </a:xfrm>
+          <a:prstGeom prst="rect">
+            <a:avLst/>
+          </a:prstGeom>
+        </p:spPr>
+      </p:pic>
+    </p:spTree>
+    <p:extLst>
+      <p:ext uri="{BB962C8B-B14F-4D97-AF65-F5344CB8AC3E}">
+        <p14:creationId xmlns:p14="http://schemas.microsoft.com/office/powerpoint/2010/main" val="3365057756"/>
+      </p:ext>
+    </p:extLst>
+  </p:cSld>
+  <p:clrMapOvr>
+    <a:masterClrMapping/>
+  </p:clrMapOvr>
+</p:sld>
+</file>
+
+<file path=ppt/slides/slide2.xml><?xml version="1.0" encoding="utf-8"?>
+<p:sld xmlns:a="http://schemas.openxmlformats.org/drawingml/2006/main" xmlns:r="http://schemas.openxmlformats.org/officeDocument/2006/relationships" xmlns:p="http://schemas.openxmlformats.org/presentationml/2006/main" show="0">
+  <p:cSld>
+    <p:spTree>
+      <p:nvGrpSpPr>
         <p:cNvPr id="1" name="Shape 323"/>
         <p:cNvGrpSpPr/>
         <p:nvPr/>
@@ -6702,7 +8075,7 @@
             </a:pPr>
             <a:fld id="{00000000-1234-1234-1234-123412341234}" type="slidenum">
               <a:rPr lang="en"/>
-              <a:t>1</a:t>
+              <a:t>2</a:t>
             </a:fld>
             <a:endParaRPr/>
           </a:p>
@@ -7105,463 +8478,7 @@
 </p:sld>
 </file>
 
-<file path=ppt/slides/slide10.xml><?xml version="1.0" encoding="utf-8"?>
-<p:sld xmlns:a="http://schemas.openxmlformats.org/drawingml/2006/main" xmlns:r="http://schemas.openxmlformats.org/officeDocument/2006/relationships" xmlns:p="http://schemas.openxmlformats.org/presentationml/2006/main" show="0">
-  <p:cSld>
-    <p:spTree>
-      <p:nvGrpSpPr>
-        <p:cNvPr id="1" name="Shape 323"/>
-        <p:cNvGrpSpPr/>
-        <p:nvPr/>
-      </p:nvGrpSpPr>
-      <p:grpSpPr>
-        <a:xfrm>
-          <a:off x="0" y="0"/>
-          <a:ext cx="0" cy="0"/>
-          <a:chOff x="0" y="0"/>
-          <a:chExt cx="0" cy="0"/>
-        </a:xfrm>
-      </p:grpSpPr>
-      <p:sp>
-        <p:nvSpPr>
-          <p:cNvPr id="324" name="Google Shape;324;p47"/>
-          <p:cNvSpPr txBox="1">
-            <a:spLocks noGrp="1"/>
-          </p:cNvSpPr>
-          <p:nvPr>
-            <p:ph type="title"/>
-          </p:nvPr>
-        </p:nvSpPr>
-        <p:spPr>
-          <a:xfrm>
-            <a:off x="226208" y="1"/>
-            <a:ext cx="8520600" cy="464980"/>
-          </a:xfrm>
-          <a:prstGeom prst="rect">
-            <a:avLst/>
-          </a:prstGeom>
-        </p:spPr>
-        <p:txBody>
-          <a:bodyPr spcFirstLastPara="1" wrap="square" lIns="91425" tIns="91425" rIns="91425" bIns="91425" anchor="t" anchorCtr="0">
-            <a:noAutofit/>
-          </a:bodyPr>
-          <a:lstStyle/>
-          <a:p>
-            <a:pPr marL="0" lvl="0" indent="0" algn="ctr" rtl="0">
-              <a:spcBef>
-                <a:spcPts val="0"/>
-              </a:spcBef>
-              <a:spcAft>
-                <a:spcPts val="0"/>
-              </a:spcAft>
-              <a:buNone/>
-            </a:pPr>
-            <a:r>
-              <a:rPr lang="en-US" dirty="0"/>
-              <a:t>Use </a:t>
-            </a:r>
-            <a:r>
-              <a:rPr lang="en-US" sz="2400" dirty="0"/>
-              <a:t>Assigned</a:t>
-            </a:r>
-            <a:r>
-              <a:rPr lang="en-US" dirty="0"/>
-              <a:t> Seat</a:t>
-            </a:r>
-            <a:endParaRPr dirty="0"/>
-          </a:p>
-        </p:txBody>
-      </p:sp>
-      <p:sp>
-        <p:nvSpPr>
-          <p:cNvPr id="326" name="Google Shape;326;p47"/>
-          <p:cNvSpPr txBox="1">
-            <a:spLocks noGrp="1"/>
-          </p:cNvSpPr>
-          <p:nvPr>
-            <p:ph type="sldNum" idx="12"/>
-          </p:nvPr>
-        </p:nvSpPr>
-        <p:spPr>
-          <a:xfrm>
-            <a:off x="8472458" y="4663217"/>
-            <a:ext cx="548700" cy="393600"/>
-          </a:xfrm>
-          <a:prstGeom prst="rect">
-            <a:avLst/>
-          </a:prstGeom>
-        </p:spPr>
-        <p:txBody>
-          <a:bodyPr spcFirstLastPara="1" wrap="square" lIns="91425" tIns="91425" rIns="91425" bIns="91425" anchor="ctr" anchorCtr="0">
-            <a:noAutofit/>
-          </a:bodyPr>
-          <a:lstStyle/>
-          <a:p>
-            <a:pPr marL="0" lvl="0" indent="0" algn="r" rtl="0">
-              <a:spcBef>
-                <a:spcPts val="0"/>
-              </a:spcBef>
-              <a:spcAft>
-                <a:spcPts val="0"/>
-              </a:spcAft>
-              <a:buNone/>
-            </a:pPr>
-            <a:fld id="{00000000-1234-1234-1234-123412341234}" type="slidenum">
-              <a:rPr lang="en"/>
-              <a:t>10</a:t>
-            </a:fld>
-            <a:endParaRPr/>
-          </a:p>
-        </p:txBody>
-      </p:sp>
-      <p:pic>
-        <p:nvPicPr>
-          <p:cNvPr id="6" name="Picture 5">
-            <a:extLst>
-              <a:ext uri="{FF2B5EF4-FFF2-40B4-BE49-F238E27FC236}">
-                <a16:creationId xmlns:a16="http://schemas.microsoft.com/office/drawing/2014/main" id="{DED32793-7C09-E3A3-94E5-B5D46727A1D0}"/>
-              </a:ext>
-            </a:extLst>
-          </p:cNvPr>
-          <p:cNvPicPr>
-            <a:picLocks noChangeAspect="1"/>
-          </p:cNvPicPr>
-          <p:nvPr/>
-        </p:nvPicPr>
-        <p:blipFill>
-          <a:blip r:embed="rId3"/>
-          <a:stretch>
-            <a:fillRect/>
-          </a:stretch>
-        </p:blipFill>
-        <p:spPr>
-          <a:xfrm>
-            <a:off x="-1" y="551663"/>
-            <a:ext cx="9144001" cy="4591837"/>
-          </a:xfrm>
-          <a:prstGeom prst="rect">
-            <a:avLst/>
-          </a:prstGeom>
-        </p:spPr>
-      </p:pic>
-    </p:spTree>
-    <p:extLst>
-      <p:ext uri="{BB962C8B-B14F-4D97-AF65-F5344CB8AC3E}">
-        <p14:creationId xmlns:p14="http://schemas.microsoft.com/office/powerpoint/2010/main" val="4226348449"/>
-      </p:ext>
-    </p:extLst>
-  </p:cSld>
-  <p:clrMapOvr>
-    <a:masterClrMapping/>
-  </p:clrMapOvr>
-</p:sld>
-</file>
-
-<file path=ppt/slides/slide11.xml><?xml version="1.0" encoding="utf-8"?>
-<p:sld xmlns:a="http://schemas.openxmlformats.org/drawingml/2006/main" xmlns:r="http://schemas.openxmlformats.org/officeDocument/2006/relationships" xmlns:p="http://schemas.openxmlformats.org/presentationml/2006/main" show="0">
-  <p:cSld>
-    <p:spTree>
-      <p:nvGrpSpPr>
-        <p:cNvPr id="1" name="Shape 323"/>
-        <p:cNvGrpSpPr/>
-        <p:nvPr/>
-      </p:nvGrpSpPr>
-      <p:grpSpPr>
-        <a:xfrm>
-          <a:off x="0" y="0"/>
-          <a:ext cx="0" cy="0"/>
-          <a:chOff x="0" y="0"/>
-          <a:chExt cx="0" cy="0"/>
-        </a:xfrm>
-      </p:grpSpPr>
-      <p:sp>
-        <p:nvSpPr>
-          <p:cNvPr id="324" name="Google Shape;324;p47"/>
-          <p:cNvSpPr txBox="1">
-            <a:spLocks noGrp="1"/>
-          </p:cNvSpPr>
-          <p:nvPr>
-            <p:ph type="title"/>
-          </p:nvPr>
-        </p:nvSpPr>
-        <p:spPr>
-          <a:xfrm>
-            <a:off x="226208" y="1"/>
-            <a:ext cx="8520600" cy="464980"/>
-          </a:xfrm>
-          <a:prstGeom prst="rect">
-            <a:avLst/>
-          </a:prstGeom>
-        </p:spPr>
-        <p:txBody>
-          <a:bodyPr spcFirstLastPara="1" wrap="square" lIns="91425" tIns="91425" rIns="91425" bIns="91425" anchor="t" anchorCtr="0">
-            <a:noAutofit/>
-          </a:bodyPr>
-          <a:lstStyle/>
-          <a:p>
-            <a:pPr marL="0" lvl="0" indent="0" algn="ctr" rtl="0">
-              <a:spcBef>
-                <a:spcPts val="0"/>
-              </a:spcBef>
-              <a:spcAft>
-                <a:spcPts val="0"/>
-              </a:spcAft>
-              <a:buNone/>
-            </a:pPr>
-            <a:r>
-              <a:rPr lang="en-US" dirty="0"/>
-              <a:t>Use </a:t>
-            </a:r>
-            <a:r>
-              <a:rPr lang="en-US" sz="2400" dirty="0"/>
-              <a:t>Assigned</a:t>
-            </a:r>
-            <a:r>
-              <a:rPr lang="en-US" dirty="0"/>
-              <a:t> Seat</a:t>
-            </a:r>
-            <a:endParaRPr dirty="0"/>
-          </a:p>
-        </p:txBody>
-      </p:sp>
-      <p:sp>
-        <p:nvSpPr>
-          <p:cNvPr id="326" name="Google Shape;326;p47"/>
-          <p:cNvSpPr txBox="1">
-            <a:spLocks noGrp="1"/>
-          </p:cNvSpPr>
-          <p:nvPr>
-            <p:ph type="sldNum" idx="12"/>
-          </p:nvPr>
-        </p:nvSpPr>
-        <p:spPr>
-          <a:xfrm>
-            <a:off x="8472458" y="4663217"/>
-            <a:ext cx="548700" cy="393600"/>
-          </a:xfrm>
-          <a:prstGeom prst="rect">
-            <a:avLst/>
-          </a:prstGeom>
-        </p:spPr>
-        <p:txBody>
-          <a:bodyPr spcFirstLastPara="1" wrap="square" lIns="91425" tIns="91425" rIns="91425" bIns="91425" anchor="ctr" anchorCtr="0">
-            <a:noAutofit/>
-          </a:bodyPr>
-          <a:lstStyle/>
-          <a:p>
-            <a:pPr marL="0" lvl="0" indent="0" algn="r" rtl="0">
-              <a:spcBef>
-                <a:spcPts val="0"/>
-              </a:spcBef>
-              <a:spcAft>
-                <a:spcPts val="0"/>
-              </a:spcAft>
-              <a:buNone/>
-            </a:pPr>
-            <a:fld id="{00000000-1234-1234-1234-123412341234}" type="slidenum">
-              <a:rPr lang="en"/>
-              <a:t>11</a:t>
-            </a:fld>
-            <a:endParaRPr/>
-          </a:p>
-        </p:txBody>
-      </p:sp>
-      <p:pic>
-        <p:nvPicPr>
-          <p:cNvPr id="3" name="Picture 2">
-            <a:extLst>
-              <a:ext uri="{FF2B5EF4-FFF2-40B4-BE49-F238E27FC236}">
-                <a16:creationId xmlns:a16="http://schemas.microsoft.com/office/drawing/2014/main" id="{92DE4AAC-70FE-A114-5258-F5B22EDDED45}"/>
-              </a:ext>
-            </a:extLst>
-          </p:cNvPr>
-          <p:cNvPicPr>
-            <a:picLocks noChangeAspect="1"/>
-          </p:cNvPicPr>
-          <p:nvPr/>
-        </p:nvPicPr>
-        <p:blipFill>
-          <a:blip r:embed="rId3"/>
-          <a:stretch>
-            <a:fillRect/>
-          </a:stretch>
-        </p:blipFill>
-        <p:spPr>
-          <a:xfrm>
-            <a:off x="0" y="716280"/>
-            <a:ext cx="9144000" cy="4427218"/>
-          </a:xfrm>
-          <a:prstGeom prst="rect">
-            <a:avLst/>
-          </a:prstGeom>
-        </p:spPr>
-      </p:pic>
-    </p:spTree>
-    <p:extLst>
-      <p:ext uri="{BB962C8B-B14F-4D97-AF65-F5344CB8AC3E}">
-        <p14:creationId xmlns:p14="http://schemas.microsoft.com/office/powerpoint/2010/main" val="1976403023"/>
-      </p:ext>
-    </p:extLst>
-  </p:cSld>
-  <p:clrMapOvr>
-    <a:masterClrMapping/>
-  </p:clrMapOvr>
-</p:sld>
-</file>
-
-<file path=ppt/slides/slide12.xml><?xml version="1.0" encoding="utf-8"?>
-<p:sld xmlns:a="http://schemas.openxmlformats.org/drawingml/2006/main" xmlns:r="http://schemas.openxmlformats.org/officeDocument/2006/relationships" xmlns:p="http://schemas.openxmlformats.org/presentationml/2006/main" show="0">
-  <p:cSld>
-    <p:spTree>
-      <p:nvGrpSpPr>
-        <p:cNvPr id="1" name="Shape 323"/>
-        <p:cNvGrpSpPr/>
-        <p:nvPr/>
-      </p:nvGrpSpPr>
-      <p:grpSpPr>
-        <a:xfrm>
-          <a:off x="0" y="0"/>
-          <a:ext cx="0" cy="0"/>
-          <a:chOff x="0" y="0"/>
-          <a:chExt cx="0" cy="0"/>
-        </a:xfrm>
-      </p:grpSpPr>
-      <p:sp>
-        <p:nvSpPr>
-          <p:cNvPr id="324" name="Google Shape;324;p47"/>
-          <p:cNvSpPr txBox="1">
-            <a:spLocks noGrp="1"/>
-          </p:cNvSpPr>
-          <p:nvPr>
-            <p:ph type="title"/>
-          </p:nvPr>
-        </p:nvSpPr>
-        <p:spPr>
-          <a:xfrm>
-            <a:off x="226208" y="1"/>
-            <a:ext cx="8520600" cy="464980"/>
-          </a:xfrm>
-          <a:prstGeom prst="rect">
-            <a:avLst/>
-          </a:prstGeom>
-        </p:spPr>
-        <p:txBody>
-          <a:bodyPr spcFirstLastPara="1" wrap="square" lIns="91425" tIns="91425" rIns="91425" bIns="91425" anchor="t" anchorCtr="0">
-            <a:noAutofit/>
-          </a:bodyPr>
-          <a:lstStyle/>
-          <a:p>
-            <a:pPr marL="0" lvl="0" indent="0" algn="ctr" rtl="0">
-              <a:spcBef>
-                <a:spcPts val="0"/>
-              </a:spcBef>
-              <a:spcAft>
-                <a:spcPts val="0"/>
-              </a:spcAft>
-              <a:buNone/>
-            </a:pPr>
-            <a:r>
-              <a:rPr lang="en-US" dirty="0"/>
-              <a:t>Use </a:t>
-            </a:r>
-            <a:r>
-              <a:rPr lang="en-US" sz="2400" dirty="0"/>
-              <a:t>Assigned</a:t>
-            </a:r>
-            <a:r>
-              <a:rPr lang="en-US" dirty="0"/>
-              <a:t> Seat</a:t>
-            </a:r>
-            <a:endParaRPr dirty="0"/>
-          </a:p>
-        </p:txBody>
-      </p:sp>
-      <p:sp>
-        <p:nvSpPr>
-          <p:cNvPr id="326" name="Google Shape;326;p47"/>
-          <p:cNvSpPr txBox="1">
-            <a:spLocks noGrp="1"/>
-          </p:cNvSpPr>
-          <p:nvPr>
-            <p:ph type="sldNum" idx="12"/>
-          </p:nvPr>
-        </p:nvSpPr>
-        <p:spPr>
-          <a:xfrm>
-            <a:off x="8472458" y="4663217"/>
-            <a:ext cx="548700" cy="393600"/>
-          </a:xfrm>
-          <a:prstGeom prst="rect">
-            <a:avLst/>
-          </a:prstGeom>
-        </p:spPr>
-        <p:txBody>
-          <a:bodyPr spcFirstLastPara="1" wrap="square" lIns="91425" tIns="91425" rIns="91425" bIns="91425" anchor="ctr" anchorCtr="0">
-            <a:noAutofit/>
-          </a:bodyPr>
-          <a:lstStyle/>
-          <a:p>
-            <a:pPr marL="0" lvl="0" indent="0" algn="r" rtl="0">
-              <a:spcBef>
-                <a:spcPts val="0"/>
-              </a:spcBef>
-              <a:spcAft>
-                <a:spcPts val="0"/>
-              </a:spcAft>
-              <a:buNone/>
-            </a:pPr>
-            <a:fld id="{00000000-1234-1234-1234-123412341234}" type="slidenum">
-              <a:rPr lang="en"/>
-              <a:t>12</a:t>
-            </a:fld>
-            <a:endParaRPr/>
-          </a:p>
-        </p:txBody>
-      </p:sp>
-      <p:pic>
-        <p:nvPicPr>
-          <p:cNvPr id="4" name="Picture 3">
-            <a:extLst>
-              <a:ext uri="{FF2B5EF4-FFF2-40B4-BE49-F238E27FC236}">
-                <a16:creationId xmlns:a16="http://schemas.microsoft.com/office/drawing/2014/main" id="{DCD752B9-EFAE-AFC1-7D39-6763B89DE8D3}"/>
-              </a:ext>
-            </a:extLst>
-          </p:cNvPr>
-          <p:cNvPicPr>
-            <a:picLocks noChangeAspect="1"/>
-          </p:cNvPicPr>
-          <p:nvPr/>
-        </p:nvPicPr>
-        <p:blipFill>
-          <a:blip r:embed="rId3"/>
-          <a:stretch>
-            <a:fillRect/>
-          </a:stretch>
-        </p:blipFill>
-        <p:spPr>
-          <a:xfrm>
-            <a:off x="0" y="652130"/>
-            <a:ext cx="9144000" cy="4491369"/>
-          </a:xfrm>
-          <a:prstGeom prst="rect">
-            <a:avLst/>
-          </a:prstGeom>
-        </p:spPr>
-      </p:pic>
-    </p:spTree>
-    <p:extLst>
-      <p:ext uri="{BB962C8B-B14F-4D97-AF65-F5344CB8AC3E}">
-        <p14:creationId xmlns:p14="http://schemas.microsoft.com/office/powerpoint/2010/main" val="3365057756"/>
-      </p:ext>
-    </p:extLst>
-  </p:cSld>
-  <p:clrMapOvr>
-    <a:masterClrMapping/>
-  </p:clrMapOvr>
-</p:sld>
-</file>
-
-<file path=ppt/slides/slide2.xml><?xml version="1.0" encoding="utf-8"?>
+<file path=ppt/slides/slide3.xml><?xml version="1.0" encoding="utf-8"?>
 <p:sld xmlns:a="http://schemas.openxmlformats.org/drawingml/2006/main" xmlns:r="http://schemas.openxmlformats.org/officeDocument/2006/relationships" xmlns:p="http://schemas.openxmlformats.org/presentationml/2006/main" show="0">
   <p:cSld>
     <p:spTree>
@@ -7712,7 +8629,7 @@
             </a:pPr>
             <a:fld id="{00000000-1234-1234-1234-123412341234}" type="slidenum">
               <a:rPr lang="en"/>
-              <a:t>2</a:t>
+              <a:t>3</a:t>
             </a:fld>
             <a:endParaRPr/>
           </a:p>
@@ -8126,7 +9043,7 @@
 </p:sld>
 </file>
 
-<file path=ppt/slides/slide3.xml><?xml version="1.0" encoding="utf-8"?>
+<file path=ppt/slides/slide4.xml><?xml version="1.0" encoding="utf-8"?>
 <p:sld xmlns:a="http://schemas.openxmlformats.org/drawingml/2006/main" xmlns:r="http://schemas.openxmlformats.org/officeDocument/2006/relationships" xmlns:p="http://schemas.openxmlformats.org/presentationml/2006/main" show="0">
   <p:cSld>
     <p:spTree>
@@ -8221,7 +9138,7 @@
             </a:pPr>
             <a:fld id="{00000000-1234-1234-1234-123412341234}" type="slidenum">
               <a:rPr lang="en"/>
-              <a:t>3</a:t>
+              <a:t>4</a:t>
             </a:fld>
             <a:endParaRPr/>
           </a:p>
@@ -8685,1209 +9602,6 @@
     <p:extLst>
       <p:ext uri="{BB962C8B-B14F-4D97-AF65-F5344CB8AC3E}">
         <p14:creationId xmlns:p14="http://schemas.microsoft.com/office/powerpoint/2010/main" val="604294447"/>
-      </p:ext>
-    </p:extLst>
-  </p:cSld>
-  <p:clrMapOvr>
-    <a:masterClrMapping/>
-  </p:clrMapOvr>
-</p:sld>
-</file>
-
-<file path=ppt/slides/slide4.xml><?xml version="1.0" encoding="utf-8"?>
-<p:sld xmlns:a="http://schemas.openxmlformats.org/drawingml/2006/main" xmlns:r="http://schemas.openxmlformats.org/officeDocument/2006/relationships" xmlns:p="http://schemas.openxmlformats.org/presentationml/2006/main" show="0">
-  <p:cSld>
-    <p:spTree>
-      <p:nvGrpSpPr>
-        <p:cNvPr id="1" name="Shape 323">
-          <a:extLst>
-            <a:ext uri="{FF2B5EF4-FFF2-40B4-BE49-F238E27FC236}">
-              <a16:creationId xmlns:a16="http://schemas.microsoft.com/office/drawing/2014/main" id="{19512066-5980-8A8B-BE30-C4FB3AC72235}"/>
-            </a:ext>
-          </a:extLst>
-        </p:cNvPr>
-        <p:cNvGrpSpPr/>
-        <p:nvPr/>
-      </p:nvGrpSpPr>
-      <p:grpSpPr>
-        <a:xfrm>
-          <a:off x="0" y="0"/>
-          <a:ext cx="0" cy="0"/>
-          <a:chOff x="0" y="0"/>
-          <a:chExt cx="0" cy="0"/>
-        </a:xfrm>
-      </p:grpSpPr>
-      <p:sp>
-        <p:nvSpPr>
-          <p:cNvPr id="324" name="Google Shape;324;p47">
-            <a:extLst>
-              <a:ext uri="{FF2B5EF4-FFF2-40B4-BE49-F238E27FC236}">
-                <a16:creationId xmlns:a16="http://schemas.microsoft.com/office/drawing/2014/main" id="{CDF56279-13BE-3C44-BBEF-E7DC5D1E88D2}"/>
-              </a:ext>
-            </a:extLst>
-          </p:cNvPr>
-          <p:cNvSpPr txBox="1">
-            <a:spLocks noGrp="1"/>
-          </p:cNvSpPr>
-          <p:nvPr>
-            <p:ph type="title"/>
-          </p:nvPr>
-        </p:nvSpPr>
-        <p:spPr>
-          <a:xfrm>
-            <a:off x="300016" y="269197"/>
-            <a:ext cx="8520600" cy="623700"/>
-          </a:xfrm>
-          <a:prstGeom prst="rect">
-            <a:avLst/>
-          </a:prstGeom>
-        </p:spPr>
-        <p:txBody>
-          <a:bodyPr spcFirstLastPara="1" wrap="square" lIns="91425" tIns="91425" rIns="91425" bIns="91425" anchor="t" anchorCtr="0">
-            <a:noAutofit/>
-          </a:bodyPr>
-          <a:lstStyle/>
-          <a:p>
-            <a:pPr marL="0" lvl="0" indent="0" algn="ctr" rtl="0">
-              <a:spcBef>
-                <a:spcPts val="0"/>
-              </a:spcBef>
-              <a:spcAft>
-                <a:spcPts val="0"/>
-              </a:spcAft>
-              <a:buNone/>
-            </a:pPr>
-            <a:r>
-              <a:rPr lang="en-US" dirty="0"/>
-              <a:t>GCIS – Software Development and Problem Solving</a:t>
-            </a:r>
-            <a:endParaRPr dirty="0"/>
-          </a:p>
-        </p:txBody>
-      </p:sp>
-      <p:sp>
-        <p:nvSpPr>
-          <p:cNvPr id="325" name="Google Shape;325;p47">
-            <a:extLst>
-              <a:ext uri="{FF2B5EF4-FFF2-40B4-BE49-F238E27FC236}">
-                <a16:creationId xmlns:a16="http://schemas.microsoft.com/office/drawing/2014/main" id="{5A9661D1-8430-BF80-279A-41B28CA04273}"/>
-              </a:ext>
-            </a:extLst>
-          </p:cNvPr>
-          <p:cNvSpPr txBox="1">
-            <a:spLocks noGrp="1"/>
-          </p:cNvSpPr>
-          <p:nvPr>
-            <p:ph type="body" idx="1"/>
-          </p:nvPr>
-        </p:nvSpPr>
-        <p:spPr>
-          <a:xfrm>
-            <a:off x="91445" y="1758317"/>
-            <a:ext cx="4000496" cy="893016"/>
-          </a:xfrm>
-          <a:prstGeom prst="rect">
-            <a:avLst/>
-          </a:prstGeom>
-        </p:spPr>
-        <p:txBody>
-          <a:bodyPr spcFirstLastPara="1" wrap="square" lIns="91425" tIns="91425" rIns="91425" bIns="91425" anchor="ctr" anchorCtr="0">
-            <a:noAutofit/>
-          </a:bodyPr>
-          <a:lstStyle/>
-          <a:p>
-            <a:pPr marL="146050" indent="0">
-              <a:buNone/>
-            </a:pPr>
-            <a:r>
-              <a:rPr lang="en-US" sz="1600" dirty="0"/>
-              <a:t>Take Quiz 12.3: Choose data structure</a:t>
-            </a:r>
-          </a:p>
-          <a:p>
-            <a:pPr marL="146050" indent="0">
-              <a:buNone/>
-            </a:pPr>
-            <a:r>
-              <a:rPr lang="en-US" sz="1600" dirty="0">
-                <a:solidFill>
-                  <a:schemeClr val="tx1"/>
-                </a:solidFill>
-              </a:rPr>
-              <a:t>Password – </a:t>
-            </a:r>
-            <a:r>
-              <a:rPr lang="en-US" sz="1600" dirty="0" err="1">
-                <a:solidFill>
-                  <a:schemeClr val="tx1"/>
-                </a:solidFill>
-              </a:rPr>
-              <a:t>the_choice_is_yours</a:t>
-            </a:r>
-            <a:endParaRPr sz="1600" dirty="0">
-              <a:solidFill>
-                <a:schemeClr val="tx1"/>
-              </a:solidFill>
-            </a:endParaRPr>
-          </a:p>
-        </p:txBody>
-      </p:sp>
-      <p:sp>
-        <p:nvSpPr>
-          <p:cNvPr id="326" name="Google Shape;326;p47">
-            <a:extLst>
-              <a:ext uri="{FF2B5EF4-FFF2-40B4-BE49-F238E27FC236}">
-                <a16:creationId xmlns:a16="http://schemas.microsoft.com/office/drawing/2014/main" id="{8A14E227-935A-FBD8-6BD5-CBCE8D13EE84}"/>
-              </a:ext>
-            </a:extLst>
-          </p:cNvPr>
-          <p:cNvSpPr txBox="1">
-            <a:spLocks noGrp="1"/>
-          </p:cNvSpPr>
-          <p:nvPr>
-            <p:ph type="sldNum" idx="12"/>
-          </p:nvPr>
-        </p:nvSpPr>
-        <p:spPr>
-          <a:xfrm>
-            <a:off x="8472458" y="4663217"/>
-            <a:ext cx="548700" cy="393600"/>
-          </a:xfrm>
-          <a:prstGeom prst="rect">
-            <a:avLst/>
-          </a:prstGeom>
-        </p:spPr>
-        <p:txBody>
-          <a:bodyPr spcFirstLastPara="1" wrap="square" lIns="91425" tIns="91425" rIns="91425" bIns="91425" anchor="ctr" anchorCtr="0">
-            <a:noAutofit/>
-          </a:bodyPr>
-          <a:lstStyle/>
-          <a:p>
-            <a:pPr marL="0" lvl="0" indent="0" algn="r" rtl="0">
-              <a:spcBef>
-                <a:spcPts val="0"/>
-              </a:spcBef>
-              <a:spcAft>
-                <a:spcPts val="0"/>
-              </a:spcAft>
-              <a:buNone/>
-            </a:pPr>
-            <a:fld id="{00000000-1234-1234-1234-123412341234}" type="slidenum">
-              <a:rPr lang="en"/>
-              <a:t>4</a:t>
-            </a:fld>
-            <a:endParaRPr/>
-          </a:p>
-        </p:txBody>
-      </p:sp>
-      <p:sp>
-        <p:nvSpPr>
-          <p:cNvPr id="2" name="TextBox 1">
-            <a:extLst>
-              <a:ext uri="{FF2B5EF4-FFF2-40B4-BE49-F238E27FC236}">
-                <a16:creationId xmlns:a16="http://schemas.microsoft.com/office/drawing/2014/main" id="{AE960589-7B12-D7F7-6452-D45441D8CA95}"/>
-              </a:ext>
-            </a:extLst>
-          </p:cNvPr>
-          <p:cNvSpPr txBox="1"/>
-          <p:nvPr/>
-        </p:nvSpPr>
-        <p:spPr>
-          <a:xfrm>
-            <a:off x="-11684" y="1287037"/>
-            <a:ext cx="9144000" cy="338555"/>
-          </a:xfrm>
-          <a:prstGeom prst="rect">
-            <a:avLst/>
-          </a:prstGeom>
-          <a:solidFill>
-            <a:srgbClr val="FFC000"/>
-          </a:solidFill>
-        </p:spPr>
-        <p:txBody>
-          <a:bodyPr wrap="square" rtlCol="0">
-            <a:spAutoFit/>
-          </a:bodyPr>
-          <a:lstStyle/>
-          <a:p>
-            <a:r>
-              <a:rPr lang="en-US" dirty="0"/>
-              <a:t>Quiz</a:t>
-            </a:r>
-          </a:p>
-        </p:txBody>
-      </p:sp>
-      <p:sp>
-        <p:nvSpPr>
-          <p:cNvPr id="3" name="TextBox 2">
-            <a:extLst>
-              <a:ext uri="{FF2B5EF4-FFF2-40B4-BE49-F238E27FC236}">
-                <a16:creationId xmlns:a16="http://schemas.microsoft.com/office/drawing/2014/main" id="{4FD526CA-3FDB-A5C2-36D9-69A3252D5E9A}"/>
-              </a:ext>
-            </a:extLst>
-          </p:cNvPr>
-          <p:cNvSpPr txBox="1"/>
-          <p:nvPr/>
-        </p:nvSpPr>
-        <p:spPr>
-          <a:xfrm>
-            <a:off x="0" y="3507404"/>
-            <a:ext cx="9144000" cy="307777"/>
-          </a:xfrm>
-          <a:prstGeom prst="rect">
-            <a:avLst/>
-          </a:prstGeom>
-          <a:solidFill>
-            <a:srgbClr val="FFC000"/>
-          </a:solidFill>
-        </p:spPr>
-        <p:txBody>
-          <a:bodyPr wrap="square" rtlCol="0">
-            <a:spAutoFit/>
-          </a:bodyPr>
-          <a:lstStyle/>
-          <a:p>
-            <a:r>
-              <a:rPr lang="en-US" dirty="0"/>
-              <a:t>Next </a:t>
-            </a:r>
-            <a:r>
-              <a:rPr lang="en-US" dirty="0">
-                <a:sym typeface="Wingdings" panose="05000000000000000000" pitchFamily="2" charset="2"/>
-              </a:rPr>
-              <a:t> </a:t>
-            </a:r>
-            <a:endParaRPr lang="en-US" dirty="0"/>
-          </a:p>
-        </p:txBody>
-      </p:sp>
-      <p:sp>
-        <p:nvSpPr>
-          <p:cNvPr id="4" name="Google Shape;325;p47">
-            <a:extLst>
-              <a:ext uri="{FF2B5EF4-FFF2-40B4-BE49-F238E27FC236}">
-                <a16:creationId xmlns:a16="http://schemas.microsoft.com/office/drawing/2014/main" id="{DC50CCB1-5AFE-1F52-8B22-87EB927965B4}"/>
-              </a:ext>
-            </a:extLst>
-          </p:cNvPr>
-          <p:cNvSpPr txBox="1">
-            <a:spLocks/>
-          </p:cNvSpPr>
-          <p:nvPr/>
-        </p:nvSpPr>
-        <p:spPr>
-          <a:xfrm>
-            <a:off x="-5842" y="3848100"/>
-            <a:ext cx="9149842" cy="1208717"/>
-          </a:xfrm>
-          <a:prstGeom prst="rect">
-            <a:avLst/>
-          </a:prstGeom>
-          <a:noFill/>
-          <a:ln>
-            <a:noFill/>
-          </a:ln>
-        </p:spPr>
-        <p:txBody>
-          <a:bodyPr spcFirstLastPara="1" wrap="square" lIns="91425" tIns="91425" rIns="91425" bIns="91425" anchor="ctr" anchorCtr="0">
-            <a:noAutofit/>
-          </a:bodyPr>
-          <a:lstStyle>
-            <a:defPPr marR="0" lvl="0" algn="l" rtl="0">
-              <a:lnSpc>
-                <a:spcPct val="100000"/>
-              </a:lnSpc>
-              <a:spcBef>
-                <a:spcPts val="0"/>
-              </a:spcBef>
-              <a:spcAft>
-                <a:spcPts val="0"/>
-              </a:spcAft>
-            </a:defPPr>
-            <a:lvl1pPr marL="457200" marR="0" lvl="0" indent="-311150" algn="l" rtl="0">
-              <a:lnSpc>
-                <a:spcPct val="115000"/>
-              </a:lnSpc>
-              <a:spcBef>
-                <a:spcPts val="0"/>
-              </a:spcBef>
-              <a:spcAft>
-                <a:spcPts val="0"/>
-              </a:spcAft>
-              <a:buClr>
-                <a:schemeClr val="dk2"/>
-              </a:buClr>
-              <a:buSzPts val="1300"/>
-              <a:buFont typeface="Roboto"/>
-              <a:buChar char="●"/>
-              <a:defRPr sz="1300" b="0" i="0" u="none" strike="noStrike" cap="none">
-                <a:solidFill>
-                  <a:schemeClr val="dk2"/>
-                </a:solidFill>
-                <a:latin typeface="Roboto"/>
-                <a:ea typeface="Roboto"/>
-                <a:cs typeface="Roboto"/>
-                <a:sym typeface="Roboto"/>
-              </a:defRPr>
-            </a:lvl1pPr>
-            <a:lvl2pPr marL="914400" marR="0" lvl="1" indent="-298450" algn="l" rtl="0">
-              <a:lnSpc>
-                <a:spcPct val="115000"/>
-              </a:lnSpc>
-              <a:spcBef>
-                <a:spcPts val="1600"/>
-              </a:spcBef>
-              <a:spcAft>
-                <a:spcPts val="0"/>
-              </a:spcAft>
-              <a:buClr>
-                <a:schemeClr val="dk2"/>
-              </a:buClr>
-              <a:buSzPts val="1100"/>
-              <a:buFont typeface="Roboto"/>
-              <a:buChar char="○"/>
-              <a:defRPr sz="1100" b="0" i="0" u="none" strike="noStrike" cap="none">
-                <a:solidFill>
-                  <a:schemeClr val="dk2"/>
-                </a:solidFill>
-                <a:latin typeface="Roboto"/>
-                <a:ea typeface="Roboto"/>
-                <a:cs typeface="Roboto"/>
-                <a:sym typeface="Roboto"/>
-              </a:defRPr>
-            </a:lvl2pPr>
-            <a:lvl3pPr marL="1371600" marR="0" lvl="2" indent="-298450" algn="l" rtl="0">
-              <a:lnSpc>
-                <a:spcPct val="115000"/>
-              </a:lnSpc>
-              <a:spcBef>
-                <a:spcPts val="1600"/>
-              </a:spcBef>
-              <a:spcAft>
-                <a:spcPts val="0"/>
-              </a:spcAft>
-              <a:buClr>
-                <a:schemeClr val="dk2"/>
-              </a:buClr>
-              <a:buSzPts val="1100"/>
-              <a:buFont typeface="Roboto"/>
-              <a:buChar char="■"/>
-              <a:defRPr sz="1100" b="0" i="0" u="none" strike="noStrike" cap="none">
-                <a:solidFill>
-                  <a:schemeClr val="dk2"/>
-                </a:solidFill>
-                <a:latin typeface="Roboto"/>
-                <a:ea typeface="Roboto"/>
-                <a:cs typeface="Roboto"/>
-                <a:sym typeface="Roboto"/>
-              </a:defRPr>
-            </a:lvl3pPr>
-            <a:lvl4pPr marL="1828800" marR="0" lvl="3" indent="-298450" algn="l" rtl="0">
-              <a:lnSpc>
-                <a:spcPct val="115000"/>
-              </a:lnSpc>
-              <a:spcBef>
-                <a:spcPts val="1600"/>
-              </a:spcBef>
-              <a:spcAft>
-                <a:spcPts val="0"/>
-              </a:spcAft>
-              <a:buClr>
-                <a:schemeClr val="dk2"/>
-              </a:buClr>
-              <a:buSzPts val="1100"/>
-              <a:buFont typeface="Roboto"/>
-              <a:buChar char="●"/>
-              <a:defRPr sz="1100" b="0" i="0" u="none" strike="noStrike" cap="none">
-                <a:solidFill>
-                  <a:schemeClr val="dk2"/>
-                </a:solidFill>
-                <a:latin typeface="Roboto"/>
-                <a:ea typeface="Roboto"/>
-                <a:cs typeface="Roboto"/>
-                <a:sym typeface="Roboto"/>
-              </a:defRPr>
-            </a:lvl4pPr>
-            <a:lvl5pPr marL="2286000" marR="0" lvl="4" indent="-298450" algn="l" rtl="0">
-              <a:lnSpc>
-                <a:spcPct val="115000"/>
-              </a:lnSpc>
-              <a:spcBef>
-                <a:spcPts val="1600"/>
-              </a:spcBef>
-              <a:spcAft>
-                <a:spcPts val="0"/>
-              </a:spcAft>
-              <a:buClr>
-                <a:schemeClr val="dk2"/>
-              </a:buClr>
-              <a:buSzPts val="1100"/>
-              <a:buFont typeface="Roboto"/>
-              <a:buChar char="○"/>
-              <a:defRPr sz="1100" b="0" i="0" u="none" strike="noStrike" cap="none">
-                <a:solidFill>
-                  <a:schemeClr val="dk2"/>
-                </a:solidFill>
-                <a:latin typeface="Roboto"/>
-                <a:ea typeface="Roboto"/>
-                <a:cs typeface="Roboto"/>
-                <a:sym typeface="Roboto"/>
-              </a:defRPr>
-            </a:lvl5pPr>
-            <a:lvl6pPr marL="2743200" marR="0" lvl="5" indent="-298450" algn="l" rtl="0">
-              <a:lnSpc>
-                <a:spcPct val="115000"/>
-              </a:lnSpc>
-              <a:spcBef>
-                <a:spcPts val="1600"/>
-              </a:spcBef>
-              <a:spcAft>
-                <a:spcPts val="0"/>
-              </a:spcAft>
-              <a:buClr>
-                <a:schemeClr val="dk2"/>
-              </a:buClr>
-              <a:buSzPts val="1100"/>
-              <a:buFont typeface="Roboto"/>
-              <a:buChar char="■"/>
-              <a:defRPr sz="1100" b="0" i="0" u="none" strike="noStrike" cap="none">
-                <a:solidFill>
-                  <a:schemeClr val="dk2"/>
-                </a:solidFill>
-                <a:latin typeface="Roboto"/>
-                <a:ea typeface="Roboto"/>
-                <a:cs typeface="Roboto"/>
-                <a:sym typeface="Roboto"/>
-              </a:defRPr>
-            </a:lvl6pPr>
-            <a:lvl7pPr marL="3200400" marR="0" lvl="6" indent="-298450" algn="l" rtl="0">
-              <a:lnSpc>
-                <a:spcPct val="115000"/>
-              </a:lnSpc>
-              <a:spcBef>
-                <a:spcPts val="1600"/>
-              </a:spcBef>
-              <a:spcAft>
-                <a:spcPts val="0"/>
-              </a:spcAft>
-              <a:buClr>
-                <a:schemeClr val="dk2"/>
-              </a:buClr>
-              <a:buSzPts val="1100"/>
-              <a:buFont typeface="Roboto"/>
-              <a:buChar char="●"/>
-              <a:defRPr sz="1100" b="0" i="0" u="none" strike="noStrike" cap="none">
-                <a:solidFill>
-                  <a:schemeClr val="dk2"/>
-                </a:solidFill>
-                <a:latin typeface="Roboto"/>
-                <a:ea typeface="Roboto"/>
-                <a:cs typeface="Roboto"/>
-                <a:sym typeface="Roboto"/>
-              </a:defRPr>
-            </a:lvl7pPr>
-            <a:lvl8pPr marL="3657600" marR="0" lvl="7" indent="-298450" algn="l" rtl="0">
-              <a:lnSpc>
-                <a:spcPct val="115000"/>
-              </a:lnSpc>
-              <a:spcBef>
-                <a:spcPts val="1600"/>
-              </a:spcBef>
-              <a:spcAft>
-                <a:spcPts val="0"/>
-              </a:spcAft>
-              <a:buClr>
-                <a:schemeClr val="dk2"/>
-              </a:buClr>
-              <a:buSzPts val="1100"/>
-              <a:buFont typeface="Roboto"/>
-              <a:buChar char="○"/>
-              <a:defRPr sz="1100" b="0" i="0" u="none" strike="noStrike" cap="none">
-                <a:solidFill>
-                  <a:schemeClr val="dk2"/>
-                </a:solidFill>
-                <a:latin typeface="Roboto"/>
-                <a:ea typeface="Roboto"/>
-                <a:cs typeface="Roboto"/>
-                <a:sym typeface="Roboto"/>
-              </a:defRPr>
-            </a:lvl8pPr>
-            <a:lvl9pPr marL="4114800" marR="0" lvl="8" indent="-298450" algn="l" rtl="0">
-              <a:lnSpc>
-                <a:spcPct val="115000"/>
-              </a:lnSpc>
-              <a:spcBef>
-                <a:spcPts val="1600"/>
-              </a:spcBef>
-              <a:spcAft>
-                <a:spcPts val="1600"/>
-              </a:spcAft>
-              <a:buClr>
-                <a:schemeClr val="dk2"/>
-              </a:buClr>
-              <a:buSzPts val="1100"/>
-              <a:buFont typeface="Roboto"/>
-              <a:buChar char="■"/>
-              <a:defRPr sz="1100" b="0" i="0" u="none" strike="noStrike" cap="none">
-                <a:solidFill>
-                  <a:schemeClr val="dk2"/>
-                </a:solidFill>
-                <a:latin typeface="Roboto"/>
-                <a:ea typeface="Roboto"/>
-                <a:cs typeface="Roboto"/>
-                <a:sym typeface="Roboto"/>
-              </a:defRPr>
-            </a:lvl9pPr>
-          </a:lstStyle>
-          <a:p>
-            <a:pPr marL="0" indent="0">
-              <a:spcAft>
-                <a:spcPts val="1600"/>
-              </a:spcAft>
-              <a:buNone/>
-            </a:pPr>
-            <a:r>
-              <a:rPr lang="en-US" sz="1400" dirty="0"/>
-              <a:t>After completing the Quiz </a:t>
-            </a:r>
-          </a:p>
-          <a:p>
-            <a:pPr marL="342900" indent="-342900">
-              <a:spcAft>
-                <a:spcPts val="1600"/>
-              </a:spcAft>
-            </a:pPr>
-            <a:r>
-              <a:rPr lang="en-US" sz="1200" dirty="0"/>
-              <a:t>Accept GitHub Classroom Assignment for Unit 13</a:t>
-            </a:r>
-          </a:p>
-          <a:p>
-            <a:pPr marL="342900" indent="-342900">
-              <a:spcAft>
-                <a:spcPts val="1600"/>
-              </a:spcAft>
-            </a:pPr>
-            <a:r>
-              <a:rPr lang="en-US" sz="1200" dirty="0"/>
-              <a:t>Clone/pull GitHub classroom repo for Unit 13 under softdev1 folder</a:t>
-            </a:r>
-            <a:endParaRPr lang="en-US" sz="1200" dirty="0">
-              <a:solidFill>
-                <a:schemeClr val="tx1"/>
-              </a:solidFill>
-            </a:endParaRPr>
-          </a:p>
-        </p:txBody>
-      </p:sp>
-      <p:sp>
-        <p:nvSpPr>
-          <p:cNvPr id="5" name="Google Shape;325;p47">
-            <a:extLst>
-              <a:ext uri="{FF2B5EF4-FFF2-40B4-BE49-F238E27FC236}">
-                <a16:creationId xmlns:a16="http://schemas.microsoft.com/office/drawing/2014/main" id="{7B85466C-6200-EE66-9396-7DECA70CDF53}"/>
-              </a:ext>
-            </a:extLst>
-          </p:cNvPr>
-          <p:cNvSpPr txBox="1">
-            <a:spLocks/>
-          </p:cNvSpPr>
-          <p:nvPr/>
-        </p:nvSpPr>
-        <p:spPr>
-          <a:xfrm>
-            <a:off x="4303618" y="1737005"/>
-            <a:ext cx="4516998" cy="893015"/>
-          </a:xfrm>
-          <a:prstGeom prst="rect">
-            <a:avLst/>
-          </a:prstGeom>
-          <a:noFill/>
-          <a:ln>
-            <a:noFill/>
-          </a:ln>
-        </p:spPr>
-        <p:txBody>
-          <a:bodyPr spcFirstLastPara="1" wrap="square" lIns="91425" tIns="91425" rIns="91425" bIns="91425" anchor="ctr" anchorCtr="0">
-            <a:noAutofit/>
-          </a:bodyPr>
-          <a:lstStyle>
-            <a:defPPr marR="0" lvl="0" algn="l" rtl="0">
-              <a:lnSpc>
-                <a:spcPct val="100000"/>
-              </a:lnSpc>
-              <a:spcBef>
-                <a:spcPts val="0"/>
-              </a:spcBef>
-              <a:spcAft>
-                <a:spcPts val="0"/>
-              </a:spcAft>
-            </a:defPPr>
-            <a:lvl1pPr marL="457200" marR="0" lvl="0" indent="-311150" algn="l" rtl="0">
-              <a:lnSpc>
-                <a:spcPct val="115000"/>
-              </a:lnSpc>
-              <a:spcBef>
-                <a:spcPts val="0"/>
-              </a:spcBef>
-              <a:spcAft>
-                <a:spcPts val="0"/>
-              </a:spcAft>
-              <a:buClr>
-                <a:schemeClr val="dk2"/>
-              </a:buClr>
-              <a:buSzPts val="1300"/>
-              <a:buFont typeface="Roboto"/>
-              <a:buChar char="●"/>
-              <a:defRPr sz="1300" b="0" i="0" u="none" strike="noStrike" cap="none">
-                <a:solidFill>
-                  <a:schemeClr val="dk2"/>
-                </a:solidFill>
-                <a:latin typeface="Roboto"/>
-                <a:ea typeface="Roboto"/>
-                <a:cs typeface="Roboto"/>
-                <a:sym typeface="Roboto"/>
-              </a:defRPr>
-            </a:lvl1pPr>
-            <a:lvl2pPr marL="914400" marR="0" lvl="1" indent="-298450" algn="l" rtl="0">
-              <a:lnSpc>
-                <a:spcPct val="115000"/>
-              </a:lnSpc>
-              <a:spcBef>
-                <a:spcPts val="1600"/>
-              </a:spcBef>
-              <a:spcAft>
-                <a:spcPts val="0"/>
-              </a:spcAft>
-              <a:buClr>
-                <a:schemeClr val="dk2"/>
-              </a:buClr>
-              <a:buSzPts val="1100"/>
-              <a:buFont typeface="Roboto"/>
-              <a:buChar char="○"/>
-              <a:defRPr sz="1100" b="0" i="0" u="none" strike="noStrike" cap="none">
-                <a:solidFill>
-                  <a:schemeClr val="dk2"/>
-                </a:solidFill>
-                <a:latin typeface="Roboto"/>
-                <a:ea typeface="Roboto"/>
-                <a:cs typeface="Roboto"/>
-                <a:sym typeface="Roboto"/>
-              </a:defRPr>
-            </a:lvl2pPr>
-            <a:lvl3pPr marL="1371600" marR="0" lvl="2" indent="-298450" algn="l" rtl="0">
-              <a:lnSpc>
-                <a:spcPct val="115000"/>
-              </a:lnSpc>
-              <a:spcBef>
-                <a:spcPts val="1600"/>
-              </a:spcBef>
-              <a:spcAft>
-                <a:spcPts val="0"/>
-              </a:spcAft>
-              <a:buClr>
-                <a:schemeClr val="dk2"/>
-              </a:buClr>
-              <a:buSzPts val="1100"/>
-              <a:buFont typeface="Roboto"/>
-              <a:buChar char="■"/>
-              <a:defRPr sz="1100" b="0" i="0" u="none" strike="noStrike" cap="none">
-                <a:solidFill>
-                  <a:schemeClr val="dk2"/>
-                </a:solidFill>
-                <a:latin typeface="Roboto"/>
-                <a:ea typeface="Roboto"/>
-                <a:cs typeface="Roboto"/>
-                <a:sym typeface="Roboto"/>
-              </a:defRPr>
-            </a:lvl3pPr>
-            <a:lvl4pPr marL="1828800" marR="0" lvl="3" indent="-298450" algn="l" rtl="0">
-              <a:lnSpc>
-                <a:spcPct val="115000"/>
-              </a:lnSpc>
-              <a:spcBef>
-                <a:spcPts val="1600"/>
-              </a:spcBef>
-              <a:spcAft>
-                <a:spcPts val="0"/>
-              </a:spcAft>
-              <a:buClr>
-                <a:schemeClr val="dk2"/>
-              </a:buClr>
-              <a:buSzPts val="1100"/>
-              <a:buFont typeface="Roboto"/>
-              <a:buChar char="●"/>
-              <a:defRPr sz="1100" b="0" i="0" u="none" strike="noStrike" cap="none">
-                <a:solidFill>
-                  <a:schemeClr val="dk2"/>
-                </a:solidFill>
-                <a:latin typeface="Roboto"/>
-                <a:ea typeface="Roboto"/>
-                <a:cs typeface="Roboto"/>
-                <a:sym typeface="Roboto"/>
-              </a:defRPr>
-            </a:lvl4pPr>
-            <a:lvl5pPr marL="2286000" marR="0" lvl="4" indent="-298450" algn="l" rtl="0">
-              <a:lnSpc>
-                <a:spcPct val="115000"/>
-              </a:lnSpc>
-              <a:spcBef>
-                <a:spcPts val="1600"/>
-              </a:spcBef>
-              <a:spcAft>
-                <a:spcPts val="0"/>
-              </a:spcAft>
-              <a:buClr>
-                <a:schemeClr val="dk2"/>
-              </a:buClr>
-              <a:buSzPts val="1100"/>
-              <a:buFont typeface="Roboto"/>
-              <a:buChar char="○"/>
-              <a:defRPr sz="1100" b="0" i="0" u="none" strike="noStrike" cap="none">
-                <a:solidFill>
-                  <a:schemeClr val="dk2"/>
-                </a:solidFill>
-                <a:latin typeface="Roboto"/>
-                <a:ea typeface="Roboto"/>
-                <a:cs typeface="Roboto"/>
-                <a:sym typeface="Roboto"/>
-              </a:defRPr>
-            </a:lvl5pPr>
-            <a:lvl6pPr marL="2743200" marR="0" lvl="5" indent="-298450" algn="l" rtl="0">
-              <a:lnSpc>
-                <a:spcPct val="115000"/>
-              </a:lnSpc>
-              <a:spcBef>
-                <a:spcPts val="1600"/>
-              </a:spcBef>
-              <a:spcAft>
-                <a:spcPts val="0"/>
-              </a:spcAft>
-              <a:buClr>
-                <a:schemeClr val="dk2"/>
-              </a:buClr>
-              <a:buSzPts val="1100"/>
-              <a:buFont typeface="Roboto"/>
-              <a:buChar char="■"/>
-              <a:defRPr sz="1100" b="0" i="0" u="none" strike="noStrike" cap="none">
-                <a:solidFill>
-                  <a:schemeClr val="dk2"/>
-                </a:solidFill>
-                <a:latin typeface="Roboto"/>
-                <a:ea typeface="Roboto"/>
-                <a:cs typeface="Roboto"/>
-                <a:sym typeface="Roboto"/>
-              </a:defRPr>
-            </a:lvl6pPr>
-            <a:lvl7pPr marL="3200400" marR="0" lvl="6" indent="-298450" algn="l" rtl="0">
-              <a:lnSpc>
-                <a:spcPct val="115000"/>
-              </a:lnSpc>
-              <a:spcBef>
-                <a:spcPts val="1600"/>
-              </a:spcBef>
-              <a:spcAft>
-                <a:spcPts val="0"/>
-              </a:spcAft>
-              <a:buClr>
-                <a:schemeClr val="dk2"/>
-              </a:buClr>
-              <a:buSzPts val="1100"/>
-              <a:buFont typeface="Roboto"/>
-              <a:buChar char="●"/>
-              <a:defRPr sz="1100" b="0" i="0" u="none" strike="noStrike" cap="none">
-                <a:solidFill>
-                  <a:schemeClr val="dk2"/>
-                </a:solidFill>
-                <a:latin typeface="Roboto"/>
-                <a:ea typeface="Roboto"/>
-                <a:cs typeface="Roboto"/>
-                <a:sym typeface="Roboto"/>
-              </a:defRPr>
-            </a:lvl7pPr>
-            <a:lvl8pPr marL="3657600" marR="0" lvl="7" indent="-298450" algn="l" rtl="0">
-              <a:lnSpc>
-                <a:spcPct val="115000"/>
-              </a:lnSpc>
-              <a:spcBef>
-                <a:spcPts val="1600"/>
-              </a:spcBef>
-              <a:spcAft>
-                <a:spcPts val="0"/>
-              </a:spcAft>
-              <a:buClr>
-                <a:schemeClr val="dk2"/>
-              </a:buClr>
-              <a:buSzPts val="1100"/>
-              <a:buFont typeface="Roboto"/>
-              <a:buChar char="○"/>
-              <a:defRPr sz="1100" b="0" i="0" u="none" strike="noStrike" cap="none">
-                <a:solidFill>
-                  <a:schemeClr val="dk2"/>
-                </a:solidFill>
-                <a:latin typeface="Roboto"/>
-                <a:ea typeface="Roboto"/>
-                <a:cs typeface="Roboto"/>
-                <a:sym typeface="Roboto"/>
-              </a:defRPr>
-            </a:lvl8pPr>
-            <a:lvl9pPr marL="4114800" marR="0" lvl="8" indent="-298450" algn="l" rtl="0">
-              <a:lnSpc>
-                <a:spcPct val="115000"/>
-              </a:lnSpc>
-              <a:spcBef>
-                <a:spcPts val="1600"/>
-              </a:spcBef>
-              <a:spcAft>
-                <a:spcPts val="1600"/>
-              </a:spcAft>
-              <a:buClr>
-                <a:schemeClr val="dk2"/>
-              </a:buClr>
-              <a:buSzPts val="1100"/>
-              <a:buFont typeface="Roboto"/>
-              <a:buChar char="■"/>
-              <a:defRPr sz="1100" b="0" i="0" u="none" strike="noStrike" cap="none">
-                <a:solidFill>
-                  <a:schemeClr val="dk2"/>
-                </a:solidFill>
-                <a:latin typeface="Roboto"/>
-                <a:ea typeface="Roboto"/>
-                <a:cs typeface="Roboto"/>
-                <a:sym typeface="Roboto"/>
-              </a:defRPr>
-            </a:lvl9pPr>
-          </a:lstStyle>
-          <a:p>
-            <a:pPr marL="146050" indent="0">
-              <a:buNone/>
-            </a:pPr>
-            <a:r>
-              <a:rPr lang="en-US" sz="1600" dirty="0"/>
-              <a:t>Quiz 13.1 Semester Review 1</a:t>
-            </a:r>
-          </a:p>
-          <a:p>
-            <a:pPr marL="146050" indent="0">
-              <a:buNone/>
-            </a:pPr>
-            <a:r>
-              <a:rPr lang="en-US" sz="1600" dirty="0">
-                <a:solidFill>
-                  <a:schemeClr val="tx1"/>
-                </a:solidFill>
-              </a:rPr>
-              <a:t>Password - 7QuestionQuiz</a:t>
-            </a:r>
-          </a:p>
-        </p:txBody>
-      </p:sp>
-      <p:sp>
-        <p:nvSpPr>
-          <p:cNvPr id="6" name="Google Shape;325;p47">
-            <a:extLst>
-              <a:ext uri="{FF2B5EF4-FFF2-40B4-BE49-F238E27FC236}">
-                <a16:creationId xmlns:a16="http://schemas.microsoft.com/office/drawing/2014/main" id="{660AE1DC-8A39-3787-FE9E-A24753EE3132}"/>
-              </a:ext>
-            </a:extLst>
-          </p:cNvPr>
-          <p:cNvSpPr txBox="1">
-            <a:spLocks/>
-          </p:cNvSpPr>
-          <p:nvPr/>
-        </p:nvSpPr>
-        <p:spPr>
-          <a:xfrm>
-            <a:off x="2650078" y="2502976"/>
-            <a:ext cx="4516998" cy="893015"/>
-          </a:xfrm>
-          <a:prstGeom prst="rect">
-            <a:avLst/>
-          </a:prstGeom>
-          <a:noFill/>
-          <a:ln>
-            <a:noFill/>
-          </a:ln>
-        </p:spPr>
-        <p:txBody>
-          <a:bodyPr spcFirstLastPara="1" wrap="square" lIns="91425" tIns="91425" rIns="91425" bIns="91425" anchor="ctr" anchorCtr="0">
-            <a:noAutofit/>
-          </a:bodyPr>
-          <a:lstStyle>
-            <a:defPPr marR="0" lvl="0" algn="l" rtl="0">
-              <a:lnSpc>
-                <a:spcPct val="100000"/>
-              </a:lnSpc>
-              <a:spcBef>
-                <a:spcPts val="0"/>
-              </a:spcBef>
-              <a:spcAft>
-                <a:spcPts val="0"/>
-              </a:spcAft>
-            </a:defPPr>
-            <a:lvl1pPr marL="457200" marR="0" lvl="0" indent="-311150" algn="l" rtl="0">
-              <a:lnSpc>
-                <a:spcPct val="115000"/>
-              </a:lnSpc>
-              <a:spcBef>
-                <a:spcPts val="0"/>
-              </a:spcBef>
-              <a:spcAft>
-                <a:spcPts val="0"/>
-              </a:spcAft>
-              <a:buClr>
-                <a:schemeClr val="dk2"/>
-              </a:buClr>
-              <a:buSzPts val="1300"/>
-              <a:buFont typeface="Roboto"/>
-              <a:buChar char="●"/>
-              <a:defRPr sz="1300" b="0" i="0" u="none" strike="noStrike" cap="none">
-                <a:solidFill>
-                  <a:schemeClr val="dk2"/>
-                </a:solidFill>
-                <a:latin typeface="Roboto"/>
-                <a:ea typeface="Roboto"/>
-                <a:cs typeface="Roboto"/>
-                <a:sym typeface="Roboto"/>
-              </a:defRPr>
-            </a:lvl1pPr>
-            <a:lvl2pPr marL="914400" marR="0" lvl="1" indent="-298450" algn="l" rtl="0">
-              <a:lnSpc>
-                <a:spcPct val="115000"/>
-              </a:lnSpc>
-              <a:spcBef>
-                <a:spcPts val="1600"/>
-              </a:spcBef>
-              <a:spcAft>
-                <a:spcPts val="0"/>
-              </a:spcAft>
-              <a:buClr>
-                <a:schemeClr val="dk2"/>
-              </a:buClr>
-              <a:buSzPts val="1100"/>
-              <a:buFont typeface="Roboto"/>
-              <a:buChar char="○"/>
-              <a:defRPr sz="1100" b="0" i="0" u="none" strike="noStrike" cap="none">
-                <a:solidFill>
-                  <a:schemeClr val="dk2"/>
-                </a:solidFill>
-                <a:latin typeface="Roboto"/>
-                <a:ea typeface="Roboto"/>
-                <a:cs typeface="Roboto"/>
-                <a:sym typeface="Roboto"/>
-              </a:defRPr>
-            </a:lvl2pPr>
-            <a:lvl3pPr marL="1371600" marR="0" lvl="2" indent="-298450" algn="l" rtl="0">
-              <a:lnSpc>
-                <a:spcPct val="115000"/>
-              </a:lnSpc>
-              <a:spcBef>
-                <a:spcPts val="1600"/>
-              </a:spcBef>
-              <a:spcAft>
-                <a:spcPts val="0"/>
-              </a:spcAft>
-              <a:buClr>
-                <a:schemeClr val="dk2"/>
-              </a:buClr>
-              <a:buSzPts val="1100"/>
-              <a:buFont typeface="Roboto"/>
-              <a:buChar char="■"/>
-              <a:defRPr sz="1100" b="0" i="0" u="none" strike="noStrike" cap="none">
-                <a:solidFill>
-                  <a:schemeClr val="dk2"/>
-                </a:solidFill>
-                <a:latin typeface="Roboto"/>
-                <a:ea typeface="Roboto"/>
-                <a:cs typeface="Roboto"/>
-                <a:sym typeface="Roboto"/>
-              </a:defRPr>
-            </a:lvl3pPr>
-            <a:lvl4pPr marL="1828800" marR="0" lvl="3" indent="-298450" algn="l" rtl="0">
-              <a:lnSpc>
-                <a:spcPct val="115000"/>
-              </a:lnSpc>
-              <a:spcBef>
-                <a:spcPts val="1600"/>
-              </a:spcBef>
-              <a:spcAft>
-                <a:spcPts val="0"/>
-              </a:spcAft>
-              <a:buClr>
-                <a:schemeClr val="dk2"/>
-              </a:buClr>
-              <a:buSzPts val="1100"/>
-              <a:buFont typeface="Roboto"/>
-              <a:buChar char="●"/>
-              <a:defRPr sz="1100" b="0" i="0" u="none" strike="noStrike" cap="none">
-                <a:solidFill>
-                  <a:schemeClr val="dk2"/>
-                </a:solidFill>
-                <a:latin typeface="Roboto"/>
-                <a:ea typeface="Roboto"/>
-                <a:cs typeface="Roboto"/>
-                <a:sym typeface="Roboto"/>
-              </a:defRPr>
-            </a:lvl4pPr>
-            <a:lvl5pPr marL="2286000" marR="0" lvl="4" indent="-298450" algn="l" rtl="0">
-              <a:lnSpc>
-                <a:spcPct val="115000"/>
-              </a:lnSpc>
-              <a:spcBef>
-                <a:spcPts val="1600"/>
-              </a:spcBef>
-              <a:spcAft>
-                <a:spcPts val="0"/>
-              </a:spcAft>
-              <a:buClr>
-                <a:schemeClr val="dk2"/>
-              </a:buClr>
-              <a:buSzPts val="1100"/>
-              <a:buFont typeface="Roboto"/>
-              <a:buChar char="○"/>
-              <a:defRPr sz="1100" b="0" i="0" u="none" strike="noStrike" cap="none">
-                <a:solidFill>
-                  <a:schemeClr val="dk2"/>
-                </a:solidFill>
-                <a:latin typeface="Roboto"/>
-                <a:ea typeface="Roboto"/>
-                <a:cs typeface="Roboto"/>
-                <a:sym typeface="Roboto"/>
-              </a:defRPr>
-            </a:lvl5pPr>
-            <a:lvl6pPr marL="2743200" marR="0" lvl="5" indent="-298450" algn="l" rtl="0">
-              <a:lnSpc>
-                <a:spcPct val="115000"/>
-              </a:lnSpc>
-              <a:spcBef>
-                <a:spcPts val="1600"/>
-              </a:spcBef>
-              <a:spcAft>
-                <a:spcPts val="0"/>
-              </a:spcAft>
-              <a:buClr>
-                <a:schemeClr val="dk2"/>
-              </a:buClr>
-              <a:buSzPts val="1100"/>
-              <a:buFont typeface="Roboto"/>
-              <a:buChar char="■"/>
-              <a:defRPr sz="1100" b="0" i="0" u="none" strike="noStrike" cap="none">
-                <a:solidFill>
-                  <a:schemeClr val="dk2"/>
-                </a:solidFill>
-                <a:latin typeface="Roboto"/>
-                <a:ea typeface="Roboto"/>
-                <a:cs typeface="Roboto"/>
-                <a:sym typeface="Roboto"/>
-              </a:defRPr>
-            </a:lvl6pPr>
-            <a:lvl7pPr marL="3200400" marR="0" lvl="6" indent="-298450" algn="l" rtl="0">
-              <a:lnSpc>
-                <a:spcPct val="115000"/>
-              </a:lnSpc>
-              <a:spcBef>
-                <a:spcPts val="1600"/>
-              </a:spcBef>
-              <a:spcAft>
-                <a:spcPts val="0"/>
-              </a:spcAft>
-              <a:buClr>
-                <a:schemeClr val="dk2"/>
-              </a:buClr>
-              <a:buSzPts val="1100"/>
-              <a:buFont typeface="Roboto"/>
-              <a:buChar char="●"/>
-              <a:defRPr sz="1100" b="0" i="0" u="none" strike="noStrike" cap="none">
-                <a:solidFill>
-                  <a:schemeClr val="dk2"/>
-                </a:solidFill>
-                <a:latin typeface="Roboto"/>
-                <a:ea typeface="Roboto"/>
-                <a:cs typeface="Roboto"/>
-                <a:sym typeface="Roboto"/>
-              </a:defRPr>
-            </a:lvl7pPr>
-            <a:lvl8pPr marL="3657600" marR="0" lvl="7" indent="-298450" algn="l" rtl="0">
-              <a:lnSpc>
-                <a:spcPct val="115000"/>
-              </a:lnSpc>
-              <a:spcBef>
-                <a:spcPts val="1600"/>
-              </a:spcBef>
-              <a:spcAft>
-                <a:spcPts val="0"/>
-              </a:spcAft>
-              <a:buClr>
-                <a:schemeClr val="dk2"/>
-              </a:buClr>
-              <a:buSzPts val="1100"/>
-              <a:buFont typeface="Roboto"/>
-              <a:buChar char="○"/>
-              <a:defRPr sz="1100" b="0" i="0" u="none" strike="noStrike" cap="none">
-                <a:solidFill>
-                  <a:schemeClr val="dk2"/>
-                </a:solidFill>
-                <a:latin typeface="Roboto"/>
-                <a:ea typeface="Roboto"/>
-                <a:cs typeface="Roboto"/>
-                <a:sym typeface="Roboto"/>
-              </a:defRPr>
-            </a:lvl8pPr>
-            <a:lvl9pPr marL="4114800" marR="0" lvl="8" indent="-298450" algn="l" rtl="0">
-              <a:lnSpc>
-                <a:spcPct val="115000"/>
-              </a:lnSpc>
-              <a:spcBef>
-                <a:spcPts val="1600"/>
-              </a:spcBef>
-              <a:spcAft>
-                <a:spcPts val="1600"/>
-              </a:spcAft>
-              <a:buClr>
-                <a:schemeClr val="dk2"/>
-              </a:buClr>
-              <a:buSzPts val="1100"/>
-              <a:buFont typeface="Roboto"/>
-              <a:buChar char="■"/>
-              <a:defRPr sz="1100" b="0" i="0" u="none" strike="noStrike" cap="none">
-                <a:solidFill>
-                  <a:schemeClr val="dk2"/>
-                </a:solidFill>
-                <a:latin typeface="Roboto"/>
-                <a:ea typeface="Roboto"/>
-                <a:cs typeface="Roboto"/>
-                <a:sym typeface="Roboto"/>
-              </a:defRPr>
-            </a:lvl9pPr>
-          </a:lstStyle>
-          <a:p>
-            <a:pPr marL="146050" indent="0">
-              <a:buNone/>
-            </a:pPr>
-            <a:r>
-              <a:rPr lang="en-US" sz="1600" dirty="0"/>
-              <a:t>Quiz 13.2 Semester Review 2</a:t>
-            </a:r>
-          </a:p>
-          <a:p>
-            <a:pPr marL="146050" indent="0">
-              <a:buNone/>
-            </a:pPr>
-            <a:r>
-              <a:rPr lang="en-US" sz="1600" dirty="0">
-                <a:solidFill>
-                  <a:schemeClr val="tx1"/>
-                </a:solidFill>
-              </a:rPr>
-              <a:t>Password - 10MoreQuestions</a:t>
-            </a:r>
-          </a:p>
-        </p:txBody>
-      </p:sp>
-    </p:spTree>
-    <p:extLst>
-      <p:ext uri="{BB962C8B-B14F-4D97-AF65-F5344CB8AC3E}">
-        <p14:creationId xmlns:p14="http://schemas.microsoft.com/office/powerpoint/2010/main" val="674272117"/>
       </p:ext>
     </p:extLst>
   </p:cSld>

--- a/Presentation/Announcement.pptx
+++ b/Presentation/Announcement.pptx
@@ -8,8 +8,8 @@
     <p:notesMasterId r:id="rId14"/>
   </p:notesMasterIdLst>
   <p:sldIdLst>
-    <p:sldId id="286" r:id="rId2"/>
-    <p:sldId id="276" r:id="rId3"/>
+    <p:sldId id="276" r:id="rId2"/>
+    <p:sldId id="286" r:id="rId3"/>
     <p:sldId id="278" r:id="rId4"/>
     <p:sldId id="281" r:id="rId5"/>
     <p:sldId id="287" r:id="rId6"/>
@@ -739,13 +739,7 @@
   <p:cSld>
     <p:spTree>
       <p:nvGrpSpPr>
-        <p:cNvPr id="1" name="Shape 320">
-          <a:extLst>
-            <a:ext uri="{FF2B5EF4-FFF2-40B4-BE49-F238E27FC236}">
-              <a16:creationId xmlns:a16="http://schemas.microsoft.com/office/drawing/2014/main" id="{5E82D901-7A14-0382-4365-722182C687A8}"/>
-            </a:ext>
-          </a:extLst>
-        </p:cNvPr>
+        <p:cNvPr id="1" name="Shape 320"/>
         <p:cNvGrpSpPr/>
         <p:nvPr/>
       </p:nvGrpSpPr>
@@ -759,13 +753,7 @@
       </p:grpSpPr>
       <p:sp>
         <p:nvSpPr>
-          <p:cNvPr id="321" name="Google Shape;321;g8f52c9b70a_3_0:notes">
-            <a:extLst>
-              <a:ext uri="{FF2B5EF4-FFF2-40B4-BE49-F238E27FC236}">
-                <a16:creationId xmlns:a16="http://schemas.microsoft.com/office/drawing/2014/main" id="{B8D16220-AF50-7601-71A9-4952749D32CB}"/>
-              </a:ext>
-            </a:extLst>
-          </p:cNvPr>
+          <p:cNvPr id="321" name="Google Shape;321;g8f52c9b70a_3_0:notes"/>
           <p:cNvSpPr>
             <a:spLocks noGrp="1" noRot="1" noChangeAspect="1"/>
           </p:cNvSpPr>
@@ -806,13 +794,7 @@
       </p:sp>
       <p:sp>
         <p:nvSpPr>
-          <p:cNvPr id="322" name="Google Shape;322;g8f52c9b70a_3_0:notes">
-            <a:extLst>
-              <a:ext uri="{FF2B5EF4-FFF2-40B4-BE49-F238E27FC236}">
-                <a16:creationId xmlns:a16="http://schemas.microsoft.com/office/drawing/2014/main" id="{AEA302D2-52D7-97D7-BF6C-781234E92D43}"/>
-              </a:ext>
-            </a:extLst>
-          </p:cNvPr>
+          <p:cNvPr id="322" name="Google Shape;322;g8f52c9b70a_3_0:notes"/>
           <p:cNvSpPr txBox="1">
             <a:spLocks noGrp="1"/>
           </p:cNvSpPr>
@@ -843,11 +825,6 @@
         </p:txBody>
       </p:sp>
     </p:spTree>
-    <p:extLst>
-      <p:ext uri="{BB962C8B-B14F-4D97-AF65-F5344CB8AC3E}">
-        <p14:creationId xmlns:p14="http://schemas.microsoft.com/office/powerpoint/2010/main" val="2483524941"/>
-      </p:ext>
-    </p:extLst>
   </p:cSld>
   <p:clrMapOvr>
     <a:masterClrMapping/>
@@ -1169,7 +1146,13 @@
   <p:cSld>
     <p:spTree>
       <p:nvGrpSpPr>
-        <p:cNvPr id="1" name="Shape 320"/>
+        <p:cNvPr id="1" name="Shape 320">
+          <a:extLst>
+            <a:ext uri="{FF2B5EF4-FFF2-40B4-BE49-F238E27FC236}">
+              <a16:creationId xmlns:a16="http://schemas.microsoft.com/office/drawing/2014/main" id="{5E82D901-7A14-0382-4365-722182C687A8}"/>
+            </a:ext>
+          </a:extLst>
+        </p:cNvPr>
         <p:cNvGrpSpPr/>
         <p:nvPr/>
       </p:nvGrpSpPr>
@@ -1183,7 +1166,13 @@
       </p:grpSpPr>
       <p:sp>
         <p:nvSpPr>
-          <p:cNvPr id="321" name="Google Shape;321;g8f52c9b70a_3_0:notes"/>
+          <p:cNvPr id="321" name="Google Shape;321;g8f52c9b70a_3_0:notes">
+            <a:extLst>
+              <a:ext uri="{FF2B5EF4-FFF2-40B4-BE49-F238E27FC236}">
+                <a16:creationId xmlns:a16="http://schemas.microsoft.com/office/drawing/2014/main" id="{B8D16220-AF50-7601-71A9-4952749D32CB}"/>
+              </a:ext>
+            </a:extLst>
+          </p:cNvPr>
           <p:cNvSpPr>
             <a:spLocks noGrp="1" noRot="1" noChangeAspect="1"/>
           </p:cNvSpPr>
@@ -1224,7 +1213,13 @@
       </p:sp>
       <p:sp>
         <p:nvSpPr>
-          <p:cNvPr id="322" name="Google Shape;322;g8f52c9b70a_3_0:notes"/>
+          <p:cNvPr id="322" name="Google Shape;322;g8f52c9b70a_3_0:notes">
+            <a:extLst>
+              <a:ext uri="{FF2B5EF4-FFF2-40B4-BE49-F238E27FC236}">
+                <a16:creationId xmlns:a16="http://schemas.microsoft.com/office/drawing/2014/main" id="{AEA302D2-52D7-97D7-BF6C-781234E92D43}"/>
+              </a:ext>
+            </a:extLst>
+          </p:cNvPr>
           <p:cNvSpPr txBox="1">
             <a:spLocks noGrp="1"/>
           </p:cNvSpPr>
@@ -1255,6 +1250,11 @@
         </p:txBody>
       </p:sp>
     </p:spTree>
+    <p:extLst>
+      <p:ext uri="{BB962C8B-B14F-4D97-AF65-F5344CB8AC3E}">
+        <p14:creationId xmlns:p14="http://schemas.microsoft.com/office/powerpoint/2010/main" val="2483524941"/>
+      </p:ext>
+    </p:extLst>
   </p:cSld>
   <p:clrMapOvr>
     <a:masterClrMapping/>
@@ -6529,6 +6529,1035 @@
   <p:cSld>
     <p:spTree>
       <p:nvGrpSpPr>
+        <p:cNvPr id="1" name="Shape 323"/>
+        <p:cNvGrpSpPr/>
+        <p:nvPr/>
+      </p:nvGrpSpPr>
+      <p:grpSpPr>
+        <a:xfrm>
+          <a:off x="0" y="0"/>
+          <a:ext cx="0" cy="0"/>
+          <a:chOff x="0" y="0"/>
+          <a:chExt cx="0" cy="0"/>
+        </a:xfrm>
+      </p:grpSpPr>
+      <p:sp>
+        <p:nvSpPr>
+          <p:cNvPr id="324" name="Google Shape;324;p47"/>
+          <p:cNvSpPr txBox="1">
+            <a:spLocks noGrp="1"/>
+          </p:cNvSpPr>
+          <p:nvPr>
+            <p:ph type="title"/>
+          </p:nvPr>
+        </p:nvSpPr>
+        <p:spPr>
+          <a:xfrm>
+            <a:off x="305858" y="273819"/>
+            <a:ext cx="8520600" cy="623700"/>
+          </a:xfrm>
+          <a:prstGeom prst="rect">
+            <a:avLst/>
+          </a:prstGeom>
+        </p:spPr>
+        <p:txBody>
+          <a:bodyPr spcFirstLastPara="1" wrap="square" lIns="91425" tIns="91425" rIns="91425" bIns="91425" anchor="t" anchorCtr="0">
+            <a:noAutofit/>
+          </a:bodyPr>
+          <a:lstStyle/>
+          <a:p>
+            <a:pPr marL="0" lvl="0" indent="0" algn="ctr" rtl="0">
+              <a:spcBef>
+                <a:spcPts val="0"/>
+              </a:spcBef>
+              <a:spcAft>
+                <a:spcPts val="0"/>
+              </a:spcAft>
+              <a:buNone/>
+            </a:pPr>
+            <a:r>
+              <a:rPr lang="en-US" dirty="0"/>
+              <a:t>GCIS – Software Development and Problem Solving</a:t>
+            </a:r>
+            <a:endParaRPr dirty="0"/>
+          </a:p>
+        </p:txBody>
+      </p:sp>
+      <p:sp>
+        <p:nvSpPr>
+          <p:cNvPr id="325" name="Google Shape;325;p47"/>
+          <p:cNvSpPr txBox="1">
+            <a:spLocks noGrp="1"/>
+          </p:cNvSpPr>
+          <p:nvPr>
+            <p:ph type="body" idx="1"/>
+          </p:nvPr>
+        </p:nvSpPr>
+        <p:spPr>
+          <a:xfrm>
+            <a:off x="-5842" y="1721147"/>
+            <a:ext cx="9149842" cy="1226403"/>
+          </a:xfrm>
+          <a:prstGeom prst="rect">
+            <a:avLst/>
+          </a:prstGeom>
+        </p:spPr>
+        <p:txBody>
+          <a:bodyPr spcFirstLastPara="1" wrap="square" lIns="91425" tIns="91425" rIns="91425" bIns="91425" anchor="ctr" anchorCtr="0">
+            <a:noAutofit/>
+          </a:bodyPr>
+          <a:lstStyle/>
+          <a:p>
+            <a:pPr marL="146050" indent="0" algn="ctr">
+              <a:buNone/>
+            </a:pPr>
+            <a:r>
+              <a:rPr lang="en-US" sz="2400" dirty="0"/>
+              <a:t>Take </a:t>
+            </a:r>
+            <a:r>
+              <a:rPr lang="pl-PL" sz="2400" dirty="0"/>
+              <a:t>Quiz </a:t>
+            </a:r>
+            <a:r>
+              <a:rPr lang="en-US" sz="2400" dirty="0"/>
+              <a:t>2</a:t>
+            </a:r>
+            <a:r>
+              <a:rPr lang="pl-PL" sz="2400" dirty="0"/>
+              <a:t>.</a:t>
+            </a:r>
+            <a:r>
+              <a:rPr lang="en-US" sz="2400" dirty="0"/>
+              <a:t>1</a:t>
+            </a:r>
+            <a:r>
+              <a:rPr lang="pl-PL" sz="2400" dirty="0"/>
+              <a:t>: </a:t>
+            </a:r>
+            <a:r>
+              <a:rPr lang="en-US" sz="2400" dirty="0"/>
+              <a:t>Java Classes</a:t>
+            </a:r>
+          </a:p>
+          <a:p>
+            <a:pPr algn="ctr"/>
+            <a:r>
+              <a:rPr lang="en-US" sz="2400" dirty="0"/>
+              <a:t>Password - </a:t>
+            </a:r>
+            <a:r>
+              <a:rPr lang="en-US" sz="2400" dirty="0" err="1"/>
+              <a:t>goTo</a:t>
+            </a:r>
+            <a:r>
+              <a:rPr lang="en-US" sz="2400" dirty="0"/>
+              <a:t>(Java)Class</a:t>
+            </a:r>
+            <a:endParaRPr sz="2400" dirty="0"/>
+          </a:p>
+        </p:txBody>
+      </p:sp>
+      <p:sp>
+        <p:nvSpPr>
+          <p:cNvPr id="326" name="Google Shape;326;p47"/>
+          <p:cNvSpPr txBox="1">
+            <a:spLocks noGrp="1"/>
+          </p:cNvSpPr>
+          <p:nvPr>
+            <p:ph type="sldNum" idx="12"/>
+          </p:nvPr>
+        </p:nvSpPr>
+        <p:spPr>
+          <a:xfrm>
+            <a:off x="8472458" y="4663217"/>
+            <a:ext cx="548700" cy="393600"/>
+          </a:xfrm>
+          <a:prstGeom prst="rect">
+            <a:avLst/>
+          </a:prstGeom>
+        </p:spPr>
+        <p:txBody>
+          <a:bodyPr spcFirstLastPara="1" wrap="square" lIns="91425" tIns="91425" rIns="91425" bIns="91425" anchor="ctr" anchorCtr="0">
+            <a:noAutofit/>
+          </a:bodyPr>
+          <a:lstStyle/>
+          <a:p>
+            <a:pPr marL="0" lvl="0" indent="0" algn="r" rtl="0">
+              <a:spcBef>
+                <a:spcPts val="0"/>
+              </a:spcBef>
+              <a:spcAft>
+                <a:spcPts val="0"/>
+              </a:spcAft>
+              <a:buNone/>
+            </a:pPr>
+            <a:fld id="{00000000-1234-1234-1234-123412341234}" type="slidenum">
+              <a:rPr lang="en"/>
+              <a:t>1</a:t>
+            </a:fld>
+            <a:endParaRPr/>
+          </a:p>
+        </p:txBody>
+      </p:sp>
+      <p:sp>
+        <p:nvSpPr>
+          <p:cNvPr id="2" name="TextBox 1">
+            <a:extLst>
+              <a:ext uri="{FF2B5EF4-FFF2-40B4-BE49-F238E27FC236}">
+                <a16:creationId xmlns:a16="http://schemas.microsoft.com/office/drawing/2014/main" id="{DCC33EBB-1C9D-B9A9-88E6-F3466077417F}"/>
+              </a:ext>
+            </a:extLst>
+          </p:cNvPr>
+          <p:cNvSpPr txBox="1"/>
+          <p:nvPr/>
+        </p:nvSpPr>
+        <p:spPr>
+          <a:xfrm>
+            <a:off x="0" y="1277369"/>
+            <a:ext cx="9144000" cy="307777"/>
+          </a:xfrm>
+          <a:prstGeom prst="rect">
+            <a:avLst/>
+          </a:prstGeom>
+          <a:solidFill>
+            <a:srgbClr val="FFC000"/>
+          </a:solidFill>
+        </p:spPr>
+        <p:txBody>
+          <a:bodyPr wrap="square" rtlCol="0">
+            <a:spAutoFit/>
+          </a:bodyPr>
+          <a:lstStyle/>
+          <a:p>
+            <a:r>
+              <a:rPr lang="en-US" dirty="0"/>
+              <a:t>Quiz</a:t>
+            </a:r>
+          </a:p>
+        </p:txBody>
+      </p:sp>
+      <p:sp>
+        <p:nvSpPr>
+          <p:cNvPr id="3" name="TextBox 2">
+            <a:extLst>
+              <a:ext uri="{FF2B5EF4-FFF2-40B4-BE49-F238E27FC236}">
+                <a16:creationId xmlns:a16="http://schemas.microsoft.com/office/drawing/2014/main" id="{64C19922-6A1B-1404-5104-DC43E4C67861}"/>
+              </a:ext>
+            </a:extLst>
+          </p:cNvPr>
+          <p:cNvSpPr txBox="1"/>
+          <p:nvPr/>
+        </p:nvSpPr>
+        <p:spPr>
+          <a:xfrm>
+            <a:off x="-5842" y="3031063"/>
+            <a:ext cx="9144000" cy="307777"/>
+          </a:xfrm>
+          <a:prstGeom prst="rect">
+            <a:avLst/>
+          </a:prstGeom>
+          <a:solidFill>
+            <a:srgbClr val="FFC000"/>
+          </a:solidFill>
+        </p:spPr>
+        <p:txBody>
+          <a:bodyPr wrap="square" rtlCol="0">
+            <a:spAutoFit/>
+          </a:bodyPr>
+          <a:lstStyle/>
+          <a:p>
+            <a:r>
+              <a:rPr lang="en-US" dirty="0"/>
+              <a:t>Next </a:t>
+            </a:r>
+            <a:r>
+              <a:rPr lang="en-US" dirty="0">
+                <a:sym typeface="Wingdings" panose="05000000000000000000" pitchFamily="2" charset="2"/>
+              </a:rPr>
+              <a:t> </a:t>
+            </a:r>
+            <a:endParaRPr lang="en-US" dirty="0"/>
+          </a:p>
+        </p:txBody>
+      </p:sp>
+      <p:sp>
+        <p:nvSpPr>
+          <p:cNvPr id="4" name="Google Shape;325;p47">
+            <a:extLst>
+              <a:ext uri="{FF2B5EF4-FFF2-40B4-BE49-F238E27FC236}">
+                <a16:creationId xmlns:a16="http://schemas.microsoft.com/office/drawing/2014/main" id="{E455EA58-F56D-AF58-E97D-95A77E0AB6CF}"/>
+              </a:ext>
+            </a:extLst>
+          </p:cNvPr>
+          <p:cNvSpPr txBox="1">
+            <a:spLocks/>
+          </p:cNvSpPr>
+          <p:nvPr/>
+        </p:nvSpPr>
+        <p:spPr>
+          <a:xfrm>
+            <a:off x="-5842" y="3422352"/>
+            <a:ext cx="9149842" cy="1721148"/>
+          </a:xfrm>
+          <a:prstGeom prst="rect">
+            <a:avLst/>
+          </a:prstGeom>
+          <a:noFill/>
+          <a:ln>
+            <a:noFill/>
+          </a:ln>
+        </p:spPr>
+        <p:txBody>
+          <a:bodyPr spcFirstLastPara="1" wrap="square" lIns="91425" tIns="91425" rIns="91425" bIns="91425" anchor="ctr" anchorCtr="0">
+            <a:noAutofit/>
+          </a:bodyPr>
+          <a:lstStyle>
+            <a:defPPr marR="0" lvl="0" algn="l" rtl="0">
+              <a:lnSpc>
+                <a:spcPct val="100000"/>
+              </a:lnSpc>
+              <a:spcBef>
+                <a:spcPts val="0"/>
+              </a:spcBef>
+              <a:spcAft>
+                <a:spcPts val="0"/>
+              </a:spcAft>
+            </a:defPPr>
+            <a:lvl1pPr marL="457200" marR="0" lvl="0" indent="-311150" algn="l" rtl="0">
+              <a:lnSpc>
+                <a:spcPct val="115000"/>
+              </a:lnSpc>
+              <a:spcBef>
+                <a:spcPts val="0"/>
+              </a:spcBef>
+              <a:spcAft>
+                <a:spcPts val="0"/>
+              </a:spcAft>
+              <a:buClr>
+                <a:schemeClr val="dk2"/>
+              </a:buClr>
+              <a:buSzPts val="1300"/>
+              <a:buFont typeface="Roboto"/>
+              <a:buChar char="●"/>
+              <a:defRPr sz="1300" b="0" i="0" u="none" strike="noStrike" cap="none">
+                <a:solidFill>
+                  <a:schemeClr val="dk2"/>
+                </a:solidFill>
+                <a:latin typeface="Roboto"/>
+                <a:ea typeface="Roboto"/>
+                <a:cs typeface="Roboto"/>
+                <a:sym typeface="Roboto"/>
+              </a:defRPr>
+            </a:lvl1pPr>
+            <a:lvl2pPr marL="914400" marR="0" lvl="1" indent="-298450" algn="l" rtl="0">
+              <a:lnSpc>
+                <a:spcPct val="115000"/>
+              </a:lnSpc>
+              <a:spcBef>
+                <a:spcPts val="1600"/>
+              </a:spcBef>
+              <a:spcAft>
+                <a:spcPts val="0"/>
+              </a:spcAft>
+              <a:buClr>
+                <a:schemeClr val="dk2"/>
+              </a:buClr>
+              <a:buSzPts val="1100"/>
+              <a:buFont typeface="Roboto"/>
+              <a:buChar char="○"/>
+              <a:defRPr sz="1100" b="0" i="0" u="none" strike="noStrike" cap="none">
+                <a:solidFill>
+                  <a:schemeClr val="dk2"/>
+                </a:solidFill>
+                <a:latin typeface="Roboto"/>
+                <a:ea typeface="Roboto"/>
+                <a:cs typeface="Roboto"/>
+                <a:sym typeface="Roboto"/>
+              </a:defRPr>
+            </a:lvl2pPr>
+            <a:lvl3pPr marL="1371600" marR="0" lvl="2" indent="-298450" algn="l" rtl="0">
+              <a:lnSpc>
+                <a:spcPct val="115000"/>
+              </a:lnSpc>
+              <a:spcBef>
+                <a:spcPts val="1600"/>
+              </a:spcBef>
+              <a:spcAft>
+                <a:spcPts val="0"/>
+              </a:spcAft>
+              <a:buClr>
+                <a:schemeClr val="dk2"/>
+              </a:buClr>
+              <a:buSzPts val="1100"/>
+              <a:buFont typeface="Roboto"/>
+              <a:buChar char="■"/>
+              <a:defRPr sz="1100" b="0" i="0" u="none" strike="noStrike" cap="none">
+                <a:solidFill>
+                  <a:schemeClr val="dk2"/>
+                </a:solidFill>
+                <a:latin typeface="Roboto"/>
+                <a:ea typeface="Roboto"/>
+                <a:cs typeface="Roboto"/>
+                <a:sym typeface="Roboto"/>
+              </a:defRPr>
+            </a:lvl3pPr>
+            <a:lvl4pPr marL="1828800" marR="0" lvl="3" indent="-298450" algn="l" rtl="0">
+              <a:lnSpc>
+                <a:spcPct val="115000"/>
+              </a:lnSpc>
+              <a:spcBef>
+                <a:spcPts val="1600"/>
+              </a:spcBef>
+              <a:spcAft>
+                <a:spcPts val="0"/>
+              </a:spcAft>
+              <a:buClr>
+                <a:schemeClr val="dk2"/>
+              </a:buClr>
+              <a:buSzPts val="1100"/>
+              <a:buFont typeface="Roboto"/>
+              <a:buChar char="●"/>
+              <a:defRPr sz="1100" b="0" i="0" u="none" strike="noStrike" cap="none">
+                <a:solidFill>
+                  <a:schemeClr val="dk2"/>
+                </a:solidFill>
+                <a:latin typeface="Roboto"/>
+                <a:ea typeface="Roboto"/>
+                <a:cs typeface="Roboto"/>
+                <a:sym typeface="Roboto"/>
+              </a:defRPr>
+            </a:lvl4pPr>
+            <a:lvl5pPr marL="2286000" marR="0" lvl="4" indent="-298450" algn="l" rtl="0">
+              <a:lnSpc>
+                <a:spcPct val="115000"/>
+              </a:lnSpc>
+              <a:spcBef>
+                <a:spcPts val="1600"/>
+              </a:spcBef>
+              <a:spcAft>
+                <a:spcPts val="0"/>
+              </a:spcAft>
+              <a:buClr>
+                <a:schemeClr val="dk2"/>
+              </a:buClr>
+              <a:buSzPts val="1100"/>
+              <a:buFont typeface="Roboto"/>
+              <a:buChar char="○"/>
+              <a:defRPr sz="1100" b="0" i="0" u="none" strike="noStrike" cap="none">
+                <a:solidFill>
+                  <a:schemeClr val="dk2"/>
+                </a:solidFill>
+                <a:latin typeface="Roboto"/>
+                <a:ea typeface="Roboto"/>
+                <a:cs typeface="Roboto"/>
+                <a:sym typeface="Roboto"/>
+              </a:defRPr>
+            </a:lvl5pPr>
+            <a:lvl6pPr marL="2743200" marR="0" lvl="5" indent="-298450" algn="l" rtl="0">
+              <a:lnSpc>
+                <a:spcPct val="115000"/>
+              </a:lnSpc>
+              <a:spcBef>
+                <a:spcPts val="1600"/>
+              </a:spcBef>
+              <a:spcAft>
+                <a:spcPts val="0"/>
+              </a:spcAft>
+              <a:buClr>
+                <a:schemeClr val="dk2"/>
+              </a:buClr>
+              <a:buSzPts val="1100"/>
+              <a:buFont typeface="Roboto"/>
+              <a:buChar char="■"/>
+              <a:defRPr sz="1100" b="0" i="0" u="none" strike="noStrike" cap="none">
+                <a:solidFill>
+                  <a:schemeClr val="dk2"/>
+                </a:solidFill>
+                <a:latin typeface="Roboto"/>
+                <a:ea typeface="Roboto"/>
+                <a:cs typeface="Roboto"/>
+                <a:sym typeface="Roboto"/>
+              </a:defRPr>
+            </a:lvl6pPr>
+            <a:lvl7pPr marL="3200400" marR="0" lvl="6" indent="-298450" algn="l" rtl="0">
+              <a:lnSpc>
+                <a:spcPct val="115000"/>
+              </a:lnSpc>
+              <a:spcBef>
+                <a:spcPts val="1600"/>
+              </a:spcBef>
+              <a:spcAft>
+                <a:spcPts val="0"/>
+              </a:spcAft>
+              <a:buClr>
+                <a:schemeClr val="dk2"/>
+              </a:buClr>
+              <a:buSzPts val="1100"/>
+              <a:buFont typeface="Roboto"/>
+              <a:buChar char="●"/>
+              <a:defRPr sz="1100" b="0" i="0" u="none" strike="noStrike" cap="none">
+                <a:solidFill>
+                  <a:schemeClr val="dk2"/>
+                </a:solidFill>
+                <a:latin typeface="Roboto"/>
+                <a:ea typeface="Roboto"/>
+                <a:cs typeface="Roboto"/>
+                <a:sym typeface="Roboto"/>
+              </a:defRPr>
+            </a:lvl7pPr>
+            <a:lvl8pPr marL="3657600" marR="0" lvl="7" indent="-298450" algn="l" rtl="0">
+              <a:lnSpc>
+                <a:spcPct val="115000"/>
+              </a:lnSpc>
+              <a:spcBef>
+                <a:spcPts val="1600"/>
+              </a:spcBef>
+              <a:spcAft>
+                <a:spcPts val="0"/>
+              </a:spcAft>
+              <a:buClr>
+                <a:schemeClr val="dk2"/>
+              </a:buClr>
+              <a:buSzPts val="1100"/>
+              <a:buFont typeface="Roboto"/>
+              <a:buChar char="○"/>
+              <a:defRPr sz="1100" b="0" i="0" u="none" strike="noStrike" cap="none">
+                <a:solidFill>
+                  <a:schemeClr val="dk2"/>
+                </a:solidFill>
+                <a:latin typeface="Roboto"/>
+                <a:ea typeface="Roboto"/>
+                <a:cs typeface="Roboto"/>
+                <a:sym typeface="Roboto"/>
+              </a:defRPr>
+            </a:lvl8pPr>
+            <a:lvl9pPr marL="4114800" marR="0" lvl="8" indent="-298450" algn="l" rtl="0">
+              <a:lnSpc>
+                <a:spcPct val="115000"/>
+              </a:lnSpc>
+              <a:spcBef>
+                <a:spcPts val="1600"/>
+              </a:spcBef>
+              <a:spcAft>
+                <a:spcPts val="1600"/>
+              </a:spcAft>
+              <a:buClr>
+                <a:schemeClr val="dk2"/>
+              </a:buClr>
+              <a:buSzPts val="1100"/>
+              <a:buFont typeface="Roboto"/>
+              <a:buChar char="■"/>
+              <a:defRPr sz="1100" b="0" i="0" u="none" strike="noStrike" cap="none">
+                <a:solidFill>
+                  <a:schemeClr val="dk2"/>
+                </a:solidFill>
+                <a:latin typeface="Roboto"/>
+                <a:ea typeface="Roboto"/>
+                <a:cs typeface="Roboto"/>
+                <a:sym typeface="Roboto"/>
+              </a:defRPr>
+            </a:lvl9pPr>
+          </a:lstStyle>
+          <a:p>
+            <a:pPr marL="0" indent="0">
+              <a:spcAft>
+                <a:spcPts val="1600"/>
+              </a:spcAft>
+              <a:buNone/>
+            </a:pPr>
+            <a:r>
+              <a:rPr lang="en-US" sz="2800" dirty="0"/>
+              <a:t>After completing the Quiz </a:t>
+            </a:r>
+          </a:p>
+          <a:p>
+            <a:pPr marL="342900" indent="-342900">
+              <a:spcAft>
+                <a:spcPts val="1600"/>
+              </a:spcAft>
+            </a:pPr>
+            <a:r>
+              <a:rPr lang="en-US" sz="2400" dirty="0"/>
+              <a:t>Clone/Pull Unit2 – git hub classroom repo for class activities</a:t>
+            </a:r>
+            <a:endParaRPr lang="en-US" sz="2400" dirty="0">
+              <a:solidFill>
+                <a:schemeClr val="tx1"/>
+              </a:solidFill>
+            </a:endParaRPr>
+          </a:p>
+        </p:txBody>
+      </p:sp>
+    </p:spTree>
+  </p:cSld>
+  <p:clrMapOvr>
+    <a:masterClrMapping/>
+  </p:clrMapOvr>
+</p:sld>
+</file>
+
+<file path=ppt/slides/slide10.xml><?xml version="1.0" encoding="utf-8"?>
+<p:sld xmlns:a="http://schemas.openxmlformats.org/drawingml/2006/main" xmlns:r="http://schemas.openxmlformats.org/officeDocument/2006/relationships" xmlns:p="http://schemas.openxmlformats.org/presentationml/2006/main" show="0">
+  <p:cSld>
+    <p:spTree>
+      <p:nvGrpSpPr>
+        <p:cNvPr id="1" name="Shape 323"/>
+        <p:cNvGrpSpPr/>
+        <p:nvPr/>
+      </p:nvGrpSpPr>
+      <p:grpSpPr>
+        <a:xfrm>
+          <a:off x="0" y="0"/>
+          <a:ext cx="0" cy="0"/>
+          <a:chOff x="0" y="0"/>
+          <a:chExt cx="0" cy="0"/>
+        </a:xfrm>
+      </p:grpSpPr>
+      <p:sp>
+        <p:nvSpPr>
+          <p:cNvPr id="324" name="Google Shape;324;p47"/>
+          <p:cNvSpPr txBox="1">
+            <a:spLocks noGrp="1"/>
+          </p:cNvSpPr>
+          <p:nvPr>
+            <p:ph type="title"/>
+          </p:nvPr>
+        </p:nvSpPr>
+        <p:spPr>
+          <a:xfrm>
+            <a:off x="226208" y="1"/>
+            <a:ext cx="8520600" cy="464980"/>
+          </a:xfrm>
+          <a:prstGeom prst="rect">
+            <a:avLst/>
+          </a:prstGeom>
+        </p:spPr>
+        <p:txBody>
+          <a:bodyPr spcFirstLastPara="1" wrap="square" lIns="91425" tIns="91425" rIns="91425" bIns="91425" anchor="t" anchorCtr="0">
+            <a:noAutofit/>
+          </a:bodyPr>
+          <a:lstStyle/>
+          <a:p>
+            <a:pPr marL="0" lvl="0" indent="0" algn="ctr" rtl="0">
+              <a:spcBef>
+                <a:spcPts val="0"/>
+              </a:spcBef>
+              <a:spcAft>
+                <a:spcPts val="0"/>
+              </a:spcAft>
+              <a:buNone/>
+            </a:pPr>
+            <a:r>
+              <a:rPr lang="en-US" dirty="0"/>
+              <a:t>Use </a:t>
+            </a:r>
+            <a:r>
+              <a:rPr lang="en-US" sz="2400" dirty="0"/>
+              <a:t>Assigned</a:t>
+            </a:r>
+            <a:r>
+              <a:rPr lang="en-US" dirty="0"/>
+              <a:t> Seat</a:t>
+            </a:r>
+            <a:endParaRPr dirty="0"/>
+          </a:p>
+        </p:txBody>
+      </p:sp>
+      <p:sp>
+        <p:nvSpPr>
+          <p:cNvPr id="326" name="Google Shape;326;p47"/>
+          <p:cNvSpPr txBox="1">
+            <a:spLocks noGrp="1"/>
+          </p:cNvSpPr>
+          <p:nvPr>
+            <p:ph type="sldNum" idx="12"/>
+          </p:nvPr>
+        </p:nvSpPr>
+        <p:spPr>
+          <a:xfrm>
+            <a:off x="8472458" y="4663217"/>
+            <a:ext cx="548700" cy="393600"/>
+          </a:xfrm>
+          <a:prstGeom prst="rect">
+            <a:avLst/>
+          </a:prstGeom>
+        </p:spPr>
+        <p:txBody>
+          <a:bodyPr spcFirstLastPara="1" wrap="square" lIns="91425" tIns="91425" rIns="91425" bIns="91425" anchor="ctr" anchorCtr="0">
+            <a:noAutofit/>
+          </a:bodyPr>
+          <a:lstStyle/>
+          <a:p>
+            <a:pPr marL="0" lvl="0" indent="0" algn="r" rtl="0">
+              <a:spcBef>
+                <a:spcPts val="0"/>
+              </a:spcBef>
+              <a:spcAft>
+                <a:spcPts val="0"/>
+              </a:spcAft>
+              <a:buNone/>
+            </a:pPr>
+            <a:fld id="{00000000-1234-1234-1234-123412341234}" type="slidenum">
+              <a:rPr lang="en"/>
+              <a:t>10</a:t>
+            </a:fld>
+            <a:endParaRPr/>
+          </a:p>
+        </p:txBody>
+      </p:sp>
+      <p:pic>
+        <p:nvPicPr>
+          <p:cNvPr id="6" name="Picture 5">
+            <a:extLst>
+              <a:ext uri="{FF2B5EF4-FFF2-40B4-BE49-F238E27FC236}">
+                <a16:creationId xmlns:a16="http://schemas.microsoft.com/office/drawing/2014/main" id="{DED32793-7C09-E3A3-94E5-B5D46727A1D0}"/>
+              </a:ext>
+            </a:extLst>
+          </p:cNvPr>
+          <p:cNvPicPr>
+            <a:picLocks noChangeAspect="1"/>
+          </p:cNvPicPr>
+          <p:nvPr/>
+        </p:nvPicPr>
+        <p:blipFill>
+          <a:blip r:embed="rId3"/>
+          <a:stretch>
+            <a:fillRect/>
+          </a:stretch>
+        </p:blipFill>
+        <p:spPr>
+          <a:xfrm>
+            <a:off x="-1" y="551663"/>
+            <a:ext cx="9144001" cy="4591837"/>
+          </a:xfrm>
+          <a:prstGeom prst="rect">
+            <a:avLst/>
+          </a:prstGeom>
+        </p:spPr>
+      </p:pic>
+    </p:spTree>
+    <p:extLst>
+      <p:ext uri="{BB962C8B-B14F-4D97-AF65-F5344CB8AC3E}">
+        <p14:creationId xmlns:p14="http://schemas.microsoft.com/office/powerpoint/2010/main" val="4226348449"/>
+      </p:ext>
+    </p:extLst>
+  </p:cSld>
+  <p:clrMapOvr>
+    <a:masterClrMapping/>
+  </p:clrMapOvr>
+</p:sld>
+</file>
+
+<file path=ppt/slides/slide11.xml><?xml version="1.0" encoding="utf-8"?>
+<p:sld xmlns:a="http://schemas.openxmlformats.org/drawingml/2006/main" xmlns:r="http://schemas.openxmlformats.org/officeDocument/2006/relationships" xmlns:p="http://schemas.openxmlformats.org/presentationml/2006/main" show="0">
+  <p:cSld>
+    <p:spTree>
+      <p:nvGrpSpPr>
+        <p:cNvPr id="1" name="Shape 323"/>
+        <p:cNvGrpSpPr/>
+        <p:nvPr/>
+      </p:nvGrpSpPr>
+      <p:grpSpPr>
+        <a:xfrm>
+          <a:off x="0" y="0"/>
+          <a:ext cx="0" cy="0"/>
+          <a:chOff x="0" y="0"/>
+          <a:chExt cx="0" cy="0"/>
+        </a:xfrm>
+      </p:grpSpPr>
+      <p:sp>
+        <p:nvSpPr>
+          <p:cNvPr id="324" name="Google Shape;324;p47"/>
+          <p:cNvSpPr txBox="1">
+            <a:spLocks noGrp="1"/>
+          </p:cNvSpPr>
+          <p:nvPr>
+            <p:ph type="title"/>
+          </p:nvPr>
+        </p:nvSpPr>
+        <p:spPr>
+          <a:xfrm>
+            <a:off x="226208" y="1"/>
+            <a:ext cx="8520600" cy="464980"/>
+          </a:xfrm>
+          <a:prstGeom prst="rect">
+            <a:avLst/>
+          </a:prstGeom>
+        </p:spPr>
+        <p:txBody>
+          <a:bodyPr spcFirstLastPara="1" wrap="square" lIns="91425" tIns="91425" rIns="91425" bIns="91425" anchor="t" anchorCtr="0">
+            <a:noAutofit/>
+          </a:bodyPr>
+          <a:lstStyle/>
+          <a:p>
+            <a:pPr marL="0" lvl="0" indent="0" algn="ctr" rtl="0">
+              <a:spcBef>
+                <a:spcPts val="0"/>
+              </a:spcBef>
+              <a:spcAft>
+                <a:spcPts val="0"/>
+              </a:spcAft>
+              <a:buNone/>
+            </a:pPr>
+            <a:r>
+              <a:rPr lang="en-US" dirty="0"/>
+              <a:t>Use </a:t>
+            </a:r>
+            <a:r>
+              <a:rPr lang="en-US" sz="2400" dirty="0"/>
+              <a:t>Assigned</a:t>
+            </a:r>
+            <a:r>
+              <a:rPr lang="en-US" dirty="0"/>
+              <a:t> Seat</a:t>
+            </a:r>
+            <a:endParaRPr dirty="0"/>
+          </a:p>
+        </p:txBody>
+      </p:sp>
+      <p:sp>
+        <p:nvSpPr>
+          <p:cNvPr id="326" name="Google Shape;326;p47"/>
+          <p:cNvSpPr txBox="1">
+            <a:spLocks noGrp="1"/>
+          </p:cNvSpPr>
+          <p:nvPr>
+            <p:ph type="sldNum" idx="12"/>
+          </p:nvPr>
+        </p:nvSpPr>
+        <p:spPr>
+          <a:xfrm>
+            <a:off x="8472458" y="4663217"/>
+            <a:ext cx="548700" cy="393600"/>
+          </a:xfrm>
+          <a:prstGeom prst="rect">
+            <a:avLst/>
+          </a:prstGeom>
+        </p:spPr>
+        <p:txBody>
+          <a:bodyPr spcFirstLastPara="1" wrap="square" lIns="91425" tIns="91425" rIns="91425" bIns="91425" anchor="ctr" anchorCtr="0">
+            <a:noAutofit/>
+          </a:bodyPr>
+          <a:lstStyle/>
+          <a:p>
+            <a:pPr marL="0" lvl="0" indent="0" algn="r" rtl="0">
+              <a:spcBef>
+                <a:spcPts val="0"/>
+              </a:spcBef>
+              <a:spcAft>
+                <a:spcPts val="0"/>
+              </a:spcAft>
+              <a:buNone/>
+            </a:pPr>
+            <a:fld id="{00000000-1234-1234-1234-123412341234}" type="slidenum">
+              <a:rPr lang="en"/>
+              <a:t>11</a:t>
+            </a:fld>
+            <a:endParaRPr/>
+          </a:p>
+        </p:txBody>
+      </p:sp>
+      <p:pic>
+        <p:nvPicPr>
+          <p:cNvPr id="3" name="Picture 2">
+            <a:extLst>
+              <a:ext uri="{FF2B5EF4-FFF2-40B4-BE49-F238E27FC236}">
+                <a16:creationId xmlns:a16="http://schemas.microsoft.com/office/drawing/2014/main" id="{92DE4AAC-70FE-A114-5258-F5B22EDDED45}"/>
+              </a:ext>
+            </a:extLst>
+          </p:cNvPr>
+          <p:cNvPicPr>
+            <a:picLocks noChangeAspect="1"/>
+          </p:cNvPicPr>
+          <p:nvPr/>
+        </p:nvPicPr>
+        <p:blipFill>
+          <a:blip r:embed="rId3"/>
+          <a:stretch>
+            <a:fillRect/>
+          </a:stretch>
+        </p:blipFill>
+        <p:spPr>
+          <a:xfrm>
+            <a:off x="0" y="716280"/>
+            <a:ext cx="9144000" cy="4427218"/>
+          </a:xfrm>
+          <a:prstGeom prst="rect">
+            <a:avLst/>
+          </a:prstGeom>
+        </p:spPr>
+      </p:pic>
+    </p:spTree>
+    <p:extLst>
+      <p:ext uri="{BB962C8B-B14F-4D97-AF65-F5344CB8AC3E}">
+        <p14:creationId xmlns:p14="http://schemas.microsoft.com/office/powerpoint/2010/main" val="1976403023"/>
+      </p:ext>
+    </p:extLst>
+  </p:cSld>
+  <p:clrMapOvr>
+    <a:masterClrMapping/>
+  </p:clrMapOvr>
+</p:sld>
+</file>
+
+<file path=ppt/slides/slide12.xml><?xml version="1.0" encoding="utf-8"?>
+<p:sld xmlns:a="http://schemas.openxmlformats.org/drawingml/2006/main" xmlns:r="http://schemas.openxmlformats.org/officeDocument/2006/relationships" xmlns:p="http://schemas.openxmlformats.org/presentationml/2006/main" show="0">
+  <p:cSld>
+    <p:spTree>
+      <p:nvGrpSpPr>
+        <p:cNvPr id="1" name="Shape 323"/>
+        <p:cNvGrpSpPr/>
+        <p:nvPr/>
+      </p:nvGrpSpPr>
+      <p:grpSpPr>
+        <a:xfrm>
+          <a:off x="0" y="0"/>
+          <a:ext cx="0" cy="0"/>
+          <a:chOff x="0" y="0"/>
+          <a:chExt cx="0" cy="0"/>
+        </a:xfrm>
+      </p:grpSpPr>
+      <p:sp>
+        <p:nvSpPr>
+          <p:cNvPr id="324" name="Google Shape;324;p47"/>
+          <p:cNvSpPr txBox="1">
+            <a:spLocks noGrp="1"/>
+          </p:cNvSpPr>
+          <p:nvPr>
+            <p:ph type="title"/>
+          </p:nvPr>
+        </p:nvSpPr>
+        <p:spPr>
+          <a:xfrm>
+            <a:off x="226208" y="1"/>
+            <a:ext cx="8520600" cy="464980"/>
+          </a:xfrm>
+          <a:prstGeom prst="rect">
+            <a:avLst/>
+          </a:prstGeom>
+        </p:spPr>
+        <p:txBody>
+          <a:bodyPr spcFirstLastPara="1" wrap="square" lIns="91425" tIns="91425" rIns="91425" bIns="91425" anchor="t" anchorCtr="0">
+            <a:noAutofit/>
+          </a:bodyPr>
+          <a:lstStyle/>
+          <a:p>
+            <a:pPr marL="0" lvl="0" indent="0" algn="ctr" rtl="0">
+              <a:spcBef>
+                <a:spcPts val="0"/>
+              </a:spcBef>
+              <a:spcAft>
+                <a:spcPts val="0"/>
+              </a:spcAft>
+              <a:buNone/>
+            </a:pPr>
+            <a:r>
+              <a:rPr lang="en-US" dirty="0"/>
+              <a:t>Use </a:t>
+            </a:r>
+            <a:r>
+              <a:rPr lang="en-US" sz="2400" dirty="0"/>
+              <a:t>Assigned</a:t>
+            </a:r>
+            <a:r>
+              <a:rPr lang="en-US" dirty="0"/>
+              <a:t> Seat</a:t>
+            </a:r>
+            <a:endParaRPr dirty="0"/>
+          </a:p>
+        </p:txBody>
+      </p:sp>
+      <p:sp>
+        <p:nvSpPr>
+          <p:cNvPr id="326" name="Google Shape;326;p47"/>
+          <p:cNvSpPr txBox="1">
+            <a:spLocks noGrp="1"/>
+          </p:cNvSpPr>
+          <p:nvPr>
+            <p:ph type="sldNum" idx="12"/>
+          </p:nvPr>
+        </p:nvSpPr>
+        <p:spPr>
+          <a:xfrm>
+            <a:off x="8472458" y="4663217"/>
+            <a:ext cx="548700" cy="393600"/>
+          </a:xfrm>
+          <a:prstGeom prst="rect">
+            <a:avLst/>
+          </a:prstGeom>
+        </p:spPr>
+        <p:txBody>
+          <a:bodyPr spcFirstLastPara="1" wrap="square" lIns="91425" tIns="91425" rIns="91425" bIns="91425" anchor="ctr" anchorCtr="0">
+            <a:noAutofit/>
+          </a:bodyPr>
+          <a:lstStyle/>
+          <a:p>
+            <a:pPr marL="0" lvl="0" indent="0" algn="r" rtl="0">
+              <a:spcBef>
+                <a:spcPts val="0"/>
+              </a:spcBef>
+              <a:spcAft>
+                <a:spcPts val="0"/>
+              </a:spcAft>
+              <a:buNone/>
+            </a:pPr>
+            <a:fld id="{00000000-1234-1234-1234-123412341234}" type="slidenum">
+              <a:rPr lang="en"/>
+              <a:t>12</a:t>
+            </a:fld>
+            <a:endParaRPr/>
+          </a:p>
+        </p:txBody>
+      </p:sp>
+      <p:pic>
+        <p:nvPicPr>
+          <p:cNvPr id="4" name="Picture 3">
+            <a:extLst>
+              <a:ext uri="{FF2B5EF4-FFF2-40B4-BE49-F238E27FC236}">
+                <a16:creationId xmlns:a16="http://schemas.microsoft.com/office/drawing/2014/main" id="{DCD752B9-EFAE-AFC1-7D39-6763B89DE8D3}"/>
+              </a:ext>
+            </a:extLst>
+          </p:cNvPr>
+          <p:cNvPicPr>
+            <a:picLocks noChangeAspect="1"/>
+          </p:cNvPicPr>
+          <p:nvPr/>
+        </p:nvPicPr>
+        <p:blipFill>
+          <a:blip r:embed="rId3"/>
+          <a:stretch>
+            <a:fillRect/>
+          </a:stretch>
+        </p:blipFill>
+        <p:spPr>
+          <a:xfrm>
+            <a:off x="0" y="652130"/>
+            <a:ext cx="9144000" cy="4491369"/>
+          </a:xfrm>
+          <a:prstGeom prst="rect">
+            <a:avLst/>
+          </a:prstGeom>
+        </p:spPr>
+      </p:pic>
+    </p:spTree>
+    <p:extLst>
+      <p:ext uri="{BB962C8B-B14F-4D97-AF65-F5344CB8AC3E}">
+        <p14:creationId xmlns:p14="http://schemas.microsoft.com/office/powerpoint/2010/main" val="3365057756"/>
+      </p:ext>
+    </p:extLst>
+  </p:cSld>
+  <p:clrMapOvr>
+    <a:masterClrMapping/>
+  </p:clrMapOvr>
+</p:sld>
+</file>
+
+<file path=ppt/slides/slide2.xml><?xml version="1.0" encoding="utf-8"?>
+<p:sld xmlns:a="http://schemas.openxmlformats.org/drawingml/2006/main" xmlns:r="http://schemas.openxmlformats.org/officeDocument/2006/relationships" xmlns:p="http://schemas.openxmlformats.org/presentationml/2006/main" show="0">
+  <p:cSld>
+    <p:spTree>
+      <p:nvGrpSpPr>
         <p:cNvPr id="1" name="Shape 323">
           <a:extLst>
             <a:ext uri="{FF2B5EF4-FFF2-40B4-BE49-F238E27FC236}">
@@ -6696,7 +7725,7 @@
             </a:pPr>
             <a:fld id="{00000000-1234-1234-1234-123412341234}" type="slidenum">
               <a:rPr lang="en"/>
-              <a:t>1</a:t>
+              <a:t>2</a:t>
             </a:fld>
             <a:endParaRPr/>
           </a:p>
@@ -7434,1043 +8463,6 @@
         <p14:creationId xmlns:p14="http://schemas.microsoft.com/office/powerpoint/2010/main" val="674272117"/>
       </p:ext>
     </p:extLst>
-  </p:cSld>
-  <p:clrMapOvr>
-    <a:masterClrMapping/>
-  </p:clrMapOvr>
-</p:sld>
-</file>
-
-<file path=ppt/slides/slide10.xml><?xml version="1.0" encoding="utf-8"?>
-<p:sld xmlns:a="http://schemas.openxmlformats.org/drawingml/2006/main" xmlns:r="http://schemas.openxmlformats.org/officeDocument/2006/relationships" xmlns:p="http://schemas.openxmlformats.org/presentationml/2006/main" show="0">
-  <p:cSld>
-    <p:spTree>
-      <p:nvGrpSpPr>
-        <p:cNvPr id="1" name="Shape 323"/>
-        <p:cNvGrpSpPr/>
-        <p:nvPr/>
-      </p:nvGrpSpPr>
-      <p:grpSpPr>
-        <a:xfrm>
-          <a:off x="0" y="0"/>
-          <a:ext cx="0" cy="0"/>
-          <a:chOff x="0" y="0"/>
-          <a:chExt cx="0" cy="0"/>
-        </a:xfrm>
-      </p:grpSpPr>
-      <p:sp>
-        <p:nvSpPr>
-          <p:cNvPr id="324" name="Google Shape;324;p47"/>
-          <p:cNvSpPr txBox="1">
-            <a:spLocks noGrp="1"/>
-          </p:cNvSpPr>
-          <p:nvPr>
-            <p:ph type="title"/>
-          </p:nvPr>
-        </p:nvSpPr>
-        <p:spPr>
-          <a:xfrm>
-            <a:off x="226208" y="1"/>
-            <a:ext cx="8520600" cy="464980"/>
-          </a:xfrm>
-          <a:prstGeom prst="rect">
-            <a:avLst/>
-          </a:prstGeom>
-        </p:spPr>
-        <p:txBody>
-          <a:bodyPr spcFirstLastPara="1" wrap="square" lIns="91425" tIns="91425" rIns="91425" bIns="91425" anchor="t" anchorCtr="0">
-            <a:noAutofit/>
-          </a:bodyPr>
-          <a:lstStyle/>
-          <a:p>
-            <a:pPr marL="0" lvl="0" indent="0" algn="ctr" rtl="0">
-              <a:spcBef>
-                <a:spcPts val="0"/>
-              </a:spcBef>
-              <a:spcAft>
-                <a:spcPts val="0"/>
-              </a:spcAft>
-              <a:buNone/>
-            </a:pPr>
-            <a:r>
-              <a:rPr lang="en-US" dirty="0"/>
-              <a:t>Use </a:t>
-            </a:r>
-            <a:r>
-              <a:rPr lang="en-US" sz="2400" dirty="0"/>
-              <a:t>Assigned</a:t>
-            </a:r>
-            <a:r>
-              <a:rPr lang="en-US" dirty="0"/>
-              <a:t> Seat</a:t>
-            </a:r>
-            <a:endParaRPr dirty="0"/>
-          </a:p>
-        </p:txBody>
-      </p:sp>
-      <p:sp>
-        <p:nvSpPr>
-          <p:cNvPr id="326" name="Google Shape;326;p47"/>
-          <p:cNvSpPr txBox="1">
-            <a:spLocks noGrp="1"/>
-          </p:cNvSpPr>
-          <p:nvPr>
-            <p:ph type="sldNum" idx="12"/>
-          </p:nvPr>
-        </p:nvSpPr>
-        <p:spPr>
-          <a:xfrm>
-            <a:off x="8472458" y="4663217"/>
-            <a:ext cx="548700" cy="393600"/>
-          </a:xfrm>
-          <a:prstGeom prst="rect">
-            <a:avLst/>
-          </a:prstGeom>
-        </p:spPr>
-        <p:txBody>
-          <a:bodyPr spcFirstLastPara="1" wrap="square" lIns="91425" tIns="91425" rIns="91425" bIns="91425" anchor="ctr" anchorCtr="0">
-            <a:noAutofit/>
-          </a:bodyPr>
-          <a:lstStyle/>
-          <a:p>
-            <a:pPr marL="0" lvl="0" indent="0" algn="r" rtl="0">
-              <a:spcBef>
-                <a:spcPts val="0"/>
-              </a:spcBef>
-              <a:spcAft>
-                <a:spcPts val="0"/>
-              </a:spcAft>
-              <a:buNone/>
-            </a:pPr>
-            <a:fld id="{00000000-1234-1234-1234-123412341234}" type="slidenum">
-              <a:rPr lang="en"/>
-              <a:t>10</a:t>
-            </a:fld>
-            <a:endParaRPr/>
-          </a:p>
-        </p:txBody>
-      </p:sp>
-      <p:pic>
-        <p:nvPicPr>
-          <p:cNvPr id="6" name="Picture 5">
-            <a:extLst>
-              <a:ext uri="{FF2B5EF4-FFF2-40B4-BE49-F238E27FC236}">
-                <a16:creationId xmlns:a16="http://schemas.microsoft.com/office/drawing/2014/main" id="{DED32793-7C09-E3A3-94E5-B5D46727A1D0}"/>
-              </a:ext>
-            </a:extLst>
-          </p:cNvPr>
-          <p:cNvPicPr>
-            <a:picLocks noChangeAspect="1"/>
-          </p:cNvPicPr>
-          <p:nvPr/>
-        </p:nvPicPr>
-        <p:blipFill>
-          <a:blip r:embed="rId3"/>
-          <a:stretch>
-            <a:fillRect/>
-          </a:stretch>
-        </p:blipFill>
-        <p:spPr>
-          <a:xfrm>
-            <a:off x="-1" y="551663"/>
-            <a:ext cx="9144001" cy="4591837"/>
-          </a:xfrm>
-          <a:prstGeom prst="rect">
-            <a:avLst/>
-          </a:prstGeom>
-        </p:spPr>
-      </p:pic>
-    </p:spTree>
-    <p:extLst>
-      <p:ext uri="{BB962C8B-B14F-4D97-AF65-F5344CB8AC3E}">
-        <p14:creationId xmlns:p14="http://schemas.microsoft.com/office/powerpoint/2010/main" val="4226348449"/>
-      </p:ext>
-    </p:extLst>
-  </p:cSld>
-  <p:clrMapOvr>
-    <a:masterClrMapping/>
-  </p:clrMapOvr>
-</p:sld>
-</file>
-
-<file path=ppt/slides/slide11.xml><?xml version="1.0" encoding="utf-8"?>
-<p:sld xmlns:a="http://schemas.openxmlformats.org/drawingml/2006/main" xmlns:r="http://schemas.openxmlformats.org/officeDocument/2006/relationships" xmlns:p="http://schemas.openxmlformats.org/presentationml/2006/main" show="0">
-  <p:cSld>
-    <p:spTree>
-      <p:nvGrpSpPr>
-        <p:cNvPr id="1" name="Shape 323"/>
-        <p:cNvGrpSpPr/>
-        <p:nvPr/>
-      </p:nvGrpSpPr>
-      <p:grpSpPr>
-        <a:xfrm>
-          <a:off x="0" y="0"/>
-          <a:ext cx="0" cy="0"/>
-          <a:chOff x="0" y="0"/>
-          <a:chExt cx="0" cy="0"/>
-        </a:xfrm>
-      </p:grpSpPr>
-      <p:sp>
-        <p:nvSpPr>
-          <p:cNvPr id="324" name="Google Shape;324;p47"/>
-          <p:cNvSpPr txBox="1">
-            <a:spLocks noGrp="1"/>
-          </p:cNvSpPr>
-          <p:nvPr>
-            <p:ph type="title"/>
-          </p:nvPr>
-        </p:nvSpPr>
-        <p:spPr>
-          <a:xfrm>
-            <a:off x="226208" y="1"/>
-            <a:ext cx="8520600" cy="464980"/>
-          </a:xfrm>
-          <a:prstGeom prst="rect">
-            <a:avLst/>
-          </a:prstGeom>
-        </p:spPr>
-        <p:txBody>
-          <a:bodyPr spcFirstLastPara="1" wrap="square" lIns="91425" tIns="91425" rIns="91425" bIns="91425" anchor="t" anchorCtr="0">
-            <a:noAutofit/>
-          </a:bodyPr>
-          <a:lstStyle/>
-          <a:p>
-            <a:pPr marL="0" lvl="0" indent="0" algn="ctr" rtl="0">
-              <a:spcBef>
-                <a:spcPts val="0"/>
-              </a:spcBef>
-              <a:spcAft>
-                <a:spcPts val="0"/>
-              </a:spcAft>
-              <a:buNone/>
-            </a:pPr>
-            <a:r>
-              <a:rPr lang="en-US" dirty="0"/>
-              <a:t>Use </a:t>
-            </a:r>
-            <a:r>
-              <a:rPr lang="en-US" sz="2400" dirty="0"/>
-              <a:t>Assigned</a:t>
-            </a:r>
-            <a:r>
-              <a:rPr lang="en-US" dirty="0"/>
-              <a:t> Seat</a:t>
-            </a:r>
-            <a:endParaRPr dirty="0"/>
-          </a:p>
-        </p:txBody>
-      </p:sp>
-      <p:sp>
-        <p:nvSpPr>
-          <p:cNvPr id="326" name="Google Shape;326;p47"/>
-          <p:cNvSpPr txBox="1">
-            <a:spLocks noGrp="1"/>
-          </p:cNvSpPr>
-          <p:nvPr>
-            <p:ph type="sldNum" idx="12"/>
-          </p:nvPr>
-        </p:nvSpPr>
-        <p:spPr>
-          <a:xfrm>
-            <a:off x="8472458" y="4663217"/>
-            <a:ext cx="548700" cy="393600"/>
-          </a:xfrm>
-          <a:prstGeom prst="rect">
-            <a:avLst/>
-          </a:prstGeom>
-        </p:spPr>
-        <p:txBody>
-          <a:bodyPr spcFirstLastPara="1" wrap="square" lIns="91425" tIns="91425" rIns="91425" bIns="91425" anchor="ctr" anchorCtr="0">
-            <a:noAutofit/>
-          </a:bodyPr>
-          <a:lstStyle/>
-          <a:p>
-            <a:pPr marL="0" lvl="0" indent="0" algn="r" rtl="0">
-              <a:spcBef>
-                <a:spcPts val="0"/>
-              </a:spcBef>
-              <a:spcAft>
-                <a:spcPts val="0"/>
-              </a:spcAft>
-              <a:buNone/>
-            </a:pPr>
-            <a:fld id="{00000000-1234-1234-1234-123412341234}" type="slidenum">
-              <a:rPr lang="en"/>
-              <a:t>11</a:t>
-            </a:fld>
-            <a:endParaRPr/>
-          </a:p>
-        </p:txBody>
-      </p:sp>
-      <p:pic>
-        <p:nvPicPr>
-          <p:cNvPr id="3" name="Picture 2">
-            <a:extLst>
-              <a:ext uri="{FF2B5EF4-FFF2-40B4-BE49-F238E27FC236}">
-                <a16:creationId xmlns:a16="http://schemas.microsoft.com/office/drawing/2014/main" id="{92DE4AAC-70FE-A114-5258-F5B22EDDED45}"/>
-              </a:ext>
-            </a:extLst>
-          </p:cNvPr>
-          <p:cNvPicPr>
-            <a:picLocks noChangeAspect="1"/>
-          </p:cNvPicPr>
-          <p:nvPr/>
-        </p:nvPicPr>
-        <p:blipFill>
-          <a:blip r:embed="rId3"/>
-          <a:stretch>
-            <a:fillRect/>
-          </a:stretch>
-        </p:blipFill>
-        <p:spPr>
-          <a:xfrm>
-            <a:off x="0" y="716280"/>
-            <a:ext cx="9144000" cy="4427218"/>
-          </a:xfrm>
-          <a:prstGeom prst="rect">
-            <a:avLst/>
-          </a:prstGeom>
-        </p:spPr>
-      </p:pic>
-    </p:spTree>
-    <p:extLst>
-      <p:ext uri="{BB962C8B-B14F-4D97-AF65-F5344CB8AC3E}">
-        <p14:creationId xmlns:p14="http://schemas.microsoft.com/office/powerpoint/2010/main" val="1976403023"/>
-      </p:ext>
-    </p:extLst>
-  </p:cSld>
-  <p:clrMapOvr>
-    <a:masterClrMapping/>
-  </p:clrMapOvr>
-</p:sld>
-</file>
-
-<file path=ppt/slides/slide12.xml><?xml version="1.0" encoding="utf-8"?>
-<p:sld xmlns:a="http://schemas.openxmlformats.org/drawingml/2006/main" xmlns:r="http://schemas.openxmlformats.org/officeDocument/2006/relationships" xmlns:p="http://schemas.openxmlformats.org/presentationml/2006/main" show="0">
-  <p:cSld>
-    <p:spTree>
-      <p:nvGrpSpPr>
-        <p:cNvPr id="1" name="Shape 323"/>
-        <p:cNvGrpSpPr/>
-        <p:nvPr/>
-      </p:nvGrpSpPr>
-      <p:grpSpPr>
-        <a:xfrm>
-          <a:off x="0" y="0"/>
-          <a:ext cx="0" cy="0"/>
-          <a:chOff x="0" y="0"/>
-          <a:chExt cx="0" cy="0"/>
-        </a:xfrm>
-      </p:grpSpPr>
-      <p:sp>
-        <p:nvSpPr>
-          <p:cNvPr id="324" name="Google Shape;324;p47"/>
-          <p:cNvSpPr txBox="1">
-            <a:spLocks noGrp="1"/>
-          </p:cNvSpPr>
-          <p:nvPr>
-            <p:ph type="title"/>
-          </p:nvPr>
-        </p:nvSpPr>
-        <p:spPr>
-          <a:xfrm>
-            <a:off x="226208" y="1"/>
-            <a:ext cx="8520600" cy="464980"/>
-          </a:xfrm>
-          <a:prstGeom prst="rect">
-            <a:avLst/>
-          </a:prstGeom>
-        </p:spPr>
-        <p:txBody>
-          <a:bodyPr spcFirstLastPara="1" wrap="square" lIns="91425" tIns="91425" rIns="91425" bIns="91425" anchor="t" anchorCtr="0">
-            <a:noAutofit/>
-          </a:bodyPr>
-          <a:lstStyle/>
-          <a:p>
-            <a:pPr marL="0" lvl="0" indent="0" algn="ctr" rtl="0">
-              <a:spcBef>
-                <a:spcPts val="0"/>
-              </a:spcBef>
-              <a:spcAft>
-                <a:spcPts val="0"/>
-              </a:spcAft>
-              <a:buNone/>
-            </a:pPr>
-            <a:r>
-              <a:rPr lang="en-US" dirty="0"/>
-              <a:t>Use </a:t>
-            </a:r>
-            <a:r>
-              <a:rPr lang="en-US" sz="2400" dirty="0"/>
-              <a:t>Assigned</a:t>
-            </a:r>
-            <a:r>
-              <a:rPr lang="en-US" dirty="0"/>
-              <a:t> Seat</a:t>
-            </a:r>
-            <a:endParaRPr dirty="0"/>
-          </a:p>
-        </p:txBody>
-      </p:sp>
-      <p:sp>
-        <p:nvSpPr>
-          <p:cNvPr id="326" name="Google Shape;326;p47"/>
-          <p:cNvSpPr txBox="1">
-            <a:spLocks noGrp="1"/>
-          </p:cNvSpPr>
-          <p:nvPr>
-            <p:ph type="sldNum" idx="12"/>
-          </p:nvPr>
-        </p:nvSpPr>
-        <p:spPr>
-          <a:xfrm>
-            <a:off x="8472458" y="4663217"/>
-            <a:ext cx="548700" cy="393600"/>
-          </a:xfrm>
-          <a:prstGeom prst="rect">
-            <a:avLst/>
-          </a:prstGeom>
-        </p:spPr>
-        <p:txBody>
-          <a:bodyPr spcFirstLastPara="1" wrap="square" lIns="91425" tIns="91425" rIns="91425" bIns="91425" anchor="ctr" anchorCtr="0">
-            <a:noAutofit/>
-          </a:bodyPr>
-          <a:lstStyle/>
-          <a:p>
-            <a:pPr marL="0" lvl="0" indent="0" algn="r" rtl="0">
-              <a:spcBef>
-                <a:spcPts val="0"/>
-              </a:spcBef>
-              <a:spcAft>
-                <a:spcPts val="0"/>
-              </a:spcAft>
-              <a:buNone/>
-            </a:pPr>
-            <a:fld id="{00000000-1234-1234-1234-123412341234}" type="slidenum">
-              <a:rPr lang="en"/>
-              <a:t>12</a:t>
-            </a:fld>
-            <a:endParaRPr/>
-          </a:p>
-        </p:txBody>
-      </p:sp>
-      <p:pic>
-        <p:nvPicPr>
-          <p:cNvPr id="4" name="Picture 3">
-            <a:extLst>
-              <a:ext uri="{FF2B5EF4-FFF2-40B4-BE49-F238E27FC236}">
-                <a16:creationId xmlns:a16="http://schemas.microsoft.com/office/drawing/2014/main" id="{DCD752B9-EFAE-AFC1-7D39-6763B89DE8D3}"/>
-              </a:ext>
-            </a:extLst>
-          </p:cNvPr>
-          <p:cNvPicPr>
-            <a:picLocks noChangeAspect="1"/>
-          </p:cNvPicPr>
-          <p:nvPr/>
-        </p:nvPicPr>
-        <p:blipFill>
-          <a:blip r:embed="rId3"/>
-          <a:stretch>
-            <a:fillRect/>
-          </a:stretch>
-        </p:blipFill>
-        <p:spPr>
-          <a:xfrm>
-            <a:off x="0" y="652130"/>
-            <a:ext cx="9144000" cy="4491369"/>
-          </a:xfrm>
-          <a:prstGeom prst="rect">
-            <a:avLst/>
-          </a:prstGeom>
-        </p:spPr>
-      </p:pic>
-    </p:spTree>
-    <p:extLst>
-      <p:ext uri="{BB962C8B-B14F-4D97-AF65-F5344CB8AC3E}">
-        <p14:creationId xmlns:p14="http://schemas.microsoft.com/office/powerpoint/2010/main" val="3365057756"/>
-      </p:ext>
-    </p:extLst>
-  </p:cSld>
-  <p:clrMapOvr>
-    <a:masterClrMapping/>
-  </p:clrMapOvr>
-</p:sld>
-</file>
-
-<file path=ppt/slides/slide2.xml><?xml version="1.0" encoding="utf-8"?>
-<p:sld xmlns:a="http://schemas.openxmlformats.org/drawingml/2006/main" xmlns:r="http://schemas.openxmlformats.org/officeDocument/2006/relationships" xmlns:p="http://schemas.openxmlformats.org/presentationml/2006/main" show="0">
-  <p:cSld>
-    <p:spTree>
-      <p:nvGrpSpPr>
-        <p:cNvPr id="1" name="Shape 323"/>
-        <p:cNvGrpSpPr/>
-        <p:nvPr/>
-      </p:nvGrpSpPr>
-      <p:grpSpPr>
-        <a:xfrm>
-          <a:off x="0" y="0"/>
-          <a:ext cx="0" cy="0"/>
-          <a:chOff x="0" y="0"/>
-          <a:chExt cx="0" cy="0"/>
-        </a:xfrm>
-      </p:grpSpPr>
-      <p:sp>
-        <p:nvSpPr>
-          <p:cNvPr id="324" name="Google Shape;324;p47"/>
-          <p:cNvSpPr txBox="1">
-            <a:spLocks noGrp="1"/>
-          </p:cNvSpPr>
-          <p:nvPr>
-            <p:ph type="title"/>
-          </p:nvPr>
-        </p:nvSpPr>
-        <p:spPr>
-          <a:xfrm>
-            <a:off x="305858" y="273819"/>
-            <a:ext cx="8520600" cy="623700"/>
-          </a:xfrm>
-          <a:prstGeom prst="rect">
-            <a:avLst/>
-          </a:prstGeom>
-        </p:spPr>
-        <p:txBody>
-          <a:bodyPr spcFirstLastPara="1" wrap="square" lIns="91425" tIns="91425" rIns="91425" bIns="91425" anchor="t" anchorCtr="0">
-            <a:noAutofit/>
-          </a:bodyPr>
-          <a:lstStyle/>
-          <a:p>
-            <a:pPr marL="0" lvl="0" indent="0" algn="ctr" rtl="0">
-              <a:spcBef>
-                <a:spcPts val="0"/>
-              </a:spcBef>
-              <a:spcAft>
-                <a:spcPts val="0"/>
-              </a:spcAft>
-              <a:buNone/>
-            </a:pPr>
-            <a:r>
-              <a:rPr lang="en-US" dirty="0"/>
-              <a:t>GCIS – Software Development and Problem Solving</a:t>
-            </a:r>
-            <a:endParaRPr dirty="0"/>
-          </a:p>
-        </p:txBody>
-      </p:sp>
-      <p:sp>
-        <p:nvSpPr>
-          <p:cNvPr id="325" name="Google Shape;325;p47"/>
-          <p:cNvSpPr txBox="1">
-            <a:spLocks noGrp="1"/>
-          </p:cNvSpPr>
-          <p:nvPr>
-            <p:ph type="body" idx="1"/>
-          </p:nvPr>
-        </p:nvSpPr>
-        <p:spPr>
-          <a:xfrm>
-            <a:off x="-5842" y="1721147"/>
-            <a:ext cx="9149842" cy="1226403"/>
-          </a:xfrm>
-          <a:prstGeom prst="rect">
-            <a:avLst/>
-          </a:prstGeom>
-        </p:spPr>
-        <p:txBody>
-          <a:bodyPr spcFirstLastPara="1" wrap="square" lIns="91425" tIns="91425" rIns="91425" bIns="91425" anchor="ctr" anchorCtr="0">
-            <a:noAutofit/>
-          </a:bodyPr>
-          <a:lstStyle/>
-          <a:p>
-            <a:pPr marL="146050" indent="0" algn="ctr">
-              <a:buNone/>
-            </a:pPr>
-            <a:r>
-              <a:rPr lang="en-US" sz="2400" dirty="0"/>
-              <a:t>Take </a:t>
-            </a:r>
-            <a:r>
-              <a:rPr lang="pl-PL" sz="2400" dirty="0"/>
-              <a:t>Quiz </a:t>
-            </a:r>
-            <a:r>
-              <a:rPr lang="en-US" sz="2400" dirty="0"/>
-              <a:t>1</a:t>
-            </a:r>
-            <a:r>
-              <a:rPr lang="pl-PL" sz="2400" dirty="0"/>
-              <a:t>.</a:t>
-            </a:r>
-            <a:r>
-              <a:rPr lang="en-US" sz="2400" dirty="0"/>
-              <a:t>1</a:t>
-            </a:r>
-            <a:r>
-              <a:rPr lang="pl-PL" sz="2400" dirty="0"/>
-              <a:t>: </a:t>
-            </a:r>
-            <a:r>
-              <a:rPr lang="en-US" sz="2400" dirty="0"/>
-              <a:t>Procedural Programming</a:t>
-            </a:r>
-          </a:p>
-          <a:p>
-            <a:pPr algn="ctr"/>
-            <a:r>
-              <a:rPr lang="en-US" sz="3200" dirty="0">
-                <a:solidFill>
-                  <a:schemeClr val="tx1"/>
-                </a:solidFill>
-              </a:rPr>
-              <a:t>Password - </a:t>
-            </a:r>
-            <a:r>
-              <a:rPr lang="en-US" sz="3200" dirty="0" err="1">
-                <a:solidFill>
-                  <a:schemeClr val="tx1"/>
-                </a:solidFill>
-              </a:rPr>
-              <a:t>proceduralJava</a:t>
-            </a:r>
-            <a:endParaRPr sz="3200" dirty="0">
-              <a:solidFill>
-                <a:schemeClr val="tx1"/>
-              </a:solidFill>
-            </a:endParaRPr>
-          </a:p>
-        </p:txBody>
-      </p:sp>
-      <p:sp>
-        <p:nvSpPr>
-          <p:cNvPr id="326" name="Google Shape;326;p47"/>
-          <p:cNvSpPr txBox="1">
-            <a:spLocks noGrp="1"/>
-          </p:cNvSpPr>
-          <p:nvPr>
-            <p:ph type="sldNum" idx="12"/>
-          </p:nvPr>
-        </p:nvSpPr>
-        <p:spPr>
-          <a:xfrm>
-            <a:off x="8472458" y="4663217"/>
-            <a:ext cx="548700" cy="393600"/>
-          </a:xfrm>
-          <a:prstGeom prst="rect">
-            <a:avLst/>
-          </a:prstGeom>
-        </p:spPr>
-        <p:txBody>
-          <a:bodyPr spcFirstLastPara="1" wrap="square" lIns="91425" tIns="91425" rIns="91425" bIns="91425" anchor="ctr" anchorCtr="0">
-            <a:noAutofit/>
-          </a:bodyPr>
-          <a:lstStyle/>
-          <a:p>
-            <a:pPr marL="0" lvl="0" indent="0" algn="r" rtl="0">
-              <a:spcBef>
-                <a:spcPts val="0"/>
-              </a:spcBef>
-              <a:spcAft>
-                <a:spcPts val="0"/>
-              </a:spcAft>
-              <a:buNone/>
-            </a:pPr>
-            <a:fld id="{00000000-1234-1234-1234-123412341234}" type="slidenum">
-              <a:rPr lang="en"/>
-              <a:t>2</a:t>
-            </a:fld>
-            <a:endParaRPr/>
-          </a:p>
-        </p:txBody>
-      </p:sp>
-      <p:sp>
-        <p:nvSpPr>
-          <p:cNvPr id="2" name="TextBox 1">
-            <a:extLst>
-              <a:ext uri="{FF2B5EF4-FFF2-40B4-BE49-F238E27FC236}">
-                <a16:creationId xmlns:a16="http://schemas.microsoft.com/office/drawing/2014/main" id="{DCC33EBB-1C9D-B9A9-88E6-F3466077417F}"/>
-              </a:ext>
-            </a:extLst>
-          </p:cNvPr>
-          <p:cNvSpPr txBox="1"/>
-          <p:nvPr/>
-        </p:nvSpPr>
-        <p:spPr>
-          <a:xfrm>
-            <a:off x="0" y="1277369"/>
-            <a:ext cx="9144000" cy="307777"/>
-          </a:xfrm>
-          <a:prstGeom prst="rect">
-            <a:avLst/>
-          </a:prstGeom>
-          <a:solidFill>
-            <a:srgbClr val="FFC000"/>
-          </a:solidFill>
-        </p:spPr>
-        <p:txBody>
-          <a:bodyPr wrap="square" rtlCol="0">
-            <a:spAutoFit/>
-          </a:bodyPr>
-          <a:lstStyle/>
-          <a:p>
-            <a:r>
-              <a:rPr lang="en-US" dirty="0"/>
-              <a:t>Quiz</a:t>
-            </a:r>
-          </a:p>
-        </p:txBody>
-      </p:sp>
-      <p:sp>
-        <p:nvSpPr>
-          <p:cNvPr id="3" name="TextBox 2">
-            <a:extLst>
-              <a:ext uri="{FF2B5EF4-FFF2-40B4-BE49-F238E27FC236}">
-                <a16:creationId xmlns:a16="http://schemas.microsoft.com/office/drawing/2014/main" id="{64C19922-6A1B-1404-5104-DC43E4C67861}"/>
-              </a:ext>
-            </a:extLst>
-          </p:cNvPr>
-          <p:cNvSpPr txBox="1"/>
-          <p:nvPr/>
-        </p:nvSpPr>
-        <p:spPr>
-          <a:xfrm>
-            <a:off x="-5842" y="3031063"/>
-            <a:ext cx="9144000" cy="307777"/>
-          </a:xfrm>
-          <a:prstGeom prst="rect">
-            <a:avLst/>
-          </a:prstGeom>
-          <a:solidFill>
-            <a:srgbClr val="FFC000"/>
-          </a:solidFill>
-        </p:spPr>
-        <p:txBody>
-          <a:bodyPr wrap="square" rtlCol="0">
-            <a:spAutoFit/>
-          </a:bodyPr>
-          <a:lstStyle/>
-          <a:p>
-            <a:r>
-              <a:rPr lang="en-US" dirty="0"/>
-              <a:t>Next </a:t>
-            </a:r>
-            <a:r>
-              <a:rPr lang="en-US" dirty="0">
-                <a:sym typeface="Wingdings" panose="05000000000000000000" pitchFamily="2" charset="2"/>
-              </a:rPr>
-              <a:t> </a:t>
-            </a:r>
-            <a:endParaRPr lang="en-US" dirty="0"/>
-          </a:p>
-        </p:txBody>
-      </p:sp>
-      <p:sp>
-        <p:nvSpPr>
-          <p:cNvPr id="4" name="Google Shape;325;p47">
-            <a:extLst>
-              <a:ext uri="{FF2B5EF4-FFF2-40B4-BE49-F238E27FC236}">
-                <a16:creationId xmlns:a16="http://schemas.microsoft.com/office/drawing/2014/main" id="{E455EA58-F56D-AF58-E97D-95A77E0AB6CF}"/>
-              </a:ext>
-            </a:extLst>
-          </p:cNvPr>
-          <p:cNvSpPr txBox="1">
-            <a:spLocks/>
-          </p:cNvSpPr>
-          <p:nvPr/>
-        </p:nvSpPr>
-        <p:spPr>
-          <a:xfrm>
-            <a:off x="-5842" y="3422352"/>
-            <a:ext cx="9149842" cy="1721148"/>
-          </a:xfrm>
-          <a:prstGeom prst="rect">
-            <a:avLst/>
-          </a:prstGeom>
-          <a:noFill/>
-          <a:ln>
-            <a:noFill/>
-          </a:ln>
-        </p:spPr>
-        <p:txBody>
-          <a:bodyPr spcFirstLastPara="1" wrap="square" lIns="91425" tIns="91425" rIns="91425" bIns="91425" anchor="ctr" anchorCtr="0">
-            <a:noAutofit/>
-          </a:bodyPr>
-          <a:lstStyle>
-            <a:defPPr marR="0" lvl="0" algn="l" rtl="0">
-              <a:lnSpc>
-                <a:spcPct val="100000"/>
-              </a:lnSpc>
-              <a:spcBef>
-                <a:spcPts val="0"/>
-              </a:spcBef>
-              <a:spcAft>
-                <a:spcPts val="0"/>
-              </a:spcAft>
-            </a:defPPr>
-            <a:lvl1pPr marL="457200" marR="0" lvl="0" indent="-311150" algn="l" rtl="0">
-              <a:lnSpc>
-                <a:spcPct val="115000"/>
-              </a:lnSpc>
-              <a:spcBef>
-                <a:spcPts val="0"/>
-              </a:spcBef>
-              <a:spcAft>
-                <a:spcPts val="0"/>
-              </a:spcAft>
-              <a:buClr>
-                <a:schemeClr val="dk2"/>
-              </a:buClr>
-              <a:buSzPts val="1300"/>
-              <a:buFont typeface="Roboto"/>
-              <a:buChar char="●"/>
-              <a:defRPr sz="1300" b="0" i="0" u="none" strike="noStrike" cap="none">
-                <a:solidFill>
-                  <a:schemeClr val="dk2"/>
-                </a:solidFill>
-                <a:latin typeface="Roboto"/>
-                <a:ea typeface="Roboto"/>
-                <a:cs typeface="Roboto"/>
-                <a:sym typeface="Roboto"/>
-              </a:defRPr>
-            </a:lvl1pPr>
-            <a:lvl2pPr marL="914400" marR="0" lvl="1" indent="-298450" algn="l" rtl="0">
-              <a:lnSpc>
-                <a:spcPct val="115000"/>
-              </a:lnSpc>
-              <a:spcBef>
-                <a:spcPts val="1600"/>
-              </a:spcBef>
-              <a:spcAft>
-                <a:spcPts val="0"/>
-              </a:spcAft>
-              <a:buClr>
-                <a:schemeClr val="dk2"/>
-              </a:buClr>
-              <a:buSzPts val="1100"/>
-              <a:buFont typeface="Roboto"/>
-              <a:buChar char="○"/>
-              <a:defRPr sz="1100" b="0" i="0" u="none" strike="noStrike" cap="none">
-                <a:solidFill>
-                  <a:schemeClr val="dk2"/>
-                </a:solidFill>
-                <a:latin typeface="Roboto"/>
-                <a:ea typeface="Roboto"/>
-                <a:cs typeface="Roboto"/>
-                <a:sym typeface="Roboto"/>
-              </a:defRPr>
-            </a:lvl2pPr>
-            <a:lvl3pPr marL="1371600" marR="0" lvl="2" indent="-298450" algn="l" rtl="0">
-              <a:lnSpc>
-                <a:spcPct val="115000"/>
-              </a:lnSpc>
-              <a:spcBef>
-                <a:spcPts val="1600"/>
-              </a:spcBef>
-              <a:spcAft>
-                <a:spcPts val="0"/>
-              </a:spcAft>
-              <a:buClr>
-                <a:schemeClr val="dk2"/>
-              </a:buClr>
-              <a:buSzPts val="1100"/>
-              <a:buFont typeface="Roboto"/>
-              <a:buChar char="■"/>
-              <a:defRPr sz="1100" b="0" i="0" u="none" strike="noStrike" cap="none">
-                <a:solidFill>
-                  <a:schemeClr val="dk2"/>
-                </a:solidFill>
-                <a:latin typeface="Roboto"/>
-                <a:ea typeface="Roboto"/>
-                <a:cs typeface="Roboto"/>
-                <a:sym typeface="Roboto"/>
-              </a:defRPr>
-            </a:lvl3pPr>
-            <a:lvl4pPr marL="1828800" marR="0" lvl="3" indent="-298450" algn="l" rtl="0">
-              <a:lnSpc>
-                <a:spcPct val="115000"/>
-              </a:lnSpc>
-              <a:spcBef>
-                <a:spcPts val="1600"/>
-              </a:spcBef>
-              <a:spcAft>
-                <a:spcPts val="0"/>
-              </a:spcAft>
-              <a:buClr>
-                <a:schemeClr val="dk2"/>
-              </a:buClr>
-              <a:buSzPts val="1100"/>
-              <a:buFont typeface="Roboto"/>
-              <a:buChar char="●"/>
-              <a:defRPr sz="1100" b="0" i="0" u="none" strike="noStrike" cap="none">
-                <a:solidFill>
-                  <a:schemeClr val="dk2"/>
-                </a:solidFill>
-                <a:latin typeface="Roboto"/>
-                <a:ea typeface="Roboto"/>
-                <a:cs typeface="Roboto"/>
-                <a:sym typeface="Roboto"/>
-              </a:defRPr>
-            </a:lvl4pPr>
-            <a:lvl5pPr marL="2286000" marR="0" lvl="4" indent="-298450" algn="l" rtl="0">
-              <a:lnSpc>
-                <a:spcPct val="115000"/>
-              </a:lnSpc>
-              <a:spcBef>
-                <a:spcPts val="1600"/>
-              </a:spcBef>
-              <a:spcAft>
-                <a:spcPts val="0"/>
-              </a:spcAft>
-              <a:buClr>
-                <a:schemeClr val="dk2"/>
-              </a:buClr>
-              <a:buSzPts val="1100"/>
-              <a:buFont typeface="Roboto"/>
-              <a:buChar char="○"/>
-              <a:defRPr sz="1100" b="0" i="0" u="none" strike="noStrike" cap="none">
-                <a:solidFill>
-                  <a:schemeClr val="dk2"/>
-                </a:solidFill>
-                <a:latin typeface="Roboto"/>
-                <a:ea typeface="Roboto"/>
-                <a:cs typeface="Roboto"/>
-                <a:sym typeface="Roboto"/>
-              </a:defRPr>
-            </a:lvl5pPr>
-            <a:lvl6pPr marL="2743200" marR="0" lvl="5" indent="-298450" algn="l" rtl="0">
-              <a:lnSpc>
-                <a:spcPct val="115000"/>
-              </a:lnSpc>
-              <a:spcBef>
-                <a:spcPts val="1600"/>
-              </a:spcBef>
-              <a:spcAft>
-                <a:spcPts val="0"/>
-              </a:spcAft>
-              <a:buClr>
-                <a:schemeClr val="dk2"/>
-              </a:buClr>
-              <a:buSzPts val="1100"/>
-              <a:buFont typeface="Roboto"/>
-              <a:buChar char="■"/>
-              <a:defRPr sz="1100" b="0" i="0" u="none" strike="noStrike" cap="none">
-                <a:solidFill>
-                  <a:schemeClr val="dk2"/>
-                </a:solidFill>
-                <a:latin typeface="Roboto"/>
-                <a:ea typeface="Roboto"/>
-                <a:cs typeface="Roboto"/>
-                <a:sym typeface="Roboto"/>
-              </a:defRPr>
-            </a:lvl6pPr>
-            <a:lvl7pPr marL="3200400" marR="0" lvl="6" indent="-298450" algn="l" rtl="0">
-              <a:lnSpc>
-                <a:spcPct val="115000"/>
-              </a:lnSpc>
-              <a:spcBef>
-                <a:spcPts val="1600"/>
-              </a:spcBef>
-              <a:spcAft>
-                <a:spcPts val="0"/>
-              </a:spcAft>
-              <a:buClr>
-                <a:schemeClr val="dk2"/>
-              </a:buClr>
-              <a:buSzPts val="1100"/>
-              <a:buFont typeface="Roboto"/>
-              <a:buChar char="●"/>
-              <a:defRPr sz="1100" b="0" i="0" u="none" strike="noStrike" cap="none">
-                <a:solidFill>
-                  <a:schemeClr val="dk2"/>
-                </a:solidFill>
-                <a:latin typeface="Roboto"/>
-                <a:ea typeface="Roboto"/>
-                <a:cs typeface="Roboto"/>
-                <a:sym typeface="Roboto"/>
-              </a:defRPr>
-            </a:lvl7pPr>
-            <a:lvl8pPr marL="3657600" marR="0" lvl="7" indent="-298450" algn="l" rtl="0">
-              <a:lnSpc>
-                <a:spcPct val="115000"/>
-              </a:lnSpc>
-              <a:spcBef>
-                <a:spcPts val="1600"/>
-              </a:spcBef>
-              <a:spcAft>
-                <a:spcPts val="0"/>
-              </a:spcAft>
-              <a:buClr>
-                <a:schemeClr val="dk2"/>
-              </a:buClr>
-              <a:buSzPts val="1100"/>
-              <a:buFont typeface="Roboto"/>
-              <a:buChar char="○"/>
-              <a:defRPr sz="1100" b="0" i="0" u="none" strike="noStrike" cap="none">
-                <a:solidFill>
-                  <a:schemeClr val="dk2"/>
-                </a:solidFill>
-                <a:latin typeface="Roboto"/>
-                <a:ea typeface="Roboto"/>
-                <a:cs typeface="Roboto"/>
-                <a:sym typeface="Roboto"/>
-              </a:defRPr>
-            </a:lvl8pPr>
-            <a:lvl9pPr marL="4114800" marR="0" lvl="8" indent="-298450" algn="l" rtl="0">
-              <a:lnSpc>
-                <a:spcPct val="115000"/>
-              </a:lnSpc>
-              <a:spcBef>
-                <a:spcPts val="1600"/>
-              </a:spcBef>
-              <a:spcAft>
-                <a:spcPts val="1600"/>
-              </a:spcAft>
-              <a:buClr>
-                <a:schemeClr val="dk2"/>
-              </a:buClr>
-              <a:buSzPts val="1100"/>
-              <a:buFont typeface="Roboto"/>
-              <a:buChar char="■"/>
-              <a:defRPr sz="1100" b="0" i="0" u="none" strike="noStrike" cap="none">
-                <a:solidFill>
-                  <a:schemeClr val="dk2"/>
-                </a:solidFill>
-                <a:latin typeface="Roboto"/>
-                <a:ea typeface="Roboto"/>
-                <a:cs typeface="Roboto"/>
-                <a:sym typeface="Roboto"/>
-              </a:defRPr>
-            </a:lvl9pPr>
-          </a:lstStyle>
-          <a:p>
-            <a:pPr marL="0" indent="0">
-              <a:spcAft>
-                <a:spcPts val="1600"/>
-              </a:spcAft>
-              <a:buNone/>
-            </a:pPr>
-            <a:r>
-              <a:rPr lang="en-US" sz="2800" dirty="0"/>
-              <a:t>After completing the Quiz </a:t>
-            </a:r>
-          </a:p>
-          <a:p>
-            <a:pPr marL="342900" indent="-342900">
-              <a:spcAft>
-                <a:spcPts val="1600"/>
-              </a:spcAft>
-            </a:pPr>
-            <a:r>
-              <a:rPr lang="en-US" sz="2400" dirty="0"/>
-              <a:t>Clone/Pull Unit1 – git hub classroom repo for class activities</a:t>
-            </a:r>
-            <a:endParaRPr lang="en-US" sz="2400" dirty="0">
-              <a:solidFill>
-                <a:schemeClr val="tx1"/>
-              </a:solidFill>
-            </a:endParaRPr>
-          </a:p>
-        </p:txBody>
-      </p:sp>
-    </p:spTree>
   </p:cSld>
   <p:clrMapOvr>
     <a:masterClrMapping/>

--- a/Presentation/Announcement.pptx
+++ b/Presentation/Announcement.pptx
@@ -8,8 +8,8 @@
     <p:notesMasterId r:id="rId14"/>
   </p:notesMasterIdLst>
   <p:sldIdLst>
-    <p:sldId id="276" r:id="rId2"/>
-    <p:sldId id="286" r:id="rId3"/>
+    <p:sldId id="286" r:id="rId2"/>
+    <p:sldId id="276" r:id="rId3"/>
     <p:sldId id="278" r:id="rId4"/>
     <p:sldId id="281" r:id="rId5"/>
     <p:sldId id="287" r:id="rId6"/>
@@ -739,7 +739,13 @@
   <p:cSld>
     <p:spTree>
       <p:nvGrpSpPr>
-        <p:cNvPr id="1" name="Shape 320"/>
+        <p:cNvPr id="1" name="Shape 320">
+          <a:extLst>
+            <a:ext uri="{FF2B5EF4-FFF2-40B4-BE49-F238E27FC236}">
+              <a16:creationId xmlns:a16="http://schemas.microsoft.com/office/drawing/2014/main" id="{5E82D901-7A14-0382-4365-722182C687A8}"/>
+            </a:ext>
+          </a:extLst>
+        </p:cNvPr>
         <p:cNvGrpSpPr/>
         <p:nvPr/>
       </p:nvGrpSpPr>
@@ -753,7 +759,13 @@
       </p:grpSpPr>
       <p:sp>
         <p:nvSpPr>
-          <p:cNvPr id="321" name="Google Shape;321;g8f52c9b70a_3_0:notes"/>
+          <p:cNvPr id="321" name="Google Shape;321;g8f52c9b70a_3_0:notes">
+            <a:extLst>
+              <a:ext uri="{FF2B5EF4-FFF2-40B4-BE49-F238E27FC236}">
+                <a16:creationId xmlns:a16="http://schemas.microsoft.com/office/drawing/2014/main" id="{B8D16220-AF50-7601-71A9-4952749D32CB}"/>
+              </a:ext>
+            </a:extLst>
+          </p:cNvPr>
           <p:cNvSpPr>
             <a:spLocks noGrp="1" noRot="1" noChangeAspect="1"/>
           </p:cNvSpPr>
@@ -794,7 +806,13 @@
       </p:sp>
       <p:sp>
         <p:nvSpPr>
-          <p:cNvPr id="322" name="Google Shape;322;g8f52c9b70a_3_0:notes"/>
+          <p:cNvPr id="322" name="Google Shape;322;g8f52c9b70a_3_0:notes">
+            <a:extLst>
+              <a:ext uri="{FF2B5EF4-FFF2-40B4-BE49-F238E27FC236}">
+                <a16:creationId xmlns:a16="http://schemas.microsoft.com/office/drawing/2014/main" id="{AEA302D2-52D7-97D7-BF6C-781234E92D43}"/>
+              </a:ext>
+            </a:extLst>
+          </p:cNvPr>
           <p:cNvSpPr txBox="1">
             <a:spLocks noGrp="1"/>
           </p:cNvSpPr>
@@ -825,6 +843,11 @@
         </p:txBody>
       </p:sp>
     </p:spTree>
+    <p:extLst>
+      <p:ext uri="{BB962C8B-B14F-4D97-AF65-F5344CB8AC3E}">
+        <p14:creationId xmlns:p14="http://schemas.microsoft.com/office/powerpoint/2010/main" val="2483524941"/>
+      </p:ext>
+    </p:extLst>
   </p:cSld>
   <p:clrMapOvr>
     <a:masterClrMapping/>
@@ -1146,13 +1169,7 @@
   <p:cSld>
     <p:spTree>
       <p:nvGrpSpPr>
-        <p:cNvPr id="1" name="Shape 320">
-          <a:extLst>
-            <a:ext uri="{FF2B5EF4-FFF2-40B4-BE49-F238E27FC236}">
-              <a16:creationId xmlns:a16="http://schemas.microsoft.com/office/drawing/2014/main" id="{5E82D901-7A14-0382-4365-722182C687A8}"/>
-            </a:ext>
-          </a:extLst>
-        </p:cNvPr>
+        <p:cNvPr id="1" name="Shape 320"/>
         <p:cNvGrpSpPr/>
         <p:nvPr/>
       </p:nvGrpSpPr>
@@ -1166,13 +1183,7 @@
       </p:grpSpPr>
       <p:sp>
         <p:nvSpPr>
-          <p:cNvPr id="321" name="Google Shape;321;g8f52c9b70a_3_0:notes">
-            <a:extLst>
-              <a:ext uri="{FF2B5EF4-FFF2-40B4-BE49-F238E27FC236}">
-                <a16:creationId xmlns:a16="http://schemas.microsoft.com/office/drawing/2014/main" id="{B8D16220-AF50-7601-71A9-4952749D32CB}"/>
-              </a:ext>
-            </a:extLst>
-          </p:cNvPr>
+          <p:cNvPr id="321" name="Google Shape;321;g8f52c9b70a_3_0:notes"/>
           <p:cNvSpPr>
             <a:spLocks noGrp="1" noRot="1" noChangeAspect="1"/>
           </p:cNvSpPr>
@@ -1213,13 +1224,7 @@
       </p:sp>
       <p:sp>
         <p:nvSpPr>
-          <p:cNvPr id="322" name="Google Shape;322;g8f52c9b70a_3_0:notes">
-            <a:extLst>
-              <a:ext uri="{FF2B5EF4-FFF2-40B4-BE49-F238E27FC236}">
-                <a16:creationId xmlns:a16="http://schemas.microsoft.com/office/drawing/2014/main" id="{AEA302D2-52D7-97D7-BF6C-781234E92D43}"/>
-              </a:ext>
-            </a:extLst>
-          </p:cNvPr>
+          <p:cNvPr id="322" name="Google Shape;322;g8f52c9b70a_3_0:notes"/>
           <p:cNvSpPr txBox="1">
             <a:spLocks noGrp="1"/>
           </p:cNvSpPr>
@@ -1250,11 +1255,6 @@
         </p:txBody>
       </p:sp>
     </p:spTree>
-    <p:extLst>
-      <p:ext uri="{BB962C8B-B14F-4D97-AF65-F5344CB8AC3E}">
-        <p14:creationId xmlns:p14="http://schemas.microsoft.com/office/powerpoint/2010/main" val="2483524941"/>
-      </p:ext>
-    </p:extLst>
   </p:cSld>
   <p:clrMapOvr>
     <a:masterClrMapping/>
@@ -6529,6 +6529,1384 @@
   <p:cSld>
     <p:spTree>
       <p:nvGrpSpPr>
+        <p:cNvPr id="1" name="Shape 323">
+          <a:extLst>
+            <a:ext uri="{FF2B5EF4-FFF2-40B4-BE49-F238E27FC236}">
+              <a16:creationId xmlns:a16="http://schemas.microsoft.com/office/drawing/2014/main" id="{19512066-5980-8A8B-BE30-C4FB3AC72235}"/>
+            </a:ext>
+          </a:extLst>
+        </p:cNvPr>
+        <p:cNvGrpSpPr/>
+        <p:nvPr/>
+      </p:nvGrpSpPr>
+      <p:grpSpPr>
+        <a:xfrm>
+          <a:off x="0" y="0"/>
+          <a:ext cx="0" cy="0"/>
+          <a:chOff x="0" y="0"/>
+          <a:chExt cx="0" cy="0"/>
+        </a:xfrm>
+      </p:grpSpPr>
+      <p:sp>
+        <p:nvSpPr>
+          <p:cNvPr id="324" name="Google Shape;324;p47">
+            <a:extLst>
+              <a:ext uri="{FF2B5EF4-FFF2-40B4-BE49-F238E27FC236}">
+                <a16:creationId xmlns:a16="http://schemas.microsoft.com/office/drawing/2014/main" id="{CDF56279-13BE-3C44-BBEF-E7DC5D1E88D2}"/>
+              </a:ext>
+            </a:extLst>
+          </p:cNvPr>
+          <p:cNvSpPr txBox="1">
+            <a:spLocks noGrp="1"/>
+          </p:cNvSpPr>
+          <p:nvPr>
+            <p:ph type="title"/>
+          </p:nvPr>
+        </p:nvSpPr>
+        <p:spPr>
+          <a:xfrm>
+            <a:off x="300016" y="269197"/>
+            <a:ext cx="8520600" cy="623700"/>
+          </a:xfrm>
+          <a:prstGeom prst="rect">
+            <a:avLst/>
+          </a:prstGeom>
+        </p:spPr>
+        <p:txBody>
+          <a:bodyPr spcFirstLastPara="1" wrap="square" lIns="91425" tIns="91425" rIns="91425" bIns="91425" anchor="t" anchorCtr="0">
+            <a:noAutofit/>
+          </a:bodyPr>
+          <a:lstStyle/>
+          <a:p>
+            <a:pPr marL="0" lvl="0" indent="0" algn="ctr" rtl="0">
+              <a:spcBef>
+                <a:spcPts val="0"/>
+              </a:spcBef>
+              <a:spcAft>
+                <a:spcPts val="0"/>
+              </a:spcAft>
+              <a:buNone/>
+            </a:pPr>
+            <a:r>
+              <a:rPr lang="en-US" dirty="0"/>
+              <a:t>GCIS – Software Development and Problem Solving</a:t>
+            </a:r>
+            <a:endParaRPr dirty="0"/>
+          </a:p>
+        </p:txBody>
+      </p:sp>
+      <p:sp>
+        <p:nvSpPr>
+          <p:cNvPr id="325" name="Google Shape;325;p47">
+            <a:extLst>
+              <a:ext uri="{FF2B5EF4-FFF2-40B4-BE49-F238E27FC236}">
+                <a16:creationId xmlns:a16="http://schemas.microsoft.com/office/drawing/2014/main" id="{5A9661D1-8430-BF80-279A-41B28CA04273}"/>
+              </a:ext>
+            </a:extLst>
+          </p:cNvPr>
+          <p:cNvSpPr txBox="1">
+            <a:spLocks noGrp="1"/>
+          </p:cNvSpPr>
+          <p:nvPr>
+            <p:ph type="body" idx="1"/>
+          </p:nvPr>
+        </p:nvSpPr>
+        <p:spPr>
+          <a:xfrm>
+            <a:off x="91445" y="1758316"/>
+            <a:ext cx="4000496" cy="1378401"/>
+          </a:xfrm>
+          <a:prstGeom prst="rect">
+            <a:avLst/>
+          </a:prstGeom>
+        </p:spPr>
+        <p:txBody>
+          <a:bodyPr spcFirstLastPara="1" wrap="square" lIns="91425" tIns="91425" rIns="91425" bIns="91425" anchor="ctr" anchorCtr="0">
+            <a:noAutofit/>
+          </a:bodyPr>
+          <a:lstStyle/>
+          <a:p>
+            <a:pPr marL="146050" indent="0">
+              <a:buNone/>
+            </a:pPr>
+            <a:r>
+              <a:rPr lang="en-US" sz="1600" dirty="0"/>
+              <a:t>Take Quiz 2.2: Special Methods</a:t>
+            </a:r>
+          </a:p>
+          <a:p>
+            <a:pPr marL="146050" indent="0">
+              <a:buNone/>
+            </a:pPr>
+            <a:r>
+              <a:rPr lang="en-US" sz="1600" dirty="0">
+                <a:solidFill>
+                  <a:schemeClr val="tx1"/>
+                </a:solidFill>
+              </a:rPr>
+              <a:t>Password – </a:t>
+            </a:r>
+            <a:r>
+              <a:rPr lang="en-US" sz="1600" dirty="0" err="1">
+                <a:solidFill>
+                  <a:schemeClr val="tx1"/>
+                </a:solidFill>
+              </a:rPr>
+              <a:t>methodsEverywhere</a:t>
+            </a:r>
+            <a:endParaRPr sz="1600" dirty="0">
+              <a:solidFill>
+                <a:schemeClr val="tx1"/>
+              </a:solidFill>
+            </a:endParaRPr>
+          </a:p>
+        </p:txBody>
+      </p:sp>
+      <p:sp>
+        <p:nvSpPr>
+          <p:cNvPr id="326" name="Google Shape;326;p47">
+            <a:extLst>
+              <a:ext uri="{FF2B5EF4-FFF2-40B4-BE49-F238E27FC236}">
+                <a16:creationId xmlns:a16="http://schemas.microsoft.com/office/drawing/2014/main" id="{8A14E227-935A-FBD8-6BD5-CBCE8D13EE84}"/>
+              </a:ext>
+            </a:extLst>
+          </p:cNvPr>
+          <p:cNvSpPr txBox="1">
+            <a:spLocks noGrp="1"/>
+          </p:cNvSpPr>
+          <p:nvPr>
+            <p:ph type="sldNum" idx="12"/>
+          </p:nvPr>
+        </p:nvSpPr>
+        <p:spPr>
+          <a:xfrm>
+            <a:off x="8472458" y="4663217"/>
+            <a:ext cx="548700" cy="393600"/>
+          </a:xfrm>
+          <a:prstGeom prst="rect">
+            <a:avLst/>
+          </a:prstGeom>
+        </p:spPr>
+        <p:txBody>
+          <a:bodyPr spcFirstLastPara="1" wrap="square" lIns="91425" tIns="91425" rIns="91425" bIns="91425" anchor="ctr" anchorCtr="0">
+            <a:noAutofit/>
+          </a:bodyPr>
+          <a:lstStyle/>
+          <a:p>
+            <a:pPr marL="0" lvl="0" indent="0" algn="r" rtl="0">
+              <a:spcBef>
+                <a:spcPts val="0"/>
+              </a:spcBef>
+              <a:spcAft>
+                <a:spcPts val="0"/>
+              </a:spcAft>
+              <a:buNone/>
+            </a:pPr>
+            <a:fld id="{00000000-1234-1234-1234-123412341234}" type="slidenum">
+              <a:rPr lang="en"/>
+              <a:t>1</a:t>
+            </a:fld>
+            <a:endParaRPr/>
+          </a:p>
+        </p:txBody>
+      </p:sp>
+      <p:sp>
+        <p:nvSpPr>
+          <p:cNvPr id="2" name="TextBox 1">
+            <a:extLst>
+              <a:ext uri="{FF2B5EF4-FFF2-40B4-BE49-F238E27FC236}">
+                <a16:creationId xmlns:a16="http://schemas.microsoft.com/office/drawing/2014/main" id="{AE960589-7B12-D7F7-6452-D45441D8CA95}"/>
+              </a:ext>
+            </a:extLst>
+          </p:cNvPr>
+          <p:cNvSpPr txBox="1"/>
+          <p:nvPr/>
+        </p:nvSpPr>
+        <p:spPr>
+          <a:xfrm>
+            <a:off x="-11684" y="1287037"/>
+            <a:ext cx="9144000" cy="338555"/>
+          </a:xfrm>
+          <a:prstGeom prst="rect">
+            <a:avLst/>
+          </a:prstGeom>
+          <a:solidFill>
+            <a:srgbClr val="FFC000"/>
+          </a:solidFill>
+        </p:spPr>
+        <p:txBody>
+          <a:bodyPr wrap="square" rtlCol="0">
+            <a:spAutoFit/>
+          </a:bodyPr>
+          <a:lstStyle/>
+          <a:p>
+            <a:r>
+              <a:rPr lang="en-US" dirty="0"/>
+              <a:t>Quiz</a:t>
+            </a:r>
+          </a:p>
+        </p:txBody>
+      </p:sp>
+      <p:sp>
+        <p:nvSpPr>
+          <p:cNvPr id="3" name="TextBox 2">
+            <a:extLst>
+              <a:ext uri="{FF2B5EF4-FFF2-40B4-BE49-F238E27FC236}">
+                <a16:creationId xmlns:a16="http://schemas.microsoft.com/office/drawing/2014/main" id="{4FD526CA-3FDB-A5C2-36D9-69A3252D5E9A}"/>
+              </a:ext>
+            </a:extLst>
+          </p:cNvPr>
+          <p:cNvSpPr txBox="1"/>
+          <p:nvPr/>
+        </p:nvSpPr>
+        <p:spPr>
+          <a:xfrm>
+            <a:off x="0" y="3507404"/>
+            <a:ext cx="9144000" cy="307777"/>
+          </a:xfrm>
+          <a:prstGeom prst="rect">
+            <a:avLst/>
+          </a:prstGeom>
+          <a:solidFill>
+            <a:srgbClr val="FFC000"/>
+          </a:solidFill>
+        </p:spPr>
+        <p:txBody>
+          <a:bodyPr wrap="square" rtlCol="0">
+            <a:spAutoFit/>
+          </a:bodyPr>
+          <a:lstStyle/>
+          <a:p>
+            <a:r>
+              <a:rPr lang="en-US" dirty="0"/>
+              <a:t>Next </a:t>
+            </a:r>
+            <a:r>
+              <a:rPr lang="en-US" dirty="0">
+                <a:sym typeface="Wingdings" panose="05000000000000000000" pitchFamily="2" charset="2"/>
+              </a:rPr>
+              <a:t> </a:t>
+            </a:r>
+            <a:endParaRPr lang="en-US" dirty="0"/>
+          </a:p>
+        </p:txBody>
+      </p:sp>
+      <p:sp>
+        <p:nvSpPr>
+          <p:cNvPr id="4" name="Google Shape;325;p47">
+            <a:extLst>
+              <a:ext uri="{FF2B5EF4-FFF2-40B4-BE49-F238E27FC236}">
+                <a16:creationId xmlns:a16="http://schemas.microsoft.com/office/drawing/2014/main" id="{DC50CCB1-5AFE-1F52-8B22-87EB927965B4}"/>
+              </a:ext>
+            </a:extLst>
+          </p:cNvPr>
+          <p:cNvSpPr txBox="1">
+            <a:spLocks/>
+          </p:cNvSpPr>
+          <p:nvPr/>
+        </p:nvSpPr>
+        <p:spPr>
+          <a:xfrm>
+            <a:off x="-5842" y="3848100"/>
+            <a:ext cx="9149842" cy="1208717"/>
+          </a:xfrm>
+          <a:prstGeom prst="rect">
+            <a:avLst/>
+          </a:prstGeom>
+          <a:noFill/>
+          <a:ln>
+            <a:noFill/>
+          </a:ln>
+        </p:spPr>
+        <p:txBody>
+          <a:bodyPr spcFirstLastPara="1" wrap="square" lIns="91425" tIns="91425" rIns="91425" bIns="91425" anchor="ctr" anchorCtr="0">
+            <a:noAutofit/>
+          </a:bodyPr>
+          <a:lstStyle>
+            <a:defPPr marR="0" lvl="0" algn="l" rtl="0">
+              <a:lnSpc>
+                <a:spcPct val="100000"/>
+              </a:lnSpc>
+              <a:spcBef>
+                <a:spcPts val="0"/>
+              </a:spcBef>
+              <a:spcAft>
+                <a:spcPts val="0"/>
+              </a:spcAft>
+            </a:defPPr>
+            <a:lvl1pPr marL="457200" marR="0" lvl="0" indent="-311150" algn="l" rtl="0">
+              <a:lnSpc>
+                <a:spcPct val="115000"/>
+              </a:lnSpc>
+              <a:spcBef>
+                <a:spcPts val="0"/>
+              </a:spcBef>
+              <a:spcAft>
+                <a:spcPts val="0"/>
+              </a:spcAft>
+              <a:buClr>
+                <a:schemeClr val="dk2"/>
+              </a:buClr>
+              <a:buSzPts val="1300"/>
+              <a:buFont typeface="Roboto"/>
+              <a:buChar char="●"/>
+              <a:defRPr sz="1300" b="0" i="0" u="none" strike="noStrike" cap="none">
+                <a:solidFill>
+                  <a:schemeClr val="dk2"/>
+                </a:solidFill>
+                <a:latin typeface="Roboto"/>
+                <a:ea typeface="Roboto"/>
+                <a:cs typeface="Roboto"/>
+                <a:sym typeface="Roboto"/>
+              </a:defRPr>
+            </a:lvl1pPr>
+            <a:lvl2pPr marL="914400" marR="0" lvl="1" indent="-298450" algn="l" rtl="0">
+              <a:lnSpc>
+                <a:spcPct val="115000"/>
+              </a:lnSpc>
+              <a:spcBef>
+                <a:spcPts val="1600"/>
+              </a:spcBef>
+              <a:spcAft>
+                <a:spcPts val="0"/>
+              </a:spcAft>
+              <a:buClr>
+                <a:schemeClr val="dk2"/>
+              </a:buClr>
+              <a:buSzPts val="1100"/>
+              <a:buFont typeface="Roboto"/>
+              <a:buChar char="○"/>
+              <a:defRPr sz="1100" b="0" i="0" u="none" strike="noStrike" cap="none">
+                <a:solidFill>
+                  <a:schemeClr val="dk2"/>
+                </a:solidFill>
+                <a:latin typeface="Roboto"/>
+                <a:ea typeface="Roboto"/>
+                <a:cs typeface="Roboto"/>
+                <a:sym typeface="Roboto"/>
+              </a:defRPr>
+            </a:lvl2pPr>
+            <a:lvl3pPr marL="1371600" marR="0" lvl="2" indent="-298450" algn="l" rtl="0">
+              <a:lnSpc>
+                <a:spcPct val="115000"/>
+              </a:lnSpc>
+              <a:spcBef>
+                <a:spcPts val="1600"/>
+              </a:spcBef>
+              <a:spcAft>
+                <a:spcPts val="0"/>
+              </a:spcAft>
+              <a:buClr>
+                <a:schemeClr val="dk2"/>
+              </a:buClr>
+              <a:buSzPts val="1100"/>
+              <a:buFont typeface="Roboto"/>
+              <a:buChar char="■"/>
+              <a:defRPr sz="1100" b="0" i="0" u="none" strike="noStrike" cap="none">
+                <a:solidFill>
+                  <a:schemeClr val="dk2"/>
+                </a:solidFill>
+                <a:latin typeface="Roboto"/>
+                <a:ea typeface="Roboto"/>
+                <a:cs typeface="Roboto"/>
+                <a:sym typeface="Roboto"/>
+              </a:defRPr>
+            </a:lvl3pPr>
+            <a:lvl4pPr marL="1828800" marR="0" lvl="3" indent="-298450" algn="l" rtl="0">
+              <a:lnSpc>
+                <a:spcPct val="115000"/>
+              </a:lnSpc>
+              <a:spcBef>
+                <a:spcPts val="1600"/>
+              </a:spcBef>
+              <a:spcAft>
+                <a:spcPts val="0"/>
+              </a:spcAft>
+              <a:buClr>
+                <a:schemeClr val="dk2"/>
+              </a:buClr>
+              <a:buSzPts val="1100"/>
+              <a:buFont typeface="Roboto"/>
+              <a:buChar char="●"/>
+              <a:defRPr sz="1100" b="0" i="0" u="none" strike="noStrike" cap="none">
+                <a:solidFill>
+                  <a:schemeClr val="dk2"/>
+                </a:solidFill>
+                <a:latin typeface="Roboto"/>
+                <a:ea typeface="Roboto"/>
+                <a:cs typeface="Roboto"/>
+                <a:sym typeface="Roboto"/>
+              </a:defRPr>
+            </a:lvl4pPr>
+            <a:lvl5pPr marL="2286000" marR="0" lvl="4" indent="-298450" algn="l" rtl="0">
+              <a:lnSpc>
+                <a:spcPct val="115000"/>
+              </a:lnSpc>
+              <a:spcBef>
+                <a:spcPts val="1600"/>
+              </a:spcBef>
+              <a:spcAft>
+                <a:spcPts val="0"/>
+              </a:spcAft>
+              <a:buClr>
+                <a:schemeClr val="dk2"/>
+              </a:buClr>
+              <a:buSzPts val="1100"/>
+              <a:buFont typeface="Roboto"/>
+              <a:buChar char="○"/>
+              <a:defRPr sz="1100" b="0" i="0" u="none" strike="noStrike" cap="none">
+                <a:solidFill>
+                  <a:schemeClr val="dk2"/>
+                </a:solidFill>
+                <a:latin typeface="Roboto"/>
+                <a:ea typeface="Roboto"/>
+                <a:cs typeface="Roboto"/>
+                <a:sym typeface="Roboto"/>
+              </a:defRPr>
+            </a:lvl5pPr>
+            <a:lvl6pPr marL="2743200" marR="0" lvl="5" indent="-298450" algn="l" rtl="0">
+              <a:lnSpc>
+                <a:spcPct val="115000"/>
+              </a:lnSpc>
+              <a:spcBef>
+                <a:spcPts val="1600"/>
+              </a:spcBef>
+              <a:spcAft>
+                <a:spcPts val="0"/>
+              </a:spcAft>
+              <a:buClr>
+                <a:schemeClr val="dk2"/>
+              </a:buClr>
+              <a:buSzPts val="1100"/>
+              <a:buFont typeface="Roboto"/>
+              <a:buChar char="■"/>
+              <a:defRPr sz="1100" b="0" i="0" u="none" strike="noStrike" cap="none">
+                <a:solidFill>
+                  <a:schemeClr val="dk2"/>
+                </a:solidFill>
+                <a:latin typeface="Roboto"/>
+                <a:ea typeface="Roboto"/>
+                <a:cs typeface="Roboto"/>
+                <a:sym typeface="Roboto"/>
+              </a:defRPr>
+            </a:lvl6pPr>
+            <a:lvl7pPr marL="3200400" marR="0" lvl="6" indent="-298450" algn="l" rtl="0">
+              <a:lnSpc>
+                <a:spcPct val="115000"/>
+              </a:lnSpc>
+              <a:spcBef>
+                <a:spcPts val="1600"/>
+              </a:spcBef>
+              <a:spcAft>
+                <a:spcPts val="0"/>
+              </a:spcAft>
+              <a:buClr>
+                <a:schemeClr val="dk2"/>
+              </a:buClr>
+              <a:buSzPts val="1100"/>
+              <a:buFont typeface="Roboto"/>
+              <a:buChar char="●"/>
+              <a:defRPr sz="1100" b="0" i="0" u="none" strike="noStrike" cap="none">
+                <a:solidFill>
+                  <a:schemeClr val="dk2"/>
+                </a:solidFill>
+                <a:latin typeface="Roboto"/>
+                <a:ea typeface="Roboto"/>
+                <a:cs typeface="Roboto"/>
+                <a:sym typeface="Roboto"/>
+              </a:defRPr>
+            </a:lvl7pPr>
+            <a:lvl8pPr marL="3657600" marR="0" lvl="7" indent="-298450" algn="l" rtl="0">
+              <a:lnSpc>
+                <a:spcPct val="115000"/>
+              </a:lnSpc>
+              <a:spcBef>
+                <a:spcPts val="1600"/>
+              </a:spcBef>
+              <a:spcAft>
+                <a:spcPts val="0"/>
+              </a:spcAft>
+              <a:buClr>
+                <a:schemeClr val="dk2"/>
+              </a:buClr>
+              <a:buSzPts val="1100"/>
+              <a:buFont typeface="Roboto"/>
+              <a:buChar char="○"/>
+              <a:defRPr sz="1100" b="0" i="0" u="none" strike="noStrike" cap="none">
+                <a:solidFill>
+                  <a:schemeClr val="dk2"/>
+                </a:solidFill>
+                <a:latin typeface="Roboto"/>
+                <a:ea typeface="Roboto"/>
+                <a:cs typeface="Roboto"/>
+                <a:sym typeface="Roboto"/>
+              </a:defRPr>
+            </a:lvl8pPr>
+            <a:lvl9pPr marL="4114800" marR="0" lvl="8" indent="-298450" algn="l" rtl="0">
+              <a:lnSpc>
+                <a:spcPct val="115000"/>
+              </a:lnSpc>
+              <a:spcBef>
+                <a:spcPts val="1600"/>
+              </a:spcBef>
+              <a:spcAft>
+                <a:spcPts val="1600"/>
+              </a:spcAft>
+              <a:buClr>
+                <a:schemeClr val="dk2"/>
+              </a:buClr>
+              <a:buSzPts val="1100"/>
+              <a:buFont typeface="Roboto"/>
+              <a:buChar char="■"/>
+              <a:defRPr sz="1100" b="0" i="0" u="none" strike="noStrike" cap="none">
+                <a:solidFill>
+                  <a:schemeClr val="dk2"/>
+                </a:solidFill>
+                <a:latin typeface="Roboto"/>
+                <a:ea typeface="Roboto"/>
+                <a:cs typeface="Roboto"/>
+                <a:sym typeface="Roboto"/>
+              </a:defRPr>
+            </a:lvl9pPr>
+          </a:lstStyle>
+          <a:p>
+            <a:pPr marL="0" indent="0">
+              <a:spcAft>
+                <a:spcPts val="1600"/>
+              </a:spcAft>
+              <a:buNone/>
+            </a:pPr>
+            <a:r>
+              <a:rPr lang="en-US" sz="1400" dirty="0"/>
+              <a:t>After completing the Quiz </a:t>
+            </a:r>
+          </a:p>
+          <a:p>
+            <a:pPr marL="342900" indent="-342900">
+              <a:spcAft>
+                <a:spcPts val="1600"/>
+              </a:spcAft>
+            </a:pPr>
+            <a:r>
+              <a:rPr lang="en-US" sz="1200" dirty="0"/>
+              <a:t>Accept GitHub Classroom Assignment for Unit 03</a:t>
+            </a:r>
+          </a:p>
+          <a:p>
+            <a:pPr marL="342900" indent="-342900">
+              <a:spcAft>
+                <a:spcPts val="1600"/>
+              </a:spcAft>
+            </a:pPr>
+            <a:r>
+              <a:rPr lang="en-US" sz="1200" dirty="0"/>
+              <a:t>Clone/pull GitHub classroom repo for Unit 03 under </a:t>
+            </a:r>
+            <a:r>
+              <a:rPr lang="en-US" sz="1200" dirty="0" err="1"/>
+              <a:t>softdevII</a:t>
+            </a:r>
+            <a:r>
+              <a:rPr lang="en-US" sz="1200" dirty="0"/>
+              <a:t> folder</a:t>
+            </a:r>
+            <a:endParaRPr lang="en-US" sz="1200" dirty="0">
+              <a:solidFill>
+                <a:schemeClr val="tx1"/>
+              </a:solidFill>
+            </a:endParaRPr>
+          </a:p>
+        </p:txBody>
+      </p:sp>
+      <p:sp>
+        <p:nvSpPr>
+          <p:cNvPr id="5" name="Google Shape;325;p47">
+            <a:extLst>
+              <a:ext uri="{FF2B5EF4-FFF2-40B4-BE49-F238E27FC236}">
+                <a16:creationId xmlns:a16="http://schemas.microsoft.com/office/drawing/2014/main" id="{7B85466C-6200-EE66-9396-7DECA70CDF53}"/>
+              </a:ext>
+            </a:extLst>
+          </p:cNvPr>
+          <p:cNvSpPr txBox="1">
+            <a:spLocks/>
+          </p:cNvSpPr>
+          <p:nvPr/>
+        </p:nvSpPr>
+        <p:spPr>
+          <a:xfrm>
+            <a:off x="4303618" y="1737005"/>
+            <a:ext cx="4516998" cy="1378400"/>
+          </a:xfrm>
+          <a:prstGeom prst="rect">
+            <a:avLst/>
+          </a:prstGeom>
+          <a:noFill/>
+          <a:ln>
+            <a:noFill/>
+          </a:ln>
+        </p:spPr>
+        <p:txBody>
+          <a:bodyPr spcFirstLastPara="1" wrap="square" lIns="91425" tIns="91425" rIns="91425" bIns="91425" anchor="ctr" anchorCtr="0">
+            <a:noAutofit/>
+          </a:bodyPr>
+          <a:lstStyle>
+            <a:defPPr marR="0" lvl="0" algn="l" rtl="0">
+              <a:lnSpc>
+                <a:spcPct val="100000"/>
+              </a:lnSpc>
+              <a:spcBef>
+                <a:spcPts val="0"/>
+              </a:spcBef>
+              <a:spcAft>
+                <a:spcPts val="0"/>
+              </a:spcAft>
+            </a:defPPr>
+            <a:lvl1pPr marL="457200" marR="0" lvl="0" indent="-311150" algn="l" rtl="0">
+              <a:lnSpc>
+                <a:spcPct val="115000"/>
+              </a:lnSpc>
+              <a:spcBef>
+                <a:spcPts val="0"/>
+              </a:spcBef>
+              <a:spcAft>
+                <a:spcPts val="0"/>
+              </a:spcAft>
+              <a:buClr>
+                <a:schemeClr val="dk2"/>
+              </a:buClr>
+              <a:buSzPts val="1300"/>
+              <a:buFont typeface="Roboto"/>
+              <a:buChar char="●"/>
+              <a:defRPr sz="1300" b="0" i="0" u="none" strike="noStrike" cap="none">
+                <a:solidFill>
+                  <a:schemeClr val="dk2"/>
+                </a:solidFill>
+                <a:latin typeface="Roboto"/>
+                <a:ea typeface="Roboto"/>
+                <a:cs typeface="Roboto"/>
+                <a:sym typeface="Roboto"/>
+              </a:defRPr>
+            </a:lvl1pPr>
+            <a:lvl2pPr marL="914400" marR="0" lvl="1" indent="-298450" algn="l" rtl="0">
+              <a:lnSpc>
+                <a:spcPct val="115000"/>
+              </a:lnSpc>
+              <a:spcBef>
+                <a:spcPts val="1600"/>
+              </a:spcBef>
+              <a:spcAft>
+                <a:spcPts val="0"/>
+              </a:spcAft>
+              <a:buClr>
+                <a:schemeClr val="dk2"/>
+              </a:buClr>
+              <a:buSzPts val="1100"/>
+              <a:buFont typeface="Roboto"/>
+              <a:buChar char="○"/>
+              <a:defRPr sz="1100" b="0" i="0" u="none" strike="noStrike" cap="none">
+                <a:solidFill>
+                  <a:schemeClr val="dk2"/>
+                </a:solidFill>
+                <a:latin typeface="Roboto"/>
+                <a:ea typeface="Roboto"/>
+                <a:cs typeface="Roboto"/>
+                <a:sym typeface="Roboto"/>
+              </a:defRPr>
+            </a:lvl2pPr>
+            <a:lvl3pPr marL="1371600" marR="0" lvl="2" indent="-298450" algn="l" rtl="0">
+              <a:lnSpc>
+                <a:spcPct val="115000"/>
+              </a:lnSpc>
+              <a:spcBef>
+                <a:spcPts val="1600"/>
+              </a:spcBef>
+              <a:spcAft>
+                <a:spcPts val="0"/>
+              </a:spcAft>
+              <a:buClr>
+                <a:schemeClr val="dk2"/>
+              </a:buClr>
+              <a:buSzPts val="1100"/>
+              <a:buFont typeface="Roboto"/>
+              <a:buChar char="■"/>
+              <a:defRPr sz="1100" b="0" i="0" u="none" strike="noStrike" cap="none">
+                <a:solidFill>
+                  <a:schemeClr val="dk2"/>
+                </a:solidFill>
+                <a:latin typeface="Roboto"/>
+                <a:ea typeface="Roboto"/>
+                <a:cs typeface="Roboto"/>
+                <a:sym typeface="Roboto"/>
+              </a:defRPr>
+            </a:lvl3pPr>
+            <a:lvl4pPr marL="1828800" marR="0" lvl="3" indent="-298450" algn="l" rtl="0">
+              <a:lnSpc>
+                <a:spcPct val="115000"/>
+              </a:lnSpc>
+              <a:spcBef>
+                <a:spcPts val="1600"/>
+              </a:spcBef>
+              <a:spcAft>
+                <a:spcPts val="0"/>
+              </a:spcAft>
+              <a:buClr>
+                <a:schemeClr val="dk2"/>
+              </a:buClr>
+              <a:buSzPts val="1100"/>
+              <a:buFont typeface="Roboto"/>
+              <a:buChar char="●"/>
+              <a:defRPr sz="1100" b="0" i="0" u="none" strike="noStrike" cap="none">
+                <a:solidFill>
+                  <a:schemeClr val="dk2"/>
+                </a:solidFill>
+                <a:latin typeface="Roboto"/>
+                <a:ea typeface="Roboto"/>
+                <a:cs typeface="Roboto"/>
+                <a:sym typeface="Roboto"/>
+              </a:defRPr>
+            </a:lvl4pPr>
+            <a:lvl5pPr marL="2286000" marR="0" lvl="4" indent="-298450" algn="l" rtl="0">
+              <a:lnSpc>
+                <a:spcPct val="115000"/>
+              </a:lnSpc>
+              <a:spcBef>
+                <a:spcPts val="1600"/>
+              </a:spcBef>
+              <a:spcAft>
+                <a:spcPts val="0"/>
+              </a:spcAft>
+              <a:buClr>
+                <a:schemeClr val="dk2"/>
+              </a:buClr>
+              <a:buSzPts val="1100"/>
+              <a:buFont typeface="Roboto"/>
+              <a:buChar char="○"/>
+              <a:defRPr sz="1100" b="0" i="0" u="none" strike="noStrike" cap="none">
+                <a:solidFill>
+                  <a:schemeClr val="dk2"/>
+                </a:solidFill>
+                <a:latin typeface="Roboto"/>
+                <a:ea typeface="Roboto"/>
+                <a:cs typeface="Roboto"/>
+                <a:sym typeface="Roboto"/>
+              </a:defRPr>
+            </a:lvl5pPr>
+            <a:lvl6pPr marL="2743200" marR="0" lvl="5" indent="-298450" algn="l" rtl="0">
+              <a:lnSpc>
+                <a:spcPct val="115000"/>
+              </a:lnSpc>
+              <a:spcBef>
+                <a:spcPts val="1600"/>
+              </a:spcBef>
+              <a:spcAft>
+                <a:spcPts val="0"/>
+              </a:spcAft>
+              <a:buClr>
+                <a:schemeClr val="dk2"/>
+              </a:buClr>
+              <a:buSzPts val="1100"/>
+              <a:buFont typeface="Roboto"/>
+              <a:buChar char="■"/>
+              <a:defRPr sz="1100" b="0" i="0" u="none" strike="noStrike" cap="none">
+                <a:solidFill>
+                  <a:schemeClr val="dk2"/>
+                </a:solidFill>
+                <a:latin typeface="Roboto"/>
+                <a:ea typeface="Roboto"/>
+                <a:cs typeface="Roboto"/>
+                <a:sym typeface="Roboto"/>
+              </a:defRPr>
+            </a:lvl6pPr>
+            <a:lvl7pPr marL="3200400" marR="0" lvl="6" indent="-298450" algn="l" rtl="0">
+              <a:lnSpc>
+                <a:spcPct val="115000"/>
+              </a:lnSpc>
+              <a:spcBef>
+                <a:spcPts val="1600"/>
+              </a:spcBef>
+              <a:spcAft>
+                <a:spcPts val="0"/>
+              </a:spcAft>
+              <a:buClr>
+                <a:schemeClr val="dk2"/>
+              </a:buClr>
+              <a:buSzPts val="1100"/>
+              <a:buFont typeface="Roboto"/>
+              <a:buChar char="●"/>
+              <a:defRPr sz="1100" b="0" i="0" u="none" strike="noStrike" cap="none">
+                <a:solidFill>
+                  <a:schemeClr val="dk2"/>
+                </a:solidFill>
+                <a:latin typeface="Roboto"/>
+                <a:ea typeface="Roboto"/>
+                <a:cs typeface="Roboto"/>
+                <a:sym typeface="Roboto"/>
+              </a:defRPr>
+            </a:lvl7pPr>
+            <a:lvl8pPr marL="3657600" marR="0" lvl="7" indent="-298450" algn="l" rtl="0">
+              <a:lnSpc>
+                <a:spcPct val="115000"/>
+              </a:lnSpc>
+              <a:spcBef>
+                <a:spcPts val="1600"/>
+              </a:spcBef>
+              <a:spcAft>
+                <a:spcPts val="0"/>
+              </a:spcAft>
+              <a:buClr>
+                <a:schemeClr val="dk2"/>
+              </a:buClr>
+              <a:buSzPts val="1100"/>
+              <a:buFont typeface="Roboto"/>
+              <a:buChar char="○"/>
+              <a:defRPr sz="1100" b="0" i="0" u="none" strike="noStrike" cap="none">
+                <a:solidFill>
+                  <a:schemeClr val="dk2"/>
+                </a:solidFill>
+                <a:latin typeface="Roboto"/>
+                <a:ea typeface="Roboto"/>
+                <a:cs typeface="Roboto"/>
+                <a:sym typeface="Roboto"/>
+              </a:defRPr>
+            </a:lvl8pPr>
+            <a:lvl9pPr marL="4114800" marR="0" lvl="8" indent="-298450" algn="l" rtl="0">
+              <a:lnSpc>
+                <a:spcPct val="115000"/>
+              </a:lnSpc>
+              <a:spcBef>
+                <a:spcPts val="1600"/>
+              </a:spcBef>
+              <a:spcAft>
+                <a:spcPts val="1600"/>
+              </a:spcAft>
+              <a:buClr>
+                <a:schemeClr val="dk2"/>
+              </a:buClr>
+              <a:buSzPts val="1100"/>
+              <a:buFont typeface="Roboto"/>
+              <a:buChar char="■"/>
+              <a:defRPr sz="1100" b="0" i="0" u="none" strike="noStrike" cap="none">
+                <a:solidFill>
+                  <a:schemeClr val="dk2"/>
+                </a:solidFill>
+                <a:latin typeface="Roboto"/>
+                <a:ea typeface="Roboto"/>
+                <a:cs typeface="Roboto"/>
+                <a:sym typeface="Roboto"/>
+              </a:defRPr>
+            </a:lvl9pPr>
+          </a:lstStyle>
+          <a:p>
+            <a:pPr marL="146050" indent="0">
+              <a:buNone/>
+            </a:pPr>
+            <a:r>
+              <a:rPr lang="en-US" sz="1600" dirty="0"/>
+              <a:t>Quiz 2.3 UML</a:t>
+            </a:r>
+          </a:p>
+          <a:p>
+            <a:pPr marL="146050" indent="0">
+              <a:buNone/>
+            </a:pPr>
+            <a:r>
+              <a:rPr lang="en-US" sz="1600" dirty="0">
+                <a:solidFill>
+                  <a:schemeClr val="tx1"/>
+                </a:solidFill>
+              </a:rPr>
+              <a:t>Password - </a:t>
+            </a:r>
+            <a:r>
+              <a:rPr lang="en-US" sz="1600">
+                <a:solidFill>
+                  <a:schemeClr val="tx1"/>
+                </a:solidFill>
+              </a:rPr>
+              <a:t>UMLforLife</a:t>
+            </a:r>
+            <a:endParaRPr lang="en-US" sz="1600" dirty="0">
+              <a:solidFill>
+                <a:schemeClr val="tx1"/>
+              </a:solidFill>
+            </a:endParaRPr>
+          </a:p>
+        </p:txBody>
+      </p:sp>
+    </p:spTree>
+    <p:extLst>
+      <p:ext uri="{BB962C8B-B14F-4D97-AF65-F5344CB8AC3E}">
+        <p14:creationId xmlns:p14="http://schemas.microsoft.com/office/powerpoint/2010/main" val="674272117"/>
+      </p:ext>
+    </p:extLst>
+  </p:cSld>
+  <p:clrMapOvr>
+    <a:masterClrMapping/>
+  </p:clrMapOvr>
+</p:sld>
+</file>
+
+<file path=ppt/slides/slide10.xml><?xml version="1.0" encoding="utf-8"?>
+<p:sld xmlns:a="http://schemas.openxmlformats.org/drawingml/2006/main" xmlns:r="http://schemas.openxmlformats.org/officeDocument/2006/relationships" xmlns:p="http://schemas.openxmlformats.org/presentationml/2006/main" show="0">
+  <p:cSld>
+    <p:spTree>
+      <p:nvGrpSpPr>
+        <p:cNvPr id="1" name="Shape 323"/>
+        <p:cNvGrpSpPr/>
+        <p:nvPr/>
+      </p:nvGrpSpPr>
+      <p:grpSpPr>
+        <a:xfrm>
+          <a:off x="0" y="0"/>
+          <a:ext cx="0" cy="0"/>
+          <a:chOff x="0" y="0"/>
+          <a:chExt cx="0" cy="0"/>
+        </a:xfrm>
+      </p:grpSpPr>
+      <p:sp>
+        <p:nvSpPr>
+          <p:cNvPr id="324" name="Google Shape;324;p47"/>
+          <p:cNvSpPr txBox="1">
+            <a:spLocks noGrp="1"/>
+          </p:cNvSpPr>
+          <p:nvPr>
+            <p:ph type="title"/>
+          </p:nvPr>
+        </p:nvSpPr>
+        <p:spPr>
+          <a:xfrm>
+            <a:off x="226208" y="1"/>
+            <a:ext cx="8520600" cy="464980"/>
+          </a:xfrm>
+          <a:prstGeom prst="rect">
+            <a:avLst/>
+          </a:prstGeom>
+        </p:spPr>
+        <p:txBody>
+          <a:bodyPr spcFirstLastPara="1" wrap="square" lIns="91425" tIns="91425" rIns="91425" bIns="91425" anchor="t" anchorCtr="0">
+            <a:noAutofit/>
+          </a:bodyPr>
+          <a:lstStyle/>
+          <a:p>
+            <a:pPr marL="0" lvl="0" indent="0" algn="ctr" rtl="0">
+              <a:spcBef>
+                <a:spcPts val="0"/>
+              </a:spcBef>
+              <a:spcAft>
+                <a:spcPts val="0"/>
+              </a:spcAft>
+              <a:buNone/>
+            </a:pPr>
+            <a:r>
+              <a:rPr lang="en-US" dirty="0"/>
+              <a:t>Use </a:t>
+            </a:r>
+            <a:r>
+              <a:rPr lang="en-US" sz="2400" dirty="0"/>
+              <a:t>Assigned</a:t>
+            </a:r>
+            <a:r>
+              <a:rPr lang="en-US" dirty="0"/>
+              <a:t> Seat</a:t>
+            </a:r>
+            <a:endParaRPr dirty="0"/>
+          </a:p>
+        </p:txBody>
+      </p:sp>
+      <p:sp>
+        <p:nvSpPr>
+          <p:cNvPr id="326" name="Google Shape;326;p47"/>
+          <p:cNvSpPr txBox="1">
+            <a:spLocks noGrp="1"/>
+          </p:cNvSpPr>
+          <p:nvPr>
+            <p:ph type="sldNum" idx="12"/>
+          </p:nvPr>
+        </p:nvSpPr>
+        <p:spPr>
+          <a:xfrm>
+            <a:off x="8472458" y="4663217"/>
+            <a:ext cx="548700" cy="393600"/>
+          </a:xfrm>
+          <a:prstGeom prst="rect">
+            <a:avLst/>
+          </a:prstGeom>
+        </p:spPr>
+        <p:txBody>
+          <a:bodyPr spcFirstLastPara="1" wrap="square" lIns="91425" tIns="91425" rIns="91425" bIns="91425" anchor="ctr" anchorCtr="0">
+            <a:noAutofit/>
+          </a:bodyPr>
+          <a:lstStyle/>
+          <a:p>
+            <a:pPr marL="0" lvl="0" indent="0" algn="r" rtl="0">
+              <a:spcBef>
+                <a:spcPts val="0"/>
+              </a:spcBef>
+              <a:spcAft>
+                <a:spcPts val="0"/>
+              </a:spcAft>
+              <a:buNone/>
+            </a:pPr>
+            <a:fld id="{00000000-1234-1234-1234-123412341234}" type="slidenum">
+              <a:rPr lang="en"/>
+              <a:t>10</a:t>
+            </a:fld>
+            <a:endParaRPr/>
+          </a:p>
+        </p:txBody>
+      </p:sp>
+      <p:pic>
+        <p:nvPicPr>
+          <p:cNvPr id="6" name="Picture 5">
+            <a:extLst>
+              <a:ext uri="{FF2B5EF4-FFF2-40B4-BE49-F238E27FC236}">
+                <a16:creationId xmlns:a16="http://schemas.microsoft.com/office/drawing/2014/main" id="{DED32793-7C09-E3A3-94E5-B5D46727A1D0}"/>
+              </a:ext>
+            </a:extLst>
+          </p:cNvPr>
+          <p:cNvPicPr>
+            <a:picLocks noChangeAspect="1"/>
+          </p:cNvPicPr>
+          <p:nvPr/>
+        </p:nvPicPr>
+        <p:blipFill>
+          <a:blip r:embed="rId3"/>
+          <a:stretch>
+            <a:fillRect/>
+          </a:stretch>
+        </p:blipFill>
+        <p:spPr>
+          <a:xfrm>
+            <a:off x="-1" y="551663"/>
+            <a:ext cx="9144001" cy="4591837"/>
+          </a:xfrm>
+          <a:prstGeom prst="rect">
+            <a:avLst/>
+          </a:prstGeom>
+        </p:spPr>
+      </p:pic>
+    </p:spTree>
+    <p:extLst>
+      <p:ext uri="{BB962C8B-B14F-4D97-AF65-F5344CB8AC3E}">
+        <p14:creationId xmlns:p14="http://schemas.microsoft.com/office/powerpoint/2010/main" val="4226348449"/>
+      </p:ext>
+    </p:extLst>
+  </p:cSld>
+  <p:clrMapOvr>
+    <a:masterClrMapping/>
+  </p:clrMapOvr>
+</p:sld>
+</file>
+
+<file path=ppt/slides/slide11.xml><?xml version="1.0" encoding="utf-8"?>
+<p:sld xmlns:a="http://schemas.openxmlformats.org/drawingml/2006/main" xmlns:r="http://schemas.openxmlformats.org/officeDocument/2006/relationships" xmlns:p="http://schemas.openxmlformats.org/presentationml/2006/main" show="0">
+  <p:cSld>
+    <p:spTree>
+      <p:nvGrpSpPr>
+        <p:cNvPr id="1" name="Shape 323"/>
+        <p:cNvGrpSpPr/>
+        <p:nvPr/>
+      </p:nvGrpSpPr>
+      <p:grpSpPr>
+        <a:xfrm>
+          <a:off x="0" y="0"/>
+          <a:ext cx="0" cy="0"/>
+          <a:chOff x="0" y="0"/>
+          <a:chExt cx="0" cy="0"/>
+        </a:xfrm>
+      </p:grpSpPr>
+      <p:sp>
+        <p:nvSpPr>
+          <p:cNvPr id="324" name="Google Shape;324;p47"/>
+          <p:cNvSpPr txBox="1">
+            <a:spLocks noGrp="1"/>
+          </p:cNvSpPr>
+          <p:nvPr>
+            <p:ph type="title"/>
+          </p:nvPr>
+        </p:nvSpPr>
+        <p:spPr>
+          <a:xfrm>
+            <a:off x="226208" y="1"/>
+            <a:ext cx="8520600" cy="464980"/>
+          </a:xfrm>
+          <a:prstGeom prst="rect">
+            <a:avLst/>
+          </a:prstGeom>
+        </p:spPr>
+        <p:txBody>
+          <a:bodyPr spcFirstLastPara="1" wrap="square" lIns="91425" tIns="91425" rIns="91425" bIns="91425" anchor="t" anchorCtr="0">
+            <a:noAutofit/>
+          </a:bodyPr>
+          <a:lstStyle/>
+          <a:p>
+            <a:pPr marL="0" lvl="0" indent="0" algn="ctr" rtl="0">
+              <a:spcBef>
+                <a:spcPts val="0"/>
+              </a:spcBef>
+              <a:spcAft>
+                <a:spcPts val="0"/>
+              </a:spcAft>
+              <a:buNone/>
+            </a:pPr>
+            <a:r>
+              <a:rPr lang="en-US" dirty="0"/>
+              <a:t>Use </a:t>
+            </a:r>
+            <a:r>
+              <a:rPr lang="en-US" sz="2400" dirty="0"/>
+              <a:t>Assigned</a:t>
+            </a:r>
+            <a:r>
+              <a:rPr lang="en-US" dirty="0"/>
+              <a:t> Seat</a:t>
+            </a:r>
+            <a:endParaRPr dirty="0"/>
+          </a:p>
+        </p:txBody>
+      </p:sp>
+      <p:sp>
+        <p:nvSpPr>
+          <p:cNvPr id="326" name="Google Shape;326;p47"/>
+          <p:cNvSpPr txBox="1">
+            <a:spLocks noGrp="1"/>
+          </p:cNvSpPr>
+          <p:nvPr>
+            <p:ph type="sldNum" idx="12"/>
+          </p:nvPr>
+        </p:nvSpPr>
+        <p:spPr>
+          <a:xfrm>
+            <a:off x="8472458" y="4663217"/>
+            <a:ext cx="548700" cy="393600"/>
+          </a:xfrm>
+          <a:prstGeom prst="rect">
+            <a:avLst/>
+          </a:prstGeom>
+        </p:spPr>
+        <p:txBody>
+          <a:bodyPr spcFirstLastPara="1" wrap="square" lIns="91425" tIns="91425" rIns="91425" bIns="91425" anchor="ctr" anchorCtr="0">
+            <a:noAutofit/>
+          </a:bodyPr>
+          <a:lstStyle/>
+          <a:p>
+            <a:pPr marL="0" lvl="0" indent="0" algn="r" rtl="0">
+              <a:spcBef>
+                <a:spcPts val="0"/>
+              </a:spcBef>
+              <a:spcAft>
+                <a:spcPts val="0"/>
+              </a:spcAft>
+              <a:buNone/>
+            </a:pPr>
+            <a:fld id="{00000000-1234-1234-1234-123412341234}" type="slidenum">
+              <a:rPr lang="en"/>
+              <a:t>11</a:t>
+            </a:fld>
+            <a:endParaRPr/>
+          </a:p>
+        </p:txBody>
+      </p:sp>
+      <p:pic>
+        <p:nvPicPr>
+          <p:cNvPr id="3" name="Picture 2">
+            <a:extLst>
+              <a:ext uri="{FF2B5EF4-FFF2-40B4-BE49-F238E27FC236}">
+                <a16:creationId xmlns:a16="http://schemas.microsoft.com/office/drawing/2014/main" id="{92DE4AAC-70FE-A114-5258-F5B22EDDED45}"/>
+              </a:ext>
+            </a:extLst>
+          </p:cNvPr>
+          <p:cNvPicPr>
+            <a:picLocks noChangeAspect="1"/>
+          </p:cNvPicPr>
+          <p:nvPr/>
+        </p:nvPicPr>
+        <p:blipFill>
+          <a:blip r:embed="rId3"/>
+          <a:stretch>
+            <a:fillRect/>
+          </a:stretch>
+        </p:blipFill>
+        <p:spPr>
+          <a:xfrm>
+            <a:off x="0" y="716280"/>
+            <a:ext cx="9144000" cy="4427218"/>
+          </a:xfrm>
+          <a:prstGeom prst="rect">
+            <a:avLst/>
+          </a:prstGeom>
+        </p:spPr>
+      </p:pic>
+    </p:spTree>
+    <p:extLst>
+      <p:ext uri="{BB962C8B-B14F-4D97-AF65-F5344CB8AC3E}">
+        <p14:creationId xmlns:p14="http://schemas.microsoft.com/office/powerpoint/2010/main" val="1976403023"/>
+      </p:ext>
+    </p:extLst>
+  </p:cSld>
+  <p:clrMapOvr>
+    <a:masterClrMapping/>
+  </p:clrMapOvr>
+</p:sld>
+</file>
+
+<file path=ppt/slides/slide12.xml><?xml version="1.0" encoding="utf-8"?>
+<p:sld xmlns:a="http://schemas.openxmlformats.org/drawingml/2006/main" xmlns:r="http://schemas.openxmlformats.org/officeDocument/2006/relationships" xmlns:p="http://schemas.openxmlformats.org/presentationml/2006/main" show="0">
+  <p:cSld>
+    <p:spTree>
+      <p:nvGrpSpPr>
+        <p:cNvPr id="1" name="Shape 323"/>
+        <p:cNvGrpSpPr/>
+        <p:nvPr/>
+      </p:nvGrpSpPr>
+      <p:grpSpPr>
+        <a:xfrm>
+          <a:off x="0" y="0"/>
+          <a:ext cx="0" cy="0"/>
+          <a:chOff x="0" y="0"/>
+          <a:chExt cx="0" cy="0"/>
+        </a:xfrm>
+      </p:grpSpPr>
+      <p:sp>
+        <p:nvSpPr>
+          <p:cNvPr id="324" name="Google Shape;324;p47"/>
+          <p:cNvSpPr txBox="1">
+            <a:spLocks noGrp="1"/>
+          </p:cNvSpPr>
+          <p:nvPr>
+            <p:ph type="title"/>
+          </p:nvPr>
+        </p:nvSpPr>
+        <p:spPr>
+          <a:xfrm>
+            <a:off x="226208" y="1"/>
+            <a:ext cx="8520600" cy="464980"/>
+          </a:xfrm>
+          <a:prstGeom prst="rect">
+            <a:avLst/>
+          </a:prstGeom>
+        </p:spPr>
+        <p:txBody>
+          <a:bodyPr spcFirstLastPara="1" wrap="square" lIns="91425" tIns="91425" rIns="91425" bIns="91425" anchor="t" anchorCtr="0">
+            <a:noAutofit/>
+          </a:bodyPr>
+          <a:lstStyle/>
+          <a:p>
+            <a:pPr marL="0" lvl="0" indent="0" algn="ctr" rtl="0">
+              <a:spcBef>
+                <a:spcPts val="0"/>
+              </a:spcBef>
+              <a:spcAft>
+                <a:spcPts val="0"/>
+              </a:spcAft>
+              <a:buNone/>
+            </a:pPr>
+            <a:r>
+              <a:rPr lang="en-US" dirty="0"/>
+              <a:t>Use </a:t>
+            </a:r>
+            <a:r>
+              <a:rPr lang="en-US" sz="2400" dirty="0"/>
+              <a:t>Assigned</a:t>
+            </a:r>
+            <a:r>
+              <a:rPr lang="en-US" dirty="0"/>
+              <a:t> Seat</a:t>
+            </a:r>
+            <a:endParaRPr dirty="0"/>
+          </a:p>
+        </p:txBody>
+      </p:sp>
+      <p:sp>
+        <p:nvSpPr>
+          <p:cNvPr id="326" name="Google Shape;326;p47"/>
+          <p:cNvSpPr txBox="1">
+            <a:spLocks noGrp="1"/>
+          </p:cNvSpPr>
+          <p:nvPr>
+            <p:ph type="sldNum" idx="12"/>
+          </p:nvPr>
+        </p:nvSpPr>
+        <p:spPr>
+          <a:xfrm>
+            <a:off x="8472458" y="4663217"/>
+            <a:ext cx="548700" cy="393600"/>
+          </a:xfrm>
+          <a:prstGeom prst="rect">
+            <a:avLst/>
+          </a:prstGeom>
+        </p:spPr>
+        <p:txBody>
+          <a:bodyPr spcFirstLastPara="1" wrap="square" lIns="91425" tIns="91425" rIns="91425" bIns="91425" anchor="ctr" anchorCtr="0">
+            <a:noAutofit/>
+          </a:bodyPr>
+          <a:lstStyle/>
+          <a:p>
+            <a:pPr marL="0" lvl="0" indent="0" algn="r" rtl="0">
+              <a:spcBef>
+                <a:spcPts val="0"/>
+              </a:spcBef>
+              <a:spcAft>
+                <a:spcPts val="0"/>
+              </a:spcAft>
+              <a:buNone/>
+            </a:pPr>
+            <a:fld id="{00000000-1234-1234-1234-123412341234}" type="slidenum">
+              <a:rPr lang="en"/>
+              <a:t>12</a:t>
+            </a:fld>
+            <a:endParaRPr/>
+          </a:p>
+        </p:txBody>
+      </p:sp>
+      <p:pic>
+        <p:nvPicPr>
+          <p:cNvPr id="4" name="Picture 3">
+            <a:extLst>
+              <a:ext uri="{FF2B5EF4-FFF2-40B4-BE49-F238E27FC236}">
+                <a16:creationId xmlns:a16="http://schemas.microsoft.com/office/drawing/2014/main" id="{DCD752B9-EFAE-AFC1-7D39-6763B89DE8D3}"/>
+              </a:ext>
+            </a:extLst>
+          </p:cNvPr>
+          <p:cNvPicPr>
+            <a:picLocks noChangeAspect="1"/>
+          </p:cNvPicPr>
+          <p:nvPr/>
+        </p:nvPicPr>
+        <p:blipFill>
+          <a:blip r:embed="rId3"/>
+          <a:stretch>
+            <a:fillRect/>
+          </a:stretch>
+        </p:blipFill>
+        <p:spPr>
+          <a:xfrm>
+            <a:off x="0" y="652130"/>
+            <a:ext cx="9144000" cy="4491369"/>
+          </a:xfrm>
+          <a:prstGeom prst="rect">
+            <a:avLst/>
+          </a:prstGeom>
+        </p:spPr>
+      </p:pic>
+    </p:spTree>
+    <p:extLst>
+      <p:ext uri="{BB962C8B-B14F-4D97-AF65-F5344CB8AC3E}">
+        <p14:creationId xmlns:p14="http://schemas.microsoft.com/office/powerpoint/2010/main" val="3365057756"/>
+      </p:ext>
+    </p:extLst>
+  </p:cSld>
+  <p:clrMapOvr>
+    <a:masterClrMapping/>
+  </p:clrMapOvr>
+</p:sld>
+</file>
+
+<file path=ppt/slides/slide2.xml><?xml version="1.0" encoding="utf-8"?>
+<p:sld xmlns:a="http://schemas.openxmlformats.org/drawingml/2006/main" xmlns:r="http://schemas.openxmlformats.org/officeDocument/2006/relationships" xmlns:p="http://schemas.openxmlformats.org/presentationml/2006/main" show="0">
+  <p:cSld>
+    <p:spTree>
+      <p:nvGrpSpPr>
         <p:cNvPr id="1" name="Shape 323"/>
         <p:cNvGrpSpPr/>
         <p:nvPr/>
@@ -6694,7 +8072,7 @@
             </a:pPr>
             <a:fld id="{00000000-1234-1234-1234-123412341234}" type="slidenum">
               <a:rPr lang="en"/>
-              <a:t>1</a:t>
+              <a:t>2</a:t>
             </a:fld>
             <a:endParaRPr/>
           </a:p>
@@ -7090,1379 +8468,6 @@
         </p:txBody>
       </p:sp>
     </p:spTree>
-  </p:cSld>
-  <p:clrMapOvr>
-    <a:masterClrMapping/>
-  </p:clrMapOvr>
-</p:sld>
-</file>
-
-<file path=ppt/slides/slide10.xml><?xml version="1.0" encoding="utf-8"?>
-<p:sld xmlns:a="http://schemas.openxmlformats.org/drawingml/2006/main" xmlns:r="http://schemas.openxmlformats.org/officeDocument/2006/relationships" xmlns:p="http://schemas.openxmlformats.org/presentationml/2006/main" show="0">
-  <p:cSld>
-    <p:spTree>
-      <p:nvGrpSpPr>
-        <p:cNvPr id="1" name="Shape 323"/>
-        <p:cNvGrpSpPr/>
-        <p:nvPr/>
-      </p:nvGrpSpPr>
-      <p:grpSpPr>
-        <a:xfrm>
-          <a:off x="0" y="0"/>
-          <a:ext cx="0" cy="0"/>
-          <a:chOff x="0" y="0"/>
-          <a:chExt cx="0" cy="0"/>
-        </a:xfrm>
-      </p:grpSpPr>
-      <p:sp>
-        <p:nvSpPr>
-          <p:cNvPr id="324" name="Google Shape;324;p47"/>
-          <p:cNvSpPr txBox="1">
-            <a:spLocks noGrp="1"/>
-          </p:cNvSpPr>
-          <p:nvPr>
-            <p:ph type="title"/>
-          </p:nvPr>
-        </p:nvSpPr>
-        <p:spPr>
-          <a:xfrm>
-            <a:off x="226208" y="1"/>
-            <a:ext cx="8520600" cy="464980"/>
-          </a:xfrm>
-          <a:prstGeom prst="rect">
-            <a:avLst/>
-          </a:prstGeom>
-        </p:spPr>
-        <p:txBody>
-          <a:bodyPr spcFirstLastPara="1" wrap="square" lIns="91425" tIns="91425" rIns="91425" bIns="91425" anchor="t" anchorCtr="0">
-            <a:noAutofit/>
-          </a:bodyPr>
-          <a:lstStyle/>
-          <a:p>
-            <a:pPr marL="0" lvl="0" indent="0" algn="ctr" rtl="0">
-              <a:spcBef>
-                <a:spcPts val="0"/>
-              </a:spcBef>
-              <a:spcAft>
-                <a:spcPts val="0"/>
-              </a:spcAft>
-              <a:buNone/>
-            </a:pPr>
-            <a:r>
-              <a:rPr lang="en-US" dirty="0"/>
-              <a:t>Use </a:t>
-            </a:r>
-            <a:r>
-              <a:rPr lang="en-US" sz="2400" dirty="0"/>
-              <a:t>Assigned</a:t>
-            </a:r>
-            <a:r>
-              <a:rPr lang="en-US" dirty="0"/>
-              <a:t> Seat</a:t>
-            </a:r>
-            <a:endParaRPr dirty="0"/>
-          </a:p>
-        </p:txBody>
-      </p:sp>
-      <p:sp>
-        <p:nvSpPr>
-          <p:cNvPr id="326" name="Google Shape;326;p47"/>
-          <p:cNvSpPr txBox="1">
-            <a:spLocks noGrp="1"/>
-          </p:cNvSpPr>
-          <p:nvPr>
-            <p:ph type="sldNum" idx="12"/>
-          </p:nvPr>
-        </p:nvSpPr>
-        <p:spPr>
-          <a:xfrm>
-            <a:off x="8472458" y="4663217"/>
-            <a:ext cx="548700" cy="393600"/>
-          </a:xfrm>
-          <a:prstGeom prst="rect">
-            <a:avLst/>
-          </a:prstGeom>
-        </p:spPr>
-        <p:txBody>
-          <a:bodyPr spcFirstLastPara="1" wrap="square" lIns="91425" tIns="91425" rIns="91425" bIns="91425" anchor="ctr" anchorCtr="0">
-            <a:noAutofit/>
-          </a:bodyPr>
-          <a:lstStyle/>
-          <a:p>
-            <a:pPr marL="0" lvl="0" indent="0" algn="r" rtl="0">
-              <a:spcBef>
-                <a:spcPts val="0"/>
-              </a:spcBef>
-              <a:spcAft>
-                <a:spcPts val="0"/>
-              </a:spcAft>
-              <a:buNone/>
-            </a:pPr>
-            <a:fld id="{00000000-1234-1234-1234-123412341234}" type="slidenum">
-              <a:rPr lang="en"/>
-              <a:t>10</a:t>
-            </a:fld>
-            <a:endParaRPr/>
-          </a:p>
-        </p:txBody>
-      </p:sp>
-      <p:pic>
-        <p:nvPicPr>
-          <p:cNvPr id="6" name="Picture 5">
-            <a:extLst>
-              <a:ext uri="{FF2B5EF4-FFF2-40B4-BE49-F238E27FC236}">
-                <a16:creationId xmlns:a16="http://schemas.microsoft.com/office/drawing/2014/main" id="{DED32793-7C09-E3A3-94E5-B5D46727A1D0}"/>
-              </a:ext>
-            </a:extLst>
-          </p:cNvPr>
-          <p:cNvPicPr>
-            <a:picLocks noChangeAspect="1"/>
-          </p:cNvPicPr>
-          <p:nvPr/>
-        </p:nvPicPr>
-        <p:blipFill>
-          <a:blip r:embed="rId3"/>
-          <a:stretch>
-            <a:fillRect/>
-          </a:stretch>
-        </p:blipFill>
-        <p:spPr>
-          <a:xfrm>
-            <a:off x="-1" y="551663"/>
-            <a:ext cx="9144001" cy="4591837"/>
-          </a:xfrm>
-          <a:prstGeom prst="rect">
-            <a:avLst/>
-          </a:prstGeom>
-        </p:spPr>
-      </p:pic>
-    </p:spTree>
-    <p:extLst>
-      <p:ext uri="{BB962C8B-B14F-4D97-AF65-F5344CB8AC3E}">
-        <p14:creationId xmlns:p14="http://schemas.microsoft.com/office/powerpoint/2010/main" val="4226348449"/>
-      </p:ext>
-    </p:extLst>
-  </p:cSld>
-  <p:clrMapOvr>
-    <a:masterClrMapping/>
-  </p:clrMapOvr>
-</p:sld>
-</file>
-
-<file path=ppt/slides/slide11.xml><?xml version="1.0" encoding="utf-8"?>
-<p:sld xmlns:a="http://schemas.openxmlformats.org/drawingml/2006/main" xmlns:r="http://schemas.openxmlformats.org/officeDocument/2006/relationships" xmlns:p="http://schemas.openxmlformats.org/presentationml/2006/main" show="0">
-  <p:cSld>
-    <p:spTree>
-      <p:nvGrpSpPr>
-        <p:cNvPr id="1" name="Shape 323"/>
-        <p:cNvGrpSpPr/>
-        <p:nvPr/>
-      </p:nvGrpSpPr>
-      <p:grpSpPr>
-        <a:xfrm>
-          <a:off x="0" y="0"/>
-          <a:ext cx="0" cy="0"/>
-          <a:chOff x="0" y="0"/>
-          <a:chExt cx="0" cy="0"/>
-        </a:xfrm>
-      </p:grpSpPr>
-      <p:sp>
-        <p:nvSpPr>
-          <p:cNvPr id="324" name="Google Shape;324;p47"/>
-          <p:cNvSpPr txBox="1">
-            <a:spLocks noGrp="1"/>
-          </p:cNvSpPr>
-          <p:nvPr>
-            <p:ph type="title"/>
-          </p:nvPr>
-        </p:nvSpPr>
-        <p:spPr>
-          <a:xfrm>
-            <a:off x="226208" y="1"/>
-            <a:ext cx="8520600" cy="464980"/>
-          </a:xfrm>
-          <a:prstGeom prst="rect">
-            <a:avLst/>
-          </a:prstGeom>
-        </p:spPr>
-        <p:txBody>
-          <a:bodyPr spcFirstLastPara="1" wrap="square" lIns="91425" tIns="91425" rIns="91425" bIns="91425" anchor="t" anchorCtr="0">
-            <a:noAutofit/>
-          </a:bodyPr>
-          <a:lstStyle/>
-          <a:p>
-            <a:pPr marL="0" lvl="0" indent="0" algn="ctr" rtl="0">
-              <a:spcBef>
-                <a:spcPts val="0"/>
-              </a:spcBef>
-              <a:spcAft>
-                <a:spcPts val="0"/>
-              </a:spcAft>
-              <a:buNone/>
-            </a:pPr>
-            <a:r>
-              <a:rPr lang="en-US" dirty="0"/>
-              <a:t>Use </a:t>
-            </a:r>
-            <a:r>
-              <a:rPr lang="en-US" sz="2400" dirty="0"/>
-              <a:t>Assigned</a:t>
-            </a:r>
-            <a:r>
-              <a:rPr lang="en-US" dirty="0"/>
-              <a:t> Seat</a:t>
-            </a:r>
-            <a:endParaRPr dirty="0"/>
-          </a:p>
-        </p:txBody>
-      </p:sp>
-      <p:sp>
-        <p:nvSpPr>
-          <p:cNvPr id="326" name="Google Shape;326;p47"/>
-          <p:cNvSpPr txBox="1">
-            <a:spLocks noGrp="1"/>
-          </p:cNvSpPr>
-          <p:nvPr>
-            <p:ph type="sldNum" idx="12"/>
-          </p:nvPr>
-        </p:nvSpPr>
-        <p:spPr>
-          <a:xfrm>
-            <a:off x="8472458" y="4663217"/>
-            <a:ext cx="548700" cy="393600"/>
-          </a:xfrm>
-          <a:prstGeom prst="rect">
-            <a:avLst/>
-          </a:prstGeom>
-        </p:spPr>
-        <p:txBody>
-          <a:bodyPr spcFirstLastPara="1" wrap="square" lIns="91425" tIns="91425" rIns="91425" bIns="91425" anchor="ctr" anchorCtr="0">
-            <a:noAutofit/>
-          </a:bodyPr>
-          <a:lstStyle/>
-          <a:p>
-            <a:pPr marL="0" lvl="0" indent="0" algn="r" rtl="0">
-              <a:spcBef>
-                <a:spcPts val="0"/>
-              </a:spcBef>
-              <a:spcAft>
-                <a:spcPts val="0"/>
-              </a:spcAft>
-              <a:buNone/>
-            </a:pPr>
-            <a:fld id="{00000000-1234-1234-1234-123412341234}" type="slidenum">
-              <a:rPr lang="en"/>
-              <a:t>11</a:t>
-            </a:fld>
-            <a:endParaRPr/>
-          </a:p>
-        </p:txBody>
-      </p:sp>
-      <p:pic>
-        <p:nvPicPr>
-          <p:cNvPr id="3" name="Picture 2">
-            <a:extLst>
-              <a:ext uri="{FF2B5EF4-FFF2-40B4-BE49-F238E27FC236}">
-                <a16:creationId xmlns:a16="http://schemas.microsoft.com/office/drawing/2014/main" id="{92DE4AAC-70FE-A114-5258-F5B22EDDED45}"/>
-              </a:ext>
-            </a:extLst>
-          </p:cNvPr>
-          <p:cNvPicPr>
-            <a:picLocks noChangeAspect="1"/>
-          </p:cNvPicPr>
-          <p:nvPr/>
-        </p:nvPicPr>
-        <p:blipFill>
-          <a:blip r:embed="rId3"/>
-          <a:stretch>
-            <a:fillRect/>
-          </a:stretch>
-        </p:blipFill>
-        <p:spPr>
-          <a:xfrm>
-            <a:off x="0" y="716280"/>
-            <a:ext cx="9144000" cy="4427218"/>
-          </a:xfrm>
-          <a:prstGeom prst="rect">
-            <a:avLst/>
-          </a:prstGeom>
-        </p:spPr>
-      </p:pic>
-    </p:spTree>
-    <p:extLst>
-      <p:ext uri="{BB962C8B-B14F-4D97-AF65-F5344CB8AC3E}">
-        <p14:creationId xmlns:p14="http://schemas.microsoft.com/office/powerpoint/2010/main" val="1976403023"/>
-      </p:ext>
-    </p:extLst>
-  </p:cSld>
-  <p:clrMapOvr>
-    <a:masterClrMapping/>
-  </p:clrMapOvr>
-</p:sld>
-</file>
-
-<file path=ppt/slides/slide12.xml><?xml version="1.0" encoding="utf-8"?>
-<p:sld xmlns:a="http://schemas.openxmlformats.org/drawingml/2006/main" xmlns:r="http://schemas.openxmlformats.org/officeDocument/2006/relationships" xmlns:p="http://schemas.openxmlformats.org/presentationml/2006/main" show="0">
-  <p:cSld>
-    <p:spTree>
-      <p:nvGrpSpPr>
-        <p:cNvPr id="1" name="Shape 323"/>
-        <p:cNvGrpSpPr/>
-        <p:nvPr/>
-      </p:nvGrpSpPr>
-      <p:grpSpPr>
-        <a:xfrm>
-          <a:off x="0" y="0"/>
-          <a:ext cx="0" cy="0"/>
-          <a:chOff x="0" y="0"/>
-          <a:chExt cx="0" cy="0"/>
-        </a:xfrm>
-      </p:grpSpPr>
-      <p:sp>
-        <p:nvSpPr>
-          <p:cNvPr id="324" name="Google Shape;324;p47"/>
-          <p:cNvSpPr txBox="1">
-            <a:spLocks noGrp="1"/>
-          </p:cNvSpPr>
-          <p:nvPr>
-            <p:ph type="title"/>
-          </p:nvPr>
-        </p:nvSpPr>
-        <p:spPr>
-          <a:xfrm>
-            <a:off x="226208" y="1"/>
-            <a:ext cx="8520600" cy="464980"/>
-          </a:xfrm>
-          <a:prstGeom prst="rect">
-            <a:avLst/>
-          </a:prstGeom>
-        </p:spPr>
-        <p:txBody>
-          <a:bodyPr spcFirstLastPara="1" wrap="square" lIns="91425" tIns="91425" rIns="91425" bIns="91425" anchor="t" anchorCtr="0">
-            <a:noAutofit/>
-          </a:bodyPr>
-          <a:lstStyle/>
-          <a:p>
-            <a:pPr marL="0" lvl="0" indent="0" algn="ctr" rtl="0">
-              <a:spcBef>
-                <a:spcPts val="0"/>
-              </a:spcBef>
-              <a:spcAft>
-                <a:spcPts val="0"/>
-              </a:spcAft>
-              <a:buNone/>
-            </a:pPr>
-            <a:r>
-              <a:rPr lang="en-US" dirty="0"/>
-              <a:t>Use </a:t>
-            </a:r>
-            <a:r>
-              <a:rPr lang="en-US" sz="2400" dirty="0"/>
-              <a:t>Assigned</a:t>
-            </a:r>
-            <a:r>
-              <a:rPr lang="en-US" dirty="0"/>
-              <a:t> Seat</a:t>
-            </a:r>
-            <a:endParaRPr dirty="0"/>
-          </a:p>
-        </p:txBody>
-      </p:sp>
-      <p:sp>
-        <p:nvSpPr>
-          <p:cNvPr id="326" name="Google Shape;326;p47"/>
-          <p:cNvSpPr txBox="1">
-            <a:spLocks noGrp="1"/>
-          </p:cNvSpPr>
-          <p:nvPr>
-            <p:ph type="sldNum" idx="12"/>
-          </p:nvPr>
-        </p:nvSpPr>
-        <p:spPr>
-          <a:xfrm>
-            <a:off x="8472458" y="4663217"/>
-            <a:ext cx="548700" cy="393600"/>
-          </a:xfrm>
-          <a:prstGeom prst="rect">
-            <a:avLst/>
-          </a:prstGeom>
-        </p:spPr>
-        <p:txBody>
-          <a:bodyPr spcFirstLastPara="1" wrap="square" lIns="91425" tIns="91425" rIns="91425" bIns="91425" anchor="ctr" anchorCtr="0">
-            <a:noAutofit/>
-          </a:bodyPr>
-          <a:lstStyle/>
-          <a:p>
-            <a:pPr marL="0" lvl="0" indent="0" algn="r" rtl="0">
-              <a:spcBef>
-                <a:spcPts val="0"/>
-              </a:spcBef>
-              <a:spcAft>
-                <a:spcPts val="0"/>
-              </a:spcAft>
-              <a:buNone/>
-            </a:pPr>
-            <a:fld id="{00000000-1234-1234-1234-123412341234}" type="slidenum">
-              <a:rPr lang="en"/>
-              <a:t>12</a:t>
-            </a:fld>
-            <a:endParaRPr/>
-          </a:p>
-        </p:txBody>
-      </p:sp>
-      <p:pic>
-        <p:nvPicPr>
-          <p:cNvPr id="4" name="Picture 3">
-            <a:extLst>
-              <a:ext uri="{FF2B5EF4-FFF2-40B4-BE49-F238E27FC236}">
-                <a16:creationId xmlns:a16="http://schemas.microsoft.com/office/drawing/2014/main" id="{DCD752B9-EFAE-AFC1-7D39-6763B89DE8D3}"/>
-              </a:ext>
-            </a:extLst>
-          </p:cNvPr>
-          <p:cNvPicPr>
-            <a:picLocks noChangeAspect="1"/>
-          </p:cNvPicPr>
-          <p:nvPr/>
-        </p:nvPicPr>
-        <p:blipFill>
-          <a:blip r:embed="rId3"/>
-          <a:stretch>
-            <a:fillRect/>
-          </a:stretch>
-        </p:blipFill>
-        <p:spPr>
-          <a:xfrm>
-            <a:off x="0" y="652130"/>
-            <a:ext cx="9144000" cy="4491369"/>
-          </a:xfrm>
-          <a:prstGeom prst="rect">
-            <a:avLst/>
-          </a:prstGeom>
-        </p:spPr>
-      </p:pic>
-    </p:spTree>
-    <p:extLst>
-      <p:ext uri="{BB962C8B-B14F-4D97-AF65-F5344CB8AC3E}">
-        <p14:creationId xmlns:p14="http://schemas.microsoft.com/office/powerpoint/2010/main" val="3365057756"/>
-      </p:ext>
-    </p:extLst>
-  </p:cSld>
-  <p:clrMapOvr>
-    <a:masterClrMapping/>
-  </p:clrMapOvr>
-</p:sld>
-</file>
-
-<file path=ppt/slides/slide2.xml><?xml version="1.0" encoding="utf-8"?>
-<p:sld xmlns:a="http://schemas.openxmlformats.org/drawingml/2006/main" xmlns:r="http://schemas.openxmlformats.org/officeDocument/2006/relationships" xmlns:p="http://schemas.openxmlformats.org/presentationml/2006/main" show="0">
-  <p:cSld>
-    <p:spTree>
-      <p:nvGrpSpPr>
-        <p:cNvPr id="1" name="Shape 323">
-          <a:extLst>
-            <a:ext uri="{FF2B5EF4-FFF2-40B4-BE49-F238E27FC236}">
-              <a16:creationId xmlns:a16="http://schemas.microsoft.com/office/drawing/2014/main" id="{19512066-5980-8A8B-BE30-C4FB3AC72235}"/>
-            </a:ext>
-          </a:extLst>
-        </p:cNvPr>
-        <p:cNvGrpSpPr/>
-        <p:nvPr/>
-      </p:nvGrpSpPr>
-      <p:grpSpPr>
-        <a:xfrm>
-          <a:off x="0" y="0"/>
-          <a:ext cx="0" cy="0"/>
-          <a:chOff x="0" y="0"/>
-          <a:chExt cx="0" cy="0"/>
-        </a:xfrm>
-      </p:grpSpPr>
-      <p:sp>
-        <p:nvSpPr>
-          <p:cNvPr id="324" name="Google Shape;324;p47">
-            <a:extLst>
-              <a:ext uri="{FF2B5EF4-FFF2-40B4-BE49-F238E27FC236}">
-                <a16:creationId xmlns:a16="http://schemas.microsoft.com/office/drawing/2014/main" id="{CDF56279-13BE-3C44-BBEF-E7DC5D1E88D2}"/>
-              </a:ext>
-            </a:extLst>
-          </p:cNvPr>
-          <p:cNvSpPr txBox="1">
-            <a:spLocks noGrp="1"/>
-          </p:cNvSpPr>
-          <p:nvPr>
-            <p:ph type="title"/>
-          </p:nvPr>
-        </p:nvSpPr>
-        <p:spPr>
-          <a:xfrm>
-            <a:off x="300016" y="269197"/>
-            <a:ext cx="8520600" cy="623700"/>
-          </a:xfrm>
-          <a:prstGeom prst="rect">
-            <a:avLst/>
-          </a:prstGeom>
-        </p:spPr>
-        <p:txBody>
-          <a:bodyPr spcFirstLastPara="1" wrap="square" lIns="91425" tIns="91425" rIns="91425" bIns="91425" anchor="t" anchorCtr="0">
-            <a:noAutofit/>
-          </a:bodyPr>
-          <a:lstStyle/>
-          <a:p>
-            <a:pPr marL="0" lvl="0" indent="0" algn="ctr" rtl="0">
-              <a:spcBef>
-                <a:spcPts val="0"/>
-              </a:spcBef>
-              <a:spcAft>
-                <a:spcPts val="0"/>
-              </a:spcAft>
-              <a:buNone/>
-            </a:pPr>
-            <a:r>
-              <a:rPr lang="en-US" dirty="0"/>
-              <a:t>GCIS – Software Development and Problem Solving</a:t>
-            </a:r>
-            <a:endParaRPr dirty="0"/>
-          </a:p>
-        </p:txBody>
-      </p:sp>
-      <p:sp>
-        <p:nvSpPr>
-          <p:cNvPr id="325" name="Google Shape;325;p47">
-            <a:extLst>
-              <a:ext uri="{FF2B5EF4-FFF2-40B4-BE49-F238E27FC236}">
-                <a16:creationId xmlns:a16="http://schemas.microsoft.com/office/drawing/2014/main" id="{5A9661D1-8430-BF80-279A-41B28CA04273}"/>
-              </a:ext>
-            </a:extLst>
-          </p:cNvPr>
-          <p:cNvSpPr txBox="1">
-            <a:spLocks noGrp="1"/>
-          </p:cNvSpPr>
-          <p:nvPr>
-            <p:ph type="body" idx="1"/>
-          </p:nvPr>
-        </p:nvSpPr>
-        <p:spPr>
-          <a:xfrm>
-            <a:off x="91445" y="1758316"/>
-            <a:ext cx="4000496" cy="1378401"/>
-          </a:xfrm>
-          <a:prstGeom prst="rect">
-            <a:avLst/>
-          </a:prstGeom>
-        </p:spPr>
-        <p:txBody>
-          <a:bodyPr spcFirstLastPara="1" wrap="square" lIns="91425" tIns="91425" rIns="91425" bIns="91425" anchor="ctr" anchorCtr="0">
-            <a:noAutofit/>
-          </a:bodyPr>
-          <a:lstStyle/>
-          <a:p>
-            <a:pPr marL="146050" indent="0">
-              <a:buNone/>
-            </a:pPr>
-            <a:r>
-              <a:rPr lang="en-US" sz="1600" dirty="0"/>
-              <a:t>Take Quiz 1.2: Testing Array &amp; Exception</a:t>
-            </a:r>
-          </a:p>
-          <a:p>
-            <a:pPr marL="146050" indent="0">
-              <a:buNone/>
-            </a:pPr>
-            <a:r>
-              <a:rPr lang="en-US" sz="1600" dirty="0">
-                <a:solidFill>
-                  <a:schemeClr val="tx1"/>
-                </a:solidFill>
-              </a:rPr>
-              <a:t>Password – camelCase</a:t>
-            </a:r>
-            <a:endParaRPr sz="1600" dirty="0">
-              <a:solidFill>
-                <a:schemeClr val="tx1"/>
-              </a:solidFill>
-            </a:endParaRPr>
-          </a:p>
-        </p:txBody>
-      </p:sp>
-      <p:sp>
-        <p:nvSpPr>
-          <p:cNvPr id="326" name="Google Shape;326;p47">
-            <a:extLst>
-              <a:ext uri="{FF2B5EF4-FFF2-40B4-BE49-F238E27FC236}">
-                <a16:creationId xmlns:a16="http://schemas.microsoft.com/office/drawing/2014/main" id="{8A14E227-935A-FBD8-6BD5-CBCE8D13EE84}"/>
-              </a:ext>
-            </a:extLst>
-          </p:cNvPr>
-          <p:cNvSpPr txBox="1">
-            <a:spLocks noGrp="1"/>
-          </p:cNvSpPr>
-          <p:nvPr>
-            <p:ph type="sldNum" idx="12"/>
-          </p:nvPr>
-        </p:nvSpPr>
-        <p:spPr>
-          <a:xfrm>
-            <a:off x="8472458" y="4663217"/>
-            <a:ext cx="548700" cy="393600"/>
-          </a:xfrm>
-          <a:prstGeom prst="rect">
-            <a:avLst/>
-          </a:prstGeom>
-        </p:spPr>
-        <p:txBody>
-          <a:bodyPr spcFirstLastPara="1" wrap="square" lIns="91425" tIns="91425" rIns="91425" bIns="91425" anchor="ctr" anchorCtr="0">
-            <a:noAutofit/>
-          </a:bodyPr>
-          <a:lstStyle/>
-          <a:p>
-            <a:pPr marL="0" lvl="0" indent="0" algn="r" rtl="0">
-              <a:spcBef>
-                <a:spcPts val="0"/>
-              </a:spcBef>
-              <a:spcAft>
-                <a:spcPts val="0"/>
-              </a:spcAft>
-              <a:buNone/>
-            </a:pPr>
-            <a:fld id="{00000000-1234-1234-1234-123412341234}" type="slidenum">
-              <a:rPr lang="en"/>
-              <a:t>2</a:t>
-            </a:fld>
-            <a:endParaRPr/>
-          </a:p>
-        </p:txBody>
-      </p:sp>
-      <p:sp>
-        <p:nvSpPr>
-          <p:cNvPr id="2" name="TextBox 1">
-            <a:extLst>
-              <a:ext uri="{FF2B5EF4-FFF2-40B4-BE49-F238E27FC236}">
-                <a16:creationId xmlns:a16="http://schemas.microsoft.com/office/drawing/2014/main" id="{AE960589-7B12-D7F7-6452-D45441D8CA95}"/>
-              </a:ext>
-            </a:extLst>
-          </p:cNvPr>
-          <p:cNvSpPr txBox="1"/>
-          <p:nvPr/>
-        </p:nvSpPr>
-        <p:spPr>
-          <a:xfrm>
-            <a:off x="-11684" y="1287037"/>
-            <a:ext cx="9144000" cy="338555"/>
-          </a:xfrm>
-          <a:prstGeom prst="rect">
-            <a:avLst/>
-          </a:prstGeom>
-          <a:solidFill>
-            <a:srgbClr val="FFC000"/>
-          </a:solidFill>
-        </p:spPr>
-        <p:txBody>
-          <a:bodyPr wrap="square" rtlCol="0">
-            <a:spAutoFit/>
-          </a:bodyPr>
-          <a:lstStyle/>
-          <a:p>
-            <a:r>
-              <a:rPr lang="en-US" dirty="0"/>
-              <a:t>Quiz</a:t>
-            </a:r>
-          </a:p>
-        </p:txBody>
-      </p:sp>
-      <p:sp>
-        <p:nvSpPr>
-          <p:cNvPr id="3" name="TextBox 2">
-            <a:extLst>
-              <a:ext uri="{FF2B5EF4-FFF2-40B4-BE49-F238E27FC236}">
-                <a16:creationId xmlns:a16="http://schemas.microsoft.com/office/drawing/2014/main" id="{4FD526CA-3FDB-A5C2-36D9-69A3252D5E9A}"/>
-              </a:ext>
-            </a:extLst>
-          </p:cNvPr>
-          <p:cNvSpPr txBox="1"/>
-          <p:nvPr/>
-        </p:nvSpPr>
-        <p:spPr>
-          <a:xfrm>
-            <a:off x="0" y="3507404"/>
-            <a:ext cx="9144000" cy="307777"/>
-          </a:xfrm>
-          <a:prstGeom prst="rect">
-            <a:avLst/>
-          </a:prstGeom>
-          <a:solidFill>
-            <a:srgbClr val="FFC000"/>
-          </a:solidFill>
-        </p:spPr>
-        <p:txBody>
-          <a:bodyPr wrap="square" rtlCol="0">
-            <a:spAutoFit/>
-          </a:bodyPr>
-          <a:lstStyle/>
-          <a:p>
-            <a:r>
-              <a:rPr lang="en-US" dirty="0"/>
-              <a:t>Next </a:t>
-            </a:r>
-            <a:r>
-              <a:rPr lang="en-US" dirty="0">
-                <a:sym typeface="Wingdings" panose="05000000000000000000" pitchFamily="2" charset="2"/>
-              </a:rPr>
-              <a:t> </a:t>
-            </a:r>
-            <a:endParaRPr lang="en-US" dirty="0"/>
-          </a:p>
-        </p:txBody>
-      </p:sp>
-      <p:sp>
-        <p:nvSpPr>
-          <p:cNvPr id="4" name="Google Shape;325;p47">
-            <a:extLst>
-              <a:ext uri="{FF2B5EF4-FFF2-40B4-BE49-F238E27FC236}">
-                <a16:creationId xmlns:a16="http://schemas.microsoft.com/office/drawing/2014/main" id="{DC50CCB1-5AFE-1F52-8B22-87EB927965B4}"/>
-              </a:ext>
-            </a:extLst>
-          </p:cNvPr>
-          <p:cNvSpPr txBox="1">
-            <a:spLocks/>
-          </p:cNvSpPr>
-          <p:nvPr/>
-        </p:nvSpPr>
-        <p:spPr>
-          <a:xfrm>
-            <a:off x="-5842" y="3848100"/>
-            <a:ext cx="9149842" cy="1208717"/>
-          </a:xfrm>
-          <a:prstGeom prst="rect">
-            <a:avLst/>
-          </a:prstGeom>
-          <a:noFill/>
-          <a:ln>
-            <a:noFill/>
-          </a:ln>
-        </p:spPr>
-        <p:txBody>
-          <a:bodyPr spcFirstLastPara="1" wrap="square" lIns="91425" tIns="91425" rIns="91425" bIns="91425" anchor="ctr" anchorCtr="0">
-            <a:noAutofit/>
-          </a:bodyPr>
-          <a:lstStyle>
-            <a:defPPr marR="0" lvl="0" algn="l" rtl="0">
-              <a:lnSpc>
-                <a:spcPct val="100000"/>
-              </a:lnSpc>
-              <a:spcBef>
-                <a:spcPts val="0"/>
-              </a:spcBef>
-              <a:spcAft>
-                <a:spcPts val="0"/>
-              </a:spcAft>
-            </a:defPPr>
-            <a:lvl1pPr marL="457200" marR="0" lvl="0" indent="-311150" algn="l" rtl="0">
-              <a:lnSpc>
-                <a:spcPct val="115000"/>
-              </a:lnSpc>
-              <a:spcBef>
-                <a:spcPts val="0"/>
-              </a:spcBef>
-              <a:spcAft>
-                <a:spcPts val="0"/>
-              </a:spcAft>
-              <a:buClr>
-                <a:schemeClr val="dk2"/>
-              </a:buClr>
-              <a:buSzPts val="1300"/>
-              <a:buFont typeface="Roboto"/>
-              <a:buChar char="●"/>
-              <a:defRPr sz="1300" b="0" i="0" u="none" strike="noStrike" cap="none">
-                <a:solidFill>
-                  <a:schemeClr val="dk2"/>
-                </a:solidFill>
-                <a:latin typeface="Roboto"/>
-                <a:ea typeface="Roboto"/>
-                <a:cs typeface="Roboto"/>
-                <a:sym typeface="Roboto"/>
-              </a:defRPr>
-            </a:lvl1pPr>
-            <a:lvl2pPr marL="914400" marR="0" lvl="1" indent="-298450" algn="l" rtl="0">
-              <a:lnSpc>
-                <a:spcPct val="115000"/>
-              </a:lnSpc>
-              <a:spcBef>
-                <a:spcPts val="1600"/>
-              </a:spcBef>
-              <a:spcAft>
-                <a:spcPts val="0"/>
-              </a:spcAft>
-              <a:buClr>
-                <a:schemeClr val="dk2"/>
-              </a:buClr>
-              <a:buSzPts val="1100"/>
-              <a:buFont typeface="Roboto"/>
-              <a:buChar char="○"/>
-              <a:defRPr sz="1100" b="0" i="0" u="none" strike="noStrike" cap="none">
-                <a:solidFill>
-                  <a:schemeClr val="dk2"/>
-                </a:solidFill>
-                <a:latin typeface="Roboto"/>
-                <a:ea typeface="Roboto"/>
-                <a:cs typeface="Roboto"/>
-                <a:sym typeface="Roboto"/>
-              </a:defRPr>
-            </a:lvl2pPr>
-            <a:lvl3pPr marL="1371600" marR="0" lvl="2" indent="-298450" algn="l" rtl="0">
-              <a:lnSpc>
-                <a:spcPct val="115000"/>
-              </a:lnSpc>
-              <a:spcBef>
-                <a:spcPts val="1600"/>
-              </a:spcBef>
-              <a:spcAft>
-                <a:spcPts val="0"/>
-              </a:spcAft>
-              <a:buClr>
-                <a:schemeClr val="dk2"/>
-              </a:buClr>
-              <a:buSzPts val="1100"/>
-              <a:buFont typeface="Roboto"/>
-              <a:buChar char="■"/>
-              <a:defRPr sz="1100" b="0" i="0" u="none" strike="noStrike" cap="none">
-                <a:solidFill>
-                  <a:schemeClr val="dk2"/>
-                </a:solidFill>
-                <a:latin typeface="Roboto"/>
-                <a:ea typeface="Roboto"/>
-                <a:cs typeface="Roboto"/>
-                <a:sym typeface="Roboto"/>
-              </a:defRPr>
-            </a:lvl3pPr>
-            <a:lvl4pPr marL="1828800" marR="0" lvl="3" indent="-298450" algn="l" rtl="0">
-              <a:lnSpc>
-                <a:spcPct val="115000"/>
-              </a:lnSpc>
-              <a:spcBef>
-                <a:spcPts val="1600"/>
-              </a:spcBef>
-              <a:spcAft>
-                <a:spcPts val="0"/>
-              </a:spcAft>
-              <a:buClr>
-                <a:schemeClr val="dk2"/>
-              </a:buClr>
-              <a:buSzPts val="1100"/>
-              <a:buFont typeface="Roboto"/>
-              <a:buChar char="●"/>
-              <a:defRPr sz="1100" b="0" i="0" u="none" strike="noStrike" cap="none">
-                <a:solidFill>
-                  <a:schemeClr val="dk2"/>
-                </a:solidFill>
-                <a:latin typeface="Roboto"/>
-                <a:ea typeface="Roboto"/>
-                <a:cs typeface="Roboto"/>
-                <a:sym typeface="Roboto"/>
-              </a:defRPr>
-            </a:lvl4pPr>
-            <a:lvl5pPr marL="2286000" marR="0" lvl="4" indent="-298450" algn="l" rtl="0">
-              <a:lnSpc>
-                <a:spcPct val="115000"/>
-              </a:lnSpc>
-              <a:spcBef>
-                <a:spcPts val="1600"/>
-              </a:spcBef>
-              <a:spcAft>
-                <a:spcPts val="0"/>
-              </a:spcAft>
-              <a:buClr>
-                <a:schemeClr val="dk2"/>
-              </a:buClr>
-              <a:buSzPts val="1100"/>
-              <a:buFont typeface="Roboto"/>
-              <a:buChar char="○"/>
-              <a:defRPr sz="1100" b="0" i="0" u="none" strike="noStrike" cap="none">
-                <a:solidFill>
-                  <a:schemeClr val="dk2"/>
-                </a:solidFill>
-                <a:latin typeface="Roboto"/>
-                <a:ea typeface="Roboto"/>
-                <a:cs typeface="Roboto"/>
-                <a:sym typeface="Roboto"/>
-              </a:defRPr>
-            </a:lvl5pPr>
-            <a:lvl6pPr marL="2743200" marR="0" lvl="5" indent="-298450" algn="l" rtl="0">
-              <a:lnSpc>
-                <a:spcPct val="115000"/>
-              </a:lnSpc>
-              <a:spcBef>
-                <a:spcPts val="1600"/>
-              </a:spcBef>
-              <a:spcAft>
-                <a:spcPts val="0"/>
-              </a:spcAft>
-              <a:buClr>
-                <a:schemeClr val="dk2"/>
-              </a:buClr>
-              <a:buSzPts val="1100"/>
-              <a:buFont typeface="Roboto"/>
-              <a:buChar char="■"/>
-              <a:defRPr sz="1100" b="0" i="0" u="none" strike="noStrike" cap="none">
-                <a:solidFill>
-                  <a:schemeClr val="dk2"/>
-                </a:solidFill>
-                <a:latin typeface="Roboto"/>
-                <a:ea typeface="Roboto"/>
-                <a:cs typeface="Roboto"/>
-                <a:sym typeface="Roboto"/>
-              </a:defRPr>
-            </a:lvl6pPr>
-            <a:lvl7pPr marL="3200400" marR="0" lvl="6" indent="-298450" algn="l" rtl="0">
-              <a:lnSpc>
-                <a:spcPct val="115000"/>
-              </a:lnSpc>
-              <a:spcBef>
-                <a:spcPts val="1600"/>
-              </a:spcBef>
-              <a:spcAft>
-                <a:spcPts val="0"/>
-              </a:spcAft>
-              <a:buClr>
-                <a:schemeClr val="dk2"/>
-              </a:buClr>
-              <a:buSzPts val="1100"/>
-              <a:buFont typeface="Roboto"/>
-              <a:buChar char="●"/>
-              <a:defRPr sz="1100" b="0" i="0" u="none" strike="noStrike" cap="none">
-                <a:solidFill>
-                  <a:schemeClr val="dk2"/>
-                </a:solidFill>
-                <a:latin typeface="Roboto"/>
-                <a:ea typeface="Roboto"/>
-                <a:cs typeface="Roboto"/>
-                <a:sym typeface="Roboto"/>
-              </a:defRPr>
-            </a:lvl7pPr>
-            <a:lvl8pPr marL="3657600" marR="0" lvl="7" indent="-298450" algn="l" rtl="0">
-              <a:lnSpc>
-                <a:spcPct val="115000"/>
-              </a:lnSpc>
-              <a:spcBef>
-                <a:spcPts val="1600"/>
-              </a:spcBef>
-              <a:spcAft>
-                <a:spcPts val="0"/>
-              </a:spcAft>
-              <a:buClr>
-                <a:schemeClr val="dk2"/>
-              </a:buClr>
-              <a:buSzPts val="1100"/>
-              <a:buFont typeface="Roboto"/>
-              <a:buChar char="○"/>
-              <a:defRPr sz="1100" b="0" i="0" u="none" strike="noStrike" cap="none">
-                <a:solidFill>
-                  <a:schemeClr val="dk2"/>
-                </a:solidFill>
-                <a:latin typeface="Roboto"/>
-                <a:ea typeface="Roboto"/>
-                <a:cs typeface="Roboto"/>
-                <a:sym typeface="Roboto"/>
-              </a:defRPr>
-            </a:lvl8pPr>
-            <a:lvl9pPr marL="4114800" marR="0" lvl="8" indent="-298450" algn="l" rtl="0">
-              <a:lnSpc>
-                <a:spcPct val="115000"/>
-              </a:lnSpc>
-              <a:spcBef>
-                <a:spcPts val="1600"/>
-              </a:spcBef>
-              <a:spcAft>
-                <a:spcPts val="1600"/>
-              </a:spcAft>
-              <a:buClr>
-                <a:schemeClr val="dk2"/>
-              </a:buClr>
-              <a:buSzPts val="1100"/>
-              <a:buFont typeface="Roboto"/>
-              <a:buChar char="■"/>
-              <a:defRPr sz="1100" b="0" i="0" u="none" strike="noStrike" cap="none">
-                <a:solidFill>
-                  <a:schemeClr val="dk2"/>
-                </a:solidFill>
-                <a:latin typeface="Roboto"/>
-                <a:ea typeface="Roboto"/>
-                <a:cs typeface="Roboto"/>
-                <a:sym typeface="Roboto"/>
-              </a:defRPr>
-            </a:lvl9pPr>
-          </a:lstStyle>
-          <a:p>
-            <a:pPr marL="0" indent="0">
-              <a:spcAft>
-                <a:spcPts val="1600"/>
-              </a:spcAft>
-              <a:buNone/>
-            </a:pPr>
-            <a:r>
-              <a:rPr lang="en-US" sz="1400" dirty="0"/>
-              <a:t>After completing the Quiz </a:t>
-            </a:r>
-          </a:p>
-          <a:p>
-            <a:pPr marL="342900" indent="-342900">
-              <a:spcAft>
-                <a:spcPts val="1600"/>
-              </a:spcAft>
-            </a:pPr>
-            <a:r>
-              <a:rPr lang="en-US" sz="1200" dirty="0"/>
-              <a:t>Accept GitHub Classroom Assignment for Unit 02</a:t>
-            </a:r>
-          </a:p>
-          <a:p>
-            <a:pPr marL="342900" indent="-342900">
-              <a:spcAft>
-                <a:spcPts val="1600"/>
-              </a:spcAft>
-            </a:pPr>
-            <a:r>
-              <a:rPr lang="en-US" sz="1200" dirty="0"/>
-              <a:t>Clone/pull GitHub classroom repo for Unit 02 under </a:t>
-            </a:r>
-            <a:r>
-              <a:rPr lang="en-US" sz="1200" dirty="0" err="1"/>
-              <a:t>softdevII</a:t>
-            </a:r>
-            <a:r>
-              <a:rPr lang="en-US" sz="1200" dirty="0"/>
-              <a:t> folder</a:t>
-            </a:r>
-            <a:endParaRPr lang="en-US" sz="1200" dirty="0">
-              <a:solidFill>
-                <a:schemeClr val="tx1"/>
-              </a:solidFill>
-            </a:endParaRPr>
-          </a:p>
-        </p:txBody>
-      </p:sp>
-      <p:sp>
-        <p:nvSpPr>
-          <p:cNvPr id="5" name="Google Shape;325;p47">
-            <a:extLst>
-              <a:ext uri="{FF2B5EF4-FFF2-40B4-BE49-F238E27FC236}">
-                <a16:creationId xmlns:a16="http://schemas.microsoft.com/office/drawing/2014/main" id="{7B85466C-6200-EE66-9396-7DECA70CDF53}"/>
-              </a:ext>
-            </a:extLst>
-          </p:cNvPr>
-          <p:cNvSpPr txBox="1">
-            <a:spLocks/>
-          </p:cNvSpPr>
-          <p:nvPr/>
-        </p:nvSpPr>
-        <p:spPr>
-          <a:xfrm>
-            <a:off x="4303618" y="1737005"/>
-            <a:ext cx="4516998" cy="1378400"/>
-          </a:xfrm>
-          <a:prstGeom prst="rect">
-            <a:avLst/>
-          </a:prstGeom>
-          <a:noFill/>
-          <a:ln>
-            <a:noFill/>
-          </a:ln>
-        </p:spPr>
-        <p:txBody>
-          <a:bodyPr spcFirstLastPara="1" wrap="square" lIns="91425" tIns="91425" rIns="91425" bIns="91425" anchor="ctr" anchorCtr="0">
-            <a:noAutofit/>
-          </a:bodyPr>
-          <a:lstStyle>
-            <a:defPPr marR="0" lvl="0" algn="l" rtl="0">
-              <a:lnSpc>
-                <a:spcPct val="100000"/>
-              </a:lnSpc>
-              <a:spcBef>
-                <a:spcPts val="0"/>
-              </a:spcBef>
-              <a:spcAft>
-                <a:spcPts val="0"/>
-              </a:spcAft>
-            </a:defPPr>
-            <a:lvl1pPr marL="457200" marR="0" lvl="0" indent="-311150" algn="l" rtl="0">
-              <a:lnSpc>
-                <a:spcPct val="115000"/>
-              </a:lnSpc>
-              <a:spcBef>
-                <a:spcPts val="0"/>
-              </a:spcBef>
-              <a:spcAft>
-                <a:spcPts val="0"/>
-              </a:spcAft>
-              <a:buClr>
-                <a:schemeClr val="dk2"/>
-              </a:buClr>
-              <a:buSzPts val="1300"/>
-              <a:buFont typeface="Roboto"/>
-              <a:buChar char="●"/>
-              <a:defRPr sz="1300" b="0" i="0" u="none" strike="noStrike" cap="none">
-                <a:solidFill>
-                  <a:schemeClr val="dk2"/>
-                </a:solidFill>
-                <a:latin typeface="Roboto"/>
-                <a:ea typeface="Roboto"/>
-                <a:cs typeface="Roboto"/>
-                <a:sym typeface="Roboto"/>
-              </a:defRPr>
-            </a:lvl1pPr>
-            <a:lvl2pPr marL="914400" marR="0" lvl="1" indent="-298450" algn="l" rtl="0">
-              <a:lnSpc>
-                <a:spcPct val="115000"/>
-              </a:lnSpc>
-              <a:spcBef>
-                <a:spcPts val="1600"/>
-              </a:spcBef>
-              <a:spcAft>
-                <a:spcPts val="0"/>
-              </a:spcAft>
-              <a:buClr>
-                <a:schemeClr val="dk2"/>
-              </a:buClr>
-              <a:buSzPts val="1100"/>
-              <a:buFont typeface="Roboto"/>
-              <a:buChar char="○"/>
-              <a:defRPr sz="1100" b="0" i="0" u="none" strike="noStrike" cap="none">
-                <a:solidFill>
-                  <a:schemeClr val="dk2"/>
-                </a:solidFill>
-                <a:latin typeface="Roboto"/>
-                <a:ea typeface="Roboto"/>
-                <a:cs typeface="Roboto"/>
-                <a:sym typeface="Roboto"/>
-              </a:defRPr>
-            </a:lvl2pPr>
-            <a:lvl3pPr marL="1371600" marR="0" lvl="2" indent="-298450" algn="l" rtl="0">
-              <a:lnSpc>
-                <a:spcPct val="115000"/>
-              </a:lnSpc>
-              <a:spcBef>
-                <a:spcPts val="1600"/>
-              </a:spcBef>
-              <a:spcAft>
-                <a:spcPts val="0"/>
-              </a:spcAft>
-              <a:buClr>
-                <a:schemeClr val="dk2"/>
-              </a:buClr>
-              <a:buSzPts val="1100"/>
-              <a:buFont typeface="Roboto"/>
-              <a:buChar char="■"/>
-              <a:defRPr sz="1100" b="0" i="0" u="none" strike="noStrike" cap="none">
-                <a:solidFill>
-                  <a:schemeClr val="dk2"/>
-                </a:solidFill>
-                <a:latin typeface="Roboto"/>
-                <a:ea typeface="Roboto"/>
-                <a:cs typeface="Roboto"/>
-                <a:sym typeface="Roboto"/>
-              </a:defRPr>
-            </a:lvl3pPr>
-            <a:lvl4pPr marL="1828800" marR="0" lvl="3" indent="-298450" algn="l" rtl="0">
-              <a:lnSpc>
-                <a:spcPct val="115000"/>
-              </a:lnSpc>
-              <a:spcBef>
-                <a:spcPts val="1600"/>
-              </a:spcBef>
-              <a:spcAft>
-                <a:spcPts val="0"/>
-              </a:spcAft>
-              <a:buClr>
-                <a:schemeClr val="dk2"/>
-              </a:buClr>
-              <a:buSzPts val="1100"/>
-              <a:buFont typeface="Roboto"/>
-              <a:buChar char="●"/>
-              <a:defRPr sz="1100" b="0" i="0" u="none" strike="noStrike" cap="none">
-                <a:solidFill>
-                  <a:schemeClr val="dk2"/>
-                </a:solidFill>
-                <a:latin typeface="Roboto"/>
-                <a:ea typeface="Roboto"/>
-                <a:cs typeface="Roboto"/>
-                <a:sym typeface="Roboto"/>
-              </a:defRPr>
-            </a:lvl4pPr>
-            <a:lvl5pPr marL="2286000" marR="0" lvl="4" indent="-298450" algn="l" rtl="0">
-              <a:lnSpc>
-                <a:spcPct val="115000"/>
-              </a:lnSpc>
-              <a:spcBef>
-                <a:spcPts val="1600"/>
-              </a:spcBef>
-              <a:spcAft>
-                <a:spcPts val="0"/>
-              </a:spcAft>
-              <a:buClr>
-                <a:schemeClr val="dk2"/>
-              </a:buClr>
-              <a:buSzPts val="1100"/>
-              <a:buFont typeface="Roboto"/>
-              <a:buChar char="○"/>
-              <a:defRPr sz="1100" b="0" i="0" u="none" strike="noStrike" cap="none">
-                <a:solidFill>
-                  <a:schemeClr val="dk2"/>
-                </a:solidFill>
-                <a:latin typeface="Roboto"/>
-                <a:ea typeface="Roboto"/>
-                <a:cs typeface="Roboto"/>
-                <a:sym typeface="Roboto"/>
-              </a:defRPr>
-            </a:lvl5pPr>
-            <a:lvl6pPr marL="2743200" marR="0" lvl="5" indent="-298450" algn="l" rtl="0">
-              <a:lnSpc>
-                <a:spcPct val="115000"/>
-              </a:lnSpc>
-              <a:spcBef>
-                <a:spcPts val="1600"/>
-              </a:spcBef>
-              <a:spcAft>
-                <a:spcPts val="0"/>
-              </a:spcAft>
-              <a:buClr>
-                <a:schemeClr val="dk2"/>
-              </a:buClr>
-              <a:buSzPts val="1100"/>
-              <a:buFont typeface="Roboto"/>
-              <a:buChar char="■"/>
-              <a:defRPr sz="1100" b="0" i="0" u="none" strike="noStrike" cap="none">
-                <a:solidFill>
-                  <a:schemeClr val="dk2"/>
-                </a:solidFill>
-                <a:latin typeface="Roboto"/>
-                <a:ea typeface="Roboto"/>
-                <a:cs typeface="Roboto"/>
-                <a:sym typeface="Roboto"/>
-              </a:defRPr>
-            </a:lvl6pPr>
-            <a:lvl7pPr marL="3200400" marR="0" lvl="6" indent="-298450" algn="l" rtl="0">
-              <a:lnSpc>
-                <a:spcPct val="115000"/>
-              </a:lnSpc>
-              <a:spcBef>
-                <a:spcPts val="1600"/>
-              </a:spcBef>
-              <a:spcAft>
-                <a:spcPts val="0"/>
-              </a:spcAft>
-              <a:buClr>
-                <a:schemeClr val="dk2"/>
-              </a:buClr>
-              <a:buSzPts val="1100"/>
-              <a:buFont typeface="Roboto"/>
-              <a:buChar char="●"/>
-              <a:defRPr sz="1100" b="0" i="0" u="none" strike="noStrike" cap="none">
-                <a:solidFill>
-                  <a:schemeClr val="dk2"/>
-                </a:solidFill>
-                <a:latin typeface="Roboto"/>
-                <a:ea typeface="Roboto"/>
-                <a:cs typeface="Roboto"/>
-                <a:sym typeface="Roboto"/>
-              </a:defRPr>
-            </a:lvl7pPr>
-            <a:lvl8pPr marL="3657600" marR="0" lvl="7" indent="-298450" algn="l" rtl="0">
-              <a:lnSpc>
-                <a:spcPct val="115000"/>
-              </a:lnSpc>
-              <a:spcBef>
-                <a:spcPts val="1600"/>
-              </a:spcBef>
-              <a:spcAft>
-                <a:spcPts val="0"/>
-              </a:spcAft>
-              <a:buClr>
-                <a:schemeClr val="dk2"/>
-              </a:buClr>
-              <a:buSzPts val="1100"/>
-              <a:buFont typeface="Roboto"/>
-              <a:buChar char="○"/>
-              <a:defRPr sz="1100" b="0" i="0" u="none" strike="noStrike" cap="none">
-                <a:solidFill>
-                  <a:schemeClr val="dk2"/>
-                </a:solidFill>
-                <a:latin typeface="Roboto"/>
-                <a:ea typeface="Roboto"/>
-                <a:cs typeface="Roboto"/>
-                <a:sym typeface="Roboto"/>
-              </a:defRPr>
-            </a:lvl8pPr>
-            <a:lvl9pPr marL="4114800" marR="0" lvl="8" indent="-298450" algn="l" rtl="0">
-              <a:lnSpc>
-                <a:spcPct val="115000"/>
-              </a:lnSpc>
-              <a:spcBef>
-                <a:spcPts val="1600"/>
-              </a:spcBef>
-              <a:spcAft>
-                <a:spcPts val="1600"/>
-              </a:spcAft>
-              <a:buClr>
-                <a:schemeClr val="dk2"/>
-              </a:buClr>
-              <a:buSzPts val="1100"/>
-              <a:buFont typeface="Roboto"/>
-              <a:buChar char="■"/>
-              <a:defRPr sz="1100" b="0" i="0" u="none" strike="noStrike" cap="none">
-                <a:solidFill>
-                  <a:schemeClr val="dk2"/>
-                </a:solidFill>
-                <a:latin typeface="Roboto"/>
-                <a:ea typeface="Roboto"/>
-                <a:cs typeface="Roboto"/>
-                <a:sym typeface="Roboto"/>
-              </a:defRPr>
-            </a:lvl9pPr>
-          </a:lstStyle>
-          <a:p>
-            <a:pPr marL="146050" indent="0">
-              <a:buNone/>
-            </a:pPr>
-            <a:r>
-              <a:rPr lang="en-US" sz="1600" dirty="0"/>
-              <a:t>Quiz 1.3 Java Classes</a:t>
-            </a:r>
-          </a:p>
-          <a:p>
-            <a:pPr marL="146050" indent="0">
-              <a:buNone/>
-            </a:pPr>
-            <a:r>
-              <a:rPr lang="en-US" sz="1600" dirty="0">
-                <a:solidFill>
-                  <a:schemeClr val="tx1"/>
-                </a:solidFill>
-              </a:rPr>
-              <a:t>Password - </a:t>
-            </a:r>
-            <a:r>
-              <a:rPr lang="en-US" sz="1600" dirty="0" err="1">
-                <a:solidFill>
-                  <a:schemeClr val="tx1"/>
-                </a:solidFill>
-              </a:rPr>
-              <a:t>goTo</a:t>
-            </a:r>
-            <a:r>
-              <a:rPr lang="en-US" sz="1600" dirty="0">
-                <a:solidFill>
-                  <a:schemeClr val="tx1"/>
-                </a:solidFill>
-              </a:rPr>
-              <a:t>(Java)Class</a:t>
-            </a:r>
-          </a:p>
-        </p:txBody>
-      </p:sp>
-    </p:spTree>
-    <p:extLst>
-      <p:ext uri="{BB962C8B-B14F-4D97-AF65-F5344CB8AC3E}">
-        <p14:creationId xmlns:p14="http://schemas.microsoft.com/office/powerpoint/2010/main" val="674272117"/>
-      </p:ext>
-    </p:extLst>
   </p:cSld>
   <p:clrMapOvr>
     <a:masterClrMapping/>

--- a/Presentation/Announcement.pptx
+++ b/Presentation/Announcement.pptx
@@ -8,8 +8,8 @@
     <p:notesMasterId r:id="rId14"/>
   </p:notesMasterIdLst>
   <p:sldIdLst>
-    <p:sldId id="286" r:id="rId2"/>
-    <p:sldId id="276" r:id="rId3"/>
+    <p:sldId id="276" r:id="rId2"/>
+    <p:sldId id="286" r:id="rId3"/>
     <p:sldId id="278" r:id="rId4"/>
     <p:sldId id="281" r:id="rId5"/>
     <p:sldId id="287" r:id="rId6"/>
@@ -739,13 +739,7 @@
   <p:cSld>
     <p:spTree>
       <p:nvGrpSpPr>
-        <p:cNvPr id="1" name="Shape 320">
-          <a:extLst>
-            <a:ext uri="{FF2B5EF4-FFF2-40B4-BE49-F238E27FC236}">
-              <a16:creationId xmlns:a16="http://schemas.microsoft.com/office/drawing/2014/main" id="{5E82D901-7A14-0382-4365-722182C687A8}"/>
-            </a:ext>
-          </a:extLst>
-        </p:cNvPr>
+        <p:cNvPr id="1" name="Shape 320"/>
         <p:cNvGrpSpPr/>
         <p:nvPr/>
       </p:nvGrpSpPr>
@@ -759,13 +753,7 @@
       </p:grpSpPr>
       <p:sp>
         <p:nvSpPr>
-          <p:cNvPr id="321" name="Google Shape;321;g8f52c9b70a_3_0:notes">
-            <a:extLst>
-              <a:ext uri="{FF2B5EF4-FFF2-40B4-BE49-F238E27FC236}">
-                <a16:creationId xmlns:a16="http://schemas.microsoft.com/office/drawing/2014/main" id="{B8D16220-AF50-7601-71A9-4952749D32CB}"/>
-              </a:ext>
-            </a:extLst>
-          </p:cNvPr>
+          <p:cNvPr id="321" name="Google Shape;321;g8f52c9b70a_3_0:notes"/>
           <p:cNvSpPr>
             <a:spLocks noGrp="1" noRot="1" noChangeAspect="1"/>
           </p:cNvSpPr>
@@ -806,13 +794,7 @@
       </p:sp>
       <p:sp>
         <p:nvSpPr>
-          <p:cNvPr id="322" name="Google Shape;322;g8f52c9b70a_3_0:notes">
-            <a:extLst>
-              <a:ext uri="{FF2B5EF4-FFF2-40B4-BE49-F238E27FC236}">
-                <a16:creationId xmlns:a16="http://schemas.microsoft.com/office/drawing/2014/main" id="{AEA302D2-52D7-97D7-BF6C-781234E92D43}"/>
-              </a:ext>
-            </a:extLst>
-          </p:cNvPr>
+          <p:cNvPr id="322" name="Google Shape;322;g8f52c9b70a_3_0:notes"/>
           <p:cNvSpPr txBox="1">
             <a:spLocks noGrp="1"/>
           </p:cNvSpPr>
@@ -843,11 +825,6 @@
         </p:txBody>
       </p:sp>
     </p:spTree>
-    <p:extLst>
-      <p:ext uri="{BB962C8B-B14F-4D97-AF65-F5344CB8AC3E}">
-        <p14:creationId xmlns:p14="http://schemas.microsoft.com/office/powerpoint/2010/main" val="2483524941"/>
-      </p:ext>
-    </p:extLst>
   </p:cSld>
   <p:clrMapOvr>
     <a:masterClrMapping/>
@@ -1169,7 +1146,13 @@
   <p:cSld>
     <p:spTree>
       <p:nvGrpSpPr>
-        <p:cNvPr id="1" name="Shape 320"/>
+        <p:cNvPr id="1" name="Shape 320">
+          <a:extLst>
+            <a:ext uri="{FF2B5EF4-FFF2-40B4-BE49-F238E27FC236}">
+              <a16:creationId xmlns:a16="http://schemas.microsoft.com/office/drawing/2014/main" id="{5E82D901-7A14-0382-4365-722182C687A8}"/>
+            </a:ext>
+          </a:extLst>
+        </p:cNvPr>
         <p:cNvGrpSpPr/>
         <p:nvPr/>
       </p:nvGrpSpPr>
@@ -1183,7 +1166,13 @@
       </p:grpSpPr>
       <p:sp>
         <p:nvSpPr>
-          <p:cNvPr id="321" name="Google Shape;321;g8f52c9b70a_3_0:notes"/>
+          <p:cNvPr id="321" name="Google Shape;321;g8f52c9b70a_3_0:notes">
+            <a:extLst>
+              <a:ext uri="{FF2B5EF4-FFF2-40B4-BE49-F238E27FC236}">
+                <a16:creationId xmlns:a16="http://schemas.microsoft.com/office/drawing/2014/main" id="{B8D16220-AF50-7601-71A9-4952749D32CB}"/>
+              </a:ext>
+            </a:extLst>
+          </p:cNvPr>
           <p:cNvSpPr>
             <a:spLocks noGrp="1" noRot="1" noChangeAspect="1"/>
           </p:cNvSpPr>
@@ -1224,7 +1213,13 @@
       </p:sp>
       <p:sp>
         <p:nvSpPr>
-          <p:cNvPr id="322" name="Google Shape;322;g8f52c9b70a_3_0:notes"/>
+          <p:cNvPr id="322" name="Google Shape;322;g8f52c9b70a_3_0:notes">
+            <a:extLst>
+              <a:ext uri="{FF2B5EF4-FFF2-40B4-BE49-F238E27FC236}">
+                <a16:creationId xmlns:a16="http://schemas.microsoft.com/office/drawing/2014/main" id="{AEA302D2-52D7-97D7-BF6C-781234E92D43}"/>
+              </a:ext>
+            </a:extLst>
+          </p:cNvPr>
           <p:cNvSpPr txBox="1">
             <a:spLocks noGrp="1"/>
           </p:cNvSpPr>
@@ -1255,6 +1250,11 @@
         </p:txBody>
       </p:sp>
     </p:spTree>
+    <p:extLst>
+      <p:ext uri="{BB962C8B-B14F-4D97-AF65-F5344CB8AC3E}">
+        <p14:creationId xmlns:p14="http://schemas.microsoft.com/office/powerpoint/2010/main" val="2483524941"/>
+      </p:ext>
+    </p:extLst>
   </p:cSld>
   <p:clrMapOvr>
     <a:masterClrMapping/>
@@ -6529,6 +6529,1040 @@
   <p:cSld>
     <p:spTree>
       <p:nvGrpSpPr>
+        <p:cNvPr id="1" name="Shape 323"/>
+        <p:cNvGrpSpPr/>
+        <p:nvPr/>
+      </p:nvGrpSpPr>
+      <p:grpSpPr>
+        <a:xfrm>
+          <a:off x="0" y="0"/>
+          <a:ext cx="0" cy="0"/>
+          <a:chOff x="0" y="0"/>
+          <a:chExt cx="0" cy="0"/>
+        </a:xfrm>
+      </p:grpSpPr>
+      <p:sp>
+        <p:nvSpPr>
+          <p:cNvPr id="324" name="Google Shape;324;p47"/>
+          <p:cNvSpPr txBox="1">
+            <a:spLocks noGrp="1"/>
+          </p:cNvSpPr>
+          <p:nvPr>
+            <p:ph type="title"/>
+          </p:nvPr>
+        </p:nvSpPr>
+        <p:spPr>
+          <a:xfrm>
+            <a:off x="305858" y="273819"/>
+            <a:ext cx="8520600" cy="623700"/>
+          </a:xfrm>
+          <a:prstGeom prst="rect">
+            <a:avLst/>
+          </a:prstGeom>
+        </p:spPr>
+        <p:txBody>
+          <a:bodyPr spcFirstLastPara="1" wrap="square" lIns="91425" tIns="91425" rIns="91425" bIns="91425" anchor="t" anchorCtr="0">
+            <a:noAutofit/>
+          </a:bodyPr>
+          <a:lstStyle/>
+          <a:p>
+            <a:pPr marL="0" lvl="0" indent="0" algn="ctr" rtl="0">
+              <a:spcBef>
+                <a:spcPts val="0"/>
+              </a:spcBef>
+              <a:spcAft>
+                <a:spcPts val="0"/>
+              </a:spcAft>
+              <a:buNone/>
+            </a:pPr>
+            <a:r>
+              <a:rPr lang="en-US" dirty="0"/>
+              <a:t>GCIS – Software Development and Problem Solving</a:t>
+            </a:r>
+            <a:endParaRPr dirty="0"/>
+          </a:p>
+        </p:txBody>
+      </p:sp>
+      <p:sp>
+        <p:nvSpPr>
+          <p:cNvPr id="325" name="Google Shape;325;p47"/>
+          <p:cNvSpPr txBox="1">
+            <a:spLocks noGrp="1"/>
+          </p:cNvSpPr>
+          <p:nvPr>
+            <p:ph type="body" idx="1"/>
+          </p:nvPr>
+        </p:nvSpPr>
+        <p:spPr>
+          <a:xfrm>
+            <a:off x="-5842" y="1721147"/>
+            <a:ext cx="9149842" cy="1226403"/>
+          </a:xfrm>
+          <a:prstGeom prst="rect">
+            <a:avLst/>
+          </a:prstGeom>
+        </p:spPr>
+        <p:txBody>
+          <a:bodyPr spcFirstLastPara="1" wrap="square" lIns="91425" tIns="91425" rIns="91425" bIns="91425" anchor="ctr" anchorCtr="0">
+            <a:noAutofit/>
+          </a:bodyPr>
+          <a:lstStyle/>
+          <a:p>
+            <a:pPr marL="146050" indent="0" algn="ctr">
+              <a:buNone/>
+            </a:pPr>
+            <a:r>
+              <a:rPr lang="en-US" sz="2400" dirty="0"/>
+              <a:t>Take </a:t>
+            </a:r>
+            <a:r>
+              <a:rPr lang="pl-PL" sz="2400" dirty="0"/>
+              <a:t>Quiz </a:t>
+            </a:r>
+            <a:r>
+              <a:rPr lang="en-US" sz="2400" dirty="0"/>
+              <a:t>3</a:t>
+            </a:r>
+            <a:r>
+              <a:rPr lang="pl-PL" sz="2400" dirty="0"/>
+              <a:t>.</a:t>
+            </a:r>
+            <a:r>
+              <a:rPr lang="en-US" sz="2400" dirty="0"/>
+              <a:t>1</a:t>
+            </a:r>
+            <a:r>
+              <a:rPr lang="pl-PL" sz="2400" dirty="0"/>
+              <a:t>: </a:t>
+            </a:r>
+            <a:r>
+              <a:rPr lang="en-US" sz="2400" dirty="0" err="1"/>
+              <a:t>Inheritence</a:t>
+            </a:r>
+            <a:endParaRPr lang="en-US" sz="2400" dirty="0"/>
+          </a:p>
+          <a:p>
+            <a:pPr algn="ctr"/>
+            <a:r>
+              <a:rPr lang="en-US" sz="2400" dirty="0"/>
+              <a:t>Password - </a:t>
+            </a:r>
+            <a:r>
+              <a:rPr lang="en-US" sz="2400" dirty="0" err="1"/>
+              <a:t>AmVerySmol</a:t>
+            </a:r>
+            <a:endParaRPr sz="2400" dirty="0"/>
+          </a:p>
+        </p:txBody>
+      </p:sp>
+      <p:sp>
+        <p:nvSpPr>
+          <p:cNvPr id="326" name="Google Shape;326;p47"/>
+          <p:cNvSpPr txBox="1">
+            <a:spLocks noGrp="1"/>
+          </p:cNvSpPr>
+          <p:nvPr>
+            <p:ph type="sldNum" idx="12"/>
+          </p:nvPr>
+        </p:nvSpPr>
+        <p:spPr>
+          <a:xfrm>
+            <a:off x="8472458" y="4663217"/>
+            <a:ext cx="548700" cy="393600"/>
+          </a:xfrm>
+          <a:prstGeom prst="rect">
+            <a:avLst/>
+          </a:prstGeom>
+        </p:spPr>
+        <p:txBody>
+          <a:bodyPr spcFirstLastPara="1" wrap="square" lIns="91425" tIns="91425" rIns="91425" bIns="91425" anchor="ctr" anchorCtr="0">
+            <a:noAutofit/>
+          </a:bodyPr>
+          <a:lstStyle/>
+          <a:p>
+            <a:pPr marL="0" lvl="0" indent="0" algn="r" rtl="0">
+              <a:spcBef>
+                <a:spcPts val="0"/>
+              </a:spcBef>
+              <a:spcAft>
+                <a:spcPts val="0"/>
+              </a:spcAft>
+              <a:buNone/>
+            </a:pPr>
+            <a:fld id="{00000000-1234-1234-1234-123412341234}" type="slidenum">
+              <a:rPr lang="en"/>
+              <a:t>1</a:t>
+            </a:fld>
+            <a:endParaRPr/>
+          </a:p>
+        </p:txBody>
+      </p:sp>
+      <p:sp>
+        <p:nvSpPr>
+          <p:cNvPr id="2" name="TextBox 1">
+            <a:extLst>
+              <a:ext uri="{FF2B5EF4-FFF2-40B4-BE49-F238E27FC236}">
+                <a16:creationId xmlns:a16="http://schemas.microsoft.com/office/drawing/2014/main" id="{DCC33EBB-1C9D-B9A9-88E6-F3466077417F}"/>
+              </a:ext>
+            </a:extLst>
+          </p:cNvPr>
+          <p:cNvSpPr txBox="1"/>
+          <p:nvPr/>
+        </p:nvSpPr>
+        <p:spPr>
+          <a:xfrm>
+            <a:off x="0" y="1277369"/>
+            <a:ext cx="9144000" cy="307777"/>
+          </a:xfrm>
+          <a:prstGeom prst="rect">
+            <a:avLst/>
+          </a:prstGeom>
+          <a:solidFill>
+            <a:srgbClr val="FFC000"/>
+          </a:solidFill>
+        </p:spPr>
+        <p:txBody>
+          <a:bodyPr wrap="square" rtlCol="0">
+            <a:spAutoFit/>
+          </a:bodyPr>
+          <a:lstStyle/>
+          <a:p>
+            <a:r>
+              <a:rPr lang="en-US" dirty="0"/>
+              <a:t>Quiz</a:t>
+            </a:r>
+          </a:p>
+        </p:txBody>
+      </p:sp>
+      <p:sp>
+        <p:nvSpPr>
+          <p:cNvPr id="3" name="TextBox 2">
+            <a:extLst>
+              <a:ext uri="{FF2B5EF4-FFF2-40B4-BE49-F238E27FC236}">
+                <a16:creationId xmlns:a16="http://schemas.microsoft.com/office/drawing/2014/main" id="{64C19922-6A1B-1404-5104-DC43E4C67861}"/>
+              </a:ext>
+            </a:extLst>
+          </p:cNvPr>
+          <p:cNvSpPr txBox="1"/>
+          <p:nvPr/>
+        </p:nvSpPr>
+        <p:spPr>
+          <a:xfrm>
+            <a:off x="-5842" y="3031063"/>
+            <a:ext cx="9144000" cy="307777"/>
+          </a:xfrm>
+          <a:prstGeom prst="rect">
+            <a:avLst/>
+          </a:prstGeom>
+          <a:solidFill>
+            <a:srgbClr val="FFC000"/>
+          </a:solidFill>
+        </p:spPr>
+        <p:txBody>
+          <a:bodyPr wrap="square" rtlCol="0">
+            <a:spAutoFit/>
+          </a:bodyPr>
+          <a:lstStyle/>
+          <a:p>
+            <a:r>
+              <a:rPr lang="en-US" dirty="0"/>
+              <a:t>Next </a:t>
+            </a:r>
+            <a:r>
+              <a:rPr lang="en-US" dirty="0">
+                <a:sym typeface="Wingdings" panose="05000000000000000000" pitchFamily="2" charset="2"/>
+              </a:rPr>
+              <a:t> </a:t>
+            </a:r>
+            <a:endParaRPr lang="en-US" dirty="0"/>
+          </a:p>
+        </p:txBody>
+      </p:sp>
+      <p:sp>
+        <p:nvSpPr>
+          <p:cNvPr id="4" name="Google Shape;325;p47">
+            <a:extLst>
+              <a:ext uri="{FF2B5EF4-FFF2-40B4-BE49-F238E27FC236}">
+                <a16:creationId xmlns:a16="http://schemas.microsoft.com/office/drawing/2014/main" id="{E455EA58-F56D-AF58-E97D-95A77E0AB6CF}"/>
+              </a:ext>
+            </a:extLst>
+          </p:cNvPr>
+          <p:cNvSpPr txBox="1">
+            <a:spLocks/>
+          </p:cNvSpPr>
+          <p:nvPr/>
+        </p:nvSpPr>
+        <p:spPr>
+          <a:xfrm>
+            <a:off x="-5842" y="3422352"/>
+            <a:ext cx="9149842" cy="1721148"/>
+          </a:xfrm>
+          <a:prstGeom prst="rect">
+            <a:avLst/>
+          </a:prstGeom>
+          <a:noFill/>
+          <a:ln>
+            <a:noFill/>
+          </a:ln>
+        </p:spPr>
+        <p:txBody>
+          <a:bodyPr spcFirstLastPara="1" wrap="square" lIns="91425" tIns="91425" rIns="91425" bIns="91425" anchor="ctr" anchorCtr="0">
+            <a:noAutofit/>
+          </a:bodyPr>
+          <a:lstStyle>
+            <a:defPPr marR="0" lvl="0" algn="l" rtl="0">
+              <a:lnSpc>
+                <a:spcPct val="100000"/>
+              </a:lnSpc>
+              <a:spcBef>
+                <a:spcPts val="0"/>
+              </a:spcBef>
+              <a:spcAft>
+                <a:spcPts val="0"/>
+              </a:spcAft>
+            </a:defPPr>
+            <a:lvl1pPr marL="457200" marR="0" lvl="0" indent="-311150" algn="l" rtl="0">
+              <a:lnSpc>
+                <a:spcPct val="115000"/>
+              </a:lnSpc>
+              <a:spcBef>
+                <a:spcPts val="0"/>
+              </a:spcBef>
+              <a:spcAft>
+                <a:spcPts val="0"/>
+              </a:spcAft>
+              <a:buClr>
+                <a:schemeClr val="dk2"/>
+              </a:buClr>
+              <a:buSzPts val="1300"/>
+              <a:buFont typeface="Roboto"/>
+              <a:buChar char="●"/>
+              <a:defRPr sz="1300" b="0" i="0" u="none" strike="noStrike" cap="none">
+                <a:solidFill>
+                  <a:schemeClr val="dk2"/>
+                </a:solidFill>
+                <a:latin typeface="Roboto"/>
+                <a:ea typeface="Roboto"/>
+                <a:cs typeface="Roboto"/>
+                <a:sym typeface="Roboto"/>
+              </a:defRPr>
+            </a:lvl1pPr>
+            <a:lvl2pPr marL="914400" marR="0" lvl="1" indent="-298450" algn="l" rtl="0">
+              <a:lnSpc>
+                <a:spcPct val="115000"/>
+              </a:lnSpc>
+              <a:spcBef>
+                <a:spcPts val="1600"/>
+              </a:spcBef>
+              <a:spcAft>
+                <a:spcPts val="0"/>
+              </a:spcAft>
+              <a:buClr>
+                <a:schemeClr val="dk2"/>
+              </a:buClr>
+              <a:buSzPts val="1100"/>
+              <a:buFont typeface="Roboto"/>
+              <a:buChar char="○"/>
+              <a:defRPr sz="1100" b="0" i="0" u="none" strike="noStrike" cap="none">
+                <a:solidFill>
+                  <a:schemeClr val="dk2"/>
+                </a:solidFill>
+                <a:latin typeface="Roboto"/>
+                <a:ea typeface="Roboto"/>
+                <a:cs typeface="Roboto"/>
+                <a:sym typeface="Roboto"/>
+              </a:defRPr>
+            </a:lvl2pPr>
+            <a:lvl3pPr marL="1371600" marR="0" lvl="2" indent="-298450" algn="l" rtl="0">
+              <a:lnSpc>
+                <a:spcPct val="115000"/>
+              </a:lnSpc>
+              <a:spcBef>
+                <a:spcPts val="1600"/>
+              </a:spcBef>
+              <a:spcAft>
+                <a:spcPts val="0"/>
+              </a:spcAft>
+              <a:buClr>
+                <a:schemeClr val="dk2"/>
+              </a:buClr>
+              <a:buSzPts val="1100"/>
+              <a:buFont typeface="Roboto"/>
+              <a:buChar char="■"/>
+              <a:defRPr sz="1100" b="0" i="0" u="none" strike="noStrike" cap="none">
+                <a:solidFill>
+                  <a:schemeClr val="dk2"/>
+                </a:solidFill>
+                <a:latin typeface="Roboto"/>
+                <a:ea typeface="Roboto"/>
+                <a:cs typeface="Roboto"/>
+                <a:sym typeface="Roboto"/>
+              </a:defRPr>
+            </a:lvl3pPr>
+            <a:lvl4pPr marL="1828800" marR="0" lvl="3" indent="-298450" algn="l" rtl="0">
+              <a:lnSpc>
+                <a:spcPct val="115000"/>
+              </a:lnSpc>
+              <a:spcBef>
+                <a:spcPts val="1600"/>
+              </a:spcBef>
+              <a:spcAft>
+                <a:spcPts val="0"/>
+              </a:spcAft>
+              <a:buClr>
+                <a:schemeClr val="dk2"/>
+              </a:buClr>
+              <a:buSzPts val="1100"/>
+              <a:buFont typeface="Roboto"/>
+              <a:buChar char="●"/>
+              <a:defRPr sz="1100" b="0" i="0" u="none" strike="noStrike" cap="none">
+                <a:solidFill>
+                  <a:schemeClr val="dk2"/>
+                </a:solidFill>
+                <a:latin typeface="Roboto"/>
+                <a:ea typeface="Roboto"/>
+                <a:cs typeface="Roboto"/>
+                <a:sym typeface="Roboto"/>
+              </a:defRPr>
+            </a:lvl4pPr>
+            <a:lvl5pPr marL="2286000" marR="0" lvl="4" indent="-298450" algn="l" rtl="0">
+              <a:lnSpc>
+                <a:spcPct val="115000"/>
+              </a:lnSpc>
+              <a:spcBef>
+                <a:spcPts val="1600"/>
+              </a:spcBef>
+              <a:spcAft>
+                <a:spcPts val="0"/>
+              </a:spcAft>
+              <a:buClr>
+                <a:schemeClr val="dk2"/>
+              </a:buClr>
+              <a:buSzPts val="1100"/>
+              <a:buFont typeface="Roboto"/>
+              <a:buChar char="○"/>
+              <a:defRPr sz="1100" b="0" i="0" u="none" strike="noStrike" cap="none">
+                <a:solidFill>
+                  <a:schemeClr val="dk2"/>
+                </a:solidFill>
+                <a:latin typeface="Roboto"/>
+                <a:ea typeface="Roboto"/>
+                <a:cs typeface="Roboto"/>
+                <a:sym typeface="Roboto"/>
+              </a:defRPr>
+            </a:lvl5pPr>
+            <a:lvl6pPr marL="2743200" marR="0" lvl="5" indent="-298450" algn="l" rtl="0">
+              <a:lnSpc>
+                <a:spcPct val="115000"/>
+              </a:lnSpc>
+              <a:spcBef>
+                <a:spcPts val="1600"/>
+              </a:spcBef>
+              <a:spcAft>
+                <a:spcPts val="0"/>
+              </a:spcAft>
+              <a:buClr>
+                <a:schemeClr val="dk2"/>
+              </a:buClr>
+              <a:buSzPts val="1100"/>
+              <a:buFont typeface="Roboto"/>
+              <a:buChar char="■"/>
+              <a:defRPr sz="1100" b="0" i="0" u="none" strike="noStrike" cap="none">
+                <a:solidFill>
+                  <a:schemeClr val="dk2"/>
+                </a:solidFill>
+                <a:latin typeface="Roboto"/>
+                <a:ea typeface="Roboto"/>
+                <a:cs typeface="Roboto"/>
+                <a:sym typeface="Roboto"/>
+              </a:defRPr>
+            </a:lvl6pPr>
+            <a:lvl7pPr marL="3200400" marR="0" lvl="6" indent="-298450" algn="l" rtl="0">
+              <a:lnSpc>
+                <a:spcPct val="115000"/>
+              </a:lnSpc>
+              <a:spcBef>
+                <a:spcPts val="1600"/>
+              </a:spcBef>
+              <a:spcAft>
+                <a:spcPts val="0"/>
+              </a:spcAft>
+              <a:buClr>
+                <a:schemeClr val="dk2"/>
+              </a:buClr>
+              <a:buSzPts val="1100"/>
+              <a:buFont typeface="Roboto"/>
+              <a:buChar char="●"/>
+              <a:defRPr sz="1100" b="0" i="0" u="none" strike="noStrike" cap="none">
+                <a:solidFill>
+                  <a:schemeClr val="dk2"/>
+                </a:solidFill>
+                <a:latin typeface="Roboto"/>
+                <a:ea typeface="Roboto"/>
+                <a:cs typeface="Roboto"/>
+                <a:sym typeface="Roboto"/>
+              </a:defRPr>
+            </a:lvl7pPr>
+            <a:lvl8pPr marL="3657600" marR="0" lvl="7" indent="-298450" algn="l" rtl="0">
+              <a:lnSpc>
+                <a:spcPct val="115000"/>
+              </a:lnSpc>
+              <a:spcBef>
+                <a:spcPts val="1600"/>
+              </a:spcBef>
+              <a:spcAft>
+                <a:spcPts val="0"/>
+              </a:spcAft>
+              <a:buClr>
+                <a:schemeClr val="dk2"/>
+              </a:buClr>
+              <a:buSzPts val="1100"/>
+              <a:buFont typeface="Roboto"/>
+              <a:buChar char="○"/>
+              <a:defRPr sz="1100" b="0" i="0" u="none" strike="noStrike" cap="none">
+                <a:solidFill>
+                  <a:schemeClr val="dk2"/>
+                </a:solidFill>
+                <a:latin typeface="Roboto"/>
+                <a:ea typeface="Roboto"/>
+                <a:cs typeface="Roboto"/>
+                <a:sym typeface="Roboto"/>
+              </a:defRPr>
+            </a:lvl8pPr>
+            <a:lvl9pPr marL="4114800" marR="0" lvl="8" indent="-298450" algn="l" rtl="0">
+              <a:lnSpc>
+                <a:spcPct val="115000"/>
+              </a:lnSpc>
+              <a:spcBef>
+                <a:spcPts val="1600"/>
+              </a:spcBef>
+              <a:spcAft>
+                <a:spcPts val="1600"/>
+              </a:spcAft>
+              <a:buClr>
+                <a:schemeClr val="dk2"/>
+              </a:buClr>
+              <a:buSzPts val="1100"/>
+              <a:buFont typeface="Roboto"/>
+              <a:buChar char="■"/>
+              <a:defRPr sz="1100" b="0" i="0" u="none" strike="noStrike" cap="none">
+                <a:solidFill>
+                  <a:schemeClr val="dk2"/>
+                </a:solidFill>
+                <a:latin typeface="Roboto"/>
+                <a:ea typeface="Roboto"/>
+                <a:cs typeface="Roboto"/>
+                <a:sym typeface="Roboto"/>
+              </a:defRPr>
+            </a:lvl9pPr>
+          </a:lstStyle>
+          <a:p>
+            <a:pPr marL="0" indent="0">
+              <a:spcAft>
+                <a:spcPts val="1600"/>
+              </a:spcAft>
+              <a:buNone/>
+            </a:pPr>
+            <a:r>
+              <a:rPr lang="en-US" sz="2800" dirty="0"/>
+              <a:t>After completing the Quiz </a:t>
+            </a:r>
+          </a:p>
+          <a:p>
+            <a:pPr marL="342900" indent="-342900">
+              <a:spcAft>
+                <a:spcPts val="1600"/>
+              </a:spcAft>
+            </a:pPr>
+            <a:r>
+              <a:rPr lang="en-US" sz="2400" dirty="0"/>
+              <a:t>Clone/</a:t>
+            </a:r>
+            <a:r>
+              <a:rPr lang="en-US" sz="2400"/>
+              <a:t>Pull Unit3 </a:t>
+            </a:r>
+            <a:r>
+              <a:rPr lang="en-US" sz="2400" dirty="0"/>
+              <a:t>– git hub classroom repo for class activities</a:t>
+            </a:r>
+            <a:endParaRPr lang="en-US" sz="2400" dirty="0">
+              <a:solidFill>
+                <a:schemeClr val="tx1"/>
+              </a:solidFill>
+            </a:endParaRPr>
+          </a:p>
+        </p:txBody>
+      </p:sp>
+    </p:spTree>
+  </p:cSld>
+  <p:clrMapOvr>
+    <a:masterClrMapping/>
+  </p:clrMapOvr>
+</p:sld>
+</file>
+
+<file path=ppt/slides/slide10.xml><?xml version="1.0" encoding="utf-8"?>
+<p:sld xmlns:a="http://schemas.openxmlformats.org/drawingml/2006/main" xmlns:r="http://schemas.openxmlformats.org/officeDocument/2006/relationships" xmlns:p="http://schemas.openxmlformats.org/presentationml/2006/main" show="0">
+  <p:cSld>
+    <p:spTree>
+      <p:nvGrpSpPr>
+        <p:cNvPr id="1" name="Shape 323"/>
+        <p:cNvGrpSpPr/>
+        <p:nvPr/>
+      </p:nvGrpSpPr>
+      <p:grpSpPr>
+        <a:xfrm>
+          <a:off x="0" y="0"/>
+          <a:ext cx="0" cy="0"/>
+          <a:chOff x="0" y="0"/>
+          <a:chExt cx="0" cy="0"/>
+        </a:xfrm>
+      </p:grpSpPr>
+      <p:sp>
+        <p:nvSpPr>
+          <p:cNvPr id="324" name="Google Shape;324;p47"/>
+          <p:cNvSpPr txBox="1">
+            <a:spLocks noGrp="1"/>
+          </p:cNvSpPr>
+          <p:nvPr>
+            <p:ph type="title"/>
+          </p:nvPr>
+        </p:nvSpPr>
+        <p:spPr>
+          <a:xfrm>
+            <a:off x="226208" y="1"/>
+            <a:ext cx="8520600" cy="464980"/>
+          </a:xfrm>
+          <a:prstGeom prst="rect">
+            <a:avLst/>
+          </a:prstGeom>
+        </p:spPr>
+        <p:txBody>
+          <a:bodyPr spcFirstLastPara="1" wrap="square" lIns="91425" tIns="91425" rIns="91425" bIns="91425" anchor="t" anchorCtr="0">
+            <a:noAutofit/>
+          </a:bodyPr>
+          <a:lstStyle/>
+          <a:p>
+            <a:pPr marL="0" lvl="0" indent="0" algn="ctr" rtl="0">
+              <a:spcBef>
+                <a:spcPts val="0"/>
+              </a:spcBef>
+              <a:spcAft>
+                <a:spcPts val="0"/>
+              </a:spcAft>
+              <a:buNone/>
+            </a:pPr>
+            <a:r>
+              <a:rPr lang="en-US" dirty="0"/>
+              <a:t>Use </a:t>
+            </a:r>
+            <a:r>
+              <a:rPr lang="en-US" sz="2400" dirty="0"/>
+              <a:t>Assigned</a:t>
+            </a:r>
+            <a:r>
+              <a:rPr lang="en-US" dirty="0"/>
+              <a:t> Seat</a:t>
+            </a:r>
+            <a:endParaRPr dirty="0"/>
+          </a:p>
+        </p:txBody>
+      </p:sp>
+      <p:sp>
+        <p:nvSpPr>
+          <p:cNvPr id="326" name="Google Shape;326;p47"/>
+          <p:cNvSpPr txBox="1">
+            <a:spLocks noGrp="1"/>
+          </p:cNvSpPr>
+          <p:nvPr>
+            <p:ph type="sldNum" idx="12"/>
+          </p:nvPr>
+        </p:nvSpPr>
+        <p:spPr>
+          <a:xfrm>
+            <a:off x="8472458" y="4663217"/>
+            <a:ext cx="548700" cy="393600"/>
+          </a:xfrm>
+          <a:prstGeom prst="rect">
+            <a:avLst/>
+          </a:prstGeom>
+        </p:spPr>
+        <p:txBody>
+          <a:bodyPr spcFirstLastPara="1" wrap="square" lIns="91425" tIns="91425" rIns="91425" bIns="91425" anchor="ctr" anchorCtr="0">
+            <a:noAutofit/>
+          </a:bodyPr>
+          <a:lstStyle/>
+          <a:p>
+            <a:pPr marL="0" lvl="0" indent="0" algn="r" rtl="0">
+              <a:spcBef>
+                <a:spcPts val="0"/>
+              </a:spcBef>
+              <a:spcAft>
+                <a:spcPts val="0"/>
+              </a:spcAft>
+              <a:buNone/>
+            </a:pPr>
+            <a:fld id="{00000000-1234-1234-1234-123412341234}" type="slidenum">
+              <a:rPr lang="en"/>
+              <a:t>10</a:t>
+            </a:fld>
+            <a:endParaRPr/>
+          </a:p>
+        </p:txBody>
+      </p:sp>
+      <p:pic>
+        <p:nvPicPr>
+          <p:cNvPr id="6" name="Picture 5">
+            <a:extLst>
+              <a:ext uri="{FF2B5EF4-FFF2-40B4-BE49-F238E27FC236}">
+                <a16:creationId xmlns:a16="http://schemas.microsoft.com/office/drawing/2014/main" id="{DED32793-7C09-E3A3-94E5-B5D46727A1D0}"/>
+              </a:ext>
+            </a:extLst>
+          </p:cNvPr>
+          <p:cNvPicPr>
+            <a:picLocks noChangeAspect="1"/>
+          </p:cNvPicPr>
+          <p:nvPr/>
+        </p:nvPicPr>
+        <p:blipFill>
+          <a:blip r:embed="rId3"/>
+          <a:stretch>
+            <a:fillRect/>
+          </a:stretch>
+        </p:blipFill>
+        <p:spPr>
+          <a:xfrm>
+            <a:off x="-1" y="551663"/>
+            <a:ext cx="9144001" cy="4591837"/>
+          </a:xfrm>
+          <a:prstGeom prst="rect">
+            <a:avLst/>
+          </a:prstGeom>
+        </p:spPr>
+      </p:pic>
+    </p:spTree>
+    <p:extLst>
+      <p:ext uri="{BB962C8B-B14F-4D97-AF65-F5344CB8AC3E}">
+        <p14:creationId xmlns:p14="http://schemas.microsoft.com/office/powerpoint/2010/main" val="4226348449"/>
+      </p:ext>
+    </p:extLst>
+  </p:cSld>
+  <p:clrMapOvr>
+    <a:masterClrMapping/>
+  </p:clrMapOvr>
+</p:sld>
+</file>
+
+<file path=ppt/slides/slide11.xml><?xml version="1.0" encoding="utf-8"?>
+<p:sld xmlns:a="http://schemas.openxmlformats.org/drawingml/2006/main" xmlns:r="http://schemas.openxmlformats.org/officeDocument/2006/relationships" xmlns:p="http://schemas.openxmlformats.org/presentationml/2006/main" show="0">
+  <p:cSld>
+    <p:spTree>
+      <p:nvGrpSpPr>
+        <p:cNvPr id="1" name="Shape 323"/>
+        <p:cNvGrpSpPr/>
+        <p:nvPr/>
+      </p:nvGrpSpPr>
+      <p:grpSpPr>
+        <a:xfrm>
+          <a:off x="0" y="0"/>
+          <a:ext cx="0" cy="0"/>
+          <a:chOff x="0" y="0"/>
+          <a:chExt cx="0" cy="0"/>
+        </a:xfrm>
+      </p:grpSpPr>
+      <p:sp>
+        <p:nvSpPr>
+          <p:cNvPr id="324" name="Google Shape;324;p47"/>
+          <p:cNvSpPr txBox="1">
+            <a:spLocks noGrp="1"/>
+          </p:cNvSpPr>
+          <p:nvPr>
+            <p:ph type="title"/>
+          </p:nvPr>
+        </p:nvSpPr>
+        <p:spPr>
+          <a:xfrm>
+            <a:off x="226208" y="1"/>
+            <a:ext cx="8520600" cy="464980"/>
+          </a:xfrm>
+          <a:prstGeom prst="rect">
+            <a:avLst/>
+          </a:prstGeom>
+        </p:spPr>
+        <p:txBody>
+          <a:bodyPr spcFirstLastPara="1" wrap="square" lIns="91425" tIns="91425" rIns="91425" bIns="91425" anchor="t" anchorCtr="0">
+            <a:noAutofit/>
+          </a:bodyPr>
+          <a:lstStyle/>
+          <a:p>
+            <a:pPr marL="0" lvl="0" indent="0" algn="ctr" rtl="0">
+              <a:spcBef>
+                <a:spcPts val="0"/>
+              </a:spcBef>
+              <a:spcAft>
+                <a:spcPts val="0"/>
+              </a:spcAft>
+              <a:buNone/>
+            </a:pPr>
+            <a:r>
+              <a:rPr lang="en-US" dirty="0"/>
+              <a:t>Use </a:t>
+            </a:r>
+            <a:r>
+              <a:rPr lang="en-US" sz="2400" dirty="0"/>
+              <a:t>Assigned</a:t>
+            </a:r>
+            <a:r>
+              <a:rPr lang="en-US" dirty="0"/>
+              <a:t> Seat</a:t>
+            </a:r>
+            <a:endParaRPr dirty="0"/>
+          </a:p>
+        </p:txBody>
+      </p:sp>
+      <p:sp>
+        <p:nvSpPr>
+          <p:cNvPr id="326" name="Google Shape;326;p47"/>
+          <p:cNvSpPr txBox="1">
+            <a:spLocks noGrp="1"/>
+          </p:cNvSpPr>
+          <p:nvPr>
+            <p:ph type="sldNum" idx="12"/>
+          </p:nvPr>
+        </p:nvSpPr>
+        <p:spPr>
+          <a:xfrm>
+            <a:off x="8472458" y="4663217"/>
+            <a:ext cx="548700" cy="393600"/>
+          </a:xfrm>
+          <a:prstGeom prst="rect">
+            <a:avLst/>
+          </a:prstGeom>
+        </p:spPr>
+        <p:txBody>
+          <a:bodyPr spcFirstLastPara="1" wrap="square" lIns="91425" tIns="91425" rIns="91425" bIns="91425" anchor="ctr" anchorCtr="0">
+            <a:noAutofit/>
+          </a:bodyPr>
+          <a:lstStyle/>
+          <a:p>
+            <a:pPr marL="0" lvl="0" indent="0" algn="r" rtl="0">
+              <a:spcBef>
+                <a:spcPts val="0"/>
+              </a:spcBef>
+              <a:spcAft>
+                <a:spcPts val="0"/>
+              </a:spcAft>
+              <a:buNone/>
+            </a:pPr>
+            <a:fld id="{00000000-1234-1234-1234-123412341234}" type="slidenum">
+              <a:rPr lang="en"/>
+              <a:t>11</a:t>
+            </a:fld>
+            <a:endParaRPr/>
+          </a:p>
+        </p:txBody>
+      </p:sp>
+      <p:pic>
+        <p:nvPicPr>
+          <p:cNvPr id="3" name="Picture 2">
+            <a:extLst>
+              <a:ext uri="{FF2B5EF4-FFF2-40B4-BE49-F238E27FC236}">
+                <a16:creationId xmlns:a16="http://schemas.microsoft.com/office/drawing/2014/main" id="{92DE4AAC-70FE-A114-5258-F5B22EDDED45}"/>
+              </a:ext>
+            </a:extLst>
+          </p:cNvPr>
+          <p:cNvPicPr>
+            <a:picLocks noChangeAspect="1"/>
+          </p:cNvPicPr>
+          <p:nvPr/>
+        </p:nvPicPr>
+        <p:blipFill>
+          <a:blip r:embed="rId3"/>
+          <a:stretch>
+            <a:fillRect/>
+          </a:stretch>
+        </p:blipFill>
+        <p:spPr>
+          <a:xfrm>
+            <a:off x="0" y="716280"/>
+            <a:ext cx="9144000" cy="4427218"/>
+          </a:xfrm>
+          <a:prstGeom prst="rect">
+            <a:avLst/>
+          </a:prstGeom>
+        </p:spPr>
+      </p:pic>
+    </p:spTree>
+    <p:extLst>
+      <p:ext uri="{BB962C8B-B14F-4D97-AF65-F5344CB8AC3E}">
+        <p14:creationId xmlns:p14="http://schemas.microsoft.com/office/powerpoint/2010/main" val="1976403023"/>
+      </p:ext>
+    </p:extLst>
+  </p:cSld>
+  <p:clrMapOvr>
+    <a:masterClrMapping/>
+  </p:clrMapOvr>
+</p:sld>
+</file>
+
+<file path=ppt/slides/slide12.xml><?xml version="1.0" encoding="utf-8"?>
+<p:sld xmlns:a="http://schemas.openxmlformats.org/drawingml/2006/main" xmlns:r="http://schemas.openxmlformats.org/officeDocument/2006/relationships" xmlns:p="http://schemas.openxmlformats.org/presentationml/2006/main" show="0">
+  <p:cSld>
+    <p:spTree>
+      <p:nvGrpSpPr>
+        <p:cNvPr id="1" name="Shape 323"/>
+        <p:cNvGrpSpPr/>
+        <p:nvPr/>
+      </p:nvGrpSpPr>
+      <p:grpSpPr>
+        <a:xfrm>
+          <a:off x="0" y="0"/>
+          <a:ext cx="0" cy="0"/>
+          <a:chOff x="0" y="0"/>
+          <a:chExt cx="0" cy="0"/>
+        </a:xfrm>
+      </p:grpSpPr>
+      <p:sp>
+        <p:nvSpPr>
+          <p:cNvPr id="324" name="Google Shape;324;p47"/>
+          <p:cNvSpPr txBox="1">
+            <a:spLocks noGrp="1"/>
+          </p:cNvSpPr>
+          <p:nvPr>
+            <p:ph type="title"/>
+          </p:nvPr>
+        </p:nvSpPr>
+        <p:spPr>
+          <a:xfrm>
+            <a:off x="226208" y="1"/>
+            <a:ext cx="8520600" cy="464980"/>
+          </a:xfrm>
+          <a:prstGeom prst="rect">
+            <a:avLst/>
+          </a:prstGeom>
+        </p:spPr>
+        <p:txBody>
+          <a:bodyPr spcFirstLastPara="1" wrap="square" lIns="91425" tIns="91425" rIns="91425" bIns="91425" anchor="t" anchorCtr="0">
+            <a:noAutofit/>
+          </a:bodyPr>
+          <a:lstStyle/>
+          <a:p>
+            <a:pPr marL="0" lvl="0" indent="0" algn="ctr" rtl="0">
+              <a:spcBef>
+                <a:spcPts val="0"/>
+              </a:spcBef>
+              <a:spcAft>
+                <a:spcPts val="0"/>
+              </a:spcAft>
+              <a:buNone/>
+            </a:pPr>
+            <a:r>
+              <a:rPr lang="en-US" dirty="0"/>
+              <a:t>Use </a:t>
+            </a:r>
+            <a:r>
+              <a:rPr lang="en-US" sz="2400" dirty="0"/>
+              <a:t>Assigned</a:t>
+            </a:r>
+            <a:r>
+              <a:rPr lang="en-US" dirty="0"/>
+              <a:t> Seat</a:t>
+            </a:r>
+            <a:endParaRPr dirty="0"/>
+          </a:p>
+        </p:txBody>
+      </p:sp>
+      <p:sp>
+        <p:nvSpPr>
+          <p:cNvPr id="326" name="Google Shape;326;p47"/>
+          <p:cNvSpPr txBox="1">
+            <a:spLocks noGrp="1"/>
+          </p:cNvSpPr>
+          <p:nvPr>
+            <p:ph type="sldNum" idx="12"/>
+          </p:nvPr>
+        </p:nvSpPr>
+        <p:spPr>
+          <a:xfrm>
+            <a:off x="8472458" y="4663217"/>
+            <a:ext cx="548700" cy="393600"/>
+          </a:xfrm>
+          <a:prstGeom prst="rect">
+            <a:avLst/>
+          </a:prstGeom>
+        </p:spPr>
+        <p:txBody>
+          <a:bodyPr spcFirstLastPara="1" wrap="square" lIns="91425" tIns="91425" rIns="91425" bIns="91425" anchor="ctr" anchorCtr="0">
+            <a:noAutofit/>
+          </a:bodyPr>
+          <a:lstStyle/>
+          <a:p>
+            <a:pPr marL="0" lvl="0" indent="0" algn="r" rtl="0">
+              <a:spcBef>
+                <a:spcPts val="0"/>
+              </a:spcBef>
+              <a:spcAft>
+                <a:spcPts val="0"/>
+              </a:spcAft>
+              <a:buNone/>
+            </a:pPr>
+            <a:fld id="{00000000-1234-1234-1234-123412341234}" type="slidenum">
+              <a:rPr lang="en"/>
+              <a:t>12</a:t>
+            </a:fld>
+            <a:endParaRPr/>
+          </a:p>
+        </p:txBody>
+      </p:sp>
+      <p:pic>
+        <p:nvPicPr>
+          <p:cNvPr id="4" name="Picture 3">
+            <a:extLst>
+              <a:ext uri="{FF2B5EF4-FFF2-40B4-BE49-F238E27FC236}">
+                <a16:creationId xmlns:a16="http://schemas.microsoft.com/office/drawing/2014/main" id="{DCD752B9-EFAE-AFC1-7D39-6763B89DE8D3}"/>
+              </a:ext>
+            </a:extLst>
+          </p:cNvPr>
+          <p:cNvPicPr>
+            <a:picLocks noChangeAspect="1"/>
+          </p:cNvPicPr>
+          <p:nvPr/>
+        </p:nvPicPr>
+        <p:blipFill>
+          <a:blip r:embed="rId3"/>
+          <a:stretch>
+            <a:fillRect/>
+          </a:stretch>
+        </p:blipFill>
+        <p:spPr>
+          <a:xfrm>
+            <a:off x="0" y="652130"/>
+            <a:ext cx="9144000" cy="4491369"/>
+          </a:xfrm>
+          <a:prstGeom prst="rect">
+            <a:avLst/>
+          </a:prstGeom>
+        </p:spPr>
+      </p:pic>
+    </p:spTree>
+    <p:extLst>
+      <p:ext uri="{BB962C8B-B14F-4D97-AF65-F5344CB8AC3E}">
+        <p14:creationId xmlns:p14="http://schemas.microsoft.com/office/powerpoint/2010/main" val="3365057756"/>
+      </p:ext>
+    </p:extLst>
+  </p:cSld>
+  <p:clrMapOvr>
+    <a:masterClrMapping/>
+  </p:clrMapOvr>
+</p:sld>
+</file>
+
+<file path=ppt/slides/slide2.xml><?xml version="1.0" encoding="utf-8"?>
+<p:sld xmlns:a="http://schemas.openxmlformats.org/drawingml/2006/main" xmlns:r="http://schemas.openxmlformats.org/officeDocument/2006/relationships" xmlns:p="http://schemas.openxmlformats.org/presentationml/2006/main" show="0">
+  <p:cSld>
+    <p:spTree>
+      <p:nvGrpSpPr>
         <p:cNvPr id="1" name="Shape 323">
           <a:extLst>
             <a:ext uri="{FF2B5EF4-FFF2-40B4-BE49-F238E27FC236}">
@@ -6704,7 +7738,7 @@
             </a:pPr>
             <a:fld id="{00000000-1234-1234-1234-123412341234}" type="slidenum">
               <a:rPr lang="en"/>
-              <a:t>1</a:t>
+              <a:t>2</a:t>
             </a:fld>
             <a:endParaRPr/>
           </a:p>
@@ -7439,1035 +8473,6 @@
         <p14:creationId xmlns:p14="http://schemas.microsoft.com/office/powerpoint/2010/main" val="674272117"/>
       </p:ext>
     </p:extLst>
-  </p:cSld>
-  <p:clrMapOvr>
-    <a:masterClrMapping/>
-  </p:clrMapOvr>
-</p:sld>
-</file>
-
-<file path=ppt/slides/slide10.xml><?xml version="1.0" encoding="utf-8"?>
-<p:sld xmlns:a="http://schemas.openxmlformats.org/drawingml/2006/main" xmlns:r="http://schemas.openxmlformats.org/officeDocument/2006/relationships" xmlns:p="http://schemas.openxmlformats.org/presentationml/2006/main" show="0">
-  <p:cSld>
-    <p:spTree>
-      <p:nvGrpSpPr>
-        <p:cNvPr id="1" name="Shape 323"/>
-        <p:cNvGrpSpPr/>
-        <p:nvPr/>
-      </p:nvGrpSpPr>
-      <p:grpSpPr>
-        <a:xfrm>
-          <a:off x="0" y="0"/>
-          <a:ext cx="0" cy="0"/>
-          <a:chOff x="0" y="0"/>
-          <a:chExt cx="0" cy="0"/>
-        </a:xfrm>
-      </p:grpSpPr>
-      <p:sp>
-        <p:nvSpPr>
-          <p:cNvPr id="324" name="Google Shape;324;p47"/>
-          <p:cNvSpPr txBox="1">
-            <a:spLocks noGrp="1"/>
-          </p:cNvSpPr>
-          <p:nvPr>
-            <p:ph type="title"/>
-          </p:nvPr>
-        </p:nvSpPr>
-        <p:spPr>
-          <a:xfrm>
-            <a:off x="226208" y="1"/>
-            <a:ext cx="8520600" cy="464980"/>
-          </a:xfrm>
-          <a:prstGeom prst="rect">
-            <a:avLst/>
-          </a:prstGeom>
-        </p:spPr>
-        <p:txBody>
-          <a:bodyPr spcFirstLastPara="1" wrap="square" lIns="91425" tIns="91425" rIns="91425" bIns="91425" anchor="t" anchorCtr="0">
-            <a:noAutofit/>
-          </a:bodyPr>
-          <a:lstStyle/>
-          <a:p>
-            <a:pPr marL="0" lvl="0" indent="0" algn="ctr" rtl="0">
-              <a:spcBef>
-                <a:spcPts val="0"/>
-              </a:spcBef>
-              <a:spcAft>
-                <a:spcPts val="0"/>
-              </a:spcAft>
-              <a:buNone/>
-            </a:pPr>
-            <a:r>
-              <a:rPr lang="en-US" dirty="0"/>
-              <a:t>Use </a:t>
-            </a:r>
-            <a:r>
-              <a:rPr lang="en-US" sz="2400" dirty="0"/>
-              <a:t>Assigned</a:t>
-            </a:r>
-            <a:r>
-              <a:rPr lang="en-US" dirty="0"/>
-              <a:t> Seat</a:t>
-            </a:r>
-            <a:endParaRPr dirty="0"/>
-          </a:p>
-        </p:txBody>
-      </p:sp>
-      <p:sp>
-        <p:nvSpPr>
-          <p:cNvPr id="326" name="Google Shape;326;p47"/>
-          <p:cNvSpPr txBox="1">
-            <a:spLocks noGrp="1"/>
-          </p:cNvSpPr>
-          <p:nvPr>
-            <p:ph type="sldNum" idx="12"/>
-          </p:nvPr>
-        </p:nvSpPr>
-        <p:spPr>
-          <a:xfrm>
-            <a:off x="8472458" y="4663217"/>
-            <a:ext cx="548700" cy="393600"/>
-          </a:xfrm>
-          <a:prstGeom prst="rect">
-            <a:avLst/>
-          </a:prstGeom>
-        </p:spPr>
-        <p:txBody>
-          <a:bodyPr spcFirstLastPara="1" wrap="square" lIns="91425" tIns="91425" rIns="91425" bIns="91425" anchor="ctr" anchorCtr="0">
-            <a:noAutofit/>
-          </a:bodyPr>
-          <a:lstStyle/>
-          <a:p>
-            <a:pPr marL="0" lvl="0" indent="0" algn="r" rtl="0">
-              <a:spcBef>
-                <a:spcPts val="0"/>
-              </a:spcBef>
-              <a:spcAft>
-                <a:spcPts val="0"/>
-              </a:spcAft>
-              <a:buNone/>
-            </a:pPr>
-            <a:fld id="{00000000-1234-1234-1234-123412341234}" type="slidenum">
-              <a:rPr lang="en"/>
-              <a:t>10</a:t>
-            </a:fld>
-            <a:endParaRPr/>
-          </a:p>
-        </p:txBody>
-      </p:sp>
-      <p:pic>
-        <p:nvPicPr>
-          <p:cNvPr id="6" name="Picture 5">
-            <a:extLst>
-              <a:ext uri="{FF2B5EF4-FFF2-40B4-BE49-F238E27FC236}">
-                <a16:creationId xmlns:a16="http://schemas.microsoft.com/office/drawing/2014/main" id="{DED32793-7C09-E3A3-94E5-B5D46727A1D0}"/>
-              </a:ext>
-            </a:extLst>
-          </p:cNvPr>
-          <p:cNvPicPr>
-            <a:picLocks noChangeAspect="1"/>
-          </p:cNvPicPr>
-          <p:nvPr/>
-        </p:nvPicPr>
-        <p:blipFill>
-          <a:blip r:embed="rId3"/>
-          <a:stretch>
-            <a:fillRect/>
-          </a:stretch>
-        </p:blipFill>
-        <p:spPr>
-          <a:xfrm>
-            <a:off x="-1" y="551663"/>
-            <a:ext cx="9144001" cy="4591837"/>
-          </a:xfrm>
-          <a:prstGeom prst="rect">
-            <a:avLst/>
-          </a:prstGeom>
-        </p:spPr>
-      </p:pic>
-    </p:spTree>
-    <p:extLst>
-      <p:ext uri="{BB962C8B-B14F-4D97-AF65-F5344CB8AC3E}">
-        <p14:creationId xmlns:p14="http://schemas.microsoft.com/office/powerpoint/2010/main" val="4226348449"/>
-      </p:ext>
-    </p:extLst>
-  </p:cSld>
-  <p:clrMapOvr>
-    <a:masterClrMapping/>
-  </p:clrMapOvr>
-</p:sld>
-</file>
-
-<file path=ppt/slides/slide11.xml><?xml version="1.0" encoding="utf-8"?>
-<p:sld xmlns:a="http://schemas.openxmlformats.org/drawingml/2006/main" xmlns:r="http://schemas.openxmlformats.org/officeDocument/2006/relationships" xmlns:p="http://schemas.openxmlformats.org/presentationml/2006/main" show="0">
-  <p:cSld>
-    <p:spTree>
-      <p:nvGrpSpPr>
-        <p:cNvPr id="1" name="Shape 323"/>
-        <p:cNvGrpSpPr/>
-        <p:nvPr/>
-      </p:nvGrpSpPr>
-      <p:grpSpPr>
-        <a:xfrm>
-          <a:off x="0" y="0"/>
-          <a:ext cx="0" cy="0"/>
-          <a:chOff x="0" y="0"/>
-          <a:chExt cx="0" cy="0"/>
-        </a:xfrm>
-      </p:grpSpPr>
-      <p:sp>
-        <p:nvSpPr>
-          <p:cNvPr id="324" name="Google Shape;324;p47"/>
-          <p:cNvSpPr txBox="1">
-            <a:spLocks noGrp="1"/>
-          </p:cNvSpPr>
-          <p:nvPr>
-            <p:ph type="title"/>
-          </p:nvPr>
-        </p:nvSpPr>
-        <p:spPr>
-          <a:xfrm>
-            <a:off x="226208" y="1"/>
-            <a:ext cx="8520600" cy="464980"/>
-          </a:xfrm>
-          <a:prstGeom prst="rect">
-            <a:avLst/>
-          </a:prstGeom>
-        </p:spPr>
-        <p:txBody>
-          <a:bodyPr spcFirstLastPara="1" wrap="square" lIns="91425" tIns="91425" rIns="91425" bIns="91425" anchor="t" anchorCtr="0">
-            <a:noAutofit/>
-          </a:bodyPr>
-          <a:lstStyle/>
-          <a:p>
-            <a:pPr marL="0" lvl="0" indent="0" algn="ctr" rtl="0">
-              <a:spcBef>
-                <a:spcPts val="0"/>
-              </a:spcBef>
-              <a:spcAft>
-                <a:spcPts val="0"/>
-              </a:spcAft>
-              <a:buNone/>
-            </a:pPr>
-            <a:r>
-              <a:rPr lang="en-US" dirty="0"/>
-              <a:t>Use </a:t>
-            </a:r>
-            <a:r>
-              <a:rPr lang="en-US" sz="2400" dirty="0"/>
-              <a:t>Assigned</a:t>
-            </a:r>
-            <a:r>
-              <a:rPr lang="en-US" dirty="0"/>
-              <a:t> Seat</a:t>
-            </a:r>
-            <a:endParaRPr dirty="0"/>
-          </a:p>
-        </p:txBody>
-      </p:sp>
-      <p:sp>
-        <p:nvSpPr>
-          <p:cNvPr id="326" name="Google Shape;326;p47"/>
-          <p:cNvSpPr txBox="1">
-            <a:spLocks noGrp="1"/>
-          </p:cNvSpPr>
-          <p:nvPr>
-            <p:ph type="sldNum" idx="12"/>
-          </p:nvPr>
-        </p:nvSpPr>
-        <p:spPr>
-          <a:xfrm>
-            <a:off x="8472458" y="4663217"/>
-            <a:ext cx="548700" cy="393600"/>
-          </a:xfrm>
-          <a:prstGeom prst="rect">
-            <a:avLst/>
-          </a:prstGeom>
-        </p:spPr>
-        <p:txBody>
-          <a:bodyPr spcFirstLastPara="1" wrap="square" lIns="91425" tIns="91425" rIns="91425" bIns="91425" anchor="ctr" anchorCtr="0">
-            <a:noAutofit/>
-          </a:bodyPr>
-          <a:lstStyle/>
-          <a:p>
-            <a:pPr marL="0" lvl="0" indent="0" algn="r" rtl="0">
-              <a:spcBef>
-                <a:spcPts val="0"/>
-              </a:spcBef>
-              <a:spcAft>
-                <a:spcPts val="0"/>
-              </a:spcAft>
-              <a:buNone/>
-            </a:pPr>
-            <a:fld id="{00000000-1234-1234-1234-123412341234}" type="slidenum">
-              <a:rPr lang="en"/>
-              <a:t>11</a:t>
-            </a:fld>
-            <a:endParaRPr/>
-          </a:p>
-        </p:txBody>
-      </p:sp>
-      <p:pic>
-        <p:nvPicPr>
-          <p:cNvPr id="3" name="Picture 2">
-            <a:extLst>
-              <a:ext uri="{FF2B5EF4-FFF2-40B4-BE49-F238E27FC236}">
-                <a16:creationId xmlns:a16="http://schemas.microsoft.com/office/drawing/2014/main" id="{92DE4AAC-70FE-A114-5258-F5B22EDDED45}"/>
-              </a:ext>
-            </a:extLst>
-          </p:cNvPr>
-          <p:cNvPicPr>
-            <a:picLocks noChangeAspect="1"/>
-          </p:cNvPicPr>
-          <p:nvPr/>
-        </p:nvPicPr>
-        <p:blipFill>
-          <a:blip r:embed="rId3"/>
-          <a:stretch>
-            <a:fillRect/>
-          </a:stretch>
-        </p:blipFill>
-        <p:spPr>
-          <a:xfrm>
-            <a:off x="0" y="716280"/>
-            <a:ext cx="9144000" cy="4427218"/>
-          </a:xfrm>
-          <a:prstGeom prst="rect">
-            <a:avLst/>
-          </a:prstGeom>
-        </p:spPr>
-      </p:pic>
-    </p:spTree>
-    <p:extLst>
-      <p:ext uri="{BB962C8B-B14F-4D97-AF65-F5344CB8AC3E}">
-        <p14:creationId xmlns:p14="http://schemas.microsoft.com/office/powerpoint/2010/main" val="1976403023"/>
-      </p:ext>
-    </p:extLst>
-  </p:cSld>
-  <p:clrMapOvr>
-    <a:masterClrMapping/>
-  </p:clrMapOvr>
-</p:sld>
-</file>
-
-<file path=ppt/slides/slide12.xml><?xml version="1.0" encoding="utf-8"?>
-<p:sld xmlns:a="http://schemas.openxmlformats.org/drawingml/2006/main" xmlns:r="http://schemas.openxmlformats.org/officeDocument/2006/relationships" xmlns:p="http://schemas.openxmlformats.org/presentationml/2006/main" show="0">
-  <p:cSld>
-    <p:spTree>
-      <p:nvGrpSpPr>
-        <p:cNvPr id="1" name="Shape 323"/>
-        <p:cNvGrpSpPr/>
-        <p:nvPr/>
-      </p:nvGrpSpPr>
-      <p:grpSpPr>
-        <a:xfrm>
-          <a:off x="0" y="0"/>
-          <a:ext cx="0" cy="0"/>
-          <a:chOff x="0" y="0"/>
-          <a:chExt cx="0" cy="0"/>
-        </a:xfrm>
-      </p:grpSpPr>
-      <p:sp>
-        <p:nvSpPr>
-          <p:cNvPr id="324" name="Google Shape;324;p47"/>
-          <p:cNvSpPr txBox="1">
-            <a:spLocks noGrp="1"/>
-          </p:cNvSpPr>
-          <p:nvPr>
-            <p:ph type="title"/>
-          </p:nvPr>
-        </p:nvSpPr>
-        <p:spPr>
-          <a:xfrm>
-            <a:off x="226208" y="1"/>
-            <a:ext cx="8520600" cy="464980"/>
-          </a:xfrm>
-          <a:prstGeom prst="rect">
-            <a:avLst/>
-          </a:prstGeom>
-        </p:spPr>
-        <p:txBody>
-          <a:bodyPr spcFirstLastPara="1" wrap="square" lIns="91425" tIns="91425" rIns="91425" bIns="91425" anchor="t" anchorCtr="0">
-            <a:noAutofit/>
-          </a:bodyPr>
-          <a:lstStyle/>
-          <a:p>
-            <a:pPr marL="0" lvl="0" indent="0" algn="ctr" rtl="0">
-              <a:spcBef>
-                <a:spcPts val="0"/>
-              </a:spcBef>
-              <a:spcAft>
-                <a:spcPts val="0"/>
-              </a:spcAft>
-              <a:buNone/>
-            </a:pPr>
-            <a:r>
-              <a:rPr lang="en-US" dirty="0"/>
-              <a:t>Use </a:t>
-            </a:r>
-            <a:r>
-              <a:rPr lang="en-US" sz="2400" dirty="0"/>
-              <a:t>Assigned</a:t>
-            </a:r>
-            <a:r>
-              <a:rPr lang="en-US" dirty="0"/>
-              <a:t> Seat</a:t>
-            </a:r>
-            <a:endParaRPr dirty="0"/>
-          </a:p>
-        </p:txBody>
-      </p:sp>
-      <p:sp>
-        <p:nvSpPr>
-          <p:cNvPr id="326" name="Google Shape;326;p47"/>
-          <p:cNvSpPr txBox="1">
-            <a:spLocks noGrp="1"/>
-          </p:cNvSpPr>
-          <p:nvPr>
-            <p:ph type="sldNum" idx="12"/>
-          </p:nvPr>
-        </p:nvSpPr>
-        <p:spPr>
-          <a:xfrm>
-            <a:off x="8472458" y="4663217"/>
-            <a:ext cx="548700" cy="393600"/>
-          </a:xfrm>
-          <a:prstGeom prst="rect">
-            <a:avLst/>
-          </a:prstGeom>
-        </p:spPr>
-        <p:txBody>
-          <a:bodyPr spcFirstLastPara="1" wrap="square" lIns="91425" tIns="91425" rIns="91425" bIns="91425" anchor="ctr" anchorCtr="0">
-            <a:noAutofit/>
-          </a:bodyPr>
-          <a:lstStyle/>
-          <a:p>
-            <a:pPr marL="0" lvl="0" indent="0" algn="r" rtl="0">
-              <a:spcBef>
-                <a:spcPts val="0"/>
-              </a:spcBef>
-              <a:spcAft>
-                <a:spcPts val="0"/>
-              </a:spcAft>
-              <a:buNone/>
-            </a:pPr>
-            <a:fld id="{00000000-1234-1234-1234-123412341234}" type="slidenum">
-              <a:rPr lang="en"/>
-              <a:t>12</a:t>
-            </a:fld>
-            <a:endParaRPr/>
-          </a:p>
-        </p:txBody>
-      </p:sp>
-      <p:pic>
-        <p:nvPicPr>
-          <p:cNvPr id="4" name="Picture 3">
-            <a:extLst>
-              <a:ext uri="{FF2B5EF4-FFF2-40B4-BE49-F238E27FC236}">
-                <a16:creationId xmlns:a16="http://schemas.microsoft.com/office/drawing/2014/main" id="{DCD752B9-EFAE-AFC1-7D39-6763B89DE8D3}"/>
-              </a:ext>
-            </a:extLst>
-          </p:cNvPr>
-          <p:cNvPicPr>
-            <a:picLocks noChangeAspect="1"/>
-          </p:cNvPicPr>
-          <p:nvPr/>
-        </p:nvPicPr>
-        <p:blipFill>
-          <a:blip r:embed="rId3"/>
-          <a:stretch>
-            <a:fillRect/>
-          </a:stretch>
-        </p:blipFill>
-        <p:spPr>
-          <a:xfrm>
-            <a:off x="0" y="652130"/>
-            <a:ext cx="9144000" cy="4491369"/>
-          </a:xfrm>
-          <a:prstGeom prst="rect">
-            <a:avLst/>
-          </a:prstGeom>
-        </p:spPr>
-      </p:pic>
-    </p:spTree>
-    <p:extLst>
-      <p:ext uri="{BB962C8B-B14F-4D97-AF65-F5344CB8AC3E}">
-        <p14:creationId xmlns:p14="http://schemas.microsoft.com/office/powerpoint/2010/main" val="3365057756"/>
-      </p:ext>
-    </p:extLst>
-  </p:cSld>
-  <p:clrMapOvr>
-    <a:masterClrMapping/>
-  </p:clrMapOvr>
-</p:sld>
-</file>
-
-<file path=ppt/slides/slide2.xml><?xml version="1.0" encoding="utf-8"?>
-<p:sld xmlns:a="http://schemas.openxmlformats.org/drawingml/2006/main" xmlns:r="http://schemas.openxmlformats.org/officeDocument/2006/relationships" xmlns:p="http://schemas.openxmlformats.org/presentationml/2006/main" show="0">
-  <p:cSld>
-    <p:spTree>
-      <p:nvGrpSpPr>
-        <p:cNvPr id="1" name="Shape 323"/>
-        <p:cNvGrpSpPr/>
-        <p:nvPr/>
-      </p:nvGrpSpPr>
-      <p:grpSpPr>
-        <a:xfrm>
-          <a:off x="0" y="0"/>
-          <a:ext cx="0" cy="0"/>
-          <a:chOff x="0" y="0"/>
-          <a:chExt cx="0" cy="0"/>
-        </a:xfrm>
-      </p:grpSpPr>
-      <p:sp>
-        <p:nvSpPr>
-          <p:cNvPr id="324" name="Google Shape;324;p47"/>
-          <p:cNvSpPr txBox="1">
-            <a:spLocks noGrp="1"/>
-          </p:cNvSpPr>
-          <p:nvPr>
-            <p:ph type="title"/>
-          </p:nvPr>
-        </p:nvSpPr>
-        <p:spPr>
-          <a:xfrm>
-            <a:off x="305858" y="273819"/>
-            <a:ext cx="8520600" cy="623700"/>
-          </a:xfrm>
-          <a:prstGeom prst="rect">
-            <a:avLst/>
-          </a:prstGeom>
-        </p:spPr>
-        <p:txBody>
-          <a:bodyPr spcFirstLastPara="1" wrap="square" lIns="91425" tIns="91425" rIns="91425" bIns="91425" anchor="t" anchorCtr="0">
-            <a:noAutofit/>
-          </a:bodyPr>
-          <a:lstStyle/>
-          <a:p>
-            <a:pPr marL="0" lvl="0" indent="0" algn="ctr" rtl="0">
-              <a:spcBef>
-                <a:spcPts val="0"/>
-              </a:spcBef>
-              <a:spcAft>
-                <a:spcPts val="0"/>
-              </a:spcAft>
-              <a:buNone/>
-            </a:pPr>
-            <a:r>
-              <a:rPr lang="en-US" dirty="0"/>
-              <a:t>GCIS – Software Development and Problem Solving</a:t>
-            </a:r>
-            <a:endParaRPr dirty="0"/>
-          </a:p>
-        </p:txBody>
-      </p:sp>
-      <p:sp>
-        <p:nvSpPr>
-          <p:cNvPr id="325" name="Google Shape;325;p47"/>
-          <p:cNvSpPr txBox="1">
-            <a:spLocks noGrp="1"/>
-          </p:cNvSpPr>
-          <p:nvPr>
-            <p:ph type="body" idx="1"/>
-          </p:nvPr>
-        </p:nvSpPr>
-        <p:spPr>
-          <a:xfrm>
-            <a:off x="-5842" y="1721147"/>
-            <a:ext cx="9149842" cy="1226403"/>
-          </a:xfrm>
-          <a:prstGeom prst="rect">
-            <a:avLst/>
-          </a:prstGeom>
-        </p:spPr>
-        <p:txBody>
-          <a:bodyPr spcFirstLastPara="1" wrap="square" lIns="91425" tIns="91425" rIns="91425" bIns="91425" anchor="ctr" anchorCtr="0">
-            <a:noAutofit/>
-          </a:bodyPr>
-          <a:lstStyle/>
-          <a:p>
-            <a:pPr marL="146050" indent="0" algn="ctr">
-              <a:buNone/>
-            </a:pPr>
-            <a:r>
-              <a:rPr lang="en-US" sz="2400" dirty="0"/>
-              <a:t>Take </a:t>
-            </a:r>
-            <a:r>
-              <a:rPr lang="pl-PL" sz="2400" dirty="0"/>
-              <a:t>Quiz </a:t>
-            </a:r>
-            <a:r>
-              <a:rPr lang="en-US" sz="2400" dirty="0"/>
-              <a:t>2</a:t>
-            </a:r>
-            <a:r>
-              <a:rPr lang="pl-PL" sz="2400" dirty="0"/>
-              <a:t>.</a:t>
-            </a:r>
-            <a:r>
-              <a:rPr lang="en-US" sz="2400" dirty="0"/>
-              <a:t>1</a:t>
-            </a:r>
-            <a:r>
-              <a:rPr lang="pl-PL" sz="2400" dirty="0"/>
-              <a:t>: </a:t>
-            </a:r>
-            <a:r>
-              <a:rPr lang="en-US" sz="2400" dirty="0"/>
-              <a:t>Java Classes</a:t>
-            </a:r>
-          </a:p>
-          <a:p>
-            <a:pPr algn="ctr"/>
-            <a:r>
-              <a:rPr lang="en-US" sz="2400" dirty="0"/>
-              <a:t>Password - </a:t>
-            </a:r>
-            <a:r>
-              <a:rPr lang="en-US" sz="2400" dirty="0" err="1"/>
-              <a:t>goTo</a:t>
-            </a:r>
-            <a:r>
-              <a:rPr lang="en-US" sz="2400" dirty="0"/>
-              <a:t>(Java)Class</a:t>
-            </a:r>
-            <a:endParaRPr sz="2400" dirty="0"/>
-          </a:p>
-        </p:txBody>
-      </p:sp>
-      <p:sp>
-        <p:nvSpPr>
-          <p:cNvPr id="326" name="Google Shape;326;p47"/>
-          <p:cNvSpPr txBox="1">
-            <a:spLocks noGrp="1"/>
-          </p:cNvSpPr>
-          <p:nvPr>
-            <p:ph type="sldNum" idx="12"/>
-          </p:nvPr>
-        </p:nvSpPr>
-        <p:spPr>
-          <a:xfrm>
-            <a:off x="8472458" y="4663217"/>
-            <a:ext cx="548700" cy="393600"/>
-          </a:xfrm>
-          <a:prstGeom prst="rect">
-            <a:avLst/>
-          </a:prstGeom>
-        </p:spPr>
-        <p:txBody>
-          <a:bodyPr spcFirstLastPara="1" wrap="square" lIns="91425" tIns="91425" rIns="91425" bIns="91425" anchor="ctr" anchorCtr="0">
-            <a:noAutofit/>
-          </a:bodyPr>
-          <a:lstStyle/>
-          <a:p>
-            <a:pPr marL="0" lvl="0" indent="0" algn="r" rtl="0">
-              <a:spcBef>
-                <a:spcPts val="0"/>
-              </a:spcBef>
-              <a:spcAft>
-                <a:spcPts val="0"/>
-              </a:spcAft>
-              <a:buNone/>
-            </a:pPr>
-            <a:fld id="{00000000-1234-1234-1234-123412341234}" type="slidenum">
-              <a:rPr lang="en"/>
-              <a:t>2</a:t>
-            </a:fld>
-            <a:endParaRPr/>
-          </a:p>
-        </p:txBody>
-      </p:sp>
-      <p:sp>
-        <p:nvSpPr>
-          <p:cNvPr id="2" name="TextBox 1">
-            <a:extLst>
-              <a:ext uri="{FF2B5EF4-FFF2-40B4-BE49-F238E27FC236}">
-                <a16:creationId xmlns:a16="http://schemas.microsoft.com/office/drawing/2014/main" id="{DCC33EBB-1C9D-B9A9-88E6-F3466077417F}"/>
-              </a:ext>
-            </a:extLst>
-          </p:cNvPr>
-          <p:cNvSpPr txBox="1"/>
-          <p:nvPr/>
-        </p:nvSpPr>
-        <p:spPr>
-          <a:xfrm>
-            <a:off x="0" y="1277369"/>
-            <a:ext cx="9144000" cy="307777"/>
-          </a:xfrm>
-          <a:prstGeom prst="rect">
-            <a:avLst/>
-          </a:prstGeom>
-          <a:solidFill>
-            <a:srgbClr val="FFC000"/>
-          </a:solidFill>
-        </p:spPr>
-        <p:txBody>
-          <a:bodyPr wrap="square" rtlCol="0">
-            <a:spAutoFit/>
-          </a:bodyPr>
-          <a:lstStyle/>
-          <a:p>
-            <a:r>
-              <a:rPr lang="en-US" dirty="0"/>
-              <a:t>Quiz</a:t>
-            </a:r>
-          </a:p>
-        </p:txBody>
-      </p:sp>
-      <p:sp>
-        <p:nvSpPr>
-          <p:cNvPr id="3" name="TextBox 2">
-            <a:extLst>
-              <a:ext uri="{FF2B5EF4-FFF2-40B4-BE49-F238E27FC236}">
-                <a16:creationId xmlns:a16="http://schemas.microsoft.com/office/drawing/2014/main" id="{64C19922-6A1B-1404-5104-DC43E4C67861}"/>
-              </a:ext>
-            </a:extLst>
-          </p:cNvPr>
-          <p:cNvSpPr txBox="1"/>
-          <p:nvPr/>
-        </p:nvSpPr>
-        <p:spPr>
-          <a:xfrm>
-            <a:off x="-5842" y="3031063"/>
-            <a:ext cx="9144000" cy="307777"/>
-          </a:xfrm>
-          <a:prstGeom prst="rect">
-            <a:avLst/>
-          </a:prstGeom>
-          <a:solidFill>
-            <a:srgbClr val="FFC000"/>
-          </a:solidFill>
-        </p:spPr>
-        <p:txBody>
-          <a:bodyPr wrap="square" rtlCol="0">
-            <a:spAutoFit/>
-          </a:bodyPr>
-          <a:lstStyle/>
-          <a:p>
-            <a:r>
-              <a:rPr lang="en-US" dirty="0"/>
-              <a:t>Next </a:t>
-            </a:r>
-            <a:r>
-              <a:rPr lang="en-US" dirty="0">
-                <a:sym typeface="Wingdings" panose="05000000000000000000" pitchFamily="2" charset="2"/>
-              </a:rPr>
-              <a:t> </a:t>
-            </a:r>
-            <a:endParaRPr lang="en-US" dirty="0"/>
-          </a:p>
-        </p:txBody>
-      </p:sp>
-      <p:sp>
-        <p:nvSpPr>
-          <p:cNvPr id="4" name="Google Shape;325;p47">
-            <a:extLst>
-              <a:ext uri="{FF2B5EF4-FFF2-40B4-BE49-F238E27FC236}">
-                <a16:creationId xmlns:a16="http://schemas.microsoft.com/office/drawing/2014/main" id="{E455EA58-F56D-AF58-E97D-95A77E0AB6CF}"/>
-              </a:ext>
-            </a:extLst>
-          </p:cNvPr>
-          <p:cNvSpPr txBox="1">
-            <a:spLocks/>
-          </p:cNvSpPr>
-          <p:nvPr/>
-        </p:nvSpPr>
-        <p:spPr>
-          <a:xfrm>
-            <a:off x="-5842" y="3422352"/>
-            <a:ext cx="9149842" cy="1721148"/>
-          </a:xfrm>
-          <a:prstGeom prst="rect">
-            <a:avLst/>
-          </a:prstGeom>
-          <a:noFill/>
-          <a:ln>
-            <a:noFill/>
-          </a:ln>
-        </p:spPr>
-        <p:txBody>
-          <a:bodyPr spcFirstLastPara="1" wrap="square" lIns="91425" tIns="91425" rIns="91425" bIns="91425" anchor="ctr" anchorCtr="0">
-            <a:noAutofit/>
-          </a:bodyPr>
-          <a:lstStyle>
-            <a:defPPr marR="0" lvl="0" algn="l" rtl="0">
-              <a:lnSpc>
-                <a:spcPct val="100000"/>
-              </a:lnSpc>
-              <a:spcBef>
-                <a:spcPts val="0"/>
-              </a:spcBef>
-              <a:spcAft>
-                <a:spcPts val="0"/>
-              </a:spcAft>
-            </a:defPPr>
-            <a:lvl1pPr marL="457200" marR="0" lvl="0" indent="-311150" algn="l" rtl="0">
-              <a:lnSpc>
-                <a:spcPct val="115000"/>
-              </a:lnSpc>
-              <a:spcBef>
-                <a:spcPts val="0"/>
-              </a:spcBef>
-              <a:spcAft>
-                <a:spcPts val="0"/>
-              </a:spcAft>
-              <a:buClr>
-                <a:schemeClr val="dk2"/>
-              </a:buClr>
-              <a:buSzPts val="1300"/>
-              <a:buFont typeface="Roboto"/>
-              <a:buChar char="●"/>
-              <a:defRPr sz="1300" b="0" i="0" u="none" strike="noStrike" cap="none">
-                <a:solidFill>
-                  <a:schemeClr val="dk2"/>
-                </a:solidFill>
-                <a:latin typeface="Roboto"/>
-                <a:ea typeface="Roboto"/>
-                <a:cs typeface="Roboto"/>
-                <a:sym typeface="Roboto"/>
-              </a:defRPr>
-            </a:lvl1pPr>
-            <a:lvl2pPr marL="914400" marR="0" lvl="1" indent="-298450" algn="l" rtl="0">
-              <a:lnSpc>
-                <a:spcPct val="115000"/>
-              </a:lnSpc>
-              <a:spcBef>
-                <a:spcPts val="1600"/>
-              </a:spcBef>
-              <a:spcAft>
-                <a:spcPts val="0"/>
-              </a:spcAft>
-              <a:buClr>
-                <a:schemeClr val="dk2"/>
-              </a:buClr>
-              <a:buSzPts val="1100"/>
-              <a:buFont typeface="Roboto"/>
-              <a:buChar char="○"/>
-              <a:defRPr sz="1100" b="0" i="0" u="none" strike="noStrike" cap="none">
-                <a:solidFill>
-                  <a:schemeClr val="dk2"/>
-                </a:solidFill>
-                <a:latin typeface="Roboto"/>
-                <a:ea typeface="Roboto"/>
-                <a:cs typeface="Roboto"/>
-                <a:sym typeface="Roboto"/>
-              </a:defRPr>
-            </a:lvl2pPr>
-            <a:lvl3pPr marL="1371600" marR="0" lvl="2" indent="-298450" algn="l" rtl="0">
-              <a:lnSpc>
-                <a:spcPct val="115000"/>
-              </a:lnSpc>
-              <a:spcBef>
-                <a:spcPts val="1600"/>
-              </a:spcBef>
-              <a:spcAft>
-                <a:spcPts val="0"/>
-              </a:spcAft>
-              <a:buClr>
-                <a:schemeClr val="dk2"/>
-              </a:buClr>
-              <a:buSzPts val="1100"/>
-              <a:buFont typeface="Roboto"/>
-              <a:buChar char="■"/>
-              <a:defRPr sz="1100" b="0" i="0" u="none" strike="noStrike" cap="none">
-                <a:solidFill>
-                  <a:schemeClr val="dk2"/>
-                </a:solidFill>
-                <a:latin typeface="Roboto"/>
-                <a:ea typeface="Roboto"/>
-                <a:cs typeface="Roboto"/>
-                <a:sym typeface="Roboto"/>
-              </a:defRPr>
-            </a:lvl3pPr>
-            <a:lvl4pPr marL="1828800" marR="0" lvl="3" indent="-298450" algn="l" rtl="0">
-              <a:lnSpc>
-                <a:spcPct val="115000"/>
-              </a:lnSpc>
-              <a:spcBef>
-                <a:spcPts val="1600"/>
-              </a:spcBef>
-              <a:spcAft>
-                <a:spcPts val="0"/>
-              </a:spcAft>
-              <a:buClr>
-                <a:schemeClr val="dk2"/>
-              </a:buClr>
-              <a:buSzPts val="1100"/>
-              <a:buFont typeface="Roboto"/>
-              <a:buChar char="●"/>
-              <a:defRPr sz="1100" b="0" i="0" u="none" strike="noStrike" cap="none">
-                <a:solidFill>
-                  <a:schemeClr val="dk2"/>
-                </a:solidFill>
-                <a:latin typeface="Roboto"/>
-                <a:ea typeface="Roboto"/>
-                <a:cs typeface="Roboto"/>
-                <a:sym typeface="Roboto"/>
-              </a:defRPr>
-            </a:lvl4pPr>
-            <a:lvl5pPr marL="2286000" marR="0" lvl="4" indent="-298450" algn="l" rtl="0">
-              <a:lnSpc>
-                <a:spcPct val="115000"/>
-              </a:lnSpc>
-              <a:spcBef>
-                <a:spcPts val="1600"/>
-              </a:spcBef>
-              <a:spcAft>
-                <a:spcPts val="0"/>
-              </a:spcAft>
-              <a:buClr>
-                <a:schemeClr val="dk2"/>
-              </a:buClr>
-              <a:buSzPts val="1100"/>
-              <a:buFont typeface="Roboto"/>
-              <a:buChar char="○"/>
-              <a:defRPr sz="1100" b="0" i="0" u="none" strike="noStrike" cap="none">
-                <a:solidFill>
-                  <a:schemeClr val="dk2"/>
-                </a:solidFill>
-                <a:latin typeface="Roboto"/>
-                <a:ea typeface="Roboto"/>
-                <a:cs typeface="Roboto"/>
-                <a:sym typeface="Roboto"/>
-              </a:defRPr>
-            </a:lvl5pPr>
-            <a:lvl6pPr marL="2743200" marR="0" lvl="5" indent="-298450" algn="l" rtl="0">
-              <a:lnSpc>
-                <a:spcPct val="115000"/>
-              </a:lnSpc>
-              <a:spcBef>
-                <a:spcPts val="1600"/>
-              </a:spcBef>
-              <a:spcAft>
-                <a:spcPts val="0"/>
-              </a:spcAft>
-              <a:buClr>
-                <a:schemeClr val="dk2"/>
-              </a:buClr>
-              <a:buSzPts val="1100"/>
-              <a:buFont typeface="Roboto"/>
-              <a:buChar char="■"/>
-              <a:defRPr sz="1100" b="0" i="0" u="none" strike="noStrike" cap="none">
-                <a:solidFill>
-                  <a:schemeClr val="dk2"/>
-                </a:solidFill>
-                <a:latin typeface="Roboto"/>
-                <a:ea typeface="Roboto"/>
-                <a:cs typeface="Roboto"/>
-                <a:sym typeface="Roboto"/>
-              </a:defRPr>
-            </a:lvl6pPr>
-            <a:lvl7pPr marL="3200400" marR="0" lvl="6" indent="-298450" algn="l" rtl="0">
-              <a:lnSpc>
-                <a:spcPct val="115000"/>
-              </a:lnSpc>
-              <a:spcBef>
-                <a:spcPts val="1600"/>
-              </a:spcBef>
-              <a:spcAft>
-                <a:spcPts val="0"/>
-              </a:spcAft>
-              <a:buClr>
-                <a:schemeClr val="dk2"/>
-              </a:buClr>
-              <a:buSzPts val="1100"/>
-              <a:buFont typeface="Roboto"/>
-              <a:buChar char="●"/>
-              <a:defRPr sz="1100" b="0" i="0" u="none" strike="noStrike" cap="none">
-                <a:solidFill>
-                  <a:schemeClr val="dk2"/>
-                </a:solidFill>
-                <a:latin typeface="Roboto"/>
-                <a:ea typeface="Roboto"/>
-                <a:cs typeface="Roboto"/>
-                <a:sym typeface="Roboto"/>
-              </a:defRPr>
-            </a:lvl7pPr>
-            <a:lvl8pPr marL="3657600" marR="0" lvl="7" indent="-298450" algn="l" rtl="0">
-              <a:lnSpc>
-                <a:spcPct val="115000"/>
-              </a:lnSpc>
-              <a:spcBef>
-                <a:spcPts val="1600"/>
-              </a:spcBef>
-              <a:spcAft>
-                <a:spcPts val="0"/>
-              </a:spcAft>
-              <a:buClr>
-                <a:schemeClr val="dk2"/>
-              </a:buClr>
-              <a:buSzPts val="1100"/>
-              <a:buFont typeface="Roboto"/>
-              <a:buChar char="○"/>
-              <a:defRPr sz="1100" b="0" i="0" u="none" strike="noStrike" cap="none">
-                <a:solidFill>
-                  <a:schemeClr val="dk2"/>
-                </a:solidFill>
-                <a:latin typeface="Roboto"/>
-                <a:ea typeface="Roboto"/>
-                <a:cs typeface="Roboto"/>
-                <a:sym typeface="Roboto"/>
-              </a:defRPr>
-            </a:lvl8pPr>
-            <a:lvl9pPr marL="4114800" marR="0" lvl="8" indent="-298450" algn="l" rtl="0">
-              <a:lnSpc>
-                <a:spcPct val="115000"/>
-              </a:lnSpc>
-              <a:spcBef>
-                <a:spcPts val="1600"/>
-              </a:spcBef>
-              <a:spcAft>
-                <a:spcPts val="1600"/>
-              </a:spcAft>
-              <a:buClr>
-                <a:schemeClr val="dk2"/>
-              </a:buClr>
-              <a:buSzPts val="1100"/>
-              <a:buFont typeface="Roboto"/>
-              <a:buChar char="■"/>
-              <a:defRPr sz="1100" b="0" i="0" u="none" strike="noStrike" cap="none">
-                <a:solidFill>
-                  <a:schemeClr val="dk2"/>
-                </a:solidFill>
-                <a:latin typeface="Roboto"/>
-                <a:ea typeface="Roboto"/>
-                <a:cs typeface="Roboto"/>
-                <a:sym typeface="Roboto"/>
-              </a:defRPr>
-            </a:lvl9pPr>
-          </a:lstStyle>
-          <a:p>
-            <a:pPr marL="0" indent="0">
-              <a:spcAft>
-                <a:spcPts val="1600"/>
-              </a:spcAft>
-              <a:buNone/>
-            </a:pPr>
-            <a:r>
-              <a:rPr lang="en-US" sz="2800" dirty="0"/>
-              <a:t>After completing the Quiz </a:t>
-            </a:r>
-          </a:p>
-          <a:p>
-            <a:pPr marL="342900" indent="-342900">
-              <a:spcAft>
-                <a:spcPts val="1600"/>
-              </a:spcAft>
-            </a:pPr>
-            <a:r>
-              <a:rPr lang="en-US" sz="2400" dirty="0"/>
-              <a:t>Clone/Pull Unit2 – git hub classroom repo for class activities</a:t>
-            </a:r>
-            <a:endParaRPr lang="en-US" sz="2400" dirty="0">
-              <a:solidFill>
-                <a:schemeClr val="tx1"/>
-              </a:solidFill>
-            </a:endParaRPr>
-          </a:p>
-        </p:txBody>
-      </p:sp>
-    </p:spTree>
   </p:cSld>
   <p:clrMapOvr>
     <a:masterClrMapping/>

--- a/Presentation/Announcement.pptx
+++ b/Presentation/Announcement.pptx
@@ -8,8 +8,8 @@
     <p:notesMasterId r:id="rId14"/>
   </p:notesMasterIdLst>
   <p:sldIdLst>
-    <p:sldId id="276" r:id="rId2"/>
-    <p:sldId id="286" r:id="rId3"/>
+    <p:sldId id="286" r:id="rId2"/>
+    <p:sldId id="276" r:id="rId3"/>
     <p:sldId id="278" r:id="rId4"/>
     <p:sldId id="281" r:id="rId5"/>
     <p:sldId id="287" r:id="rId6"/>
@@ -739,7 +739,13 @@
   <p:cSld>
     <p:spTree>
       <p:nvGrpSpPr>
-        <p:cNvPr id="1" name="Shape 320"/>
+        <p:cNvPr id="1" name="Shape 320">
+          <a:extLst>
+            <a:ext uri="{FF2B5EF4-FFF2-40B4-BE49-F238E27FC236}">
+              <a16:creationId xmlns:a16="http://schemas.microsoft.com/office/drawing/2014/main" id="{5E82D901-7A14-0382-4365-722182C687A8}"/>
+            </a:ext>
+          </a:extLst>
+        </p:cNvPr>
         <p:cNvGrpSpPr/>
         <p:nvPr/>
       </p:nvGrpSpPr>
@@ -753,7 +759,13 @@
       </p:grpSpPr>
       <p:sp>
         <p:nvSpPr>
-          <p:cNvPr id="321" name="Google Shape;321;g8f52c9b70a_3_0:notes"/>
+          <p:cNvPr id="321" name="Google Shape;321;g8f52c9b70a_3_0:notes">
+            <a:extLst>
+              <a:ext uri="{FF2B5EF4-FFF2-40B4-BE49-F238E27FC236}">
+                <a16:creationId xmlns:a16="http://schemas.microsoft.com/office/drawing/2014/main" id="{B8D16220-AF50-7601-71A9-4952749D32CB}"/>
+              </a:ext>
+            </a:extLst>
+          </p:cNvPr>
           <p:cNvSpPr>
             <a:spLocks noGrp="1" noRot="1" noChangeAspect="1"/>
           </p:cNvSpPr>
@@ -794,7 +806,13 @@
       </p:sp>
       <p:sp>
         <p:nvSpPr>
-          <p:cNvPr id="322" name="Google Shape;322;g8f52c9b70a_3_0:notes"/>
+          <p:cNvPr id="322" name="Google Shape;322;g8f52c9b70a_3_0:notes">
+            <a:extLst>
+              <a:ext uri="{FF2B5EF4-FFF2-40B4-BE49-F238E27FC236}">
+                <a16:creationId xmlns:a16="http://schemas.microsoft.com/office/drawing/2014/main" id="{AEA302D2-52D7-97D7-BF6C-781234E92D43}"/>
+              </a:ext>
+            </a:extLst>
+          </p:cNvPr>
           <p:cNvSpPr txBox="1">
             <a:spLocks noGrp="1"/>
           </p:cNvSpPr>
@@ -825,6 +843,11 @@
         </p:txBody>
       </p:sp>
     </p:spTree>
+    <p:extLst>
+      <p:ext uri="{BB962C8B-B14F-4D97-AF65-F5344CB8AC3E}">
+        <p14:creationId xmlns:p14="http://schemas.microsoft.com/office/powerpoint/2010/main" val="2483524941"/>
+      </p:ext>
+    </p:extLst>
   </p:cSld>
   <p:clrMapOvr>
     <a:masterClrMapping/>
@@ -1146,13 +1169,7 @@
   <p:cSld>
     <p:spTree>
       <p:nvGrpSpPr>
-        <p:cNvPr id="1" name="Shape 320">
-          <a:extLst>
-            <a:ext uri="{FF2B5EF4-FFF2-40B4-BE49-F238E27FC236}">
-              <a16:creationId xmlns:a16="http://schemas.microsoft.com/office/drawing/2014/main" id="{5E82D901-7A14-0382-4365-722182C687A8}"/>
-            </a:ext>
-          </a:extLst>
-        </p:cNvPr>
+        <p:cNvPr id="1" name="Shape 320"/>
         <p:cNvGrpSpPr/>
         <p:nvPr/>
       </p:nvGrpSpPr>
@@ -1166,13 +1183,7 @@
       </p:grpSpPr>
       <p:sp>
         <p:nvSpPr>
-          <p:cNvPr id="321" name="Google Shape;321;g8f52c9b70a_3_0:notes">
-            <a:extLst>
-              <a:ext uri="{FF2B5EF4-FFF2-40B4-BE49-F238E27FC236}">
-                <a16:creationId xmlns:a16="http://schemas.microsoft.com/office/drawing/2014/main" id="{B8D16220-AF50-7601-71A9-4952749D32CB}"/>
-              </a:ext>
-            </a:extLst>
-          </p:cNvPr>
+          <p:cNvPr id="321" name="Google Shape;321;g8f52c9b70a_3_0:notes"/>
           <p:cNvSpPr>
             <a:spLocks noGrp="1" noRot="1" noChangeAspect="1"/>
           </p:cNvSpPr>
@@ -1213,13 +1224,7 @@
       </p:sp>
       <p:sp>
         <p:nvSpPr>
-          <p:cNvPr id="322" name="Google Shape;322;g8f52c9b70a_3_0:notes">
-            <a:extLst>
-              <a:ext uri="{FF2B5EF4-FFF2-40B4-BE49-F238E27FC236}">
-                <a16:creationId xmlns:a16="http://schemas.microsoft.com/office/drawing/2014/main" id="{AEA302D2-52D7-97D7-BF6C-781234E92D43}"/>
-              </a:ext>
-            </a:extLst>
-          </p:cNvPr>
+          <p:cNvPr id="322" name="Google Shape;322;g8f52c9b70a_3_0:notes"/>
           <p:cNvSpPr txBox="1">
             <a:spLocks noGrp="1"/>
           </p:cNvSpPr>
@@ -1250,11 +1255,6 @@
         </p:txBody>
       </p:sp>
     </p:spTree>
-    <p:extLst>
-      <p:ext uri="{BB962C8B-B14F-4D97-AF65-F5344CB8AC3E}">
-        <p14:creationId xmlns:p14="http://schemas.microsoft.com/office/powerpoint/2010/main" val="2483524941"/>
-      </p:ext>
-    </p:extLst>
   </p:cSld>
   <p:clrMapOvr>
     <a:masterClrMapping/>
@@ -6529,6 +6529,1384 @@
   <p:cSld>
     <p:spTree>
       <p:nvGrpSpPr>
+        <p:cNvPr id="1" name="Shape 323">
+          <a:extLst>
+            <a:ext uri="{FF2B5EF4-FFF2-40B4-BE49-F238E27FC236}">
+              <a16:creationId xmlns:a16="http://schemas.microsoft.com/office/drawing/2014/main" id="{19512066-5980-8A8B-BE30-C4FB3AC72235}"/>
+            </a:ext>
+          </a:extLst>
+        </p:cNvPr>
+        <p:cNvGrpSpPr/>
+        <p:nvPr/>
+      </p:nvGrpSpPr>
+      <p:grpSpPr>
+        <a:xfrm>
+          <a:off x="0" y="0"/>
+          <a:ext cx="0" cy="0"/>
+          <a:chOff x="0" y="0"/>
+          <a:chExt cx="0" cy="0"/>
+        </a:xfrm>
+      </p:grpSpPr>
+      <p:sp>
+        <p:nvSpPr>
+          <p:cNvPr id="324" name="Google Shape;324;p47">
+            <a:extLst>
+              <a:ext uri="{FF2B5EF4-FFF2-40B4-BE49-F238E27FC236}">
+                <a16:creationId xmlns:a16="http://schemas.microsoft.com/office/drawing/2014/main" id="{CDF56279-13BE-3C44-BBEF-E7DC5D1E88D2}"/>
+              </a:ext>
+            </a:extLst>
+          </p:cNvPr>
+          <p:cNvSpPr txBox="1">
+            <a:spLocks noGrp="1"/>
+          </p:cNvSpPr>
+          <p:nvPr>
+            <p:ph type="title"/>
+          </p:nvPr>
+        </p:nvSpPr>
+        <p:spPr>
+          <a:xfrm>
+            <a:off x="300016" y="269197"/>
+            <a:ext cx="8520600" cy="623700"/>
+          </a:xfrm>
+          <a:prstGeom prst="rect">
+            <a:avLst/>
+          </a:prstGeom>
+        </p:spPr>
+        <p:txBody>
+          <a:bodyPr spcFirstLastPara="1" wrap="square" lIns="91425" tIns="91425" rIns="91425" bIns="91425" anchor="t" anchorCtr="0">
+            <a:noAutofit/>
+          </a:bodyPr>
+          <a:lstStyle/>
+          <a:p>
+            <a:pPr marL="0" lvl="0" indent="0" algn="ctr" rtl="0">
+              <a:spcBef>
+                <a:spcPts val="0"/>
+              </a:spcBef>
+              <a:spcAft>
+                <a:spcPts val="0"/>
+              </a:spcAft>
+              <a:buNone/>
+            </a:pPr>
+            <a:r>
+              <a:rPr lang="en-US" dirty="0"/>
+              <a:t>GCIS – Software Development and Problem Solving</a:t>
+            </a:r>
+            <a:endParaRPr dirty="0"/>
+          </a:p>
+        </p:txBody>
+      </p:sp>
+      <p:sp>
+        <p:nvSpPr>
+          <p:cNvPr id="325" name="Google Shape;325;p47">
+            <a:extLst>
+              <a:ext uri="{FF2B5EF4-FFF2-40B4-BE49-F238E27FC236}">
+                <a16:creationId xmlns:a16="http://schemas.microsoft.com/office/drawing/2014/main" id="{5A9661D1-8430-BF80-279A-41B28CA04273}"/>
+              </a:ext>
+            </a:extLst>
+          </p:cNvPr>
+          <p:cNvSpPr txBox="1">
+            <a:spLocks noGrp="1"/>
+          </p:cNvSpPr>
+          <p:nvPr>
+            <p:ph type="body" idx="1"/>
+          </p:nvPr>
+        </p:nvSpPr>
+        <p:spPr>
+          <a:xfrm>
+            <a:off x="91445" y="1758316"/>
+            <a:ext cx="4000496" cy="1378401"/>
+          </a:xfrm>
+          <a:prstGeom prst="rect">
+            <a:avLst/>
+          </a:prstGeom>
+        </p:spPr>
+        <p:txBody>
+          <a:bodyPr spcFirstLastPara="1" wrap="square" lIns="91425" tIns="91425" rIns="91425" bIns="91425" anchor="ctr" anchorCtr="0">
+            <a:noAutofit/>
+          </a:bodyPr>
+          <a:lstStyle/>
+          <a:p>
+            <a:pPr marL="146050" indent="0">
+              <a:buNone/>
+            </a:pPr>
+            <a:r>
+              <a:rPr lang="en-US" sz="1600" dirty="0"/>
+              <a:t>Take Quiz 3.2: Abstract Classes</a:t>
+            </a:r>
+          </a:p>
+          <a:p>
+            <a:pPr marL="146050" indent="0">
+              <a:buNone/>
+            </a:pPr>
+            <a:r>
+              <a:rPr lang="en-US" sz="1600" dirty="0">
+                <a:solidFill>
+                  <a:schemeClr val="tx1"/>
+                </a:solidFill>
+              </a:rPr>
+              <a:t>Password – </a:t>
+            </a:r>
+            <a:r>
+              <a:rPr lang="en-US" sz="1600" dirty="0" err="1">
+                <a:solidFill>
+                  <a:schemeClr val="tx1"/>
+                </a:solidFill>
+              </a:rPr>
+              <a:t>abstractPassword</a:t>
+            </a:r>
+            <a:endParaRPr sz="1600" dirty="0">
+              <a:solidFill>
+                <a:schemeClr val="tx1"/>
+              </a:solidFill>
+            </a:endParaRPr>
+          </a:p>
+        </p:txBody>
+      </p:sp>
+      <p:sp>
+        <p:nvSpPr>
+          <p:cNvPr id="326" name="Google Shape;326;p47">
+            <a:extLst>
+              <a:ext uri="{FF2B5EF4-FFF2-40B4-BE49-F238E27FC236}">
+                <a16:creationId xmlns:a16="http://schemas.microsoft.com/office/drawing/2014/main" id="{8A14E227-935A-FBD8-6BD5-CBCE8D13EE84}"/>
+              </a:ext>
+            </a:extLst>
+          </p:cNvPr>
+          <p:cNvSpPr txBox="1">
+            <a:spLocks noGrp="1"/>
+          </p:cNvSpPr>
+          <p:nvPr>
+            <p:ph type="sldNum" idx="12"/>
+          </p:nvPr>
+        </p:nvSpPr>
+        <p:spPr>
+          <a:xfrm>
+            <a:off x="8472458" y="4663217"/>
+            <a:ext cx="548700" cy="393600"/>
+          </a:xfrm>
+          <a:prstGeom prst="rect">
+            <a:avLst/>
+          </a:prstGeom>
+        </p:spPr>
+        <p:txBody>
+          <a:bodyPr spcFirstLastPara="1" wrap="square" lIns="91425" tIns="91425" rIns="91425" bIns="91425" anchor="ctr" anchorCtr="0">
+            <a:noAutofit/>
+          </a:bodyPr>
+          <a:lstStyle/>
+          <a:p>
+            <a:pPr marL="0" lvl="0" indent="0" algn="r" rtl="0">
+              <a:spcBef>
+                <a:spcPts val="0"/>
+              </a:spcBef>
+              <a:spcAft>
+                <a:spcPts val="0"/>
+              </a:spcAft>
+              <a:buNone/>
+            </a:pPr>
+            <a:fld id="{00000000-1234-1234-1234-123412341234}" type="slidenum">
+              <a:rPr lang="en"/>
+              <a:t>1</a:t>
+            </a:fld>
+            <a:endParaRPr/>
+          </a:p>
+        </p:txBody>
+      </p:sp>
+      <p:sp>
+        <p:nvSpPr>
+          <p:cNvPr id="2" name="TextBox 1">
+            <a:extLst>
+              <a:ext uri="{FF2B5EF4-FFF2-40B4-BE49-F238E27FC236}">
+                <a16:creationId xmlns:a16="http://schemas.microsoft.com/office/drawing/2014/main" id="{AE960589-7B12-D7F7-6452-D45441D8CA95}"/>
+              </a:ext>
+            </a:extLst>
+          </p:cNvPr>
+          <p:cNvSpPr txBox="1"/>
+          <p:nvPr/>
+        </p:nvSpPr>
+        <p:spPr>
+          <a:xfrm>
+            <a:off x="-11684" y="1287037"/>
+            <a:ext cx="9144000" cy="338555"/>
+          </a:xfrm>
+          <a:prstGeom prst="rect">
+            <a:avLst/>
+          </a:prstGeom>
+          <a:solidFill>
+            <a:srgbClr val="FFC000"/>
+          </a:solidFill>
+        </p:spPr>
+        <p:txBody>
+          <a:bodyPr wrap="square" rtlCol="0">
+            <a:spAutoFit/>
+          </a:bodyPr>
+          <a:lstStyle/>
+          <a:p>
+            <a:r>
+              <a:rPr lang="en-US" dirty="0"/>
+              <a:t>Quiz</a:t>
+            </a:r>
+          </a:p>
+        </p:txBody>
+      </p:sp>
+      <p:sp>
+        <p:nvSpPr>
+          <p:cNvPr id="3" name="TextBox 2">
+            <a:extLst>
+              <a:ext uri="{FF2B5EF4-FFF2-40B4-BE49-F238E27FC236}">
+                <a16:creationId xmlns:a16="http://schemas.microsoft.com/office/drawing/2014/main" id="{4FD526CA-3FDB-A5C2-36D9-69A3252D5E9A}"/>
+              </a:ext>
+            </a:extLst>
+          </p:cNvPr>
+          <p:cNvSpPr txBox="1"/>
+          <p:nvPr/>
+        </p:nvSpPr>
+        <p:spPr>
+          <a:xfrm>
+            <a:off x="0" y="3507404"/>
+            <a:ext cx="9144000" cy="307777"/>
+          </a:xfrm>
+          <a:prstGeom prst="rect">
+            <a:avLst/>
+          </a:prstGeom>
+          <a:solidFill>
+            <a:srgbClr val="FFC000"/>
+          </a:solidFill>
+        </p:spPr>
+        <p:txBody>
+          <a:bodyPr wrap="square" rtlCol="0">
+            <a:spAutoFit/>
+          </a:bodyPr>
+          <a:lstStyle/>
+          <a:p>
+            <a:r>
+              <a:rPr lang="en-US" dirty="0"/>
+              <a:t>Next </a:t>
+            </a:r>
+            <a:r>
+              <a:rPr lang="en-US" dirty="0">
+                <a:sym typeface="Wingdings" panose="05000000000000000000" pitchFamily="2" charset="2"/>
+              </a:rPr>
+              <a:t> </a:t>
+            </a:r>
+            <a:endParaRPr lang="en-US" dirty="0"/>
+          </a:p>
+        </p:txBody>
+      </p:sp>
+      <p:sp>
+        <p:nvSpPr>
+          <p:cNvPr id="4" name="Google Shape;325;p47">
+            <a:extLst>
+              <a:ext uri="{FF2B5EF4-FFF2-40B4-BE49-F238E27FC236}">
+                <a16:creationId xmlns:a16="http://schemas.microsoft.com/office/drawing/2014/main" id="{DC50CCB1-5AFE-1F52-8B22-87EB927965B4}"/>
+              </a:ext>
+            </a:extLst>
+          </p:cNvPr>
+          <p:cNvSpPr txBox="1">
+            <a:spLocks/>
+          </p:cNvSpPr>
+          <p:nvPr/>
+        </p:nvSpPr>
+        <p:spPr>
+          <a:xfrm>
+            <a:off x="-5842" y="3848100"/>
+            <a:ext cx="9149842" cy="1208717"/>
+          </a:xfrm>
+          <a:prstGeom prst="rect">
+            <a:avLst/>
+          </a:prstGeom>
+          <a:noFill/>
+          <a:ln>
+            <a:noFill/>
+          </a:ln>
+        </p:spPr>
+        <p:txBody>
+          <a:bodyPr spcFirstLastPara="1" wrap="square" lIns="91425" tIns="91425" rIns="91425" bIns="91425" anchor="ctr" anchorCtr="0">
+            <a:noAutofit/>
+          </a:bodyPr>
+          <a:lstStyle>
+            <a:defPPr marR="0" lvl="0" algn="l" rtl="0">
+              <a:lnSpc>
+                <a:spcPct val="100000"/>
+              </a:lnSpc>
+              <a:spcBef>
+                <a:spcPts val="0"/>
+              </a:spcBef>
+              <a:spcAft>
+                <a:spcPts val="0"/>
+              </a:spcAft>
+            </a:defPPr>
+            <a:lvl1pPr marL="457200" marR="0" lvl="0" indent="-311150" algn="l" rtl="0">
+              <a:lnSpc>
+                <a:spcPct val="115000"/>
+              </a:lnSpc>
+              <a:spcBef>
+                <a:spcPts val="0"/>
+              </a:spcBef>
+              <a:spcAft>
+                <a:spcPts val="0"/>
+              </a:spcAft>
+              <a:buClr>
+                <a:schemeClr val="dk2"/>
+              </a:buClr>
+              <a:buSzPts val="1300"/>
+              <a:buFont typeface="Roboto"/>
+              <a:buChar char="●"/>
+              <a:defRPr sz="1300" b="0" i="0" u="none" strike="noStrike" cap="none">
+                <a:solidFill>
+                  <a:schemeClr val="dk2"/>
+                </a:solidFill>
+                <a:latin typeface="Roboto"/>
+                <a:ea typeface="Roboto"/>
+                <a:cs typeface="Roboto"/>
+                <a:sym typeface="Roboto"/>
+              </a:defRPr>
+            </a:lvl1pPr>
+            <a:lvl2pPr marL="914400" marR="0" lvl="1" indent="-298450" algn="l" rtl="0">
+              <a:lnSpc>
+                <a:spcPct val="115000"/>
+              </a:lnSpc>
+              <a:spcBef>
+                <a:spcPts val="1600"/>
+              </a:spcBef>
+              <a:spcAft>
+                <a:spcPts val="0"/>
+              </a:spcAft>
+              <a:buClr>
+                <a:schemeClr val="dk2"/>
+              </a:buClr>
+              <a:buSzPts val="1100"/>
+              <a:buFont typeface="Roboto"/>
+              <a:buChar char="○"/>
+              <a:defRPr sz="1100" b="0" i="0" u="none" strike="noStrike" cap="none">
+                <a:solidFill>
+                  <a:schemeClr val="dk2"/>
+                </a:solidFill>
+                <a:latin typeface="Roboto"/>
+                <a:ea typeface="Roboto"/>
+                <a:cs typeface="Roboto"/>
+                <a:sym typeface="Roboto"/>
+              </a:defRPr>
+            </a:lvl2pPr>
+            <a:lvl3pPr marL="1371600" marR="0" lvl="2" indent="-298450" algn="l" rtl="0">
+              <a:lnSpc>
+                <a:spcPct val="115000"/>
+              </a:lnSpc>
+              <a:spcBef>
+                <a:spcPts val="1600"/>
+              </a:spcBef>
+              <a:spcAft>
+                <a:spcPts val="0"/>
+              </a:spcAft>
+              <a:buClr>
+                <a:schemeClr val="dk2"/>
+              </a:buClr>
+              <a:buSzPts val="1100"/>
+              <a:buFont typeface="Roboto"/>
+              <a:buChar char="■"/>
+              <a:defRPr sz="1100" b="0" i="0" u="none" strike="noStrike" cap="none">
+                <a:solidFill>
+                  <a:schemeClr val="dk2"/>
+                </a:solidFill>
+                <a:latin typeface="Roboto"/>
+                <a:ea typeface="Roboto"/>
+                <a:cs typeface="Roboto"/>
+                <a:sym typeface="Roboto"/>
+              </a:defRPr>
+            </a:lvl3pPr>
+            <a:lvl4pPr marL="1828800" marR="0" lvl="3" indent="-298450" algn="l" rtl="0">
+              <a:lnSpc>
+                <a:spcPct val="115000"/>
+              </a:lnSpc>
+              <a:spcBef>
+                <a:spcPts val="1600"/>
+              </a:spcBef>
+              <a:spcAft>
+                <a:spcPts val="0"/>
+              </a:spcAft>
+              <a:buClr>
+                <a:schemeClr val="dk2"/>
+              </a:buClr>
+              <a:buSzPts val="1100"/>
+              <a:buFont typeface="Roboto"/>
+              <a:buChar char="●"/>
+              <a:defRPr sz="1100" b="0" i="0" u="none" strike="noStrike" cap="none">
+                <a:solidFill>
+                  <a:schemeClr val="dk2"/>
+                </a:solidFill>
+                <a:latin typeface="Roboto"/>
+                <a:ea typeface="Roboto"/>
+                <a:cs typeface="Roboto"/>
+                <a:sym typeface="Roboto"/>
+              </a:defRPr>
+            </a:lvl4pPr>
+            <a:lvl5pPr marL="2286000" marR="0" lvl="4" indent="-298450" algn="l" rtl="0">
+              <a:lnSpc>
+                <a:spcPct val="115000"/>
+              </a:lnSpc>
+              <a:spcBef>
+                <a:spcPts val="1600"/>
+              </a:spcBef>
+              <a:spcAft>
+                <a:spcPts val="0"/>
+              </a:spcAft>
+              <a:buClr>
+                <a:schemeClr val="dk2"/>
+              </a:buClr>
+              <a:buSzPts val="1100"/>
+              <a:buFont typeface="Roboto"/>
+              <a:buChar char="○"/>
+              <a:defRPr sz="1100" b="0" i="0" u="none" strike="noStrike" cap="none">
+                <a:solidFill>
+                  <a:schemeClr val="dk2"/>
+                </a:solidFill>
+                <a:latin typeface="Roboto"/>
+                <a:ea typeface="Roboto"/>
+                <a:cs typeface="Roboto"/>
+                <a:sym typeface="Roboto"/>
+              </a:defRPr>
+            </a:lvl5pPr>
+            <a:lvl6pPr marL="2743200" marR="0" lvl="5" indent="-298450" algn="l" rtl="0">
+              <a:lnSpc>
+                <a:spcPct val="115000"/>
+              </a:lnSpc>
+              <a:spcBef>
+                <a:spcPts val="1600"/>
+              </a:spcBef>
+              <a:spcAft>
+                <a:spcPts val="0"/>
+              </a:spcAft>
+              <a:buClr>
+                <a:schemeClr val="dk2"/>
+              </a:buClr>
+              <a:buSzPts val="1100"/>
+              <a:buFont typeface="Roboto"/>
+              <a:buChar char="■"/>
+              <a:defRPr sz="1100" b="0" i="0" u="none" strike="noStrike" cap="none">
+                <a:solidFill>
+                  <a:schemeClr val="dk2"/>
+                </a:solidFill>
+                <a:latin typeface="Roboto"/>
+                <a:ea typeface="Roboto"/>
+                <a:cs typeface="Roboto"/>
+                <a:sym typeface="Roboto"/>
+              </a:defRPr>
+            </a:lvl6pPr>
+            <a:lvl7pPr marL="3200400" marR="0" lvl="6" indent="-298450" algn="l" rtl="0">
+              <a:lnSpc>
+                <a:spcPct val="115000"/>
+              </a:lnSpc>
+              <a:spcBef>
+                <a:spcPts val="1600"/>
+              </a:spcBef>
+              <a:spcAft>
+                <a:spcPts val="0"/>
+              </a:spcAft>
+              <a:buClr>
+                <a:schemeClr val="dk2"/>
+              </a:buClr>
+              <a:buSzPts val="1100"/>
+              <a:buFont typeface="Roboto"/>
+              <a:buChar char="●"/>
+              <a:defRPr sz="1100" b="0" i="0" u="none" strike="noStrike" cap="none">
+                <a:solidFill>
+                  <a:schemeClr val="dk2"/>
+                </a:solidFill>
+                <a:latin typeface="Roboto"/>
+                <a:ea typeface="Roboto"/>
+                <a:cs typeface="Roboto"/>
+                <a:sym typeface="Roboto"/>
+              </a:defRPr>
+            </a:lvl7pPr>
+            <a:lvl8pPr marL="3657600" marR="0" lvl="7" indent="-298450" algn="l" rtl="0">
+              <a:lnSpc>
+                <a:spcPct val="115000"/>
+              </a:lnSpc>
+              <a:spcBef>
+                <a:spcPts val="1600"/>
+              </a:spcBef>
+              <a:spcAft>
+                <a:spcPts val="0"/>
+              </a:spcAft>
+              <a:buClr>
+                <a:schemeClr val="dk2"/>
+              </a:buClr>
+              <a:buSzPts val="1100"/>
+              <a:buFont typeface="Roboto"/>
+              <a:buChar char="○"/>
+              <a:defRPr sz="1100" b="0" i="0" u="none" strike="noStrike" cap="none">
+                <a:solidFill>
+                  <a:schemeClr val="dk2"/>
+                </a:solidFill>
+                <a:latin typeface="Roboto"/>
+                <a:ea typeface="Roboto"/>
+                <a:cs typeface="Roboto"/>
+                <a:sym typeface="Roboto"/>
+              </a:defRPr>
+            </a:lvl8pPr>
+            <a:lvl9pPr marL="4114800" marR="0" lvl="8" indent="-298450" algn="l" rtl="0">
+              <a:lnSpc>
+                <a:spcPct val="115000"/>
+              </a:lnSpc>
+              <a:spcBef>
+                <a:spcPts val="1600"/>
+              </a:spcBef>
+              <a:spcAft>
+                <a:spcPts val="1600"/>
+              </a:spcAft>
+              <a:buClr>
+                <a:schemeClr val="dk2"/>
+              </a:buClr>
+              <a:buSzPts val="1100"/>
+              <a:buFont typeface="Roboto"/>
+              <a:buChar char="■"/>
+              <a:defRPr sz="1100" b="0" i="0" u="none" strike="noStrike" cap="none">
+                <a:solidFill>
+                  <a:schemeClr val="dk2"/>
+                </a:solidFill>
+                <a:latin typeface="Roboto"/>
+                <a:ea typeface="Roboto"/>
+                <a:cs typeface="Roboto"/>
+                <a:sym typeface="Roboto"/>
+              </a:defRPr>
+            </a:lvl9pPr>
+          </a:lstStyle>
+          <a:p>
+            <a:pPr marL="0" indent="0">
+              <a:spcAft>
+                <a:spcPts val="1600"/>
+              </a:spcAft>
+              <a:buNone/>
+            </a:pPr>
+            <a:r>
+              <a:rPr lang="en-US" sz="1400" dirty="0"/>
+              <a:t>After completing the Quiz </a:t>
+            </a:r>
+          </a:p>
+          <a:p>
+            <a:pPr marL="342900" indent="-342900">
+              <a:spcAft>
+                <a:spcPts val="1600"/>
+              </a:spcAft>
+            </a:pPr>
+            <a:r>
+              <a:rPr lang="en-US" sz="1200" dirty="0"/>
+              <a:t>Accept GitHub Classroom Assignment for Unit 04</a:t>
+            </a:r>
+          </a:p>
+          <a:p>
+            <a:pPr marL="342900" indent="-342900">
+              <a:spcAft>
+                <a:spcPts val="1600"/>
+              </a:spcAft>
+            </a:pPr>
+            <a:r>
+              <a:rPr lang="en-US" sz="1200" dirty="0"/>
+              <a:t>Clone/pull GitHub classroom repo for Unit 04 under </a:t>
+            </a:r>
+            <a:r>
+              <a:rPr lang="en-US" sz="1200" dirty="0" err="1"/>
+              <a:t>softdevII</a:t>
+            </a:r>
+            <a:r>
+              <a:rPr lang="en-US" sz="1200" dirty="0"/>
+              <a:t> folder</a:t>
+            </a:r>
+            <a:endParaRPr lang="en-US" sz="1200" dirty="0">
+              <a:solidFill>
+                <a:schemeClr val="tx1"/>
+              </a:solidFill>
+            </a:endParaRPr>
+          </a:p>
+        </p:txBody>
+      </p:sp>
+      <p:sp>
+        <p:nvSpPr>
+          <p:cNvPr id="5" name="Google Shape;325;p47">
+            <a:extLst>
+              <a:ext uri="{FF2B5EF4-FFF2-40B4-BE49-F238E27FC236}">
+                <a16:creationId xmlns:a16="http://schemas.microsoft.com/office/drawing/2014/main" id="{7B85466C-6200-EE66-9396-7DECA70CDF53}"/>
+              </a:ext>
+            </a:extLst>
+          </p:cNvPr>
+          <p:cNvSpPr txBox="1">
+            <a:spLocks/>
+          </p:cNvSpPr>
+          <p:nvPr/>
+        </p:nvSpPr>
+        <p:spPr>
+          <a:xfrm>
+            <a:off x="4303618" y="1737005"/>
+            <a:ext cx="4516998" cy="1378400"/>
+          </a:xfrm>
+          <a:prstGeom prst="rect">
+            <a:avLst/>
+          </a:prstGeom>
+          <a:noFill/>
+          <a:ln>
+            <a:noFill/>
+          </a:ln>
+        </p:spPr>
+        <p:txBody>
+          <a:bodyPr spcFirstLastPara="1" wrap="square" lIns="91425" tIns="91425" rIns="91425" bIns="91425" anchor="ctr" anchorCtr="0">
+            <a:noAutofit/>
+          </a:bodyPr>
+          <a:lstStyle>
+            <a:defPPr marR="0" lvl="0" algn="l" rtl="0">
+              <a:lnSpc>
+                <a:spcPct val="100000"/>
+              </a:lnSpc>
+              <a:spcBef>
+                <a:spcPts val="0"/>
+              </a:spcBef>
+              <a:spcAft>
+                <a:spcPts val="0"/>
+              </a:spcAft>
+            </a:defPPr>
+            <a:lvl1pPr marL="457200" marR="0" lvl="0" indent="-311150" algn="l" rtl="0">
+              <a:lnSpc>
+                <a:spcPct val="115000"/>
+              </a:lnSpc>
+              <a:spcBef>
+                <a:spcPts val="0"/>
+              </a:spcBef>
+              <a:spcAft>
+                <a:spcPts val="0"/>
+              </a:spcAft>
+              <a:buClr>
+                <a:schemeClr val="dk2"/>
+              </a:buClr>
+              <a:buSzPts val="1300"/>
+              <a:buFont typeface="Roboto"/>
+              <a:buChar char="●"/>
+              <a:defRPr sz="1300" b="0" i="0" u="none" strike="noStrike" cap="none">
+                <a:solidFill>
+                  <a:schemeClr val="dk2"/>
+                </a:solidFill>
+                <a:latin typeface="Roboto"/>
+                <a:ea typeface="Roboto"/>
+                <a:cs typeface="Roboto"/>
+                <a:sym typeface="Roboto"/>
+              </a:defRPr>
+            </a:lvl1pPr>
+            <a:lvl2pPr marL="914400" marR="0" lvl="1" indent="-298450" algn="l" rtl="0">
+              <a:lnSpc>
+                <a:spcPct val="115000"/>
+              </a:lnSpc>
+              <a:spcBef>
+                <a:spcPts val="1600"/>
+              </a:spcBef>
+              <a:spcAft>
+                <a:spcPts val="0"/>
+              </a:spcAft>
+              <a:buClr>
+                <a:schemeClr val="dk2"/>
+              </a:buClr>
+              <a:buSzPts val="1100"/>
+              <a:buFont typeface="Roboto"/>
+              <a:buChar char="○"/>
+              <a:defRPr sz="1100" b="0" i="0" u="none" strike="noStrike" cap="none">
+                <a:solidFill>
+                  <a:schemeClr val="dk2"/>
+                </a:solidFill>
+                <a:latin typeface="Roboto"/>
+                <a:ea typeface="Roboto"/>
+                <a:cs typeface="Roboto"/>
+                <a:sym typeface="Roboto"/>
+              </a:defRPr>
+            </a:lvl2pPr>
+            <a:lvl3pPr marL="1371600" marR="0" lvl="2" indent="-298450" algn="l" rtl="0">
+              <a:lnSpc>
+                <a:spcPct val="115000"/>
+              </a:lnSpc>
+              <a:spcBef>
+                <a:spcPts val="1600"/>
+              </a:spcBef>
+              <a:spcAft>
+                <a:spcPts val="0"/>
+              </a:spcAft>
+              <a:buClr>
+                <a:schemeClr val="dk2"/>
+              </a:buClr>
+              <a:buSzPts val="1100"/>
+              <a:buFont typeface="Roboto"/>
+              <a:buChar char="■"/>
+              <a:defRPr sz="1100" b="0" i="0" u="none" strike="noStrike" cap="none">
+                <a:solidFill>
+                  <a:schemeClr val="dk2"/>
+                </a:solidFill>
+                <a:latin typeface="Roboto"/>
+                <a:ea typeface="Roboto"/>
+                <a:cs typeface="Roboto"/>
+                <a:sym typeface="Roboto"/>
+              </a:defRPr>
+            </a:lvl3pPr>
+            <a:lvl4pPr marL="1828800" marR="0" lvl="3" indent="-298450" algn="l" rtl="0">
+              <a:lnSpc>
+                <a:spcPct val="115000"/>
+              </a:lnSpc>
+              <a:spcBef>
+                <a:spcPts val="1600"/>
+              </a:spcBef>
+              <a:spcAft>
+                <a:spcPts val="0"/>
+              </a:spcAft>
+              <a:buClr>
+                <a:schemeClr val="dk2"/>
+              </a:buClr>
+              <a:buSzPts val="1100"/>
+              <a:buFont typeface="Roboto"/>
+              <a:buChar char="●"/>
+              <a:defRPr sz="1100" b="0" i="0" u="none" strike="noStrike" cap="none">
+                <a:solidFill>
+                  <a:schemeClr val="dk2"/>
+                </a:solidFill>
+                <a:latin typeface="Roboto"/>
+                <a:ea typeface="Roboto"/>
+                <a:cs typeface="Roboto"/>
+                <a:sym typeface="Roboto"/>
+              </a:defRPr>
+            </a:lvl4pPr>
+            <a:lvl5pPr marL="2286000" marR="0" lvl="4" indent="-298450" algn="l" rtl="0">
+              <a:lnSpc>
+                <a:spcPct val="115000"/>
+              </a:lnSpc>
+              <a:spcBef>
+                <a:spcPts val="1600"/>
+              </a:spcBef>
+              <a:spcAft>
+                <a:spcPts val="0"/>
+              </a:spcAft>
+              <a:buClr>
+                <a:schemeClr val="dk2"/>
+              </a:buClr>
+              <a:buSzPts val="1100"/>
+              <a:buFont typeface="Roboto"/>
+              <a:buChar char="○"/>
+              <a:defRPr sz="1100" b="0" i="0" u="none" strike="noStrike" cap="none">
+                <a:solidFill>
+                  <a:schemeClr val="dk2"/>
+                </a:solidFill>
+                <a:latin typeface="Roboto"/>
+                <a:ea typeface="Roboto"/>
+                <a:cs typeface="Roboto"/>
+                <a:sym typeface="Roboto"/>
+              </a:defRPr>
+            </a:lvl5pPr>
+            <a:lvl6pPr marL="2743200" marR="0" lvl="5" indent="-298450" algn="l" rtl="0">
+              <a:lnSpc>
+                <a:spcPct val="115000"/>
+              </a:lnSpc>
+              <a:spcBef>
+                <a:spcPts val="1600"/>
+              </a:spcBef>
+              <a:spcAft>
+                <a:spcPts val="0"/>
+              </a:spcAft>
+              <a:buClr>
+                <a:schemeClr val="dk2"/>
+              </a:buClr>
+              <a:buSzPts val="1100"/>
+              <a:buFont typeface="Roboto"/>
+              <a:buChar char="■"/>
+              <a:defRPr sz="1100" b="0" i="0" u="none" strike="noStrike" cap="none">
+                <a:solidFill>
+                  <a:schemeClr val="dk2"/>
+                </a:solidFill>
+                <a:latin typeface="Roboto"/>
+                <a:ea typeface="Roboto"/>
+                <a:cs typeface="Roboto"/>
+                <a:sym typeface="Roboto"/>
+              </a:defRPr>
+            </a:lvl6pPr>
+            <a:lvl7pPr marL="3200400" marR="0" lvl="6" indent="-298450" algn="l" rtl="0">
+              <a:lnSpc>
+                <a:spcPct val="115000"/>
+              </a:lnSpc>
+              <a:spcBef>
+                <a:spcPts val="1600"/>
+              </a:spcBef>
+              <a:spcAft>
+                <a:spcPts val="0"/>
+              </a:spcAft>
+              <a:buClr>
+                <a:schemeClr val="dk2"/>
+              </a:buClr>
+              <a:buSzPts val="1100"/>
+              <a:buFont typeface="Roboto"/>
+              <a:buChar char="●"/>
+              <a:defRPr sz="1100" b="0" i="0" u="none" strike="noStrike" cap="none">
+                <a:solidFill>
+                  <a:schemeClr val="dk2"/>
+                </a:solidFill>
+                <a:latin typeface="Roboto"/>
+                <a:ea typeface="Roboto"/>
+                <a:cs typeface="Roboto"/>
+                <a:sym typeface="Roboto"/>
+              </a:defRPr>
+            </a:lvl7pPr>
+            <a:lvl8pPr marL="3657600" marR="0" lvl="7" indent="-298450" algn="l" rtl="0">
+              <a:lnSpc>
+                <a:spcPct val="115000"/>
+              </a:lnSpc>
+              <a:spcBef>
+                <a:spcPts val="1600"/>
+              </a:spcBef>
+              <a:spcAft>
+                <a:spcPts val="0"/>
+              </a:spcAft>
+              <a:buClr>
+                <a:schemeClr val="dk2"/>
+              </a:buClr>
+              <a:buSzPts val="1100"/>
+              <a:buFont typeface="Roboto"/>
+              <a:buChar char="○"/>
+              <a:defRPr sz="1100" b="0" i="0" u="none" strike="noStrike" cap="none">
+                <a:solidFill>
+                  <a:schemeClr val="dk2"/>
+                </a:solidFill>
+                <a:latin typeface="Roboto"/>
+                <a:ea typeface="Roboto"/>
+                <a:cs typeface="Roboto"/>
+                <a:sym typeface="Roboto"/>
+              </a:defRPr>
+            </a:lvl8pPr>
+            <a:lvl9pPr marL="4114800" marR="0" lvl="8" indent="-298450" algn="l" rtl="0">
+              <a:lnSpc>
+                <a:spcPct val="115000"/>
+              </a:lnSpc>
+              <a:spcBef>
+                <a:spcPts val="1600"/>
+              </a:spcBef>
+              <a:spcAft>
+                <a:spcPts val="1600"/>
+              </a:spcAft>
+              <a:buClr>
+                <a:schemeClr val="dk2"/>
+              </a:buClr>
+              <a:buSzPts val="1100"/>
+              <a:buFont typeface="Roboto"/>
+              <a:buChar char="■"/>
+              <a:defRPr sz="1100" b="0" i="0" u="none" strike="noStrike" cap="none">
+                <a:solidFill>
+                  <a:schemeClr val="dk2"/>
+                </a:solidFill>
+                <a:latin typeface="Roboto"/>
+                <a:ea typeface="Roboto"/>
+                <a:cs typeface="Roboto"/>
+                <a:sym typeface="Roboto"/>
+              </a:defRPr>
+            </a:lvl9pPr>
+          </a:lstStyle>
+          <a:p>
+            <a:pPr marL="146050" indent="0">
+              <a:buNone/>
+            </a:pPr>
+            <a:r>
+              <a:rPr lang="en-US" sz="1600" dirty="0"/>
+              <a:t>Quiz 3.3 Interfaces</a:t>
+            </a:r>
+          </a:p>
+          <a:p>
+            <a:pPr marL="146050" indent="0">
+              <a:buNone/>
+            </a:pPr>
+            <a:r>
+              <a:rPr lang="en-US" sz="1600" dirty="0">
+                <a:solidFill>
+                  <a:schemeClr val="tx1"/>
+                </a:solidFill>
+              </a:rPr>
+              <a:t>Password - </a:t>
+            </a:r>
+            <a:r>
+              <a:rPr lang="en-US" sz="1600" dirty="0" err="1">
+                <a:solidFill>
+                  <a:schemeClr val="tx1"/>
+                </a:solidFill>
+              </a:rPr>
+              <a:t>InterstellarFaces</a:t>
+            </a:r>
+            <a:endParaRPr lang="en-US" sz="1600" dirty="0">
+              <a:solidFill>
+                <a:schemeClr val="tx1"/>
+              </a:solidFill>
+            </a:endParaRPr>
+          </a:p>
+        </p:txBody>
+      </p:sp>
+    </p:spTree>
+    <p:extLst>
+      <p:ext uri="{BB962C8B-B14F-4D97-AF65-F5344CB8AC3E}">
+        <p14:creationId xmlns:p14="http://schemas.microsoft.com/office/powerpoint/2010/main" val="674272117"/>
+      </p:ext>
+    </p:extLst>
+  </p:cSld>
+  <p:clrMapOvr>
+    <a:masterClrMapping/>
+  </p:clrMapOvr>
+</p:sld>
+</file>
+
+<file path=ppt/slides/slide10.xml><?xml version="1.0" encoding="utf-8"?>
+<p:sld xmlns:a="http://schemas.openxmlformats.org/drawingml/2006/main" xmlns:r="http://schemas.openxmlformats.org/officeDocument/2006/relationships" xmlns:p="http://schemas.openxmlformats.org/presentationml/2006/main" show="0">
+  <p:cSld>
+    <p:spTree>
+      <p:nvGrpSpPr>
+        <p:cNvPr id="1" name="Shape 323"/>
+        <p:cNvGrpSpPr/>
+        <p:nvPr/>
+      </p:nvGrpSpPr>
+      <p:grpSpPr>
+        <a:xfrm>
+          <a:off x="0" y="0"/>
+          <a:ext cx="0" cy="0"/>
+          <a:chOff x="0" y="0"/>
+          <a:chExt cx="0" cy="0"/>
+        </a:xfrm>
+      </p:grpSpPr>
+      <p:sp>
+        <p:nvSpPr>
+          <p:cNvPr id="324" name="Google Shape;324;p47"/>
+          <p:cNvSpPr txBox="1">
+            <a:spLocks noGrp="1"/>
+          </p:cNvSpPr>
+          <p:nvPr>
+            <p:ph type="title"/>
+          </p:nvPr>
+        </p:nvSpPr>
+        <p:spPr>
+          <a:xfrm>
+            <a:off x="226208" y="1"/>
+            <a:ext cx="8520600" cy="464980"/>
+          </a:xfrm>
+          <a:prstGeom prst="rect">
+            <a:avLst/>
+          </a:prstGeom>
+        </p:spPr>
+        <p:txBody>
+          <a:bodyPr spcFirstLastPara="1" wrap="square" lIns="91425" tIns="91425" rIns="91425" bIns="91425" anchor="t" anchorCtr="0">
+            <a:noAutofit/>
+          </a:bodyPr>
+          <a:lstStyle/>
+          <a:p>
+            <a:pPr marL="0" lvl="0" indent="0" algn="ctr" rtl="0">
+              <a:spcBef>
+                <a:spcPts val="0"/>
+              </a:spcBef>
+              <a:spcAft>
+                <a:spcPts val="0"/>
+              </a:spcAft>
+              <a:buNone/>
+            </a:pPr>
+            <a:r>
+              <a:rPr lang="en-US" dirty="0"/>
+              <a:t>Use </a:t>
+            </a:r>
+            <a:r>
+              <a:rPr lang="en-US" sz="2400" dirty="0"/>
+              <a:t>Assigned</a:t>
+            </a:r>
+            <a:r>
+              <a:rPr lang="en-US" dirty="0"/>
+              <a:t> Seat</a:t>
+            </a:r>
+            <a:endParaRPr dirty="0"/>
+          </a:p>
+        </p:txBody>
+      </p:sp>
+      <p:sp>
+        <p:nvSpPr>
+          <p:cNvPr id="326" name="Google Shape;326;p47"/>
+          <p:cNvSpPr txBox="1">
+            <a:spLocks noGrp="1"/>
+          </p:cNvSpPr>
+          <p:nvPr>
+            <p:ph type="sldNum" idx="12"/>
+          </p:nvPr>
+        </p:nvSpPr>
+        <p:spPr>
+          <a:xfrm>
+            <a:off x="8472458" y="4663217"/>
+            <a:ext cx="548700" cy="393600"/>
+          </a:xfrm>
+          <a:prstGeom prst="rect">
+            <a:avLst/>
+          </a:prstGeom>
+        </p:spPr>
+        <p:txBody>
+          <a:bodyPr spcFirstLastPara="1" wrap="square" lIns="91425" tIns="91425" rIns="91425" bIns="91425" anchor="ctr" anchorCtr="0">
+            <a:noAutofit/>
+          </a:bodyPr>
+          <a:lstStyle/>
+          <a:p>
+            <a:pPr marL="0" lvl="0" indent="0" algn="r" rtl="0">
+              <a:spcBef>
+                <a:spcPts val="0"/>
+              </a:spcBef>
+              <a:spcAft>
+                <a:spcPts val="0"/>
+              </a:spcAft>
+              <a:buNone/>
+            </a:pPr>
+            <a:fld id="{00000000-1234-1234-1234-123412341234}" type="slidenum">
+              <a:rPr lang="en"/>
+              <a:t>10</a:t>
+            </a:fld>
+            <a:endParaRPr/>
+          </a:p>
+        </p:txBody>
+      </p:sp>
+      <p:pic>
+        <p:nvPicPr>
+          <p:cNvPr id="6" name="Picture 5">
+            <a:extLst>
+              <a:ext uri="{FF2B5EF4-FFF2-40B4-BE49-F238E27FC236}">
+                <a16:creationId xmlns:a16="http://schemas.microsoft.com/office/drawing/2014/main" id="{DED32793-7C09-E3A3-94E5-B5D46727A1D0}"/>
+              </a:ext>
+            </a:extLst>
+          </p:cNvPr>
+          <p:cNvPicPr>
+            <a:picLocks noChangeAspect="1"/>
+          </p:cNvPicPr>
+          <p:nvPr/>
+        </p:nvPicPr>
+        <p:blipFill>
+          <a:blip r:embed="rId3"/>
+          <a:stretch>
+            <a:fillRect/>
+          </a:stretch>
+        </p:blipFill>
+        <p:spPr>
+          <a:xfrm>
+            <a:off x="-1" y="551663"/>
+            <a:ext cx="9144001" cy="4591837"/>
+          </a:xfrm>
+          <a:prstGeom prst="rect">
+            <a:avLst/>
+          </a:prstGeom>
+        </p:spPr>
+      </p:pic>
+    </p:spTree>
+    <p:extLst>
+      <p:ext uri="{BB962C8B-B14F-4D97-AF65-F5344CB8AC3E}">
+        <p14:creationId xmlns:p14="http://schemas.microsoft.com/office/powerpoint/2010/main" val="4226348449"/>
+      </p:ext>
+    </p:extLst>
+  </p:cSld>
+  <p:clrMapOvr>
+    <a:masterClrMapping/>
+  </p:clrMapOvr>
+</p:sld>
+</file>
+
+<file path=ppt/slides/slide11.xml><?xml version="1.0" encoding="utf-8"?>
+<p:sld xmlns:a="http://schemas.openxmlformats.org/drawingml/2006/main" xmlns:r="http://schemas.openxmlformats.org/officeDocument/2006/relationships" xmlns:p="http://schemas.openxmlformats.org/presentationml/2006/main" show="0">
+  <p:cSld>
+    <p:spTree>
+      <p:nvGrpSpPr>
+        <p:cNvPr id="1" name="Shape 323"/>
+        <p:cNvGrpSpPr/>
+        <p:nvPr/>
+      </p:nvGrpSpPr>
+      <p:grpSpPr>
+        <a:xfrm>
+          <a:off x="0" y="0"/>
+          <a:ext cx="0" cy="0"/>
+          <a:chOff x="0" y="0"/>
+          <a:chExt cx="0" cy="0"/>
+        </a:xfrm>
+      </p:grpSpPr>
+      <p:sp>
+        <p:nvSpPr>
+          <p:cNvPr id="324" name="Google Shape;324;p47"/>
+          <p:cNvSpPr txBox="1">
+            <a:spLocks noGrp="1"/>
+          </p:cNvSpPr>
+          <p:nvPr>
+            <p:ph type="title"/>
+          </p:nvPr>
+        </p:nvSpPr>
+        <p:spPr>
+          <a:xfrm>
+            <a:off x="226208" y="1"/>
+            <a:ext cx="8520600" cy="464980"/>
+          </a:xfrm>
+          <a:prstGeom prst="rect">
+            <a:avLst/>
+          </a:prstGeom>
+        </p:spPr>
+        <p:txBody>
+          <a:bodyPr spcFirstLastPara="1" wrap="square" lIns="91425" tIns="91425" rIns="91425" bIns="91425" anchor="t" anchorCtr="0">
+            <a:noAutofit/>
+          </a:bodyPr>
+          <a:lstStyle/>
+          <a:p>
+            <a:pPr marL="0" lvl="0" indent="0" algn="ctr" rtl="0">
+              <a:spcBef>
+                <a:spcPts val="0"/>
+              </a:spcBef>
+              <a:spcAft>
+                <a:spcPts val="0"/>
+              </a:spcAft>
+              <a:buNone/>
+            </a:pPr>
+            <a:r>
+              <a:rPr lang="en-US" dirty="0"/>
+              <a:t>Use </a:t>
+            </a:r>
+            <a:r>
+              <a:rPr lang="en-US" sz="2400" dirty="0"/>
+              <a:t>Assigned</a:t>
+            </a:r>
+            <a:r>
+              <a:rPr lang="en-US" dirty="0"/>
+              <a:t> Seat</a:t>
+            </a:r>
+            <a:endParaRPr dirty="0"/>
+          </a:p>
+        </p:txBody>
+      </p:sp>
+      <p:sp>
+        <p:nvSpPr>
+          <p:cNvPr id="326" name="Google Shape;326;p47"/>
+          <p:cNvSpPr txBox="1">
+            <a:spLocks noGrp="1"/>
+          </p:cNvSpPr>
+          <p:nvPr>
+            <p:ph type="sldNum" idx="12"/>
+          </p:nvPr>
+        </p:nvSpPr>
+        <p:spPr>
+          <a:xfrm>
+            <a:off x="8472458" y="4663217"/>
+            <a:ext cx="548700" cy="393600"/>
+          </a:xfrm>
+          <a:prstGeom prst="rect">
+            <a:avLst/>
+          </a:prstGeom>
+        </p:spPr>
+        <p:txBody>
+          <a:bodyPr spcFirstLastPara="1" wrap="square" lIns="91425" tIns="91425" rIns="91425" bIns="91425" anchor="ctr" anchorCtr="0">
+            <a:noAutofit/>
+          </a:bodyPr>
+          <a:lstStyle/>
+          <a:p>
+            <a:pPr marL="0" lvl="0" indent="0" algn="r" rtl="0">
+              <a:spcBef>
+                <a:spcPts val="0"/>
+              </a:spcBef>
+              <a:spcAft>
+                <a:spcPts val="0"/>
+              </a:spcAft>
+              <a:buNone/>
+            </a:pPr>
+            <a:fld id="{00000000-1234-1234-1234-123412341234}" type="slidenum">
+              <a:rPr lang="en"/>
+              <a:t>11</a:t>
+            </a:fld>
+            <a:endParaRPr/>
+          </a:p>
+        </p:txBody>
+      </p:sp>
+      <p:pic>
+        <p:nvPicPr>
+          <p:cNvPr id="3" name="Picture 2">
+            <a:extLst>
+              <a:ext uri="{FF2B5EF4-FFF2-40B4-BE49-F238E27FC236}">
+                <a16:creationId xmlns:a16="http://schemas.microsoft.com/office/drawing/2014/main" id="{92DE4AAC-70FE-A114-5258-F5B22EDDED45}"/>
+              </a:ext>
+            </a:extLst>
+          </p:cNvPr>
+          <p:cNvPicPr>
+            <a:picLocks noChangeAspect="1"/>
+          </p:cNvPicPr>
+          <p:nvPr/>
+        </p:nvPicPr>
+        <p:blipFill>
+          <a:blip r:embed="rId3"/>
+          <a:stretch>
+            <a:fillRect/>
+          </a:stretch>
+        </p:blipFill>
+        <p:spPr>
+          <a:xfrm>
+            <a:off x="0" y="716280"/>
+            <a:ext cx="9144000" cy="4427218"/>
+          </a:xfrm>
+          <a:prstGeom prst="rect">
+            <a:avLst/>
+          </a:prstGeom>
+        </p:spPr>
+      </p:pic>
+    </p:spTree>
+    <p:extLst>
+      <p:ext uri="{BB962C8B-B14F-4D97-AF65-F5344CB8AC3E}">
+        <p14:creationId xmlns:p14="http://schemas.microsoft.com/office/powerpoint/2010/main" val="1976403023"/>
+      </p:ext>
+    </p:extLst>
+  </p:cSld>
+  <p:clrMapOvr>
+    <a:masterClrMapping/>
+  </p:clrMapOvr>
+</p:sld>
+</file>
+
+<file path=ppt/slides/slide12.xml><?xml version="1.0" encoding="utf-8"?>
+<p:sld xmlns:a="http://schemas.openxmlformats.org/drawingml/2006/main" xmlns:r="http://schemas.openxmlformats.org/officeDocument/2006/relationships" xmlns:p="http://schemas.openxmlformats.org/presentationml/2006/main" show="0">
+  <p:cSld>
+    <p:spTree>
+      <p:nvGrpSpPr>
+        <p:cNvPr id="1" name="Shape 323"/>
+        <p:cNvGrpSpPr/>
+        <p:nvPr/>
+      </p:nvGrpSpPr>
+      <p:grpSpPr>
+        <a:xfrm>
+          <a:off x="0" y="0"/>
+          <a:ext cx="0" cy="0"/>
+          <a:chOff x="0" y="0"/>
+          <a:chExt cx="0" cy="0"/>
+        </a:xfrm>
+      </p:grpSpPr>
+      <p:sp>
+        <p:nvSpPr>
+          <p:cNvPr id="324" name="Google Shape;324;p47"/>
+          <p:cNvSpPr txBox="1">
+            <a:spLocks noGrp="1"/>
+          </p:cNvSpPr>
+          <p:nvPr>
+            <p:ph type="title"/>
+          </p:nvPr>
+        </p:nvSpPr>
+        <p:spPr>
+          <a:xfrm>
+            <a:off x="226208" y="1"/>
+            <a:ext cx="8520600" cy="464980"/>
+          </a:xfrm>
+          <a:prstGeom prst="rect">
+            <a:avLst/>
+          </a:prstGeom>
+        </p:spPr>
+        <p:txBody>
+          <a:bodyPr spcFirstLastPara="1" wrap="square" lIns="91425" tIns="91425" rIns="91425" bIns="91425" anchor="t" anchorCtr="0">
+            <a:noAutofit/>
+          </a:bodyPr>
+          <a:lstStyle/>
+          <a:p>
+            <a:pPr marL="0" lvl="0" indent="0" algn="ctr" rtl="0">
+              <a:spcBef>
+                <a:spcPts val="0"/>
+              </a:spcBef>
+              <a:spcAft>
+                <a:spcPts val="0"/>
+              </a:spcAft>
+              <a:buNone/>
+            </a:pPr>
+            <a:r>
+              <a:rPr lang="en-US" dirty="0"/>
+              <a:t>Use </a:t>
+            </a:r>
+            <a:r>
+              <a:rPr lang="en-US" sz="2400" dirty="0"/>
+              <a:t>Assigned</a:t>
+            </a:r>
+            <a:r>
+              <a:rPr lang="en-US" dirty="0"/>
+              <a:t> Seat</a:t>
+            </a:r>
+            <a:endParaRPr dirty="0"/>
+          </a:p>
+        </p:txBody>
+      </p:sp>
+      <p:sp>
+        <p:nvSpPr>
+          <p:cNvPr id="326" name="Google Shape;326;p47"/>
+          <p:cNvSpPr txBox="1">
+            <a:spLocks noGrp="1"/>
+          </p:cNvSpPr>
+          <p:nvPr>
+            <p:ph type="sldNum" idx="12"/>
+          </p:nvPr>
+        </p:nvSpPr>
+        <p:spPr>
+          <a:xfrm>
+            <a:off x="8472458" y="4663217"/>
+            <a:ext cx="548700" cy="393600"/>
+          </a:xfrm>
+          <a:prstGeom prst="rect">
+            <a:avLst/>
+          </a:prstGeom>
+        </p:spPr>
+        <p:txBody>
+          <a:bodyPr spcFirstLastPara="1" wrap="square" lIns="91425" tIns="91425" rIns="91425" bIns="91425" anchor="ctr" anchorCtr="0">
+            <a:noAutofit/>
+          </a:bodyPr>
+          <a:lstStyle/>
+          <a:p>
+            <a:pPr marL="0" lvl="0" indent="0" algn="r" rtl="0">
+              <a:spcBef>
+                <a:spcPts val="0"/>
+              </a:spcBef>
+              <a:spcAft>
+                <a:spcPts val="0"/>
+              </a:spcAft>
+              <a:buNone/>
+            </a:pPr>
+            <a:fld id="{00000000-1234-1234-1234-123412341234}" type="slidenum">
+              <a:rPr lang="en"/>
+              <a:t>12</a:t>
+            </a:fld>
+            <a:endParaRPr/>
+          </a:p>
+        </p:txBody>
+      </p:sp>
+      <p:pic>
+        <p:nvPicPr>
+          <p:cNvPr id="4" name="Picture 3">
+            <a:extLst>
+              <a:ext uri="{FF2B5EF4-FFF2-40B4-BE49-F238E27FC236}">
+                <a16:creationId xmlns:a16="http://schemas.microsoft.com/office/drawing/2014/main" id="{DCD752B9-EFAE-AFC1-7D39-6763B89DE8D3}"/>
+              </a:ext>
+            </a:extLst>
+          </p:cNvPr>
+          <p:cNvPicPr>
+            <a:picLocks noChangeAspect="1"/>
+          </p:cNvPicPr>
+          <p:nvPr/>
+        </p:nvPicPr>
+        <p:blipFill>
+          <a:blip r:embed="rId3"/>
+          <a:stretch>
+            <a:fillRect/>
+          </a:stretch>
+        </p:blipFill>
+        <p:spPr>
+          <a:xfrm>
+            <a:off x="0" y="652130"/>
+            <a:ext cx="9144000" cy="4491369"/>
+          </a:xfrm>
+          <a:prstGeom prst="rect">
+            <a:avLst/>
+          </a:prstGeom>
+        </p:spPr>
+      </p:pic>
+    </p:spTree>
+    <p:extLst>
+      <p:ext uri="{BB962C8B-B14F-4D97-AF65-F5344CB8AC3E}">
+        <p14:creationId xmlns:p14="http://schemas.microsoft.com/office/powerpoint/2010/main" val="3365057756"/>
+      </p:ext>
+    </p:extLst>
+  </p:cSld>
+  <p:clrMapOvr>
+    <a:masterClrMapping/>
+  </p:clrMapOvr>
+</p:sld>
+</file>
+
+<file path=ppt/slides/slide2.xml><?xml version="1.0" encoding="utf-8"?>
+<p:sld xmlns:a="http://schemas.openxmlformats.org/drawingml/2006/main" xmlns:r="http://schemas.openxmlformats.org/officeDocument/2006/relationships" xmlns:p="http://schemas.openxmlformats.org/presentationml/2006/main" show="0">
+  <p:cSld>
+    <p:spTree>
+      <p:nvGrpSpPr>
         <p:cNvPr id="1" name="Shape 323"/>
         <p:cNvGrpSpPr/>
         <p:nvPr/>
@@ -6691,7 +8069,7 @@
             </a:pPr>
             <a:fld id="{00000000-1234-1234-1234-123412341234}" type="slidenum">
               <a:rPr lang="en"/>
-              <a:t>1</a:t>
+              <a:t>2</a:t>
             </a:fld>
             <a:endParaRPr/>
           </a:p>
@@ -7095,1384 +8473,6 @@
         </p:txBody>
       </p:sp>
     </p:spTree>
-  </p:cSld>
-  <p:clrMapOvr>
-    <a:masterClrMapping/>
-  </p:clrMapOvr>
-</p:sld>
-</file>
-
-<file path=ppt/slides/slide10.xml><?xml version="1.0" encoding="utf-8"?>
-<p:sld xmlns:a="http://schemas.openxmlformats.org/drawingml/2006/main" xmlns:r="http://schemas.openxmlformats.org/officeDocument/2006/relationships" xmlns:p="http://schemas.openxmlformats.org/presentationml/2006/main" show="0">
-  <p:cSld>
-    <p:spTree>
-      <p:nvGrpSpPr>
-        <p:cNvPr id="1" name="Shape 323"/>
-        <p:cNvGrpSpPr/>
-        <p:nvPr/>
-      </p:nvGrpSpPr>
-      <p:grpSpPr>
-        <a:xfrm>
-          <a:off x="0" y="0"/>
-          <a:ext cx="0" cy="0"/>
-          <a:chOff x="0" y="0"/>
-          <a:chExt cx="0" cy="0"/>
-        </a:xfrm>
-      </p:grpSpPr>
-      <p:sp>
-        <p:nvSpPr>
-          <p:cNvPr id="324" name="Google Shape;324;p47"/>
-          <p:cNvSpPr txBox="1">
-            <a:spLocks noGrp="1"/>
-          </p:cNvSpPr>
-          <p:nvPr>
-            <p:ph type="title"/>
-          </p:nvPr>
-        </p:nvSpPr>
-        <p:spPr>
-          <a:xfrm>
-            <a:off x="226208" y="1"/>
-            <a:ext cx="8520600" cy="464980"/>
-          </a:xfrm>
-          <a:prstGeom prst="rect">
-            <a:avLst/>
-          </a:prstGeom>
-        </p:spPr>
-        <p:txBody>
-          <a:bodyPr spcFirstLastPara="1" wrap="square" lIns="91425" tIns="91425" rIns="91425" bIns="91425" anchor="t" anchorCtr="0">
-            <a:noAutofit/>
-          </a:bodyPr>
-          <a:lstStyle/>
-          <a:p>
-            <a:pPr marL="0" lvl="0" indent="0" algn="ctr" rtl="0">
-              <a:spcBef>
-                <a:spcPts val="0"/>
-              </a:spcBef>
-              <a:spcAft>
-                <a:spcPts val="0"/>
-              </a:spcAft>
-              <a:buNone/>
-            </a:pPr>
-            <a:r>
-              <a:rPr lang="en-US" dirty="0"/>
-              <a:t>Use </a:t>
-            </a:r>
-            <a:r>
-              <a:rPr lang="en-US" sz="2400" dirty="0"/>
-              <a:t>Assigned</a:t>
-            </a:r>
-            <a:r>
-              <a:rPr lang="en-US" dirty="0"/>
-              <a:t> Seat</a:t>
-            </a:r>
-            <a:endParaRPr dirty="0"/>
-          </a:p>
-        </p:txBody>
-      </p:sp>
-      <p:sp>
-        <p:nvSpPr>
-          <p:cNvPr id="326" name="Google Shape;326;p47"/>
-          <p:cNvSpPr txBox="1">
-            <a:spLocks noGrp="1"/>
-          </p:cNvSpPr>
-          <p:nvPr>
-            <p:ph type="sldNum" idx="12"/>
-          </p:nvPr>
-        </p:nvSpPr>
-        <p:spPr>
-          <a:xfrm>
-            <a:off x="8472458" y="4663217"/>
-            <a:ext cx="548700" cy="393600"/>
-          </a:xfrm>
-          <a:prstGeom prst="rect">
-            <a:avLst/>
-          </a:prstGeom>
-        </p:spPr>
-        <p:txBody>
-          <a:bodyPr spcFirstLastPara="1" wrap="square" lIns="91425" tIns="91425" rIns="91425" bIns="91425" anchor="ctr" anchorCtr="0">
-            <a:noAutofit/>
-          </a:bodyPr>
-          <a:lstStyle/>
-          <a:p>
-            <a:pPr marL="0" lvl="0" indent="0" algn="r" rtl="0">
-              <a:spcBef>
-                <a:spcPts val="0"/>
-              </a:spcBef>
-              <a:spcAft>
-                <a:spcPts val="0"/>
-              </a:spcAft>
-              <a:buNone/>
-            </a:pPr>
-            <a:fld id="{00000000-1234-1234-1234-123412341234}" type="slidenum">
-              <a:rPr lang="en"/>
-              <a:t>10</a:t>
-            </a:fld>
-            <a:endParaRPr/>
-          </a:p>
-        </p:txBody>
-      </p:sp>
-      <p:pic>
-        <p:nvPicPr>
-          <p:cNvPr id="6" name="Picture 5">
-            <a:extLst>
-              <a:ext uri="{FF2B5EF4-FFF2-40B4-BE49-F238E27FC236}">
-                <a16:creationId xmlns:a16="http://schemas.microsoft.com/office/drawing/2014/main" id="{DED32793-7C09-E3A3-94E5-B5D46727A1D0}"/>
-              </a:ext>
-            </a:extLst>
-          </p:cNvPr>
-          <p:cNvPicPr>
-            <a:picLocks noChangeAspect="1"/>
-          </p:cNvPicPr>
-          <p:nvPr/>
-        </p:nvPicPr>
-        <p:blipFill>
-          <a:blip r:embed="rId3"/>
-          <a:stretch>
-            <a:fillRect/>
-          </a:stretch>
-        </p:blipFill>
-        <p:spPr>
-          <a:xfrm>
-            <a:off x="-1" y="551663"/>
-            <a:ext cx="9144001" cy="4591837"/>
-          </a:xfrm>
-          <a:prstGeom prst="rect">
-            <a:avLst/>
-          </a:prstGeom>
-        </p:spPr>
-      </p:pic>
-    </p:spTree>
-    <p:extLst>
-      <p:ext uri="{BB962C8B-B14F-4D97-AF65-F5344CB8AC3E}">
-        <p14:creationId xmlns:p14="http://schemas.microsoft.com/office/powerpoint/2010/main" val="4226348449"/>
-      </p:ext>
-    </p:extLst>
-  </p:cSld>
-  <p:clrMapOvr>
-    <a:masterClrMapping/>
-  </p:clrMapOvr>
-</p:sld>
-</file>
-
-<file path=ppt/slides/slide11.xml><?xml version="1.0" encoding="utf-8"?>
-<p:sld xmlns:a="http://schemas.openxmlformats.org/drawingml/2006/main" xmlns:r="http://schemas.openxmlformats.org/officeDocument/2006/relationships" xmlns:p="http://schemas.openxmlformats.org/presentationml/2006/main" show="0">
-  <p:cSld>
-    <p:spTree>
-      <p:nvGrpSpPr>
-        <p:cNvPr id="1" name="Shape 323"/>
-        <p:cNvGrpSpPr/>
-        <p:nvPr/>
-      </p:nvGrpSpPr>
-      <p:grpSpPr>
-        <a:xfrm>
-          <a:off x="0" y="0"/>
-          <a:ext cx="0" cy="0"/>
-          <a:chOff x="0" y="0"/>
-          <a:chExt cx="0" cy="0"/>
-        </a:xfrm>
-      </p:grpSpPr>
-      <p:sp>
-        <p:nvSpPr>
-          <p:cNvPr id="324" name="Google Shape;324;p47"/>
-          <p:cNvSpPr txBox="1">
-            <a:spLocks noGrp="1"/>
-          </p:cNvSpPr>
-          <p:nvPr>
-            <p:ph type="title"/>
-          </p:nvPr>
-        </p:nvSpPr>
-        <p:spPr>
-          <a:xfrm>
-            <a:off x="226208" y="1"/>
-            <a:ext cx="8520600" cy="464980"/>
-          </a:xfrm>
-          <a:prstGeom prst="rect">
-            <a:avLst/>
-          </a:prstGeom>
-        </p:spPr>
-        <p:txBody>
-          <a:bodyPr spcFirstLastPara="1" wrap="square" lIns="91425" tIns="91425" rIns="91425" bIns="91425" anchor="t" anchorCtr="0">
-            <a:noAutofit/>
-          </a:bodyPr>
-          <a:lstStyle/>
-          <a:p>
-            <a:pPr marL="0" lvl="0" indent="0" algn="ctr" rtl="0">
-              <a:spcBef>
-                <a:spcPts val="0"/>
-              </a:spcBef>
-              <a:spcAft>
-                <a:spcPts val="0"/>
-              </a:spcAft>
-              <a:buNone/>
-            </a:pPr>
-            <a:r>
-              <a:rPr lang="en-US" dirty="0"/>
-              <a:t>Use </a:t>
-            </a:r>
-            <a:r>
-              <a:rPr lang="en-US" sz="2400" dirty="0"/>
-              <a:t>Assigned</a:t>
-            </a:r>
-            <a:r>
-              <a:rPr lang="en-US" dirty="0"/>
-              <a:t> Seat</a:t>
-            </a:r>
-            <a:endParaRPr dirty="0"/>
-          </a:p>
-        </p:txBody>
-      </p:sp>
-      <p:sp>
-        <p:nvSpPr>
-          <p:cNvPr id="326" name="Google Shape;326;p47"/>
-          <p:cNvSpPr txBox="1">
-            <a:spLocks noGrp="1"/>
-          </p:cNvSpPr>
-          <p:nvPr>
-            <p:ph type="sldNum" idx="12"/>
-          </p:nvPr>
-        </p:nvSpPr>
-        <p:spPr>
-          <a:xfrm>
-            <a:off x="8472458" y="4663217"/>
-            <a:ext cx="548700" cy="393600"/>
-          </a:xfrm>
-          <a:prstGeom prst="rect">
-            <a:avLst/>
-          </a:prstGeom>
-        </p:spPr>
-        <p:txBody>
-          <a:bodyPr spcFirstLastPara="1" wrap="square" lIns="91425" tIns="91425" rIns="91425" bIns="91425" anchor="ctr" anchorCtr="0">
-            <a:noAutofit/>
-          </a:bodyPr>
-          <a:lstStyle/>
-          <a:p>
-            <a:pPr marL="0" lvl="0" indent="0" algn="r" rtl="0">
-              <a:spcBef>
-                <a:spcPts val="0"/>
-              </a:spcBef>
-              <a:spcAft>
-                <a:spcPts val="0"/>
-              </a:spcAft>
-              <a:buNone/>
-            </a:pPr>
-            <a:fld id="{00000000-1234-1234-1234-123412341234}" type="slidenum">
-              <a:rPr lang="en"/>
-              <a:t>11</a:t>
-            </a:fld>
-            <a:endParaRPr/>
-          </a:p>
-        </p:txBody>
-      </p:sp>
-      <p:pic>
-        <p:nvPicPr>
-          <p:cNvPr id="3" name="Picture 2">
-            <a:extLst>
-              <a:ext uri="{FF2B5EF4-FFF2-40B4-BE49-F238E27FC236}">
-                <a16:creationId xmlns:a16="http://schemas.microsoft.com/office/drawing/2014/main" id="{92DE4AAC-70FE-A114-5258-F5B22EDDED45}"/>
-              </a:ext>
-            </a:extLst>
-          </p:cNvPr>
-          <p:cNvPicPr>
-            <a:picLocks noChangeAspect="1"/>
-          </p:cNvPicPr>
-          <p:nvPr/>
-        </p:nvPicPr>
-        <p:blipFill>
-          <a:blip r:embed="rId3"/>
-          <a:stretch>
-            <a:fillRect/>
-          </a:stretch>
-        </p:blipFill>
-        <p:spPr>
-          <a:xfrm>
-            <a:off x="0" y="716280"/>
-            <a:ext cx="9144000" cy="4427218"/>
-          </a:xfrm>
-          <a:prstGeom prst="rect">
-            <a:avLst/>
-          </a:prstGeom>
-        </p:spPr>
-      </p:pic>
-    </p:spTree>
-    <p:extLst>
-      <p:ext uri="{BB962C8B-B14F-4D97-AF65-F5344CB8AC3E}">
-        <p14:creationId xmlns:p14="http://schemas.microsoft.com/office/powerpoint/2010/main" val="1976403023"/>
-      </p:ext>
-    </p:extLst>
-  </p:cSld>
-  <p:clrMapOvr>
-    <a:masterClrMapping/>
-  </p:clrMapOvr>
-</p:sld>
-</file>
-
-<file path=ppt/slides/slide12.xml><?xml version="1.0" encoding="utf-8"?>
-<p:sld xmlns:a="http://schemas.openxmlformats.org/drawingml/2006/main" xmlns:r="http://schemas.openxmlformats.org/officeDocument/2006/relationships" xmlns:p="http://schemas.openxmlformats.org/presentationml/2006/main" show="0">
-  <p:cSld>
-    <p:spTree>
-      <p:nvGrpSpPr>
-        <p:cNvPr id="1" name="Shape 323"/>
-        <p:cNvGrpSpPr/>
-        <p:nvPr/>
-      </p:nvGrpSpPr>
-      <p:grpSpPr>
-        <a:xfrm>
-          <a:off x="0" y="0"/>
-          <a:ext cx="0" cy="0"/>
-          <a:chOff x="0" y="0"/>
-          <a:chExt cx="0" cy="0"/>
-        </a:xfrm>
-      </p:grpSpPr>
-      <p:sp>
-        <p:nvSpPr>
-          <p:cNvPr id="324" name="Google Shape;324;p47"/>
-          <p:cNvSpPr txBox="1">
-            <a:spLocks noGrp="1"/>
-          </p:cNvSpPr>
-          <p:nvPr>
-            <p:ph type="title"/>
-          </p:nvPr>
-        </p:nvSpPr>
-        <p:spPr>
-          <a:xfrm>
-            <a:off x="226208" y="1"/>
-            <a:ext cx="8520600" cy="464980"/>
-          </a:xfrm>
-          <a:prstGeom prst="rect">
-            <a:avLst/>
-          </a:prstGeom>
-        </p:spPr>
-        <p:txBody>
-          <a:bodyPr spcFirstLastPara="1" wrap="square" lIns="91425" tIns="91425" rIns="91425" bIns="91425" anchor="t" anchorCtr="0">
-            <a:noAutofit/>
-          </a:bodyPr>
-          <a:lstStyle/>
-          <a:p>
-            <a:pPr marL="0" lvl="0" indent="0" algn="ctr" rtl="0">
-              <a:spcBef>
-                <a:spcPts val="0"/>
-              </a:spcBef>
-              <a:spcAft>
-                <a:spcPts val="0"/>
-              </a:spcAft>
-              <a:buNone/>
-            </a:pPr>
-            <a:r>
-              <a:rPr lang="en-US" dirty="0"/>
-              <a:t>Use </a:t>
-            </a:r>
-            <a:r>
-              <a:rPr lang="en-US" sz="2400" dirty="0"/>
-              <a:t>Assigned</a:t>
-            </a:r>
-            <a:r>
-              <a:rPr lang="en-US" dirty="0"/>
-              <a:t> Seat</a:t>
-            </a:r>
-            <a:endParaRPr dirty="0"/>
-          </a:p>
-        </p:txBody>
-      </p:sp>
-      <p:sp>
-        <p:nvSpPr>
-          <p:cNvPr id="326" name="Google Shape;326;p47"/>
-          <p:cNvSpPr txBox="1">
-            <a:spLocks noGrp="1"/>
-          </p:cNvSpPr>
-          <p:nvPr>
-            <p:ph type="sldNum" idx="12"/>
-          </p:nvPr>
-        </p:nvSpPr>
-        <p:spPr>
-          <a:xfrm>
-            <a:off x="8472458" y="4663217"/>
-            <a:ext cx="548700" cy="393600"/>
-          </a:xfrm>
-          <a:prstGeom prst="rect">
-            <a:avLst/>
-          </a:prstGeom>
-        </p:spPr>
-        <p:txBody>
-          <a:bodyPr spcFirstLastPara="1" wrap="square" lIns="91425" tIns="91425" rIns="91425" bIns="91425" anchor="ctr" anchorCtr="0">
-            <a:noAutofit/>
-          </a:bodyPr>
-          <a:lstStyle/>
-          <a:p>
-            <a:pPr marL="0" lvl="0" indent="0" algn="r" rtl="0">
-              <a:spcBef>
-                <a:spcPts val="0"/>
-              </a:spcBef>
-              <a:spcAft>
-                <a:spcPts val="0"/>
-              </a:spcAft>
-              <a:buNone/>
-            </a:pPr>
-            <a:fld id="{00000000-1234-1234-1234-123412341234}" type="slidenum">
-              <a:rPr lang="en"/>
-              <a:t>12</a:t>
-            </a:fld>
-            <a:endParaRPr/>
-          </a:p>
-        </p:txBody>
-      </p:sp>
-      <p:pic>
-        <p:nvPicPr>
-          <p:cNvPr id="4" name="Picture 3">
-            <a:extLst>
-              <a:ext uri="{FF2B5EF4-FFF2-40B4-BE49-F238E27FC236}">
-                <a16:creationId xmlns:a16="http://schemas.microsoft.com/office/drawing/2014/main" id="{DCD752B9-EFAE-AFC1-7D39-6763B89DE8D3}"/>
-              </a:ext>
-            </a:extLst>
-          </p:cNvPr>
-          <p:cNvPicPr>
-            <a:picLocks noChangeAspect="1"/>
-          </p:cNvPicPr>
-          <p:nvPr/>
-        </p:nvPicPr>
-        <p:blipFill>
-          <a:blip r:embed="rId3"/>
-          <a:stretch>
-            <a:fillRect/>
-          </a:stretch>
-        </p:blipFill>
-        <p:spPr>
-          <a:xfrm>
-            <a:off x="0" y="652130"/>
-            <a:ext cx="9144000" cy="4491369"/>
-          </a:xfrm>
-          <a:prstGeom prst="rect">
-            <a:avLst/>
-          </a:prstGeom>
-        </p:spPr>
-      </p:pic>
-    </p:spTree>
-    <p:extLst>
-      <p:ext uri="{BB962C8B-B14F-4D97-AF65-F5344CB8AC3E}">
-        <p14:creationId xmlns:p14="http://schemas.microsoft.com/office/powerpoint/2010/main" val="3365057756"/>
-      </p:ext>
-    </p:extLst>
-  </p:cSld>
-  <p:clrMapOvr>
-    <a:masterClrMapping/>
-  </p:clrMapOvr>
-</p:sld>
-</file>
-
-<file path=ppt/slides/slide2.xml><?xml version="1.0" encoding="utf-8"?>
-<p:sld xmlns:a="http://schemas.openxmlformats.org/drawingml/2006/main" xmlns:r="http://schemas.openxmlformats.org/officeDocument/2006/relationships" xmlns:p="http://schemas.openxmlformats.org/presentationml/2006/main" show="0">
-  <p:cSld>
-    <p:spTree>
-      <p:nvGrpSpPr>
-        <p:cNvPr id="1" name="Shape 323">
-          <a:extLst>
-            <a:ext uri="{FF2B5EF4-FFF2-40B4-BE49-F238E27FC236}">
-              <a16:creationId xmlns:a16="http://schemas.microsoft.com/office/drawing/2014/main" id="{19512066-5980-8A8B-BE30-C4FB3AC72235}"/>
-            </a:ext>
-          </a:extLst>
-        </p:cNvPr>
-        <p:cNvGrpSpPr/>
-        <p:nvPr/>
-      </p:nvGrpSpPr>
-      <p:grpSpPr>
-        <a:xfrm>
-          <a:off x="0" y="0"/>
-          <a:ext cx="0" cy="0"/>
-          <a:chOff x="0" y="0"/>
-          <a:chExt cx="0" cy="0"/>
-        </a:xfrm>
-      </p:grpSpPr>
-      <p:sp>
-        <p:nvSpPr>
-          <p:cNvPr id="324" name="Google Shape;324;p47">
-            <a:extLst>
-              <a:ext uri="{FF2B5EF4-FFF2-40B4-BE49-F238E27FC236}">
-                <a16:creationId xmlns:a16="http://schemas.microsoft.com/office/drawing/2014/main" id="{CDF56279-13BE-3C44-BBEF-E7DC5D1E88D2}"/>
-              </a:ext>
-            </a:extLst>
-          </p:cNvPr>
-          <p:cNvSpPr txBox="1">
-            <a:spLocks noGrp="1"/>
-          </p:cNvSpPr>
-          <p:nvPr>
-            <p:ph type="title"/>
-          </p:nvPr>
-        </p:nvSpPr>
-        <p:spPr>
-          <a:xfrm>
-            <a:off x="300016" y="269197"/>
-            <a:ext cx="8520600" cy="623700"/>
-          </a:xfrm>
-          <a:prstGeom prst="rect">
-            <a:avLst/>
-          </a:prstGeom>
-        </p:spPr>
-        <p:txBody>
-          <a:bodyPr spcFirstLastPara="1" wrap="square" lIns="91425" tIns="91425" rIns="91425" bIns="91425" anchor="t" anchorCtr="0">
-            <a:noAutofit/>
-          </a:bodyPr>
-          <a:lstStyle/>
-          <a:p>
-            <a:pPr marL="0" lvl="0" indent="0" algn="ctr" rtl="0">
-              <a:spcBef>
-                <a:spcPts val="0"/>
-              </a:spcBef>
-              <a:spcAft>
-                <a:spcPts val="0"/>
-              </a:spcAft>
-              <a:buNone/>
-            </a:pPr>
-            <a:r>
-              <a:rPr lang="en-US" dirty="0"/>
-              <a:t>GCIS – Software Development and Problem Solving</a:t>
-            </a:r>
-            <a:endParaRPr dirty="0"/>
-          </a:p>
-        </p:txBody>
-      </p:sp>
-      <p:sp>
-        <p:nvSpPr>
-          <p:cNvPr id="325" name="Google Shape;325;p47">
-            <a:extLst>
-              <a:ext uri="{FF2B5EF4-FFF2-40B4-BE49-F238E27FC236}">
-                <a16:creationId xmlns:a16="http://schemas.microsoft.com/office/drawing/2014/main" id="{5A9661D1-8430-BF80-279A-41B28CA04273}"/>
-              </a:ext>
-            </a:extLst>
-          </p:cNvPr>
-          <p:cNvSpPr txBox="1">
-            <a:spLocks noGrp="1"/>
-          </p:cNvSpPr>
-          <p:nvPr>
-            <p:ph type="body" idx="1"/>
-          </p:nvPr>
-        </p:nvSpPr>
-        <p:spPr>
-          <a:xfrm>
-            <a:off x="91445" y="1758316"/>
-            <a:ext cx="4000496" cy="1378401"/>
-          </a:xfrm>
-          <a:prstGeom prst="rect">
-            <a:avLst/>
-          </a:prstGeom>
-        </p:spPr>
-        <p:txBody>
-          <a:bodyPr spcFirstLastPara="1" wrap="square" lIns="91425" tIns="91425" rIns="91425" bIns="91425" anchor="ctr" anchorCtr="0">
-            <a:noAutofit/>
-          </a:bodyPr>
-          <a:lstStyle/>
-          <a:p>
-            <a:pPr marL="146050" indent="0">
-              <a:buNone/>
-            </a:pPr>
-            <a:r>
-              <a:rPr lang="en-US" sz="1600" dirty="0"/>
-              <a:t>Take Quiz 2.2: Special Methods</a:t>
-            </a:r>
-          </a:p>
-          <a:p>
-            <a:pPr marL="146050" indent="0">
-              <a:buNone/>
-            </a:pPr>
-            <a:r>
-              <a:rPr lang="en-US" sz="1600" dirty="0">
-                <a:solidFill>
-                  <a:schemeClr val="tx1"/>
-                </a:solidFill>
-              </a:rPr>
-              <a:t>Password – </a:t>
-            </a:r>
-            <a:r>
-              <a:rPr lang="en-US" sz="1600" dirty="0" err="1">
-                <a:solidFill>
-                  <a:schemeClr val="tx1"/>
-                </a:solidFill>
-              </a:rPr>
-              <a:t>methodsEverywhere</a:t>
-            </a:r>
-            <a:endParaRPr sz="1600" dirty="0">
-              <a:solidFill>
-                <a:schemeClr val="tx1"/>
-              </a:solidFill>
-            </a:endParaRPr>
-          </a:p>
-        </p:txBody>
-      </p:sp>
-      <p:sp>
-        <p:nvSpPr>
-          <p:cNvPr id="326" name="Google Shape;326;p47">
-            <a:extLst>
-              <a:ext uri="{FF2B5EF4-FFF2-40B4-BE49-F238E27FC236}">
-                <a16:creationId xmlns:a16="http://schemas.microsoft.com/office/drawing/2014/main" id="{8A14E227-935A-FBD8-6BD5-CBCE8D13EE84}"/>
-              </a:ext>
-            </a:extLst>
-          </p:cNvPr>
-          <p:cNvSpPr txBox="1">
-            <a:spLocks noGrp="1"/>
-          </p:cNvSpPr>
-          <p:nvPr>
-            <p:ph type="sldNum" idx="12"/>
-          </p:nvPr>
-        </p:nvSpPr>
-        <p:spPr>
-          <a:xfrm>
-            <a:off x="8472458" y="4663217"/>
-            <a:ext cx="548700" cy="393600"/>
-          </a:xfrm>
-          <a:prstGeom prst="rect">
-            <a:avLst/>
-          </a:prstGeom>
-        </p:spPr>
-        <p:txBody>
-          <a:bodyPr spcFirstLastPara="1" wrap="square" lIns="91425" tIns="91425" rIns="91425" bIns="91425" anchor="ctr" anchorCtr="0">
-            <a:noAutofit/>
-          </a:bodyPr>
-          <a:lstStyle/>
-          <a:p>
-            <a:pPr marL="0" lvl="0" indent="0" algn="r" rtl="0">
-              <a:spcBef>
-                <a:spcPts val="0"/>
-              </a:spcBef>
-              <a:spcAft>
-                <a:spcPts val="0"/>
-              </a:spcAft>
-              <a:buNone/>
-            </a:pPr>
-            <a:fld id="{00000000-1234-1234-1234-123412341234}" type="slidenum">
-              <a:rPr lang="en"/>
-              <a:t>2</a:t>
-            </a:fld>
-            <a:endParaRPr/>
-          </a:p>
-        </p:txBody>
-      </p:sp>
-      <p:sp>
-        <p:nvSpPr>
-          <p:cNvPr id="2" name="TextBox 1">
-            <a:extLst>
-              <a:ext uri="{FF2B5EF4-FFF2-40B4-BE49-F238E27FC236}">
-                <a16:creationId xmlns:a16="http://schemas.microsoft.com/office/drawing/2014/main" id="{AE960589-7B12-D7F7-6452-D45441D8CA95}"/>
-              </a:ext>
-            </a:extLst>
-          </p:cNvPr>
-          <p:cNvSpPr txBox="1"/>
-          <p:nvPr/>
-        </p:nvSpPr>
-        <p:spPr>
-          <a:xfrm>
-            <a:off x="-11684" y="1287037"/>
-            <a:ext cx="9144000" cy="338555"/>
-          </a:xfrm>
-          <a:prstGeom prst="rect">
-            <a:avLst/>
-          </a:prstGeom>
-          <a:solidFill>
-            <a:srgbClr val="FFC000"/>
-          </a:solidFill>
-        </p:spPr>
-        <p:txBody>
-          <a:bodyPr wrap="square" rtlCol="0">
-            <a:spAutoFit/>
-          </a:bodyPr>
-          <a:lstStyle/>
-          <a:p>
-            <a:r>
-              <a:rPr lang="en-US" dirty="0"/>
-              <a:t>Quiz</a:t>
-            </a:r>
-          </a:p>
-        </p:txBody>
-      </p:sp>
-      <p:sp>
-        <p:nvSpPr>
-          <p:cNvPr id="3" name="TextBox 2">
-            <a:extLst>
-              <a:ext uri="{FF2B5EF4-FFF2-40B4-BE49-F238E27FC236}">
-                <a16:creationId xmlns:a16="http://schemas.microsoft.com/office/drawing/2014/main" id="{4FD526CA-3FDB-A5C2-36D9-69A3252D5E9A}"/>
-              </a:ext>
-            </a:extLst>
-          </p:cNvPr>
-          <p:cNvSpPr txBox="1"/>
-          <p:nvPr/>
-        </p:nvSpPr>
-        <p:spPr>
-          <a:xfrm>
-            <a:off x="0" y="3507404"/>
-            <a:ext cx="9144000" cy="307777"/>
-          </a:xfrm>
-          <a:prstGeom prst="rect">
-            <a:avLst/>
-          </a:prstGeom>
-          <a:solidFill>
-            <a:srgbClr val="FFC000"/>
-          </a:solidFill>
-        </p:spPr>
-        <p:txBody>
-          <a:bodyPr wrap="square" rtlCol="0">
-            <a:spAutoFit/>
-          </a:bodyPr>
-          <a:lstStyle/>
-          <a:p>
-            <a:r>
-              <a:rPr lang="en-US" dirty="0"/>
-              <a:t>Next </a:t>
-            </a:r>
-            <a:r>
-              <a:rPr lang="en-US" dirty="0">
-                <a:sym typeface="Wingdings" panose="05000000000000000000" pitchFamily="2" charset="2"/>
-              </a:rPr>
-              <a:t> </a:t>
-            </a:r>
-            <a:endParaRPr lang="en-US" dirty="0"/>
-          </a:p>
-        </p:txBody>
-      </p:sp>
-      <p:sp>
-        <p:nvSpPr>
-          <p:cNvPr id="4" name="Google Shape;325;p47">
-            <a:extLst>
-              <a:ext uri="{FF2B5EF4-FFF2-40B4-BE49-F238E27FC236}">
-                <a16:creationId xmlns:a16="http://schemas.microsoft.com/office/drawing/2014/main" id="{DC50CCB1-5AFE-1F52-8B22-87EB927965B4}"/>
-              </a:ext>
-            </a:extLst>
-          </p:cNvPr>
-          <p:cNvSpPr txBox="1">
-            <a:spLocks/>
-          </p:cNvSpPr>
-          <p:nvPr/>
-        </p:nvSpPr>
-        <p:spPr>
-          <a:xfrm>
-            <a:off x="-5842" y="3848100"/>
-            <a:ext cx="9149842" cy="1208717"/>
-          </a:xfrm>
-          <a:prstGeom prst="rect">
-            <a:avLst/>
-          </a:prstGeom>
-          <a:noFill/>
-          <a:ln>
-            <a:noFill/>
-          </a:ln>
-        </p:spPr>
-        <p:txBody>
-          <a:bodyPr spcFirstLastPara="1" wrap="square" lIns="91425" tIns="91425" rIns="91425" bIns="91425" anchor="ctr" anchorCtr="0">
-            <a:noAutofit/>
-          </a:bodyPr>
-          <a:lstStyle>
-            <a:defPPr marR="0" lvl="0" algn="l" rtl="0">
-              <a:lnSpc>
-                <a:spcPct val="100000"/>
-              </a:lnSpc>
-              <a:spcBef>
-                <a:spcPts val="0"/>
-              </a:spcBef>
-              <a:spcAft>
-                <a:spcPts val="0"/>
-              </a:spcAft>
-            </a:defPPr>
-            <a:lvl1pPr marL="457200" marR="0" lvl="0" indent="-311150" algn="l" rtl="0">
-              <a:lnSpc>
-                <a:spcPct val="115000"/>
-              </a:lnSpc>
-              <a:spcBef>
-                <a:spcPts val="0"/>
-              </a:spcBef>
-              <a:spcAft>
-                <a:spcPts val="0"/>
-              </a:spcAft>
-              <a:buClr>
-                <a:schemeClr val="dk2"/>
-              </a:buClr>
-              <a:buSzPts val="1300"/>
-              <a:buFont typeface="Roboto"/>
-              <a:buChar char="●"/>
-              <a:defRPr sz="1300" b="0" i="0" u="none" strike="noStrike" cap="none">
-                <a:solidFill>
-                  <a:schemeClr val="dk2"/>
-                </a:solidFill>
-                <a:latin typeface="Roboto"/>
-                <a:ea typeface="Roboto"/>
-                <a:cs typeface="Roboto"/>
-                <a:sym typeface="Roboto"/>
-              </a:defRPr>
-            </a:lvl1pPr>
-            <a:lvl2pPr marL="914400" marR="0" lvl="1" indent="-298450" algn="l" rtl="0">
-              <a:lnSpc>
-                <a:spcPct val="115000"/>
-              </a:lnSpc>
-              <a:spcBef>
-                <a:spcPts val="1600"/>
-              </a:spcBef>
-              <a:spcAft>
-                <a:spcPts val="0"/>
-              </a:spcAft>
-              <a:buClr>
-                <a:schemeClr val="dk2"/>
-              </a:buClr>
-              <a:buSzPts val="1100"/>
-              <a:buFont typeface="Roboto"/>
-              <a:buChar char="○"/>
-              <a:defRPr sz="1100" b="0" i="0" u="none" strike="noStrike" cap="none">
-                <a:solidFill>
-                  <a:schemeClr val="dk2"/>
-                </a:solidFill>
-                <a:latin typeface="Roboto"/>
-                <a:ea typeface="Roboto"/>
-                <a:cs typeface="Roboto"/>
-                <a:sym typeface="Roboto"/>
-              </a:defRPr>
-            </a:lvl2pPr>
-            <a:lvl3pPr marL="1371600" marR="0" lvl="2" indent="-298450" algn="l" rtl="0">
-              <a:lnSpc>
-                <a:spcPct val="115000"/>
-              </a:lnSpc>
-              <a:spcBef>
-                <a:spcPts val="1600"/>
-              </a:spcBef>
-              <a:spcAft>
-                <a:spcPts val="0"/>
-              </a:spcAft>
-              <a:buClr>
-                <a:schemeClr val="dk2"/>
-              </a:buClr>
-              <a:buSzPts val="1100"/>
-              <a:buFont typeface="Roboto"/>
-              <a:buChar char="■"/>
-              <a:defRPr sz="1100" b="0" i="0" u="none" strike="noStrike" cap="none">
-                <a:solidFill>
-                  <a:schemeClr val="dk2"/>
-                </a:solidFill>
-                <a:latin typeface="Roboto"/>
-                <a:ea typeface="Roboto"/>
-                <a:cs typeface="Roboto"/>
-                <a:sym typeface="Roboto"/>
-              </a:defRPr>
-            </a:lvl3pPr>
-            <a:lvl4pPr marL="1828800" marR="0" lvl="3" indent="-298450" algn="l" rtl="0">
-              <a:lnSpc>
-                <a:spcPct val="115000"/>
-              </a:lnSpc>
-              <a:spcBef>
-                <a:spcPts val="1600"/>
-              </a:spcBef>
-              <a:spcAft>
-                <a:spcPts val="0"/>
-              </a:spcAft>
-              <a:buClr>
-                <a:schemeClr val="dk2"/>
-              </a:buClr>
-              <a:buSzPts val="1100"/>
-              <a:buFont typeface="Roboto"/>
-              <a:buChar char="●"/>
-              <a:defRPr sz="1100" b="0" i="0" u="none" strike="noStrike" cap="none">
-                <a:solidFill>
-                  <a:schemeClr val="dk2"/>
-                </a:solidFill>
-                <a:latin typeface="Roboto"/>
-                <a:ea typeface="Roboto"/>
-                <a:cs typeface="Roboto"/>
-                <a:sym typeface="Roboto"/>
-              </a:defRPr>
-            </a:lvl4pPr>
-            <a:lvl5pPr marL="2286000" marR="0" lvl="4" indent="-298450" algn="l" rtl="0">
-              <a:lnSpc>
-                <a:spcPct val="115000"/>
-              </a:lnSpc>
-              <a:spcBef>
-                <a:spcPts val="1600"/>
-              </a:spcBef>
-              <a:spcAft>
-                <a:spcPts val="0"/>
-              </a:spcAft>
-              <a:buClr>
-                <a:schemeClr val="dk2"/>
-              </a:buClr>
-              <a:buSzPts val="1100"/>
-              <a:buFont typeface="Roboto"/>
-              <a:buChar char="○"/>
-              <a:defRPr sz="1100" b="0" i="0" u="none" strike="noStrike" cap="none">
-                <a:solidFill>
-                  <a:schemeClr val="dk2"/>
-                </a:solidFill>
-                <a:latin typeface="Roboto"/>
-                <a:ea typeface="Roboto"/>
-                <a:cs typeface="Roboto"/>
-                <a:sym typeface="Roboto"/>
-              </a:defRPr>
-            </a:lvl5pPr>
-            <a:lvl6pPr marL="2743200" marR="0" lvl="5" indent="-298450" algn="l" rtl="0">
-              <a:lnSpc>
-                <a:spcPct val="115000"/>
-              </a:lnSpc>
-              <a:spcBef>
-                <a:spcPts val="1600"/>
-              </a:spcBef>
-              <a:spcAft>
-                <a:spcPts val="0"/>
-              </a:spcAft>
-              <a:buClr>
-                <a:schemeClr val="dk2"/>
-              </a:buClr>
-              <a:buSzPts val="1100"/>
-              <a:buFont typeface="Roboto"/>
-              <a:buChar char="■"/>
-              <a:defRPr sz="1100" b="0" i="0" u="none" strike="noStrike" cap="none">
-                <a:solidFill>
-                  <a:schemeClr val="dk2"/>
-                </a:solidFill>
-                <a:latin typeface="Roboto"/>
-                <a:ea typeface="Roboto"/>
-                <a:cs typeface="Roboto"/>
-                <a:sym typeface="Roboto"/>
-              </a:defRPr>
-            </a:lvl6pPr>
-            <a:lvl7pPr marL="3200400" marR="0" lvl="6" indent="-298450" algn="l" rtl="0">
-              <a:lnSpc>
-                <a:spcPct val="115000"/>
-              </a:lnSpc>
-              <a:spcBef>
-                <a:spcPts val="1600"/>
-              </a:spcBef>
-              <a:spcAft>
-                <a:spcPts val="0"/>
-              </a:spcAft>
-              <a:buClr>
-                <a:schemeClr val="dk2"/>
-              </a:buClr>
-              <a:buSzPts val="1100"/>
-              <a:buFont typeface="Roboto"/>
-              <a:buChar char="●"/>
-              <a:defRPr sz="1100" b="0" i="0" u="none" strike="noStrike" cap="none">
-                <a:solidFill>
-                  <a:schemeClr val="dk2"/>
-                </a:solidFill>
-                <a:latin typeface="Roboto"/>
-                <a:ea typeface="Roboto"/>
-                <a:cs typeface="Roboto"/>
-                <a:sym typeface="Roboto"/>
-              </a:defRPr>
-            </a:lvl7pPr>
-            <a:lvl8pPr marL="3657600" marR="0" lvl="7" indent="-298450" algn="l" rtl="0">
-              <a:lnSpc>
-                <a:spcPct val="115000"/>
-              </a:lnSpc>
-              <a:spcBef>
-                <a:spcPts val="1600"/>
-              </a:spcBef>
-              <a:spcAft>
-                <a:spcPts val="0"/>
-              </a:spcAft>
-              <a:buClr>
-                <a:schemeClr val="dk2"/>
-              </a:buClr>
-              <a:buSzPts val="1100"/>
-              <a:buFont typeface="Roboto"/>
-              <a:buChar char="○"/>
-              <a:defRPr sz="1100" b="0" i="0" u="none" strike="noStrike" cap="none">
-                <a:solidFill>
-                  <a:schemeClr val="dk2"/>
-                </a:solidFill>
-                <a:latin typeface="Roboto"/>
-                <a:ea typeface="Roboto"/>
-                <a:cs typeface="Roboto"/>
-                <a:sym typeface="Roboto"/>
-              </a:defRPr>
-            </a:lvl8pPr>
-            <a:lvl9pPr marL="4114800" marR="0" lvl="8" indent="-298450" algn="l" rtl="0">
-              <a:lnSpc>
-                <a:spcPct val="115000"/>
-              </a:lnSpc>
-              <a:spcBef>
-                <a:spcPts val="1600"/>
-              </a:spcBef>
-              <a:spcAft>
-                <a:spcPts val="1600"/>
-              </a:spcAft>
-              <a:buClr>
-                <a:schemeClr val="dk2"/>
-              </a:buClr>
-              <a:buSzPts val="1100"/>
-              <a:buFont typeface="Roboto"/>
-              <a:buChar char="■"/>
-              <a:defRPr sz="1100" b="0" i="0" u="none" strike="noStrike" cap="none">
-                <a:solidFill>
-                  <a:schemeClr val="dk2"/>
-                </a:solidFill>
-                <a:latin typeface="Roboto"/>
-                <a:ea typeface="Roboto"/>
-                <a:cs typeface="Roboto"/>
-                <a:sym typeface="Roboto"/>
-              </a:defRPr>
-            </a:lvl9pPr>
-          </a:lstStyle>
-          <a:p>
-            <a:pPr marL="0" indent="0">
-              <a:spcAft>
-                <a:spcPts val="1600"/>
-              </a:spcAft>
-              <a:buNone/>
-            </a:pPr>
-            <a:r>
-              <a:rPr lang="en-US" sz="1400" dirty="0"/>
-              <a:t>After completing the Quiz </a:t>
-            </a:r>
-          </a:p>
-          <a:p>
-            <a:pPr marL="342900" indent="-342900">
-              <a:spcAft>
-                <a:spcPts val="1600"/>
-              </a:spcAft>
-            </a:pPr>
-            <a:r>
-              <a:rPr lang="en-US" sz="1200" dirty="0"/>
-              <a:t>Accept GitHub Classroom Assignment for Unit 03</a:t>
-            </a:r>
-          </a:p>
-          <a:p>
-            <a:pPr marL="342900" indent="-342900">
-              <a:spcAft>
-                <a:spcPts val="1600"/>
-              </a:spcAft>
-            </a:pPr>
-            <a:r>
-              <a:rPr lang="en-US" sz="1200" dirty="0"/>
-              <a:t>Clone/pull GitHub classroom repo for Unit 03 under </a:t>
-            </a:r>
-            <a:r>
-              <a:rPr lang="en-US" sz="1200" dirty="0" err="1"/>
-              <a:t>softdevII</a:t>
-            </a:r>
-            <a:r>
-              <a:rPr lang="en-US" sz="1200" dirty="0"/>
-              <a:t> folder</a:t>
-            </a:r>
-            <a:endParaRPr lang="en-US" sz="1200" dirty="0">
-              <a:solidFill>
-                <a:schemeClr val="tx1"/>
-              </a:solidFill>
-            </a:endParaRPr>
-          </a:p>
-        </p:txBody>
-      </p:sp>
-      <p:sp>
-        <p:nvSpPr>
-          <p:cNvPr id="5" name="Google Shape;325;p47">
-            <a:extLst>
-              <a:ext uri="{FF2B5EF4-FFF2-40B4-BE49-F238E27FC236}">
-                <a16:creationId xmlns:a16="http://schemas.microsoft.com/office/drawing/2014/main" id="{7B85466C-6200-EE66-9396-7DECA70CDF53}"/>
-              </a:ext>
-            </a:extLst>
-          </p:cNvPr>
-          <p:cNvSpPr txBox="1">
-            <a:spLocks/>
-          </p:cNvSpPr>
-          <p:nvPr/>
-        </p:nvSpPr>
-        <p:spPr>
-          <a:xfrm>
-            <a:off x="4303618" y="1737005"/>
-            <a:ext cx="4516998" cy="1378400"/>
-          </a:xfrm>
-          <a:prstGeom prst="rect">
-            <a:avLst/>
-          </a:prstGeom>
-          <a:noFill/>
-          <a:ln>
-            <a:noFill/>
-          </a:ln>
-        </p:spPr>
-        <p:txBody>
-          <a:bodyPr spcFirstLastPara="1" wrap="square" lIns="91425" tIns="91425" rIns="91425" bIns="91425" anchor="ctr" anchorCtr="0">
-            <a:noAutofit/>
-          </a:bodyPr>
-          <a:lstStyle>
-            <a:defPPr marR="0" lvl="0" algn="l" rtl="0">
-              <a:lnSpc>
-                <a:spcPct val="100000"/>
-              </a:lnSpc>
-              <a:spcBef>
-                <a:spcPts val="0"/>
-              </a:spcBef>
-              <a:spcAft>
-                <a:spcPts val="0"/>
-              </a:spcAft>
-            </a:defPPr>
-            <a:lvl1pPr marL="457200" marR="0" lvl="0" indent="-311150" algn="l" rtl="0">
-              <a:lnSpc>
-                <a:spcPct val="115000"/>
-              </a:lnSpc>
-              <a:spcBef>
-                <a:spcPts val="0"/>
-              </a:spcBef>
-              <a:spcAft>
-                <a:spcPts val="0"/>
-              </a:spcAft>
-              <a:buClr>
-                <a:schemeClr val="dk2"/>
-              </a:buClr>
-              <a:buSzPts val="1300"/>
-              <a:buFont typeface="Roboto"/>
-              <a:buChar char="●"/>
-              <a:defRPr sz="1300" b="0" i="0" u="none" strike="noStrike" cap="none">
-                <a:solidFill>
-                  <a:schemeClr val="dk2"/>
-                </a:solidFill>
-                <a:latin typeface="Roboto"/>
-                <a:ea typeface="Roboto"/>
-                <a:cs typeface="Roboto"/>
-                <a:sym typeface="Roboto"/>
-              </a:defRPr>
-            </a:lvl1pPr>
-            <a:lvl2pPr marL="914400" marR="0" lvl="1" indent="-298450" algn="l" rtl="0">
-              <a:lnSpc>
-                <a:spcPct val="115000"/>
-              </a:lnSpc>
-              <a:spcBef>
-                <a:spcPts val="1600"/>
-              </a:spcBef>
-              <a:spcAft>
-                <a:spcPts val="0"/>
-              </a:spcAft>
-              <a:buClr>
-                <a:schemeClr val="dk2"/>
-              </a:buClr>
-              <a:buSzPts val="1100"/>
-              <a:buFont typeface="Roboto"/>
-              <a:buChar char="○"/>
-              <a:defRPr sz="1100" b="0" i="0" u="none" strike="noStrike" cap="none">
-                <a:solidFill>
-                  <a:schemeClr val="dk2"/>
-                </a:solidFill>
-                <a:latin typeface="Roboto"/>
-                <a:ea typeface="Roboto"/>
-                <a:cs typeface="Roboto"/>
-                <a:sym typeface="Roboto"/>
-              </a:defRPr>
-            </a:lvl2pPr>
-            <a:lvl3pPr marL="1371600" marR="0" lvl="2" indent="-298450" algn="l" rtl="0">
-              <a:lnSpc>
-                <a:spcPct val="115000"/>
-              </a:lnSpc>
-              <a:spcBef>
-                <a:spcPts val="1600"/>
-              </a:spcBef>
-              <a:spcAft>
-                <a:spcPts val="0"/>
-              </a:spcAft>
-              <a:buClr>
-                <a:schemeClr val="dk2"/>
-              </a:buClr>
-              <a:buSzPts val="1100"/>
-              <a:buFont typeface="Roboto"/>
-              <a:buChar char="■"/>
-              <a:defRPr sz="1100" b="0" i="0" u="none" strike="noStrike" cap="none">
-                <a:solidFill>
-                  <a:schemeClr val="dk2"/>
-                </a:solidFill>
-                <a:latin typeface="Roboto"/>
-                <a:ea typeface="Roboto"/>
-                <a:cs typeface="Roboto"/>
-                <a:sym typeface="Roboto"/>
-              </a:defRPr>
-            </a:lvl3pPr>
-            <a:lvl4pPr marL="1828800" marR="0" lvl="3" indent="-298450" algn="l" rtl="0">
-              <a:lnSpc>
-                <a:spcPct val="115000"/>
-              </a:lnSpc>
-              <a:spcBef>
-                <a:spcPts val="1600"/>
-              </a:spcBef>
-              <a:spcAft>
-                <a:spcPts val="0"/>
-              </a:spcAft>
-              <a:buClr>
-                <a:schemeClr val="dk2"/>
-              </a:buClr>
-              <a:buSzPts val="1100"/>
-              <a:buFont typeface="Roboto"/>
-              <a:buChar char="●"/>
-              <a:defRPr sz="1100" b="0" i="0" u="none" strike="noStrike" cap="none">
-                <a:solidFill>
-                  <a:schemeClr val="dk2"/>
-                </a:solidFill>
-                <a:latin typeface="Roboto"/>
-                <a:ea typeface="Roboto"/>
-                <a:cs typeface="Roboto"/>
-                <a:sym typeface="Roboto"/>
-              </a:defRPr>
-            </a:lvl4pPr>
-            <a:lvl5pPr marL="2286000" marR="0" lvl="4" indent="-298450" algn="l" rtl="0">
-              <a:lnSpc>
-                <a:spcPct val="115000"/>
-              </a:lnSpc>
-              <a:spcBef>
-                <a:spcPts val="1600"/>
-              </a:spcBef>
-              <a:spcAft>
-                <a:spcPts val="0"/>
-              </a:spcAft>
-              <a:buClr>
-                <a:schemeClr val="dk2"/>
-              </a:buClr>
-              <a:buSzPts val="1100"/>
-              <a:buFont typeface="Roboto"/>
-              <a:buChar char="○"/>
-              <a:defRPr sz="1100" b="0" i="0" u="none" strike="noStrike" cap="none">
-                <a:solidFill>
-                  <a:schemeClr val="dk2"/>
-                </a:solidFill>
-                <a:latin typeface="Roboto"/>
-                <a:ea typeface="Roboto"/>
-                <a:cs typeface="Roboto"/>
-                <a:sym typeface="Roboto"/>
-              </a:defRPr>
-            </a:lvl5pPr>
-            <a:lvl6pPr marL="2743200" marR="0" lvl="5" indent="-298450" algn="l" rtl="0">
-              <a:lnSpc>
-                <a:spcPct val="115000"/>
-              </a:lnSpc>
-              <a:spcBef>
-                <a:spcPts val="1600"/>
-              </a:spcBef>
-              <a:spcAft>
-                <a:spcPts val="0"/>
-              </a:spcAft>
-              <a:buClr>
-                <a:schemeClr val="dk2"/>
-              </a:buClr>
-              <a:buSzPts val="1100"/>
-              <a:buFont typeface="Roboto"/>
-              <a:buChar char="■"/>
-              <a:defRPr sz="1100" b="0" i="0" u="none" strike="noStrike" cap="none">
-                <a:solidFill>
-                  <a:schemeClr val="dk2"/>
-                </a:solidFill>
-                <a:latin typeface="Roboto"/>
-                <a:ea typeface="Roboto"/>
-                <a:cs typeface="Roboto"/>
-                <a:sym typeface="Roboto"/>
-              </a:defRPr>
-            </a:lvl6pPr>
-            <a:lvl7pPr marL="3200400" marR="0" lvl="6" indent="-298450" algn="l" rtl="0">
-              <a:lnSpc>
-                <a:spcPct val="115000"/>
-              </a:lnSpc>
-              <a:spcBef>
-                <a:spcPts val="1600"/>
-              </a:spcBef>
-              <a:spcAft>
-                <a:spcPts val="0"/>
-              </a:spcAft>
-              <a:buClr>
-                <a:schemeClr val="dk2"/>
-              </a:buClr>
-              <a:buSzPts val="1100"/>
-              <a:buFont typeface="Roboto"/>
-              <a:buChar char="●"/>
-              <a:defRPr sz="1100" b="0" i="0" u="none" strike="noStrike" cap="none">
-                <a:solidFill>
-                  <a:schemeClr val="dk2"/>
-                </a:solidFill>
-                <a:latin typeface="Roboto"/>
-                <a:ea typeface="Roboto"/>
-                <a:cs typeface="Roboto"/>
-                <a:sym typeface="Roboto"/>
-              </a:defRPr>
-            </a:lvl7pPr>
-            <a:lvl8pPr marL="3657600" marR="0" lvl="7" indent="-298450" algn="l" rtl="0">
-              <a:lnSpc>
-                <a:spcPct val="115000"/>
-              </a:lnSpc>
-              <a:spcBef>
-                <a:spcPts val="1600"/>
-              </a:spcBef>
-              <a:spcAft>
-                <a:spcPts val="0"/>
-              </a:spcAft>
-              <a:buClr>
-                <a:schemeClr val="dk2"/>
-              </a:buClr>
-              <a:buSzPts val="1100"/>
-              <a:buFont typeface="Roboto"/>
-              <a:buChar char="○"/>
-              <a:defRPr sz="1100" b="0" i="0" u="none" strike="noStrike" cap="none">
-                <a:solidFill>
-                  <a:schemeClr val="dk2"/>
-                </a:solidFill>
-                <a:latin typeface="Roboto"/>
-                <a:ea typeface="Roboto"/>
-                <a:cs typeface="Roboto"/>
-                <a:sym typeface="Roboto"/>
-              </a:defRPr>
-            </a:lvl8pPr>
-            <a:lvl9pPr marL="4114800" marR="0" lvl="8" indent="-298450" algn="l" rtl="0">
-              <a:lnSpc>
-                <a:spcPct val="115000"/>
-              </a:lnSpc>
-              <a:spcBef>
-                <a:spcPts val="1600"/>
-              </a:spcBef>
-              <a:spcAft>
-                <a:spcPts val="1600"/>
-              </a:spcAft>
-              <a:buClr>
-                <a:schemeClr val="dk2"/>
-              </a:buClr>
-              <a:buSzPts val="1100"/>
-              <a:buFont typeface="Roboto"/>
-              <a:buChar char="■"/>
-              <a:defRPr sz="1100" b="0" i="0" u="none" strike="noStrike" cap="none">
-                <a:solidFill>
-                  <a:schemeClr val="dk2"/>
-                </a:solidFill>
-                <a:latin typeface="Roboto"/>
-                <a:ea typeface="Roboto"/>
-                <a:cs typeface="Roboto"/>
-                <a:sym typeface="Roboto"/>
-              </a:defRPr>
-            </a:lvl9pPr>
-          </a:lstStyle>
-          <a:p>
-            <a:pPr marL="146050" indent="0">
-              <a:buNone/>
-            </a:pPr>
-            <a:r>
-              <a:rPr lang="en-US" sz="1600" dirty="0"/>
-              <a:t>Quiz 2.3 UML</a:t>
-            </a:r>
-          </a:p>
-          <a:p>
-            <a:pPr marL="146050" indent="0">
-              <a:buNone/>
-            </a:pPr>
-            <a:r>
-              <a:rPr lang="en-US" sz="1600" dirty="0">
-                <a:solidFill>
-                  <a:schemeClr val="tx1"/>
-                </a:solidFill>
-              </a:rPr>
-              <a:t>Password - </a:t>
-            </a:r>
-            <a:r>
-              <a:rPr lang="en-US" sz="1600">
-                <a:solidFill>
-                  <a:schemeClr val="tx1"/>
-                </a:solidFill>
-              </a:rPr>
-              <a:t>UMLforLife</a:t>
-            </a:r>
-            <a:endParaRPr lang="en-US" sz="1600" dirty="0">
-              <a:solidFill>
-                <a:schemeClr val="tx1"/>
-              </a:solidFill>
-            </a:endParaRPr>
-          </a:p>
-        </p:txBody>
-      </p:sp>
-    </p:spTree>
-    <p:extLst>
-      <p:ext uri="{BB962C8B-B14F-4D97-AF65-F5344CB8AC3E}">
-        <p14:creationId xmlns:p14="http://schemas.microsoft.com/office/powerpoint/2010/main" val="674272117"/>
-      </p:ext>
-    </p:extLst>
   </p:cSld>
   <p:clrMapOvr>
     <a:masterClrMapping/>

--- a/Presentation/Announcement.pptx
+++ b/Presentation/Announcement.pptx
@@ -8,8 +8,8 @@
     <p:notesMasterId r:id="rId14"/>
   </p:notesMasterIdLst>
   <p:sldIdLst>
-    <p:sldId id="286" r:id="rId2"/>
-    <p:sldId id="276" r:id="rId3"/>
+    <p:sldId id="276" r:id="rId2"/>
+    <p:sldId id="286" r:id="rId3"/>
     <p:sldId id="278" r:id="rId4"/>
     <p:sldId id="281" r:id="rId5"/>
     <p:sldId id="287" r:id="rId6"/>
@@ -739,13 +739,7 @@
   <p:cSld>
     <p:spTree>
       <p:nvGrpSpPr>
-        <p:cNvPr id="1" name="Shape 320">
-          <a:extLst>
-            <a:ext uri="{FF2B5EF4-FFF2-40B4-BE49-F238E27FC236}">
-              <a16:creationId xmlns:a16="http://schemas.microsoft.com/office/drawing/2014/main" id="{5E82D901-7A14-0382-4365-722182C687A8}"/>
-            </a:ext>
-          </a:extLst>
-        </p:cNvPr>
+        <p:cNvPr id="1" name="Shape 320"/>
         <p:cNvGrpSpPr/>
         <p:nvPr/>
       </p:nvGrpSpPr>
@@ -759,13 +753,7 @@
       </p:grpSpPr>
       <p:sp>
         <p:nvSpPr>
-          <p:cNvPr id="321" name="Google Shape;321;g8f52c9b70a_3_0:notes">
-            <a:extLst>
-              <a:ext uri="{FF2B5EF4-FFF2-40B4-BE49-F238E27FC236}">
-                <a16:creationId xmlns:a16="http://schemas.microsoft.com/office/drawing/2014/main" id="{B8D16220-AF50-7601-71A9-4952749D32CB}"/>
-              </a:ext>
-            </a:extLst>
-          </p:cNvPr>
+          <p:cNvPr id="321" name="Google Shape;321;g8f52c9b70a_3_0:notes"/>
           <p:cNvSpPr>
             <a:spLocks noGrp="1" noRot="1" noChangeAspect="1"/>
           </p:cNvSpPr>
@@ -806,13 +794,7 @@
       </p:sp>
       <p:sp>
         <p:nvSpPr>
-          <p:cNvPr id="322" name="Google Shape;322;g8f52c9b70a_3_0:notes">
-            <a:extLst>
-              <a:ext uri="{FF2B5EF4-FFF2-40B4-BE49-F238E27FC236}">
-                <a16:creationId xmlns:a16="http://schemas.microsoft.com/office/drawing/2014/main" id="{AEA302D2-52D7-97D7-BF6C-781234E92D43}"/>
-              </a:ext>
-            </a:extLst>
-          </p:cNvPr>
+          <p:cNvPr id="322" name="Google Shape;322;g8f52c9b70a_3_0:notes"/>
           <p:cNvSpPr txBox="1">
             <a:spLocks noGrp="1"/>
           </p:cNvSpPr>
@@ -843,11 +825,6 @@
         </p:txBody>
       </p:sp>
     </p:spTree>
-    <p:extLst>
-      <p:ext uri="{BB962C8B-B14F-4D97-AF65-F5344CB8AC3E}">
-        <p14:creationId xmlns:p14="http://schemas.microsoft.com/office/powerpoint/2010/main" val="2483524941"/>
-      </p:ext>
-    </p:extLst>
   </p:cSld>
   <p:clrMapOvr>
     <a:masterClrMapping/>
@@ -1169,7 +1146,13 @@
   <p:cSld>
     <p:spTree>
       <p:nvGrpSpPr>
-        <p:cNvPr id="1" name="Shape 320"/>
+        <p:cNvPr id="1" name="Shape 320">
+          <a:extLst>
+            <a:ext uri="{FF2B5EF4-FFF2-40B4-BE49-F238E27FC236}">
+              <a16:creationId xmlns:a16="http://schemas.microsoft.com/office/drawing/2014/main" id="{5E82D901-7A14-0382-4365-722182C687A8}"/>
+            </a:ext>
+          </a:extLst>
+        </p:cNvPr>
         <p:cNvGrpSpPr/>
         <p:nvPr/>
       </p:nvGrpSpPr>
@@ -1183,7 +1166,13 @@
       </p:grpSpPr>
       <p:sp>
         <p:nvSpPr>
-          <p:cNvPr id="321" name="Google Shape;321;g8f52c9b70a_3_0:notes"/>
+          <p:cNvPr id="321" name="Google Shape;321;g8f52c9b70a_3_0:notes">
+            <a:extLst>
+              <a:ext uri="{FF2B5EF4-FFF2-40B4-BE49-F238E27FC236}">
+                <a16:creationId xmlns:a16="http://schemas.microsoft.com/office/drawing/2014/main" id="{B8D16220-AF50-7601-71A9-4952749D32CB}"/>
+              </a:ext>
+            </a:extLst>
+          </p:cNvPr>
           <p:cNvSpPr>
             <a:spLocks noGrp="1" noRot="1" noChangeAspect="1"/>
           </p:cNvSpPr>
@@ -1224,7 +1213,13 @@
       </p:sp>
       <p:sp>
         <p:nvSpPr>
-          <p:cNvPr id="322" name="Google Shape;322;g8f52c9b70a_3_0:notes"/>
+          <p:cNvPr id="322" name="Google Shape;322;g8f52c9b70a_3_0:notes">
+            <a:extLst>
+              <a:ext uri="{FF2B5EF4-FFF2-40B4-BE49-F238E27FC236}">
+                <a16:creationId xmlns:a16="http://schemas.microsoft.com/office/drawing/2014/main" id="{AEA302D2-52D7-97D7-BF6C-781234E92D43}"/>
+              </a:ext>
+            </a:extLst>
+          </p:cNvPr>
           <p:cNvSpPr txBox="1">
             <a:spLocks noGrp="1"/>
           </p:cNvSpPr>
@@ -1255,6 +1250,11 @@
         </p:txBody>
       </p:sp>
     </p:spTree>
+    <p:extLst>
+      <p:ext uri="{BB962C8B-B14F-4D97-AF65-F5344CB8AC3E}">
+        <p14:creationId xmlns:p14="http://schemas.microsoft.com/office/powerpoint/2010/main" val="2483524941"/>
+      </p:ext>
+    </p:extLst>
   </p:cSld>
   <p:clrMapOvr>
     <a:masterClrMapping/>
@@ -6529,6 +6529,1039 @@
   <p:cSld>
     <p:spTree>
       <p:nvGrpSpPr>
+        <p:cNvPr id="1" name="Shape 323"/>
+        <p:cNvGrpSpPr/>
+        <p:nvPr/>
+      </p:nvGrpSpPr>
+      <p:grpSpPr>
+        <a:xfrm>
+          <a:off x="0" y="0"/>
+          <a:ext cx="0" cy="0"/>
+          <a:chOff x="0" y="0"/>
+          <a:chExt cx="0" cy="0"/>
+        </a:xfrm>
+      </p:grpSpPr>
+      <p:sp>
+        <p:nvSpPr>
+          <p:cNvPr id="324" name="Google Shape;324;p47"/>
+          <p:cNvSpPr txBox="1">
+            <a:spLocks noGrp="1"/>
+          </p:cNvSpPr>
+          <p:nvPr>
+            <p:ph type="title"/>
+          </p:nvPr>
+        </p:nvSpPr>
+        <p:spPr>
+          <a:xfrm>
+            <a:off x="305858" y="273819"/>
+            <a:ext cx="8520600" cy="623700"/>
+          </a:xfrm>
+          <a:prstGeom prst="rect">
+            <a:avLst/>
+          </a:prstGeom>
+        </p:spPr>
+        <p:txBody>
+          <a:bodyPr spcFirstLastPara="1" wrap="square" lIns="91425" tIns="91425" rIns="91425" bIns="91425" anchor="t" anchorCtr="0">
+            <a:noAutofit/>
+          </a:bodyPr>
+          <a:lstStyle/>
+          <a:p>
+            <a:pPr marL="0" lvl="0" indent="0" algn="ctr" rtl="0">
+              <a:spcBef>
+                <a:spcPts val="0"/>
+              </a:spcBef>
+              <a:spcAft>
+                <a:spcPts val="0"/>
+              </a:spcAft>
+              <a:buNone/>
+            </a:pPr>
+            <a:r>
+              <a:rPr lang="en-US" dirty="0"/>
+              <a:t>GCIS – Software Development and Problem Solving</a:t>
+            </a:r>
+            <a:endParaRPr dirty="0"/>
+          </a:p>
+        </p:txBody>
+      </p:sp>
+      <p:sp>
+        <p:nvSpPr>
+          <p:cNvPr id="325" name="Google Shape;325;p47"/>
+          <p:cNvSpPr txBox="1">
+            <a:spLocks noGrp="1"/>
+          </p:cNvSpPr>
+          <p:nvPr>
+            <p:ph type="body" idx="1"/>
+          </p:nvPr>
+        </p:nvSpPr>
+        <p:spPr>
+          <a:xfrm>
+            <a:off x="-5842" y="1721147"/>
+            <a:ext cx="9149842" cy="1226403"/>
+          </a:xfrm>
+          <a:prstGeom prst="rect">
+            <a:avLst/>
+          </a:prstGeom>
+        </p:spPr>
+        <p:txBody>
+          <a:bodyPr spcFirstLastPara="1" wrap="square" lIns="91425" tIns="91425" rIns="91425" bIns="91425" anchor="ctr" anchorCtr="0">
+            <a:noAutofit/>
+          </a:bodyPr>
+          <a:lstStyle/>
+          <a:p>
+            <a:pPr marL="146050" indent="0" algn="ctr">
+              <a:buNone/>
+            </a:pPr>
+            <a:r>
+              <a:rPr lang="en-US" sz="2400" dirty="0"/>
+              <a:t>Take </a:t>
+            </a:r>
+            <a:r>
+              <a:rPr lang="pl-PL" sz="2400" dirty="0"/>
+              <a:t>Quiz </a:t>
+            </a:r>
+            <a:r>
+              <a:rPr lang="en-US" sz="2400" dirty="0"/>
+              <a:t>3</a:t>
+            </a:r>
+            <a:r>
+              <a:rPr lang="pl-PL" sz="2400" dirty="0"/>
+              <a:t>.</a:t>
+            </a:r>
+            <a:r>
+              <a:rPr lang="en-US" sz="2400" dirty="0"/>
+              <a:t>1</a:t>
+            </a:r>
+            <a:r>
+              <a:rPr lang="pl-PL" sz="2400" dirty="0"/>
+              <a:t>: </a:t>
+            </a:r>
+            <a:r>
+              <a:rPr lang="en-US" sz="2400" dirty="0"/>
+              <a:t>Inner Class &amp; </a:t>
+            </a:r>
+            <a:r>
+              <a:rPr lang="en-US" sz="2400" dirty="0" err="1"/>
+              <a:t>Annonymous</a:t>
+            </a:r>
+            <a:r>
+              <a:rPr lang="en-US" sz="2400" dirty="0"/>
+              <a:t> class</a:t>
+            </a:r>
+          </a:p>
+          <a:p>
+            <a:pPr algn="ctr"/>
+            <a:r>
+              <a:rPr lang="en-US" sz="2400" dirty="0"/>
+              <a:t>Password - </a:t>
+            </a:r>
+            <a:r>
+              <a:rPr lang="en-US" sz="2400" dirty="0" err="1"/>
+              <a:t>inner_strength_class</a:t>
+            </a:r>
+            <a:endParaRPr sz="2400" dirty="0"/>
+          </a:p>
+        </p:txBody>
+      </p:sp>
+      <p:sp>
+        <p:nvSpPr>
+          <p:cNvPr id="326" name="Google Shape;326;p47"/>
+          <p:cNvSpPr txBox="1">
+            <a:spLocks noGrp="1"/>
+          </p:cNvSpPr>
+          <p:nvPr>
+            <p:ph type="sldNum" idx="12"/>
+          </p:nvPr>
+        </p:nvSpPr>
+        <p:spPr>
+          <a:xfrm>
+            <a:off x="8472458" y="4663217"/>
+            <a:ext cx="548700" cy="393600"/>
+          </a:xfrm>
+          <a:prstGeom prst="rect">
+            <a:avLst/>
+          </a:prstGeom>
+        </p:spPr>
+        <p:txBody>
+          <a:bodyPr spcFirstLastPara="1" wrap="square" lIns="91425" tIns="91425" rIns="91425" bIns="91425" anchor="ctr" anchorCtr="0">
+            <a:noAutofit/>
+          </a:bodyPr>
+          <a:lstStyle/>
+          <a:p>
+            <a:pPr marL="0" lvl="0" indent="0" algn="r" rtl="0">
+              <a:spcBef>
+                <a:spcPts val="0"/>
+              </a:spcBef>
+              <a:spcAft>
+                <a:spcPts val="0"/>
+              </a:spcAft>
+              <a:buNone/>
+            </a:pPr>
+            <a:fld id="{00000000-1234-1234-1234-123412341234}" type="slidenum">
+              <a:rPr lang="en"/>
+              <a:t>1</a:t>
+            </a:fld>
+            <a:endParaRPr/>
+          </a:p>
+        </p:txBody>
+      </p:sp>
+      <p:sp>
+        <p:nvSpPr>
+          <p:cNvPr id="2" name="TextBox 1">
+            <a:extLst>
+              <a:ext uri="{FF2B5EF4-FFF2-40B4-BE49-F238E27FC236}">
+                <a16:creationId xmlns:a16="http://schemas.microsoft.com/office/drawing/2014/main" id="{DCC33EBB-1C9D-B9A9-88E6-F3466077417F}"/>
+              </a:ext>
+            </a:extLst>
+          </p:cNvPr>
+          <p:cNvSpPr txBox="1"/>
+          <p:nvPr/>
+        </p:nvSpPr>
+        <p:spPr>
+          <a:xfrm>
+            <a:off x="0" y="1277369"/>
+            <a:ext cx="9144000" cy="307777"/>
+          </a:xfrm>
+          <a:prstGeom prst="rect">
+            <a:avLst/>
+          </a:prstGeom>
+          <a:solidFill>
+            <a:srgbClr val="FFC000"/>
+          </a:solidFill>
+        </p:spPr>
+        <p:txBody>
+          <a:bodyPr wrap="square" rtlCol="0">
+            <a:spAutoFit/>
+          </a:bodyPr>
+          <a:lstStyle/>
+          <a:p>
+            <a:r>
+              <a:rPr lang="en-US" dirty="0"/>
+              <a:t>Quiz</a:t>
+            </a:r>
+          </a:p>
+        </p:txBody>
+      </p:sp>
+      <p:sp>
+        <p:nvSpPr>
+          <p:cNvPr id="3" name="TextBox 2">
+            <a:extLst>
+              <a:ext uri="{FF2B5EF4-FFF2-40B4-BE49-F238E27FC236}">
+                <a16:creationId xmlns:a16="http://schemas.microsoft.com/office/drawing/2014/main" id="{64C19922-6A1B-1404-5104-DC43E4C67861}"/>
+              </a:ext>
+            </a:extLst>
+          </p:cNvPr>
+          <p:cNvSpPr txBox="1"/>
+          <p:nvPr/>
+        </p:nvSpPr>
+        <p:spPr>
+          <a:xfrm>
+            <a:off x="-5842" y="3031063"/>
+            <a:ext cx="9144000" cy="307777"/>
+          </a:xfrm>
+          <a:prstGeom prst="rect">
+            <a:avLst/>
+          </a:prstGeom>
+          <a:solidFill>
+            <a:srgbClr val="FFC000"/>
+          </a:solidFill>
+        </p:spPr>
+        <p:txBody>
+          <a:bodyPr wrap="square" rtlCol="0">
+            <a:spAutoFit/>
+          </a:bodyPr>
+          <a:lstStyle/>
+          <a:p>
+            <a:r>
+              <a:rPr lang="en-US" dirty="0"/>
+              <a:t>Next </a:t>
+            </a:r>
+            <a:r>
+              <a:rPr lang="en-US" dirty="0">
+                <a:sym typeface="Wingdings" panose="05000000000000000000" pitchFamily="2" charset="2"/>
+              </a:rPr>
+              <a:t> </a:t>
+            </a:r>
+            <a:endParaRPr lang="en-US" dirty="0"/>
+          </a:p>
+        </p:txBody>
+      </p:sp>
+      <p:sp>
+        <p:nvSpPr>
+          <p:cNvPr id="4" name="Google Shape;325;p47">
+            <a:extLst>
+              <a:ext uri="{FF2B5EF4-FFF2-40B4-BE49-F238E27FC236}">
+                <a16:creationId xmlns:a16="http://schemas.microsoft.com/office/drawing/2014/main" id="{E455EA58-F56D-AF58-E97D-95A77E0AB6CF}"/>
+              </a:ext>
+            </a:extLst>
+          </p:cNvPr>
+          <p:cNvSpPr txBox="1">
+            <a:spLocks/>
+          </p:cNvSpPr>
+          <p:nvPr/>
+        </p:nvSpPr>
+        <p:spPr>
+          <a:xfrm>
+            <a:off x="-5842" y="3422352"/>
+            <a:ext cx="9149842" cy="1721148"/>
+          </a:xfrm>
+          <a:prstGeom prst="rect">
+            <a:avLst/>
+          </a:prstGeom>
+          <a:noFill/>
+          <a:ln>
+            <a:noFill/>
+          </a:ln>
+        </p:spPr>
+        <p:txBody>
+          <a:bodyPr spcFirstLastPara="1" wrap="square" lIns="91425" tIns="91425" rIns="91425" bIns="91425" anchor="ctr" anchorCtr="0">
+            <a:noAutofit/>
+          </a:bodyPr>
+          <a:lstStyle>
+            <a:defPPr marR="0" lvl="0" algn="l" rtl="0">
+              <a:lnSpc>
+                <a:spcPct val="100000"/>
+              </a:lnSpc>
+              <a:spcBef>
+                <a:spcPts val="0"/>
+              </a:spcBef>
+              <a:spcAft>
+                <a:spcPts val="0"/>
+              </a:spcAft>
+            </a:defPPr>
+            <a:lvl1pPr marL="457200" marR="0" lvl="0" indent="-311150" algn="l" rtl="0">
+              <a:lnSpc>
+                <a:spcPct val="115000"/>
+              </a:lnSpc>
+              <a:spcBef>
+                <a:spcPts val="0"/>
+              </a:spcBef>
+              <a:spcAft>
+                <a:spcPts val="0"/>
+              </a:spcAft>
+              <a:buClr>
+                <a:schemeClr val="dk2"/>
+              </a:buClr>
+              <a:buSzPts val="1300"/>
+              <a:buFont typeface="Roboto"/>
+              <a:buChar char="●"/>
+              <a:defRPr sz="1300" b="0" i="0" u="none" strike="noStrike" cap="none">
+                <a:solidFill>
+                  <a:schemeClr val="dk2"/>
+                </a:solidFill>
+                <a:latin typeface="Roboto"/>
+                <a:ea typeface="Roboto"/>
+                <a:cs typeface="Roboto"/>
+                <a:sym typeface="Roboto"/>
+              </a:defRPr>
+            </a:lvl1pPr>
+            <a:lvl2pPr marL="914400" marR="0" lvl="1" indent="-298450" algn="l" rtl="0">
+              <a:lnSpc>
+                <a:spcPct val="115000"/>
+              </a:lnSpc>
+              <a:spcBef>
+                <a:spcPts val="1600"/>
+              </a:spcBef>
+              <a:spcAft>
+                <a:spcPts val="0"/>
+              </a:spcAft>
+              <a:buClr>
+                <a:schemeClr val="dk2"/>
+              </a:buClr>
+              <a:buSzPts val="1100"/>
+              <a:buFont typeface="Roboto"/>
+              <a:buChar char="○"/>
+              <a:defRPr sz="1100" b="0" i="0" u="none" strike="noStrike" cap="none">
+                <a:solidFill>
+                  <a:schemeClr val="dk2"/>
+                </a:solidFill>
+                <a:latin typeface="Roboto"/>
+                <a:ea typeface="Roboto"/>
+                <a:cs typeface="Roboto"/>
+                <a:sym typeface="Roboto"/>
+              </a:defRPr>
+            </a:lvl2pPr>
+            <a:lvl3pPr marL="1371600" marR="0" lvl="2" indent="-298450" algn="l" rtl="0">
+              <a:lnSpc>
+                <a:spcPct val="115000"/>
+              </a:lnSpc>
+              <a:spcBef>
+                <a:spcPts val="1600"/>
+              </a:spcBef>
+              <a:spcAft>
+                <a:spcPts val="0"/>
+              </a:spcAft>
+              <a:buClr>
+                <a:schemeClr val="dk2"/>
+              </a:buClr>
+              <a:buSzPts val="1100"/>
+              <a:buFont typeface="Roboto"/>
+              <a:buChar char="■"/>
+              <a:defRPr sz="1100" b="0" i="0" u="none" strike="noStrike" cap="none">
+                <a:solidFill>
+                  <a:schemeClr val="dk2"/>
+                </a:solidFill>
+                <a:latin typeface="Roboto"/>
+                <a:ea typeface="Roboto"/>
+                <a:cs typeface="Roboto"/>
+                <a:sym typeface="Roboto"/>
+              </a:defRPr>
+            </a:lvl3pPr>
+            <a:lvl4pPr marL="1828800" marR="0" lvl="3" indent="-298450" algn="l" rtl="0">
+              <a:lnSpc>
+                <a:spcPct val="115000"/>
+              </a:lnSpc>
+              <a:spcBef>
+                <a:spcPts val="1600"/>
+              </a:spcBef>
+              <a:spcAft>
+                <a:spcPts val="0"/>
+              </a:spcAft>
+              <a:buClr>
+                <a:schemeClr val="dk2"/>
+              </a:buClr>
+              <a:buSzPts val="1100"/>
+              <a:buFont typeface="Roboto"/>
+              <a:buChar char="●"/>
+              <a:defRPr sz="1100" b="0" i="0" u="none" strike="noStrike" cap="none">
+                <a:solidFill>
+                  <a:schemeClr val="dk2"/>
+                </a:solidFill>
+                <a:latin typeface="Roboto"/>
+                <a:ea typeface="Roboto"/>
+                <a:cs typeface="Roboto"/>
+                <a:sym typeface="Roboto"/>
+              </a:defRPr>
+            </a:lvl4pPr>
+            <a:lvl5pPr marL="2286000" marR="0" lvl="4" indent="-298450" algn="l" rtl="0">
+              <a:lnSpc>
+                <a:spcPct val="115000"/>
+              </a:lnSpc>
+              <a:spcBef>
+                <a:spcPts val="1600"/>
+              </a:spcBef>
+              <a:spcAft>
+                <a:spcPts val="0"/>
+              </a:spcAft>
+              <a:buClr>
+                <a:schemeClr val="dk2"/>
+              </a:buClr>
+              <a:buSzPts val="1100"/>
+              <a:buFont typeface="Roboto"/>
+              <a:buChar char="○"/>
+              <a:defRPr sz="1100" b="0" i="0" u="none" strike="noStrike" cap="none">
+                <a:solidFill>
+                  <a:schemeClr val="dk2"/>
+                </a:solidFill>
+                <a:latin typeface="Roboto"/>
+                <a:ea typeface="Roboto"/>
+                <a:cs typeface="Roboto"/>
+                <a:sym typeface="Roboto"/>
+              </a:defRPr>
+            </a:lvl5pPr>
+            <a:lvl6pPr marL="2743200" marR="0" lvl="5" indent="-298450" algn="l" rtl="0">
+              <a:lnSpc>
+                <a:spcPct val="115000"/>
+              </a:lnSpc>
+              <a:spcBef>
+                <a:spcPts val="1600"/>
+              </a:spcBef>
+              <a:spcAft>
+                <a:spcPts val="0"/>
+              </a:spcAft>
+              <a:buClr>
+                <a:schemeClr val="dk2"/>
+              </a:buClr>
+              <a:buSzPts val="1100"/>
+              <a:buFont typeface="Roboto"/>
+              <a:buChar char="■"/>
+              <a:defRPr sz="1100" b="0" i="0" u="none" strike="noStrike" cap="none">
+                <a:solidFill>
+                  <a:schemeClr val="dk2"/>
+                </a:solidFill>
+                <a:latin typeface="Roboto"/>
+                <a:ea typeface="Roboto"/>
+                <a:cs typeface="Roboto"/>
+                <a:sym typeface="Roboto"/>
+              </a:defRPr>
+            </a:lvl6pPr>
+            <a:lvl7pPr marL="3200400" marR="0" lvl="6" indent="-298450" algn="l" rtl="0">
+              <a:lnSpc>
+                <a:spcPct val="115000"/>
+              </a:lnSpc>
+              <a:spcBef>
+                <a:spcPts val="1600"/>
+              </a:spcBef>
+              <a:spcAft>
+                <a:spcPts val="0"/>
+              </a:spcAft>
+              <a:buClr>
+                <a:schemeClr val="dk2"/>
+              </a:buClr>
+              <a:buSzPts val="1100"/>
+              <a:buFont typeface="Roboto"/>
+              <a:buChar char="●"/>
+              <a:defRPr sz="1100" b="0" i="0" u="none" strike="noStrike" cap="none">
+                <a:solidFill>
+                  <a:schemeClr val="dk2"/>
+                </a:solidFill>
+                <a:latin typeface="Roboto"/>
+                <a:ea typeface="Roboto"/>
+                <a:cs typeface="Roboto"/>
+                <a:sym typeface="Roboto"/>
+              </a:defRPr>
+            </a:lvl7pPr>
+            <a:lvl8pPr marL="3657600" marR="0" lvl="7" indent="-298450" algn="l" rtl="0">
+              <a:lnSpc>
+                <a:spcPct val="115000"/>
+              </a:lnSpc>
+              <a:spcBef>
+                <a:spcPts val="1600"/>
+              </a:spcBef>
+              <a:spcAft>
+                <a:spcPts val="0"/>
+              </a:spcAft>
+              <a:buClr>
+                <a:schemeClr val="dk2"/>
+              </a:buClr>
+              <a:buSzPts val="1100"/>
+              <a:buFont typeface="Roboto"/>
+              <a:buChar char="○"/>
+              <a:defRPr sz="1100" b="0" i="0" u="none" strike="noStrike" cap="none">
+                <a:solidFill>
+                  <a:schemeClr val="dk2"/>
+                </a:solidFill>
+                <a:latin typeface="Roboto"/>
+                <a:ea typeface="Roboto"/>
+                <a:cs typeface="Roboto"/>
+                <a:sym typeface="Roboto"/>
+              </a:defRPr>
+            </a:lvl8pPr>
+            <a:lvl9pPr marL="4114800" marR="0" lvl="8" indent="-298450" algn="l" rtl="0">
+              <a:lnSpc>
+                <a:spcPct val="115000"/>
+              </a:lnSpc>
+              <a:spcBef>
+                <a:spcPts val="1600"/>
+              </a:spcBef>
+              <a:spcAft>
+                <a:spcPts val="1600"/>
+              </a:spcAft>
+              <a:buClr>
+                <a:schemeClr val="dk2"/>
+              </a:buClr>
+              <a:buSzPts val="1100"/>
+              <a:buFont typeface="Roboto"/>
+              <a:buChar char="■"/>
+              <a:defRPr sz="1100" b="0" i="0" u="none" strike="noStrike" cap="none">
+                <a:solidFill>
+                  <a:schemeClr val="dk2"/>
+                </a:solidFill>
+                <a:latin typeface="Roboto"/>
+                <a:ea typeface="Roboto"/>
+                <a:cs typeface="Roboto"/>
+                <a:sym typeface="Roboto"/>
+              </a:defRPr>
+            </a:lvl9pPr>
+          </a:lstStyle>
+          <a:p>
+            <a:pPr marL="0" indent="0">
+              <a:spcAft>
+                <a:spcPts val="1600"/>
+              </a:spcAft>
+              <a:buNone/>
+            </a:pPr>
+            <a:r>
+              <a:rPr lang="en-US" sz="2800" dirty="0"/>
+              <a:t>After completing the Quiz </a:t>
+            </a:r>
+          </a:p>
+          <a:p>
+            <a:pPr marL="342900" indent="-342900">
+              <a:spcAft>
+                <a:spcPts val="1600"/>
+              </a:spcAft>
+            </a:pPr>
+            <a:r>
+              <a:rPr lang="en-US" sz="2400" dirty="0"/>
+              <a:t>Clone/Pull Unit4 – git hub classroom repo for class activities</a:t>
+            </a:r>
+            <a:endParaRPr lang="en-US" sz="2400" dirty="0">
+              <a:solidFill>
+                <a:schemeClr val="tx1"/>
+              </a:solidFill>
+            </a:endParaRPr>
+          </a:p>
+        </p:txBody>
+      </p:sp>
+    </p:spTree>
+  </p:cSld>
+  <p:clrMapOvr>
+    <a:masterClrMapping/>
+  </p:clrMapOvr>
+</p:sld>
+</file>
+
+<file path=ppt/slides/slide10.xml><?xml version="1.0" encoding="utf-8"?>
+<p:sld xmlns:a="http://schemas.openxmlformats.org/drawingml/2006/main" xmlns:r="http://schemas.openxmlformats.org/officeDocument/2006/relationships" xmlns:p="http://schemas.openxmlformats.org/presentationml/2006/main" show="0">
+  <p:cSld>
+    <p:spTree>
+      <p:nvGrpSpPr>
+        <p:cNvPr id="1" name="Shape 323"/>
+        <p:cNvGrpSpPr/>
+        <p:nvPr/>
+      </p:nvGrpSpPr>
+      <p:grpSpPr>
+        <a:xfrm>
+          <a:off x="0" y="0"/>
+          <a:ext cx="0" cy="0"/>
+          <a:chOff x="0" y="0"/>
+          <a:chExt cx="0" cy="0"/>
+        </a:xfrm>
+      </p:grpSpPr>
+      <p:sp>
+        <p:nvSpPr>
+          <p:cNvPr id="324" name="Google Shape;324;p47"/>
+          <p:cNvSpPr txBox="1">
+            <a:spLocks noGrp="1"/>
+          </p:cNvSpPr>
+          <p:nvPr>
+            <p:ph type="title"/>
+          </p:nvPr>
+        </p:nvSpPr>
+        <p:spPr>
+          <a:xfrm>
+            <a:off x="226208" y="1"/>
+            <a:ext cx="8520600" cy="464980"/>
+          </a:xfrm>
+          <a:prstGeom prst="rect">
+            <a:avLst/>
+          </a:prstGeom>
+        </p:spPr>
+        <p:txBody>
+          <a:bodyPr spcFirstLastPara="1" wrap="square" lIns="91425" tIns="91425" rIns="91425" bIns="91425" anchor="t" anchorCtr="0">
+            <a:noAutofit/>
+          </a:bodyPr>
+          <a:lstStyle/>
+          <a:p>
+            <a:pPr marL="0" lvl="0" indent="0" algn="ctr" rtl="0">
+              <a:spcBef>
+                <a:spcPts val="0"/>
+              </a:spcBef>
+              <a:spcAft>
+                <a:spcPts val="0"/>
+              </a:spcAft>
+              <a:buNone/>
+            </a:pPr>
+            <a:r>
+              <a:rPr lang="en-US" dirty="0"/>
+              <a:t>Use </a:t>
+            </a:r>
+            <a:r>
+              <a:rPr lang="en-US" sz="2400" dirty="0"/>
+              <a:t>Assigned</a:t>
+            </a:r>
+            <a:r>
+              <a:rPr lang="en-US" dirty="0"/>
+              <a:t> Seat</a:t>
+            </a:r>
+            <a:endParaRPr dirty="0"/>
+          </a:p>
+        </p:txBody>
+      </p:sp>
+      <p:sp>
+        <p:nvSpPr>
+          <p:cNvPr id="326" name="Google Shape;326;p47"/>
+          <p:cNvSpPr txBox="1">
+            <a:spLocks noGrp="1"/>
+          </p:cNvSpPr>
+          <p:nvPr>
+            <p:ph type="sldNum" idx="12"/>
+          </p:nvPr>
+        </p:nvSpPr>
+        <p:spPr>
+          <a:xfrm>
+            <a:off x="8472458" y="4663217"/>
+            <a:ext cx="548700" cy="393600"/>
+          </a:xfrm>
+          <a:prstGeom prst="rect">
+            <a:avLst/>
+          </a:prstGeom>
+        </p:spPr>
+        <p:txBody>
+          <a:bodyPr spcFirstLastPara="1" wrap="square" lIns="91425" tIns="91425" rIns="91425" bIns="91425" anchor="ctr" anchorCtr="0">
+            <a:noAutofit/>
+          </a:bodyPr>
+          <a:lstStyle/>
+          <a:p>
+            <a:pPr marL="0" lvl="0" indent="0" algn="r" rtl="0">
+              <a:spcBef>
+                <a:spcPts val="0"/>
+              </a:spcBef>
+              <a:spcAft>
+                <a:spcPts val="0"/>
+              </a:spcAft>
+              <a:buNone/>
+            </a:pPr>
+            <a:fld id="{00000000-1234-1234-1234-123412341234}" type="slidenum">
+              <a:rPr lang="en"/>
+              <a:t>10</a:t>
+            </a:fld>
+            <a:endParaRPr/>
+          </a:p>
+        </p:txBody>
+      </p:sp>
+      <p:pic>
+        <p:nvPicPr>
+          <p:cNvPr id="6" name="Picture 5">
+            <a:extLst>
+              <a:ext uri="{FF2B5EF4-FFF2-40B4-BE49-F238E27FC236}">
+                <a16:creationId xmlns:a16="http://schemas.microsoft.com/office/drawing/2014/main" id="{DED32793-7C09-E3A3-94E5-B5D46727A1D0}"/>
+              </a:ext>
+            </a:extLst>
+          </p:cNvPr>
+          <p:cNvPicPr>
+            <a:picLocks noChangeAspect="1"/>
+          </p:cNvPicPr>
+          <p:nvPr/>
+        </p:nvPicPr>
+        <p:blipFill>
+          <a:blip r:embed="rId3"/>
+          <a:stretch>
+            <a:fillRect/>
+          </a:stretch>
+        </p:blipFill>
+        <p:spPr>
+          <a:xfrm>
+            <a:off x="-1" y="551663"/>
+            <a:ext cx="9144001" cy="4591837"/>
+          </a:xfrm>
+          <a:prstGeom prst="rect">
+            <a:avLst/>
+          </a:prstGeom>
+        </p:spPr>
+      </p:pic>
+    </p:spTree>
+    <p:extLst>
+      <p:ext uri="{BB962C8B-B14F-4D97-AF65-F5344CB8AC3E}">
+        <p14:creationId xmlns:p14="http://schemas.microsoft.com/office/powerpoint/2010/main" val="4226348449"/>
+      </p:ext>
+    </p:extLst>
+  </p:cSld>
+  <p:clrMapOvr>
+    <a:masterClrMapping/>
+  </p:clrMapOvr>
+</p:sld>
+</file>
+
+<file path=ppt/slides/slide11.xml><?xml version="1.0" encoding="utf-8"?>
+<p:sld xmlns:a="http://schemas.openxmlformats.org/drawingml/2006/main" xmlns:r="http://schemas.openxmlformats.org/officeDocument/2006/relationships" xmlns:p="http://schemas.openxmlformats.org/presentationml/2006/main" show="0">
+  <p:cSld>
+    <p:spTree>
+      <p:nvGrpSpPr>
+        <p:cNvPr id="1" name="Shape 323"/>
+        <p:cNvGrpSpPr/>
+        <p:nvPr/>
+      </p:nvGrpSpPr>
+      <p:grpSpPr>
+        <a:xfrm>
+          <a:off x="0" y="0"/>
+          <a:ext cx="0" cy="0"/>
+          <a:chOff x="0" y="0"/>
+          <a:chExt cx="0" cy="0"/>
+        </a:xfrm>
+      </p:grpSpPr>
+      <p:sp>
+        <p:nvSpPr>
+          <p:cNvPr id="324" name="Google Shape;324;p47"/>
+          <p:cNvSpPr txBox="1">
+            <a:spLocks noGrp="1"/>
+          </p:cNvSpPr>
+          <p:nvPr>
+            <p:ph type="title"/>
+          </p:nvPr>
+        </p:nvSpPr>
+        <p:spPr>
+          <a:xfrm>
+            <a:off x="226208" y="1"/>
+            <a:ext cx="8520600" cy="464980"/>
+          </a:xfrm>
+          <a:prstGeom prst="rect">
+            <a:avLst/>
+          </a:prstGeom>
+        </p:spPr>
+        <p:txBody>
+          <a:bodyPr spcFirstLastPara="1" wrap="square" lIns="91425" tIns="91425" rIns="91425" bIns="91425" anchor="t" anchorCtr="0">
+            <a:noAutofit/>
+          </a:bodyPr>
+          <a:lstStyle/>
+          <a:p>
+            <a:pPr marL="0" lvl="0" indent="0" algn="ctr" rtl="0">
+              <a:spcBef>
+                <a:spcPts val="0"/>
+              </a:spcBef>
+              <a:spcAft>
+                <a:spcPts val="0"/>
+              </a:spcAft>
+              <a:buNone/>
+            </a:pPr>
+            <a:r>
+              <a:rPr lang="en-US" dirty="0"/>
+              <a:t>Use </a:t>
+            </a:r>
+            <a:r>
+              <a:rPr lang="en-US" sz="2400" dirty="0"/>
+              <a:t>Assigned</a:t>
+            </a:r>
+            <a:r>
+              <a:rPr lang="en-US" dirty="0"/>
+              <a:t> Seat</a:t>
+            </a:r>
+            <a:endParaRPr dirty="0"/>
+          </a:p>
+        </p:txBody>
+      </p:sp>
+      <p:sp>
+        <p:nvSpPr>
+          <p:cNvPr id="326" name="Google Shape;326;p47"/>
+          <p:cNvSpPr txBox="1">
+            <a:spLocks noGrp="1"/>
+          </p:cNvSpPr>
+          <p:nvPr>
+            <p:ph type="sldNum" idx="12"/>
+          </p:nvPr>
+        </p:nvSpPr>
+        <p:spPr>
+          <a:xfrm>
+            <a:off x="8472458" y="4663217"/>
+            <a:ext cx="548700" cy="393600"/>
+          </a:xfrm>
+          <a:prstGeom prst="rect">
+            <a:avLst/>
+          </a:prstGeom>
+        </p:spPr>
+        <p:txBody>
+          <a:bodyPr spcFirstLastPara="1" wrap="square" lIns="91425" tIns="91425" rIns="91425" bIns="91425" anchor="ctr" anchorCtr="0">
+            <a:noAutofit/>
+          </a:bodyPr>
+          <a:lstStyle/>
+          <a:p>
+            <a:pPr marL="0" lvl="0" indent="0" algn="r" rtl="0">
+              <a:spcBef>
+                <a:spcPts val="0"/>
+              </a:spcBef>
+              <a:spcAft>
+                <a:spcPts val="0"/>
+              </a:spcAft>
+              <a:buNone/>
+            </a:pPr>
+            <a:fld id="{00000000-1234-1234-1234-123412341234}" type="slidenum">
+              <a:rPr lang="en"/>
+              <a:t>11</a:t>
+            </a:fld>
+            <a:endParaRPr/>
+          </a:p>
+        </p:txBody>
+      </p:sp>
+      <p:pic>
+        <p:nvPicPr>
+          <p:cNvPr id="3" name="Picture 2">
+            <a:extLst>
+              <a:ext uri="{FF2B5EF4-FFF2-40B4-BE49-F238E27FC236}">
+                <a16:creationId xmlns:a16="http://schemas.microsoft.com/office/drawing/2014/main" id="{92DE4AAC-70FE-A114-5258-F5B22EDDED45}"/>
+              </a:ext>
+            </a:extLst>
+          </p:cNvPr>
+          <p:cNvPicPr>
+            <a:picLocks noChangeAspect="1"/>
+          </p:cNvPicPr>
+          <p:nvPr/>
+        </p:nvPicPr>
+        <p:blipFill>
+          <a:blip r:embed="rId3"/>
+          <a:stretch>
+            <a:fillRect/>
+          </a:stretch>
+        </p:blipFill>
+        <p:spPr>
+          <a:xfrm>
+            <a:off x="0" y="716280"/>
+            <a:ext cx="9144000" cy="4427218"/>
+          </a:xfrm>
+          <a:prstGeom prst="rect">
+            <a:avLst/>
+          </a:prstGeom>
+        </p:spPr>
+      </p:pic>
+    </p:spTree>
+    <p:extLst>
+      <p:ext uri="{BB962C8B-B14F-4D97-AF65-F5344CB8AC3E}">
+        <p14:creationId xmlns:p14="http://schemas.microsoft.com/office/powerpoint/2010/main" val="1976403023"/>
+      </p:ext>
+    </p:extLst>
+  </p:cSld>
+  <p:clrMapOvr>
+    <a:masterClrMapping/>
+  </p:clrMapOvr>
+</p:sld>
+</file>
+
+<file path=ppt/slides/slide12.xml><?xml version="1.0" encoding="utf-8"?>
+<p:sld xmlns:a="http://schemas.openxmlformats.org/drawingml/2006/main" xmlns:r="http://schemas.openxmlformats.org/officeDocument/2006/relationships" xmlns:p="http://schemas.openxmlformats.org/presentationml/2006/main" show="0">
+  <p:cSld>
+    <p:spTree>
+      <p:nvGrpSpPr>
+        <p:cNvPr id="1" name="Shape 323"/>
+        <p:cNvGrpSpPr/>
+        <p:nvPr/>
+      </p:nvGrpSpPr>
+      <p:grpSpPr>
+        <a:xfrm>
+          <a:off x="0" y="0"/>
+          <a:ext cx="0" cy="0"/>
+          <a:chOff x="0" y="0"/>
+          <a:chExt cx="0" cy="0"/>
+        </a:xfrm>
+      </p:grpSpPr>
+      <p:sp>
+        <p:nvSpPr>
+          <p:cNvPr id="324" name="Google Shape;324;p47"/>
+          <p:cNvSpPr txBox="1">
+            <a:spLocks noGrp="1"/>
+          </p:cNvSpPr>
+          <p:nvPr>
+            <p:ph type="title"/>
+          </p:nvPr>
+        </p:nvSpPr>
+        <p:spPr>
+          <a:xfrm>
+            <a:off x="226208" y="1"/>
+            <a:ext cx="8520600" cy="464980"/>
+          </a:xfrm>
+          <a:prstGeom prst="rect">
+            <a:avLst/>
+          </a:prstGeom>
+        </p:spPr>
+        <p:txBody>
+          <a:bodyPr spcFirstLastPara="1" wrap="square" lIns="91425" tIns="91425" rIns="91425" bIns="91425" anchor="t" anchorCtr="0">
+            <a:noAutofit/>
+          </a:bodyPr>
+          <a:lstStyle/>
+          <a:p>
+            <a:pPr marL="0" lvl="0" indent="0" algn="ctr" rtl="0">
+              <a:spcBef>
+                <a:spcPts val="0"/>
+              </a:spcBef>
+              <a:spcAft>
+                <a:spcPts val="0"/>
+              </a:spcAft>
+              <a:buNone/>
+            </a:pPr>
+            <a:r>
+              <a:rPr lang="en-US" dirty="0"/>
+              <a:t>Use </a:t>
+            </a:r>
+            <a:r>
+              <a:rPr lang="en-US" sz="2400" dirty="0"/>
+              <a:t>Assigned</a:t>
+            </a:r>
+            <a:r>
+              <a:rPr lang="en-US" dirty="0"/>
+              <a:t> Seat</a:t>
+            </a:r>
+            <a:endParaRPr dirty="0"/>
+          </a:p>
+        </p:txBody>
+      </p:sp>
+      <p:sp>
+        <p:nvSpPr>
+          <p:cNvPr id="326" name="Google Shape;326;p47"/>
+          <p:cNvSpPr txBox="1">
+            <a:spLocks noGrp="1"/>
+          </p:cNvSpPr>
+          <p:nvPr>
+            <p:ph type="sldNum" idx="12"/>
+          </p:nvPr>
+        </p:nvSpPr>
+        <p:spPr>
+          <a:xfrm>
+            <a:off x="8472458" y="4663217"/>
+            <a:ext cx="548700" cy="393600"/>
+          </a:xfrm>
+          <a:prstGeom prst="rect">
+            <a:avLst/>
+          </a:prstGeom>
+        </p:spPr>
+        <p:txBody>
+          <a:bodyPr spcFirstLastPara="1" wrap="square" lIns="91425" tIns="91425" rIns="91425" bIns="91425" anchor="ctr" anchorCtr="0">
+            <a:noAutofit/>
+          </a:bodyPr>
+          <a:lstStyle/>
+          <a:p>
+            <a:pPr marL="0" lvl="0" indent="0" algn="r" rtl="0">
+              <a:spcBef>
+                <a:spcPts val="0"/>
+              </a:spcBef>
+              <a:spcAft>
+                <a:spcPts val="0"/>
+              </a:spcAft>
+              <a:buNone/>
+            </a:pPr>
+            <a:fld id="{00000000-1234-1234-1234-123412341234}" type="slidenum">
+              <a:rPr lang="en"/>
+              <a:t>12</a:t>
+            </a:fld>
+            <a:endParaRPr/>
+          </a:p>
+        </p:txBody>
+      </p:sp>
+      <p:pic>
+        <p:nvPicPr>
+          <p:cNvPr id="4" name="Picture 3">
+            <a:extLst>
+              <a:ext uri="{FF2B5EF4-FFF2-40B4-BE49-F238E27FC236}">
+                <a16:creationId xmlns:a16="http://schemas.microsoft.com/office/drawing/2014/main" id="{DCD752B9-EFAE-AFC1-7D39-6763B89DE8D3}"/>
+              </a:ext>
+            </a:extLst>
+          </p:cNvPr>
+          <p:cNvPicPr>
+            <a:picLocks noChangeAspect="1"/>
+          </p:cNvPicPr>
+          <p:nvPr/>
+        </p:nvPicPr>
+        <p:blipFill>
+          <a:blip r:embed="rId3"/>
+          <a:stretch>
+            <a:fillRect/>
+          </a:stretch>
+        </p:blipFill>
+        <p:spPr>
+          <a:xfrm>
+            <a:off x="0" y="652130"/>
+            <a:ext cx="9144000" cy="4491369"/>
+          </a:xfrm>
+          <a:prstGeom prst="rect">
+            <a:avLst/>
+          </a:prstGeom>
+        </p:spPr>
+      </p:pic>
+    </p:spTree>
+    <p:extLst>
+      <p:ext uri="{BB962C8B-B14F-4D97-AF65-F5344CB8AC3E}">
+        <p14:creationId xmlns:p14="http://schemas.microsoft.com/office/powerpoint/2010/main" val="3365057756"/>
+      </p:ext>
+    </p:extLst>
+  </p:cSld>
+  <p:clrMapOvr>
+    <a:masterClrMapping/>
+  </p:clrMapOvr>
+</p:sld>
+</file>
+
+<file path=ppt/slides/slide2.xml><?xml version="1.0" encoding="utf-8"?>
+<p:sld xmlns:a="http://schemas.openxmlformats.org/drawingml/2006/main" xmlns:r="http://schemas.openxmlformats.org/officeDocument/2006/relationships" xmlns:p="http://schemas.openxmlformats.org/presentationml/2006/main" show="0">
+  <p:cSld>
+    <p:spTree>
+      <p:nvGrpSpPr>
         <p:cNvPr id="1" name="Shape 323">
           <a:extLst>
             <a:ext uri="{FF2B5EF4-FFF2-40B4-BE49-F238E27FC236}">
@@ -6704,7 +7737,7 @@
             </a:pPr>
             <a:fld id="{00000000-1234-1234-1234-123412341234}" type="slidenum">
               <a:rPr lang="en"/>
-              <a:t>1</a:t>
+              <a:t>2</a:t>
             </a:fld>
             <a:endParaRPr/>
           </a:p>
@@ -7439,1040 +8472,6 @@
         <p14:creationId xmlns:p14="http://schemas.microsoft.com/office/powerpoint/2010/main" val="674272117"/>
       </p:ext>
     </p:extLst>
-  </p:cSld>
-  <p:clrMapOvr>
-    <a:masterClrMapping/>
-  </p:clrMapOvr>
-</p:sld>
-</file>
-
-<file path=ppt/slides/slide10.xml><?xml version="1.0" encoding="utf-8"?>
-<p:sld xmlns:a="http://schemas.openxmlformats.org/drawingml/2006/main" xmlns:r="http://schemas.openxmlformats.org/officeDocument/2006/relationships" xmlns:p="http://schemas.openxmlformats.org/presentationml/2006/main" show="0">
-  <p:cSld>
-    <p:spTree>
-      <p:nvGrpSpPr>
-        <p:cNvPr id="1" name="Shape 323"/>
-        <p:cNvGrpSpPr/>
-        <p:nvPr/>
-      </p:nvGrpSpPr>
-      <p:grpSpPr>
-        <a:xfrm>
-          <a:off x="0" y="0"/>
-          <a:ext cx="0" cy="0"/>
-          <a:chOff x="0" y="0"/>
-          <a:chExt cx="0" cy="0"/>
-        </a:xfrm>
-      </p:grpSpPr>
-      <p:sp>
-        <p:nvSpPr>
-          <p:cNvPr id="324" name="Google Shape;324;p47"/>
-          <p:cNvSpPr txBox="1">
-            <a:spLocks noGrp="1"/>
-          </p:cNvSpPr>
-          <p:nvPr>
-            <p:ph type="title"/>
-          </p:nvPr>
-        </p:nvSpPr>
-        <p:spPr>
-          <a:xfrm>
-            <a:off x="226208" y="1"/>
-            <a:ext cx="8520600" cy="464980"/>
-          </a:xfrm>
-          <a:prstGeom prst="rect">
-            <a:avLst/>
-          </a:prstGeom>
-        </p:spPr>
-        <p:txBody>
-          <a:bodyPr spcFirstLastPara="1" wrap="square" lIns="91425" tIns="91425" rIns="91425" bIns="91425" anchor="t" anchorCtr="0">
-            <a:noAutofit/>
-          </a:bodyPr>
-          <a:lstStyle/>
-          <a:p>
-            <a:pPr marL="0" lvl="0" indent="0" algn="ctr" rtl="0">
-              <a:spcBef>
-                <a:spcPts val="0"/>
-              </a:spcBef>
-              <a:spcAft>
-                <a:spcPts val="0"/>
-              </a:spcAft>
-              <a:buNone/>
-            </a:pPr>
-            <a:r>
-              <a:rPr lang="en-US" dirty="0"/>
-              <a:t>Use </a:t>
-            </a:r>
-            <a:r>
-              <a:rPr lang="en-US" sz="2400" dirty="0"/>
-              <a:t>Assigned</a:t>
-            </a:r>
-            <a:r>
-              <a:rPr lang="en-US" dirty="0"/>
-              <a:t> Seat</a:t>
-            </a:r>
-            <a:endParaRPr dirty="0"/>
-          </a:p>
-        </p:txBody>
-      </p:sp>
-      <p:sp>
-        <p:nvSpPr>
-          <p:cNvPr id="326" name="Google Shape;326;p47"/>
-          <p:cNvSpPr txBox="1">
-            <a:spLocks noGrp="1"/>
-          </p:cNvSpPr>
-          <p:nvPr>
-            <p:ph type="sldNum" idx="12"/>
-          </p:nvPr>
-        </p:nvSpPr>
-        <p:spPr>
-          <a:xfrm>
-            <a:off x="8472458" y="4663217"/>
-            <a:ext cx="548700" cy="393600"/>
-          </a:xfrm>
-          <a:prstGeom prst="rect">
-            <a:avLst/>
-          </a:prstGeom>
-        </p:spPr>
-        <p:txBody>
-          <a:bodyPr spcFirstLastPara="1" wrap="square" lIns="91425" tIns="91425" rIns="91425" bIns="91425" anchor="ctr" anchorCtr="0">
-            <a:noAutofit/>
-          </a:bodyPr>
-          <a:lstStyle/>
-          <a:p>
-            <a:pPr marL="0" lvl="0" indent="0" algn="r" rtl="0">
-              <a:spcBef>
-                <a:spcPts val="0"/>
-              </a:spcBef>
-              <a:spcAft>
-                <a:spcPts val="0"/>
-              </a:spcAft>
-              <a:buNone/>
-            </a:pPr>
-            <a:fld id="{00000000-1234-1234-1234-123412341234}" type="slidenum">
-              <a:rPr lang="en"/>
-              <a:t>10</a:t>
-            </a:fld>
-            <a:endParaRPr/>
-          </a:p>
-        </p:txBody>
-      </p:sp>
-      <p:pic>
-        <p:nvPicPr>
-          <p:cNvPr id="6" name="Picture 5">
-            <a:extLst>
-              <a:ext uri="{FF2B5EF4-FFF2-40B4-BE49-F238E27FC236}">
-                <a16:creationId xmlns:a16="http://schemas.microsoft.com/office/drawing/2014/main" id="{DED32793-7C09-E3A3-94E5-B5D46727A1D0}"/>
-              </a:ext>
-            </a:extLst>
-          </p:cNvPr>
-          <p:cNvPicPr>
-            <a:picLocks noChangeAspect="1"/>
-          </p:cNvPicPr>
-          <p:nvPr/>
-        </p:nvPicPr>
-        <p:blipFill>
-          <a:blip r:embed="rId3"/>
-          <a:stretch>
-            <a:fillRect/>
-          </a:stretch>
-        </p:blipFill>
-        <p:spPr>
-          <a:xfrm>
-            <a:off x="-1" y="551663"/>
-            <a:ext cx="9144001" cy="4591837"/>
-          </a:xfrm>
-          <a:prstGeom prst="rect">
-            <a:avLst/>
-          </a:prstGeom>
-        </p:spPr>
-      </p:pic>
-    </p:spTree>
-    <p:extLst>
-      <p:ext uri="{BB962C8B-B14F-4D97-AF65-F5344CB8AC3E}">
-        <p14:creationId xmlns:p14="http://schemas.microsoft.com/office/powerpoint/2010/main" val="4226348449"/>
-      </p:ext>
-    </p:extLst>
-  </p:cSld>
-  <p:clrMapOvr>
-    <a:masterClrMapping/>
-  </p:clrMapOvr>
-</p:sld>
-</file>
-
-<file path=ppt/slides/slide11.xml><?xml version="1.0" encoding="utf-8"?>
-<p:sld xmlns:a="http://schemas.openxmlformats.org/drawingml/2006/main" xmlns:r="http://schemas.openxmlformats.org/officeDocument/2006/relationships" xmlns:p="http://schemas.openxmlformats.org/presentationml/2006/main" show="0">
-  <p:cSld>
-    <p:spTree>
-      <p:nvGrpSpPr>
-        <p:cNvPr id="1" name="Shape 323"/>
-        <p:cNvGrpSpPr/>
-        <p:nvPr/>
-      </p:nvGrpSpPr>
-      <p:grpSpPr>
-        <a:xfrm>
-          <a:off x="0" y="0"/>
-          <a:ext cx="0" cy="0"/>
-          <a:chOff x="0" y="0"/>
-          <a:chExt cx="0" cy="0"/>
-        </a:xfrm>
-      </p:grpSpPr>
-      <p:sp>
-        <p:nvSpPr>
-          <p:cNvPr id="324" name="Google Shape;324;p47"/>
-          <p:cNvSpPr txBox="1">
-            <a:spLocks noGrp="1"/>
-          </p:cNvSpPr>
-          <p:nvPr>
-            <p:ph type="title"/>
-          </p:nvPr>
-        </p:nvSpPr>
-        <p:spPr>
-          <a:xfrm>
-            <a:off x="226208" y="1"/>
-            <a:ext cx="8520600" cy="464980"/>
-          </a:xfrm>
-          <a:prstGeom prst="rect">
-            <a:avLst/>
-          </a:prstGeom>
-        </p:spPr>
-        <p:txBody>
-          <a:bodyPr spcFirstLastPara="1" wrap="square" lIns="91425" tIns="91425" rIns="91425" bIns="91425" anchor="t" anchorCtr="0">
-            <a:noAutofit/>
-          </a:bodyPr>
-          <a:lstStyle/>
-          <a:p>
-            <a:pPr marL="0" lvl="0" indent="0" algn="ctr" rtl="0">
-              <a:spcBef>
-                <a:spcPts val="0"/>
-              </a:spcBef>
-              <a:spcAft>
-                <a:spcPts val="0"/>
-              </a:spcAft>
-              <a:buNone/>
-            </a:pPr>
-            <a:r>
-              <a:rPr lang="en-US" dirty="0"/>
-              <a:t>Use </a:t>
-            </a:r>
-            <a:r>
-              <a:rPr lang="en-US" sz="2400" dirty="0"/>
-              <a:t>Assigned</a:t>
-            </a:r>
-            <a:r>
-              <a:rPr lang="en-US" dirty="0"/>
-              <a:t> Seat</a:t>
-            </a:r>
-            <a:endParaRPr dirty="0"/>
-          </a:p>
-        </p:txBody>
-      </p:sp>
-      <p:sp>
-        <p:nvSpPr>
-          <p:cNvPr id="326" name="Google Shape;326;p47"/>
-          <p:cNvSpPr txBox="1">
-            <a:spLocks noGrp="1"/>
-          </p:cNvSpPr>
-          <p:nvPr>
-            <p:ph type="sldNum" idx="12"/>
-          </p:nvPr>
-        </p:nvSpPr>
-        <p:spPr>
-          <a:xfrm>
-            <a:off x="8472458" y="4663217"/>
-            <a:ext cx="548700" cy="393600"/>
-          </a:xfrm>
-          <a:prstGeom prst="rect">
-            <a:avLst/>
-          </a:prstGeom>
-        </p:spPr>
-        <p:txBody>
-          <a:bodyPr spcFirstLastPara="1" wrap="square" lIns="91425" tIns="91425" rIns="91425" bIns="91425" anchor="ctr" anchorCtr="0">
-            <a:noAutofit/>
-          </a:bodyPr>
-          <a:lstStyle/>
-          <a:p>
-            <a:pPr marL="0" lvl="0" indent="0" algn="r" rtl="0">
-              <a:spcBef>
-                <a:spcPts val="0"/>
-              </a:spcBef>
-              <a:spcAft>
-                <a:spcPts val="0"/>
-              </a:spcAft>
-              <a:buNone/>
-            </a:pPr>
-            <a:fld id="{00000000-1234-1234-1234-123412341234}" type="slidenum">
-              <a:rPr lang="en"/>
-              <a:t>11</a:t>
-            </a:fld>
-            <a:endParaRPr/>
-          </a:p>
-        </p:txBody>
-      </p:sp>
-      <p:pic>
-        <p:nvPicPr>
-          <p:cNvPr id="3" name="Picture 2">
-            <a:extLst>
-              <a:ext uri="{FF2B5EF4-FFF2-40B4-BE49-F238E27FC236}">
-                <a16:creationId xmlns:a16="http://schemas.microsoft.com/office/drawing/2014/main" id="{92DE4AAC-70FE-A114-5258-F5B22EDDED45}"/>
-              </a:ext>
-            </a:extLst>
-          </p:cNvPr>
-          <p:cNvPicPr>
-            <a:picLocks noChangeAspect="1"/>
-          </p:cNvPicPr>
-          <p:nvPr/>
-        </p:nvPicPr>
-        <p:blipFill>
-          <a:blip r:embed="rId3"/>
-          <a:stretch>
-            <a:fillRect/>
-          </a:stretch>
-        </p:blipFill>
-        <p:spPr>
-          <a:xfrm>
-            <a:off x="0" y="716280"/>
-            <a:ext cx="9144000" cy="4427218"/>
-          </a:xfrm>
-          <a:prstGeom prst="rect">
-            <a:avLst/>
-          </a:prstGeom>
-        </p:spPr>
-      </p:pic>
-    </p:spTree>
-    <p:extLst>
-      <p:ext uri="{BB962C8B-B14F-4D97-AF65-F5344CB8AC3E}">
-        <p14:creationId xmlns:p14="http://schemas.microsoft.com/office/powerpoint/2010/main" val="1976403023"/>
-      </p:ext>
-    </p:extLst>
-  </p:cSld>
-  <p:clrMapOvr>
-    <a:masterClrMapping/>
-  </p:clrMapOvr>
-</p:sld>
-</file>
-
-<file path=ppt/slides/slide12.xml><?xml version="1.0" encoding="utf-8"?>
-<p:sld xmlns:a="http://schemas.openxmlformats.org/drawingml/2006/main" xmlns:r="http://schemas.openxmlformats.org/officeDocument/2006/relationships" xmlns:p="http://schemas.openxmlformats.org/presentationml/2006/main" show="0">
-  <p:cSld>
-    <p:spTree>
-      <p:nvGrpSpPr>
-        <p:cNvPr id="1" name="Shape 323"/>
-        <p:cNvGrpSpPr/>
-        <p:nvPr/>
-      </p:nvGrpSpPr>
-      <p:grpSpPr>
-        <a:xfrm>
-          <a:off x="0" y="0"/>
-          <a:ext cx="0" cy="0"/>
-          <a:chOff x="0" y="0"/>
-          <a:chExt cx="0" cy="0"/>
-        </a:xfrm>
-      </p:grpSpPr>
-      <p:sp>
-        <p:nvSpPr>
-          <p:cNvPr id="324" name="Google Shape;324;p47"/>
-          <p:cNvSpPr txBox="1">
-            <a:spLocks noGrp="1"/>
-          </p:cNvSpPr>
-          <p:nvPr>
-            <p:ph type="title"/>
-          </p:nvPr>
-        </p:nvSpPr>
-        <p:spPr>
-          <a:xfrm>
-            <a:off x="226208" y="1"/>
-            <a:ext cx="8520600" cy="464980"/>
-          </a:xfrm>
-          <a:prstGeom prst="rect">
-            <a:avLst/>
-          </a:prstGeom>
-        </p:spPr>
-        <p:txBody>
-          <a:bodyPr spcFirstLastPara="1" wrap="square" lIns="91425" tIns="91425" rIns="91425" bIns="91425" anchor="t" anchorCtr="0">
-            <a:noAutofit/>
-          </a:bodyPr>
-          <a:lstStyle/>
-          <a:p>
-            <a:pPr marL="0" lvl="0" indent="0" algn="ctr" rtl="0">
-              <a:spcBef>
-                <a:spcPts val="0"/>
-              </a:spcBef>
-              <a:spcAft>
-                <a:spcPts val="0"/>
-              </a:spcAft>
-              <a:buNone/>
-            </a:pPr>
-            <a:r>
-              <a:rPr lang="en-US" dirty="0"/>
-              <a:t>Use </a:t>
-            </a:r>
-            <a:r>
-              <a:rPr lang="en-US" sz="2400" dirty="0"/>
-              <a:t>Assigned</a:t>
-            </a:r>
-            <a:r>
-              <a:rPr lang="en-US" dirty="0"/>
-              <a:t> Seat</a:t>
-            </a:r>
-            <a:endParaRPr dirty="0"/>
-          </a:p>
-        </p:txBody>
-      </p:sp>
-      <p:sp>
-        <p:nvSpPr>
-          <p:cNvPr id="326" name="Google Shape;326;p47"/>
-          <p:cNvSpPr txBox="1">
-            <a:spLocks noGrp="1"/>
-          </p:cNvSpPr>
-          <p:nvPr>
-            <p:ph type="sldNum" idx="12"/>
-          </p:nvPr>
-        </p:nvSpPr>
-        <p:spPr>
-          <a:xfrm>
-            <a:off x="8472458" y="4663217"/>
-            <a:ext cx="548700" cy="393600"/>
-          </a:xfrm>
-          <a:prstGeom prst="rect">
-            <a:avLst/>
-          </a:prstGeom>
-        </p:spPr>
-        <p:txBody>
-          <a:bodyPr spcFirstLastPara="1" wrap="square" lIns="91425" tIns="91425" rIns="91425" bIns="91425" anchor="ctr" anchorCtr="0">
-            <a:noAutofit/>
-          </a:bodyPr>
-          <a:lstStyle/>
-          <a:p>
-            <a:pPr marL="0" lvl="0" indent="0" algn="r" rtl="0">
-              <a:spcBef>
-                <a:spcPts val="0"/>
-              </a:spcBef>
-              <a:spcAft>
-                <a:spcPts val="0"/>
-              </a:spcAft>
-              <a:buNone/>
-            </a:pPr>
-            <a:fld id="{00000000-1234-1234-1234-123412341234}" type="slidenum">
-              <a:rPr lang="en"/>
-              <a:t>12</a:t>
-            </a:fld>
-            <a:endParaRPr/>
-          </a:p>
-        </p:txBody>
-      </p:sp>
-      <p:pic>
-        <p:nvPicPr>
-          <p:cNvPr id="4" name="Picture 3">
-            <a:extLst>
-              <a:ext uri="{FF2B5EF4-FFF2-40B4-BE49-F238E27FC236}">
-                <a16:creationId xmlns:a16="http://schemas.microsoft.com/office/drawing/2014/main" id="{DCD752B9-EFAE-AFC1-7D39-6763B89DE8D3}"/>
-              </a:ext>
-            </a:extLst>
-          </p:cNvPr>
-          <p:cNvPicPr>
-            <a:picLocks noChangeAspect="1"/>
-          </p:cNvPicPr>
-          <p:nvPr/>
-        </p:nvPicPr>
-        <p:blipFill>
-          <a:blip r:embed="rId3"/>
-          <a:stretch>
-            <a:fillRect/>
-          </a:stretch>
-        </p:blipFill>
-        <p:spPr>
-          <a:xfrm>
-            <a:off x="0" y="652130"/>
-            <a:ext cx="9144000" cy="4491369"/>
-          </a:xfrm>
-          <a:prstGeom prst="rect">
-            <a:avLst/>
-          </a:prstGeom>
-        </p:spPr>
-      </p:pic>
-    </p:spTree>
-    <p:extLst>
-      <p:ext uri="{BB962C8B-B14F-4D97-AF65-F5344CB8AC3E}">
-        <p14:creationId xmlns:p14="http://schemas.microsoft.com/office/powerpoint/2010/main" val="3365057756"/>
-      </p:ext>
-    </p:extLst>
-  </p:cSld>
-  <p:clrMapOvr>
-    <a:masterClrMapping/>
-  </p:clrMapOvr>
-</p:sld>
-</file>
-
-<file path=ppt/slides/slide2.xml><?xml version="1.0" encoding="utf-8"?>
-<p:sld xmlns:a="http://schemas.openxmlformats.org/drawingml/2006/main" xmlns:r="http://schemas.openxmlformats.org/officeDocument/2006/relationships" xmlns:p="http://schemas.openxmlformats.org/presentationml/2006/main" show="0">
-  <p:cSld>
-    <p:spTree>
-      <p:nvGrpSpPr>
-        <p:cNvPr id="1" name="Shape 323"/>
-        <p:cNvGrpSpPr/>
-        <p:nvPr/>
-      </p:nvGrpSpPr>
-      <p:grpSpPr>
-        <a:xfrm>
-          <a:off x="0" y="0"/>
-          <a:ext cx="0" cy="0"/>
-          <a:chOff x="0" y="0"/>
-          <a:chExt cx="0" cy="0"/>
-        </a:xfrm>
-      </p:grpSpPr>
-      <p:sp>
-        <p:nvSpPr>
-          <p:cNvPr id="324" name="Google Shape;324;p47"/>
-          <p:cNvSpPr txBox="1">
-            <a:spLocks noGrp="1"/>
-          </p:cNvSpPr>
-          <p:nvPr>
-            <p:ph type="title"/>
-          </p:nvPr>
-        </p:nvSpPr>
-        <p:spPr>
-          <a:xfrm>
-            <a:off x="305858" y="273819"/>
-            <a:ext cx="8520600" cy="623700"/>
-          </a:xfrm>
-          <a:prstGeom prst="rect">
-            <a:avLst/>
-          </a:prstGeom>
-        </p:spPr>
-        <p:txBody>
-          <a:bodyPr spcFirstLastPara="1" wrap="square" lIns="91425" tIns="91425" rIns="91425" bIns="91425" anchor="t" anchorCtr="0">
-            <a:noAutofit/>
-          </a:bodyPr>
-          <a:lstStyle/>
-          <a:p>
-            <a:pPr marL="0" lvl="0" indent="0" algn="ctr" rtl="0">
-              <a:spcBef>
-                <a:spcPts val="0"/>
-              </a:spcBef>
-              <a:spcAft>
-                <a:spcPts val="0"/>
-              </a:spcAft>
-              <a:buNone/>
-            </a:pPr>
-            <a:r>
-              <a:rPr lang="en-US" dirty="0"/>
-              <a:t>GCIS – Software Development and Problem Solving</a:t>
-            </a:r>
-            <a:endParaRPr dirty="0"/>
-          </a:p>
-        </p:txBody>
-      </p:sp>
-      <p:sp>
-        <p:nvSpPr>
-          <p:cNvPr id="325" name="Google Shape;325;p47"/>
-          <p:cNvSpPr txBox="1">
-            <a:spLocks noGrp="1"/>
-          </p:cNvSpPr>
-          <p:nvPr>
-            <p:ph type="body" idx="1"/>
-          </p:nvPr>
-        </p:nvSpPr>
-        <p:spPr>
-          <a:xfrm>
-            <a:off x="-5842" y="1721147"/>
-            <a:ext cx="9149842" cy="1226403"/>
-          </a:xfrm>
-          <a:prstGeom prst="rect">
-            <a:avLst/>
-          </a:prstGeom>
-        </p:spPr>
-        <p:txBody>
-          <a:bodyPr spcFirstLastPara="1" wrap="square" lIns="91425" tIns="91425" rIns="91425" bIns="91425" anchor="ctr" anchorCtr="0">
-            <a:noAutofit/>
-          </a:bodyPr>
-          <a:lstStyle/>
-          <a:p>
-            <a:pPr marL="146050" indent="0" algn="ctr">
-              <a:buNone/>
-            </a:pPr>
-            <a:r>
-              <a:rPr lang="en-US" sz="2400" dirty="0"/>
-              <a:t>Take </a:t>
-            </a:r>
-            <a:r>
-              <a:rPr lang="pl-PL" sz="2400" dirty="0"/>
-              <a:t>Quiz </a:t>
-            </a:r>
-            <a:r>
-              <a:rPr lang="en-US" sz="2400" dirty="0"/>
-              <a:t>3</a:t>
-            </a:r>
-            <a:r>
-              <a:rPr lang="pl-PL" sz="2400" dirty="0"/>
-              <a:t>.</a:t>
-            </a:r>
-            <a:r>
-              <a:rPr lang="en-US" sz="2400" dirty="0"/>
-              <a:t>1</a:t>
-            </a:r>
-            <a:r>
-              <a:rPr lang="pl-PL" sz="2400" dirty="0"/>
-              <a:t>: </a:t>
-            </a:r>
-            <a:r>
-              <a:rPr lang="en-US" sz="2400" dirty="0" err="1"/>
-              <a:t>Inheritence</a:t>
-            </a:r>
-            <a:endParaRPr lang="en-US" sz="2400" dirty="0"/>
-          </a:p>
-          <a:p>
-            <a:pPr algn="ctr"/>
-            <a:r>
-              <a:rPr lang="en-US" sz="2400" dirty="0"/>
-              <a:t>Password - </a:t>
-            </a:r>
-            <a:r>
-              <a:rPr lang="en-US" sz="2400" dirty="0" err="1"/>
-              <a:t>AmVerySmol</a:t>
-            </a:r>
-            <a:endParaRPr sz="2400" dirty="0"/>
-          </a:p>
-        </p:txBody>
-      </p:sp>
-      <p:sp>
-        <p:nvSpPr>
-          <p:cNvPr id="326" name="Google Shape;326;p47"/>
-          <p:cNvSpPr txBox="1">
-            <a:spLocks noGrp="1"/>
-          </p:cNvSpPr>
-          <p:nvPr>
-            <p:ph type="sldNum" idx="12"/>
-          </p:nvPr>
-        </p:nvSpPr>
-        <p:spPr>
-          <a:xfrm>
-            <a:off x="8472458" y="4663217"/>
-            <a:ext cx="548700" cy="393600"/>
-          </a:xfrm>
-          <a:prstGeom prst="rect">
-            <a:avLst/>
-          </a:prstGeom>
-        </p:spPr>
-        <p:txBody>
-          <a:bodyPr spcFirstLastPara="1" wrap="square" lIns="91425" tIns="91425" rIns="91425" bIns="91425" anchor="ctr" anchorCtr="0">
-            <a:noAutofit/>
-          </a:bodyPr>
-          <a:lstStyle/>
-          <a:p>
-            <a:pPr marL="0" lvl="0" indent="0" algn="r" rtl="0">
-              <a:spcBef>
-                <a:spcPts val="0"/>
-              </a:spcBef>
-              <a:spcAft>
-                <a:spcPts val="0"/>
-              </a:spcAft>
-              <a:buNone/>
-            </a:pPr>
-            <a:fld id="{00000000-1234-1234-1234-123412341234}" type="slidenum">
-              <a:rPr lang="en"/>
-              <a:t>2</a:t>
-            </a:fld>
-            <a:endParaRPr/>
-          </a:p>
-        </p:txBody>
-      </p:sp>
-      <p:sp>
-        <p:nvSpPr>
-          <p:cNvPr id="2" name="TextBox 1">
-            <a:extLst>
-              <a:ext uri="{FF2B5EF4-FFF2-40B4-BE49-F238E27FC236}">
-                <a16:creationId xmlns:a16="http://schemas.microsoft.com/office/drawing/2014/main" id="{DCC33EBB-1C9D-B9A9-88E6-F3466077417F}"/>
-              </a:ext>
-            </a:extLst>
-          </p:cNvPr>
-          <p:cNvSpPr txBox="1"/>
-          <p:nvPr/>
-        </p:nvSpPr>
-        <p:spPr>
-          <a:xfrm>
-            <a:off x="0" y="1277369"/>
-            <a:ext cx="9144000" cy="307777"/>
-          </a:xfrm>
-          <a:prstGeom prst="rect">
-            <a:avLst/>
-          </a:prstGeom>
-          <a:solidFill>
-            <a:srgbClr val="FFC000"/>
-          </a:solidFill>
-        </p:spPr>
-        <p:txBody>
-          <a:bodyPr wrap="square" rtlCol="0">
-            <a:spAutoFit/>
-          </a:bodyPr>
-          <a:lstStyle/>
-          <a:p>
-            <a:r>
-              <a:rPr lang="en-US" dirty="0"/>
-              <a:t>Quiz</a:t>
-            </a:r>
-          </a:p>
-        </p:txBody>
-      </p:sp>
-      <p:sp>
-        <p:nvSpPr>
-          <p:cNvPr id="3" name="TextBox 2">
-            <a:extLst>
-              <a:ext uri="{FF2B5EF4-FFF2-40B4-BE49-F238E27FC236}">
-                <a16:creationId xmlns:a16="http://schemas.microsoft.com/office/drawing/2014/main" id="{64C19922-6A1B-1404-5104-DC43E4C67861}"/>
-              </a:ext>
-            </a:extLst>
-          </p:cNvPr>
-          <p:cNvSpPr txBox="1"/>
-          <p:nvPr/>
-        </p:nvSpPr>
-        <p:spPr>
-          <a:xfrm>
-            <a:off x="-5842" y="3031063"/>
-            <a:ext cx="9144000" cy="307777"/>
-          </a:xfrm>
-          <a:prstGeom prst="rect">
-            <a:avLst/>
-          </a:prstGeom>
-          <a:solidFill>
-            <a:srgbClr val="FFC000"/>
-          </a:solidFill>
-        </p:spPr>
-        <p:txBody>
-          <a:bodyPr wrap="square" rtlCol="0">
-            <a:spAutoFit/>
-          </a:bodyPr>
-          <a:lstStyle/>
-          <a:p>
-            <a:r>
-              <a:rPr lang="en-US" dirty="0"/>
-              <a:t>Next </a:t>
-            </a:r>
-            <a:r>
-              <a:rPr lang="en-US" dirty="0">
-                <a:sym typeface="Wingdings" panose="05000000000000000000" pitchFamily="2" charset="2"/>
-              </a:rPr>
-              <a:t> </a:t>
-            </a:r>
-            <a:endParaRPr lang="en-US" dirty="0"/>
-          </a:p>
-        </p:txBody>
-      </p:sp>
-      <p:sp>
-        <p:nvSpPr>
-          <p:cNvPr id="4" name="Google Shape;325;p47">
-            <a:extLst>
-              <a:ext uri="{FF2B5EF4-FFF2-40B4-BE49-F238E27FC236}">
-                <a16:creationId xmlns:a16="http://schemas.microsoft.com/office/drawing/2014/main" id="{E455EA58-F56D-AF58-E97D-95A77E0AB6CF}"/>
-              </a:ext>
-            </a:extLst>
-          </p:cNvPr>
-          <p:cNvSpPr txBox="1">
-            <a:spLocks/>
-          </p:cNvSpPr>
-          <p:nvPr/>
-        </p:nvSpPr>
-        <p:spPr>
-          <a:xfrm>
-            <a:off x="-5842" y="3422352"/>
-            <a:ext cx="9149842" cy="1721148"/>
-          </a:xfrm>
-          <a:prstGeom prst="rect">
-            <a:avLst/>
-          </a:prstGeom>
-          <a:noFill/>
-          <a:ln>
-            <a:noFill/>
-          </a:ln>
-        </p:spPr>
-        <p:txBody>
-          <a:bodyPr spcFirstLastPara="1" wrap="square" lIns="91425" tIns="91425" rIns="91425" bIns="91425" anchor="ctr" anchorCtr="0">
-            <a:noAutofit/>
-          </a:bodyPr>
-          <a:lstStyle>
-            <a:defPPr marR="0" lvl="0" algn="l" rtl="0">
-              <a:lnSpc>
-                <a:spcPct val="100000"/>
-              </a:lnSpc>
-              <a:spcBef>
-                <a:spcPts val="0"/>
-              </a:spcBef>
-              <a:spcAft>
-                <a:spcPts val="0"/>
-              </a:spcAft>
-            </a:defPPr>
-            <a:lvl1pPr marL="457200" marR="0" lvl="0" indent="-311150" algn="l" rtl="0">
-              <a:lnSpc>
-                <a:spcPct val="115000"/>
-              </a:lnSpc>
-              <a:spcBef>
-                <a:spcPts val="0"/>
-              </a:spcBef>
-              <a:spcAft>
-                <a:spcPts val="0"/>
-              </a:spcAft>
-              <a:buClr>
-                <a:schemeClr val="dk2"/>
-              </a:buClr>
-              <a:buSzPts val="1300"/>
-              <a:buFont typeface="Roboto"/>
-              <a:buChar char="●"/>
-              <a:defRPr sz="1300" b="0" i="0" u="none" strike="noStrike" cap="none">
-                <a:solidFill>
-                  <a:schemeClr val="dk2"/>
-                </a:solidFill>
-                <a:latin typeface="Roboto"/>
-                <a:ea typeface="Roboto"/>
-                <a:cs typeface="Roboto"/>
-                <a:sym typeface="Roboto"/>
-              </a:defRPr>
-            </a:lvl1pPr>
-            <a:lvl2pPr marL="914400" marR="0" lvl="1" indent="-298450" algn="l" rtl="0">
-              <a:lnSpc>
-                <a:spcPct val="115000"/>
-              </a:lnSpc>
-              <a:spcBef>
-                <a:spcPts val="1600"/>
-              </a:spcBef>
-              <a:spcAft>
-                <a:spcPts val="0"/>
-              </a:spcAft>
-              <a:buClr>
-                <a:schemeClr val="dk2"/>
-              </a:buClr>
-              <a:buSzPts val="1100"/>
-              <a:buFont typeface="Roboto"/>
-              <a:buChar char="○"/>
-              <a:defRPr sz="1100" b="0" i="0" u="none" strike="noStrike" cap="none">
-                <a:solidFill>
-                  <a:schemeClr val="dk2"/>
-                </a:solidFill>
-                <a:latin typeface="Roboto"/>
-                <a:ea typeface="Roboto"/>
-                <a:cs typeface="Roboto"/>
-                <a:sym typeface="Roboto"/>
-              </a:defRPr>
-            </a:lvl2pPr>
-            <a:lvl3pPr marL="1371600" marR="0" lvl="2" indent="-298450" algn="l" rtl="0">
-              <a:lnSpc>
-                <a:spcPct val="115000"/>
-              </a:lnSpc>
-              <a:spcBef>
-                <a:spcPts val="1600"/>
-              </a:spcBef>
-              <a:spcAft>
-                <a:spcPts val="0"/>
-              </a:spcAft>
-              <a:buClr>
-                <a:schemeClr val="dk2"/>
-              </a:buClr>
-              <a:buSzPts val="1100"/>
-              <a:buFont typeface="Roboto"/>
-              <a:buChar char="■"/>
-              <a:defRPr sz="1100" b="0" i="0" u="none" strike="noStrike" cap="none">
-                <a:solidFill>
-                  <a:schemeClr val="dk2"/>
-                </a:solidFill>
-                <a:latin typeface="Roboto"/>
-                <a:ea typeface="Roboto"/>
-                <a:cs typeface="Roboto"/>
-                <a:sym typeface="Roboto"/>
-              </a:defRPr>
-            </a:lvl3pPr>
-            <a:lvl4pPr marL="1828800" marR="0" lvl="3" indent="-298450" algn="l" rtl="0">
-              <a:lnSpc>
-                <a:spcPct val="115000"/>
-              </a:lnSpc>
-              <a:spcBef>
-                <a:spcPts val="1600"/>
-              </a:spcBef>
-              <a:spcAft>
-                <a:spcPts val="0"/>
-              </a:spcAft>
-              <a:buClr>
-                <a:schemeClr val="dk2"/>
-              </a:buClr>
-              <a:buSzPts val="1100"/>
-              <a:buFont typeface="Roboto"/>
-              <a:buChar char="●"/>
-              <a:defRPr sz="1100" b="0" i="0" u="none" strike="noStrike" cap="none">
-                <a:solidFill>
-                  <a:schemeClr val="dk2"/>
-                </a:solidFill>
-                <a:latin typeface="Roboto"/>
-                <a:ea typeface="Roboto"/>
-                <a:cs typeface="Roboto"/>
-                <a:sym typeface="Roboto"/>
-              </a:defRPr>
-            </a:lvl4pPr>
-            <a:lvl5pPr marL="2286000" marR="0" lvl="4" indent="-298450" algn="l" rtl="0">
-              <a:lnSpc>
-                <a:spcPct val="115000"/>
-              </a:lnSpc>
-              <a:spcBef>
-                <a:spcPts val="1600"/>
-              </a:spcBef>
-              <a:spcAft>
-                <a:spcPts val="0"/>
-              </a:spcAft>
-              <a:buClr>
-                <a:schemeClr val="dk2"/>
-              </a:buClr>
-              <a:buSzPts val="1100"/>
-              <a:buFont typeface="Roboto"/>
-              <a:buChar char="○"/>
-              <a:defRPr sz="1100" b="0" i="0" u="none" strike="noStrike" cap="none">
-                <a:solidFill>
-                  <a:schemeClr val="dk2"/>
-                </a:solidFill>
-                <a:latin typeface="Roboto"/>
-                <a:ea typeface="Roboto"/>
-                <a:cs typeface="Roboto"/>
-                <a:sym typeface="Roboto"/>
-              </a:defRPr>
-            </a:lvl5pPr>
-            <a:lvl6pPr marL="2743200" marR="0" lvl="5" indent="-298450" algn="l" rtl="0">
-              <a:lnSpc>
-                <a:spcPct val="115000"/>
-              </a:lnSpc>
-              <a:spcBef>
-                <a:spcPts val="1600"/>
-              </a:spcBef>
-              <a:spcAft>
-                <a:spcPts val="0"/>
-              </a:spcAft>
-              <a:buClr>
-                <a:schemeClr val="dk2"/>
-              </a:buClr>
-              <a:buSzPts val="1100"/>
-              <a:buFont typeface="Roboto"/>
-              <a:buChar char="■"/>
-              <a:defRPr sz="1100" b="0" i="0" u="none" strike="noStrike" cap="none">
-                <a:solidFill>
-                  <a:schemeClr val="dk2"/>
-                </a:solidFill>
-                <a:latin typeface="Roboto"/>
-                <a:ea typeface="Roboto"/>
-                <a:cs typeface="Roboto"/>
-                <a:sym typeface="Roboto"/>
-              </a:defRPr>
-            </a:lvl6pPr>
-            <a:lvl7pPr marL="3200400" marR="0" lvl="6" indent="-298450" algn="l" rtl="0">
-              <a:lnSpc>
-                <a:spcPct val="115000"/>
-              </a:lnSpc>
-              <a:spcBef>
-                <a:spcPts val="1600"/>
-              </a:spcBef>
-              <a:spcAft>
-                <a:spcPts val="0"/>
-              </a:spcAft>
-              <a:buClr>
-                <a:schemeClr val="dk2"/>
-              </a:buClr>
-              <a:buSzPts val="1100"/>
-              <a:buFont typeface="Roboto"/>
-              <a:buChar char="●"/>
-              <a:defRPr sz="1100" b="0" i="0" u="none" strike="noStrike" cap="none">
-                <a:solidFill>
-                  <a:schemeClr val="dk2"/>
-                </a:solidFill>
-                <a:latin typeface="Roboto"/>
-                <a:ea typeface="Roboto"/>
-                <a:cs typeface="Roboto"/>
-                <a:sym typeface="Roboto"/>
-              </a:defRPr>
-            </a:lvl7pPr>
-            <a:lvl8pPr marL="3657600" marR="0" lvl="7" indent="-298450" algn="l" rtl="0">
-              <a:lnSpc>
-                <a:spcPct val="115000"/>
-              </a:lnSpc>
-              <a:spcBef>
-                <a:spcPts val="1600"/>
-              </a:spcBef>
-              <a:spcAft>
-                <a:spcPts val="0"/>
-              </a:spcAft>
-              <a:buClr>
-                <a:schemeClr val="dk2"/>
-              </a:buClr>
-              <a:buSzPts val="1100"/>
-              <a:buFont typeface="Roboto"/>
-              <a:buChar char="○"/>
-              <a:defRPr sz="1100" b="0" i="0" u="none" strike="noStrike" cap="none">
-                <a:solidFill>
-                  <a:schemeClr val="dk2"/>
-                </a:solidFill>
-                <a:latin typeface="Roboto"/>
-                <a:ea typeface="Roboto"/>
-                <a:cs typeface="Roboto"/>
-                <a:sym typeface="Roboto"/>
-              </a:defRPr>
-            </a:lvl8pPr>
-            <a:lvl9pPr marL="4114800" marR="0" lvl="8" indent="-298450" algn="l" rtl="0">
-              <a:lnSpc>
-                <a:spcPct val="115000"/>
-              </a:lnSpc>
-              <a:spcBef>
-                <a:spcPts val="1600"/>
-              </a:spcBef>
-              <a:spcAft>
-                <a:spcPts val="1600"/>
-              </a:spcAft>
-              <a:buClr>
-                <a:schemeClr val="dk2"/>
-              </a:buClr>
-              <a:buSzPts val="1100"/>
-              <a:buFont typeface="Roboto"/>
-              <a:buChar char="■"/>
-              <a:defRPr sz="1100" b="0" i="0" u="none" strike="noStrike" cap="none">
-                <a:solidFill>
-                  <a:schemeClr val="dk2"/>
-                </a:solidFill>
-                <a:latin typeface="Roboto"/>
-                <a:ea typeface="Roboto"/>
-                <a:cs typeface="Roboto"/>
-                <a:sym typeface="Roboto"/>
-              </a:defRPr>
-            </a:lvl9pPr>
-          </a:lstStyle>
-          <a:p>
-            <a:pPr marL="0" indent="0">
-              <a:spcAft>
-                <a:spcPts val="1600"/>
-              </a:spcAft>
-              <a:buNone/>
-            </a:pPr>
-            <a:r>
-              <a:rPr lang="en-US" sz="2800" dirty="0"/>
-              <a:t>After completing the Quiz </a:t>
-            </a:r>
-          </a:p>
-          <a:p>
-            <a:pPr marL="342900" indent="-342900">
-              <a:spcAft>
-                <a:spcPts val="1600"/>
-              </a:spcAft>
-            </a:pPr>
-            <a:r>
-              <a:rPr lang="en-US" sz="2400" dirty="0"/>
-              <a:t>Clone/</a:t>
-            </a:r>
-            <a:r>
-              <a:rPr lang="en-US" sz="2400"/>
-              <a:t>Pull Unit3 </a:t>
-            </a:r>
-            <a:r>
-              <a:rPr lang="en-US" sz="2400" dirty="0"/>
-              <a:t>– git hub classroom repo for class activities</a:t>
-            </a:r>
-            <a:endParaRPr lang="en-US" sz="2400" dirty="0">
-              <a:solidFill>
-                <a:schemeClr val="tx1"/>
-              </a:solidFill>
-            </a:endParaRPr>
-          </a:p>
-        </p:txBody>
-      </p:sp>
-    </p:spTree>
   </p:cSld>
   <p:clrMapOvr>
     <a:masterClrMapping/>

--- a/Presentation/Announcement.pptx
+++ b/Presentation/Announcement.pptx
@@ -8,9 +8,9 @@
     <p:notesMasterId r:id="rId14"/>
   </p:notesMasterIdLst>
   <p:sldIdLst>
-    <p:sldId id="276" r:id="rId2"/>
-    <p:sldId id="286" r:id="rId3"/>
-    <p:sldId id="278" r:id="rId4"/>
+    <p:sldId id="278" r:id="rId2"/>
+    <p:sldId id="276" r:id="rId3"/>
+    <p:sldId id="286" r:id="rId4"/>
     <p:sldId id="281" r:id="rId5"/>
     <p:sldId id="287" r:id="rId6"/>
     <p:sldId id="285" r:id="rId7"/>
@@ -825,6 +825,11 @@
         </p:txBody>
       </p:sp>
     </p:spTree>
+    <p:extLst>
+      <p:ext uri="{BB962C8B-B14F-4D97-AF65-F5344CB8AC3E}">
+        <p14:creationId xmlns:p14="http://schemas.microsoft.com/office/powerpoint/2010/main" val="4097390636"/>
+      </p:ext>
+    </p:extLst>
   </p:cSld>
   <p:clrMapOvr>
     <a:masterClrMapping/>
@@ -1146,6 +1151,104 @@
   <p:cSld>
     <p:spTree>
       <p:nvGrpSpPr>
+        <p:cNvPr id="1" name="Shape 320"/>
+        <p:cNvGrpSpPr/>
+        <p:nvPr/>
+      </p:nvGrpSpPr>
+      <p:grpSpPr>
+        <a:xfrm>
+          <a:off x="0" y="0"/>
+          <a:ext cx="0" cy="0"/>
+          <a:chOff x="0" y="0"/>
+          <a:chExt cx="0" cy="0"/>
+        </a:xfrm>
+      </p:grpSpPr>
+      <p:sp>
+        <p:nvSpPr>
+          <p:cNvPr id="321" name="Google Shape;321;g8f52c9b70a_3_0:notes"/>
+          <p:cNvSpPr>
+            <a:spLocks noGrp="1" noRot="1" noChangeAspect="1"/>
+          </p:cNvSpPr>
+          <p:nvPr>
+            <p:ph type="sldImg" idx="2"/>
+          </p:nvPr>
+        </p:nvSpPr>
+        <p:spPr>
+          <a:xfrm>
+            <a:off x="406400" y="696913"/>
+            <a:ext cx="6197600" cy="3486150"/>
+          </a:xfrm>
+          <a:custGeom>
+            <a:avLst/>
+            <a:gdLst/>
+            <a:ahLst/>
+            <a:cxnLst/>
+            <a:rect l="l" t="t" r="r" b="b"/>
+            <a:pathLst>
+              <a:path w="120000" h="120000" extrusionOk="0">
+                <a:moveTo>
+                  <a:pt x="0" y="0"/>
+                </a:moveTo>
+                <a:lnTo>
+                  <a:pt x="120000" y="0"/>
+                </a:lnTo>
+                <a:lnTo>
+                  <a:pt x="120000" y="120000"/>
+                </a:lnTo>
+                <a:lnTo>
+                  <a:pt x="0" y="120000"/>
+                </a:lnTo>
+                <a:close/>
+              </a:path>
+            </a:pathLst>
+          </a:custGeom>
+        </p:spPr>
+      </p:sp>
+      <p:sp>
+        <p:nvSpPr>
+          <p:cNvPr id="322" name="Google Shape;322;g8f52c9b70a_3_0:notes"/>
+          <p:cNvSpPr txBox="1">
+            <a:spLocks noGrp="1"/>
+          </p:cNvSpPr>
+          <p:nvPr>
+            <p:ph type="body" idx="1"/>
+          </p:nvPr>
+        </p:nvSpPr>
+        <p:spPr>
+          <a:xfrm>
+            <a:off x="701040" y="4415790"/>
+            <a:ext cx="5608320" cy="4183380"/>
+          </a:xfrm>
+          <a:prstGeom prst="rect">
+            <a:avLst/>
+          </a:prstGeom>
+        </p:spPr>
+        <p:txBody>
+          <a:bodyPr spcFirstLastPara="1" wrap="square" lIns="93162" tIns="93162" rIns="93162" bIns="93162" anchor="t" anchorCtr="0">
+            <a:noAutofit/>
+          </a:bodyPr>
+          <a:lstStyle/>
+          <a:p>
+            <a:pPr marL="0" indent="0">
+              <a:buNone/>
+            </a:pPr>
+            <a:endParaRPr/>
+          </a:p>
+        </p:txBody>
+      </p:sp>
+    </p:spTree>
+  </p:cSld>
+  <p:clrMapOvr>
+    <a:masterClrMapping/>
+  </p:clrMapOvr>
+</p:notes>
+</file>
+
+<file path=ppt/notesSlides/notesSlide3.xml><?xml version="1.0" encoding="utf-8"?>
+<p:notes xmlns:a="http://schemas.openxmlformats.org/drawingml/2006/main" xmlns:r="http://schemas.openxmlformats.org/officeDocument/2006/relationships" xmlns:p="http://schemas.openxmlformats.org/presentationml/2006/main" showMasterSp="0" showMasterPhAnim="0">
+  <p:cSld>
+    <p:spTree>
+      <p:nvGrpSpPr>
         <p:cNvPr id="1" name="Shape 320">
           <a:extLst>
             <a:ext uri="{FF2B5EF4-FFF2-40B4-BE49-F238E27FC236}">
@@ -1253,109 +1356,6 @@
     <p:extLst>
       <p:ext uri="{BB962C8B-B14F-4D97-AF65-F5344CB8AC3E}">
         <p14:creationId xmlns:p14="http://schemas.microsoft.com/office/powerpoint/2010/main" val="2483524941"/>
-      </p:ext>
-    </p:extLst>
-  </p:cSld>
-  <p:clrMapOvr>
-    <a:masterClrMapping/>
-  </p:clrMapOvr>
-</p:notes>
-</file>
-
-<file path=ppt/notesSlides/notesSlide3.xml><?xml version="1.0" encoding="utf-8"?>
-<p:notes xmlns:a="http://schemas.openxmlformats.org/drawingml/2006/main" xmlns:r="http://schemas.openxmlformats.org/officeDocument/2006/relationships" xmlns:p="http://schemas.openxmlformats.org/presentationml/2006/main" showMasterSp="0" showMasterPhAnim="0">
-  <p:cSld>
-    <p:spTree>
-      <p:nvGrpSpPr>
-        <p:cNvPr id="1" name="Shape 320"/>
-        <p:cNvGrpSpPr/>
-        <p:nvPr/>
-      </p:nvGrpSpPr>
-      <p:grpSpPr>
-        <a:xfrm>
-          <a:off x="0" y="0"/>
-          <a:ext cx="0" cy="0"/>
-          <a:chOff x="0" y="0"/>
-          <a:chExt cx="0" cy="0"/>
-        </a:xfrm>
-      </p:grpSpPr>
-      <p:sp>
-        <p:nvSpPr>
-          <p:cNvPr id="321" name="Google Shape;321;g8f52c9b70a_3_0:notes"/>
-          <p:cNvSpPr>
-            <a:spLocks noGrp="1" noRot="1" noChangeAspect="1"/>
-          </p:cNvSpPr>
-          <p:nvPr>
-            <p:ph type="sldImg" idx="2"/>
-          </p:nvPr>
-        </p:nvSpPr>
-        <p:spPr>
-          <a:xfrm>
-            <a:off x="406400" y="696913"/>
-            <a:ext cx="6197600" cy="3486150"/>
-          </a:xfrm>
-          <a:custGeom>
-            <a:avLst/>
-            <a:gdLst/>
-            <a:ahLst/>
-            <a:cxnLst/>
-            <a:rect l="l" t="t" r="r" b="b"/>
-            <a:pathLst>
-              <a:path w="120000" h="120000" extrusionOk="0">
-                <a:moveTo>
-                  <a:pt x="0" y="0"/>
-                </a:moveTo>
-                <a:lnTo>
-                  <a:pt x="120000" y="0"/>
-                </a:lnTo>
-                <a:lnTo>
-                  <a:pt x="120000" y="120000"/>
-                </a:lnTo>
-                <a:lnTo>
-                  <a:pt x="0" y="120000"/>
-                </a:lnTo>
-                <a:close/>
-              </a:path>
-            </a:pathLst>
-          </a:custGeom>
-        </p:spPr>
-      </p:sp>
-      <p:sp>
-        <p:nvSpPr>
-          <p:cNvPr id="322" name="Google Shape;322;g8f52c9b70a_3_0:notes"/>
-          <p:cNvSpPr txBox="1">
-            <a:spLocks noGrp="1"/>
-          </p:cNvSpPr>
-          <p:nvPr>
-            <p:ph type="body" idx="1"/>
-          </p:nvPr>
-        </p:nvSpPr>
-        <p:spPr>
-          <a:xfrm>
-            <a:off x="701040" y="4415790"/>
-            <a:ext cx="5608320" cy="4183380"/>
-          </a:xfrm>
-          <a:prstGeom prst="rect">
-            <a:avLst/>
-          </a:prstGeom>
-        </p:spPr>
-        <p:txBody>
-          <a:bodyPr spcFirstLastPara="1" wrap="square" lIns="93162" tIns="93162" rIns="93162" bIns="93162" anchor="t" anchorCtr="0">
-            <a:noAutofit/>
-          </a:bodyPr>
-          <a:lstStyle/>
-          <a:p>
-            <a:pPr marL="0" indent="0">
-              <a:buNone/>
-            </a:pPr>
-            <a:endParaRPr/>
-          </a:p>
-        </p:txBody>
-      </p:sp>
-    </p:spTree>
-    <p:extLst>
-      <p:ext uri="{BB962C8B-B14F-4D97-AF65-F5344CB8AC3E}">
-        <p14:creationId xmlns:p14="http://schemas.microsoft.com/office/powerpoint/2010/main" val="4097390636"/>
       </p:ext>
     </p:extLst>
   </p:cSld>
@@ -6553,6 +6553,1027 @@
         </p:nvSpPr>
         <p:spPr>
           <a:xfrm>
+            <a:off x="314621" y="235914"/>
+            <a:ext cx="8520600" cy="623700"/>
+          </a:xfrm>
+          <a:prstGeom prst="rect">
+            <a:avLst/>
+          </a:prstGeom>
+        </p:spPr>
+        <p:txBody>
+          <a:bodyPr spcFirstLastPara="1" wrap="square" lIns="91425" tIns="91425" rIns="91425" bIns="91425" anchor="t" anchorCtr="0">
+            <a:noAutofit/>
+          </a:bodyPr>
+          <a:lstStyle/>
+          <a:p>
+            <a:pPr marL="0" lvl="0" indent="0" algn="ctr" rtl="0">
+              <a:spcBef>
+                <a:spcPts val="0"/>
+              </a:spcBef>
+              <a:spcAft>
+                <a:spcPts val="0"/>
+              </a:spcAft>
+              <a:buNone/>
+            </a:pPr>
+            <a:r>
+              <a:rPr lang="en-US" dirty="0"/>
+              <a:t>GCIS – Software Development and Problem Solving</a:t>
+            </a:r>
+            <a:endParaRPr dirty="0"/>
+          </a:p>
+        </p:txBody>
+      </p:sp>
+      <p:sp>
+        <p:nvSpPr>
+          <p:cNvPr id="325" name="Google Shape;325;p47"/>
+          <p:cNvSpPr txBox="1">
+            <a:spLocks noGrp="1"/>
+          </p:cNvSpPr>
+          <p:nvPr>
+            <p:ph type="body" idx="1"/>
+          </p:nvPr>
+        </p:nvSpPr>
+        <p:spPr>
+          <a:xfrm>
+            <a:off x="0" y="1856257"/>
+            <a:ext cx="9149842" cy="1226403"/>
+          </a:xfrm>
+          <a:prstGeom prst="rect">
+            <a:avLst/>
+          </a:prstGeom>
+        </p:spPr>
+        <p:txBody>
+          <a:bodyPr spcFirstLastPara="1" wrap="square" lIns="91425" tIns="91425" rIns="91425" bIns="91425" anchor="ctr" anchorCtr="0">
+            <a:noAutofit/>
+          </a:bodyPr>
+          <a:lstStyle/>
+          <a:p>
+            <a:pPr marL="146050" indent="0" algn="ctr">
+              <a:buNone/>
+            </a:pPr>
+            <a:r>
+              <a:rPr lang="en-US" sz="2400" dirty="0"/>
+              <a:t>Take Quiz – Midterm Exam 1</a:t>
+            </a:r>
+          </a:p>
+          <a:p>
+            <a:pPr marL="146050" indent="0" algn="ctr">
+              <a:buNone/>
+            </a:pPr>
+            <a:r>
+              <a:rPr lang="en-US" sz="3200" b="1" dirty="0">
+                <a:solidFill>
+                  <a:schemeClr val="tx1"/>
+                </a:solidFill>
+              </a:rPr>
+              <a:t>Password - YouGotThis124!</a:t>
+            </a:r>
+            <a:endParaRPr sz="3200" b="1" dirty="0">
+              <a:solidFill>
+                <a:schemeClr val="tx1"/>
+              </a:solidFill>
+              <a:highlight>
+                <a:srgbClr val="FFFF00"/>
+              </a:highlight>
+            </a:endParaRPr>
+          </a:p>
+        </p:txBody>
+      </p:sp>
+      <p:sp>
+        <p:nvSpPr>
+          <p:cNvPr id="326" name="Google Shape;326;p47"/>
+          <p:cNvSpPr txBox="1">
+            <a:spLocks noGrp="1"/>
+          </p:cNvSpPr>
+          <p:nvPr>
+            <p:ph type="sldNum" idx="12"/>
+          </p:nvPr>
+        </p:nvSpPr>
+        <p:spPr>
+          <a:xfrm>
+            <a:off x="8472458" y="4663217"/>
+            <a:ext cx="548700" cy="393600"/>
+          </a:xfrm>
+          <a:prstGeom prst="rect">
+            <a:avLst/>
+          </a:prstGeom>
+        </p:spPr>
+        <p:txBody>
+          <a:bodyPr spcFirstLastPara="1" wrap="square" lIns="91425" tIns="91425" rIns="91425" bIns="91425" anchor="ctr" anchorCtr="0">
+            <a:noAutofit/>
+          </a:bodyPr>
+          <a:lstStyle/>
+          <a:p>
+            <a:pPr marL="0" lvl="0" indent="0" algn="r" rtl="0">
+              <a:spcBef>
+                <a:spcPts val="0"/>
+              </a:spcBef>
+              <a:spcAft>
+                <a:spcPts val="0"/>
+              </a:spcAft>
+              <a:buNone/>
+            </a:pPr>
+            <a:fld id="{00000000-1234-1234-1234-123412341234}" type="slidenum">
+              <a:rPr lang="en"/>
+              <a:t>1</a:t>
+            </a:fld>
+            <a:endParaRPr/>
+          </a:p>
+        </p:txBody>
+      </p:sp>
+      <p:sp>
+        <p:nvSpPr>
+          <p:cNvPr id="2" name="TextBox 1">
+            <a:extLst>
+              <a:ext uri="{FF2B5EF4-FFF2-40B4-BE49-F238E27FC236}">
+                <a16:creationId xmlns:a16="http://schemas.microsoft.com/office/drawing/2014/main" id="{DCC33EBB-1C9D-B9A9-88E6-F3466077417F}"/>
+              </a:ext>
+            </a:extLst>
+          </p:cNvPr>
+          <p:cNvSpPr txBox="1"/>
+          <p:nvPr/>
+        </p:nvSpPr>
+        <p:spPr>
+          <a:xfrm>
+            <a:off x="-5842" y="1277369"/>
+            <a:ext cx="9144000" cy="307777"/>
+          </a:xfrm>
+          <a:prstGeom prst="rect">
+            <a:avLst/>
+          </a:prstGeom>
+          <a:solidFill>
+            <a:srgbClr val="FFC000"/>
+          </a:solidFill>
+        </p:spPr>
+        <p:txBody>
+          <a:bodyPr wrap="square" rtlCol="0">
+            <a:spAutoFit/>
+          </a:bodyPr>
+          <a:lstStyle/>
+          <a:p>
+            <a:pPr algn="ctr"/>
+            <a:r>
+              <a:rPr lang="en-US" b="1" dirty="0"/>
+              <a:t>Midterm Exam 1 - Written</a:t>
+            </a:r>
+          </a:p>
+        </p:txBody>
+      </p:sp>
+      <p:sp>
+        <p:nvSpPr>
+          <p:cNvPr id="3" name="TextBox 2">
+            <a:extLst>
+              <a:ext uri="{FF2B5EF4-FFF2-40B4-BE49-F238E27FC236}">
+                <a16:creationId xmlns:a16="http://schemas.microsoft.com/office/drawing/2014/main" id="{25A19346-2F9F-0DB9-0B08-CF872EB1D563}"/>
+              </a:ext>
+            </a:extLst>
+          </p:cNvPr>
+          <p:cNvSpPr txBox="1"/>
+          <p:nvPr/>
+        </p:nvSpPr>
+        <p:spPr>
+          <a:xfrm>
+            <a:off x="0" y="3313985"/>
+            <a:ext cx="9144000" cy="307777"/>
+          </a:xfrm>
+          <a:prstGeom prst="rect">
+            <a:avLst/>
+          </a:prstGeom>
+          <a:solidFill>
+            <a:srgbClr val="FFC000"/>
+          </a:solidFill>
+        </p:spPr>
+        <p:txBody>
+          <a:bodyPr wrap="square" rtlCol="0">
+            <a:spAutoFit/>
+          </a:bodyPr>
+          <a:lstStyle/>
+          <a:p>
+            <a:r>
+              <a:rPr lang="en-US" dirty="0"/>
+              <a:t>Practicum</a:t>
+            </a:r>
+          </a:p>
+        </p:txBody>
+      </p:sp>
+      <p:sp>
+        <p:nvSpPr>
+          <p:cNvPr id="4" name="Google Shape;325;p47">
+            <a:extLst>
+              <a:ext uri="{FF2B5EF4-FFF2-40B4-BE49-F238E27FC236}">
+                <a16:creationId xmlns:a16="http://schemas.microsoft.com/office/drawing/2014/main" id="{11D0E6FB-E344-369B-CE83-B3CF5834F823}"/>
+              </a:ext>
+            </a:extLst>
+          </p:cNvPr>
+          <p:cNvSpPr txBox="1">
+            <a:spLocks/>
+          </p:cNvSpPr>
+          <p:nvPr/>
+        </p:nvSpPr>
+        <p:spPr>
+          <a:xfrm>
+            <a:off x="122842" y="3621762"/>
+            <a:ext cx="8478300" cy="1435054"/>
+          </a:xfrm>
+          <a:prstGeom prst="rect">
+            <a:avLst/>
+          </a:prstGeom>
+          <a:noFill/>
+          <a:ln>
+            <a:noFill/>
+          </a:ln>
+        </p:spPr>
+        <p:txBody>
+          <a:bodyPr spcFirstLastPara="1" wrap="square" lIns="91425" tIns="91425" rIns="91425" bIns="91425" anchor="ctr" anchorCtr="0">
+            <a:noAutofit/>
+          </a:bodyPr>
+          <a:lstStyle>
+            <a:defPPr marR="0" lvl="0" algn="l" rtl="0">
+              <a:lnSpc>
+                <a:spcPct val="100000"/>
+              </a:lnSpc>
+              <a:spcBef>
+                <a:spcPts val="0"/>
+              </a:spcBef>
+              <a:spcAft>
+                <a:spcPts val="0"/>
+              </a:spcAft>
+            </a:defPPr>
+            <a:lvl1pPr marL="457200" marR="0" lvl="0" indent="-311150" algn="l" rtl="0">
+              <a:lnSpc>
+                <a:spcPct val="115000"/>
+              </a:lnSpc>
+              <a:spcBef>
+                <a:spcPts val="0"/>
+              </a:spcBef>
+              <a:spcAft>
+                <a:spcPts val="0"/>
+              </a:spcAft>
+              <a:buClr>
+                <a:schemeClr val="dk2"/>
+              </a:buClr>
+              <a:buSzPts val="1300"/>
+              <a:buFont typeface="Roboto"/>
+              <a:buChar char="●"/>
+              <a:defRPr sz="1300" b="0" i="0" u="none" strike="noStrike" cap="none">
+                <a:solidFill>
+                  <a:schemeClr val="dk2"/>
+                </a:solidFill>
+                <a:latin typeface="Roboto"/>
+                <a:ea typeface="Roboto"/>
+                <a:cs typeface="Roboto"/>
+                <a:sym typeface="Roboto"/>
+              </a:defRPr>
+            </a:lvl1pPr>
+            <a:lvl2pPr marL="914400" marR="0" lvl="1" indent="-298450" algn="l" rtl="0">
+              <a:lnSpc>
+                <a:spcPct val="115000"/>
+              </a:lnSpc>
+              <a:spcBef>
+                <a:spcPts val="1600"/>
+              </a:spcBef>
+              <a:spcAft>
+                <a:spcPts val="0"/>
+              </a:spcAft>
+              <a:buClr>
+                <a:schemeClr val="dk2"/>
+              </a:buClr>
+              <a:buSzPts val="1100"/>
+              <a:buFont typeface="Roboto"/>
+              <a:buChar char="○"/>
+              <a:defRPr sz="1100" b="0" i="0" u="none" strike="noStrike" cap="none">
+                <a:solidFill>
+                  <a:schemeClr val="dk2"/>
+                </a:solidFill>
+                <a:latin typeface="Roboto"/>
+                <a:ea typeface="Roboto"/>
+                <a:cs typeface="Roboto"/>
+                <a:sym typeface="Roboto"/>
+              </a:defRPr>
+            </a:lvl2pPr>
+            <a:lvl3pPr marL="1371600" marR="0" lvl="2" indent="-298450" algn="l" rtl="0">
+              <a:lnSpc>
+                <a:spcPct val="115000"/>
+              </a:lnSpc>
+              <a:spcBef>
+                <a:spcPts val="1600"/>
+              </a:spcBef>
+              <a:spcAft>
+                <a:spcPts val="0"/>
+              </a:spcAft>
+              <a:buClr>
+                <a:schemeClr val="dk2"/>
+              </a:buClr>
+              <a:buSzPts val="1100"/>
+              <a:buFont typeface="Roboto"/>
+              <a:buChar char="■"/>
+              <a:defRPr sz="1100" b="0" i="0" u="none" strike="noStrike" cap="none">
+                <a:solidFill>
+                  <a:schemeClr val="dk2"/>
+                </a:solidFill>
+                <a:latin typeface="Roboto"/>
+                <a:ea typeface="Roboto"/>
+                <a:cs typeface="Roboto"/>
+                <a:sym typeface="Roboto"/>
+              </a:defRPr>
+            </a:lvl3pPr>
+            <a:lvl4pPr marL="1828800" marR="0" lvl="3" indent="-298450" algn="l" rtl="0">
+              <a:lnSpc>
+                <a:spcPct val="115000"/>
+              </a:lnSpc>
+              <a:spcBef>
+                <a:spcPts val="1600"/>
+              </a:spcBef>
+              <a:spcAft>
+                <a:spcPts val="0"/>
+              </a:spcAft>
+              <a:buClr>
+                <a:schemeClr val="dk2"/>
+              </a:buClr>
+              <a:buSzPts val="1100"/>
+              <a:buFont typeface="Roboto"/>
+              <a:buChar char="●"/>
+              <a:defRPr sz="1100" b="0" i="0" u="none" strike="noStrike" cap="none">
+                <a:solidFill>
+                  <a:schemeClr val="dk2"/>
+                </a:solidFill>
+                <a:latin typeface="Roboto"/>
+                <a:ea typeface="Roboto"/>
+                <a:cs typeface="Roboto"/>
+                <a:sym typeface="Roboto"/>
+              </a:defRPr>
+            </a:lvl4pPr>
+            <a:lvl5pPr marL="2286000" marR="0" lvl="4" indent="-298450" algn="l" rtl="0">
+              <a:lnSpc>
+                <a:spcPct val="115000"/>
+              </a:lnSpc>
+              <a:spcBef>
+                <a:spcPts val="1600"/>
+              </a:spcBef>
+              <a:spcAft>
+                <a:spcPts val="0"/>
+              </a:spcAft>
+              <a:buClr>
+                <a:schemeClr val="dk2"/>
+              </a:buClr>
+              <a:buSzPts val="1100"/>
+              <a:buFont typeface="Roboto"/>
+              <a:buChar char="○"/>
+              <a:defRPr sz="1100" b="0" i="0" u="none" strike="noStrike" cap="none">
+                <a:solidFill>
+                  <a:schemeClr val="dk2"/>
+                </a:solidFill>
+                <a:latin typeface="Roboto"/>
+                <a:ea typeface="Roboto"/>
+                <a:cs typeface="Roboto"/>
+                <a:sym typeface="Roboto"/>
+              </a:defRPr>
+            </a:lvl5pPr>
+            <a:lvl6pPr marL="2743200" marR="0" lvl="5" indent="-298450" algn="l" rtl="0">
+              <a:lnSpc>
+                <a:spcPct val="115000"/>
+              </a:lnSpc>
+              <a:spcBef>
+                <a:spcPts val="1600"/>
+              </a:spcBef>
+              <a:spcAft>
+                <a:spcPts val="0"/>
+              </a:spcAft>
+              <a:buClr>
+                <a:schemeClr val="dk2"/>
+              </a:buClr>
+              <a:buSzPts val="1100"/>
+              <a:buFont typeface="Roboto"/>
+              <a:buChar char="■"/>
+              <a:defRPr sz="1100" b="0" i="0" u="none" strike="noStrike" cap="none">
+                <a:solidFill>
+                  <a:schemeClr val="dk2"/>
+                </a:solidFill>
+                <a:latin typeface="Roboto"/>
+                <a:ea typeface="Roboto"/>
+                <a:cs typeface="Roboto"/>
+                <a:sym typeface="Roboto"/>
+              </a:defRPr>
+            </a:lvl6pPr>
+            <a:lvl7pPr marL="3200400" marR="0" lvl="6" indent="-298450" algn="l" rtl="0">
+              <a:lnSpc>
+                <a:spcPct val="115000"/>
+              </a:lnSpc>
+              <a:spcBef>
+                <a:spcPts val="1600"/>
+              </a:spcBef>
+              <a:spcAft>
+                <a:spcPts val="0"/>
+              </a:spcAft>
+              <a:buClr>
+                <a:schemeClr val="dk2"/>
+              </a:buClr>
+              <a:buSzPts val="1100"/>
+              <a:buFont typeface="Roboto"/>
+              <a:buChar char="●"/>
+              <a:defRPr sz="1100" b="0" i="0" u="none" strike="noStrike" cap="none">
+                <a:solidFill>
+                  <a:schemeClr val="dk2"/>
+                </a:solidFill>
+                <a:latin typeface="Roboto"/>
+                <a:ea typeface="Roboto"/>
+                <a:cs typeface="Roboto"/>
+                <a:sym typeface="Roboto"/>
+              </a:defRPr>
+            </a:lvl7pPr>
+            <a:lvl8pPr marL="3657600" marR="0" lvl="7" indent="-298450" algn="l" rtl="0">
+              <a:lnSpc>
+                <a:spcPct val="115000"/>
+              </a:lnSpc>
+              <a:spcBef>
+                <a:spcPts val="1600"/>
+              </a:spcBef>
+              <a:spcAft>
+                <a:spcPts val="0"/>
+              </a:spcAft>
+              <a:buClr>
+                <a:schemeClr val="dk2"/>
+              </a:buClr>
+              <a:buSzPts val="1100"/>
+              <a:buFont typeface="Roboto"/>
+              <a:buChar char="○"/>
+              <a:defRPr sz="1100" b="0" i="0" u="none" strike="noStrike" cap="none">
+                <a:solidFill>
+                  <a:schemeClr val="dk2"/>
+                </a:solidFill>
+                <a:latin typeface="Roboto"/>
+                <a:ea typeface="Roboto"/>
+                <a:cs typeface="Roboto"/>
+                <a:sym typeface="Roboto"/>
+              </a:defRPr>
+            </a:lvl8pPr>
+            <a:lvl9pPr marL="4114800" marR="0" lvl="8" indent="-298450" algn="l" rtl="0">
+              <a:lnSpc>
+                <a:spcPct val="115000"/>
+              </a:lnSpc>
+              <a:spcBef>
+                <a:spcPts val="1600"/>
+              </a:spcBef>
+              <a:spcAft>
+                <a:spcPts val="1600"/>
+              </a:spcAft>
+              <a:buClr>
+                <a:schemeClr val="dk2"/>
+              </a:buClr>
+              <a:buSzPts val="1100"/>
+              <a:buFont typeface="Roboto"/>
+              <a:buChar char="■"/>
+              <a:defRPr sz="1100" b="0" i="0" u="none" strike="noStrike" cap="none">
+                <a:solidFill>
+                  <a:schemeClr val="dk2"/>
+                </a:solidFill>
+                <a:latin typeface="Roboto"/>
+                <a:ea typeface="Roboto"/>
+                <a:cs typeface="Roboto"/>
+                <a:sym typeface="Roboto"/>
+              </a:defRPr>
+            </a:lvl9pPr>
+          </a:lstStyle>
+          <a:p>
+            <a:pPr marL="342900" indent="-342900">
+              <a:spcAft>
+                <a:spcPts val="1600"/>
+              </a:spcAft>
+            </a:pPr>
+            <a:r>
+              <a:rPr lang="en-US" sz="1600" dirty="0"/>
+              <a:t>Accept assignment Mid Exam 1 under Instructor -&gt; Alam -&gt; Exam</a:t>
+            </a:r>
+            <a:endParaRPr lang="en-US" sz="1600" dirty="0">
+              <a:solidFill>
+                <a:schemeClr val="tx1"/>
+              </a:solidFill>
+            </a:endParaRPr>
+          </a:p>
+          <a:p>
+            <a:pPr marL="342900" indent="-342900">
+              <a:spcAft>
+                <a:spcPts val="1600"/>
+              </a:spcAft>
+            </a:pPr>
+            <a:r>
+              <a:rPr lang="en-US" sz="1600" dirty="0">
+                <a:solidFill>
+                  <a:schemeClr val="tx1"/>
+                </a:solidFill>
+              </a:rPr>
+              <a:t>Clone the repository for </a:t>
+            </a:r>
+            <a:r>
+              <a:rPr lang="en-US" sz="1600" dirty="0"/>
+              <a:t>Mid Exam 1 </a:t>
+            </a:r>
+            <a:endParaRPr lang="en-US" sz="1600" dirty="0">
+              <a:solidFill>
+                <a:schemeClr val="tx1"/>
+              </a:solidFill>
+            </a:endParaRPr>
+          </a:p>
+        </p:txBody>
+      </p:sp>
+    </p:spTree>
+    <p:extLst>
+      <p:ext uri="{BB962C8B-B14F-4D97-AF65-F5344CB8AC3E}">
+        <p14:creationId xmlns:p14="http://schemas.microsoft.com/office/powerpoint/2010/main" val="943055912"/>
+      </p:ext>
+    </p:extLst>
+  </p:cSld>
+  <p:clrMapOvr>
+    <a:masterClrMapping/>
+  </p:clrMapOvr>
+</p:sld>
+</file>
+
+<file path=ppt/slides/slide10.xml><?xml version="1.0" encoding="utf-8"?>
+<p:sld xmlns:a="http://schemas.openxmlformats.org/drawingml/2006/main" xmlns:r="http://schemas.openxmlformats.org/officeDocument/2006/relationships" xmlns:p="http://schemas.openxmlformats.org/presentationml/2006/main" show="0">
+  <p:cSld>
+    <p:spTree>
+      <p:nvGrpSpPr>
+        <p:cNvPr id="1" name="Shape 323"/>
+        <p:cNvGrpSpPr/>
+        <p:nvPr/>
+      </p:nvGrpSpPr>
+      <p:grpSpPr>
+        <a:xfrm>
+          <a:off x="0" y="0"/>
+          <a:ext cx="0" cy="0"/>
+          <a:chOff x="0" y="0"/>
+          <a:chExt cx="0" cy="0"/>
+        </a:xfrm>
+      </p:grpSpPr>
+      <p:sp>
+        <p:nvSpPr>
+          <p:cNvPr id="324" name="Google Shape;324;p47"/>
+          <p:cNvSpPr txBox="1">
+            <a:spLocks noGrp="1"/>
+          </p:cNvSpPr>
+          <p:nvPr>
+            <p:ph type="title"/>
+          </p:nvPr>
+        </p:nvSpPr>
+        <p:spPr>
+          <a:xfrm>
+            <a:off x="226208" y="1"/>
+            <a:ext cx="8520600" cy="464980"/>
+          </a:xfrm>
+          <a:prstGeom prst="rect">
+            <a:avLst/>
+          </a:prstGeom>
+        </p:spPr>
+        <p:txBody>
+          <a:bodyPr spcFirstLastPara="1" wrap="square" lIns="91425" tIns="91425" rIns="91425" bIns="91425" anchor="t" anchorCtr="0">
+            <a:noAutofit/>
+          </a:bodyPr>
+          <a:lstStyle/>
+          <a:p>
+            <a:pPr marL="0" lvl="0" indent="0" algn="ctr" rtl="0">
+              <a:spcBef>
+                <a:spcPts val="0"/>
+              </a:spcBef>
+              <a:spcAft>
+                <a:spcPts val="0"/>
+              </a:spcAft>
+              <a:buNone/>
+            </a:pPr>
+            <a:r>
+              <a:rPr lang="en-US" dirty="0"/>
+              <a:t>Use </a:t>
+            </a:r>
+            <a:r>
+              <a:rPr lang="en-US" sz="2400" dirty="0"/>
+              <a:t>Assigned</a:t>
+            </a:r>
+            <a:r>
+              <a:rPr lang="en-US" dirty="0"/>
+              <a:t> Seat</a:t>
+            </a:r>
+            <a:endParaRPr dirty="0"/>
+          </a:p>
+        </p:txBody>
+      </p:sp>
+      <p:sp>
+        <p:nvSpPr>
+          <p:cNvPr id="326" name="Google Shape;326;p47"/>
+          <p:cNvSpPr txBox="1">
+            <a:spLocks noGrp="1"/>
+          </p:cNvSpPr>
+          <p:nvPr>
+            <p:ph type="sldNum" idx="12"/>
+          </p:nvPr>
+        </p:nvSpPr>
+        <p:spPr>
+          <a:xfrm>
+            <a:off x="8472458" y="4663217"/>
+            <a:ext cx="548700" cy="393600"/>
+          </a:xfrm>
+          <a:prstGeom prst="rect">
+            <a:avLst/>
+          </a:prstGeom>
+        </p:spPr>
+        <p:txBody>
+          <a:bodyPr spcFirstLastPara="1" wrap="square" lIns="91425" tIns="91425" rIns="91425" bIns="91425" anchor="ctr" anchorCtr="0">
+            <a:noAutofit/>
+          </a:bodyPr>
+          <a:lstStyle/>
+          <a:p>
+            <a:pPr marL="0" lvl="0" indent="0" algn="r" rtl="0">
+              <a:spcBef>
+                <a:spcPts val="0"/>
+              </a:spcBef>
+              <a:spcAft>
+                <a:spcPts val="0"/>
+              </a:spcAft>
+              <a:buNone/>
+            </a:pPr>
+            <a:fld id="{00000000-1234-1234-1234-123412341234}" type="slidenum">
+              <a:rPr lang="en"/>
+              <a:t>10</a:t>
+            </a:fld>
+            <a:endParaRPr/>
+          </a:p>
+        </p:txBody>
+      </p:sp>
+      <p:pic>
+        <p:nvPicPr>
+          <p:cNvPr id="6" name="Picture 5">
+            <a:extLst>
+              <a:ext uri="{FF2B5EF4-FFF2-40B4-BE49-F238E27FC236}">
+                <a16:creationId xmlns:a16="http://schemas.microsoft.com/office/drawing/2014/main" id="{DED32793-7C09-E3A3-94E5-B5D46727A1D0}"/>
+              </a:ext>
+            </a:extLst>
+          </p:cNvPr>
+          <p:cNvPicPr>
+            <a:picLocks noChangeAspect="1"/>
+          </p:cNvPicPr>
+          <p:nvPr/>
+        </p:nvPicPr>
+        <p:blipFill>
+          <a:blip r:embed="rId3"/>
+          <a:stretch>
+            <a:fillRect/>
+          </a:stretch>
+        </p:blipFill>
+        <p:spPr>
+          <a:xfrm>
+            <a:off x="-1" y="551663"/>
+            <a:ext cx="9144001" cy="4591837"/>
+          </a:xfrm>
+          <a:prstGeom prst="rect">
+            <a:avLst/>
+          </a:prstGeom>
+        </p:spPr>
+      </p:pic>
+    </p:spTree>
+    <p:extLst>
+      <p:ext uri="{BB962C8B-B14F-4D97-AF65-F5344CB8AC3E}">
+        <p14:creationId xmlns:p14="http://schemas.microsoft.com/office/powerpoint/2010/main" val="4226348449"/>
+      </p:ext>
+    </p:extLst>
+  </p:cSld>
+  <p:clrMapOvr>
+    <a:masterClrMapping/>
+  </p:clrMapOvr>
+</p:sld>
+</file>
+
+<file path=ppt/slides/slide11.xml><?xml version="1.0" encoding="utf-8"?>
+<p:sld xmlns:a="http://schemas.openxmlformats.org/drawingml/2006/main" xmlns:r="http://schemas.openxmlformats.org/officeDocument/2006/relationships" xmlns:p="http://schemas.openxmlformats.org/presentationml/2006/main" show="0">
+  <p:cSld>
+    <p:spTree>
+      <p:nvGrpSpPr>
+        <p:cNvPr id="1" name="Shape 323"/>
+        <p:cNvGrpSpPr/>
+        <p:nvPr/>
+      </p:nvGrpSpPr>
+      <p:grpSpPr>
+        <a:xfrm>
+          <a:off x="0" y="0"/>
+          <a:ext cx="0" cy="0"/>
+          <a:chOff x="0" y="0"/>
+          <a:chExt cx="0" cy="0"/>
+        </a:xfrm>
+      </p:grpSpPr>
+      <p:sp>
+        <p:nvSpPr>
+          <p:cNvPr id="324" name="Google Shape;324;p47"/>
+          <p:cNvSpPr txBox="1">
+            <a:spLocks noGrp="1"/>
+          </p:cNvSpPr>
+          <p:nvPr>
+            <p:ph type="title"/>
+          </p:nvPr>
+        </p:nvSpPr>
+        <p:spPr>
+          <a:xfrm>
+            <a:off x="226208" y="1"/>
+            <a:ext cx="8520600" cy="464980"/>
+          </a:xfrm>
+          <a:prstGeom prst="rect">
+            <a:avLst/>
+          </a:prstGeom>
+        </p:spPr>
+        <p:txBody>
+          <a:bodyPr spcFirstLastPara="1" wrap="square" lIns="91425" tIns="91425" rIns="91425" bIns="91425" anchor="t" anchorCtr="0">
+            <a:noAutofit/>
+          </a:bodyPr>
+          <a:lstStyle/>
+          <a:p>
+            <a:pPr marL="0" lvl="0" indent="0" algn="ctr" rtl="0">
+              <a:spcBef>
+                <a:spcPts val="0"/>
+              </a:spcBef>
+              <a:spcAft>
+                <a:spcPts val="0"/>
+              </a:spcAft>
+              <a:buNone/>
+            </a:pPr>
+            <a:r>
+              <a:rPr lang="en-US" dirty="0"/>
+              <a:t>Use </a:t>
+            </a:r>
+            <a:r>
+              <a:rPr lang="en-US" sz="2400" dirty="0"/>
+              <a:t>Assigned</a:t>
+            </a:r>
+            <a:r>
+              <a:rPr lang="en-US" dirty="0"/>
+              <a:t> Seat</a:t>
+            </a:r>
+            <a:endParaRPr dirty="0"/>
+          </a:p>
+        </p:txBody>
+      </p:sp>
+      <p:sp>
+        <p:nvSpPr>
+          <p:cNvPr id="326" name="Google Shape;326;p47"/>
+          <p:cNvSpPr txBox="1">
+            <a:spLocks noGrp="1"/>
+          </p:cNvSpPr>
+          <p:nvPr>
+            <p:ph type="sldNum" idx="12"/>
+          </p:nvPr>
+        </p:nvSpPr>
+        <p:spPr>
+          <a:xfrm>
+            <a:off x="8472458" y="4663217"/>
+            <a:ext cx="548700" cy="393600"/>
+          </a:xfrm>
+          <a:prstGeom prst="rect">
+            <a:avLst/>
+          </a:prstGeom>
+        </p:spPr>
+        <p:txBody>
+          <a:bodyPr spcFirstLastPara="1" wrap="square" lIns="91425" tIns="91425" rIns="91425" bIns="91425" anchor="ctr" anchorCtr="0">
+            <a:noAutofit/>
+          </a:bodyPr>
+          <a:lstStyle/>
+          <a:p>
+            <a:pPr marL="0" lvl="0" indent="0" algn="r" rtl="0">
+              <a:spcBef>
+                <a:spcPts val="0"/>
+              </a:spcBef>
+              <a:spcAft>
+                <a:spcPts val="0"/>
+              </a:spcAft>
+              <a:buNone/>
+            </a:pPr>
+            <a:fld id="{00000000-1234-1234-1234-123412341234}" type="slidenum">
+              <a:rPr lang="en"/>
+              <a:t>11</a:t>
+            </a:fld>
+            <a:endParaRPr/>
+          </a:p>
+        </p:txBody>
+      </p:sp>
+      <p:pic>
+        <p:nvPicPr>
+          <p:cNvPr id="3" name="Picture 2">
+            <a:extLst>
+              <a:ext uri="{FF2B5EF4-FFF2-40B4-BE49-F238E27FC236}">
+                <a16:creationId xmlns:a16="http://schemas.microsoft.com/office/drawing/2014/main" id="{92DE4AAC-70FE-A114-5258-F5B22EDDED45}"/>
+              </a:ext>
+            </a:extLst>
+          </p:cNvPr>
+          <p:cNvPicPr>
+            <a:picLocks noChangeAspect="1"/>
+          </p:cNvPicPr>
+          <p:nvPr/>
+        </p:nvPicPr>
+        <p:blipFill>
+          <a:blip r:embed="rId3"/>
+          <a:stretch>
+            <a:fillRect/>
+          </a:stretch>
+        </p:blipFill>
+        <p:spPr>
+          <a:xfrm>
+            <a:off x="0" y="716280"/>
+            <a:ext cx="9144000" cy="4427218"/>
+          </a:xfrm>
+          <a:prstGeom prst="rect">
+            <a:avLst/>
+          </a:prstGeom>
+        </p:spPr>
+      </p:pic>
+    </p:spTree>
+    <p:extLst>
+      <p:ext uri="{BB962C8B-B14F-4D97-AF65-F5344CB8AC3E}">
+        <p14:creationId xmlns:p14="http://schemas.microsoft.com/office/powerpoint/2010/main" val="1976403023"/>
+      </p:ext>
+    </p:extLst>
+  </p:cSld>
+  <p:clrMapOvr>
+    <a:masterClrMapping/>
+  </p:clrMapOvr>
+</p:sld>
+</file>
+
+<file path=ppt/slides/slide12.xml><?xml version="1.0" encoding="utf-8"?>
+<p:sld xmlns:a="http://schemas.openxmlformats.org/drawingml/2006/main" xmlns:r="http://schemas.openxmlformats.org/officeDocument/2006/relationships" xmlns:p="http://schemas.openxmlformats.org/presentationml/2006/main" show="0">
+  <p:cSld>
+    <p:spTree>
+      <p:nvGrpSpPr>
+        <p:cNvPr id="1" name="Shape 323"/>
+        <p:cNvGrpSpPr/>
+        <p:nvPr/>
+      </p:nvGrpSpPr>
+      <p:grpSpPr>
+        <a:xfrm>
+          <a:off x="0" y="0"/>
+          <a:ext cx="0" cy="0"/>
+          <a:chOff x="0" y="0"/>
+          <a:chExt cx="0" cy="0"/>
+        </a:xfrm>
+      </p:grpSpPr>
+      <p:sp>
+        <p:nvSpPr>
+          <p:cNvPr id="324" name="Google Shape;324;p47"/>
+          <p:cNvSpPr txBox="1">
+            <a:spLocks noGrp="1"/>
+          </p:cNvSpPr>
+          <p:nvPr>
+            <p:ph type="title"/>
+          </p:nvPr>
+        </p:nvSpPr>
+        <p:spPr>
+          <a:xfrm>
+            <a:off x="226208" y="1"/>
+            <a:ext cx="8520600" cy="464980"/>
+          </a:xfrm>
+          <a:prstGeom prst="rect">
+            <a:avLst/>
+          </a:prstGeom>
+        </p:spPr>
+        <p:txBody>
+          <a:bodyPr spcFirstLastPara="1" wrap="square" lIns="91425" tIns="91425" rIns="91425" bIns="91425" anchor="t" anchorCtr="0">
+            <a:noAutofit/>
+          </a:bodyPr>
+          <a:lstStyle/>
+          <a:p>
+            <a:pPr marL="0" lvl="0" indent="0" algn="ctr" rtl="0">
+              <a:spcBef>
+                <a:spcPts val="0"/>
+              </a:spcBef>
+              <a:spcAft>
+                <a:spcPts val="0"/>
+              </a:spcAft>
+              <a:buNone/>
+            </a:pPr>
+            <a:r>
+              <a:rPr lang="en-US" dirty="0"/>
+              <a:t>Use </a:t>
+            </a:r>
+            <a:r>
+              <a:rPr lang="en-US" sz="2400" dirty="0"/>
+              <a:t>Assigned</a:t>
+            </a:r>
+            <a:r>
+              <a:rPr lang="en-US" dirty="0"/>
+              <a:t> Seat</a:t>
+            </a:r>
+            <a:endParaRPr dirty="0"/>
+          </a:p>
+        </p:txBody>
+      </p:sp>
+      <p:sp>
+        <p:nvSpPr>
+          <p:cNvPr id="326" name="Google Shape;326;p47"/>
+          <p:cNvSpPr txBox="1">
+            <a:spLocks noGrp="1"/>
+          </p:cNvSpPr>
+          <p:nvPr>
+            <p:ph type="sldNum" idx="12"/>
+          </p:nvPr>
+        </p:nvSpPr>
+        <p:spPr>
+          <a:xfrm>
+            <a:off x="8472458" y="4663217"/>
+            <a:ext cx="548700" cy="393600"/>
+          </a:xfrm>
+          <a:prstGeom prst="rect">
+            <a:avLst/>
+          </a:prstGeom>
+        </p:spPr>
+        <p:txBody>
+          <a:bodyPr spcFirstLastPara="1" wrap="square" lIns="91425" tIns="91425" rIns="91425" bIns="91425" anchor="ctr" anchorCtr="0">
+            <a:noAutofit/>
+          </a:bodyPr>
+          <a:lstStyle/>
+          <a:p>
+            <a:pPr marL="0" lvl="0" indent="0" algn="r" rtl="0">
+              <a:spcBef>
+                <a:spcPts val="0"/>
+              </a:spcBef>
+              <a:spcAft>
+                <a:spcPts val="0"/>
+              </a:spcAft>
+              <a:buNone/>
+            </a:pPr>
+            <a:fld id="{00000000-1234-1234-1234-123412341234}" type="slidenum">
+              <a:rPr lang="en"/>
+              <a:t>12</a:t>
+            </a:fld>
+            <a:endParaRPr/>
+          </a:p>
+        </p:txBody>
+      </p:sp>
+      <p:pic>
+        <p:nvPicPr>
+          <p:cNvPr id="4" name="Picture 3">
+            <a:extLst>
+              <a:ext uri="{FF2B5EF4-FFF2-40B4-BE49-F238E27FC236}">
+                <a16:creationId xmlns:a16="http://schemas.microsoft.com/office/drawing/2014/main" id="{DCD752B9-EFAE-AFC1-7D39-6763B89DE8D3}"/>
+              </a:ext>
+            </a:extLst>
+          </p:cNvPr>
+          <p:cNvPicPr>
+            <a:picLocks noChangeAspect="1"/>
+          </p:cNvPicPr>
+          <p:nvPr/>
+        </p:nvPicPr>
+        <p:blipFill>
+          <a:blip r:embed="rId3"/>
+          <a:stretch>
+            <a:fillRect/>
+          </a:stretch>
+        </p:blipFill>
+        <p:spPr>
+          <a:xfrm>
+            <a:off x="0" y="652130"/>
+            <a:ext cx="9144000" cy="4491369"/>
+          </a:xfrm>
+          <a:prstGeom prst="rect">
+            <a:avLst/>
+          </a:prstGeom>
+        </p:spPr>
+      </p:pic>
+    </p:spTree>
+    <p:extLst>
+      <p:ext uri="{BB962C8B-B14F-4D97-AF65-F5344CB8AC3E}">
+        <p14:creationId xmlns:p14="http://schemas.microsoft.com/office/powerpoint/2010/main" val="3365057756"/>
+      </p:ext>
+    </p:extLst>
+  </p:cSld>
+  <p:clrMapOvr>
+    <a:masterClrMapping/>
+  </p:clrMapOvr>
+</p:sld>
+</file>
+
+<file path=ppt/slides/slide2.xml><?xml version="1.0" encoding="utf-8"?>
+<p:sld xmlns:a="http://schemas.openxmlformats.org/drawingml/2006/main" xmlns:r="http://schemas.openxmlformats.org/officeDocument/2006/relationships" xmlns:p="http://schemas.openxmlformats.org/presentationml/2006/main" show="0">
+  <p:cSld>
+    <p:spTree>
+      <p:nvGrpSpPr>
+        <p:cNvPr id="1" name="Shape 323"/>
+        <p:cNvGrpSpPr/>
+        <p:nvPr/>
+      </p:nvGrpSpPr>
+      <p:grpSpPr>
+        <a:xfrm>
+          <a:off x="0" y="0"/>
+          <a:ext cx="0" cy="0"/>
+          <a:chOff x="0" y="0"/>
+          <a:chExt cx="0" cy="0"/>
+        </a:xfrm>
+      </p:grpSpPr>
+      <p:sp>
+        <p:nvSpPr>
+          <p:cNvPr id="324" name="Google Shape;324;p47"/>
+          <p:cNvSpPr txBox="1">
+            <a:spLocks noGrp="1"/>
+          </p:cNvSpPr>
+          <p:nvPr>
+            <p:ph type="title"/>
+          </p:nvPr>
+        </p:nvSpPr>
+        <p:spPr>
+          <a:xfrm>
             <a:off x="305858" y="273819"/>
             <a:ext cx="8520600" cy="623700"/>
           </a:xfrm>
@@ -6621,10 +7642,10 @@
             </a:r>
             <a:r>
               <a:rPr lang="en-US" sz="2400" dirty="0"/>
-              <a:t>3</a:t>
+              <a:t>4</a:t>
             </a:r>
             <a:r>
-              <a:rPr lang="pl-PL" sz="2400" dirty="0"/>
+              <a:rPr lang="pl-PL" sz="2400"/>
               <a:t>.</a:t>
             </a:r>
             <a:r>
@@ -6698,7 +7719,7 @@
             </a:pPr>
             <a:fld id="{00000000-1234-1234-1234-123412341234}" type="slidenum">
               <a:rPr lang="en"/>
-              <a:t>1</a:t>
+              <a:t>2</a:t>
             </a:fld>
             <a:endParaRPr/>
           </a:p>
@@ -7101,463 +8122,7 @@
 </p:sld>
 </file>
 
-<file path=ppt/slides/slide10.xml><?xml version="1.0" encoding="utf-8"?>
-<p:sld xmlns:a="http://schemas.openxmlformats.org/drawingml/2006/main" xmlns:r="http://schemas.openxmlformats.org/officeDocument/2006/relationships" xmlns:p="http://schemas.openxmlformats.org/presentationml/2006/main" show="0">
-  <p:cSld>
-    <p:spTree>
-      <p:nvGrpSpPr>
-        <p:cNvPr id="1" name="Shape 323"/>
-        <p:cNvGrpSpPr/>
-        <p:nvPr/>
-      </p:nvGrpSpPr>
-      <p:grpSpPr>
-        <a:xfrm>
-          <a:off x="0" y="0"/>
-          <a:ext cx="0" cy="0"/>
-          <a:chOff x="0" y="0"/>
-          <a:chExt cx="0" cy="0"/>
-        </a:xfrm>
-      </p:grpSpPr>
-      <p:sp>
-        <p:nvSpPr>
-          <p:cNvPr id="324" name="Google Shape;324;p47"/>
-          <p:cNvSpPr txBox="1">
-            <a:spLocks noGrp="1"/>
-          </p:cNvSpPr>
-          <p:nvPr>
-            <p:ph type="title"/>
-          </p:nvPr>
-        </p:nvSpPr>
-        <p:spPr>
-          <a:xfrm>
-            <a:off x="226208" y="1"/>
-            <a:ext cx="8520600" cy="464980"/>
-          </a:xfrm>
-          <a:prstGeom prst="rect">
-            <a:avLst/>
-          </a:prstGeom>
-        </p:spPr>
-        <p:txBody>
-          <a:bodyPr spcFirstLastPara="1" wrap="square" lIns="91425" tIns="91425" rIns="91425" bIns="91425" anchor="t" anchorCtr="0">
-            <a:noAutofit/>
-          </a:bodyPr>
-          <a:lstStyle/>
-          <a:p>
-            <a:pPr marL="0" lvl="0" indent="0" algn="ctr" rtl="0">
-              <a:spcBef>
-                <a:spcPts val="0"/>
-              </a:spcBef>
-              <a:spcAft>
-                <a:spcPts val="0"/>
-              </a:spcAft>
-              <a:buNone/>
-            </a:pPr>
-            <a:r>
-              <a:rPr lang="en-US" dirty="0"/>
-              <a:t>Use </a:t>
-            </a:r>
-            <a:r>
-              <a:rPr lang="en-US" sz="2400" dirty="0"/>
-              <a:t>Assigned</a:t>
-            </a:r>
-            <a:r>
-              <a:rPr lang="en-US" dirty="0"/>
-              <a:t> Seat</a:t>
-            </a:r>
-            <a:endParaRPr dirty="0"/>
-          </a:p>
-        </p:txBody>
-      </p:sp>
-      <p:sp>
-        <p:nvSpPr>
-          <p:cNvPr id="326" name="Google Shape;326;p47"/>
-          <p:cNvSpPr txBox="1">
-            <a:spLocks noGrp="1"/>
-          </p:cNvSpPr>
-          <p:nvPr>
-            <p:ph type="sldNum" idx="12"/>
-          </p:nvPr>
-        </p:nvSpPr>
-        <p:spPr>
-          <a:xfrm>
-            <a:off x="8472458" y="4663217"/>
-            <a:ext cx="548700" cy="393600"/>
-          </a:xfrm>
-          <a:prstGeom prst="rect">
-            <a:avLst/>
-          </a:prstGeom>
-        </p:spPr>
-        <p:txBody>
-          <a:bodyPr spcFirstLastPara="1" wrap="square" lIns="91425" tIns="91425" rIns="91425" bIns="91425" anchor="ctr" anchorCtr="0">
-            <a:noAutofit/>
-          </a:bodyPr>
-          <a:lstStyle/>
-          <a:p>
-            <a:pPr marL="0" lvl="0" indent="0" algn="r" rtl="0">
-              <a:spcBef>
-                <a:spcPts val="0"/>
-              </a:spcBef>
-              <a:spcAft>
-                <a:spcPts val="0"/>
-              </a:spcAft>
-              <a:buNone/>
-            </a:pPr>
-            <a:fld id="{00000000-1234-1234-1234-123412341234}" type="slidenum">
-              <a:rPr lang="en"/>
-              <a:t>10</a:t>
-            </a:fld>
-            <a:endParaRPr/>
-          </a:p>
-        </p:txBody>
-      </p:sp>
-      <p:pic>
-        <p:nvPicPr>
-          <p:cNvPr id="6" name="Picture 5">
-            <a:extLst>
-              <a:ext uri="{FF2B5EF4-FFF2-40B4-BE49-F238E27FC236}">
-                <a16:creationId xmlns:a16="http://schemas.microsoft.com/office/drawing/2014/main" id="{DED32793-7C09-E3A3-94E5-B5D46727A1D0}"/>
-              </a:ext>
-            </a:extLst>
-          </p:cNvPr>
-          <p:cNvPicPr>
-            <a:picLocks noChangeAspect="1"/>
-          </p:cNvPicPr>
-          <p:nvPr/>
-        </p:nvPicPr>
-        <p:blipFill>
-          <a:blip r:embed="rId3"/>
-          <a:stretch>
-            <a:fillRect/>
-          </a:stretch>
-        </p:blipFill>
-        <p:spPr>
-          <a:xfrm>
-            <a:off x="-1" y="551663"/>
-            <a:ext cx="9144001" cy="4591837"/>
-          </a:xfrm>
-          <a:prstGeom prst="rect">
-            <a:avLst/>
-          </a:prstGeom>
-        </p:spPr>
-      </p:pic>
-    </p:spTree>
-    <p:extLst>
-      <p:ext uri="{BB962C8B-B14F-4D97-AF65-F5344CB8AC3E}">
-        <p14:creationId xmlns:p14="http://schemas.microsoft.com/office/powerpoint/2010/main" val="4226348449"/>
-      </p:ext>
-    </p:extLst>
-  </p:cSld>
-  <p:clrMapOvr>
-    <a:masterClrMapping/>
-  </p:clrMapOvr>
-</p:sld>
-</file>
-
-<file path=ppt/slides/slide11.xml><?xml version="1.0" encoding="utf-8"?>
-<p:sld xmlns:a="http://schemas.openxmlformats.org/drawingml/2006/main" xmlns:r="http://schemas.openxmlformats.org/officeDocument/2006/relationships" xmlns:p="http://schemas.openxmlformats.org/presentationml/2006/main" show="0">
-  <p:cSld>
-    <p:spTree>
-      <p:nvGrpSpPr>
-        <p:cNvPr id="1" name="Shape 323"/>
-        <p:cNvGrpSpPr/>
-        <p:nvPr/>
-      </p:nvGrpSpPr>
-      <p:grpSpPr>
-        <a:xfrm>
-          <a:off x="0" y="0"/>
-          <a:ext cx="0" cy="0"/>
-          <a:chOff x="0" y="0"/>
-          <a:chExt cx="0" cy="0"/>
-        </a:xfrm>
-      </p:grpSpPr>
-      <p:sp>
-        <p:nvSpPr>
-          <p:cNvPr id="324" name="Google Shape;324;p47"/>
-          <p:cNvSpPr txBox="1">
-            <a:spLocks noGrp="1"/>
-          </p:cNvSpPr>
-          <p:nvPr>
-            <p:ph type="title"/>
-          </p:nvPr>
-        </p:nvSpPr>
-        <p:spPr>
-          <a:xfrm>
-            <a:off x="226208" y="1"/>
-            <a:ext cx="8520600" cy="464980"/>
-          </a:xfrm>
-          <a:prstGeom prst="rect">
-            <a:avLst/>
-          </a:prstGeom>
-        </p:spPr>
-        <p:txBody>
-          <a:bodyPr spcFirstLastPara="1" wrap="square" lIns="91425" tIns="91425" rIns="91425" bIns="91425" anchor="t" anchorCtr="0">
-            <a:noAutofit/>
-          </a:bodyPr>
-          <a:lstStyle/>
-          <a:p>
-            <a:pPr marL="0" lvl="0" indent="0" algn="ctr" rtl="0">
-              <a:spcBef>
-                <a:spcPts val="0"/>
-              </a:spcBef>
-              <a:spcAft>
-                <a:spcPts val="0"/>
-              </a:spcAft>
-              <a:buNone/>
-            </a:pPr>
-            <a:r>
-              <a:rPr lang="en-US" dirty="0"/>
-              <a:t>Use </a:t>
-            </a:r>
-            <a:r>
-              <a:rPr lang="en-US" sz="2400" dirty="0"/>
-              <a:t>Assigned</a:t>
-            </a:r>
-            <a:r>
-              <a:rPr lang="en-US" dirty="0"/>
-              <a:t> Seat</a:t>
-            </a:r>
-            <a:endParaRPr dirty="0"/>
-          </a:p>
-        </p:txBody>
-      </p:sp>
-      <p:sp>
-        <p:nvSpPr>
-          <p:cNvPr id="326" name="Google Shape;326;p47"/>
-          <p:cNvSpPr txBox="1">
-            <a:spLocks noGrp="1"/>
-          </p:cNvSpPr>
-          <p:nvPr>
-            <p:ph type="sldNum" idx="12"/>
-          </p:nvPr>
-        </p:nvSpPr>
-        <p:spPr>
-          <a:xfrm>
-            <a:off x="8472458" y="4663217"/>
-            <a:ext cx="548700" cy="393600"/>
-          </a:xfrm>
-          <a:prstGeom prst="rect">
-            <a:avLst/>
-          </a:prstGeom>
-        </p:spPr>
-        <p:txBody>
-          <a:bodyPr spcFirstLastPara="1" wrap="square" lIns="91425" tIns="91425" rIns="91425" bIns="91425" anchor="ctr" anchorCtr="0">
-            <a:noAutofit/>
-          </a:bodyPr>
-          <a:lstStyle/>
-          <a:p>
-            <a:pPr marL="0" lvl="0" indent="0" algn="r" rtl="0">
-              <a:spcBef>
-                <a:spcPts val="0"/>
-              </a:spcBef>
-              <a:spcAft>
-                <a:spcPts val="0"/>
-              </a:spcAft>
-              <a:buNone/>
-            </a:pPr>
-            <a:fld id="{00000000-1234-1234-1234-123412341234}" type="slidenum">
-              <a:rPr lang="en"/>
-              <a:t>11</a:t>
-            </a:fld>
-            <a:endParaRPr/>
-          </a:p>
-        </p:txBody>
-      </p:sp>
-      <p:pic>
-        <p:nvPicPr>
-          <p:cNvPr id="3" name="Picture 2">
-            <a:extLst>
-              <a:ext uri="{FF2B5EF4-FFF2-40B4-BE49-F238E27FC236}">
-                <a16:creationId xmlns:a16="http://schemas.microsoft.com/office/drawing/2014/main" id="{92DE4AAC-70FE-A114-5258-F5B22EDDED45}"/>
-              </a:ext>
-            </a:extLst>
-          </p:cNvPr>
-          <p:cNvPicPr>
-            <a:picLocks noChangeAspect="1"/>
-          </p:cNvPicPr>
-          <p:nvPr/>
-        </p:nvPicPr>
-        <p:blipFill>
-          <a:blip r:embed="rId3"/>
-          <a:stretch>
-            <a:fillRect/>
-          </a:stretch>
-        </p:blipFill>
-        <p:spPr>
-          <a:xfrm>
-            <a:off x="0" y="716280"/>
-            <a:ext cx="9144000" cy="4427218"/>
-          </a:xfrm>
-          <a:prstGeom prst="rect">
-            <a:avLst/>
-          </a:prstGeom>
-        </p:spPr>
-      </p:pic>
-    </p:spTree>
-    <p:extLst>
-      <p:ext uri="{BB962C8B-B14F-4D97-AF65-F5344CB8AC3E}">
-        <p14:creationId xmlns:p14="http://schemas.microsoft.com/office/powerpoint/2010/main" val="1976403023"/>
-      </p:ext>
-    </p:extLst>
-  </p:cSld>
-  <p:clrMapOvr>
-    <a:masterClrMapping/>
-  </p:clrMapOvr>
-</p:sld>
-</file>
-
-<file path=ppt/slides/slide12.xml><?xml version="1.0" encoding="utf-8"?>
-<p:sld xmlns:a="http://schemas.openxmlformats.org/drawingml/2006/main" xmlns:r="http://schemas.openxmlformats.org/officeDocument/2006/relationships" xmlns:p="http://schemas.openxmlformats.org/presentationml/2006/main" show="0">
-  <p:cSld>
-    <p:spTree>
-      <p:nvGrpSpPr>
-        <p:cNvPr id="1" name="Shape 323"/>
-        <p:cNvGrpSpPr/>
-        <p:nvPr/>
-      </p:nvGrpSpPr>
-      <p:grpSpPr>
-        <a:xfrm>
-          <a:off x="0" y="0"/>
-          <a:ext cx="0" cy="0"/>
-          <a:chOff x="0" y="0"/>
-          <a:chExt cx="0" cy="0"/>
-        </a:xfrm>
-      </p:grpSpPr>
-      <p:sp>
-        <p:nvSpPr>
-          <p:cNvPr id="324" name="Google Shape;324;p47"/>
-          <p:cNvSpPr txBox="1">
-            <a:spLocks noGrp="1"/>
-          </p:cNvSpPr>
-          <p:nvPr>
-            <p:ph type="title"/>
-          </p:nvPr>
-        </p:nvSpPr>
-        <p:spPr>
-          <a:xfrm>
-            <a:off x="226208" y="1"/>
-            <a:ext cx="8520600" cy="464980"/>
-          </a:xfrm>
-          <a:prstGeom prst="rect">
-            <a:avLst/>
-          </a:prstGeom>
-        </p:spPr>
-        <p:txBody>
-          <a:bodyPr spcFirstLastPara="1" wrap="square" lIns="91425" tIns="91425" rIns="91425" bIns="91425" anchor="t" anchorCtr="0">
-            <a:noAutofit/>
-          </a:bodyPr>
-          <a:lstStyle/>
-          <a:p>
-            <a:pPr marL="0" lvl="0" indent="0" algn="ctr" rtl="0">
-              <a:spcBef>
-                <a:spcPts val="0"/>
-              </a:spcBef>
-              <a:spcAft>
-                <a:spcPts val="0"/>
-              </a:spcAft>
-              <a:buNone/>
-            </a:pPr>
-            <a:r>
-              <a:rPr lang="en-US" dirty="0"/>
-              <a:t>Use </a:t>
-            </a:r>
-            <a:r>
-              <a:rPr lang="en-US" sz="2400" dirty="0"/>
-              <a:t>Assigned</a:t>
-            </a:r>
-            <a:r>
-              <a:rPr lang="en-US" dirty="0"/>
-              <a:t> Seat</a:t>
-            </a:r>
-            <a:endParaRPr dirty="0"/>
-          </a:p>
-        </p:txBody>
-      </p:sp>
-      <p:sp>
-        <p:nvSpPr>
-          <p:cNvPr id="326" name="Google Shape;326;p47"/>
-          <p:cNvSpPr txBox="1">
-            <a:spLocks noGrp="1"/>
-          </p:cNvSpPr>
-          <p:nvPr>
-            <p:ph type="sldNum" idx="12"/>
-          </p:nvPr>
-        </p:nvSpPr>
-        <p:spPr>
-          <a:xfrm>
-            <a:off x="8472458" y="4663217"/>
-            <a:ext cx="548700" cy="393600"/>
-          </a:xfrm>
-          <a:prstGeom prst="rect">
-            <a:avLst/>
-          </a:prstGeom>
-        </p:spPr>
-        <p:txBody>
-          <a:bodyPr spcFirstLastPara="1" wrap="square" lIns="91425" tIns="91425" rIns="91425" bIns="91425" anchor="ctr" anchorCtr="0">
-            <a:noAutofit/>
-          </a:bodyPr>
-          <a:lstStyle/>
-          <a:p>
-            <a:pPr marL="0" lvl="0" indent="0" algn="r" rtl="0">
-              <a:spcBef>
-                <a:spcPts val="0"/>
-              </a:spcBef>
-              <a:spcAft>
-                <a:spcPts val="0"/>
-              </a:spcAft>
-              <a:buNone/>
-            </a:pPr>
-            <a:fld id="{00000000-1234-1234-1234-123412341234}" type="slidenum">
-              <a:rPr lang="en"/>
-              <a:t>12</a:t>
-            </a:fld>
-            <a:endParaRPr/>
-          </a:p>
-        </p:txBody>
-      </p:sp>
-      <p:pic>
-        <p:nvPicPr>
-          <p:cNvPr id="4" name="Picture 3">
-            <a:extLst>
-              <a:ext uri="{FF2B5EF4-FFF2-40B4-BE49-F238E27FC236}">
-                <a16:creationId xmlns:a16="http://schemas.microsoft.com/office/drawing/2014/main" id="{DCD752B9-EFAE-AFC1-7D39-6763B89DE8D3}"/>
-              </a:ext>
-            </a:extLst>
-          </p:cNvPr>
-          <p:cNvPicPr>
-            <a:picLocks noChangeAspect="1"/>
-          </p:cNvPicPr>
-          <p:nvPr/>
-        </p:nvPicPr>
-        <p:blipFill>
-          <a:blip r:embed="rId3"/>
-          <a:stretch>
-            <a:fillRect/>
-          </a:stretch>
-        </p:blipFill>
-        <p:spPr>
-          <a:xfrm>
-            <a:off x="0" y="652130"/>
-            <a:ext cx="9144000" cy="4491369"/>
-          </a:xfrm>
-          <a:prstGeom prst="rect">
-            <a:avLst/>
-          </a:prstGeom>
-        </p:spPr>
-      </p:pic>
-    </p:spTree>
-    <p:extLst>
-      <p:ext uri="{BB962C8B-B14F-4D97-AF65-F5344CB8AC3E}">
-        <p14:creationId xmlns:p14="http://schemas.microsoft.com/office/powerpoint/2010/main" val="3365057756"/>
-      </p:ext>
-    </p:extLst>
-  </p:cSld>
-  <p:clrMapOvr>
-    <a:masterClrMapping/>
-  </p:clrMapOvr>
-</p:sld>
-</file>
-
-<file path=ppt/slides/slide2.xml><?xml version="1.0" encoding="utf-8"?>
+<file path=ppt/slides/slide3.xml><?xml version="1.0" encoding="utf-8"?>
 <p:sld xmlns:a="http://schemas.openxmlformats.org/drawingml/2006/main" xmlns:r="http://schemas.openxmlformats.org/officeDocument/2006/relationships" xmlns:p="http://schemas.openxmlformats.org/presentationml/2006/main" show="0">
   <p:cSld>
     <p:spTree>
@@ -7737,7 +8302,7 @@
             </a:pPr>
             <a:fld id="{00000000-1234-1234-1234-123412341234}" type="slidenum">
               <a:rPr lang="en"/>
-              <a:t>2</a:t>
+              <a:t>3</a:t>
             </a:fld>
             <a:endParaRPr/>
           </a:p>
@@ -8470,571 +9035,6 @@
     <p:extLst>
       <p:ext uri="{BB962C8B-B14F-4D97-AF65-F5344CB8AC3E}">
         <p14:creationId xmlns:p14="http://schemas.microsoft.com/office/powerpoint/2010/main" val="674272117"/>
-      </p:ext>
-    </p:extLst>
-  </p:cSld>
-  <p:clrMapOvr>
-    <a:masterClrMapping/>
-  </p:clrMapOvr>
-</p:sld>
-</file>
-
-<file path=ppt/slides/slide3.xml><?xml version="1.0" encoding="utf-8"?>
-<p:sld xmlns:a="http://schemas.openxmlformats.org/drawingml/2006/main" xmlns:r="http://schemas.openxmlformats.org/officeDocument/2006/relationships" xmlns:p="http://schemas.openxmlformats.org/presentationml/2006/main" show="0">
-  <p:cSld>
-    <p:spTree>
-      <p:nvGrpSpPr>
-        <p:cNvPr id="1" name="Shape 323"/>
-        <p:cNvGrpSpPr/>
-        <p:nvPr/>
-      </p:nvGrpSpPr>
-      <p:grpSpPr>
-        <a:xfrm>
-          <a:off x="0" y="0"/>
-          <a:ext cx="0" cy="0"/>
-          <a:chOff x="0" y="0"/>
-          <a:chExt cx="0" cy="0"/>
-        </a:xfrm>
-      </p:grpSpPr>
-      <p:sp>
-        <p:nvSpPr>
-          <p:cNvPr id="324" name="Google Shape;324;p47"/>
-          <p:cNvSpPr txBox="1">
-            <a:spLocks noGrp="1"/>
-          </p:cNvSpPr>
-          <p:nvPr>
-            <p:ph type="title"/>
-          </p:nvPr>
-        </p:nvSpPr>
-        <p:spPr>
-          <a:xfrm>
-            <a:off x="314621" y="235914"/>
-            <a:ext cx="8520600" cy="623700"/>
-          </a:xfrm>
-          <a:prstGeom prst="rect">
-            <a:avLst/>
-          </a:prstGeom>
-        </p:spPr>
-        <p:txBody>
-          <a:bodyPr spcFirstLastPara="1" wrap="square" lIns="91425" tIns="91425" rIns="91425" bIns="91425" anchor="t" anchorCtr="0">
-            <a:noAutofit/>
-          </a:bodyPr>
-          <a:lstStyle/>
-          <a:p>
-            <a:pPr marL="0" lvl="0" indent="0" algn="ctr" rtl="0">
-              <a:spcBef>
-                <a:spcPts val="0"/>
-              </a:spcBef>
-              <a:spcAft>
-                <a:spcPts val="0"/>
-              </a:spcAft>
-              <a:buNone/>
-            </a:pPr>
-            <a:r>
-              <a:rPr lang="en-US" dirty="0"/>
-              <a:t>GCIS – Software Development and Problem Solving</a:t>
-            </a:r>
-            <a:endParaRPr dirty="0"/>
-          </a:p>
-        </p:txBody>
-      </p:sp>
-      <p:sp>
-        <p:nvSpPr>
-          <p:cNvPr id="325" name="Google Shape;325;p47"/>
-          <p:cNvSpPr txBox="1">
-            <a:spLocks noGrp="1"/>
-          </p:cNvSpPr>
-          <p:nvPr>
-            <p:ph type="body" idx="1"/>
-          </p:nvPr>
-        </p:nvSpPr>
-        <p:spPr>
-          <a:xfrm>
-            <a:off x="0" y="1856257"/>
-            <a:ext cx="9149842" cy="1226403"/>
-          </a:xfrm>
-          <a:prstGeom prst="rect">
-            <a:avLst/>
-          </a:prstGeom>
-        </p:spPr>
-        <p:txBody>
-          <a:bodyPr spcFirstLastPara="1" wrap="square" lIns="91425" tIns="91425" rIns="91425" bIns="91425" anchor="ctr" anchorCtr="0">
-            <a:noAutofit/>
-          </a:bodyPr>
-          <a:lstStyle/>
-          <a:p>
-            <a:pPr marL="146050" indent="0" algn="ctr">
-              <a:buNone/>
-            </a:pPr>
-            <a:r>
-              <a:rPr lang="en-US" sz="2400" dirty="0"/>
-              <a:t>Take Quiz – Final Exam</a:t>
-            </a:r>
-          </a:p>
-          <a:p>
-            <a:pPr marL="146050" indent="0" algn="ctr">
-              <a:buNone/>
-            </a:pPr>
-            <a:r>
-              <a:rPr lang="en-US" sz="3200" b="1" dirty="0">
-                <a:solidFill>
-                  <a:schemeClr val="tx1"/>
-                </a:solidFill>
-              </a:rPr>
-              <a:t>Password - 2025FinalCountdown</a:t>
-            </a:r>
-            <a:endParaRPr sz="3200" b="1" dirty="0">
-              <a:solidFill>
-                <a:schemeClr val="tx1"/>
-              </a:solidFill>
-              <a:highlight>
-                <a:srgbClr val="FFFF00"/>
-              </a:highlight>
-            </a:endParaRPr>
-          </a:p>
-        </p:txBody>
-      </p:sp>
-      <p:sp>
-        <p:nvSpPr>
-          <p:cNvPr id="326" name="Google Shape;326;p47"/>
-          <p:cNvSpPr txBox="1">
-            <a:spLocks noGrp="1"/>
-          </p:cNvSpPr>
-          <p:nvPr>
-            <p:ph type="sldNum" idx="12"/>
-          </p:nvPr>
-        </p:nvSpPr>
-        <p:spPr>
-          <a:xfrm>
-            <a:off x="8472458" y="4663217"/>
-            <a:ext cx="548700" cy="393600"/>
-          </a:xfrm>
-          <a:prstGeom prst="rect">
-            <a:avLst/>
-          </a:prstGeom>
-        </p:spPr>
-        <p:txBody>
-          <a:bodyPr spcFirstLastPara="1" wrap="square" lIns="91425" tIns="91425" rIns="91425" bIns="91425" anchor="ctr" anchorCtr="0">
-            <a:noAutofit/>
-          </a:bodyPr>
-          <a:lstStyle/>
-          <a:p>
-            <a:pPr marL="0" lvl="0" indent="0" algn="r" rtl="0">
-              <a:spcBef>
-                <a:spcPts val="0"/>
-              </a:spcBef>
-              <a:spcAft>
-                <a:spcPts val="0"/>
-              </a:spcAft>
-              <a:buNone/>
-            </a:pPr>
-            <a:fld id="{00000000-1234-1234-1234-123412341234}" type="slidenum">
-              <a:rPr lang="en"/>
-              <a:t>3</a:t>
-            </a:fld>
-            <a:endParaRPr/>
-          </a:p>
-        </p:txBody>
-      </p:sp>
-      <p:sp>
-        <p:nvSpPr>
-          <p:cNvPr id="2" name="TextBox 1">
-            <a:extLst>
-              <a:ext uri="{FF2B5EF4-FFF2-40B4-BE49-F238E27FC236}">
-                <a16:creationId xmlns:a16="http://schemas.microsoft.com/office/drawing/2014/main" id="{DCC33EBB-1C9D-B9A9-88E6-F3466077417F}"/>
-              </a:ext>
-            </a:extLst>
-          </p:cNvPr>
-          <p:cNvSpPr txBox="1"/>
-          <p:nvPr/>
-        </p:nvSpPr>
-        <p:spPr>
-          <a:xfrm>
-            <a:off x="-5842" y="1277369"/>
-            <a:ext cx="9144000" cy="307777"/>
-          </a:xfrm>
-          <a:prstGeom prst="rect">
-            <a:avLst/>
-          </a:prstGeom>
-          <a:solidFill>
-            <a:srgbClr val="FFC000"/>
-          </a:solidFill>
-        </p:spPr>
-        <p:txBody>
-          <a:bodyPr wrap="square" rtlCol="0">
-            <a:spAutoFit/>
-          </a:bodyPr>
-          <a:lstStyle/>
-          <a:p>
-            <a:pPr algn="ctr"/>
-            <a:r>
-              <a:rPr lang="en-US" b="1" dirty="0"/>
-              <a:t>Final Exam - Written</a:t>
-            </a:r>
-          </a:p>
-        </p:txBody>
-      </p:sp>
-      <p:sp>
-        <p:nvSpPr>
-          <p:cNvPr id="3" name="TextBox 2">
-            <a:extLst>
-              <a:ext uri="{FF2B5EF4-FFF2-40B4-BE49-F238E27FC236}">
-                <a16:creationId xmlns:a16="http://schemas.microsoft.com/office/drawing/2014/main" id="{25A19346-2F9F-0DB9-0B08-CF872EB1D563}"/>
-              </a:ext>
-            </a:extLst>
-          </p:cNvPr>
-          <p:cNvSpPr txBox="1"/>
-          <p:nvPr/>
-        </p:nvSpPr>
-        <p:spPr>
-          <a:xfrm>
-            <a:off x="0" y="3313985"/>
-            <a:ext cx="9144000" cy="307777"/>
-          </a:xfrm>
-          <a:prstGeom prst="rect">
-            <a:avLst/>
-          </a:prstGeom>
-          <a:solidFill>
-            <a:srgbClr val="FFC000"/>
-          </a:solidFill>
-        </p:spPr>
-        <p:txBody>
-          <a:bodyPr wrap="square" rtlCol="0">
-            <a:spAutoFit/>
-          </a:bodyPr>
-          <a:lstStyle/>
-          <a:p>
-            <a:r>
-              <a:rPr lang="en-US" dirty="0"/>
-              <a:t>Practicum</a:t>
-            </a:r>
-          </a:p>
-        </p:txBody>
-      </p:sp>
-      <p:sp>
-        <p:nvSpPr>
-          <p:cNvPr id="4" name="Google Shape;325;p47">
-            <a:extLst>
-              <a:ext uri="{FF2B5EF4-FFF2-40B4-BE49-F238E27FC236}">
-                <a16:creationId xmlns:a16="http://schemas.microsoft.com/office/drawing/2014/main" id="{11D0E6FB-E344-369B-CE83-B3CF5834F823}"/>
-              </a:ext>
-            </a:extLst>
-          </p:cNvPr>
-          <p:cNvSpPr txBox="1">
-            <a:spLocks/>
-          </p:cNvSpPr>
-          <p:nvPr/>
-        </p:nvSpPr>
-        <p:spPr>
-          <a:xfrm>
-            <a:off x="122842" y="3621762"/>
-            <a:ext cx="8478300" cy="1435054"/>
-          </a:xfrm>
-          <a:prstGeom prst="rect">
-            <a:avLst/>
-          </a:prstGeom>
-          <a:noFill/>
-          <a:ln>
-            <a:noFill/>
-          </a:ln>
-        </p:spPr>
-        <p:txBody>
-          <a:bodyPr spcFirstLastPara="1" wrap="square" lIns="91425" tIns="91425" rIns="91425" bIns="91425" anchor="ctr" anchorCtr="0">
-            <a:noAutofit/>
-          </a:bodyPr>
-          <a:lstStyle>
-            <a:defPPr marR="0" lvl="0" algn="l" rtl="0">
-              <a:lnSpc>
-                <a:spcPct val="100000"/>
-              </a:lnSpc>
-              <a:spcBef>
-                <a:spcPts val="0"/>
-              </a:spcBef>
-              <a:spcAft>
-                <a:spcPts val="0"/>
-              </a:spcAft>
-            </a:defPPr>
-            <a:lvl1pPr marL="457200" marR="0" lvl="0" indent="-311150" algn="l" rtl="0">
-              <a:lnSpc>
-                <a:spcPct val="115000"/>
-              </a:lnSpc>
-              <a:spcBef>
-                <a:spcPts val="0"/>
-              </a:spcBef>
-              <a:spcAft>
-                <a:spcPts val="0"/>
-              </a:spcAft>
-              <a:buClr>
-                <a:schemeClr val="dk2"/>
-              </a:buClr>
-              <a:buSzPts val="1300"/>
-              <a:buFont typeface="Roboto"/>
-              <a:buChar char="●"/>
-              <a:defRPr sz="1300" b="0" i="0" u="none" strike="noStrike" cap="none">
-                <a:solidFill>
-                  <a:schemeClr val="dk2"/>
-                </a:solidFill>
-                <a:latin typeface="Roboto"/>
-                <a:ea typeface="Roboto"/>
-                <a:cs typeface="Roboto"/>
-                <a:sym typeface="Roboto"/>
-              </a:defRPr>
-            </a:lvl1pPr>
-            <a:lvl2pPr marL="914400" marR="0" lvl="1" indent="-298450" algn="l" rtl="0">
-              <a:lnSpc>
-                <a:spcPct val="115000"/>
-              </a:lnSpc>
-              <a:spcBef>
-                <a:spcPts val="1600"/>
-              </a:spcBef>
-              <a:spcAft>
-                <a:spcPts val="0"/>
-              </a:spcAft>
-              <a:buClr>
-                <a:schemeClr val="dk2"/>
-              </a:buClr>
-              <a:buSzPts val="1100"/>
-              <a:buFont typeface="Roboto"/>
-              <a:buChar char="○"/>
-              <a:defRPr sz="1100" b="0" i="0" u="none" strike="noStrike" cap="none">
-                <a:solidFill>
-                  <a:schemeClr val="dk2"/>
-                </a:solidFill>
-                <a:latin typeface="Roboto"/>
-                <a:ea typeface="Roboto"/>
-                <a:cs typeface="Roboto"/>
-                <a:sym typeface="Roboto"/>
-              </a:defRPr>
-            </a:lvl2pPr>
-            <a:lvl3pPr marL="1371600" marR="0" lvl="2" indent="-298450" algn="l" rtl="0">
-              <a:lnSpc>
-                <a:spcPct val="115000"/>
-              </a:lnSpc>
-              <a:spcBef>
-                <a:spcPts val="1600"/>
-              </a:spcBef>
-              <a:spcAft>
-                <a:spcPts val="0"/>
-              </a:spcAft>
-              <a:buClr>
-                <a:schemeClr val="dk2"/>
-              </a:buClr>
-              <a:buSzPts val="1100"/>
-              <a:buFont typeface="Roboto"/>
-              <a:buChar char="■"/>
-              <a:defRPr sz="1100" b="0" i="0" u="none" strike="noStrike" cap="none">
-                <a:solidFill>
-                  <a:schemeClr val="dk2"/>
-                </a:solidFill>
-                <a:latin typeface="Roboto"/>
-                <a:ea typeface="Roboto"/>
-                <a:cs typeface="Roboto"/>
-                <a:sym typeface="Roboto"/>
-              </a:defRPr>
-            </a:lvl3pPr>
-            <a:lvl4pPr marL="1828800" marR="0" lvl="3" indent="-298450" algn="l" rtl="0">
-              <a:lnSpc>
-                <a:spcPct val="115000"/>
-              </a:lnSpc>
-              <a:spcBef>
-                <a:spcPts val="1600"/>
-              </a:spcBef>
-              <a:spcAft>
-                <a:spcPts val="0"/>
-              </a:spcAft>
-              <a:buClr>
-                <a:schemeClr val="dk2"/>
-              </a:buClr>
-              <a:buSzPts val="1100"/>
-              <a:buFont typeface="Roboto"/>
-              <a:buChar char="●"/>
-              <a:defRPr sz="1100" b="0" i="0" u="none" strike="noStrike" cap="none">
-                <a:solidFill>
-                  <a:schemeClr val="dk2"/>
-                </a:solidFill>
-                <a:latin typeface="Roboto"/>
-                <a:ea typeface="Roboto"/>
-                <a:cs typeface="Roboto"/>
-                <a:sym typeface="Roboto"/>
-              </a:defRPr>
-            </a:lvl4pPr>
-            <a:lvl5pPr marL="2286000" marR="0" lvl="4" indent="-298450" algn="l" rtl="0">
-              <a:lnSpc>
-                <a:spcPct val="115000"/>
-              </a:lnSpc>
-              <a:spcBef>
-                <a:spcPts val="1600"/>
-              </a:spcBef>
-              <a:spcAft>
-                <a:spcPts val="0"/>
-              </a:spcAft>
-              <a:buClr>
-                <a:schemeClr val="dk2"/>
-              </a:buClr>
-              <a:buSzPts val="1100"/>
-              <a:buFont typeface="Roboto"/>
-              <a:buChar char="○"/>
-              <a:defRPr sz="1100" b="0" i="0" u="none" strike="noStrike" cap="none">
-                <a:solidFill>
-                  <a:schemeClr val="dk2"/>
-                </a:solidFill>
-                <a:latin typeface="Roboto"/>
-                <a:ea typeface="Roboto"/>
-                <a:cs typeface="Roboto"/>
-                <a:sym typeface="Roboto"/>
-              </a:defRPr>
-            </a:lvl5pPr>
-            <a:lvl6pPr marL="2743200" marR="0" lvl="5" indent="-298450" algn="l" rtl="0">
-              <a:lnSpc>
-                <a:spcPct val="115000"/>
-              </a:lnSpc>
-              <a:spcBef>
-                <a:spcPts val="1600"/>
-              </a:spcBef>
-              <a:spcAft>
-                <a:spcPts val="0"/>
-              </a:spcAft>
-              <a:buClr>
-                <a:schemeClr val="dk2"/>
-              </a:buClr>
-              <a:buSzPts val="1100"/>
-              <a:buFont typeface="Roboto"/>
-              <a:buChar char="■"/>
-              <a:defRPr sz="1100" b="0" i="0" u="none" strike="noStrike" cap="none">
-                <a:solidFill>
-                  <a:schemeClr val="dk2"/>
-                </a:solidFill>
-                <a:latin typeface="Roboto"/>
-                <a:ea typeface="Roboto"/>
-                <a:cs typeface="Roboto"/>
-                <a:sym typeface="Roboto"/>
-              </a:defRPr>
-            </a:lvl6pPr>
-            <a:lvl7pPr marL="3200400" marR="0" lvl="6" indent="-298450" algn="l" rtl="0">
-              <a:lnSpc>
-                <a:spcPct val="115000"/>
-              </a:lnSpc>
-              <a:spcBef>
-                <a:spcPts val="1600"/>
-              </a:spcBef>
-              <a:spcAft>
-                <a:spcPts val="0"/>
-              </a:spcAft>
-              <a:buClr>
-                <a:schemeClr val="dk2"/>
-              </a:buClr>
-              <a:buSzPts val="1100"/>
-              <a:buFont typeface="Roboto"/>
-              <a:buChar char="●"/>
-              <a:defRPr sz="1100" b="0" i="0" u="none" strike="noStrike" cap="none">
-                <a:solidFill>
-                  <a:schemeClr val="dk2"/>
-                </a:solidFill>
-                <a:latin typeface="Roboto"/>
-                <a:ea typeface="Roboto"/>
-                <a:cs typeface="Roboto"/>
-                <a:sym typeface="Roboto"/>
-              </a:defRPr>
-            </a:lvl7pPr>
-            <a:lvl8pPr marL="3657600" marR="0" lvl="7" indent="-298450" algn="l" rtl="0">
-              <a:lnSpc>
-                <a:spcPct val="115000"/>
-              </a:lnSpc>
-              <a:spcBef>
-                <a:spcPts val="1600"/>
-              </a:spcBef>
-              <a:spcAft>
-                <a:spcPts val="0"/>
-              </a:spcAft>
-              <a:buClr>
-                <a:schemeClr val="dk2"/>
-              </a:buClr>
-              <a:buSzPts val="1100"/>
-              <a:buFont typeface="Roboto"/>
-              <a:buChar char="○"/>
-              <a:defRPr sz="1100" b="0" i="0" u="none" strike="noStrike" cap="none">
-                <a:solidFill>
-                  <a:schemeClr val="dk2"/>
-                </a:solidFill>
-                <a:latin typeface="Roboto"/>
-                <a:ea typeface="Roboto"/>
-                <a:cs typeface="Roboto"/>
-                <a:sym typeface="Roboto"/>
-              </a:defRPr>
-            </a:lvl8pPr>
-            <a:lvl9pPr marL="4114800" marR="0" lvl="8" indent="-298450" algn="l" rtl="0">
-              <a:lnSpc>
-                <a:spcPct val="115000"/>
-              </a:lnSpc>
-              <a:spcBef>
-                <a:spcPts val="1600"/>
-              </a:spcBef>
-              <a:spcAft>
-                <a:spcPts val="1600"/>
-              </a:spcAft>
-              <a:buClr>
-                <a:schemeClr val="dk2"/>
-              </a:buClr>
-              <a:buSzPts val="1100"/>
-              <a:buFont typeface="Roboto"/>
-              <a:buChar char="■"/>
-              <a:defRPr sz="1100" b="0" i="0" u="none" strike="noStrike" cap="none">
-                <a:solidFill>
-                  <a:schemeClr val="dk2"/>
-                </a:solidFill>
-                <a:latin typeface="Roboto"/>
-                <a:ea typeface="Roboto"/>
-                <a:cs typeface="Roboto"/>
-                <a:sym typeface="Roboto"/>
-              </a:defRPr>
-            </a:lvl9pPr>
-          </a:lstStyle>
-          <a:p>
-            <a:pPr marL="342900" indent="-342900">
-              <a:spcAft>
-                <a:spcPts val="1600"/>
-              </a:spcAft>
-            </a:pPr>
-            <a:r>
-              <a:rPr lang="en-US" sz="1600" dirty="0"/>
-              <a:t>Accept assignment Final Exam under Instructor -&gt; Alam -&gt; Exam</a:t>
-            </a:r>
-            <a:endParaRPr lang="en-US" sz="1600" dirty="0">
-              <a:solidFill>
-                <a:schemeClr val="tx1"/>
-              </a:solidFill>
-            </a:endParaRPr>
-          </a:p>
-          <a:p>
-            <a:pPr marL="342900" indent="-342900">
-              <a:spcAft>
-                <a:spcPts val="1600"/>
-              </a:spcAft>
-            </a:pPr>
-            <a:r>
-              <a:rPr lang="en-US" sz="1600" dirty="0">
-                <a:solidFill>
-                  <a:schemeClr val="tx1"/>
-                </a:solidFill>
-              </a:rPr>
-              <a:t>Clone the repository for </a:t>
-            </a:r>
-            <a:r>
-              <a:rPr lang="en-US" sz="1600" dirty="0"/>
-              <a:t>Final Exam</a:t>
-            </a:r>
-            <a:endParaRPr lang="en-US" sz="1600" dirty="0">
-              <a:solidFill>
-                <a:schemeClr val="tx1"/>
-              </a:solidFill>
-            </a:endParaRPr>
-          </a:p>
-        </p:txBody>
-      </p:sp>
-    </p:spTree>
-    <p:extLst>
-      <p:ext uri="{BB962C8B-B14F-4D97-AF65-F5344CB8AC3E}">
-        <p14:creationId xmlns:p14="http://schemas.microsoft.com/office/powerpoint/2010/main" val="943055912"/>
       </p:ext>
     </p:extLst>
   </p:cSld>

--- a/Presentation/Announcement.pptx
+++ b/Presentation/Announcement.pptx
@@ -8,9 +8,9 @@
     <p:notesMasterId r:id="rId14"/>
   </p:notesMasterIdLst>
   <p:sldIdLst>
-    <p:sldId id="278" r:id="rId2"/>
-    <p:sldId id="276" r:id="rId3"/>
-    <p:sldId id="286" r:id="rId4"/>
+    <p:sldId id="286" r:id="rId2"/>
+    <p:sldId id="278" r:id="rId3"/>
+    <p:sldId id="276" r:id="rId4"/>
     <p:sldId id="281" r:id="rId5"/>
     <p:sldId id="287" r:id="rId6"/>
     <p:sldId id="285" r:id="rId7"/>
@@ -739,7 +739,13 @@
   <p:cSld>
     <p:spTree>
       <p:nvGrpSpPr>
-        <p:cNvPr id="1" name="Shape 320"/>
+        <p:cNvPr id="1" name="Shape 320">
+          <a:extLst>
+            <a:ext uri="{FF2B5EF4-FFF2-40B4-BE49-F238E27FC236}">
+              <a16:creationId xmlns:a16="http://schemas.microsoft.com/office/drawing/2014/main" id="{5E82D901-7A14-0382-4365-722182C687A8}"/>
+            </a:ext>
+          </a:extLst>
+        </p:cNvPr>
         <p:cNvGrpSpPr/>
         <p:nvPr/>
       </p:nvGrpSpPr>
@@ -753,7 +759,13 @@
       </p:grpSpPr>
       <p:sp>
         <p:nvSpPr>
-          <p:cNvPr id="321" name="Google Shape;321;g8f52c9b70a_3_0:notes"/>
+          <p:cNvPr id="321" name="Google Shape;321;g8f52c9b70a_3_0:notes">
+            <a:extLst>
+              <a:ext uri="{FF2B5EF4-FFF2-40B4-BE49-F238E27FC236}">
+                <a16:creationId xmlns:a16="http://schemas.microsoft.com/office/drawing/2014/main" id="{B8D16220-AF50-7601-71A9-4952749D32CB}"/>
+              </a:ext>
+            </a:extLst>
+          </p:cNvPr>
           <p:cNvSpPr>
             <a:spLocks noGrp="1" noRot="1" noChangeAspect="1"/>
           </p:cNvSpPr>
@@ -794,7 +806,13 @@
       </p:sp>
       <p:sp>
         <p:nvSpPr>
-          <p:cNvPr id="322" name="Google Shape;322;g8f52c9b70a_3_0:notes"/>
+          <p:cNvPr id="322" name="Google Shape;322;g8f52c9b70a_3_0:notes">
+            <a:extLst>
+              <a:ext uri="{FF2B5EF4-FFF2-40B4-BE49-F238E27FC236}">
+                <a16:creationId xmlns:a16="http://schemas.microsoft.com/office/drawing/2014/main" id="{AEA302D2-52D7-97D7-BF6C-781234E92D43}"/>
+              </a:ext>
+            </a:extLst>
+          </p:cNvPr>
           <p:cNvSpPr txBox="1">
             <a:spLocks noGrp="1"/>
           </p:cNvSpPr>
@@ -827,7 +845,7 @@
     </p:spTree>
     <p:extLst>
       <p:ext uri="{BB962C8B-B14F-4D97-AF65-F5344CB8AC3E}">
-        <p14:creationId xmlns:p14="http://schemas.microsoft.com/office/powerpoint/2010/main" val="4097390636"/>
+        <p14:creationId xmlns:p14="http://schemas.microsoft.com/office/powerpoint/2010/main" val="2483524941"/>
       </p:ext>
     </p:extLst>
   </p:cSld>
@@ -1237,6 +1255,11 @@
         </p:txBody>
       </p:sp>
     </p:spTree>
+    <p:extLst>
+      <p:ext uri="{BB962C8B-B14F-4D97-AF65-F5344CB8AC3E}">
+        <p14:creationId xmlns:p14="http://schemas.microsoft.com/office/powerpoint/2010/main" val="4097390636"/>
+      </p:ext>
+    </p:extLst>
   </p:cSld>
   <p:clrMapOvr>
     <a:masterClrMapping/>
@@ -1249,13 +1272,7 @@
   <p:cSld>
     <p:spTree>
       <p:nvGrpSpPr>
-        <p:cNvPr id="1" name="Shape 320">
-          <a:extLst>
-            <a:ext uri="{FF2B5EF4-FFF2-40B4-BE49-F238E27FC236}">
-              <a16:creationId xmlns:a16="http://schemas.microsoft.com/office/drawing/2014/main" id="{5E82D901-7A14-0382-4365-722182C687A8}"/>
-            </a:ext>
-          </a:extLst>
-        </p:cNvPr>
+        <p:cNvPr id="1" name="Shape 320"/>
         <p:cNvGrpSpPr/>
         <p:nvPr/>
       </p:nvGrpSpPr>
@@ -1269,13 +1286,7 @@
       </p:grpSpPr>
       <p:sp>
         <p:nvSpPr>
-          <p:cNvPr id="321" name="Google Shape;321;g8f52c9b70a_3_0:notes">
-            <a:extLst>
-              <a:ext uri="{FF2B5EF4-FFF2-40B4-BE49-F238E27FC236}">
-                <a16:creationId xmlns:a16="http://schemas.microsoft.com/office/drawing/2014/main" id="{B8D16220-AF50-7601-71A9-4952749D32CB}"/>
-              </a:ext>
-            </a:extLst>
-          </p:cNvPr>
+          <p:cNvPr id="321" name="Google Shape;321;g8f52c9b70a_3_0:notes"/>
           <p:cNvSpPr>
             <a:spLocks noGrp="1" noRot="1" noChangeAspect="1"/>
           </p:cNvSpPr>
@@ -1316,13 +1327,7 @@
       </p:sp>
       <p:sp>
         <p:nvSpPr>
-          <p:cNvPr id="322" name="Google Shape;322;g8f52c9b70a_3_0:notes">
-            <a:extLst>
-              <a:ext uri="{FF2B5EF4-FFF2-40B4-BE49-F238E27FC236}">
-                <a16:creationId xmlns:a16="http://schemas.microsoft.com/office/drawing/2014/main" id="{AEA302D2-52D7-97D7-BF6C-781234E92D43}"/>
-              </a:ext>
-            </a:extLst>
-          </p:cNvPr>
+          <p:cNvPr id="322" name="Google Shape;322;g8f52c9b70a_3_0:notes"/>
           <p:cNvSpPr txBox="1">
             <a:spLocks noGrp="1"/>
           </p:cNvSpPr>
@@ -1353,11 +1358,6 @@
         </p:txBody>
       </p:sp>
     </p:spTree>
-    <p:extLst>
-      <p:ext uri="{BB962C8B-B14F-4D97-AF65-F5344CB8AC3E}">
-        <p14:creationId xmlns:p14="http://schemas.microsoft.com/office/powerpoint/2010/main" val="2483524941"/>
-      </p:ext>
-    </p:extLst>
   </p:cSld>
   <p:clrMapOvr>
     <a:masterClrMapping/>
@@ -6529,6 +6529,1389 @@
   <p:cSld>
     <p:spTree>
       <p:nvGrpSpPr>
+        <p:cNvPr id="1" name="Shape 323">
+          <a:extLst>
+            <a:ext uri="{FF2B5EF4-FFF2-40B4-BE49-F238E27FC236}">
+              <a16:creationId xmlns:a16="http://schemas.microsoft.com/office/drawing/2014/main" id="{19512066-5980-8A8B-BE30-C4FB3AC72235}"/>
+            </a:ext>
+          </a:extLst>
+        </p:cNvPr>
+        <p:cNvGrpSpPr/>
+        <p:nvPr/>
+      </p:nvGrpSpPr>
+      <p:grpSpPr>
+        <a:xfrm>
+          <a:off x="0" y="0"/>
+          <a:ext cx="0" cy="0"/>
+          <a:chOff x="0" y="0"/>
+          <a:chExt cx="0" cy="0"/>
+        </a:xfrm>
+      </p:grpSpPr>
+      <p:sp>
+        <p:nvSpPr>
+          <p:cNvPr id="324" name="Google Shape;324;p47">
+            <a:extLst>
+              <a:ext uri="{FF2B5EF4-FFF2-40B4-BE49-F238E27FC236}">
+                <a16:creationId xmlns:a16="http://schemas.microsoft.com/office/drawing/2014/main" id="{CDF56279-13BE-3C44-BBEF-E7DC5D1E88D2}"/>
+              </a:ext>
+            </a:extLst>
+          </p:cNvPr>
+          <p:cNvSpPr txBox="1">
+            <a:spLocks noGrp="1"/>
+          </p:cNvSpPr>
+          <p:nvPr>
+            <p:ph type="title"/>
+          </p:nvPr>
+        </p:nvSpPr>
+        <p:spPr>
+          <a:xfrm>
+            <a:off x="300016" y="269197"/>
+            <a:ext cx="8520600" cy="623700"/>
+          </a:xfrm>
+          <a:prstGeom prst="rect">
+            <a:avLst/>
+          </a:prstGeom>
+        </p:spPr>
+        <p:txBody>
+          <a:bodyPr spcFirstLastPara="1" wrap="square" lIns="91425" tIns="91425" rIns="91425" bIns="91425" anchor="t" anchorCtr="0">
+            <a:noAutofit/>
+          </a:bodyPr>
+          <a:lstStyle/>
+          <a:p>
+            <a:pPr marL="0" lvl="0" indent="0" algn="ctr" rtl="0">
+              <a:spcBef>
+                <a:spcPts val="0"/>
+              </a:spcBef>
+              <a:spcAft>
+                <a:spcPts val="0"/>
+              </a:spcAft>
+              <a:buNone/>
+            </a:pPr>
+            <a:r>
+              <a:rPr lang="en-US" dirty="0"/>
+              <a:t>GCIS – Software Development and Problem Solving</a:t>
+            </a:r>
+            <a:endParaRPr dirty="0"/>
+          </a:p>
+        </p:txBody>
+      </p:sp>
+      <p:sp>
+        <p:nvSpPr>
+          <p:cNvPr id="325" name="Google Shape;325;p47">
+            <a:extLst>
+              <a:ext uri="{FF2B5EF4-FFF2-40B4-BE49-F238E27FC236}">
+                <a16:creationId xmlns:a16="http://schemas.microsoft.com/office/drawing/2014/main" id="{5A9661D1-8430-BF80-279A-41B28CA04273}"/>
+              </a:ext>
+            </a:extLst>
+          </p:cNvPr>
+          <p:cNvSpPr txBox="1">
+            <a:spLocks noGrp="1"/>
+          </p:cNvSpPr>
+          <p:nvPr>
+            <p:ph type="body" idx="1"/>
+          </p:nvPr>
+        </p:nvSpPr>
+        <p:spPr>
+          <a:xfrm>
+            <a:off x="91445" y="1758316"/>
+            <a:ext cx="4000496" cy="1378401"/>
+          </a:xfrm>
+          <a:prstGeom prst="rect">
+            <a:avLst/>
+          </a:prstGeom>
+        </p:spPr>
+        <p:txBody>
+          <a:bodyPr spcFirstLastPara="1" wrap="square" lIns="91425" tIns="91425" rIns="91425" bIns="91425" anchor="ctr" anchorCtr="0">
+            <a:noAutofit/>
+          </a:bodyPr>
+          <a:lstStyle/>
+          <a:p>
+            <a:pPr marL="146050" indent="0">
+              <a:buNone/>
+            </a:pPr>
+            <a:r>
+              <a:rPr lang="en-US" sz="1600" dirty="0"/>
+              <a:t>Take Quiz 4.2: </a:t>
+            </a:r>
+            <a:r>
+              <a:rPr lang="en-US" sz="1600" dirty="0" err="1"/>
+              <a:t>Lamdas</a:t>
+            </a:r>
+            <a:endParaRPr lang="en-US" sz="1600" dirty="0"/>
+          </a:p>
+          <a:p>
+            <a:pPr marL="146050" indent="0">
+              <a:buNone/>
+            </a:pPr>
+            <a:r>
+              <a:rPr lang="en-US" sz="1600" dirty="0">
+                <a:solidFill>
+                  <a:schemeClr val="tx1"/>
+                </a:solidFill>
+              </a:rPr>
+              <a:t>Password – </a:t>
+            </a:r>
+            <a:r>
+              <a:rPr lang="en-US" sz="1600" dirty="0" err="1">
+                <a:solidFill>
+                  <a:schemeClr val="tx1"/>
+                </a:solidFill>
+              </a:rPr>
+              <a:t>AnonymousLambdas</a:t>
+            </a:r>
+            <a:endParaRPr sz="1600" dirty="0">
+              <a:solidFill>
+                <a:schemeClr val="tx1"/>
+              </a:solidFill>
+            </a:endParaRPr>
+          </a:p>
+        </p:txBody>
+      </p:sp>
+      <p:sp>
+        <p:nvSpPr>
+          <p:cNvPr id="326" name="Google Shape;326;p47">
+            <a:extLst>
+              <a:ext uri="{FF2B5EF4-FFF2-40B4-BE49-F238E27FC236}">
+                <a16:creationId xmlns:a16="http://schemas.microsoft.com/office/drawing/2014/main" id="{8A14E227-935A-FBD8-6BD5-CBCE8D13EE84}"/>
+              </a:ext>
+            </a:extLst>
+          </p:cNvPr>
+          <p:cNvSpPr txBox="1">
+            <a:spLocks noGrp="1"/>
+          </p:cNvSpPr>
+          <p:nvPr>
+            <p:ph type="sldNum" idx="12"/>
+          </p:nvPr>
+        </p:nvSpPr>
+        <p:spPr>
+          <a:xfrm>
+            <a:off x="8472458" y="4663217"/>
+            <a:ext cx="548700" cy="393600"/>
+          </a:xfrm>
+          <a:prstGeom prst="rect">
+            <a:avLst/>
+          </a:prstGeom>
+        </p:spPr>
+        <p:txBody>
+          <a:bodyPr spcFirstLastPara="1" wrap="square" lIns="91425" tIns="91425" rIns="91425" bIns="91425" anchor="ctr" anchorCtr="0">
+            <a:noAutofit/>
+          </a:bodyPr>
+          <a:lstStyle/>
+          <a:p>
+            <a:pPr marL="0" lvl="0" indent="0" algn="r" rtl="0">
+              <a:spcBef>
+                <a:spcPts val="0"/>
+              </a:spcBef>
+              <a:spcAft>
+                <a:spcPts val="0"/>
+              </a:spcAft>
+              <a:buNone/>
+            </a:pPr>
+            <a:fld id="{00000000-1234-1234-1234-123412341234}" type="slidenum">
+              <a:rPr lang="en"/>
+              <a:t>1</a:t>
+            </a:fld>
+            <a:endParaRPr/>
+          </a:p>
+        </p:txBody>
+      </p:sp>
+      <p:sp>
+        <p:nvSpPr>
+          <p:cNvPr id="2" name="TextBox 1">
+            <a:extLst>
+              <a:ext uri="{FF2B5EF4-FFF2-40B4-BE49-F238E27FC236}">
+                <a16:creationId xmlns:a16="http://schemas.microsoft.com/office/drawing/2014/main" id="{AE960589-7B12-D7F7-6452-D45441D8CA95}"/>
+              </a:ext>
+            </a:extLst>
+          </p:cNvPr>
+          <p:cNvSpPr txBox="1"/>
+          <p:nvPr/>
+        </p:nvSpPr>
+        <p:spPr>
+          <a:xfrm>
+            <a:off x="-11684" y="1287037"/>
+            <a:ext cx="9144000" cy="338555"/>
+          </a:xfrm>
+          <a:prstGeom prst="rect">
+            <a:avLst/>
+          </a:prstGeom>
+          <a:solidFill>
+            <a:srgbClr val="FFC000"/>
+          </a:solidFill>
+        </p:spPr>
+        <p:txBody>
+          <a:bodyPr wrap="square" rtlCol="0">
+            <a:spAutoFit/>
+          </a:bodyPr>
+          <a:lstStyle/>
+          <a:p>
+            <a:r>
+              <a:rPr lang="en-US" dirty="0"/>
+              <a:t>Quiz</a:t>
+            </a:r>
+          </a:p>
+        </p:txBody>
+      </p:sp>
+      <p:sp>
+        <p:nvSpPr>
+          <p:cNvPr id="3" name="TextBox 2">
+            <a:extLst>
+              <a:ext uri="{FF2B5EF4-FFF2-40B4-BE49-F238E27FC236}">
+                <a16:creationId xmlns:a16="http://schemas.microsoft.com/office/drawing/2014/main" id="{4FD526CA-3FDB-A5C2-36D9-69A3252D5E9A}"/>
+              </a:ext>
+            </a:extLst>
+          </p:cNvPr>
+          <p:cNvSpPr txBox="1"/>
+          <p:nvPr/>
+        </p:nvSpPr>
+        <p:spPr>
+          <a:xfrm>
+            <a:off x="0" y="3507404"/>
+            <a:ext cx="9144000" cy="307777"/>
+          </a:xfrm>
+          <a:prstGeom prst="rect">
+            <a:avLst/>
+          </a:prstGeom>
+          <a:solidFill>
+            <a:srgbClr val="FFC000"/>
+          </a:solidFill>
+        </p:spPr>
+        <p:txBody>
+          <a:bodyPr wrap="square" rtlCol="0">
+            <a:spAutoFit/>
+          </a:bodyPr>
+          <a:lstStyle/>
+          <a:p>
+            <a:r>
+              <a:rPr lang="en-US" dirty="0"/>
+              <a:t>Next </a:t>
+            </a:r>
+            <a:r>
+              <a:rPr lang="en-US" dirty="0">
+                <a:sym typeface="Wingdings" panose="05000000000000000000" pitchFamily="2" charset="2"/>
+              </a:rPr>
+              <a:t> </a:t>
+            </a:r>
+            <a:endParaRPr lang="en-US" dirty="0"/>
+          </a:p>
+        </p:txBody>
+      </p:sp>
+      <p:sp>
+        <p:nvSpPr>
+          <p:cNvPr id="4" name="Google Shape;325;p47">
+            <a:extLst>
+              <a:ext uri="{FF2B5EF4-FFF2-40B4-BE49-F238E27FC236}">
+                <a16:creationId xmlns:a16="http://schemas.microsoft.com/office/drawing/2014/main" id="{DC50CCB1-5AFE-1F52-8B22-87EB927965B4}"/>
+              </a:ext>
+            </a:extLst>
+          </p:cNvPr>
+          <p:cNvSpPr txBox="1">
+            <a:spLocks/>
+          </p:cNvSpPr>
+          <p:nvPr/>
+        </p:nvSpPr>
+        <p:spPr>
+          <a:xfrm>
+            <a:off x="-5842" y="3848100"/>
+            <a:ext cx="9149842" cy="1208717"/>
+          </a:xfrm>
+          <a:prstGeom prst="rect">
+            <a:avLst/>
+          </a:prstGeom>
+          <a:noFill/>
+          <a:ln>
+            <a:noFill/>
+          </a:ln>
+        </p:spPr>
+        <p:txBody>
+          <a:bodyPr spcFirstLastPara="1" wrap="square" lIns="91425" tIns="91425" rIns="91425" bIns="91425" anchor="ctr" anchorCtr="0">
+            <a:noAutofit/>
+          </a:bodyPr>
+          <a:lstStyle>
+            <a:defPPr marR="0" lvl="0" algn="l" rtl="0">
+              <a:lnSpc>
+                <a:spcPct val="100000"/>
+              </a:lnSpc>
+              <a:spcBef>
+                <a:spcPts val="0"/>
+              </a:spcBef>
+              <a:spcAft>
+                <a:spcPts val="0"/>
+              </a:spcAft>
+            </a:defPPr>
+            <a:lvl1pPr marL="457200" marR="0" lvl="0" indent="-311150" algn="l" rtl="0">
+              <a:lnSpc>
+                <a:spcPct val="115000"/>
+              </a:lnSpc>
+              <a:spcBef>
+                <a:spcPts val="0"/>
+              </a:spcBef>
+              <a:spcAft>
+                <a:spcPts val="0"/>
+              </a:spcAft>
+              <a:buClr>
+                <a:schemeClr val="dk2"/>
+              </a:buClr>
+              <a:buSzPts val="1300"/>
+              <a:buFont typeface="Roboto"/>
+              <a:buChar char="●"/>
+              <a:defRPr sz="1300" b="0" i="0" u="none" strike="noStrike" cap="none">
+                <a:solidFill>
+                  <a:schemeClr val="dk2"/>
+                </a:solidFill>
+                <a:latin typeface="Roboto"/>
+                <a:ea typeface="Roboto"/>
+                <a:cs typeface="Roboto"/>
+                <a:sym typeface="Roboto"/>
+              </a:defRPr>
+            </a:lvl1pPr>
+            <a:lvl2pPr marL="914400" marR="0" lvl="1" indent="-298450" algn="l" rtl="0">
+              <a:lnSpc>
+                <a:spcPct val="115000"/>
+              </a:lnSpc>
+              <a:spcBef>
+                <a:spcPts val="1600"/>
+              </a:spcBef>
+              <a:spcAft>
+                <a:spcPts val="0"/>
+              </a:spcAft>
+              <a:buClr>
+                <a:schemeClr val="dk2"/>
+              </a:buClr>
+              <a:buSzPts val="1100"/>
+              <a:buFont typeface="Roboto"/>
+              <a:buChar char="○"/>
+              <a:defRPr sz="1100" b="0" i="0" u="none" strike="noStrike" cap="none">
+                <a:solidFill>
+                  <a:schemeClr val="dk2"/>
+                </a:solidFill>
+                <a:latin typeface="Roboto"/>
+                <a:ea typeface="Roboto"/>
+                <a:cs typeface="Roboto"/>
+                <a:sym typeface="Roboto"/>
+              </a:defRPr>
+            </a:lvl2pPr>
+            <a:lvl3pPr marL="1371600" marR="0" lvl="2" indent="-298450" algn="l" rtl="0">
+              <a:lnSpc>
+                <a:spcPct val="115000"/>
+              </a:lnSpc>
+              <a:spcBef>
+                <a:spcPts val="1600"/>
+              </a:spcBef>
+              <a:spcAft>
+                <a:spcPts val="0"/>
+              </a:spcAft>
+              <a:buClr>
+                <a:schemeClr val="dk2"/>
+              </a:buClr>
+              <a:buSzPts val="1100"/>
+              <a:buFont typeface="Roboto"/>
+              <a:buChar char="■"/>
+              <a:defRPr sz="1100" b="0" i="0" u="none" strike="noStrike" cap="none">
+                <a:solidFill>
+                  <a:schemeClr val="dk2"/>
+                </a:solidFill>
+                <a:latin typeface="Roboto"/>
+                <a:ea typeface="Roboto"/>
+                <a:cs typeface="Roboto"/>
+                <a:sym typeface="Roboto"/>
+              </a:defRPr>
+            </a:lvl3pPr>
+            <a:lvl4pPr marL="1828800" marR="0" lvl="3" indent="-298450" algn="l" rtl="0">
+              <a:lnSpc>
+                <a:spcPct val="115000"/>
+              </a:lnSpc>
+              <a:spcBef>
+                <a:spcPts val="1600"/>
+              </a:spcBef>
+              <a:spcAft>
+                <a:spcPts val="0"/>
+              </a:spcAft>
+              <a:buClr>
+                <a:schemeClr val="dk2"/>
+              </a:buClr>
+              <a:buSzPts val="1100"/>
+              <a:buFont typeface="Roboto"/>
+              <a:buChar char="●"/>
+              <a:defRPr sz="1100" b="0" i="0" u="none" strike="noStrike" cap="none">
+                <a:solidFill>
+                  <a:schemeClr val="dk2"/>
+                </a:solidFill>
+                <a:latin typeface="Roboto"/>
+                <a:ea typeface="Roboto"/>
+                <a:cs typeface="Roboto"/>
+                <a:sym typeface="Roboto"/>
+              </a:defRPr>
+            </a:lvl4pPr>
+            <a:lvl5pPr marL="2286000" marR="0" lvl="4" indent="-298450" algn="l" rtl="0">
+              <a:lnSpc>
+                <a:spcPct val="115000"/>
+              </a:lnSpc>
+              <a:spcBef>
+                <a:spcPts val="1600"/>
+              </a:spcBef>
+              <a:spcAft>
+                <a:spcPts val="0"/>
+              </a:spcAft>
+              <a:buClr>
+                <a:schemeClr val="dk2"/>
+              </a:buClr>
+              <a:buSzPts val="1100"/>
+              <a:buFont typeface="Roboto"/>
+              <a:buChar char="○"/>
+              <a:defRPr sz="1100" b="0" i="0" u="none" strike="noStrike" cap="none">
+                <a:solidFill>
+                  <a:schemeClr val="dk2"/>
+                </a:solidFill>
+                <a:latin typeface="Roboto"/>
+                <a:ea typeface="Roboto"/>
+                <a:cs typeface="Roboto"/>
+                <a:sym typeface="Roboto"/>
+              </a:defRPr>
+            </a:lvl5pPr>
+            <a:lvl6pPr marL="2743200" marR="0" lvl="5" indent="-298450" algn="l" rtl="0">
+              <a:lnSpc>
+                <a:spcPct val="115000"/>
+              </a:lnSpc>
+              <a:spcBef>
+                <a:spcPts val="1600"/>
+              </a:spcBef>
+              <a:spcAft>
+                <a:spcPts val="0"/>
+              </a:spcAft>
+              <a:buClr>
+                <a:schemeClr val="dk2"/>
+              </a:buClr>
+              <a:buSzPts val="1100"/>
+              <a:buFont typeface="Roboto"/>
+              <a:buChar char="■"/>
+              <a:defRPr sz="1100" b="0" i="0" u="none" strike="noStrike" cap="none">
+                <a:solidFill>
+                  <a:schemeClr val="dk2"/>
+                </a:solidFill>
+                <a:latin typeface="Roboto"/>
+                <a:ea typeface="Roboto"/>
+                <a:cs typeface="Roboto"/>
+                <a:sym typeface="Roboto"/>
+              </a:defRPr>
+            </a:lvl6pPr>
+            <a:lvl7pPr marL="3200400" marR="0" lvl="6" indent="-298450" algn="l" rtl="0">
+              <a:lnSpc>
+                <a:spcPct val="115000"/>
+              </a:lnSpc>
+              <a:spcBef>
+                <a:spcPts val="1600"/>
+              </a:spcBef>
+              <a:spcAft>
+                <a:spcPts val="0"/>
+              </a:spcAft>
+              <a:buClr>
+                <a:schemeClr val="dk2"/>
+              </a:buClr>
+              <a:buSzPts val="1100"/>
+              <a:buFont typeface="Roboto"/>
+              <a:buChar char="●"/>
+              <a:defRPr sz="1100" b="0" i="0" u="none" strike="noStrike" cap="none">
+                <a:solidFill>
+                  <a:schemeClr val="dk2"/>
+                </a:solidFill>
+                <a:latin typeface="Roboto"/>
+                <a:ea typeface="Roboto"/>
+                <a:cs typeface="Roboto"/>
+                <a:sym typeface="Roboto"/>
+              </a:defRPr>
+            </a:lvl7pPr>
+            <a:lvl8pPr marL="3657600" marR="0" lvl="7" indent="-298450" algn="l" rtl="0">
+              <a:lnSpc>
+                <a:spcPct val="115000"/>
+              </a:lnSpc>
+              <a:spcBef>
+                <a:spcPts val="1600"/>
+              </a:spcBef>
+              <a:spcAft>
+                <a:spcPts val="0"/>
+              </a:spcAft>
+              <a:buClr>
+                <a:schemeClr val="dk2"/>
+              </a:buClr>
+              <a:buSzPts val="1100"/>
+              <a:buFont typeface="Roboto"/>
+              <a:buChar char="○"/>
+              <a:defRPr sz="1100" b="0" i="0" u="none" strike="noStrike" cap="none">
+                <a:solidFill>
+                  <a:schemeClr val="dk2"/>
+                </a:solidFill>
+                <a:latin typeface="Roboto"/>
+                <a:ea typeface="Roboto"/>
+                <a:cs typeface="Roboto"/>
+                <a:sym typeface="Roboto"/>
+              </a:defRPr>
+            </a:lvl8pPr>
+            <a:lvl9pPr marL="4114800" marR="0" lvl="8" indent="-298450" algn="l" rtl="0">
+              <a:lnSpc>
+                <a:spcPct val="115000"/>
+              </a:lnSpc>
+              <a:spcBef>
+                <a:spcPts val="1600"/>
+              </a:spcBef>
+              <a:spcAft>
+                <a:spcPts val="1600"/>
+              </a:spcAft>
+              <a:buClr>
+                <a:schemeClr val="dk2"/>
+              </a:buClr>
+              <a:buSzPts val="1100"/>
+              <a:buFont typeface="Roboto"/>
+              <a:buChar char="■"/>
+              <a:defRPr sz="1100" b="0" i="0" u="none" strike="noStrike" cap="none">
+                <a:solidFill>
+                  <a:schemeClr val="dk2"/>
+                </a:solidFill>
+                <a:latin typeface="Roboto"/>
+                <a:ea typeface="Roboto"/>
+                <a:cs typeface="Roboto"/>
+                <a:sym typeface="Roboto"/>
+              </a:defRPr>
+            </a:lvl9pPr>
+          </a:lstStyle>
+          <a:p>
+            <a:pPr marL="0" indent="0">
+              <a:spcAft>
+                <a:spcPts val="1600"/>
+              </a:spcAft>
+              <a:buNone/>
+            </a:pPr>
+            <a:r>
+              <a:rPr lang="en-US" sz="1400" dirty="0"/>
+              <a:t>After completing the Quiz </a:t>
+            </a:r>
+          </a:p>
+          <a:p>
+            <a:pPr marL="342900" indent="-342900">
+              <a:spcAft>
+                <a:spcPts val="1600"/>
+              </a:spcAft>
+            </a:pPr>
+            <a:r>
+              <a:rPr lang="en-US" sz="1200" dirty="0"/>
+              <a:t>Accept GitHub Classroom Assignment for Unit 05</a:t>
+            </a:r>
+          </a:p>
+          <a:p>
+            <a:pPr marL="342900" indent="-342900">
+              <a:spcAft>
+                <a:spcPts val="1600"/>
+              </a:spcAft>
+            </a:pPr>
+            <a:r>
+              <a:rPr lang="en-US" sz="1200" dirty="0"/>
+              <a:t>Clone/pull GitHub classroom repo for Unit 05 under </a:t>
+            </a:r>
+            <a:r>
+              <a:rPr lang="en-US" sz="1200" dirty="0" err="1"/>
+              <a:t>softdevII</a:t>
+            </a:r>
+            <a:r>
+              <a:rPr lang="en-US" sz="1200" dirty="0"/>
+              <a:t> folder</a:t>
+            </a:r>
+            <a:endParaRPr lang="en-US" sz="1200" dirty="0">
+              <a:solidFill>
+                <a:schemeClr val="tx1"/>
+              </a:solidFill>
+            </a:endParaRPr>
+          </a:p>
+        </p:txBody>
+      </p:sp>
+      <p:sp>
+        <p:nvSpPr>
+          <p:cNvPr id="5" name="Google Shape;325;p47">
+            <a:extLst>
+              <a:ext uri="{FF2B5EF4-FFF2-40B4-BE49-F238E27FC236}">
+                <a16:creationId xmlns:a16="http://schemas.microsoft.com/office/drawing/2014/main" id="{7B85466C-6200-EE66-9396-7DECA70CDF53}"/>
+              </a:ext>
+            </a:extLst>
+          </p:cNvPr>
+          <p:cNvSpPr txBox="1">
+            <a:spLocks/>
+          </p:cNvSpPr>
+          <p:nvPr/>
+        </p:nvSpPr>
+        <p:spPr>
+          <a:xfrm>
+            <a:off x="4303618" y="1737005"/>
+            <a:ext cx="4516998" cy="1378400"/>
+          </a:xfrm>
+          <a:prstGeom prst="rect">
+            <a:avLst/>
+          </a:prstGeom>
+          <a:noFill/>
+          <a:ln>
+            <a:noFill/>
+          </a:ln>
+        </p:spPr>
+        <p:txBody>
+          <a:bodyPr spcFirstLastPara="1" wrap="square" lIns="91425" tIns="91425" rIns="91425" bIns="91425" anchor="ctr" anchorCtr="0">
+            <a:noAutofit/>
+          </a:bodyPr>
+          <a:lstStyle>
+            <a:defPPr marR="0" lvl="0" algn="l" rtl="0">
+              <a:lnSpc>
+                <a:spcPct val="100000"/>
+              </a:lnSpc>
+              <a:spcBef>
+                <a:spcPts val="0"/>
+              </a:spcBef>
+              <a:spcAft>
+                <a:spcPts val="0"/>
+              </a:spcAft>
+            </a:defPPr>
+            <a:lvl1pPr marL="457200" marR="0" lvl="0" indent="-311150" algn="l" rtl="0">
+              <a:lnSpc>
+                <a:spcPct val="115000"/>
+              </a:lnSpc>
+              <a:spcBef>
+                <a:spcPts val="0"/>
+              </a:spcBef>
+              <a:spcAft>
+                <a:spcPts val="0"/>
+              </a:spcAft>
+              <a:buClr>
+                <a:schemeClr val="dk2"/>
+              </a:buClr>
+              <a:buSzPts val="1300"/>
+              <a:buFont typeface="Roboto"/>
+              <a:buChar char="●"/>
+              <a:defRPr sz="1300" b="0" i="0" u="none" strike="noStrike" cap="none">
+                <a:solidFill>
+                  <a:schemeClr val="dk2"/>
+                </a:solidFill>
+                <a:latin typeface="Roboto"/>
+                <a:ea typeface="Roboto"/>
+                <a:cs typeface="Roboto"/>
+                <a:sym typeface="Roboto"/>
+              </a:defRPr>
+            </a:lvl1pPr>
+            <a:lvl2pPr marL="914400" marR="0" lvl="1" indent="-298450" algn="l" rtl="0">
+              <a:lnSpc>
+                <a:spcPct val="115000"/>
+              </a:lnSpc>
+              <a:spcBef>
+                <a:spcPts val="1600"/>
+              </a:spcBef>
+              <a:spcAft>
+                <a:spcPts val="0"/>
+              </a:spcAft>
+              <a:buClr>
+                <a:schemeClr val="dk2"/>
+              </a:buClr>
+              <a:buSzPts val="1100"/>
+              <a:buFont typeface="Roboto"/>
+              <a:buChar char="○"/>
+              <a:defRPr sz="1100" b="0" i="0" u="none" strike="noStrike" cap="none">
+                <a:solidFill>
+                  <a:schemeClr val="dk2"/>
+                </a:solidFill>
+                <a:latin typeface="Roboto"/>
+                <a:ea typeface="Roboto"/>
+                <a:cs typeface="Roboto"/>
+                <a:sym typeface="Roboto"/>
+              </a:defRPr>
+            </a:lvl2pPr>
+            <a:lvl3pPr marL="1371600" marR="0" lvl="2" indent="-298450" algn="l" rtl="0">
+              <a:lnSpc>
+                <a:spcPct val="115000"/>
+              </a:lnSpc>
+              <a:spcBef>
+                <a:spcPts val="1600"/>
+              </a:spcBef>
+              <a:spcAft>
+                <a:spcPts val="0"/>
+              </a:spcAft>
+              <a:buClr>
+                <a:schemeClr val="dk2"/>
+              </a:buClr>
+              <a:buSzPts val="1100"/>
+              <a:buFont typeface="Roboto"/>
+              <a:buChar char="■"/>
+              <a:defRPr sz="1100" b="0" i="0" u="none" strike="noStrike" cap="none">
+                <a:solidFill>
+                  <a:schemeClr val="dk2"/>
+                </a:solidFill>
+                <a:latin typeface="Roboto"/>
+                <a:ea typeface="Roboto"/>
+                <a:cs typeface="Roboto"/>
+                <a:sym typeface="Roboto"/>
+              </a:defRPr>
+            </a:lvl3pPr>
+            <a:lvl4pPr marL="1828800" marR="0" lvl="3" indent="-298450" algn="l" rtl="0">
+              <a:lnSpc>
+                <a:spcPct val="115000"/>
+              </a:lnSpc>
+              <a:spcBef>
+                <a:spcPts val="1600"/>
+              </a:spcBef>
+              <a:spcAft>
+                <a:spcPts val="0"/>
+              </a:spcAft>
+              <a:buClr>
+                <a:schemeClr val="dk2"/>
+              </a:buClr>
+              <a:buSzPts val="1100"/>
+              <a:buFont typeface="Roboto"/>
+              <a:buChar char="●"/>
+              <a:defRPr sz="1100" b="0" i="0" u="none" strike="noStrike" cap="none">
+                <a:solidFill>
+                  <a:schemeClr val="dk2"/>
+                </a:solidFill>
+                <a:latin typeface="Roboto"/>
+                <a:ea typeface="Roboto"/>
+                <a:cs typeface="Roboto"/>
+                <a:sym typeface="Roboto"/>
+              </a:defRPr>
+            </a:lvl4pPr>
+            <a:lvl5pPr marL="2286000" marR="0" lvl="4" indent="-298450" algn="l" rtl="0">
+              <a:lnSpc>
+                <a:spcPct val="115000"/>
+              </a:lnSpc>
+              <a:spcBef>
+                <a:spcPts val="1600"/>
+              </a:spcBef>
+              <a:spcAft>
+                <a:spcPts val="0"/>
+              </a:spcAft>
+              <a:buClr>
+                <a:schemeClr val="dk2"/>
+              </a:buClr>
+              <a:buSzPts val="1100"/>
+              <a:buFont typeface="Roboto"/>
+              <a:buChar char="○"/>
+              <a:defRPr sz="1100" b="0" i="0" u="none" strike="noStrike" cap="none">
+                <a:solidFill>
+                  <a:schemeClr val="dk2"/>
+                </a:solidFill>
+                <a:latin typeface="Roboto"/>
+                <a:ea typeface="Roboto"/>
+                <a:cs typeface="Roboto"/>
+                <a:sym typeface="Roboto"/>
+              </a:defRPr>
+            </a:lvl5pPr>
+            <a:lvl6pPr marL="2743200" marR="0" lvl="5" indent="-298450" algn="l" rtl="0">
+              <a:lnSpc>
+                <a:spcPct val="115000"/>
+              </a:lnSpc>
+              <a:spcBef>
+                <a:spcPts val="1600"/>
+              </a:spcBef>
+              <a:spcAft>
+                <a:spcPts val="0"/>
+              </a:spcAft>
+              <a:buClr>
+                <a:schemeClr val="dk2"/>
+              </a:buClr>
+              <a:buSzPts val="1100"/>
+              <a:buFont typeface="Roboto"/>
+              <a:buChar char="■"/>
+              <a:defRPr sz="1100" b="0" i="0" u="none" strike="noStrike" cap="none">
+                <a:solidFill>
+                  <a:schemeClr val="dk2"/>
+                </a:solidFill>
+                <a:latin typeface="Roboto"/>
+                <a:ea typeface="Roboto"/>
+                <a:cs typeface="Roboto"/>
+                <a:sym typeface="Roboto"/>
+              </a:defRPr>
+            </a:lvl6pPr>
+            <a:lvl7pPr marL="3200400" marR="0" lvl="6" indent="-298450" algn="l" rtl="0">
+              <a:lnSpc>
+                <a:spcPct val="115000"/>
+              </a:lnSpc>
+              <a:spcBef>
+                <a:spcPts val="1600"/>
+              </a:spcBef>
+              <a:spcAft>
+                <a:spcPts val="0"/>
+              </a:spcAft>
+              <a:buClr>
+                <a:schemeClr val="dk2"/>
+              </a:buClr>
+              <a:buSzPts val="1100"/>
+              <a:buFont typeface="Roboto"/>
+              <a:buChar char="●"/>
+              <a:defRPr sz="1100" b="0" i="0" u="none" strike="noStrike" cap="none">
+                <a:solidFill>
+                  <a:schemeClr val="dk2"/>
+                </a:solidFill>
+                <a:latin typeface="Roboto"/>
+                <a:ea typeface="Roboto"/>
+                <a:cs typeface="Roboto"/>
+                <a:sym typeface="Roboto"/>
+              </a:defRPr>
+            </a:lvl7pPr>
+            <a:lvl8pPr marL="3657600" marR="0" lvl="7" indent="-298450" algn="l" rtl="0">
+              <a:lnSpc>
+                <a:spcPct val="115000"/>
+              </a:lnSpc>
+              <a:spcBef>
+                <a:spcPts val="1600"/>
+              </a:spcBef>
+              <a:spcAft>
+                <a:spcPts val="0"/>
+              </a:spcAft>
+              <a:buClr>
+                <a:schemeClr val="dk2"/>
+              </a:buClr>
+              <a:buSzPts val="1100"/>
+              <a:buFont typeface="Roboto"/>
+              <a:buChar char="○"/>
+              <a:defRPr sz="1100" b="0" i="0" u="none" strike="noStrike" cap="none">
+                <a:solidFill>
+                  <a:schemeClr val="dk2"/>
+                </a:solidFill>
+                <a:latin typeface="Roboto"/>
+                <a:ea typeface="Roboto"/>
+                <a:cs typeface="Roboto"/>
+                <a:sym typeface="Roboto"/>
+              </a:defRPr>
+            </a:lvl8pPr>
+            <a:lvl9pPr marL="4114800" marR="0" lvl="8" indent="-298450" algn="l" rtl="0">
+              <a:lnSpc>
+                <a:spcPct val="115000"/>
+              </a:lnSpc>
+              <a:spcBef>
+                <a:spcPts val="1600"/>
+              </a:spcBef>
+              <a:spcAft>
+                <a:spcPts val="1600"/>
+              </a:spcAft>
+              <a:buClr>
+                <a:schemeClr val="dk2"/>
+              </a:buClr>
+              <a:buSzPts val="1100"/>
+              <a:buFont typeface="Roboto"/>
+              <a:buChar char="■"/>
+              <a:defRPr sz="1100" b="0" i="0" u="none" strike="noStrike" cap="none">
+                <a:solidFill>
+                  <a:schemeClr val="dk2"/>
+                </a:solidFill>
+                <a:latin typeface="Roboto"/>
+                <a:ea typeface="Roboto"/>
+                <a:cs typeface="Roboto"/>
+                <a:sym typeface="Roboto"/>
+              </a:defRPr>
+            </a:lvl9pPr>
+          </a:lstStyle>
+          <a:p>
+            <a:pPr marL="146050" indent="0">
+              <a:buNone/>
+            </a:pPr>
+            <a:r>
+              <a:rPr lang="en-US" sz="1600" dirty="0"/>
+              <a:t>Quiz 3.3 Streams and Files</a:t>
+            </a:r>
+          </a:p>
+          <a:p>
+            <a:pPr marL="146050" indent="0">
+              <a:buNone/>
+            </a:pPr>
+            <a:r>
+              <a:rPr lang="en-US" sz="1600" dirty="0">
+                <a:solidFill>
+                  <a:schemeClr val="tx1"/>
+                </a:solidFill>
+              </a:rPr>
+              <a:t>Password - </a:t>
+            </a:r>
+            <a:r>
+              <a:rPr lang="en-US" sz="1600" dirty="0" err="1">
+                <a:solidFill>
+                  <a:schemeClr val="tx1"/>
+                </a:solidFill>
+              </a:rPr>
+              <a:t>FileAndStream</a:t>
+            </a:r>
+            <a:endParaRPr lang="en-US" sz="1600" dirty="0">
+              <a:solidFill>
+                <a:schemeClr val="tx1"/>
+              </a:solidFill>
+            </a:endParaRPr>
+          </a:p>
+        </p:txBody>
+      </p:sp>
+    </p:spTree>
+    <p:extLst>
+      <p:ext uri="{BB962C8B-B14F-4D97-AF65-F5344CB8AC3E}">
+        <p14:creationId xmlns:p14="http://schemas.microsoft.com/office/powerpoint/2010/main" val="674272117"/>
+      </p:ext>
+    </p:extLst>
+  </p:cSld>
+  <p:clrMapOvr>
+    <a:masterClrMapping/>
+  </p:clrMapOvr>
+</p:sld>
+</file>
+
+<file path=ppt/slides/slide10.xml><?xml version="1.0" encoding="utf-8"?>
+<p:sld xmlns:a="http://schemas.openxmlformats.org/drawingml/2006/main" xmlns:r="http://schemas.openxmlformats.org/officeDocument/2006/relationships" xmlns:p="http://schemas.openxmlformats.org/presentationml/2006/main" show="0">
+  <p:cSld>
+    <p:spTree>
+      <p:nvGrpSpPr>
+        <p:cNvPr id="1" name="Shape 323"/>
+        <p:cNvGrpSpPr/>
+        <p:nvPr/>
+      </p:nvGrpSpPr>
+      <p:grpSpPr>
+        <a:xfrm>
+          <a:off x="0" y="0"/>
+          <a:ext cx="0" cy="0"/>
+          <a:chOff x="0" y="0"/>
+          <a:chExt cx="0" cy="0"/>
+        </a:xfrm>
+      </p:grpSpPr>
+      <p:sp>
+        <p:nvSpPr>
+          <p:cNvPr id="324" name="Google Shape;324;p47"/>
+          <p:cNvSpPr txBox="1">
+            <a:spLocks noGrp="1"/>
+          </p:cNvSpPr>
+          <p:nvPr>
+            <p:ph type="title"/>
+          </p:nvPr>
+        </p:nvSpPr>
+        <p:spPr>
+          <a:xfrm>
+            <a:off x="226208" y="1"/>
+            <a:ext cx="8520600" cy="464980"/>
+          </a:xfrm>
+          <a:prstGeom prst="rect">
+            <a:avLst/>
+          </a:prstGeom>
+        </p:spPr>
+        <p:txBody>
+          <a:bodyPr spcFirstLastPara="1" wrap="square" lIns="91425" tIns="91425" rIns="91425" bIns="91425" anchor="t" anchorCtr="0">
+            <a:noAutofit/>
+          </a:bodyPr>
+          <a:lstStyle/>
+          <a:p>
+            <a:pPr marL="0" lvl="0" indent="0" algn="ctr" rtl="0">
+              <a:spcBef>
+                <a:spcPts val="0"/>
+              </a:spcBef>
+              <a:spcAft>
+                <a:spcPts val="0"/>
+              </a:spcAft>
+              <a:buNone/>
+            </a:pPr>
+            <a:r>
+              <a:rPr lang="en-US" dirty="0"/>
+              <a:t>Use </a:t>
+            </a:r>
+            <a:r>
+              <a:rPr lang="en-US" sz="2400" dirty="0"/>
+              <a:t>Assigned</a:t>
+            </a:r>
+            <a:r>
+              <a:rPr lang="en-US" dirty="0"/>
+              <a:t> Seat</a:t>
+            </a:r>
+            <a:endParaRPr dirty="0"/>
+          </a:p>
+        </p:txBody>
+      </p:sp>
+      <p:sp>
+        <p:nvSpPr>
+          <p:cNvPr id="326" name="Google Shape;326;p47"/>
+          <p:cNvSpPr txBox="1">
+            <a:spLocks noGrp="1"/>
+          </p:cNvSpPr>
+          <p:nvPr>
+            <p:ph type="sldNum" idx="12"/>
+          </p:nvPr>
+        </p:nvSpPr>
+        <p:spPr>
+          <a:xfrm>
+            <a:off x="8472458" y="4663217"/>
+            <a:ext cx="548700" cy="393600"/>
+          </a:xfrm>
+          <a:prstGeom prst="rect">
+            <a:avLst/>
+          </a:prstGeom>
+        </p:spPr>
+        <p:txBody>
+          <a:bodyPr spcFirstLastPara="1" wrap="square" lIns="91425" tIns="91425" rIns="91425" bIns="91425" anchor="ctr" anchorCtr="0">
+            <a:noAutofit/>
+          </a:bodyPr>
+          <a:lstStyle/>
+          <a:p>
+            <a:pPr marL="0" lvl="0" indent="0" algn="r" rtl="0">
+              <a:spcBef>
+                <a:spcPts val="0"/>
+              </a:spcBef>
+              <a:spcAft>
+                <a:spcPts val="0"/>
+              </a:spcAft>
+              <a:buNone/>
+            </a:pPr>
+            <a:fld id="{00000000-1234-1234-1234-123412341234}" type="slidenum">
+              <a:rPr lang="en"/>
+              <a:t>10</a:t>
+            </a:fld>
+            <a:endParaRPr/>
+          </a:p>
+        </p:txBody>
+      </p:sp>
+      <p:pic>
+        <p:nvPicPr>
+          <p:cNvPr id="6" name="Picture 5">
+            <a:extLst>
+              <a:ext uri="{FF2B5EF4-FFF2-40B4-BE49-F238E27FC236}">
+                <a16:creationId xmlns:a16="http://schemas.microsoft.com/office/drawing/2014/main" id="{DED32793-7C09-E3A3-94E5-B5D46727A1D0}"/>
+              </a:ext>
+            </a:extLst>
+          </p:cNvPr>
+          <p:cNvPicPr>
+            <a:picLocks noChangeAspect="1"/>
+          </p:cNvPicPr>
+          <p:nvPr/>
+        </p:nvPicPr>
+        <p:blipFill>
+          <a:blip r:embed="rId3"/>
+          <a:stretch>
+            <a:fillRect/>
+          </a:stretch>
+        </p:blipFill>
+        <p:spPr>
+          <a:xfrm>
+            <a:off x="-1" y="551663"/>
+            <a:ext cx="9144001" cy="4591837"/>
+          </a:xfrm>
+          <a:prstGeom prst="rect">
+            <a:avLst/>
+          </a:prstGeom>
+        </p:spPr>
+      </p:pic>
+    </p:spTree>
+    <p:extLst>
+      <p:ext uri="{BB962C8B-B14F-4D97-AF65-F5344CB8AC3E}">
+        <p14:creationId xmlns:p14="http://schemas.microsoft.com/office/powerpoint/2010/main" val="4226348449"/>
+      </p:ext>
+    </p:extLst>
+  </p:cSld>
+  <p:clrMapOvr>
+    <a:masterClrMapping/>
+  </p:clrMapOvr>
+</p:sld>
+</file>
+
+<file path=ppt/slides/slide11.xml><?xml version="1.0" encoding="utf-8"?>
+<p:sld xmlns:a="http://schemas.openxmlformats.org/drawingml/2006/main" xmlns:r="http://schemas.openxmlformats.org/officeDocument/2006/relationships" xmlns:p="http://schemas.openxmlformats.org/presentationml/2006/main" show="0">
+  <p:cSld>
+    <p:spTree>
+      <p:nvGrpSpPr>
+        <p:cNvPr id="1" name="Shape 323"/>
+        <p:cNvGrpSpPr/>
+        <p:nvPr/>
+      </p:nvGrpSpPr>
+      <p:grpSpPr>
+        <a:xfrm>
+          <a:off x="0" y="0"/>
+          <a:ext cx="0" cy="0"/>
+          <a:chOff x="0" y="0"/>
+          <a:chExt cx="0" cy="0"/>
+        </a:xfrm>
+      </p:grpSpPr>
+      <p:sp>
+        <p:nvSpPr>
+          <p:cNvPr id="324" name="Google Shape;324;p47"/>
+          <p:cNvSpPr txBox="1">
+            <a:spLocks noGrp="1"/>
+          </p:cNvSpPr>
+          <p:nvPr>
+            <p:ph type="title"/>
+          </p:nvPr>
+        </p:nvSpPr>
+        <p:spPr>
+          <a:xfrm>
+            <a:off x="226208" y="1"/>
+            <a:ext cx="8520600" cy="464980"/>
+          </a:xfrm>
+          <a:prstGeom prst="rect">
+            <a:avLst/>
+          </a:prstGeom>
+        </p:spPr>
+        <p:txBody>
+          <a:bodyPr spcFirstLastPara="1" wrap="square" lIns="91425" tIns="91425" rIns="91425" bIns="91425" anchor="t" anchorCtr="0">
+            <a:noAutofit/>
+          </a:bodyPr>
+          <a:lstStyle/>
+          <a:p>
+            <a:pPr marL="0" lvl="0" indent="0" algn="ctr" rtl="0">
+              <a:spcBef>
+                <a:spcPts val="0"/>
+              </a:spcBef>
+              <a:spcAft>
+                <a:spcPts val="0"/>
+              </a:spcAft>
+              <a:buNone/>
+            </a:pPr>
+            <a:r>
+              <a:rPr lang="en-US" dirty="0"/>
+              <a:t>Use </a:t>
+            </a:r>
+            <a:r>
+              <a:rPr lang="en-US" sz="2400" dirty="0"/>
+              <a:t>Assigned</a:t>
+            </a:r>
+            <a:r>
+              <a:rPr lang="en-US" dirty="0"/>
+              <a:t> Seat</a:t>
+            </a:r>
+            <a:endParaRPr dirty="0"/>
+          </a:p>
+        </p:txBody>
+      </p:sp>
+      <p:sp>
+        <p:nvSpPr>
+          <p:cNvPr id="326" name="Google Shape;326;p47"/>
+          <p:cNvSpPr txBox="1">
+            <a:spLocks noGrp="1"/>
+          </p:cNvSpPr>
+          <p:nvPr>
+            <p:ph type="sldNum" idx="12"/>
+          </p:nvPr>
+        </p:nvSpPr>
+        <p:spPr>
+          <a:xfrm>
+            <a:off x="8472458" y="4663217"/>
+            <a:ext cx="548700" cy="393600"/>
+          </a:xfrm>
+          <a:prstGeom prst="rect">
+            <a:avLst/>
+          </a:prstGeom>
+        </p:spPr>
+        <p:txBody>
+          <a:bodyPr spcFirstLastPara="1" wrap="square" lIns="91425" tIns="91425" rIns="91425" bIns="91425" anchor="ctr" anchorCtr="0">
+            <a:noAutofit/>
+          </a:bodyPr>
+          <a:lstStyle/>
+          <a:p>
+            <a:pPr marL="0" lvl="0" indent="0" algn="r" rtl="0">
+              <a:spcBef>
+                <a:spcPts val="0"/>
+              </a:spcBef>
+              <a:spcAft>
+                <a:spcPts val="0"/>
+              </a:spcAft>
+              <a:buNone/>
+            </a:pPr>
+            <a:fld id="{00000000-1234-1234-1234-123412341234}" type="slidenum">
+              <a:rPr lang="en"/>
+              <a:t>11</a:t>
+            </a:fld>
+            <a:endParaRPr/>
+          </a:p>
+        </p:txBody>
+      </p:sp>
+      <p:pic>
+        <p:nvPicPr>
+          <p:cNvPr id="3" name="Picture 2">
+            <a:extLst>
+              <a:ext uri="{FF2B5EF4-FFF2-40B4-BE49-F238E27FC236}">
+                <a16:creationId xmlns:a16="http://schemas.microsoft.com/office/drawing/2014/main" id="{92DE4AAC-70FE-A114-5258-F5B22EDDED45}"/>
+              </a:ext>
+            </a:extLst>
+          </p:cNvPr>
+          <p:cNvPicPr>
+            <a:picLocks noChangeAspect="1"/>
+          </p:cNvPicPr>
+          <p:nvPr/>
+        </p:nvPicPr>
+        <p:blipFill>
+          <a:blip r:embed="rId3"/>
+          <a:stretch>
+            <a:fillRect/>
+          </a:stretch>
+        </p:blipFill>
+        <p:spPr>
+          <a:xfrm>
+            <a:off x="0" y="716280"/>
+            <a:ext cx="9144000" cy="4427218"/>
+          </a:xfrm>
+          <a:prstGeom prst="rect">
+            <a:avLst/>
+          </a:prstGeom>
+        </p:spPr>
+      </p:pic>
+    </p:spTree>
+    <p:extLst>
+      <p:ext uri="{BB962C8B-B14F-4D97-AF65-F5344CB8AC3E}">
+        <p14:creationId xmlns:p14="http://schemas.microsoft.com/office/powerpoint/2010/main" val="1976403023"/>
+      </p:ext>
+    </p:extLst>
+  </p:cSld>
+  <p:clrMapOvr>
+    <a:masterClrMapping/>
+  </p:clrMapOvr>
+</p:sld>
+</file>
+
+<file path=ppt/slides/slide12.xml><?xml version="1.0" encoding="utf-8"?>
+<p:sld xmlns:a="http://schemas.openxmlformats.org/drawingml/2006/main" xmlns:r="http://schemas.openxmlformats.org/officeDocument/2006/relationships" xmlns:p="http://schemas.openxmlformats.org/presentationml/2006/main" show="0">
+  <p:cSld>
+    <p:spTree>
+      <p:nvGrpSpPr>
+        <p:cNvPr id="1" name="Shape 323"/>
+        <p:cNvGrpSpPr/>
+        <p:nvPr/>
+      </p:nvGrpSpPr>
+      <p:grpSpPr>
+        <a:xfrm>
+          <a:off x="0" y="0"/>
+          <a:ext cx="0" cy="0"/>
+          <a:chOff x="0" y="0"/>
+          <a:chExt cx="0" cy="0"/>
+        </a:xfrm>
+      </p:grpSpPr>
+      <p:sp>
+        <p:nvSpPr>
+          <p:cNvPr id="324" name="Google Shape;324;p47"/>
+          <p:cNvSpPr txBox="1">
+            <a:spLocks noGrp="1"/>
+          </p:cNvSpPr>
+          <p:nvPr>
+            <p:ph type="title"/>
+          </p:nvPr>
+        </p:nvSpPr>
+        <p:spPr>
+          <a:xfrm>
+            <a:off x="226208" y="1"/>
+            <a:ext cx="8520600" cy="464980"/>
+          </a:xfrm>
+          <a:prstGeom prst="rect">
+            <a:avLst/>
+          </a:prstGeom>
+        </p:spPr>
+        <p:txBody>
+          <a:bodyPr spcFirstLastPara="1" wrap="square" lIns="91425" tIns="91425" rIns="91425" bIns="91425" anchor="t" anchorCtr="0">
+            <a:noAutofit/>
+          </a:bodyPr>
+          <a:lstStyle/>
+          <a:p>
+            <a:pPr marL="0" lvl="0" indent="0" algn="ctr" rtl="0">
+              <a:spcBef>
+                <a:spcPts val="0"/>
+              </a:spcBef>
+              <a:spcAft>
+                <a:spcPts val="0"/>
+              </a:spcAft>
+              <a:buNone/>
+            </a:pPr>
+            <a:r>
+              <a:rPr lang="en-US" dirty="0"/>
+              <a:t>Use </a:t>
+            </a:r>
+            <a:r>
+              <a:rPr lang="en-US" sz="2400" dirty="0"/>
+              <a:t>Assigned</a:t>
+            </a:r>
+            <a:r>
+              <a:rPr lang="en-US" dirty="0"/>
+              <a:t> Seat</a:t>
+            </a:r>
+            <a:endParaRPr dirty="0"/>
+          </a:p>
+        </p:txBody>
+      </p:sp>
+      <p:sp>
+        <p:nvSpPr>
+          <p:cNvPr id="326" name="Google Shape;326;p47"/>
+          <p:cNvSpPr txBox="1">
+            <a:spLocks noGrp="1"/>
+          </p:cNvSpPr>
+          <p:nvPr>
+            <p:ph type="sldNum" idx="12"/>
+          </p:nvPr>
+        </p:nvSpPr>
+        <p:spPr>
+          <a:xfrm>
+            <a:off x="8472458" y="4663217"/>
+            <a:ext cx="548700" cy="393600"/>
+          </a:xfrm>
+          <a:prstGeom prst="rect">
+            <a:avLst/>
+          </a:prstGeom>
+        </p:spPr>
+        <p:txBody>
+          <a:bodyPr spcFirstLastPara="1" wrap="square" lIns="91425" tIns="91425" rIns="91425" bIns="91425" anchor="ctr" anchorCtr="0">
+            <a:noAutofit/>
+          </a:bodyPr>
+          <a:lstStyle/>
+          <a:p>
+            <a:pPr marL="0" lvl="0" indent="0" algn="r" rtl="0">
+              <a:spcBef>
+                <a:spcPts val="0"/>
+              </a:spcBef>
+              <a:spcAft>
+                <a:spcPts val="0"/>
+              </a:spcAft>
+              <a:buNone/>
+            </a:pPr>
+            <a:fld id="{00000000-1234-1234-1234-123412341234}" type="slidenum">
+              <a:rPr lang="en"/>
+              <a:t>12</a:t>
+            </a:fld>
+            <a:endParaRPr/>
+          </a:p>
+        </p:txBody>
+      </p:sp>
+      <p:pic>
+        <p:nvPicPr>
+          <p:cNvPr id="4" name="Picture 3">
+            <a:extLst>
+              <a:ext uri="{FF2B5EF4-FFF2-40B4-BE49-F238E27FC236}">
+                <a16:creationId xmlns:a16="http://schemas.microsoft.com/office/drawing/2014/main" id="{DCD752B9-EFAE-AFC1-7D39-6763B89DE8D3}"/>
+              </a:ext>
+            </a:extLst>
+          </p:cNvPr>
+          <p:cNvPicPr>
+            <a:picLocks noChangeAspect="1"/>
+          </p:cNvPicPr>
+          <p:nvPr/>
+        </p:nvPicPr>
+        <p:blipFill>
+          <a:blip r:embed="rId3"/>
+          <a:stretch>
+            <a:fillRect/>
+          </a:stretch>
+        </p:blipFill>
+        <p:spPr>
+          <a:xfrm>
+            <a:off x="0" y="652130"/>
+            <a:ext cx="9144000" cy="4491369"/>
+          </a:xfrm>
+          <a:prstGeom prst="rect">
+            <a:avLst/>
+          </a:prstGeom>
+        </p:spPr>
+      </p:pic>
+    </p:spTree>
+    <p:extLst>
+      <p:ext uri="{BB962C8B-B14F-4D97-AF65-F5344CB8AC3E}">
+        <p14:creationId xmlns:p14="http://schemas.microsoft.com/office/powerpoint/2010/main" val="3365057756"/>
+      </p:ext>
+    </p:extLst>
+  </p:cSld>
+  <p:clrMapOvr>
+    <a:masterClrMapping/>
+  </p:clrMapOvr>
+</p:sld>
+</file>
+
+<file path=ppt/slides/slide2.xml><?xml version="1.0" encoding="utf-8"?>
+<p:sld xmlns:a="http://schemas.openxmlformats.org/drawingml/2006/main" xmlns:r="http://schemas.openxmlformats.org/officeDocument/2006/relationships" xmlns:p="http://schemas.openxmlformats.org/presentationml/2006/main" show="0">
+  <p:cSld>
+    <p:spTree>
+      <p:nvGrpSpPr>
         <p:cNvPr id="1" name="Shape 323"/>
         <p:cNvGrpSpPr/>
         <p:nvPr/>
@@ -6675,7 +8058,7 @@
             </a:pPr>
             <a:fld id="{00000000-1234-1234-1234-123412341234}" type="slidenum">
               <a:rPr lang="en"/>
-              <a:t>1</a:t>
+              <a:t>2</a:t>
             </a:fld>
             <a:endParaRPr/>
           </a:p>
@@ -7089,463 +8472,7 @@
 </p:sld>
 </file>
 
-<file path=ppt/slides/slide10.xml><?xml version="1.0" encoding="utf-8"?>
-<p:sld xmlns:a="http://schemas.openxmlformats.org/drawingml/2006/main" xmlns:r="http://schemas.openxmlformats.org/officeDocument/2006/relationships" xmlns:p="http://schemas.openxmlformats.org/presentationml/2006/main" show="0">
-  <p:cSld>
-    <p:spTree>
-      <p:nvGrpSpPr>
-        <p:cNvPr id="1" name="Shape 323"/>
-        <p:cNvGrpSpPr/>
-        <p:nvPr/>
-      </p:nvGrpSpPr>
-      <p:grpSpPr>
-        <a:xfrm>
-          <a:off x="0" y="0"/>
-          <a:ext cx="0" cy="0"/>
-          <a:chOff x="0" y="0"/>
-          <a:chExt cx="0" cy="0"/>
-        </a:xfrm>
-      </p:grpSpPr>
-      <p:sp>
-        <p:nvSpPr>
-          <p:cNvPr id="324" name="Google Shape;324;p47"/>
-          <p:cNvSpPr txBox="1">
-            <a:spLocks noGrp="1"/>
-          </p:cNvSpPr>
-          <p:nvPr>
-            <p:ph type="title"/>
-          </p:nvPr>
-        </p:nvSpPr>
-        <p:spPr>
-          <a:xfrm>
-            <a:off x="226208" y="1"/>
-            <a:ext cx="8520600" cy="464980"/>
-          </a:xfrm>
-          <a:prstGeom prst="rect">
-            <a:avLst/>
-          </a:prstGeom>
-        </p:spPr>
-        <p:txBody>
-          <a:bodyPr spcFirstLastPara="1" wrap="square" lIns="91425" tIns="91425" rIns="91425" bIns="91425" anchor="t" anchorCtr="0">
-            <a:noAutofit/>
-          </a:bodyPr>
-          <a:lstStyle/>
-          <a:p>
-            <a:pPr marL="0" lvl="0" indent="0" algn="ctr" rtl="0">
-              <a:spcBef>
-                <a:spcPts val="0"/>
-              </a:spcBef>
-              <a:spcAft>
-                <a:spcPts val="0"/>
-              </a:spcAft>
-              <a:buNone/>
-            </a:pPr>
-            <a:r>
-              <a:rPr lang="en-US" dirty="0"/>
-              <a:t>Use </a:t>
-            </a:r>
-            <a:r>
-              <a:rPr lang="en-US" sz="2400" dirty="0"/>
-              <a:t>Assigned</a:t>
-            </a:r>
-            <a:r>
-              <a:rPr lang="en-US" dirty="0"/>
-              <a:t> Seat</a:t>
-            </a:r>
-            <a:endParaRPr dirty="0"/>
-          </a:p>
-        </p:txBody>
-      </p:sp>
-      <p:sp>
-        <p:nvSpPr>
-          <p:cNvPr id="326" name="Google Shape;326;p47"/>
-          <p:cNvSpPr txBox="1">
-            <a:spLocks noGrp="1"/>
-          </p:cNvSpPr>
-          <p:nvPr>
-            <p:ph type="sldNum" idx="12"/>
-          </p:nvPr>
-        </p:nvSpPr>
-        <p:spPr>
-          <a:xfrm>
-            <a:off x="8472458" y="4663217"/>
-            <a:ext cx="548700" cy="393600"/>
-          </a:xfrm>
-          <a:prstGeom prst="rect">
-            <a:avLst/>
-          </a:prstGeom>
-        </p:spPr>
-        <p:txBody>
-          <a:bodyPr spcFirstLastPara="1" wrap="square" lIns="91425" tIns="91425" rIns="91425" bIns="91425" anchor="ctr" anchorCtr="0">
-            <a:noAutofit/>
-          </a:bodyPr>
-          <a:lstStyle/>
-          <a:p>
-            <a:pPr marL="0" lvl="0" indent="0" algn="r" rtl="0">
-              <a:spcBef>
-                <a:spcPts val="0"/>
-              </a:spcBef>
-              <a:spcAft>
-                <a:spcPts val="0"/>
-              </a:spcAft>
-              <a:buNone/>
-            </a:pPr>
-            <a:fld id="{00000000-1234-1234-1234-123412341234}" type="slidenum">
-              <a:rPr lang="en"/>
-              <a:t>10</a:t>
-            </a:fld>
-            <a:endParaRPr/>
-          </a:p>
-        </p:txBody>
-      </p:sp>
-      <p:pic>
-        <p:nvPicPr>
-          <p:cNvPr id="6" name="Picture 5">
-            <a:extLst>
-              <a:ext uri="{FF2B5EF4-FFF2-40B4-BE49-F238E27FC236}">
-                <a16:creationId xmlns:a16="http://schemas.microsoft.com/office/drawing/2014/main" id="{DED32793-7C09-E3A3-94E5-B5D46727A1D0}"/>
-              </a:ext>
-            </a:extLst>
-          </p:cNvPr>
-          <p:cNvPicPr>
-            <a:picLocks noChangeAspect="1"/>
-          </p:cNvPicPr>
-          <p:nvPr/>
-        </p:nvPicPr>
-        <p:blipFill>
-          <a:blip r:embed="rId3"/>
-          <a:stretch>
-            <a:fillRect/>
-          </a:stretch>
-        </p:blipFill>
-        <p:spPr>
-          <a:xfrm>
-            <a:off x="-1" y="551663"/>
-            <a:ext cx="9144001" cy="4591837"/>
-          </a:xfrm>
-          <a:prstGeom prst="rect">
-            <a:avLst/>
-          </a:prstGeom>
-        </p:spPr>
-      </p:pic>
-    </p:spTree>
-    <p:extLst>
-      <p:ext uri="{BB962C8B-B14F-4D97-AF65-F5344CB8AC3E}">
-        <p14:creationId xmlns:p14="http://schemas.microsoft.com/office/powerpoint/2010/main" val="4226348449"/>
-      </p:ext>
-    </p:extLst>
-  </p:cSld>
-  <p:clrMapOvr>
-    <a:masterClrMapping/>
-  </p:clrMapOvr>
-</p:sld>
-</file>
-
-<file path=ppt/slides/slide11.xml><?xml version="1.0" encoding="utf-8"?>
-<p:sld xmlns:a="http://schemas.openxmlformats.org/drawingml/2006/main" xmlns:r="http://schemas.openxmlformats.org/officeDocument/2006/relationships" xmlns:p="http://schemas.openxmlformats.org/presentationml/2006/main" show="0">
-  <p:cSld>
-    <p:spTree>
-      <p:nvGrpSpPr>
-        <p:cNvPr id="1" name="Shape 323"/>
-        <p:cNvGrpSpPr/>
-        <p:nvPr/>
-      </p:nvGrpSpPr>
-      <p:grpSpPr>
-        <a:xfrm>
-          <a:off x="0" y="0"/>
-          <a:ext cx="0" cy="0"/>
-          <a:chOff x="0" y="0"/>
-          <a:chExt cx="0" cy="0"/>
-        </a:xfrm>
-      </p:grpSpPr>
-      <p:sp>
-        <p:nvSpPr>
-          <p:cNvPr id="324" name="Google Shape;324;p47"/>
-          <p:cNvSpPr txBox="1">
-            <a:spLocks noGrp="1"/>
-          </p:cNvSpPr>
-          <p:nvPr>
-            <p:ph type="title"/>
-          </p:nvPr>
-        </p:nvSpPr>
-        <p:spPr>
-          <a:xfrm>
-            <a:off x="226208" y="1"/>
-            <a:ext cx="8520600" cy="464980"/>
-          </a:xfrm>
-          <a:prstGeom prst="rect">
-            <a:avLst/>
-          </a:prstGeom>
-        </p:spPr>
-        <p:txBody>
-          <a:bodyPr spcFirstLastPara="1" wrap="square" lIns="91425" tIns="91425" rIns="91425" bIns="91425" anchor="t" anchorCtr="0">
-            <a:noAutofit/>
-          </a:bodyPr>
-          <a:lstStyle/>
-          <a:p>
-            <a:pPr marL="0" lvl="0" indent="0" algn="ctr" rtl="0">
-              <a:spcBef>
-                <a:spcPts val="0"/>
-              </a:spcBef>
-              <a:spcAft>
-                <a:spcPts val="0"/>
-              </a:spcAft>
-              <a:buNone/>
-            </a:pPr>
-            <a:r>
-              <a:rPr lang="en-US" dirty="0"/>
-              <a:t>Use </a:t>
-            </a:r>
-            <a:r>
-              <a:rPr lang="en-US" sz="2400" dirty="0"/>
-              <a:t>Assigned</a:t>
-            </a:r>
-            <a:r>
-              <a:rPr lang="en-US" dirty="0"/>
-              <a:t> Seat</a:t>
-            </a:r>
-            <a:endParaRPr dirty="0"/>
-          </a:p>
-        </p:txBody>
-      </p:sp>
-      <p:sp>
-        <p:nvSpPr>
-          <p:cNvPr id="326" name="Google Shape;326;p47"/>
-          <p:cNvSpPr txBox="1">
-            <a:spLocks noGrp="1"/>
-          </p:cNvSpPr>
-          <p:nvPr>
-            <p:ph type="sldNum" idx="12"/>
-          </p:nvPr>
-        </p:nvSpPr>
-        <p:spPr>
-          <a:xfrm>
-            <a:off x="8472458" y="4663217"/>
-            <a:ext cx="548700" cy="393600"/>
-          </a:xfrm>
-          <a:prstGeom prst="rect">
-            <a:avLst/>
-          </a:prstGeom>
-        </p:spPr>
-        <p:txBody>
-          <a:bodyPr spcFirstLastPara="1" wrap="square" lIns="91425" tIns="91425" rIns="91425" bIns="91425" anchor="ctr" anchorCtr="0">
-            <a:noAutofit/>
-          </a:bodyPr>
-          <a:lstStyle/>
-          <a:p>
-            <a:pPr marL="0" lvl="0" indent="0" algn="r" rtl="0">
-              <a:spcBef>
-                <a:spcPts val="0"/>
-              </a:spcBef>
-              <a:spcAft>
-                <a:spcPts val="0"/>
-              </a:spcAft>
-              <a:buNone/>
-            </a:pPr>
-            <a:fld id="{00000000-1234-1234-1234-123412341234}" type="slidenum">
-              <a:rPr lang="en"/>
-              <a:t>11</a:t>
-            </a:fld>
-            <a:endParaRPr/>
-          </a:p>
-        </p:txBody>
-      </p:sp>
-      <p:pic>
-        <p:nvPicPr>
-          <p:cNvPr id="3" name="Picture 2">
-            <a:extLst>
-              <a:ext uri="{FF2B5EF4-FFF2-40B4-BE49-F238E27FC236}">
-                <a16:creationId xmlns:a16="http://schemas.microsoft.com/office/drawing/2014/main" id="{92DE4AAC-70FE-A114-5258-F5B22EDDED45}"/>
-              </a:ext>
-            </a:extLst>
-          </p:cNvPr>
-          <p:cNvPicPr>
-            <a:picLocks noChangeAspect="1"/>
-          </p:cNvPicPr>
-          <p:nvPr/>
-        </p:nvPicPr>
-        <p:blipFill>
-          <a:blip r:embed="rId3"/>
-          <a:stretch>
-            <a:fillRect/>
-          </a:stretch>
-        </p:blipFill>
-        <p:spPr>
-          <a:xfrm>
-            <a:off x="0" y="716280"/>
-            <a:ext cx="9144000" cy="4427218"/>
-          </a:xfrm>
-          <a:prstGeom prst="rect">
-            <a:avLst/>
-          </a:prstGeom>
-        </p:spPr>
-      </p:pic>
-    </p:spTree>
-    <p:extLst>
-      <p:ext uri="{BB962C8B-B14F-4D97-AF65-F5344CB8AC3E}">
-        <p14:creationId xmlns:p14="http://schemas.microsoft.com/office/powerpoint/2010/main" val="1976403023"/>
-      </p:ext>
-    </p:extLst>
-  </p:cSld>
-  <p:clrMapOvr>
-    <a:masterClrMapping/>
-  </p:clrMapOvr>
-</p:sld>
-</file>
-
-<file path=ppt/slides/slide12.xml><?xml version="1.0" encoding="utf-8"?>
-<p:sld xmlns:a="http://schemas.openxmlformats.org/drawingml/2006/main" xmlns:r="http://schemas.openxmlformats.org/officeDocument/2006/relationships" xmlns:p="http://schemas.openxmlformats.org/presentationml/2006/main" show="0">
-  <p:cSld>
-    <p:spTree>
-      <p:nvGrpSpPr>
-        <p:cNvPr id="1" name="Shape 323"/>
-        <p:cNvGrpSpPr/>
-        <p:nvPr/>
-      </p:nvGrpSpPr>
-      <p:grpSpPr>
-        <a:xfrm>
-          <a:off x="0" y="0"/>
-          <a:ext cx="0" cy="0"/>
-          <a:chOff x="0" y="0"/>
-          <a:chExt cx="0" cy="0"/>
-        </a:xfrm>
-      </p:grpSpPr>
-      <p:sp>
-        <p:nvSpPr>
-          <p:cNvPr id="324" name="Google Shape;324;p47"/>
-          <p:cNvSpPr txBox="1">
-            <a:spLocks noGrp="1"/>
-          </p:cNvSpPr>
-          <p:nvPr>
-            <p:ph type="title"/>
-          </p:nvPr>
-        </p:nvSpPr>
-        <p:spPr>
-          <a:xfrm>
-            <a:off x="226208" y="1"/>
-            <a:ext cx="8520600" cy="464980"/>
-          </a:xfrm>
-          <a:prstGeom prst="rect">
-            <a:avLst/>
-          </a:prstGeom>
-        </p:spPr>
-        <p:txBody>
-          <a:bodyPr spcFirstLastPara="1" wrap="square" lIns="91425" tIns="91425" rIns="91425" bIns="91425" anchor="t" anchorCtr="0">
-            <a:noAutofit/>
-          </a:bodyPr>
-          <a:lstStyle/>
-          <a:p>
-            <a:pPr marL="0" lvl="0" indent="0" algn="ctr" rtl="0">
-              <a:spcBef>
-                <a:spcPts val="0"/>
-              </a:spcBef>
-              <a:spcAft>
-                <a:spcPts val="0"/>
-              </a:spcAft>
-              <a:buNone/>
-            </a:pPr>
-            <a:r>
-              <a:rPr lang="en-US" dirty="0"/>
-              <a:t>Use </a:t>
-            </a:r>
-            <a:r>
-              <a:rPr lang="en-US" sz="2400" dirty="0"/>
-              <a:t>Assigned</a:t>
-            </a:r>
-            <a:r>
-              <a:rPr lang="en-US" dirty="0"/>
-              <a:t> Seat</a:t>
-            </a:r>
-            <a:endParaRPr dirty="0"/>
-          </a:p>
-        </p:txBody>
-      </p:sp>
-      <p:sp>
-        <p:nvSpPr>
-          <p:cNvPr id="326" name="Google Shape;326;p47"/>
-          <p:cNvSpPr txBox="1">
-            <a:spLocks noGrp="1"/>
-          </p:cNvSpPr>
-          <p:nvPr>
-            <p:ph type="sldNum" idx="12"/>
-          </p:nvPr>
-        </p:nvSpPr>
-        <p:spPr>
-          <a:xfrm>
-            <a:off x="8472458" y="4663217"/>
-            <a:ext cx="548700" cy="393600"/>
-          </a:xfrm>
-          <a:prstGeom prst="rect">
-            <a:avLst/>
-          </a:prstGeom>
-        </p:spPr>
-        <p:txBody>
-          <a:bodyPr spcFirstLastPara="1" wrap="square" lIns="91425" tIns="91425" rIns="91425" bIns="91425" anchor="ctr" anchorCtr="0">
-            <a:noAutofit/>
-          </a:bodyPr>
-          <a:lstStyle/>
-          <a:p>
-            <a:pPr marL="0" lvl="0" indent="0" algn="r" rtl="0">
-              <a:spcBef>
-                <a:spcPts val="0"/>
-              </a:spcBef>
-              <a:spcAft>
-                <a:spcPts val="0"/>
-              </a:spcAft>
-              <a:buNone/>
-            </a:pPr>
-            <a:fld id="{00000000-1234-1234-1234-123412341234}" type="slidenum">
-              <a:rPr lang="en"/>
-              <a:t>12</a:t>
-            </a:fld>
-            <a:endParaRPr/>
-          </a:p>
-        </p:txBody>
-      </p:sp>
-      <p:pic>
-        <p:nvPicPr>
-          <p:cNvPr id="4" name="Picture 3">
-            <a:extLst>
-              <a:ext uri="{FF2B5EF4-FFF2-40B4-BE49-F238E27FC236}">
-                <a16:creationId xmlns:a16="http://schemas.microsoft.com/office/drawing/2014/main" id="{DCD752B9-EFAE-AFC1-7D39-6763B89DE8D3}"/>
-              </a:ext>
-            </a:extLst>
-          </p:cNvPr>
-          <p:cNvPicPr>
-            <a:picLocks noChangeAspect="1"/>
-          </p:cNvPicPr>
-          <p:nvPr/>
-        </p:nvPicPr>
-        <p:blipFill>
-          <a:blip r:embed="rId3"/>
-          <a:stretch>
-            <a:fillRect/>
-          </a:stretch>
-        </p:blipFill>
-        <p:spPr>
-          <a:xfrm>
-            <a:off x="0" y="652130"/>
-            <a:ext cx="9144000" cy="4491369"/>
-          </a:xfrm>
-          <a:prstGeom prst="rect">
-            <a:avLst/>
-          </a:prstGeom>
-        </p:spPr>
-      </p:pic>
-    </p:spTree>
-    <p:extLst>
-      <p:ext uri="{BB962C8B-B14F-4D97-AF65-F5344CB8AC3E}">
-        <p14:creationId xmlns:p14="http://schemas.microsoft.com/office/powerpoint/2010/main" val="3365057756"/>
-      </p:ext>
-    </p:extLst>
-  </p:cSld>
-  <p:clrMapOvr>
-    <a:masterClrMapping/>
-  </p:clrMapOvr>
-</p:sld>
-</file>
-
-<file path=ppt/slides/slide2.xml><?xml version="1.0" encoding="utf-8"?>
+<file path=ppt/slides/slide3.xml><?xml version="1.0" encoding="utf-8"?>
 <p:sld xmlns:a="http://schemas.openxmlformats.org/drawingml/2006/main" xmlns:r="http://schemas.openxmlformats.org/officeDocument/2006/relationships" xmlns:p="http://schemas.openxmlformats.org/presentationml/2006/main" show="0">
   <p:cSld>
     <p:spTree>
@@ -7719,7 +8646,7 @@
             </a:pPr>
             <a:fld id="{00000000-1234-1234-1234-123412341234}" type="slidenum">
               <a:rPr lang="en"/>
-              <a:t>2</a:t>
+              <a:t>3</a:t>
             </a:fld>
             <a:endParaRPr/>
           </a:p>
@@ -8115,928 +9042,6 @@
         </p:txBody>
       </p:sp>
     </p:spTree>
-  </p:cSld>
-  <p:clrMapOvr>
-    <a:masterClrMapping/>
-  </p:clrMapOvr>
-</p:sld>
-</file>
-
-<file path=ppt/slides/slide3.xml><?xml version="1.0" encoding="utf-8"?>
-<p:sld xmlns:a="http://schemas.openxmlformats.org/drawingml/2006/main" xmlns:r="http://schemas.openxmlformats.org/officeDocument/2006/relationships" xmlns:p="http://schemas.openxmlformats.org/presentationml/2006/main" show="0">
-  <p:cSld>
-    <p:spTree>
-      <p:nvGrpSpPr>
-        <p:cNvPr id="1" name="Shape 323">
-          <a:extLst>
-            <a:ext uri="{FF2B5EF4-FFF2-40B4-BE49-F238E27FC236}">
-              <a16:creationId xmlns:a16="http://schemas.microsoft.com/office/drawing/2014/main" id="{19512066-5980-8A8B-BE30-C4FB3AC72235}"/>
-            </a:ext>
-          </a:extLst>
-        </p:cNvPr>
-        <p:cNvGrpSpPr/>
-        <p:nvPr/>
-      </p:nvGrpSpPr>
-      <p:grpSpPr>
-        <a:xfrm>
-          <a:off x="0" y="0"/>
-          <a:ext cx="0" cy="0"/>
-          <a:chOff x="0" y="0"/>
-          <a:chExt cx="0" cy="0"/>
-        </a:xfrm>
-      </p:grpSpPr>
-      <p:sp>
-        <p:nvSpPr>
-          <p:cNvPr id="324" name="Google Shape;324;p47">
-            <a:extLst>
-              <a:ext uri="{FF2B5EF4-FFF2-40B4-BE49-F238E27FC236}">
-                <a16:creationId xmlns:a16="http://schemas.microsoft.com/office/drawing/2014/main" id="{CDF56279-13BE-3C44-BBEF-E7DC5D1E88D2}"/>
-              </a:ext>
-            </a:extLst>
-          </p:cNvPr>
-          <p:cNvSpPr txBox="1">
-            <a:spLocks noGrp="1"/>
-          </p:cNvSpPr>
-          <p:nvPr>
-            <p:ph type="title"/>
-          </p:nvPr>
-        </p:nvSpPr>
-        <p:spPr>
-          <a:xfrm>
-            <a:off x="300016" y="269197"/>
-            <a:ext cx="8520600" cy="623700"/>
-          </a:xfrm>
-          <a:prstGeom prst="rect">
-            <a:avLst/>
-          </a:prstGeom>
-        </p:spPr>
-        <p:txBody>
-          <a:bodyPr spcFirstLastPara="1" wrap="square" lIns="91425" tIns="91425" rIns="91425" bIns="91425" anchor="t" anchorCtr="0">
-            <a:noAutofit/>
-          </a:bodyPr>
-          <a:lstStyle/>
-          <a:p>
-            <a:pPr marL="0" lvl="0" indent="0" algn="ctr" rtl="0">
-              <a:spcBef>
-                <a:spcPts val="0"/>
-              </a:spcBef>
-              <a:spcAft>
-                <a:spcPts val="0"/>
-              </a:spcAft>
-              <a:buNone/>
-            </a:pPr>
-            <a:r>
-              <a:rPr lang="en-US" dirty="0"/>
-              <a:t>GCIS – Software Development and Problem Solving</a:t>
-            </a:r>
-            <a:endParaRPr dirty="0"/>
-          </a:p>
-        </p:txBody>
-      </p:sp>
-      <p:sp>
-        <p:nvSpPr>
-          <p:cNvPr id="325" name="Google Shape;325;p47">
-            <a:extLst>
-              <a:ext uri="{FF2B5EF4-FFF2-40B4-BE49-F238E27FC236}">
-                <a16:creationId xmlns:a16="http://schemas.microsoft.com/office/drawing/2014/main" id="{5A9661D1-8430-BF80-279A-41B28CA04273}"/>
-              </a:ext>
-            </a:extLst>
-          </p:cNvPr>
-          <p:cNvSpPr txBox="1">
-            <a:spLocks noGrp="1"/>
-          </p:cNvSpPr>
-          <p:nvPr>
-            <p:ph type="body" idx="1"/>
-          </p:nvPr>
-        </p:nvSpPr>
-        <p:spPr>
-          <a:xfrm>
-            <a:off x="91445" y="1758316"/>
-            <a:ext cx="4000496" cy="1378401"/>
-          </a:xfrm>
-          <a:prstGeom prst="rect">
-            <a:avLst/>
-          </a:prstGeom>
-        </p:spPr>
-        <p:txBody>
-          <a:bodyPr spcFirstLastPara="1" wrap="square" lIns="91425" tIns="91425" rIns="91425" bIns="91425" anchor="ctr" anchorCtr="0">
-            <a:noAutofit/>
-          </a:bodyPr>
-          <a:lstStyle/>
-          <a:p>
-            <a:pPr marL="146050" indent="0">
-              <a:buNone/>
-            </a:pPr>
-            <a:r>
-              <a:rPr lang="en-US" sz="1600" dirty="0"/>
-              <a:t>Take Quiz 3.2: Abstract Classes</a:t>
-            </a:r>
-          </a:p>
-          <a:p>
-            <a:pPr marL="146050" indent="0">
-              <a:buNone/>
-            </a:pPr>
-            <a:r>
-              <a:rPr lang="en-US" sz="1600" dirty="0">
-                <a:solidFill>
-                  <a:schemeClr val="tx1"/>
-                </a:solidFill>
-              </a:rPr>
-              <a:t>Password – </a:t>
-            </a:r>
-            <a:r>
-              <a:rPr lang="en-US" sz="1600" dirty="0" err="1">
-                <a:solidFill>
-                  <a:schemeClr val="tx1"/>
-                </a:solidFill>
-              </a:rPr>
-              <a:t>abstractPassword</a:t>
-            </a:r>
-            <a:endParaRPr sz="1600" dirty="0">
-              <a:solidFill>
-                <a:schemeClr val="tx1"/>
-              </a:solidFill>
-            </a:endParaRPr>
-          </a:p>
-        </p:txBody>
-      </p:sp>
-      <p:sp>
-        <p:nvSpPr>
-          <p:cNvPr id="326" name="Google Shape;326;p47">
-            <a:extLst>
-              <a:ext uri="{FF2B5EF4-FFF2-40B4-BE49-F238E27FC236}">
-                <a16:creationId xmlns:a16="http://schemas.microsoft.com/office/drawing/2014/main" id="{8A14E227-935A-FBD8-6BD5-CBCE8D13EE84}"/>
-              </a:ext>
-            </a:extLst>
-          </p:cNvPr>
-          <p:cNvSpPr txBox="1">
-            <a:spLocks noGrp="1"/>
-          </p:cNvSpPr>
-          <p:nvPr>
-            <p:ph type="sldNum" idx="12"/>
-          </p:nvPr>
-        </p:nvSpPr>
-        <p:spPr>
-          <a:xfrm>
-            <a:off x="8472458" y="4663217"/>
-            <a:ext cx="548700" cy="393600"/>
-          </a:xfrm>
-          <a:prstGeom prst="rect">
-            <a:avLst/>
-          </a:prstGeom>
-        </p:spPr>
-        <p:txBody>
-          <a:bodyPr spcFirstLastPara="1" wrap="square" lIns="91425" tIns="91425" rIns="91425" bIns="91425" anchor="ctr" anchorCtr="0">
-            <a:noAutofit/>
-          </a:bodyPr>
-          <a:lstStyle/>
-          <a:p>
-            <a:pPr marL="0" lvl="0" indent="0" algn="r" rtl="0">
-              <a:spcBef>
-                <a:spcPts val="0"/>
-              </a:spcBef>
-              <a:spcAft>
-                <a:spcPts val="0"/>
-              </a:spcAft>
-              <a:buNone/>
-            </a:pPr>
-            <a:fld id="{00000000-1234-1234-1234-123412341234}" type="slidenum">
-              <a:rPr lang="en"/>
-              <a:t>3</a:t>
-            </a:fld>
-            <a:endParaRPr/>
-          </a:p>
-        </p:txBody>
-      </p:sp>
-      <p:sp>
-        <p:nvSpPr>
-          <p:cNvPr id="2" name="TextBox 1">
-            <a:extLst>
-              <a:ext uri="{FF2B5EF4-FFF2-40B4-BE49-F238E27FC236}">
-                <a16:creationId xmlns:a16="http://schemas.microsoft.com/office/drawing/2014/main" id="{AE960589-7B12-D7F7-6452-D45441D8CA95}"/>
-              </a:ext>
-            </a:extLst>
-          </p:cNvPr>
-          <p:cNvSpPr txBox="1"/>
-          <p:nvPr/>
-        </p:nvSpPr>
-        <p:spPr>
-          <a:xfrm>
-            <a:off x="-11684" y="1287037"/>
-            <a:ext cx="9144000" cy="338555"/>
-          </a:xfrm>
-          <a:prstGeom prst="rect">
-            <a:avLst/>
-          </a:prstGeom>
-          <a:solidFill>
-            <a:srgbClr val="FFC000"/>
-          </a:solidFill>
-        </p:spPr>
-        <p:txBody>
-          <a:bodyPr wrap="square" rtlCol="0">
-            <a:spAutoFit/>
-          </a:bodyPr>
-          <a:lstStyle/>
-          <a:p>
-            <a:r>
-              <a:rPr lang="en-US" dirty="0"/>
-              <a:t>Quiz</a:t>
-            </a:r>
-          </a:p>
-        </p:txBody>
-      </p:sp>
-      <p:sp>
-        <p:nvSpPr>
-          <p:cNvPr id="3" name="TextBox 2">
-            <a:extLst>
-              <a:ext uri="{FF2B5EF4-FFF2-40B4-BE49-F238E27FC236}">
-                <a16:creationId xmlns:a16="http://schemas.microsoft.com/office/drawing/2014/main" id="{4FD526CA-3FDB-A5C2-36D9-69A3252D5E9A}"/>
-              </a:ext>
-            </a:extLst>
-          </p:cNvPr>
-          <p:cNvSpPr txBox="1"/>
-          <p:nvPr/>
-        </p:nvSpPr>
-        <p:spPr>
-          <a:xfrm>
-            <a:off x="0" y="3507404"/>
-            <a:ext cx="9144000" cy="307777"/>
-          </a:xfrm>
-          <a:prstGeom prst="rect">
-            <a:avLst/>
-          </a:prstGeom>
-          <a:solidFill>
-            <a:srgbClr val="FFC000"/>
-          </a:solidFill>
-        </p:spPr>
-        <p:txBody>
-          <a:bodyPr wrap="square" rtlCol="0">
-            <a:spAutoFit/>
-          </a:bodyPr>
-          <a:lstStyle/>
-          <a:p>
-            <a:r>
-              <a:rPr lang="en-US" dirty="0"/>
-              <a:t>Next </a:t>
-            </a:r>
-            <a:r>
-              <a:rPr lang="en-US" dirty="0">
-                <a:sym typeface="Wingdings" panose="05000000000000000000" pitchFamily="2" charset="2"/>
-              </a:rPr>
-              <a:t> </a:t>
-            </a:r>
-            <a:endParaRPr lang="en-US" dirty="0"/>
-          </a:p>
-        </p:txBody>
-      </p:sp>
-      <p:sp>
-        <p:nvSpPr>
-          <p:cNvPr id="4" name="Google Shape;325;p47">
-            <a:extLst>
-              <a:ext uri="{FF2B5EF4-FFF2-40B4-BE49-F238E27FC236}">
-                <a16:creationId xmlns:a16="http://schemas.microsoft.com/office/drawing/2014/main" id="{DC50CCB1-5AFE-1F52-8B22-87EB927965B4}"/>
-              </a:ext>
-            </a:extLst>
-          </p:cNvPr>
-          <p:cNvSpPr txBox="1">
-            <a:spLocks/>
-          </p:cNvSpPr>
-          <p:nvPr/>
-        </p:nvSpPr>
-        <p:spPr>
-          <a:xfrm>
-            <a:off x="-5842" y="3848100"/>
-            <a:ext cx="9149842" cy="1208717"/>
-          </a:xfrm>
-          <a:prstGeom prst="rect">
-            <a:avLst/>
-          </a:prstGeom>
-          <a:noFill/>
-          <a:ln>
-            <a:noFill/>
-          </a:ln>
-        </p:spPr>
-        <p:txBody>
-          <a:bodyPr spcFirstLastPara="1" wrap="square" lIns="91425" tIns="91425" rIns="91425" bIns="91425" anchor="ctr" anchorCtr="0">
-            <a:noAutofit/>
-          </a:bodyPr>
-          <a:lstStyle>
-            <a:defPPr marR="0" lvl="0" algn="l" rtl="0">
-              <a:lnSpc>
-                <a:spcPct val="100000"/>
-              </a:lnSpc>
-              <a:spcBef>
-                <a:spcPts val="0"/>
-              </a:spcBef>
-              <a:spcAft>
-                <a:spcPts val="0"/>
-              </a:spcAft>
-            </a:defPPr>
-            <a:lvl1pPr marL="457200" marR="0" lvl="0" indent="-311150" algn="l" rtl="0">
-              <a:lnSpc>
-                <a:spcPct val="115000"/>
-              </a:lnSpc>
-              <a:spcBef>
-                <a:spcPts val="0"/>
-              </a:spcBef>
-              <a:spcAft>
-                <a:spcPts val="0"/>
-              </a:spcAft>
-              <a:buClr>
-                <a:schemeClr val="dk2"/>
-              </a:buClr>
-              <a:buSzPts val="1300"/>
-              <a:buFont typeface="Roboto"/>
-              <a:buChar char="●"/>
-              <a:defRPr sz="1300" b="0" i="0" u="none" strike="noStrike" cap="none">
-                <a:solidFill>
-                  <a:schemeClr val="dk2"/>
-                </a:solidFill>
-                <a:latin typeface="Roboto"/>
-                <a:ea typeface="Roboto"/>
-                <a:cs typeface="Roboto"/>
-                <a:sym typeface="Roboto"/>
-              </a:defRPr>
-            </a:lvl1pPr>
-            <a:lvl2pPr marL="914400" marR="0" lvl="1" indent="-298450" algn="l" rtl="0">
-              <a:lnSpc>
-                <a:spcPct val="115000"/>
-              </a:lnSpc>
-              <a:spcBef>
-                <a:spcPts val="1600"/>
-              </a:spcBef>
-              <a:spcAft>
-                <a:spcPts val="0"/>
-              </a:spcAft>
-              <a:buClr>
-                <a:schemeClr val="dk2"/>
-              </a:buClr>
-              <a:buSzPts val="1100"/>
-              <a:buFont typeface="Roboto"/>
-              <a:buChar char="○"/>
-              <a:defRPr sz="1100" b="0" i="0" u="none" strike="noStrike" cap="none">
-                <a:solidFill>
-                  <a:schemeClr val="dk2"/>
-                </a:solidFill>
-                <a:latin typeface="Roboto"/>
-                <a:ea typeface="Roboto"/>
-                <a:cs typeface="Roboto"/>
-                <a:sym typeface="Roboto"/>
-              </a:defRPr>
-            </a:lvl2pPr>
-            <a:lvl3pPr marL="1371600" marR="0" lvl="2" indent="-298450" algn="l" rtl="0">
-              <a:lnSpc>
-                <a:spcPct val="115000"/>
-              </a:lnSpc>
-              <a:spcBef>
-                <a:spcPts val="1600"/>
-              </a:spcBef>
-              <a:spcAft>
-                <a:spcPts val="0"/>
-              </a:spcAft>
-              <a:buClr>
-                <a:schemeClr val="dk2"/>
-              </a:buClr>
-              <a:buSzPts val="1100"/>
-              <a:buFont typeface="Roboto"/>
-              <a:buChar char="■"/>
-              <a:defRPr sz="1100" b="0" i="0" u="none" strike="noStrike" cap="none">
-                <a:solidFill>
-                  <a:schemeClr val="dk2"/>
-                </a:solidFill>
-                <a:latin typeface="Roboto"/>
-                <a:ea typeface="Roboto"/>
-                <a:cs typeface="Roboto"/>
-                <a:sym typeface="Roboto"/>
-              </a:defRPr>
-            </a:lvl3pPr>
-            <a:lvl4pPr marL="1828800" marR="0" lvl="3" indent="-298450" algn="l" rtl="0">
-              <a:lnSpc>
-                <a:spcPct val="115000"/>
-              </a:lnSpc>
-              <a:spcBef>
-                <a:spcPts val="1600"/>
-              </a:spcBef>
-              <a:spcAft>
-                <a:spcPts val="0"/>
-              </a:spcAft>
-              <a:buClr>
-                <a:schemeClr val="dk2"/>
-              </a:buClr>
-              <a:buSzPts val="1100"/>
-              <a:buFont typeface="Roboto"/>
-              <a:buChar char="●"/>
-              <a:defRPr sz="1100" b="0" i="0" u="none" strike="noStrike" cap="none">
-                <a:solidFill>
-                  <a:schemeClr val="dk2"/>
-                </a:solidFill>
-                <a:latin typeface="Roboto"/>
-                <a:ea typeface="Roboto"/>
-                <a:cs typeface="Roboto"/>
-                <a:sym typeface="Roboto"/>
-              </a:defRPr>
-            </a:lvl4pPr>
-            <a:lvl5pPr marL="2286000" marR="0" lvl="4" indent="-298450" algn="l" rtl="0">
-              <a:lnSpc>
-                <a:spcPct val="115000"/>
-              </a:lnSpc>
-              <a:spcBef>
-                <a:spcPts val="1600"/>
-              </a:spcBef>
-              <a:spcAft>
-                <a:spcPts val="0"/>
-              </a:spcAft>
-              <a:buClr>
-                <a:schemeClr val="dk2"/>
-              </a:buClr>
-              <a:buSzPts val="1100"/>
-              <a:buFont typeface="Roboto"/>
-              <a:buChar char="○"/>
-              <a:defRPr sz="1100" b="0" i="0" u="none" strike="noStrike" cap="none">
-                <a:solidFill>
-                  <a:schemeClr val="dk2"/>
-                </a:solidFill>
-                <a:latin typeface="Roboto"/>
-                <a:ea typeface="Roboto"/>
-                <a:cs typeface="Roboto"/>
-                <a:sym typeface="Roboto"/>
-              </a:defRPr>
-            </a:lvl5pPr>
-            <a:lvl6pPr marL="2743200" marR="0" lvl="5" indent="-298450" algn="l" rtl="0">
-              <a:lnSpc>
-                <a:spcPct val="115000"/>
-              </a:lnSpc>
-              <a:spcBef>
-                <a:spcPts val="1600"/>
-              </a:spcBef>
-              <a:spcAft>
-                <a:spcPts val="0"/>
-              </a:spcAft>
-              <a:buClr>
-                <a:schemeClr val="dk2"/>
-              </a:buClr>
-              <a:buSzPts val="1100"/>
-              <a:buFont typeface="Roboto"/>
-              <a:buChar char="■"/>
-              <a:defRPr sz="1100" b="0" i="0" u="none" strike="noStrike" cap="none">
-                <a:solidFill>
-                  <a:schemeClr val="dk2"/>
-                </a:solidFill>
-                <a:latin typeface="Roboto"/>
-                <a:ea typeface="Roboto"/>
-                <a:cs typeface="Roboto"/>
-                <a:sym typeface="Roboto"/>
-              </a:defRPr>
-            </a:lvl6pPr>
-            <a:lvl7pPr marL="3200400" marR="0" lvl="6" indent="-298450" algn="l" rtl="0">
-              <a:lnSpc>
-                <a:spcPct val="115000"/>
-              </a:lnSpc>
-              <a:spcBef>
-                <a:spcPts val="1600"/>
-              </a:spcBef>
-              <a:spcAft>
-                <a:spcPts val="0"/>
-              </a:spcAft>
-              <a:buClr>
-                <a:schemeClr val="dk2"/>
-              </a:buClr>
-              <a:buSzPts val="1100"/>
-              <a:buFont typeface="Roboto"/>
-              <a:buChar char="●"/>
-              <a:defRPr sz="1100" b="0" i="0" u="none" strike="noStrike" cap="none">
-                <a:solidFill>
-                  <a:schemeClr val="dk2"/>
-                </a:solidFill>
-                <a:latin typeface="Roboto"/>
-                <a:ea typeface="Roboto"/>
-                <a:cs typeface="Roboto"/>
-                <a:sym typeface="Roboto"/>
-              </a:defRPr>
-            </a:lvl7pPr>
-            <a:lvl8pPr marL="3657600" marR="0" lvl="7" indent="-298450" algn="l" rtl="0">
-              <a:lnSpc>
-                <a:spcPct val="115000"/>
-              </a:lnSpc>
-              <a:spcBef>
-                <a:spcPts val="1600"/>
-              </a:spcBef>
-              <a:spcAft>
-                <a:spcPts val="0"/>
-              </a:spcAft>
-              <a:buClr>
-                <a:schemeClr val="dk2"/>
-              </a:buClr>
-              <a:buSzPts val="1100"/>
-              <a:buFont typeface="Roboto"/>
-              <a:buChar char="○"/>
-              <a:defRPr sz="1100" b="0" i="0" u="none" strike="noStrike" cap="none">
-                <a:solidFill>
-                  <a:schemeClr val="dk2"/>
-                </a:solidFill>
-                <a:latin typeface="Roboto"/>
-                <a:ea typeface="Roboto"/>
-                <a:cs typeface="Roboto"/>
-                <a:sym typeface="Roboto"/>
-              </a:defRPr>
-            </a:lvl8pPr>
-            <a:lvl9pPr marL="4114800" marR="0" lvl="8" indent="-298450" algn="l" rtl="0">
-              <a:lnSpc>
-                <a:spcPct val="115000"/>
-              </a:lnSpc>
-              <a:spcBef>
-                <a:spcPts val="1600"/>
-              </a:spcBef>
-              <a:spcAft>
-                <a:spcPts val="1600"/>
-              </a:spcAft>
-              <a:buClr>
-                <a:schemeClr val="dk2"/>
-              </a:buClr>
-              <a:buSzPts val="1100"/>
-              <a:buFont typeface="Roboto"/>
-              <a:buChar char="■"/>
-              <a:defRPr sz="1100" b="0" i="0" u="none" strike="noStrike" cap="none">
-                <a:solidFill>
-                  <a:schemeClr val="dk2"/>
-                </a:solidFill>
-                <a:latin typeface="Roboto"/>
-                <a:ea typeface="Roboto"/>
-                <a:cs typeface="Roboto"/>
-                <a:sym typeface="Roboto"/>
-              </a:defRPr>
-            </a:lvl9pPr>
-          </a:lstStyle>
-          <a:p>
-            <a:pPr marL="0" indent="0">
-              <a:spcAft>
-                <a:spcPts val="1600"/>
-              </a:spcAft>
-              <a:buNone/>
-            </a:pPr>
-            <a:r>
-              <a:rPr lang="en-US" sz="1400" dirty="0"/>
-              <a:t>After completing the Quiz </a:t>
-            </a:r>
-          </a:p>
-          <a:p>
-            <a:pPr marL="342900" indent="-342900">
-              <a:spcAft>
-                <a:spcPts val="1600"/>
-              </a:spcAft>
-            </a:pPr>
-            <a:r>
-              <a:rPr lang="en-US" sz="1200" dirty="0"/>
-              <a:t>Accept GitHub Classroom Assignment for Unit 04</a:t>
-            </a:r>
-          </a:p>
-          <a:p>
-            <a:pPr marL="342900" indent="-342900">
-              <a:spcAft>
-                <a:spcPts val="1600"/>
-              </a:spcAft>
-            </a:pPr>
-            <a:r>
-              <a:rPr lang="en-US" sz="1200" dirty="0"/>
-              <a:t>Clone/pull GitHub classroom repo for Unit 04 under </a:t>
-            </a:r>
-            <a:r>
-              <a:rPr lang="en-US" sz="1200" dirty="0" err="1"/>
-              <a:t>softdevII</a:t>
-            </a:r>
-            <a:r>
-              <a:rPr lang="en-US" sz="1200" dirty="0"/>
-              <a:t> folder</a:t>
-            </a:r>
-            <a:endParaRPr lang="en-US" sz="1200" dirty="0">
-              <a:solidFill>
-                <a:schemeClr val="tx1"/>
-              </a:solidFill>
-            </a:endParaRPr>
-          </a:p>
-        </p:txBody>
-      </p:sp>
-      <p:sp>
-        <p:nvSpPr>
-          <p:cNvPr id="5" name="Google Shape;325;p47">
-            <a:extLst>
-              <a:ext uri="{FF2B5EF4-FFF2-40B4-BE49-F238E27FC236}">
-                <a16:creationId xmlns:a16="http://schemas.microsoft.com/office/drawing/2014/main" id="{7B85466C-6200-EE66-9396-7DECA70CDF53}"/>
-              </a:ext>
-            </a:extLst>
-          </p:cNvPr>
-          <p:cNvSpPr txBox="1">
-            <a:spLocks/>
-          </p:cNvSpPr>
-          <p:nvPr/>
-        </p:nvSpPr>
-        <p:spPr>
-          <a:xfrm>
-            <a:off x="4303618" y="1737005"/>
-            <a:ext cx="4516998" cy="1378400"/>
-          </a:xfrm>
-          <a:prstGeom prst="rect">
-            <a:avLst/>
-          </a:prstGeom>
-          <a:noFill/>
-          <a:ln>
-            <a:noFill/>
-          </a:ln>
-        </p:spPr>
-        <p:txBody>
-          <a:bodyPr spcFirstLastPara="1" wrap="square" lIns="91425" tIns="91425" rIns="91425" bIns="91425" anchor="ctr" anchorCtr="0">
-            <a:noAutofit/>
-          </a:bodyPr>
-          <a:lstStyle>
-            <a:defPPr marR="0" lvl="0" algn="l" rtl="0">
-              <a:lnSpc>
-                <a:spcPct val="100000"/>
-              </a:lnSpc>
-              <a:spcBef>
-                <a:spcPts val="0"/>
-              </a:spcBef>
-              <a:spcAft>
-                <a:spcPts val="0"/>
-              </a:spcAft>
-            </a:defPPr>
-            <a:lvl1pPr marL="457200" marR="0" lvl="0" indent="-311150" algn="l" rtl="0">
-              <a:lnSpc>
-                <a:spcPct val="115000"/>
-              </a:lnSpc>
-              <a:spcBef>
-                <a:spcPts val="0"/>
-              </a:spcBef>
-              <a:spcAft>
-                <a:spcPts val="0"/>
-              </a:spcAft>
-              <a:buClr>
-                <a:schemeClr val="dk2"/>
-              </a:buClr>
-              <a:buSzPts val="1300"/>
-              <a:buFont typeface="Roboto"/>
-              <a:buChar char="●"/>
-              <a:defRPr sz="1300" b="0" i="0" u="none" strike="noStrike" cap="none">
-                <a:solidFill>
-                  <a:schemeClr val="dk2"/>
-                </a:solidFill>
-                <a:latin typeface="Roboto"/>
-                <a:ea typeface="Roboto"/>
-                <a:cs typeface="Roboto"/>
-                <a:sym typeface="Roboto"/>
-              </a:defRPr>
-            </a:lvl1pPr>
-            <a:lvl2pPr marL="914400" marR="0" lvl="1" indent="-298450" algn="l" rtl="0">
-              <a:lnSpc>
-                <a:spcPct val="115000"/>
-              </a:lnSpc>
-              <a:spcBef>
-                <a:spcPts val="1600"/>
-              </a:spcBef>
-              <a:spcAft>
-                <a:spcPts val="0"/>
-              </a:spcAft>
-              <a:buClr>
-                <a:schemeClr val="dk2"/>
-              </a:buClr>
-              <a:buSzPts val="1100"/>
-              <a:buFont typeface="Roboto"/>
-              <a:buChar char="○"/>
-              <a:defRPr sz="1100" b="0" i="0" u="none" strike="noStrike" cap="none">
-                <a:solidFill>
-                  <a:schemeClr val="dk2"/>
-                </a:solidFill>
-                <a:latin typeface="Roboto"/>
-                <a:ea typeface="Roboto"/>
-                <a:cs typeface="Roboto"/>
-                <a:sym typeface="Roboto"/>
-              </a:defRPr>
-            </a:lvl2pPr>
-            <a:lvl3pPr marL="1371600" marR="0" lvl="2" indent="-298450" algn="l" rtl="0">
-              <a:lnSpc>
-                <a:spcPct val="115000"/>
-              </a:lnSpc>
-              <a:spcBef>
-                <a:spcPts val="1600"/>
-              </a:spcBef>
-              <a:spcAft>
-                <a:spcPts val="0"/>
-              </a:spcAft>
-              <a:buClr>
-                <a:schemeClr val="dk2"/>
-              </a:buClr>
-              <a:buSzPts val="1100"/>
-              <a:buFont typeface="Roboto"/>
-              <a:buChar char="■"/>
-              <a:defRPr sz="1100" b="0" i="0" u="none" strike="noStrike" cap="none">
-                <a:solidFill>
-                  <a:schemeClr val="dk2"/>
-                </a:solidFill>
-                <a:latin typeface="Roboto"/>
-                <a:ea typeface="Roboto"/>
-                <a:cs typeface="Roboto"/>
-                <a:sym typeface="Roboto"/>
-              </a:defRPr>
-            </a:lvl3pPr>
-            <a:lvl4pPr marL="1828800" marR="0" lvl="3" indent="-298450" algn="l" rtl="0">
-              <a:lnSpc>
-                <a:spcPct val="115000"/>
-              </a:lnSpc>
-              <a:spcBef>
-                <a:spcPts val="1600"/>
-              </a:spcBef>
-              <a:spcAft>
-                <a:spcPts val="0"/>
-              </a:spcAft>
-              <a:buClr>
-                <a:schemeClr val="dk2"/>
-              </a:buClr>
-              <a:buSzPts val="1100"/>
-              <a:buFont typeface="Roboto"/>
-              <a:buChar char="●"/>
-              <a:defRPr sz="1100" b="0" i="0" u="none" strike="noStrike" cap="none">
-                <a:solidFill>
-                  <a:schemeClr val="dk2"/>
-                </a:solidFill>
-                <a:latin typeface="Roboto"/>
-                <a:ea typeface="Roboto"/>
-                <a:cs typeface="Roboto"/>
-                <a:sym typeface="Roboto"/>
-              </a:defRPr>
-            </a:lvl4pPr>
-            <a:lvl5pPr marL="2286000" marR="0" lvl="4" indent="-298450" algn="l" rtl="0">
-              <a:lnSpc>
-                <a:spcPct val="115000"/>
-              </a:lnSpc>
-              <a:spcBef>
-                <a:spcPts val="1600"/>
-              </a:spcBef>
-              <a:spcAft>
-                <a:spcPts val="0"/>
-              </a:spcAft>
-              <a:buClr>
-                <a:schemeClr val="dk2"/>
-              </a:buClr>
-              <a:buSzPts val="1100"/>
-              <a:buFont typeface="Roboto"/>
-              <a:buChar char="○"/>
-              <a:defRPr sz="1100" b="0" i="0" u="none" strike="noStrike" cap="none">
-                <a:solidFill>
-                  <a:schemeClr val="dk2"/>
-                </a:solidFill>
-                <a:latin typeface="Roboto"/>
-                <a:ea typeface="Roboto"/>
-                <a:cs typeface="Roboto"/>
-                <a:sym typeface="Roboto"/>
-              </a:defRPr>
-            </a:lvl5pPr>
-            <a:lvl6pPr marL="2743200" marR="0" lvl="5" indent="-298450" algn="l" rtl="0">
-              <a:lnSpc>
-                <a:spcPct val="115000"/>
-              </a:lnSpc>
-              <a:spcBef>
-                <a:spcPts val="1600"/>
-              </a:spcBef>
-              <a:spcAft>
-                <a:spcPts val="0"/>
-              </a:spcAft>
-              <a:buClr>
-                <a:schemeClr val="dk2"/>
-              </a:buClr>
-              <a:buSzPts val="1100"/>
-              <a:buFont typeface="Roboto"/>
-              <a:buChar char="■"/>
-              <a:defRPr sz="1100" b="0" i="0" u="none" strike="noStrike" cap="none">
-                <a:solidFill>
-                  <a:schemeClr val="dk2"/>
-                </a:solidFill>
-                <a:latin typeface="Roboto"/>
-                <a:ea typeface="Roboto"/>
-                <a:cs typeface="Roboto"/>
-                <a:sym typeface="Roboto"/>
-              </a:defRPr>
-            </a:lvl6pPr>
-            <a:lvl7pPr marL="3200400" marR="0" lvl="6" indent="-298450" algn="l" rtl="0">
-              <a:lnSpc>
-                <a:spcPct val="115000"/>
-              </a:lnSpc>
-              <a:spcBef>
-                <a:spcPts val="1600"/>
-              </a:spcBef>
-              <a:spcAft>
-                <a:spcPts val="0"/>
-              </a:spcAft>
-              <a:buClr>
-                <a:schemeClr val="dk2"/>
-              </a:buClr>
-              <a:buSzPts val="1100"/>
-              <a:buFont typeface="Roboto"/>
-              <a:buChar char="●"/>
-              <a:defRPr sz="1100" b="0" i="0" u="none" strike="noStrike" cap="none">
-                <a:solidFill>
-                  <a:schemeClr val="dk2"/>
-                </a:solidFill>
-                <a:latin typeface="Roboto"/>
-                <a:ea typeface="Roboto"/>
-                <a:cs typeface="Roboto"/>
-                <a:sym typeface="Roboto"/>
-              </a:defRPr>
-            </a:lvl7pPr>
-            <a:lvl8pPr marL="3657600" marR="0" lvl="7" indent="-298450" algn="l" rtl="0">
-              <a:lnSpc>
-                <a:spcPct val="115000"/>
-              </a:lnSpc>
-              <a:spcBef>
-                <a:spcPts val="1600"/>
-              </a:spcBef>
-              <a:spcAft>
-                <a:spcPts val="0"/>
-              </a:spcAft>
-              <a:buClr>
-                <a:schemeClr val="dk2"/>
-              </a:buClr>
-              <a:buSzPts val="1100"/>
-              <a:buFont typeface="Roboto"/>
-              <a:buChar char="○"/>
-              <a:defRPr sz="1100" b="0" i="0" u="none" strike="noStrike" cap="none">
-                <a:solidFill>
-                  <a:schemeClr val="dk2"/>
-                </a:solidFill>
-                <a:latin typeface="Roboto"/>
-                <a:ea typeface="Roboto"/>
-                <a:cs typeface="Roboto"/>
-                <a:sym typeface="Roboto"/>
-              </a:defRPr>
-            </a:lvl8pPr>
-            <a:lvl9pPr marL="4114800" marR="0" lvl="8" indent="-298450" algn="l" rtl="0">
-              <a:lnSpc>
-                <a:spcPct val="115000"/>
-              </a:lnSpc>
-              <a:spcBef>
-                <a:spcPts val="1600"/>
-              </a:spcBef>
-              <a:spcAft>
-                <a:spcPts val="1600"/>
-              </a:spcAft>
-              <a:buClr>
-                <a:schemeClr val="dk2"/>
-              </a:buClr>
-              <a:buSzPts val="1100"/>
-              <a:buFont typeface="Roboto"/>
-              <a:buChar char="■"/>
-              <a:defRPr sz="1100" b="0" i="0" u="none" strike="noStrike" cap="none">
-                <a:solidFill>
-                  <a:schemeClr val="dk2"/>
-                </a:solidFill>
-                <a:latin typeface="Roboto"/>
-                <a:ea typeface="Roboto"/>
-                <a:cs typeface="Roboto"/>
-                <a:sym typeface="Roboto"/>
-              </a:defRPr>
-            </a:lvl9pPr>
-          </a:lstStyle>
-          <a:p>
-            <a:pPr marL="146050" indent="0">
-              <a:buNone/>
-            </a:pPr>
-            <a:r>
-              <a:rPr lang="en-US" sz="1600" dirty="0"/>
-              <a:t>Quiz 3.3 Interfaces</a:t>
-            </a:r>
-          </a:p>
-          <a:p>
-            <a:pPr marL="146050" indent="0">
-              <a:buNone/>
-            </a:pPr>
-            <a:r>
-              <a:rPr lang="en-US" sz="1600" dirty="0">
-                <a:solidFill>
-                  <a:schemeClr val="tx1"/>
-                </a:solidFill>
-              </a:rPr>
-              <a:t>Password - </a:t>
-            </a:r>
-            <a:r>
-              <a:rPr lang="en-US" sz="1600" dirty="0" err="1">
-                <a:solidFill>
-                  <a:schemeClr val="tx1"/>
-                </a:solidFill>
-              </a:rPr>
-              <a:t>InterstellarFaces</a:t>
-            </a:r>
-            <a:endParaRPr lang="en-US" sz="1600" dirty="0">
-              <a:solidFill>
-                <a:schemeClr val="tx1"/>
-              </a:solidFill>
-            </a:endParaRPr>
-          </a:p>
-        </p:txBody>
-      </p:sp>
-    </p:spTree>
-    <p:extLst>
-      <p:ext uri="{BB962C8B-B14F-4D97-AF65-F5344CB8AC3E}">
-        <p14:creationId xmlns:p14="http://schemas.microsoft.com/office/powerpoint/2010/main" val="674272117"/>
-      </p:ext>
-    </p:extLst>
   </p:cSld>
   <p:clrMapOvr>
     <a:masterClrMapping/>

--- a/Presentation/Announcement.pptx
+++ b/Presentation/Announcement.pptx
@@ -8,9 +8,9 @@
     <p:notesMasterId r:id="rId14"/>
   </p:notesMasterIdLst>
   <p:sldIdLst>
-    <p:sldId id="286" r:id="rId2"/>
+    <p:sldId id="276" r:id="rId2"/>
     <p:sldId id="278" r:id="rId3"/>
-    <p:sldId id="276" r:id="rId4"/>
+    <p:sldId id="286" r:id="rId4"/>
     <p:sldId id="281" r:id="rId5"/>
     <p:sldId id="287" r:id="rId6"/>
     <p:sldId id="285" r:id="rId7"/>
@@ -739,13 +739,7 @@
   <p:cSld>
     <p:spTree>
       <p:nvGrpSpPr>
-        <p:cNvPr id="1" name="Shape 320">
-          <a:extLst>
-            <a:ext uri="{FF2B5EF4-FFF2-40B4-BE49-F238E27FC236}">
-              <a16:creationId xmlns:a16="http://schemas.microsoft.com/office/drawing/2014/main" id="{5E82D901-7A14-0382-4365-722182C687A8}"/>
-            </a:ext>
-          </a:extLst>
-        </p:cNvPr>
+        <p:cNvPr id="1" name="Shape 320"/>
         <p:cNvGrpSpPr/>
         <p:nvPr/>
       </p:nvGrpSpPr>
@@ -759,13 +753,7 @@
       </p:grpSpPr>
       <p:sp>
         <p:nvSpPr>
-          <p:cNvPr id="321" name="Google Shape;321;g8f52c9b70a_3_0:notes">
-            <a:extLst>
-              <a:ext uri="{FF2B5EF4-FFF2-40B4-BE49-F238E27FC236}">
-                <a16:creationId xmlns:a16="http://schemas.microsoft.com/office/drawing/2014/main" id="{B8D16220-AF50-7601-71A9-4952749D32CB}"/>
-              </a:ext>
-            </a:extLst>
-          </p:cNvPr>
+          <p:cNvPr id="321" name="Google Shape;321;g8f52c9b70a_3_0:notes"/>
           <p:cNvSpPr>
             <a:spLocks noGrp="1" noRot="1" noChangeAspect="1"/>
           </p:cNvSpPr>
@@ -806,13 +794,7 @@
       </p:sp>
       <p:sp>
         <p:nvSpPr>
-          <p:cNvPr id="322" name="Google Shape;322;g8f52c9b70a_3_0:notes">
-            <a:extLst>
-              <a:ext uri="{FF2B5EF4-FFF2-40B4-BE49-F238E27FC236}">
-                <a16:creationId xmlns:a16="http://schemas.microsoft.com/office/drawing/2014/main" id="{AEA302D2-52D7-97D7-BF6C-781234E92D43}"/>
-              </a:ext>
-            </a:extLst>
-          </p:cNvPr>
+          <p:cNvPr id="322" name="Google Shape;322;g8f52c9b70a_3_0:notes"/>
           <p:cNvSpPr txBox="1">
             <a:spLocks noGrp="1"/>
           </p:cNvSpPr>
@@ -843,11 +825,6 @@
         </p:txBody>
       </p:sp>
     </p:spTree>
-    <p:extLst>
-      <p:ext uri="{BB962C8B-B14F-4D97-AF65-F5344CB8AC3E}">
-        <p14:creationId xmlns:p14="http://schemas.microsoft.com/office/powerpoint/2010/main" val="2483524941"/>
-      </p:ext>
-    </p:extLst>
   </p:cSld>
   <p:clrMapOvr>
     <a:masterClrMapping/>
@@ -1272,7 +1249,13 @@
   <p:cSld>
     <p:spTree>
       <p:nvGrpSpPr>
-        <p:cNvPr id="1" name="Shape 320"/>
+        <p:cNvPr id="1" name="Shape 320">
+          <a:extLst>
+            <a:ext uri="{FF2B5EF4-FFF2-40B4-BE49-F238E27FC236}">
+              <a16:creationId xmlns:a16="http://schemas.microsoft.com/office/drawing/2014/main" id="{5E82D901-7A14-0382-4365-722182C687A8}"/>
+            </a:ext>
+          </a:extLst>
+        </p:cNvPr>
         <p:cNvGrpSpPr/>
         <p:nvPr/>
       </p:nvGrpSpPr>
@@ -1286,7 +1269,13 @@
       </p:grpSpPr>
       <p:sp>
         <p:nvSpPr>
-          <p:cNvPr id="321" name="Google Shape;321;g8f52c9b70a_3_0:notes"/>
+          <p:cNvPr id="321" name="Google Shape;321;g8f52c9b70a_3_0:notes">
+            <a:extLst>
+              <a:ext uri="{FF2B5EF4-FFF2-40B4-BE49-F238E27FC236}">
+                <a16:creationId xmlns:a16="http://schemas.microsoft.com/office/drawing/2014/main" id="{B8D16220-AF50-7601-71A9-4952749D32CB}"/>
+              </a:ext>
+            </a:extLst>
+          </p:cNvPr>
           <p:cNvSpPr>
             <a:spLocks noGrp="1" noRot="1" noChangeAspect="1"/>
           </p:cNvSpPr>
@@ -1327,7 +1316,13 @@
       </p:sp>
       <p:sp>
         <p:nvSpPr>
-          <p:cNvPr id="322" name="Google Shape;322;g8f52c9b70a_3_0:notes"/>
+          <p:cNvPr id="322" name="Google Shape;322;g8f52c9b70a_3_0:notes">
+            <a:extLst>
+              <a:ext uri="{FF2B5EF4-FFF2-40B4-BE49-F238E27FC236}">
+                <a16:creationId xmlns:a16="http://schemas.microsoft.com/office/drawing/2014/main" id="{AEA302D2-52D7-97D7-BF6C-781234E92D43}"/>
+              </a:ext>
+            </a:extLst>
+          </p:cNvPr>
           <p:cNvSpPr txBox="1">
             <a:spLocks noGrp="1"/>
           </p:cNvSpPr>
@@ -1358,6 +1353,11 @@
         </p:txBody>
       </p:sp>
     </p:spTree>
+    <p:extLst>
+      <p:ext uri="{BB962C8B-B14F-4D97-AF65-F5344CB8AC3E}">
+        <p14:creationId xmlns:p14="http://schemas.microsoft.com/office/powerpoint/2010/main" val="2483524941"/>
+      </p:ext>
+    </p:extLst>
   </p:cSld>
   <p:clrMapOvr>
     <a:masterClrMapping/>
@@ -6529,6 +6529,1602 @@
   <p:cSld>
     <p:spTree>
       <p:nvGrpSpPr>
+        <p:cNvPr id="1" name="Shape 323"/>
+        <p:cNvGrpSpPr/>
+        <p:nvPr/>
+      </p:nvGrpSpPr>
+      <p:grpSpPr>
+        <a:xfrm>
+          <a:off x="0" y="0"/>
+          <a:ext cx="0" cy="0"/>
+          <a:chOff x="0" y="0"/>
+          <a:chExt cx="0" cy="0"/>
+        </a:xfrm>
+      </p:grpSpPr>
+      <p:sp>
+        <p:nvSpPr>
+          <p:cNvPr id="324" name="Google Shape;324;p47"/>
+          <p:cNvSpPr txBox="1">
+            <a:spLocks noGrp="1"/>
+          </p:cNvSpPr>
+          <p:nvPr>
+            <p:ph type="title"/>
+          </p:nvPr>
+        </p:nvSpPr>
+        <p:spPr>
+          <a:xfrm>
+            <a:off x="305858" y="273819"/>
+            <a:ext cx="8520600" cy="623700"/>
+          </a:xfrm>
+          <a:prstGeom prst="rect">
+            <a:avLst/>
+          </a:prstGeom>
+        </p:spPr>
+        <p:txBody>
+          <a:bodyPr spcFirstLastPara="1" wrap="square" lIns="91425" tIns="91425" rIns="91425" bIns="91425" anchor="t" anchorCtr="0">
+            <a:noAutofit/>
+          </a:bodyPr>
+          <a:lstStyle/>
+          <a:p>
+            <a:pPr marL="0" lvl="0" indent="0" algn="ctr" rtl="0">
+              <a:spcBef>
+                <a:spcPts val="0"/>
+              </a:spcBef>
+              <a:spcAft>
+                <a:spcPts val="0"/>
+              </a:spcAft>
+              <a:buNone/>
+            </a:pPr>
+            <a:r>
+              <a:rPr lang="en-US" dirty="0"/>
+              <a:t>GCIS – Software Development and Problem Solving</a:t>
+            </a:r>
+            <a:endParaRPr dirty="0"/>
+          </a:p>
+        </p:txBody>
+      </p:sp>
+      <p:sp>
+        <p:nvSpPr>
+          <p:cNvPr id="325" name="Google Shape;325;p47"/>
+          <p:cNvSpPr txBox="1">
+            <a:spLocks noGrp="1"/>
+          </p:cNvSpPr>
+          <p:nvPr>
+            <p:ph type="body" idx="1"/>
+          </p:nvPr>
+        </p:nvSpPr>
+        <p:spPr>
+          <a:xfrm>
+            <a:off x="-5842" y="1721147"/>
+            <a:ext cx="9149842" cy="1226403"/>
+          </a:xfrm>
+          <a:prstGeom prst="rect">
+            <a:avLst/>
+          </a:prstGeom>
+        </p:spPr>
+        <p:txBody>
+          <a:bodyPr spcFirstLastPara="1" wrap="square" lIns="91425" tIns="91425" rIns="91425" bIns="91425" anchor="ctr" anchorCtr="0">
+            <a:noAutofit/>
+          </a:bodyPr>
+          <a:lstStyle/>
+          <a:p>
+            <a:pPr marL="146050" indent="0" algn="ctr">
+              <a:buNone/>
+            </a:pPr>
+            <a:r>
+              <a:rPr lang="en-US" sz="2400" dirty="0"/>
+              <a:t>Take </a:t>
+            </a:r>
+            <a:r>
+              <a:rPr lang="pl-PL" sz="2400" dirty="0"/>
+              <a:t>Quiz </a:t>
+            </a:r>
+            <a:r>
+              <a:rPr lang="en-US" sz="2400" dirty="0"/>
+              <a:t>5</a:t>
+            </a:r>
+            <a:r>
+              <a:rPr lang="pl-PL" sz="2400" dirty="0"/>
+              <a:t>.</a:t>
+            </a:r>
+            <a:r>
+              <a:rPr lang="en-US" sz="2400" dirty="0"/>
+              <a:t>1</a:t>
+            </a:r>
+            <a:r>
+              <a:rPr lang="pl-PL" sz="2400" dirty="0"/>
+              <a:t>: </a:t>
+            </a:r>
+            <a:r>
+              <a:rPr lang="en-US" sz="2400" dirty="0"/>
+              <a:t>Abstract Data Types</a:t>
+            </a:r>
+          </a:p>
+          <a:p>
+            <a:pPr algn="ctr"/>
+            <a:r>
+              <a:rPr lang="en-US" sz="2400" dirty="0"/>
+              <a:t>Password - </a:t>
+            </a:r>
+            <a:r>
+              <a:rPr lang="en-US" sz="2400" dirty="0" err="1"/>
+              <a:t>abstractWord</a:t>
+            </a:r>
+            <a:endParaRPr sz="2400" dirty="0"/>
+          </a:p>
+        </p:txBody>
+      </p:sp>
+      <p:sp>
+        <p:nvSpPr>
+          <p:cNvPr id="326" name="Google Shape;326;p47"/>
+          <p:cNvSpPr txBox="1">
+            <a:spLocks noGrp="1"/>
+          </p:cNvSpPr>
+          <p:nvPr>
+            <p:ph type="sldNum" idx="12"/>
+          </p:nvPr>
+        </p:nvSpPr>
+        <p:spPr>
+          <a:xfrm>
+            <a:off x="8472458" y="4663217"/>
+            <a:ext cx="548700" cy="393600"/>
+          </a:xfrm>
+          <a:prstGeom prst="rect">
+            <a:avLst/>
+          </a:prstGeom>
+        </p:spPr>
+        <p:txBody>
+          <a:bodyPr spcFirstLastPara="1" wrap="square" lIns="91425" tIns="91425" rIns="91425" bIns="91425" anchor="ctr" anchorCtr="0">
+            <a:noAutofit/>
+          </a:bodyPr>
+          <a:lstStyle/>
+          <a:p>
+            <a:pPr marL="0" lvl="0" indent="0" algn="r" rtl="0">
+              <a:spcBef>
+                <a:spcPts val="0"/>
+              </a:spcBef>
+              <a:spcAft>
+                <a:spcPts val="0"/>
+              </a:spcAft>
+              <a:buNone/>
+            </a:pPr>
+            <a:fld id="{00000000-1234-1234-1234-123412341234}" type="slidenum">
+              <a:rPr lang="en"/>
+              <a:t>1</a:t>
+            </a:fld>
+            <a:endParaRPr/>
+          </a:p>
+        </p:txBody>
+      </p:sp>
+      <p:sp>
+        <p:nvSpPr>
+          <p:cNvPr id="2" name="TextBox 1">
+            <a:extLst>
+              <a:ext uri="{FF2B5EF4-FFF2-40B4-BE49-F238E27FC236}">
+                <a16:creationId xmlns:a16="http://schemas.microsoft.com/office/drawing/2014/main" id="{DCC33EBB-1C9D-B9A9-88E6-F3466077417F}"/>
+              </a:ext>
+            </a:extLst>
+          </p:cNvPr>
+          <p:cNvSpPr txBox="1"/>
+          <p:nvPr/>
+        </p:nvSpPr>
+        <p:spPr>
+          <a:xfrm>
+            <a:off x="0" y="1277369"/>
+            <a:ext cx="9144000" cy="307777"/>
+          </a:xfrm>
+          <a:prstGeom prst="rect">
+            <a:avLst/>
+          </a:prstGeom>
+          <a:solidFill>
+            <a:srgbClr val="FFC000"/>
+          </a:solidFill>
+        </p:spPr>
+        <p:txBody>
+          <a:bodyPr wrap="square" rtlCol="0">
+            <a:spAutoFit/>
+          </a:bodyPr>
+          <a:lstStyle/>
+          <a:p>
+            <a:r>
+              <a:rPr lang="en-US" dirty="0"/>
+              <a:t>Quiz</a:t>
+            </a:r>
+          </a:p>
+        </p:txBody>
+      </p:sp>
+      <p:sp>
+        <p:nvSpPr>
+          <p:cNvPr id="3" name="TextBox 2">
+            <a:extLst>
+              <a:ext uri="{FF2B5EF4-FFF2-40B4-BE49-F238E27FC236}">
+                <a16:creationId xmlns:a16="http://schemas.microsoft.com/office/drawing/2014/main" id="{64C19922-6A1B-1404-5104-DC43E4C67861}"/>
+              </a:ext>
+            </a:extLst>
+          </p:cNvPr>
+          <p:cNvSpPr txBox="1"/>
+          <p:nvPr/>
+        </p:nvSpPr>
+        <p:spPr>
+          <a:xfrm>
+            <a:off x="-5842" y="3031063"/>
+            <a:ext cx="9144000" cy="307777"/>
+          </a:xfrm>
+          <a:prstGeom prst="rect">
+            <a:avLst/>
+          </a:prstGeom>
+          <a:solidFill>
+            <a:srgbClr val="FFC000"/>
+          </a:solidFill>
+        </p:spPr>
+        <p:txBody>
+          <a:bodyPr wrap="square" rtlCol="0">
+            <a:spAutoFit/>
+          </a:bodyPr>
+          <a:lstStyle/>
+          <a:p>
+            <a:r>
+              <a:rPr lang="en-US" dirty="0"/>
+              <a:t>Next </a:t>
+            </a:r>
+            <a:r>
+              <a:rPr lang="en-US" dirty="0">
+                <a:sym typeface="Wingdings" panose="05000000000000000000" pitchFamily="2" charset="2"/>
+              </a:rPr>
+              <a:t> </a:t>
+            </a:r>
+            <a:endParaRPr lang="en-US" dirty="0"/>
+          </a:p>
+        </p:txBody>
+      </p:sp>
+      <p:sp>
+        <p:nvSpPr>
+          <p:cNvPr id="4" name="Google Shape;325;p47">
+            <a:extLst>
+              <a:ext uri="{FF2B5EF4-FFF2-40B4-BE49-F238E27FC236}">
+                <a16:creationId xmlns:a16="http://schemas.microsoft.com/office/drawing/2014/main" id="{E455EA58-F56D-AF58-E97D-95A77E0AB6CF}"/>
+              </a:ext>
+            </a:extLst>
+          </p:cNvPr>
+          <p:cNvSpPr txBox="1">
+            <a:spLocks/>
+          </p:cNvSpPr>
+          <p:nvPr/>
+        </p:nvSpPr>
+        <p:spPr>
+          <a:xfrm>
+            <a:off x="-5842" y="3422352"/>
+            <a:ext cx="9149842" cy="1721148"/>
+          </a:xfrm>
+          <a:prstGeom prst="rect">
+            <a:avLst/>
+          </a:prstGeom>
+          <a:noFill/>
+          <a:ln>
+            <a:noFill/>
+          </a:ln>
+        </p:spPr>
+        <p:txBody>
+          <a:bodyPr spcFirstLastPara="1" wrap="square" lIns="91425" tIns="91425" rIns="91425" bIns="91425" anchor="ctr" anchorCtr="0">
+            <a:noAutofit/>
+          </a:bodyPr>
+          <a:lstStyle>
+            <a:defPPr marR="0" lvl="0" algn="l" rtl="0">
+              <a:lnSpc>
+                <a:spcPct val="100000"/>
+              </a:lnSpc>
+              <a:spcBef>
+                <a:spcPts val="0"/>
+              </a:spcBef>
+              <a:spcAft>
+                <a:spcPts val="0"/>
+              </a:spcAft>
+            </a:defPPr>
+            <a:lvl1pPr marL="457200" marR="0" lvl="0" indent="-311150" algn="l" rtl="0">
+              <a:lnSpc>
+                <a:spcPct val="115000"/>
+              </a:lnSpc>
+              <a:spcBef>
+                <a:spcPts val="0"/>
+              </a:spcBef>
+              <a:spcAft>
+                <a:spcPts val="0"/>
+              </a:spcAft>
+              <a:buClr>
+                <a:schemeClr val="dk2"/>
+              </a:buClr>
+              <a:buSzPts val="1300"/>
+              <a:buFont typeface="Roboto"/>
+              <a:buChar char="●"/>
+              <a:defRPr sz="1300" b="0" i="0" u="none" strike="noStrike" cap="none">
+                <a:solidFill>
+                  <a:schemeClr val="dk2"/>
+                </a:solidFill>
+                <a:latin typeface="Roboto"/>
+                <a:ea typeface="Roboto"/>
+                <a:cs typeface="Roboto"/>
+                <a:sym typeface="Roboto"/>
+              </a:defRPr>
+            </a:lvl1pPr>
+            <a:lvl2pPr marL="914400" marR="0" lvl="1" indent="-298450" algn="l" rtl="0">
+              <a:lnSpc>
+                <a:spcPct val="115000"/>
+              </a:lnSpc>
+              <a:spcBef>
+                <a:spcPts val="1600"/>
+              </a:spcBef>
+              <a:spcAft>
+                <a:spcPts val="0"/>
+              </a:spcAft>
+              <a:buClr>
+                <a:schemeClr val="dk2"/>
+              </a:buClr>
+              <a:buSzPts val="1100"/>
+              <a:buFont typeface="Roboto"/>
+              <a:buChar char="○"/>
+              <a:defRPr sz="1100" b="0" i="0" u="none" strike="noStrike" cap="none">
+                <a:solidFill>
+                  <a:schemeClr val="dk2"/>
+                </a:solidFill>
+                <a:latin typeface="Roboto"/>
+                <a:ea typeface="Roboto"/>
+                <a:cs typeface="Roboto"/>
+                <a:sym typeface="Roboto"/>
+              </a:defRPr>
+            </a:lvl2pPr>
+            <a:lvl3pPr marL="1371600" marR="0" lvl="2" indent="-298450" algn="l" rtl="0">
+              <a:lnSpc>
+                <a:spcPct val="115000"/>
+              </a:lnSpc>
+              <a:spcBef>
+                <a:spcPts val="1600"/>
+              </a:spcBef>
+              <a:spcAft>
+                <a:spcPts val="0"/>
+              </a:spcAft>
+              <a:buClr>
+                <a:schemeClr val="dk2"/>
+              </a:buClr>
+              <a:buSzPts val="1100"/>
+              <a:buFont typeface="Roboto"/>
+              <a:buChar char="■"/>
+              <a:defRPr sz="1100" b="0" i="0" u="none" strike="noStrike" cap="none">
+                <a:solidFill>
+                  <a:schemeClr val="dk2"/>
+                </a:solidFill>
+                <a:latin typeface="Roboto"/>
+                <a:ea typeface="Roboto"/>
+                <a:cs typeface="Roboto"/>
+                <a:sym typeface="Roboto"/>
+              </a:defRPr>
+            </a:lvl3pPr>
+            <a:lvl4pPr marL="1828800" marR="0" lvl="3" indent="-298450" algn="l" rtl="0">
+              <a:lnSpc>
+                <a:spcPct val="115000"/>
+              </a:lnSpc>
+              <a:spcBef>
+                <a:spcPts val="1600"/>
+              </a:spcBef>
+              <a:spcAft>
+                <a:spcPts val="0"/>
+              </a:spcAft>
+              <a:buClr>
+                <a:schemeClr val="dk2"/>
+              </a:buClr>
+              <a:buSzPts val="1100"/>
+              <a:buFont typeface="Roboto"/>
+              <a:buChar char="●"/>
+              <a:defRPr sz="1100" b="0" i="0" u="none" strike="noStrike" cap="none">
+                <a:solidFill>
+                  <a:schemeClr val="dk2"/>
+                </a:solidFill>
+                <a:latin typeface="Roboto"/>
+                <a:ea typeface="Roboto"/>
+                <a:cs typeface="Roboto"/>
+                <a:sym typeface="Roboto"/>
+              </a:defRPr>
+            </a:lvl4pPr>
+            <a:lvl5pPr marL="2286000" marR="0" lvl="4" indent="-298450" algn="l" rtl="0">
+              <a:lnSpc>
+                <a:spcPct val="115000"/>
+              </a:lnSpc>
+              <a:spcBef>
+                <a:spcPts val="1600"/>
+              </a:spcBef>
+              <a:spcAft>
+                <a:spcPts val="0"/>
+              </a:spcAft>
+              <a:buClr>
+                <a:schemeClr val="dk2"/>
+              </a:buClr>
+              <a:buSzPts val="1100"/>
+              <a:buFont typeface="Roboto"/>
+              <a:buChar char="○"/>
+              <a:defRPr sz="1100" b="0" i="0" u="none" strike="noStrike" cap="none">
+                <a:solidFill>
+                  <a:schemeClr val="dk2"/>
+                </a:solidFill>
+                <a:latin typeface="Roboto"/>
+                <a:ea typeface="Roboto"/>
+                <a:cs typeface="Roboto"/>
+                <a:sym typeface="Roboto"/>
+              </a:defRPr>
+            </a:lvl5pPr>
+            <a:lvl6pPr marL="2743200" marR="0" lvl="5" indent="-298450" algn="l" rtl="0">
+              <a:lnSpc>
+                <a:spcPct val="115000"/>
+              </a:lnSpc>
+              <a:spcBef>
+                <a:spcPts val="1600"/>
+              </a:spcBef>
+              <a:spcAft>
+                <a:spcPts val="0"/>
+              </a:spcAft>
+              <a:buClr>
+                <a:schemeClr val="dk2"/>
+              </a:buClr>
+              <a:buSzPts val="1100"/>
+              <a:buFont typeface="Roboto"/>
+              <a:buChar char="■"/>
+              <a:defRPr sz="1100" b="0" i="0" u="none" strike="noStrike" cap="none">
+                <a:solidFill>
+                  <a:schemeClr val="dk2"/>
+                </a:solidFill>
+                <a:latin typeface="Roboto"/>
+                <a:ea typeface="Roboto"/>
+                <a:cs typeface="Roboto"/>
+                <a:sym typeface="Roboto"/>
+              </a:defRPr>
+            </a:lvl6pPr>
+            <a:lvl7pPr marL="3200400" marR="0" lvl="6" indent="-298450" algn="l" rtl="0">
+              <a:lnSpc>
+                <a:spcPct val="115000"/>
+              </a:lnSpc>
+              <a:spcBef>
+                <a:spcPts val="1600"/>
+              </a:spcBef>
+              <a:spcAft>
+                <a:spcPts val="0"/>
+              </a:spcAft>
+              <a:buClr>
+                <a:schemeClr val="dk2"/>
+              </a:buClr>
+              <a:buSzPts val="1100"/>
+              <a:buFont typeface="Roboto"/>
+              <a:buChar char="●"/>
+              <a:defRPr sz="1100" b="0" i="0" u="none" strike="noStrike" cap="none">
+                <a:solidFill>
+                  <a:schemeClr val="dk2"/>
+                </a:solidFill>
+                <a:latin typeface="Roboto"/>
+                <a:ea typeface="Roboto"/>
+                <a:cs typeface="Roboto"/>
+                <a:sym typeface="Roboto"/>
+              </a:defRPr>
+            </a:lvl7pPr>
+            <a:lvl8pPr marL="3657600" marR="0" lvl="7" indent="-298450" algn="l" rtl="0">
+              <a:lnSpc>
+                <a:spcPct val="115000"/>
+              </a:lnSpc>
+              <a:spcBef>
+                <a:spcPts val="1600"/>
+              </a:spcBef>
+              <a:spcAft>
+                <a:spcPts val="0"/>
+              </a:spcAft>
+              <a:buClr>
+                <a:schemeClr val="dk2"/>
+              </a:buClr>
+              <a:buSzPts val="1100"/>
+              <a:buFont typeface="Roboto"/>
+              <a:buChar char="○"/>
+              <a:defRPr sz="1100" b="0" i="0" u="none" strike="noStrike" cap="none">
+                <a:solidFill>
+                  <a:schemeClr val="dk2"/>
+                </a:solidFill>
+                <a:latin typeface="Roboto"/>
+                <a:ea typeface="Roboto"/>
+                <a:cs typeface="Roboto"/>
+                <a:sym typeface="Roboto"/>
+              </a:defRPr>
+            </a:lvl8pPr>
+            <a:lvl9pPr marL="4114800" marR="0" lvl="8" indent="-298450" algn="l" rtl="0">
+              <a:lnSpc>
+                <a:spcPct val="115000"/>
+              </a:lnSpc>
+              <a:spcBef>
+                <a:spcPts val="1600"/>
+              </a:spcBef>
+              <a:spcAft>
+                <a:spcPts val="1600"/>
+              </a:spcAft>
+              <a:buClr>
+                <a:schemeClr val="dk2"/>
+              </a:buClr>
+              <a:buSzPts val="1100"/>
+              <a:buFont typeface="Roboto"/>
+              <a:buChar char="■"/>
+              <a:defRPr sz="1100" b="0" i="0" u="none" strike="noStrike" cap="none">
+                <a:solidFill>
+                  <a:schemeClr val="dk2"/>
+                </a:solidFill>
+                <a:latin typeface="Roboto"/>
+                <a:ea typeface="Roboto"/>
+                <a:cs typeface="Roboto"/>
+                <a:sym typeface="Roboto"/>
+              </a:defRPr>
+            </a:lvl9pPr>
+          </a:lstStyle>
+          <a:p>
+            <a:pPr marL="0" indent="0">
+              <a:spcAft>
+                <a:spcPts val="1600"/>
+              </a:spcAft>
+              <a:buNone/>
+            </a:pPr>
+            <a:r>
+              <a:rPr lang="en-US" sz="2800" dirty="0"/>
+              <a:t>After completing the Quiz </a:t>
+            </a:r>
+          </a:p>
+          <a:p>
+            <a:pPr marL="342900" indent="-342900">
+              <a:spcAft>
+                <a:spcPts val="1600"/>
+              </a:spcAft>
+            </a:pPr>
+            <a:r>
+              <a:rPr lang="en-US" sz="2400" dirty="0"/>
+              <a:t>Clone/Pull Unit5 – git hub classroom repo for class activities</a:t>
+            </a:r>
+          </a:p>
+          <a:p>
+            <a:pPr marL="342900" indent="-342900">
+              <a:spcAft>
+                <a:spcPts val="1600"/>
+              </a:spcAft>
+            </a:pPr>
+            <a:r>
+              <a:rPr lang="en-US" sz="2400" dirty="0"/>
+              <a:t>Last week Class activity is uploaded in my courses</a:t>
+            </a:r>
+          </a:p>
+        </p:txBody>
+      </p:sp>
+    </p:spTree>
+  </p:cSld>
+  <p:clrMapOvr>
+    <a:masterClrMapping/>
+  </p:clrMapOvr>
+</p:sld>
+</file>
+
+<file path=ppt/slides/slide10.xml><?xml version="1.0" encoding="utf-8"?>
+<p:sld xmlns:a="http://schemas.openxmlformats.org/drawingml/2006/main" xmlns:r="http://schemas.openxmlformats.org/officeDocument/2006/relationships" xmlns:p="http://schemas.openxmlformats.org/presentationml/2006/main" show="0">
+  <p:cSld>
+    <p:spTree>
+      <p:nvGrpSpPr>
+        <p:cNvPr id="1" name="Shape 323"/>
+        <p:cNvGrpSpPr/>
+        <p:nvPr/>
+      </p:nvGrpSpPr>
+      <p:grpSpPr>
+        <a:xfrm>
+          <a:off x="0" y="0"/>
+          <a:ext cx="0" cy="0"/>
+          <a:chOff x="0" y="0"/>
+          <a:chExt cx="0" cy="0"/>
+        </a:xfrm>
+      </p:grpSpPr>
+      <p:sp>
+        <p:nvSpPr>
+          <p:cNvPr id="324" name="Google Shape;324;p47"/>
+          <p:cNvSpPr txBox="1">
+            <a:spLocks noGrp="1"/>
+          </p:cNvSpPr>
+          <p:nvPr>
+            <p:ph type="title"/>
+          </p:nvPr>
+        </p:nvSpPr>
+        <p:spPr>
+          <a:xfrm>
+            <a:off x="226208" y="1"/>
+            <a:ext cx="8520600" cy="464980"/>
+          </a:xfrm>
+          <a:prstGeom prst="rect">
+            <a:avLst/>
+          </a:prstGeom>
+        </p:spPr>
+        <p:txBody>
+          <a:bodyPr spcFirstLastPara="1" wrap="square" lIns="91425" tIns="91425" rIns="91425" bIns="91425" anchor="t" anchorCtr="0">
+            <a:noAutofit/>
+          </a:bodyPr>
+          <a:lstStyle/>
+          <a:p>
+            <a:pPr marL="0" lvl="0" indent="0" algn="ctr" rtl="0">
+              <a:spcBef>
+                <a:spcPts val="0"/>
+              </a:spcBef>
+              <a:spcAft>
+                <a:spcPts val="0"/>
+              </a:spcAft>
+              <a:buNone/>
+            </a:pPr>
+            <a:r>
+              <a:rPr lang="en-US" dirty="0"/>
+              <a:t>Use </a:t>
+            </a:r>
+            <a:r>
+              <a:rPr lang="en-US" sz="2400" dirty="0"/>
+              <a:t>Assigned</a:t>
+            </a:r>
+            <a:r>
+              <a:rPr lang="en-US" dirty="0"/>
+              <a:t> Seat</a:t>
+            </a:r>
+            <a:endParaRPr dirty="0"/>
+          </a:p>
+        </p:txBody>
+      </p:sp>
+      <p:sp>
+        <p:nvSpPr>
+          <p:cNvPr id="326" name="Google Shape;326;p47"/>
+          <p:cNvSpPr txBox="1">
+            <a:spLocks noGrp="1"/>
+          </p:cNvSpPr>
+          <p:nvPr>
+            <p:ph type="sldNum" idx="12"/>
+          </p:nvPr>
+        </p:nvSpPr>
+        <p:spPr>
+          <a:xfrm>
+            <a:off x="8472458" y="4663217"/>
+            <a:ext cx="548700" cy="393600"/>
+          </a:xfrm>
+          <a:prstGeom prst="rect">
+            <a:avLst/>
+          </a:prstGeom>
+        </p:spPr>
+        <p:txBody>
+          <a:bodyPr spcFirstLastPara="1" wrap="square" lIns="91425" tIns="91425" rIns="91425" bIns="91425" anchor="ctr" anchorCtr="0">
+            <a:noAutofit/>
+          </a:bodyPr>
+          <a:lstStyle/>
+          <a:p>
+            <a:pPr marL="0" lvl="0" indent="0" algn="r" rtl="0">
+              <a:spcBef>
+                <a:spcPts val="0"/>
+              </a:spcBef>
+              <a:spcAft>
+                <a:spcPts val="0"/>
+              </a:spcAft>
+              <a:buNone/>
+            </a:pPr>
+            <a:fld id="{00000000-1234-1234-1234-123412341234}" type="slidenum">
+              <a:rPr lang="en"/>
+              <a:t>10</a:t>
+            </a:fld>
+            <a:endParaRPr/>
+          </a:p>
+        </p:txBody>
+      </p:sp>
+      <p:pic>
+        <p:nvPicPr>
+          <p:cNvPr id="6" name="Picture 5">
+            <a:extLst>
+              <a:ext uri="{FF2B5EF4-FFF2-40B4-BE49-F238E27FC236}">
+                <a16:creationId xmlns:a16="http://schemas.microsoft.com/office/drawing/2014/main" id="{DED32793-7C09-E3A3-94E5-B5D46727A1D0}"/>
+              </a:ext>
+            </a:extLst>
+          </p:cNvPr>
+          <p:cNvPicPr>
+            <a:picLocks noChangeAspect="1"/>
+          </p:cNvPicPr>
+          <p:nvPr/>
+        </p:nvPicPr>
+        <p:blipFill>
+          <a:blip r:embed="rId3"/>
+          <a:stretch>
+            <a:fillRect/>
+          </a:stretch>
+        </p:blipFill>
+        <p:spPr>
+          <a:xfrm>
+            <a:off x="-1" y="551663"/>
+            <a:ext cx="9144001" cy="4591837"/>
+          </a:xfrm>
+          <a:prstGeom prst="rect">
+            <a:avLst/>
+          </a:prstGeom>
+        </p:spPr>
+      </p:pic>
+    </p:spTree>
+    <p:extLst>
+      <p:ext uri="{BB962C8B-B14F-4D97-AF65-F5344CB8AC3E}">
+        <p14:creationId xmlns:p14="http://schemas.microsoft.com/office/powerpoint/2010/main" val="4226348449"/>
+      </p:ext>
+    </p:extLst>
+  </p:cSld>
+  <p:clrMapOvr>
+    <a:masterClrMapping/>
+  </p:clrMapOvr>
+</p:sld>
+</file>
+
+<file path=ppt/slides/slide11.xml><?xml version="1.0" encoding="utf-8"?>
+<p:sld xmlns:a="http://schemas.openxmlformats.org/drawingml/2006/main" xmlns:r="http://schemas.openxmlformats.org/officeDocument/2006/relationships" xmlns:p="http://schemas.openxmlformats.org/presentationml/2006/main" show="0">
+  <p:cSld>
+    <p:spTree>
+      <p:nvGrpSpPr>
+        <p:cNvPr id="1" name="Shape 323"/>
+        <p:cNvGrpSpPr/>
+        <p:nvPr/>
+      </p:nvGrpSpPr>
+      <p:grpSpPr>
+        <a:xfrm>
+          <a:off x="0" y="0"/>
+          <a:ext cx="0" cy="0"/>
+          <a:chOff x="0" y="0"/>
+          <a:chExt cx="0" cy="0"/>
+        </a:xfrm>
+      </p:grpSpPr>
+      <p:sp>
+        <p:nvSpPr>
+          <p:cNvPr id="324" name="Google Shape;324;p47"/>
+          <p:cNvSpPr txBox="1">
+            <a:spLocks noGrp="1"/>
+          </p:cNvSpPr>
+          <p:nvPr>
+            <p:ph type="title"/>
+          </p:nvPr>
+        </p:nvSpPr>
+        <p:spPr>
+          <a:xfrm>
+            <a:off x="226208" y="1"/>
+            <a:ext cx="8520600" cy="464980"/>
+          </a:xfrm>
+          <a:prstGeom prst="rect">
+            <a:avLst/>
+          </a:prstGeom>
+        </p:spPr>
+        <p:txBody>
+          <a:bodyPr spcFirstLastPara="1" wrap="square" lIns="91425" tIns="91425" rIns="91425" bIns="91425" anchor="t" anchorCtr="0">
+            <a:noAutofit/>
+          </a:bodyPr>
+          <a:lstStyle/>
+          <a:p>
+            <a:pPr marL="0" lvl="0" indent="0" algn="ctr" rtl="0">
+              <a:spcBef>
+                <a:spcPts val="0"/>
+              </a:spcBef>
+              <a:spcAft>
+                <a:spcPts val="0"/>
+              </a:spcAft>
+              <a:buNone/>
+            </a:pPr>
+            <a:r>
+              <a:rPr lang="en-US" dirty="0"/>
+              <a:t>Use </a:t>
+            </a:r>
+            <a:r>
+              <a:rPr lang="en-US" sz="2400" dirty="0"/>
+              <a:t>Assigned</a:t>
+            </a:r>
+            <a:r>
+              <a:rPr lang="en-US" dirty="0"/>
+              <a:t> Seat</a:t>
+            </a:r>
+            <a:endParaRPr dirty="0"/>
+          </a:p>
+        </p:txBody>
+      </p:sp>
+      <p:sp>
+        <p:nvSpPr>
+          <p:cNvPr id="326" name="Google Shape;326;p47"/>
+          <p:cNvSpPr txBox="1">
+            <a:spLocks noGrp="1"/>
+          </p:cNvSpPr>
+          <p:nvPr>
+            <p:ph type="sldNum" idx="12"/>
+          </p:nvPr>
+        </p:nvSpPr>
+        <p:spPr>
+          <a:xfrm>
+            <a:off x="8472458" y="4663217"/>
+            <a:ext cx="548700" cy="393600"/>
+          </a:xfrm>
+          <a:prstGeom prst="rect">
+            <a:avLst/>
+          </a:prstGeom>
+        </p:spPr>
+        <p:txBody>
+          <a:bodyPr spcFirstLastPara="1" wrap="square" lIns="91425" tIns="91425" rIns="91425" bIns="91425" anchor="ctr" anchorCtr="0">
+            <a:noAutofit/>
+          </a:bodyPr>
+          <a:lstStyle/>
+          <a:p>
+            <a:pPr marL="0" lvl="0" indent="0" algn="r" rtl="0">
+              <a:spcBef>
+                <a:spcPts val="0"/>
+              </a:spcBef>
+              <a:spcAft>
+                <a:spcPts val="0"/>
+              </a:spcAft>
+              <a:buNone/>
+            </a:pPr>
+            <a:fld id="{00000000-1234-1234-1234-123412341234}" type="slidenum">
+              <a:rPr lang="en"/>
+              <a:t>11</a:t>
+            </a:fld>
+            <a:endParaRPr/>
+          </a:p>
+        </p:txBody>
+      </p:sp>
+      <p:pic>
+        <p:nvPicPr>
+          <p:cNvPr id="3" name="Picture 2">
+            <a:extLst>
+              <a:ext uri="{FF2B5EF4-FFF2-40B4-BE49-F238E27FC236}">
+                <a16:creationId xmlns:a16="http://schemas.microsoft.com/office/drawing/2014/main" id="{92DE4AAC-70FE-A114-5258-F5B22EDDED45}"/>
+              </a:ext>
+            </a:extLst>
+          </p:cNvPr>
+          <p:cNvPicPr>
+            <a:picLocks noChangeAspect="1"/>
+          </p:cNvPicPr>
+          <p:nvPr/>
+        </p:nvPicPr>
+        <p:blipFill>
+          <a:blip r:embed="rId3"/>
+          <a:stretch>
+            <a:fillRect/>
+          </a:stretch>
+        </p:blipFill>
+        <p:spPr>
+          <a:xfrm>
+            <a:off x="0" y="716280"/>
+            <a:ext cx="9144000" cy="4427218"/>
+          </a:xfrm>
+          <a:prstGeom prst="rect">
+            <a:avLst/>
+          </a:prstGeom>
+        </p:spPr>
+      </p:pic>
+    </p:spTree>
+    <p:extLst>
+      <p:ext uri="{BB962C8B-B14F-4D97-AF65-F5344CB8AC3E}">
+        <p14:creationId xmlns:p14="http://schemas.microsoft.com/office/powerpoint/2010/main" val="1976403023"/>
+      </p:ext>
+    </p:extLst>
+  </p:cSld>
+  <p:clrMapOvr>
+    <a:masterClrMapping/>
+  </p:clrMapOvr>
+</p:sld>
+</file>
+
+<file path=ppt/slides/slide12.xml><?xml version="1.0" encoding="utf-8"?>
+<p:sld xmlns:a="http://schemas.openxmlformats.org/drawingml/2006/main" xmlns:r="http://schemas.openxmlformats.org/officeDocument/2006/relationships" xmlns:p="http://schemas.openxmlformats.org/presentationml/2006/main" show="0">
+  <p:cSld>
+    <p:spTree>
+      <p:nvGrpSpPr>
+        <p:cNvPr id="1" name="Shape 323"/>
+        <p:cNvGrpSpPr/>
+        <p:nvPr/>
+      </p:nvGrpSpPr>
+      <p:grpSpPr>
+        <a:xfrm>
+          <a:off x="0" y="0"/>
+          <a:ext cx="0" cy="0"/>
+          <a:chOff x="0" y="0"/>
+          <a:chExt cx="0" cy="0"/>
+        </a:xfrm>
+      </p:grpSpPr>
+      <p:sp>
+        <p:nvSpPr>
+          <p:cNvPr id="324" name="Google Shape;324;p47"/>
+          <p:cNvSpPr txBox="1">
+            <a:spLocks noGrp="1"/>
+          </p:cNvSpPr>
+          <p:nvPr>
+            <p:ph type="title"/>
+          </p:nvPr>
+        </p:nvSpPr>
+        <p:spPr>
+          <a:xfrm>
+            <a:off x="226208" y="1"/>
+            <a:ext cx="8520600" cy="464980"/>
+          </a:xfrm>
+          <a:prstGeom prst="rect">
+            <a:avLst/>
+          </a:prstGeom>
+        </p:spPr>
+        <p:txBody>
+          <a:bodyPr spcFirstLastPara="1" wrap="square" lIns="91425" tIns="91425" rIns="91425" bIns="91425" anchor="t" anchorCtr="0">
+            <a:noAutofit/>
+          </a:bodyPr>
+          <a:lstStyle/>
+          <a:p>
+            <a:pPr marL="0" lvl="0" indent="0" algn="ctr" rtl="0">
+              <a:spcBef>
+                <a:spcPts val="0"/>
+              </a:spcBef>
+              <a:spcAft>
+                <a:spcPts val="0"/>
+              </a:spcAft>
+              <a:buNone/>
+            </a:pPr>
+            <a:r>
+              <a:rPr lang="en-US" dirty="0"/>
+              <a:t>Use </a:t>
+            </a:r>
+            <a:r>
+              <a:rPr lang="en-US" sz="2400" dirty="0"/>
+              <a:t>Assigned</a:t>
+            </a:r>
+            <a:r>
+              <a:rPr lang="en-US" dirty="0"/>
+              <a:t> Seat</a:t>
+            </a:r>
+            <a:endParaRPr dirty="0"/>
+          </a:p>
+        </p:txBody>
+      </p:sp>
+      <p:sp>
+        <p:nvSpPr>
+          <p:cNvPr id="326" name="Google Shape;326;p47"/>
+          <p:cNvSpPr txBox="1">
+            <a:spLocks noGrp="1"/>
+          </p:cNvSpPr>
+          <p:nvPr>
+            <p:ph type="sldNum" idx="12"/>
+          </p:nvPr>
+        </p:nvSpPr>
+        <p:spPr>
+          <a:xfrm>
+            <a:off x="8472458" y="4663217"/>
+            <a:ext cx="548700" cy="393600"/>
+          </a:xfrm>
+          <a:prstGeom prst="rect">
+            <a:avLst/>
+          </a:prstGeom>
+        </p:spPr>
+        <p:txBody>
+          <a:bodyPr spcFirstLastPara="1" wrap="square" lIns="91425" tIns="91425" rIns="91425" bIns="91425" anchor="ctr" anchorCtr="0">
+            <a:noAutofit/>
+          </a:bodyPr>
+          <a:lstStyle/>
+          <a:p>
+            <a:pPr marL="0" lvl="0" indent="0" algn="r" rtl="0">
+              <a:spcBef>
+                <a:spcPts val="0"/>
+              </a:spcBef>
+              <a:spcAft>
+                <a:spcPts val="0"/>
+              </a:spcAft>
+              <a:buNone/>
+            </a:pPr>
+            <a:fld id="{00000000-1234-1234-1234-123412341234}" type="slidenum">
+              <a:rPr lang="en"/>
+              <a:t>12</a:t>
+            </a:fld>
+            <a:endParaRPr/>
+          </a:p>
+        </p:txBody>
+      </p:sp>
+      <p:pic>
+        <p:nvPicPr>
+          <p:cNvPr id="4" name="Picture 3">
+            <a:extLst>
+              <a:ext uri="{FF2B5EF4-FFF2-40B4-BE49-F238E27FC236}">
+                <a16:creationId xmlns:a16="http://schemas.microsoft.com/office/drawing/2014/main" id="{DCD752B9-EFAE-AFC1-7D39-6763B89DE8D3}"/>
+              </a:ext>
+            </a:extLst>
+          </p:cNvPr>
+          <p:cNvPicPr>
+            <a:picLocks noChangeAspect="1"/>
+          </p:cNvPicPr>
+          <p:nvPr/>
+        </p:nvPicPr>
+        <p:blipFill>
+          <a:blip r:embed="rId3"/>
+          <a:stretch>
+            <a:fillRect/>
+          </a:stretch>
+        </p:blipFill>
+        <p:spPr>
+          <a:xfrm>
+            <a:off x="0" y="652130"/>
+            <a:ext cx="9144000" cy="4491369"/>
+          </a:xfrm>
+          <a:prstGeom prst="rect">
+            <a:avLst/>
+          </a:prstGeom>
+        </p:spPr>
+      </p:pic>
+    </p:spTree>
+    <p:extLst>
+      <p:ext uri="{BB962C8B-B14F-4D97-AF65-F5344CB8AC3E}">
+        <p14:creationId xmlns:p14="http://schemas.microsoft.com/office/powerpoint/2010/main" val="3365057756"/>
+      </p:ext>
+    </p:extLst>
+  </p:cSld>
+  <p:clrMapOvr>
+    <a:masterClrMapping/>
+  </p:clrMapOvr>
+</p:sld>
+</file>
+
+<file path=ppt/slides/slide2.xml><?xml version="1.0" encoding="utf-8"?>
+<p:sld xmlns:a="http://schemas.openxmlformats.org/drawingml/2006/main" xmlns:r="http://schemas.openxmlformats.org/officeDocument/2006/relationships" xmlns:p="http://schemas.openxmlformats.org/presentationml/2006/main" show="0">
+  <p:cSld>
+    <p:spTree>
+      <p:nvGrpSpPr>
+        <p:cNvPr id="1" name="Shape 323"/>
+        <p:cNvGrpSpPr/>
+        <p:nvPr/>
+      </p:nvGrpSpPr>
+      <p:grpSpPr>
+        <a:xfrm>
+          <a:off x="0" y="0"/>
+          <a:ext cx="0" cy="0"/>
+          <a:chOff x="0" y="0"/>
+          <a:chExt cx="0" cy="0"/>
+        </a:xfrm>
+      </p:grpSpPr>
+      <p:sp>
+        <p:nvSpPr>
+          <p:cNvPr id="324" name="Google Shape;324;p47"/>
+          <p:cNvSpPr txBox="1">
+            <a:spLocks noGrp="1"/>
+          </p:cNvSpPr>
+          <p:nvPr>
+            <p:ph type="title"/>
+          </p:nvPr>
+        </p:nvSpPr>
+        <p:spPr>
+          <a:xfrm>
+            <a:off x="314621" y="235914"/>
+            <a:ext cx="8520600" cy="623700"/>
+          </a:xfrm>
+          <a:prstGeom prst="rect">
+            <a:avLst/>
+          </a:prstGeom>
+        </p:spPr>
+        <p:txBody>
+          <a:bodyPr spcFirstLastPara="1" wrap="square" lIns="91425" tIns="91425" rIns="91425" bIns="91425" anchor="t" anchorCtr="0">
+            <a:noAutofit/>
+          </a:bodyPr>
+          <a:lstStyle/>
+          <a:p>
+            <a:pPr marL="0" lvl="0" indent="0" algn="ctr" rtl="0">
+              <a:spcBef>
+                <a:spcPts val="0"/>
+              </a:spcBef>
+              <a:spcAft>
+                <a:spcPts val="0"/>
+              </a:spcAft>
+              <a:buNone/>
+            </a:pPr>
+            <a:r>
+              <a:rPr lang="en-US" dirty="0"/>
+              <a:t>GCIS – Software Development and Problem Solving</a:t>
+            </a:r>
+            <a:endParaRPr dirty="0"/>
+          </a:p>
+        </p:txBody>
+      </p:sp>
+      <p:sp>
+        <p:nvSpPr>
+          <p:cNvPr id="325" name="Google Shape;325;p47"/>
+          <p:cNvSpPr txBox="1">
+            <a:spLocks noGrp="1"/>
+          </p:cNvSpPr>
+          <p:nvPr>
+            <p:ph type="body" idx="1"/>
+          </p:nvPr>
+        </p:nvSpPr>
+        <p:spPr>
+          <a:xfrm>
+            <a:off x="0" y="1856257"/>
+            <a:ext cx="9149842" cy="1226403"/>
+          </a:xfrm>
+          <a:prstGeom prst="rect">
+            <a:avLst/>
+          </a:prstGeom>
+        </p:spPr>
+        <p:txBody>
+          <a:bodyPr spcFirstLastPara="1" wrap="square" lIns="91425" tIns="91425" rIns="91425" bIns="91425" anchor="ctr" anchorCtr="0">
+            <a:noAutofit/>
+          </a:bodyPr>
+          <a:lstStyle/>
+          <a:p>
+            <a:pPr marL="146050" indent="0" algn="ctr">
+              <a:buNone/>
+            </a:pPr>
+            <a:r>
+              <a:rPr lang="en-US" sz="2400" dirty="0"/>
+              <a:t>Take Quiz – Midterm Exam 1</a:t>
+            </a:r>
+          </a:p>
+          <a:p>
+            <a:pPr marL="146050" indent="0" algn="ctr">
+              <a:buNone/>
+            </a:pPr>
+            <a:r>
+              <a:rPr lang="en-US" sz="3200" b="1" dirty="0">
+                <a:solidFill>
+                  <a:schemeClr val="tx1"/>
+                </a:solidFill>
+              </a:rPr>
+              <a:t>Password - YouGotThis124!</a:t>
+            </a:r>
+            <a:endParaRPr sz="3200" b="1" dirty="0">
+              <a:solidFill>
+                <a:schemeClr val="tx1"/>
+              </a:solidFill>
+              <a:highlight>
+                <a:srgbClr val="FFFF00"/>
+              </a:highlight>
+            </a:endParaRPr>
+          </a:p>
+        </p:txBody>
+      </p:sp>
+      <p:sp>
+        <p:nvSpPr>
+          <p:cNvPr id="326" name="Google Shape;326;p47"/>
+          <p:cNvSpPr txBox="1">
+            <a:spLocks noGrp="1"/>
+          </p:cNvSpPr>
+          <p:nvPr>
+            <p:ph type="sldNum" idx="12"/>
+          </p:nvPr>
+        </p:nvSpPr>
+        <p:spPr>
+          <a:xfrm>
+            <a:off x="8472458" y="4663217"/>
+            <a:ext cx="548700" cy="393600"/>
+          </a:xfrm>
+          <a:prstGeom prst="rect">
+            <a:avLst/>
+          </a:prstGeom>
+        </p:spPr>
+        <p:txBody>
+          <a:bodyPr spcFirstLastPara="1" wrap="square" lIns="91425" tIns="91425" rIns="91425" bIns="91425" anchor="ctr" anchorCtr="0">
+            <a:noAutofit/>
+          </a:bodyPr>
+          <a:lstStyle/>
+          <a:p>
+            <a:pPr marL="0" lvl="0" indent="0" algn="r" rtl="0">
+              <a:spcBef>
+                <a:spcPts val="0"/>
+              </a:spcBef>
+              <a:spcAft>
+                <a:spcPts val="0"/>
+              </a:spcAft>
+              <a:buNone/>
+            </a:pPr>
+            <a:fld id="{00000000-1234-1234-1234-123412341234}" type="slidenum">
+              <a:rPr lang="en"/>
+              <a:t>2</a:t>
+            </a:fld>
+            <a:endParaRPr/>
+          </a:p>
+        </p:txBody>
+      </p:sp>
+      <p:sp>
+        <p:nvSpPr>
+          <p:cNvPr id="2" name="TextBox 1">
+            <a:extLst>
+              <a:ext uri="{FF2B5EF4-FFF2-40B4-BE49-F238E27FC236}">
+                <a16:creationId xmlns:a16="http://schemas.microsoft.com/office/drawing/2014/main" id="{DCC33EBB-1C9D-B9A9-88E6-F3466077417F}"/>
+              </a:ext>
+            </a:extLst>
+          </p:cNvPr>
+          <p:cNvSpPr txBox="1"/>
+          <p:nvPr/>
+        </p:nvSpPr>
+        <p:spPr>
+          <a:xfrm>
+            <a:off x="-5842" y="1277369"/>
+            <a:ext cx="9144000" cy="307777"/>
+          </a:xfrm>
+          <a:prstGeom prst="rect">
+            <a:avLst/>
+          </a:prstGeom>
+          <a:solidFill>
+            <a:srgbClr val="FFC000"/>
+          </a:solidFill>
+        </p:spPr>
+        <p:txBody>
+          <a:bodyPr wrap="square" rtlCol="0">
+            <a:spAutoFit/>
+          </a:bodyPr>
+          <a:lstStyle/>
+          <a:p>
+            <a:pPr algn="ctr"/>
+            <a:r>
+              <a:rPr lang="en-US" b="1" dirty="0"/>
+              <a:t>Midterm Exam 1 - Written</a:t>
+            </a:r>
+          </a:p>
+        </p:txBody>
+      </p:sp>
+      <p:sp>
+        <p:nvSpPr>
+          <p:cNvPr id="3" name="TextBox 2">
+            <a:extLst>
+              <a:ext uri="{FF2B5EF4-FFF2-40B4-BE49-F238E27FC236}">
+                <a16:creationId xmlns:a16="http://schemas.microsoft.com/office/drawing/2014/main" id="{25A19346-2F9F-0DB9-0B08-CF872EB1D563}"/>
+              </a:ext>
+            </a:extLst>
+          </p:cNvPr>
+          <p:cNvSpPr txBox="1"/>
+          <p:nvPr/>
+        </p:nvSpPr>
+        <p:spPr>
+          <a:xfrm>
+            <a:off x="0" y="3313985"/>
+            <a:ext cx="9144000" cy="307777"/>
+          </a:xfrm>
+          <a:prstGeom prst="rect">
+            <a:avLst/>
+          </a:prstGeom>
+          <a:solidFill>
+            <a:srgbClr val="FFC000"/>
+          </a:solidFill>
+        </p:spPr>
+        <p:txBody>
+          <a:bodyPr wrap="square" rtlCol="0">
+            <a:spAutoFit/>
+          </a:bodyPr>
+          <a:lstStyle/>
+          <a:p>
+            <a:r>
+              <a:rPr lang="en-US" dirty="0"/>
+              <a:t>Practicum</a:t>
+            </a:r>
+          </a:p>
+        </p:txBody>
+      </p:sp>
+      <p:sp>
+        <p:nvSpPr>
+          <p:cNvPr id="4" name="Google Shape;325;p47">
+            <a:extLst>
+              <a:ext uri="{FF2B5EF4-FFF2-40B4-BE49-F238E27FC236}">
+                <a16:creationId xmlns:a16="http://schemas.microsoft.com/office/drawing/2014/main" id="{11D0E6FB-E344-369B-CE83-B3CF5834F823}"/>
+              </a:ext>
+            </a:extLst>
+          </p:cNvPr>
+          <p:cNvSpPr txBox="1">
+            <a:spLocks/>
+          </p:cNvSpPr>
+          <p:nvPr/>
+        </p:nvSpPr>
+        <p:spPr>
+          <a:xfrm>
+            <a:off x="122842" y="3621762"/>
+            <a:ext cx="8478300" cy="1435054"/>
+          </a:xfrm>
+          <a:prstGeom prst="rect">
+            <a:avLst/>
+          </a:prstGeom>
+          <a:noFill/>
+          <a:ln>
+            <a:noFill/>
+          </a:ln>
+        </p:spPr>
+        <p:txBody>
+          <a:bodyPr spcFirstLastPara="1" wrap="square" lIns="91425" tIns="91425" rIns="91425" bIns="91425" anchor="ctr" anchorCtr="0">
+            <a:noAutofit/>
+          </a:bodyPr>
+          <a:lstStyle>
+            <a:defPPr marR="0" lvl="0" algn="l" rtl="0">
+              <a:lnSpc>
+                <a:spcPct val="100000"/>
+              </a:lnSpc>
+              <a:spcBef>
+                <a:spcPts val="0"/>
+              </a:spcBef>
+              <a:spcAft>
+                <a:spcPts val="0"/>
+              </a:spcAft>
+            </a:defPPr>
+            <a:lvl1pPr marL="457200" marR="0" lvl="0" indent="-311150" algn="l" rtl="0">
+              <a:lnSpc>
+                <a:spcPct val="115000"/>
+              </a:lnSpc>
+              <a:spcBef>
+                <a:spcPts val="0"/>
+              </a:spcBef>
+              <a:spcAft>
+                <a:spcPts val="0"/>
+              </a:spcAft>
+              <a:buClr>
+                <a:schemeClr val="dk2"/>
+              </a:buClr>
+              <a:buSzPts val="1300"/>
+              <a:buFont typeface="Roboto"/>
+              <a:buChar char="●"/>
+              <a:defRPr sz="1300" b="0" i="0" u="none" strike="noStrike" cap="none">
+                <a:solidFill>
+                  <a:schemeClr val="dk2"/>
+                </a:solidFill>
+                <a:latin typeface="Roboto"/>
+                <a:ea typeface="Roboto"/>
+                <a:cs typeface="Roboto"/>
+                <a:sym typeface="Roboto"/>
+              </a:defRPr>
+            </a:lvl1pPr>
+            <a:lvl2pPr marL="914400" marR="0" lvl="1" indent="-298450" algn="l" rtl="0">
+              <a:lnSpc>
+                <a:spcPct val="115000"/>
+              </a:lnSpc>
+              <a:spcBef>
+                <a:spcPts val="1600"/>
+              </a:spcBef>
+              <a:spcAft>
+                <a:spcPts val="0"/>
+              </a:spcAft>
+              <a:buClr>
+                <a:schemeClr val="dk2"/>
+              </a:buClr>
+              <a:buSzPts val="1100"/>
+              <a:buFont typeface="Roboto"/>
+              <a:buChar char="○"/>
+              <a:defRPr sz="1100" b="0" i="0" u="none" strike="noStrike" cap="none">
+                <a:solidFill>
+                  <a:schemeClr val="dk2"/>
+                </a:solidFill>
+                <a:latin typeface="Roboto"/>
+                <a:ea typeface="Roboto"/>
+                <a:cs typeface="Roboto"/>
+                <a:sym typeface="Roboto"/>
+              </a:defRPr>
+            </a:lvl2pPr>
+            <a:lvl3pPr marL="1371600" marR="0" lvl="2" indent="-298450" algn="l" rtl="0">
+              <a:lnSpc>
+                <a:spcPct val="115000"/>
+              </a:lnSpc>
+              <a:spcBef>
+                <a:spcPts val="1600"/>
+              </a:spcBef>
+              <a:spcAft>
+                <a:spcPts val="0"/>
+              </a:spcAft>
+              <a:buClr>
+                <a:schemeClr val="dk2"/>
+              </a:buClr>
+              <a:buSzPts val="1100"/>
+              <a:buFont typeface="Roboto"/>
+              <a:buChar char="■"/>
+              <a:defRPr sz="1100" b="0" i="0" u="none" strike="noStrike" cap="none">
+                <a:solidFill>
+                  <a:schemeClr val="dk2"/>
+                </a:solidFill>
+                <a:latin typeface="Roboto"/>
+                <a:ea typeface="Roboto"/>
+                <a:cs typeface="Roboto"/>
+                <a:sym typeface="Roboto"/>
+              </a:defRPr>
+            </a:lvl3pPr>
+            <a:lvl4pPr marL="1828800" marR="0" lvl="3" indent="-298450" algn="l" rtl="0">
+              <a:lnSpc>
+                <a:spcPct val="115000"/>
+              </a:lnSpc>
+              <a:spcBef>
+                <a:spcPts val="1600"/>
+              </a:spcBef>
+              <a:spcAft>
+                <a:spcPts val="0"/>
+              </a:spcAft>
+              <a:buClr>
+                <a:schemeClr val="dk2"/>
+              </a:buClr>
+              <a:buSzPts val="1100"/>
+              <a:buFont typeface="Roboto"/>
+              <a:buChar char="●"/>
+              <a:defRPr sz="1100" b="0" i="0" u="none" strike="noStrike" cap="none">
+                <a:solidFill>
+                  <a:schemeClr val="dk2"/>
+                </a:solidFill>
+                <a:latin typeface="Roboto"/>
+                <a:ea typeface="Roboto"/>
+                <a:cs typeface="Roboto"/>
+                <a:sym typeface="Roboto"/>
+              </a:defRPr>
+            </a:lvl4pPr>
+            <a:lvl5pPr marL="2286000" marR="0" lvl="4" indent="-298450" algn="l" rtl="0">
+              <a:lnSpc>
+                <a:spcPct val="115000"/>
+              </a:lnSpc>
+              <a:spcBef>
+                <a:spcPts val="1600"/>
+              </a:spcBef>
+              <a:spcAft>
+                <a:spcPts val="0"/>
+              </a:spcAft>
+              <a:buClr>
+                <a:schemeClr val="dk2"/>
+              </a:buClr>
+              <a:buSzPts val="1100"/>
+              <a:buFont typeface="Roboto"/>
+              <a:buChar char="○"/>
+              <a:defRPr sz="1100" b="0" i="0" u="none" strike="noStrike" cap="none">
+                <a:solidFill>
+                  <a:schemeClr val="dk2"/>
+                </a:solidFill>
+                <a:latin typeface="Roboto"/>
+                <a:ea typeface="Roboto"/>
+                <a:cs typeface="Roboto"/>
+                <a:sym typeface="Roboto"/>
+              </a:defRPr>
+            </a:lvl5pPr>
+            <a:lvl6pPr marL="2743200" marR="0" lvl="5" indent="-298450" algn="l" rtl="0">
+              <a:lnSpc>
+                <a:spcPct val="115000"/>
+              </a:lnSpc>
+              <a:spcBef>
+                <a:spcPts val="1600"/>
+              </a:spcBef>
+              <a:spcAft>
+                <a:spcPts val="0"/>
+              </a:spcAft>
+              <a:buClr>
+                <a:schemeClr val="dk2"/>
+              </a:buClr>
+              <a:buSzPts val="1100"/>
+              <a:buFont typeface="Roboto"/>
+              <a:buChar char="■"/>
+              <a:defRPr sz="1100" b="0" i="0" u="none" strike="noStrike" cap="none">
+                <a:solidFill>
+                  <a:schemeClr val="dk2"/>
+                </a:solidFill>
+                <a:latin typeface="Roboto"/>
+                <a:ea typeface="Roboto"/>
+                <a:cs typeface="Roboto"/>
+                <a:sym typeface="Roboto"/>
+              </a:defRPr>
+            </a:lvl6pPr>
+            <a:lvl7pPr marL="3200400" marR="0" lvl="6" indent="-298450" algn="l" rtl="0">
+              <a:lnSpc>
+                <a:spcPct val="115000"/>
+              </a:lnSpc>
+              <a:spcBef>
+                <a:spcPts val="1600"/>
+              </a:spcBef>
+              <a:spcAft>
+                <a:spcPts val="0"/>
+              </a:spcAft>
+              <a:buClr>
+                <a:schemeClr val="dk2"/>
+              </a:buClr>
+              <a:buSzPts val="1100"/>
+              <a:buFont typeface="Roboto"/>
+              <a:buChar char="●"/>
+              <a:defRPr sz="1100" b="0" i="0" u="none" strike="noStrike" cap="none">
+                <a:solidFill>
+                  <a:schemeClr val="dk2"/>
+                </a:solidFill>
+                <a:latin typeface="Roboto"/>
+                <a:ea typeface="Roboto"/>
+                <a:cs typeface="Roboto"/>
+                <a:sym typeface="Roboto"/>
+              </a:defRPr>
+            </a:lvl7pPr>
+            <a:lvl8pPr marL="3657600" marR="0" lvl="7" indent="-298450" algn="l" rtl="0">
+              <a:lnSpc>
+                <a:spcPct val="115000"/>
+              </a:lnSpc>
+              <a:spcBef>
+                <a:spcPts val="1600"/>
+              </a:spcBef>
+              <a:spcAft>
+                <a:spcPts val="0"/>
+              </a:spcAft>
+              <a:buClr>
+                <a:schemeClr val="dk2"/>
+              </a:buClr>
+              <a:buSzPts val="1100"/>
+              <a:buFont typeface="Roboto"/>
+              <a:buChar char="○"/>
+              <a:defRPr sz="1100" b="0" i="0" u="none" strike="noStrike" cap="none">
+                <a:solidFill>
+                  <a:schemeClr val="dk2"/>
+                </a:solidFill>
+                <a:latin typeface="Roboto"/>
+                <a:ea typeface="Roboto"/>
+                <a:cs typeface="Roboto"/>
+                <a:sym typeface="Roboto"/>
+              </a:defRPr>
+            </a:lvl8pPr>
+            <a:lvl9pPr marL="4114800" marR="0" lvl="8" indent="-298450" algn="l" rtl="0">
+              <a:lnSpc>
+                <a:spcPct val="115000"/>
+              </a:lnSpc>
+              <a:spcBef>
+                <a:spcPts val="1600"/>
+              </a:spcBef>
+              <a:spcAft>
+                <a:spcPts val="1600"/>
+              </a:spcAft>
+              <a:buClr>
+                <a:schemeClr val="dk2"/>
+              </a:buClr>
+              <a:buSzPts val="1100"/>
+              <a:buFont typeface="Roboto"/>
+              <a:buChar char="■"/>
+              <a:defRPr sz="1100" b="0" i="0" u="none" strike="noStrike" cap="none">
+                <a:solidFill>
+                  <a:schemeClr val="dk2"/>
+                </a:solidFill>
+                <a:latin typeface="Roboto"/>
+                <a:ea typeface="Roboto"/>
+                <a:cs typeface="Roboto"/>
+                <a:sym typeface="Roboto"/>
+              </a:defRPr>
+            </a:lvl9pPr>
+          </a:lstStyle>
+          <a:p>
+            <a:pPr marL="342900" indent="-342900">
+              <a:spcAft>
+                <a:spcPts val="1600"/>
+              </a:spcAft>
+            </a:pPr>
+            <a:r>
+              <a:rPr lang="en-US" sz="1600" dirty="0"/>
+              <a:t>Accept assignment Mid Exam 1 under Instructor -&gt; Alam -&gt; Exam</a:t>
+            </a:r>
+            <a:endParaRPr lang="en-US" sz="1600" dirty="0">
+              <a:solidFill>
+                <a:schemeClr val="tx1"/>
+              </a:solidFill>
+            </a:endParaRPr>
+          </a:p>
+          <a:p>
+            <a:pPr marL="342900" indent="-342900">
+              <a:spcAft>
+                <a:spcPts val="1600"/>
+              </a:spcAft>
+            </a:pPr>
+            <a:r>
+              <a:rPr lang="en-US" sz="1600" dirty="0">
+                <a:solidFill>
+                  <a:schemeClr val="tx1"/>
+                </a:solidFill>
+              </a:rPr>
+              <a:t>Clone the repository for </a:t>
+            </a:r>
+            <a:r>
+              <a:rPr lang="en-US" sz="1600" dirty="0"/>
+              <a:t>Mid Exam 1 </a:t>
+            </a:r>
+            <a:endParaRPr lang="en-US" sz="1600" dirty="0">
+              <a:solidFill>
+                <a:schemeClr val="tx1"/>
+              </a:solidFill>
+            </a:endParaRPr>
+          </a:p>
+        </p:txBody>
+      </p:sp>
+    </p:spTree>
+    <p:extLst>
+      <p:ext uri="{BB962C8B-B14F-4D97-AF65-F5344CB8AC3E}">
+        <p14:creationId xmlns:p14="http://schemas.microsoft.com/office/powerpoint/2010/main" val="943055912"/>
+      </p:ext>
+    </p:extLst>
+  </p:cSld>
+  <p:clrMapOvr>
+    <a:masterClrMapping/>
+  </p:clrMapOvr>
+</p:sld>
+</file>
+
+<file path=ppt/slides/slide3.xml><?xml version="1.0" encoding="utf-8"?>
+<p:sld xmlns:a="http://schemas.openxmlformats.org/drawingml/2006/main" xmlns:r="http://schemas.openxmlformats.org/officeDocument/2006/relationships" xmlns:p="http://schemas.openxmlformats.org/presentationml/2006/main" show="0">
+  <p:cSld>
+    <p:spTree>
+      <p:nvGrpSpPr>
         <p:cNvPr id="1" name="Shape 323">
           <a:extLst>
             <a:ext uri="{FF2B5EF4-FFF2-40B4-BE49-F238E27FC236}">
@@ -6709,7 +8305,7 @@
             </a:pPr>
             <a:fld id="{00000000-1234-1234-1234-123412341234}" type="slidenum">
               <a:rPr lang="en"/>
-              <a:t>1</a:t>
+              <a:t>3</a:t>
             </a:fld>
             <a:endParaRPr/>
           </a:p>
@@ -7444,1604 +9040,6 @@
         <p14:creationId xmlns:p14="http://schemas.microsoft.com/office/powerpoint/2010/main" val="674272117"/>
       </p:ext>
     </p:extLst>
-  </p:cSld>
-  <p:clrMapOvr>
-    <a:masterClrMapping/>
-  </p:clrMapOvr>
-</p:sld>
-</file>
-
-<file path=ppt/slides/slide10.xml><?xml version="1.0" encoding="utf-8"?>
-<p:sld xmlns:a="http://schemas.openxmlformats.org/drawingml/2006/main" xmlns:r="http://schemas.openxmlformats.org/officeDocument/2006/relationships" xmlns:p="http://schemas.openxmlformats.org/presentationml/2006/main" show="0">
-  <p:cSld>
-    <p:spTree>
-      <p:nvGrpSpPr>
-        <p:cNvPr id="1" name="Shape 323"/>
-        <p:cNvGrpSpPr/>
-        <p:nvPr/>
-      </p:nvGrpSpPr>
-      <p:grpSpPr>
-        <a:xfrm>
-          <a:off x="0" y="0"/>
-          <a:ext cx="0" cy="0"/>
-          <a:chOff x="0" y="0"/>
-          <a:chExt cx="0" cy="0"/>
-        </a:xfrm>
-      </p:grpSpPr>
-      <p:sp>
-        <p:nvSpPr>
-          <p:cNvPr id="324" name="Google Shape;324;p47"/>
-          <p:cNvSpPr txBox="1">
-            <a:spLocks noGrp="1"/>
-          </p:cNvSpPr>
-          <p:nvPr>
-            <p:ph type="title"/>
-          </p:nvPr>
-        </p:nvSpPr>
-        <p:spPr>
-          <a:xfrm>
-            <a:off x="226208" y="1"/>
-            <a:ext cx="8520600" cy="464980"/>
-          </a:xfrm>
-          <a:prstGeom prst="rect">
-            <a:avLst/>
-          </a:prstGeom>
-        </p:spPr>
-        <p:txBody>
-          <a:bodyPr spcFirstLastPara="1" wrap="square" lIns="91425" tIns="91425" rIns="91425" bIns="91425" anchor="t" anchorCtr="0">
-            <a:noAutofit/>
-          </a:bodyPr>
-          <a:lstStyle/>
-          <a:p>
-            <a:pPr marL="0" lvl="0" indent="0" algn="ctr" rtl="0">
-              <a:spcBef>
-                <a:spcPts val="0"/>
-              </a:spcBef>
-              <a:spcAft>
-                <a:spcPts val="0"/>
-              </a:spcAft>
-              <a:buNone/>
-            </a:pPr>
-            <a:r>
-              <a:rPr lang="en-US" dirty="0"/>
-              <a:t>Use </a:t>
-            </a:r>
-            <a:r>
-              <a:rPr lang="en-US" sz="2400" dirty="0"/>
-              <a:t>Assigned</a:t>
-            </a:r>
-            <a:r>
-              <a:rPr lang="en-US" dirty="0"/>
-              <a:t> Seat</a:t>
-            </a:r>
-            <a:endParaRPr dirty="0"/>
-          </a:p>
-        </p:txBody>
-      </p:sp>
-      <p:sp>
-        <p:nvSpPr>
-          <p:cNvPr id="326" name="Google Shape;326;p47"/>
-          <p:cNvSpPr txBox="1">
-            <a:spLocks noGrp="1"/>
-          </p:cNvSpPr>
-          <p:nvPr>
-            <p:ph type="sldNum" idx="12"/>
-          </p:nvPr>
-        </p:nvSpPr>
-        <p:spPr>
-          <a:xfrm>
-            <a:off x="8472458" y="4663217"/>
-            <a:ext cx="548700" cy="393600"/>
-          </a:xfrm>
-          <a:prstGeom prst="rect">
-            <a:avLst/>
-          </a:prstGeom>
-        </p:spPr>
-        <p:txBody>
-          <a:bodyPr spcFirstLastPara="1" wrap="square" lIns="91425" tIns="91425" rIns="91425" bIns="91425" anchor="ctr" anchorCtr="0">
-            <a:noAutofit/>
-          </a:bodyPr>
-          <a:lstStyle/>
-          <a:p>
-            <a:pPr marL="0" lvl="0" indent="0" algn="r" rtl="0">
-              <a:spcBef>
-                <a:spcPts val="0"/>
-              </a:spcBef>
-              <a:spcAft>
-                <a:spcPts val="0"/>
-              </a:spcAft>
-              <a:buNone/>
-            </a:pPr>
-            <a:fld id="{00000000-1234-1234-1234-123412341234}" type="slidenum">
-              <a:rPr lang="en"/>
-              <a:t>10</a:t>
-            </a:fld>
-            <a:endParaRPr/>
-          </a:p>
-        </p:txBody>
-      </p:sp>
-      <p:pic>
-        <p:nvPicPr>
-          <p:cNvPr id="6" name="Picture 5">
-            <a:extLst>
-              <a:ext uri="{FF2B5EF4-FFF2-40B4-BE49-F238E27FC236}">
-                <a16:creationId xmlns:a16="http://schemas.microsoft.com/office/drawing/2014/main" id="{DED32793-7C09-E3A3-94E5-B5D46727A1D0}"/>
-              </a:ext>
-            </a:extLst>
-          </p:cNvPr>
-          <p:cNvPicPr>
-            <a:picLocks noChangeAspect="1"/>
-          </p:cNvPicPr>
-          <p:nvPr/>
-        </p:nvPicPr>
-        <p:blipFill>
-          <a:blip r:embed="rId3"/>
-          <a:stretch>
-            <a:fillRect/>
-          </a:stretch>
-        </p:blipFill>
-        <p:spPr>
-          <a:xfrm>
-            <a:off x="-1" y="551663"/>
-            <a:ext cx="9144001" cy="4591837"/>
-          </a:xfrm>
-          <a:prstGeom prst="rect">
-            <a:avLst/>
-          </a:prstGeom>
-        </p:spPr>
-      </p:pic>
-    </p:spTree>
-    <p:extLst>
-      <p:ext uri="{BB962C8B-B14F-4D97-AF65-F5344CB8AC3E}">
-        <p14:creationId xmlns:p14="http://schemas.microsoft.com/office/powerpoint/2010/main" val="4226348449"/>
-      </p:ext>
-    </p:extLst>
-  </p:cSld>
-  <p:clrMapOvr>
-    <a:masterClrMapping/>
-  </p:clrMapOvr>
-</p:sld>
-</file>
-
-<file path=ppt/slides/slide11.xml><?xml version="1.0" encoding="utf-8"?>
-<p:sld xmlns:a="http://schemas.openxmlformats.org/drawingml/2006/main" xmlns:r="http://schemas.openxmlformats.org/officeDocument/2006/relationships" xmlns:p="http://schemas.openxmlformats.org/presentationml/2006/main" show="0">
-  <p:cSld>
-    <p:spTree>
-      <p:nvGrpSpPr>
-        <p:cNvPr id="1" name="Shape 323"/>
-        <p:cNvGrpSpPr/>
-        <p:nvPr/>
-      </p:nvGrpSpPr>
-      <p:grpSpPr>
-        <a:xfrm>
-          <a:off x="0" y="0"/>
-          <a:ext cx="0" cy="0"/>
-          <a:chOff x="0" y="0"/>
-          <a:chExt cx="0" cy="0"/>
-        </a:xfrm>
-      </p:grpSpPr>
-      <p:sp>
-        <p:nvSpPr>
-          <p:cNvPr id="324" name="Google Shape;324;p47"/>
-          <p:cNvSpPr txBox="1">
-            <a:spLocks noGrp="1"/>
-          </p:cNvSpPr>
-          <p:nvPr>
-            <p:ph type="title"/>
-          </p:nvPr>
-        </p:nvSpPr>
-        <p:spPr>
-          <a:xfrm>
-            <a:off x="226208" y="1"/>
-            <a:ext cx="8520600" cy="464980"/>
-          </a:xfrm>
-          <a:prstGeom prst="rect">
-            <a:avLst/>
-          </a:prstGeom>
-        </p:spPr>
-        <p:txBody>
-          <a:bodyPr spcFirstLastPara="1" wrap="square" lIns="91425" tIns="91425" rIns="91425" bIns="91425" anchor="t" anchorCtr="0">
-            <a:noAutofit/>
-          </a:bodyPr>
-          <a:lstStyle/>
-          <a:p>
-            <a:pPr marL="0" lvl="0" indent="0" algn="ctr" rtl="0">
-              <a:spcBef>
-                <a:spcPts val="0"/>
-              </a:spcBef>
-              <a:spcAft>
-                <a:spcPts val="0"/>
-              </a:spcAft>
-              <a:buNone/>
-            </a:pPr>
-            <a:r>
-              <a:rPr lang="en-US" dirty="0"/>
-              <a:t>Use </a:t>
-            </a:r>
-            <a:r>
-              <a:rPr lang="en-US" sz="2400" dirty="0"/>
-              <a:t>Assigned</a:t>
-            </a:r>
-            <a:r>
-              <a:rPr lang="en-US" dirty="0"/>
-              <a:t> Seat</a:t>
-            </a:r>
-            <a:endParaRPr dirty="0"/>
-          </a:p>
-        </p:txBody>
-      </p:sp>
-      <p:sp>
-        <p:nvSpPr>
-          <p:cNvPr id="326" name="Google Shape;326;p47"/>
-          <p:cNvSpPr txBox="1">
-            <a:spLocks noGrp="1"/>
-          </p:cNvSpPr>
-          <p:nvPr>
-            <p:ph type="sldNum" idx="12"/>
-          </p:nvPr>
-        </p:nvSpPr>
-        <p:spPr>
-          <a:xfrm>
-            <a:off x="8472458" y="4663217"/>
-            <a:ext cx="548700" cy="393600"/>
-          </a:xfrm>
-          <a:prstGeom prst="rect">
-            <a:avLst/>
-          </a:prstGeom>
-        </p:spPr>
-        <p:txBody>
-          <a:bodyPr spcFirstLastPara="1" wrap="square" lIns="91425" tIns="91425" rIns="91425" bIns="91425" anchor="ctr" anchorCtr="0">
-            <a:noAutofit/>
-          </a:bodyPr>
-          <a:lstStyle/>
-          <a:p>
-            <a:pPr marL="0" lvl="0" indent="0" algn="r" rtl="0">
-              <a:spcBef>
-                <a:spcPts val="0"/>
-              </a:spcBef>
-              <a:spcAft>
-                <a:spcPts val="0"/>
-              </a:spcAft>
-              <a:buNone/>
-            </a:pPr>
-            <a:fld id="{00000000-1234-1234-1234-123412341234}" type="slidenum">
-              <a:rPr lang="en"/>
-              <a:t>11</a:t>
-            </a:fld>
-            <a:endParaRPr/>
-          </a:p>
-        </p:txBody>
-      </p:sp>
-      <p:pic>
-        <p:nvPicPr>
-          <p:cNvPr id="3" name="Picture 2">
-            <a:extLst>
-              <a:ext uri="{FF2B5EF4-FFF2-40B4-BE49-F238E27FC236}">
-                <a16:creationId xmlns:a16="http://schemas.microsoft.com/office/drawing/2014/main" id="{92DE4AAC-70FE-A114-5258-F5B22EDDED45}"/>
-              </a:ext>
-            </a:extLst>
-          </p:cNvPr>
-          <p:cNvPicPr>
-            <a:picLocks noChangeAspect="1"/>
-          </p:cNvPicPr>
-          <p:nvPr/>
-        </p:nvPicPr>
-        <p:blipFill>
-          <a:blip r:embed="rId3"/>
-          <a:stretch>
-            <a:fillRect/>
-          </a:stretch>
-        </p:blipFill>
-        <p:spPr>
-          <a:xfrm>
-            <a:off x="0" y="716280"/>
-            <a:ext cx="9144000" cy="4427218"/>
-          </a:xfrm>
-          <a:prstGeom prst="rect">
-            <a:avLst/>
-          </a:prstGeom>
-        </p:spPr>
-      </p:pic>
-    </p:spTree>
-    <p:extLst>
-      <p:ext uri="{BB962C8B-B14F-4D97-AF65-F5344CB8AC3E}">
-        <p14:creationId xmlns:p14="http://schemas.microsoft.com/office/powerpoint/2010/main" val="1976403023"/>
-      </p:ext>
-    </p:extLst>
-  </p:cSld>
-  <p:clrMapOvr>
-    <a:masterClrMapping/>
-  </p:clrMapOvr>
-</p:sld>
-</file>
-
-<file path=ppt/slides/slide12.xml><?xml version="1.0" encoding="utf-8"?>
-<p:sld xmlns:a="http://schemas.openxmlformats.org/drawingml/2006/main" xmlns:r="http://schemas.openxmlformats.org/officeDocument/2006/relationships" xmlns:p="http://schemas.openxmlformats.org/presentationml/2006/main" show="0">
-  <p:cSld>
-    <p:spTree>
-      <p:nvGrpSpPr>
-        <p:cNvPr id="1" name="Shape 323"/>
-        <p:cNvGrpSpPr/>
-        <p:nvPr/>
-      </p:nvGrpSpPr>
-      <p:grpSpPr>
-        <a:xfrm>
-          <a:off x="0" y="0"/>
-          <a:ext cx="0" cy="0"/>
-          <a:chOff x="0" y="0"/>
-          <a:chExt cx="0" cy="0"/>
-        </a:xfrm>
-      </p:grpSpPr>
-      <p:sp>
-        <p:nvSpPr>
-          <p:cNvPr id="324" name="Google Shape;324;p47"/>
-          <p:cNvSpPr txBox="1">
-            <a:spLocks noGrp="1"/>
-          </p:cNvSpPr>
-          <p:nvPr>
-            <p:ph type="title"/>
-          </p:nvPr>
-        </p:nvSpPr>
-        <p:spPr>
-          <a:xfrm>
-            <a:off x="226208" y="1"/>
-            <a:ext cx="8520600" cy="464980"/>
-          </a:xfrm>
-          <a:prstGeom prst="rect">
-            <a:avLst/>
-          </a:prstGeom>
-        </p:spPr>
-        <p:txBody>
-          <a:bodyPr spcFirstLastPara="1" wrap="square" lIns="91425" tIns="91425" rIns="91425" bIns="91425" anchor="t" anchorCtr="0">
-            <a:noAutofit/>
-          </a:bodyPr>
-          <a:lstStyle/>
-          <a:p>
-            <a:pPr marL="0" lvl="0" indent="0" algn="ctr" rtl="0">
-              <a:spcBef>
-                <a:spcPts val="0"/>
-              </a:spcBef>
-              <a:spcAft>
-                <a:spcPts val="0"/>
-              </a:spcAft>
-              <a:buNone/>
-            </a:pPr>
-            <a:r>
-              <a:rPr lang="en-US" dirty="0"/>
-              <a:t>Use </a:t>
-            </a:r>
-            <a:r>
-              <a:rPr lang="en-US" sz="2400" dirty="0"/>
-              <a:t>Assigned</a:t>
-            </a:r>
-            <a:r>
-              <a:rPr lang="en-US" dirty="0"/>
-              <a:t> Seat</a:t>
-            </a:r>
-            <a:endParaRPr dirty="0"/>
-          </a:p>
-        </p:txBody>
-      </p:sp>
-      <p:sp>
-        <p:nvSpPr>
-          <p:cNvPr id="326" name="Google Shape;326;p47"/>
-          <p:cNvSpPr txBox="1">
-            <a:spLocks noGrp="1"/>
-          </p:cNvSpPr>
-          <p:nvPr>
-            <p:ph type="sldNum" idx="12"/>
-          </p:nvPr>
-        </p:nvSpPr>
-        <p:spPr>
-          <a:xfrm>
-            <a:off x="8472458" y="4663217"/>
-            <a:ext cx="548700" cy="393600"/>
-          </a:xfrm>
-          <a:prstGeom prst="rect">
-            <a:avLst/>
-          </a:prstGeom>
-        </p:spPr>
-        <p:txBody>
-          <a:bodyPr spcFirstLastPara="1" wrap="square" lIns="91425" tIns="91425" rIns="91425" bIns="91425" anchor="ctr" anchorCtr="0">
-            <a:noAutofit/>
-          </a:bodyPr>
-          <a:lstStyle/>
-          <a:p>
-            <a:pPr marL="0" lvl="0" indent="0" algn="r" rtl="0">
-              <a:spcBef>
-                <a:spcPts val="0"/>
-              </a:spcBef>
-              <a:spcAft>
-                <a:spcPts val="0"/>
-              </a:spcAft>
-              <a:buNone/>
-            </a:pPr>
-            <a:fld id="{00000000-1234-1234-1234-123412341234}" type="slidenum">
-              <a:rPr lang="en"/>
-              <a:t>12</a:t>
-            </a:fld>
-            <a:endParaRPr/>
-          </a:p>
-        </p:txBody>
-      </p:sp>
-      <p:pic>
-        <p:nvPicPr>
-          <p:cNvPr id="4" name="Picture 3">
-            <a:extLst>
-              <a:ext uri="{FF2B5EF4-FFF2-40B4-BE49-F238E27FC236}">
-                <a16:creationId xmlns:a16="http://schemas.microsoft.com/office/drawing/2014/main" id="{DCD752B9-EFAE-AFC1-7D39-6763B89DE8D3}"/>
-              </a:ext>
-            </a:extLst>
-          </p:cNvPr>
-          <p:cNvPicPr>
-            <a:picLocks noChangeAspect="1"/>
-          </p:cNvPicPr>
-          <p:nvPr/>
-        </p:nvPicPr>
-        <p:blipFill>
-          <a:blip r:embed="rId3"/>
-          <a:stretch>
-            <a:fillRect/>
-          </a:stretch>
-        </p:blipFill>
-        <p:spPr>
-          <a:xfrm>
-            <a:off x="0" y="652130"/>
-            <a:ext cx="9144000" cy="4491369"/>
-          </a:xfrm>
-          <a:prstGeom prst="rect">
-            <a:avLst/>
-          </a:prstGeom>
-        </p:spPr>
-      </p:pic>
-    </p:spTree>
-    <p:extLst>
-      <p:ext uri="{BB962C8B-B14F-4D97-AF65-F5344CB8AC3E}">
-        <p14:creationId xmlns:p14="http://schemas.microsoft.com/office/powerpoint/2010/main" val="3365057756"/>
-      </p:ext>
-    </p:extLst>
-  </p:cSld>
-  <p:clrMapOvr>
-    <a:masterClrMapping/>
-  </p:clrMapOvr>
-</p:sld>
-</file>
-
-<file path=ppt/slides/slide2.xml><?xml version="1.0" encoding="utf-8"?>
-<p:sld xmlns:a="http://schemas.openxmlformats.org/drawingml/2006/main" xmlns:r="http://schemas.openxmlformats.org/officeDocument/2006/relationships" xmlns:p="http://schemas.openxmlformats.org/presentationml/2006/main" show="0">
-  <p:cSld>
-    <p:spTree>
-      <p:nvGrpSpPr>
-        <p:cNvPr id="1" name="Shape 323"/>
-        <p:cNvGrpSpPr/>
-        <p:nvPr/>
-      </p:nvGrpSpPr>
-      <p:grpSpPr>
-        <a:xfrm>
-          <a:off x="0" y="0"/>
-          <a:ext cx="0" cy="0"/>
-          <a:chOff x="0" y="0"/>
-          <a:chExt cx="0" cy="0"/>
-        </a:xfrm>
-      </p:grpSpPr>
-      <p:sp>
-        <p:nvSpPr>
-          <p:cNvPr id="324" name="Google Shape;324;p47"/>
-          <p:cNvSpPr txBox="1">
-            <a:spLocks noGrp="1"/>
-          </p:cNvSpPr>
-          <p:nvPr>
-            <p:ph type="title"/>
-          </p:nvPr>
-        </p:nvSpPr>
-        <p:spPr>
-          <a:xfrm>
-            <a:off x="314621" y="235914"/>
-            <a:ext cx="8520600" cy="623700"/>
-          </a:xfrm>
-          <a:prstGeom prst="rect">
-            <a:avLst/>
-          </a:prstGeom>
-        </p:spPr>
-        <p:txBody>
-          <a:bodyPr spcFirstLastPara="1" wrap="square" lIns="91425" tIns="91425" rIns="91425" bIns="91425" anchor="t" anchorCtr="0">
-            <a:noAutofit/>
-          </a:bodyPr>
-          <a:lstStyle/>
-          <a:p>
-            <a:pPr marL="0" lvl="0" indent="0" algn="ctr" rtl="0">
-              <a:spcBef>
-                <a:spcPts val="0"/>
-              </a:spcBef>
-              <a:spcAft>
-                <a:spcPts val="0"/>
-              </a:spcAft>
-              <a:buNone/>
-            </a:pPr>
-            <a:r>
-              <a:rPr lang="en-US" dirty="0"/>
-              <a:t>GCIS – Software Development and Problem Solving</a:t>
-            </a:r>
-            <a:endParaRPr dirty="0"/>
-          </a:p>
-        </p:txBody>
-      </p:sp>
-      <p:sp>
-        <p:nvSpPr>
-          <p:cNvPr id="325" name="Google Shape;325;p47"/>
-          <p:cNvSpPr txBox="1">
-            <a:spLocks noGrp="1"/>
-          </p:cNvSpPr>
-          <p:nvPr>
-            <p:ph type="body" idx="1"/>
-          </p:nvPr>
-        </p:nvSpPr>
-        <p:spPr>
-          <a:xfrm>
-            <a:off x="0" y="1856257"/>
-            <a:ext cx="9149842" cy="1226403"/>
-          </a:xfrm>
-          <a:prstGeom prst="rect">
-            <a:avLst/>
-          </a:prstGeom>
-        </p:spPr>
-        <p:txBody>
-          <a:bodyPr spcFirstLastPara="1" wrap="square" lIns="91425" tIns="91425" rIns="91425" bIns="91425" anchor="ctr" anchorCtr="0">
-            <a:noAutofit/>
-          </a:bodyPr>
-          <a:lstStyle/>
-          <a:p>
-            <a:pPr marL="146050" indent="0" algn="ctr">
-              <a:buNone/>
-            </a:pPr>
-            <a:r>
-              <a:rPr lang="en-US" sz="2400" dirty="0"/>
-              <a:t>Take Quiz – Midterm Exam 1</a:t>
-            </a:r>
-          </a:p>
-          <a:p>
-            <a:pPr marL="146050" indent="0" algn="ctr">
-              <a:buNone/>
-            </a:pPr>
-            <a:r>
-              <a:rPr lang="en-US" sz="3200" b="1" dirty="0">
-                <a:solidFill>
-                  <a:schemeClr val="tx1"/>
-                </a:solidFill>
-              </a:rPr>
-              <a:t>Password - YouGotThis124!</a:t>
-            </a:r>
-            <a:endParaRPr sz="3200" b="1" dirty="0">
-              <a:solidFill>
-                <a:schemeClr val="tx1"/>
-              </a:solidFill>
-              <a:highlight>
-                <a:srgbClr val="FFFF00"/>
-              </a:highlight>
-            </a:endParaRPr>
-          </a:p>
-        </p:txBody>
-      </p:sp>
-      <p:sp>
-        <p:nvSpPr>
-          <p:cNvPr id="326" name="Google Shape;326;p47"/>
-          <p:cNvSpPr txBox="1">
-            <a:spLocks noGrp="1"/>
-          </p:cNvSpPr>
-          <p:nvPr>
-            <p:ph type="sldNum" idx="12"/>
-          </p:nvPr>
-        </p:nvSpPr>
-        <p:spPr>
-          <a:xfrm>
-            <a:off x="8472458" y="4663217"/>
-            <a:ext cx="548700" cy="393600"/>
-          </a:xfrm>
-          <a:prstGeom prst="rect">
-            <a:avLst/>
-          </a:prstGeom>
-        </p:spPr>
-        <p:txBody>
-          <a:bodyPr spcFirstLastPara="1" wrap="square" lIns="91425" tIns="91425" rIns="91425" bIns="91425" anchor="ctr" anchorCtr="0">
-            <a:noAutofit/>
-          </a:bodyPr>
-          <a:lstStyle/>
-          <a:p>
-            <a:pPr marL="0" lvl="0" indent="0" algn="r" rtl="0">
-              <a:spcBef>
-                <a:spcPts val="0"/>
-              </a:spcBef>
-              <a:spcAft>
-                <a:spcPts val="0"/>
-              </a:spcAft>
-              <a:buNone/>
-            </a:pPr>
-            <a:fld id="{00000000-1234-1234-1234-123412341234}" type="slidenum">
-              <a:rPr lang="en"/>
-              <a:t>2</a:t>
-            </a:fld>
-            <a:endParaRPr/>
-          </a:p>
-        </p:txBody>
-      </p:sp>
-      <p:sp>
-        <p:nvSpPr>
-          <p:cNvPr id="2" name="TextBox 1">
-            <a:extLst>
-              <a:ext uri="{FF2B5EF4-FFF2-40B4-BE49-F238E27FC236}">
-                <a16:creationId xmlns:a16="http://schemas.microsoft.com/office/drawing/2014/main" id="{DCC33EBB-1C9D-B9A9-88E6-F3466077417F}"/>
-              </a:ext>
-            </a:extLst>
-          </p:cNvPr>
-          <p:cNvSpPr txBox="1"/>
-          <p:nvPr/>
-        </p:nvSpPr>
-        <p:spPr>
-          <a:xfrm>
-            <a:off x="-5842" y="1277369"/>
-            <a:ext cx="9144000" cy="307777"/>
-          </a:xfrm>
-          <a:prstGeom prst="rect">
-            <a:avLst/>
-          </a:prstGeom>
-          <a:solidFill>
-            <a:srgbClr val="FFC000"/>
-          </a:solidFill>
-        </p:spPr>
-        <p:txBody>
-          <a:bodyPr wrap="square" rtlCol="0">
-            <a:spAutoFit/>
-          </a:bodyPr>
-          <a:lstStyle/>
-          <a:p>
-            <a:pPr algn="ctr"/>
-            <a:r>
-              <a:rPr lang="en-US" b="1" dirty="0"/>
-              <a:t>Midterm Exam 1 - Written</a:t>
-            </a:r>
-          </a:p>
-        </p:txBody>
-      </p:sp>
-      <p:sp>
-        <p:nvSpPr>
-          <p:cNvPr id="3" name="TextBox 2">
-            <a:extLst>
-              <a:ext uri="{FF2B5EF4-FFF2-40B4-BE49-F238E27FC236}">
-                <a16:creationId xmlns:a16="http://schemas.microsoft.com/office/drawing/2014/main" id="{25A19346-2F9F-0DB9-0B08-CF872EB1D563}"/>
-              </a:ext>
-            </a:extLst>
-          </p:cNvPr>
-          <p:cNvSpPr txBox="1"/>
-          <p:nvPr/>
-        </p:nvSpPr>
-        <p:spPr>
-          <a:xfrm>
-            <a:off x="0" y="3313985"/>
-            <a:ext cx="9144000" cy="307777"/>
-          </a:xfrm>
-          <a:prstGeom prst="rect">
-            <a:avLst/>
-          </a:prstGeom>
-          <a:solidFill>
-            <a:srgbClr val="FFC000"/>
-          </a:solidFill>
-        </p:spPr>
-        <p:txBody>
-          <a:bodyPr wrap="square" rtlCol="0">
-            <a:spAutoFit/>
-          </a:bodyPr>
-          <a:lstStyle/>
-          <a:p>
-            <a:r>
-              <a:rPr lang="en-US" dirty="0"/>
-              <a:t>Practicum</a:t>
-            </a:r>
-          </a:p>
-        </p:txBody>
-      </p:sp>
-      <p:sp>
-        <p:nvSpPr>
-          <p:cNvPr id="4" name="Google Shape;325;p47">
-            <a:extLst>
-              <a:ext uri="{FF2B5EF4-FFF2-40B4-BE49-F238E27FC236}">
-                <a16:creationId xmlns:a16="http://schemas.microsoft.com/office/drawing/2014/main" id="{11D0E6FB-E344-369B-CE83-B3CF5834F823}"/>
-              </a:ext>
-            </a:extLst>
-          </p:cNvPr>
-          <p:cNvSpPr txBox="1">
-            <a:spLocks/>
-          </p:cNvSpPr>
-          <p:nvPr/>
-        </p:nvSpPr>
-        <p:spPr>
-          <a:xfrm>
-            <a:off x="122842" y="3621762"/>
-            <a:ext cx="8478300" cy="1435054"/>
-          </a:xfrm>
-          <a:prstGeom prst="rect">
-            <a:avLst/>
-          </a:prstGeom>
-          <a:noFill/>
-          <a:ln>
-            <a:noFill/>
-          </a:ln>
-        </p:spPr>
-        <p:txBody>
-          <a:bodyPr spcFirstLastPara="1" wrap="square" lIns="91425" tIns="91425" rIns="91425" bIns="91425" anchor="ctr" anchorCtr="0">
-            <a:noAutofit/>
-          </a:bodyPr>
-          <a:lstStyle>
-            <a:defPPr marR="0" lvl="0" algn="l" rtl="0">
-              <a:lnSpc>
-                <a:spcPct val="100000"/>
-              </a:lnSpc>
-              <a:spcBef>
-                <a:spcPts val="0"/>
-              </a:spcBef>
-              <a:spcAft>
-                <a:spcPts val="0"/>
-              </a:spcAft>
-            </a:defPPr>
-            <a:lvl1pPr marL="457200" marR="0" lvl="0" indent="-311150" algn="l" rtl="0">
-              <a:lnSpc>
-                <a:spcPct val="115000"/>
-              </a:lnSpc>
-              <a:spcBef>
-                <a:spcPts val="0"/>
-              </a:spcBef>
-              <a:spcAft>
-                <a:spcPts val="0"/>
-              </a:spcAft>
-              <a:buClr>
-                <a:schemeClr val="dk2"/>
-              </a:buClr>
-              <a:buSzPts val="1300"/>
-              <a:buFont typeface="Roboto"/>
-              <a:buChar char="●"/>
-              <a:defRPr sz="1300" b="0" i="0" u="none" strike="noStrike" cap="none">
-                <a:solidFill>
-                  <a:schemeClr val="dk2"/>
-                </a:solidFill>
-                <a:latin typeface="Roboto"/>
-                <a:ea typeface="Roboto"/>
-                <a:cs typeface="Roboto"/>
-                <a:sym typeface="Roboto"/>
-              </a:defRPr>
-            </a:lvl1pPr>
-            <a:lvl2pPr marL="914400" marR="0" lvl="1" indent="-298450" algn="l" rtl="0">
-              <a:lnSpc>
-                <a:spcPct val="115000"/>
-              </a:lnSpc>
-              <a:spcBef>
-                <a:spcPts val="1600"/>
-              </a:spcBef>
-              <a:spcAft>
-                <a:spcPts val="0"/>
-              </a:spcAft>
-              <a:buClr>
-                <a:schemeClr val="dk2"/>
-              </a:buClr>
-              <a:buSzPts val="1100"/>
-              <a:buFont typeface="Roboto"/>
-              <a:buChar char="○"/>
-              <a:defRPr sz="1100" b="0" i="0" u="none" strike="noStrike" cap="none">
-                <a:solidFill>
-                  <a:schemeClr val="dk2"/>
-                </a:solidFill>
-                <a:latin typeface="Roboto"/>
-                <a:ea typeface="Roboto"/>
-                <a:cs typeface="Roboto"/>
-                <a:sym typeface="Roboto"/>
-              </a:defRPr>
-            </a:lvl2pPr>
-            <a:lvl3pPr marL="1371600" marR="0" lvl="2" indent="-298450" algn="l" rtl="0">
-              <a:lnSpc>
-                <a:spcPct val="115000"/>
-              </a:lnSpc>
-              <a:spcBef>
-                <a:spcPts val="1600"/>
-              </a:spcBef>
-              <a:spcAft>
-                <a:spcPts val="0"/>
-              </a:spcAft>
-              <a:buClr>
-                <a:schemeClr val="dk2"/>
-              </a:buClr>
-              <a:buSzPts val="1100"/>
-              <a:buFont typeface="Roboto"/>
-              <a:buChar char="■"/>
-              <a:defRPr sz="1100" b="0" i="0" u="none" strike="noStrike" cap="none">
-                <a:solidFill>
-                  <a:schemeClr val="dk2"/>
-                </a:solidFill>
-                <a:latin typeface="Roboto"/>
-                <a:ea typeface="Roboto"/>
-                <a:cs typeface="Roboto"/>
-                <a:sym typeface="Roboto"/>
-              </a:defRPr>
-            </a:lvl3pPr>
-            <a:lvl4pPr marL="1828800" marR="0" lvl="3" indent="-298450" algn="l" rtl="0">
-              <a:lnSpc>
-                <a:spcPct val="115000"/>
-              </a:lnSpc>
-              <a:spcBef>
-                <a:spcPts val="1600"/>
-              </a:spcBef>
-              <a:spcAft>
-                <a:spcPts val="0"/>
-              </a:spcAft>
-              <a:buClr>
-                <a:schemeClr val="dk2"/>
-              </a:buClr>
-              <a:buSzPts val="1100"/>
-              <a:buFont typeface="Roboto"/>
-              <a:buChar char="●"/>
-              <a:defRPr sz="1100" b="0" i="0" u="none" strike="noStrike" cap="none">
-                <a:solidFill>
-                  <a:schemeClr val="dk2"/>
-                </a:solidFill>
-                <a:latin typeface="Roboto"/>
-                <a:ea typeface="Roboto"/>
-                <a:cs typeface="Roboto"/>
-                <a:sym typeface="Roboto"/>
-              </a:defRPr>
-            </a:lvl4pPr>
-            <a:lvl5pPr marL="2286000" marR="0" lvl="4" indent="-298450" algn="l" rtl="0">
-              <a:lnSpc>
-                <a:spcPct val="115000"/>
-              </a:lnSpc>
-              <a:spcBef>
-                <a:spcPts val="1600"/>
-              </a:spcBef>
-              <a:spcAft>
-                <a:spcPts val="0"/>
-              </a:spcAft>
-              <a:buClr>
-                <a:schemeClr val="dk2"/>
-              </a:buClr>
-              <a:buSzPts val="1100"/>
-              <a:buFont typeface="Roboto"/>
-              <a:buChar char="○"/>
-              <a:defRPr sz="1100" b="0" i="0" u="none" strike="noStrike" cap="none">
-                <a:solidFill>
-                  <a:schemeClr val="dk2"/>
-                </a:solidFill>
-                <a:latin typeface="Roboto"/>
-                <a:ea typeface="Roboto"/>
-                <a:cs typeface="Roboto"/>
-                <a:sym typeface="Roboto"/>
-              </a:defRPr>
-            </a:lvl5pPr>
-            <a:lvl6pPr marL="2743200" marR="0" lvl="5" indent="-298450" algn="l" rtl="0">
-              <a:lnSpc>
-                <a:spcPct val="115000"/>
-              </a:lnSpc>
-              <a:spcBef>
-                <a:spcPts val="1600"/>
-              </a:spcBef>
-              <a:spcAft>
-                <a:spcPts val="0"/>
-              </a:spcAft>
-              <a:buClr>
-                <a:schemeClr val="dk2"/>
-              </a:buClr>
-              <a:buSzPts val="1100"/>
-              <a:buFont typeface="Roboto"/>
-              <a:buChar char="■"/>
-              <a:defRPr sz="1100" b="0" i="0" u="none" strike="noStrike" cap="none">
-                <a:solidFill>
-                  <a:schemeClr val="dk2"/>
-                </a:solidFill>
-                <a:latin typeface="Roboto"/>
-                <a:ea typeface="Roboto"/>
-                <a:cs typeface="Roboto"/>
-                <a:sym typeface="Roboto"/>
-              </a:defRPr>
-            </a:lvl6pPr>
-            <a:lvl7pPr marL="3200400" marR="0" lvl="6" indent="-298450" algn="l" rtl="0">
-              <a:lnSpc>
-                <a:spcPct val="115000"/>
-              </a:lnSpc>
-              <a:spcBef>
-                <a:spcPts val="1600"/>
-              </a:spcBef>
-              <a:spcAft>
-                <a:spcPts val="0"/>
-              </a:spcAft>
-              <a:buClr>
-                <a:schemeClr val="dk2"/>
-              </a:buClr>
-              <a:buSzPts val="1100"/>
-              <a:buFont typeface="Roboto"/>
-              <a:buChar char="●"/>
-              <a:defRPr sz="1100" b="0" i="0" u="none" strike="noStrike" cap="none">
-                <a:solidFill>
-                  <a:schemeClr val="dk2"/>
-                </a:solidFill>
-                <a:latin typeface="Roboto"/>
-                <a:ea typeface="Roboto"/>
-                <a:cs typeface="Roboto"/>
-                <a:sym typeface="Roboto"/>
-              </a:defRPr>
-            </a:lvl7pPr>
-            <a:lvl8pPr marL="3657600" marR="0" lvl="7" indent="-298450" algn="l" rtl="0">
-              <a:lnSpc>
-                <a:spcPct val="115000"/>
-              </a:lnSpc>
-              <a:spcBef>
-                <a:spcPts val="1600"/>
-              </a:spcBef>
-              <a:spcAft>
-                <a:spcPts val="0"/>
-              </a:spcAft>
-              <a:buClr>
-                <a:schemeClr val="dk2"/>
-              </a:buClr>
-              <a:buSzPts val="1100"/>
-              <a:buFont typeface="Roboto"/>
-              <a:buChar char="○"/>
-              <a:defRPr sz="1100" b="0" i="0" u="none" strike="noStrike" cap="none">
-                <a:solidFill>
-                  <a:schemeClr val="dk2"/>
-                </a:solidFill>
-                <a:latin typeface="Roboto"/>
-                <a:ea typeface="Roboto"/>
-                <a:cs typeface="Roboto"/>
-                <a:sym typeface="Roboto"/>
-              </a:defRPr>
-            </a:lvl8pPr>
-            <a:lvl9pPr marL="4114800" marR="0" lvl="8" indent="-298450" algn="l" rtl="0">
-              <a:lnSpc>
-                <a:spcPct val="115000"/>
-              </a:lnSpc>
-              <a:spcBef>
-                <a:spcPts val="1600"/>
-              </a:spcBef>
-              <a:spcAft>
-                <a:spcPts val="1600"/>
-              </a:spcAft>
-              <a:buClr>
-                <a:schemeClr val="dk2"/>
-              </a:buClr>
-              <a:buSzPts val="1100"/>
-              <a:buFont typeface="Roboto"/>
-              <a:buChar char="■"/>
-              <a:defRPr sz="1100" b="0" i="0" u="none" strike="noStrike" cap="none">
-                <a:solidFill>
-                  <a:schemeClr val="dk2"/>
-                </a:solidFill>
-                <a:latin typeface="Roboto"/>
-                <a:ea typeface="Roboto"/>
-                <a:cs typeface="Roboto"/>
-                <a:sym typeface="Roboto"/>
-              </a:defRPr>
-            </a:lvl9pPr>
-          </a:lstStyle>
-          <a:p>
-            <a:pPr marL="342900" indent="-342900">
-              <a:spcAft>
-                <a:spcPts val="1600"/>
-              </a:spcAft>
-            </a:pPr>
-            <a:r>
-              <a:rPr lang="en-US" sz="1600" dirty="0"/>
-              <a:t>Accept assignment Mid Exam 1 under Instructor -&gt; Alam -&gt; Exam</a:t>
-            </a:r>
-            <a:endParaRPr lang="en-US" sz="1600" dirty="0">
-              <a:solidFill>
-                <a:schemeClr val="tx1"/>
-              </a:solidFill>
-            </a:endParaRPr>
-          </a:p>
-          <a:p>
-            <a:pPr marL="342900" indent="-342900">
-              <a:spcAft>
-                <a:spcPts val="1600"/>
-              </a:spcAft>
-            </a:pPr>
-            <a:r>
-              <a:rPr lang="en-US" sz="1600" dirty="0">
-                <a:solidFill>
-                  <a:schemeClr val="tx1"/>
-                </a:solidFill>
-              </a:rPr>
-              <a:t>Clone the repository for </a:t>
-            </a:r>
-            <a:r>
-              <a:rPr lang="en-US" sz="1600" dirty="0"/>
-              <a:t>Mid Exam 1 </a:t>
-            </a:r>
-            <a:endParaRPr lang="en-US" sz="1600" dirty="0">
-              <a:solidFill>
-                <a:schemeClr val="tx1"/>
-              </a:solidFill>
-            </a:endParaRPr>
-          </a:p>
-        </p:txBody>
-      </p:sp>
-    </p:spTree>
-    <p:extLst>
-      <p:ext uri="{BB962C8B-B14F-4D97-AF65-F5344CB8AC3E}">
-        <p14:creationId xmlns:p14="http://schemas.microsoft.com/office/powerpoint/2010/main" val="943055912"/>
-      </p:ext>
-    </p:extLst>
-  </p:cSld>
-  <p:clrMapOvr>
-    <a:masterClrMapping/>
-  </p:clrMapOvr>
-</p:sld>
-</file>
-
-<file path=ppt/slides/slide3.xml><?xml version="1.0" encoding="utf-8"?>
-<p:sld xmlns:a="http://schemas.openxmlformats.org/drawingml/2006/main" xmlns:r="http://schemas.openxmlformats.org/officeDocument/2006/relationships" xmlns:p="http://schemas.openxmlformats.org/presentationml/2006/main" show="0">
-  <p:cSld>
-    <p:spTree>
-      <p:nvGrpSpPr>
-        <p:cNvPr id="1" name="Shape 323"/>
-        <p:cNvGrpSpPr/>
-        <p:nvPr/>
-      </p:nvGrpSpPr>
-      <p:grpSpPr>
-        <a:xfrm>
-          <a:off x="0" y="0"/>
-          <a:ext cx="0" cy="0"/>
-          <a:chOff x="0" y="0"/>
-          <a:chExt cx="0" cy="0"/>
-        </a:xfrm>
-      </p:grpSpPr>
-      <p:sp>
-        <p:nvSpPr>
-          <p:cNvPr id="324" name="Google Shape;324;p47"/>
-          <p:cNvSpPr txBox="1">
-            <a:spLocks noGrp="1"/>
-          </p:cNvSpPr>
-          <p:nvPr>
-            <p:ph type="title"/>
-          </p:nvPr>
-        </p:nvSpPr>
-        <p:spPr>
-          <a:xfrm>
-            <a:off x="305858" y="273819"/>
-            <a:ext cx="8520600" cy="623700"/>
-          </a:xfrm>
-          <a:prstGeom prst="rect">
-            <a:avLst/>
-          </a:prstGeom>
-        </p:spPr>
-        <p:txBody>
-          <a:bodyPr spcFirstLastPara="1" wrap="square" lIns="91425" tIns="91425" rIns="91425" bIns="91425" anchor="t" anchorCtr="0">
-            <a:noAutofit/>
-          </a:bodyPr>
-          <a:lstStyle/>
-          <a:p>
-            <a:pPr marL="0" lvl="0" indent="0" algn="ctr" rtl="0">
-              <a:spcBef>
-                <a:spcPts val="0"/>
-              </a:spcBef>
-              <a:spcAft>
-                <a:spcPts val="0"/>
-              </a:spcAft>
-              <a:buNone/>
-            </a:pPr>
-            <a:r>
-              <a:rPr lang="en-US" dirty="0"/>
-              <a:t>GCIS – Software Development and Problem Solving</a:t>
-            </a:r>
-            <a:endParaRPr dirty="0"/>
-          </a:p>
-        </p:txBody>
-      </p:sp>
-      <p:sp>
-        <p:nvSpPr>
-          <p:cNvPr id="325" name="Google Shape;325;p47"/>
-          <p:cNvSpPr txBox="1">
-            <a:spLocks noGrp="1"/>
-          </p:cNvSpPr>
-          <p:nvPr>
-            <p:ph type="body" idx="1"/>
-          </p:nvPr>
-        </p:nvSpPr>
-        <p:spPr>
-          <a:xfrm>
-            <a:off x="-5842" y="1721147"/>
-            <a:ext cx="9149842" cy="1226403"/>
-          </a:xfrm>
-          <a:prstGeom prst="rect">
-            <a:avLst/>
-          </a:prstGeom>
-        </p:spPr>
-        <p:txBody>
-          <a:bodyPr spcFirstLastPara="1" wrap="square" lIns="91425" tIns="91425" rIns="91425" bIns="91425" anchor="ctr" anchorCtr="0">
-            <a:noAutofit/>
-          </a:bodyPr>
-          <a:lstStyle/>
-          <a:p>
-            <a:pPr marL="146050" indent="0" algn="ctr">
-              <a:buNone/>
-            </a:pPr>
-            <a:r>
-              <a:rPr lang="en-US" sz="2400" dirty="0"/>
-              <a:t>Take </a:t>
-            </a:r>
-            <a:r>
-              <a:rPr lang="pl-PL" sz="2400" dirty="0"/>
-              <a:t>Quiz </a:t>
-            </a:r>
-            <a:r>
-              <a:rPr lang="en-US" sz="2400" dirty="0"/>
-              <a:t>4</a:t>
-            </a:r>
-            <a:r>
-              <a:rPr lang="pl-PL" sz="2400"/>
-              <a:t>.</a:t>
-            </a:r>
-            <a:r>
-              <a:rPr lang="en-US" sz="2400" dirty="0"/>
-              <a:t>1</a:t>
-            </a:r>
-            <a:r>
-              <a:rPr lang="pl-PL" sz="2400" dirty="0"/>
-              <a:t>: </a:t>
-            </a:r>
-            <a:r>
-              <a:rPr lang="en-US" sz="2400" dirty="0"/>
-              <a:t>Inner Class &amp; </a:t>
-            </a:r>
-            <a:r>
-              <a:rPr lang="en-US" sz="2400" dirty="0" err="1"/>
-              <a:t>Annonymous</a:t>
-            </a:r>
-            <a:r>
-              <a:rPr lang="en-US" sz="2400" dirty="0"/>
-              <a:t> class</a:t>
-            </a:r>
-          </a:p>
-          <a:p>
-            <a:pPr algn="ctr"/>
-            <a:r>
-              <a:rPr lang="en-US" sz="2400" dirty="0"/>
-              <a:t>Password - </a:t>
-            </a:r>
-            <a:r>
-              <a:rPr lang="en-US" sz="2400" dirty="0" err="1"/>
-              <a:t>inner_strength_class</a:t>
-            </a:r>
-            <a:endParaRPr sz="2400" dirty="0"/>
-          </a:p>
-        </p:txBody>
-      </p:sp>
-      <p:sp>
-        <p:nvSpPr>
-          <p:cNvPr id="326" name="Google Shape;326;p47"/>
-          <p:cNvSpPr txBox="1">
-            <a:spLocks noGrp="1"/>
-          </p:cNvSpPr>
-          <p:nvPr>
-            <p:ph type="sldNum" idx="12"/>
-          </p:nvPr>
-        </p:nvSpPr>
-        <p:spPr>
-          <a:xfrm>
-            <a:off x="8472458" y="4663217"/>
-            <a:ext cx="548700" cy="393600"/>
-          </a:xfrm>
-          <a:prstGeom prst="rect">
-            <a:avLst/>
-          </a:prstGeom>
-        </p:spPr>
-        <p:txBody>
-          <a:bodyPr spcFirstLastPara="1" wrap="square" lIns="91425" tIns="91425" rIns="91425" bIns="91425" anchor="ctr" anchorCtr="0">
-            <a:noAutofit/>
-          </a:bodyPr>
-          <a:lstStyle/>
-          <a:p>
-            <a:pPr marL="0" lvl="0" indent="0" algn="r" rtl="0">
-              <a:spcBef>
-                <a:spcPts val="0"/>
-              </a:spcBef>
-              <a:spcAft>
-                <a:spcPts val="0"/>
-              </a:spcAft>
-              <a:buNone/>
-            </a:pPr>
-            <a:fld id="{00000000-1234-1234-1234-123412341234}" type="slidenum">
-              <a:rPr lang="en"/>
-              <a:t>3</a:t>
-            </a:fld>
-            <a:endParaRPr/>
-          </a:p>
-        </p:txBody>
-      </p:sp>
-      <p:sp>
-        <p:nvSpPr>
-          <p:cNvPr id="2" name="TextBox 1">
-            <a:extLst>
-              <a:ext uri="{FF2B5EF4-FFF2-40B4-BE49-F238E27FC236}">
-                <a16:creationId xmlns:a16="http://schemas.microsoft.com/office/drawing/2014/main" id="{DCC33EBB-1C9D-B9A9-88E6-F3466077417F}"/>
-              </a:ext>
-            </a:extLst>
-          </p:cNvPr>
-          <p:cNvSpPr txBox="1"/>
-          <p:nvPr/>
-        </p:nvSpPr>
-        <p:spPr>
-          <a:xfrm>
-            <a:off x="0" y="1277369"/>
-            <a:ext cx="9144000" cy="307777"/>
-          </a:xfrm>
-          <a:prstGeom prst="rect">
-            <a:avLst/>
-          </a:prstGeom>
-          <a:solidFill>
-            <a:srgbClr val="FFC000"/>
-          </a:solidFill>
-        </p:spPr>
-        <p:txBody>
-          <a:bodyPr wrap="square" rtlCol="0">
-            <a:spAutoFit/>
-          </a:bodyPr>
-          <a:lstStyle/>
-          <a:p>
-            <a:r>
-              <a:rPr lang="en-US" dirty="0"/>
-              <a:t>Quiz</a:t>
-            </a:r>
-          </a:p>
-        </p:txBody>
-      </p:sp>
-      <p:sp>
-        <p:nvSpPr>
-          <p:cNvPr id="3" name="TextBox 2">
-            <a:extLst>
-              <a:ext uri="{FF2B5EF4-FFF2-40B4-BE49-F238E27FC236}">
-                <a16:creationId xmlns:a16="http://schemas.microsoft.com/office/drawing/2014/main" id="{64C19922-6A1B-1404-5104-DC43E4C67861}"/>
-              </a:ext>
-            </a:extLst>
-          </p:cNvPr>
-          <p:cNvSpPr txBox="1"/>
-          <p:nvPr/>
-        </p:nvSpPr>
-        <p:spPr>
-          <a:xfrm>
-            <a:off x="-5842" y="3031063"/>
-            <a:ext cx="9144000" cy="307777"/>
-          </a:xfrm>
-          <a:prstGeom prst="rect">
-            <a:avLst/>
-          </a:prstGeom>
-          <a:solidFill>
-            <a:srgbClr val="FFC000"/>
-          </a:solidFill>
-        </p:spPr>
-        <p:txBody>
-          <a:bodyPr wrap="square" rtlCol="0">
-            <a:spAutoFit/>
-          </a:bodyPr>
-          <a:lstStyle/>
-          <a:p>
-            <a:r>
-              <a:rPr lang="en-US" dirty="0"/>
-              <a:t>Next </a:t>
-            </a:r>
-            <a:r>
-              <a:rPr lang="en-US" dirty="0">
-                <a:sym typeface="Wingdings" panose="05000000000000000000" pitchFamily="2" charset="2"/>
-              </a:rPr>
-              <a:t> </a:t>
-            </a:r>
-            <a:endParaRPr lang="en-US" dirty="0"/>
-          </a:p>
-        </p:txBody>
-      </p:sp>
-      <p:sp>
-        <p:nvSpPr>
-          <p:cNvPr id="4" name="Google Shape;325;p47">
-            <a:extLst>
-              <a:ext uri="{FF2B5EF4-FFF2-40B4-BE49-F238E27FC236}">
-                <a16:creationId xmlns:a16="http://schemas.microsoft.com/office/drawing/2014/main" id="{E455EA58-F56D-AF58-E97D-95A77E0AB6CF}"/>
-              </a:ext>
-            </a:extLst>
-          </p:cNvPr>
-          <p:cNvSpPr txBox="1">
-            <a:spLocks/>
-          </p:cNvSpPr>
-          <p:nvPr/>
-        </p:nvSpPr>
-        <p:spPr>
-          <a:xfrm>
-            <a:off x="-5842" y="3422352"/>
-            <a:ext cx="9149842" cy="1721148"/>
-          </a:xfrm>
-          <a:prstGeom prst="rect">
-            <a:avLst/>
-          </a:prstGeom>
-          <a:noFill/>
-          <a:ln>
-            <a:noFill/>
-          </a:ln>
-        </p:spPr>
-        <p:txBody>
-          <a:bodyPr spcFirstLastPara="1" wrap="square" lIns="91425" tIns="91425" rIns="91425" bIns="91425" anchor="ctr" anchorCtr="0">
-            <a:noAutofit/>
-          </a:bodyPr>
-          <a:lstStyle>
-            <a:defPPr marR="0" lvl="0" algn="l" rtl="0">
-              <a:lnSpc>
-                <a:spcPct val="100000"/>
-              </a:lnSpc>
-              <a:spcBef>
-                <a:spcPts val="0"/>
-              </a:spcBef>
-              <a:spcAft>
-                <a:spcPts val="0"/>
-              </a:spcAft>
-            </a:defPPr>
-            <a:lvl1pPr marL="457200" marR="0" lvl="0" indent="-311150" algn="l" rtl="0">
-              <a:lnSpc>
-                <a:spcPct val="115000"/>
-              </a:lnSpc>
-              <a:spcBef>
-                <a:spcPts val="0"/>
-              </a:spcBef>
-              <a:spcAft>
-                <a:spcPts val="0"/>
-              </a:spcAft>
-              <a:buClr>
-                <a:schemeClr val="dk2"/>
-              </a:buClr>
-              <a:buSzPts val="1300"/>
-              <a:buFont typeface="Roboto"/>
-              <a:buChar char="●"/>
-              <a:defRPr sz="1300" b="0" i="0" u="none" strike="noStrike" cap="none">
-                <a:solidFill>
-                  <a:schemeClr val="dk2"/>
-                </a:solidFill>
-                <a:latin typeface="Roboto"/>
-                <a:ea typeface="Roboto"/>
-                <a:cs typeface="Roboto"/>
-                <a:sym typeface="Roboto"/>
-              </a:defRPr>
-            </a:lvl1pPr>
-            <a:lvl2pPr marL="914400" marR="0" lvl="1" indent="-298450" algn="l" rtl="0">
-              <a:lnSpc>
-                <a:spcPct val="115000"/>
-              </a:lnSpc>
-              <a:spcBef>
-                <a:spcPts val="1600"/>
-              </a:spcBef>
-              <a:spcAft>
-                <a:spcPts val="0"/>
-              </a:spcAft>
-              <a:buClr>
-                <a:schemeClr val="dk2"/>
-              </a:buClr>
-              <a:buSzPts val="1100"/>
-              <a:buFont typeface="Roboto"/>
-              <a:buChar char="○"/>
-              <a:defRPr sz="1100" b="0" i="0" u="none" strike="noStrike" cap="none">
-                <a:solidFill>
-                  <a:schemeClr val="dk2"/>
-                </a:solidFill>
-                <a:latin typeface="Roboto"/>
-                <a:ea typeface="Roboto"/>
-                <a:cs typeface="Roboto"/>
-                <a:sym typeface="Roboto"/>
-              </a:defRPr>
-            </a:lvl2pPr>
-            <a:lvl3pPr marL="1371600" marR="0" lvl="2" indent="-298450" algn="l" rtl="0">
-              <a:lnSpc>
-                <a:spcPct val="115000"/>
-              </a:lnSpc>
-              <a:spcBef>
-                <a:spcPts val="1600"/>
-              </a:spcBef>
-              <a:spcAft>
-                <a:spcPts val="0"/>
-              </a:spcAft>
-              <a:buClr>
-                <a:schemeClr val="dk2"/>
-              </a:buClr>
-              <a:buSzPts val="1100"/>
-              <a:buFont typeface="Roboto"/>
-              <a:buChar char="■"/>
-              <a:defRPr sz="1100" b="0" i="0" u="none" strike="noStrike" cap="none">
-                <a:solidFill>
-                  <a:schemeClr val="dk2"/>
-                </a:solidFill>
-                <a:latin typeface="Roboto"/>
-                <a:ea typeface="Roboto"/>
-                <a:cs typeface="Roboto"/>
-                <a:sym typeface="Roboto"/>
-              </a:defRPr>
-            </a:lvl3pPr>
-            <a:lvl4pPr marL="1828800" marR="0" lvl="3" indent="-298450" algn="l" rtl="0">
-              <a:lnSpc>
-                <a:spcPct val="115000"/>
-              </a:lnSpc>
-              <a:spcBef>
-                <a:spcPts val="1600"/>
-              </a:spcBef>
-              <a:spcAft>
-                <a:spcPts val="0"/>
-              </a:spcAft>
-              <a:buClr>
-                <a:schemeClr val="dk2"/>
-              </a:buClr>
-              <a:buSzPts val="1100"/>
-              <a:buFont typeface="Roboto"/>
-              <a:buChar char="●"/>
-              <a:defRPr sz="1100" b="0" i="0" u="none" strike="noStrike" cap="none">
-                <a:solidFill>
-                  <a:schemeClr val="dk2"/>
-                </a:solidFill>
-                <a:latin typeface="Roboto"/>
-                <a:ea typeface="Roboto"/>
-                <a:cs typeface="Roboto"/>
-                <a:sym typeface="Roboto"/>
-              </a:defRPr>
-            </a:lvl4pPr>
-            <a:lvl5pPr marL="2286000" marR="0" lvl="4" indent="-298450" algn="l" rtl="0">
-              <a:lnSpc>
-                <a:spcPct val="115000"/>
-              </a:lnSpc>
-              <a:spcBef>
-                <a:spcPts val="1600"/>
-              </a:spcBef>
-              <a:spcAft>
-                <a:spcPts val="0"/>
-              </a:spcAft>
-              <a:buClr>
-                <a:schemeClr val="dk2"/>
-              </a:buClr>
-              <a:buSzPts val="1100"/>
-              <a:buFont typeface="Roboto"/>
-              <a:buChar char="○"/>
-              <a:defRPr sz="1100" b="0" i="0" u="none" strike="noStrike" cap="none">
-                <a:solidFill>
-                  <a:schemeClr val="dk2"/>
-                </a:solidFill>
-                <a:latin typeface="Roboto"/>
-                <a:ea typeface="Roboto"/>
-                <a:cs typeface="Roboto"/>
-                <a:sym typeface="Roboto"/>
-              </a:defRPr>
-            </a:lvl5pPr>
-            <a:lvl6pPr marL="2743200" marR="0" lvl="5" indent="-298450" algn="l" rtl="0">
-              <a:lnSpc>
-                <a:spcPct val="115000"/>
-              </a:lnSpc>
-              <a:spcBef>
-                <a:spcPts val="1600"/>
-              </a:spcBef>
-              <a:spcAft>
-                <a:spcPts val="0"/>
-              </a:spcAft>
-              <a:buClr>
-                <a:schemeClr val="dk2"/>
-              </a:buClr>
-              <a:buSzPts val="1100"/>
-              <a:buFont typeface="Roboto"/>
-              <a:buChar char="■"/>
-              <a:defRPr sz="1100" b="0" i="0" u="none" strike="noStrike" cap="none">
-                <a:solidFill>
-                  <a:schemeClr val="dk2"/>
-                </a:solidFill>
-                <a:latin typeface="Roboto"/>
-                <a:ea typeface="Roboto"/>
-                <a:cs typeface="Roboto"/>
-                <a:sym typeface="Roboto"/>
-              </a:defRPr>
-            </a:lvl6pPr>
-            <a:lvl7pPr marL="3200400" marR="0" lvl="6" indent="-298450" algn="l" rtl="0">
-              <a:lnSpc>
-                <a:spcPct val="115000"/>
-              </a:lnSpc>
-              <a:spcBef>
-                <a:spcPts val="1600"/>
-              </a:spcBef>
-              <a:spcAft>
-                <a:spcPts val="0"/>
-              </a:spcAft>
-              <a:buClr>
-                <a:schemeClr val="dk2"/>
-              </a:buClr>
-              <a:buSzPts val="1100"/>
-              <a:buFont typeface="Roboto"/>
-              <a:buChar char="●"/>
-              <a:defRPr sz="1100" b="0" i="0" u="none" strike="noStrike" cap="none">
-                <a:solidFill>
-                  <a:schemeClr val="dk2"/>
-                </a:solidFill>
-                <a:latin typeface="Roboto"/>
-                <a:ea typeface="Roboto"/>
-                <a:cs typeface="Roboto"/>
-                <a:sym typeface="Roboto"/>
-              </a:defRPr>
-            </a:lvl7pPr>
-            <a:lvl8pPr marL="3657600" marR="0" lvl="7" indent="-298450" algn="l" rtl="0">
-              <a:lnSpc>
-                <a:spcPct val="115000"/>
-              </a:lnSpc>
-              <a:spcBef>
-                <a:spcPts val="1600"/>
-              </a:spcBef>
-              <a:spcAft>
-                <a:spcPts val="0"/>
-              </a:spcAft>
-              <a:buClr>
-                <a:schemeClr val="dk2"/>
-              </a:buClr>
-              <a:buSzPts val="1100"/>
-              <a:buFont typeface="Roboto"/>
-              <a:buChar char="○"/>
-              <a:defRPr sz="1100" b="0" i="0" u="none" strike="noStrike" cap="none">
-                <a:solidFill>
-                  <a:schemeClr val="dk2"/>
-                </a:solidFill>
-                <a:latin typeface="Roboto"/>
-                <a:ea typeface="Roboto"/>
-                <a:cs typeface="Roboto"/>
-                <a:sym typeface="Roboto"/>
-              </a:defRPr>
-            </a:lvl8pPr>
-            <a:lvl9pPr marL="4114800" marR="0" lvl="8" indent="-298450" algn="l" rtl="0">
-              <a:lnSpc>
-                <a:spcPct val="115000"/>
-              </a:lnSpc>
-              <a:spcBef>
-                <a:spcPts val="1600"/>
-              </a:spcBef>
-              <a:spcAft>
-                <a:spcPts val="1600"/>
-              </a:spcAft>
-              <a:buClr>
-                <a:schemeClr val="dk2"/>
-              </a:buClr>
-              <a:buSzPts val="1100"/>
-              <a:buFont typeface="Roboto"/>
-              <a:buChar char="■"/>
-              <a:defRPr sz="1100" b="0" i="0" u="none" strike="noStrike" cap="none">
-                <a:solidFill>
-                  <a:schemeClr val="dk2"/>
-                </a:solidFill>
-                <a:latin typeface="Roboto"/>
-                <a:ea typeface="Roboto"/>
-                <a:cs typeface="Roboto"/>
-                <a:sym typeface="Roboto"/>
-              </a:defRPr>
-            </a:lvl9pPr>
-          </a:lstStyle>
-          <a:p>
-            <a:pPr marL="0" indent="0">
-              <a:spcAft>
-                <a:spcPts val="1600"/>
-              </a:spcAft>
-              <a:buNone/>
-            </a:pPr>
-            <a:r>
-              <a:rPr lang="en-US" sz="2800" dirty="0"/>
-              <a:t>After completing the Quiz </a:t>
-            </a:r>
-          </a:p>
-          <a:p>
-            <a:pPr marL="342900" indent="-342900">
-              <a:spcAft>
-                <a:spcPts val="1600"/>
-              </a:spcAft>
-            </a:pPr>
-            <a:r>
-              <a:rPr lang="en-US" sz="2400" dirty="0"/>
-              <a:t>Clone/Pull Unit4 – git hub classroom repo for class activities</a:t>
-            </a:r>
-            <a:endParaRPr lang="en-US" sz="2400" dirty="0">
-              <a:solidFill>
-                <a:schemeClr val="tx1"/>
-              </a:solidFill>
-            </a:endParaRPr>
-          </a:p>
-        </p:txBody>
-      </p:sp>
-    </p:spTree>
   </p:cSld>
   <p:clrMapOvr>
     <a:masterClrMapping/>

--- a/Presentation/Announcement.pptx
+++ b/Presentation/Announcement.pptx
@@ -8,9 +8,9 @@
     <p:notesMasterId r:id="rId14"/>
   </p:notesMasterIdLst>
   <p:sldIdLst>
-    <p:sldId id="276" r:id="rId2"/>
-    <p:sldId id="278" r:id="rId3"/>
-    <p:sldId id="286" r:id="rId4"/>
+    <p:sldId id="286" r:id="rId2"/>
+    <p:sldId id="276" r:id="rId3"/>
+    <p:sldId id="278" r:id="rId4"/>
     <p:sldId id="281" r:id="rId5"/>
     <p:sldId id="287" r:id="rId6"/>
     <p:sldId id="285" r:id="rId7"/>
@@ -739,7 +739,13 @@
   <p:cSld>
     <p:spTree>
       <p:nvGrpSpPr>
-        <p:cNvPr id="1" name="Shape 320"/>
+        <p:cNvPr id="1" name="Shape 320">
+          <a:extLst>
+            <a:ext uri="{FF2B5EF4-FFF2-40B4-BE49-F238E27FC236}">
+              <a16:creationId xmlns:a16="http://schemas.microsoft.com/office/drawing/2014/main" id="{5E82D901-7A14-0382-4365-722182C687A8}"/>
+            </a:ext>
+          </a:extLst>
+        </p:cNvPr>
         <p:cNvGrpSpPr/>
         <p:nvPr/>
       </p:nvGrpSpPr>
@@ -753,7 +759,13 @@
       </p:grpSpPr>
       <p:sp>
         <p:nvSpPr>
-          <p:cNvPr id="321" name="Google Shape;321;g8f52c9b70a_3_0:notes"/>
+          <p:cNvPr id="321" name="Google Shape;321;g8f52c9b70a_3_0:notes">
+            <a:extLst>
+              <a:ext uri="{FF2B5EF4-FFF2-40B4-BE49-F238E27FC236}">
+                <a16:creationId xmlns:a16="http://schemas.microsoft.com/office/drawing/2014/main" id="{B8D16220-AF50-7601-71A9-4952749D32CB}"/>
+              </a:ext>
+            </a:extLst>
+          </p:cNvPr>
           <p:cNvSpPr>
             <a:spLocks noGrp="1" noRot="1" noChangeAspect="1"/>
           </p:cNvSpPr>
@@ -794,7 +806,13 @@
       </p:sp>
       <p:sp>
         <p:nvSpPr>
-          <p:cNvPr id="322" name="Google Shape;322;g8f52c9b70a_3_0:notes"/>
+          <p:cNvPr id="322" name="Google Shape;322;g8f52c9b70a_3_0:notes">
+            <a:extLst>
+              <a:ext uri="{FF2B5EF4-FFF2-40B4-BE49-F238E27FC236}">
+                <a16:creationId xmlns:a16="http://schemas.microsoft.com/office/drawing/2014/main" id="{AEA302D2-52D7-97D7-BF6C-781234E92D43}"/>
+              </a:ext>
+            </a:extLst>
+          </p:cNvPr>
           <p:cNvSpPr txBox="1">
             <a:spLocks noGrp="1"/>
           </p:cNvSpPr>
@@ -825,6 +843,11 @@
         </p:txBody>
       </p:sp>
     </p:spTree>
+    <p:extLst>
+      <p:ext uri="{BB962C8B-B14F-4D97-AF65-F5344CB8AC3E}">
+        <p14:creationId xmlns:p14="http://schemas.microsoft.com/office/powerpoint/2010/main" val="2483524941"/>
+      </p:ext>
+    </p:extLst>
   </p:cSld>
   <p:clrMapOvr>
     <a:masterClrMapping/>
@@ -1232,11 +1255,6 @@
         </p:txBody>
       </p:sp>
     </p:spTree>
-    <p:extLst>
-      <p:ext uri="{BB962C8B-B14F-4D97-AF65-F5344CB8AC3E}">
-        <p14:creationId xmlns:p14="http://schemas.microsoft.com/office/powerpoint/2010/main" val="4097390636"/>
-      </p:ext>
-    </p:extLst>
   </p:cSld>
   <p:clrMapOvr>
     <a:masterClrMapping/>
@@ -1249,13 +1267,7 @@
   <p:cSld>
     <p:spTree>
       <p:nvGrpSpPr>
-        <p:cNvPr id="1" name="Shape 320">
-          <a:extLst>
-            <a:ext uri="{FF2B5EF4-FFF2-40B4-BE49-F238E27FC236}">
-              <a16:creationId xmlns:a16="http://schemas.microsoft.com/office/drawing/2014/main" id="{5E82D901-7A14-0382-4365-722182C687A8}"/>
-            </a:ext>
-          </a:extLst>
-        </p:cNvPr>
+        <p:cNvPr id="1" name="Shape 320"/>
         <p:cNvGrpSpPr/>
         <p:nvPr/>
       </p:nvGrpSpPr>
@@ -1269,13 +1281,7 @@
       </p:grpSpPr>
       <p:sp>
         <p:nvSpPr>
-          <p:cNvPr id="321" name="Google Shape;321;g8f52c9b70a_3_0:notes">
-            <a:extLst>
-              <a:ext uri="{FF2B5EF4-FFF2-40B4-BE49-F238E27FC236}">
-                <a16:creationId xmlns:a16="http://schemas.microsoft.com/office/drawing/2014/main" id="{B8D16220-AF50-7601-71A9-4952749D32CB}"/>
-              </a:ext>
-            </a:extLst>
-          </p:cNvPr>
+          <p:cNvPr id="321" name="Google Shape;321;g8f52c9b70a_3_0:notes"/>
           <p:cNvSpPr>
             <a:spLocks noGrp="1" noRot="1" noChangeAspect="1"/>
           </p:cNvSpPr>
@@ -1316,13 +1322,7 @@
       </p:sp>
       <p:sp>
         <p:nvSpPr>
-          <p:cNvPr id="322" name="Google Shape;322;g8f52c9b70a_3_0:notes">
-            <a:extLst>
-              <a:ext uri="{FF2B5EF4-FFF2-40B4-BE49-F238E27FC236}">
-                <a16:creationId xmlns:a16="http://schemas.microsoft.com/office/drawing/2014/main" id="{AEA302D2-52D7-97D7-BF6C-781234E92D43}"/>
-              </a:ext>
-            </a:extLst>
-          </p:cNvPr>
+          <p:cNvPr id="322" name="Google Shape;322;g8f52c9b70a_3_0:notes"/>
           <p:cNvSpPr txBox="1">
             <a:spLocks noGrp="1"/>
           </p:cNvSpPr>
@@ -1355,7 +1355,7 @@
     </p:spTree>
     <p:extLst>
       <p:ext uri="{BB962C8B-B14F-4D97-AF65-F5344CB8AC3E}">
-        <p14:creationId xmlns:p14="http://schemas.microsoft.com/office/powerpoint/2010/main" val="2483524941"/>
+        <p14:creationId xmlns:p14="http://schemas.microsoft.com/office/powerpoint/2010/main" val="4097390636"/>
       </p:ext>
     </p:extLst>
   </p:cSld>
@@ -6529,6 +6529,1384 @@
   <p:cSld>
     <p:spTree>
       <p:nvGrpSpPr>
+        <p:cNvPr id="1" name="Shape 323">
+          <a:extLst>
+            <a:ext uri="{FF2B5EF4-FFF2-40B4-BE49-F238E27FC236}">
+              <a16:creationId xmlns:a16="http://schemas.microsoft.com/office/drawing/2014/main" id="{19512066-5980-8A8B-BE30-C4FB3AC72235}"/>
+            </a:ext>
+          </a:extLst>
+        </p:cNvPr>
+        <p:cNvGrpSpPr/>
+        <p:nvPr/>
+      </p:nvGrpSpPr>
+      <p:grpSpPr>
+        <a:xfrm>
+          <a:off x="0" y="0"/>
+          <a:ext cx="0" cy="0"/>
+          <a:chOff x="0" y="0"/>
+          <a:chExt cx="0" cy="0"/>
+        </a:xfrm>
+      </p:grpSpPr>
+      <p:sp>
+        <p:nvSpPr>
+          <p:cNvPr id="324" name="Google Shape;324;p47">
+            <a:extLst>
+              <a:ext uri="{FF2B5EF4-FFF2-40B4-BE49-F238E27FC236}">
+                <a16:creationId xmlns:a16="http://schemas.microsoft.com/office/drawing/2014/main" id="{CDF56279-13BE-3C44-BBEF-E7DC5D1E88D2}"/>
+              </a:ext>
+            </a:extLst>
+          </p:cNvPr>
+          <p:cNvSpPr txBox="1">
+            <a:spLocks noGrp="1"/>
+          </p:cNvSpPr>
+          <p:nvPr>
+            <p:ph type="title"/>
+          </p:nvPr>
+        </p:nvSpPr>
+        <p:spPr>
+          <a:xfrm>
+            <a:off x="300016" y="269197"/>
+            <a:ext cx="8520600" cy="623700"/>
+          </a:xfrm>
+          <a:prstGeom prst="rect">
+            <a:avLst/>
+          </a:prstGeom>
+        </p:spPr>
+        <p:txBody>
+          <a:bodyPr spcFirstLastPara="1" wrap="square" lIns="91425" tIns="91425" rIns="91425" bIns="91425" anchor="t" anchorCtr="0">
+            <a:noAutofit/>
+          </a:bodyPr>
+          <a:lstStyle/>
+          <a:p>
+            <a:pPr marL="0" lvl="0" indent="0" algn="ctr" rtl="0">
+              <a:spcBef>
+                <a:spcPts val="0"/>
+              </a:spcBef>
+              <a:spcAft>
+                <a:spcPts val="0"/>
+              </a:spcAft>
+              <a:buNone/>
+            </a:pPr>
+            <a:r>
+              <a:rPr lang="en-US" dirty="0"/>
+              <a:t>GCIS – Software Development and Problem Solving</a:t>
+            </a:r>
+            <a:endParaRPr dirty="0"/>
+          </a:p>
+        </p:txBody>
+      </p:sp>
+      <p:sp>
+        <p:nvSpPr>
+          <p:cNvPr id="325" name="Google Shape;325;p47">
+            <a:extLst>
+              <a:ext uri="{FF2B5EF4-FFF2-40B4-BE49-F238E27FC236}">
+                <a16:creationId xmlns:a16="http://schemas.microsoft.com/office/drawing/2014/main" id="{5A9661D1-8430-BF80-279A-41B28CA04273}"/>
+              </a:ext>
+            </a:extLst>
+          </p:cNvPr>
+          <p:cNvSpPr txBox="1">
+            <a:spLocks noGrp="1"/>
+          </p:cNvSpPr>
+          <p:nvPr>
+            <p:ph type="body" idx="1"/>
+          </p:nvPr>
+        </p:nvSpPr>
+        <p:spPr>
+          <a:xfrm>
+            <a:off x="91445" y="1758316"/>
+            <a:ext cx="4000496" cy="1378401"/>
+          </a:xfrm>
+          <a:prstGeom prst="rect">
+            <a:avLst/>
+          </a:prstGeom>
+        </p:spPr>
+        <p:txBody>
+          <a:bodyPr spcFirstLastPara="1" wrap="square" lIns="91425" tIns="91425" rIns="91425" bIns="91425" anchor="ctr" anchorCtr="0">
+            <a:noAutofit/>
+          </a:bodyPr>
+          <a:lstStyle/>
+          <a:p>
+            <a:pPr marL="146050" indent="0">
+              <a:buNone/>
+            </a:pPr>
+            <a:r>
+              <a:rPr lang="en-US" sz="1600" dirty="0">
+                <a:solidFill>
+                  <a:schemeClr val="tx1"/>
+                </a:solidFill>
+              </a:rPr>
+              <a:t>Take Quiz 5.2: Generics and Lists</a:t>
+            </a:r>
+          </a:p>
+          <a:p>
+            <a:pPr marL="146050" indent="0">
+              <a:buNone/>
+            </a:pPr>
+            <a:r>
+              <a:rPr lang="en-US" sz="1600" dirty="0">
+                <a:solidFill>
+                  <a:schemeClr val="tx1"/>
+                </a:solidFill>
+              </a:rPr>
+              <a:t>Password – SomeGenericPassword1</a:t>
+            </a:r>
+            <a:endParaRPr sz="1600" dirty="0">
+              <a:solidFill>
+                <a:schemeClr val="tx1"/>
+              </a:solidFill>
+            </a:endParaRPr>
+          </a:p>
+        </p:txBody>
+      </p:sp>
+      <p:sp>
+        <p:nvSpPr>
+          <p:cNvPr id="326" name="Google Shape;326;p47">
+            <a:extLst>
+              <a:ext uri="{FF2B5EF4-FFF2-40B4-BE49-F238E27FC236}">
+                <a16:creationId xmlns:a16="http://schemas.microsoft.com/office/drawing/2014/main" id="{8A14E227-935A-FBD8-6BD5-CBCE8D13EE84}"/>
+              </a:ext>
+            </a:extLst>
+          </p:cNvPr>
+          <p:cNvSpPr txBox="1">
+            <a:spLocks noGrp="1"/>
+          </p:cNvSpPr>
+          <p:nvPr>
+            <p:ph type="sldNum" idx="12"/>
+          </p:nvPr>
+        </p:nvSpPr>
+        <p:spPr>
+          <a:xfrm>
+            <a:off x="8472458" y="4663217"/>
+            <a:ext cx="548700" cy="393600"/>
+          </a:xfrm>
+          <a:prstGeom prst="rect">
+            <a:avLst/>
+          </a:prstGeom>
+        </p:spPr>
+        <p:txBody>
+          <a:bodyPr spcFirstLastPara="1" wrap="square" lIns="91425" tIns="91425" rIns="91425" bIns="91425" anchor="ctr" anchorCtr="0">
+            <a:noAutofit/>
+          </a:bodyPr>
+          <a:lstStyle/>
+          <a:p>
+            <a:pPr marL="0" lvl="0" indent="0" algn="r" rtl="0">
+              <a:spcBef>
+                <a:spcPts val="0"/>
+              </a:spcBef>
+              <a:spcAft>
+                <a:spcPts val="0"/>
+              </a:spcAft>
+              <a:buNone/>
+            </a:pPr>
+            <a:fld id="{00000000-1234-1234-1234-123412341234}" type="slidenum">
+              <a:rPr lang="en"/>
+              <a:t>1</a:t>
+            </a:fld>
+            <a:endParaRPr/>
+          </a:p>
+        </p:txBody>
+      </p:sp>
+      <p:sp>
+        <p:nvSpPr>
+          <p:cNvPr id="2" name="TextBox 1">
+            <a:extLst>
+              <a:ext uri="{FF2B5EF4-FFF2-40B4-BE49-F238E27FC236}">
+                <a16:creationId xmlns:a16="http://schemas.microsoft.com/office/drawing/2014/main" id="{AE960589-7B12-D7F7-6452-D45441D8CA95}"/>
+              </a:ext>
+            </a:extLst>
+          </p:cNvPr>
+          <p:cNvSpPr txBox="1"/>
+          <p:nvPr/>
+        </p:nvSpPr>
+        <p:spPr>
+          <a:xfrm>
+            <a:off x="-11684" y="1287037"/>
+            <a:ext cx="9144000" cy="338555"/>
+          </a:xfrm>
+          <a:prstGeom prst="rect">
+            <a:avLst/>
+          </a:prstGeom>
+          <a:solidFill>
+            <a:srgbClr val="FFC000"/>
+          </a:solidFill>
+        </p:spPr>
+        <p:txBody>
+          <a:bodyPr wrap="square" rtlCol="0">
+            <a:spAutoFit/>
+          </a:bodyPr>
+          <a:lstStyle/>
+          <a:p>
+            <a:r>
+              <a:rPr lang="en-US" dirty="0"/>
+              <a:t>Quiz</a:t>
+            </a:r>
+          </a:p>
+        </p:txBody>
+      </p:sp>
+      <p:sp>
+        <p:nvSpPr>
+          <p:cNvPr id="3" name="TextBox 2">
+            <a:extLst>
+              <a:ext uri="{FF2B5EF4-FFF2-40B4-BE49-F238E27FC236}">
+                <a16:creationId xmlns:a16="http://schemas.microsoft.com/office/drawing/2014/main" id="{4FD526CA-3FDB-A5C2-36D9-69A3252D5E9A}"/>
+              </a:ext>
+            </a:extLst>
+          </p:cNvPr>
+          <p:cNvSpPr txBox="1"/>
+          <p:nvPr/>
+        </p:nvSpPr>
+        <p:spPr>
+          <a:xfrm>
+            <a:off x="0" y="3507404"/>
+            <a:ext cx="9144000" cy="307777"/>
+          </a:xfrm>
+          <a:prstGeom prst="rect">
+            <a:avLst/>
+          </a:prstGeom>
+          <a:solidFill>
+            <a:srgbClr val="FFC000"/>
+          </a:solidFill>
+        </p:spPr>
+        <p:txBody>
+          <a:bodyPr wrap="square" rtlCol="0">
+            <a:spAutoFit/>
+          </a:bodyPr>
+          <a:lstStyle/>
+          <a:p>
+            <a:r>
+              <a:rPr lang="en-US" dirty="0"/>
+              <a:t>Next </a:t>
+            </a:r>
+            <a:r>
+              <a:rPr lang="en-US" dirty="0">
+                <a:sym typeface="Wingdings" panose="05000000000000000000" pitchFamily="2" charset="2"/>
+              </a:rPr>
+              <a:t> </a:t>
+            </a:r>
+            <a:endParaRPr lang="en-US" dirty="0"/>
+          </a:p>
+        </p:txBody>
+      </p:sp>
+      <p:sp>
+        <p:nvSpPr>
+          <p:cNvPr id="4" name="Google Shape;325;p47">
+            <a:extLst>
+              <a:ext uri="{FF2B5EF4-FFF2-40B4-BE49-F238E27FC236}">
+                <a16:creationId xmlns:a16="http://schemas.microsoft.com/office/drawing/2014/main" id="{DC50CCB1-5AFE-1F52-8B22-87EB927965B4}"/>
+              </a:ext>
+            </a:extLst>
+          </p:cNvPr>
+          <p:cNvSpPr txBox="1">
+            <a:spLocks/>
+          </p:cNvSpPr>
+          <p:nvPr/>
+        </p:nvSpPr>
+        <p:spPr>
+          <a:xfrm>
+            <a:off x="-5842" y="3848100"/>
+            <a:ext cx="9149842" cy="1208717"/>
+          </a:xfrm>
+          <a:prstGeom prst="rect">
+            <a:avLst/>
+          </a:prstGeom>
+          <a:noFill/>
+          <a:ln>
+            <a:noFill/>
+          </a:ln>
+        </p:spPr>
+        <p:txBody>
+          <a:bodyPr spcFirstLastPara="1" wrap="square" lIns="91425" tIns="91425" rIns="91425" bIns="91425" anchor="ctr" anchorCtr="0">
+            <a:noAutofit/>
+          </a:bodyPr>
+          <a:lstStyle>
+            <a:defPPr marR="0" lvl="0" algn="l" rtl="0">
+              <a:lnSpc>
+                <a:spcPct val="100000"/>
+              </a:lnSpc>
+              <a:spcBef>
+                <a:spcPts val="0"/>
+              </a:spcBef>
+              <a:spcAft>
+                <a:spcPts val="0"/>
+              </a:spcAft>
+            </a:defPPr>
+            <a:lvl1pPr marL="457200" marR="0" lvl="0" indent="-311150" algn="l" rtl="0">
+              <a:lnSpc>
+                <a:spcPct val="115000"/>
+              </a:lnSpc>
+              <a:spcBef>
+                <a:spcPts val="0"/>
+              </a:spcBef>
+              <a:spcAft>
+                <a:spcPts val="0"/>
+              </a:spcAft>
+              <a:buClr>
+                <a:schemeClr val="dk2"/>
+              </a:buClr>
+              <a:buSzPts val="1300"/>
+              <a:buFont typeface="Roboto"/>
+              <a:buChar char="●"/>
+              <a:defRPr sz="1300" b="0" i="0" u="none" strike="noStrike" cap="none">
+                <a:solidFill>
+                  <a:schemeClr val="dk2"/>
+                </a:solidFill>
+                <a:latin typeface="Roboto"/>
+                <a:ea typeface="Roboto"/>
+                <a:cs typeface="Roboto"/>
+                <a:sym typeface="Roboto"/>
+              </a:defRPr>
+            </a:lvl1pPr>
+            <a:lvl2pPr marL="914400" marR="0" lvl="1" indent="-298450" algn="l" rtl="0">
+              <a:lnSpc>
+                <a:spcPct val="115000"/>
+              </a:lnSpc>
+              <a:spcBef>
+                <a:spcPts val="1600"/>
+              </a:spcBef>
+              <a:spcAft>
+                <a:spcPts val="0"/>
+              </a:spcAft>
+              <a:buClr>
+                <a:schemeClr val="dk2"/>
+              </a:buClr>
+              <a:buSzPts val="1100"/>
+              <a:buFont typeface="Roboto"/>
+              <a:buChar char="○"/>
+              <a:defRPr sz="1100" b="0" i="0" u="none" strike="noStrike" cap="none">
+                <a:solidFill>
+                  <a:schemeClr val="dk2"/>
+                </a:solidFill>
+                <a:latin typeface="Roboto"/>
+                <a:ea typeface="Roboto"/>
+                <a:cs typeface="Roboto"/>
+                <a:sym typeface="Roboto"/>
+              </a:defRPr>
+            </a:lvl2pPr>
+            <a:lvl3pPr marL="1371600" marR="0" lvl="2" indent="-298450" algn="l" rtl="0">
+              <a:lnSpc>
+                <a:spcPct val="115000"/>
+              </a:lnSpc>
+              <a:spcBef>
+                <a:spcPts val="1600"/>
+              </a:spcBef>
+              <a:spcAft>
+                <a:spcPts val="0"/>
+              </a:spcAft>
+              <a:buClr>
+                <a:schemeClr val="dk2"/>
+              </a:buClr>
+              <a:buSzPts val="1100"/>
+              <a:buFont typeface="Roboto"/>
+              <a:buChar char="■"/>
+              <a:defRPr sz="1100" b="0" i="0" u="none" strike="noStrike" cap="none">
+                <a:solidFill>
+                  <a:schemeClr val="dk2"/>
+                </a:solidFill>
+                <a:latin typeface="Roboto"/>
+                <a:ea typeface="Roboto"/>
+                <a:cs typeface="Roboto"/>
+                <a:sym typeface="Roboto"/>
+              </a:defRPr>
+            </a:lvl3pPr>
+            <a:lvl4pPr marL="1828800" marR="0" lvl="3" indent="-298450" algn="l" rtl="0">
+              <a:lnSpc>
+                <a:spcPct val="115000"/>
+              </a:lnSpc>
+              <a:spcBef>
+                <a:spcPts val="1600"/>
+              </a:spcBef>
+              <a:spcAft>
+                <a:spcPts val="0"/>
+              </a:spcAft>
+              <a:buClr>
+                <a:schemeClr val="dk2"/>
+              </a:buClr>
+              <a:buSzPts val="1100"/>
+              <a:buFont typeface="Roboto"/>
+              <a:buChar char="●"/>
+              <a:defRPr sz="1100" b="0" i="0" u="none" strike="noStrike" cap="none">
+                <a:solidFill>
+                  <a:schemeClr val="dk2"/>
+                </a:solidFill>
+                <a:latin typeface="Roboto"/>
+                <a:ea typeface="Roboto"/>
+                <a:cs typeface="Roboto"/>
+                <a:sym typeface="Roboto"/>
+              </a:defRPr>
+            </a:lvl4pPr>
+            <a:lvl5pPr marL="2286000" marR="0" lvl="4" indent="-298450" algn="l" rtl="0">
+              <a:lnSpc>
+                <a:spcPct val="115000"/>
+              </a:lnSpc>
+              <a:spcBef>
+                <a:spcPts val="1600"/>
+              </a:spcBef>
+              <a:spcAft>
+                <a:spcPts val="0"/>
+              </a:spcAft>
+              <a:buClr>
+                <a:schemeClr val="dk2"/>
+              </a:buClr>
+              <a:buSzPts val="1100"/>
+              <a:buFont typeface="Roboto"/>
+              <a:buChar char="○"/>
+              <a:defRPr sz="1100" b="0" i="0" u="none" strike="noStrike" cap="none">
+                <a:solidFill>
+                  <a:schemeClr val="dk2"/>
+                </a:solidFill>
+                <a:latin typeface="Roboto"/>
+                <a:ea typeface="Roboto"/>
+                <a:cs typeface="Roboto"/>
+                <a:sym typeface="Roboto"/>
+              </a:defRPr>
+            </a:lvl5pPr>
+            <a:lvl6pPr marL="2743200" marR="0" lvl="5" indent="-298450" algn="l" rtl="0">
+              <a:lnSpc>
+                <a:spcPct val="115000"/>
+              </a:lnSpc>
+              <a:spcBef>
+                <a:spcPts val="1600"/>
+              </a:spcBef>
+              <a:spcAft>
+                <a:spcPts val="0"/>
+              </a:spcAft>
+              <a:buClr>
+                <a:schemeClr val="dk2"/>
+              </a:buClr>
+              <a:buSzPts val="1100"/>
+              <a:buFont typeface="Roboto"/>
+              <a:buChar char="■"/>
+              <a:defRPr sz="1100" b="0" i="0" u="none" strike="noStrike" cap="none">
+                <a:solidFill>
+                  <a:schemeClr val="dk2"/>
+                </a:solidFill>
+                <a:latin typeface="Roboto"/>
+                <a:ea typeface="Roboto"/>
+                <a:cs typeface="Roboto"/>
+                <a:sym typeface="Roboto"/>
+              </a:defRPr>
+            </a:lvl6pPr>
+            <a:lvl7pPr marL="3200400" marR="0" lvl="6" indent="-298450" algn="l" rtl="0">
+              <a:lnSpc>
+                <a:spcPct val="115000"/>
+              </a:lnSpc>
+              <a:spcBef>
+                <a:spcPts val="1600"/>
+              </a:spcBef>
+              <a:spcAft>
+                <a:spcPts val="0"/>
+              </a:spcAft>
+              <a:buClr>
+                <a:schemeClr val="dk2"/>
+              </a:buClr>
+              <a:buSzPts val="1100"/>
+              <a:buFont typeface="Roboto"/>
+              <a:buChar char="●"/>
+              <a:defRPr sz="1100" b="0" i="0" u="none" strike="noStrike" cap="none">
+                <a:solidFill>
+                  <a:schemeClr val="dk2"/>
+                </a:solidFill>
+                <a:latin typeface="Roboto"/>
+                <a:ea typeface="Roboto"/>
+                <a:cs typeface="Roboto"/>
+                <a:sym typeface="Roboto"/>
+              </a:defRPr>
+            </a:lvl7pPr>
+            <a:lvl8pPr marL="3657600" marR="0" lvl="7" indent="-298450" algn="l" rtl="0">
+              <a:lnSpc>
+                <a:spcPct val="115000"/>
+              </a:lnSpc>
+              <a:spcBef>
+                <a:spcPts val="1600"/>
+              </a:spcBef>
+              <a:spcAft>
+                <a:spcPts val="0"/>
+              </a:spcAft>
+              <a:buClr>
+                <a:schemeClr val="dk2"/>
+              </a:buClr>
+              <a:buSzPts val="1100"/>
+              <a:buFont typeface="Roboto"/>
+              <a:buChar char="○"/>
+              <a:defRPr sz="1100" b="0" i="0" u="none" strike="noStrike" cap="none">
+                <a:solidFill>
+                  <a:schemeClr val="dk2"/>
+                </a:solidFill>
+                <a:latin typeface="Roboto"/>
+                <a:ea typeface="Roboto"/>
+                <a:cs typeface="Roboto"/>
+                <a:sym typeface="Roboto"/>
+              </a:defRPr>
+            </a:lvl8pPr>
+            <a:lvl9pPr marL="4114800" marR="0" lvl="8" indent="-298450" algn="l" rtl="0">
+              <a:lnSpc>
+                <a:spcPct val="115000"/>
+              </a:lnSpc>
+              <a:spcBef>
+                <a:spcPts val="1600"/>
+              </a:spcBef>
+              <a:spcAft>
+                <a:spcPts val="1600"/>
+              </a:spcAft>
+              <a:buClr>
+                <a:schemeClr val="dk2"/>
+              </a:buClr>
+              <a:buSzPts val="1100"/>
+              <a:buFont typeface="Roboto"/>
+              <a:buChar char="■"/>
+              <a:defRPr sz="1100" b="0" i="0" u="none" strike="noStrike" cap="none">
+                <a:solidFill>
+                  <a:schemeClr val="dk2"/>
+                </a:solidFill>
+                <a:latin typeface="Roboto"/>
+                <a:ea typeface="Roboto"/>
+                <a:cs typeface="Roboto"/>
+                <a:sym typeface="Roboto"/>
+              </a:defRPr>
+            </a:lvl9pPr>
+          </a:lstStyle>
+          <a:p>
+            <a:pPr marL="0" indent="0">
+              <a:spcAft>
+                <a:spcPts val="1600"/>
+              </a:spcAft>
+              <a:buNone/>
+            </a:pPr>
+            <a:r>
+              <a:rPr lang="en-US" sz="1400" dirty="0"/>
+              <a:t>After completing the Quiz </a:t>
+            </a:r>
+          </a:p>
+          <a:p>
+            <a:pPr marL="342900" indent="-342900">
+              <a:spcAft>
+                <a:spcPts val="1600"/>
+              </a:spcAft>
+            </a:pPr>
+            <a:r>
+              <a:rPr lang="en-US" sz="1200" dirty="0"/>
+              <a:t>Accept GitHub Classroom Assignment for Unit 06</a:t>
+            </a:r>
+          </a:p>
+          <a:p>
+            <a:pPr marL="342900" indent="-342900">
+              <a:spcAft>
+                <a:spcPts val="1600"/>
+              </a:spcAft>
+            </a:pPr>
+            <a:r>
+              <a:rPr lang="en-US" sz="1200" dirty="0"/>
+              <a:t>Clone/pull GitHub classroom repo for Unit 06 under </a:t>
+            </a:r>
+            <a:r>
+              <a:rPr lang="en-US" sz="1200" dirty="0" err="1"/>
+              <a:t>softdevII</a:t>
+            </a:r>
+            <a:r>
+              <a:rPr lang="en-US" sz="1200" dirty="0"/>
+              <a:t> folder</a:t>
+            </a:r>
+            <a:endParaRPr lang="en-US" sz="1200" dirty="0">
+              <a:solidFill>
+                <a:schemeClr val="tx1"/>
+              </a:solidFill>
+            </a:endParaRPr>
+          </a:p>
+        </p:txBody>
+      </p:sp>
+      <p:sp>
+        <p:nvSpPr>
+          <p:cNvPr id="5" name="Google Shape;325;p47">
+            <a:extLst>
+              <a:ext uri="{FF2B5EF4-FFF2-40B4-BE49-F238E27FC236}">
+                <a16:creationId xmlns:a16="http://schemas.microsoft.com/office/drawing/2014/main" id="{7B85466C-6200-EE66-9396-7DECA70CDF53}"/>
+              </a:ext>
+            </a:extLst>
+          </p:cNvPr>
+          <p:cNvSpPr txBox="1">
+            <a:spLocks/>
+          </p:cNvSpPr>
+          <p:nvPr/>
+        </p:nvSpPr>
+        <p:spPr>
+          <a:xfrm>
+            <a:off x="4303618" y="1737005"/>
+            <a:ext cx="4516998" cy="1378400"/>
+          </a:xfrm>
+          <a:prstGeom prst="rect">
+            <a:avLst/>
+          </a:prstGeom>
+          <a:noFill/>
+          <a:ln>
+            <a:noFill/>
+          </a:ln>
+        </p:spPr>
+        <p:txBody>
+          <a:bodyPr spcFirstLastPara="1" wrap="square" lIns="91425" tIns="91425" rIns="91425" bIns="91425" anchor="ctr" anchorCtr="0">
+            <a:noAutofit/>
+          </a:bodyPr>
+          <a:lstStyle>
+            <a:defPPr marR="0" lvl="0" algn="l" rtl="0">
+              <a:lnSpc>
+                <a:spcPct val="100000"/>
+              </a:lnSpc>
+              <a:spcBef>
+                <a:spcPts val="0"/>
+              </a:spcBef>
+              <a:spcAft>
+                <a:spcPts val="0"/>
+              </a:spcAft>
+            </a:defPPr>
+            <a:lvl1pPr marL="457200" marR="0" lvl="0" indent="-311150" algn="l" rtl="0">
+              <a:lnSpc>
+                <a:spcPct val="115000"/>
+              </a:lnSpc>
+              <a:spcBef>
+                <a:spcPts val="0"/>
+              </a:spcBef>
+              <a:spcAft>
+                <a:spcPts val="0"/>
+              </a:spcAft>
+              <a:buClr>
+                <a:schemeClr val="dk2"/>
+              </a:buClr>
+              <a:buSzPts val="1300"/>
+              <a:buFont typeface="Roboto"/>
+              <a:buChar char="●"/>
+              <a:defRPr sz="1300" b="0" i="0" u="none" strike="noStrike" cap="none">
+                <a:solidFill>
+                  <a:schemeClr val="dk2"/>
+                </a:solidFill>
+                <a:latin typeface="Roboto"/>
+                <a:ea typeface="Roboto"/>
+                <a:cs typeface="Roboto"/>
+                <a:sym typeface="Roboto"/>
+              </a:defRPr>
+            </a:lvl1pPr>
+            <a:lvl2pPr marL="914400" marR="0" lvl="1" indent="-298450" algn="l" rtl="0">
+              <a:lnSpc>
+                <a:spcPct val="115000"/>
+              </a:lnSpc>
+              <a:spcBef>
+                <a:spcPts val="1600"/>
+              </a:spcBef>
+              <a:spcAft>
+                <a:spcPts val="0"/>
+              </a:spcAft>
+              <a:buClr>
+                <a:schemeClr val="dk2"/>
+              </a:buClr>
+              <a:buSzPts val="1100"/>
+              <a:buFont typeface="Roboto"/>
+              <a:buChar char="○"/>
+              <a:defRPr sz="1100" b="0" i="0" u="none" strike="noStrike" cap="none">
+                <a:solidFill>
+                  <a:schemeClr val="dk2"/>
+                </a:solidFill>
+                <a:latin typeface="Roboto"/>
+                <a:ea typeface="Roboto"/>
+                <a:cs typeface="Roboto"/>
+                <a:sym typeface="Roboto"/>
+              </a:defRPr>
+            </a:lvl2pPr>
+            <a:lvl3pPr marL="1371600" marR="0" lvl="2" indent="-298450" algn="l" rtl="0">
+              <a:lnSpc>
+                <a:spcPct val="115000"/>
+              </a:lnSpc>
+              <a:spcBef>
+                <a:spcPts val="1600"/>
+              </a:spcBef>
+              <a:spcAft>
+                <a:spcPts val="0"/>
+              </a:spcAft>
+              <a:buClr>
+                <a:schemeClr val="dk2"/>
+              </a:buClr>
+              <a:buSzPts val="1100"/>
+              <a:buFont typeface="Roboto"/>
+              <a:buChar char="■"/>
+              <a:defRPr sz="1100" b="0" i="0" u="none" strike="noStrike" cap="none">
+                <a:solidFill>
+                  <a:schemeClr val="dk2"/>
+                </a:solidFill>
+                <a:latin typeface="Roboto"/>
+                <a:ea typeface="Roboto"/>
+                <a:cs typeface="Roboto"/>
+                <a:sym typeface="Roboto"/>
+              </a:defRPr>
+            </a:lvl3pPr>
+            <a:lvl4pPr marL="1828800" marR="0" lvl="3" indent="-298450" algn="l" rtl="0">
+              <a:lnSpc>
+                <a:spcPct val="115000"/>
+              </a:lnSpc>
+              <a:spcBef>
+                <a:spcPts val="1600"/>
+              </a:spcBef>
+              <a:spcAft>
+                <a:spcPts val="0"/>
+              </a:spcAft>
+              <a:buClr>
+                <a:schemeClr val="dk2"/>
+              </a:buClr>
+              <a:buSzPts val="1100"/>
+              <a:buFont typeface="Roboto"/>
+              <a:buChar char="●"/>
+              <a:defRPr sz="1100" b="0" i="0" u="none" strike="noStrike" cap="none">
+                <a:solidFill>
+                  <a:schemeClr val="dk2"/>
+                </a:solidFill>
+                <a:latin typeface="Roboto"/>
+                <a:ea typeface="Roboto"/>
+                <a:cs typeface="Roboto"/>
+                <a:sym typeface="Roboto"/>
+              </a:defRPr>
+            </a:lvl4pPr>
+            <a:lvl5pPr marL="2286000" marR="0" lvl="4" indent="-298450" algn="l" rtl="0">
+              <a:lnSpc>
+                <a:spcPct val="115000"/>
+              </a:lnSpc>
+              <a:spcBef>
+                <a:spcPts val="1600"/>
+              </a:spcBef>
+              <a:spcAft>
+                <a:spcPts val="0"/>
+              </a:spcAft>
+              <a:buClr>
+                <a:schemeClr val="dk2"/>
+              </a:buClr>
+              <a:buSzPts val="1100"/>
+              <a:buFont typeface="Roboto"/>
+              <a:buChar char="○"/>
+              <a:defRPr sz="1100" b="0" i="0" u="none" strike="noStrike" cap="none">
+                <a:solidFill>
+                  <a:schemeClr val="dk2"/>
+                </a:solidFill>
+                <a:latin typeface="Roboto"/>
+                <a:ea typeface="Roboto"/>
+                <a:cs typeface="Roboto"/>
+                <a:sym typeface="Roboto"/>
+              </a:defRPr>
+            </a:lvl5pPr>
+            <a:lvl6pPr marL="2743200" marR="0" lvl="5" indent="-298450" algn="l" rtl="0">
+              <a:lnSpc>
+                <a:spcPct val="115000"/>
+              </a:lnSpc>
+              <a:spcBef>
+                <a:spcPts val="1600"/>
+              </a:spcBef>
+              <a:spcAft>
+                <a:spcPts val="0"/>
+              </a:spcAft>
+              <a:buClr>
+                <a:schemeClr val="dk2"/>
+              </a:buClr>
+              <a:buSzPts val="1100"/>
+              <a:buFont typeface="Roboto"/>
+              <a:buChar char="■"/>
+              <a:defRPr sz="1100" b="0" i="0" u="none" strike="noStrike" cap="none">
+                <a:solidFill>
+                  <a:schemeClr val="dk2"/>
+                </a:solidFill>
+                <a:latin typeface="Roboto"/>
+                <a:ea typeface="Roboto"/>
+                <a:cs typeface="Roboto"/>
+                <a:sym typeface="Roboto"/>
+              </a:defRPr>
+            </a:lvl6pPr>
+            <a:lvl7pPr marL="3200400" marR="0" lvl="6" indent="-298450" algn="l" rtl="0">
+              <a:lnSpc>
+                <a:spcPct val="115000"/>
+              </a:lnSpc>
+              <a:spcBef>
+                <a:spcPts val="1600"/>
+              </a:spcBef>
+              <a:spcAft>
+                <a:spcPts val="0"/>
+              </a:spcAft>
+              <a:buClr>
+                <a:schemeClr val="dk2"/>
+              </a:buClr>
+              <a:buSzPts val="1100"/>
+              <a:buFont typeface="Roboto"/>
+              <a:buChar char="●"/>
+              <a:defRPr sz="1100" b="0" i="0" u="none" strike="noStrike" cap="none">
+                <a:solidFill>
+                  <a:schemeClr val="dk2"/>
+                </a:solidFill>
+                <a:latin typeface="Roboto"/>
+                <a:ea typeface="Roboto"/>
+                <a:cs typeface="Roboto"/>
+                <a:sym typeface="Roboto"/>
+              </a:defRPr>
+            </a:lvl7pPr>
+            <a:lvl8pPr marL="3657600" marR="0" lvl="7" indent="-298450" algn="l" rtl="0">
+              <a:lnSpc>
+                <a:spcPct val="115000"/>
+              </a:lnSpc>
+              <a:spcBef>
+                <a:spcPts val="1600"/>
+              </a:spcBef>
+              <a:spcAft>
+                <a:spcPts val="0"/>
+              </a:spcAft>
+              <a:buClr>
+                <a:schemeClr val="dk2"/>
+              </a:buClr>
+              <a:buSzPts val="1100"/>
+              <a:buFont typeface="Roboto"/>
+              <a:buChar char="○"/>
+              <a:defRPr sz="1100" b="0" i="0" u="none" strike="noStrike" cap="none">
+                <a:solidFill>
+                  <a:schemeClr val="dk2"/>
+                </a:solidFill>
+                <a:latin typeface="Roboto"/>
+                <a:ea typeface="Roboto"/>
+                <a:cs typeface="Roboto"/>
+                <a:sym typeface="Roboto"/>
+              </a:defRPr>
+            </a:lvl8pPr>
+            <a:lvl9pPr marL="4114800" marR="0" lvl="8" indent="-298450" algn="l" rtl="0">
+              <a:lnSpc>
+                <a:spcPct val="115000"/>
+              </a:lnSpc>
+              <a:spcBef>
+                <a:spcPts val="1600"/>
+              </a:spcBef>
+              <a:spcAft>
+                <a:spcPts val="1600"/>
+              </a:spcAft>
+              <a:buClr>
+                <a:schemeClr val="dk2"/>
+              </a:buClr>
+              <a:buSzPts val="1100"/>
+              <a:buFont typeface="Roboto"/>
+              <a:buChar char="■"/>
+              <a:defRPr sz="1100" b="0" i="0" u="none" strike="noStrike" cap="none">
+                <a:solidFill>
+                  <a:schemeClr val="dk2"/>
+                </a:solidFill>
+                <a:latin typeface="Roboto"/>
+                <a:ea typeface="Roboto"/>
+                <a:cs typeface="Roboto"/>
+                <a:sym typeface="Roboto"/>
+              </a:defRPr>
+            </a:lvl9pPr>
+          </a:lstStyle>
+          <a:p>
+            <a:pPr marL="146050" indent="0">
+              <a:buNone/>
+            </a:pPr>
+            <a:r>
+              <a:rPr lang="en-US" sz="1600" dirty="0">
+                <a:solidFill>
+                  <a:schemeClr val="tx1"/>
+                </a:solidFill>
+              </a:rPr>
+              <a:t>Quiz 5.3 Iterators &amp; the JCF</a:t>
+            </a:r>
+          </a:p>
+          <a:p>
+            <a:pPr marL="146050" indent="0">
+              <a:buNone/>
+            </a:pPr>
+            <a:r>
+              <a:rPr lang="en-US" sz="1600" dirty="0">
+                <a:solidFill>
+                  <a:schemeClr val="tx1"/>
+                </a:solidFill>
+              </a:rPr>
+              <a:t>Password - </a:t>
+            </a:r>
+            <a:r>
+              <a:rPr lang="en-US" sz="1600" dirty="0" err="1">
+                <a:solidFill>
+                  <a:schemeClr val="tx1"/>
+                </a:solidFill>
+              </a:rPr>
+              <a:t>forEachLoopBrother</a:t>
+            </a:r>
+            <a:endParaRPr lang="en-US" sz="1600" dirty="0">
+              <a:solidFill>
+                <a:schemeClr val="tx1"/>
+              </a:solidFill>
+            </a:endParaRPr>
+          </a:p>
+        </p:txBody>
+      </p:sp>
+    </p:spTree>
+    <p:extLst>
+      <p:ext uri="{BB962C8B-B14F-4D97-AF65-F5344CB8AC3E}">
+        <p14:creationId xmlns:p14="http://schemas.microsoft.com/office/powerpoint/2010/main" val="674272117"/>
+      </p:ext>
+    </p:extLst>
+  </p:cSld>
+  <p:clrMapOvr>
+    <a:masterClrMapping/>
+  </p:clrMapOvr>
+</p:sld>
+</file>
+
+<file path=ppt/slides/slide10.xml><?xml version="1.0" encoding="utf-8"?>
+<p:sld xmlns:a="http://schemas.openxmlformats.org/drawingml/2006/main" xmlns:r="http://schemas.openxmlformats.org/officeDocument/2006/relationships" xmlns:p="http://schemas.openxmlformats.org/presentationml/2006/main" show="0">
+  <p:cSld>
+    <p:spTree>
+      <p:nvGrpSpPr>
+        <p:cNvPr id="1" name="Shape 323"/>
+        <p:cNvGrpSpPr/>
+        <p:nvPr/>
+      </p:nvGrpSpPr>
+      <p:grpSpPr>
+        <a:xfrm>
+          <a:off x="0" y="0"/>
+          <a:ext cx="0" cy="0"/>
+          <a:chOff x="0" y="0"/>
+          <a:chExt cx="0" cy="0"/>
+        </a:xfrm>
+      </p:grpSpPr>
+      <p:sp>
+        <p:nvSpPr>
+          <p:cNvPr id="324" name="Google Shape;324;p47"/>
+          <p:cNvSpPr txBox="1">
+            <a:spLocks noGrp="1"/>
+          </p:cNvSpPr>
+          <p:nvPr>
+            <p:ph type="title"/>
+          </p:nvPr>
+        </p:nvSpPr>
+        <p:spPr>
+          <a:xfrm>
+            <a:off x="226208" y="1"/>
+            <a:ext cx="8520600" cy="464980"/>
+          </a:xfrm>
+          <a:prstGeom prst="rect">
+            <a:avLst/>
+          </a:prstGeom>
+        </p:spPr>
+        <p:txBody>
+          <a:bodyPr spcFirstLastPara="1" wrap="square" lIns="91425" tIns="91425" rIns="91425" bIns="91425" anchor="t" anchorCtr="0">
+            <a:noAutofit/>
+          </a:bodyPr>
+          <a:lstStyle/>
+          <a:p>
+            <a:pPr marL="0" lvl="0" indent="0" algn="ctr" rtl="0">
+              <a:spcBef>
+                <a:spcPts val="0"/>
+              </a:spcBef>
+              <a:spcAft>
+                <a:spcPts val="0"/>
+              </a:spcAft>
+              <a:buNone/>
+            </a:pPr>
+            <a:r>
+              <a:rPr lang="en-US" dirty="0"/>
+              <a:t>Use </a:t>
+            </a:r>
+            <a:r>
+              <a:rPr lang="en-US" sz="2400" dirty="0"/>
+              <a:t>Assigned</a:t>
+            </a:r>
+            <a:r>
+              <a:rPr lang="en-US" dirty="0"/>
+              <a:t> Seat</a:t>
+            </a:r>
+            <a:endParaRPr dirty="0"/>
+          </a:p>
+        </p:txBody>
+      </p:sp>
+      <p:sp>
+        <p:nvSpPr>
+          <p:cNvPr id="326" name="Google Shape;326;p47"/>
+          <p:cNvSpPr txBox="1">
+            <a:spLocks noGrp="1"/>
+          </p:cNvSpPr>
+          <p:nvPr>
+            <p:ph type="sldNum" idx="12"/>
+          </p:nvPr>
+        </p:nvSpPr>
+        <p:spPr>
+          <a:xfrm>
+            <a:off x="8472458" y="4663217"/>
+            <a:ext cx="548700" cy="393600"/>
+          </a:xfrm>
+          <a:prstGeom prst="rect">
+            <a:avLst/>
+          </a:prstGeom>
+        </p:spPr>
+        <p:txBody>
+          <a:bodyPr spcFirstLastPara="1" wrap="square" lIns="91425" tIns="91425" rIns="91425" bIns="91425" anchor="ctr" anchorCtr="0">
+            <a:noAutofit/>
+          </a:bodyPr>
+          <a:lstStyle/>
+          <a:p>
+            <a:pPr marL="0" lvl="0" indent="0" algn="r" rtl="0">
+              <a:spcBef>
+                <a:spcPts val="0"/>
+              </a:spcBef>
+              <a:spcAft>
+                <a:spcPts val="0"/>
+              </a:spcAft>
+              <a:buNone/>
+            </a:pPr>
+            <a:fld id="{00000000-1234-1234-1234-123412341234}" type="slidenum">
+              <a:rPr lang="en"/>
+              <a:t>10</a:t>
+            </a:fld>
+            <a:endParaRPr/>
+          </a:p>
+        </p:txBody>
+      </p:sp>
+      <p:pic>
+        <p:nvPicPr>
+          <p:cNvPr id="6" name="Picture 5">
+            <a:extLst>
+              <a:ext uri="{FF2B5EF4-FFF2-40B4-BE49-F238E27FC236}">
+                <a16:creationId xmlns:a16="http://schemas.microsoft.com/office/drawing/2014/main" id="{DED32793-7C09-E3A3-94E5-B5D46727A1D0}"/>
+              </a:ext>
+            </a:extLst>
+          </p:cNvPr>
+          <p:cNvPicPr>
+            <a:picLocks noChangeAspect="1"/>
+          </p:cNvPicPr>
+          <p:nvPr/>
+        </p:nvPicPr>
+        <p:blipFill>
+          <a:blip r:embed="rId3"/>
+          <a:stretch>
+            <a:fillRect/>
+          </a:stretch>
+        </p:blipFill>
+        <p:spPr>
+          <a:xfrm>
+            <a:off x="-1" y="551663"/>
+            <a:ext cx="9144001" cy="4591837"/>
+          </a:xfrm>
+          <a:prstGeom prst="rect">
+            <a:avLst/>
+          </a:prstGeom>
+        </p:spPr>
+      </p:pic>
+    </p:spTree>
+    <p:extLst>
+      <p:ext uri="{BB962C8B-B14F-4D97-AF65-F5344CB8AC3E}">
+        <p14:creationId xmlns:p14="http://schemas.microsoft.com/office/powerpoint/2010/main" val="4226348449"/>
+      </p:ext>
+    </p:extLst>
+  </p:cSld>
+  <p:clrMapOvr>
+    <a:masterClrMapping/>
+  </p:clrMapOvr>
+</p:sld>
+</file>
+
+<file path=ppt/slides/slide11.xml><?xml version="1.0" encoding="utf-8"?>
+<p:sld xmlns:a="http://schemas.openxmlformats.org/drawingml/2006/main" xmlns:r="http://schemas.openxmlformats.org/officeDocument/2006/relationships" xmlns:p="http://schemas.openxmlformats.org/presentationml/2006/main" show="0">
+  <p:cSld>
+    <p:spTree>
+      <p:nvGrpSpPr>
+        <p:cNvPr id="1" name="Shape 323"/>
+        <p:cNvGrpSpPr/>
+        <p:nvPr/>
+      </p:nvGrpSpPr>
+      <p:grpSpPr>
+        <a:xfrm>
+          <a:off x="0" y="0"/>
+          <a:ext cx="0" cy="0"/>
+          <a:chOff x="0" y="0"/>
+          <a:chExt cx="0" cy="0"/>
+        </a:xfrm>
+      </p:grpSpPr>
+      <p:sp>
+        <p:nvSpPr>
+          <p:cNvPr id="324" name="Google Shape;324;p47"/>
+          <p:cNvSpPr txBox="1">
+            <a:spLocks noGrp="1"/>
+          </p:cNvSpPr>
+          <p:nvPr>
+            <p:ph type="title"/>
+          </p:nvPr>
+        </p:nvSpPr>
+        <p:spPr>
+          <a:xfrm>
+            <a:off x="226208" y="1"/>
+            <a:ext cx="8520600" cy="464980"/>
+          </a:xfrm>
+          <a:prstGeom prst="rect">
+            <a:avLst/>
+          </a:prstGeom>
+        </p:spPr>
+        <p:txBody>
+          <a:bodyPr spcFirstLastPara="1" wrap="square" lIns="91425" tIns="91425" rIns="91425" bIns="91425" anchor="t" anchorCtr="0">
+            <a:noAutofit/>
+          </a:bodyPr>
+          <a:lstStyle/>
+          <a:p>
+            <a:pPr marL="0" lvl="0" indent="0" algn="ctr" rtl="0">
+              <a:spcBef>
+                <a:spcPts val="0"/>
+              </a:spcBef>
+              <a:spcAft>
+                <a:spcPts val="0"/>
+              </a:spcAft>
+              <a:buNone/>
+            </a:pPr>
+            <a:r>
+              <a:rPr lang="en-US" dirty="0"/>
+              <a:t>Use </a:t>
+            </a:r>
+            <a:r>
+              <a:rPr lang="en-US" sz="2400" dirty="0"/>
+              <a:t>Assigned</a:t>
+            </a:r>
+            <a:r>
+              <a:rPr lang="en-US" dirty="0"/>
+              <a:t> Seat</a:t>
+            </a:r>
+            <a:endParaRPr dirty="0"/>
+          </a:p>
+        </p:txBody>
+      </p:sp>
+      <p:sp>
+        <p:nvSpPr>
+          <p:cNvPr id="326" name="Google Shape;326;p47"/>
+          <p:cNvSpPr txBox="1">
+            <a:spLocks noGrp="1"/>
+          </p:cNvSpPr>
+          <p:nvPr>
+            <p:ph type="sldNum" idx="12"/>
+          </p:nvPr>
+        </p:nvSpPr>
+        <p:spPr>
+          <a:xfrm>
+            <a:off x="8472458" y="4663217"/>
+            <a:ext cx="548700" cy="393600"/>
+          </a:xfrm>
+          <a:prstGeom prst="rect">
+            <a:avLst/>
+          </a:prstGeom>
+        </p:spPr>
+        <p:txBody>
+          <a:bodyPr spcFirstLastPara="1" wrap="square" lIns="91425" tIns="91425" rIns="91425" bIns="91425" anchor="ctr" anchorCtr="0">
+            <a:noAutofit/>
+          </a:bodyPr>
+          <a:lstStyle/>
+          <a:p>
+            <a:pPr marL="0" lvl="0" indent="0" algn="r" rtl="0">
+              <a:spcBef>
+                <a:spcPts val="0"/>
+              </a:spcBef>
+              <a:spcAft>
+                <a:spcPts val="0"/>
+              </a:spcAft>
+              <a:buNone/>
+            </a:pPr>
+            <a:fld id="{00000000-1234-1234-1234-123412341234}" type="slidenum">
+              <a:rPr lang="en"/>
+              <a:t>11</a:t>
+            </a:fld>
+            <a:endParaRPr/>
+          </a:p>
+        </p:txBody>
+      </p:sp>
+      <p:pic>
+        <p:nvPicPr>
+          <p:cNvPr id="3" name="Picture 2">
+            <a:extLst>
+              <a:ext uri="{FF2B5EF4-FFF2-40B4-BE49-F238E27FC236}">
+                <a16:creationId xmlns:a16="http://schemas.microsoft.com/office/drawing/2014/main" id="{92DE4AAC-70FE-A114-5258-F5B22EDDED45}"/>
+              </a:ext>
+            </a:extLst>
+          </p:cNvPr>
+          <p:cNvPicPr>
+            <a:picLocks noChangeAspect="1"/>
+          </p:cNvPicPr>
+          <p:nvPr/>
+        </p:nvPicPr>
+        <p:blipFill>
+          <a:blip r:embed="rId3"/>
+          <a:stretch>
+            <a:fillRect/>
+          </a:stretch>
+        </p:blipFill>
+        <p:spPr>
+          <a:xfrm>
+            <a:off x="0" y="716280"/>
+            <a:ext cx="9144000" cy="4427218"/>
+          </a:xfrm>
+          <a:prstGeom prst="rect">
+            <a:avLst/>
+          </a:prstGeom>
+        </p:spPr>
+      </p:pic>
+    </p:spTree>
+    <p:extLst>
+      <p:ext uri="{BB962C8B-B14F-4D97-AF65-F5344CB8AC3E}">
+        <p14:creationId xmlns:p14="http://schemas.microsoft.com/office/powerpoint/2010/main" val="1976403023"/>
+      </p:ext>
+    </p:extLst>
+  </p:cSld>
+  <p:clrMapOvr>
+    <a:masterClrMapping/>
+  </p:clrMapOvr>
+</p:sld>
+</file>
+
+<file path=ppt/slides/slide12.xml><?xml version="1.0" encoding="utf-8"?>
+<p:sld xmlns:a="http://schemas.openxmlformats.org/drawingml/2006/main" xmlns:r="http://schemas.openxmlformats.org/officeDocument/2006/relationships" xmlns:p="http://schemas.openxmlformats.org/presentationml/2006/main" show="0">
+  <p:cSld>
+    <p:spTree>
+      <p:nvGrpSpPr>
+        <p:cNvPr id="1" name="Shape 323"/>
+        <p:cNvGrpSpPr/>
+        <p:nvPr/>
+      </p:nvGrpSpPr>
+      <p:grpSpPr>
+        <a:xfrm>
+          <a:off x="0" y="0"/>
+          <a:ext cx="0" cy="0"/>
+          <a:chOff x="0" y="0"/>
+          <a:chExt cx="0" cy="0"/>
+        </a:xfrm>
+      </p:grpSpPr>
+      <p:sp>
+        <p:nvSpPr>
+          <p:cNvPr id="324" name="Google Shape;324;p47"/>
+          <p:cNvSpPr txBox="1">
+            <a:spLocks noGrp="1"/>
+          </p:cNvSpPr>
+          <p:nvPr>
+            <p:ph type="title"/>
+          </p:nvPr>
+        </p:nvSpPr>
+        <p:spPr>
+          <a:xfrm>
+            <a:off x="226208" y="1"/>
+            <a:ext cx="8520600" cy="464980"/>
+          </a:xfrm>
+          <a:prstGeom prst="rect">
+            <a:avLst/>
+          </a:prstGeom>
+        </p:spPr>
+        <p:txBody>
+          <a:bodyPr spcFirstLastPara="1" wrap="square" lIns="91425" tIns="91425" rIns="91425" bIns="91425" anchor="t" anchorCtr="0">
+            <a:noAutofit/>
+          </a:bodyPr>
+          <a:lstStyle/>
+          <a:p>
+            <a:pPr marL="0" lvl="0" indent="0" algn="ctr" rtl="0">
+              <a:spcBef>
+                <a:spcPts val="0"/>
+              </a:spcBef>
+              <a:spcAft>
+                <a:spcPts val="0"/>
+              </a:spcAft>
+              <a:buNone/>
+            </a:pPr>
+            <a:r>
+              <a:rPr lang="en-US" dirty="0"/>
+              <a:t>Use </a:t>
+            </a:r>
+            <a:r>
+              <a:rPr lang="en-US" sz="2400" dirty="0"/>
+              <a:t>Assigned</a:t>
+            </a:r>
+            <a:r>
+              <a:rPr lang="en-US" dirty="0"/>
+              <a:t> Seat</a:t>
+            </a:r>
+            <a:endParaRPr dirty="0"/>
+          </a:p>
+        </p:txBody>
+      </p:sp>
+      <p:sp>
+        <p:nvSpPr>
+          <p:cNvPr id="326" name="Google Shape;326;p47"/>
+          <p:cNvSpPr txBox="1">
+            <a:spLocks noGrp="1"/>
+          </p:cNvSpPr>
+          <p:nvPr>
+            <p:ph type="sldNum" idx="12"/>
+          </p:nvPr>
+        </p:nvSpPr>
+        <p:spPr>
+          <a:xfrm>
+            <a:off x="8472458" y="4663217"/>
+            <a:ext cx="548700" cy="393600"/>
+          </a:xfrm>
+          <a:prstGeom prst="rect">
+            <a:avLst/>
+          </a:prstGeom>
+        </p:spPr>
+        <p:txBody>
+          <a:bodyPr spcFirstLastPara="1" wrap="square" lIns="91425" tIns="91425" rIns="91425" bIns="91425" anchor="ctr" anchorCtr="0">
+            <a:noAutofit/>
+          </a:bodyPr>
+          <a:lstStyle/>
+          <a:p>
+            <a:pPr marL="0" lvl="0" indent="0" algn="r" rtl="0">
+              <a:spcBef>
+                <a:spcPts val="0"/>
+              </a:spcBef>
+              <a:spcAft>
+                <a:spcPts val="0"/>
+              </a:spcAft>
+              <a:buNone/>
+            </a:pPr>
+            <a:fld id="{00000000-1234-1234-1234-123412341234}" type="slidenum">
+              <a:rPr lang="en"/>
+              <a:t>12</a:t>
+            </a:fld>
+            <a:endParaRPr/>
+          </a:p>
+        </p:txBody>
+      </p:sp>
+      <p:pic>
+        <p:nvPicPr>
+          <p:cNvPr id="4" name="Picture 3">
+            <a:extLst>
+              <a:ext uri="{FF2B5EF4-FFF2-40B4-BE49-F238E27FC236}">
+                <a16:creationId xmlns:a16="http://schemas.microsoft.com/office/drawing/2014/main" id="{DCD752B9-EFAE-AFC1-7D39-6763B89DE8D3}"/>
+              </a:ext>
+            </a:extLst>
+          </p:cNvPr>
+          <p:cNvPicPr>
+            <a:picLocks noChangeAspect="1"/>
+          </p:cNvPicPr>
+          <p:nvPr/>
+        </p:nvPicPr>
+        <p:blipFill>
+          <a:blip r:embed="rId3"/>
+          <a:stretch>
+            <a:fillRect/>
+          </a:stretch>
+        </p:blipFill>
+        <p:spPr>
+          <a:xfrm>
+            <a:off x="0" y="652130"/>
+            <a:ext cx="9144000" cy="4491369"/>
+          </a:xfrm>
+          <a:prstGeom prst="rect">
+            <a:avLst/>
+          </a:prstGeom>
+        </p:spPr>
+      </p:pic>
+    </p:spTree>
+    <p:extLst>
+      <p:ext uri="{BB962C8B-B14F-4D97-AF65-F5344CB8AC3E}">
+        <p14:creationId xmlns:p14="http://schemas.microsoft.com/office/powerpoint/2010/main" val="3365057756"/>
+      </p:ext>
+    </p:extLst>
+  </p:cSld>
+  <p:clrMapOvr>
+    <a:masterClrMapping/>
+  </p:clrMapOvr>
+</p:sld>
+</file>
+
+<file path=ppt/slides/slide2.xml><?xml version="1.0" encoding="utf-8"?>
+<p:sld xmlns:a="http://schemas.openxmlformats.org/drawingml/2006/main" xmlns:r="http://schemas.openxmlformats.org/officeDocument/2006/relationships" xmlns:p="http://schemas.openxmlformats.org/presentationml/2006/main" show="0">
+  <p:cSld>
+    <p:spTree>
+      <p:nvGrpSpPr>
         <p:cNvPr id="1" name="Shape 323"/>
         <p:cNvGrpSpPr/>
         <p:nvPr/>
@@ -6690,7 +8068,7 @@
             </a:pPr>
             <a:fld id="{00000000-1234-1234-1234-123412341234}" type="slidenum">
               <a:rPr lang="en"/>
-              <a:t>1</a:t>
+              <a:t>2</a:t>
             </a:fld>
             <a:endParaRPr/>
           </a:p>
@@ -7099,463 +8477,7 @@
 </p:sld>
 </file>
 
-<file path=ppt/slides/slide10.xml><?xml version="1.0" encoding="utf-8"?>
-<p:sld xmlns:a="http://schemas.openxmlformats.org/drawingml/2006/main" xmlns:r="http://schemas.openxmlformats.org/officeDocument/2006/relationships" xmlns:p="http://schemas.openxmlformats.org/presentationml/2006/main" show="0">
-  <p:cSld>
-    <p:spTree>
-      <p:nvGrpSpPr>
-        <p:cNvPr id="1" name="Shape 323"/>
-        <p:cNvGrpSpPr/>
-        <p:nvPr/>
-      </p:nvGrpSpPr>
-      <p:grpSpPr>
-        <a:xfrm>
-          <a:off x="0" y="0"/>
-          <a:ext cx="0" cy="0"/>
-          <a:chOff x="0" y="0"/>
-          <a:chExt cx="0" cy="0"/>
-        </a:xfrm>
-      </p:grpSpPr>
-      <p:sp>
-        <p:nvSpPr>
-          <p:cNvPr id="324" name="Google Shape;324;p47"/>
-          <p:cNvSpPr txBox="1">
-            <a:spLocks noGrp="1"/>
-          </p:cNvSpPr>
-          <p:nvPr>
-            <p:ph type="title"/>
-          </p:nvPr>
-        </p:nvSpPr>
-        <p:spPr>
-          <a:xfrm>
-            <a:off x="226208" y="1"/>
-            <a:ext cx="8520600" cy="464980"/>
-          </a:xfrm>
-          <a:prstGeom prst="rect">
-            <a:avLst/>
-          </a:prstGeom>
-        </p:spPr>
-        <p:txBody>
-          <a:bodyPr spcFirstLastPara="1" wrap="square" lIns="91425" tIns="91425" rIns="91425" bIns="91425" anchor="t" anchorCtr="0">
-            <a:noAutofit/>
-          </a:bodyPr>
-          <a:lstStyle/>
-          <a:p>
-            <a:pPr marL="0" lvl="0" indent="0" algn="ctr" rtl="0">
-              <a:spcBef>
-                <a:spcPts val="0"/>
-              </a:spcBef>
-              <a:spcAft>
-                <a:spcPts val="0"/>
-              </a:spcAft>
-              <a:buNone/>
-            </a:pPr>
-            <a:r>
-              <a:rPr lang="en-US" dirty="0"/>
-              <a:t>Use </a:t>
-            </a:r>
-            <a:r>
-              <a:rPr lang="en-US" sz="2400" dirty="0"/>
-              <a:t>Assigned</a:t>
-            </a:r>
-            <a:r>
-              <a:rPr lang="en-US" dirty="0"/>
-              <a:t> Seat</a:t>
-            </a:r>
-            <a:endParaRPr dirty="0"/>
-          </a:p>
-        </p:txBody>
-      </p:sp>
-      <p:sp>
-        <p:nvSpPr>
-          <p:cNvPr id="326" name="Google Shape;326;p47"/>
-          <p:cNvSpPr txBox="1">
-            <a:spLocks noGrp="1"/>
-          </p:cNvSpPr>
-          <p:nvPr>
-            <p:ph type="sldNum" idx="12"/>
-          </p:nvPr>
-        </p:nvSpPr>
-        <p:spPr>
-          <a:xfrm>
-            <a:off x="8472458" y="4663217"/>
-            <a:ext cx="548700" cy="393600"/>
-          </a:xfrm>
-          <a:prstGeom prst="rect">
-            <a:avLst/>
-          </a:prstGeom>
-        </p:spPr>
-        <p:txBody>
-          <a:bodyPr spcFirstLastPara="1" wrap="square" lIns="91425" tIns="91425" rIns="91425" bIns="91425" anchor="ctr" anchorCtr="0">
-            <a:noAutofit/>
-          </a:bodyPr>
-          <a:lstStyle/>
-          <a:p>
-            <a:pPr marL="0" lvl="0" indent="0" algn="r" rtl="0">
-              <a:spcBef>
-                <a:spcPts val="0"/>
-              </a:spcBef>
-              <a:spcAft>
-                <a:spcPts val="0"/>
-              </a:spcAft>
-              <a:buNone/>
-            </a:pPr>
-            <a:fld id="{00000000-1234-1234-1234-123412341234}" type="slidenum">
-              <a:rPr lang="en"/>
-              <a:t>10</a:t>
-            </a:fld>
-            <a:endParaRPr/>
-          </a:p>
-        </p:txBody>
-      </p:sp>
-      <p:pic>
-        <p:nvPicPr>
-          <p:cNvPr id="6" name="Picture 5">
-            <a:extLst>
-              <a:ext uri="{FF2B5EF4-FFF2-40B4-BE49-F238E27FC236}">
-                <a16:creationId xmlns:a16="http://schemas.microsoft.com/office/drawing/2014/main" id="{DED32793-7C09-E3A3-94E5-B5D46727A1D0}"/>
-              </a:ext>
-            </a:extLst>
-          </p:cNvPr>
-          <p:cNvPicPr>
-            <a:picLocks noChangeAspect="1"/>
-          </p:cNvPicPr>
-          <p:nvPr/>
-        </p:nvPicPr>
-        <p:blipFill>
-          <a:blip r:embed="rId3"/>
-          <a:stretch>
-            <a:fillRect/>
-          </a:stretch>
-        </p:blipFill>
-        <p:spPr>
-          <a:xfrm>
-            <a:off x="-1" y="551663"/>
-            <a:ext cx="9144001" cy="4591837"/>
-          </a:xfrm>
-          <a:prstGeom prst="rect">
-            <a:avLst/>
-          </a:prstGeom>
-        </p:spPr>
-      </p:pic>
-    </p:spTree>
-    <p:extLst>
-      <p:ext uri="{BB962C8B-B14F-4D97-AF65-F5344CB8AC3E}">
-        <p14:creationId xmlns:p14="http://schemas.microsoft.com/office/powerpoint/2010/main" val="4226348449"/>
-      </p:ext>
-    </p:extLst>
-  </p:cSld>
-  <p:clrMapOvr>
-    <a:masterClrMapping/>
-  </p:clrMapOvr>
-</p:sld>
-</file>
-
-<file path=ppt/slides/slide11.xml><?xml version="1.0" encoding="utf-8"?>
-<p:sld xmlns:a="http://schemas.openxmlformats.org/drawingml/2006/main" xmlns:r="http://schemas.openxmlformats.org/officeDocument/2006/relationships" xmlns:p="http://schemas.openxmlformats.org/presentationml/2006/main" show="0">
-  <p:cSld>
-    <p:spTree>
-      <p:nvGrpSpPr>
-        <p:cNvPr id="1" name="Shape 323"/>
-        <p:cNvGrpSpPr/>
-        <p:nvPr/>
-      </p:nvGrpSpPr>
-      <p:grpSpPr>
-        <a:xfrm>
-          <a:off x="0" y="0"/>
-          <a:ext cx="0" cy="0"/>
-          <a:chOff x="0" y="0"/>
-          <a:chExt cx="0" cy="0"/>
-        </a:xfrm>
-      </p:grpSpPr>
-      <p:sp>
-        <p:nvSpPr>
-          <p:cNvPr id="324" name="Google Shape;324;p47"/>
-          <p:cNvSpPr txBox="1">
-            <a:spLocks noGrp="1"/>
-          </p:cNvSpPr>
-          <p:nvPr>
-            <p:ph type="title"/>
-          </p:nvPr>
-        </p:nvSpPr>
-        <p:spPr>
-          <a:xfrm>
-            <a:off x="226208" y="1"/>
-            <a:ext cx="8520600" cy="464980"/>
-          </a:xfrm>
-          <a:prstGeom prst="rect">
-            <a:avLst/>
-          </a:prstGeom>
-        </p:spPr>
-        <p:txBody>
-          <a:bodyPr spcFirstLastPara="1" wrap="square" lIns="91425" tIns="91425" rIns="91425" bIns="91425" anchor="t" anchorCtr="0">
-            <a:noAutofit/>
-          </a:bodyPr>
-          <a:lstStyle/>
-          <a:p>
-            <a:pPr marL="0" lvl="0" indent="0" algn="ctr" rtl="0">
-              <a:spcBef>
-                <a:spcPts val="0"/>
-              </a:spcBef>
-              <a:spcAft>
-                <a:spcPts val="0"/>
-              </a:spcAft>
-              <a:buNone/>
-            </a:pPr>
-            <a:r>
-              <a:rPr lang="en-US" dirty="0"/>
-              <a:t>Use </a:t>
-            </a:r>
-            <a:r>
-              <a:rPr lang="en-US" sz="2400" dirty="0"/>
-              <a:t>Assigned</a:t>
-            </a:r>
-            <a:r>
-              <a:rPr lang="en-US" dirty="0"/>
-              <a:t> Seat</a:t>
-            </a:r>
-            <a:endParaRPr dirty="0"/>
-          </a:p>
-        </p:txBody>
-      </p:sp>
-      <p:sp>
-        <p:nvSpPr>
-          <p:cNvPr id="326" name="Google Shape;326;p47"/>
-          <p:cNvSpPr txBox="1">
-            <a:spLocks noGrp="1"/>
-          </p:cNvSpPr>
-          <p:nvPr>
-            <p:ph type="sldNum" idx="12"/>
-          </p:nvPr>
-        </p:nvSpPr>
-        <p:spPr>
-          <a:xfrm>
-            <a:off x="8472458" y="4663217"/>
-            <a:ext cx="548700" cy="393600"/>
-          </a:xfrm>
-          <a:prstGeom prst="rect">
-            <a:avLst/>
-          </a:prstGeom>
-        </p:spPr>
-        <p:txBody>
-          <a:bodyPr spcFirstLastPara="1" wrap="square" lIns="91425" tIns="91425" rIns="91425" bIns="91425" anchor="ctr" anchorCtr="0">
-            <a:noAutofit/>
-          </a:bodyPr>
-          <a:lstStyle/>
-          <a:p>
-            <a:pPr marL="0" lvl="0" indent="0" algn="r" rtl="0">
-              <a:spcBef>
-                <a:spcPts val="0"/>
-              </a:spcBef>
-              <a:spcAft>
-                <a:spcPts val="0"/>
-              </a:spcAft>
-              <a:buNone/>
-            </a:pPr>
-            <a:fld id="{00000000-1234-1234-1234-123412341234}" type="slidenum">
-              <a:rPr lang="en"/>
-              <a:t>11</a:t>
-            </a:fld>
-            <a:endParaRPr/>
-          </a:p>
-        </p:txBody>
-      </p:sp>
-      <p:pic>
-        <p:nvPicPr>
-          <p:cNvPr id="3" name="Picture 2">
-            <a:extLst>
-              <a:ext uri="{FF2B5EF4-FFF2-40B4-BE49-F238E27FC236}">
-                <a16:creationId xmlns:a16="http://schemas.microsoft.com/office/drawing/2014/main" id="{92DE4AAC-70FE-A114-5258-F5B22EDDED45}"/>
-              </a:ext>
-            </a:extLst>
-          </p:cNvPr>
-          <p:cNvPicPr>
-            <a:picLocks noChangeAspect="1"/>
-          </p:cNvPicPr>
-          <p:nvPr/>
-        </p:nvPicPr>
-        <p:blipFill>
-          <a:blip r:embed="rId3"/>
-          <a:stretch>
-            <a:fillRect/>
-          </a:stretch>
-        </p:blipFill>
-        <p:spPr>
-          <a:xfrm>
-            <a:off x="0" y="716280"/>
-            <a:ext cx="9144000" cy="4427218"/>
-          </a:xfrm>
-          <a:prstGeom prst="rect">
-            <a:avLst/>
-          </a:prstGeom>
-        </p:spPr>
-      </p:pic>
-    </p:spTree>
-    <p:extLst>
-      <p:ext uri="{BB962C8B-B14F-4D97-AF65-F5344CB8AC3E}">
-        <p14:creationId xmlns:p14="http://schemas.microsoft.com/office/powerpoint/2010/main" val="1976403023"/>
-      </p:ext>
-    </p:extLst>
-  </p:cSld>
-  <p:clrMapOvr>
-    <a:masterClrMapping/>
-  </p:clrMapOvr>
-</p:sld>
-</file>
-
-<file path=ppt/slides/slide12.xml><?xml version="1.0" encoding="utf-8"?>
-<p:sld xmlns:a="http://schemas.openxmlformats.org/drawingml/2006/main" xmlns:r="http://schemas.openxmlformats.org/officeDocument/2006/relationships" xmlns:p="http://schemas.openxmlformats.org/presentationml/2006/main" show="0">
-  <p:cSld>
-    <p:spTree>
-      <p:nvGrpSpPr>
-        <p:cNvPr id="1" name="Shape 323"/>
-        <p:cNvGrpSpPr/>
-        <p:nvPr/>
-      </p:nvGrpSpPr>
-      <p:grpSpPr>
-        <a:xfrm>
-          <a:off x="0" y="0"/>
-          <a:ext cx="0" cy="0"/>
-          <a:chOff x="0" y="0"/>
-          <a:chExt cx="0" cy="0"/>
-        </a:xfrm>
-      </p:grpSpPr>
-      <p:sp>
-        <p:nvSpPr>
-          <p:cNvPr id="324" name="Google Shape;324;p47"/>
-          <p:cNvSpPr txBox="1">
-            <a:spLocks noGrp="1"/>
-          </p:cNvSpPr>
-          <p:nvPr>
-            <p:ph type="title"/>
-          </p:nvPr>
-        </p:nvSpPr>
-        <p:spPr>
-          <a:xfrm>
-            <a:off x="226208" y="1"/>
-            <a:ext cx="8520600" cy="464980"/>
-          </a:xfrm>
-          <a:prstGeom prst="rect">
-            <a:avLst/>
-          </a:prstGeom>
-        </p:spPr>
-        <p:txBody>
-          <a:bodyPr spcFirstLastPara="1" wrap="square" lIns="91425" tIns="91425" rIns="91425" bIns="91425" anchor="t" anchorCtr="0">
-            <a:noAutofit/>
-          </a:bodyPr>
-          <a:lstStyle/>
-          <a:p>
-            <a:pPr marL="0" lvl="0" indent="0" algn="ctr" rtl="0">
-              <a:spcBef>
-                <a:spcPts val="0"/>
-              </a:spcBef>
-              <a:spcAft>
-                <a:spcPts val="0"/>
-              </a:spcAft>
-              <a:buNone/>
-            </a:pPr>
-            <a:r>
-              <a:rPr lang="en-US" dirty="0"/>
-              <a:t>Use </a:t>
-            </a:r>
-            <a:r>
-              <a:rPr lang="en-US" sz="2400" dirty="0"/>
-              <a:t>Assigned</a:t>
-            </a:r>
-            <a:r>
-              <a:rPr lang="en-US" dirty="0"/>
-              <a:t> Seat</a:t>
-            </a:r>
-            <a:endParaRPr dirty="0"/>
-          </a:p>
-        </p:txBody>
-      </p:sp>
-      <p:sp>
-        <p:nvSpPr>
-          <p:cNvPr id="326" name="Google Shape;326;p47"/>
-          <p:cNvSpPr txBox="1">
-            <a:spLocks noGrp="1"/>
-          </p:cNvSpPr>
-          <p:nvPr>
-            <p:ph type="sldNum" idx="12"/>
-          </p:nvPr>
-        </p:nvSpPr>
-        <p:spPr>
-          <a:xfrm>
-            <a:off x="8472458" y="4663217"/>
-            <a:ext cx="548700" cy="393600"/>
-          </a:xfrm>
-          <a:prstGeom prst="rect">
-            <a:avLst/>
-          </a:prstGeom>
-        </p:spPr>
-        <p:txBody>
-          <a:bodyPr spcFirstLastPara="1" wrap="square" lIns="91425" tIns="91425" rIns="91425" bIns="91425" anchor="ctr" anchorCtr="0">
-            <a:noAutofit/>
-          </a:bodyPr>
-          <a:lstStyle/>
-          <a:p>
-            <a:pPr marL="0" lvl="0" indent="0" algn="r" rtl="0">
-              <a:spcBef>
-                <a:spcPts val="0"/>
-              </a:spcBef>
-              <a:spcAft>
-                <a:spcPts val="0"/>
-              </a:spcAft>
-              <a:buNone/>
-            </a:pPr>
-            <a:fld id="{00000000-1234-1234-1234-123412341234}" type="slidenum">
-              <a:rPr lang="en"/>
-              <a:t>12</a:t>
-            </a:fld>
-            <a:endParaRPr/>
-          </a:p>
-        </p:txBody>
-      </p:sp>
-      <p:pic>
-        <p:nvPicPr>
-          <p:cNvPr id="4" name="Picture 3">
-            <a:extLst>
-              <a:ext uri="{FF2B5EF4-FFF2-40B4-BE49-F238E27FC236}">
-                <a16:creationId xmlns:a16="http://schemas.microsoft.com/office/drawing/2014/main" id="{DCD752B9-EFAE-AFC1-7D39-6763B89DE8D3}"/>
-              </a:ext>
-            </a:extLst>
-          </p:cNvPr>
-          <p:cNvPicPr>
-            <a:picLocks noChangeAspect="1"/>
-          </p:cNvPicPr>
-          <p:nvPr/>
-        </p:nvPicPr>
-        <p:blipFill>
-          <a:blip r:embed="rId3"/>
-          <a:stretch>
-            <a:fillRect/>
-          </a:stretch>
-        </p:blipFill>
-        <p:spPr>
-          <a:xfrm>
-            <a:off x="0" y="652130"/>
-            <a:ext cx="9144000" cy="4491369"/>
-          </a:xfrm>
-          <a:prstGeom prst="rect">
-            <a:avLst/>
-          </a:prstGeom>
-        </p:spPr>
-      </p:pic>
-    </p:spTree>
-    <p:extLst>
-      <p:ext uri="{BB962C8B-B14F-4D97-AF65-F5344CB8AC3E}">
-        <p14:creationId xmlns:p14="http://schemas.microsoft.com/office/powerpoint/2010/main" val="3365057756"/>
-      </p:ext>
-    </p:extLst>
-  </p:cSld>
-  <p:clrMapOvr>
-    <a:masterClrMapping/>
-  </p:clrMapOvr>
-</p:sld>
-</file>
-
-<file path=ppt/slides/slide2.xml><?xml version="1.0" encoding="utf-8"?>
+<file path=ppt/slides/slide3.xml><?xml version="1.0" encoding="utf-8"?>
 <p:sld xmlns:a="http://schemas.openxmlformats.org/drawingml/2006/main" xmlns:r="http://schemas.openxmlformats.org/officeDocument/2006/relationships" xmlns:p="http://schemas.openxmlformats.org/presentationml/2006/main" show="0">
   <p:cSld>
     <p:spTree>
@@ -7706,7 +8628,7 @@
             </a:pPr>
             <a:fld id="{00000000-1234-1234-1234-123412341234}" type="slidenum">
               <a:rPr lang="en"/>
-              <a:t>2</a:t>
+              <a:t>3</a:t>
             </a:fld>
             <a:endParaRPr/>
           </a:p>
@@ -8111,933 +9033,6 @@
     <p:extLst>
       <p:ext uri="{BB962C8B-B14F-4D97-AF65-F5344CB8AC3E}">
         <p14:creationId xmlns:p14="http://schemas.microsoft.com/office/powerpoint/2010/main" val="943055912"/>
-      </p:ext>
-    </p:extLst>
-  </p:cSld>
-  <p:clrMapOvr>
-    <a:masterClrMapping/>
-  </p:clrMapOvr>
-</p:sld>
-</file>
-
-<file path=ppt/slides/slide3.xml><?xml version="1.0" encoding="utf-8"?>
-<p:sld xmlns:a="http://schemas.openxmlformats.org/drawingml/2006/main" xmlns:r="http://schemas.openxmlformats.org/officeDocument/2006/relationships" xmlns:p="http://schemas.openxmlformats.org/presentationml/2006/main" show="0">
-  <p:cSld>
-    <p:spTree>
-      <p:nvGrpSpPr>
-        <p:cNvPr id="1" name="Shape 323">
-          <a:extLst>
-            <a:ext uri="{FF2B5EF4-FFF2-40B4-BE49-F238E27FC236}">
-              <a16:creationId xmlns:a16="http://schemas.microsoft.com/office/drawing/2014/main" id="{19512066-5980-8A8B-BE30-C4FB3AC72235}"/>
-            </a:ext>
-          </a:extLst>
-        </p:cNvPr>
-        <p:cNvGrpSpPr/>
-        <p:nvPr/>
-      </p:nvGrpSpPr>
-      <p:grpSpPr>
-        <a:xfrm>
-          <a:off x="0" y="0"/>
-          <a:ext cx="0" cy="0"/>
-          <a:chOff x="0" y="0"/>
-          <a:chExt cx="0" cy="0"/>
-        </a:xfrm>
-      </p:grpSpPr>
-      <p:sp>
-        <p:nvSpPr>
-          <p:cNvPr id="324" name="Google Shape;324;p47">
-            <a:extLst>
-              <a:ext uri="{FF2B5EF4-FFF2-40B4-BE49-F238E27FC236}">
-                <a16:creationId xmlns:a16="http://schemas.microsoft.com/office/drawing/2014/main" id="{CDF56279-13BE-3C44-BBEF-E7DC5D1E88D2}"/>
-              </a:ext>
-            </a:extLst>
-          </p:cNvPr>
-          <p:cNvSpPr txBox="1">
-            <a:spLocks noGrp="1"/>
-          </p:cNvSpPr>
-          <p:nvPr>
-            <p:ph type="title"/>
-          </p:nvPr>
-        </p:nvSpPr>
-        <p:spPr>
-          <a:xfrm>
-            <a:off x="300016" y="269197"/>
-            <a:ext cx="8520600" cy="623700"/>
-          </a:xfrm>
-          <a:prstGeom prst="rect">
-            <a:avLst/>
-          </a:prstGeom>
-        </p:spPr>
-        <p:txBody>
-          <a:bodyPr spcFirstLastPara="1" wrap="square" lIns="91425" tIns="91425" rIns="91425" bIns="91425" anchor="t" anchorCtr="0">
-            <a:noAutofit/>
-          </a:bodyPr>
-          <a:lstStyle/>
-          <a:p>
-            <a:pPr marL="0" lvl="0" indent="0" algn="ctr" rtl="0">
-              <a:spcBef>
-                <a:spcPts val="0"/>
-              </a:spcBef>
-              <a:spcAft>
-                <a:spcPts val="0"/>
-              </a:spcAft>
-              <a:buNone/>
-            </a:pPr>
-            <a:r>
-              <a:rPr lang="en-US" dirty="0"/>
-              <a:t>GCIS – Software Development and Problem Solving</a:t>
-            </a:r>
-            <a:endParaRPr dirty="0"/>
-          </a:p>
-        </p:txBody>
-      </p:sp>
-      <p:sp>
-        <p:nvSpPr>
-          <p:cNvPr id="325" name="Google Shape;325;p47">
-            <a:extLst>
-              <a:ext uri="{FF2B5EF4-FFF2-40B4-BE49-F238E27FC236}">
-                <a16:creationId xmlns:a16="http://schemas.microsoft.com/office/drawing/2014/main" id="{5A9661D1-8430-BF80-279A-41B28CA04273}"/>
-              </a:ext>
-            </a:extLst>
-          </p:cNvPr>
-          <p:cNvSpPr txBox="1">
-            <a:spLocks noGrp="1"/>
-          </p:cNvSpPr>
-          <p:nvPr>
-            <p:ph type="body" idx="1"/>
-          </p:nvPr>
-        </p:nvSpPr>
-        <p:spPr>
-          <a:xfrm>
-            <a:off x="91445" y="1758316"/>
-            <a:ext cx="4000496" cy="1378401"/>
-          </a:xfrm>
-          <a:prstGeom prst="rect">
-            <a:avLst/>
-          </a:prstGeom>
-        </p:spPr>
-        <p:txBody>
-          <a:bodyPr spcFirstLastPara="1" wrap="square" lIns="91425" tIns="91425" rIns="91425" bIns="91425" anchor="ctr" anchorCtr="0">
-            <a:noAutofit/>
-          </a:bodyPr>
-          <a:lstStyle/>
-          <a:p>
-            <a:pPr marL="146050" indent="0">
-              <a:buNone/>
-            </a:pPr>
-            <a:r>
-              <a:rPr lang="en-US" sz="1600" dirty="0"/>
-              <a:t>Take Quiz 4.2: </a:t>
-            </a:r>
-            <a:r>
-              <a:rPr lang="en-US" sz="1600" dirty="0" err="1"/>
-              <a:t>Lamdas</a:t>
-            </a:r>
-            <a:endParaRPr lang="en-US" sz="1600" dirty="0"/>
-          </a:p>
-          <a:p>
-            <a:pPr marL="146050" indent="0">
-              <a:buNone/>
-            </a:pPr>
-            <a:r>
-              <a:rPr lang="en-US" sz="1600" dirty="0">
-                <a:solidFill>
-                  <a:schemeClr val="tx1"/>
-                </a:solidFill>
-              </a:rPr>
-              <a:t>Password – </a:t>
-            </a:r>
-            <a:r>
-              <a:rPr lang="en-US" sz="1600" dirty="0" err="1">
-                <a:solidFill>
-                  <a:schemeClr val="tx1"/>
-                </a:solidFill>
-              </a:rPr>
-              <a:t>AnonymousLambdas</a:t>
-            </a:r>
-            <a:endParaRPr sz="1600" dirty="0">
-              <a:solidFill>
-                <a:schemeClr val="tx1"/>
-              </a:solidFill>
-            </a:endParaRPr>
-          </a:p>
-        </p:txBody>
-      </p:sp>
-      <p:sp>
-        <p:nvSpPr>
-          <p:cNvPr id="326" name="Google Shape;326;p47">
-            <a:extLst>
-              <a:ext uri="{FF2B5EF4-FFF2-40B4-BE49-F238E27FC236}">
-                <a16:creationId xmlns:a16="http://schemas.microsoft.com/office/drawing/2014/main" id="{8A14E227-935A-FBD8-6BD5-CBCE8D13EE84}"/>
-              </a:ext>
-            </a:extLst>
-          </p:cNvPr>
-          <p:cNvSpPr txBox="1">
-            <a:spLocks noGrp="1"/>
-          </p:cNvSpPr>
-          <p:nvPr>
-            <p:ph type="sldNum" idx="12"/>
-          </p:nvPr>
-        </p:nvSpPr>
-        <p:spPr>
-          <a:xfrm>
-            <a:off x="8472458" y="4663217"/>
-            <a:ext cx="548700" cy="393600"/>
-          </a:xfrm>
-          <a:prstGeom prst="rect">
-            <a:avLst/>
-          </a:prstGeom>
-        </p:spPr>
-        <p:txBody>
-          <a:bodyPr spcFirstLastPara="1" wrap="square" lIns="91425" tIns="91425" rIns="91425" bIns="91425" anchor="ctr" anchorCtr="0">
-            <a:noAutofit/>
-          </a:bodyPr>
-          <a:lstStyle/>
-          <a:p>
-            <a:pPr marL="0" lvl="0" indent="0" algn="r" rtl="0">
-              <a:spcBef>
-                <a:spcPts val="0"/>
-              </a:spcBef>
-              <a:spcAft>
-                <a:spcPts val="0"/>
-              </a:spcAft>
-              <a:buNone/>
-            </a:pPr>
-            <a:fld id="{00000000-1234-1234-1234-123412341234}" type="slidenum">
-              <a:rPr lang="en"/>
-              <a:t>3</a:t>
-            </a:fld>
-            <a:endParaRPr/>
-          </a:p>
-        </p:txBody>
-      </p:sp>
-      <p:sp>
-        <p:nvSpPr>
-          <p:cNvPr id="2" name="TextBox 1">
-            <a:extLst>
-              <a:ext uri="{FF2B5EF4-FFF2-40B4-BE49-F238E27FC236}">
-                <a16:creationId xmlns:a16="http://schemas.microsoft.com/office/drawing/2014/main" id="{AE960589-7B12-D7F7-6452-D45441D8CA95}"/>
-              </a:ext>
-            </a:extLst>
-          </p:cNvPr>
-          <p:cNvSpPr txBox="1"/>
-          <p:nvPr/>
-        </p:nvSpPr>
-        <p:spPr>
-          <a:xfrm>
-            <a:off x="-11684" y="1287037"/>
-            <a:ext cx="9144000" cy="338555"/>
-          </a:xfrm>
-          <a:prstGeom prst="rect">
-            <a:avLst/>
-          </a:prstGeom>
-          <a:solidFill>
-            <a:srgbClr val="FFC000"/>
-          </a:solidFill>
-        </p:spPr>
-        <p:txBody>
-          <a:bodyPr wrap="square" rtlCol="0">
-            <a:spAutoFit/>
-          </a:bodyPr>
-          <a:lstStyle/>
-          <a:p>
-            <a:r>
-              <a:rPr lang="en-US" dirty="0"/>
-              <a:t>Quiz</a:t>
-            </a:r>
-          </a:p>
-        </p:txBody>
-      </p:sp>
-      <p:sp>
-        <p:nvSpPr>
-          <p:cNvPr id="3" name="TextBox 2">
-            <a:extLst>
-              <a:ext uri="{FF2B5EF4-FFF2-40B4-BE49-F238E27FC236}">
-                <a16:creationId xmlns:a16="http://schemas.microsoft.com/office/drawing/2014/main" id="{4FD526CA-3FDB-A5C2-36D9-69A3252D5E9A}"/>
-              </a:ext>
-            </a:extLst>
-          </p:cNvPr>
-          <p:cNvSpPr txBox="1"/>
-          <p:nvPr/>
-        </p:nvSpPr>
-        <p:spPr>
-          <a:xfrm>
-            <a:off x="0" y="3507404"/>
-            <a:ext cx="9144000" cy="307777"/>
-          </a:xfrm>
-          <a:prstGeom prst="rect">
-            <a:avLst/>
-          </a:prstGeom>
-          <a:solidFill>
-            <a:srgbClr val="FFC000"/>
-          </a:solidFill>
-        </p:spPr>
-        <p:txBody>
-          <a:bodyPr wrap="square" rtlCol="0">
-            <a:spAutoFit/>
-          </a:bodyPr>
-          <a:lstStyle/>
-          <a:p>
-            <a:r>
-              <a:rPr lang="en-US" dirty="0"/>
-              <a:t>Next </a:t>
-            </a:r>
-            <a:r>
-              <a:rPr lang="en-US" dirty="0">
-                <a:sym typeface="Wingdings" panose="05000000000000000000" pitchFamily="2" charset="2"/>
-              </a:rPr>
-              <a:t> </a:t>
-            </a:r>
-            <a:endParaRPr lang="en-US" dirty="0"/>
-          </a:p>
-        </p:txBody>
-      </p:sp>
-      <p:sp>
-        <p:nvSpPr>
-          <p:cNvPr id="4" name="Google Shape;325;p47">
-            <a:extLst>
-              <a:ext uri="{FF2B5EF4-FFF2-40B4-BE49-F238E27FC236}">
-                <a16:creationId xmlns:a16="http://schemas.microsoft.com/office/drawing/2014/main" id="{DC50CCB1-5AFE-1F52-8B22-87EB927965B4}"/>
-              </a:ext>
-            </a:extLst>
-          </p:cNvPr>
-          <p:cNvSpPr txBox="1">
-            <a:spLocks/>
-          </p:cNvSpPr>
-          <p:nvPr/>
-        </p:nvSpPr>
-        <p:spPr>
-          <a:xfrm>
-            <a:off x="-5842" y="3848100"/>
-            <a:ext cx="9149842" cy="1208717"/>
-          </a:xfrm>
-          <a:prstGeom prst="rect">
-            <a:avLst/>
-          </a:prstGeom>
-          <a:noFill/>
-          <a:ln>
-            <a:noFill/>
-          </a:ln>
-        </p:spPr>
-        <p:txBody>
-          <a:bodyPr spcFirstLastPara="1" wrap="square" lIns="91425" tIns="91425" rIns="91425" bIns="91425" anchor="ctr" anchorCtr="0">
-            <a:noAutofit/>
-          </a:bodyPr>
-          <a:lstStyle>
-            <a:defPPr marR="0" lvl="0" algn="l" rtl="0">
-              <a:lnSpc>
-                <a:spcPct val="100000"/>
-              </a:lnSpc>
-              <a:spcBef>
-                <a:spcPts val="0"/>
-              </a:spcBef>
-              <a:spcAft>
-                <a:spcPts val="0"/>
-              </a:spcAft>
-            </a:defPPr>
-            <a:lvl1pPr marL="457200" marR="0" lvl="0" indent="-311150" algn="l" rtl="0">
-              <a:lnSpc>
-                <a:spcPct val="115000"/>
-              </a:lnSpc>
-              <a:spcBef>
-                <a:spcPts val="0"/>
-              </a:spcBef>
-              <a:spcAft>
-                <a:spcPts val="0"/>
-              </a:spcAft>
-              <a:buClr>
-                <a:schemeClr val="dk2"/>
-              </a:buClr>
-              <a:buSzPts val="1300"/>
-              <a:buFont typeface="Roboto"/>
-              <a:buChar char="●"/>
-              <a:defRPr sz="1300" b="0" i="0" u="none" strike="noStrike" cap="none">
-                <a:solidFill>
-                  <a:schemeClr val="dk2"/>
-                </a:solidFill>
-                <a:latin typeface="Roboto"/>
-                <a:ea typeface="Roboto"/>
-                <a:cs typeface="Roboto"/>
-                <a:sym typeface="Roboto"/>
-              </a:defRPr>
-            </a:lvl1pPr>
-            <a:lvl2pPr marL="914400" marR="0" lvl="1" indent="-298450" algn="l" rtl="0">
-              <a:lnSpc>
-                <a:spcPct val="115000"/>
-              </a:lnSpc>
-              <a:spcBef>
-                <a:spcPts val="1600"/>
-              </a:spcBef>
-              <a:spcAft>
-                <a:spcPts val="0"/>
-              </a:spcAft>
-              <a:buClr>
-                <a:schemeClr val="dk2"/>
-              </a:buClr>
-              <a:buSzPts val="1100"/>
-              <a:buFont typeface="Roboto"/>
-              <a:buChar char="○"/>
-              <a:defRPr sz="1100" b="0" i="0" u="none" strike="noStrike" cap="none">
-                <a:solidFill>
-                  <a:schemeClr val="dk2"/>
-                </a:solidFill>
-                <a:latin typeface="Roboto"/>
-                <a:ea typeface="Roboto"/>
-                <a:cs typeface="Roboto"/>
-                <a:sym typeface="Roboto"/>
-              </a:defRPr>
-            </a:lvl2pPr>
-            <a:lvl3pPr marL="1371600" marR="0" lvl="2" indent="-298450" algn="l" rtl="0">
-              <a:lnSpc>
-                <a:spcPct val="115000"/>
-              </a:lnSpc>
-              <a:spcBef>
-                <a:spcPts val="1600"/>
-              </a:spcBef>
-              <a:spcAft>
-                <a:spcPts val="0"/>
-              </a:spcAft>
-              <a:buClr>
-                <a:schemeClr val="dk2"/>
-              </a:buClr>
-              <a:buSzPts val="1100"/>
-              <a:buFont typeface="Roboto"/>
-              <a:buChar char="■"/>
-              <a:defRPr sz="1100" b="0" i="0" u="none" strike="noStrike" cap="none">
-                <a:solidFill>
-                  <a:schemeClr val="dk2"/>
-                </a:solidFill>
-                <a:latin typeface="Roboto"/>
-                <a:ea typeface="Roboto"/>
-                <a:cs typeface="Roboto"/>
-                <a:sym typeface="Roboto"/>
-              </a:defRPr>
-            </a:lvl3pPr>
-            <a:lvl4pPr marL="1828800" marR="0" lvl="3" indent="-298450" algn="l" rtl="0">
-              <a:lnSpc>
-                <a:spcPct val="115000"/>
-              </a:lnSpc>
-              <a:spcBef>
-                <a:spcPts val="1600"/>
-              </a:spcBef>
-              <a:spcAft>
-                <a:spcPts val="0"/>
-              </a:spcAft>
-              <a:buClr>
-                <a:schemeClr val="dk2"/>
-              </a:buClr>
-              <a:buSzPts val="1100"/>
-              <a:buFont typeface="Roboto"/>
-              <a:buChar char="●"/>
-              <a:defRPr sz="1100" b="0" i="0" u="none" strike="noStrike" cap="none">
-                <a:solidFill>
-                  <a:schemeClr val="dk2"/>
-                </a:solidFill>
-                <a:latin typeface="Roboto"/>
-                <a:ea typeface="Roboto"/>
-                <a:cs typeface="Roboto"/>
-                <a:sym typeface="Roboto"/>
-              </a:defRPr>
-            </a:lvl4pPr>
-            <a:lvl5pPr marL="2286000" marR="0" lvl="4" indent="-298450" algn="l" rtl="0">
-              <a:lnSpc>
-                <a:spcPct val="115000"/>
-              </a:lnSpc>
-              <a:spcBef>
-                <a:spcPts val="1600"/>
-              </a:spcBef>
-              <a:spcAft>
-                <a:spcPts val="0"/>
-              </a:spcAft>
-              <a:buClr>
-                <a:schemeClr val="dk2"/>
-              </a:buClr>
-              <a:buSzPts val="1100"/>
-              <a:buFont typeface="Roboto"/>
-              <a:buChar char="○"/>
-              <a:defRPr sz="1100" b="0" i="0" u="none" strike="noStrike" cap="none">
-                <a:solidFill>
-                  <a:schemeClr val="dk2"/>
-                </a:solidFill>
-                <a:latin typeface="Roboto"/>
-                <a:ea typeface="Roboto"/>
-                <a:cs typeface="Roboto"/>
-                <a:sym typeface="Roboto"/>
-              </a:defRPr>
-            </a:lvl5pPr>
-            <a:lvl6pPr marL="2743200" marR="0" lvl="5" indent="-298450" algn="l" rtl="0">
-              <a:lnSpc>
-                <a:spcPct val="115000"/>
-              </a:lnSpc>
-              <a:spcBef>
-                <a:spcPts val="1600"/>
-              </a:spcBef>
-              <a:spcAft>
-                <a:spcPts val="0"/>
-              </a:spcAft>
-              <a:buClr>
-                <a:schemeClr val="dk2"/>
-              </a:buClr>
-              <a:buSzPts val="1100"/>
-              <a:buFont typeface="Roboto"/>
-              <a:buChar char="■"/>
-              <a:defRPr sz="1100" b="0" i="0" u="none" strike="noStrike" cap="none">
-                <a:solidFill>
-                  <a:schemeClr val="dk2"/>
-                </a:solidFill>
-                <a:latin typeface="Roboto"/>
-                <a:ea typeface="Roboto"/>
-                <a:cs typeface="Roboto"/>
-                <a:sym typeface="Roboto"/>
-              </a:defRPr>
-            </a:lvl6pPr>
-            <a:lvl7pPr marL="3200400" marR="0" lvl="6" indent="-298450" algn="l" rtl="0">
-              <a:lnSpc>
-                <a:spcPct val="115000"/>
-              </a:lnSpc>
-              <a:spcBef>
-                <a:spcPts val="1600"/>
-              </a:spcBef>
-              <a:spcAft>
-                <a:spcPts val="0"/>
-              </a:spcAft>
-              <a:buClr>
-                <a:schemeClr val="dk2"/>
-              </a:buClr>
-              <a:buSzPts val="1100"/>
-              <a:buFont typeface="Roboto"/>
-              <a:buChar char="●"/>
-              <a:defRPr sz="1100" b="0" i="0" u="none" strike="noStrike" cap="none">
-                <a:solidFill>
-                  <a:schemeClr val="dk2"/>
-                </a:solidFill>
-                <a:latin typeface="Roboto"/>
-                <a:ea typeface="Roboto"/>
-                <a:cs typeface="Roboto"/>
-                <a:sym typeface="Roboto"/>
-              </a:defRPr>
-            </a:lvl7pPr>
-            <a:lvl8pPr marL="3657600" marR="0" lvl="7" indent="-298450" algn="l" rtl="0">
-              <a:lnSpc>
-                <a:spcPct val="115000"/>
-              </a:lnSpc>
-              <a:spcBef>
-                <a:spcPts val="1600"/>
-              </a:spcBef>
-              <a:spcAft>
-                <a:spcPts val="0"/>
-              </a:spcAft>
-              <a:buClr>
-                <a:schemeClr val="dk2"/>
-              </a:buClr>
-              <a:buSzPts val="1100"/>
-              <a:buFont typeface="Roboto"/>
-              <a:buChar char="○"/>
-              <a:defRPr sz="1100" b="0" i="0" u="none" strike="noStrike" cap="none">
-                <a:solidFill>
-                  <a:schemeClr val="dk2"/>
-                </a:solidFill>
-                <a:latin typeface="Roboto"/>
-                <a:ea typeface="Roboto"/>
-                <a:cs typeface="Roboto"/>
-                <a:sym typeface="Roboto"/>
-              </a:defRPr>
-            </a:lvl8pPr>
-            <a:lvl9pPr marL="4114800" marR="0" lvl="8" indent="-298450" algn="l" rtl="0">
-              <a:lnSpc>
-                <a:spcPct val="115000"/>
-              </a:lnSpc>
-              <a:spcBef>
-                <a:spcPts val="1600"/>
-              </a:spcBef>
-              <a:spcAft>
-                <a:spcPts val="1600"/>
-              </a:spcAft>
-              <a:buClr>
-                <a:schemeClr val="dk2"/>
-              </a:buClr>
-              <a:buSzPts val="1100"/>
-              <a:buFont typeface="Roboto"/>
-              <a:buChar char="■"/>
-              <a:defRPr sz="1100" b="0" i="0" u="none" strike="noStrike" cap="none">
-                <a:solidFill>
-                  <a:schemeClr val="dk2"/>
-                </a:solidFill>
-                <a:latin typeface="Roboto"/>
-                <a:ea typeface="Roboto"/>
-                <a:cs typeface="Roboto"/>
-                <a:sym typeface="Roboto"/>
-              </a:defRPr>
-            </a:lvl9pPr>
-          </a:lstStyle>
-          <a:p>
-            <a:pPr marL="0" indent="0">
-              <a:spcAft>
-                <a:spcPts val="1600"/>
-              </a:spcAft>
-              <a:buNone/>
-            </a:pPr>
-            <a:r>
-              <a:rPr lang="en-US" sz="1400" dirty="0"/>
-              <a:t>After completing the Quiz </a:t>
-            </a:r>
-          </a:p>
-          <a:p>
-            <a:pPr marL="342900" indent="-342900">
-              <a:spcAft>
-                <a:spcPts val="1600"/>
-              </a:spcAft>
-            </a:pPr>
-            <a:r>
-              <a:rPr lang="en-US" sz="1200" dirty="0"/>
-              <a:t>Accept GitHub Classroom Assignment for Unit 05</a:t>
-            </a:r>
-          </a:p>
-          <a:p>
-            <a:pPr marL="342900" indent="-342900">
-              <a:spcAft>
-                <a:spcPts val="1600"/>
-              </a:spcAft>
-            </a:pPr>
-            <a:r>
-              <a:rPr lang="en-US" sz="1200" dirty="0"/>
-              <a:t>Clone/pull GitHub classroom repo for Unit 05 under </a:t>
-            </a:r>
-            <a:r>
-              <a:rPr lang="en-US" sz="1200" dirty="0" err="1"/>
-              <a:t>softdevII</a:t>
-            </a:r>
-            <a:r>
-              <a:rPr lang="en-US" sz="1200" dirty="0"/>
-              <a:t> folder</a:t>
-            </a:r>
-            <a:endParaRPr lang="en-US" sz="1200" dirty="0">
-              <a:solidFill>
-                <a:schemeClr val="tx1"/>
-              </a:solidFill>
-            </a:endParaRPr>
-          </a:p>
-        </p:txBody>
-      </p:sp>
-      <p:sp>
-        <p:nvSpPr>
-          <p:cNvPr id="5" name="Google Shape;325;p47">
-            <a:extLst>
-              <a:ext uri="{FF2B5EF4-FFF2-40B4-BE49-F238E27FC236}">
-                <a16:creationId xmlns:a16="http://schemas.microsoft.com/office/drawing/2014/main" id="{7B85466C-6200-EE66-9396-7DECA70CDF53}"/>
-              </a:ext>
-            </a:extLst>
-          </p:cNvPr>
-          <p:cNvSpPr txBox="1">
-            <a:spLocks/>
-          </p:cNvSpPr>
-          <p:nvPr/>
-        </p:nvSpPr>
-        <p:spPr>
-          <a:xfrm>
-            <a:off x="4303618" y="1737005"/>
-            <a:ext cx="4516998" cy="1378400"/>
-          </a:xfrm>
-          <a:prstGeom prst="rect">
-            <a:avLst/>
-          </a:prstGeom>
-          <a:noFill/>
-          <a:ln>
-            <a:noFill/>
-          </a:ln>
-        </p:spPr>
-        <p:txBody>
-          <a:bodyPr spcFirstLastPara="1" wrap="square" lIns="91425" tIns="91425" rIns="91425" bIns="91425" anchor="ctr" anchorCtr="0">
-            <a:noAutofit/>
-          </a:bodyPr>
-          <a:lstStyle>
-            <a:defPPr marR="0" lvl="0" algn="l" rtl="0">
-              <a:lnSpc>
-                <a:spcPct val="100000"/>
-              </a:lnSpc>
-              <a:spcBef>
-                <a:spcPts val="0"/>
-              </a:spcBef>
-              <a:spcAft>
-                <a:spcPts val="0"/>
-              </a:spcAft>
-            </a:defPPr>
-            <a:lvl1pPr marL="457200" marR="0" lvl="0" indent="-311150" algn="l" rtl="0">
-              <a:lnSpc>
-                <a:spcPct val="115000"/>
-              </a:lnSpc>
-              <a:spcBef>
-                <a:spcPts val="0"/>
-              </a:spcBef>
-              <a:spcAft>
-                <a:spcPts val="0"/>
-              </a:spcAft>
-              <a:buClr>
-                <a:schemeClr val="dk2"/>
-              </a:buClr>
-              <a:buSzPts val="1300"/>
-              <a:buFont typeface="Roboto"/>
-              <a:buChar char="●"/>
-              <a:defRPr sz="1300" b="0" i="0" u="none" strike="noStrike" cap="none">
-                <a:solidFill>
-                  <a:schemeClr val="dk2"/>
-                </a:solidFill>
-                <a:latin typeface="Roboto"/>
-                <a:ea typeface="Roboto"/>
-                <a:cs typeface="Roboto"/>
-                <a:sym typeface="Roboto"/>
-              </a:defRPr>
-            </a:lvl1pPr>
-            <a:lvl2pPr marL="914400" marR="0" lvl="1" indent="-298450" algn="l" rtl="0">
-              <a:lnSpc>
-                <a:spcPct val="115000"/>
-              </a:lnSpc>
-              <a:spcBef>
-                <a:spcPts val="1600"/>
-              </a:spcBef>
-              <a:spcAft>
-                <a:spcPts val="0"/>
-              </a:spcAft>
-              <a:buClr>
-                <a:schemeClr val="dk2"/>
-              </a:buClr>
-              <a:buSzPts val="1100"/>
-              <a:buFont typeface="Roboto"/>
-              <a:buChar char="○"/>
-              <a:defRPr sz="1100" b="0" i="0" u="none" strike="noStrike" cap="none">
-                <a:solidFill>
-                  <a:schemeClr val="dk2"/>
-                </a:solidFill>
-                <a:latin typeface="Roboto"/>
-                <a:ea typeface="Roboto"/>
-                <a:cs typeface="Roboto"/>
-                <a:sym typeface="Roboto"/>
-              </a:defRPr>
-            </a:lvl2pPr>
-            <a:lvl3pPr marL="1371600" marR="0" lvl="2" indent="-298450" algn="l" rtl="0">
-              <a:lnSpc>
-                <a:spcPct val="115000"/>
-              </a:lnSpc>
-              <a:spcBef>
-                <a:spcPts val="1600"/>
-              </a:spcBef>
-              <a:spcAft>
-                <a:spcPts val="0"/>
-              </a:spcAft>
-              <a:buClr>
-                <a:schemeClr val="dk2"/>
-              </a:buClr>
-              <a:buSzPts val="1100"/>
-              <a:buFont typeface="Roboto"/>
-              <a:buChar char="■"/>
-              <a:defRPr sz="1100" b="0" i="0" u="none" strike="noStrike" cap="none">
-                <a:solidFill>
-                  <a:schemeClr val="dk2"/>
-                </a:solidFill>
-                <a:latin typeface="Roboto"/>
-                <a:ea typeface="Roboto"/>
-                <a:cs typeface="Roboto"/>
-                <a:sym typeface="Roboto"/>
-              </a:defRPr>
-            </a:lvl3pPr>
-            <a:lvl4pPr marL="1828800" marR="0" lvl="3" indent="-298450" algn="l" rtl="0">
-              <a:lnSpc>
-                <a:spcPct val="115000"/>
-              </a:lnSpc>
-              <a:spcBef>
-                <a:spcPts val="1600"/>
-              </a:spcBef>
-              <a:spcAft>
-                <a:spcPts val="0"/>
-              </a:spcAft>
-              <a:buClr>
-                <a:schemeClr val="dk2"/>
-              </a:buClr>
-              <a:buSzPts val="1100"/>
-              <a:buFont typeface="Roboto"/>
-              <a:buChar char="●"/>
-              <a:defRPr sz="1100" b="0" i="0" u="none" strike="noStrike" cap="none">
-                <a:solidFill>
-                  <a:schemeClr val="dk2"/>
-                </a:solidFill>
-                <a:latin typeface="Roboto"/>
-                <a:ea typeface="Roboto"/>
-                <a:cs typeface="Roboto"/>
-                <a:sym typeface="Roboto"/>
-              </a:defRPr>
-            </a:lvl4pPr>
-            <a:lvl5pPr marL="2286000" marR="0" lvl="4" indent="-298450" algn="l" rtl="0">
-              <a:lnSpc>
-                <a:spcPct val="115000"/>
-              </a:lnSpc>
-              <a:spcBef>
-                <a:spcPts val="1600"/>
-              </a:spcBef>
-              <a:spcAft>
-                <a:spcPts val="0"/>
-              </a:spcAft>
-              <a:buClr>
-                <a:schemeClr val="dk2"/>
-              </a:buClr>
-              <a:buSzPts val="1100"/>
-              <a:buFont typeface="Roboto"/>
-              <a:buChar char="○"/>
-              <a:defRPr sz="1100" b="0" i="0" u="none" strike="noStrike" cap="none">
-                <a:solidFill>
-                  <a:schemeClr val="dk2"/>
-                </a:solidFill>
-                <a:latin typeface="Roboto"/>
-                <a:ea typeface="Roboto"/>
-                <a:cs typeface="Roboto"/>
-                <a:sym typeface="Roboto"/>
-              </a:defRPr>
-            </a:lvl5pPr>
-            <a:lvl6pPr marL="2743200" marR="0" lvl="5" indent="-298450" algn="l" rtl="0">
-              <a:lnSpc>
-                <a:spcPct val="115000"/>
-              </a:lnSpc>
-              <a:spcBef>
-                <a:spcPts val="1600"/>
-              </a:spcBef>
-              <a:spcAft>
-                <a:spcPts val="0"/>
-              </a:spcAft>
-              <a:buClr>
-                <a:schemeClr val="dk2"/>
-              </a:buClr>
-              <a:buSzPts val="1100"/>
-              <a:buFont typeface="Roboto"/>
-              <a:buChar char="■"/>
-              <a:defRPr sz="1100" b="0" i="0" u="none" strike="noStrike" cap="none">
-                <a:solidFill>
-                  <a:schemeClr val="dk2"/>
-                </a:solidFill>
-                <a:latin typeface="Roboto"/>
-                <a:ea typeface="Roboto"/>
-                <a:cs typeface="Roboto"/>
-                <a:sym typeface="Roboto"/>
-              </a:defRPr>
-            </a:lvl6pPr>
-            <a:lvl7pPr marL="3200400" marR="0" lvl="6" indent="-298450" algn="l" rtl="0">
-              <a:lnSpc>
-                <a:spcPct val="115000"/>
-              </a:lnSpc>
-              <a:spcBef>
-                <a:spcPts val="1600"/>
-              </a:spcBef>
-              <a:spcAft>
-                <a:spcPts val="0"/>
-              </a:spcAft>
-              <a:buClr>
-                <a:schemeClr val="dk2"/>
-              </a:buClr>
-              <a:buSzPts val="1100"/>
-              <a:buFont typeface="Roboto"/>
-              <a:buChar char="●"/>
-              <a:defRPr sz="1100" b="0" i="0" u="none" strike="noStrike" cap="none">
-                <a:solidFill>
-                  <a:schemeClr val="dk2"/>
-                </a:solidFill>
-                <a:latin typeface="Roboto"/>
-                <a:ea typeface="Roboto"/>
-                <a:cs typeface="Roboto"/>
-                <a:sym typeface="Roboto"/>
-              </a:defRPr>
-            </a:lvl7pPr>
-            <a:lvl8pPr marL="3657600" marR="0" lvl="7" indent="-298450" algn="l" rtl="0">
-              <a:lnSpc>
-                <a:spcPct val="115000"/>
-              </a:lnSpc>
-              <a:spcBef>
-                <a:spcPts val="1600"/>
-              </a:spcBef>
-              <a:spcAft>
-                <a:spcPts val="0"/>
-              </a:spcAft>
-              <a:buClr>
-                <a:schemeClr val="dk2"/>
-              </a:buClr>
-              <a:buSzPts val="1100"/>
-              <a:buFont typeface="Roboto"/>
-              <a:buChar char="○"/>
-              <a:defRPr sz="1100" b="0" i="0" u="none" strike="noStrike" cap="none">
-                <a:solidFill>
-                  <a:schemeClr val="dk2"/>
-                </a:solidFill>
-                <a:latin typeface="Roboto"/>
-                <a:ea typeface="Roboto"/>
-                <a:cs typeface="Roboto"/>
-                <a:sym typeface="Roboto"/>
-              </a:defRPr>
-            </a:lvl8pPr>
-            <a:lvl9pPr marL="4114800" marR="0" lvl="8" indent="-298450" algn="l" rtl="0">
-              <a:lnSpc>
-                <a:spcPct val="115000"/>
-              </a:lnSpc>
-              <a:spcBef>
-                <a:spcPts val="1600"/>
-              </a:spcBef>
-              <a:spcAft>
-                <a:spcPts val="1600"/>
-              </a:spcAft>
-              <a:buClr>
-                <a:schemeClr val="dk2"/>
-              </a:buClr>
-              <a:buSzPts val="1100"/>
-              <a:buFont typeface="Roboto"/>
-              <a:buChar char="■"/>
-              <a:defRPr sz="1100" b="0" i="0" u="none" strike="noStrike" cap="none">
-                <a:solidFill>
-                  <a:schemeClr val="dk2"/>
-                </a:solidFill>
-                <a:latin typeface="Roboto"/>
-                <a:ea typeface="Roboto"/>
-                <a:cs typeface="Roboto"/>
-                <a:sym typeface="Roboto"/>
-              </a:defRPr>
-            </a:lvl9pPr>
-          </a:lstStyle>
-          <a:p>
-            <a:pPr marL="146050" indent="0">
-              <a:buNone/>
-            </a:pPr>
-            <a:r>
-              <a:rPr lang="en-US" sz="1600" dirty="0"/>
-              <a:t>Quiz 3.3 Streams and Files</a:t>
-            </a:r>
-          </a:p>
-          <a:p>
-            <a:pPr marL="146050" indent="0">
-              <a:buNone/>
-            </a:pPr>
-            <a:r>
-              <a:rPr lang="en-US" sz="1600" dirty="0">
-                <a:solidFill>
-                  <a:schemeClr val="tx1"/>
-                </a:solidFill>
-              </a:rPr>
-              <a:t>Password - </a:t>
-            </a:r>
-            <a:r>
-              <a:rPr lang="en-US" sz="1600" dirty="0" err="1">
-                <a:solidFill>
-                  <a:schemeClr val="tx1"/>
-                </a:solidFill>
-              </a:rPr>
-              <a:t>FileAndStream</a:t>
-            </a:r>
-            <a:endParaRPr lang="en-US" sz="1600" dirty="0">
-              <a:solidFill>
-                <a:schemeClr val="tx1"/>
-              </a:solidFill>
-            </a:endParaRPr>
-          </a:p>
-        </p:txBody>
-      </p:sp>
-    </p:spTree>
-    <p:extLst>
-      <p:ext uri="{BB962C8B-B14F-4D97-AF65-F5344CB8AC3E}">
-        <p14:creationId xmlns:p14="http://schemas.microsoft.com/office/powerpoint/2010/main" val="674272117"/>
       </p:ext>
     </p:extLst>
   </p:cSld>

--- a/Presentation/Announcement.pptx
+++ b/Presentation/Announcement.pptx
@@ -8,8 +8,8 @@
     <p:notesMasterId r:id="rId14"/>
   </p:notesMasterIdLst>
   <p:sldIdLst>
-    <p:sldId id="286" r:id="rId2"/>
-    <p:sldId id="276" r:id="rId3"/>
+    <p:sldId id="276" r:id="rId2"/>
+    <p:sldId id="286" r:id="rId3"/>
     <p:sldId id="278" r:id="rId4"/>
     <p:sldId id="281" r:id="rId5"/>
     <p:sldId id="287" r:id="rId6"/>
@@ -739,13 +739,7 @@
   <p:cSld>
     <p:spTree>
       <p:nvGrpSpPr>
-        <p:cNvPr id="1" name="Shape 320">
-          <a:extLst>
-            <a:ext uri="{FF2B5EF4-FFF2-40B4-BE49-F238E27FC236}">
-              <a16:creationId xmlns:a16="http://schemas.microsoft.com/office/drawing/2014/main" id="{5E82D901-7A14-0382-4365-722182C687A8}"/>
-            </a:ext>
-          </a:extLst>
-        </p:cNvPr>
+        <p:cNvPr id="1" name="Shape 320"/>
         <p:cNvGrpSpPr/>
         <p:nvPr/>
       </p:nvGrpSpPr>
@@ -759,13 +753,7 @@
       </p:grpSpPr>
       <p:sp>
         <p:nvSpPr>
-          <p:cNvPr id="321" name="Google Shape;321;g8f52c9b70a_3_0:notes">
-            <a:extLst>
-              <a:ext uri="{FF2B5EF4-FFF2-40B4-BE49-F238E27FC236}">
-                <a16:creationId xmlns:a16="http://schemas.microsoft.com/office/drawing/2014/main" id="{B8D16220-AF50-7601-71A9-4952749D32CB}"/>
-              </a:ext>
-            </a:extLst>
-          </p:cNvPr>
+          <p:cNvPr id="321" name="Google Shape;321;g8f52c9b70a_3_0:notes"/>
           <p:cNvSpPr>
             <a:spLocks noGrp="1" noRot="1" noChangeAspect="1"/>
           </p:cNvSpPr>
@@ -806,13 +794,7 @@
       </p:sp>
       <p:sp>
         <p:nvSpPr>
-          <p:cNvPr id="322" name="Google Shape;322;g8f52c9b70a_3_0:notes">
-            <a:extLst>
-              <a:ext uri="{FF2B5EF4-FFF2-40B4-BE49-F238E27FC236}">
-                <a16:creationId xmlns:a16="http://schemas.microsoft.com/office/drawing/2014/main" id="{AEA302D2-52D7-97D7-BF6C-781234E92D43}"/>
-              </a:ext>
-            </a:extLst>
-          </p:cNvPr>
+          <p:cNvPr id="322" name="Google Shape;322;g8f52c9b70a_3_0:notes"/>
           <p:cNvSpPr txBox="1">
             <a:spLocks noGrp="1"/>
           </p:cNvSpPr>
@@ -843,11 +825,6 @@
         </p:txBody>
       </p:sp>
     </p:spTree>
-    <p:extLst>
-      <p:ext uri="{BB962C8B-B14F-4D97-AF65-F5344CB8AC3E}">
-        <p14:creationId xmlns:p14="http://schemas.microsoft.com/office/powerpoint/2010/main" val="2483524941"/>
-      </p:ext>
-    </p:extLst>
   </p:cSld>
   <p:clrMapOvr>
     <a:masterClrMapping/>
@@ -1169,7 +1146,13 @@
   <p:cSld>
     <p:spTree>
       <p:nvGrpSpPr>
-        <p:cNvPr id="1" name="Shape 320"/>
+        <p:cNvPr id="1" name="Shape 320">
+          <a:extLst>
+            <a:ext uri="{FF2B5EF4-FFF2-40B4-BE49-F238E27FC236}">
+              <a16:creationId xmlns:a16="http://schemas.microsoft.com/office/drawing/2014/main" id="{5E82D901-7A14-0382-4365-722182C687A8}"/>
+            </a:ext>
+          </a:extLst>
+        </p:cNvPr>
         <p:cNvGrpSpPr/>
         <p:nvPr/>
       </p:nvGrpSpPr>
@@ -1183,7 +1166,13 @@
       </p:grpSpPr>
       <p:sp>
         <p:nvSpPr>
-          <p:cNvPr id="321" name="Google Shape;321;g8f52c9b70a_3_0:notes"/>
+          <p:cNvPr id="321" name="Google Shape;321;g8f52c9b70a_3_0:notes">
+            <a:extLst>
+              <a:ext uri="{FF2B5EF4-FFF2-40B4-BE49-F238E27FC236}">
+                <a16:creationId xmlns:a16="http://schemas.microsoft.com/office/drawing/2014/main" id="{B8D16220-AF50-7601-71A9-4952749D32CB}"/>
+              </a:ext>
+            </a:extLst>
+          </p:cNvPr>
           <p:cNvSpPr>
             <a:spLocks noGrp="1" noRot="1" noChangeAspect="1"/>
           </p:cNvSpPr>
@@ -1224,7 +1213,13 @@
       </p:sp>
       <p:sp>
         <p:nvSpPr>
-          <p:cNvPr id="322" name="Google Shape;322;g8f52c9b70a_3_0:notes"/>
+          <p:cNvPr id="322" name="Google Shape;322;g8f52c9b70a_3_0:notes">
+            <a:extLst>
+              <a:ext uri="{FF2B5EF4-FFF2-40B4-BE49-F238E27FC236}">
+                <a16:creationId xmlns:a16="http://schemas.microsoft.com/office/drawing/2014/main" id="{AEA302D2-52D7-97D7-BF6C-781234E92D43}"/>
+              </a:ext>
+            </a:extLst>
+          </p:cNvPr>
           <p:cNvSpPr txBox="1">
             <a:spLocks noGrp="1"/>
           </p:cNvSpPr>
@@ -1255,6 +1250,11 @@
         </p:txBody>
       </p:sp>
     </p:spTree>
+    <p:extLst>
+      <p:ext uri="{BB962C8B-B14F-4D97-AF65-F5344CB8AC3E}">
+        <p14:creationId xmlns:p14="http://schemas.microsoft.com/office/powerpoint/2010/main" val="2483524941"/>
+      </p:ext>
+    </p:extLst>
   </p:cSld>
   <p:clrMapOvr>
     <a:masterClrMapping/>
@@ -6529,6 +6529,1037 @@
   <p:cSld>
     <p:spTree>
       <p:nvGrpSpPr>
+        <p:cNvPr id="1" name="Shape 323"/>
+        <p:cNvGrpSpPr/>
+        <p:nvPr/>
+      </p:nvGrpSpPr>
+      <p:grpSpPr>
+        <a:xfrm>
+          <a:off x="0" y="0"/>
+          <a:ext cx="0" cy="0"/>
+          <a:chOff x="0" y="0"/>
+          <a:chExt cx="0" cy="0"/>
+        </a:xfrm>
+      </p:grpSpPr>
+      <p:sp>
+        <p:nvSpPr>
+          <p:cNvPr id="324" name="Google Shape;324;p47"/>
+          <p:cNvSpPr txBox="1">
+            <a:spLocks noGrp="1"/>
+          </p:cNvSpPr>
+          <p:nvPr>
+            <p:ph type="title"/>
+          </p:nvPr>
+        </p:nvSpPr>
+        <p:spPr>
+          <a:xfrm>
+            <a:off x="305858" y="273819"/>
+            <a:ext cx="8520600" cy="623700"/>
+          </a:xfrm>
+          <a:prstGeom prst="rect">
+            <a:avLst/>
+          </a:prstGeom>
+        </p:spPr>
+        <p:txBody>
+          <a:bodyPr spcFirstLastPara="1" wrap="square" lIns="91425" tIns="91425" rIns="91425" bIns="91425" anchor="t" anchorCtr="0">
+            <a:noAutofit/>
+          </a:bodyPr>
+          <a:lstStyle/>
+          <a:p>
+            <a:pPr marL="0" lvl="0" indent="0" algn="ctr" rtl="0">
+              <a:spcBef>
+                <a:spcPts val="0"/>
+              </a:spcBef>
+              <a:spcAft>
+                <a:spcPts val="0"/>
+              </a:spcAft>
+              <a:buNone/>
+            </a:pPr>
+            <a:r>
+              <a:rPr lang="en-US" dirty="0"/>
+              <a:t>GCIS – Software Development and Problem Solving</a:t>
+            </a:r>
+            <a:endParaRPr dirty="0"/>
+          </a:p>
+        </p:txBody>
+      </p:sp>
+      <p:sp>
+        <p:nvSpPr>
+          <p:cNvPr id="325" name="Google Shape;325;p47"/>
+          <p:cNvSpPr txBox="1">
+            <a:spLocks noGrp="1"/>
+          </p:cNvSpPr>
+          <p:nvPr>
+            <p:ph type="body" idx="1"/>
+          </p:nvPr>
+        </p:nvSpPr>
+        <p:spPr>
+          <a:xfrm>
+            <a:off x="-5842" y="1721147"/>
+            <a:ext cx="9149842" cy="1226403"/>
+          </a:xfrm>
+          <a:prstGeom prst="rect">
+            <a:avLst/>
+          </a:prstGeom>
+        </p:spPr>
+        <p:txBody>
+          <a:bodyPr spcFirstLastPara="1" wrap="square" lIns="91425" tIns="91425" rIns="91425" bIns="91425" anchor="ctr" anchorCtr="0">
+            <a:noAutofit/>
+          </a:bodyPr>
+          <a:lstStyle/>
+          <a:p>
+            <a:pPr marL="146050" indent="0" algn="ctr">
+              <a:buNone/>
+            </a:pPr>
+            <a:r>
+              <a:rPr lang="en-US" sz="2400" dirty="0"/>
+              <a:t>Take </a:t>
+            </a:r>
+            <a:r>
+              <a:rPr lang="pl-PL" sz="2400" dirty="0"/>
+              <a:t>Quiz </a:t>
+            </a:r>
+            <a:r>
+              <a:rPr lang="en-US" sz="2400" dirty="0"/>
+              <a:t>6</a:t>
+            </a:r>
+            <a:r>
+              <a:rPr lang="pl-PL" sz="2400" dirty="0"/>
+              <a:t>.</a:t>
+            </a:r>
+            <a:r>
+              <a:rPr lang="en-US" sz="2400" dirty="0"/>
+              <a:t>1</a:t>
+            </a:r>
+            <a:r>
+              <a:rPr lang="pl-PL" sz="2400" dirty="0"/>
+              <a:t>: </a:t>
+            </a:r>
+            <a:r>
+              <a:rPr lang="en-US" sz="2400" dirty="0"/>
+              <a:t>Binary Tree</a:t>
+            </a:r>
+          </a:p>
+          <a:p>
+            <a:pPr algn="ctr"/>
+            <a:r>
+              <a:rPr lang="en-US" sz="2400" dirty="0"/>
+              <a:t>Password </a:t>
+            </a:r>
+            <a:r>
+              <a:rPr lang="en-US" sz="2400"/>
+              <a:t>- Photo-synthesis!</a:t>
+            </a:r>
+            <a:endParaRPr sz="2400" dirty="0"/>
+          </a:p>
+        </p:txBody>
+      </p:sp>
+      <p:sp>
+        <p:nvSpPr>
+          <p:cNvPr id="326" name="Google Shape;326;p47"/>
+          <p:cNvSpPr txBox="1">
+            <a:spLocks noGrp="1"/>
+          </p:cNvSpPr>
+          <p:nvPr>
+            <p:ph type="sldNum" idx="12"/>
+          </p:nvPr>
+        </p:nvSpPr>
+        <p:spPr>
+          <a:xfrm>
+            <a:off x="8472458" y="4663217"/>
+            <a:ext cx="548700" cy="393600"/>
+          </a:xfrm>
+          <a:prstGeom prst="rect">
+            <a:avLst/>
+          </a:prstGeom>
+        </p:spPr>
+        <p:txBody>
+          <a:bodyPr spcFirstLastPara="1" wrap="square" lIns="91425" tIns="91425" rIns="91425" bIns="91425" anchor="ctr" anchorCtr="0">
+            <a:noAutofit/>
+          </a:bodyPr>
+          <a:lstStyle/>
+          <a:p>
+            <a:pPr marL="0" lvl="0" indent="0" algn="r" rtl="0">
+              <a:spcBef>
+                <a:spcPts val="0"/>
+              </a:spcBef>
+              <a:spcAft>
+                <a:spcPts val="0"/>
+              </a:spcAft>
+              <a:buNone/>
+            </a:pPr>
+            <a:fld id="{00000000-1234-1234-1234-123412341234}" type="slidenum">
+              <a:rPr lang="en"/>
+              <a:t>1</a:t>
+            </a:fld>
+            <a:endParaRPr/>
+          </a:p>
+        </p:txBody>
+      </p:sp>
+      <p:sp>
+        <p:nvSpPr>
+          <p:cNvPr id="2" name="TextBox 1">
+            <a:extLst>
+              <a:ext uri="{FF2B5EF4-FFF2-40B4-BE49-F238E27FC236}">
+                <a16:creationId xmlns:a16="http://schemas.microsoft.com/office/drawing/2014/main" id="{DCC33EBB-1C9D-B9A9-88E6-F3466077417F}"/>
+              </a:ext>
+            </a:extLst>
+          </p:cNvPr>
+          <p:cNvSpPr txBox="1"/>
+          <p:nvPr/>
+        </p:nvSpPr>
+        <p:spPr>
+          <a:xfrm>
+            <a:off x="0" y="1277369"/>
+            <a:ext cx="9144000" cy="307777"/>
+          </a:xfrm>
+          <a:prstGeom prst="rect">
+            <a:avLst/>
+          </a:prstGeom>
+          <a:solidFill>
+            <a:srgbClr val="FFC000"/>
+          </a:solidFill>
+        </p:spPr>
+        <p:txBody>
+          <a:bodyPr wrap="square" rtlCol="0">
+            <a:spAutoFit/>
+          </a:bodyPr>
+          <a:lstStyle/>
+          <a:p>
+            <a:r>
+              <a:rPr lang="en-US" dirty="0"/>
+              <a:t>Quiz</a:t>
+            </a:r>
+          </a:p>
+        </p:txBody>
+      </p:sp>
+      <p:sp>
+        <p:nvSpPr>
+          <p:cNvPr id="3" name="TextBox 2">
+            <a:extLst>
+              <a:ext uri="{FF2B5EF4-FFF2-40B4-BE49-F238E27FC236}">
+                <a16:creationId xmlns:a16="http://schemas.microsoft.com/office/drawing/2014/main" id="{64C19922-6A1B-1404-5104-DC43E4C67861}"/>
+              </a:ext>
+            </a:extLst>
+          </p:cNvPr>
+          <p:cNvSpPr txBox="1"/>
+          <p:nvPr/>
+        </p:nvSpPr>
+        <p:spPr>
+          <a:xfrm>
+            <a:off x="-5842" y="3031063"/>
+            <a:ext cx="9144000" cy="307777"/>
+          </a:xfrm>
+          <a:prstGeom prst="rect">
+            <a:avLst/>
+          </a:prstGeom>
+          <a:solidFill>
+            <a:srgbClr val="FFC000"/>
+          </a:solidFill>
+        </p:spPr>
+        <p:txBody>
+          <a:bodyPr wrap="square" rtlCol="0">
+            <a:spAutoFit/>
+          </a:bodyPr>
+          <a:lstStyle/>
+          <a:p>
+            <a:r>
+              <a:rPr lang="en-US" dirty="0"/>
+              <a:t>Next </a:t>
+            </a:r>
+            <a:r>
+              <a:rPr lang="en-US" dirty="0">
+                <a:sym typeface="Wingdings" panose="05000000000000000000" pitchFamily="2" charset="2"/>
+              </a:rPr>
+              <a:t> </a:t>
+            </a:r>
+            <a:endParaRPr lang="en-US" dirty="0"/>
+          </a:p>
+        </p:txBody>
+      </p:sp>
+      <p:sp>
+        <p:nvSpPr>
+          <p:cNvPr id="4" name="Google Shape;325;p47">
+            <a:extLst>
+              <a:ext uri="{FF2B5EF4-FFF2-40B4-BE49-F238E27FC236}">
+                <a16:creationId xmlns:a16="http://schemas.microsoft.com/office/drawing/2014/main" id="{E455EA58-F56D-AF58-E97D-95A77E0AB6CF}"/>
+              </a:ext>
+            </a:extLst>
+          </p:cNvPr>
+          <p:cNvSpPr txBox="1">
+            <a:spLocks/>
+          </p:cNvSpPr>
+          <p:nvPr/>
+        </p:nvSpPr>
+        <p:spPr>
+          <a:xfrm>
+            <a:off x="-5842" y="3422352"/>
+            <a:ext cx="9149842" cy="1721148"/>
+          </a:xfrm>
+          <a:prstGeom prst="rect">
+            <a:avLst/>
+          </a:prstGeom>
+          <a:noFill/>
+          <a:ln>
+            <a:noFill/>
+          </a:ln>
+        </p:spPr>
+        <p:txBody>
+          <a:bodyPr spcFirstLastPara="1" wrap="square" lIns="91425" tIns="91425" rIns="91425" bIns="91425" anchor="ctr" anchorCtr="0">
+            <a:noAutofit/>
+          </a:bodyPr>
+          <a:lstStyle>
+            <a:defPPr marR="0" lvl="0" algn="l" rtl="0">
+              <a:lnSpc>
+                <a:spcPct val="100000"/>
+              </a:lnSpc>
+              <a:spcBef>
+                <a:spcPts val="0"/>
+              </a:spcBef>
+              <a:spcAft>
+                <a:spcPts val="0"/>
+              </a:spcAft>
+            </a:defPPr>
+            <a:lvl1pPr marL="457200" marR="0" lvl="0" indent="-311150" algn="l" rtl="0">
+              <a:lnSpc>
+                <a:spcPct val="115000"/>
+              </a:lnSpc>
+              <a:spcBef>
+                <a:spcPts val="0"/>
+              </a:spcBef>
+              <a:spcAft>
+                <a:spcPts val="0"/>
+              </a:spcAft>
+              <a:buClr>
+                <a:schemeClr val="dk2"/>
+              </a:buClr>
+              <a:buSzPts val="1300"/>
+              <a:buFont typeface="Roboto"/>
+              <a:buChar char="●"/>
+              <a:defRPr sz="1300" b="0" i="0" u="none" strike="noStrike" cap="none">
+                <a:solidFill>
+                  <a:schemeClr val="dk2"/>
+                </a:solidFill>
+                <a:latin typeface="Roboto"/>
+                <a:ea typeface="Roboto"/>
+                <a:cs typeface="Roboto"/>
+                <a:sym typeface="Roboto"/>
+              </a:defRPr>
+            </a:lvl1pPr>
+            <a:lvl2pPr marL="914400" marR="0" lvl="1" indent="-298450" algn="l" rtl="0">
+              <a:lnSpc>
+                <a:spcPct val="115000"/>
+              </a:lnSpc>
+              <a:spcBef>
+                <a:spcPts val="1600"/>
+              </a:spcBef>
+              <a:spcAft>
+                <a:spcPts val="0"/>
+              </a:spcAft>
+              <a:buClr>
+                <a:schemeClr val="dk2"/>
+              </a:buClr>
+              <a:buSzPts val="1100"/>
+              <a:buFont typeface="Roboto"/>
+              <a:buChar char="○"/>
+              <a:defRPr sz="1100" b="0" i="0" u="none" strike="noStrike" cap="none">
+                <a:solidFill>
+                  <a:schemeClr val="dk2"/>
+                </a:solidFill>
+                <a:latin typeface="Roboto"/>
+                <a:ea typeface="Roboto"/>
+                <a:cs typeface="Roboto"/>
+                <a:sym typeface="Roboto"/>
+              </a:defRPr>
+            </a:lvl2pPr>
+            <a:lvl3pPr marL="1371600" marR="0" lvl="2" indent="-298450" algn="l" rtl="0">
+              <a:lnSpc>
+                <a:spcPct val="115000"/>
+              </a:lnSpc>
+              <a:spcBef>
+                <a:spcPts val="1600"/>
+              </a:spcBef>
+              <a:spcAft>
+                <a:spcPts val="0"/>
+              </a:spcAft>
+              <a:buClr>
+                <a:schemeClr val="dk2"/>
+              </a:buClr>
+              <a:buSzPts val="1100"/>
+              <a:buFont typeface="Roboto"/>
+              <a:buChar char="■"/>
+              <a:defRPr sz="1100" b="0" i="0" u="none" strike="noStrike" cap="none">
+                <a:solidFill>
+                  <a:schemeClr val="dk2"/>
+                </a:solidFill>
+                <a:latin typeface="Roboto"/>
+                <a:ea typeface="Roboto"/>
+                <a:cs typeface="Roboto"/>
+                <a:sym typeface="Roboto"/>
+              </a:defRPr>
+            </a:lvl3pPr>
+            <a:lvl4pPr marL="1828800" marR="0" lvl="3" indent="-298450" algn="l" rtl="0">
+              <a:lnSpc>
+                <a:spcPct val="115000"/>
+              </a:lnSpc>
+              <a:spcBef>
+                <a:spcPts val="1600"/>
+              </a:spcBef>
+              <a:spcAft>
+                <a:spcPts val="0"/>
+              </a:spcAft>
+              <a:buClr>
+                <a:schemeClr val="dk2"/>
+              </a:buClr>
+              <a:buSzPts val="1100"/>
+              <a:buFont typeface="Roboto"/>
+              <a:buChar char="●"/>
+              <a:defRPr sz="1100" b="0" i="0" u="none" strike="noStrike" cap="none">
+                <a:solidFill>
+                  <a:schemeClr val="dk2"/>
+                </a:solidFill>
+                <a:latin typeface="Roboto"/>
+                <a:ea typeface="Roboto"/>
+                <a:cs typeface="Roboto"/>
+                <a:sym typeface="Roboto"/>
+              </a:defRPr>
+            </a:lvl4pPr>
+            <a:lvl5pPr marL="2286000" marR="0" lvl="4" indent="-298450" algn="l" rtl="0">
+              <a:lnSpc>
+                <a:spcPct val="115000"/>
+              </a:lnSpc>
+              <a:spcBef>
+                <a:spcPts val="1600"/>
+              </a:spcBef>
+              <a:spcAft>
+                <a:spcPts val="0"/>
+              </a:spcAft>
+              <a:buClr>
+                <a:schemeClr val="dk2"/>
+              </a:buClr>
+              <a:buSzPts val="1100"/>
+              <a:buFont typeface="Roboto"/>
+              <a:buChar char="○"/>
+              <a:defRPr sz="1100" b="0" i="0" u="none" strike="noStrike" cap="none">
+                <a:solidFill>
+                  <a:schemeClr val="dk2"/>
+                </a:solidFill>
+                <a:latin typeface="Roboto"/>
+                <a:ea typeface="Roboto"/>
+                <a:cs typeface="Roboto"/>
+                <a:sym typeface="Roboto"/>
+              </a:defRPr>
+            </a:lvl5pPr>
+            <a:lvl6pPr marL="2743200" marR="0" lvl="5" indent="-298450" algn="l" rtl="0">
+              <a:lnSpc>
+                <a:spcPct val="115000"/>
+              </a:lnSpc>
+              <a:spcBef>
+                <a:spcPts val="1600"/>
+              </a:spcBef>
+              <a:spcAft>
+                <a:spcPts val="0"/>
+              </a:spcAft>
+              <a:buClr>
+                <a:schemeClr val="dk2"/>
+              </a:buClr>
+              <a:buSzPts val="1100"/>
+              <a:buFont typeface="Roboto"/>
+              <a:buChar char="■"/>
+              <a:defRPr sz="1100" b="0" i="0" u="none" strike="noStrike" cap="none">
+                <a:solidFill>
+                  <a:schemeClr val="dk2"/>
+                </a:solidFill>
+                <a:latin typeface="Roboto"/>
+                <a:ea typeface="Roboto"/>
+                <a:cs typeface="Roboto"/>
+                <a:sym typeface="Roboto"/>
+              </a:defRPr>
+            </a:lvl6pPr>
+            <a:lvl7pPr marL="3200400" marR="0" lvl="6" indent="-298450" algn="l" rtl="0">
+              <a:lnSpc>
+                <a:spcPct val="115000"/>
+              </a:lnSpc>
+              <a:spcBef>
+                <a:spcPts val="1600"/>
+              </a:spcBef>
+              <a:spcAft>
+                <a:spcPts val="0"/>
+              </a:spcAft>
+              <a:buClr>
+                <a:schemeClr val="dk2"/>
+              </a:buClr>
+              <a:buSzPts val="1100"/>
+              <a:buFont typeface="Roboto"/>
+              <a:buChar char="●"/>
+              <a:defRPr sz="1100" b="0" i="0" u="none" strike="noStrike" cap="none">
+                <a:solidFill>
+                  <a:schemeClr val="dk2"/>
+                </a:solidFill>
+                <a:latin typeface="Roboto"/>
+                <a:ea typeface="Roboto"/>
+                <a:cs typeface="Roboto"/>
+                <a:sym typeface="Roboto"/>
+              </a:defRPr>
+            </a:lvl7pPr>
+            <a:lvl8pPr marL="3657600" marR="0" lvl="7" indent="-298450" algn="l" rtl="0">
+              <a:lnSpc>
+                <a:spcPct val="115000"/>
+              </a:lnSpc>
+              <a:spcBef>
+                <a:spcPts val="1600"/>
+              </a:spcBef>
+              <a:spcAft>
+                <a:spcPts val="0"/>
+              </a:spcAft>
+              <a:buClr>
+                <a:schemeClr val="dk2"/>
+              </a:buClr>
+              <a:buSzPts val="1100"/>
+              <a:buFont typeface="Roboto"/>
+              <a:buChar char="○"/>
+              <a:defRPr sz="1100" b="0" i="0" u="none" strike="noStrike" cap="none">
+                <a:solidFill>
+                  <a:schemeClr val="dk2"/>
+                </a:solidFill>
+                <a:latin typeface="Roboto"/>
+                <a:ea typeface="Roboto"/>
+                <a:cs typeface="Roboto"/>
+                <a:sym typeface="Roboto"/>
+              </a:defRPr>
+            </a:lvl8pPr>
+            <a:lvl9pPr marL="4114800" marR="0" lvl="8" indent="-298450" algn="l" rtl="0">
+              <a:lnSpc>
+                <a:spcPct val="115000"/>
+              </a:lnSpc>
+              <a:spcBef>
+                <a:spcPts val="1600"/>
+              </a:spcBef>
+              <a:spcAft>
+                <a:spcPts val="1600"/>
+              </a:spcAft>
+              <a:buClr>
+                <a:schemeClr val="dk2"/>
+              </a:buClr>
+              <a:buSzPts val="1100"/>
+              <a:buFont typeface="Roboto"/>
+              <a:buChar char="■"/>
+              <a:defRPr sz="1100" b="0" i="0" u="none" strike="noStrike" cap="none">
+                <a:solidFill>
+                  <a:schemeClr val="dk2"/>
+                </a:solidFill>
+                <a:latin typeface="Roboto"/>
+                <a:ea typeface="Roboto"/>
+                <a:cs typeface="Roboto"/>
+                <a:sym typeface="Roboto"/>
+              </a:defRPr>
+            </a:lvl9pPr>
+          </a:lstStyle>
+          <a:p>
+            <a:pPr marL="0" indent="0">
+              <a:spcAft>
+                <a:spcPts val="1600"/>
+              </a:spcAft>
+              <a:buNone/>
+            </a:pPr>
+            <a:r>
+              <a:rPr lang="en-US" sz="2800" dirty="0"/>
+              <a:t>After completing the Quiz </a:t>
+            </a:r>
+          </a:p>
+          <a:p>
+            <a:pPr marL="342900" indent="-342900">
+              <a:spcAft>
+                <a:spcPts val="1600"/>
+              </a:spcAft>
+            </a:pPr>
+            <a:r>
+              <a:rPr lang="en-US" sz="2400" dirty="0"/>
+              <a:t>Clone/Pull Unit6 – git hub classroom repo for class activities</a:t>
+            </a:r>
+          </a:p>
+          <a:p>
+            <a:pPr marL="342900" indent="-342900">
+              <a:spcAft>
+                <a:spcPts val="1600"/>
+              </a:spcAft>
+            </a:pPr>
+            <a:r>
+              <a:rPr lang="en-US" sz="2400" dirty="0"/>
+              <a:t>Last week Class activity is uploaded in my courses</a:t>
+            </a:r>
+          </a:p>
+        </p:txBody>
+      </p:sp>
+    </p:spTree>
+  </p:cSld>
+  <p:clrMapOvr>
+    <a:masterClrMapping/>
+  </p:clrMapOvr>
+</p:sld>
+</file>
+
+<file path=ppt/slides/slide10.xml><?xml version="1.0" encoding="utf-8"?>
+<p:sld xmlns:a="http://schemas.openxmlformats.org/drawingml/2006/main" xmlns:r="http://schemas.openxmlformats.org/officeDocument/2006/relationships" xmlns:p="http://schemas.openxmlformats.org/presentationml/2006/main" show="0">
+  <p:cSld>
+    <p:spTree>
+      <p:nvGrpSpPr>
+        <p:cNvPr id="1" name="Shape 323"/>
+        <p:cNvGrpSpPr/>
+        <p:nvPr/>
+      </p:nvGrpSpPr>
+      <p:grpSpPr>
+        <a:xfrm>
+          <a:off x="0" y="0"/>
+          <a:ext cx="0" cy="0"/>
+          <a:chOff x="0" y="0"/>
+          <a:chExt cx="0" cy="0"/>
+        </a:xfrm>
+      </p:grpSpPr>
+      <p:sp>
+        <p:nvSpPr>
+          <p:cNvPr id="324" name="Google Shape;324;p47"/>
+          <p:cNvSpPr txBox="1">
+            <a:spLocks noGrp="1"/>
+          </p:cNvSpPr>
+          <p:nvPr>
+            <p:ph type="title"/>
+          </p:nvPr>
+        </p:nvSpPr>
+        <p:spPr>
+          <a:xfrm>
+            <a:off x="226208" y="1"/>
+            <a:ext cx="8520600" cy="464980"/>
+          </a:xfrm>
+          <a:prstGeom prst="rect">
+            <a:avLst/>
+          </a:prstGeom>
+        </p:spPr>
+        <p:txBody>
+          <a:bodyPr spcFirstLastPara="1" wrap="square" lIns="91425" tIns="91425" rIns="91425" bIns="91425" anchor="t" anchorCtr="0">
+            <a:noAutofit/>
+          </a:bodyPr>
+          <a:lstStyle/>
+          <a:p>
+            <a:pPr marL="0" lvl="0" indent="0" algn="ctr" rtl="0">
+              <a:spcBef>
+                <a:spcPts val="0"/>
+              </a:spcBef>
+              <a:spcAft>
+                <a:spcPts val="0"/>
+              </a:spcAft>
+              <a:buNone/>
+            </a:pPr>
+            <a:r>
+              <a:rPr lang="en-US" dirty="0"/>
+              <a:t>Use </a:t>
+            </a:r>
+            <a:r>
+              <a:rPr lang="en-US" sz="2400" dirty="0"/>
+              <a:t>Assigned</a:t>
+            </a:r>
+            <a:r>
+              <a:rPr lang="en-US" dirty="0"/>
+              <a:t> Seat</a:t>
+            </a:r>
+            <a:endParaRPr dirty="0"/>
+          </a:p>
+        </p:txBody>
+      </p:sp>
+      <p:sp>
+        <p:nvSpPr>
+          <p:cNvPr id="326" name="Google Shape;326;p47"/>
+          <p:cNvSpPr txBox="1">
+            <a:spLocks noGrp="1"/>
+          </p:cNvSpPr>
+          <p:nvPr>
+            <p:ph type="sldNum" idx="12"/>
+          </p:nvPr>
+        </p:nvSpPr>
+        <p:spPr>
+          <a:xfrm>
+            <a:off x="8472458" y="4663217"/>
+            <a:ext cx="548700" cy="393600"/>
+          </a:xfrm>
+          <a:prstGeom prst="rect">
+            <a:avLst/>
+          </a:prstGeom>
+        </p:spPr>
+        <p:txBody>
+          <a:bodyPr spcFirstLastPara="1" wrap="square" lIns="91425" tIns="91425" rIns="91425" bIns="91425" anchor="ctr" anchorCtr="0">
+            <a:noAutofit/>
+          </a:bodyPr>
+          <a:lstStyle/>
+          <a:p>
+            <a:pPr marL="0" lvl="0" indent="0" algn="r" rtl="0">
+              <a:spcBef>
+                <a:spcPts val="0"/>
+              </a:spcBef>
+              <a:spcAft>
+                <a:spcPts val="0"/>
+              </a:spcAft>
+              <a:buNone/>
+            </a:pPr>
+            <a:fld id="{00000000-1234-1234-1234-123412341234}" type="slidenum">
+              <a:rPr lang="en"/>
+              <a:t>10</a:t>
+            </a:fld>
+            <a:endParaRPr/>
+          </a:p>
+        </p:txBody>
+      </p:sp>
+      <p:pic>
+        <p:nvPicPr>
+          <p:cNvPr id="6" name="Picture 5">
+            <a:extLst>
+              <a:ext uri="{FF2B5EF4-FFF2-40B4-BE49-F238E27FC236}">
+                <a16:creationId xmlns:a16="http://schemas.microsoft.com/office/drawing/2014/main" id="{DED32793-7C09-E3A3-94E5-B5D46727A1D0}"/>
+              </a:ext>
+            </a:extLst>
+          </p:cNvPr>
+          <p:cNvPicPr>
+            <a:picLocks noChangeAspect="1"/>
+          </p:cNvPicPr>
+          <p:nvPr/>
+        </p:nvPicPr>
+        <p:blipFill>
+          <a:blip r:embed="rId3"/>
+          <a:stretch>
+            <a:fillRect/>
+          </a:stretch>
+        </p:blipFill>
+        <p:spPr>
+          <a:xfrm>
+            <a:off x="-1" y="551663"/>
+            <a:ext cx="9144001" cy="4591837"/>
+          </a:xfrm>
+          <a:prstGeom prst="rect">
+            <a:avLst/>
+          </a:prstGeom>
+        </p:spPr>
+      </p:pic>
+    </p:spTree>
+    <p:extLst>
+      <p:ext uri="{BB962C8B-B14F-4D97-AF65-F5344CB8AC3E}">
+        <p14:creationId xmlns:p14="http://schemas.microsoft.com/office/powerpoint/2010/main" val="4226348449"/>
+      </p:ext>
+    </p:extLst>
+  </p:cSld>
+  <p:clrMapOvr>
+    <a:masterClrMapping/>
+  </p:clrMapOvr>
+</p:sld>
+</file>
+
+<file path=ppt/slides/slide11.xml><?xml version="1.0" encoding="utf-8"?>
+<p:sld xmlns:a="http://schemas.openxmlformats.org/drawingml/2006/main" xmlns:r="http://schemas.openxmlformats.org/officeDocument/2006/relationships" xmlns:p="http://schemas.openxmlformats.org/presentationml/2006/main" show="0">
+  <p:cSld>
+    <p:spTree>
+      <p:nvGrpSpPr>
+        <p:cNvPr id="1" name="Shape 323"/>
+        <p:cNvGrpSpPr/>
+        <p:nvPr/>
+      </p:nvGrpSpPr>
+      <p:grpSpPr>
+        <a:xfrm>
+          <a:off x="0" y="0"/>
+          <a:ext cx="0" cy="0"/>
+          <a:chOff x="0" y="0"/>
+          <a:chExt cx="0" cy="0"/>
+        </a:xfrm>
+      </p:grpSpPr>
+      <p:sp>
+        <p:nvSpPr>
+          <p:cNvPr id="324" name="Google Shape;324;p47"/>
+          <p:cNvSpPr txBox="1">
+            <a:spLocks noGrp="1"/>
+          </p:cNvSpPr>
+          <p:nvPr>
+            <p:ph type="title"/>
+          </p:nvPr>
+        </p:nvSpPr>
+        <p:spPr>
+          <a:xfrm>
+            <a:off x="226208" y="1"/>
+            <a:ext cx="8520600" cy="464980"/>
+          </a:xfrm>
+          <a:prstGeom prst="rect">
+            <a:avLst/>
+          </a:prstGeom>
+        </p:spPr>
+        <p:txBody>
+          <a:bodyPr spcFirstLastPara="1" wrap="square" lIns="91425" tIns="91425" rIns="91425" bIns="91425" anchor="t" anchorCtr="0">
+            <a:noAutofit/>
+          </a:bodyPr>
+          <a:lstStyle/>
+          <a:p>
+            <a:pPr marL="0" lvl="0" indent="0" algn="ctr" rtl="0">
+              <a:spcBef>
+                <a:spcPts val="0"/>
+              </a:spcBef>
+              <a:spcAft>
+                <a:spcPts val="0"/>
+              </a:spcAft>
+              <a:buNone/>
+            </a:pPr>
+            <a:r>
+              <a:rPr lang="en-US" dirty="0"/>
+              <a:t>Use </a:t>
+            </a:r>
+            <a:r>
+              <a:rPr lang="en-US" sz="2400" dirty="0"/>
+              <a:t>Assigned</a:t>
+            </a:r>
+            <a:r>
+              <a:rPr lang="en-US" dirty="0"/>
+              <a:t> Seat</a:t>
+            </a:r>
+            <a:endParaRPr dirty="0"/>
+          </a:p>
+        </p:txBody>
+      </p:sp>
+      <p:sp>
+        <p:nvSpPr>
+          <p:cNvPr id="326" name="Google Shape;326;p47"/>
+          <p:cNvSpPr txBox="1">
+            <a:spLocks noGrp="1"/>
+          </p:cNvSpPr>
+          <p:nvPr>
+            <p:ph type="sldNum" idx="12"/>
+          </p:nvPr>
+        </p:nvSpPr>
+        <p:spPr>
+          <a:xfrm>
+            <a:off x="8472458" y="4663217"/>
+            <a:ext cx="548700" cy="393600"/>
+          </a:xfrm>
+          <a:prstGeom prst="rect">
+            <a:avLst/>
+          </a:prstGeom>
+        </p:spPr>
+        <p:txBody>
+          <a:bodyPr spcFirstLastPara="1" wrap="square" lIns="91425" tIns="91425" rIns="91425" bIns="91425" anchor="ctr" anchorCtr="0">
+            <a:noAutofit/>
+          </a:bodyPr>
+          <a:lstStyle/>
+          <a:p>
+            <a:pPr marL="0" lvl="0" indent="0" algn="r" rtl="0">
+              <a:spcBef>
+                <a:spcPts val="0"/>
+              </a:spcBef>
+              <a:spcAft>
+                <a:spcPts val="0"/>
+              </a:spcAft>
+              <a:buNone/>
+            </a:pPr>
+            <a:fld id="{00000000-1234-1234-1234-123412341234}" type="slidenum">
+              <a:rPr lang="en"/>
+              <a:t>11</a:t>
+            </a:fld>
+            <a:endParaRPr/>
+          </a:p>
+        </p:txBody>
+      </p:sp>
+      <p:pic>
+        <p:nvPicPr>
+          <p:cNvPr id="3" name="Picture 2">
+            <a:extLst>
+              <a:ext uri="{FF2B5EF4-FFF2-40B4-BE49-F238E27FC236}">
+                <a16:creationId xmlns:a16="http://schemas.microsoft.com/office/drawing/2014/main" id="{92DE4AAC-70FE-A114-5258-F5B22EDDED45}"/>
+              </a:ext>
+            </a:extLst>
+          </p:cNvPr>
+          <p:cNvPicPr>
+            <a:picLocks noChangeAspect="1"/>
+          </p:cNvPicPr>
+          <p:nvPr/>
+        </p:nvPicPr>
+        <p:blipFill>
+          <a:blip r:embed="rId3"/>
+          <a:stretch>
+            <a:fillRect/>
+          </a:stretch>
+        </p:blipFill>
+        <p:spPr>
+          <a:xfrm>
+            <a:off x="0" y="716280"/>
+            <a:ext cx="9144000" cy="4427218"/>
+          </a:xfrm>
+          <a:prstGeom prst="rect">
+            <a:avLst/>
+          </a:prstGeom>
+        </p:spPr>
+      </p:pic>
+    </p:spTree>
+    <p:extLst>
+      <p:ext uri="{BB962C8B-B14F-4D97-AF65-F5344CB8AC3E}">
+        <p14:creationId xmlns:p14="http://schemas.microsoft.com/office/powerpoint/2010/main" val="1976403023"/>
+      </p:ext>
+    </p:extLst>
+  </p:cSld>
+  <p:clrMapOvr>
+    <a:masterClrMapping/>
+  </p:clrMapOvr>
+</p:sld>
+</file>
+
+<file path=ppt/slides/slide12.xml><?xml version="1.0" encoding="utf-8"?>
+<p:sld xmlns:a="http://schemas.openxmlformats.org/drawingml/2006/main" xmlns:r="http://schemas.openxmlformats.org/officeDocument/2006/relationships" xmlns:p="http://schemas.openxmlformats.org/presentationml/2006/main" show="0">
+  <p:cSld>
+    <p:spTree>
+      <p:nvGrpSpPr>
+        <p:cNvPr id="1" name="Shape 323"/>
+        <p:cNvGrpSpPr/>
+        <p:nvPr/>
+      </p:nvGrpSpPr>
+      <p:grpSpPr>
+        <a:xfrm>
+          <a:off x="0" y="0"/>
+          <a:ext cx="0" cy="0"/>
+          <a:chOff x="0" y="0"/>
+          <a:chExt cx="0" cy="0"/>
+        </a:xfrm>
+      </p:grpSpPr>
+      <p:sp>
+        <p:nvSpPr>
+          <p:cNvPr id="324" name="Google Shape;324;p47"/>
+          <p:cNvSpPr txBox="1">
+            <a:spLocks noGrp="1"/>
+          </p:cNvSpPr>
+          <p:nvPr>
+            <p:ph type="title"/>
+          </p:nvPr>
+        </p:nvSpPr>
+        <p:spPr>
+          <a:xfrm>
+            <a:off x="226208" y="1"/>
+            <a:ext cx="8520600" cy="464980"/>
+          </a:xfrm>
+          <a:prstGeom prst="rect">
+            <a:avLst/>
+          </a:prstGeom>
+        </p:spPr>
+        <p:txBody>
+          <a:bodyPr spcFirstLastPara="1" wrap="square" lIns="91425" tIns="91425" rIns="91425" bIns="91425" anchor="t" anchorCtr="0">
+            <a:noAutofit/>
+          </a:bodyPr>
+          <a:lstStyle/>
+          <a:p>
+            <a:pPr marL="0" lvl="0" indent="0" algn="ctr" rtl="0">
+              <a:spcBef>
+                <a:spcPts val="0"/>
+              </a:spcBef>
+              <a:spcAft>
+                <a:spcPts val="0"/>
+              </a:spcAft>
+              <a:buNone/>
+            </a:pPr>
+            <a:r>
+              <a:rPr lang="en-US" dirty="0"/>
+              <a:t>Use </a:t>
+            </a:r>
+            <a:r>
+              <a:rPr lang="en-US" sz="2400" dirty="0"/>
+              <a:t>Assigned</a:t>
+            </a:r>
+            <a:r>
+              <a:rPr lang="en-US" dirty="0"/>
+              <a:t> Seat</a:t>
+            </a:r>
+            <a:endParaRPr dirty="0"/>
+          </a:p>
+        </p:txBody>
+      </p:sp>
+      <p:sp>
+        <p:nvSpPr>
+          <p:cNvPr id="326" name="Google Shape;326;p47"/>
+          <p:cNvSpPr txBox="1">
+            <a:spLocks noGrp="1"/>
+          </p:cNvSpPr>
+          <p:nvPr>
+            <p:ph type="sldNum" idx="12"/>
+          </p:nvPr>
+        </p:nvSpPr>
+        <p:spPr>
+          <a:xfrm>
+            <a:off x="8472458" y="4663217"/>
+            <a:ext cx="548700" cy="393600"/>
+          </a:xfrm>
+          <a:prstGeom prst="rect">
+            <a:avLst/>
+          </a:prstGeom>
+        </p:spPr>
+        <p:txBody>
+          <a:bodyPr spcFirstLastPara="1" wrap="square" lIns="91425" tIns="91425" rIns="91425" bIns="91425" anchor="ctr" anchorCtr="0">
+            <a:noAutofit/>
+          </a:bodyPr>
+          <a:lstStyle/>
+          <a:p>
+            <a:pPr marL="0" lvl="0" indent="0" algn="r" rtl="0">
+              <a:spcBef>
+                <a:spcPts val="0"/>
+              </a:spcBef>
+              <a:spcAft>
+                <a:spcPts val="0"/>
+              </a:spcAft>
+              <a:buNone/>
+            </a:pPr>
+            <a:fld id="{00000000-1234-1234-1234-123412341234}" type="slidenum">
+              <a:rPr lang="en"/>
+              <a:t>12</a:t>
+            </a:fld>
+            <a:endParaRPr/>
+          </a:p>
+        </p:txBody>
+      </p:sp>
+      <p:pic>
+        <p:nvPicPr>
+          <p:cNvPr id="4" name="Picture 3">
+            <a:extLst>
+              <a:ext uri="{FF2B5EF4-FFF2-40B4-BE49-F238E27FC236}">
+                <a16:creationId xmlns:a16="http://schemas.microsoft.com/office/drawing/2014/main" id="{DCD752B9-EFAE-AFC1-7D39-6763B89DE8D3}"/>
+              </a:ext>
+            </a:extLst>
+          </p:cNvPr>
+          <p:cNvPicPr>
+            <a:picLocks noChangeAspect="1"/>
+          </p:cNvPicPr>
+          <p:nvPr/>
+        </p:nvPicPr>
+        <p:blipFill>
+          <a:blip r:embed="rId3"/>
+          <a:stretch>
+            <a:fillRect/>
+          </a:stretch>
+        </p:blipFill>
+        <p:spPr>
+          <a:xfrm>
+            <a:off x="0" y="652130"/>
+            <a:ext cx="9144000" cy="4491369"/>
+          </a:xfrm>
+          <a:prstGeom prst="rect">
+            <a:avLst/>
+          </a:prstGeom>
+        </p:spPr>
+      </p:pic>
+    </p:spTree>
+    <p:extLst>
+      <p:ext uri="{BB962C8B-B14F-4D97-AF65-F5344CB8AC3E}">
+        <p14:creationId xmlns:p14="http://schemas.microsoft.com/office/powerpoint/2010/main" val="3365057756"/>
+      </p:ext>
+    </p:extLst>
+  </p:cSld>
+  <p:clrMapOvr>
+    <a:masterClrMapping/>
+  </p:clrMapOvr>
+</p:sld>
+</file>
+
+<file path=ppt/slides/slide2.xml><?xml version="1.0" encoding="utf-8"?>
+<p:sld xmlns:a="http://schemas.openxmlformats.org/drawingml/2006/main" xmlns:r="http://schemas.openxmlformats.org/officeDocument/2006/relationships" xmlns:p="http://schemas.openxmlformats.org/presentationml/2006/main" show="0">
+  <p:cSld>
+    <p:spTree>
+      <p:nvGrpSpPr>
         <p:cNvPr id="1" name="Shape 323">
           <a:extLst>
             <a:ext uri="{FF2B5EF4-FFF2-40B4-BE49-F238E27FC236}">
@@ -6700,7 +7731,7 @@
             </a:pPr>
             <a:fld id="{00000000-1234-1234-1234-123412341234}" type="slidenum">
               <a:rPr lang="en"/>
-              <a:t>1</a:t>
+              <a:t>2</a:t>
             </a:fld>
             <a:endParaRPr/>
           </a:p>
@@ -7439,1037 +8470,6 @@
         <p14:creationId xmlns:p14="http://schemas.microsoft.com/office/powerpoint/2010/main" val="674272117"/>
       </p:ext>
     </p:extLst>
-  </p:cSld>
-  <p:clrMapOvr>
-    <a:masterClrMapping/>
-  </p:clrMapOvr>
-</p:sld>
-</file>
-
-<file path=ppt/slides/slide10.xml><?xml version="1.0" encoding="utf-8"?>
-<p:sld xmlns:a="http://schemas.openxmlformats.org/drawingml/2006/main" xmlns:r="http://schemas.openxmlformats.org/officeDocument/2006/relationships" xmlns:p="http://schemas.openxmlformats.org/presentationml/2006/main" show="0">
-  <p:cSld>
-    <p:spTree>
-      <p:nvGrpSpPr>
-        <p:cNvPr id="1" name="Shape 323"/>
-        <p:cNvGrpSpPr/>
-        <p:nvPr/>
-      </p:nvGrpSpPr>
-      <p:grpSpPr>
-        <a:xfrm>
-          <a:off x="0" y="0"/>
-          <a:ext cx="0" cy="0"/>
-          <a:chOff x="0" y="0"/>
-          <a:chExt cx="0" cy="0"/>
-        </a:xfrm>
-      </p:grpSpPr>
-      <p:sp>
-        <p:nvSpPr>
-          <p:cNvPr id="324" name="Google Shape;324;p47"/>
-          <p:cNvSpPr txBox="1">
-            <a:spLocks noGrp="1"/>
-          </p:cNvSpPr>
-          <p:nvPr>
-            <p:ph type="title"/>
-          </p:nvPr>
-        </p:nvSpPr>
-        <p:spPr>
-          <a:xfrm>
-            <a:off x="226208" y="1"/>
-            <a:ext cx="8520600" cy="464980"/>
-          </a:xfrm>
-          <a:prstGeom prst="rect">
-            <a:avLst/>
-          </a:prstGeom>
-        </p:spPr>
-        <p:txBody>
-          <a:bodyPr spcFirstLastPara="1" wrap="square" lIns="91425" tIns="91425" rIns="91425" bIns="91425" anchor="t" anchorCtr="0">
-            <a:noAutofit/>
-          </a:bodyPr>
-          <a:lstStyle/>
-          <a:p>
-            <a:pPr marL="0" lvl="0" indent="0" algn="ctr" rtl="0">
-              <a:spcBef>
-                <a:spcPts val="0"/>
-              </a:spcBef>
-              <a:spcAft>
-                <a:spcPts val="0"/>
-              </a:spcAft>
-              <a:buNone/>
-            </a:pPr>
-            <a:r>
-              <a:rPr lang="en-US" dirty="0"/>
-              <a:t>Use </a:t>
-            </a:r>
-            <a:r>
-              <a:rPr lang="en-US" sz="2400" dirty="0"/>
-              <a:t>Assigned</a:t>
-            </a:r>
-            <a:r>
-              <a:rPr lang="en-US" dirty="0"/>
-              <a:t> Seat</a:t>
-            </a:r>
-            <a:endParaRPr dirty="0"/>
-          </a:p>
-        </p:txBody>
-      </p:sp>
-      <p:sp>
-        <p:nvSpPr>
-          <p:cNvPr id="326" name="Google Shape;326;p47"/>
-          <p:cNvSpPr txBox="1">
-            <a:spLocks noGrp="1"/>
-          </p:cNvSpPr>
-          <p:nvPr>
-            <p:ph type="sldNum" idx="12"/>
-          </p:nvPr>
-        </p:nvSpPr>
-        <p:spPr>
-          <a:xfrm>
-            <a:off x="8472458" y="4663217"/>
-            <a:ext cx="548700" cy="393600"/>
-          </a:xfrm>
-          <a:prstGeom prst="rect">
-            <a:avLst/>
-          </a:prstGeom>
-        </p:spPr>
-        <p:txBody>
-          <a:bodyPr spcFirstLastPara="1" wrap="square" lIns="91425" tIns="91425" rIns="91425" bIns="91425" anchor="ctr" anchorCtr="0">
-            <a:noAutofit/>
-          </a:bodyPr>
-          <a:lstStyle/>
-          <a:p>
-            <a:pPr marL="0" lvl="0" indent="0" algn="r" rtl="0">
-              <a:spcBef>
-                <a:spcPts val="0"/>
-              </a:spcBef>
-              <a:spcAft>
-                <a:spcPts val="0"/>
-              </a:spcAft>
-              <a:buNone/>
-            </a:pPr>
-            <a:fld id="{00000000-1234-1234-1234-123412341234}" type="slidenum">
-              <a:rPr lang="en"/>
-              <a:t>10</a:t>
-            </a:fld>
-            <a:endParaRPr/>
-          </a:p>
-        </p:txBody>
-      </p:sp>
-      <p:pic>
-        <p:nvPicPr>
-          <p:cNvPr id="6" name="Picture 5">
-            <a:extLst>
-              <a:ext uri="{FF2B5EF4-FFF2-40B4-BE49-F238E27FC236}">
-                <a16:creationId xmlns:a16="http://schemas.microsoft.com/office/drawing/2014/main" id="{DED32793-7C09-E3A3-94E5-B5D46727A1D0}"/>
-              </a:ext>
-            </a:extLst>
-          </p:cNvPr>
-          <p:cNvPicPr>
-            <a:picLocks noChangeAspect="1"/>
-          </p:cNvPicPr>
-          <p:nvPr/>
-        </p:nvPicPr>
-        <p:blipFill>
-          <a:blip r:embed="rId3"/>
-          <a:stretch>
-            <a:fillRect/>
-          </a:stretch>
-        </p:blipFill>
-        <p:spPr>
-          <a:xfrm>
-            <a:off x="-1" y="551663"/>
-            <a:ext cx="9144001" cy="4591837"/>
-          </a:xfrm>
-          <a:prstGeom prst="rect">
-            <a:avLst/>
-          </a:prstGeom>
-        </p:spPr>
-      </p:pic>
-    </p:spTree>
-    <p:extLst>
-      <p:ext uri="{BB962C8B-B14F-4D97-AF65-F5344CB8AC3E}">
-        <p14:creationId xmlns:p14="http://schemas.microsoft.com/office/powerpoint/2010/main" val="4226348449"/>
-      </p:ext>
-    </p:extLst>
-  </p:cSld>
-  <p:clrMapOvr>
-    <a:masterClrMapping/>
-  </p:clrMapOvr>
-</p:sld>
-</file>
-
-<file path=ppt/slides/slide11.xml><?xml version="1.0" encoding="utf-8"?>
-<p:sld xmlns:a="http://schemas.openxmlformats.org/drawingml/2006/main" xmlns:r="http://schemas.openxmlformats.org/officeDocument/2006/relationships" xmlns:p="http://schemas.openxmlformats.org/presentationml/2006/main" show="0">
-  <p:cSld>
-    <p:spTree>
-      <p:nvGrpSpPr>
-        <p:cNvPr id="1" name="Shape 323"/>
-        <p:cNvGrpSpPr/>
-        <p:nvPr/>
-      </p:nvGrpSpPr>
-      <p:grpSpPr>
-        <a:xfrm>
-          <a:off x="0" y="0"/>
-          <a:ext cx="0" cy="0"/>
-          <a:chOff x="0" y="0"/>
-          <a:chExt cx="0" cy="0"/>
-        </a:xfrm>
-      </p:grpSpPr>
-      <p:sp>
-        <p:nvSpPr>
-          <p:cNvPr id="324" name="Google Shape;324;p47"/>
-          <p:cNvSpPr txBox="1">
-            <a:spLocks noGrp="1"/>
-          </p:cNvSpPr>
-          <p:nvPr>
-            <p:ph type="title"/>
-          </p:nvPr>
-        </p:nvSpPr>
-        <p:spPr>
-          <a:xfrm>
-            <a:off x="226208" y="1"/>
-            <a:ext cx="8520600" cy="464980"/>
-          </a:xfrm>
-          <a:prstGeom prst="rect">
-            <a:avLst/>
-          </a:prstGeom>
-        </p:spPr>
-        <p:txBody>
-          <a:bodyPr spcFirstLastPara="1" wrap="square" lIns="91425" tIns="91425" rIns="91425" bIns="91425" anchor="t" anchorCtr="0">
-            <a:noAutofit/>
-          </a:bodyPr>
-          <a:lstStyle/>
-          <a:p>
-            <a:pPr marL="0" lvl="0" indent="0" algn="ctr" rtl="0">
-              <a:spcBef>
-                <a:spcPts val="0"/>
-              </a:spcBef>
-              <a:spcAft>
-                <a:spcPts val="0"/>
-              </a:spcAft>
-              <a:buNone/>
-            </a:pPr>
-            <a:r>
-              <a:rPr lang="en-US" dirty="0"/>
-              <a:t>Use </a:t>
-            </a:r>
-            <a:r>
-              <a:rPr lang="en-US" sz="2400" dirty="0"/>
-              <a:t>Assigned</a:t>
-            </a:r>
-            <a:r>
-              <a:rPr lang="en-US" dirty="0"/>
-              <a:t> Seat</a:t>
-            </a:r>
-            <a:endParaRPr dirty="0"/>
-          </a:p>
-        </p:txBody>
-      </p:sp>
-      <p:sp>
-        <p:nvSpPr>
-          <p:cNvPr id="326" name="Google Shape;326;p47"/>
-          <p:cNvSpPr txBox="1">
-            <a:spLocks noGrp="1"/>
-          </p:cNvSpPr>
-          <p:nvPr>
-            <p:ph type="sldNum" idx="12"/>
-          </p:nvPr>
-        </p:nvSpPr>
-        <p:spPr>
-          <a:xfrm>
-            <a:off x="8472458" y="4663217"/>
-            <a:ext cx="548700" cy="393600"/>
-          </a:xfrm>
-          <a:prstGeom prst="rect">
-            <a:avLst/>
-          </a:prstGeom>
-        </p:spPr>
-        <p:txBody>
-          <a:bodyPr spcFirstLastPara="1" wrap="square" lIns="91425" tIns="91425" rIns="91425" bIns="91425" anchor="ctr" anchorCtr="0">
-            <a:noAutofit/>
-          </a:bodyPr>
-          <a:lstStyle/>
-          <a:p>
-            <a:pPr marL="0" lvl="0" indent="0" algn="r" rtl="0">
-              <a:spcBef>
-                <a:spcPts val="0"/>
-              </a:spcBef>
-              <a:spcAft>
-                <a:spcPts val="0"/>
-              </a:spcAft>
-              <a:buNone/>
-            </a:pPr>
-            <a:fld id="{00000000-1234-1234-1234-123412341234}" type="slidenum">
-              <a:rPr lang="en"/>
-              <a:t>11</a:t>
-            </a:fld>
-            <a:endParaRPr/>
-          </a:p>
-        </p:txBody>
-      </p:sp>
-      <p:pic>
-        <p:nvPicPr>
-          <p:cNvPr id="3" name="Picture 2">
-            <a:extLst>
-              <a:ext uri="{FF2B5EF4-FFF2-40B4-BE49-F238E27FC236}">
-                <a16:creationId xmlns:a16="http://schemas.microsoft.com/office/drawing/2014/main" id="{92DE4AAC-70FE-A114-5258-F5B22EDDED45}"/>
-              </a:ext>
-            </a:extLst>
-          </p:cNvPr>
-          <p:cNvPicPr>
-            <a:picLocks noChangeAspect="1"/>
-          </p:cNvPicPr>
-          <p:nvPr/>
-        </p:nvPicPr>
-        <p:blipFill>
-          <a:blip r:embed="rId3"/>
-          <a:stretch>
-            <a:fillRect/>
-          </a:stretch>
-        </p:blipFill>
-        <p:spPr>
-          <a:xfrm>
-            <a:off x="0" y="716280"/>
-            <a:ext cx="9144000" cy="4427218"/>
-          </a:xfrm>
-          <a:prstGeom prst="rect">
-            <a:avLst/>
-          </a:prstGeom>
-        </p:spPr>
-      </p:pic>
-    </p:spTree>
-    <p:extLst>
-      <p:ext uri="{BB962C8B-B14F-4D97-AF65-F5344CB8AC3E}">
-        <p14:creationId xmlns:p14="http://schemas.microsoft.com/office/powerpoint/2010/main" val="1976403023"/>
-      </p:ext>
-    </p:extLst>
-  </p:cSld>
-  <p:clrMapOvr>
-    <a:masterClrMapping/>
-  </p:clrMapOvr>
-</p:sld>
-</file>
-
-<file path=ppt/slides/slide12.xml><?xml version="1.0" encoding="utf-8"?>
-<p:sld xmlns:a="http://schemas.openxmlformats.org/drawingml/2006/main" xmlns:r="http://schemas.openxmlformats.org/officeDocument/2006/relationships" xmlns:p="http://schemas.openxmlformats.org/presentationml/2006/main" show="0">
-  <p:cSld>
-    <p:spTree>
-      <p:nvGrpSpPr>
-        <p:cNvPr id="1" name="Shape 323"/>
-        <p:cNvGrpSpPr/>
-        <p:nvPr/>
-      </p:nvGrpSpPr>
-      <p:grpSpPr>
-        <a:xfrm>
-          <a:off x="0" y="0"/>
-          <a:ext cx="0" cy="0"/>
-          <a:chOff x="0" y="0"/>
-          <a:chExt cx="0" cy="0"/>
-        </a:xfrm>
-      </p:grpSpPr>
-      <p:sp>
-        <p:nvSpPr>
-          <p:cNvPr id="324" name="Google Shape;324;p47"/>
-          <p:cNvSpPr txBox="1">
-            <a:spLocks noGrp="1"/>
-          </p:cNvSpPr>
-          <p:nvPr>
-            <p:ph type="title"/>
-          </p:nvPr>
-        </p:nvSpPr>
-        <p:spPr>
-          <a:xfrm>
-            <a:off x="226208" y="1"/>
-            <a:ext cx="8520600" cy="464980"/>
-          </a:xfrm>
-          <a:prstGeom prst="rect">
-            <a:avLst/>
-          </a:prstGeom>
-        </p:spPr>
-        <p:txBody>
-          <a:bodyPr spcFirstLastPara="1" wrap="square" lIns="91425" tIns="91425" rIns="91425" bIns="91425" anchor="t" anchorCtr="0">
-            <a:noAutofit/>
-          </a:bodyPr>
-          <a:lstStyle/>
-          <a:p>
-            <a:pPr marL="0" lvl="0" indent="0" algn="ctr" rtl="0">
-              <a:spcBef>
-                <a:spcPts val="0"/>
-              </a:spcBef>
-              <a:spcAft>
-                <a:spcPts val="0"/>
-              </a:spcAft>
-              <a:buNone/>
-            </a:pPr>
-            <a:r>
-              <a:rPr lang="en-US" dirty="0"/>
-              <a:t>Use </a:t>
-            </a:r>
-            <a:r>
-              <a:rPr lang="en-US" sz="2400" dirty="0"/>
-              <a:t>Assigned</a:t>
-            </a:r>
-            <a:r>
-              <a:rPr lang="en-US" dirty="0"/>
-              <a:t> Seat</a:t>
-            </a:r>
-            <a:endParaRPr dirty="0"/>
-          </a:p>
-        </p:txBody>
-      </p:sp>
-      <p:sp>
-        <p:nvSpPr>
-          <p:cNvPr id="326" name="Google Shape;326;p47"/>
-          <p:cNvSpPr txBox="1">
-            <a:spLocks noGrp="1"/>
-          </p:cNvSpPr>
-          <p:nvPr>
-            <p:ph type="sldNum" idx="12"/>
-          </p:nvPr>
-        </p:nvSpPr>
-        <p:spPr>
-          <a:xfrm>
-            <a:off x="8472458" y="4663217"/>
-            <a:ext cx="548700" cy="393600"/>
-          </a:xfrm>
-          <a:prstGeom prst="rect">
-            <a:avLst/>
-          </a:prstGeom>
-        </p:spPr>
-        <p:txBody>
-          <a:bodyPr spcFirstLastPara="1" wrap="square" lIns="91425" tIns="91425" rIns="91425" bIns="91425" anchor="ctr" anchorCtr="0">
-            <a:noAutofit/>
-          </a:bodyPr>
-          <a:lstStyle/>
-          <a:p>
-            <a:pPr marL="0" lvl="0" indent="0" algn="r" rtl="0">
-              <a:spcBef>
-                <a:spcPts val="0"/>
-              </a:spcBef>
-              <a:spcAft>
-                <a:spcPts val="0"/>
-              </a:spcAft>
-              <a:buNone/>
-            </a:pPr>
-            <a:fld id="{00000000-1234-1234-1234-123412341234}" type="slidenum">
-              <a:rPr lang="en"/>
-              <a:t>12</a:t>
-            </a:fld>
-            <a:endParaRPr/>
-          </a:p>
-        </p:txBody>
-      </p:sp>
-      <p:pic>
-        <p:nvPicPr>
-          <p:cNvPr id="4" name="Picture 3">
-            <a:extLst>
-              <a:ext uri="{FF2B5EF4-FFF2-40B4-BE49-F238E27FC236}">
-                <a16:creationId xmlns:a16="http://schemas.microsoft.com/office/drawing/2014/main" id="{DCD752B9-EFAE-AFC1-7D39-6763B89DE8D3}"/>
-              </a:ext>
-            </a:extLst>
-          </p:cNvPr>
-          <p:cNvPicPr>
-            <a:picLocks noChangeAspect="1"/>
-          </p:cNvPicPr>
-          <p:nvPr/>
-        </p:nvPicPr>
-        <p:blipFill>
-          <a:blip r:embed="rId3"/>
-          <a:stretch>
-            <a:fillRect/>
-          </a:stretch>
-        </p:blipFill>
-        <p:spPr>
-          <a:xfrm>
-            <a:off x="0" y="652130"/>
-            <a:ext cx="9144000" cy="4491369"/>
-          </a:xfrm>
-          <a:prstGeom prst="rect">
-            <a:avLst/>
-          </a:prstGeom>
-        </p:spPr>
-      </p:pic>
-    </p:spTree>
-    <p:extLst>
-      <p:ext uri="{BB962C8B-B14F-4D97-AF65-F5344CB8AC3E}">
-        <p14:creationId xmlns:p14="http://schemas.microsoft.com/office/powerpoint/2010/main" val="3365057756"/>
-      </p:ext>
-    </p:extLst>
-  </p:cSld>
-  <p:clrMapOvr>
-    <a:masterClrMapping/>
-  </p:clrMapOvr>
-</p:sld>
-</file>
-
-<file path=ppt/slides/slide2.xml><?xml version="1.0" encoding="utf-8"?>
-<p:sld xmlns:a="http://schemas.openxmlformats.org/drawingml/2006/main" xmlns:r="http://schemas.openxmlformats.org/officeDocument/2006/relationships" xmlns:p="http://schemas.openxmlformats.org/presentationml/2006/main" show="0">
-  <p:cSld>
-    <p:spTree>
-      <p:nvGrpSpPr>
-        <p:cNvPr id="1" name="Shape 323"/>
-        <p:cNvGrpSpPr/>
-        <p:nvPr/>
-      </p:nvGrpSpPr>
-      <p:grpSpPr>
-        <a:xfrm>
-          <a:off x="0" y="0"/>
-          <a:ext cx="0" cy="0"/>
-          <a:chOff x="0" y="0"/>
-          <a:chExt cx="0" cy="0"/>
-        </a:xfrm>
-      </p:grpSpPr>
-      <p:sp>
-        <p:nvSpPr>
-          <p:cNvPr id="324" name="Google Shape;324;p47"/>
-          <p:cNvSpPr txBox="1">
-            <a:spLocks noGrp="1"/>
-          </p:cNvSpPr>
-          <p:nvPr>
-            <p:ph type="title"/>
-          </p:nvPr>
-        </p:nvSpPr>
-        <p:spPr>
-          <a:xfrm>
-            <a:off x="305858" y="273819"/>
-            <a:ext cx="8520600" cy="623700"/>
-          </a:xfrm>
-          <a:prstGeom prst="rect">
-            <a:avLst/>
-          </a:prstGeom>
-        </p:spPr>
-        <p:txBody>
-          <a:bodyPr spcFirstLastPara="1" wrap="square" lIns="91425" tIns="91425" rIns="91425" bIns="91425" anchor="t" anchorCtr="0">
-            <a:noAutofit/>
-          </a:bodyPr>
-          <a:lstStyle/>
-          <a:p>
-            <a:pPr marL="0" lvl="0" indent="0" algn="ctr" rtl="0">
-              <a:spcBef>
-                <a:spcPts val="0"/>
-              </a:spcBef>
-              <a:spcAft>
-                <a:spcPts val="0"/>
-              </a:spcAft>
-              <a:buNone/>
-            </a:pPr>
-            <a:r>
-              <a:rPr lang="en-US" dirty="0"/>
-              <a:t>GCIS – Software Development and Problem Solving</a:t>
-            </a:r>
-            <a:endParaRPr dirty="0"/>
-          </a:p>
-        </p:txBody>
-      </p:sp>
-      <p:sp>
-        <p:nvSpPr>
-          <p:cNvPr id="325" name="Google Shape;325;p47"/>
-          <p:cNvSpPr txBox="1">
-            <a:spLocks noGrp="1"/>
-          </p:cNvSpPr>
-          <p:nvPr>
-            <p:ph type="body" idx="1"/>
-          </p:nvPr>
-        </p:nvSpPr>
-        <p:spPr>
-          <a:xfrm>
-            <a:off x="-5842" y="1721147"/>
-            <a:ext cx="9149842" cy="1226403"/>
-          </a:xfrm>
-          <a:prstGeom prst="rect">
-            <a:avLst/>
-          </a:prstGeom>
-        </p:spPr>
-        <p:txBody>
-          <a:bodyPr spcFirstLastPara="1" wrap="square" lIns="91425" tIns="91425" rIns="91425" bIns="91425" anchor="ctr" anchorCtr="0">
-            <a:noAutofit/>
-          </a:bodyPr>
-          <a:lstStyle/>
-          <a:p>
-            <a:pPr marL="146050" indent="0" algn="ctr">
-              <a:buNone/>
-            </a:pPr>
-            <a:r>
-              <a:rPr lang="en-US" sz="2400" dirty="0"/>
-              <a:t>Take </a:t>
-            </a:r>
-            <a:r>
-              <a:rPr lang="pl-PL" sz="2400" dirty="0"/>
-              <a:t>Quiz </a:t>
-            </a:r>
-            <a:r>
-              <a:rPr lang="en-US" sz="2400" dirty="0"/>
-              <a:t>5</a:t>
-            </a:r>
-            <a:r>
-              <a:rPr lang="pl-PL" sz="2400" dirty="0"/>
-              <a:t>.</a:t>
-            </a:r>
-            <a:r>
-              <a:rPr lang="en-US" sz="2400" dirty="0"/>
-              <a:t>1</a:t>
-            </a:r>
-            <a:r>
-              <a:rPr lang="pl-PL" sz="2400" dirty="0"/>
-              <a:t>: </a:t>
-            </a:r>
-            <a:r>
-              <a:rPr lang="en-US" sz="2400" dirty="0"/>
-              <a:t>Abstract Data Types</a:t>
-            </a:r>
-          </a:p>
-          <a:p>
-            <a:pPr algn="ctr"/>
-            <a:r>
-              <a:rPr lang="en-US" sz="2400" dirty="0"/>
-              <a:t>Password - </a:t>
-            </a:r>
-            <a:r>
-              <a:rPr lang="en-US" sz="2400" dirty="0" err="1"/>
-              <a:t>abstractWord</a:t>
-            </a:r>
-            <a:endParaRPr sz="2400" dirty="0"/>
-          </a:p>
-        </p:txBody>
-      </p:sp>
-      <p:sp>
-        <p:nvSpPr>
-          <p:cNvPr id="326" name="Google Shape;326;p47"/>
-          <p:cNvSpPr txBox="1">
-            <a:spLocks noGrp="1"/>
-          </p:cNvSpPr>
-          <p:nvPr>
-            <p:ph type="sldNum" idx="12"/>
-          </p:nvPr>
-        </p:nvSpPr>
-        <p:spPr>
-          <a:xfrm>
-            <a:off x="8472458" y="4663217"/>
-            <a:ext cx="548700" cy="393600"/>
-          </a:xfrm>
-          <a:prstGeom prst="rect">
-            <a:avLst/>
-          </a:prstGeom>
-        </p:spPr>
-        <p:txBody>
-          <a:bodyPr spcFirstLastPara="1" wrap="square" lIns="91425" tIns="91425" rIns="91425" bIns="91425" anchor="ctr" anchorCtr="0">
-            <a:noAutofit/>
-          </a:bodyPr>
-          <a:lstStyle/>
-          <a:p>
-            <a:pPr marL="0" lvl="0" indent="0" algn="r" rtl="0">
-              <a:spcBef>
-                <a:spcPts val="0"/>
-              </a:spcBef>
-              <a:spcAft>
-                <a:spcPts val="0"/>
-              </a:spcAft>
-              <a:buNone/>
-            </a:pPr>
-            <a:fld id="{00000000-1234-1234-1234-123412341234}" type="slidenum">
-              <a:rPr lang="en"/>
-              <a:t>2</a:t>
-            </a:fld>
-            <a:endParaRPr/>
-          </a:p>
-        </p:txBody>
-      </p:sp>
-      <p:sp>
-        <p:nvSpPr>
-          <p:cNvPr id="2" name="TextBox 1">
-            <a:extLst>
-              <a:ext uri="{FF2B5EF4-FFF2-40B4-BE49-F238E27FC236}">
-                <a16:creationId xmlns:a16="http://schemas.microsoft.com/office/drawing/2014/main" id="{DCC33EBB-1C9D-B9A9-88E6-F3466077417F}"/>
-              </a:ext>
-            </a:extLst>
-          </p:cNvPr>
-          <p:cNvSpPr txBox="1"/>
-          <p:nvPr/>
-        </p:nvSpPr>
-        <p:spPr>
-          <a:xfrm>
-            <a:off x="0" y="1277369"/>
-            <a:ext cx="9144000" cy="307777"/>
-          </a:xfrm>
-          <a:prstGeom prst="rect">
-            <a:avLst/>
-          </a:prstGeom>
-          <a:solidFill>
-            <a:srgbClr val="FFC000"/>
-          </a:solidFill>
-        </p:spPr>
-        <p:txBody>
-          <a:bodyPr wrap="square" rtlCol="0">
-            <a:spAutoFit/>
-          </a:bodyPr>
-          <a:lstStyle/>
-          <a:p>
-            <a:r>
-              <a:rPr lang="en-US" dirty="0"/>
-              <a:t>Quiz</a:t>
-            </a:r>
-          </a:p>
-        </p:txBody>
-      </p:sp>
-      <p:sp>
-        <p:nvSpPr>
-          <p:cNvPr id="3" name="TextBox 2">
-            <a:extLst>
-              <a:ext uri="{FF2B5EF4-FFF2-40B4-BE49-F238E27FC236}">
-                <a16:creationId xmlns:a16="http://schemas.microsoft.com/office/drawing/2014/main" id="{64C19922-6A1B-1404-5104-DC43E4C67861}"/>
-              </a:ext>
-            </a:extLst>
-          </p:cNvPr>
-          <p:cNvSpPr txBox="1"/>
-          <p:nvPr/>
-        </p:nvSpPr>
-        <p:spPr>
-          <a:xfrm>
-            <a:off x="-5842" y="3031063"/>
-            <a:ext cx="9144000" cy="307777"/>
-          </a:xfrm>
-          <a:prstGeom prst="rect">
-            <a:avLst/>
-          </a:prstGeom>
-          <a:solidFill>
-            <a:srgbClr val="FFC000"/>
-          </a:solidFill>
-        </p:spPr>
-        <p:txBody>
-          <a:bodyPr wrap="square" rtlCol="0">
-            <a:spAutoFit/>
-          </a:bodyPr>
-          <a:lstStyle/>
-          <a:p>
-            <a:r>
-              <a:rPr lang="en-US" dirty="0"/>
-              <a:t>Next </a:t>
-            </a:r>
-            <a:r>
-              <a:rPr lang="en-US" dirty="0">
-                <a:sym typeface="Wingdings" panose="05000000000000000000" pitchFamily="2" charset="2"/>
-              </a:rPr>
-              <a:t> </a:t>
-            </a:r>
-            <a:endParaRPr lang="en-US" dirty="0"/>
-          </a:p>
-        </p:txBody>
-      </p:sp>
-      <p:sp>
-        <p:nvSpPr>
-          <p:cNvPr id="4" name="Google Shape;325;p47">
-            <a:extLst>
-              <a:ext uri="{FF2B5EF4-FFF2-40B4-BE49-F238E27FC236}">
-                <a16:creationId xmlns:a16="http://schemas.microsoft.com/office/drawing/2014/main" id="{E455EA58-F56D-AF58-E97D-95A77E0AB6CF}"/>
-              </a:ext>
-            </a:extLst>
-          </p:cNvPr>
-          <p:cNvSpPr txBox="1">
-            <a:spLocks/>
-          </p:cNvSpPr>
-          <p:nvPr/>
-        </p:nvSpPr>
-        <p:spPr>
-          <a:xfrm>
-            <a:off x="-5842" y="3422352"/>
-            <a:ext cx="9149842" cy="1721148"/>
-          </a:xfrm>
-          <a:prstGeom prst="rect">
-            <a:avLst/>
-          </a:prstGeom>
-          <a:noFill/>
-          <a:ln>
-            <a:noFill/>
-          </a:ln>
-        </p:spPr>
-        <p:txBody>
-          <a:bodyPr spcFirstLastPara="1" wrap="square" lIns="91425" tIns="91425" rIns="91425" bIns="91425" anchor="ctr" anchorCtr="0">
-            <a:noAutofit/>
-          </a:bodyPr>
-          <a:lstStyle>
-            <a:defPPr marR="0" lvl="0" algn="l" rtl="0">
-              <a:lnSpc>
-                <a:spcPct val="100000"/>
-              </a:lnSpc>
-              <a:spcBef>
-                <a:spcPts val="0"/>
-              </a:spcBef>
-              <a:spcAft>
-                <a:spcPts val="0"/>
-              </a:spcAft>
-            </a:defPPr>
-            <a:lvl1pPr marL="457200" marR="0" lvl="0" indent="-311150" algn="l" rtl="0">
-              <a:lnSpc>
-                <a:spcPct val="115000"/>
-              </a:lnSpc>
-              <a:spcBef>
-                <a:spcPts val="0"/>
-              </a:spcBef>
-              <a:spcAft>
-                <a:spcPts val="0"/>
-              </a:spcAft>
-              <a:buClr>
-                <a:schemeClr val="dk2"/>
-              </a:buClr>
-              <a:buSzPts val="1300"/>
-              <a:buFont typeface="Roboto"/>
-              <a:buChar char="●"/>
-              <a:defRPr sz="1300" b="0" i="0" u="none" strike="noStrike" cap="none">
-                <a:solidFill>
-                  <a:schemeClr val="dk2"/>
-                </a:solidFill>
-                <a:latin typeface="Roboto"/>
-                <a:ea typeface="Roboto"/>
-                <a:cs typeface="Roboto"/>
-                <a:sym typeface="Roboto"/>
-              </a:defRPr>
-            </a:lvl1pPr>
-            <a:lvl2pPr marL="914400" marR="0" lvl="1" indent="-298450" algn="l" rtl="0">
-              <a:lnSpc>
-                <a:spcPct val="115000"/>
-              </a:lnSpc>
-              <a:spcBef>
-                <a:spcPts val="1600"/>
-              </a:spcBef>
-              <a:spcAft>
-                <a:spcPts val="0"/>
-              </a:spcAft>
-              <a:buClr>
-                <a:schemeClr val="dk2"/>
-              </a:buClr>
-              <a:buSzPts val="1100"/>
-              <a:buFont typeface="Roboto"/>
-              <a:buChar char="○"/>
-              <a:defRPr sz="1100" b="0" i="0" u="none" strike="noStrike" cap="none">
-                <a:solidFill>
-                  <a:schemeClr val="dk2"/>
-                </a:solidFill>
-                <a:latin typeface="Roboto"/>
-                <a:ea typeface="Roboto"/>
-                <a:cs typeface="Roboto"/>
-                <a:sym typeface="Roboto"/>
-              </a:defRPr>
-            </a:lvl2pPr>
-            <a:lvl3pPr marL="1371600" marR="0" lvl="2" indent="-298450" algn="l" rtl="0">
-              <a:lnSpc>
-                <a:spcPct val="115000"/>
-              </a:lnSpc>
-              <a:spcBef>
-                <a:spcPts val="1600"/>
-              </a:spcBef>
-              <a:spcAft>
-                <a:spcPts val="0"/>
-              </a:spcAft>
-              <a:buClr>
-                <a:schemeClr val="dk2"/>
-              </a:buClr>
-              <a:buSzPts val="1100"/>
-              <a:buFont typeface="Roboto"/>
-              <a:buChar char="■"/>
-              <a:defRPr sz="1100" b="0" i="0" u="none" strike="noStrike" cap="none">
-                <a:solidFill>
-                  <a:schemeClr val="dk2"/>
-                </a:solidFill>
-                <a:latin typeface="Roboto"/>
-                <a:ea typeface="Roboto"/>
-                <a:cs typeface="Roboto"/>
-                <a:sym typeface="Roboto"/>
-              </a:defRPr>
-            </a:lvl3pPr>
-            <a:lvl4pPr marL="1828800" marR="0" lvl="3" indent="-298450" algn="l" rtl="0">
-              <a:lnSpc>
-                <a:spcPct val="115000"/>
-              </a:lnSpc>
-              <a:spcBef>
-                <a:spcPts val="1600"/>
-              </a:spcBef>
-              <a:spcAft>
-                <a:spcPts val="0"/>
-              </a:spcAft>
-              <a:buClr>
-                <a:schemeClr val="dk2"/>
-              </a:buClr>
-              <a:buSzPts val="1100"/>
-              <a:buFont typeface="Roboto"/>
-              <a:buChar char="●"/>
-              <a:defRPr sz="1100" b="0" i="0" u="none" strike="noStrike" cap="none">
-                <a:solidFill>
-                  <a:schemeClr val="dk2"/>
-                </a:solidFill>
-                <a:latin typeface="Roboto"/>
-                <a:ea typeface="Roboto"/>
-                <a:cs typeface="Roboto"/>
-                <a:sym typeface="Roboto"/>
-              </a:defRPr>
-            </a:lvl4pPr>
-            <a:lvl5pPr marL="2286000" marR="0" lvl="4" indent="-298450" algn="l" rtl="0">
-              <a:lnSpc>
-                <a:spcPct val="115000"/>
-              </a:lnSpc>
-              <a:spcBef>
-                <a:spcPts val="1600"/>
-              </a:spcBef>
-              <a:spcAft>
-                <a:spcPts val="0"/>
-              </a:spcAft>
-              <a:buClr>
-                <a:schemeClr val="dk2"/>
-              </a:buClr>
-              <a:buSzPts val="1100"/>
-              <a:buFont typeface="Roboto"/>
-              <a:buChar char="○"/>
-              <a:defRPr sz="1100" b="0" i="0" u="none" strike="noStrike" cap="none">
-                <a:solidFill>
-                  <a:schemeClr val="dk2"/>
-                </a:solidFill>
-                <a:latin typeface="Roboto"/>
-                <a:ea typeface="Roboto"/>
-                <a:cs typeface="Roboto"/>
-                <a:sym typeface="Roboto"/>
-              </a:defRPr>
-            </a:lvl5pPr>
-            <a:lvl6pPr marL="2743200" marR="0" lvl="5" indent="-298450" algn="l" rtl="0">
-              <a:lnSpc>
-                <a:spcPct val="115000"/>
-              </a:lnSpc>
-              <a:spcBef>
-                <a:spcPts val="1600"/>
-              </a:spcBef>
-              <a:spcAft>
-                <a:spcPts val="0"/>
-              </a:spcAft>
-              <a:buClr>
-                <a:schemeClr val="dk2"/>
-              </a:buClr>
-              <a:buSzPts val="1100"/>
-              <a:buFont typeface="Roboto"/>
-              <a:buChar char="■"/>
-              <a:defRPr sz="1100" b="0" i="0" u="none" strike="noStrike" cap="none">
-                <a:solidFill>
-                  <a:schemeClr val="dk2"/>
-                </a:solidFill>
-                <a:latin typeface="Roboto"/>
-                <a:ea typeface="Roboto"/>
-                <a:cs typeface="Roboto"/>
-                <a:sym typeface="Roboto"/>
-              </a:defRPr>
-            </a:lvl6pPr>
-            <a:lvl7pPr marL="3200400" marR="0" lvl="6" indent="-298450" algn="l" rtl="0">
-              <a:lnSpc>
-                <a:spcPct val="115000"/>
-              </a:lnSpc>
-              <a:spcBef>
-                <a:spcPts val="1600"/>
-              </a:spcBef>
-              <a:spcAft>
-                <a:spcPts val="0"/>
-              </a:spcAft>
-              <a:buClr>
-                <a:schemeClr val="dk2"/>
-              </a:buClr>
-              <a:buSzPts val="1100"/>
-              <a:buFont typeface="Roboto"/>
-              <a:buChar char="●"/>
-              <a:defRPr sz="1100" b="0" i="0" u="none" strike="noStrike" cap="none">
-                <a:solidFill>
-                  <a:schemeClr val="dk2"/>
-                </a:solidFill>
-                <a:latin typeface="Roboto"/>
-                <a:ea typeface="Roboto"/>
-                <a:cs typeface="Roboto"/>
-                <a:sym typeface="Roboto"/>
-              </a:defRPr>
-            </a:lvl7pPr>
-            <a:lvl8pPr marL="3657600" marR="0" lvl="7" indent="-298450" algn="l" rtl="0">
-              <a:lnSpc>
-                <a:spcPct val="115000"/>
-              </a:lnSpc>
-              <a:spcBef>
-                <a:spcPts val="1600"/>
-              </a:spcBef>
-              <a:spcAft>
-                <a:spcPts val="0"/>
-              </a:spcAft>
-              <a:buClr>
-                <a:schemeClr val="dk2"/>
-              </a:buClr>
-              <a:buSzPts val="1100"/>
-              <a:buFont typeface="Roboto"/>
-              <a:buChar char="○"/>
-              <a:defRPr sz="1100" b="0" i="0" u="none" strike="noStrike" cap="none">
-                <a:solidFill>
-                  <a:schemeClr val="dk2"/>
-                </a:solidFill>
-                <a:latin typeface="Roboto"/>
-                <a:ea typeface="Roboto"/>
-                <a:cs typeface="Roboto"/>
-                <a:sym typeface="Roboto"/>
-              </a:defRPr>
-            </a:lvl8pPr>
-            <a:lvl9pPr marL="4114800" marR="0" lvl="8" indent="-298450" algn="l" rtl="0">
-              <a:lnSpc>
-                <a:spcPct val="115000"/>
-              </a:lnSpc>
-              <a:spcBef>
-                <a:spcPts val="1600"/>
-              </a:spcBef>
-              <a:spcAft>
-                <a:spcPts val="1600"/>
-              </a:spcAft>
-              <a:buClr>
-                <a:schemeClr val="dk2"/>
-              </a:buClr>
-              <a:buSzPts val="1100"/>
-              <a:buFont typeface="Roboto"/>
-              <a:buChar char="■"/>
-              <a:defRPr sz="1100" b="0" i="0" u="none" strike="noStrike" cap="none">
-                <a:solidFill>
-                  <a:schemeClr val="dk2"/>
-                </a:solidFill>
-                <a:latin typeface="Roboto"/>
-                <a:ea typeface="Roboto"/>
-                <a:cs typeface="Roboto"/>
-                <a:sym typeface="Roboto"/>
-              </a:defRPr>
-            </a:lvl9pPr>
-          </a:lstStyle>
-          <a:p>
-            <a:pPr marL="0" indent="0">
-              <a:spcAft>
-                <a:spcPts val="1600"/>
-              </a:spcAft>
-              <a:buNone/>
-            </a:pPr>
-            <a:r>
-              <a:rPr lang="en-US" sz="2800" dirty="0"/>
-              <a:t>After completing the Quiz </a:t>
-            </a:r>
-          </a:p>
-          <a:p>
-            <a:pPr marL="342900" indent="-342900">
-              <a:spcAft>
-                <a:spcPts val="1600"/>
-              </a:spcAft>
-            </a:pPr>
-            <a:r>
-              <a:rPr lang="en-US" sz="2400" dirty="0"/>
-              <a:t>Clone/Pull Unit5 – git hub classroom repo for class activities</a:t>
-            </a:r>
-          </a:p>
-          <a:p>
-            <a:pPr marL="342900" indent="-342900">
-              <a:spcAft>
-                <a:spcPts val="1600"/>
-              </a:spcAft>
-            </a:pPr>
-            <a:r>
-              <a:rPr lang="en-US" sz="2400" dirty="0"/>
-              <a:t>Last week Class activity is uploaded in my courses</a:t>
-            </a:r>
-          </a:p>
-        </p:txBody>
-      </p:sp>
-    </p:spTree>
   </p:cSld>
   <p:clrMapOvr>
     <a:masterClrMapping/>

--- a/Presentation/Announcement.pptx
+++ b/Presentation/Announcement.pptx
@@ -8,8 +8,8 @@
     <p:notesMasterId r:id="rId14"/>
   </p:notesMasterIdLst>
   <p:sldIdLst>
-    <p:sldId id="276" r:id="rId2"/>
-    <p:sldId id="286" r:id="rId3"/>
+    <p:sldId id="286" r:id="rId2"/>
+    <p:sldId id="276" r:id="rId3"/>
     <p:sldId id="278" r:id="rId4"/>
     <p:sldId id="281" r:id="rId5"/>
     <p:sldId id="287" r:id="rId6"/>
@@ -739,7 +739,13 @@
   <p:cSld>
     <p:spTree>
       <p:nvGrpSpPr>
-        <p:cNvPr id="1" name="Shape 320"/>
+        <p:cNvPr id="1" name="Shape 320">
+          <a:extLst>
+            <a:ext uri="{FF2B5EF4-FFF2-40B4-BE49-F238E27FC236}">
+              <a16:creationId xmlns:a16="http://schemas.microsoft.com/office/drawing/2014/main" id="{5E82D901-7A14-0382-4365-722182C687A8}"/>
+            </a:ext>
+          </a:extLst>
+        </p:cNvPr>
         <p:cNvGrpSpPr/>
         <p:nvPr/>
       </p:nvGrpSpPr>
@@ -753,7 +759,13 @@
       </p:grpSpPr>
       <p:sp>
         <p:nvSpPr>
-          <p:cNvPr id="321" name="Google Shape;321;g8f52c9b70a_3_0:notes"/>
+          <p:cNvPr id="321" name="Google Shape;321;g8f52c9b70a_3_0:notes">
+            <a:extLst>
+              <a:ext uri="{FF2B5EF4-FFF2-40B4-BE49-F238E27FC236}">
+                <a16:creationId xmlns:a16="http://schemas.microsoft.com/office/drawing/2014/main" id="{B8D16220-AF50-7601-71A9-4952749D32CB}"/>
+              </a:ext>
+            </a:extLst>
+          </p:cNvPr>
           <p:cNvSpPr>
             <a:spLocks noGrp="1" noRot="1" noChangeAspect="1"/>
           </p:cNvSpPr>
@@ -794,7 +806,13 @@
       </p:sp>
       <p:sp>
         <p:nvSpPr>
-          <p:cNvPr id="322" name="Google Shape;322;g8f52c9b70a_3_0:notes"/>
+          <p:cNvPr id="322" name="Google Shape;322;g8f52c9b70a_3_0:notes">
+            <a:extLst>
+              <a:ext uri="{FF2B5EF4-FFF2-40B4-BE49-F238E27FC236}">
+                <a16:creationId xmlns:a16="http://schemas.microsoft.com/office/drawing/2014/main" id="{AEA302D2-52D7-97D7-BF6C-781234E92D43}"/>
+              </a:ext>
+            </a:extLst>
+          </p:cNvPr>
           <p:cNvSpPr txBox="1">
             <a:spLocks noGrp="1"/>
           </p:cNvSpPr>
@@ -825,6 +843,11 @@
         </p:txBody>
       </p:sp>
     </p:spTree>
+    <p:extLst>
+      <p:ext uri="{BB962C8B-B14F-4D97-AF65-F5344CB8AC3E}">
+        <p14:creationId xmlns:p14="http://schemas.microsoft.com/office/powerpoint/2010/main" val="2483524941"/>
+      </p:ext>
+    </p:extLst>
   </p:cSld>
   <p:clrMapOvr>
     <a:masterClrMapping/>
@@ -1146,13 +1169,7 @@
   <p:cSld>
     <p:spTree>
       <p:nvGrpSpPr>
-        <p:cNvPr id="1" name="Shape 320">
-          <a:extLst>
-            <a:ext uri="{FF2B5EF4-FFF2-40B4-BE49-F238E27FC236}">
-              <a16:creationId xmlns:a16="http://schemas.microsoft.com/office/drawing/2014/main" id="{5E82D901-7A14-0382-4365-722182C687A8}"/>
-            </a:ext>
-          </a:extLst>
-        </p:cNvPr>
+        <p:cNvPr id="1" name="Shape 320"/>
         <p:cNvGrpSpPr/>
         <p:nvPr/>
       </p:nvGrpSpPr>
@@ -1166,13 +1183,7 @@
       </p:grpSpPr>
       <p:sp>
         <p:nvSpPr>
-          <p:cNvPr id="321" name="Google Shape;321;g8f52c9b70a_3_0:notes">
-            <a:extLst>
-              <a:ext uri="{FF2B5EF4-FFF2-40B4-BE49-F238E27FC236}">
-                <a16:creationId xmlns:a16="http://schemas.microsoft.com/office/drawing/2014/main" id="{B8D16220-AF50-7601-71A9-4952749D32CB}"/>
-              </a:ext>
-            </a:extLst>
-          </p:cNvPr>
+          <p:cNvPr id="321" name="Google Shape;321;g8f52c9b70a_3_0:notes"/>
           <p:cNvSpPr>
             <a:spLocks noGrp="1" noRot="1" noChangeAspect="1"/>
           </p:cNvSpPr>
@@ -1213,13 +1224,7 @@
       </p:sp>
       <p:sp>
         <p:nvSpPr>
-          <p:cNvPr id="322" name="Google Shape;322;g8f52c9b70a_3_0:notes">
-            <a:extLst>
-              <a:ext uri="{FF2B5EF4-FFF2-40B4-BE49-F238E27FC236}">
-                <a16:creationId xmlns:a16="http://schemas.microsoft.com/office/drawing/2014/main" id="{AEA302D2-52D7-97D7-BF6C-781234E92D43}"/>
-              </a:ext>
-            </a:extLst>
-          </p:cNvPr>
+          <p:cNvPr id="322" name="Google Shape;322;g8f52c9b70a_3_0:notes"/>
           <p:cNvSpPr txBox="1">
             <a:spLocks noGrp="1"/>
           </p:cNvSpPr>
@@ -1250,11 +1255,6 @@
         </p:txBody>
       </p:sp>
     </p:spTree>
-    <p:extLst>
-      <p:ext uri="{BB962C8B-B14F-4D97-AF65-F5344CB8AC3E}">
-        <p14:creationId xmlns:p14="http://schemas.microsoft.com/office/powerpoint/2010/main" val="2483524941"/>
-      </p:ext>
-    </p:extLst>
   </p:cSld>
   <p:clrMapOvr>
     <a:masterClrMapping/>
@@ -6529,6 +6529,1400 @@
   <p:cSld>
     <p:spTree>
       <p:nvGrpSpPr>
+        <p:cNvPr id="1" name="Shape 323">
+          <a:extLst>
+            <a:ext uri="{FF2B5EF4-FFF2-40B4-BE49-F238E27FC236}">
+              <a16:creationId xmlns:a16="http://schemas.microsoft.com/office/drawing/2014/main" id="{19512066-5980-8A8B-BE30-C4FB3AC72235}"/>
+            </a:ext>
+          </a:extLst>
+        </p:cNvPr>
+        <p:cNvGrpSpPr/>
+        <p:nvPr/>
+      </p:nvGrpSpPr>
+      <p:grpSpPr>
+        <a:xfrm>
+          <a:off x="0" y="0"/>
+          <a:ext cx="0" cy="0"/>
+          <a:chOff x="0" y="0"/>
+          <a:chExt cx="0" cy="0"/>
+        </a:xfrm>
+      </p:grpSpPr>
+      <p:sp>
+        <p:nvSpPr>
+          <p:cNvPr id="324" name="Google Shape;324;p47">
+            <a:extLst>
+              <a:ext uri="{FF2B5EF4-FFF2-40B4-BE49-F238E27FC236}">
+                <a16:creationId xmlns:a16="http://schemas.microsoft.com/office/drawing/2014/main" id="{CDF56279-13BE-3C44-BBEF-E7DC5D1E88D2}"/>
+              </a:ext>
+            </a:extLst>
+          </p:cNvPr>
+          <p:cNvSpPr txBox="1">
+            <a:spLocks noGrp="1"/>
+          </p:cNvSpPr>
+          <p:nvPr>
+            <p:ph type="title"/>
+          </p:nvPr>
+        </p:nvSpPr>
+        <p:spPr>
+          <a:xfrm>
+            <a:off x="300016" y="269197"/>
+            <a:ext cx="8520600" cy="623700"/>
+          </a:xfrm>
+          <a:prstGeom prst="rect">
+            <a:avLst/>
+          </a:prstGeom>
+        </p:spPr>
+        <p:txBody>
+          <a:bodyPr spcFirstLastPara="1" wrap="square" lIns="91425" tIns="91425" rIns="91425" bIns="91425" anchor="t" anchorCtr="0">
+            <a:noAutofit/>
+          </a:bodyPr>
+          <a:lstStyle/>
+          <a:p>
+            <a:pPr marL="0" lvl="0" indent="0" algn="ctr" rtl="0">
+              <a:spcBef>
+                <a:spcPts val="0"/>
+              </a:spcBef>
+              <a:spcAft>
+                <a:spcPts val="0"/>
+              </a:spcAft>
+              <a:buNone/>
+            </a:pPr>
+            <a:r>
+              <a:rPr lang="en-US" dirty="0"/>
+              <a:t>GCIS – Software Development and Problem Solving</a:t>
+            </a:r>
+            <a:endParaRPr dirty="0"/>
+          </a:p>
+        </p:txBody>
+      </p:sp>
+      <p:sp>
+        <p:nvSpPr>
+          <p:cNvPr id="325" name="Google Shape;325;p47">
+            <a:extLst>
+              <a:ext uri="{FF2B5EF4-FFF2-40B4-BE49-F238E27FC236}">
+                <a16:creationId xmlns:a16="http://schemas.microsoft.com/office/drawing/2014/main" id="{5A9661D1-8430-BF80-279A-41B28CA04273}"/>
+              </a:ext>
+            </a:extLst>
+          </p:cNvPr>
+          <p:cNvSpPr txBox="1">
+            <a:spLocks noGrp="1"/>
+          </p:cNvSpPr>
+          <p:nvPr>
+            <p:ph type="body" idx="1"/>
+          </p:nvPr>
+        </p:nvSpPr>
+        <p:spPr>
+          <a:xfrm>
+            <a:off x="91445" y="1758316"/>
+            <a:ext cx="4000496" cy="1378401"/>
+          </a:xfrm>
+          <a:prstGeom prst="rect">
+            <a:avLst/>
+          </a:prstGeom>
+        </p:spPr>
+        <p:txBody>
+          <a:bodyPr spcFirstLastPara="1" wrap="square" lIns="91425" tIns="91425" rIns="91425" bIns="91425" anchor="ctr" anchorCtr="0">
+            <a:noAutofit/>
+          </a:bodyPr>
+          <a:lstStyle/>
+          <a:p>
+            <a:pPr marL="146050" indent="0">
+              <a:buNone/>
+            </a:pPr>
+            <a:r>
+              <a:rPr lang="en-US" sz="1600" dirty="0">
+                <a:solidFill>
+                  <a:schemeClr val="tx1"/>
+                </a:solidFill>
+              </a:rPr>
+              <a:t>Quiz 6.2: Comparable and Comparator</a:t>
+            </a:r>
+          </a:p>
+          <a:p>
+            <a:pPr marL="146050" indent="0">
+              <a:buNone/>
+            </a:pPr>
+            <a:r>
+              <a:rPr lang="en-US" sz="1600" dirty="0">
+                <a:solidFill>
+                  <a:schemeClr val="tx1"/>
+                </a:solidFill>
+              </a:rPr>
+              <a:t>Password – </a:t>
+            </a:r>
+            <a:r>
+              <a:rPr lang="en-US" sz="1600" dirty="0" err="1">
+                <a:solidFill>
+                  <a:schemeClr val="tx1"/>
+                </a:solidFill>
+              </a:rPr>
+              <a:t>comparisonsGalore</a:t>
+            </a:r>
+            <a:endParaRPr sz="1600" dirty="0">
+              <a:solidFill>
+                <a:schemeClr val="tx1"/>
+              </a:solidFill>
+            </a:endParaRPr>
+          </a:p>
+        </p:txBody>
+      </p:sp>
+      <p:sp>
+        <p:nvSpPr>
+          <p:cNvPr id="326" name="Google Shape;326;p47">
+            <a:extLst>
+              <a:ext uri="{FF2B5EF4-FFF2-40B4-BE49-F238E27FC236}">
+                <a16:creationId xmlns:a16="http://schemas.microsoft.com/office/drawing/2014/main" id="{8A14E227-935A-FBD8-6BD5-CBCE8D13EE84}"/>
+              </a:ext>
+            </a:extLst>
+          </p:cNvPr>
+          <p:cNvSpPr txBox="1">
+            <a:spLocks noGrp="1"/>
+          </p:cNvSpPr>
+          <p:nvPr>
+            <p:ph type="sldNum" idx="12"/>
+          </p:nvPr>
+        </p:nvSpPr>
+        <p:spPr>
+          <a:xfrm>
+            <a:off x="8472458" y="4663217"/>
+            <a:ext cx="548700" cy="393600"/>
+          </a:xfrm>
+          <a:prstGeom prst="rect">
+            <a:avLst/>
+          </a:prstGeom>
+        </p:spPr>
+        <p:txBody>
+          <a:bodyPr spcFirstLastPara="1" wrap="square" lIns="91425" tIns="91425" rIns="91425" bIns="91425" anchor="ctr" anchorCtr="0">
+            <a:noAutofit/>
+          </a:bodyPr>
+          <a:lstStyle/>
+          <a:p>
+            <a:pPr marL="0" lvl="0" indent="0" algn="r" rtl="0">
+              <a:spcBef>
+                <a:spcPts val="0"/>
+              </a:spcBef>
+              <a:spcAft>
+                <a:spcPts val="0"/>
+              </a:spcAft>
+              <a:buNone/>
+            </a:pPr>
+            <a:fld id="{00000000-1234-1234-1234-123412341234}" type="slidenum">
+              <a:rPr lang="en"/>
+              <a:t>1</a:t>
+            </a:fld>
+            <a:endParaRPr/>
+          </a:p>
+        </p:txBody>
+      </p:sp>
+      <p:sp>
+        <p:nvSpPr>
+          <p:cNvPr id="2" name="TextBox 1">
+            <a:extLst>
+              <a:ext uri="{FF2B5EF4-FFF2-40B4-BE49-F238E27FC236}">
+                <a16:creationId xmlns:a16="http://schemas.microsoft.com/office/drawing/2014/main" id="{AE960589-7B12-D7F7-6452-D45441D8CA95}"/>
+              </a:ext>
+            </a:extLst>
+          </p:cNvPr>
+          <p:cNvSpPr txBox="1"/>
+          <p:nvPr/>
+        </p:nvSpPr>
+        <p:spPr>
+          <a:xfrm>
+            <a:off x="-11684" y="1287037"/>
+            <a:ext cx="9144000" cy="338555"/>
+          </a:xfrm>
+          <a:prstGeom prst="rect">
+            <a:avLst/>
+          </a:prstGeom>
+          <a:solidFill>
+            <a:srgbClr val="FFC000"/>
+          </a:solidFill>
+        </p:spPr>
+        <p:txBody>
+          <a:bodyPr wrap="square" rtlCol="0">
+            <a:spAutoFit/>
+          </a:bodyPr>
+          <a:lstStyle/>
+          <a:p>
+            <a:r>
+              <a:rPr lang="en-US" dirty="0"/>
+              <a:t>Quiz</a:t>
+            </a:r>
+          </a:p>
+        </p:txBody>
+      </p:sp>
+      <p:sp>
+        <p:nvSpPr>
+          <p:cNvPr id="3" name="TextBox 2">
+            <a:extLst>
+              <a:ext uri="{FF2B5EF4-FFF2-40B4-BE49-F238E27FC236}">
+                <a16:creationId xmlns:a16="http://schemas.microsoft.com/office/drawing/2014/main" id="{4FD526CA-3FDB-A5C2-36D9-69A3252D5E9A}"/>
+              </a:ext>
+            </a:extLst>
+          </p:cNvPr>
+          <p:cNvSpPr txBox="1"/>
+          <p:nvPr/>
+        </p:nvSpPr>
+        <p:spPr>
+          <a:xfrm>
+            <a:off x="0" y="3254487"/>
+            <a:ext cx="9144000" cy="307777"/>
+          </a:xfrm>
+          <a:prstGeom prst="rect">
+            <a:avLst/>
+          </a:prstGeom>
+          <a:solidFill>
+            <a:srgbClr val="FFC000"/>
+          </a:solidFill>
+        </p:spPr>
+        <p:txBody>
+          <a:bodyPr wrap="square" rtlCol="0">
+            <a:spAutoFit/>
+          </a:bodyPr>
+          <a:lstStyle/>
+          <a:p>
+            <a:r>
+              <a:rPr lang="en-US" dirty="0"/>
+              <a:t>Next </a:t>
+            </a:r>
+            <a:r>
+              <a:rPr lang="en-US" dirty="0">
+                <a:sym typeface="Wingdings" panose="05000000000000000000" pitchFamily="2" charset="2"/>
+              </a:rPr>
+              <a:t> </a:t>
+            </a:r>
+            <a:endParaRPr lang="en-US" dirty="0"/>
+          </a:p>
+        </p:txBody>
+      </p:sp>
+      <p:sp>
+        <p:nvSpPr>
+          <p:cNvPr id="4" name="Google Shape;325;p47">
+            <a:extLst>
+              <a:ext uri="{FF2B5EF4-FFF2-40B4-BE49-F238E27FC236}">
+                <a16:creationId xmlns:a16="http://schemas.microsoft.com/office/drawing/2014/main" id="{DC50CCB1-5AFE-1F52-8B22-87EB927965B4}"/>
+              </a:ext>
+            </a:extLst>
+          </p:cNvPr>
+          <p:cNvSpPr txBox="1">
+            <a:spLocks/>
+          </p:cNvSpPr>
+          <p:nvPr/>
+        </p:nvSpPr>
+        <p:spPr>
+          <a:xfrm>
+            <a:off x="-5842" y="3562264"/>
+            <a:ext cx="9149842" cy="1494553"/>
+          </a:xfrm>
+          <a:prstGeom prst="rect">
+            <a:avLst/>
+          </a:prstGeom>
+          <a:noFill/>
+          <a:ln>
+            <a:noFill/>
+          </a:ln>
+        </p:spPr>
+        <p:txBody>
+          <a:bodyPr spcFirstLastPara="1" wrap="square" lIns="91425" tIns="91425" rIns="91425" bIns="91425" anchor="ctr" anchorCtr="0">
+            <a:noAutofit/>
+          </a:bodyPr>
+          <a:lstStyle>
+            <a:defPPr marR="0" lvl="0" algn="l" rtl="0">
+              <a:lnSpc>
+                <a:spcPct val="100000"/>
+              </a:lnSpc>
+              <a:spcBef>
+                <a:spcPts val="0"/>
+              </a:spcBef>
+              <a:spcAft>
+                <a:spcPts val="0"/>
+              </a:spcAft>
+            </a:defPPr>
+            <a:lvl1pPr marL="457200" marR="0" lvl="0" indent="-311150" algn="l" rtl="0">
+              <a:lnSpc>
+                <a:spcPct val="115000"/>
+              </a:lnSpc>
+              <a:spcBef>
+                <a:spcPts val="0"/>
+              </a:spcBef>
+              <a:spcAft>
+                <a:spcPts val="0"/>
+              </a:spcAft>
+              <a:buClr>
+                <a:schemeClr val="dk2"/>
+              </a:buClr>
+              <a:buSzPts val="1300"/>
+              <a:buFont typeface="Roboto"/>
+              <a:buChar char="●"/>
+              <a:defRPr sz="1300" b="0" i="0" u="none" strike="noStrike" cap="none">
+                <a:solidFill>
+                  <a:schemeClr val="dk2"/>
+                </a:solidFill>
+                <a:latin typeface="Roboto"/>
+                <a:ea typeface="Roboto"/>
+                <a:cs typeface="Roboto"/>
+                <a:sym typeface="Roboto"/>
+              </a:defRPr>
+            </a:lvl1pPr>
+            <a:lvl2pPr marL="914400" marR="0" lvl="1" indent="-298450" algn="l" rtl="0">
+              <a:lnSpc>
+                <a:spcPct val="115000"/>
+              </a:lnSpc>
+              <a:spcBef>
+                <a:spcPts val="1600"/>
+              </a:spcBef>
+              <a:spcAft>
+                <a:spcPts val="0"/>
+              </a:spcAft>
+              <a:buClr>
+                <a:schemeClr val="dk2"/>
+              </a:buClr>
+              <a:buSzPts val="1100"/>
+              <a:buFont typeface="Roboto"/>
+              <a:buChar char="○"/>
+              <a:defRPr sz="1100" b="0" i="0" u="none" strike="noStrike" cap="none">
+                <a:solidFill>
+                  <a:schemeClr val="dk2"/>
+                </a:solidFill>
+                <a:latin typeface="Roboto"/>
+                <a:ea typeface="Roboto"/>
+                <a:cs typeface="Roboto"/>
+                <a:sym typeface="Roboto"/>
+              </a:defRPr>
+            </a:lvl2pPr>
+            <a:lvl3pPr marL="1371600" marR="0" lvl="2" indent="-298450" algn="l" rtl="0">
+              <a:lnSpc>
+                <a:spcPct val="115000"/>
+              </a:lnSpc>
+              <a:spcBef>
+                <a:spcPts val="1600"/>
+              </a:spcBef>
+              <a:spcAft>
+                <a:spcPts val="0"/>
+              </a:spcAft>
+              <a:buClr>
+                <a:schemeClr val="dk2"/>
+              </a:buClr>
+              <a:buSzPts val="1100"/>
+              <a:buFont typeface="Roboto"/>
+              <a:buChar char="■"/>
+              <a:defRPr sz="1100" b="0" i="0" u="none" strike="noStrike" cap="none">
+                <a:solidFill>
+                  <a:schemeClr val="dk2"/>
+                </a:solidFill>
+                <a:latin typeface="Roboto"/>
+                <a:ea typeface="Roboto"/>
+                <a:cs typeface="Roboto"/>
+                <a:sym typeface="Roboto"/>
+              </a:defRPr>
+            </a:lvl3pPr>
+            <a:lvl4pPr marL="1828800" marR="0" lvl="3" indent="-298450" algn="l" rtl="0">
+              <a:lnSpc>
+                <a:spcPct val="115000"/>
+              </a:lnSpc>
+              <a:spcBef>
+                <a:spcPts val="1600"/>
+              </a:spcBef>
+              <a:spcAft>
+                <a:spcPts val="0"/>
+              </a:spcAft>
+              <a:buClr>
+                <a:schemeClr val="dk2"/>
+              </a:buClr>
+              <a:buSzPts val="1100"/>
+              <a:buFont typeface="Roboto"/>
+              <a:buChar char="●"/>
+              <a:defRPr sz="1100" b="0" i="0" u="none" strike="noStrike" cap="none">
+                <a:solidFill>
+                  <a:schemeClr val="dk2"/>
+                </a:solidFill>
+                <a:latin typeface="Roboto"/>
+                <a:ea typeface="Roboto"/>
+                <a:cs typeface="Roboto"/>
+                <a:sym typeface="Roboto"/>
+              </a:defRPr>
+            </a:lvl4pPr>
+            <a:lvl5pPr marL="2286000" marR="0" lvl="4" indent="-298450" algn="l" rtl="0">
+              <a:lnSpc>
+                <a:spcPct val="115000"/>
+              </a:lnSpc>
+              <a:spcBef>
+                <a:spcPts val="1600"/>
+              </a:spcBef>
+              <a:spcAft>
+                <a:spcPts val="0"/>
+              </a:spcAft>
+              <a:buClr>
+                <a:schemeClr val="dk2"/>
+              </a:buClr>
+              <a:buSzPts val="1100"/>
+              <a:buFont typeface="Roboto"/>
+              <a:buChar char="○"/>
+              <a:defRPr sz="1100" b="0" i="0" u="none" strike="noStrike" cap="none">
+                <a:solidFill>
+                  <a:schemeClr val="dk2"/>
+                </a:solidFill>
+                <a:latin typeface="Roboto"/>
+                <a:ea typeface="Roboto"/>
+                <a:cs typeface="Roboto"/>
+                <a:sym typeface="Roboto"/>
+              </a:defRPr>
+            </a:lvl5pPr>
+            <a:lvl6pPr marL="2743200" marR="0" lvl="5" indent="-298450" algn="l" rtl="0">
+              <a:lnSpc>
+                <a:spcPct val="115000"/>
+              </a:lnSpc>
+              <a:spcBef>
+                <a:spcPts val="1600"/>
+              </a:spcBef>
+              <a:spcAft>
+                <a:spcPts val="0"/>
+              </a:spcAft>
+              <a:buClr>
+                <a:schemeClr val="dk2"/>
+              </a:buClr>
+              <a:buSzPts val="1100"/>
+              <a:buFont typeface="Roboto"/>
+              <a:buChar char="■"/>
+              <a:defRPr sz="1100" b="0" i="0" u="none" strike="noStrike" cap="none">
+                <a:solidFill>
+                  <a:schemeClr val="dk2"/>
+                </a:solidFill>
+                <a:latin typeface="Roboto"/>
+                <a:ea typeface="Roboto"/>
+                <a:cs typeface="Roboto"/>
+                <a:sym typeface="Roboto"/>
+              </a:defRPr>
+            </a:lvl6pPr>
+            <a:lvl7pPr marL="3200400" marR="0" lvl="6" indent="-298450" algn="l" rtl="0">
+              <a:lnSpc>
+                <a:spcPct val="115000"/>
+              </a:lnSpc>
+              <a:spcBef>
+                <a:spcPts val="1600"/>
+              </a:spcBef>
+              <a:spcAft>
+                <a:spcPts val="0"/>
+              </a:spcAft>
+              <a:buClr>
+                <a:schemeClr val="dk2"/>
+              </a:buClr>
+              <a:buSzPts val="1100"/>
+              <a:buFont typeface="Roboto"/>
+              <a:buChar char="●"/>
+              <a:defRPr sz="1100" b="0" i="0" u="none" strike="noStrike" cap="none">
+                <a:solidFill>
+                  <a:schemeClr val="dk2"/>
+                </a:solidFill>
+                <a:latin typeface="Roboto"/>
+                <a:ea typeface="Roboto"/>
+                <a:cs typeface="Roboto"/>
+                <a:sym typeface="Roboto"/>
+              </a:defRPr>
+            </a:lvl7pPr>
+            <a:lvl8pPr marL="3657600" marR="0" lvl="7" indent="-298450" algn="l" rtl="0">
+              <a:lnSpc>
+                <a:spcPct val="115000"/>
+              </a:lnSpc>
+              <a:spcBef>
+                <a:spcPts val="1600"/>
+              </a:spcBef>
+              <a:spcAft>
+                <a:spcPts val="0"/>
+              </a:spcAft>
+              <a:buClr>
+                <a:schemeClr val="dk2"/>
+              </a:buClr>
+              <a:buSzPts val="1100"/>
+              <a:buFont typeface="Roboto"/>
+              <a:buChar char="○"/>
+              <a:defRPr sz="1100" b="0" i="0" u="none" strike="noStrike" cap="none">
+                <a:solidFill>
+                  <a:schemeClr val="dk2"/>
+                </a:solidFill>
+                <a:latin typeface="Roboto"/>
+                <a:ea typeface="Roboto"/>
+                <a:cs typeface="Roboto"/>
+                <a:sym typeface="Roboto"/>
+              </a:defRPr>
+            </a:lvl8pPr>
+            <a:lvl9pPr marL="4114800" marR="0" lvl="8" indent="-298450" algn="l" rtl="0">
+              <a:lnSpc>
+                <a:spcPct val="115000"/>
+              </a:lnSpc>
+              <a:spcBef>
+                <a:spcPts val="1600"/>
+              </a:spcBef>
+              <a:spcAft>
+                <a:spcPts val="1600"/>
+              </a:spcAft>
+              <a:buClr>
+                <a:schemeClr val="dk2"/>
+              </a:buClr>
+              <a:buSzPts val="1100"/>
+              <a:buFont typeface="Roboto"/>
+              <a:buChar char="■"/>
+              <a:defRPr sz="1100" b="0" i="0" u="none" strike="noStrike" cap="none">
+                <a:solidFill>
+                  <a:schemeClr val="dk2"/>
+                </a:solidFill>
+                <a:latin typeface="Roboto"/>
+                <a:ea typeface="Roboto"/>
+                <a:cs typeface="Roboto"/>
+                <a:sym typeface="Roboto"/>
+              </a:defRPr>
+            </a:lvl9pPr>
+          </a:lstStyle>
+          <a:p>
+            <a:pPr marL="0" indent="0">
+              <a:spcAft>
+                <a:spcPts val="1600"/>
+              </a:spcAft>
+              <a:buNone/>
+            </a:pPr>
+            <a:r>
+              <a:rPr lang="en-US" sz="1400" dirty="0"/>
+              <a:t>After completing the Quiz </a:t>
+            </a:r>
+          </a:p>
+          <a:p>
+            <a:pPr marL="342900" indent="-342900">
+              <a:spcAft>
+                <a:spcPts val="1600"/>
+              </a:spcAft>
+            </a:pPr>
+            <a:r>
+              <a:rPr lang="en-US" sz="1200" dirty="0"/>
+              <a:t>Accept GitHub Classroom Assignment for Unit 07</a:t>
+            </a:r>
+          </a:p>
+          <a:p>
+            <a:pPr marL="342900" indent="-342900">
+              <a:spcAft>
+                <a:spcPts val="1600"/>
+              </a:spcAft>
+            </a:pPr>
+            <a:r>
+              <a:rPr lang="en-US" sz="1200" dirty="0"/>
+              <a:t>Clone/pull GitHub classroom repo for Unit 07 under </a:t>
+            </a:r>
+            <a:r>
+              <a:rPr lang="en-US" sz="1200" dirty="0" err="1"/>
+              <a:t>softdevII</a:t>
+            </a:r>
+            <a:r>
+              <a:rPr lang="en-US" sz="1200" dirty="0"/>
+              <a:t> folder. Download Starter code from </a:t>
+            </a:r>
+            <a:r>
+              <a:rPr lang="en-US" sz="1200" dirty="0" err="1"/>
+              <a:t>myCourses</a:t>
+            </a:r>
+            <a:r>
+              <a:rPr lang="en-US" sz="1200" dirty="0"/>
+              <a:t> under Alam-&gt;Class Activities</a:t>
+            </a:r>
+            <a:endParaRPr lang="en-US" sz="1200" dirty="0">
+              <a:solidFill>
+                <a:schemeClr val="tx1"/>
+              </a:solidFill>
+            </a:endParaRPr>
+          </a:p>
+        </p:txBody>
+      </p:sp>
+      <p:sp>
+        <p:nvSpPr>
+          <p:cNvPr id="5" name="Google Shape;325;p47">
+            <a:extLst>
+              <a:ext uri="{FF2B5EF4-FFF2-40B4-BE49-F238E27FC236}">
+                <a16:creationId xmlns:a16="http://schemas.microsoft.com/office/drawing/2014/main" id="{7B85466C-6200-EE66-9396-7DECA70CDF53}"/>
+              </a:ext>
+            </a:extLst>
+          </p:cNvPr>
+          <p:cNvSpPr txBox="1">
+            <a:spLocks/>
+          </p:cNvSpPr>
+          <p:nvPr/>
+        </p:nvSpPr>
+        <p:spPr>
+          <a:xfrm>
+            <a:off x="4303618" y="1737005"/>
+            <a:ext cx="4516998" cy="1378400"/>
+          </a:xfrm>
+          <a:prstGeom prst="rect">
+            <a:avLst/>
+          </a:prstGeom>
+          <a:noFill/>
+          <a:ln>
+            <a:noFill/>
+          </a:ln>
+        </p:spPr>
+        <p:txBody>
+          <a:bodyPr spcFirstLastPara="1" wrap="square" lIns="91425" tIns="91425" rIns="91425" bIns="91425" anchor="ctr" anchorCtr="0">
+            <a:noAutofit/>
+          </a:bodyPr>
+          <a:lstStyle>
+            <a:defPPr marR="0" lvl="0" algn="l" rtl="0">
+              <a:lnSpc>
+                <a:spcPct val="100000"/>
+              </a:lnSpc>
+              <a:spcBef>
+                <a:spcPts val="0"/>
+              </a:spcBef>
+              <a:spcAft>
+                <a:spcPts val="0"/>
+              </a:spcAft>
+            </a:defPPr>
+            <a:lvl1pPr marL="457200" marR="0" lvl="0" indent="-311150" algn="l" rtl="0">
+              <a:lnSpc>
+                <a:spcPct val="115000"/>
+              </a:lnSpc>
+              <a:spcBef>
+                <a:spcPts val="0"/>
+              </a:spcBef>
+              <a:spcAft>
+                <a:spcPts val="0"/>
+              </a:spcAft>
+              <a:buClr>
+                <a:schemeClr val="dk2"/>
+              </a:buClr>
+              <a:buSzPts val="1300"/>
+              <a:buFont typeface="Roboto"/>
+              <a:buChar char="●"/>
+              <a:defRPr sz="1300" b="0" i="0" u="none" strike="noStrike" cap="none">
+                <a:solidFill>
+                  <a:schemeClr val="dk2"/>
+                </a:solidFill>
+                <a:latin typeface="Roboto"/>
+                <a:ea typeface="Roboto"/>
+                <a:cs typeface="Roboto"/>
+                <a:sym typeface="Roboto"/>
+              </a:defRPr>
+            </a:lvl1pPr>
+            <a:lvl2pPr marL="914400" marR="0" lvl="1" indent="-298450" algn="l" rtl="0">
+              <a:lnSpc>
+                <a:spcPct val="115000"/>
+              </a:lnSpc>
+              <a:spcBef>
+                <a:spcPts val="1600"/>
+              </a:spcBef>
+              <a:spcAft>
+                <a:spcPts val="0"/>
+              </a:spcAft>
+              <a:buClr>
+                <a:schemeClr val="dk2"/>
+              </a:buClr>
+              <a:buSzPts val="1100"/>
+              <a:buFont typeface="Roboto"/>
+              <a:buChar char="○"/>
+              <a:defRPr sz="1100" b="0" i="0" u="none" strike="noStrike" cap="none">
+                <a:solidFill>
+                  <a:schemeClr val="dk2"/>
+                </a:solidFill>
+                <a:latin typeface="Roboto"/>
+                <a:ea typeface="Roboto"/>
+                <a:cs typeface="Roboto"/>
+                <a:sym typeface="Roboto"/>
+              </a:defRPr>
+            </a:lvl2pPr>
+            <a:lvl3pPr marL="1371600" marR="0" lvl="2" indent="-298450" algn="l" rtl="0">
+              <a:lnSpc>
+                <a:spcPct val="115000"/>
+              </a:lnSpc>
+              <a:spcBef>
+                <a:spcPts val="1600"/>
+              </a:spcBef>
+              <a:spcAft>
+                <a:spcPts val="0"/>
+              </a:spcAft>
+              <a:buClr>
+                <a:schemeClr val="dk2"/>
+              </a:buClr>
+              <a:buSzPts val="1100"/>
+              <a:buFont typeface="Roboto"/>
+              <a:buChar char="■"/>
+              <a:defRPr sz="1100" b="0" i="0" u="none" strike="noStrike" cap="none">
+                <a:solidFill>
+                  <a:schemeClr val="dk2"/>
+                </a:solidFill>
+                <a:latin typeface="Roboto"/>
+                <a:ea typeface="Roboto"/>
+                <a:cs typeface="Roboto"/>
+                <a:sym typeface="Roboto"/>
+              </a:defRPr>
+            </a:lvl3pPr>
+            <a:lvl4pPr marL="1828800" marR="0" lvl="3" indent="-298450" algn="l" rtl="0">
+              <a:lnSpc>
+                <a:spcPct val="115000"/>
+              </a:lnSpc>
+              <a:spcBef>
+                <a:spcPts val="1600"/>
+              </a:spcBef>
+              <a:spcAft>
+                <a:spcPts val="0"/>
+              </a:spcAft>
+              <a:buClr>
+                <a:schemeClr val="dk2"/>
+              </a:buClr>
+              <a:buSzPts val="1100"/>
+              <a:buFont typeface="Roboto"/>
+              <a:buChar char="●"/>
+              <a:defRPr sz="1100" b="0" i="0" u="none" strike="noStrike" cap="none">
+                <a:solidFill>
+                  <a:schemeClr val="dk2"/>
+                </a:solidFill>
+                <a:latin typeface="Roboto"/>
+                <a:ea typeface="Roboto"/>
+                <a:cs typeface="Roboto"/>
+                <a:sym typeface="Roboto"/>
+              </a:defRPr>
+            </a:lvl4pPr>
+            <a:lvl5pPr marL="2286000" marR="0" lvl="4" indent="-298450" algn="l" rtl="0">
+              <a:lnSpc>
+                <a:spcPct val="115000"/>
+              </a:lnSpc>
+              <a:spcBef>
+                <a:spcPts val="1600"/>
+              </a:spcBef>
+              <a:spcAft>
+                <a:spcPts val="0"/>
+              </a:spcAft>
+              <a:buClr>
+                <a:schemeClr val="dk2"/>
+              </a:buClr>
+              <a:buSzPts val="1100"/>
+              <a:buFont typeface="Roboto"/>
+              <a:buChar char="○"/>
+              <a:defRPr sz="1100" b="0" i="0" u="none" strike="noStrike" cap="none">
+                <a:solidFill>
+                  <a:schemeClr val="dk2"/>
+                </a:solidFill>
+                <a:latin typeface="Roboto"/>
+                <a:ea typeface="Roboto"/>
+                <a:cs typeface="Roboto"/>
+                <a:sym typeface="Roboto"/>
+              </a:defRPr>
+            </a:lvl5pPr>
+            <a:lvl6pPr marL="2743200" marR="0" lvl="5" indent="-298450" algn="l" rtl="0">
+              <a:lnSpc>
+                <a:spcPct val="115000"/>
+              </a:lnSpc>
+              <a:spcBef>
+                <a:spcPts val="1600"/>
+              </a:spcBef>
+              <a:spcAft>
+                <a:spcPts val="0"/>
+              </a:spcAft>
+              <a:buClr>
+                <a:schemeClr val="dk2"/>
+              </a:buClr>
+              <a:buSzPts val="1100"/>
+              <a:buFont typeface="Roboto"/>
+              <a:buChar char="■"/>
+              <a:defRPr sz="1100" b="0" i="0" u="none" strike="noStrike" cap="none">
+                <a:solidFill>
+                  <a:schemeClr val="dk2"/>
+                </a:solidFill>
+                <a:latin typeface="Roboto"/>
+                <a:ea typeface="Roboto"/>
+                <a:cs typeface="Roboto"/>
+                <a:sym typeface="Roboto"/>
+              </a:defRPr>
+            </a:lvl6pPr>
+            <a:lvl7pPr marL="3200400" marR="0" lvl="6" indent="-298450" algn="l" rtl="0">
+              <a:lnSpc>
+                <a:spcPct val="115000"/>
+              </a:lnSpc>
+              <a:spcBef>
+                <a:spcPts val="1600"/>
+              </a:spcBef>
+              <a:spcAft>
+                <a:spcPts val="0"/>
+              </a:spcAft>
+              <a:buClr>
+                <a:schemeClr val="dk2"/>
+              </a:buClr>
+              <a:buSzPts val="1100"/>
+              <a:buFont typeface="Roboto"/>
+              <a:buChar char="●"/>
+              <a:defRPr sz="1100" b="0" i="0" u="none" strike="noStrike" cap="none">
+                <a:solidFill>
+                  <a:schemeClr val="dk2"/>
+                </a:solidFill>
+                <a:latin typeface="Roboto"/>
+                <a:ea typeface="Roboto"/>
+                <a:cs typeface="Roboto"/>
+                <a:sym typeface="Roboto"/>
+              </a:defRPr>
+            </a:lvl7pPr>
+            <a:lvl8pPr marL="3657600" marR="0" lvl="7" indent="-298450" algn="l" rtl="0">
+              <a:lnSpc>
+                <a:spcPct val="115000"/>
+              </a:lnSpc>
+              <a:spcBef>
+                <a:spcPts val="1600"/>
+              </a:spcBef>
+              <a:spcAft>
+                <a:spcPts val="0"/>
+              </a:spcAft>
+              <a:buClr>
+                <a:schemeClr val="dk2"/>
+              </a:buClr>
+              <a:buSzPts val="1100"/>
+              <a:buFont typeface="Roboto"/>
+              <a:buChar char="○"/>
+              <a:defRPr sz="1100" b="0" i="0" u="none" strike="noStrike" cap="none">
+                <a:solidFill>
+                  <a:schemeClr val="dk2"/>
+                </a:solidFill>
+                <a:latin typeface="Roboto"/>
+                <a:ea typeface="Roboto"/>
+                <a:cs typeface="Roboto"/>
+                <a:sym typeface="Roboto"/>
+              </a:defRPr>
+            </a:lvl8pPr>
+            <a:lvl9pPr marL="4114800" marR="0" lvl="8" indent="-298450" algn="l" rtl="0">
+              <a:lnSpc>
+                <a:spcPct val="115000"/>
+              </a:lnSpc>
+              <a:spcBef>
+                <a:spcPts val="1600"/>
+              </a:spcBef>
+              <a:spcAft>
+                <a:spcPts val="1600"/>
+              </a:spcAft>
+              <a:buClr>
+                <a:schemeClr val="dk2"/>
+              </a:buClr>
+              <a:buSzPts val="1100"/>
+              <a:buFont typeface="Roboto"/>
+              <a:buChar char="■"/>
+              <a:defRPr sz="1100" b="0" i="0" u="none" strike="noStrike" cap="none">
+                <a:solidFill>
+                  <a:schemeClr val="dk2"/>
+                </a:solidFill>
+                <a:latin typeface="Roboto"/>
+                <a:ea typeface="Roboto"/>
+                <a:cs typeface="Roboto"/>
+                <a:sym typeface="Roboto"/>
+              </a:defRPr>
+            </a:lvl9pPr>
+          </a:lstStyle>
+          <a:p>
+            <a:pPr marL="146050" indent="0">
+              <a:buNone/>
+            </a:pPr>
+            <a:r>
+              <a:rPr lang="en-US" sz="1600" dirty="0">
+                <a:solidFill>
+                  <a:schemeClr val="tx1"/>
+                </a:solidFill>
+              </a:rPr>
+              <a:t>Quiz 6.3 Heap</a:t>
+            </a:r>
+          </a:p>
+          <a:p>
+            <a:pPr marL="146050" indent="0">
+              <a:buNone/>
+            </a:pPr>
+            <a:r>
+              <a:rPr lang="en-US" sz="1600" dirty="0">
+                <a:solidFill>
+                  <a:schemeClr val="tx1"/>
+                </a:solidFill>
+              </a:rPr>
+              <a:t>Password - </a:t>
+            </a:r>
+            <a:r>
+              <a:rPr lang="en-US" sz="1600" dirty="0" err="1">
+                <a:solidFill>
+                  <a:schemeClr val="tx1"/>
+                </a:solidFill>
+              </a:rPr>
+              <a:t>heapingHelping</a:t>
+            </a:r>
+            <a:endParaRPr lang="en-US" sz="1600" dirty="0">
+              <a:solidFill>
+                <a:schemeClr val="tx1"/>
+              </a:solidFill>
+            </a:endParaRPr>
+          </a:p>
+        </p:txBody>
+      </p:sp>
+    </p:spTree>
+    <p:extLst>
+      <p:ext uri="{BB962C8B-B14F-4D97-AF65-F5344CB8AC3E}">
+        <p14:creationId xmlns:p14="http://schemas.microsoft.com/office/powerpoint/2010/main" val="674272117"/>
+      </p:ext>
+    </p:extLst>
+  </p:cSld>
+  <p:clrMapOvr>
+    <a:masterClrMapping/>
+  </p:clrMapOvr>
+</p:sld>
+</file>
+
+<file path=ppt/slides/slide10.xml><?xml version="1.0" encoding="utf-8"?>
+<p:sld xmlns:a="http://schemas.openxmlformats.org/drawingml/2006/main" xmlns:r="http://schemas.openxmlformats.org/officeDocument/2006/relationships" xmlns:p="http://schemas.openxmlformats.org/presentationml/2006/main" show="0">
+  <p:cSld>
+    <p:spTree>
+      <p:nvGrpSpPr>
+        <p:cNvPr id="1" name="Shape 323"/>
+        <p:cNvGrpSpPr/>
+        <p:nvPr/>
+      </p:nvGrpSpPr>
+      <p:grpSpPr>
+        <a:xfrm>
+          <a:off x="0" y="0"/>
+          <a:ext cx="0" cy="0"/>
+          <a:chOff x="0" y="0"/>
+          <a:chExt cx="0" cy="0"/>
+        </a:xfrm>
+      </p:grpSpPr>
+      <p:sp>
+        <p:nvSpPr>
+          <p:cNvPr id="324" name="Google Shape;324;p47"/>
+          <p:cNvSpPr txBox="1">
+            <a:spLocks noGrp="1"/>
+          </p:cNvSpPr>
+          <p:nvPr>
+            <p:ph type="title"/>
+          </p:nvPr>
+        </p:nvSpPr>
+        <p:spPr>
+          <a:xfrm>
+            <a:off x="226208" y="1"/>
+            <a:ext cx="8520600" cy="464980"/>
+          </a:xfrm>
+          <a:prstGeom prst="rect">
+            <a:avLst/>
+          </a:prstGeom>
+        </p:spPr>
+        <p:txBody>
+          <a:bodyPr spcFirstLastPara="1" wrap="square" lIns="91425" tIns="91425" rIns="91425" bIns="91425" anchor="t" anchorCtr="0">
+            <a:noAutofit/>
+          </a:bodyPr>
+          <a:lstStyle/>
+          <a:p>
+            <a:pPr marL="0" lvl="0" indent="0" algn="ctr" rtl="0">
+              <a:spcBef>
+                <a:spcPts val="0"/>
+              </a:spcBef>
+              <a:spcAft>
+                <a:spcPts val="0"/>
+              </a:spcAft>
+              <a:buNone/>
+            </a:pPr>
+            <a:r>
+              <a:rPr lang="en-US" dirty="0"/>
+              <a:t>Use </a:t>
+            </a:r>
+            <a:r>
+              <a:rPr lang="en-US" sz="2400" dirty="0"/>
+              <a:t>Assigned</a:t>
+            </a:r>
+            <a:r>
+              <a:rPr lang="en-US" dirty="0"/>
+              <a:t> Seat</a:t>
+            </a:r>
+            <a:endParaRPr dirty="0"/>
+          </a:p>
+        </p:txBody>
+      </p:sp>
+      <p:sp>
+        <p:nvSpPr>
+          <p:cNvPr id="326" name="Google Shape;326;p47"/>
+          <p:cNvSpPr txBox="1">
+            <a:spLocks noGrp="1"/>
+          </p:cNvSpPr>
+          <p:nvPr>
+            <p:ph type="sldNum" idx="12"/>
+          </p:nvPr>
+        </p:nvSpPr>
+        <p:spPr>
+          <a:xfrm>
+            <a:off x="8472458" y="4663217"/>
+            <a:ext cx="548700" cy="393600"/>
+          </a:xfrm>
+          <a:prstGeom prst="rect">
+            <a:avLst/>
+          </a:prstGeom>
+        </p:spPr>
+        <p:txBody>
+          <a:bodyPr spcFirstLastPara="1" wrap="square" lIns="91425" tIns="91425" rIns="91425" bIns="91425" anchor="ctr" anchorCtr="0">
+            <a:noAutofit/>
+          </a:bodyPr>
+          <a:lstStyle/>
+          <a:p>
+            <a:pPr marL="0" lvl="0" indent="0" algn="r" rtl="0">
+              <a:spcBef>
+                <a:spcPts val="0"/>
+              </a:spcBef>
+              <a:spcAft>
+                <a:spcPts val="0"/>
+              </a:spcAft>
+              <a:buNone/>
+            </a:pPr>
+            <a:fld id="{00000000-1234-1234-1234-123412341234}" type="slidenum">
+              <a:rPr lang="en"/>
+              <a:t>10</a:t>
+            </a:fld>
+            <a:endParaRPr/>
+          </a:p>
+        </p:txBody>
+      </p:sp>
+      <p:pic>
+        <p:nvPicPr>
+          <p:cNvPr id="6" name="Picture 5">
+            <a:extLst>
+              <a:ext uri="{FF2B5EF4-FFF2-40B4-BE49-F238E27FC236}">
+                <a16:creationId xmlns:a16="http://schemas.microsoft.com/office/drawing/2014/main" id="{DED32793-7C09-E3A3-94E5-B5D46727A1D0}"/>
+              </a:ext>
+            </a:extLst>
+          </p:cNvPr>
+          <p:cNvPicPr>
+            <a:picLocks noChangeAspect="1"/>
+          </p:cNvPicPr>
+          <p:nvPr/>
+        </p:nvPicPr>
+        <p:blipFill>
+          <a:blip r:embed="rId3"/>
+          <a:stretch>
+            <a:fillRect/>
+          </a:stretch>
+        </p:blipFill>
+        <p:spPr>
+          <a:xfrm>
+            <a:off x="-1" y="551663"/>
+            <a:ext cx="9144001" cy="4591837"/>
+          </a:xfrm>
+          <a:prstGeom prst="rect">
+            <a:avLst/>
+          </a:prstGeom>
+        </p:spPr>
+      </p:pic>
+    </p:spTree>
+    <p:extLst>
+      <p:ext uri="{BB962C8B-B14F-4D97-AF65-F5344CB8AC3E}">
+        <p14:creationId xmlns:p14="http://schemas.microsoft.com/office/powerpoint/2010/main" val="4226348449"/>
+      </p:ext>
+    </p:extLst>
+  </p:cSld>
+  <p:clrMapOvr>
+    <a:masterClrMapping/>
+  </p:clrMapOvr>
+</p:sld>
+</file>
+
+<file path=ppt/slides/slide11.xml><?xml version="1.0" encoding="utf-8"?>
+<p:sld xmlns:a="http://schemas.openxmlformats.org/drawingml/2006/main" xmlns:r="http://schemas.openxmlformats.org/officeDocument/2006/relationships" xmlns:p="http://schemas.openxmlformats.org/presentationml/2006/main" show="0">
+  <p:cSld>
+    <p:spTree>
+      <p:nvGrpSpPr>
+        <p:cNvPr id="1" name="Shape 323"/>
+        <p:cNvGrpSpPr/>
+        <p:nvPr/>
+      </p:nvGrpSpPr>
+      <p:grpSpPr>
+        <a:xfrm>
+          <a:off x="0" y="0"/>
+          <a:ext cx="0" cy="0"/>
+          <a:chOff x="0" y="0"/>
+          <a:chExt cx="0" cy="0"/>
+        </a:xfrm>
+      </p:grpSpPr>
+      <p:sp>
+        <p:nvSpPr>
+          <p:cNvPr id="324" name="Google Shape;324;p47"/>
+          <p:cNvSpPr txBox="1">
+            <a:spLocks noGrp="1"/>
+          </p:cNvSpPr>
+          <p:nvPr>
+            <p:ph type="title"/>
+          </p:nvPr>
+        </p:nvSpPr>
+        <p:spPr>
+          <a:xfrm>
+            <a:off x="226208" y="1"/>
+            <a:ext cx="8520600" cy="464980"/>
+          </a:xfrm>
+          <a:prstGeom prst="rect">
+            <a:avLst/>
+          </a:prstGeom>
+        </p:spPr>
+        <p:txBody>
+          <a:bodyPr spcFirstLastPara="1" wrap="square" lIns="91425" tIns="91425" rIns="91425" bIns="91425" anchor="t" anchorCtr="0">
+            <a:noAutofit/>
+          </a:bodyPr>
+          <a:lstStyle/>
+          <a:p>
+            <a:pPr marL="0" lvl="0" indent="0" algn="ctr" rtl="0">
+              <a:spcBef>
+                <a:spcPts val="0"/>
+              </a:spcBef>
+              <a:spcAft>
+                <a:spcPts val="0"/>
+              </a:spcAft>
+              <a:buNone/>
+            </a:pPr>
+            <a:r>
+              <a:rPr lang="en-US" dirty="0"/>
+              <a:t>Use </a:t>
+            </a:r>
+            <a:r>
+              <a:rPr lang="en-US" sz="2400" dirty="0"/>
+              <a:t>Assigned</a:t>
+            </a:r>
+            <a:r>
+              <a:rPr lang="en-US" dirty="0"/>
+              <a:t> Seat</a:t>
+            </a:r>
+            <a:endParaRPr dirty="0"/>
+          </a:p>
+        </p:txBody>
+      </p:sp>
+      <p:sp>
+        <p:nvSpPr>
+          <p:cNvPr id="326" name="Google Shape;326;p47"/>
+          <p:cNvSpPr txBox="1">
+            <a:spLocks noGrp="1"/>
+          </p:cNvSpPr>
+          <p:nvPr>
+            <p:ph type="sldNum" idx="12"/>
+          </p:nvPr>
+        </p:nvSpPr>
+        <p:spPr>
+          <a:xfrm>
+            <a:off x="8472458" y="4663217"/>
+            <a:ext cx="548700" cy="393600"/>
+          </a:xfrm>
+          <a:prstGeom prst="rect">
+            <a:avLst/>
+          </a:prstGeom>
+        </p:spPr>
+        <p:txBody>
+          <a:bodyPr spcFirstLastPara="1" wrap="square" lIns="91425" tIns="91425" rIns="91425" bIns="91425" anchor="ctr" anchorCtr="0">
+            <a:noAutofit/>
+          </a:bodyPr>
+          <a:lstStyle/>
+          <a:p>
+            <a:pPr marL="0" lvl="0" indent="0" algn="r" rtl="0">
+              <a:spcBef>
+                <a:spcPts val="0"/>
+              </a:spcBef>
+              <a:spcAft>
+                <a:spcPts val="0"/>
+              </a:spcAft>
+              <a:buNone/>
+            </a:pPr>
+            <a:fld id="{00000000-1234-1234-1234-123412341234}" type="slidenum">
+              <a:rPr lang="en"/>
+              <a:t>11</a:t>
+            </a:fld>
+            <a:endParaRPr/>
+          </a:p>
+        </p:txBody>
+      </p:sp>
+      <p:pic>
+        <p:nvPicPr>
+          <p:cNvPr id="3" name="Picture 2">
+            <a:extLst>
+              <a:ext uri="{FF2B5EF4-FFF2-40B4-BE49-F238E27FC236}">
+                <a16:creationId xmlns:a16="http://schemas.microsoft.com/office/drawing/2014/main" id="{92DE4AAC-70FE-A114-5258-F5B22EDDED45}"/>
+              </a:ext>
+            </a:extLst>
+          </p:cNvPr>
+          <p:cNvPicPr>
+            <a:picLocks noChangeAspect="1"/>
+          </p:cNvPicPr>
+          <p:nvPr/>
+        </p:nvPicPr>
+        <p:blipFill>
+          <a:blip r:embed="rId3"/>
+          <a:stretch>
+            <a:fillRect/>
+          </a:stretch>
+        </p:blipFill>
+        <p:spPr>
+          <a:xfrm>
+            <a:off x="0" y="716280"/>
+            <a:ext cx="9144000" cy="4427218"/>
+          </a:xfrm>
+          <a:prstGeom prst="rect">
+            <a:avLst/>
+          </a:prstGeom>
+        </p:spPr>
+      </p:pic>
+    </p:spTree>
+    <p:extLst>
+      <p:ext uri="{BB962C8B-B14F-4D97-AF65-F5344CB8AC3E}">
+        <p14:creationId xmlns:p14="http://schemas.microsoft.com/office/powerpoint/2010/main" val="1976403023"/>
+      </p:ext>
+    </p:extLst>
+  </p:cSld>
+  <p:clrMapOvr>
+    <a:masterClrMapping/>
+  </p:clrMapOvr>
+</p:sld>
+</file>
+
+<file path=ppt/slides/slide12.xml><?xml version="1.0" encoding="utf-8"?>
+<p:sld xmlns:a="http://schemas.openxmlformats.org/drawingml/2006/main" xmlns:r="http://schemas.openxmlformats.org/officeDocument/2006/relationships" xmlns:p="http://schemas.openxmlformats.org/presentationml/2006/main" show="0">
+  <p:cSld>
+    <p:spTree>
+      <p:nvGrpSpPr>
+        <p:cNvPr id="1" name="Shape 323"/>
+        <p:cNvGrpSpPr/>
+        <p:nvPr/>
+      </p:nvGrpSpPr>
+      <p:grpSpPr>
+        <a:xfrm>
+          <a:off x="0" y="0"/>
+          <a:ext cx="0" cy="0"/>
+          <a:chOff x="0" y="0"/>
+          <a:chExt cx="0" cy="0"/>
+        </a:xfrm>
+      </p:grpSpPr>
+      <p:sp>
+        <p:nvSpPr>
+          <p:cNvPr id="324" name="Google Shape;324;p47"/>
+          <p:cNvSpPr txBox="1">
+            <a:spLocks noGrp="1"/>
+          </p:cNvSpPr>
+          <p:nvPr>
+            <p:ph type="title"/>
+          </p:nvPr>
+        </p:nvSpPr>
+        <p:spPr>
+          <a:xfrm>
+            <a:off x="226208" y="1"/>
+            <a:ext cx="8520600" cy="464980"/>
+          </a:xfrm>
+          <a:prstGeom prst="rect">
+            <a:avLst/>
+          </a:prstGeom>
+        </p:spPr>
+        <p:txBody>
+          <a:bodyPr spcFirstLastPara="1" wrap="square" lIns="91425" tIns="91425" rIns="91425" bIns="91425" anchor="t" anchorCtr="0">
+            <a:noAutofit/>
+          </a:bodyPr>
+          <a:lstStyle/>
+          <a:p>
+            <a:pPr marL="0" lvl="0" indent="0" algn="ctr" rtl="0">
+              <a:spcBef>
+                <a:spcPts val="0"/>
+              </a:spcBef>
+              <a:spcAft>
+                <a:spcPts val="0"/>
+              </a:spcAft>
+              <a:buNone/>
+            </a:pPr>
+            <a:r>
+              <a:rPr lang="en-US" dirty="0"/>
+              <a:t>Use </a:t>
+            </a:r>
+            <a:r>
+              <a:rPr lang="en-US" sz="2400" dirty="0"/>
+              <a:t>Assigned</a:t>
+            </a:r>
+            <a:r>
+              <a:rPr lang="en-US" dirty="0"/>
+              <a:t> Seat</a:t>
+            </a:r>
+            <a:endParaRPr dirty="0"/>
+          </a:p>
+        </p:txBody>
+      </p:sp>
+      <p:sp>
+        <p:nvSpPr>
+          <p:cNvPr id="326" name="Google Shape;326;p47"/>
+          <p:cNvSpPr txBox="1">
+            <a:spLocks noGrp="1"/>
+          </p:cNvSpPr>
+          <p:nvPr>
+            <p:ph type="sldNum" idx="12"/>
+          </p:nvPr>
+        </p:nvSpPr>
+        <p:spPr>
+          <a:xfrm>
+            <a:off x="8472458" y="4663217"/>
+            <a:ext cx="548700" cy="393600"/>
+          </a:xfrm>
+          <a:prstGeom prst="rect">
+            <a:avLst/>
+          </a:prstGeom>
+        </p:spPr>
+        <p:txBody>
+          <a:bodyPr spcFirstLastPara="1" wrap="square" lIns="91425" tIns="91425" rIns="91425" bIns="91425" anchor="ctr" anchorCtr="0">
+            <a:noAutofit/>
+          </a:bodyPr>
+          <a:lstStyle/>
+          <a:p>
+            <a:pPr marL="0" lvl="0" indent="0" algn="r" rtl="0">
+              <a:spcBef>
+                <a:spcPts val="0"/>
+              </a:spcBef>
+              <a:spcAft>
+                <a:spcPts val="0"/>
+              </a:spcAft>
+              <a:buNone/>
+            </a:pPr>
+            <a:fld id="{00000000-1234-1234-1234-123412341234}" type="slidenum">
+              <a:rPr lang="en"/>
+              <a:t>12</a:t>
+            </a:fld>
+            <a:endParaRPr/>
+          </a:p>
+        </p:txBody>
+      </p:sp>
+      <p:pic>
+        <p:nvPicPr>
+          <p:cNvPr id="4" name="Picture 3">
+            <a:extLst>
+              <a:ext uri="{FF2B5EF4-FFF2-40B4-BE49-F238E27FC236}">
+                <a16:creationId xmlns:a16="http://schemas.microsoft.com/office/drawing/2014/main" id="{DCD752B9-EFAE-AFC1-7D39-6763B89DE8D3}"/>
+              </a:ext>
+            </a:extLst>
+          </p:cNvPr>
+          <p:cNvPicPr>
+            <a:picLocks noChangeAspect="1"/>
+          </p:cNvPicPr>
+          <p:nvPr/>
+        </p:nvPicPr>
+        <p:blipFill>
+          <a:blip r:embed="rId3"/>
+          <a:stretch>
+            <a:fillRect/>
+          </a:stretch>
+        </p:blipFill>
+        <p:spPr>
+          <a:xfrm>
+            <a:off x="0" y="652130"/>
+            <a:ext cx="9144000" cy="4491369"/>
+          </a:xfrm>
+          <a:prstGeom prst="rect">
+            <a:avLst/>
+          </a:prstGeom>
+        </p:spPr>
+      </p:pic>
+    </p:spTree>
+    <p:extLst>
+      <p:ext uri="{BB962C8B-B14F-4D97-AF65-F5344CB8AC3E}">
+        <p14:creationId xmlns:p14="http://schemas.microsoft.com/office/powerpoint/2010/main" val="3365057756"/>
+      </p:ext>
+    </p:extLst>
+  </p:cSld>
+  <p:clrMapOvr>
+    <a:masterClrMapping/>
+  </p:clrMapOvr>
+</p:sld>
+</file>
+
+<file path=ppt/slides/slide2.xml><?xml version="1.0" encoding="utf-8"?>
+<p:sld xmlns:a="http://schemas.openxmlformats.org/drawingml/2006/main" xmlns:r="http://schemas.openxmlformats.org/officeDocument/2006/relationships" xmlns:p="http://schemas.openxmlformats.org/presentationml/2006/main" show="0">
+  <p:cSld>
+    <p:spTree>
+      <p:nvGrpSpPr>
         <p:cNvPr id="1" name="Shape 323"/>
         <p:cNvGrpSpPr/>
         <p:nvPr/>
@@ -6690,7 +8084,7 @@
             </a:pPr>
             <a:fld id="{00000000-1234-1234-1234-123412341234}" type="slidenum">
               <a:rPr lang="en"/>
-              <a:t>1</a:t>
+              <a:t>2</a:t>
             </a:fld>
             <a:endParaRPr/>
           </a:p>
@@ -7092,1384 +8486,6 @@
         </p:txBody>
       </p:sp>
     </p:spTree>
-  </p:cSld>
-  <p:clrMapOvr>
-    <a:masterClrMapping/>
-  </p:clrMapOvr>
-</p:sld>
-</file>
-
-<file path=ppt/slides/slide10.xml><?xml version="1.0" encoding="utf-8"?>
-<p:sld xmlns:a="http://schemas.openxmlformats.org/drawingml/2006/main" xmlns:r="http://schemas.openxmlformats.org/officeDocument/2006/relationships" xmlns:p="http://schemas.openxmlformats.org/presentationml/2006/main" show="0">
-  <p:cSld>
-    <p:spTree>
-      <p:nvGrpSpPr>
-        <p:cNvPr id="1" name="Shape 323"/>
-        <p:cNvGrpSpPr/>
-        <p:nvPr/>
-      </p:nvGrpSpPr>
-      <p:grpSpPr>
-        <a:xfrm>
-          <a:off x="0" y="0"/>
-          <a:ext cx="0" cy="0"/>
-          <a:chOff x="0" y="0"/>
-          <a:chExt cx="0" cy="0"/>
-        </a:xfrm>
-      </p:grpSpPr>
-      <p:sp>
-        <p:nvSpPr>
-          <p:cNvPr id="324" name="Google Shape;324;p47"/>
-          <p:cNvSpPr txBox="1">
-            <a:spLocks noGrp="1"/>
-          </p:cNvSpPr>
-          <p:nvPr>
-            <p:ph type="title"/>
-          </p:nvPr>
-        </p:nvSpPr>
-        <p:spPr>
-          <a:xfrm>
-            <a:off x="226208" y="1"/>
-            <a:ext cx="8520600" cy="464980"/>
-          </a:xfrm>
-          <a:prstGeom prst="rect">
-            <a:avLst/>
-          </a:prstGeom>
-        </p:spPr>
-        <p:txBody>
-          <a:bodyPr spcFirstLastPara="1" wrap="square" lIns="91425" tIns="91425" rIns="91425" bIns="91425" anchor="t" anchorCtr="0">
-            <a:noAutofit/>
-          </a:bodyPr>
-          <a:lstStyle/>
-          <a:p>
-            <a:pPr marL="0" lvl="0" indent="0" algn="ctr" rtl="0">
-              <a:spcBef>
-                <a:spcPts val="0"/>
-              </a:spcBef>
-              <a:spcAft>
-                <a:spcPts val="0"/>
-              </a:spcAft>
-              <a:buNone/>
-            </a:pPr>
-            <a:r>
-              <a:rPr lang="en-US" dirty="0"/>
-              <a:t>Use </a:t>
-            </a:r>
-            <a:r>
-              <a:rPr lang="en-US" sz="2400" dirty="0"/>
-              <a:t>Assigned</a:t>
-            </a:r>
-            <a:r>
-              <a:rPr lang="en-US" dirty="0"/>
-              <a:t> Seat</a:t>
-            </a:r>
-            <a:endParaRPr dirty="0"/>
-          </a:p>
-        </p:txBody>
-      </p:sp>
-      <p:sp>
-        <p:nvSpPr>
-          <p:cNvPr id="326" name="Google Shape;326;p47"/>
-          <p:cNvSpPr txBox="1">
-            <a:spLocks noGrp="1"/>
-          </p:cNvSpPr>
-          <p:nvPr>
-            <p:ph type="sldNum" idx="12"/>
-          </p:nvPr>
-        </p:nvSpPr>
-        <p:spPr>
-          <a:xfrm>
-            <a:off x="8472458" y="4663217"/>
-            <a:ext cx="548700" cy="393600"/>
-          </a:xfrm>
-          <a:prstGeom prst="rect">
-            <a:avLst/>
-          </a:prstGeom>
-        </p:spPr>
-        <p:txBody>
-          <a:bodyPr spcFirstLastPara="1" wrap="square" lIns="91425" tIns="91425" rIns="91425" bIns="91425" anchor="ctr" anchorCtr="0">
-            <a:noAutofit/>
-          </a:bodyPr>
-          <a:lstStyle/>
-          <a:p>
-            <a:pPr marL="0" lvl="0" indent="0" algn="r" rtl="0">
-              <a:spcBef>
-                <a:spcPts val="0"/>
-              </a:spcBef>
-              <a:spcAft>
-                <a:spcPts val="0"/>
-              </a:spcAft>
-              <a:buNone/>
-            </a:pPr>
-            <a:fld id="{00000000-1234-1234-1234-123412341234}" type="slidenum">
-              <a:rPr lang="en"/>
-              <a:t>10</a:t>
-            </a:fld>
-            <a:endParaRPr/>
-          </a:p>
-        </p:txBody>
-      </p:sp>
-      <p:pic>
-        <p:nvPicPr>
-          <p:cNvPr id="6" name="Picture 5">
-            <a:extLst>
-              <a:ext uri="{FF2B5EF4-FFF2-40B4-BE49-F238E27FC236}">
-                <a16:creationId xmlns:a16="http://schemas.microsoft.com/office/drawing/2014/main" id="{DED32793-7C09-E3A3-94E5-B5D46727A1D0}"/>
-              </a:ext>
-            </a:extLst>
-          </p:cNvPr>
-          <p:cNvPicPr>
-            <a:picLocks noChangeAspect="1"/>
-          </p:cNvPicPr>
-          <p:nvPr/>
-        </p:nvPicPr>
-        <p:blipFill>
-          <a:blip r:embed="rId3"/>
-          <a:stretch>
-            <a:fillRect/>
-          </a:stretch>
-        </p:blipFill>
-        <p:spPr>
-          <a:xfrm>
-            <a:off x="-1" y="551663"/>
-            <a:ext cx="9144001" cy="4591837"/>
-          </a:xfrm>
-          <a:prstGeom prst="rect">
-            <a:avLst/>
-          </a:prstGeom>
-        </p:spPr>
-      </p:pic>
-    </p:spTree>
-    <p:extLst>
-      <p:ext uri="{BB962C8B-B14F-4D97-AF65-F5344CB8AC3E}">
-        <p14:creationId xmlns:p14="http://schemas.microsoft.com/office/powerpoint/2010/main" val="4226348449"/>
-      </p:ext>
-    </p:extLst>
-  </p:cSld>
-  <p:clrMapOvr>
-    <a:masterClrMapping/>
-  </p:clrMapOvr>
-</p:sld>
-</file>
-
-<file path=ppt/slides/slide11.xml><?xml version="1.0" encoding="utf-8"?>
-<p:sld xmlns:a="http://schemas.openxmlformats.org/drawingml/2006/main" xmlns:r="http://schemas.openxmlformats.org/officeDocument/2006/relationships" xmlns:p="http://schemas.openxmlformats.org/presentationml/2006/main" show="0">
-  <p:cSld>
-    <p:spTree>
-      <p:nvGrpSpPr>
-        <p:cNvPr id="1" name="Shape 323"/>
-        <p:cNvGrpSpPr/>
-        <p:nvPr/>
-      </p:nvGrpSpPr>
-      <p:grpSpPr>
-        <a:xfrm>
-          <a:off x="0" y="0"/>
-          <a:ext cx="0" cy="0"/>
-          <a:chOff x="0" y="0"/>
-          <a:chExt cx="0" cy="0"/>
-        </a:xfrm>
-      </p:grpSpPr>
-      <p:sp>
-        <p:nvSpPr>
-          <p:cNvPr id="324" name="Google Shape;324;p47"/>
-          <p:cNvSpPr txBox="1">
-            <a:spLocks noGrp="1"/>
-          </p:cNvSpPr>
-          <p:nvPr>
-            <p:ph type="title"/>
-          </p:nvPr>
-        </p:nvSpPr>
-        <p:spPr>
-          <a:xfrm>
-            <a:off x="226208" y="1"/>
-            <a:ext cx="8520600" cy="464980"/>
-          </a:xfrm>
-          <a:prstGeom prst="rect">
-            <a:avLst/>
-          </a:prstGeom>
-        </p:spPr>
-        <p:txBody>
-          <a:bodyPr spcFirstLastPara="1" wrap="square" lIns="91425" tIns="91425" rIns="91425" bIns="91425" anchor="t" anchorCtr="0">
-            <a:noAutofit/>
-          </a:bodyPr>
-          <a:lstStyle/>
-          <a:p>
-            <a:pPr marL="0" lvl="0" indent="0" algn="ctr" rtl="0">
-              <a:spcBef>
-                <a:spcPts val="0"/>
-              </a:spcBef>
-              <a:spcAft>
-                <a:spcPts val="0"/>
-              </a:spcAft>
-              <a:buNone/>
-            </a:pPr>
-            <a:r>
-              <a:rPr lang="en-US" dirty="0"/>
-              <a:t>Use </a:t>
-            </a:r>
-            <a:r>
-              <a:rPr lang="en-US" sz="2400" dirty="0"/>
-              <a:t>Assigned</a:t>
-            </a:r>
-            <a:r>
-              <a:rPr lang="en-US" dirty="0"/>
-              <a:t> Seat</a:t>
-            </a:r>
-            <a:endParaRPr dirty="0"/>
-          </a:p>
-        </p:txBody>
-      </p:sp>
-      <p:sp>
-        <p:nvSpPr>
-          <p:cNvPr id="326" name="Google Shape;326;p47"/>
-          <p:cNvSpPr txBox="1">
-            <a:spLocks noGrp="1"/>
-          </p:cNvSpPr>
-          <p:nvPr>
-            <p:ph type="sldNum" idx="12"/>
-          </p:nvPr>
-        </p:nvSpPr>
-        <p:spPr>
-          <a:xfrm>
-            <a:off x="8472458" y="4663217"/>
-            <a:ext cx="548700" cy="393600"/>
-          </a:xfrm>
-          <a:prstGeom prst="rect">
-            <a:avLst/>
-          </a:prstGeom>
-        </p:spPr>
-        <p:txBody>
-          <a:bodyPr spcFirstLastPara="1" wrap="square" lIns="91425" tIns="91425" rIns="91425" bIns="91425" anchor="ctr" anchorCtr="0">
-            <a:noAutofit/>
-          </a:bodyPr>
-          <a:lstStyle/>
-          <a:p>
-            <a:pPr marL="0" lvl="0" indent="0" algn="r" rtl="0">
-              <a:spcBef>
-                <a:spcPts val="0"/>
-              </a:spcBef>
-              <a:spcAft>
-                <a:spcPts val="0"/>
-              </a:spcAft>
-              <a:buNone/>
-            </a:pPr>
-            <a:fld id="{00000000-1234-1234-1234-123412341234}" type="slidenum">
-              <a:rPr lang="en"/>
-              <a:t>11</a:t>
-            </a:fld>
-            <a:endParaRPr/>
-          </a:p>
-        </p:txBody>
-      </p:sp>
-      <p:pic>
-        <p:nvPicPr>
-          <p:cNvPr id="3" name="Picture 2">
-            <a:extLst>
-              <a:ext uri="{FF2B5EF4-FFF2-40B4-BE49-F238E27FC236}">
-                <a16:creationId xmlns:a16="http://schemas.microsoft.com/office/drawing/2014/main" id="{92DE4AAC-70FE-A114-5258-F5B22EDDED45}"/>
-              </a:ext>
-            </a:extLst>
-          </p:cNvPr>
-          <p:cNvPicPr>
-            <a:picLocks noChangeAspect="1"/>
-          </p:cNvPicPr>
-          <p:nvPr/>
-        </p:nvPicPr>
-        <p:blipFill>
-          <a:blip r:embed="rId3"/>
-          <a:stretch>
-            <a:fillRect/>
-          </a:stretch>
-        </p:blipFill>
-        <p:spPr>
-          <a:xfrm>
-            <a:off x="0" y="716280"/>
-            <a:ext cx="9144000" cy="4427218"/>
-          </a:xfrm>
-          <a:prstGeom prst="rect">
-            <a:avLst/>
-          </a:prstGeom>
-        </p:spPr>
-      </p:pic>
-    </p:spTree>
-    <p:extLst>
-      <p:ext uri="{BB962C8B-B14F-4D97-AF65-F5344CB8AC3E}">
-        <p14:creationId xmlns:p14="http://schemas.microsoft.com/office/powerpoint/2010/main" val="1976403023"/>
-      </p:ext>
-    </p:extLst>
-  </p:cSld>
-  <p:clrMapOvr>
-    <a:masterClrMapping/>
-  </p:clrMapOvr>
-</p:sld>
-</file>
-
-<file path=ppt/slides/slide12.xml><?xml version="1.0" encoding="utf-8"?>
-<p:sld xmlns:a="http://schemas.openxmlformats.org/drawingml/2006/main" xmlns:r="http://schemas.openxmlformats.org/officeDocument/2006/relationships" xmlns:p="http://schemas.openxmlformats.org/presentationml/2006/main" show="0">
-  <p:cSld>
-    <p:spTree>
-      <p:nvGrpSpPr>
-        <p:cNvPr id="1" name="Shape 323"/>
-        <p:cNvGrpSpPr/>
-        <p:nvPr/>
-      </p:nvGrpSpPr>
-      <p:grpSpPr>
-        <a:xfrm>
-          <a:off x="0" y="0"/>
-          <a:ext cx="0" cy="0"/>
-          <a:chOff x="0" y="0"/>
-          <a:chExt cx="0" cy="0"/>
-        </a:xfrm>
-      </p:grpSpPr>
-      <p:sp>
-        <p:nvSpPr>
-          <p:cNvPr id="324" name="Google Shape;324;p47"/>
-          <p:cNvSpPr txBox="1">
-            <a:spLocks noGrp="1"/>
-          </p:cNvSpPr>
-          <p:nvPr>
-            <p:ph type="title"/>
-          </p:nvPr>
-        </p:nvSpPr>
-        <p:spPr>
-          <a:xfrm>
-            <a:off x="226208" y="1"/>
-            <a:ext cx="8520600" cy="464980"/>
-          </a:xfrm>
-          <a:prstGeom prst="rect">
-            <a:avLst/>
-          </a:prstGeom>
-        </p:spPr>
-        <p:txBody>
-          <a:bodyPr spcFirstLastPara="1" wrap="square" lIns="91425" tIns="91425" rIns="91425" bIns="91425" anchor="t" anchorCtr="0">
-            <a:noAutofit/>
-          </a:bodyPr>
-          <a:lstStyle/>
-          <a:p>
-            <a:pPr marL="0" lvl="0" indent="0" algn="ctr" rtl="0">
-              <a:spcBef>
-                <a:spcPts val="0"/>
-              </a:spcBef>
-              <a:spcAft>
-                <a:spcPts val="0"/>
-              </a:spcAft>
-              <a:buNone/>
-            </a:pPr>
-            <a:r>
-              <a:rPr lang="en-US" dirty="0"/>
-              <a:t>Use </a:t>
-            </a:r>
-            <a:r>
-              <a:rPr lang="en-US" sz="2400" dirty="0"/>
-              <a:t>Assigned</a:t>
-            </a:r>
-            <a:r>
-              <a:rPr lang="en-US" dirty="0"/>
-              <a:t> Seat</a:t>
-            </a:r>
-            <a:endParaRPr dirty="0"/>
-          </a:p>
-        </p:txBody>
-      </p:sp>
-      <p:sp>
-        <p:nvSpPr>
-          <p:cNvPr id="326" name="Google Shape;326;p47"/>
-          <p:cNvSpPr txBox="1">
-            <a:spLocks noGrp="1"/>
-          </p:cNvSpPr>
-          <p:nvPr>
-            <p:ph type="sldNum" idx="12"/>
-          </p:nvPr>
-        </p:nvSpPr>
-        <p:spPr>
-          <a:xfrm>
-            <a:off x="8472458" y="4663217"/>
-            <a:ext cx="548700" cy="393600"/>
-          </a:xfrm>
-          <a:prstGeom prst="rect">
-            <a:avLst/>
-          </a:prstGeom>
-        </p:spPr>
-        <p:txBody>
-          <a:bodyPr spcFirstLastPara="1" wrap="square" lIns="91425" tIns="91425" rIns="91425" bIns="91425" anchor="ctr" anchorCtr="0">
-            <a:noAutofit/>
-          </a:bodyPr>
-          <a:lstStyle/>
-          <a:p>
-            <a:pPr marL="0" lvl="0" indent="0" algn="r" rtl="0">
-              <a:spcBef>
-                <a:spcPts val="0"/>
-              </a:spcBef>
-              <a:spcAft>
-                <a:spcPts val="0"/>
-              </a:spcAft>
-              <a:buNone/>
-            </a:pPr>
-            <a:fld id="{00000000-1234-1234-1234-123412341234}" type="slidenum">
-              <a:rPr lang="en"/>
-              <a:t>12</a:t>
-            </a:fld>
-            <a:endParaRPr/>
-          </a:p>
-        </p:txBody>
-      </p:sp>
-      <p:pic>
-        <p:nvPicPr>
-          <p:cNvPr id="4" name="Picture 3">
-            <a:extLst>
-              <a:ext uri="{FF2B5EF4-FFF2-40B4-BE49-F238E27FC236}">
-                <a16:creationId xmlns:a16="http://schemas.microsoft.com/office/drawing/2014/main" id="{DCD752B9-EFAE-AFC1-7D39-6763B89DE8D3}"/>
-              </a:ext>
-            </a:extLst>
-          </p:cNvPr>
-          <p:cNvPicPr>
-            <a:picLocks noChangeAspect="1"/>
-          </p:cNvPicPr>
-          <p:nvPr/>
-        </p:nvPicPr>
-        <p:blipFill>
-          <a:blip r:embed="rId3"/>
-          <a:stretch>
-            <a:fillRect/>
-          </a:stretch>
-        </p:blipFill>
-        <p:spPr>
-          <a:xfrm>
-            <a:off x="0" y="652130"/>
-            <a:ext cx="9144000" cy="4491369"/>
-          </a:xfrm>
-          <a:prstGeom prst="rect">
-            <a:avLst/>
-          </a:prstGeom>
-        </p:spPr>
-      </p:pic>
-    </p:spTree>
-    <p:extLst>
-      <p:ext uri="{BB962C8B-B14F-4D97-AF65-F5344CB8AC3E}">
-        <p14:creationId xmlns:p14="http://schemas.microsoft.com/office/powerpoint/2010/main" val="3365057756"/>
-      </p:ext>
-    </p:extLst>
-  </p:cSld>
-  <p:clrMapOvr>
-    <a:masterClrMapping/>
-  </p:clrMapOvr>
-</p:sld>
-</file>
-
-<file path=ppt/slides/slide2.xml><?xml version="1.0" encoding="utf-8"?>
-<p:sld xmlns:a="http://schemas.openxmlformats.org/drawingml/2006/main" xmlns:r="http://schemas.openxmlformats.org/officeDocument/2006/relationships" xmlns:p="http://schemas.openxmlformats.org/presentationml/2006/main" show="0">
-  <p:cSld>
-    <p:spTree>
-      <p:nvGrpSpPr>
-        <p:cNvPr id="1" name="Shape 323">
-          <a:extLst>
-            <a:ext uri="{FF2B5EF4-FFF2-40B4-BE49-F238E27FC236}">
-              <a16:creationId xmlns:a16="http://schemas.microsoft.com/office/drawing/2014/main" id="{19512066-5980-8A8B-BE30-C4FB3AC72235}"/>
-            </a:ext>
-          </a:extLst>
-        </p:cNvPr>
-        <p:cNvGrpSpPr/>
-        <p:nvPr/>
-      </p:nvGrpSpPr>
-      <p:grpSpPr>
-        <a:xfrm>
-          <a:off x="0" y="0"/>
-          <a:ext cx="0" cy="0"/>
-          <a:chOff x="0" y="0"/>
-          <a:chExt cx="0" cy="0"/>
-        </a:xfrm>
-      </p:grpSpPr>
-      <p:sp>
-        <p:nvSpPr>
-          <p:cNvPr id="324" name="Google Shape;324;p47">
-            <a:extLst>
-              <a:ext uri="{FF2B5EF4-FFF2-40B4-BE49-F238E27FC236}">
-                <a16:creationId xmlns:a16="http://schemas.microsoft.com/office/drawing/2014/main" id="{CDF56279-13BE-3C44-BBEF-E7DC5D1E88D2}"/>
-              </a:ext>
-            </a:extLst>
-          </p:cNvPr>
-          <p:cNvSpPr txBox="1">
-            <a:spLocks noGrp="1"/>
-          </p:cNvSpPr>
-          <p:nvPr>
-            <p:ph type="title"/>
-          </p:nvPr>
-        </p:nvSpPr>
-        <p:spPr>
-          <a:xfrm>
-            <a:off x="300016" y="269197"/>
-            <a:ext cx="8520600" cy="623700"/>
-          </a:xfrm>
-          <a:prstGeom prst="rect">
-            <a:avLst/>
-          </a:prstGeom>
-        </p:spPr>
-        <p:txBody>
-          <a:bodyPr spcFirstLastPara="1" wrap="square" lIns="91425" tIns="91425" rIns="91425" bIns="91425" anchor="t" anchorCtr="0">
-            <a:noAutofit/>
-          </a:bodyPr>
-          <a:lstStyle/>
-          <a:p>
-            <a:pPr marL="0" lvl="0" indent="0" algn="ctr" rtl="0">
-              <a:spcBef>
-                <a:spcPts val="0"/>
-              </a:spcBef>
-              <a:spcAft>
-                <a:spcPts val="0"/>
-              </a:spcAft>
-              <a:buNone/>
-            </a:pPr>
-            <a:r>
-              <a:rPr lang="en-US" dirty="0"/>
-              <a:t>GCIS – Software Development and Problem Solving</a:t>
-            </a:r>
-            <a:endParaRPr dirty="0"/>
-          </a:p>
-        </p:txBody>
-      </p:sp>
-      <p:sp>
-        <p:nvSpPr>
-          <p:cNvPr id="325" name="Google Shape;325;p47">
-            <a:extLst>
-              <a:ext uri="{FF2B5EF4-FFF2-40B4-BE49-F238E27FC236}">
-                <a16:creationId xmlns:a16="http://schemas.microsoft.com/office/drawing/2014/main" id="{5A9661D1-8430-BF80-279A-41B28CA04273}"/>
-              </a:ext>
-            </a:extLst>
-          </p:cNvPr>
-          <p:cNvSpPr txBox="1">
-            <a:spLocks noGrp="1"/>
-          </p:cNvSpPr>
-          <p:nvPr>
-            <p:ph type="body" idx="1"/>
-          </p:nvPr>
-        </p:nvSpPr>
-        <p:spPr>
-          <a:xfrm>
-            <a:off x="91445" y="1758316"/>
-            <a:ext cx="4000496" cy="1378401"/>
-          </a:xfrm>
-          <a:prstGeom prst="rect">
-            <a:avLst/>
-          </a:prstGeom>
-        </p:spPr>
-        <p:txBody>
-          <a:bodyPr spcFirstLastPara="1" wrap="square" lIns="91425" tIns="91425" rIns="91425" bIns="91425" anchor="ctr" anchorCtr="0">
-            <a:noAutofit/>
-          </a:bodyPr>
-          <a:lstStyle/>
-          <a:p>
-            <a:pPr marL="146050" indent="0">
-              <a:buNone/>
-            </a:pPr>
-            <a:r>
-              <a:rPr lang="en-US" sz="1600" dirty="0">
-                <a:solidFill>
-                  <a:schemeClr val="tx1"/>
-                </a:solidFill>
-              </a:rPr>
-              <a:t>Take Quiz 5.2: Generics and Lists</a:t>
-            </a:r>
-          </a:p>
-          <a:p>
-            <a:pPr marL="146050" indent="0">
-              <a:buNone/>
-            </a:pPr>
-            <a:r>
-              <a:rPr lang="en-US" sz="1600" dirty="0">
-                <a:solidFill>
-                  <a:schemeClr val="tx1"/>
-                </a:solidFill>
-              </a:rPr>
-              <a:t>Password – SomeGenericPassword1</a:t>
-            </a:r>
-            <a:endParaRPr sz="1600" dirty="0">
-              <a:solidFill>
-                <a:schemeClr val="tx1"/>
-              </a:solidFill>
-            </a:endParaRPr>
-          </a:p>
-        </p:txBody>
-      </p:sp>
-      <p:sp>
-        <p:nvSpPr>
-          <p:cNvPr id="326" name="Google Shape;326;p47">
-            <a:extLst>
-              <a:ext uri="{FF2B5EF4-FFF2-40B4-BE49-F238E27FC236}">
-                <a16:creationId xmlns:a16="http://schemas.microsoft.com/office/drawing/2014/main" id="{8A14E227-935A-FBD8-6BD5-CBCE8D13EE84}"/>
-              </a:ext>
-            </a:extLst>
-          </p:cNvPr>
-          <p:cNvSpPr txBox="1">
-            <a:spLocks noGrp="1"/>
-          </p:cNvSpPr>
-          <p:nvPr>
-            <p:ph type="sldNum" idx="12"/>
-          </p:nvPr>
-        </p:nvSpPr>
-        <p:spPr>
-          <a:xfrm>
-            <a:off x="8472458" y="4663217"/>
-            <a:ext cx="548700" cy="393600"/>
-          </a:xfrm>
-          <a:prstGeom prst="rect">
-            <a:avLst/>
-          </a:prstGeom>
-        </p:spPr>
-        <p:txBody>
-          <a:bodyPr spcFirstLastPara="1" wrap="square" lIns="91425" tIns="91425" rIns="91425" bIns="91425" anchor="ctr" anchorCtr="0">
-            <a:noAutofit/>
-          </a:bodyPr>
-          <a:lstStyle/>
-          <a:p>
-            <a:pPr marL="0" lvl="0" indent="0" algn="r" rtl="0">
-              <a:spcBef>
-                <a:spcPts val="0"/>
-              </a:spcBef>
-              <a:spcAft>
-                <a:spcPts val="0"/>
-              </a:spcAft>
-              <a:buNone/>
-            </a:pPr>
-            <a:fld id="{00000000-1234-1234-1234-123412341234}" type="slidenum">
-              <a:rPr lang="en"/>
-              <a:t>2</a:t>
-            </a:fld>
-            <a:endParaRPr/>
-          </a:p>
-        </p:txBody>
-      </p:sp>
-      <p:sp>
-        <p:nvSpPr>
-          <p:cNvPr id="2" name="TextBox 1">
-            <a:extLst>
-              <a:ext uri="{FF2B5EF4-FFF2-40B4-BE49-F238E27FC236}">
-                <a16:creationId xmlns:a16="http://schemas.microsoft.com/office/drawing/2014/main" id="{AE960589-7B12-D7F7-6452-D45441D8CA95}"/>
-              </a:ext>
-            </a:extLst>
-          </p:cNvPr>
-          <p:cNvSpPr txBox="1"/>
-          <p:nvPr/>
-        </p:nvSpPr>
-        <p:spPr>
-          <a:xfrm>
-            <a:off x="-11684" y="1287037"/>
-            <a:ext cx="9144000" cy="338555"/>
-          </a:xfrm>
-          <a:prstGeom prst="rect">
-            <a:avLst/>
-          </a:prstGeom>
-          <a:solidFill>
-            <a:srgbClr val="FFC000"/>
-          </a:solidFill>
-        </p:spPr>
-        <p:txBody>
-          <a:bodyPr wrap="square" rtlCol="0">
-            <a:spAutoFit/>
-          </a:bodyPr>
-          <a:lstStyle/>
-          <a:p>
-            <a:r>
-              <a:rPr lang="en-US" dirty="0"/>
-              <a:t>Quiz</a:t>
-            </a:r>
-          </a:p>
-        </p:txBody>
-      </p:sp>
-      <p:sp>
-        <p:nvSpPr>
-          <p:cNvPr id="3" name="TextBox 2">
-            <a:extLst>
-              <a:ext uri="{FF2B5EF4-FFF2-40B4-BE49-F238E27FC236}">
-                <a16:creationId xmlns:a16="http://schemas.microsoft.com/office/drawing/2014/main" id="{4FD526CA-3FDB-A5C2-36D9-69A3252D5E9A}"/>
-              </a:ext>
-            </a:extLst>
-          </p:cNvPr>
-          <p:cNvSpPr txBox="1"/>
-          <p:nvPr/>
-        </p:nvSpPr>
-        <p:spPr>
-          <a:xfrm>
-            <a:off x="0" y="3507404"/>
-            <a:ext cx="9144000" cy="307777"/>
-          </a:xfrm>
-          <a:prstGeom prst="rect">
-            <a:avLst/>
-          </a:prstGeom>
-          <a:solidFill>
-            <a:srgbClr val="FFC000"/>
-          </a:solidFill>
-        </p:spPr>
-        <p:txBody>
-          <a:bodyPr wrap="square" rtlCol="0">
-            <a:spAutoFit/>
-          </a:bodyPr>
-          <a:lstStyle/>
-          <a:p>
-            <a:r>
-              <a:rPr lang="en-US" dirty="0"/>
-              <a:t>Next </a:t>
-            </a:r>
-            <a:r>
-              <a:rPr lang="en-US" dirty="0">
-                <a:sym typeface="Wingdings" panose="05000000000000000000" pitchFamily="2" charset="2"/>
-              </a:rPr>
-              <a:t> </a:t>
-            </a:r>
-            <a:endParaRPr lang="en-US" dirty="0"/>
-          </a:p>
-        </p:txBody>
-      </p:sp>
-      <p:sp>
-        <p:nvSpPr>
-          <p:cNvPr id="4" name="Google Shape;325;p47">
-            <a:extLst>
-              <a:ext uri="{FF2B5EF4-FFF2-40B4-BE49-F238E27FC236}">
-                <a16:creationId xmlns:a16="http://schemas.microsoft.com/office/drawing/2014/main" id="{DC50CCB1-5AFE-1F52-8B22-87EB927965B4}"/>
-              </a:ext>
-            </a:extLst>
-          </p:cNvPr>
-          <p:cNvSpPr txBox="1">
-            <a:spLocks/>
-          </p:cNvSpPr>
-          <p:nvPr/>
-        </p:nvSpPr>
-        <p:spPr>
-          <a:xfrm>
-            <a:off x="-5842" y="3848100"/>
-            <a:ext cx="9149842" cy="1208717"/>
-          </a:xfrm>
-          <a:prstGeom prst="rect">
-            <a:avLst/>
-          </a:prstGeom>
-          <a:noFill/>
-          <a:ln>
-            <a:noFill/>
-          </a:ln>
-        </p:spPr>
-        <p:txBody>
-          <a:bodyPr spcFirstLastPara="1" wrap="square" lIns="91425" tIns="91425" rIns="91425" bIns="91425" anchor="ctr" anchorCtr="0">
-            <a:noAutofit/>
-          </a:bodyPr>
-          <a:lstStyle>
-            <a:defPPr marR="0" lvl="0" algn="l" rtl="0">
-              <a:lnSpc>
-                <a:spcPct val="100000"/>
-              </a:lnSpc>
-              <a:spcBef>
-                <a:spcPts val="0"/>
-              </a:spcBef>
-              <a:spcAft>
-                <a:spcPts val="0"/>
-              </a:spcAft>
-            </a:defPPr>
-            <a:lvl1pPr marL="457200" marR="0" lvl="0" indent="-311150" algn="l" rtl="0">
-              <a:lnSpc>
-                <a:spcPct val="115000"/>
-              </a:lnSpc>
-              <a:spcBef>
-                <a:spcPts val="0"/>
-              </a:spcBef>
-              <a:spcAft>
-                <a:spcPts val="0"/>
-              </a:spcAft>
-              <a:buClr>
-                <a:schemeClr val="dk2"/>
-              </a:buClr>
-              <a:buSzPts val="1300"/>
-              <a:buFont typeface="Roboto"/>
-              <a:buChar char="●"/>
-              <a:defRPr sz="1300" b="0" i="0" u="none" strike="noStrike" cap="none">
-                <a:solidFill>
-                  <a:schemeClr val="dk2"/>
-                </a:solidFill>
-                <a:latin typeface="Roboto"/>
-                <a:ea typeface="Roboto"/>
-                <a:cs typeface="Roboto"/>
-                <a:sym typeface="Roboto"/>
-              </a:defRPr>
-            </a:lvl1pPr>
-            <a:lvl2pPr marL="914400" marR="0" lvl="1" indent="-298450" algn="l" rtl="0">
-              <a:lnSpc>
-                <a:spcPct val="115000"/>
-              </a:lnSpc>
-              <a:spcBef>
-                <a:spcPts val="1600"/>
-              </a:spcBef>
-              <a:spcAft>
-                <a:spcPts val="0"/>
-              </a:spcAft>
-              <a:buClr>
-                <a:schemeClr val="dk2"/>
-              </a:buClr>
-              <a:buSzPts val="1100"/>
-              <a:buFont typeface="Roboto"/>
-              <a:buChar char="○"/>
-              <a:defRPr sz="1100" b="0" i="0" u="none" strike="noStrike" cap="none">
-                <a:solidFill>
-                  <a:schemeClr val="dk2"/>
-                </a:solidFill>
-                <a:latin typeface="Roboto"/>
-                <a:ea typeface="Roboto"/>
-                <a:cs typeface="Roboto"/>
-                <a:sym typeface="Roboto"/>
-              </a:defRPr>
-            </a:lvl2pPr>
-            <a:lvl3pPr marL="1371600" marR="0" lvl="2" indent="-298450" algn="l" rtl="0">
-              <a:lnSpc>
-                <a:spcPct val="115000"/>
-              </a:lnSpc>
-              <a:spcBef>
-                <a:spcPts val="1600"/>
-              </a:spcBef>
-              <a:spcAft>
-                <a:spcPts val="0"/>
-              </a:spcAft>
-              <a:buClr>
-                <a:schemeClr val="dk2"/>
-              </a:buClr>
-              <a:buSzPts val="1100"/>
-              <a:buFont typeface="Roboto"/>
-              <a:buChar char="■"/>
-              <a:defRPr sz="1100" b="0" i="0" u="none" strike="noStrike" cap="none">
-                <a:solidFill>
-                  <a:schemeClr val="dk2"/>
-                </a:solidFill>
-                <a:latin typeface="Roboto"/>
-                <a:ea typeface="Roboto"/>
-                <a:cs typeface="Roboto"/>
-                <a:sym typeface="Roboto"/>
-              </a:defRPr>
-            </a:lvl3pPr>
-            <a:lvl4pPr marL="1828800" marR="0" lvl="3" indent="-298450" algn="l" rtl="0">
-              <a:lnSpc>
-                <a:spcPct val="115000"/>
-              </a:lnSpc>
-              <a:spcBef>
-                <a:spcPts val="1600"/>
-              </a:spcBef>
-              <a:spcAft>
-                <a:spcPts val="0"/>
-              </a:spcAft>
-              <a:buClr>
-                <a:schemeClr val="dk2"/>
-              </a:buClr>
-              <a:buSzPts val="1100"/>
-              <a:buFont typeface="Roboto"/>
-              <a:buChar char="●"/>
-              <a:defRPr sz="1100" b="0" i="0" u="none" strike="noStrike" cap="none">
-                <a:solidFill>
-                  <a:schemeClr val="dk2"/>
-                </a:solidFill>
-                <a:latin typeface="Roboto"/>
-                <a:ea typeface="Roboto"/>
-                <a:cs typeface="Roboto"/>
-                <a:sym typeface="Roboto"/>
-              </a:defRPr>
-            </a:lvl4pPr>
-            <a:lvl5pPr marL="2286000" marR="0" lvl="4" indent="-298450" algn="l" rtl="0">
-              <a:lnSpc>
-                <a:spcPct val="115000"/>
-              </a:lnSpc>
-              <a:spcBef>
-                <a:spcPts val="1600"/>
-              </a:spcBef>
-              <a:spcAft>
-                <a:spcPts val="0"/>
-              </a:spcAft>
-              <a:buClr>
-                <a:schemeClr val="dk2"/>
-              </a:buClr>
-              <a:buSzPts val="1100"/>
-              <a:buFont typeface="Roboto"/>
-              <a:buChar char="○"/>
-              <a:defRPr sz="1100" b="0" i="0" u="none" strike="noStrike" cap="none">
-                <a:solidFill>
-                  <a:schemeClr val="dk2"/>
-                </a:solidFill>
-                <a:latin typeface="Roboto"/>
-                <a:ea typeface="Roboto"/>
-                <a:cs typeface="Roboto"/>
-                <a:sym typeface="Roboto"/>
-              </a:defRPr>
-            </a:lvl5pPr>
-            <a:lvl6pPr marL="2743200" marR="0" lvl="5" indent="-298450" algn="l" rtl="0">
-              <a:lnSpc>
-                <a:spcPct val="115000"/>
-              </a:lnSpc>
-              <a:spcBef>
-                <a:spcPts val="1600"/>
-              </a:spcBef>
-              <a:spcAft>
-                <a:spcPts val="0"/>
-              </a:spcAft>
-              <a:buClr>
-                <a:schemeClr val="dk2"/>
-              </a:buClr>
-              <a:buSzPts val="1100"/>
-              <a:buFont typeface="Roboto"/>
-              <a:buChar char="■"/>
-              <a:defRPr sz="1100" b="0" i="0" u="none" strike="noStrike" cap="none">
-                <a:solidFill>
-                  <a:schemeClr val="dk2"/>
-                </a:solidFill>
-                <a:latin typeface="Roboto"/>
-                <a:ea typeface="Roboto"/>
-                <a:cs typeface="Roboto"/>
-                <a:sym typeface="Roboto"/>
-              </a:defRPr>
-            </a:lvl6pPr>
-            <a:lvl7pPr marL="3200400" marR="0" lvl="6" indent="-298450" algn="l" rtl="0">
-              <a:lnSpc>
-                <a:spcPct val="115000"/>
-              </a:lnSpc>
-              <a:spcBef>
-                <a:spcPts val="1600"/>
-              </a:spcBef>
-              <a:spcAft>
-                <a:spcPts val="0"/>
-              </a:spcAft>
-              <a:buClr>
-                <a:schemeClr val="dk2"/>
-              </a:buClr>
-              <a:buSzPts val="1100"/>
-              <a:buFont typeface="Roboto"/>
-              <a:buChar char="●"/>
-              <a:defRPr sz="1100" b="0" i="0" u="none" strike="noStrike" cap="none">
-                <a:solidFill>
-                  <a:schemeClr val="dk2"/>
-                </a:solidFill>
-                <a:latin typeface="Roboto"/>
-                <a:ea typeface="Roboto"/>
-                <a:cs typeface="Roboto"/>
-                <a:sym typeface="Roboto"/>
-              </a:defRPr>
-            </a:lvl7pPr>
-            <a:lvl8pPr marL="3657600" marR="0" lvl="7" indent="-298450" algn="l" rtl="0">
-              <a:lnSpc>
-                <a:spcPct val="115000"/>
-              </a:lnSpc>
-              <a:spcBef>
-                <a:spcPts val="1600"/>
-              </a:spcBef>
-              <a:spcAft>
-                <a:spcPts val="0"/>
-              </a:spcAft>
-              <a:buClr>
-                <a:schemeClr val="dk2"/>
-              </a:buClr>
-              <a:buSzPts val="1100"/>
-              <a:buFont typeface="Roboto"/>
-              <a:buChar char="○"/>
-              <a:defRPr sz="1100" b="0" i="0" u="none" strike="noStrike" cap="none">
-                <a:solidFill>
-                  <a:schemeClr val="dk2"/>
-                </a:solidFill>
-                <a:latin typeface="Roboto"/>
-                <a:ea typeface="Roboto"/>
-                <a:cs typeface="Roboto"/>
-                <a:sym typeface="Roboto"/>
-              </a:defRPr>
-            </a:lvl8pPr>
-            <a:lvl9pPr marL="4114800" marR="0" lvl="8" indent="-298450" algn="l" rtl="0">
-              <a:lnSpc>
-                <a:spcPct val="115000"/>
-              </a:lnSpc>
-              <a:spcBef>
-                <a:spcPts val="1600"/>
-              </a:spcBef>
-              <a:spcAft>
-                <a:spcPts val="1600"/>
-              </a:spcAft>
-              <a:buClr>
-                <a:schemeClr val="dk2"/>
-              </a:buClr>
-              <a:buSzPts val="1100"/>
-              <a:buFont typeface="Roboto"/>
-              <a:buChar char="■"/>
-              <a:defRPr sz="1100" b="0" i="0" u="none" strike="noStrike" cap="none">
-                <a:solidFill>
-                  <a:schemeClr val="dk2"/>
-                </a:solidFill>
-                <a:latin typeface="Roboto"/>
-                <a:ea typeface="Roboto"/>
-                <a:cs typeface="Roboto"/>
-                <a:sym typeface="Roboto"/>
-              </a:defRPr>
-            </a:lvl9pPr>
-          </a:lstStyle>
-          <a:p>
-            <a:pPr marL="0" indent="0">
-              <a:spcAft>
-                <a:spcPts val="1600"/>
-              </a:spcAft>
-              <a:buNone/>
-            </a:pPr>
-            <a:r>
-              <a:rPr lang="en-US" sz="1400" dirty="0"/>
-              <a:t>After completing the Quiz </a:t>
-            </a:r>
-          </a:p>
-          <a:p>
-            <a:pPr marL="342900" indent="-342900">
-              <a:spcAft>
-                <a:spcPts val="1600"/>
-              </a:spcAft>
-            </a:pPr>
-            <a:r>
-              <a:rPr lang="en-US" sz="1200" dirty="0"/>
-              <a:t>Accept GitHub Classroom Assignment for Unit 06</a:t>
-            </a:r>
-          </a:p>
-          <a:p>
-            <a:pPr marL="342900" indent="-342900">
-              <a:spcAft>
-                <a:spcPts val="1600"/>
-              </a:spcAft>
-            </a:pPr>
-            <a:r>
-              <a:rPr lang="en-US" sz="1200" dirty="0"/>
-              <a:t>Clone/pull GitHub classroom repo for Unit 06 under </a:t>
-            </a:r>
-            <a:r>
-              <a:rPr lang="en-US" sz="1200" dirty="0" err="1"/>
-              <a:t>softdevII</a:t>
-            </a:r>
-            <a:r>
-              <a:rPr lang="en-US" sz="1200" dirty="0"/>
-              <a:t> folder</a:t>
-            </a:r>
-            <a:endParaRPr lang="en-US" sz="1200" dirty="0">
-              <a:solidFill>
-                <a:schemeClr val="tx1"/>
-              </a:solidFill>
-            </a:endParaRPr>
-          </a:p>
-        </p:txBody>
-      </p:sp>
-      <p:sp>
-        <p:nvSpPr>
-          <p:cNvPr id="5" name="Google Shape;325;p47">
-            <a:extLst>
-              <a:ext uri="{FF2B5EF4-FFF2-40B4-BE49-F238E27FC236}">
-                <a16:creationId xmlns:a16="http://schemas.microsoft.com/office/drawing/2014/main" id="{7B85466C-6200-EE66-9396-7DECA70CDF53}"/>
-              </a:ext>
-            </a:extLst>
-          </p:cNvPr>
-          <p:cNvSpPr txBox="1">
-            <a:spLocks/>
-          </p:cNvSpPr>
-          <p:nvPr/>
-        </p:nvSpPr>
-        <p:spPr>
-          <a:xfrm>
-            <a:off x="4303618" y="1737005"/>
-            <a:ext cx="4516998" cy="1378400"/>
-          </a:xfrm>
-          <a:prstGeom prst="rect">
-            <a:avLst/>
-          </a:prstGeom>
-          <a:noFill/>
-          <a:ln>
-            <a:noFill/>
-          </a:ln>
-        </p:spPr>
-        <p:txBody>
-          <a:bodyPr spcFirstLastPara="1" wrap="square" lIns="91425" tIns="91425" rIns="91425" bIns="91425" anchor="ctr" anchorCtr="0">
-            <a:noAutofit/>
-          </a:bodyPr>
-          <a:lstStyle>
-            <a:defPPr marR="0" lvl="0" algn="l" rtl="0">
-              <a:lnSpc>
-                <a:spcPct val="100000"/>
-              </a:lnSpc>
-              <a:spcBef>
-                <a:spcPts val="0"/>
-              </a:spcBef>
-              <a:spcAft>
-                <a:spcPts val="0"/>
-              </a:spcAft>
-            </a:defPPr>
-            <a:lvl1pPr marL="457200" marR="0" lvl="0" indent="-311150" algn="l" rtl="0">
-              <a:lnSpc>
-                <a:spcPct val="115000"/>
-              </a:lnSpc>
-              <a:spcBef>
-                <a:spcPts val="0"/>
-              </a:spcBef>
-              <a:spcAft>
-                <a:spcPts val="0"/>
-              </a:spcAft>
-              <a:buClr>
-                <a:schemeClr val="dk2"/>
-              </a:buClr>
-              <a:buSzPts val="1300"/>
-              <a:buFont typeface="Roboto"/>
-              <a:buChar char="●"/>
-              <a:defRPr sz="1300" b="0" i="0" u="none" strike="noStrike" cap="none">
-                <a:solidFill>
-                  <a:schemeClr val="dk2"/>
-                </a:solidFill>
-                <a:latin typeface="Roboto"/>
-                <a:ea typeface="Roboto"/>
-                <a:cs typeface="Roboto"/>
-                <a:sym typeface="Roboto"/>
-              </a:defRPr>
-            </a:lvl1pPr>
-            <a:lvl2pPr marL="914400" marR="0" lvl="1" indent="-298450" algn="l" rtl="0">
-              <a:lnSpc>
-                <a:spcPct val="115000"/>
-              </a:lnSpc>
-              <a:spcBef>
-                <a:spcPts val="1600"/>
-              </a:spcBef>
-              <a:spcAft>
-                <a:spcPts val="0"/>
-              </a:spcAft>
-              <a:buClr>
-                <a:schemeClr val="dk2"/>
-              </a:buClr>
-              <a:buSzPts val="1100"/>
-              <a:buFont typeface="Roboto"/>
-              <a:buChar char="○"/>
-              <a:defRPr sz="1100" b="0" i="0" u="none" strike="noStrike" cap="none">
-                <a:solidFill>
-                  <a:schemeClr val="dk2"/>
-                </a:solidFill>
-                <a:latin typeface="Roboto"/>
-                <a:ea typeface="Roboto"/>
-                <a:cs typeface="Roboto"/>
-                <a:sym typeface="Roboto"/>
-              </a:defRPr>
-            </a:lvl2pPr>
-            <a:lvl3pPr marL="1371600" marR="0" lvl="2" indent="-298450" algn="l" rtl="0">
-              <a:lnSpc>
-                <a:spcPct val="115000"/>
-              </a:lnSpc>
-              <a:spcBef>
-                <a:spcPts val="1600"/>
-              </a:spcBef>
-              <a:spcAft>
-                <a:spcPts val="0"/>
-              </a:spcAft>
-              <a:buClr>
-                <a:schemeClr val="dk2"/>
-              </a:buClr>
-              <a:buSzPts val="1100"/>
-              <a:buFont typeface="Roboto"/>
-              <a:buChar char="■"/>
-              <a:defRPr sz="1100" b="0" i="0" u="none" strike="noStrike" cap="none">
-                <a:solidFill>
-                  <a:schemeClr val="dk2"/>
-                </a:solidFill>
-                <a:latin typeface="Roboto"/>
-                <a:ea typeface="Roboto"/>
-                <a:cs typeface="Roboto"/>
-                <a:sym typeface="Roboto"/>
-              </a:defRPr>
-            </a:lvl3pPr>
-            <a:lvl4pPr marL="1828800" marR="0" lvl="3" indent="-298450" algn="l" rtl="0">
-              <a:lnSpc>
-                <a:spcPct val="115000"/>
-              </a:lnSpc>
-              <a:spcBef>
-                <a:spcPts val="1600"/>
-              </a:spcBef>
-              <a:spcAft>
-                <a:spcPts val="0"/>
-              </a:spcAft>
-              <a:buClr>
-                <a:schemeClr val="dk2"/>
-              </a:buClr>
-              <a:buSzPts val="1100"/>
-              <a:buFont typeface="Roboto"/>
-              <a:buChar char="●"/>
-              <a:defRPr sz="1100" b="0" i="0" u="none" strike="noStrike" cap="none">
-                <a:solidFill>
-                  <a:schemeClr val="dk2"/>
-                </a:solidFill>
-                <a:latin typeface="Roboto"/>
-                <a:ea typeface="Roboto"/>
-                <a:cs typeface="Roboto"/>
-                <a:sym typeface="Roboto"/>
-              </a:defRPr>
-            </a:lvl4pPr>
-            <a:lvl5pPr marL="2286000" marR="0" lvl="4" indent="-298450" algn="l" rtl="0">
-              <a:lnSpc>
-                <a:spcPct val="115000"/>
-              </a:lnSpc>
-              <a:spcBef>
-                <a:spcPts val="1600"/>
-              </a:spcBef>
-              <a:spcAft>
-                <a:spcPts val="0"/>
-              </a:spcAft>
-              <a:buClr>
-                <a:schemeClr val="dk2"/>
-              </a:buClr>
-              <a:buSzPts val="1100"/>
-              <a:buFont typeface="Roboto"/>
-              <a:buChar char="○"/>
-              <a:defRPr sz="1100" b="0" i="0" u="none" strike="noStrike" cap="none">
-                <a:solidFill>
-                  <a:schemeClr val="dk2"/>
-                </a:solidFill>
-                <a:latin typeface="Roboto"/>
-                <a:ea typeface="Roboto"/>
-                <a:cs typeface="Roboto"/>
-                <a:sym typeface="Roboto"/>
-              </a:defRPr>
-            </a:lvl5pPr>
-            <a:lvl6pPr marL="2743200" marR="0" lvl="5" indent="-298450" algn="l" rtl="0">
-              <a:lnSpc>
-                <a:spcPct val="115000"/>
-              </a:lnSpc>
-              <a:spcBef>
-                <a:spcPts val="1600"/>
-              </a:spcBef>
-              <a:spcAft>
-                <a:spcPts val="0"/>
-              </a:spcAft>
-              <a:buClr>
-                <a:schemeClr val="dk2"/>
-              </a:buClr>
-              <a:buSzPts val="1100"/>
-              <a:buFont typeface="Roboto"/>
-              <a:buChar char="■"/>
-              <a:defRPr sz="1100" b="0" i="0" u="none" strike="noStrike" cap="none">
-                <a:solidFill>
-                  <a:schemeClr val="dk2"/>
-                </a:solidFill>
-                <a:latin typeface="Roboto"/>
-                <a:ea typeface="Roboto"/>
-                <a:cs typeface="Roboto"/>
-                <a:sym typeface="Roboto"/>
-              </a:defRPr>
-            </a:lvl6pPr>
-            <a:lvl7pPr marL="3200400" marR="0" lvl="6" indent="-298450" algn="l" rtl="0">
-              <a:lnSpc>
-                <a:spcPct val="115000"/>
-              </a:lnSpc>
-              <a:spcBef>
-                <a:spcPts val="1600"/>
-              </a:spcBef>
-              <a:spcAft>
-                <a:spcPts val="0"/>
-              </a:spcAft>
-              <a:buClr>
-                <a:schemeClr val="dk2"/>
-              </a:buClr>
-              <a:buSzPts val="1100"/>
-              <a:buFont typeface="Roboto"/>
-              <a:buChar char="●"/>
-              <a:defRPr sz="1100" b="0" i="0" u="none" strike="noStrike" cap="none">
-                <a:solidFill>
-                  <a:schemeClr val="dk2"/>
-                </a:solidFill>
-                <a:latin typeface="Roboto"/>
-                <a:ea typeface="Roboto"/>
-                <a:cs typeface="Roboto"/>
-                <a:sym typeface="Roboto"/>
-              </a:defRPr>
-            </a:lvl7pPr>
-            <a:lvl8pPr marL="3657600" marR="0" lvl="7" indent="-298450" algn="l" rtl="0">
-              <a:lnSpc>
-                <a:spcPct val="115000"/>
-              </a:lnSpc>
-              <a:spcBef>
-                <a:spcPts val="1600"/>
-              </a:spcBef>
-              <a:spcAft>
-                <a:spcPts val="0"/>
-              </a:spcAft>
-              <a:buClr>
-                <a:schemeClr val="dk2"/>
-              </a:buClr>
-              <a:buSzPts val="1100"/>
-              <a:buFont typeface="Roboto"/>
-              <a:buChar char="○"/>
-              <a:defRPr sz="1100" b="0" i="0" u="none" strike="noStrike" cap="none">
-                <a:solidFill>
-                  <a:schemeClr val="dk2"/>
-                </a:solidFill>
-                <a:latin typeface="Roboto"/>
-                <a:ea typeface="Roboto"/>
-                <a:cs typeface="Roboto"/>
-                <a:sym typeface="Roboto"/>
-              </a:defRPr>
-            </a:lvl8pPr>
-            <a:lvl9pPr marL="4114800" marR="0" lvl="8" indent="-298450" algn="l" rtl="0">
-              <a:lnSpc>
-                <a:spcPct val="115000"/>
-              </a:lnSpc>
-              <a:spcBef>
-                <a:spcPts val="1600"/>
-              </a:spcBef>
-              <a:spcAft>
-                <a:spcPts val="1600"/>
-              </a:spcAft>
-              <a:buClr>
-                <a:schemeClr val="dk2"/>
-              </a:buClr>
-              <a:buSzPts val="1100"/>
-              <a:buFont typeface="Roboto"/>
-              <a:buChar char="■"/>
-              <a:defRPr sz="1100" b="0" i="0" u="none" strike="noStrike" cap="none">
-                <a:solidFill>
-                  <a:schemeClr val="dk2"/>
-                </a:solidFill>
-                <a:latin typeface="Roboto"/>
-                <a:ea typeface="Roboto"/>
-                <a:cs typeface="Roboto"/>
-                <a:sym typeface="Roboto"/>
-              </a:defRPr>
-            </a:lvl9pPr>
-          </a:lstStyle>
-          <a:p>
-            <a:pPr marL="146050" indent="0">
-              <a:buNone/>
-            </a:pPr>
-            <a:r>
-              <a:rPr lang="en-US" sz="1600" dirty="0">
-                <a:solidFill>
-                  <a:schemeClr val="tx1"/>
-                </a:solidFill>
-              </a:rPr>
-              <a:t>Quiz 5.3 Iterators &amp; the JCF</a:t>
-            </a:r>
-          </a:p>
-          <a:p>
-            <a:pPr marL="146050" indent="0">
-              <a:buNone/>
-            </a:pPr>
-            <a:r>
-              <a:rPr lang="en-US" sz="1600" dirty="0">
-                <a:solidFill>
-                  <a:schemeClr val="tx1"/>
-                </a:solidFill>
-              </a:rPr>
-              <a:t>Password - </a:t>
-            </a:r>
-            <a:r>
-              <a:rPr lang="en-US" sz="1600" dirty="0" err="1">
-                <a:solidFill>
-                  <a:schemeClr val="tx1"/>
-                </a:solidFill>
-              </a:rPr>
-              <a:t>forEachLoopBrother</a:t>
-            </a:r>
-            <a:endParaRPr lang="en-US" sz="1600" dirty="0">
-              <a:solidFill>
-                <a:schemeClr val="tx1"/>
-              </a:solidFill>
-            </a:endParaRPr>
-          </a:p>
-        </p:txBody>
-      </p:sp>
-    </p:spTree>
-    <p:extLst>
-      <p:ext uri="{BB962C8B-B14F-4D97-AF65-F5344CB8AC3E}">
-        <p14:creationId xmlns:p14="http://schemas.microsoft.com/office/powerpoint/2010/main" val="674272117"/>
-      </p:ext>
-    </p:extLst>
   </p:cSld>
   <p:clrMapOvr>
     <a:masterClrMapping/>

--- a/Presentation/Announcement.pptx
+++ b/Presentation/Announcement.pptx
@@ -8,9 +8,9 @@
     <p:notesMasterId r:id="rId14"/>
   </p:notesMasterIdLst>
   <p:sldIdLst>
-    <p:sldId id="286" r:id="rId2"/>
+    <p:sldId id="278" r:id="rId2"/>
     <p:sldId id="276" r:id="rId3"/>
-    <p:sldId id="278" r:id="rId4"/>
+    <p:sldId id="286" r:id="rId4"/>
     <p:sldId id="281" r:id="rId5"/>
     <p:sldId id="287" r:id="rId6"/>
     <p:sldId id="285" r:id="rId7"/>
@@ -739,13 +739,7 @@
   <p:cSld>
     <p:spTree>
       <p:nvGrpSpPr>
-        <p:cNvPr id="1" name="Shape 320">
-          <a:extLst>
-            <a:ext uri="{FF2B5EF4-FFF2-40B4-BE49-F238E27FC236}">
-              <a16:creationId xmlns:a16="http://schemas.microsoft.com/office/drawing/2014/main" id="{5E82D901-7A14-0382-4365-722182C687A8}"/>
-            </a:ext>
-          </a:extLst>
-        </p:cNvPr>
+        <p:cNvPr id="1" name="Shape 320"/>
         <p:cNvGrpSpPr/>
         <p:nvPr/>
       </p:nvGrpSpPr>
@@ -759,13 +753,7 @@
       </p:grpSpPr>
       <p:sp>
         <p:nvSpPr>
-          <p:cNvPr id="321" name="Google Shape;321;g8f52c9b70a_3_0:notes">
-            <a:extLst>
-              <a:ext uri="{FF2B5EF4-FFF2-40B4-BE49-F238E27FC236}">
-                <a16:creationId xmlns:a16="http://schemas.microsoft.com/office/drawing/2014/main" id="{B8D16220-AF50-7601-71A9-4952749D32CB}"/>
-              </a:ext>
-            </a:extLst>
-          </p:cNvPr>
+          <p:cNvPr id="321" name="Google Shape;321;g8f52c9b70a_3_0:notes"/>
           <p:cNvSpPr>
             <a:spLocks noGrp="1" noRot="1" noChangeAspect="1"/>
           </p:cNvSpPr>
@@ -806,13 +794,7 @@
       </p:sp>
       <p:sp>
         <p:nvSpPr>
-          <p:cNvPr id="322" name="Google Shape;322;g8f52c9b70a_3_0:notes">
-            <a:extLst>
-              <a:ext uri="{FF2B5EF4-FFF2-40B4-BE49-F238E27FC236}">
-                <a16:creationId xmlns:a16="http://schemas.microsoft.com/office/drawing/2014/main" id="{AEA302D2-52D7-97D7-BF6C-781234E92D43}"/>
-              </a:ext>
-            </a:extLst>
-          </p:cNvPr>
+          <p:cNvPr id="322" name="Google Shape;322;g8f52c9b70a_3_0:notes"/>
           <p:cNvSpPr txBox="1">
             <a:spLocks noGrp="1"/>
           </p:cNvSpPr>
@@ -845,7 +827,7 @@
     </p:spTree>
     <p:extLst>
       <p:ext uri="{BB962C8B-B14F-4D97-AF65-F5344CB8AC3E}">
-        <p14:creationId xmlns:p14="http://schemas.microsoft.com/office/powerpoint/2010/main" val="2483524941"/>
+        <p14:creationId xmlns:p14="http://schemas.microsoft.com/office/powerpoint/2010/main" val="4097390636"/>
       </p:ext>
     </p:extLst>
   </p:cSld>
@@ -1267,7 +1249,13 @@
   <p:cSld>
     <p:spTree>
       <p:nvGrpSpPr>
-        <p:cNvPr id="1" name="Shape 320"/>
+        <p:cNvPr id="1" name="Shape 320">
+          <a:extLst>
+            <a:ext uri="{FF2B5EF4-FFF2-40B4-BE49-F238E27FC236}">
+              <a16:creationId xmlns:a16="http://schemas.microsoft.com/office/drawing/2014/main" id="{5E82D901-7A14-0382-4365-722182C687A8}"/>
+            </a:ext>
+          </a:extLst>
+        </p:cNvPr>
         <p:cNvGrpSpPr/>
         <p:nvPr/>
       </p:nvGrpSpPr>
@@ -1281,7 +1269,13 @@
       </p:grpSpPr>
       <p:sp>
         <p:nvSpPr>
-          <p:cNvPr id="321" name="Google Shape;321;g8f52c9b70a_3_0:notes"/>
+          <p:cNvPr id="321" name="Google Shape;321;g8f52c9b70a_3_0:notes">
+            <a:extLst>
+              <a:ext uri="{FF2B5EF4-FFF2-40B4-BE49-F238E27FC236}">
+                <a16:creationId xmlns:a16="http://schemas.microsoft.com/office/drawing/2014/main" id="{B8D16220-AF50-7601-71A9-4952749D32CB}"/>
+              </a:ext>
+            </a:extLst>
+          </p:cNvPr>
           <p:cNvSpPr>
             <a:spLocks noGrp="1" noRot="1" noChangeAspect="1"/>
           </p:cNvSpPr>
@@ -1322,7 +1316,13 @@
       </p:sp>
       <p:sp>
         <p:nvSpPr>
-          <p:cNvPr id="322" name="Google Shape;322;g8f52c9b70a_3_0:notes"/>
+          <p:cNvPr id="322" name="Google Shape;322;g8f52c9b70a_3_0:notes">
+            <a:extLst>
+              <a:ext uri="{FF2B5EF4-FFF2-40B4-BE49-F238E27FC236}">
+                <a16:creationId xmlns:a16="http://schemas.microsoft.com/office/drawing/2014/main" id="{AEA302D2-52D7-97D7-BF6C-781234E92D43}"/>
+              </a:ext>
+            </a:extLst>
+          </p:cNvPr>
           <p:cNvSpPr txBox="1">
             <a:spLocks noGrp="1"/>
           </p:cNvSpPr>
@@ -1355,7 +1355,7 @@
     </p:spTree>
     <p:extLst>
       <p:ext uri="{BB962C8B-B14F-4D97-AF65-F5344CB8AC3E}">
-        <p14:creationId xmlns:p14="http://schemas.microsoft.com/office/powerpoint/2010/main" val="4097390636"/>
+        <p14:creationId xmlns:p14="http://schemas.microsoft.com/office/powerpoint/2010/main" val="2483524941"/>
       </p:ext>
     </p:extLst>
   </p:cSld>
@@ -6529,13 +6529,7 @@
   <p:cSld>
     <p:spTree>
       <p:nvGrpSpPr>
-        <p:cNvPr id="1" name="Shape 323">
-          <a:extLst>
-            <a:ext uri="{FF2B5EF4-FFF2-40B4-BE49-F238E27FC236}">
-              <a16:creationId xmlns:a16="http://schemas.microsoft.com/office/drawing/2014/main" id="{19512066-5980-8A8B-BE30-C4FB3AC72235}"/>
-            </a:ext>
-          </a:extLst>
-        </p:cNvPr>
+        <p:cNvPr id="1" name="Shape 323"/>
         <p:cNvGrpSpPr/>
         <p:nvPr/>
       </p:nvGrpSpPr>
@@ -6549,13 +6543,7 @@
       </p:grpSpPr>
       <p:sp>
         <p:nvSpPr>
-          <p:cNvPr id="324" name="Google Shape;324;p47">
-            <a:extLst>
-              <a:ext uri="{FF2B5EF4-FFF2-40B4-BE49-F238E27FC236}">
-                <a16:creationId xmlns:a16="http://schemas.microsoft.com/office/drawing/2014/main" id="{CDF56279-13BE-3C44-BBEF-E7DC5D1E88D2}"/>
-              </a:ext>
-            </a:extLst>
-          </p:cNvPr>
+          <p:cNvPr id="324" name="Google Shape;324;p47"/>
           <p:cNvSpPr txBox="1">
             <a:spLocks noGrp="1"/>
           </p:cNvSpPr>
@@ -6565,7 +6553,7 @@
         </p:nvSpPr>
         <p:spPr>
           <a:xfrm>
-            <a:off x="300016" y="269197"/>
+            <a:off x="314621" y="235914"/>
             <a:ext cx="8520600" cy="623700"/>
           </a:xfrm>
           <a:prstGeom prst="rect">
@@ -6597,13 +6585,7 @@
       </p:sp>
       <p:sp>
         <p:nvSpPr>
-          <p:cNvPr id="325" name="Google Shape;325;p47">
-            <a:extLst>
-              <a:ext uri="{FF2B5EF4-FFF2-40B4-BE49-F238E27FC236}">
-                <a16:creationId xmlns:a16="http://schemas.microsoft.com/office/drawing/2014/main" id="{5A9661D1-8430-BF80-279A-41B28CA04273}"/>
-              </a:ext>
-            </a:extLst>
-          </p:cNvPr>
+          <p:cNvPr id="325" name="Google Shape;325;p47"/>
           <p:cNvSpPr txBox="1">
             <a:spLocks noGrp="1"/>
           </p:cNvSpPr>
@@ -6613,8 +6595,8 @@
         </p:nvSpPr>
         <p:spPr>
           <a:xfrm>
-            <a:off x="91445" y="1758316"/>
-            <a:ext cx="4000496" cy="1378401"/>
+            <a:off x="0" y="1856257"/>
+            <a:ext cx="9149842" cy="1226403"/>
           </a:xfrm>
           <a:prstGeom prst="rect">
             <a:avLst/>
@@ -6626,55 +6608,56 @@
           </a:bodyPr>
           <a:lstStyle/>
           <a:p>
-            <a:pPr marL="146050" indent="0">
+            <a:pPr marL="146050" indent="0" algn="ctr">
               <a:buNone/>
             </a:pPr>
             <a:r>
-              <a:rPr lang="en-US" sz="1600" dirty="0">
-                <a:solidFill>
-                  <a:schemeClr val="tx1"/>
-                </a:solidFill>
-              </a:rPr>
-              <a:t>Quiz 6.2: Comparable and Comparator</a:t>
+              <a:rPr lang="en-US" sz="2400" dirty="0"/>
+              <a:t>Take Quiz – Midterm Exam 2</a:t>
             </a:r>
           </a:p>
           <a:p>
-            <a:pPr marL="146050" indent="0">
+            <a:pPr marL="146050" indent="0" algn="ctr">
               <a:buNone/>
             </a:pPr>
             <a:r>
-              <a:rPr lang="en-US" sz="1600" dirty="0">
+              <a:rPr lang="en-US" sz="3200" b="1" dirty="0">
                 <a:solidFill>
                   <a:schemeClr val="tx1"/>
                 </a:solidFill>
               </a:rPr>
-              <a:t>Password – </a:t>
+              <a:t>Password - </a:t>
             </a:r>
             <a:r>
-              <a:rPr lang="en-US" sz="1600" dirty="0" err="1">
+              <a:rPr lang="en-US" sz="3200" b="1" dirty="0" err="1">
                 <a:solidFill>
                   <a:schemeClr val="tx1"/>
                 </a:solidFill>
               </a:rPr>
-              <a:t>comparisonsGalore</a:t>
+              <a:t>CompareIterators</a:t>
             </a:r>
-            <a:endParaRPr sz="1600" dirty="0">
+            <a:r>
+              <a:rPr lang="en-US" sz="3200" b="1" dirty="0">
+                <a:solidFill>
+                  <a:schemeClr val="tx1"/>
+                </a:solidFill>
+              </a:rPr>
+              <a:t>!</a:t>
+            </a:r>
+            <a:endParaRPr sz="3200" b="1" dirty="0">
               <a:solidFill>
                 <a:schemeClr val="tx1"/>
               </a:solidFill>
+              <a:highlight>
+                <a:srgbClr val="FFFF00"/>
+              </a:highlight>
             </a:endParaRPr>
           </a:p>
         </p:txBody>
       </p:sp>
       <p:sp>
         <p:nvSpPr>
-          <p:cNvPr id="326" name="Google Shape;326;p47">
-            <a:extLst>
-              <a:ext uri="{FF2B5EF4-FFF2-40B4-BE49-F238E27FC236}">
-                <a16:creationId xmlns:a16="http://schemas.microsoft.com/office/drawing/2014/main" id="{8A14E227-935A-FBD8-6BD5-CBCE8D13EE84}"/>
-              </a:ext>
-            </a:extLst>
-          </p:cNvPr>
+          <p:cNvPr id="326" name="Google Shape;326;p47"/>
           <p:cNvSpPr txBox="1">
             <a:spLocks noGrp="1"/>
           </p:cNvSpPr>
@@ -6719,7 +6702,7 @@
           <p:cNvPr id="2" name="TextBox 1">
             <a:extLst>
               <a:ext uri="{FF2B5EF4-FFF2-40B4-BE49-F238E27FC236}">
-                <a16:creationId xmlns:a16="http://schemas.microsoft.com/office/drawing/2014/main" id="{AE960589-7B12-D7F7-6452-D45441D8CA95}"/>
+                <a16:creationId xmlns:a16="http://schemas.microsoft.com/office/drawing/2014/main" id="{DCC33EBB-1C9D-B9A9-88E6-F3466077417F}"/>
               </a:ext>
             </a:extLst>
           </p:cNvPr>
@@ -6728,8 +6711,8 @@
         </p:nvSpPr>
         <p:spPr>
           <a:xfrm>
-            <a:off x="-11684" y="1287037"/>
-            <a:ext cx="9144000" cy="338555"/>
+            <a:off x="-5842" y="1277369"/>
+            <a:ext cx="9144000" cy="307777"/>
           </a:xfrm>
           <a:prstGeom prst="rect">
             <a:avLst/>
@@ -6744,9 +6727,10 @@
           </a:bodyPr>
           <a:lstStyle/>
           <a:p>
+            <a:pPr algn="ctr"/>
             <a:r>
-              <a:rPr lang="en-US" dirty="0"/>
-              <a:t>Quiz</a:t>
+              <a:rPr lang="en-US" b="1" dirty="0"/>
+              <a:t>Midterm Exam 2 - Written</a:t>
             </a:r>
           </a:p>
         </p:txBody>
@@ -6756,7 +6740,7 @@
           <p:cNvPr id="3" name="TextBox 2">
             <a:extLst>
               <a:ext uri="{FF2B5EF4-FFF2-40B4-BE49-F238E27FC236}">
-                <a16:creationId xmlns:a16="http://schemas.microsoft.com/office/drawing/2014/main" id="{4FD526CA-3FDB-A5C2-36D9-69A3252D5E9A}"/>
+                <a16:creationId xmlns:a16="http://schemas.microsoft.com/office/drawing/2014/main" id="{25A19346-2F9F-0DB9-0B08-CF872EB1D563}"/>
               </a:ext>
             </a:extLst>
           </p:cNvPr>
@@ -6765,7 +6749,7 @@
         </p:nvSpPr>
         <p:spPr>
           <a:xfrm>
-            <a:off x="0" y="3254487"/>
+            <a:off x="0" y="3313985"/>
             <a:ext cx="9144000" cy="307777"/>
           </a:xfrm>
           <a:prstGeom prst="rect">
@@ -6783,15 +6767,8 @@
           <a:p>
             <a:r>
               <a:rPr lang="en-US" dirty="0"/>
-              <a:t>Next </a:t>
+              <a:t>Practicum</a:t>
             </a:r>
-            <a:r>
-              <a:rPr lang="en-US" dirty="0">
-                <a:sym typeface="Wingdings" panose="05000000000000000000" pitchFamily="2" charset="2"/>
-              </a:rPr>
-              <a:t> </a:t>
-            </a:r>
-            <a:endParaRPr lang="en-US" dirty="0"/>
           </a:p>
         </p:txBody>
       </p:sp>
@@ -6800,7 +6777,7 @@
           <p:cNvPr id="4" name="Google Shape;325;p47">
             <a:extLst>
               <a:ext uri="{FF2B5EF4-FFF2-40B4-BE49-F238E27FC236}">
-                <a16:creationId xmlns:a16="http://schemas.microsoft.com/office/drawing/2014/main" id="{DC50CCB1-5AFE-1F52-8B22-87EB927965B4}"/>
+                <a16:creationId xmlns:a16="http://schemas.microsoft.com/office/drawing/2014/main" id="{11D0E6FB-E344-369B-CE83-B3CF5834F823}"/>
               </a:ext>
             </a:extLst>
           </p:cNvPr>
@@ -6811,8 +6788,8 @@
         </p:nvSpPr>
         <p:spPr>
           <a:xfrm>
-            <a:off x="-5842" y="3562264"/>
-            <a:ext cx="9149842" cy="1494553"/>
+            <a:off x="122842" y="3621762"/>
+            <a:ext cx="8478300" cy="1435054"/>
           </a:xfrm>
           <a:prstGeom prst="rect">
             <a:avLst/>
@@ -7074,343 +7051,26 @@
             </a:lvl9pPr>
           </a:lstStyle>
           <a:p>
-            <a:pPr marL="0" indent="0">
-              <a:spcAft>
-                <a:spcPts val="1600"/>
-              </a:spcAft>
-              <a:buNone/>
+            <a:pPr marL="342900" indent="-342900">
+              <a:spcAft>
+                <a:spcPts val="1600"/>
+              </a:spcAft>
             </a:pPr>
             <a:r>
-              <a:rPr lang="en-US" sz="1400" dirty="0"/>
-              <a:t>After completing the Quiz </a:t>
+              <a:rPr lang="en-US" sz="1600" dirty="0"/>
+              <a:t>Accept assignment Mid Exam 2 under Instructor -&gt; Alam -&gt; Exam</a:t>
             </a:r>
-          </a:p>
-          <a:p>
-            <a:pPr marL="342900" indent="-342900">
-              <a:spcAft>
-                <a:spcPts val="1600"/>
-              </a:spcAft>
-            </a:pPr>
-            <a:r>
-              <a:rPr lang="en-US" sz="1200" dirty="0"/>
-              <a:t>Accept GitHub Classroom Assignment for Unit 07</a:t>
-            </a:r>
-          </a:p>
-          <a:p>
-            <a:pPr marL="342900" indent="-342900">
-              <a:spcAft>
-                <a:spcPts val="1600"/>
-              </a:spcAft>
-            </a:pPr>
-            <a:r>
-              <a:rPr lang="en-US" sz="1200" dirty="0"/>
-              <a:t>Clone/pull GitHub classroom repo for Unit 07 under </a:t>
-            </a:r>
-            <a:r>
-              <a:rPr lang="en-US" sz="1200" dirty="0" err="1"/>
-              <a:t>softdevII</a:t>
-            </a:r>
-            <a:r>
-              <a:rPr lang="en-US" sz="1200" dirty="0"/>
-              <a:t> folder. Download Starter code from </a:t>
-            </a:r>
-            <a:r>
-              <a:rPr lang="en-US" sz="1200" dirty="0" err="1"/>
-              <a:t>myCourses</a:t>
-            </a:r>
-            <a:r>
-              <a:rPr lang="en-US" sz="1200" dirty="0"/>
-              <a:t> under Alam-&gt;Class Activities</a:t>
-            </a:r>
-            <a:endParaRPr lang="en-US" sz="1200" dirty="0">
+            <a:endParaRPr lang="en-US" sz="1600" dirty="0">
               <a:solidFill>
                 <a:schemeClr val="tx1"/>
               </a:solidFill>
             </a:endParaRPr>
           </a:p>
-        </p:txBody>
-      </p:sp>
-      <p:sp>
-        <p:nvSpPr>
-          <p:cNvPr id="5" name="Google Shape;325;p47">
-            <a:extLst>
-              <a:ext uri="{FF2B5EF4-FFF2-40B4-BE49-F238E27FC236}">
-                <a16:creationId xmlns:a16="http://schemas.microsoft.com/office/drawing/2014/main" id="{7B85466C-6200-EE66-9396-7DECA70CDF53}"/>
-              </a:ext>
-            </a:extLst>
-          </p:cNvPr>
-          <p:cNvSpPr txBox="1">
-            <a:spLocks/>
-          </p:cNvSpPr>
-          <p:nvPr/>
-        </p:nvSpPr>
-        <p:spPr>
-          <a:xfrm>
-            <a:off x="4303618" y="1737005"/>
-            <a:ext cx="4516998" cy="1378400"/>
-          </a:xfrm>
-          <a:prstGeom prst="rect">
-            <a:avLst/>
-          </a:prstGeom>
-          <a:noFill/>
-          <a:ln>
-            <a:noFill/>
-          </a:ln>
-        </p:spPr>
-        <p:txBody>
-          <a:bodyPr spcFirstLastPara="1" wrap="square" lIns="91425" tIns="91425" rIns="91425" bIns="91425" anchor="ctr" anchorCtr="0">
-            <a:noAutofit/>
-          </a:bodyPr>
-          <a:lstStyle>
-            <a:defPPr marR="0" lvl="0" algn="l" rtl="0">
-              <a:lnSpc>
-                <a:spcPct val="100000"/>
-              </a:lnSpc>
-              <a:spcBef>
-                <a:spcPts val="0"/>
-              </a:spcBef>
-              <a:spcAft>
-                <a:spcPts val="0"/>
-              </a:spcAft>
-            </a:defPPr>
-            <a:lvl1pPr marL="457200" marR="0" lvl="0" indent="-311150" algn="l" rtl="0">
-              <a:lnSpc>
-                <a:spcPct val="115000"/>
-              </a:lnSpc>
-              <a:spcBef>
-                <a:spcPts val="0"/>
-              </a:spcBef>
-              <a:spcAft>
-                <a:spcPts val="0"/>
-              </a:spcAft>
-              <a:buClr>
-                <a:schemeClr val="dk2"/>
-              </a:buClr>
-              <a:buSzPts val="1300"/>
-              <a:buFont typeface="Roboto"/>
-              <a:buChar char="●"/>
-              <a:defRPr sz="1300" b="0" i="0" u="none" strike="noStrike" cap="none">
-                <a:solidFill>
-                  <a:schemeClr val="dk2"/>
-                </a:solidFill>
-                <a:latin typeface="Roboto"/>
-                <a:ea typeface="Roboto"/>
-                <a:cs typeface="Roboto"/>
-                <a:sym typeface="Roboto"/>
-              </a:defRPr>
-            </a:lvl1pPr>
-            <a:lvl2pPr marL="914400" marR="0" lvl="1" indent="-298450" algn="l" rtl="0">
-              <a:lnSpc>
-                <a:spcPct val="115000"/>
-              </a:lnSpc>
-              <a:spcBef>
-                <a:spcPts val="1600"/>
-              </a:spcBef>
-              <a:spcAft>
-                <a:spcPts val="0"/>
-              </a:spcAft>
-              <a:buClr>
-                <a:schemeClr val="dk2"/>
-              </a:buClr>
-              <a:buSzPts val="1100"/>
-              <a:buFont typeface="Roboto"/>
-              <a:buChar char="○"/>
-              <a:defRPr sz="1100" b="0" i="0" u="none" strike="noStrike" cap="none">
-                <a:solidFill>
-                  <a:schemeClr val="dk2"/>
-                </a:solidFill>
-                <a:latin typeface="Roboto"/>
-                <a:ea typeface="Roboto"/>
-                <a:cs typeface="Roboto"/>
-                <a:sym typeface="Roboto"/>
-              </a:defRPr>
-            </a:lvl2pPr>
-            <a:lvl3pPr marL="1371600" marR="0" lvl="2" indent="-298450" algn="l" rtl="0">
-              <a:lnSpc>
-                <a:spcPct val="115000"/>
-              </a:lnSpc>
-              <a:spcBef>
-                <a:spcPts val="1600"/>
-              </a:spcBef>
-              <a:spcAft>
-                <a:spcPts val="0"/>
-              </a:spcAft>
-              <a:buClr>
-                <a:schemeClr val="dk2"/>
-              </a:buClr>
-              <a:buSzPts val="1100"/>
-              <a:buFont typeface="Roboto"/>
-              <a:buChar char="■"/>
-              <a:defRPr sz="1100" b="0" i="0" u="none" strike="noStrike" cap="none">
-                <a:solidFill>
-                  <a:schemeClr val="dk2"/>
-                </a:solidFill>
-                <a:latin typeface="Roboto"/>
-                <a:ea typeface="Roboto"/>
-                <a:cs typeface="Roboto"/>
-                <a:sym typeface="Roboto"/>
-              </a:defRPr>
-            </a:lvl3pPr>
-            <a:lvl4pPr marL="1828800" marR="0" lvl="3" indent="-298450" algn="l" rtl="0">
-              <a:lnSpc>
-                <a:spcPct val="115000"/>
-              </a:lnSpc>
-              <a:spcBef>
-                <a:spcPts val="1600"/>
-              </a:spcBef>
-              <a:spcAft>
-                <a:spcPts val="0"/>
-              </a:spcAft>
-              <a:buClr>
-                <a:schemeClr val="dk2"/>
-              </a:buClr>
-              <a:buSzPts val="1100"/>
-              <a:buFont typeface="Roboto"/>
-              <a:buChar char="●"/>
-              <a:defRPr sz="1100" b="0" i="0" u="none" strike="noStrike" cap="none">
-                <a:solidFill>
-                  <a:schemeClr val="dk2"/>
-                </a:solidFill>
-                <a:latin typeface="Roboto"/>
-                <a:ea typeface="Roboto"/>
-                <a:cs typeface="Roboto"/>
-                <a:sym typeface="Roboto"/>
-              </a:defRPr>
-            </a:lvl4pPr>
-            <a:lvl5pPr marL="2286000" marR="0" lvl="4" indent="-298450" algn="l" rtl="0">
-              <a:lnSpc>
-                <a:spcPct val="115000"/>
-              </a:lnSpc>
-              <a:spcBef>
-                <a:spcPts val="1600"/>
-              </a:spcBef>
-              <a:spcAft>
-                <a:spcPts val="0"/>
-              </a:spcAft>
-              <a:buClr>
-                <a:schemeClr val="dk2"/>
-              </a:buClr>
-              <a:buSzPts val="1100"/>
-              <a:buFont typeface="Roboto"/>
-              <a:buChar char="○"/>
-              <a:defRPr sz="1100" b="0" i="0" u="none" strike="noStrike" cap="none">
-                <a:solidFill>
-                  <a:schemeClr val="dk2"/>
-                </a:solidFill>
-                <a:latin typeface="Roboto"/>
-                <a:ea typeface="Roboto"/>
-                <a:cs typeface="Roboto"/>
-                <a:sym typeface="Roboto"/>
-              </a:defRPr>
-            </a:lvl5pPr>
-            <a:lvl6pPr marL="2743200" marR="0" lvl="5" indent="-298450" algn="l" rtl="0">
-              <a:lnSpc>
-                <a:spcPct val="115000"/>
-              </a:lnSpc>
-              <a:spcBef>
-                <a:spcPts val="1600"/>
-              </a:spcBef>
-              <a:spcAft>
-                <a:spcPts val="0"/>
-              </a:spcAft>
-              <a:buClr>
-                <a:schemeClr val="dk2"/>
-              </a:buClr>
-              <a:buSzPts val="1100"/>
-              <a:buFont typeface="Roboto"/>
-              <a:buChar char="■"/>
-              <a:defRPr sz="1100" b="0" i="0" u="none" strike="noStrike" cap="none">
-                <a:solidFill>
-                  <a:schemeClr val="dk2"/>
-                </a:solidFill>
-                <a:latin typeface="Roboto"/>
-                <a:ea typeface="Roboto"/>
-                <a:cs typeface="Roboto"/>
-                <a:sym typeface="Roboto"/>
-              </a:defRPr>
-            </a:lvl6pPr>
-            <a:lvl7pPr marL="3200400" marR="0" lvl="6" indent="-298450" algn="l" rtl="0">
-              <a:lnSpc>
-                <a:spcPct val="115000"/>
-              </a:lnSpc>
-              <a:spcBef>
-                <a:spcPts val="1600"/>
-              </a:spcBef>
-              <a:spcAft>
-                <a:spcPts val="0"/>
-              </a:spcAft>
-              <a:buClr>
-                <a:schemeClr val="dk2"/>
-              </a:buClr>
-              <a:buSzPts val="1100"/>
-              <a:buFont typeface="Roboto"/>
-              <a:buChar char="●"/>
-              <a:defRPr sz="1100" b="0" i="0" u="none" strike="noStrike" cap="none">
-                <a:solidFill>
-                  <a:schemeClr val="dk2"/>
-                </a:solidFill>
-                <a:latin typeface="Roboto"/>
-                <a:ea typeface="Roboto"/>
-                <a:cs typeface="Roboto"/>
-                <a:sym typeface="Roboto"/>
-              </a:defRPr>
-            </a:lvl7pPr>
-            <a:lvl8pPr marL="3657600" marR="0" lvl="7" indent="-298450" algn="l" rtl="0">
-              <a:lnSpc>
-                <a:spcPct val="115000"/>
-              </a:lnSpc>
-              <a:spcBef>
-                <a:spcPts val="1600"/>
-              </a:spcBef>
-              <a:spcAft>
-                <a:spcPts val="0"/>
-              </a:spcAft>
-              <a:buClr>
-                <a:schemeClr val="dk2"/>
-              </a:buClr>
-              <a:buSzPts val="1100"/>
-              <a:buFont typeface="Roboto"/>
-              <a:buChar char="○"/>
-              <a:defRPr sz="1100" b="0" i="0" u="none" strike="noStrike" cap="none">
-                <a:solidFill>
-                  <a:schemeClr val="dk2"/>
-                </a:solidFill>
-                <a:latin typeface="Roboto"/>
-                <a:ea typeface="Roboto"/>
-                <a:cs typeface="Roboto"/>
-                <a:sym typeface="Roboto"/>
-              </a:defRPr>
-            </a:lvl8pPr>
-            <a:lvl9pPr marL="4114800" marR="0" lvl="8" indent="-298450" algn="l" rtl="0">
-              <a:lnSpc>
-                <a:spcPct val="115000"/>
-              </a:lnSpc>
-              <a:spcBef>
-                <a:spcPts val="1600"/>
-              </a:spcBef>
-              <a:spcAft>
-                <a:spcPts val="1600"/>
-              </a:spcAft>
-              <a:buClr>
-                <a:schemeClr val="dk2"/>
-              </a:buClr>
-              <a:buSzPts val="1100"/>
-              <a:buFont typeface="Roboto"/>
-              <a:buChar char="■"/>
-              <a:defRPr sz="1100" b="0" i="0" u="none" strike="noStrike" cap="none">
-                <a:solidFill>
-                  <a:schemeClr val="dk2"/>
-                </a:solidFill>
-                <a:latin typeface="Roboto"/>
-                <a:ea typeface="Roboto"/>
-                <a:cs typeface="Roboto"/>
-                <a:sym typeface="Roboto"/>
-              </a:defRPr>
-            </a:lvl9pPr>
-          </a:lstStyle>
           <a:p>
-            <a:pPr marL="146050" indent="0">
-              <a:buNone/>
+            <a:pPr marL="342900" indent="-342900">
+              <a:spcAft>
+                <a:spcPts val="1600"/>
+              </a:spcAft>
             </a:pPr>
             <a:r>
               <a:rPr lang="en-US" sz="1600" dirty="0">
@@ -7418,28 +7078,11 @@
                   <a:schemeClr val="tx1"/>
                 </a:solidFill>
               </a:rPr>
-              <a:t>Quiz 6.3 Heap</a:t>
-            </a:r>
-          </a:p>
-          <a:p>
-            <a:pPr marL="146050" indent="0">
-              <a:buNone/>
-            </a:pPr>
-            <a:r>
-              <a:rPr lang="en-US" sz="1600" dirty="0">
-                <a:solidFill>
-                  <a:schemeClr val="tx1"/>
-                </a:solidFill>
-              </a:rPr>
-              <a:t>Password - </a:t>
+              <a:t>Clone the repository for </a:t>
             </a:r>
             <a:r>
-              <a:rPr lang="en-US" sz="1600" dirty="0" err="1">
-                <a:solidFill>
-                  <a:schemeClr val="tx1"/>
-                </a:solidFill>
-              </a:rPr>
-              <a:t>heapingHelping</a:t>
+              <a:rPr lang="en-US" sz="1600" dirty="0"/>
+              <a:t>Mid Exam 2 </a:t>
             </a:r>
             <a:endParaRPr lang="en-US" sz="1600" dirty="0">
               <a:solidFill>
@@ -7452,7 +7095,7 @@
     </p:spTree>
     <p:extLst>
       <p:ext uri="{BB962C8B-B14F-4D97-AF65-F5344CB8AC3E}">
-        <p14:creationId xmlns:p14="http://schemas.microsoft.com/office/powerpoint/2010/main" val="674272117"/>
+        <p14:creationId xmlns:p14="http://schemas.microsoft.com/office/powerpoint/2010/main" val="943055912"/>
       </p:ext>
     </p:extLst>
   </p:cSld>
@@ -8015,7 +7658,7 @@
             </a:r>
             <a:r>
               <a:rPr lang="en-US" sz="2400" dirty="0"/>
-              <a:t>6</a:t>
+              <a:t>7</a:t>
             </a:r>
             <a:r>
               <a:rPr lang="pl-PL" sz="2400" dirty="0"/>
@@ -8031,18 +7674,20 @@
             </a:r>
             <a:r>
               <a:rPr lang="en-US" sz="2400" dirty="0"/>
-              <a:t>Binary Tree</a:t>
+              <a:t>Sets, Maps, and Hashing</a:t>
             </a:r>
           </a:p>
           <a:p>
-            <a:pPr algn="ctr"/>
+            <a:pPr marL="146050" indent="0" algn="ctr">
+              <a:buNone/>
+            </a:pPr>
             <a:r>
               <a:rPr lang="en-US" sz="2400" dirty="0"/>
-              <a:t>Password </a:t>
+              <a:t>Password - </a:t>
             </a:r>
             <a:r>
-              <a:rPr lang="en-US" sz="2400"/>
-              <a:t>- Photo-synthesis!</a:t>
+              <a:rPr lang="en-US" sz="2400" dirty="0" err="1"/>
+              <a:t>NoMoreDictionaries</a:t>
             </a:r>
             <a:endParaRPr sz="2400" dirty="0"/>
           </a:p>
@@ -8498,7 +8143,13 @@
   <p:cSld>
     <p:spTree>
       <p:nvGrpSpPr>
-        <p:cNvPr id="1" name="Shape 323"/>
+        <p:cNvPr id="1" name="Shape 323">
+          <a:extLst>
+            <a:ext uri="{FF2B5EF4-FFF2-40B4-BE49-F238E27FC236}">
+              <a16:creationId xmlns:a16="http://schemas.microsoft.com/office/drawing/2014/main" id="{19512066-5980-8A8B-BE30-C4FB3AC72235}"/>
+            </a:ext>
+          </a:extLst>
+        </p:cNvPr>
         <p:cNvGrpSpPr/>
         <p:nvPr/>
       </p:nvGrpSpPr>
@@ -8512,7 +8163,13 @@
       </p:grpSpPr>
       <p:sp>
         <p:nvSpPr>
-          <p:cNvPr id="324" name="Google Shape;324;p47"/>
+          <p:cNvPr id="324" name="Google Shape;324;p47">
+            <a:extLst>
+              <a:ext uri="{FF2B5EF4-FFF2-40B4-BE49-F238E27FC236}">
+                <a16:creationId xmlns:a16="http://schemas.microsoft.com/office/drawing/2014/main" id="{CDF56279-13BE-3C44-BBEF-E7DC5D1E88D2}"/>
+              </a:ext>
+            </a:extLst>
+          </p:cNvPr>
           <p:cNvSpPr txBox="1">
             <a:spLocks noGrp="1"/>
           </p:cNvSpPr>
@@ -8522,7 +8179,7 @@
         </p:nvSpPr>
         <p:spPr>
           <a:xfrm>
-            <a:off x="314621" y="235914"/>
+            <a:off x="300016" y="269197"/>
             <a:ext cx="8520600" cy="623700"/>
           </a:xfrm>
           <a:prstGeom prst="rect">
@@ -8554,7 +8211,13 @@
       </p:sp>
       <p:sp>
         <p:nvSpPr>
-          <p:cNvPr id="325" name="Google Shape;325;p47"/>
+          <p:cNvPr id="325" name="Google Shape;325;p47">
+            <a:extLst>
+              <a:ext uri="{FF2B5EF4-FFF2-40B4-BE49-F238E27FC236}">
+                <a16:creationId xmlns:a16="http://schemas.microsoft.com/office/drawing/2014/main" id="{5A9661D1-8430-BF80-279A-41B28CA04273}"/>
+              </a:ext>
+            </a:extLst>
+          </p:cNvPr>
           <p:cNvSpPr txBox="1">
             <a:spLocks noGrp="1"/>
           </p:cNvSpPr>
@@ -8564,8 +8227,8 @@
         </p:nvSpPr>
         <p:spPr>
           <a:xfrm>
-            <a:off x="0" y="1856257"/>
-            <a:ext cx="9149842" cy="1226403"/>
+            <a:off x="91445" y="1758316"/>
+            <a:ext cx="4000496" cy="1378401"/>
           </a:xfrm>
           <a:prstGeom prst="rect">
             <a:avLst/>
@@ -8577,40 +8240,55 @@
           </a:bodyPr>
           <a:lstStyle/>
           <a:p>
-            <a:pPr marL="146050" indent="0" algn="ctr">
+            <a:pPr marL="146050" indent="0">
               <a:buNone/>
             </a:pPr>
             <a:r>
-              <a:rPr lang="en-US" sz="2400" dirty="0"/>
-              <a:t>Take Quiz – Midterm Exam 1</a:t>
+              <a:rPr lang="en-US" sz="1600" dirty="0">
+                <a:solidFill>
+                  <a:schemeClr val="tx1"/>
+                </a:solidFill>
+              </a:rPr>
+              <a:t>Quiz 6.2: Comparable and Comparator</a:t>
             </a:r>
           </a:p>
           <a:p>
-            <a:pPr marL="146050" indent="0" algn="ctr">
+            <a:pPr marL="146050" indent="0">
               <a:buNone/>
             </a:pPr>
             <a:r>
-              <a:rPr lang="en-US" sz="3200" b="1" dirty="0">
+              <a:rPr lang="en-US" sz="1600" dirty="0">
                 <a:solidFill>
                   <a:schemeClr val="tx1"/>
                 </a:solidFill>
               </a:rPr>
-              <a:t>Password - YouGotThis124!</a:t>
+              <a:t>Password – </a:t>
             </a:r>
-            <a:endParaRPr sz="3200" b="1" dirty="0">
+            <a:r>
+              <a:rPr lang="en-US" sz="1600" dirty="0" err="1">
+                <a:solidFill>
+                  <a:schemeClr val="tx1"/>
+                </a:solidFill>
+              </a:rPr>
+              <a:t>comparisonsGalore</a:t>
+            </a:r>
+            <a:endParaRPr sz="1600" dirty="0">
               <a:solidFill>
                 <a:schemeClr val="tx1"/>
               </a:solidFill>
-              <a:highlight>
-                <a:srgbClr val="FFFF00"/>
-              </a:highlight>
             </a:endParaRPr>
           </a:p>
         </p:txBody>
       </p:sp>
       <p:sp>
         <p:nvSpPr>
-          <p:cNvPr id="326" name="Google Shape;326;p47"/>
+          <p:cNvPr id="326" name="Google Shape;326;p47">
+            <a:extLst>
+              <a:ext uri="{FF2B5EF4-FFF2-40B4-BE49-F238E27FC236}">
+                <a16:creationId xmlns:a16="http://schemas.microsoft.com/office/drawing/2014/main" id="{8A14E227-935A-FBD8-6BD5-CBCE8D13EE84}"/>
+              </a:ext>
+            </a:extLst>
+          </p:cNvPr>
           <p:cNvSpPr txBox="1">
             <a:spLocks noGrp="1"/>
           </p:cNvSpPr>
@@ -8655,7 +8333,7 @@
           <p:cNvPr id="2" name="TextBox 1">
             <a:extLst>
               <a:ext uri="{FF2B5EF4-FFF2-40B4-BE49-F238E27FC236}">
-                <a16:creationId xmlns:a16="http://schemas.microsoft.com/office/drawing/2014/main" id="{DCC33EBB-1C9D-B9A9-88E6-F3466077417F}"/>
+                <a16:creationId xmlns:a16="http://schemas.microsoft.com/office/drawing/2014/main" id="{AE960589-7B12-D7F7-6452-D45441D8CA95}"/>
               </a:ext>
             </a:extLst>
           </p:cNvPr>
@@ -8664,8 +8342,8 @@
         </p:nvSpPr>
         <p:spPr>
           <a:xfrm>
-            <a:off x="-5842" y="1277369"/>
-            <a:ext cx="9144000" cy="307777"/>
+            <a:off x="-11684" y="1287037"/>
+            <a:ext cx="9144000" cy="338555"/>
           </a:xfrm>
           <a:prstGeom prst="rect">
             <a:avLst/>
@@ -8680,10 +8358,9 @@
           </a:bodyPr>
           <a:lstStyle/>
           <a:p>
-            <a:pPr algn="ctr"/>
             <a:r>
-              <a:rPr lang="en-US" b="1" dirty="0"/>
-              <a:t>Midterm Exam 1 - Written</a:t>
+              <a:rPr lang="en-US" dirty="0"/>
+              <a:t>Quiz</a:t>
             </a:r>
           </a:p>
         </p:txBody>
@@ -8693,7 +8370,7 @@
           <p:cNvPr id="3" name="TextBox 2">
             <a:extLst>
               <a:ext uri="{FF2B5EF4-FFF2-40B4-BE49-F238E27FC236}">
-                <a16:creationId xmlns:a16="http://schemas.microsoft.com/office/drawing/2014/main" id="{25A19346-2F9F-0DB9-0B08-CF872EB1D563}"/>
+                <a16:creationId xmlns:a16="http://schemas.microsoft.com/office/drawing/2014/main" id="{4FD526CA-3FDB-A5C2-36D9-69A3252D5E9A}"/>
               </a:ext>
             </a:extLst>
           </p:cNvPr>
@@ -8702,7 +8379,7 @@
         </p:nvSpPr>
         <p:spPr>
           <a:xfrm>
-            <a:off x="0" y="3313985"/>
+            <a:off x="0" y="3254487"/>
             <a:ext cx="9144000" cy="307777"/>
           </a:xfrm>
           <a:prstGeom prst="rect">
@@ -8720,8 +8397,15 @@
           <a:p>
             <a:r>
               <a:rPr lang="en-US" dirty="0"/>
-              <a:t>Practicum</a:t>
+              <a:t>Next </a:t>
             </a:r>
+            <a:r>
+              <a:rPr lang="en-US" dirty="0">
+                <a:sym typeface="Wingdings" panose="05000000000000000000" pitchFamily="2" charset="2"/>
+              </a:rPr>
+              <a:t> </a:t>
+            </a:r>
+            <a:endParaRPr lang="en-US" dirty="0"/>
           </a:p>
         </p:txBody>
       </p:sp>
@@ -8730,7 +8414,7 @@
           <p:cNvPr id="4" name="Google Shape;325;p47">
             <a:extLst>
               <a:ext uri="{FF2B5EF4-FFF2-40B4-BE49-F238E27FC236}">
-                <a16:creationId xmlns:a16="http://schemas.microsoft.com/office/drawing/2014/main" id="{11D0E6FB-E344-369B-CE83-B3CF5834F823}"/>
+                <a16:creationId xmlns:a16="http://schemas.microsoft.com/office/drawing/2014/main" id="{DC50CCB1-5AFE-1F52-8B22-87EB927965B4}"/>
               </a:ext>
             </a:extLst>
           </p:cNvPr>
@@ -8741,8 +8425,8 @@
         </p:nvSpPr>
         <p:spPr>
           <a:xfrm>
-            <a:off x="122842" y="3621762"/>
-            <a:ext cx="8478300" cy="1435054"/>
+            <a:off x="-5842" y="3562264"/>
+            <a:ext cx="9149842" cy="1494553"/>
           </a:xfrm>
           <a:prstGeom prst="rect">
             <a:avLst/>
@@ -9004,26 +8688,343 @@
             </a:lvl9pPr>
           </a:lstStyle>
           <a:p>
-            <a:pPr marL="342900" indent="-342900">
-              <a:spcAft>
-                <a:spcPts val="1600"/>
-              </a:spcAft>
+            <a:pPr marL="0" indent="0">
+              <a:spcAft>
+                <a:spcPts val="1600"/>
+              </a:spcAft>
+              <a:buNone/>
             </a:pPr>
             <a:r>
-              <a:rPr lang="en-US" sz="1600" dirty="0"/>
-              <a:t>Accept assignment Mid Exam 1 under Instructor -&gt; Alam -&gt; Exam</a:t>
+              <a:rPr lang="en-US" sz="1400" dirty="0"/>
+              <a:t>After completing the Quiz </a:t>
             </a:r>
-            <a:endParaRPr lang="en-US" sz="1600" dirty="0">
+          </a:p>
+          <a:p>
+            <a:pPr marL="342900" indent="-342900">
+              <a:spcAft>
+                <a:spcPts val="1600"/>
+              </a:spcAft>
+            </a:pPr>
+            <a:r>
+              <a:rPr lang="en-US" sz="1200" dirty="0"/>
+              <a:t>Accept GitHub Classroom Assignment for Unit 07</a:t>
+            </a:r>
+          </a:p>
+          <a:p>
+            <a:pPr marL="342900" indent="-342900">
+              <a:spcAft>
+                <a:spcPts val="1600"/>
+              </a:spcAft>
+            </a:pPr>
+            <a:r>
+              <a:rPr lang="en-US" sz="1200" dirty="0"/>
+              <a:t>Clone/pull GitHub classroom repo for Unit 07 under </a:t>
+            </a:r>
+            <a:r>
+              <a:rPr lang="en-US" sz="1200" dirty="0" err="1"/>
+              <a:t>softdevII</a:t>
+            </a:r>
+            <a:r>
+              <a:rPr lang="en-US" sz="1200" dirty="0"/>
+              <a:t> folder. Download Starter code from </a:t>
+            </a:r>
+            <a:r>
+              <a:rPr lang="en-US" sz="1200" dirty="0" err="1"/>
+              <a:t>myCourses</a:t>
+            </a:r>
+            <a:r>
+              <a:rPr lang="en-US" sz="1200" dirty="0"/>
+              <a:t> under Alam-&gt;Class Activities</a:t>
+            </a:r>
+            <a:endParaRPr lang="en-US" sz="1200" dirty="0">
               <a:solidFill>
                 <a:schemeClr val="tx1"/>
               </a:solidFill>
             </a:endParaRPr>
           </a:p>
+        </p:txBody>
+      </p:sp>
+      <p:sp>
+        <p:nvSpPr>
+          <p:cNvPr id="5" name="Google Shape;325;p47">
+            <a:extLst>
+              <a:ext uri="{FF2B5EF4-FFF2-40B4-BE49-F238E27FC236}">
+                <a16:creationId xmlns:a16="http://schemas.microsoft.com/office/drawing/2014/main" id="{7B85466C-6200-EE66-9396-7DECA70CDF53}"/>
+              </a:ext>
+            </a:extLst>
+          </p:cNvPr>
+          <p:cNvSpPr txBox="1">
+            <a:spLocks/>
+          </p:cNvSpPr>
+          <p:nvPr/>
+        </p:nvSpPr>
+        <p:spPr>
+          <a:xfrm>
+            <a:off x="4303618" y="1737005"/>
+            <a:ext cx="4516998" cy="1378400"/>
+          </a:xfrm>
+          <a:prstGeom prst="rect">
+            <a:avLst/>
+          </a:prstGeom>
+          <a:noFill/>
+          <a:ln>
+            <a:noFill/>
+          </a:ln>
+        </p:spPr>
+        <p:txBody>
+          <a:bodyPr spcFirstLastPara="1" wrap="square" lIns="91425" tIns="91425" rIns="91425" bIns="91425" anchor="ctr" anchorCtr="0">
+            <a:noAutofit/>
+          </a:bodyPr>
+          <a:lstStyle>
+            <a:defPPr marR="0" lvl="0" algn="l" rtl="0">
+              <a:lnSpc>
+                <a:spcPct val="100000"/>
+              </a:lnSpc>
+              <a:spcBef>
+                <a:spcPts val="0"/>
+              </a:spcBef>
+              <a:spcAft>
+                <a:spcPts val="0"/>
+              </a:spcAft>
+            </a:defPPr>
+            <a:lvl1pPr marL="457200" marR="0" lvl="0" indent="-311150" algn="l" rtl="0">
+              <a:lnSpc>
+                <a:spcPct val="115000"/>
+              </a:lnSpc>
+              <a:spcBef>
+                <a:spcPts val="0"/>
+              </a:spcBef>
+              <a:spcAft>
+                <a:spcPts val="0"/>
+              </a:spcAft>
+              <a:buClr>
+                <a:schemeClr val="dk2"/>
+              </a:buClr>
+              <a:buSzPts val="1300"/>
+              <a:buFont typeface="Roboto"/>
+              <a:buChar char="●"/>
+              <a:defRPr sz="1300" b="0" i="0" u="none" strike="noStrike" cap="none">
+                <a:solidFill>
+                  <a:schemeClr val="dk2"/>
+                </a:solidFill>
+                <a:latin typeface="Roboto"/>
+                <a:ea typeface="Roboto"/>
+                <a:cs typeface="Roboto"/>
+                <a:sym typeface="Roboto"/>
+              </a:defRPr>
+            </a:lvl1pPr>
+            <a:lvl2pPr marL="914400" marR="0" lvl="1" indent="-298450" algn="l" rtl="0">
+              <a:lnSpc>
+                <a:spcPct val="115000"/>
+              </a:lnSpc>
+              <a:spcBef>
+                <a:spcPts val="1600"/>
+              </a:spcBef>
+              <a:spcAft>
+                <a:spcPts val="0"/>
+              </a:spcAft>
+              <a:buClr>
+                <a:schemeClr val="dk2"/>
+              </a:buClr>
+              <a:buSzPts val="1100"/>
+              <a:buFont typeface="Roboto"/>
+              <a:buChar char="○"/>
+              <a:defRPr sz="1100" b="0" i="0" u="none" strike="noStrike" cap="none">
+                <a:solidFill>
+                  <a:schemeClr val="dk2"/>
+                </a:solidFill>
+                <a:latin typeface="Roboto"/>
+                <a:ea typeface="Roboto"/>
+                <a:cs typeface="Roboto"/>
+                <a:sym typeface="Roboto"/>
+              </a:defRPr>
+            </a:lvl2pPr>
+            <a:lvl3pPr marL="1371600" marR="0" lvl="2" indent="-298450" algn="l" rtl="0">
+              <a:lnSpc>
+                <a:spcPct val="115000"/>
+              </a:lnSpc>
+              <a:spcBef>
+                <a:spcPts val="1600"/>
+              </a:spcBef>
+              <a:spcAft>
+                <a:spcPts val="0"/>
+              </a:spcAft>
+              <a:buClr>
+                <a:schemeClr val="dk2"/>
+              </a:buClr>
+              <a:buSzPts val="1100"/>
+              <a:buFont typeface="Roboto"/>
+              <a:buChar char="■"/>
+              <a:defRPr sz="1100" b="0" i="0" u="none" strike="noStrike" cap="none">
+                <a:solidFill>
+                  <a:schemeClr val="dk2"/>
+                </a:solidFill>
+                <a:latin typeface="Roboto"/>
+                <a:ea typeface="Roboto"/>
+                <a:cs typeface="Roboto"/>
+                <a:sym typeface="Roboto"/>
+              </a:defRPr>
+            </a:lvl3pPr>
+            <a:lvl4pPr marL="1828800" marR="0" lvl="3" indent="-298450" algn="l" rtl="0">
+              <a:lnSpc>
+                <a:spcPct val="115000"/>
+              </a:lnSpc>
+              <a:spcBef>
+                <a:spcPts val="1600"/>
+              </a:spcBef>
+              <a:spcAft>
+                <a:spcPts val="0"/>
+              </a:spcAft>
+              <a:buClr>
+                <a:schemeClr val="dk2"/>
+              </a:buClr>
+              <a:buSzPts val="1100"/>
+              <a:buFont typeface="Roboto"/>
+              <a:buChar char="●"/>
+              <a:defRPr sz="1100" b="0" i="0" u="none" strike="noStrike" cap="none">
+                <a:solidFill>
+                  <a:schemeClr val="dk2"/>
+                </a:solidFill>
+                <a:latin typeface="Roboto"/>
+                <a:ea typeface="Roboto"/>
+                <a:cs typeface="Roboto"/>
+                <a:sym typeface="Roboto"/>
+              </a:defRPr>
+            </a:lvl4pPr>
+            <a:lvl5pPr marL="2286000" marR="0" lvl="4" indent="-298450" algn="l" rtl="0">
+              <a:lnSpc>
+                <a:spcPct val="115000"/>
+              </a:lnSpc>
+              <a:spcBef>
+                <a:spcPts val="1600"/>
+              </a:spcBef>
+              <a:spcAft>
+                <a:spcPts val="0"/>
+              </a:spcAft>
+              <a:buClr>
+                <a:schemeClr val="dk2"/>
+              </a:buClr>
+              <a:buSzPts val="1100"/>
+              <a:buFont typeface="Roboto"/>
+              <a:buChar char="○"/>
+              <a:defRPr sz="1100" b="0" i="0" u="none" strike="noStrike" cap="none">
+                <a:solidFill>
+                  <a:schemeClr val="dk2"/>
+                </a:solidFill>
+                <a:latin typeface="Roboto"/>
+                <a:ea typeface="Roboto"/>
+                <a:cs typeface="Roboto"/>
+                <a:sym typeface="Roboto"/>
+              </a:defRPr>
+            </a:lvl5pPr>
+            <a:lvl6pPr marL="2743200" marR="0" lvl="5" indent="-298450" algn="l" rtl="0">
+              <a:lnSpc>
+                <a:spcPct val="115000"/>
+              </a:lnSpc>
+              <a:spcBef>
+                <a:spcPts val="1600"/>
+              </a:spcBef>
+              <a:spcAft>
+                <a:spcPts val="0"/>
+              </a:spcAft>
+              <a:buClr>
+                <a:schemeClr val="dk2"/>
+              </a:buClr>
+              <a:buSzPts val="1100"/>
+              <a:buFont typeface="Roboto"/>
+              <a:buChar char="■"/>
+              <a:defRPr sz="1100" b="0" i="0" u="none" strike="noStrike" cap="none">
+                <a:solidFill>
+                  <a:schemeClr val="dk2"/>
+                </a:solidFill>
+                <a:latin typeface="Roboto"/>
+                <a:ea typeface="Roboto"/>
+                <a:cs typeface="Roboto"/>
+                <a:sym typeface="Roboto"/>
+              </a:defRPr>
+            </a:lvl6pPr>
+            <a:lvl7pPr marL="3200400" marR="0" lvl="6" indent="-298450" algn="l" rtl="0">
+              <a:lnSpc>
+                <a:spcPct val="115000"/>
+              </a:lnSpc>
+              <a:spcBef>
+                <a:spcPts val="1600"/>
+              </a:spcBef>
+              <a:spcAft>
+                <a:spcPts val="0"/>
+              </a:spcAft>
+              <a:buClr>
+                <a:schemeClr val="dk2"/>
+              </a:buClr>
+              <a:buSzPts val="1100"/>
+              <a:buFont typeface="Roboto"/>
+              <a:buChar char="●"/>
+              <a:defRPr sz="1100" b="0" i="0" u="none" strike="noStrike" cap="none">
+                <a:solidFill>
+                  <a:schemeClr val="dk2"/>
+                </a:solidFill>
+                <a:latin typeface="Roboto"/>
+                <a:ea typeface="Roboto"/>
+                <a:cs typeface="Roboto"/>
+                <a:sym typeface="Roboto"/>
+              </a:defRPr>
+            </a:lvl7pPr>
+            <a:lvl8pPr marL="3657600" marR="0" lvl="7" indent="-298450" algn="l" rtl="0">
+              <a:lnSpc>
+                <a:spcPct val="115000"/>
+              </a:lnSpc>
+              <a:spcBef>
+                <a:spcPts val="1600"/>
+              </a:spcBef>
+              <a:spcAft>
+                <a:spcPts val="0"/>
+              </a:spcAft>
+              <a:buClr>
+                <a:schemeClr val="dk2"/>
+              </a:buClr>
+              <a:buSzPts val="1100"/>
+              <a:buFont typeface="Roboto"/>
+              <a:buChar char="○"/>
+              <a:defRPr sz="1100" b="0" i="0" u="none" strike="noStrike" cap="none">
+                <a:solidFill>
+                  <a:schemeClr val="dk2"/>
+                </a:solidFill>
+                <a:latin typeface="Roboto"/>
+                <a:ea typeface="Roboto"/>
+                <a:cs typeface="Roboto"/>
+                <a:sym typeface="Roboto"/>
+              </a:defRPr>
+            </a:lvl8pPr>
+            <a:lvl9pPr marL="4114800" marR="0" lvl="8" indent="-298450" algn="l" rtl="0">
+              <a:lnSpc>
+                <a:spcPct val="115000"/>
+              </a:lnSpc>
+              <a:spcBef>
+                <a:spcPts val="1600"/>
+              </a:spcBef>
+              <a:spcAft>
+                <a:spcPts val="1600"/>
+              </a:spcAft>
+              <a:buClr>
+                <a:schemeClr val="dk2"/>
+              </a:buClr>
+              <a:buSzPts val="1100"/>
+              <a:buFont typeface="Roboto"/>
+              <a:buChar char="■"/>
+              <a:defRPr sz="1100" b="0" i="0" u="none" strike="noStrike" cap="none">
+                <a:solidFill>
+                  <a:schemeClr val="dk2"/>
+                </a:solidFill>
+                <a:latin typeface="Roboto"/>
+                <a:ea typeface="Roboto"/>
+                <a:cs typeface="Roboto"/>
+                <a:sym typeface="Roboto"/>
+              </a:defRPr>
+            </a:lvl9pPr>
+          </a:lstStyle>
           <a:p>
-            <a:pPr marL="342900" indent="-342900">
-              <a:spcAft>
-                <a:spcPts val="1600"/>
-              </a:spcAft>
+            <a:pPr marL="146050" indent="0">
+              <a:buNone/>
             </a:pPr>
             <a:r>
               <a:rPr lang="en-US" sz="1600" dirty="0">
@@ -9031,11 +9032,28 @@
                   <a:schemeClr val="tx1"/>
                 </a:solidFill>
               </a:rPr>
-              <a:t>Clone the repository for </a:t>
+              <a:t>Quiz 6.3 Heap</a:t>
+            </a:r>
+          </a:p>
+          <a:p>
+            <a:pPr marL="146050" indent="0">
+              <a:buNone/>
+            </a:pPr>
+            <a:r>
+              <a:rPr lang="en-US" sz="1600" dirty="0">
+                <a:solidFill>
+                  <a:schemeClr val="tx1"/>
+                </a:solidFill>
+              </a:rPr>
+              <a:t>Password - </a:t>
             </a:r>
             <a:r>
-              <a:rPr lang="en-US" sz="1600" dirty="0"/>
-              <a:t>Mid Exam 1 </a:t>
+              <a:rPr lang="en-US" sz="1600" dirty="0" err="1">
+                <a:solidFill>
+                  <a:schemeClr val="tx1"/>
+                </a:solidFill>
+              </a:rPr>
+              <a:t>heapingHelping</a:t>
             </a:r>
             <a:endParaRPr lang="en-US" sz="1600" dirty="0">
               <a:solidFill>
@@ -9048,7 +9066,7 @@
     </p:spTree>
     <p:extLst>
       <p:ext uri="{BB962C8B-B14F-4D97-AF65-F5344CB8AC3E}">
-        <p14:creationId xmlns:p14="http://schemas.microsoft.com/office/powerpoint/2010/main" val="943055912"/>
+        <p14:creationId xmlns:p14="http://schemas.microsoft.com/office/powerpoint/2010/main" val="674272117"/>
       </p:ext>
     </p:extLst>
   </p:cSld>

--- a/Presentation/Announcement.pptx
+++ b/Presentation/Announcement.pptx
@@ -6626,23 +6626,15 @@
                   <a:schemeClr val="tx1"/>
                 </a:solidFill>
               </a:rPr>
-              <a:t>Password - </a:t>
+              <a:t>Password -</a:t>
             </a:r>
             <a:r>
-              <a:rPr lang="en-US" sz="3200" b="1" dirty="0" err="1">
+              <a:rPr lang="en-US" sz="3200" b="1">
                 <a:solidFill>
                   <a:schemeClr val="tx1"/>
                 </a:solidFill>
               </a:rPr>
               <a:t>CompareIterators</a:t>
-            </a:r>
-            <a:r>
-              <a:rPr lang="en-US" sz="3200" b="1" dirty="0">
-                <a:solidFill>
-                  <a:schemeClr val="tx1"/>
-                </a:solidFill>
-              </a:rPr>
-              <a:t>!</a:t>
             </a:r>
             <a:endParaRPr sz="3200" b="1" dirty="0">
               <a:solidFill>

--- a/Presentation/Announcement.pptx
+++ b/Presentation/Announcement.pptx
@@ -8,10 +8,10 @@
     <p:notesMasterId r:id="rId14"/>
   </p:notesMasterIdLst>
   <p:sldIdLst>
-    <p:sldId id="278" r:id="rId2"/>
-    <p:sldId id="276" r:id="rId3"/>
-    <p:sldId id="286" r:id="rId4"/>
-    <p:sldId id="281" r:id="rId5"/>
+    <p:sldId id="276" r:id="rId2"/>
+    <p:sldId id="286" r:id="rId3"/>
+    <p:sldId id="281" r:id="rId4"/>
+    <p:sldId id="278" r:id="rId5"/>
     <p:sldId id="287" r:id="rId6"/>
     <p:sldId id="285" r:id="rId7"/>
     <p:sldId id="284" r:id="rId8"/>
@@ -825,11 +825,6 @@
         </p:txBody>
       </p:sp>
     </p:spTree>
-    <p:extLst>
-      <p:ext uri="{BB962C8B-B14F-4D97-AF65-F5344CB8AC3E}">
-        <p14:creationId xmlns:p14="http://schemas.microsoft.com/office/powerpoint/2010/main" val="4097390636"/>
-      </p:ext>
-    </p:extLst>
   </p:cSld>
   <p:clrMapOvr>
     <a:masterClrMapping/>
@@ -1151,104 +1146,6 @@
   <p:cSld>
     <p:spTree>
       <p:nvGrpSpPr>
-        <p:cNvPr id="1" name="Shape 320"/>
-        <p:cNvGrpSpPr/>
-        <p:nvPr/>
-      </p:nvGrpSpPr>
-      <p:grpSpPr>
-        <a:xfrm>
-          <a:off x="0" y="0"/>
-          <a:ext cx="0" cy="0"/>
-          <a:chOff x="0" y="0"/>
-          <a:chExt cx="0" cy="0"/>
-        </a:xfrm>
-      </p:grpSpPr>
-      <p:sp>
-        <p:nvSpPr>
-          <p:cNvPr id="321" name="Google Shape;321;g8f52c9b70a_3_0:notes"/>
-          <p:cNvSpPr>
-            <a:spLocks noGrp="1" noRot="1" noChangeAspect="1"/>
-          </p:cNvSpPr>
-          <p:nvPr>
-            <p:ph type="sldImg" idx="2"/>
-          </p:nvPr>
-        </p:nvSpPr>
-        <p:spPr>
-          <a:xfrm>
-            <a:off x="406400" y="696913"/>
-            <a:ext cx="6197600" cy="3486150"/>
-          </a:xfrm>
-          <a:custGeom>
-            <a:avLst/>
-            <a:gdLst/>
-            <a:ahLst/>
-            <a:cxnLst/>
-            <a:rect l="l" t="t" r="r" b="b"/>
-            <a:pathLst>
-              <a:path w="120000" h="120000" extrusionOk="0">
-                <a:moveTo>
-                  <a:pt x="0" y="0"/>
-                </a:moveTo>
-                <a:lnTo>
-                  <a:pt x="120000" y="0"/>
-                </a:lnTo>
-                <a:lnTo>
-                  <a:pt x="120000" y="120000"/>
-                </a:lnTo>
-                <a:lnTo>
-                  <a:pt x="0" y="120000"/>
-                </a:lnTo>
-                <a:close/>
-              </a:path>
-            </a:pathLst>
-          </a:custGeom>
-        </p:spPr>
-      </p:sp>
-      <p:sp>
-        <p:nvSpPr>
-          <p:cNvPr id="322" name="Google Shape;322;g8f52c9b70a_3_0:notes"/>
-          <p:cNvSpPr txBox="1">
-            <a:spLocks noGrp="1"/>
-          </p:cNvSpPr>
-          <p:nvPr>
-            <p:ph type="body" idx="1"/>
-          </p:nvPr>
-        </p:nvSpPr>
-        <p:spPr>
-          <a:xfrm>
-            <a:off x="701040" y="4415790"/>
-            <a:ext cx="5608320" cy="4183380"/>
-          </a:xfrm>
-          <a:prstGeom prst="rect">
-            <a:avLst/>
-          </a:prstGeom>
-        </p:spPr>
-        <p:txBody>
-          <a:bodyPr spcFirstLastPara="1" wrap="square" lIns="93162" tIns="93162" rIns="93162" bIns="93162" anchor="t" anchorCtr="0">
-            <a:noAutofit/>
-          </a:bodyPr>
-          <a:lstStyle/>
-          <a:p>
-            <a:pPr marL="0" indent="0">
-              <a:buNone/>
-            </a:pPr>
-            <a:endParaRPr/>
-          </a:p>
-        </p:txBody>
-      </p:sp>
-    </p:spTree>
-  </p:cSld>
-  <p:clrMapOvr>
-    <a:masterClrMapping/>
-  </p:clrMapOvr>
-</p:notes>
-</file>
-
-<file path=ppt/notesSlides/notesSlide3.xml><?xml version="1.0" encoding="utf-8"?>
-<p:notes xmlns:a="http://schemas.openxmlformats.org/drawingml/2006/main" xmlns:r="http://schemas.openxmlformats.org/officeDocument/2006/relationships" xmlns:p="http://schemas.openxmlformats.org/presentationml/2006/main" showMasterSp="0" showMasterPhAnim="0">
-  <p:cSld>
-    <p:spTree>
-      <p:nvGrpSpPr>
         <p:cNvPr id="1" name="Shape 320">
           <a:extLst>
             <a:ext uri="{FF2B5EF4-FFF2-40B4-BE49-F238E27FC236}">
@@ -1365,6 +1262,109 @@
 </p:notes>
 </file>
 
+<file path=ppt/notesSlides/notesSlide3.xml><?xml version="1.0" encoding="utf-8"?>
+<p:notes xmlns:a="http://schemas.openxmlformats.org/drawingml/2006/main" xmlns:r="http://schemas.openxmlformats.org/officeDocument/2006/relationships" xmlns:p="http://schemas.openxmlformats.org/presentationml/2006/main" showMasterSp="0" showMasterPhAnim="0">
+  <p:cSld>
+    <p:spTree>
+      <p:nvGrpSpPr>
+        <p:cNvPr id="1" name="Shape 320"/>
+        <p:cNvGrpSpPr/>
+        <p:nvPr/>
+      </p:nvGrpSpPr>
+      <p:grpSpPr>
+        <a:xfrm>
+          <a:off x="0" y="0"/>
+          <a:ext cx="0" cy="0"/>
+          <a:chOff x="0" y="0"/>
+          <a:chExt cx="0" cy="0"/>
+        </a:xfrm>
+      </p:grpSpPr>
+      <p:sp>
+        <p:nvSpPr>
+          <p:cNvPr id="321" name="Google Shape;321;g8f52c9b70a_3_0:notes"/>
+          <p:cNvSpPr>
+            <a:spLocks noGrp="1" noRot="1" noChangeAspect="1"/>
+          </p:cNvSpPr>
+          <p:nvPr>
+            <p:ph type="sldImg" idx="2"/>
+          </p:nvPr>
+        </p:nvSpPr>
+        <p:spPr>
+          <a:xfrm>
+            <a:off x="406400" y="696913"/>
+            <a:ext cx="6197600" cy="3486150"/>
+          </a:xfrm>
+          <a:custGeom>
+            <a:avLst/>
+            <a:gdLst/>
+            <a:ahLst/>
+            <a:cxnLst/>
+            <a:rect l="l" t="t" r="r" b="b"/>
+            <a:pathLst>
+              <a:path w="120000" h="120000" extrusionOk="0">
+                <a:moveTo>
+                  <a:pt x="0" y="0"/>
+                </a:moveTo>
+                <a:lnTo>
+                  <a:pt x="120000" y="0"/>
+                </a:lnTo>
+                <a:lnTo>
+                  <a:pt x="120000" y="120000"/>
+                </a:lnTo>
+                <a:lnTo>
+                  <a:pt x="0" y="120000"/>
+                </a:lnTo>
+                <a:close/>
+              </a:path>
+            </a:pathLst>
+          </a:custGeom>
+        </p:spPr>
+      </p:sp>
+      <p:sp>
+        <p:nvSpPr>
+          <p:cNvPr id="322" name="Google Shape;322;g8f52c9b70a_3_0:notes"/>
+          <p:cNvSpPr txBox="1">
+            <a:spLocks noGrp="1"/>
+          </p:cNvSpPr>
+          <p:nvPr>
+            <p:ph type="body" idx="1"/>
+          </p:nvPr>
+        </p:nvSpPr>
+        <p:spPr>
+          <a:xfrm>
+            <a:off x="701040" y="4415790"/>
+            <a:ext cx="5608320" cy="4183380"/>
+          </a:xfrm>
+          <a:prstGeom prst="rect">
+            <a:avLst/>
+          </a:prstGeom>
+        </p:spPr>
+        <p:txBody>
+          <a:bodyPr spcFirstLastPara="1" wrap="square" lIns="93162" tIns="93162" rIns="93162" bIns="93162" anchor="t" anchorCtr="0">
+            <a:noAutofit/>
+          </a:bodyPr>
+          <a:lstStyle/>
+          <a:p>
+            <a:pPr marL="0" indent="0">
+              <a:buNone/>
+            </a:pPr>
+            <a:endParaRPr/>
+          </a:p>
+        </p:txBody>
+      </p:sp>
+    </p:spTree>
+    <p:extLst>
+      <p:ext uri="{BB962C8B-B14F-4D97-AF65-F5344CB8AC3E}">
+        <p14:creationId xmlns:p14="http://schemas.microsoft.com/office/powerpoint/2010/main" val="2158134825"/>
+      </p:ext>
+    </p:extLst>
+  </p:cSld>
+  <p:clrMapOvr>
+    <a:masterClrMapping/>
+  </p:clrMapOvr>
+</p:notes>
+</file>
+
 <file path=ppt/notesSlides/notesSlide4.xml><?xml version="1.0" encoding="utf-8"?>
 <p:notes xmlns:a="http://schemas.openxmlformats.org/drawingml/2006/main" xmlns:r="http://schemas.openxmlformats.org/officeDocument/2006/relationships" xmlns:p="http://schemas.openxmlformats.org/presentationml/2006/main" showMasterSp="0" showMasterPhAnim="0">
   <p:cSld>
@@ -1458,7 +1458,7 @@
     </p:spTree>
     <p:extLst>
       <p:ext uri="{BB962C8B-B14F-4D97-AF65-F5344CB8AC3E}">
-        <p14:creationId xmlns:p14="http://schemas.microsoft.com/office/powerpoint/2010/main" val="2158134825"/>
+        <p14:creationId xmlns:p14="http://schemas.microsoft.com/office/powerpoint/2010/main" val="4097390636"/>
       </p:ext>
     </p:extLst>
   </p:cSld>
@@ -6553,1035 +6553,6 @@
         </p:nvSpPr>
         <p:spPr>
           <a:xfrm>
-            <a:off x="314621" y="235914"/>
-            <a:ext cx="8520600" cy="623700"/>
-          </a:xfrm>
-          <a:prstGeom prst="rect">
-            <a:avLst/>
-          </a:prstGeom>
-        </p:spPr>
-        <p:txBody>
-          <a:bodyPr spcFirstLastPara="1" wrap="square" lIns="91425" tIns="91425" rIns="91425" bIns="91425" anchor="t" anchorCtr="0">
-            <a:noAutofit/>
-          </a:bodyPr>
-          <a:lstStyle/>
-          <a:p>
-            <a:pPr marL="0" lvl="0" indent="0" algn="ctr" rtl="0">
-              <a:spcBef>
-                <a:spcPts val="0"/>
-              </a:spcBef>
-              <a:spcAft>
-                <a:spcPts val="0"/>
-              </a:spcAft>
-              <a:buNone/>
-            </a:pPr>
-            <a:r>
-              <a:rPr lang="en-US" dirty="0"/>
-              <a:t>GCIS – Software Development and Problem Solving</a:t>
-            </a:r>
-            <a:endParaRPr dirty="0"/>
-          </a:p>
-        </p:txBody>
-      </p:sp>
-      <p:sp>
-        <p:nvSpPr>
-          <p:cNvPr id="325" name="Google Shape;325;p47"/>
-          <p:cNvSpPr txBox="1">
-            <a:spLocks noGrp="1"/>
-          </p:cNvSpPr>
-          <p:nvPr>
-            <p:ph type="body" idx="1"/>
-          </p:nvPr>
-        </p:nvSpPr>
-        <p:spPr>
-          <a:xfrm>
-            <a:off x="0" y="1856257"/>
-            <a:ext cx="9149842" cy="1226403"/>
-          </a:xfrm>
-          <a:prstGeom prst="rect">
-            <a:avLst/>
-          </a:prstGeom>
-        </p:spPr>
-        <p:txBody>
-          <a:bodyPr spcFirstLastPara="1" wrap="square" lIns="91425" tIns="91425" rIns="91425" bIns="91425" anchor="ctr" anchorCtr="0">
-            <a:noAutofit/>
-          </a:bodyPr>
-          <a:lstStyle/>
-          <a:p>
-            <a:pPr marL="146050" indent="0" algn="ctr">
-              <a:buNone/>
-            </a:pPr>
-            <a:r>
-              <a:rPr lang="en-US" sz="2400" dirty="0"/>
-              <a:t>Take Quiz – Midterm Exam 2</a:t>
-            </a:r>
-          </a:p>
-          <a:p>
-            <a:pPr marL="146050" indent="0" algn="ctr">
-              <a:buNone/>
-            </a:pPr>
-            <a:r>
-              <a:rPr lang="en-US" sz="3200" b="1" dirty="0">
-                <a:solidFill>
-                  <a:schemeClr val="tx1"/>
-                </a:solidFill>
-              </a:rPr>
-              <a:t>Password -</a:t>
-            </a:r>
-            <a:r>
-              <a:rPr lang="en-US" sz="3200" b="1">
-                <a:solidFill>
-                  <a:schemeClr val="tx1"/>
-                </a:solidFill>
-              </a:rPr>
-              <a:t>CompareIterators</a:t>
-            </a:r>
-            <a:endParaRPr sz="3200" b="1" dirty="0">
-              <a:solidFill>
-                <a:schemeClr val="tx1"/>
-              </a:solidFill>
-              <a:highlight>
-                <a:srgbClr val="FFFF00"/>
-              </a:highlight>
-            </a:endParaRPr>
-          </a:p>
-        </p:txBody>
-      </p:sp>
-      <p:sp>
-        <p:nvSpPr>
-          <p:cNvPr id="326" name="Google Shape;326;p47"/>
-          <p:cNvSpPr txBox="1">
-            <a:spLocks noGrp="1"/>
-          </p:cNvSpPr>
-          <p:nvPr>
-            <p:ph type="sldNum" idx="12"/>
-          </p:nvPr>
-        </p:nvSpPr>
-        <p:spPr>
-          <a:xfrm>
-            <a:off x="8472458" y="4663217"/>
-            <a:ext cx="548700" cy="393600"/>
-          </a:xfrm>
-          <a:prstGeom prst="rect">
-            <a:avLst/>
-          </a:prstGeom>
-        </p:spPr>
-        <p:txBody>
-          <a:bodyPr spcFirstLastPara="1" wrap="square" lIns="91425" tIns="91425" rIns="91425" bIns="91425" anchor="ctr" anchorCtr="0">
-            <a:noAutofit/>
-          </a:bodyPr>
-          <a:lstStyle/>
-          <a:p>
-            <a:pPr marL="0" lvl="0" indent="0" algn="r" rtl="0">
-              <a:spcBef>
-                <a:spcPts val="0"/>
-              </a:spcBef>
-              <a:spcAft>
-                <a:spcPts val="0"/>
-              </a:spcAft>
-              <a:buNone/>
-            </a:pPr>
-            <a:fld id="{00000000-1234-1234-1234-123412341234}" type="slidenum">
-              <a:rPr lang="en"/>
-              <a:t>1</a:t>
-            </a:fld>
-            <a:endParaRPr/>
-          </a:p>
-        </p:txBody>
-      </p:sp>
-      <p:sp>
-        <p:nvSpPr>
-          <p:cNvPr id="2" name="TextBox 1">
-            <a:extLst>
-              <a:ext uri="{FF2B5EF4-FFF2-40B4-BE49-F238E27FC236}">
-                <a16:creationId xmlns:a16="http://schemas.microsoft.com/office/drawing/2014/main" id="{DCC33EBB-1C9D-B9A9-88E6-F3466077417F}"/>
-              </a:ext>
-            </a:extLst>
-          </p:cNvPr>
-          <p:cNvSpPr txBox="1"/>
-          <p:nvPr/>
-        </p:nvSpPr>
-        <p:spPr>
-          <a:xfrm>
-            <a:off x="-5842" y="1277369"/>
-            <a:ext cx="9144000" cy="307777"/>
-          </a:xfrm>
-          <a:prstGeom prst="rect">
-            <a:avLst/>
-          </a:prstGeom>
-          <a:solidFill>
-            <a:srgbClr val="FFC000"/>
-          </a:solidFill>
-        </p:spPr>
-        <p:txBody>
-          <a:bodyPr wrap="square" rtlCol="0">
-            <a:spAutoFit/>
-          </a:bodyPr>
-          <a:lstStyle/>
-          <a:p>
-            <a:pPr algn="ctr"/>
-            <a:r>
-              <a:rPr lang="en-US" b="1" dirty="0"/>
-              <a:t>Midterm Exam 2 - Written</a:t>
-            </a:r>
-          </a:p>
-        </p:txBody>
-      </p:sp>
-      <p:sp>
-        <p:nvSpPr>
-          <p:cNvPr id="3" name="TextBox 2">
-            <a:extLst>
-              <a:ext uri="{FF2B5EF4-FFF2-40B4-BE49-F238E27FC236}">
-                <a16:creationId xmlns:a16="http://schemas.microsoft.com/office/drawing/2014/main" id="{25A19346-2F9F-0DB9-0B08-CF872EB1D563}"/>
-              </a:ext>
-            </a:extLst>
-          </p:cNvPr>
-          <p:cNvSpPr txBox="1"/>
-          <p:nvPr/>
-        </p:nvSpPr>
-        <p:spPr>
-          <a:xfrm>
-            <a:off x="0" y="3313985"/>
-            <a:ext cx="9144000" cy="307777"/>
-          </a:xfrm>
-          <a:prstGeom prst="rect">
-            <a:avLst/>
-          </a:prstGeom>
-          <a:solidFill>
-            <a:srgbClr val="FFC000"/>
-          </a:solidFill>
-        </p:spPr>
-        <p:txBody>
-          <a:bodyPr wrap="square" rtlCol="0">
-            <a:spAutoFit/>
-          </a:bodyPr>
-          <a:lstStyle/>
-          <a:p>
-            <a:r>
-              <a:rPr lang="en-US" dirty="0"/>
-              <a:t>Practicum</a:t>
-            </a:r>
-          </a:p>
-        </p:txBody>
-      </p:sp>
-      <p:sp>
-        <p:nvSpPr>
-          <p:cNvPr id="4" name="Google Shape;325;p47">
-            <a:extLst>
-              <a:ext uri="{FF2B5EF4-FFF2-40B4-BE49-F238E27FC236}">
-                <a16:creationId xmlns:a16="http://schemas.microsoft.com/office/drawing/2014/main" id="{11D0E6FB-E344-369B-CE83-B3CF5834F823}"/>
-              </a:ext>
-            </a:extLst>
-          </p:cNvPr>
-          <p:cNvSpPr txBox="1">
-            <a:spLocks/>
-          </p:cNvSpPr>
-          <p:nvPr/>
-        </p:nvSpPr>
-        <p:spPr>
-          <a:xfrm>
-            <a:off x="122842" y="3621762"/>
-            <a:ext cx="8478300" cy="1435054"/>
-          </a:xfrm>
-          <a:prstGeom prst="rect">
-            <a:avLst/>
-          </a:prstGeom>
-          <a:noFill/>
-          <a:ln>
-            <a:noFill/>
-          </a:ln>
-        </p:spPr>
-        <p:txBody>
-          <a:bodyPr spcFirstLastPara="1" wrap="square" lIns="91425" tIns="91425" rIns="91425" bIns="91425" anchor="ctr" anchorCtr="0">
-            <a:noAutofit/>
-          </a:bodyPr>
-          <a:lstStyle>
-            <a:defPPr marR="0" lvl="0" algn="l" rtl="0">
-              <a:lnSpc>
-                <a:spcPct val="100000"/>
-              </a:lnSpc>
-              <a:spcBef>
-                <a:spcPts val="0"/>
-              </a:spcBef>
-              <a:spcAft>
-                <a:spcPts val="0"/>
-              </a:spcAft>
-            </a:defPPr>
-            <a:lvl1pPr marL="457200" marR="0" lvl="0" indent="-311150" algn="l" rtl="0">
-              <a:lnSpc>
-                <a:spcPct val="115000"/>
-              </a:lnSpc>
-              <a:spcBef>
-                <a:spcPts val="0"/>
-              </a:spcBef>
-              <a:spcAft>
-                <a:spcPts val="0"/>
-              </a:spcAft>
-              <a:buClr>
-                <a:schemeClr val="dk2"/>
-              </a:buClr>
-              <a:buSzPts val="1300"/>
-              <a:buFont typeface="Roboto"/>
-              <a:buChar char="●"/>
-              <a:defRPr sz="1300" b="0" i="0" u="none" strike="noStrike" cap="none">
-                <a:solidFill>
-                  <a:schemeClr val="dk2"/>
-                </a:solidFill>
-                <a:latin typeface="Roboto"/>
-                <a:ea typeface="Roboto"/>
-                <a:cs typeface="Roboto"/>
-                <a:sym typeface="Roboto"/>
-              </a:defRPr>
-            </a:lvl1pPr>
-            <a:lvl2pPr marL="914400" marR="0" lvl="1" indent="-298450" algn="l" rtl="0">
-              <a:lnSpc>
-                <a:spcPct val="115000"/>
-              </a:lnSpc>
-              <a:spcBef>
-                <a:spcPts val="1600"/>
-              </a:spcBef>
-              <a:spcAft>
-                <a:spcPts val="0"/>
-              </a:spcAft>
-              <a:buClr>
-                <a:schemeClr val="dk2"/>
-              </a:buClr>
-              <a:buSzPts val="1100"/>
-              <a:buFont typeface="Roboto"/>
-              <a:buChar char="○"/>
-              <a:defRPr sz="1100" b="0" i="0" u="none" strike="noStrike" cap="none">
-                <a:solidFill>
-                  <a:schemeClr val="dk2"/>
-                </a:solidFill>
-                <a:latin typeface="Roboto"/>
-                <a:ea typeface="Roboto"/>
-                <a:cs typeface="Roboto"/>
-                <a:sym typeface="Roboto"/>
-              </a:defRPr>
-            </a:lvl2pPr>
-            <a:lvl3pPr marL="1371600" marR="0" lvl="2" indent="-298450" algn="l" rtl="0">
-              <a:lnSpc>
-                <a:spcPct val="115000"/>
-              </a:lnSpc>
-              <a:spcBef>
-                <a:spcPts val="1600"/>
-              </a:spcBef>
-              <a:spcAft>
-                <a:spcPts val="0"/>
-              </a:spcAft>
-              <a:buClr>
-                <a:schemeClr val="dk2"/>
-              </a:buClr>
-              <a:buSzPts val="1100"/>
-              <a:buFont typeface="Roboto"/>
-              <a:buChar char="■"/>
-              <a:defRPr sz="1100" b="0" i="0" u="none" strike="noStrike" cap="none">
-                <a:solidFill>
-                  <a:schemeClr val="dk2"/>
-                </a:solidFill>
-                <a:latin typeface="Roboto"/>
-                <a:ea typeface="Roboto"/>
-                <a:cs typeface="Roboto"/>
-                <a:sym typeface="Roboto"/>
-              </a:defRPr>
-            </a:lvl3pPr>
-            <a:lvl4pPr marL="1828800" marR="0" lvl="3" indent="-298450" algn="l" rtl="0">
-              <a:lnSpc>
-                <a:spcPct val="115000"/>
-              </a:lnSpc>
-              <a:spcBef>
-                <a:spcPts val="1600"/>
-              </a:spcBef>
-              <a:spcAft>
-                <a:spcPts val="0"/>
-              </a:spcAft>
-              <a:buClr>
-                <a:schemeClr val="dk2"/>
-              </a:buClr>
-              <a:buSzPts val="1100"/>
-              <a:buFont typeface="Roboto"/>
-              <a:buChar char="●"/>
-              <a:defRPr sz="1100" b="0" i="0" u="none" strike="noStrike" cap="none">
-                <a:solidFill>
-                  <a:schemeClr val="dk2"/>
-                </a:solidFill>
-                <a:latin typeface="Roboto"/>
-                <a:ea typeface="Roboto"/>
-                <a:cs typeface="Roboto"/>
-                <a:sym typeface="Roboto"/>
-              </a:defRPr>
-            </a:lvl4pPr>
-            <a:lvl5pPr marL="2286000" marR="0" lvl="4" indent="-298450" algn="l" rtl="0">
-              <a:lnSpc>
-                <a:spcPct val="115000"/>
-              </a:lnSpc>
-              <a:spcBef>
-                <a:spcPts val="1600"/>
-              </a:spcBef>
-              <a:spcAft>
-                <a:spcPts val="0"/>
-              </a:spcAft>
-              <a:buClr>
-                <a:schemeClr val="dk2"/>
-              </a:buClr>
-              <a:buSzPts val="1100"/>
-              <a:buFont typeface="Roboto"/>
-              <a:buChar char="○"/>
-              <a:defRPr sz="1100" b="0" i="0" u="none" strike="noStrike" cap="none">
-                <a:solidFill>
-                  <a:schemeClr val="dk2"/>
-                </a:solidFill>
-                <a:latin typeface="Roboto"/>
-                <a:ea typeface="Roboto"/>
-                <a:cs typeface="Roboto"/>
-                <a:sym typeface="Roboto"/>
-              </a:defRPr>
-            </a:lvl5pPr>
-            <a:lvl6pPr marL="2743200" marR="0" lvl="5" indent="-298450" algn="l" rtl="0">
-              <a:lnSpc>
-                <a:spcPct val="115000"/>
-              </a:lnSpc>
-              <a:spcBef>
-                <a:spcPts val="1600"/>
-              </a:spcBef>
-              <a:spcAft>
-                <a:spcPts val="0"/>
-              </a:spcAft>
-              <a:buClr>
-                <a:schemeClr val="dk2"/>
-              </a:buClr>
-              <a:buSzPts val="1100"/>
-              <a:buFont typeface="Roboto"/>
-              <a:buChar char="■"/>
-              <a:defRPr sz="1100" b="0" i="0" u="none" strike="noStrike" cap="none">
-                <a:solidFill>
-                  <a:schemeClr val="dk2"/>
-                </a:solidFill>
-                <a:latin typeface="Roboto"/>
-                <a:ea typeface="Roboto"/>
-                <a:cs typeface="Roboto"/>
-                <a:sym typeface="Roboto"/>
-              </a:defRPr>
-            </a:lvl6pPr>
-            <a:lvl7pPr marL="3200400" marR="0" lvl="6" indent="-298450" algn="l" rtl="0">
-              <a:lnSpc>
-                <a:spcPct val="115000"/>
-              </a:lnSpc>
-              <a:spcBef>
-                <a:spcPts val="1600"/>
-              </a:spcBef>
-              <a:spcAft>
-                <a:spcPts val="0"/>
-              </a:spcAft>
-              <a:buClr>
-                <a:schemeClr val="dk2"/>
-              </a:buClr>
-              <a:buSzPts val="1100"/>
-              <a:buFont typeface="Roboto"/>
-              <a:buChar char="●"/>
-              <a:defRPr sz="1100" b="0" i="0" u="none" strike="noStrike" cap="none">
-                <a:solidFill>
-                  <a:schemeClr val="dk2"/>
-                </a:solidFill>
-                <a:latin typeface="Roboto"/>
-                <a:ea typeface="Roboto"/>
-                <a:cs typeface="Roboto"/>
-                <a:sym typeface="Roboto"/>
-              </a:defRPr>
-            </a:lvl7pPr>
-            <a:lvl8pPr marL="3657600" marR="0" lvl="7" indent="-298450" algn="l" rtl="0">
-              <a:lnSpc>
-                <a:spcPct val="115000"/>
-              </a:lnSpc>
-              <a:spcBef>
-                <a:spcPts val="1600"/>
-              </a:spcBef>
-              <a:spcAft>
-                <a:spcPts val="0"/>
-              </a:spcAft>
-              <a:buClr>
-                <a:schemeClr val="dk2"/>
-              </a:buClr>
-              <a:buSzPts val="1100"/>
-              <a:buFont typeface="Roboto"/>
-              <a:buChar char="○"/>
-              <a:defRPr sz="1100" b="0" i="0" u="none" strike="noStrike" cap="none">
-                <a:solidFill>
-                  <a:schemeClr val="dk2"/>
-                </a:solidFill>
-                <a:latin typeface="Roboto"/>
-                <a:ea typeface="Roboto"/>
-                <a:cs typeface="Roboto"/>
-                <a:sym typeface="Roboto"/>
-              </a:defRPr>
-            </a:lvl8pPr>
-            <a:lvl9pPr marL="4114800" marR="0" lvl="8" indent="-298450" algn="l" rtl="0">
-              <a:lnSpc>
-                <a:spcPct val="115000"/>
-              </a:lnSpc>
-              <a:spcBef>
-                <a:spcPts val="1600"/>
-              </a:spcBef>
-              <a:spcAft>
-                <a:spcPts val="1600"/>
-              </a:spcAft>
-              <a:buClr>
-                <a:schemeClr val="dk2"/>
-              </a:buClr>
-              <a:buSzPts val="1100"/>
-              <a:buFont typeface="Roboto"/>
-              <a:buChar char="■"/>
-              <a:defRPr sz="1100" b="0" i="0" u="none" strike="noStrike" cap="none">
-                <a:solidFill>
-                  <a:schemeClr val="dk2"/>
-                </a:solidFill>
-                <a:latin typeface="Roboto"/>
-                <a:ea typeface="Roboto"/>
-                <a:cs typeface="Roboto"/>
-                <a:sym typeface="Roboto"/>
-              </a:defRPr>
-            </a:lvl9pPr>
-          </a:lstStyle>
-          <a:p>
-            <a:pPr marL="342900" indent="-342900">
-              <a:spcAft>
-                <a:spcPts val="1600"/>
-              </a:spcAft>
-            </a:pPr>
-            <a:r>
-              <a:rPr lang="en-US" sz="1600" dirty="0"/>
-              <a:t>Accept assignment Mid Exam 2 under Instructor -&gt; Alam -&gt; Exam</a:t>
-            </a:r>
-            <a:endParaRPr lang="en-US" sz="1600" dirty="0">
-              <a:solidFill>
-                <a:schemeClr val="tx1"/>
-              </a:solidFill>
-            </a:endParaRPr>
-          </a:p>
-          <a:p>
-            <a:pPr marL="342900" indent="-342900">
-              <a:spcAft>
-                <a:spcPts val="1600"/>
-              </a:spcAft>
-            </a:pPr>
-            <a:r>
-              <a:rPr lang="en-US" sz="1600" dirty="0">
-                <a:solidFill>
-                  <a:schemeClr val="tx1"/>
-                </a:solidFill>
-              </a:rPr>
-              <a:t>Clone the repository for </a:t>
-            </a:r>
-            <a:r>
-              <a:rPr lang="en-US" sz="1600" dirty="0"/>
-              <a:t>Mid Exam 2 </a:t>
-            </a:r>
-            <a:endParaRPr lang="en-US" sz="1600" dirty="0">
-              <a:solidFill>
-                <a:schemeClr val="tx1"/>
-              </a:solidFill>
-            </a:endParaRPr>
-          </a:p>
-        </p:txBody>
-      </p:sp>
-    </p:spTree>
-    <p:extLst>
-      <p:ext uri="{BB962C8B-B14F-4D97-AF65-F5344CB8AC3E}">
-        <p14:creationId xmlns:p14="http://schemas.microsoft.com/office/powerpoint/2010/main" val="943055912"/>
-      </p:ext>
-    </p:extLst>
-  </p:cSld>
-  <p:clrMapOvr>
-    <a:masterClrMapping/>
-  </p:clrMapOvr>
-</p:sld>
-</file>
-
-<file path=ppt/slides/slide10.xml><?xml version="1.0" encoding="utf-8"?>
-<p:sld xmlns:a="http://schemas.openxmlformats.org/drawingml/2006/main" xmlns:r="http://schemas.openxmlformats.org/officeDocument/2006/relationships" xmlns:p="http://schemas.openxmlformats.org/presentationml/2006/main" show="0">
-  <p:cSld>
-    <p:spTree>
-      <p:nvGrpSpPr>
-        <p:cNvPr id="1" name="Shape 323"/>
-        <p:cNvGrpSpPr/>
-        <p:nvPr/>
-      </p:nvGrpSpPr>
-      <p:grpSpPr>
-        <a:xfrm>
-          <a:off x="0" y="0"/>
-          <a:ext cx="0" cy="0"/>
-          <a:chOff x="0" y="0"/>
-          <a:chExt cx="0" cy="0"/>
-        </a:xfrm>
-      </p:grpSpPr>
-      <p:sp>
-        <p:nvSpPr>
-          <p:cNvPr id="324" name="Google Shape;324;p47"/>
-          <p:cNvSpPr txBox="1">
-            <a:spLocks noGrp="1"/>
-          </p:cNvSpPr>
-          <p:nvPr>
-            <p:ph type="title"/>
-          </p:nvPr>
-        </p:nvSpPr>
-        <p:spPr>
-          <a:xfrm>
-            <a:off x="226208" y="1"/>
-            <a:ext cx="8520600" cy="464980"/>
-          </a:xfrm>
-          <a:prstGeom prst="rect">
-            <a:avLst/>
-          </a:prstGeom>
-        </p:spPr>
-        <p:txBody>
-          <a:bodyPr spcFirstLastPara="1" wrap="square" lIns="91425" tIns="91425" rIns="91425" bIns="91425" anchor="t" anchorCtr="0">
-            <a:noAutofit/>
-          </a:bodyPr>
-          <a:lstStyle/>
-          <a:p>
-            <a:pPr marL="0" lvl="0" indent="0" algn="ctr" rtl="0">
-              <a:spcBef>
-                <a:spcPts val="0"/>
-              </a:spcBef>
-              <a:spcAft>
-                <a:spcPts val="0"/>
-              </a:spcAft>
-              <a:buNone/>
-            </a:pPr>
-            <a:r>
-              <a:rPr lang="en-US" dirty="0"/>
-              <a:t>Use </a:t>
-            </a:r>
-            <a:r>
-              <a:rPr lang="en-US" sz="2400" dirty="0"/>
-              <a:t>Assigned</a:t>
-            </a:r>
-            <a:r>
-              <a:rPr lang="en-US" dirty="0"/>
-              <a:t> Seat</a:t>
-            </a:r>
-            <a:endParaRPr dirty="0"/>
-          </a:p>
-        </p:txBody>
-      </p:sp>
-      <p:sp>
-        <p:nvSpPr>
-          <p:cNvPr id="326" name="Google Shape;326;p47"/>
-          <p:cNvSpPr txBox="1">
-            <a:spLocks noGrp="1"/>
-          </p:cNvSpPr>
-          <p:nvPr>
-            <p:ph type="sldNum" idx="12"/>
-          </p:nvPr>
-        </p:nvSpPr>
-        <p:spPr>
-          <a:xfrm>
-            <a:off x="8472458" y="4663217"/>
-            <a:ext cx="548700" cy="393600"/>
-          </a:xfrm>
-          <a:prstGeom prst="rect">
-            <a:avLst/>
-          </a:prstGeom>
-        </p:spPr>
-        <p:txBody>
-          <a:bodyPr spcFirstLastPara="1" wrap="square" lIns="91425" tIns="91425" rIns="91425" bIns="91425" anchor="ctr" anchorCtr="0">
-            <a:noAutofit/>
-          </a:bodyPr>
-          <a:lstStyle/>
-          <a:p>
-            <a:pPr marL="0" lvl="0" indent="0" algn="r" rtl="0">
-              <a:spcBef>
-                <a:spcPts val="0"/>
-              </a:spcBef>
-              <a:spcAft>
-                <a:spcPts val="0"/>
-              </a:spcAft>
-              <a:buNone/>
-            </a:pPr>
-            <a:fld id="{00000000-1234-1234-1234-123412341234}" type="slidenum">
-              <a:rPr lang="en"/>
-              <a:t>10</a:t>
-            </a:fld>
-            <a:endParaRPr/>
-          </a:p>
-        </p:txBody>
-      </p:sp>
-      <p:pic>
-        <p:nvPicPr>
-          <p:cNvPr id="6" name="Picture 5">
-            <a:extLst>
-              <a:ext uri="{FF2B5EF4-FFF2-40B4-BE49-F238E27FC236}">
-                <a16:creationId xmlns:a16="http://schemas.microsoft.com/office/drawing/2014/main" id="{DED32793-7C09-E3A3-94E5-B5D46727A1D0}"/>
-              </a:ext>
-            </a:extLst>
-          </p:cNvPr>
-          <p:cNvPicPr>
-            <a:picLocks noChangeAspect="1"/>
-          </p:cNvPicPr>
-          <p:nvPr/>
-        </p:nvPicPr>
-        <p:blipFill>
-          <a:blip r:embed="rId3"/>
-          <a:stretch>
-            <a:fillRect/>
-          </a:stretch>
-        </p:blipFill>
-        <p:spPr>
-          <a:xfrm>
-            <a:off x="-1" y="551663"/>
-            <a:ext cx="9144001" cy="4591837"/>
-          </a:xfrm>
-          <a:prstGeom prst="rect">
-            <a:avLst/>
-          </a:prstGeom>
-        </p:spPr>
-      </p:pic>
-    </p:spTree>
-    <p:extLst>
-      <p:ext uri="{BB962C8B-B14F-4D97-AF65-F5344CB8AC3E}">
-        <p14:creationId xmlns:p14="http://schemas.microsoft.com/office/powerpoint/2010/main" val="4226348449"/>
-      </p:ext>
-    </p:extLst>
-  </p:cSld>
-  <p:clrMapOvr>
-    <a:masterClrMapping/>
-  </p:clrMapOvr>
-</p:sld>
-</file>
-
-<file path=ppt/slides/slide11.xml><?xml version="1.0" encoding="utf-8"?>
-<p:sld xmlns:a="http://schemas.openxmlformats.org/drawingml/2006/main" xmlns:r="http://schemas.openxmlformats.org/officeDocument/2006/relationships" xmlns:p="http://schemas.openxmlformats.org/presentationml/2006/main" show="0">
-  <p:cSld>
-    <p:spTree>
-      <p:nvGrpSpPr>
-        <p:cNvPr id="1" name="Shape 323"/>
-        <p:cNvGrpSpPr/>
-        <p:nvPr/>
-      </p:nvGrpSpPr>
-      <p:grpSpPr>
-        <a:xfrm>
-          <a:off x="0" y="0"/>
-          <a:ext cx="0" cy="0"/>
-          <a:chOff x="0" y="0"/>
-          <a:chExt cx="0" cy="0"/>
-        </a:xfrm>
-      </p:grpSpPr>
-      <p:sp>
-        <p:nvSpPr>
-          <p:cNvPr id="324" name="Google Shape;324;p47"/>
-          <p:cNvSpPr txBox="1">
-            <a:spLocks noGrp="1"/>
-          </p:cNvSpPr>
-          <p:nvPr>
-            <p:ph type="title"/>
-          </p:nvPr>
-        </p:nvSpPr>
-        <p:spPr>
-          <a:xfrm>
-            <a:off x="226208" y="1"/>
-            <a:ext cx="8520600" cy="464980"/>
-          </a:xfrm>
-          <a:prstGeom prst="rect">
-            <a:avLst/>
-          </a:prstGeom>
-        </p:spPr>
-        <p:txBody>
-          <a:bodyPr spcFirstLastPara="1" wrap="square" lIns="91425" tIns="91425" rIns="91425" bIns="91425" anchor="t" anchorCtr="0">
-            <a:noAutofit/>
-          </a:bodyPr>
-          <a:lstStyle/>
-          <a:p>
-            <a:pPr marL="0" lvl="0" indent="0" algn="ctr" rtl="0">
-              <a:spcBef>
-                <a:spcPts val="0"/>
-              </a:spcBef>
-              <a:spcAft>
-                <a:spcPts val="0"/>
-              </a:spcAft>
-              <a:buNone/>
-            </a:pPr>
-            <a:r>
-              <a:rPr lang="en-US" dirty="0"/>
-              <a:t>Use </a:t>
-            </a:r>
-            <a:r>
-              <a:rPr lang="en-US" sz="2400" dirty="0"/>
-              <a:t>Assigned</a:t>
-            </a:r>
-            <a:r>
-              <a:rPr lang="en-US" dirty="0"/>
-              <a:t> Seat</a:t>
-            </a:r>
-            <a:endParaRPr dirty="0"/>
-          </a:p>
-        </p:txBody>
-      </p:sp>
-      <p:sp>
-        <p:nvSpPr>
-          <p:cNvPr id="326" name="Google Shape;326;p47"/>
-          <p:cNvSpPr txBox="1">
-            <a:spLocks noGrp="1"/>
-          </p:cNvSpPr>
-          <p:nvPr>
-            <p:ph type="sldNum" idx="12"/>
-          </p:nvPr>
-        </p:nvSpPr>
-        <p:spPr>
-          <a:xfrm>
-            <a:off x="8472458" y="4663217"/>
-            <a:ext cx="548700" cy="393600"/>
-          </a:xfrm>
-          <a:prstGeom prst="rect">
-            <a:avLst/>
-          </a:prstGeom>
-        </p:spPr>
-        <p:txBody>
-          <a:bodyPr spcFirstLastPara="1" wrap="square" lIns="91425" tIns="91425" rIns="91425" bIns="91425" anchor="ctr" anchorCtr="0">
-            <a:noAutofit/>
-          </a:bodyPr>
-          <a:lstStyle/>
-          <a:p>
-            <a:pPr marL="0" lvl="0" indent="0" algn="r" rtl="0">
-              <a:spcBef>
-                <a:spcPts val="0"/>
-              </a:spcBef>
-              <a:spcAft>
-                <a:spcPts val="0"/>
-              </a:spcAft>
-              <a:buNone/>
-            </a:pPr>
-            <a:fld id="{00000000-1234-1234-1234-123412341234}" type="slidenum">
-              <a:rPr lang="en"/>
-              <a:t>11</a:t>
-            </a:fld>
-            <a:endParaRPr/>
-          </a:p>
-        </p:txBody>
-      </p:sp>
-      <p:pic>
-        <p:nvPicPr>
-          <p:cNvPr id="3" name="Picture 2">
-            <a:extLst>
-              <a:ext uri="{FF2B5EF4-FFF2-40B4-BE49-F238E27FC236}">
-                <a16:creationId xmlns:a16="http://schemas.microsoft.com/office/drawing/2014/main" id="{92DE4AAC-70FE-A114-5258-F5B22EDDED45}"/>
-              </a:ext>
-            </a:extLst>
-          </p:cNvPr>
-          <p:cNvPicPr>
-            <a:picLocks noChangeAspect="1"/>
-          </p:cNvPicPr>
-          <p:nvPr/>
-        </p:nvPicPr>
-        <p:blipFill>
-          <a:blip r:embed="rId3"/>
-          <a:stretch>
-            <a:fillRect/>
-          </a:stretch>
-        </p:blipFill>
-        <p:spPr>
-          <a:xfrm>
-            <a:off x="0" y="716280"/>
-            <a:ext cx="9144000" cy="4427218"/>
-          </a:xfrm>
-          <a:prstGeom prst="rect">
-            <a:avLst/>
-          </a:prstGeom>
-        </p:spPr>
-      </p:pic>
-    </p:spTree>
-    <p:extLst>
-      <p:ext uri="{BB962C8B-B14F-4D97-AF65-F5344CB8AC3E}">
-        <p14:creationId xmlns:p14="http://schemas.microsoft.com/office/powerpoint/2010/main" val="1976403023"/>
-      </p:ext>
-    </p:extLst>
-  </p:cSld>
-  <p:clrMapOvr>
-    <a:masterClrMapping/>
-  </p:clrMapOvr>
-</p:sld>
-</file>
-
-<file path=ppt/slides/slide12.xml><?xml version="1.0" encoding="utf-8"?>
-<p:sld xmlns:a="http://schemas.openxmlformats.org/drawingml/2006/main" xmlns:r="http://schemas.openxmlformats.org/officeDocument/2006/relationships" xmlns:p="http://schemas.openxmlformats.org/presentationml/2006/main" show="0">
-  <p:cSld>
-    <p:spTree>
-      <p:nvGrpSpPr>
-        <p:cNvPr id="1" name="Shape 323"/>
-        <p:cNvGrpSpPr/>
-        <p:nvPr/>
-      </p:nvGrpSpPr>
-      <p:grpSpPr>
-        <a:xfrm>
-          <a:off x="0" y="0"/>
-          <a:ext cx="0" cy="0"/>
-          <a:chOff x="0" y="0"/>
-          <a:chExt cx="0" cy="0"/>
-        </a:xfrm>
-      </p:grpSpPr>
-      <p:sp>
-        <p:nvSpPr>
-          <p:cNvPr id="324" name="Google Shape;324;p47"/>
-          <p:cNvSpPr txBox="1">
-            <a:spLocks noGrp="1"/>
-          </p:cNvSpPr>
-          <p:nvPr>
-            <p:ph type="title"/>
-          </p:nvPr>
-        </p:nvSpPr>
-        <p:spPr>
-          <a:xfrm>
-            <a:off x="226208" y="1"/>
-            <a:ext cx="8520600" cy="464980"/>
-          </a:xfrm>
-          <a:prstGeom prst="rect">
-            <a:avLst/>
-          </a:prstGeom>
-        </p:spPr>
-        <p:txBody>
-          <a:bodyPr spcFirstLastPara="1" wrap="square" lIns="91425" tIns="91425" rIns="91425" bIns="91425" anchor="t" anchorCtr="0">
-            <a:noAutofit/>
-          </a:bodyPr>
-          <a:lstStyle/>
-          <a:p>
-            <a:pPr marL="0" lvl="0" indent="0" algn="ctr" rtl="0">
-              <a:spcBef>
-                <a:spcPts val="0"/>
-              </a:spcBef>
-              <a:spcAft>
-                <a:spcPts val="0"/>
-              </a:spcAft>
-              <a:buNone/>
-            </a:pPr>
-            <a:r>
-              <a:rPr lang="en-US" dirty="0"/>
-              <a:t>Use </a:t>
-            </a:r>
-            <a:r>
-              <a:rPr lang="en-US" sz="2400" dirty="0"/>
-              <a:t>Assigned</a:t>
-            </a:r>
-            <a:r>
-              <a:rPr lang="en-US" dirty="0"/>
-              <a:t> Seat</a:t>
-            </a:r>
-            <a:endParaRPr dirty="0"/>
-          </a:p>
-        </p:txBody>
-      </p:sp>
-      <p:sp>
-        <p:nvSpPr>
-          <p:cNvPr id="326" name="Google Shape;326;p47"/>
-          <p:cNvSpPr txBox="1">
-            <a:spLocks noGrp="1"/>
-          </p:cNvSpPr>
-          <p:nvPr>
-            <p:ph type="sldNum" idx="12"/>
-          </p:nvPr>
-        </p:nvSpPr>
-        <p:spPr>
-          <a:xfrm>
-            <a:off x="8472458" y="4663217"/>
-            <a:ext cx="548700" cy="393600"/>
-          </a:xfrm>
-          <a:prstGeom prst="rect">
-            <a:avLst/>
-          </a:prstGeom>
-        </p:spPr>
-        <p:txBody>
-          <a:bodyPr spcFirstLastPara="1" wrap="square" lIns="91425" tIns="91425" rIns="91425" bIns="91425" anchor="ctr" anchorCtr="0">
-            <a:noAutofit/>
-          </a:bodyPr>
-          <a:lstStyle/>
-          <a:p>
-            <a:pPr marL="0" lvl="0" indent="0" algn="r" rtl="0">
-              <a:spcBef>
-                <a:spcPts val="0"/>
-              </a:spcBef>
-              <a:spcAft>
-                <a:spcPts val="0"/>
-              </a:spcAft>
-              <a:buNone/>
-            </a:pPr>
-            <a:fld id="{00000000-1234-1234-1234-123412341234}" type="slidenum">
-              <a:rPr lang="en"/>
-              <a:t>12</a:t>
-            </a:fld>
-            <a:endParaRPr/>
-          </a:p>
-        </p:txBody>
-      </p:sp>
-      <p:pic>
-        <p:nvPicPr>
-          <p:cNvPr id="4" name="Picture 3">
-            <a:extLst>
-              <a:ext uri="{FF2B5EF4-FFF2-40B4-BE49-F238E27FC236}">
-                <a16:creationId xmlns:a16="http://schemas.microsoft.com/office/drawing/2014/main" id="{DCD752B9-EFAE-AFC1-7D39-6763B89DE8D3}"/>
-              </a:ext>
-            </a:extLst>
-          </p:cNvPr>
-          <p:cNvPicPr>
-            <a:picLocks noChangeAspect="1"/>
-          </p:cNvPicPr>
-          <p:nvPr/>
-        </p:nvPicPr>
-        <p:blipFill>
-          <a:blip r:embed="rId3"/>
-          <a:stretch>
-            <a:fillRect/>
-          </a:stretch>
-        </p:blipFill>
-        <p:spPr>
-          <a:xfrm>
-            <a:off x="0" y="652130"/>
-            <a:ext cx="9144000" cy="4491369"/>
-          </a:xfrm>
-          <a:prstGeom prst="rect">
-            <a:avLst/>
-          </a:prstGeom>
-        </p:spPr>
-      </p:pic>
-    </p:spTree>
-    <p:extLst>
-      <p:ext uri="{BB962C8B-B14F-4D97-AF65-F5344CB8AC3E}">
-        <p14:creationId xmlns:p14="http://schemas.microsoft.com/office/powerpoint/2010/main" val="3365057756"/>
-      </p:ext>
-    </p:extLst>
-  </p:cSld>
-  <p:clrMapOvr>
-    <a:masterClrMapping/>
-  </p:clrMapOvr>
-</p:sld>
-</file>
-
-<file path=ppt/slides/slide2.xml><?xml version="1.0" encoding="utf-8"?>
-<p:sld xmlns:a="http://schemas.openxmlformats.org/drawingml/2006/main" xmlns:r="http://schemas.openxmlformats.org/officeDocument/2006/relationships" xmlns:p="http://schemas.openxmlformats.org/presentationml/2006/main" show="0">
-  <p:cSld>
-    <p:spTree>
-      <p:nvGrpSpPr>
-        <p:cNvPr id="1" name="Shape 323"/>
-        <p:cNvGrpSpPr/>
-        <p:nvPr/>
-      </p:nvGrpSpPr>
-      <p:grpSpPr>
-        <a:xfrm>
-          <a:off x="0" y="0"/>
-          <a:ext cx="0" cy="0"/>
-          <a:chOff x="0" y="0"/>
-          <a:chExt cx="0" cy="0"/>
-        </a:xfrm>
-      </p:grpSpPr>
-      <p:sp>
-        <p:nvSpPr>
-          <p:cNvPr id="324" name="Google Shape;324;p47"/>
-          <p:cNvSpPr txBox="1">
-            <a:spLocks noGrp="1"/>
-          </p:cNvSpPr>
-          <p:nvPr>
-            <p:ph type="title"/>
-          </p:nvPr>
-        </p:nvSpPr>
-        <p:spPr>
-          <a:xfrm>
             <a:off x="305858" y="273819"/>
             <a:ext cx="8520600" cy="623700"/>
           </a:xfrm>
@@ -7658,7 +6629,7 @@
             </a:r>
             <a:r>
               <a:rPr lang="en-US" sz="2400" dirty="0"/>
-              <a:t>1</a:t>
+              <a:t>2</a:t>
             </a:r>
             <a:r>
               <a:rPr lang="pl-PL" sz="2400" dirty="0"/>
@@ -7666,7 +6637,7 @@
             </a:r>
             <a:r>
               <a:rPr lang="en-US" sz="2400" dirty="0"/>
-              <a:t>Sets, Maps, and Hashing</a:t>
+              <a:t>Hashes and JCF Data Structures</a:t>
             </a:r>
           </a:p>
           <a:p>
@@ -7679,7 +6650,7 @@
             </a:r>
             <a:r>
               <a:rPr lang="en-US" sz="2400" dirty="0" err="1"/>
-              <a:t>NoMoreDictionaries</a:t>
+              <a:t>JCFunwork</a:t>
             </a:r>
             <a:endParaRPr sz="2400" dirty="0"/>
           </a:p>
@@ -7721,7 +6692,7 @@
             </a:pPr>
             <a:fld id="{00000000-1234-1234-1234-123412341234}" type="slidenum">
               <a:rPr lang="en"/>
-              <a:t>2</a:t>
+              <a:t>1</a:t>
             </a:fld>
             <a:endParaRPr/>
           </a:p>
@@ -8106,7 +7077,7 @@
             </a:pPr>
             <a:r>
               <a:rPr lang="en-US" sz="2400" dirty="0"/>
-              <a:t>Clone/Pull Unit6 – git hub classroom repo for class activities</a:t>
+              <a:t>Clone Unit8 – git hub classroom repo for class activities</a:t>
             </a:r>
           </a:p>
           <a:p>
@@ -8117,7 +7088,7 @@
             </a:pPr>
             <a:r>
               <a:rPr lang="en-US" sz="2400" dirty="0"/>
-              <a:t>Last week Class activity is uploaded in my courses</a:t>
+              <a:t>Download Starter code</a:t>
             </a:r>
           </a:p>
         </p:txBody>
@@ -8130,7 +7101,463 @@
 </p:sld>
 </file>
 
-<file path=ppt/slides/slide3.xml><?xml version="1.0" encoding="utf-8"?>
+<file path=ppt/slides/slide10.xml><?xml version="1.0" encoding="utf-8"?>
+<p:sld xmlns:a="http://schemas.openxmlformats.org/drawingml/2006/main" xmlns:r="http://schemas.openxmlformats.org/officeDocument/2006/relationships" xmlns:p="http://schemas.openxmlformats.org/presentationml/2006/main" show="0">
+  <p:cSld>
+    <p:spTree>
+      <p:nvGrpSpPr>
+        <p:cNvPr id="1" name="Shape 323"/>
+        <p:cNvGrpSpPr/>
+        <p:nvPr/>
+      </p:nvGrpSpPr>
+      <p:grpSpPr>
+        <a:xfrm>
+          <a:off x="0" y="0"/>
+          <a:ext cx="0" cy="0"/>
+          <a:chOff x="0" y="0"/>
+          <a:chExt cx="0" cy="0"/>
+        </a:xfrm>
+      </p:grpSpPr>
+      <p:sp>
+        <p:nvSpPr>
+          <p:cNvPr id="324" name="Google Shape;324;p47"/>
+          <p:cNvSpPr txBox="1">
+            <a:spLocks noGrp="1"/>
+          </p:cNvSpPr>
+          <p:nvPr>
+            <p:ph type="title"/>
+          </p:nvPr>
+        </p:nvSpPr>
+        <p:spPr>
+          <a:xfrm>
+            <a:off x="226208" y="1"/>
+            <a:ext cx="8520600" cy="464980"/>
+          </a:xfrm>
+          <a:prstGeom prst="rect">
+            <a:avLst/>
+          </a:prstGeom>
+        </p:spPr>
+        <p:txBody>
+          <a:bodyPr spcFirstLastPara="1" wrap="square" lIns="91425" tIns="91425" rIns="91425" bIns="91425" anchor="t" anchorCtr="0">
+            <a:noAutofit/>
+          </a:bodyPr>
+          <a:lstStyle/>
+          <a:p>
+            <a:pPr marL="0" lvl="0" indent="0" algn="ctr" rtl="0">
+              <a:spcBef>
+                <a:spcPts val="0"/>
+              </a:spcBef>
+              <a:spcAft>
+                <a:spcPts val="0"/>
+              </a:spcAft>
+              <a:buNone/>
+            </a:pPr>
+            <a:r>
+              <a:rPr lang="en-US" dirty="0"/>
+              <a:t>Use </a:t>
+            </a:r>
+            <a:r>
+              <a:rPr lang="en-US" sz="2400" dirty="0"/>
+              <a:t>Assigned</a:t>
+            </a:r>
+            <a:r>
+              <a:rPr lang="en-US" dirty="0"/>
+              <a:t> Seat</a:t>
+            </a:r>
+            <a:endParaRPr dirty="0"/>
+          </a:p>
+        </p:txBody>
+      </p:sp>
+      <p:sp>
+        <p:nvSpPr>
+          <p:cNvPr id="326" name="Google Shape;326;p47"/>
+          <p:cNvSpPr txBox="1">
+            <a:spLocks noGrp="1"/>
+          </p:cNvSpPr>
+          <p:nvPr>
+            <p:ph type="sldNum" idx="12"/>
+          </p:nvPr>
+        </p:nvSpPr>
+        <p:spPr>
+          <a:xfrm>
+            <a:off x="8472458" y="4663217"/>
+            <a:ext cx="548700" cy="393600"/>
+          </a:xfrm>
+          <a:prstGeom prst="rect">
+            <a:avLst/>
+          </a:prstGeom>
+        </p:spPr>
+        <p:txBody>
+          <a:bodyPr spcFirstLastPara="1" wrap="square" lIns="91425" tIns="91425" rIns="91425" bIns="91425" anchor="ctr" anchorCtr="0">
+            <a:noAutofit/>
+          </a:bodyPr>
+          <a:lstStyle/>
+          <a:p>
+            <a:pPr marL="0" lvl="0" indent="0" algn="r" rtl="0">
+              <a:spcBef>
+                <a:spcPts val="0"/>
+              </a:spcBef>
+              <a:spcAft>
+                <a:spcPts val="0"/>
+              </a:spcAft>
+              <a:buNone/>
+            </a:pPr>
+            <a:fld id="{00000000-1234-1234-1234-123412341234}" type="slidenum">
+              <a:rPr lang="en"/>
+              <a:t>10</a:t>
+            </a:fld>
+            <a:endParaRPr/>
+          </a:p>
+        </p:txBody>
+      </p:sp>
+      <p:pic>
+        <p:nvPicPr>
+          <p:cNvPr id="6" name="Picture 5">
+            <a:extLst>
+              <a:ext uri="{FF2B5EF4-FFF2-40B4-BE49-F238E27FC236}">
+                <a16:creationId xmlns:a16="http://schemas.microsoft.com/office/drawing/2014/main" id="{DED32793-7C09-E3A3-94E5-B5D46727A1D0}"/>
+              </a:ext>
+            </a:extLst>
+          </p:cNvPr>
+          <p:cNvPicPr>
+            <a:picLocks noChangeAspect="1"/>
+          </p:cNvPicPr>
+          <p:nvPr/>
+        </p:nvPicPr>
+        <p:blipFill>
+          <a:blip r:embed="rId3"/>
+          <a:stretch>
+            <a:fillRect/>
+          </a:stretch>
+        </p:blipFill>
+        <p:spPr>
+          <a:xfrm>
+            <a:off x="-1" y="551663"/>
+            <a:ext cx="9144001" cy="4591837"/>
+          </a:xfrm>
+          <a:prstGeom prst="rect">
+            <a:avLst/>
+          </a:prstGeom>
+        </p:spPr>
+      </p:pic>
+    </p:spTree>
+    <p:extLst>
+      <p:ext uri="{BB962C8B-B14F-4D97-AF65-F5344CB8AC3E}">
+        <p14:creationId xmlns:p14="http://schemas.microsoft.com/office/powerpoint/2010/main" val="4226348449"/>
+      </p:ext>
+    </p:extLst>
+  </p:cSld>
+  <p:clrMapOvr>
+    <a:masterClrMapping/>
+  </p:clrMapOvr>
+</p:sld>
+</file>
+
+<file path=ppt/slides/slide11.xml><?xml version="1.0" encoding="utf-8"?>
+<p:sld xmlns:a="http://schemas.openxmlformats.org/drawingml/2006/main" xmlns:r="http://schemas.openxmlformats.org/officeDocument/2006/relationships" xmlns:p="http://schemas.openxmlformats.org/presentationml/2006/main" show="0">
+  <p:cSld>
+    <p:spTree>
+      <p:nvGrpSpPr>
+        <p:cNvPr id="1" name="Shape 323"/>
+        <p:cNvGrpSpPr/>
+        <p:nvPr/>
+      </p:nvGrpSpPr>
+      <p:grpSpPr>
+        <a:xfrm>
+          <a:off x="0" y="0"/>
+          <a:ext cx="0" cy="0"/>
+          <a:chOff x="0" y="0"/>
+          <a:chExt cx="0" cy="0"/>
+        </a:xfrm>
+      </p:grpSpPr>
+      <p:sp>
+        <p:nvSpPr>
+          <p:cNvPr id="324" name="Google Shape;324;p47"/>
+          <p:cNvSpPr txBox="1">
+            <a:spLocks noGrp="1"/>
+          </p:cNvSpPr>
+          <p:nvPr>
+            <p:ph type="title"/>
+          </p:nvPr>
+        </p:nvSpPr>
+        <p:spPr>
+          <a:xfrm>
+            <a:off x="226208" y="1"/>
+            <a:ext cx="8520600" cy="464980"/>
+          </a:xfrm>
+          <a:prstGeom prst="rect">
+            <a:avLst/>
+          </a:prstGeom>
+        </p:spPr>
+        <p:txBody>
+          <a:bodyPr spcFirstLastPara="1" wrap="square" lIns="91425" tIns="91425" rIns="91425" bIns="91425" anchor="t" anchorCtr="0">
+            <a:noAutofit/>
+          </a:bodyPr>
+          <a:lstStyle/>
+          <a:p>
+            <a:pPr marL="0" lvl="0" indent="0" algn="ctr" rtl="0">
+              <a:spcBef>
+                <a:spcPts val="0"/>
+              </a:spcBef>
+              <a:spcAft>
+                <a:spcPts val="0"/>
+              </a:spcAft>
+              <a:buNone/>
+            </a:pPr>
+            <a:r>
+              <a:rPr lang="en-US" dirty="0"/>
+              <a:t>Use </a:t>
+            </a:r>
+            <a:r>
+              <a:rPr lang="en-US" sz="2400" dirty="0"/>
+              <a:t>Assigned</a:t>
+            </a:r>
+            <a:r>
+              <a:rPr lang="en-US" dirty="0"/>
+              <a:t> Seat</a:t>
+            </a:r>
+            <a:endParaRPr dirty="0"/>
+          </a:p>
+        </p:txBody>
+      </p:sp>
+      <p:sp>
+        <p:nvSpPr>
+          <p:cNvPr id="326" name="Google Shape;326;p47"/>
+          <p:cNvSpPr txBox="1">
+            <a:spLocks noGrp="1"/>
+          </p:cNvSpPr>
+          <p:nvPr>
+            <p:ph type="sldNum" idx="12"/>
+          </p:nvPr>
+        </p:nvSpPr>
+        <p:spPr>
+          <a:xfrm>
+            <a:off x="8472458" y="4663217"/>
+            <a:ext cx="548700" cy="393600"/>
+          </a:xfrm>
+          <a:prstGeom prst="rect">
+            <a:avLst/>
+          </a:prstGeom>
+        </p:spPr>
+        <p:txBody>
+          <a:bodyPr spcFirstLastPara="1" wrap="square" lIns="91425" tIns="91425" rIns="91425" bIns="91425" anchor="ctr" anchorCtr="0">
+            <a:noAutofit/>
+          </a:bodyPr>
+          <a:lstStyle/>
+          <a:p>
+            <a:pPr marL="0" lvl="0" indent="0" algn="r" rtl="0">
+              <a:spcBef>
+                <a:spcPts val="0"/>
+              </a:spcBef>
+              <a:spcAft>
+                <a:spcPts val="0"/>
+              </a:spcAft>
+              <a:buNone/>
+            </a:pPr>
+            <a:fld id="{00000000-1234-1234-1234-123412341234}" type="slidenum">
+              <a:rPr lang="en"/>
+              <a:t>11</a:t>
+            </a:fld>
+            <a:endParaRPr/>
+          </a:p>
+        </p:txBody>
+      </p:sp>
+      <p:pic>
+        <p:nvPicPr>
+          <p:cNvPr id="3" name="Picture 2">
+            <a:extLst>
+              <a:ext uri="{FF2B5EF4-FFF2-40B4-BE49-F238E27FC236}">
+                <a16:creationId xmlns:a16="http://schemas.microsoft.com/office/drawing/2014/main" id="{92DE4AAC-70FE-A114-5258-F5B22EDDED45}"/>
+              </a:ext>
+            </a:extLst>
+          </p:cNvPr>
+          <p:cNvPicPr>
+            <a:picLocks noChangeAspect="1"/>
+          </p:cNvPicPr>
+          <p:nvPr/>
+        </p:nvPicPr>
+        <p:blipFill>
+          <a:blip r:embed="rId3"/>
+          <a:stretch>
+            <a:fillRect/>
+          </a:stretch>
+        </p:blipFill>
+        <p:spPr>
+          <a:xfrm>
+            <a:off x="0" y="716280"/>
+            <a:ext cx="9144000" cy="4427218"/>
+          </a:xfrm>
+          <a:prstGeom prst="rect">
+            <a:avLst/>
+          </a:prstGeom>
+        </p:spPr>
+      </p:pic>
+    </p:spTree>
+    <p:extLst>
+      <p:ext uri="{BB962C8B-B14F-4D97-AF65-F5344CB8AC3E}">
+        <p14:creationId xmlns:p14="http://schemas.microsoft.com/office/powerpoint/2010/main" val="1976403023"/>
+      </p:ext>
+    </p:extLst>
+  </p:cSld>
+  <p:clrMapOvr>
+    <a:masterClrMapping/>
+  </p:clrMapOvr>
+</p:sld>
+</file>
+
+<file path=ppt/slides/slide12.xml><?xml version="1.0" encoding="utf-8"?>
+<p:sld xmlns:a="http://schemas.openxmlformats.org/drawingml/2006/main" xmlns:r="http://schemas.openxmlformats.org/officeDocument/2006/relationships" xmlns:p="http://schemas.openxmlformats.org/presentationml/2006/main" show="0">
+  <p:cSld>
+    <p:spTree>
+      <p:nvGrpSpPr>
+        <p:cNvPr id="1" name="Shape 323"/>
+        <p:cNvGrpSpPr/>
+        <p:nvPr/>
+      </p:nvGrpSpPr>
+      <p:grpSpPr>
+        <a:xfrm>
+          <a:off x="0" y="0"/>
+          <a:ext cx="0" cy="0"/>
+          <a:chOff x="0" y="0"/>
+          <a:chExt cx="0" cy="0"/>
+        </a:xfrm>
+      </p:grpSpPr>
+      <p:sp>
+        <p:nvSpPr>
+          <p:cNvPr id="324" name="Google Shape;324;p47"/>
+          <p:cNvSpPr txBox="1">
+            <a:spLocks noGrp="1"/>
+          </p:cNvSpPr>
+          <p:nvPr>
+            <p:ph type="title"/>
+          </p:nvPr>
+        </p:nvSpPr>
+        <p:spPr>
+          <a:xfrm>
+            <a:off x="226208" y="1"/>
+            <a:ext cx="8520600" cy="464980"/>
+          </a:xfrm>
+          <a:prstGeom prst="rect">
+            <a:avLst/>
+          </a:prstGeom>
+        </p:spPr>
+        <p:txBody>
+          <a:bodyPr spcFirstLastPara="1" wrap="square" lIns="91425" tIns="91425" rIns="91425" bIns="91425" anchor="t" anchorCtr="0">
+            <a:noAutofit/>
+          </a:bodyPr>
+          <a:lstStyle/>
+          <a:p>
+            <a:pPr marL="0" lvl="0" indent="0" algn="ctr" rtl="0">
+              <a:spcBef>
+                <a:spcPts val="0"/>
+              </a:spcBef>
+              <a:spcAft>
+                <a:spcPts val="0"/>
+              </a:spcAft>
+              <a:buNone/>
+            </a:pPr>
+            <a:r>
+              <a:rPr lang="en-US" dirty="0"/>
+              <a:t>Use </a:t>
+            </a:r>
+            <a:r>
+              <a:rPr lang="en-US" sz="2400" dirty="0"/>
+              <a:t>Assigned</a:t>
+            </a:r>
+            <a:r>
+              <a:rPr lang="en-US" dirty="0"/>
+              <a:t> Seat</a:t>
+            </a:r>
+            <a:endParaRPr dirty="0"/>
+          </a:p>
+        </p:txBody>
+      </p:sp>
+      <p:sp>
+        <p:nvSpPr>
+          <p:cNvPr id="326" name="Google Shape;326;p47"/>
+          <p:cNvSpPr txBox="1">
+            <a:spLocks noGrp="1"/>
+          </p:cNvSpPr>
+          <p:nvPr>
+            <p:ph type="sldNum" idx="12"/>
+          </p:nvPr>
+        </p:nvSpPr>
+        <p:spPr>
+          <a:xfrm>
+            <a:off x="8472458" y="4663217"/>
+            <a:ext cx="548700" cy="393600"/>
+          </a:xfrm>
+          <a:prstGeom prst="rect">
+            <a:avLst/>
+          </a:prstGeom>
+        </p:spPr>
+        <p:txBody>
+          <a:bodyPr spcFirstLastPara="1" wrap="square" lIns="91425" tIns="91425" rIns="91425" bIns="91425" anchor="ctr" anchorCtr="0">
+            <a:noAutofit/>
+          </a:bodyPr>
+          <a:lstStyle/>
+          <a:p>
+            <a:pPr marL="0" lvl="0" indent="0" algn="r" rtl="0">
+              <a:spcBef>
+                <a:spcPts val="0"/>
+              </a:spcBef>
+              <a:spcAft>
+                <a:spcPts val="0"/>
+              </a:spcAft>
+              <a:buNone/>
+            </a:pPr>
+            <a:fld id="{00000000-1234-1234-1234-123412341234}" type="slidenum">
+              <a:rPr lang="en"/>
+              <a:t>12</a:t>
+            </a:fld>
+            <a:endParaRPr/>
+          </a:p>
+        </p:txBody>
+      </p:sp>
+      <p:pic>
+        <p:nvPicPr>
+          <p:cNvPr id="4" name="Picture 3">
+            <a:extLst>
+              <a:ext uri="{FF2B5EF4-FFF2-40B4-BE49-F238E27FC236}">
+                <a16:creationId xmlns:a16="http://schemas.microsoft.com/office/drawing/2014/main" id="{DCD752B9-EFAE-AFC1-7D39-6763B89DE8D3}"/>
+              </a:ext>
+            </a:extLst>
+          </p:cNvPr>
+          <p:cNvPicPr>
+            <a:picLocks noChangeAspect="1"/>
+          </p:cNvPicPr>
+          <p:nvPr/>
+        </p:nvPicPr>
+        <p:blipFill>
+          <a:blip r:embed="rId3"/>
+          <a:stretch>
+            <a:fillRect/>
+          </a:stretch>
+        </p:blipFill>
+        <p:spPr>
+          <a:xfrm>
+            <a:off x="0" y="652130"/>
+            <a:ext cx="9144000" cy="4491369"/>
+          </a:xfrm>
+          <a:prstGeom prst="rect">
+            <a:avLst/>
+          </a:prstGeom>
+        </p:spPr>
+      </p:pic>
+    </p:spTree>
+    <p:extLst>
+      <p:ext uri="{BB962C8B-B14F-4D97-AF65-F5344CB8AC3E}">
+        <p14:creationId xmlns:p14="http://schemas.microsoft.com/office/powerpoint/2010/main" val="3365057756"/>
+      </p:ext>
+    </p:extLst>
+  </p:cSld>
+  <p:clrMapOvr>
+    <a:masterClrMapping/>
+  </p:clrMapOvr>
+</p:sld>
+</file>
+
+<file path=ppt/slides/slide2.xml><?xml version="1.0" encoding="utf-8"?>
 <p:sld xmlns:a="http://schemas.openxmlformats.org/drawingml/2006/main" xmlns:r="http://schemas.openxmlformats.org/officeDocument/2006/relationships" xmlns:p="http://schemas.openxmlformats.org/presentationml/2006/main" show="0">
   <p:cSld>
     <p:spTree>
@@ -8314,7 +7741,7 @@
             </a:pPr>
             <a:fld id="{00000000-1234-1234-1234-123412341234}" type="slidenum">
               <a:rPr lang="en"/>
-              <a:t>3</a:t>
+              <a:t>2</a:t>
             </a:fld>
             <a:endParaRPr/>
           </a:p>
@@ -9068,7 +8495,7 @@
 </p:sld>
 </file>
 
-<file path=ppt/slides/slide4.xml><?xml version="1.0" encoding="utf-8"?>
+<file path=ppt/slides/slide3.xml><?xml version="1.0" encoding="utf-8"?>
 <p:sld xmlns:a="http://schemas.openxmlformats.org/drawingml/2006/main" xmlns:r="http://schemas.openxmlformats.org/officeDocument/2006/relationships" xmlns:p="http://schemas.openxmlformats.org/presentationml/2006/main" show="0">
   <p:cSld>
     <p:spTree>
@@ -9163,7 +8590,7 @@
             </a:pPr>
             <a:fld id="{00000000-1234-1234-1234-123412341234}" type="slidenum">
               <a:rPr lang="en"/>
-              <a:t>4</a:t>
+              <a:t>3</a:t>
             </a:fld>
             <a:endParaRPr/>
           </a:p>
@@ -9627,6 +9054,579 @@
     <p:extLst>
       <p:ext uri="{BB962C8B-B14F-4D97-AF65-F5344CB8AC3E}">
         <p14:creationId xmlns:p14="http://schemas.microsoft.com/office/powerpoint/2010/main" val="604294447"/>
+      </p:ext>
+    </p:extLst>
+  </p:cSld>
+  <p:clrMapOvr>
+    <a:masterClrMapping/>
+  </p:clrMapOvr>
+</p:sld>
+</file>
+
+<file path=ppt/slides/slide4.xml><?xml version="1.0" encoding="utf-8"?>
+<p:sld xmlns:a="http://schemas.openxmlformats.org/drawingml/2006/main" xmlns:r="http://schemas.openxmlformats.org/officeDocument/2006/relationships" xmlns:p="http://schemas.openxmlformats.org/presentationml/2006/main" show="0">
+  <p:cSld>
+    <p:spTree>
+      <p:nvGrpSpPr>
+        <p:cNvPr id="1" name="Shape 323"/>
+        <p:cNvGrpSpPr/>
+        <p:nvPr/>
+      </p:nvGrpSpPr>
+      <p:grpSpPr>
+        <a:xfrm>
+          <a:off x="0" y="0"/>
+          <a:ext cx="0" cy="0"/>
+          <a:chOff x="0" y="0"/>
+          <a:chExt cx="0" cy="0"/>
+        </a:xfrm>
+      </p:grpSpPr>
+      <p:sp>
+        <p:nvSpPr>
+          <p:cNvPr id="324" name="Google Shape;324;p47"/>
+          <p:cNvSpPr txBox="1">
+            <a:spLocks noGrp="1"/>
+          </p:cNvSpPr>
+          <p:nvPr>
+            <p:ph type="title"/>
+          </p:nvPr>
+        </p:nvSpPr>
+        <p:spPr>
+          <a:xfrm>
+            <a:off x="314621" y="235914"/>
+            <a:ext cx="8520600" cy="623700"/>
+          </a:xfrm>
+          <a:prstGeom prst="rect">
+            <a:avLst/>
+          </a:prstGeom>
+        </p:spPr>
+        <p:txBody>
+          <a:bodyPr spcFirstLastPara="1" wrap="square" lIns="91425" tIns="91425" rIns="91425" bIns="91425" anchor="t" anchorCtr="0">
+            <a:noAutofit/>
+          </a:bodyPr>
+          <a:lstStyle/>
+          <a:p>
+            <a:pPr marL="0" lvl="0" indent="0" algn="ctr" rtl="0">
+              <a:spcBef>
+                <a:spcPts val="0"/>
+              </a:spcBef>
+              <a:spcAft>
+                <a:spcPts val="0"/>
+              </a:spcAft>
+              <a:buNone/>
+            </a:pPr>
+            <a:r>
+              <a:rPr lang="en-US" dirty="0"/>
+              <a:t>GCIS – Software Development and Problem Solving</a:t>
+            </a:r>
+            <a:endParaRPr dirty="0"/>
+          </a:p>
+        </p:txBody>
+      </p:sp>
+      <p:sp>
+        <p:nvSpPr>
+          <p:cNvPr id="325" name="Google Shape;325;p47"/>
+          <p:cNvSpPr txBox="1">
+            <a:spLocks noGrp="1"/>
+          </p:cNvSpPr>
+          <p:nvPr>
+            <p:ph type="body" idx="1"/>
+          </p:nvPr>
+        </p:nvSpPr>
+        <p:spPr>
+          <a:xfrm>
+            <a:off x="0" y="1856257"/>
+            <a:ext cx="9149842" cy="1226403"/>
+          </a:xfrm>
+          <a:prstGeom prst="rect">
+            <a:avLst/>
+          </a:prstGeom>
+        </p:spPr>
+        <p:txBody>
+          <a:bodyPr spcFirstLastPara="1" wrap="square" lIns="91425" tIns="91425" rIns="91425" bIns="91425" anchor="ctr" anchorCtr="0">
+            <a:noAutofit/>
+          </a:bodyPr>
+          <a:lstStyle/>
+          <a:p>
+            <a:pPr marL="146050" indent="0" algn="ctr">
+              <a:buNone/>
+            </a:pPr>
+            <a:r>
+              <a:rPr lang="en-US" sz="2400" dirty="0"/>
+              <a:t>Take Quiz – Midterm Exam 2</a:t>
+            </a:r>
+          </a:p>
+          <a:p>
+            <a:pPr marL="146050" indent="0" algn="ctr">
+              <a:buNone/>
+            </a:pPr>
+            <a:r>
+              <a:rPr lang="en-US" sz="3200" b="1" dirty="0">
+                <a:solidFill>
+                  <a:schemeClr val="tx1"/>
+                </a:solidFill>
+              </a:rPr>
+              <a:t>Password -</a:t>
+            </a:r>
+            <a:r>
+              <a:rPr lang="en-US" sz="3200" b="1">
+                <a:solidFill>
+                  <a:schemeClr val="tx1"/>
+                </a:solidFill>
+              </a:rPr>
+              <a:t>CompareIterators</a:t>
+            </a:r>
+            <a:endParaRPr sz="3200" b="1" dirty="0">
+              <a:solidFill>
+                <a:schemeClr val="tx1"/>
+              </a:solidFill>
+              <a:highlight>
+                <a:srgbClr val="FFFF00"/>
+              </a:highlight>
+            </a:endParaRPr>
+          </a:p>
+        </p:txBody>
+      </p:sp>
+      <p:sp>
+        <p:nvSpPr>
+          <p:cNvPr id="326" name="Google Shape;326;p47"/>
+          <p:cNvSpPr txBox="1">
+            <a:spLocks noGrp="1"/>
+          </p:cNvSpPr>
+          <p:nvPr>
+            <p:ph type="sldNum" idx="12"/>
+          </p:nvPr>
+        </p:nvSpPr>
+        <p:spPr>
+          <a:xfrm>
+            <a:off x="8472458" y="4663217"/>
+            <a:ext cx="548700" cy="393600"/>
+          </a:xfrm>
+          <a:prstGeom prst="rect">
+            <a:avLst/>
+          </a:prstGeom>
+        </p:spPr>
+        <p:txBody>
+          <a:bodyPr spcFirstLastPara="1" wrap="square" lIns="91425" tIns="91425" rIns="91425" bIns="91425" anchor="ctr" anchorCtr="0">
+            <a:noAutofit/>
+          </a:bodyPr>
+          <a:lstStyle/>
+          <a:p>
+            <a:pPr marL="0" lvl="0" indent="0" algn="r" rtl="0">
+              <a:spcBef>
+                <a:spcPts val="0"/>
+              </a:spcBef>
+              <a:spcAft>
+                <a:spcPts val="0"/>
+              </a:spcAft>
+              <a:buNone/>
+            </a:pPr>
+            <a:fld id="{00000000-1234-1234-1234-123412341234}" type="slidenum">
+              <a:rPr lang="en"/>
+              <a:t>4</a:t>
+            </a:fld>
+            <a:endParaRPr/>
+          </a:p>
+        </p:txBody>
+      </p:sp>
+      <p:sp>
+        <p:nvSpPr>
+          <p:cNvPr id="2" name="TextBox 1">
+            <a:extLst>
+              <a:ext uri="{FF2B5EF4-FFF2-40B4-BE49-F238E27FC236}">
+                <a16:creationId xmlns:a16="http://schemas.microsoft.com/office/drawing/2014/main" id="{DCC33EBB-1C9D-B9A9-88E6-F3466077417F}"/>
+              </a:ext>
+            </a:extLst>
+          </p:cNvPr>
+          <p:cNvSpPr txBox="1"/>
+          <p:nvPr/>
+        </p:nvSpPr>
+        <p:spPr>
+          <a:xfrm>
+            <a:off x="-5842" y="1277369"/>
+            <a:ext cx="9144000" cy="307777"/>
+          </a:xfrm>
+          <a:prstGeom prst="rect">
+            <a:avLst/>
+          </a:prstGeom>
+          <a:solidFill>
+            <a:srgbClr val="FFC000"/>
+          </a:solidFill>
+        </p:spPr>
+        <p:txBody>
+          <a:bodyPr wrap="square" rtlCol="0">
+            <a:spAutoFit/>
+          </a:bodyPr>
+          <a:lstStyle/>
+          <a:p>
+            <a:pPr algn="ctr"/>
+            <a:r>
+              <a:rPr lang="en-US" b="1" dirty="0"/>
+              <a:t>Midterm Exam 2 - Written</a:t>
+            </a:r>
+          </a:p>
+        </p:txBody>
+      </p:sp>
+      <p:sp>
+        <p:nvSpPr>
+          <p:cNvPr id="3" name="TextBox 2">
+            <a:extLst>
+              <a:ext uri="{FF2B5EF4-FFF2-40B4-BE49-F238E27FC236}">
+                <a16:creationId xmlns:a16="http://schemas.microsoft.com/office/drawing/2014/main" id="{25A19346-2F9F-0DB9-0B08-CF872EB1D563}"/>
+              </a:ext>
+            </a:extLst>
+          </p:cNvPr>
+          <p:cNvSpPr txBox="1"/>
+          <p:nvPr/>
+        </p:nvSpPr>
+        <p:spPr>
+          <a:xfrm>
+            <a:off x="0" y="3313985"/>
+            <a:ext cx="9144000" cy="307777"/>
+          </a:xfrm>
+          <a:prstGeom prst="rect">
+            <a:avLst/>
+          </a:prstGeom>
+          <a:solidFill>
+            <a:srgbClr val="FFC000"/>
+          </a:solidFill>
+        </p:spPr>
+        <p:txBody>
+          <a:bodyPr wrap="square" rtlCol="0">
+            <a:spAutoFit/>
+          </a:bodyPr>
+          <a:lstStyle/>
+          <a:p>
+            <a:r>
+              <a:rPr lang="en-US" dirty="0"/>
+              <a:t>Practicum</a:t>
+            </a:r>
+          </a:p>
+        </p:txBody>
+      </p:sp>
+      <p:sp>
+        <p:nvSpPr>
+          <p:cNvPr id="4" name="Google Shape;325;p47">
+            <a:extLst>
+              <a:ext uri="{FF2B5EF4-FFF2-40B4-BE49-F238E27FC236}">
+                <a16:creationId xmlns:a16="http://schemas.microsoft.com/office/drawing/2014/main" id="{11D0E6FB-E344-369B-CE83-B3CF5834F823}"/>
+              </a:ext>
+            </a:extLst>
+          </p:cNvPr>
+          <p:cNvSpPr txBox="1">
+            <a:spLocks/>
+          </p:cNvSpPr>
+          <p:nvPr/>
+        </p:nvSpPr>
+        <p:spPr>
+          <a:xfrm>
+            <a:off x="122842" y="3621762"/>
+            <a:ext cx="8478300" cy="1435054"/>
+          </a:xfrm>
+          <a:prstGeom prst="rect">
+            <a:avLst/>
+          </a:prstGeom>
+          <a:noFill/>
+          <a:ln>
+            <a:noFill/>
+          </a:ln>
+        </p:spPr>
+        <p:txBody>
+          <a:bodyPr spcFirstLastPara="1" wrap="square" lIns="91425" tIns="91425" rIns="91425" bIns="91425" anchor="ctr" anchorCtr="0">
+            <a:noAutofit/>
+          </a:bodyPr>
+          <a:lstStyle>
+            <a:defPPr marR="0" lvl="0" algn="l" rtl="0">
+              <a:lnSpc>
+                <a:spcPct val="100000"/>
+              </a:lnSpc>
+              <a:spcBef>
+                <a:spcPts val="0"/>
+              </a:spcBef>
+              <a:spcAft>
+                <a:spcPts val="0"/>
+              </a:spcAft>
+            </a:defPPr>
+            <a:lvl1pPr marL="457200" marR="0" lvl="0" indent="-311150" algn="l" rtl="0">
+              <a:lnSpc>
+                <a:spcPct val="115000"/>
+              </a:lnSpc>
+              <a:spcBef>
+                <a:spcPts val="0"/>
+              </a:spcBef>
+              <a:spcAft>
+                <a:spcPts val="0"/>
+              </a:spcAft>
+              <a:buClr>
+                <a:schemeClr val="dk2"/>
+              </a:buClr>
+              <a:buSzPts val="1300"/>
+              <a:buFont typeface="Roboto"/>
+              <a:buChar char="●"/>
+              <a:defRPr sz="1300" b="0" i="0" u="none" strike="noStrike" cap="none">
+                <a:solidFill>
+                  <a:schemeClr val="dk2"/>
+                </a:solidFill>
+                <a:latin typeface="Roboto"/>
+                <a:ea typeface="Roboto"/>
+                <a:cs typeface="Roboto"/>
+                <a:sym typeface="Roboto"/>
+              </a:defRPr>
+            </a:lvl1pPr>
+            <a:lvl2pPr marL="914400" marR="0" lvl="1" indent="-298450" algn="l" rtl="0">
+              <a:lnSpc>
+                <a:spcPct val="115000"/>
+              </a:lnSpc>
+              <a:spcBef>
+                <a:spcPts val="1600"/>
+              </a:spcBef>
+              <a:spcAft>
+                <a:spcPts val="0"/>
+              </a:spcAft>
+              <a:buClr>
+                <a:schemeClr val="dk2"/>
+              </a:buClr>
+              <a:buSzPts val="1100"/>
+              <a:buFont typeface="Roboto"/>
+              <a:buChar char="○"/>
+              <a:defRPr sz="1100" b="0" i="0" u="none" strike="noStrike" cap="none">
+                <a:solidFill>
+                  <a:schemeClr val="dk2"/>
+                </a:solidFill>
+                <a:latin typeface="Roboto"/>
+                <a:ea typeface="Roboto"/>
+                <a:cs typeface="Roboto"/>
+                <a:sym typeface="Roboto"/>
+              </a:defRPr>
+            </a:lvl2pPr>
+            <a:lvl3pPr marL="1371600" marR="0" lvl="2" indent="-298450" algn="l" rtl="0">
+              <a:lnSpc>
+                <a:spcPct val="115000"/>
+              </a:lnSpc>
+              <a:spcBef>
+                <a:spcPts val="1600"/>
+              </a:spcBef>
+              <a:spcAft>
+                <a:spcPts val="0"/>
+              </a:spcAft>
+              <a:buClr>
+                <a:schemeClr val="dk2"/>
+              </a:buClr>
+              <a:buSzPts val="1100"/>
+              <a:buFont typeface="Roboto"/>
+              <a:buChar char="■"/>
+              <a:defRPr sz="1100" b="0" i="0" u="none" strike="noStrike" cap="none">
+                <a:solidFill>
+                  <a:schemeClr val="dk2"/>
+                </a:solidFill>
+                <a:latin typeface="Roboto"/>
+                <a:ea typeface="Roboto"/>
+                <a:cs typeface="Roboto"/>
+                <a:sym typeface="Roboto"/>
+              </a:defRPr>
+            </a:lvl3pPr>
+            <a:lvl4pPr marL="1828800" marR="0" lvl="3" indent="-298450" algn="l" rtl="0">
+              <a:lnSpc>
+                <a:spcPct val="115000"/>
+              </a:lnSpc>
+              <a:spcBef>
+                <a:spcPts val="1600"/>
+              </a:spcBef>
+              <a:spcAft>
+                <a:spcPts val="0"/>
+              </a:spcAft>
+              <a:buClr>
+                <a:schemeClr val="dk2"/>
+              </a:buClr>
+              <a:buSzPts val="1100"/>
+              <a:buFont typeface="Roboto"/>
+              <a:buChar char="●"/>
+              <a:defRPr sz="1100" b="0" i="0" u="none" strike="noStrike" cap="none">
+                <a:solidFill>
+                  <a:schemeClr val="dk2"/>
+                </a:solidFill>
+                <a:latin typeface="Roboto"/>
+                <a:ea typeface="Roboto"/>
+                <a:cs typeface="Roboto"/>
+                <a:sym typeface="Roboto"/>
+              </a:defRPr>
+            </a:lvl4pPr>
+            <a:lvl5pPr marL="2286000" marR="0" lvl="4" indent="-298450" algn="l" rtl="0">
+              <a:lnSpc>
+                <a:spcPct val="115000"/>
+              </a:lnSpc>
+              <a:spcBef>
+                <a:spcPts val="1600"/>
+              </a:spcBef>
+              <a:spcAft>
+                <a:spcPts val="0"/>
+              </a:spcAft>
+              <a:buClr>
+                <a:schemeClr val="dk2"/>
+              </a:buClr>
+              <a:buSzPts val="1100"/>
+              <a:buFont typeface="Roboto"/>
+              <a:buChar char="○"/>
+              <a:defRPr sz="1100" b="0" i="0" u="none" strike="noStrike" cap="none">
+                <a:solidFill>
+                  <a:schemeClr val="dk2"/>
+                </a:solidFill>
+                <a:latin typeface="Roboto"/>
+                <a:ea typeface="Roboto"/>
+                <a:cs typeface="Roboto"/>
+                <a:sym typeface="Roboto"/>
+              </a:defRPr>
+            </a:lvl5pPr>
+            <a:lvl6pPr marL="2743200" marR="0" lvl="5" indent="-298450" algn="l" rtl="0">
+              <a:lnSpc>
+                <a:spcPct val="115000"/>
+              </a:lnSpc>
+              <a:spcBef>
+                <a:spcPts val="1600"/>
+              </a:spcBef>
+              <a:spcAft>
+                <a:spcPts val="0"/>
+              </a:spcAft>
+              <a:buClr>
+                <a:schemeClr val="dk2"/>
+              </a:buClr>
+              <a:buSzPts val="1100"/>
+              <a:buFont typeface="Roboto"/>
+              <a:buChar char="■"/>
+              <a:defRPr sz="1100" b="0" i="0" u="none" strike="noStrike" cap="none">
+                <a:solidFill>
+                  <a:schemeClr val="dk2"/>
+                </a:solidFill>
+                <a:latin typeface="Roboto"/>
+                <a:ea typeface="Roboto"/>
+                <a:cs typeface="Roboto"/>
+                <a:sym typeface="Roboto"/>
+              </a:defRPr>
+            </a:lvl6pPr>
+            <a:lvl7pPr marL="3200400" marR="0" lvl="6" indent="-298450" algn="l" rtl="0">
+              <a:lnSpc>
+                <a:spcPct val="115000"/>
+              </a:lnSpc>
+              <a:spcBef>
+                <a:spcPts val="1600"/>
+              </a:spcBef>
+              <a:spcAft>
+                <a:spcPts val="0"/>
+              </a:spcAft>
+              <a:buClr>
+                <a:schemeClr val="dk2"/>
+              </a:buClr>
+              <a:buSzPts val="1100"/>
+              <a:buFont typeface="Roboto"/>
+              <a:buChar char="●"/>
+              <a:defRPr sz="1100" b="0" i="0" u="none" strike="noStrike" cap="none">
+                <a:solidFill>
+                  <a:schemeClr val="dk2"/>
+                </a:solidFill>
+                <a:latin typeface="Roboto"/>
+                <a:ea typeface="Roboto"/>
+                <a:cs typeface="Roboto"/>
+                <a:sym typeface="Roboto"/>
+              </a:defRPr>
+            </a:lvl7pPr>
+            <a:lvl8pPr marL="3657600" marR="0" lvl="7" indent="-298450" algn="l" rtl="0">
+              <a:lnSpc>
+                <a:spcPct val="115000"/>
+              </a:lnSpc>
+              <a:spcBef>
+                <a:spcPts val="1600"/>
+              </a:spcBef>
+              <a:spcAft>
+                <a:spcPts val="0"/>
+              </a:spcAft>
+              <a:buClr>
+                <a:schemeClr val="dk2"/>
+              </a:buClr>
+              <a:buSzPts val="1100"/>
+              <a:buFont typeface="Roboto"/>
+              <a:buChar char="○"/>
+              <a:defRPr sz="1100" b="0" i="0" u="none" strike="noStrike" cap="none">
+                <a:solidFill>
+                  <a:schemeClr val="dk2"/>
+                </a:solidFill>
+                <a:latin typeface="Roboto"/>
+                <a:ea typeface="Roboto"/>
+                <a:cs typeface="Roboto"/>
+                <a:sym typeface="Roboto"/>
+              </a:defRPr>
+            </a:lvl8pPr>
+            <a:lvl9pPr marL="4114800" marR="0" lvl="8" indent="-298450" algn="l" rtl="0">
+              <a:lnSpc>
+                <a:spcPct val="115000"/>
+              </a:lnSpc>
+              <a:spcBef>
+                <a:spcPts val="1600"/>
+              </a:spcBef>
+              <a:spcAft>
+                <a:spcPts val="1600"/>
+              </a:spcAft>
+              <a:buClr>
+                <a:schemeClr val="dk2"/>
+              </a:buClr>
+              <a:buSzPts val="1100"/>
+              <a:buFont typeface="Roboto"/>
+              <a:buChar char="■"/>
+              <a:defRPr sz="1100" b="0" i="0" u="none" strike="noStrike" cap="none">
+                <a:solidFill>
+                  <a:schemeClr val="dk2"/>
+                </a:solidFill>
+                <a:latin typeface="Roboto"/>
+                <a:ea typeface="Roboto"/>
+                <a:cs typeface="Roboto"/>
+                <a:sym typeface="Roboto"/>
+              </a:defRPr>
+            </a:lvl9pPr>
+          </a:lstStyle>
+          <a:p>
+            <a:pPr marL="342900" indent="-342900">
+              <a:spcAft>
+                <a:spcPts val="1600"/>
+              </a:spcAft>
+            </a:pPr>
+            <a:r>
+              <a:rPr lang="en-US" sz="1600" dirty="0"/>
+              <a:t>Accept assignment Mid Exam 2 under Instructor -&gt; Alam -&gt; Exam</a:t>
+            </a:r>
+            <a:endParaRPr lang="en-US" sz="1600" dirty="0">
+              <a:solidFill>
+                <a:schemeClr val="tx1"/>
+              </a:solidFill>
+            </a:endParaRPr>
+          </a:p>
+          <a:p>
+            <a:pPr marL="342900" indent="-342900">
+              <a:spcAft>
+                <a:spcPts val="1600"/>
+              </a:spcAft>
+            </a:pPr>
+            <a:r>
+              <a:rPr lang="en-US" sz="1600" dirty="0">
+                <a:solidFill>
+                  <a:schemeClr val="tx1"/>
+                </a:solidFill>
+              </a:rPr>
+              <a:t>Clone the repository for </a:t>
+            </a:r>
+            <a:r>
+              <a:rPr lang="en-US" sz="1600" dirty="0"/>
+              <a:t>Mid Exam 2 </a:t>
+            </a:r>
+            <a:endParaRPr lang="en-US" sz="1600" dirty="0">
+              <a:solidFill>
+                <a:schemeClr val="tx1"/>
+              </a:solidFill>
+            </a:endParaRPr>
+          </a:p>
+        </p:txBody>
+      </p:sp>
+    </p:spTree>
+    <p:extLst>
+      <p:ext uri="{BB962C8B-B14F-4D97-AF65-F5344CB8AC3E}">
+        <p14:creationId xmlns:p14="http://schemas.microsoft.com/office/powerpoint/2010/main" val="943055912"/>
       </p:ext>
     </p:extLst>
   </p:cSld>

--- a/Presentation/Announcement.pptx
+++ b/Presentation/Announcement.pptx
@@ -5,38 +5,39 @@
     <p:sldMasterId id="2147483672" r:id="rId1"/>
   </p:sldMasterIdLst>
   <p:notesMasterIdLst>
-    <p:notesMasterId r:id="rId14"/>
+    <p:notesMasterId r:id="rId15"/>
   </p:notesMasterIdLst>
   <p:sldIdLst>
     <p:sldId id="276" r:id="rId2"/>
-    <p:sldId id="286" r:id="rId3"/>
-    <p:sldId id="281" r:id="rId4"/>
-    <p:sldId id="278" r:id="rId5"/>
-    <p:sldId id="287" r:id="rId6"/>
-    <p:sldId id="285" r:id="rId7"/>
-    <p:sldId id="284" r:id="rId8"/>
-    <p:sldId id="277" r:id="rId9"/>
-    <p:sldId id="280" r:id="rId10"/>
-    <p:sldId id="279" r:id="rId11"/>
-    <p:sldId id="283" r:id="rId12"/>
-    <p:sldId id="282" r:id="rId13"/>
+    <p:sldId id="288" r:id="rId3"/>
+    <p:sldId id="286" r:id="rId4"/>
+    <p:sldId id="281" r:id="rId5"/>
+    <p:sldId id="278" r:id="rId6"/>
+    <p:sldId id="287" r:id="rId7"/>
+    <p:sldId id="285" r:id="rId8"/>
+    <p:sldId id="284" r:id="rId9"/>
+    <p:sldId id="277" r:id="rId10"/>
+    <p:sldId id="280" r:id="rId11"/>
+    <p:sldId id="279" r:id="rId12"/>
+    <p:sldId id="283" r:id="rId13"/>
+    <p:sldId id="282" r:id="rId14"/>
   </p:sldIdLst>
   <p:sldSz cx="9144000" cy="5143500" type="screen16x9"/>
   <p:notesSz cx="7010400" cy="9296400"/>
   <p:embeddedFontLst>
     <p:embeddedFont>
       <p:font typeface="Merriweather" panose="00000500000000000000" pitchFamily="2" charset="0"/>
-      <p:regular r:id="rId15"/>
-      <p:bold r:id="rId16"/>
-      <p:italic r:id="rId17"/>
-      <p:boldItalic r:id="rId18"/>
+      <p:regular r:id="rId16"/>
+      <p:bold r:id="rId17"/>
+      <p:italic r:id="rId18"/>
+      <p:boldItalic r:id="rId19"/>
     </p:embeddedFont>
     <p:embeddedFont>
       <p:font typeface="Roboto" panose="02000000000000000000" pitchFamily="2" charset="0"/>
-      <p:regular r:id="rId19"/>
-      <p:bold r:id="rId20"/>
-      <p:italic r:id="rId21"/>
-      <p:boldItalic r:id="rId22"/>
+      <p:regular r:id="rId20"/>
+      <p:bold r:id="rId21"/>
+      <p:italic r:id="rId22"/>
+      <p:boldItalic r:id="rId23"/>
     </p:embeddedFont>
   </p:embeddedFontLst>
   <p:defaultTextStyle>
@@ -925,7 +926,7 @@
     </p:spTree>
     <p:extLst>
       <p:ext uri="{BB962C8B-B14F-4D97-AF65-F5344CB8AC3E}">
-        <p14:creationId xmlns:p14="http://schemas.microsoft.com/office/powerpoint/2010/main" val="1423659308"/>
+        <p14:creationId xmlns:p14="http://schemas.microsoft.com/office/powerpoint/2010/main" val="19610079"/>
       </p:ext>
     </p:extLst>
   </p:cSld>
@@ -1028,7 +1029,7 @@
     </p:spTree>
     <p:extLst>
       <p:ext uri="{BB962C8B-B14F-4D97-AF65-F5344CB8AC3E}">
-        <p14:creationId xmlns:p14="http://schemas.microsoft.com/office/powerpoint/2010/main" val="3243937958"/>
+        <p14:creationId xmlns:p14="http://schemas.microsoft.com/office/powerpoint/2010/main" val="1423659308"/>
       </p:ext>
     </p:extLst>
   </p:cSld>
@@ -1131,6 +1132,109 @@
     </p:spTree>
     <p:extLst>
       <p:ext uri="{BB962C8B-B14F-4D97-AF65-F5344CB8AC3E}">
+        <p14:creationId xmlns:p14="http://schemas.microsoft.com/office/powerpoint/2010/main" val="3243937958"/>
+      </p:ext>
+    </p:extLst>
+  </p:cSld>
+  <p:clrMapOvr>
+    <a:masterClrMapping/>
+  </p:clrMapOvr>
+</p:notes>
+</file>
+
+<file path=ppt/notesSlides/notesSlide13.xml><?xml version="1.0" encoding="utf-8"?>
+<p:notes xmlns:a="http://schemas.openxmlformats.org/drawingml/2006/main" xmlns:r="http://schemas.openxmlformats.org/officeDocument/2006/relationships" xmlns:p="http://schemas.openxmlformats.org/presentationml/2006/main" showMasterSp="0" showMasterPhAnim="0">
+  <p:cSld>
+    <p:spTree>
+      <p:nvGrpSpPr>
+        <p:cNvPr id="1" name="Shape 320"/>
+        <p:cNvGrpSpPr/>
+        <p:nvPr/>
+      </p:nvGrpSpPr>
+      <p:grpSpPr>
+        <a:xfrm>
+          <a:off x="0" y="0"/>
+          <a:ext cx="0" cy="0"/>
+          <a:chOff x="0" y="0"/>
+          <a:chExt cx="0" cy="0"/>
+        </a:xfrm>
+      </p:grpSpPr>
+      <p:sp>
+        <p:nvSpPr>
+          <p:cNvPr id="321" name="Google Shape;321;g8f52c9b70a_3_0:notes"/>
+          <p:cNvSpPr>
+            <a:spLocks noGrp="1" noRot="1" noChangeAspect="1"/>
+          </p:cNvSpPr>
+          <p:nvPr>
+            <p:ph type="sldImg" idx="2"/>
+          </p:nvPr>
+        </p:nvSpPr>
+        <p:spPr>
+          <a:xfrm>
+            <a:off x="406400" y="696913"/>
+            <a:ext cx="6197600" cy="3486150"/>
+          </a:xfrm>
+          <a:custGeom>
+            <a:avLst/>
+            <a:gdLst/>
+            <a:ahLst/>
+            <a:cxnLst/>
+            <a:rect l="l" t="t" r="r" b="b"/>
+            <a:pathLst>
+              <a:path w="120000" h="120000" extrusionOk="0">
+                <a:moveTo>
+                  <a:pt x="0" y="0"/>
+                </a:moveTo>
+                <a:lnTo>
+                  <a:pt x="120000" y="0"/>
+                </a:lnTo>
+                <a:lnTo>
+                  <a:pt x="120000" y="120000"/>
+                </a:lnTo>
+                <a:lnTo>
+                  <a:pt x="0" y="120000"/>
+                </a:lnTo>
+                <a:close/>
+              </a:path>
+            </a:pathLst>
+          </a:custGeom>
+        </p:spPr>
+      </p:sp>
+      <p:sp>
+        <p:nvSpPr>
+          <p:cNvPr id="322" name="Google Shape;322;g8f52c9b70a_3_0:notes"/>
+          <p:cNvSpPr txBox="1">
+            <a:spLocks noGrp="1"/>
+          </p:cNvSpPr>
+          <p:nvPr>
+            <p:ph type="body" idx="1"/>
+          </p:nvPr>
+        </p:nvSpPr>
+        <p:spPr>
+          <a:xfrm>
+            <a:off x="701040" y="4415790"/>
+            <a:ext cx="5608320" cy="4183380"/>
+          </a:xfrm>
+          <a:prstGeom prst="rect">
+            <a:avLst/>
+          </a:prstGeom>
+        </p:spPr>
+        <p:txBody>
+          <a:bodyPr spcFirstLastPara="1" wrap="square" lIns="93162" tIns="93162" rIns="93162" bIns="93162" anchor="t" anchorCtr="0">
+            <a:noAutofit/>
+          </a:bodyPr>
+          <a:lstStyle/>
+          <a:p>
+            <a:pPr marL="0" indent="0">
+              <a:buNone/>
+            </a:pPr>
+            <a:endParaRPr/>
+          </a:p>
+        </p:txBody>
+      </p:sp>
+    </p:spTree>
+    <p:extLst>
+      <p:ext uri="{BB962C8B-B14F-4D97-AF65-F5344CB8AC3E}">
         <p14:creationId xmlns:p14="http://schemas.microsoft.com/office/powerpoint/2010/main" val="4192097652"/>
       </p:ext>
     </p:extLst>
@@ -1142,6 +1246,127 @@
 </file>
 
 <file path=ppt/notesSlides/notesSlide2.xml><?xml version="1.0" encoding="utf-8"?>
+<p:notes xmlns:a="http://schemas.openxmlformats.org/drawingml/2006/main" xmlns:r="http://schemas.openxmlformats.org/officeDocument/2006/relationships" xmlns:p="http://schemas.openxmlformats.org/presentationml/2006/main" showMasterSp="0" showMasterPhAnim="0">
+  <p:cSld>
+    <p:spTree>
+      <p:nvGrpSpPr>
+        <p:cNvPr id="1" name="Shape 320">
+          <a:extLst>
+            <a:ext uri="{FF2B5EF4-FFF2-40B4-BE49-F238E27FC236}">
+              <a16:creationId xmlns:a16="http://schemas.microsoft.com/office/drawing/2014/main" id="{24B78B97-6304-5220-23EC-68FECD8C6202}"/>
+            </a:ext>
+          </a:extLst>
+        </p:cNvPr>
+        <p:cNvGrpSpPr/>
+        <p:nvPr/>
+      </p:nvGrpSpPr>
+      <p:grpSpPr>
+        <a:xfrm>
+          <a:off x="0" y="0"/>
+          <a:ext cx="0" cy="0"/>
+          <a:chOff x="0" y="0"/>
+          <a:chExt cx="0" cy="0"/>
+        </a:xfrm>
+      </p:grpSpPr>
+      <p:sp>
+        <p:nvSpPr>
+          <p:cNvPr id="321" name="Google Shape;321;g8f52c9b70a_3_0:notes">
+            <a:extLst>
+              <a:ext uri="{FF2B5EF4-FFF2-40B4-BE49-F238E27FC236}">
+                <a16:creationId xmlns:a16="http://schemas.microsoft.com/office/drawing/2014/main" id="{683F55B6-ED3F-1E1D-A3FA-7F409D287DAD}"/>
+              </a:ext>
+            </a:extLst>
+          </p:cNvPr>
+          <p:cNvSpPr>
+            <a:spLocks noGrp="1" noRot="1" noChangeAspect="1"/>
+          </p:cNvSpPr>
+          <p:nvPr>
+            <p:ph type="sldImg" idx="2"/>
+          </p:nvPr>
+        </p:nvSpPr>
+        <p:spPr>
+          <a:xfrm>
+            <a:off x="406400" y="696913"/>
+            <a:ext cx="6197600" cy="3486150"/>
+          </a:xfrm>
+          <a:custGeom>
+            <a:avLst/>
+            <a:gdLst/>
+            <a:ahLst/>
+            <a:cxnLst/>
+            <a:rect l="l" t="t" r="r" b="b"/>
+            <a:pathLst>
+              <a:path w="120000" h="120000" extrusionOk="0">
+                <a:moveTo>
+                  <a:pt x="0" y="0"/>
+                </a:moveTo>
+                <a:lnTo>
+                  <a:pt x="120000" y="0"/>
+                </a:lnTo>
+                <a:lnTo>
+                  <a:pt x="120000" y="120000"/>
+                </a:lnTo>
+                <a:lnTo>
+                  <a:pt x="0" y="120000"/>
+                </a:lnTo>
+                <a:close/>
+              </a:path>
+            </a:pathLst>
+          </a:custGeom>
+        </p:spPr>
+      </p:sp>
+      <p:sp>
+        <p:nvSpPr>
+          <p:cNvPr id="322" name="Google Shape;322;g8f52c9b70a_3_0:notes">
+            <a:extLst>
+              <a:ext uri="{FF2B5EF4-FFF2-40B4-BE49-F238E27FC236}">
+                <a16:creationId xmlns:a16="http://schemas.microsoft.com/office/drawing/2014/main" id="{C8A54B26-763A-DEFE-D808-CA7C2747A414}"/>
+              </a:ext>
+            </a:extLst>
+          </p:cNvPr>
+          <p:cNvSpPr txBox="1">
+            <a:spLocks noGrp="1"/>
+          </p:cNvSpPr>
+          <p:nvPr>
+            <p:ph type="body" idx="1"/>
+          </p:nvPr>
+        </p:nvSpPr>
+        <p:spPr>
+          <a:xfrm>
+            <a:off x="701040" y="4415790"/>
+            <a:ext cx="5608320" cy="4183380"/>
+          </a:xfrm>
+          <a:prstGeom prst="rect">
+            <a:avLst/>
+          </a:prstGeom>
+        </p:spPr>
+        <p:txBody>
+          <a:bodyPr spcFirstLastPara="1" wrap="square" lIns="93162" tIns="93162" rIns="93162" bIns="93162" anchor="t" anchorCtr="0">
+            <a:noAutofit/>
+          </a:bodyPr>
+          <a:lstStyle/>
+          <a:p>
+            <a:pPr marL="0" indent="0">
+              <a:buNone/>
+            </a:pPr>
+            <a:endParaRPr/>
+          </a:p>
+        </p:txBody>
+      </p:sp>
+    </p:spTree>
+    <p:extLst>
+      <p:ext uri="{BB962C8B-B14F-4D97-AF65-F5344CB8AC3E}">
+        <p14:creationId xmlns:p14="http://schemas.microsoft.com/office/powerpoint/2010/main" val="1525491664"/>
+      </p:ext>
+    </p:extLst>
+  </p:cSld>
+  <p:clrMapOvr>
+    <a:masterClrMapping/>
+  </p:clrMapOvr>
+</p:notes>
+</file>
+
+<file path=ppt/notesSlides/notesSlide3.xml><?xml version="1.0" encoding="utf-8"?>
 <p:notes xmlns:a="http://schemas.openxmlformats.org/drawingml/2006/main" xmlns:r="http://schemas.openxmlformats.org/officeDocument/2006/relationships" xmlns:p="http://schemas.openxmlformats.org/presentationml/2006/main" showMasterSp="0" showMasterPhAnim="0">
   <p:cSld>
     <p:spTree>
@@ -1262,109 +1487,6 @@
 </p:notes>
 </file>
 
-<file path=ppt/notesSlides/notesSlide3.xml><?xml version="1.0" encoding="utf-8"?>
-<p:notes xmlns:a="http://schemas.openxmlformats.org/drawingml/2006/main" xmlns:r="http://schemas.openxmlformats.org/officeDocument/2006/relationships" xmlns:p="http://schemas.openxmlformats.org/presentationml/2006/main" showMasterSp="0" showMasterPhAnim="0">
-  <p:cSld>
-    <p:spTree>
-      <p:nvGrpSpPr>
-        <p:cNvPr id="1" name="Shape 320"/>
-        <p:cNvGrpSpPr/>
-        <p:nvPr/>
-      </p:nvGrpSpPr>
-      <p:grpSpPr>
-        <a:xfrm>
-          <a:off x="0" y="0"/>
-          <a:ext cx="0" cy="0"/>
-          <a:chOff x="0" y="0"/>
-          <a:chExt cx="0" cy="0"/>
-        </a:xfrm>
-      </p:grpSpPr>
-      <p:sp>
-        <p:nvSpPr>
-          <p:cNvPr id="321" name="Google Shape;321;g8f52c9b70a_3_0:notes"/>
-          <p:cNvSpPr>
-            <a:spLocks noGrp="1" noRot="1" noChangeAspect="1"/>
-          </p:cNvSpPr>
-          <p:nvPr>
-            <p:ph type="sldImg" idx="2"/>
-          </p:nvPr>
-        </p:nvSpPr>
-        <p:spPr>
-          <a:xfrm>
-            <a:off x="406400" y="696913"/>
-            <a:ext cx="6197600" cy="3486150"/>
-          </a:xfrm>
-          <a:custGeom>
-            <a:avLst/>
-            <a:gdLst/>
-            <a:ahLst/>
-            <a:cxnLst/>
-            <a:rect l="l" t="t" r="r" b="b"/>
-            <a:pathLst>
-              <a:path w="120000" h="120000" extrusionOk="0">
-                <a:moveTo>
-                  <a:pt x="0" y="0"/>
-                </a:moveTo>
-                <a:lnTo>
-                  <a:pt x="120000" y="0"/>
-                </a:lnTo>
-                <a:lnTo>
-                  <a:pt x="120000" y="120000"/>
-                </a:lnTo>
-                <a:lnTo>
-                  <a:pt x="0" y="120000"/>
-                </a:lnTo>
-                <a:close/>
-              </a:path>
-            </a:pathLst>
-          </a:custGeom>
-        </p:spPr>
-      </p:sp>
-      <p:sp>
-        <p:nvSpPr>
-          <p:cNvPr id="322" name="Google Shape;322;g8f52c9b70a_3_0:notes"/>
-          <p:cNvSpPr txBox="1">
-            <a:spLocks noGrp="1"/>
-          </p:cNvSpPr>
-          <p:nvPr>
-            <p:ph type="body" idx="1"/>
-          </p:nvPr>
-        </p:nvSpPr>
-        <p:spPr>
-          <a:xfrm>
-            <a:off x="701040" y="4415790"/>
-            <a:ext cx="5608320" cy="4183380"/>
-          </a:xfrm>
-          <a:prstGeom prst="rect">
-            <a:avLst/>
-          </a:prstGeom>
-        </p:spPr>
-        <p:txBody>
-          <a:bodyPr spcFirstLastPara="1" wrap="square" lIns="93162" tIns="93162" rIns="93162" bIns="93162" anchor="t" anchorCtr="0">
-            <a:noAutofit/>
-          </a:bodyPr>
-          <a:lstStyle/>
-          <a:p>
-            <a:pPr marL="0" indent="0">
-              <a:buNone/>
-            </a:pPr>
-            <a:endParaRPr/>
-          </a:p>
-        </p:txBody>
-      </p:sp>
-    </p:spTree>
-    <p:extLst>
-      <p:ext uri="{BB962C8B-B14F-4D97-AF65-F5344CB8AC3E}">
-        <p14:creationId xmlns:p14="http://schemas.microsoft.com/office/powerpoint/2010/main" val="2158134825"/>
-      </p:ext>
-    </p:extLst>
-  </p:cSld>
-  <p:clrMapOvr>
-    <a:masterClrMapping/>
-  </p:clrMapOvr>
-</p:notes>
-</file>
-
 <file path=ppt/notesSlides/notesSlide4.xml><?xml version="1.0" encoding="utf-8"?>
 <p:notes xmlns:a="http://schemas.openxmlformats.org/drawingml/2006/main" xmlns:r="http://schemas.openxmlformats.org/officeDocument/2006/relationships" xmlns:p="http://schemas.openxmlformats.org/presentationml/2006/main" showMasterSp="0" showMasterPhAnim="0">
   <p:cSld>
@@ -1458,6 +1580,109 @@
     </p:spTree>
     <p:extLst>
       <p:ext uri="{BB962C8B-B14F-4D97-AF65-F5344CB8AC3E}">
+        <p14:creationId xmlns:p14="http://schemas.microsoft.com/office/powerpoint/2010/main" val="2158134825"/>
+      </p:ext>
+    </p:extLst>
+  </p:cSld>
+  <p:clrMapOvr>
+    <a:masterClrMapping/>
+  </p:clrMapOvr>
+</p:notes>
+</file>
+
+<file path=ppt/notesSlides/notesSlide5.xml><?xml version="1.0" encoding="utf-8"?>
+<p:notes xmlns:a="http://schemas.openxmlformats.org/drawingml/2006/main" xmlns:r="http://schemas.openxmlformats.org/officeDocument/2006/relationships" xmlns:p="http://schemas.openxmlformats.org/presentationml/2006/main" showMasterSp="0" showMasterPhAnim="0">
+  <p:cSld>
+    <p:spTree>
+      <p:nvGrpSpPr>
+        <p:cNvPr id="1" name="Shape 320"/>
+        <p:cNvGrpSpPr/>
+        <p:nvPr/>
+      </p:nvGrpSpPr>
+      <p:grpSpPr>
+        <a:xfrm>
+          <a:off x="0" y="0"/>
+          <a:ext cx="0" cy="0"/>
+          <a:chOff x="0" y="0"/>
+          <a:chExt cx="0" cy="0"/>
+        </a:xfrm>
+      </p:grpSpPr>
+      <p:sp>
+        <p:nvSpPr>
+          <p:cNvPr id="321" name="Google Shape;321;g8f52c9b70a_3_0:notes"/>
+          <p:cNvSpPr>
+            <a:spLocks noGrp="1" noRot="1" noChangeAspect="1"/>
+          </p:cNvSpPr>
+          <p:nvPr>
+            <p:ph type="sldImg" idx="2"/>
+          </p:nvPr>
+        </p:nvSpPr>
+        <p:spPr>
+          <a:xfrm>
+            <a:off x="406400" y="696913"/>
+            <a:ext cx="6197600" cy="3486150"/>
+          </a:xfrm>
+          <a:custGeom>
+            <a:avLst/>
+            <a:gdLst/>
+            <a:ahLst/>
+            <a:cxnLst/>
+            <a:rect l="l" t="t" r="r" b="b"/>
+            <a:pathLst>
+              <a:path w="120000" h="120000" extrusionOk="0">
+                <a:moveTo>
+                  <a:pt x="0" y="0"/>
+                </a:moveTo>
+                <a:lnTo>
+                  <a:pt x="120000" y="0"/>
+                </a:lnTo>
+                <a:lnTo>
+                  <a:pt x="120000" y="120000"/>
+                </a:lnTo>
+                <a:lnTo>
+                  <a:pt x="0" y="120000"/>
+                </a:lnTo>
+                <a:close/>
+              </a:path>
+            </a:pathLst>
+          </a:custGeom>
+        </p:spPr>
+      </p:sp>
+      <p:sp>
+        <p:nvSpPr>
+          <p:cNvPr id="322" name="Google Shape;322;g8f52c9b70a_3_0:notes"/>
+          <p:cNvSpPr txBox="1">
+            <a:spLocks noGrp="1"/>
+          </p:cNvSpPr>
+          <p:nvPr>
+            <p:ph type="body" idx="1"/>
+          </p:nvPr>
+        </p:nvSpPr>
+        <p:spPr>
+          <a:xfrm>
+            <a:off x="701040" y="4415790"/>
+            <a:ext cx="5608320" cy="4183380"/>
+          </a:xfrm>
+          <a:prstGeom prst="rect">
+            <a:avLst/>
+          </a:prstGeom>
+        </p:spPr>
+        <p:txBody>
+          <a:bodyPr spcFirstLastPara="1" wrap="square" lIns="93162" tIns="93162" rIns="93162" bIns="93162" anchor="t" anchorCtr="0">
+            <a:noAutofit/>
+          </a:bodyPr>
+          <a:lstStyle/>
+          <a:p>
+            <a:pPr marL="0" indent="0">
+              <a:buNone/>
+            </a:pPr>
+            <a:endParaRPr/>
+          </a:p>
+        </p:txBody>
+      </p:sp>
+    </p:spTree>
+    <p:extLst>
+      <p:ext uri="{BB962C8B-B14F-4D97-AF65-F5344CB8AC3E}">
         <p14:creationId xmlns:p14="http://schemas.microsoft.com/office/powerpoint/2010/main" val="4097390636"/>
       </p:ext>
     </p:extLst>
@@ -1468,7 +1693,7 @@
 </p:notes>
 </file>
 
-<file path=ppt/notesSlides/notesSlide5.xml><?xml version="1.0" encoding="utf-8"?>
+<file path=ppt/notesSlides/notesSlide6.xml><?xml version="1.0" encoding="utf-8"?>
 <p:notes xmlns:a="http://schemas.openxmlformats.org/drawingml/2006/main" xmlns:r="http://schemas.openxmlformats.org/officeDocument/2006/relationships" xmlns:p="http://schemas.openxmlformats.org/presentationml/2006/main" showMasterSp="0" showMasterPhAnim="0">
   <p:cSld>
     <p:spTree>
@@ -1589,109 +1814,6 @@
 </p:notes>
 </file>
 
-<file path=ppt/notesSlides/notesSlide6.xml><?xml version="1.0" encoding="utf-8"?>
-<p:notes xmlns:a="http://schemas.openxmlformats.org/drawingml/2006/main" xmlns:r="http://schemas.openxmlformats.org/officeDocument/2006/relationships" xmlns:p="http://schemas.openxmlformats.org/presentationml/2006/main" showMasterSp="0" showMasterPhAnim="0">
-  <p:cSld>
-    <p:spTree>
-      <p:nvGrpSpPr>
-        <p:cNvPr id="1" name="Shape 320"/>
-        <p:cNvGrpSpPr/>
-        <p:nvPr/>
-      </p:nvGrpSpPr>
-      <p:grpSpPr>
-        <a:xfrm>
-          <a:off x="0" y="0"/>
-          <a:ext cx="0" cy="0"/>
-          <a:chOff x="0" y="0"/>
-          <a:chExt cx="0" cy="0"/>
-        </a:xfrm>
-      </p:grpSpPr>
-      <p:sp>
-        <p:nvSpPr>
-          <p:cNvPr id="321" name="Google Shape;321;g8f52c9b70a_3_0:notes"/>
-          <p:cNvSpPr>
-            <a:spLocks noGrp="1" noRot="1" noChangeAspect="1"/>
-          </p:cNvSpPr>
-          <p:nvPr>
-            <p:ph type="sldImg" idx="2"/>
-          </p:nvPr>
-        </p:nvSpPr>
-        <p:spPr>
-          <a:xfrm>
-            <a:off x="406400" y="696913"/>
-            <a:ext cx="6197600" cy="3486150"/>
-          </a:xfrm>
-          <a:custGeom>
-            <a:avLst/>
-            <a:gdLst/>
-            <a:ahLst/>
-            <a:cxnLst/>
-            <a:rect l="l" t="t" r="r" b="b"/>
-            <a:pathLst>
-              <a:path w="120000" h="120000" extrusionOk="0">
-                <a:moveTo>
-                  <a:pt x="0" y="0"/>
-                </a:moveTo>
-                <a:lnTo>
-                  <a:pt x="120000" y="0"/>
-                </a:lnTo>
-                <a:lnTo>
-                  <a:pt x="120000" y="120000"/>
-                </a:lnTo>
-                <a:lnTo>
-                  <a:pt x="0" y="120000"/>
-                </a:lnTo>
-                <a:close/>
-              </a:path>
-            </a:pathLst>
-          </a:custGeom>
-        </p:spPr>
-      </p:sp>
-      <p:sp>
-        <p:nvSpPr>
-          <p:cNvPr id="322" name="Google Shape;322;g8f52c9b70a_3_0:notes"/>
-          <p:cNvSpPr txBox="1">
-            <a:spLocks noGrp="1"/>
-          </p:cNvSpPr>
-          <p:nvPr>
-            <p:ph type="body" idx="1"/>
-          </p:nvPr>
-        </p:nvSpPr>
-        <p:spPr>
-          <a:xfrm>
-            <a:off x="701040" y="4415790"/>
-            <a:ext cx="5608320" cy="4183380"/>
-          </a:xfrm>
-          <a:prstGeom prst="rect">
-            <a:avLst/>
-          </a:prstGeom>
-        </p:spPr>
-        <p:txBody>
-          <a:bodyPr spcFirstLastPara="1" wrap="square" lIns="93162" tIns="93162" rIns="93162" bIns="93162" anchor="t" anchorCtr="0">
-            <a:noAutofit/>
-          </a:bodyPr>
-          <a:lstStyle/>
-          <a:p>
-            <a:pPr marL="0" indent="0">
-              <a:buNone/>
-            </a:pPr>
-            <a:endParaRPr/>
-          </a:p>
-        </p:txBody>
-      </p:sp>
-    </p:spTree>
-    <p:extLst>
-      <p:ext uri="{BB962C8B-B14F-4D97-AF65-F5344CB8AC3E}">
-        <p14:creationId xmlns:p14="http://schemas.microsoft.com/office/powerpoint/2010/main" val="2333971157"/>
-      </p:ext>
-    </p:extLst>
-  </p:cSld>
-  <p:clrMapOvr>
-    <a:masterClrMapping/>
-  </p:clrMapOvr>
-</p:notes>
-</file>
-
 <file path=ppt/notesSlides/notesSlide7.xml><?xml version="1.0" encoding="utf-8"?>
 <p:notes xmlns:a="http://schemas.openxmlformats.org/drawingml/2006/main" xmlns:r="http://schemas.openxmlformats.org/officeDocument/2006/relationships" xmlns:p="http://schemas.openxmlformats.org/presentationml/2006/main" showMasterSp="0" showMasterPhAnim="0">
   <p:cSld>
@@ -1785,7 +1907,7 @@
     </p:spTree>
     <p:extLst>
       <p:ext uri="{BB962C8B-B14F-4D97-AF65-F5344CB8AC3E}">
-        <p14:creationId xmlns:p14="http://schemas.microsoft.com/office/powerpoint/2010/main" val="4203204877"/>
+        <p14:creationId xmlns:p14="http://schemas.microsoft.com/office/powerpoint/2010/main" val="2333971157"/>
       </p:ext>
     </p:extLst>
   </p:cSld>
@@ -1888,7 +2010,7 @@
     </p:spTree>
     <p:extLst>
       <p:ext uri="{BB962C8B-B14F-4D97-AF65-F5344CB8AC3E}">
-        <p14:creationId xmlns:p14="http://schemas.microsoft.com/office/powerpoint/2010/main" val="1240201680"/>
+        <p14:creationId xmlns:p14="http://schemas.microsoft.com/office/powerpoint/2010/main" val="4203204877"/>
       </p:ext>
     </p:extLst>
   </p:cSld>
@@ -1991,7 +2113,7 @@
     </p:spTree>
     <p:extLst>
       <p:ext uri="{BB962C8B-B14F-4D97-AF65-F5344CB8AC3E}">
-        <p14:creationId xmlns:p14="http://schemas.microsoft.com/office/powerpoint/2010/main" val="19610079"/>
+        <p14:creationId xmlns:p14="http://schemas.microsoft.com/office/powerpoint/2010/main" val="1240201680"/>
       </p:ext>
     </p:extLst>
   </p:cSld>
@@ -6621,7 +6743,7 @@
             </a:r>
             <a:r>
               <a:rPr lang="en-US" sz="2400" dirty="0"/>
-              <a:t>7</a:t>
+              <a:t>8</a:t>
             </a:r>
             <a:r>
               <a:rPr lang="pl-PL" sz="2400" dirty="0"/>
@@ -6629,7 +6751,7 @@
             </a:r>
             <a:r>
               <a:rPr lang="en-US" sz="2400" dirty="0"/>
-              <a:t>2</a:t>
+              <a:t>1</a:t>
             </a:r>
             <a:r>
               <a:rPr lang="pl-PL" sz="2400" dirty="0"/>
@@ -6637,7 +6759,7 @@
             </a:r>
             <a:r>
               <a:rPr lang="en-US" sz="2400" dirty="0"/>
-              <a:t>Hashes and JCF Data Structures</a:t>
+              <a:t>Threads</a:t>
             </a:r>
           </a:p>
           <a:p>
@@ -6650,7 +6772,7 @@
             </a:r>
             <a:r>
               <a:rPr lang="en-US" sz="2400" dirty="0" err="1"/>
-              <a:t>JCFunwork</a:t>
+              <a:t>ThreadingTheNeedle</a:t>
             </a:r>
             <a:endParaRPr sz="2400" dirty="0"/>
           </a:p>
@@ -7077,18 +7199,7 @@
             </a:pPr>
             <a:r>
               <a:rPr lang="en-US" sz="2400" dirty="0"/>
-              <a:t>Clone Unit8 – git hub classroom repo for class activities</a:t>
-            </a:r>
-          </a:p>
-          <a:p>
-            <a:pPr marL="342900" indent="-342900">
-              <a:spcAft>
-                <a:spcPts val="1600"/>
-              </a:spcAft>
-            </a:pPr>
-            <a:r>
-              <a:rPr lang="en-US" sz="2400" dirty="0"/>
-              <a:t>Download Starter code</a:t>
+              <a:t>Clone/Pull Unit8 – git hub classroom repo for class activities</a:t>
             </a:r>
           </a:p>
         </p:txBody>
@@ -7212,10 +7323,10 @@
       </p:sp>
       <p:pic>
         <p:nvPicPr>
-          <p:cNvPr id="6" name="Picture 5">
+          <p:cNvPr id="3" name="Picture 2">
             <a:extLst>
               <a:ext uri="{FF2B5EF4-FFF2-40B4-BE49-F238E27FC236}">
-                <a16:creationId xmlns:a16="http://schemas.microsoft.com/office/drawing/2014/main" id="{DED32793-7C09-E3A3-94E5-B5D46727A1D0}"/>
+                <a16:creationId xmlns:a16="http://schemas.microsoft.com/office/drawing/2014/main" id="{565A4964-E8A9-A46D-F4BE-E7D41C14EF1B}"/>
               </a:ext>
             </a:extLst>
           </p:cNvPr>
@@ -7232,8 +7343,8 @@
         </p:blipFill>
         <p:spPr>
           <a:xfrm>
-            <a:off x="-1" y="551663"/>
-            <a:ext cx="9144001" cy="4591837"/>
+            <a:off x="0" y="559220"/>
+            <a:ext cx="9144000" cy="4471763"/>
           </a:xfrm>
           <a:prstGeom prst="rect">
             <a:avLst/>
@@ -7243,7 +7354,7 @@
     </p:spTree>
     <p:extLst>
       <p:ext uri="{BB962C8B-B14F-4D97-AF65-F5344CB8AC3E}">
-        <p14:creationId xmlns:p14="http://schemas.microsoft.com/office/powerpoint/2010/main" val="4226348449"/>
+        <p14:creationId xmlns:p14="http://schemas.microsoft.com/office/powerpoint/2010/main" val="2495509868"/>
       </p:ext>
     </p:extLst>
   </p:cSld>
@@ -7364,10 +7475,10 @@
       </p:sp>
       <p:pic>
         <p:nvPicPr>
-          <p:cNvPr id="3" name="Picture 2">
+          <p:cNvPr id="6" name="Picture 5">
             <a:extLst>
               <a:ext uri="{FF2B5EF4-FFF2-40B4-BE49-F238E27FC236}">
-                <a16:creationId xmlns:a16="http://schemas.microsoft.com/office/drawing/2014/main" id="{92DE4AAC-70FE-A114-5258-F5B22EDDED45}"/>
+                <a16:creationId xmlns:a16="http://schemas.microsoft.com/office/drawing/2014/main" id="{DED32793-7C09-E3A3-94E5-B5D46727A1D0}"/>
               </a:ext>
             </a:extLst>
           </p:cNvPr>
@@ -7384,8 +7495,8 @@
         </p:blipFill>
         <p:spPr>
           <a:xfrm>
-            <a:off x="0" y="716280"/>
-            <a:ext cx="9144000" cy="4427218"/>
+            <a:off x="-1" y="551663"/>
+            <a:ext cx="9144001" cy="4591837"/>
           </a:xfrm>
           <a:prstGeom prst="rect">
             <a:avLst/>
@@ -7395,7 +7506,7 @@
     </p:spTree>
     <p:extLst>
       <p:ext uri="{BB962C8B-B14F-4D97-AF65-F5344CB8AC3E}">
-        <p14:creationId xmlns:p14="http://schemas.microsoft.com/office/powerpoint/2010/main" val="1976403023"/>
+        <p14:creationId xmlns:p14="http://schemas.microsoft.com/office/powerpoint/2010/main" val="4226348449"/>
       </p:ext>
     </p:extLst>
   </p:cSld>
@@ -7509,6 +7620,158 @@
             <a:fld id="{00000000-1234-1234-1234-123412341234}" type="slidenum">
               <a:rPr lang="en"/>
               <a:t>12</a:t>
+            </a:fld>
+            <a:endParaRPr/>
+          </a:p>
+        </p:txBody>
+      </p:sp>
+      <p:pic>
+        <p:nvPicPr>
+          <p:cNvPr id="3" name="Picture 2">
+            <a:extLst>
+              <a:ext uri="{FF2B5EF4-FFF2-40B4-BE49-F238E27FC236}">
+                <a16:creationId xmlns:a16="http://schemas.microsoft.com/office/drawing/2014/main" id="{92DE4AAC-70FE-A114-5258-F5B22EDDED45}"/>
+              </a:ext>
+            </a:extLst>
+          </p:cNvPr>
+          <p:cNvPicPr>
+            <a:picLocks noChangeAspect="1"/>
+          </p:cNvPicPr>
+          <p:nvPr/>
+        </p:nvPicPr>
+        <p:blipFill>
+          <a:blip r:embed="rId3"/>
+          <a:stretch>
+            <a:fillRect/>
+          </a:stretch>
+        </p:blipFill>
+        <p:spPr>
+          <a:xfrm>
+            <a:off x="0" y="716280"/>
+            <a:ext cx="9144000" cy="4427218"/>
+          </a:xfrm>
+          <a:prstGeom prst="rect">
+            <a:avLst/>
+          </a:prstGeom>
+        </p:spPr>
+      </p:pic>
+    </p:spTree>
+    <p:extLst>
+      <p:ext uri="{BB962C8B-B14F-4D97-AF65-F5344CB8AC3E}">
+        <p14:creationId xmlns:p14="http://schemas.microsoft.com/office/powerpoint/2010/main" val="1976403023"/>
+      </p:ext>
+    </p:extLst>
+  </p:cSld>
+  <p:clrMapOvr>
+    <a:masterClrMapping/>
+  </p:clrMapOvr>
+</p:sld>
+</file>
+
+<file path=ppt/slides/slide13.xml><?xml version="1.0" encoding="utf-8"?>
+<p:sld xmlns:a="http://schemas.openxmlformats.org/drawingml/2006/main" xmlns:r="http://schemas.openxmlformats.org/officeDocument/2006/relationships" xmlns:p="http://schemas.openxmlformats.org/presentationml/2006/main" show="0">
+  <p:cSld>
+    <p:spTree>
+      <p:nvGrpSpPr>
+        <p:cNvPr id="1" name="Shape 323"/>
+        <p:cNvGrpSpPr/>
+        <p:nvPr/>
+      </p:nvGrpSpPr>
+      <p:grpSpPr>
+        <a:xfrm>
+          <a:off x="0" y="0"/>
+          <a:ext cx="0" cy="0"/>
+          <a:chOff x="0" y="0"/>
+          <a:chExt cx="0" cy="0"/>
+        </a:xfrm>
+      </p:grpSpPr>
+      <p:sp>
+        <p:nvSpPr>
+          <p:cNvPr id="324" name="Google Shape;324;p47"/>
+          <p:cNvSpPr txBox="1">
+            <a:spLocks noGrp="1"/>
+          </p:cNvSpPr>
+          <p:nvPr>
+            <p:ph type="title"/>
+          </p:nvPr>
+        </p:nvSpPr>
+        <p:spPr>
+          <a:xfrm>
+            <a:off x="226208" y="1"/>
+            <a:ext cx="8520600" cy="464980"/>
+          </a:xfrm>
+          <a:prstGeom prst="rect">
+            <a:avLst/>
+          </a:prstGeom>
+        </p:spPr>
+        <p:txBody>
+          <a:bodyPr spcFirstLastPara="1" wrap="square" lIns="91425" tIns="91425" rIns="91425" bIns="91425" anchor="t" anchorCtr="0">
+            <a:noAutofit/>
+          </a:bodyPr>
+          <a:lstStyle/>
+          <a:p>
+            <a:pPr marL="0" lvl="0" indent="0" algn="ctr" rtl="0">
+              <a:spcBef>
+                <a:spcPts val="0"/>
+              </a:spcBef>
+              <a:spcAft>
+                <a:spcPts val="0"/>
+              </a:spcAft>
+              <a:buNone/>
+            </a:pPr>
+            <a:r>
+              <a:rPr lang="en-US" dirty="0"/>
+              <a:t>Use </a:t>
+            </a:r>
+            <a:r>
+              <a:rPr lang="en-US" sz="2400" dirty="0"/>
+              <a:t>Assigned</a:t>
+            </a:r>
+            <a:r>
+              <a:rPr lang="en-US" dirty="0"/>
+              <a:t> Seat</a:t>
+            </a:r>
+            <a:endParaRPr dirty="0"/>
+          </a:p>
+        </p:txBody>
+      </p:sp>
+      <p:sp>
+        <p:nvSpPr>
+          <p:cNvPr id="326" name="Google Shape;326;p47"/>
+          <p:cNvSpPr txBox="1">
+            <a:spLocks noGrp="1"/>
+          </p:cNvSpPr>
+          <p:nvPr>
+            <p:ph type="sldNum" idx="12"/>
+          </p:nvPr>
+        </p:nvSpPr>
+        <p:spPr>
+          <a:xfrm>
+            <a:off x="8472458" y="4663217"/>
+            <a:ext cx="548700" cy="393600"/>
+          </a:xfrm>
+          <a:prstGeom prst="rect">
+            <a:avLst/>
+          </a:prstGeom>
+        </p:spPr>
+        <p:txBody>
+          <a:bodyPr spcFirstLastPara="1" wrap="square" lIns="91425" tIns="91425" rIns="91425" bIns="91425" anchor="ctr" anchorCtr="0">
+            <a:noAutofit/>
+          </a:bodyPr>
+          <a:lstStyle/>
+          <a:p>
+            <a:pPr marL="0" lvl="0" indent="0" algn="r" rtl="0">
+              <a:spcBef>
+                <a:spcPts val="0"/>
+              </a:spcBef>
+              <a:spcAft>
+                <a:spcPts val="0"/>
+              </a:spcAft>
+              <a:buNone/>
+            </a:pPr>
+            <a:fld id="{00000000-1234-1234-1234-123412341234}" type="slidenum">
+              <a:rPr lang="en"/>
+              <a:t>13</a:t>
             </a:fld>
             <a:endParaRPr/>
           </a:p>
@@ -7565,6 +7828,612 @@
         <p:cNvPr id="1" name="Shape 323">
           <a:extLst>
             <a:ext uri="{FF2B5EF4-FFF2-40B4-BE49-F238E27FC236}">
+              <a16:creationId xmlns:a16="http://schemas.microsoft.com/office/drawing/2014/main" id="{C56E22EE-4DFC-A710-4A3B-CF93203A366B}"/>
+            </a:ext>
+          </a:extLst>
+        </p:cNvPr>
+        <p:cNvGrpSpPr/>
+        <p:nvPr/>
+      </p:nvGrpSpPr>
+      <p:grpSpPr>
+        <a:xfrm>
+          <a:off x="0" y="0"/>
+          <a:ext cx="0" cy="0"/>
+          <a:chOff x="0" y="0"/>
+          <a:chExt cx="0" cy="0"/>
+        </a:xfrm>
+      </p:grpSpPr>
+      <p:sp>
+        <p:nvSpPr>
+          <p:cNvPr id="324" name="Google Shape;324;p47">
+            <a:extLst>
+              <a:ext uri="{FF2B5EF4-FFF2-40B4-BE49-F238E27FC236}">
+                <a16:creationId xmlns:a16="http://schemas.microsoft.com/office/drawing/2014/main" id="{1760026F-3F25-DAF1-DE32-7B9B3CB46FD9}"/>
+              </a:ext>
+            </a:extLst>
+          </p:cNvPr>
+          <p:cNvSpPr txBox="1">
+            <a:spLocks noGrp="1"/>
+          </p:cNvSpPr>
+          <p:nvPr>
+            <p:ph type="title"/>
+          </p:nvPr>
+        </p:nvSpPr>
+        <p:spPr>
+          <a:xfrm>
+            <a:off x="305858" y="273819"/>
+            <a:ext cx="8520600" cy="623700"/>
+          </a:xfrm>
+          <a:prstGeom prst="rect">
+            <a:avLst/>
+          </a:prstGeom>
+        </p:spPr>
+        <p:txBody>
+          <a:bodyPr spcFirstLastPara="1" wrap="square" lIns="91425" tIns="91425" rIns="91425" bIns="91425" anchor="t" anchorCtr="0">
+            <a:noAutofit/>
+          </a:bodyPr>
+          <a:lstStyle/>
+          <a:p>
+            <a:pPr marL="0" lvl="0" indent="0" algn="ctr" rtl="0">
+              <a:spcBef>
+                <a:spcPts val="0"/>
+              </a:spcBef>
+              <a:spcAft>
+                <a:spcPts val="0"/>
+              </a:spcAft>
+              <a:buNone/>
+            </a:pPr>
+            <a:r>
+              <a:rPr lang="en-US" dirty="0"/>
+              <a:t>GCIS – Software Development and Problem Solving</a:t>
+            </a:r>
+            <a:endParaRPr dirty="0"/>
+          </a:p>
+        </p:txBody>
+      </p:sp>
+      <p:sp>
+        <p:nvSpPr>
+          <p:cNvPr id="325" name="Google Shape;325;p47">
+            <a:extLst>
+              <a:ext uri="{FF2B5EF4-FFF2-40B4-BE49-F238E27FC236}">
+                <a16:creationId xmlns:a16="http://schemas.microsoft.com/office/drawing/2014/main" id="{E6A28030-2BED-23B8-37A4-8D7E25DBC2E5}"/>
+              </a:ext>
+            </a:extLst>
+          </p:cNvPr>
+          <p:cNvSpPr txBox="1">
+            <a:spLocks noGrp="1"/>
+          </p:cNvSpPr>
+          <p:nvPr>
+            <p:ph type="body" idx="1"/>
+          </p:nvPr>
+        </p:nvSpPr>
+        <p:spPr>
+          <a:xfrm>
+            <a:off x="-5842" y="1721147"/>
+            <a:ext cx="9149842" cy="1226403"/>
+          </a:xfrm>
+          <a:prstGeom prst="rect">
+            <a:avLst/>
+          </a:prstGeom>
+        </p:spPr>
+        <p:txBody>
+          <a:bodyPr spcFirstLastPara="1" wrap="square" lIns="91425" tIns="91425" rIns="91425" bIns="91425" anchor="ctr" anchorCtr="0">
+            <a:noAutofit/>
+          </a:bodyPr>
+          <a:lstStyle/>
+          <a:p>
+            <a:pPr marL="146050" indent="0" algn="ctr">
+              <a:buNone/>
+            </a:pPr>
+            <a:r>
+              <a:rPr lang="en-US" sz="2400" dirty="0"/>
+              <a:t>Take </a:t>
+            </a:r>
+            <a:r>
+              <a:rPr lang="pl-PL" sz="2400" dirty="0"/>
+              <a:t>Quiz </a:t>
+            </a:r>
+            <a:r>
+              <a:rPr lang="en-US" sz="2400" dirty="0"/>
+              <a:t>8</a:t>
+            </a:r>
+            <a:r>
+              <a:rPr lang="pl-PL" sz="2400" dirty="0"/>
+              <a:t>.</a:t>
+            </a:r>
+            <a:r>
+              <a:rPr lang="en-US" sz="2400" dirty="0"/>
+              <a:t>2</a:t>
+            </a:r>
+            <a:r>
+              <a:rPr lang="pl-PL" sz="2400" dirty="0"/>
+              <a:t>: </a:t>
+            </a:r>
+            <a:r>
+              <a:rPr lang="en-US" sz="2400" dirty="0"/>
+              <a:t>Threads Execution</a:t>
+            </a:r>
+          </a:p>
+          <a:p>
+            <a:pPr marL="146050" indent="0" algn="ctr">
+              <a:buNone/>
+            </a:pPr>
+            <a:r>
+              <a:rPr lang="en-US" sz="2400" dirty="0"/>
+              <a:t>Password - </a:t>
+            </a:r>
+            <a:r>
+              <a:rPr lang="en-US" sz="2400" dirty="0" err="1"/>
+              <a:t>ThreadingTheNeedle</a:t>
+            </a:r>
+            <a:endParaRPr sz="2400" dirty="0"/>
+          </a:p>
+        </p:txBody>
+      </p:sp>
+      <p:sp>
+        <p:nvSpPr>
+          <p:cNvPr id="326" name="Google Shape;326;p47">
+            <a:extLst>
+              <a:ext uri="{FF2B5EF4-FFF2-40B4-BE49-F238E27FC236}">
+                <a16:creationId xmlns:a16="http://schemas.microsoft.com/office/drawing/2014/main" id="{D42A63D7-CFFF-8C12-22BB-79CE447D436C}"/>
+              </a:ext>
+            </a:extLst>
+          </p:cNvPr>
+          <p:cNvSpPr txBox="1">
+            <a:spLocks noGrp="1"/>
+          </p:cNvSpPr>
+          <p:nvPr>
+            <p:ph type="sldNum" idx="12"/>
+          </p:nvPr>
+        </p:nvSpPr>
+        <p:spPr>
+          <a:xfrm>
+            <a:off x="8472458" y="4663217"/>
+            <a:ext cx="548700" cy="393600"/>
+          </a:xfrm>
+          <a:prstGeom prst="rect">
+            <a:avLst/>
+          </a:prstGeom>
+        </p:spPr>
+        <p:txBody>
+          <a:bodyPr spcFirstLastPara="1" wrap="square" lIns="91425" tIns="91425" rIns="91425" bIns="91425" anchor="ctr" anchorCtr="0">
+            <a:noAutofit/>
+          </a:bodyPr>
+          <a:lstStyle/>
+          <a:p>
+            <a:pPr marL="0" lvl="0" indent="0" algn="r" rtl="0">
+              <a:spcBef>
+                <a:spcPts val="0"/>
+              </a:spcBef>
+              <a:spcAft>
+                <a:spcPts val="0"/>
+              </a:spcAft>
+              <a:buNone/>
+            </a:pPr>
+            <a:fld id="{00000000-1234-1234-1234-123412341234}" type="slidenum">
+              <a:rPr lang="en"/>
+              <a:t>2</a:t>
+            </a:fld>
+            <a:endParaRPr/>
+          </a:p>
+        </p:txBody>
+      </p:sp>
+      <p:sp>
+        <p:nvSpPr>
+          <p:cNvPr id="2" name="TextBox 1">
+            <a:extLst>
+              <a:ext uri="{FF2B5EF4-FFF2-40B4-BE49-F238E27FC236}">
+                <a16:creationId xmlns:a16="http://schemas.microsoft.com/office/drawing/2014/main" id="{9B766597-B548-75DD-A58A-BB0570D1F8E0}"/>
+              </a:ext>
+            </a:extLst>
+          </p:cNvPr>
+          <p:cNvSpPr txBox="1"/>
+          <p:nvPr/>
+        </p:nvSpPr>
+        <p:spPr>
+          <a:xfrm>
+            <a:off x="0" y="1277369"/>
+            <a:ext cx="9144000" cy="307777"/>
+          </a:xfrm>
+          <a:prstGeom prst="rect">
+            <a:avLst/>
+          </a:prstGeom>
+          <a:solidFill>
+            <a:srgbClr val="FFC000"/>
+          </a:solidFill>
+        </p:spPr>
+        <p:txBody>
+          <a:bodyPr wrap="square" rtlCol="0">
+            <a:spAutoFit/>
+          </a:bodyPr>
+          <a:lstStyle/>
+          <a:p>
+            <a:r>
+              <a:rPr lang="en-US" dirty="0"/>
+              <a:t>Quiz</a:t>
+            </a:r>
+          </a:p>
+        </p:txBody>
+      </p:sp>
+      <p:sp>
+        <p:nvSpPr>
+          <p:cNvPr id="3" name="TextBox 2">
+            <a:extLst>
+              <a:ext uri="{FF2B5EF4-FFF2-40B4-BE49-F238E27FC236}">
+                <a16:creationId xmlns:a16="http://schemas.microsoft.com/office/drawing/2014/main" id="{FDEE64FC-EBEB-622F-E7B7-7333B884C2D5}"/>
+              </a:ext>
+            </a:extLst>
+          </p:cNvPr>
+          <p:cNvSpPr txBox="1"/>
+          <p:nvPr/>
+        </p:nvSpPr>
+        <p:spPr>
+          <a:xfrm>
+            <a:off x="-5842" y="3031063"/>
+            <a:ext cx="9144000" cy="307777"/>
+          </a:xfrm>
+          <a:prstGeom prst="rect">
+            <a:avLst/>
+          </a:prstGeom>
+          <a:solidFill>
+            <a:srgbClr val="FFC000"/>
+          </a:solidFill>
+        </p:spPr>
+        <p:txBody>
+          <a:bodyPr wrap="square" rtlCol="0">
+            <a:spAutoFit/>
+          </a:bodyPr>
+          <a:lstStyle/>
+          <a:p>
+            <a:r>
+              <a:rPr lang="en-US" dirty="0"/>
+              <a:t>Next </a:t>
+            </a:r>
+            <a:r>
+              <a:rPr lang="en-US" dirty="0">
+                <a:sym typeface="Wingdings" panose="05000000000000000000" pitchFamily="2" charset="2"/>
+              </a:rPr>
+              <a:t> </a:t>
+            </a:r>
+            <a:endParaRPr lang="en-US" dirty="0"/>
+          </a:p>
+        </p:txBody>
+      </p:sp>
+      <p:sp>
+        <p:nvSpPr>
+          <p:cNvPr id="4" name="Google Shape;325;p47">
+            <a:extLst>
+              <a:ext uri="{FF2B5EF4-FFF2-40B4-BE49-F238E27FC236}">
+                <a16:creationId xmlns:a16="http://schemas.microsoft.com/office/drawing/2014/main" id="{C8BB826E-6579-520F-043B-C73A582F3EC7}"/>
+              </a:ext>
+            </a:extLst>
+          </p:cNvPr>
+          <p:cNvSpPr txBox="1">
+            <a:spLocks/>
+          </p:cNvSpPr>
+          <p:nvPr/>
+        </p:nvSpPr>
+        <p:spPr>
+          <a:xfrm>
+            <a:off x="-5842" y="3422352"/>
+            <a:ext cx="9149842" cy="1721148"/>
+          </a:xfrm>
+          <a:prstGeom prst="rect">
+            <a:avLst/>
+          </a:prstGeom>
+          <a:noFill/>
+          <a:ln>
+            <a:noFill/>
+          </a:ln>
+        </p:spPr>
+        <p:txBody>
+          <a:bodyPr spcFirstLastPara="1" wrap="square" lIns="91425" tIns="91425" rIns="91425" bIns="91425" anchor="ctr" anchorCtr="0">
+            <a:noAutofit/>
+          </a:bodyPr>
+          <a:lstStyle>
+            <a:defPPr marR="0" lvl="0" algn="l" rtl="0">
+              <a:lnSpc>
+                <a:spcPct val="100000"/>
+              </a:lnSpc>
+              <a:spcBef>
+                <a:spcPts val="0"/>
+              </a:spcBef>
+              <a:spcAft>
+                <a:spcPts val="0"/>
+              </a:spcAft>
+            </a:defPPr>
+            <a:lvl1pPr marL="457200" marR="0" lvl="0" indent="-311150" algn="l" rtl="0">
+              <a:lnSpc>
+                <a:spcPct val="115000"/>
+              </a:lnSpc>
+              <a:spcBef>
+                <a:spcPts val="0"/>
+              </a:spcBef>
+              <a:spcAft>
+                <a:spcPts val="0"/>
+              </a:spcAft>
+              <a:buClr>
+                <a:schemeClr val="dk2"/>
+              </a:buClr>
+              <a:buSzPts val="1300"/>
+              <a:buFont typeface="Roboto"/>
+              <a:buChar char="●"/>
+              <a:defRPr sz="1300" b="0" i="0" u="none" strike="noStrike" cap="none">
+                <a:solidFill>
+                  <a:schemeClr val="dk2"/>
+                </a:solidFill>
+                <a:latin typeface="Roboto"/>
+                <a:ea typeface="Roboto"/>
+                <a:cs typeface="Roboto"/>
+                <a:sym typeface="Roboto"/>
+              </a:defRPr>
+            </a:lvl1pPr>
+            <a:lvl2pPr marL="914400" marR="0" lvl="1" indent="-298450" algn="l" rtl="0">
+              <a:lnSpc>
+                <a:spcPct val="115000"/>
+              </a:lnSpc>
+              <a:spcBef>
+                <a:spcPts val="1600"/>
+              </a:spcBef>
+              <a:spcAft>
+                <a:spcPts val="0"/>
+              </a:spcAft>
+              <a:buClr>
+                <a:schemeClr val="dk2"/>
+              </a:buClr>
+              <a:buSzPts val="1100"/>
+              <a:buFont typeface="Roboto"/>
+              <a:buChar char="○"/>
+              <a:defRPr sz="1100" b="0" i="0" u="none" strike="noStrike" cap="none">
+                <a:solidFill>
+                  <a:schemeClr val="dk2"/>
+                </a:solidFill>
+                <a:latin typeface="Roboto"/>
+                <a:ea typeface="Roboto"/>
+                <a:cs typeface="Roboto"/>
+                <a:sym typeface="Roboto"/>
+              </a:defRPr>
+            </a:lvl2pPr>
+            <a:lvl3pPr marL="1371600" marR="0" lvl="2" indent="-298450" algn="l" rtl="0">
+              <a:lnSpc>
+                <a:spcPct val="115000"/>
+              </a:lnSpc>
+              <a:spcBef>
+                <a:spcPts val="1600"/>
+              </a:spcBef>
+              <a:spcAft>
+                <a:spcPts val="0"/>
+              </a:spcAft>
+              <a:buClr>
+                <a:schemeClr val="dk2"/>
+              </a:buClr>
+              <a:buSzPts val="1100"/>
+              <a:buFont typeface="Roboto"/>
+              <a:buChar char="■"/>
+              <a:defRPr sz="1100" b="0" i="0" u="none" strike="noStrike" cap="none">
+                <a:solidFill>
+                  <a:schemeClr val="dk2"/>
+                </a:solidFill>
+                <a:latin typeface="Roboto"/>
+                <a:ea typeface="Roboto"/>
+                <a:cs typeface="Roboto"/>
+                <a:sym typeface="Roboto"/>
+              </a:defRPr>
+            </a:lvl3pPr>
+            <a:lvl4pPr marL="1828800" marR="0" lvl="3" indent="-298450" algn="l" rtl="0">
+              <a:lnSpc>
+                <a:spcPct val="115000"/>
+              </a:lnSpc>
+              <a:spcBef>
+                <a:spcPts val="1600"/>
+              </a:spcBef>
+              <a:spcAft>
+                <a:spcPts val="0"/>
+              </a:spcAft>
+              <a:buClr>
+                <a:schemeClr val="dk2"/>
+              </a:buClr>
+              <a:buSzPts val="1100"/>
+              <a:buFont typeface="Roboto"/>
+              <a:buChar char="●"/>
+              <a:defRPr sz="1100" b="0" i="0" u="none" strike="noStrike" cap="none">
+                <a:solidFill>
+                  <a:schemeClr val="dk2"/>
+                </a:solidFill>
+                <a:latin typeface="Roboto"/>
+                <a:ea typeface="Roboto"/>
+                <a:cs typeface="Roboto"/>
+                <a:sym typeface="Roboto"/>
+              </a:defRPr>
+            </a:lvl4pPr>
+            <a:lvl5pPr marL="2286000" marR="0" lvl="4" indent="-298450" algn="l" rtl="0">
+              <a:lnSpc>
+                <a:spcPct val="115000"/>
+              </a:lnSpc>
+              <a:spcBef>
+                <a:spcPts val="1600"/>
+              </a:spcBef>
+              <a:spcAft>
+                <a:spcPts val="0"/>
+              </a:spcAft>
+              <a:buClr>
+                <a:schemeClr val="dk2"/>
+              </a:buClr>
+              <a:buSzPts val="1100"/>
+              <a:buFont typeface="Roboto"/>
+              <a:buChar char="○"/>
+              <a:defRPr sz="1100" b="0" i="0" u="none" strike="noStrike" cap="none">
+                <a:solidFill>
+                  <a:schemeClr val="dk2"/>
+                </a:solidFill>
+                <a:latin typeface="Roboto"/>
+                <a:ea typeface="Roboto"/>
+                <a:cs typeface="Roboto"/>
+                <a:sym typeface="Roboto"/>
+              </a:defRPr>
+            </a:lvl5pPr>
+            <a:lvl6pPr marL="2743200" marR="0" lvl="5" indent="-298450" algn="l" rtl="0">
+              <a:lnSpc>
+                <a:spcPct val="115000"/>
+              </a:lnSpc>
+              <a:spcBef>
+                <a:spcPts val="1600"/>
+              </a:spcBef>
+              <a:spcAft>
+                <a:spcPts val="0"/>
+              </a:spcAft>
+              <a:buClr>
+                <a:schemeClr val="dk2"/>
+              </a:buClr>
+              <a:buSzPts val="1100"/>
+              <a:buFont typeface="Roboto"/>
+              <a:buChar char="■"/>
+              <a:defRPr sz="1100" b="0" i="0" u="none" strike="noStrike" cap="none">
+                <a:solidFill>
+                  <a:schemeClr val="dk2"/>
+                </a:solidFill>
+                <a:latin typeface="Roboto"/>
+                <a:ea typeface="Roboto"/>
+                <a:cs typeface="Roboto"/>
+                <a:sym typeface="Roboto"/>
+              </a:defRPr>
+            </a:lvl6pPr>
+            <a:lvl7pPr marL="3200400" marR="0" lvl="6" indent="-298450" algn="l" rtl="0">
+              <a:lnSpc>
+                <a:spcPct val="115000"/>
+              </a:lnSpc>
+              <a:spcBef>
+                <a:spcPts val="1600"/>
+              </a:spcBef>
+              <a:spcAft>
+                <a:spcPts val="0"/>
+              </a:spcAft>
+              <a:buClr>
+                <a:schemeClr val="dk2"/>
+              </a:buClr>
+              <a:buSzPts val="1100"/>
+              <a:buFont typeface="Roboto"/>
+              <a:buChar char="●"/>
+              <a:defRPr sz="1100" b="0" i="0" u="none" strike="noStrike" cap="none">
+                <a:solidFill>
+                  <a:schemeClr val="dk2"/>
+                </a:solidFill>
+                <a:latin typeface="Roboto"/>
+                <a:ea typeface="Roboto"/>
+                <a:cs typeface="Roboto"/>
+                <a:sym typeface="Roboto"/>
+              </a:defRPr>
+            </a:lvl7pPr>
+            <a:lvl8pPr marL="3657600" marR="0" lvl="7" indent="-298450" algn="l" rtl="0">
+              <a:lnSpc>
+                <a:spcPct val="115000"/>
+              </a:lnSpc>
+              <a:spcBef>
+                <a:spcPts val="1600"/>
+              </a:spcBef>
+              <a:spcAft>
+                <a:spcPts val="0"/>
+              </a:spcAft>
+              <a:buClr>
+                <a:schemeClr val="dk2"/>
+              </a:buClr>
+              <a:buSzPts val="1100"/>
+              <a:buFont typeface="Roboto"/>
+              <a:buChar char="○"/>
+              <a:defRPr sz="1100" b="0" i="0" u="none" strike="noStrike" cap="none">
+                <a:solidFill>
+                  <a:schemeClr val="dk2"/>
+                </a:solidFill>
+                <a:latin typeface="Roboto"/>
+                <a:ea typeface="Roboto"/>
+                <a:cs typeface="Roboto"/>
+                <a:sym typeface="Roboto"/>
+              </a:defRPr>
+            </a:lvl8pPr>
+            <a:lvl9pPr marL="4114800" marR="0" lvl="8" indent="-298450" algn="l" rtl="0">
+              <a:lnSpc>
+                <a:spcPct val="115000"/>
+              </a:lnSpc>
+              <a:spcBef>
+                <a:spcPts val="1600"/>
+              </a:spcBef>
+              <a:spcAft>
+                <a:spcPts val="1600"/>
+              </a:spcAft>
+              <a:buClr>
+                <a:schemeClr val="dk2"/>
+              </a:buClr>
+              <a:buSzPts val="1100"/>
+              <a:buFont typeface="Roboto"/>
+              <a:buChar char="■"/>
+              <a:defRPr sz="1100" b="0" i="0" u="none" strike="noStrike" cap="none">
+                <a:solidFill>
+                  <a:schemeClr val="dk2"/>
+                </a:solidFill>
+                <a:latin typeface="Roboto"/>
+                <a:ea typeface="Roboto"/>
+                <a:cs typeface="Roboto"/>
+                <a:sym typeface="Roboto"/>
+              </a:defRPr>
+            </a:lvl9pPr>
+          </a:lstStyle>
+          <a:p>
+            <a:pPr marL="0" indent="0">
+              <a:spcAft>
+                <a:spcPts val="1600"/>
+              </a:spcAft>
+              <a:buNone/>
+            </a:pPr>
+            <a:r>
+              <a:rPr lang="en-US" sz="2800" dirty="0"/>
+              <a:t>After completing the Quiz </a:t>
+            </a:r>
+          </a:p>
+          <a:p>
+            <a:pPr marL="342900" indent="-342900">
+              <a:spcAft>
+                <a:spcPts val="1600"/>
+              </a:spcAft>
+            </a:pPr>
+            <a:r>
+              <a:rPr lang="en-US" sz="2000" dirty="0"/>
+              <a:t>Accept GitHub Classroom Assignment for Unit 09</a:t>
+            </a:r>
+          </a:p>
+          <a:p>
+            <a:pPr marL="342900" indent="-342900">
+              <a:spcAft>
+                <a:spcPts val="1600"/>
+              </a:spcAft>
+            </a:pPr>
+            <a:r>
+              <a:rPr lang="en-US" sz="2000" dirty="0"/>
+              <a:t>Clone Unit9 – git hub classroom repo for class activities</a:t>
+            </a:r>
+          </a:p>
+        </p:txBody>
+      </p:sp>
+    </p:spTree>
+    <p:extLst>
+      <p:ext uri="{BB962C8B-B14F-4D97-AF65-F5344CB8AC3E}">
+        <p14:creationId xmlns:p14="http://schemas.microsoft.com/office/powerpoint/2010/main" val="1325608804"/>
+      </p:ext>
+    </p:extLst>
+  </p:cSld>
+  <p:clrMapOvr>
+    <a:masterClrMapping/>
+  </p:clrMapOvr>
+</p:sld>
+</file>
+
+<file path=ppt/slides/slide3.xml><?xml version="1.0" encoding="utf-8"?>
+<p:sld xmlns:a="http://schemas.openxmlformats.org/drawingml/2006/main" xmlns:r="http://schemas.openxmlformats.org/officeDocument/2006/relationships" xmlns:p="http://schemas.openxmlformats.org/presentationml/2006/main" show="0">
+  <p:cSld>
+    <p:spTree>
+      <p:nvGrpSpPr>
+        <p:cNvPr id="1" name="Shape 323">
+          <a:extLst>
+            <a:ext uri="{FF2B5EF4-FFF2-40B4-BE49-F238E27FC236}">
               <a16:creationId xmlns:a16="http://schemas.microsoft.com/office/drawing/2014/main" id="{19512066-5980-8A8B-BE30-C4FB3AC72235}"/>
             </a:ext>
           </a:extLst>
@@ -7741,7 +8610,7 @@
             </a:pPr>
             <a:fld id="{00000000-1234-1234-1234-123412341234}" type="slidenum">
               <a:rPr lang="en"/>
-              <a:t>2</a:t>
+              <a:t>3</a:t>
             </a:fld>
             <a:endParaRPr/>
           </a:p>
@@ -8495,7 +9364,7 @@
 </p:sld>
 </file>
 
-<file path=ppt/slides/slide3.xml><?xml version="1.0" encoding="utf-8"?>
+<file path=ppt/slides/slide4.xml><?xml version="1.0" encoding="utf-8"?>
 <p:sld xmlns:a="http://schemas.openxmlformats.org/drawingml/2006/main" xmlns:r="http://schemas.openxmlformats.org/officeDocument/2006/relationships" xmlns:p="http://schemas.openxmlformats.org/presentationml/2006/main" show="0">
   <p:cSld>
     <p:spTree>
@@ -8590,7 +9459,7 @@
             </a:pPr>
             <a:fld id="{00000000-1234-1234-1234-123412341234}" type="slidenum">
               <a:rPr lang="en"/>
-              <a:t>3</a:t>
+              <a:t>4</a:t>
             </a:fld>
             <a:endParaRPr/>
           </a:p>
@@ -9063,7 +9932,7 @@
 </p:sld>
 </file>
 
-<file path=ppt/slides/slide4.xml><?xml version="1.0" encoding="utf-8"?>
+<file path=ppt/slides/slide5.xml><?xml version="1.0" encoding="utf-8"?>
 <p:sld xmlns:a="http://schemas.openxmlformats.org/drawingml/2006/main" xmlns:r="http://schemas.openxmlformats.org/officeDocument/2006/relationships" xmlns:p="http://schemas.openxmlformats.org/presentationml/2006/main" show="0">
   <p:cSld>
     <p:spTree>
@@ -9222,7 +10091,7 @@
             </a:pPr>
             <a:fld id="{00000000-1234-1234-1234-123412341234}" type="slidenum">
               <a:rPr lang="en"/>
-              <a:t>4</a:t>
+              <a:t>5</a:t>
             </a:fld>
             <a:endParaRPr/>
           </a:p>
@@ -9636,7 +10505,7 @@
 </p:sld>
 </file>
 
-<file path=ppt/slides/slide5.xml><?xml version="1.0" encoding="utf-8"?>
+<file path=ppt/slides/slide6.xml><?xml version="1.0" encoding="utf-8"?>
 <p:sld xmlns:a="http://schemas.openxmlformats.org/drawingml/2006/main" xmlns:r="http://schemas.openxmlformats.org/officeDocument/2006/relationships" xmlns:p="http://schemas.openxmlformats.org/presentationml/2006/main" show="0">
   <p:cSld>
     <p:spTree>
@@ -9816,7 +10685,7 @@
             </a:pPr>
             <a:fld id="{00000000-1234-1234-1234-123412341234}" type="slidenum">
               <a:rPr lang="en"/>
-              <a:t>5</a:t>
+              <a:t>6</a:t>
             </a:fld>
             <a:endParaRPr/>
           </a:p>
@@ -10547,7 +11416,7 @@
 </p:sld>
 </file>
 
-<file path=ppt/slides/slide6.xml><?xml version="1.0" encoding="utf-8"?>
+<file path=ppt/slides/slide7.xml><?xml version="1.0" encoding="utf-8"?>
 <p:sld xmlns:a="http://schemas.openxmlformats.org/drawingml/2006/main" xmlns:r="http://schemas.openxmlformats.org/officeDocument/2006/relationships" xmlns:p="http://schemas.openxmlformats.org/presentationml/2006/main" show="0">
   <p:cSld>
     <p:spTree>
@@ -10642,7 +11511,7 @@
             </a:pPr>
             <a:fld id="{00000000-1234-1234-1234-123412341234}" type="slidenum">
               <a:rPr lang="en"/>
-              <a:t>6</a:t>
+              <a:t>7</a:t>
             </a:fld>
             <a:endParaRPr/>
           </a:p>
@@ -11114,7 +11983,7 @@
 </p:sld>
 </file>
 
-<file path=ppt/slides/slide7.xml><?xml version="1.0" encoding="utf-8"?>
+<file path=ppt/slides/slide8.xml><?xml version="1.0" encoding="utf-8"?>
 <p:sld xmlns:a="http://schemas.openxmlformats.org/drawingml/2006/main" xmlns:r="http://schemas.openxmlformats.org/officeDocument/2006/relationships" xmlns:p="http://schemas.openxmlformats.org/presentationml/2006/main" show="0">
   <p:cSld>
     <p:spTree>
@@ -11209,7 +12078,7 @@
             </a:pPr>
             <a:fld id="{00000000-1234-1234-1234-123412341234}" type="slidenum">
               <a:rPr lang="en"/>
-              <a:t>7</a:t>
+              <a:t>8</a:t>
             </a:fld>
             <a:endParaRPr/>
           </a:p>
@@ -11467,7 +12336,7 @@
 </p:sld>
 </file>
 
-<file path=ppt/slides/slide8.xml><?xml version="1.0" encoding="utf-8"?>
+<file path=ppt/slides/slide9.xml><?xml version="1.0" encoding="utf-8"?>
 <p:sld xmlns:a="http://schemas.openxmlformats.org/drawingml/2006/main" xmlns:r="http://schemas.openxmlformats.org/officeDocument/2006/relationships" xmlns:p="http://schemas.openxmlformats.org/presentationml/2006/main" show="0">
   <p:cSld>
     <p:spTree>
@@ -11634,7 +12503,7 @@
             </a:pPr>
             <a:fld id="{00000000-1234-1234-1234-123412341234}" type="slidenum">
               <a:rPr lang="en"/>
-              <a:t>8</a:t>
+              <a:t>9</a:t>
             </a:fld>
             <a:endParaRPr/>
           </a:p>
@@ -12068,158 +12937,6 @@
     <p:extLst>
       <p:ext uri="{BB962C8B-B14F-4D97-AF65-F5344CB8AC3E}">
         <p14:creationId xmlns:p14="http://schemas.microsoft.com/office/powerpoint/2010/main" val="4206004111"/>
-      </p:ext>
-    </p:extLst>
-  </p:cSld>
-  <p:clrMapOvr>
-    <a:masterClrMapping/>
-  </p:clrMapOvr>
-</p:sld>
-</file>
-
-<file path=ppt/slides/slide9.xml><?xml version="1.0" encoding="utf-8"?>
-<p:sld xmlns:a="http://schemas.openxmlformats.org/drawingml/2006/main" xmlns:r="http://schemas.openxmlformats.org/officeDocument/2006/relationships" xmlns:p="http://schemas.openxmlformats.org/presentationml/2006/main" show="0">
-  <p:cSld>
-    <p:spTree>
-      <p:nvGrpSpPr>
-        <p:cNvPr id="1" name="Shape 323"/>
-        <p:cNvGrpSpPr/>
-        <p:nvPr/>
-      </p:nvGrpSpPr>
-      <p:grpSpPr>
-        <a:xfrm>
-          <a:off x="0" y="0"/>
-          <a:ext cx="0" cy="0"/>
-          <a:chOff x="0" y="0"/>
-          <a:chExt cx="0" cy="0"/>
-        </a:xfrm>
-      </p:grpSpPr>
-      <p:sp>
-        <p:nvSpPr>
-          <p:cNvPr id="324" name="Google Shape;324;p47"/>
-          <p:cNvSpPr txBox="1">
-            <a:spLocks noGrp="1"/>
-          </p:cNvSpPr>
-          <p:nvPr>
-            <p:ph type="title"/>
-          </p:nvPr>
-        </p:nvSpPr>
-        <p:spPr>
-          <a:xfrm>
-            <a:off x="226208" y="1"/>
-            <a:ext cx="8520600" cy="464980"/>
-          </a:xfrm>
-          <a:prstGeom prst="rect">
-            <a:avLst/>
-          </a:prstGeom>
-        </p:spPr>
-        <p:txBody>
-          <a:bodyPr spcFirstLastPara="1" wrap="square" lIns="91425" tIns="91425" rIns="91425" bIns="91425" anchor="t" anchorCtr="0">
-            <a:noAutofit/>
-          </a:bodyPr>
-          <a:lstStyle/>
-          <a:p>
-            <a:pPr marL="0" lvl="0" indent="0" algn="ctr" rtl="0">
-              <a:spcBef>
-                <a:spcPts val="0"/>
-              </a:spcBef>
-              <a:spcAft>
-                <a:spcPts val="0"/>
-              </a:spcAft>
-              <a:buNone/>
-            </a:pPr>
-            <a:r>
-              <a:rPr lang="en-US" dirty="0"/>
-              <a:t>Use </a:t>
-            </a:r>
-            <a:r>
-              <a:rPr lang="en-US" sz="2400" dirty="0"/>
-              <a:t>Assigned</a:t>
-            </a:r>
-            <a:r>
-              <a:rPr lang="en-US" dirty="0"/>
-              <a:t> Seat</a:t>
-            </a:r>
-            <a:endParaRPr dirty="0"/>
-          </a:p>
-        </p:txBody>
-      </p:sp>
-      <p:sp>
-        <p:nvSpPr>
-          <p:cNvPr id="326" name="Google Shape;326;p47"/>
-          <p:cNvSpPr txBox="1">
-            <a:spLocks noGrp="1"/>
-          </p:cNvSpPr>
-          <p:nvPr>
-            <p:ph type="sldNum" idx="12"/>
-          </p:nvPr>
-        </p:nvSpPr>
-        <p:spPr>
-          <a:xfrm>
-            <a:off x="8472458" y="4663217"/>
-            <a:ext cx="548700" cy="393600"/>
-          </a:xfrm>
-          <a:prstGeom prst="rect">
-            <a:avLst/>
-          </a:prstGeom>
-        </p:spPr>
-        <p:txBody>
-          <a:bodyPr spcFirstLastPara="1" wrap="square" lIns="91425" tIns="91425" rIns="91425" bIns="91425" anchor="ctr" anchorCtr="0">
-            <a:noAutofit/>
-          </a:bodyPr>
-          <a:lstStyle/>
-          <a:p>
-            <a:pPr marL="0" lvl="0" indent="0" algn="r" rtl="0">
-              <a:spcBef>
-                <a:spcPts val="0"/>
-              </a:spcBef>
-              <a:spcAft>
-                <a:spcPts val="0"/>
-              </a:spcAft>
-              <a:buNone/>
-            </a:pPr>
-            <a:fld id="{00000000-1234-1234-1234-123412341234}" type="slidenum">
-              <a:rPr lang="en"/>
-              <a:t>9</a:t>
-            </a:fld>
-            <a:endParaRPr/>
-          </a:p>
-        </p:txBody>
-      </p:sp>
-      <p:pic>
-        <p:nvPicPr>
-          <p:cNvPr id="3" name="Picture 2">
-            <a:extLst>
-              <a:ext uri="{FF2B5EF4-FFF2-40B4-BE49-F238E27FC236}">
-                <a16:creationId xmlns:a16="http://schemas.microsoft.com/office/drawing/2014/main" id="{565A4964-E8A9-A46D-F4BE-E7D41C14EF1B}"/>
-              </a:ext>
-            </a:extLst>
-          </p:cNvPr>
-          <p:cNvPicPr>
-            <a:picLocks noChangeAspect="1"/>
-          </p:cNvPicPr>
-          <p:nvPr/>
-        </p:nvPicPr>
-        <p:blipFill>
-          <a:blip r:embed="rId3"/>
-          <a:stretch>
-            <a:fillRect/>
-          </a:stretch>
-        </p:blipFill>
-        <p:spPr>
-          <a:xfrm>
-            <a:off x="0" y="559220"/>
-            <a:ext cx="9144000" cy="4471763"/>
-          </a:xfrm>
-          <a:prstGeom prst="rect">
-            <a:avLst/>
-          </a:prstGeom>
-        </p:spPr>
-      </p:pic>
-    </p:spTree>
-    <p:extLst>
-      <p:ext uri="{BB962C8B-B14F-4D97-AF65-F5344CB8AC3E}">
-        <p14:creationId xmlns:p14="http://schemas.microsoft.com/office/powerpoint/2010/main" val="2495509868"/>
       </p:ext>
     </p:extLst>
   </p:cSld>

--- a/Presentation/Announcement.pptx
+++ b/Presentation/Announcement.pptx
@@ -6743,7 +6743,7 @@
             </a:r>
             <a:r>
               <a:rPr lang="en-US" sz="2400" dirty="0"/>
-              <a:t>8</a:t>
+              <a:t>9</a:t>
             </a:r>
             <a:r>
               <a:rPr lang="pl-PL" sz="2400" dirty="0"/>
@@ -6759,7 +6759,7 @@
             </a:r>
             <a:r>
               <a:rPr lang="en-US" sz="2400" dirty="0"/>
-              <a:t>Threads</a:t>
+              <a:t>Network Basic</a:t>
             </a:r>
           </a:p>
           <a:p>
@@ -6772,7 +6772,7 @@
             </a:r>
             <a:r>
               <a:rPr lang="en-US" sz="2400" dirty="0" err="1"/>
-              <a:t>ThreadingTheNeedle</a:t>
+              <a:t>LocalLoopback</a:t>
             </a:r>
             <a:endParaRPr sz="2400" dirty="0"/>
           </a:p>
@@ -7199,7 +7199,7 @@
             </a:pPr>
             <a:r>
               <a:rPr lang="en-US" sz="2400" dirty="0"/>
-              <a:t>Clone/Pull Unit8 – git hub classroom repo for class activities</a:t>
+              <a:t>Clone/Pull Unit9 – git hub classroom repo for class activities</a:t>
             </a:r>
           </a:p>
         </p:txBody>

--- a/Presentation/Announcement.pptx
+++ b/Presentation/Announcement.pptx
@@ -7935,7 +7935,7 @@
             </a:r>
             <a:r>
               <a:rPr lang="en-US" sz="2400" dirty="0"/>
-              <a:t>8</a:t>
+              <a:t>9</a:t>
             </a:r>
             <a:r>
               <a:rPr lang="pl-PL" sz="2400" dirty="0"/>
@@ -7951,7 +7951,7 @@
             </a:r>
             <a:r>
               <a:rPr lang="en-US" sz="2400" dirty="0"/>
-              <a:t>Threads Execution</a:t>
+              <a:t>Protocol</a:t>
             </a:r>
           </a:p>
           <a:p>
@@ -8537,7 +8537,7 @@
                   <a:schemeClr val="tx1"/>
                 </a:solidFill>
               </a:rPr>
-              <a:t>Quiz 6.2: Comparable and Comparator</a:t>
+              <a:t>Quiz 9.2: Protocol</a:t>
             </a:r>
           </a:p>
           <a:p>
@@ -8558,7 +8558,7 @@
                   <a:schemeClr val="tx1"/>
                 </a:solidFill>
               </a:rPr>
-              <a:t>comparisonsGalore</a:t>
+              <a:t>TokenRingRocks</a:t>
             </a:r>
             <a:endParaRPr sz="1600" dirty="0">
               <a:solidFill>
@@ -8995,7 +8995,7 @@
             </a:pPr>
             <a:r>
               <a:rPr lang="en-US" sz="1200" dirty="0"/>
-              <a:t>Accept GitHub Classroom Assignment for Unit 07</a:t>
+              <a:t>Accept GitHub Classroom Assignment for Unit 10</a:t>
             </a:r>
           </a:p>
           <a:p>
@@ -9005,8 +9005,12 @@
               </a:spcAft>
             </a:pPr>
             <a:r>
+              <a:rPr lang="en-US" sz="1200"/>
+              <a:t>Clone GitHub </a:t>
+            </a:r>
+            <a:r>
               <a:rPr lang="en-US" sz="1200" dirty="0"/>
-              <a:t>Clone/pull GitHub classroom repo for Unit 07 under </a:t>
+              <a:t>classroom repo for Unit 10 under </a:t>
             </a:r>
             <a:r>
               <a:rPr lang="en-US" sz="1200" dirty="0" err="1"/>
@@ -9320,7 +9324,7 @@
                   <a:schemeClr val="tx1"/>
                 </a:solidFill>
               </a:rPr>
-              <a:t>Quiz 6.3 Heap</a:t>
+              <a:t>Quiz 9.3 Socket Programming</a:t>
             </a:r>
           </a:p>
           <a:p>
@@ -9341,7 +9345,7 @@
                   <a:schemeClr val="tx1"/>
                 </a:solidFill>
               </a:rPr>
-              <a:t>heapingHelping</a:t>
+              <a:t>socket_dont_knock_it</a:t>
             </a:r>
             <a:endParaRPr lang="en-US" sz="1600" dirty="0">
               <a:solidFill>

--- a/Presentation/Announcement.pptx
+++ b/Presentation/Announcement.pptx
@@ -8,9 +8,9 @@
     <p:notesMasterId r:id="rId15"/>
   </p:notesMasterIdLst>
   <p:sldIdLst>
-    <p:sldId id="276" r:id="rId2"/>
-    <p:sldId id="288" r:id="rId3"/>
-    <p:sldId id="286" r:id="rId4"/>
+    <p:sldId id="286" r:id="rId2"/>
+    <p:sldId id="276" r:id="rId3"/>
+    <p:sldId id="288" r:id="rId4"/>
     <p:sldId id="281" r:id="rId5"/>
     <p:sldId id="278" r:id="rId6"/>
     <p:sldId id="287" r:id="rId7"/>
@@ -740,7 +740,13 @@
   <p:cSld>
     <p:spTree>
       <p:nvGrpSpPr>
-        <p:cNvPr id="1" name="Shape 320"/>
+        <p:cNvPr id="1" name="Shape 320">
+          <a:extLst>
+            <a:ext uri="{FF2B5EF4-FFF2-40B4-BE49-F238E27FC236}">
+              <a16:creationId xmlns:a16="http://schemas.microsoft.com/office/drawing/2014/main" id="{5E82D901-7A14-0382-4365-722182C687A8}"/>
+            </a:ext>
+          </a:extLst>
+        </p:cNvPr>
         <p:cNvGrpSpPr/>
         <p:nvPr/>
       </p:nvGrpSpPr>
@@ -754,7 +760,13 @@
       </p:grpSpPr>
       <p:sp>
         <p:nvSpPr>
-          <p:cNvPr id="321" name="Google Shape;321;g8f52c9b70a_3_0:notes"/>
+          <p:cNvPr id="321" name="Google Shape;321;g8f52c9b70a_3_0:notes">
+            <a:extLst>
+              <a:ext uri="{FF2B5EF4-FFF2-40B4-BE49-F238E27FC236}">
+                <a16:creationId xmlns:a16="http://schemas.microsoft.com/office/drawing/2014/main" id="{B8D16220-AF50-7601-71A9-4952749D32CB}"/>
+              </a:ext>
+            </a:extLst>
+          </p:cNvPr>
           <p:cNvSpPr>
             <a:spLocks noGrp="1" noRot="1" noChangeAspect="1"/>
           </p:cNvSpPr>
@@ -795,7 +807,13 @@
       </p:sp>
       <p:sp>
         <p:nvSpPr>
-          <p:cNvPr id="322" name="Google Shape;322;g8f52c9b70a_3_0:notes"/>
+          <p:cNvPr id="322" name="Google Shape;322;g8f52c9b70a_3_0:notes">
+            <a:extLst>
+              <a:ext uri="{FF2B5EF4-FFF2-40B4-BE49-F238E27FC236}">
+                <a16:creationId xmlns:a16="http://schemas.microsoft.com/office/drawing/2014/main" id="{AEA302D2-52D7-97D7-BF6C-781234E92D43}"/>
+              </a:ext>
+            </a:extLst>
+          </p:cNvPr>
           <p:cNvSpPr txBox="1">
             <a:spLocks noGrp="1"/>
           </p:cNvSpPr>
@@ -826,6 +844,11 @@
         </p:txBody>
       </p:sp>
     </p:spTree>
+    <p:extLst>
+      <p:ext uri="{BB962C8B-B14F-4D97-AF65-F5344CB8AC3E}">
+        <p14:creationId xmlns:p14="http://schemas.microsoft.com/office/powerpoint/2010/main" val="2483524941"/>
+      </p:ext>
+    </p:extLst>
   </p:cSld>
   <p:clrMapOvr>
     <a:masterClrMapping/>
@@ -1250,6 +1273,104 @@
   <p:cSld>
     <p:spTree>
       <p:nvGrpSpPr>
+        <p:cNvPr id="1" name="Shape 320"/>
+        <p:cNvGrpSpPr/>
+        <p:nvPr/>
+      </p:nvGrpSpPr>
+      <p:grpSpPr>
+        <a:xfrm>
+          <a:off x="0" y="0"/>
+          <a:ext cx="0" cy="0"/>
+          <a:chOff x="0" y="0"/>
+          <a:chExt cx="0" cy="0"/>
+        </a:xfrm>
+      </p:grpSpPr>
+      <p:sp>
+        <p:nvSpPr>
+          <p:cNvPr id="321" name="Google Shape;321;g8f52c9b70a_3_0:notes"/>
+          <p:cNvSpPr>
+            <a:spLocks noGrp="1" noRot="1" noChangeAspect="1"/>
+          </p:cNvSpPr>
+          <p:nvPr>
+            <p:ph type="sldImg" idx="2"/>
+          </p:nvPr>
+        </p:nvSpPr>
+        <p:spPr>
+          <a:xfrm>
+            <a:off x="406400" y="696913"/>
+            <a:ext cx="6197600" cy="3486150"/>
+          </a:xfrm>
+          <a:custGeom>
+            <a:avLst/>
+            <a:gdLst/>
+            <a:ahLst/>
+            <a:cxnLst/>
+            <a:rect l="l" t="t" r="r" b="b"/>
+            <a:pathLst>
+              <a:path w="120000" h="120000" extrusionOk="0">
+                <a:moveTo>
+                  <a:pt x="0" y="0"/>
+                </a:moveTo>
+                <a:lnTo>
+                  <a:pt x="120000" y="0"/>
+                </a:lnTo>
+                <a:lnTo>
+                  <a:pt x="120000" y="120000"/>
+                </a:lnTo>
+                <a:lnTo>
+                  <a:pt x="0" y="120000"/>
+                </a:lnTo>
+                <a:close/>
+              </a:path>
+            </a:pathLst>
+          </a:custGeom>
+        </p:spPr>
+      </p:sp>
+      <p:sp>
+        <p:nvSpPr>
+          <p:cNvPr id="322" name="Google Shape;322;g8f52c9b70a_3_0:notes"/>
+          <p:cNvSpPr txBox="1">
+            <a:spLocks noGrp="1"/>
+          </p:cNvSpPr>
+          <p:nvPr>
+            <p:ph type="body" idx="1"/>
+          </p:nvPr>
+        </p:nvSpPr>
+        <p:spPr>
+          <a:xfrm>
+            <a:off x="701040" y="4415790"/>
+            <a:ext cx="5608320" cy="4183380"/>
+          </a:xfrm>
+          <a:prstGeom prst="rect">
+            <a:avLst/>
+          </a:prstGeom>
+        </p:spPr>
+        <p:txBody>
+          <a:bodyPr spcFirstLastPara="1" wrap="square" lIns="93162" tIns="93162" rIns="93162" bIns="93162" anchor="t" anchorCtr="0">
+            <a:noAutofit/>
+          </a:bodyPr>
+          <a:lstStyle/>
+          <a:p>
+            <a:pPr marL="0" indent="0">
+              <a:buNone/>
+            </a:pPr>
+            <a:endParaRPr/>
+          </a:p>
+        </p:txBody>
+      </p:sp>
+    </p:spTree>
+  </p:cSld>
+  <p:clrMapOvr>
+    <a:masterClrMapping/>
+  </p:clrMapOvr>
+</p:notes>
+</file>
+
+<file path=ppt/notesSlides/notesSlide3.xml><?xml version="1.0" encoding="utf-8"?>
+<p:notes xmlns:a="http://schemas.openxmlformats.org/drawingml/2006/main" xmlns:r="http://schemas.openxmlformats.org/officeDocument/2006/relationships" xmlns:p="http://schemas.openxmlformats.org/presentationml/2006/main" showMasterSp="0" showMasterPhAnim="0">
+  <p:cSld>
+    <p:spTree>
+      <p:nvGrpSpPr>
         <p:cNvPr id="1" name="Shape 320">
           <a:extLst>
             <a:ext uri="{FF2B5EF4-FFF2-40B4-BE49-F238E27FC236}">
@@ -1357,127 +1478,6 @@
     <p:extLst>
       <p:ext uri="{BB962C8B-B14F-4D97-AF65-F5344CB8AC3E}">
         <p14:creationId xmlns:p14="http://schemas.microsoft.com/office/powerpoint/2010/main" val="1525491664"/>
-      </p:ext>
-    </p:extLst>
-  </p:cSld>
-  <p:clrMapOvr>
-    <a:masterClrMapping/>
-  </p:clrMapOvr>
-</p:notes>
-</file>
-
-<file path=ppt/notesSlides/notesSlide3.xml><?xml version="1.0" encoding="utf-8"?>
-<p:notes xmlns:a="http://schemas.openxmlformats.org/drawingml/2006/main" xmlns:r="http://schemas.openxmlformats.org/officeDocument/2006/relationships" xmlns:p="http://schemas.openxmlformats.org/presentationml/2006/main" showMasterSp="0" showMasterPhAnim="0">
-  <p:cSld>
-    <p:spTree>
-      <p:nvGrpSpPr>
-        <p:cNvPr id="1" name="Shape 320">
-          <a:extLst>
-            <a:ext uri="{FF2B5EF4-FFF2-40B4-BE49-F238E27FC236}">
-              <a16:creationId xmlns:a16="http://schemas.microsoft.com/office/drawing/2014/main" id="{5E82D901-7A14-0382-4365-722182C687A8}"/>
-            </a:ext>
-          </a:extLst>
-        </p:cNvPr>
-        <p:cNvGrpSpPr/>
-        <p:nvPr/>
-      </p:nvGrpSpPr>
-      <p:grpSpPr>
-        <a:xfrm>
-          <a:off x="0" y="0"/>
-          <a:ext cx="0" cy="0"/>
-          <a:chOff x="0" y="0"/>
-          <a:chExt cx="0" cy="0"/>
-        </a:xfrm>
-      </p:grpSpPr>
-      <p:sp>
-        <p:nvSpPr>
-          <p:cNvPr id="321" name="Google Shape;321;g8f52c9b70a_3_0:notes">
-            <a:extLst>
-              <a:ext uri="{FF2B5EF4-FFF2-40B4-BE49-F238E27FC236}">
-                <a16:creationId xmlns:a16="http://schemas.microsoft.com/office/drawing/2014/main" id="{B8D16220-AF50-7601-71A9-4952749D32CB}"/>
-              </a:ext>
-            </a:extLst>
-          </p:cNvPr>
-          <p:cNvSpPr>
-            <a:spLocks noGrp="1" noRot="1" noChangeAspect="1"/>
-          </p:cNvSpPr>
-          <p:nvPr>
-            <p:ph type="sldImg" idx="2"/>
-          </p:nvPr>
-        </p:nvSpPr>
-        <p:spPr>
-          <a:xfrm>
-            <a:off x="406400" y="696913"/>
-            <a:ext cx="6197600" cy="3486150"/>
-          </a:xfrm>
-          <a:custGeom>
-            <a:avLst/>
-            <a:gdLst/>
-            <a:ahLst/>
-            <a:cxnLst/>
-            <a:rect l="l" t="t" r="r" b="b"/>
-            <a:pathLst>
-              <a:path w="120000" h="120000" extrusionOk="0">
-                <a:moveTo>
-                  <a:pt x="0" y="0"/>
-                </a:moveTo>
-                <a:lnTo>
-                  <a:pt x="120000" y="0"/>
-                </a:lnTo>
-                <a:lnTo>
-                  <a:pt x="120000" y="120000"/>
-                </a:lnTo>
-                <a:lnTo>
-                  <a:pt x="0" y="120000"/>
-                </a:lnTo>
-                <a:close/>
-              </a:path>
-            </a:pathLst>
-          </a:custGeom>
-        </p:spPr>
-      </p:sp>
-      <p:sp>
-        <p:nvSpPr>
-          <p:cNvPr id="322" name="Google Shape;322;g8f52c9b70a_3_0:notes">
-            <a:extLst>
-              <a:ext uri="{FF2B5EF4-FFF2-40B4-BE49-F238E27FC236}">
-                <a16:creationId xmlns:a16="http://schemas.microsoft.com/office/drawing/2014/main" id="{AEA302D2-52D7-97D7-BF6C-781234E92D43}"/>
-              </a:ext>
-            </a:extLst>
-          </p:cNvPr>
-          <p:cNvSpPr txBox="1">
-            <a:spLocks noGrp="1"/>
-          </p:cNvSpPr>
-          <p:nvPr>
-            <p:ph type="body" idx="1"/>
-          </p:nvPr>
-        </p:nvSpPr>
-        <p:spPr>
-          <a:xfrm>
-            <a:off x="701040" y="4415790"/>
-            <a:ext cx="5608320" cy="4183380"/>
-          </a:xfrm>
-          <a:prstGeom prst="rect">
-            <a:avLst/>
-          </a:prstGeom>
-        </p:spPr>
-        <p:txBody>
-          <a:bodyPr spcFirstLastPara="1" wrap="square" lIns="93162" tIns="93162" rIns="93162" bIns="93162" anchor="t" anchorCtr="0">
-            <a:noAutofit/>
-          </a:bodyPr>
-          <a:lstStyle/>
-          <a:p>
-            <a:pPr marL="0" indent="0">
-              <a:buNone/>
-            </a:pPr>
-            <a:endParaRPr/>
-          </a:p>
-        </p:txBody>
-      </p:sp>
-    </p:spTree>
-    <p:extLst>
-      <p:ext uri="{BB962C8B-B14F-4D97-AF65-F5344CB8AC3E}">
-        <p14:creationId xmlns:p14="http://schemas.microsoft.com/office/powerpoint/2010/main" val="2483524941"/>
       </p:ext>
     </p:extLst>
   </p:cSld>
@@ -6651,6 +6651,1544 @@
   <p:cSld>
     <p:spTree>
       <p:nvGrpSpPr>
+        <p:cNvPr id="1" name="Shape 323">
+          <a:extLst>
+            <a:ext uri="{FF2B5EF4-FFF2-40B4-BE49-F238E27FC236}">
+              <a16:creationId xmlns:a16="http://schemas.microsoft.com/office/drawing/2014/main" id="{19512066-5980-8A8B-BE30-C4FB3AC72235}"/>
+            </a:ext>
+          </a:extLst>
+        </p:cNvPr>
+        <p:cNvGrpSpPr/>
+        <p:nvPr/>
+      </p:nvGrpSpPr>
+      <p:grpSpPr>
+        <a:xfrm>
+          <a:off x="0" y="0"/>
+          <a:ext cx="0" cy="0"/>
+          <a:chOff x="0" y="0"/>
+          <a:chExt cx="0" cy="0"/>
+        </a:xfrm>
+      </p:grpSpPr>
+      <p:sp>
+        <p:nvSpPr>
+          <p:cNvPr id="324" name="Google Shape;324;p47">
+            <a:extLst>
+              <a:ext uri="{FF2B5EF4-FFF2-40B4-BE49-F238E27FC236}">
+                <a16:creationId xmlns:a16="http://schemas.microsoft.com/office/drawing/2014/main" id="{CDF56279-13BE-3C44-BBEF-E7DC5D1E88D2}"/>
+              </a:ext>
+            </a:extLst>
+          </p:cNvPr>
+          <p:cNvSpPr txBox="1">
+            <a:spLocks noGrp="1"/>
+          </p:cNvSpPr>
+          <p:nvPr>
+            <p:ph type="title"/>
+          </p:nvPr>
+        </p:nvSpPr>
+        <p:spPr>
+          <a:xfrm>
+            <a:off x="300016" y="269197"/>
+            <a:ext cx="8520600" cy="623700"/>
+          </a:xfrm>
+          <a:prstGeom prst="rect">
+            <a:avLst/>
+          </a:prstGeom>
+        </p:spPr>
+        <p:txBody>
+          <a:bodyPr spcFirstLastPara="1" wrap="square" lIns="91425" tIns="91425" rIns="91425" bIns="91425" anchor="t" anchorCtr="0">
+            <a:noAutofit/>
+          </a:bodyPr>
+          <a:lstStyle/>
+          <a:p>
+            <a:pPr marL="0" lvl="0" indent="0" algn="ctr" rtl="0">
+              <a:spcBef>
+                <a:spcPts val="0"/>
+              </a:spcBef>
+              <a:spcAft>
+                <a:spcPts val="0"/>
+              </a:spcAft>
+              <a:buNone/>
+            </a:pPr>
+            <a:r>
+              <a:rPr lang="en-US" dirty="0"/>
+              <a:t>GCIS – Software Development and Problem Solving</a:t>
+            </a:r>
+            <a:endParaRPr dirty="0"/>
+          </a:p>
+        </p:txBody>
+      </p:sp>
+      <p:sp>
+        <p:nvSpPr>
+          <p:cNvPr id="325" name="Google Shape;325;p47">
+            <a:extLst>
+              <a:ext uri="{FF2B5EF4-FFF2-40B4-BE49-F238E27FC236}">
+                <a16:creationId xmlns:a16="http://schemas.microsoft.com/office/drawing/2014/main" id="{5A9661D1-8430-BF80-279A-41B28CA04273}"/>
+              </a:ext>
+            </a:extLst>
+          </p:cNvPr>
+          <p:cNvSpPr txBox="1">
+            <a:spLocks noGrp="1"/>
+          </p:cNvSpPr>
+          <p:nvPr>
+            <p:ph type="body" idx="1"/>
+          </p:nvPr>
+        </p:nvSpPr>
+        <p:spPr>
+          <a:xfrm>
+            <a:off x="91445" y="1758316"/>
+            <a:ext cx="4000496" cy="1378401"/>
+          </a:xfrm>
+          <a:prstGeom prst="rect">
+            <a:avLst/>
+          </a:prstGeom>
+        </p:spPr>
+        <p:txBody>
+          <a:bodyPr spcFirstLastPara="1" wrap="square" lIns="91425" tIns="91425" rIns="91425" bIns="91425" anchor="ctr" anchorCtr="0">
+            <a:noAutofit/>
+          </a:bodyPr>
+          <a:lstStyle/>
+          <a:p>
+            <a:pPr marL="146050" indent="0">
+              <a:buNone/>
+            </a:pPr>
+            <a:r>
+              <a:rPr lang="en-US" sz="1600" dirty="0">
+                <a:solidFill>
+                  <a:schemeClr val="tx1"/>
+                </a:solidFill>
+              </a:rPr>
+              <a:t>Quiz 10.2: HTTP2</a:t>
+            </a:r>
+          </a:p>
+          <a:p>
+            <a:pPr marL="146050" indent="0">
+              <a:buNone/>
+            </a:pPr>
+            <a:r>
+              <a:rPr lang="en-US" sz="1600" dirty="0">
+                <a:solidFill>
+                  <a:schemeClr val="tx1"/>
+                </a:solidFill>
+              </a:rPr>
+              <a:t>Password – </a:t>
+            </a:r>
+            <a:r>
+              <a:rPr lang="en-US" sz="1600" dirty="0" err="1">
+                <a:solidFill>
+                  <a:schemeClr val="tx1"/>
+                </a:solidFill>
+              </a:rPr>
+              <a:t>ProtoCall</a:t>
+            </a:r>
+            <a:endParaRPr sz="1600" dirty="0">
+              <a:solidFill>
+                <a:schemeClr val="tx1"/>
+              </a:solidFill>
+            </a:endParaRPr>
+          </a:p>
+        </p:txBody>
+      </p:sp>
+      <p:sp>
+        <p:nvSpPr>
+          <p:cNvPr id="326" name="Google Shape;326;p47">
+            <a:extLst>
+              <a:ext uri="{FF2B5EF4-FFF2-40B4-BE49-F238E27FC236}">
+                <a16:creationId xmlns:a16="http://schemas.microsoft.com/office/drawing/2014/main" id="{8A14E227-935A-FBD8-6BD5-CBCE8D13EE84}"/>
+              </a:ext>
+            </a:extLst>
+          </p:cNvPr>
+          <p:cNvSpPr txBox="1">
+            <a:spLocks noGrp="1"/>
+          </p:cNvSpPr>
+          <p:nvPr>
+            <p:ph type="sldNum" idx="12"/>
+          </p:nvPr>
+        </p:nvSpPr>
+        <p:spPr>
+          <a:xfrm>
+            <a:off x="8472458" y="4663217"/>
+            <a:ext cx="548700" cy="393600"/>
+          </a:xfrm>
+          <a:prstGeom prst="rect">
+            <a:avLst/>
+          </a:prstGeom>
+        </p:spPr>
+        <p:txBody>
+          <a:bodyPr spcFirstLastPara="1" wrap="square" lIns="91425" tIns="91425" rIns="91425" bIns="91425" anchor="ctr" anchorCtr="0">
+            <a:noAutofit/>
+          </a:bodyPr>
+          <a:lstStyle/>
+          <a:p>
+            <a:pPr marL="0" lvl="0" indent="0" algn="r" rtl="0">
+              <a:spcBef>
+                <a:spcPts val="0"/>
+              </a:spcBef>
+              <a:spcAft>
+                <a:spcPts val="0"/>
+              </a:spcAft>
+              <a:buNone/>
+            </a:pPr>
+            <a:fld id="{00000000-1234-1234-1234-123412341234}" type="slidenum">
+              <a:rPr lang="en"/>
+              <a:t>1</a:t>
+            </a:fld>
+            <a:endParaRPr/>
+          </a:p>
+        </p:txBody>
+      </p:sp>
+      <p:sp>
+        <p:nvSpPr>
+          <p:cNvPr id="2" name="TextBox 1">
+            <a:extLst>
+              <a:ext uri="{FF2B5EF4-FFF2-40B4-BE49-F238E27FC236}">
+                <a16:creationId xmlns:a16="http://schemas.microsoft.com/office/drawing/2014/main" id="{AE960589-7B12-D7F7-6452-D45441D8CA95}"/>
+              </a:ext>
+            </a:extLst>
+          </p:cNvPr>
+          <p:cNvSpPr txBox="1"/>
+          <p:nvPr/>
+        </p:nvSpPr>
+        <p:spPr>
+          <a:xfrm>
+            <a:off x="-11684" y="1287037"/>
+            <a:ext cx="9144000" cy="338555"/>
+          </a:xfrm>
+          <a:prstGeom prst="rect">
+            <a:avLst/>
+          </a:prstGeom>
+          <a:solidFill>
+            <a:srgbClr val="FFC000"/>
+          </a:solidFill>
+        </p:spPr>
+        <p:txBody>
+          <a:bodyPr wrap="square" rtlCol="0">
+            <a:spAutoFit/>
+          </a:bodyPr>
+          <a:lstStyle/>
+          <a:p>
+            <a:r>
+              <a:rPr lang="en-US" dirty="0"/>
+              <a:t>Quiz</a:t>
+            </a:r>
+          </a:p>
+        </p:txBody>
+      </p:sp>
+      <p:sp>
+        <p:nvSpPr>
+          <p:cNvPr id="3" name="TextBox 2">
+            <a:extLst>
+              <a:ext uri="{FF2B5EF4-FFF2-40B4-BE49-F238E27FC236}">
+                <a16:creationId xmlns:a16="http://schemas.microsoft.com/office/drawing/2014/main" id="{4FD526CA-3FDB-A5C2-36D9-69A3252D5E9A}"/>
+              </a:ext>
+            </a:extLst>
+          </p:cNvPr>
+          <p:cNvSpPr txBox="1"/>
+          <p:nvPr/>
+        </p:nvSpPr>
+        <p:spPr>
+          <a:xfrm>
+            <a:off x="0" y="3254487"/>
+            <a:ext cx="9144000" cy="307777"/>
+          </a:xfrm>
+          <a:prstGeom prst="rect">
+            <a:avLst/>
+          </a:prstGeom>
+          <a:solidFill>
+            <a:srgbClr val="FFC000"/>
+          </a:solidFill>
+        </p:spPr>
+        <p:txBody>
+          <a:bodyPr wrap="square" rtlCol="0">
+            <a:spAutoFit/>
+          </a:bodyPr>
+          <a:lstStyle/>
+          <a:p>
+            <a:r>
+              <a:rPr lang="en-US" dirty="0"/>
+              <a:t>Next </a:t>
+            </a:r>
+            <a:r>
+              <a:rPr lang="en-US" dirty="0">
+                <a:sym typeface="Wingdings" panose="05000000000000000000" pitchFamily="2" charset="2"/>
+              </a:rPr>
+              <a:t> </a:t>
+            </a:r>
+            <a:endParaRPr lang="en-US" dirty="0"/>
+          </a:p>
+        </p:txBody>
+      </p:sp>
+      <p:sp>
+        <p:nvSpPr>
+          <p:cNvPr id="4" name="Google Shape;325;p47">
+            <a:extLst>
+              <a:ext uri="{FF2B5EF4-FFF2-40B4-BE49-F238E27FC236}">
+                <a16:creationId xmlns:a16="http://schemas.microsoft.com/office/drawing/2014/main" id="{DC50CCB1-5AFE-1F52-8B22-87EB927965B4}"/>
+              </a:ext>
+            </a:extLst>
+          </p:cNvPr>
+          <p:cNvSpPr txBox="1">
+            <a:spLocks/>
+          </p:cNvSpPr>
+          <p:nvPr/>
+        </p:nvSpPr>
+        <p:spPr>
+          <a:xfrm>
+            <a:off x="-5842" y="3562264"/>
+            <a:ext cx="9149842" cy="1494553"/>
+          </a:xfrm>
+          <a:prstGeom prst="rect">
+            <a:avLst/>
+          </a:prstGeom>
+          <a:noFill/>
+          <a:ln>
+            <a:noFill/>
+          </a:ln>
+        </p:spPr>
+        <p:txBody>
+          <a:bodyPr spcFirstLastPara="1" wrap="square" lIns="91425" tIns="91425" rIns="91425" bIns="91425" anchor="ctr" anchorCtr="0">
+            <a:noAutofit/>
+          </a:bodyPr>
+          <a:lstStyle>
+            <a:defPPr marR="0" lvl="0" algn="l" rtl="0">
+              <a:lnSpc>
+                <a:spcPct val="100000"/>
+              </a:lnSpc>
+              <a:spcBef>
+                <a:spcPts val="0"/>
+              </a:spcBef>
+              <a:spcAft>
+                <a:spcPts val="0"/>
+              </a:spcAft>
+            </a:defPPr>
+            <a:lvl1pPr marL="457200" marR="0" lvl="0" indent="-311150" algn="l" rtl="0">
+              <a:lnSpc>
+                <a:spcPct val="115000"/>
+              </a:lnSpc>
+              <a:spcBef>
+                <a:spcPts val="0"/>
+              </a:spcBef>
+              <a:spcAft>
+                <a:spcPts val="0"/>
+              </a:spcAft>
+              <a:buClr>
+                <a:schemeClr val="dk2"/>
+              </a:buClr>
+              <a:buSzPts val="1300"/>
+              <a:buFont typeface="Roboto"/>
+              <a:buChar char="●"/>
+              <a:defRPr sz="1300" b="0" i="0" u="none" strike="noStrike" cap="none">
+                <a:solidFill>
+                  <a:schemeClr val="dk2"/>
+                </a:solidFill>
+                <a:latin typeface="Roboto"/>
+                <a:ea typeface="Roboto"/>
+                <a:cs typeface="Roboto"/>
+                <a:sym typeface="Roboto"/>
+              </a:defRPr>
+            </a:lvl1pPr>
+            <a:lvl2pPr marL="914400" marR="0" lvl="1" indent="-298450" algn="l" rtl="0">
+              <a:lnSpc>
+                <a:spcPct val="115000"/>
+              </a:lnSpc>
+              <a:spcBef>
+                <a:spcPts val="1600"/>
+              </a:spcBef>
+              <a:spcAft>
+                <a:spcPts val="0"/>
+              </a:spcAft>
+              <a:buClr>
+                <a:schemeClr val="dk2"/>
+              </a:buClr>
+              <a:buSzPts val="1100"/>
+              <a:buFont typeface="Roboto"/>
+              <a:buChar char="○"/>
+              <a:defRPr sz="1100" b="0" i="0" u="none" strike="noStrike" cap="none">
+                <a:solidFill>
+                  <a:schemeClr val="dk2"/>
+                </a:solidFill>
+                <a:latin typeface="Roboto"/>
+                <a:ea typeface="Roboto"/>
+                <a:cs typeface="Roboto"/>
+                <a:sym typeface="Roboto"/>
+              </a:defRPr>
+            </a:lvl2pPr>
+            <a:lvl3pPr marL="1371600" marR="0" lvl="2" indent="-298450" algn="l" rtl="0">
+              <a:lnSpc>
+                <a:spcPct val="115000"/>
+              </a:lnSpc>
+              <a:spcBef>
+                <a:spcPts val="1600"/>
+              </a:spcBef>
+              <a:spcAft>
+                <a:spcPts val="0"/>
+              </a:spcAft>
+              <a:buClr>
+                <a:schemeClr val="dk2"/>
+              </a:buClr>
+              <a:buSzPts val="1100"/>
+              <a:buFont typeface="Roboto"/>
+              <a:buChar char="■"/>
+              <a:defRPr sz="1100" b="0" i="0" u="none" strike="noStrike" cap="none">
+                <a:solidFill>
+                  <a:schemeClr val="dk2"/>
+                </a:solidFill>
+                <a:latin typeface="Roboto"/>
+                <a:ea typeface="Roboto"/>
+                <a:cs typeface="Roboto"/>
+                <a:sym typeface="Roboto"/>
+              </a:defRPr>
+            </a:lvl3pPr>
+            <a:lvl4pPr marL="1828800" marR="0" lvl="3" indent="-298450" algn="l" rtl="0">
+              <a:lnSpc>
+                <a:spcPct val="115000"/>
+              </a:lnSpc>
+              <a:spcBef>
+                <a:spcPts val="1600"/>
+              </a:spcBef>
+              <a:spcAft>
+                <a:spcPts val="0"/>
+              </a:spcAft>
+              <a:buClr>
+                <a:schemeClr val="dk2"/>
+              </a:buClr>
+              <a:buSzPts val="1100"/>
+              <a:buFont typeface="Roboto"/>
+              <a:buChar char="●"/>
+              <a:defRPr sz="1100" b="0" i="0" u="none" strike="noStrike" cap="none">
+                <a:solidFill>
+                  <a:schemeClr val="dk2"/>
+                </a:solidFill>
+                <a:latin typeface="Roboto"/>
+                <a:ea typeface="Roboto"/>
+                <a:cs typeface="Roboto"/>
+                <a:sym typeface="Roboto"/>
+              </a:defRPr>
+            </a:lvl4pPr>
+            <a:lvl5pPr marL="2286000" marR="0" lvl="4" indent="-298450" algn="l" rtl="0">
+              <a:lnSpc>
+                <a:spcPct val="115000"/>
+              </a:lnSpc>
+              <a:spcBef>
+                <a:spcPts val="1600"/>
+              </a:spcBef>
+              <a:spcAft>
+                <a:spcPts val="0"/>
+              </a:spcAft>
+              <a:buClr>
+                <a:schemeClr val="dk2"/>
+              </a:buClr>
+              <a:buSzPts val="1100"/>
+              <a:buFont typeface="Roboto"/>
+              <a:buChar char="○"/>
+              <a:defRPr sz="1100" b="0" i="0" u="none" strike="noStrike" cap="none">
+                <a:solidFill>
+                  <a:schemeClr val="dk2"/>
+                </a:solidFill>
+                <a:latin typeface="Roboto"/>
+                <a:ea typeface="Roboto"/>
+                <a:cs typeface="Roboto"/>
+                <a:sym typeface="Roboto"/>
+              </a:defRPr>
+            </a:lvl5pPr>
+            <a:lvl6pPr marL="2743200" marR="0" lvl="5" indent="-298450" algn="l" rtl="0">
+              <a:lnSpc>
+                <a:spcPct val="115000"/>
+              </a:lnSpc>
+              <a:spcBef>
+                <a:spcPts val="1600"/>
+              </a:spcBef>
+              <a:spcAft>
+                <a:spcPts val="0"/>
+              </a:spcAft>
+              <a:buClr>
+                <a:schemeClr val="dk2"/>
+              </a:buClr>
+              <a:buSzPts val="1100"/>
+              <a:buFont typeface="Roboto"/>
+              <a:buChar char="■"/>
+              <a:defRPr sz="1100" b="0" i="0" u="none" strike="noStrike" cap="none">
+                <a:solidFill>
+                  <a:schemeClr val="dk2"/>
+                </a:solidFill>
+                <a:latin typeface="Roboto"/>
+                <a:ea typeface="Roboto"/>
+                <a:cs typeface="Roboto"/>
+                <a:sym typeface="Roboto"/>
+              </a:defRPr>
+            </a:lvl6pPr>
+            <a:lvl7pPr marL="3200400" marR="0" lvl="6" indent="-298450" algn="l" rtl="0">
+              <a:lnSpc>
+                <a:spcPct val="115000"/>
+              </a:lnSpc>
+              <a:spcBef>
+                <a:spcPts val="1600"/>
+              </a:spcBef>
+              <a:spcAft>
+                <a:spcPts val="0"/>
+              </a:spcAft>
+              <a:buClr>
+                <a:schemeClr val="dk2"/>
+              </a:buClr>
+              <a:buSzPts val="1100"/>
+              <a:buFont typeface="Roboto"/>
+              <a:buChar char="●"/>
+              <a:defRPr sz="1100" b="0" i="0" u="none" strike="noStrike" cap="none">
+                <a:solidFill>
+                  <a:schemeClr val="dk2"/>
+                </a:solidFill>
+                <a:latin typeface="Roboto"/>
+                <a:ea typeface="Roboto"/>
+                <a:cs typeface="Roboto"/>
+                <a:sym typeface="Roboto"/>
+              </a:defRPr>
+            </a:lvl7pPr>
+            <a:lvl8pPr marL="3657600" marR="0" lvl="7" indent="-298450" algn="l" rtl="0">
+              <a:lnSpc>
+                <a:spcPct val="115000"/>
+              </a:lnSpc>
+              <a:spcBef>
+                <a:spcPts val="1600"/>
+              </a:spcBef>
+              <a:spcAft>
+                <a:spcPts val="0"/>
+              </a:spcAft>
+              <a:buClr>
+                <a:schemeClr val="dk2"/>
+              </a:buClr>
+              <a:buSzPts val="1100"/>
+              <a:buFont typeface="Roboto"/>
+              <a:buChar char="○"/>
+              <a:defRPr sz="1100" b="0" i="0" u="none" strike="noStrike" cap="none">
+                <a:solidFill>
+                  <a:schemeClr val="dk2"/>
+                </a:solidFill>
+                <a:latin typeface="Roboto"/>
+                <a:ea typeface="Roboto"/>
+                <a:cs typeface="Roboto"/>
+                <a:sym typeface="Roboto"/>
+              </a:defRPr>
+            </a:lvl8pPr>
+            <a:lvl9pPr marL="4114800" marR="0" lvl="8" indent="-298450" algn="l" rtl="0">
+              <a:lnSpc>
+                <a:spcPct val="115000"/>
+              </a:lnSpc>
+              <a:spcBef>
+                <a:spcPts val="1600"/>
+              </a:spcBef>
+              <a:spcAft>
+                <a:spcPts val="1600"/>
+              </a:spcAft>
+              <a:buClr>
+                <a:schemeClr val="dk2"/>
+              </a:buClr>
+              <a:buSzPts val="1100"/>
+              <a:buFont typeface="Roboto"/>
+              <a:buChar char="■"/>
+              <a:defRPr sz="1100" b="0" i="0" u="none" strike="noStrike" cap="none">
+                <a:solidFill>
+                  <a:schemeClr val="dk2"/>
+                </a:solidFill>
+                <a:latin typeface="Roboto"/>
+                <a:ea typeface="Roboto"/>
+                <a:cs typeface="Roboto"/>
+                <a:sym typeface="Roboto"/>
+              </a:defRPr>
+            </a:lvl9pPr>
+          </a:lstStyle>
+          <a:p>
+            <a:pPr marL="0" indent="0">
+              <a:spcAft>
+                <a:spcPts val="1600"/>
+              </a:spcAft>
+              <a:buNone/>
+            </a:pPr>
+            <a:r>
+              <a:rPr lang="en-US" sz="1400" dirty="0"/>
+              <a:t>After completing the Quiz </a:t>
+            </a:r>
+          </a:p>
+          <a:p>
+            <a:pPr marL="342900" indent="-342900">
+              <a:spcAft>
+                <a:spcPts val="1600"/>
+              </a:spcAft>
+            </a:pPr>
+            <a:r>
+              <a:rPr lang="en-US" sz="1200" dirty="0"/>
+              <a:t>Accept GitHub Classroom Assignment for Unit 11</a:t>
+            </a:r>
+          </a:p>
+          <a:p>
+            <a:pPr marL="342900" indent="-342900">
+              <a:spcAft>
+                <a:spcPts val="1600"/>
+              </a:spcAft>
+            </a:pPr>
+            <a:r>
+              <a:rPr lang="en-US" sz="1200" dirty="0"/>
+              <a:t>Clone GitHub classroom repo for Unit 11 under </a:t>
+            </a:r>
+            <a:r>
+              <a:rPr lang="en-US" sz="1200" dirty="0" err="1"/>
+              <a:t>softdevII</a:t>
+            </a:r>
+            <a:r>
+              <a:rPr lang="en-US" sz="1200" dirty="0"/>
+              <a:t> folder. </a:t>
+            </a:r>
+            <a:endParaRPr lang="en-US" sz="1200" dirty="0">
+              <a:solidFill>
+                <a:schemeClr val="tx1"/>
+              </a:solidFill>
+            </a:endParaRPr>
+          </a:p>
+        </p:txBody>
+      </p:sp>
+      <p:sp>
+        <p:nvSpPr>
+          <p:cNvPr id="5" name="Google Shape;325;p47">
+            <a:extLst>
+              <a:ext uri="{FF2B5EF4-FFF2-40B4-BE49-F238E27FC236}">
+                <a16:creationId xmlns:a16="http://schemas.microsoft.com/office/drawing/2014/main" id="{7B85466C-6200-EE66-9396-7DECA70CDF53}"/>
+              </a:ext>
+            </a:extLst>
+          </p:cNvPr>
+          <p:cNvSpPr txBox="1">
+            <a:spLocks/>
+          </p:cNvSpPr>
+          <p:nvPr/>
+        </p:nvSpPr>
+        <p:spPr>
+          <a:xfrm>
+            <a:off x="4303618" y="1750839"/>
+            <a:ext cx="4516998" cy="1378400"/>
+          </a:xfrm>
+          <a:prstGeom prst="rect">
+            <a:avLst/>
+          </a:prstGeom>
+          <a:noFill/>
+          <a:ln>
+            <a:noFill/>
+          </a:ln>
+        </p:spPr>
+        <p:txBody>
+          <a:bodyPr spcFirstLastPara="1" wrap="square" lIns="91425" tIns="91425" rIns="91425" bIns="91425" anchor="ctr" anchorCtr="0">
+            <a:noAutofit/>
+          </a:bodyPr>
+          <a:lstStyle>
+            <a:defPPr marR="0" lvl="0" algn="l" rtl="0">
+              <a:lnSpc>
+                <a:spcPct val="100000"/>
+              </a:lnSpc>
+              <a:spcBef>
+                <a:spcPts val="0"/>
+              </a:spcBef>
+              <a:spcAft>
+                <a:spcPts val="0"/>
+              </a:spcAft>
+            </a:defPPr>
+            <a:lvl1pPr marL="457200" marR="0" lvl="0" indent="-311150" algn="l" rtl="0">
+              <a:lnSpc>
+                <a:spcPct val="115000"/>
+              </a:lnSpc>
+              <a:spcBef>
+                <a:spcPts val="0"/>
+              </a:spcBef>
+              <a:spcAft>
+                <a:spcPts val="0"/>
+              </a:spcAft>
+              <a:buClr>
+                <a:schemeClr val="dk2"/>
+              </a:buClr>
+              <a:buSzPts val="1300"/>
+              <a:buFont typeface="Roboto"/>
+              <a:buChar char="●"/>
+              <a:defRPr sz="1300" b="0" i="0" u="none" strike="noStrike" cap="none">
+                <a:solidFill>
+                  <a:schemeClr val="dk2"/>
+                </a:solidFill>
+                <a:latin typeface="Roboto"/>
+                <a:ea typeface="Roboto"/>
+                <a:cs typeface="Roboto"/>
+                <a:sym typeface="Roboto"/>
+              </a:defRPr>
+            </a:lvl1pPr>
+            <a:lvl2pPr marL="914400" marR="0" lvl="1" indent="-298450" algn="l" rtl="0">
+              <a:lnSpc>
+                <a:spcPct val="115000"/>
+              </a:lnSpc>
+              <a:spcBef>
+                <a:spcPts val="1600"/>
+              </a:spcBef>
+              <a:spcAft>
+                <a:spcPts val="0"/>
+              </a:spcAft>
+              <a:buClr>
+                <a:schemeClr val="dk2"/>
+              </a:buClr>
+              <a:buSzPts val="1100"/>
+              <a:buFont typeface="Roboto"/>
+              <a:buChar char="○"/>
+              <a:defRPr sz="1100" b="0" i="0" u="none" strike="noStrike" cap="none">
+                <a:solidFill>
+                  <a:schemeClr val="dk2"/>
+                </a:solidFill>
+                <a:latin typeface="Roboto"/>
+                <a:ea typeface="Roboto"/>
+                <a:cs typeface="Roboto"/>
+                <a:sym typeface="Roboto"/>
+              </a:defRPr>
+            </a:lvl2pPr>
+            <a:lvl3pPr marL="1371600" marR="0" lvl="2" indent="-298450" algn="l" rtl="0">
+              <a:lnSpc>
+                <a:spcPct val="115000"/>
+              </a:lnSpc>
+              <a:spcBef>
+                <a:spcPts val="1600"/>
+              </a:spcBef>
+              <a:spcAft>
+                <a:spcPts val="0"/>
+              </a:spcAft>
+              <a:buClr>
+                <a:schemeClr val="dk2"/>
+              </a:buClr>
+              <a:buSzPts val="1100"/>
+              <a:buFont typeface="Roboto"/>
+              <a:buChar char="■"/>
+              <a:defRPr sz="1100" b="0" i="0" u="none" strike="noStrike" cap="none">
+                <a:solidFill>
+                  <a:schemeClr val="dk2"/>
+                </a:solidFill>
+                <a:latin typeface="Roboto"/>
+                <a:ea typeface="Roboto"/>
+                <a:cs typeface="Roboto"/>
+                <a:sym typeface="Roboto"/>
+              </a:defRPr>
+            </a:lvl3pPr>
+            <a:lvl4pPr marL="1828800" marR="0" lvl="3" indent="-298450" algn="l" rtl="0">
+              <a:lnSpc>
+                <a:spcPct val="115000"/>
+              </a:lnSpc>
+              <a:spcBef>
+                <a:spcPts val="1600"/>
+              </a:spcBef>
+              <a:spcAft>
+                <a:spcPts val="0"/>
+              </a:spcAft>
+              <a:buClr>
+                <a:schemeClr val="dk2"/>
+              </a:buClr>
+              <a:buSzPts val="1100"/>
+              <a:buFont typeface="Roboto"/>
+              <a:buChar char="●"/>
+              <a:defRPr sz="1100" b="0" i="0" u="none" strike="noStrike" cap="none">
+                <a:solidFill>
+                  <a:schemeClr val="dk2"/>
+                </a:solidFill>
+                <a:latin typeface="Roboto"/>
+                <a:ea typeface="Roboto"/>
+                <a:cs typeface="Roboto"/>
+                <a:sym typeface="Roboto"/>
+              </a:defRPr>
+            </a:lvl4pPr>
+            <a:lvl5pPr marL="2286000" marR="0" lvl="4" indent="-298450" algn="l" rtl="0">
+              <a:lnSpc>
+                <a:spcPct val="115000"/>
+              </a:lnSpc>
+              <a:spcBef>
+                <a:spcPts val="1600"/>
+              </a:spcBef>
+              <a:spcAft>
+                <a:spcPts val="0"/>
+              </a:spcAft>
+              <a:buClr>
+                <a:schemeClr val="dk2"/>
+              </a:buClr>
+              <a:buSzPts val="1100"/>
+              <a:buFont typeface="Roboto"/>
+              <a:buChar char="○"/>
+              <a:defRPr sz="1100" b="0" i="0" u="none" strike="noStrike" cap="none">
+                <a:solidFill>
+                  <a:schemeClr val="dk2"/>
+                </a:solidFill>
+                <a:latin typeface="Roboto"/>
+                <a:ea typeface="Roboto"/>
+                <a:cs typeface="Roboto"/>
+                <a:sym typeface="Roboto"/>
+              </a:defRPr>
+            </a:lvl5pPr>
+            <a:lvl6pPr marL="2743200" marR="0" lvl="5" indent="-298450" algn="l" rtl="0">
+              <a:lnSpc>
+                <a:spcPct val="115000"/>
+              </a:lnSpc>
+              <a:spcBef>
+                <a:spcPts val="1600"/>
+              </a:spcBef>
+              <a:spcAft>
+                <a:spcPts val="0"/>
+              </a:spcAft>
+              <a:buClr>
+                <a:schemeClr val="dk2"/>
+              </a:buClr>
+              <a:buSzPts val="1100"/>
+              <a:buFont typeface="Roboto"/>
+              <a:buChar char="■"/>
+              <a:defRPr sz="1100" b="0" i="0" u="none" strike="noStrike" cap="none">
+                <a:solidFill>
+                  <a:schemeClr val="dk2"/>
+                </a:solidFill>
+                <a:latin typeface="Roboto"/>
+                <a:ea typeface="Roboto"/>
+                <a:cs typeface="Roboto"/>
+                <a:sym typeface="Roboto"/>
+              </a:defRPr>
+            </a:lvl6pPr>
+            <a:lvl7pPr marL="3200400" marR="0" lvl="6" indent="-298450" algn="l" rtl="0">
+              <a:lnSpc>
+                <a:spcPct val="115000"/>
+              </a:lnSpc>
+              <a:spcBef>
+                <a:spcPts val="1600"/>
+              </a:spcBef>
+              <a:spcAft>
+                <a:spcPts val="0"/>
+              </a:spcAft>
+              <a:buClr>
+                <a:schemeClr val="dk2"/>
+              </a:buClr>
+              <a:buSzPts val="1100"/>
+              <a:buFont typeface="Roboto"/>
+              <a:buChar char="●"/>
+              <a:defRPr sz="1100" b="0" i="0" u="none" strike="noStrike" cap="none">
+                <a:solidFill>
+                  <a:schemeClr val="dk2"/>
+                </a:solidFill>
+                <a:latin typeface="Roboto"/>
+                <a:ea typeface="Roboto"/>
+                <a:cs typeface="Roboto"/>
+                <a:sym typeface="Roboto"/>
+              </a:defRPr>
+            </a:lvl7pPr>
+            <a:lvl8pPr marL="3657600" marR="0" lvl="7" indent="-298450" algn="l" rtl="0">
+              <a:lnSpc>
+                <a:spcPct val="115000"/>
+              </a:lnSpc>
+              <a:spcBef>
+                <a:spcPts val="1600"/>
+              </a:spcBef>
+              <a:spcAft>
+                <a:spcPts val="0"/>
+              </a:spcAft>
+              <a:buClr>
+                <a:schemeClr val="dk2"/>
+              </a:buClr>
+              <a:buSzPts val="1100"/>
+              <a:buFont typeface="Roboto"/>
+              <a:buChar char="○"/>
+              <a:defRPr sz="1100" b="0" i="0" u="none" strike="noStrike" cap="none">
+                <a:solidFill>
+                  <a:schemeClr val="dk2"/>
+                </a:solidFill>
+                <a:latin typeface="Roboto"/>
+                <a:ea typeface="Roboto"/>
+                <a:cs typeface="Roboto"/>
+                <a:sym typeface="Roboto"/>
+              </a:defRPr>
+            </a:lvl8pPr>
+            <a:lvl9pPr marL="4114800" marR="0" lvl="8" indent="-298450" algn="l" rtl="0">
+              <a:lnSpc>
+                <a:spcPct val="115000"/>
+              </a:lnSpc>
+              <a:spcBef>
+                <a:spcPts val="1600"/>
+              </a:spcBef>
+              <a:spcAft>
+                <a:spcPts val="1600"/>
+              </a:spcAft>
+              <a:buClr>
+                <a:schemeClr val="dk2"/>
+              </a:buClr>
+              <a:buSzPts val="1100"/>
+              <a:buFont typeface="Roboto"/>
+              <a:buChar char="■"/>
+              <a:defRPr sz="1100" b="0" i="0" u="none" strike="noStrike" cap="none">
+                <a:solidFill>
+                  <a:schemeClr val="dk2"/>
+                </a:solidFill>
+                <a:latin typeface="Roboto"/>
+                <a:ea typeface="Roboto"/>
+                <a:cs typeface="Roboto"/>
+                <a:sym typeface="Roboto"/>
+              </a:defRPr>
+            </a:lvl9pPr>
+          </a:lstStyle>
+          <a:p>
+            <a:pPr marL="146050" indent="0">
+              <a:buNone/>
+            </a:pPr>
+            <a:r>
+              <a:rPr lang="en-US" sz="1600" dirty="0">
+                <a:solidFill>
+                  <a:schemeClr val="tx1"/>
+                </a:solidFill>
+              </a:rPr>
+              <a:t>Quiz 10.3 Networking and HTTP Review</a:t>
+            </a:r>
+          </a:p>
+          <a:p>
+            <a:pPr marL="146050" indent="0">
+              <a:buNone/>
+            </a:pPr>
+            <a:r>
+              <a:rPr lang="en-US" sz="1600" dirty="0">
+                <a:solidFill>
+                  <a:schemeClr val="tx1"/>
+                </a:solidFill>
+              </a:rPr>
+              <a:t>Password - </a:t>
+            </a:r>
+            <a:r>
+              <a:rPr lang="en-US" sz="1600" dirty="0" err="1">
+                <a:solidFill>
+                  <a:schemeClr val="tx1"/>
+                </a:solidFill>
+              </a:rPr>
+              <a:t>PacketFrames</a:t>
+            </a:r>
+            <a:endParaRPr lang="en-US" sz="1600" dirty="0">
+              <a:solidFill>
+                <a:schemeClr val="tx1"/>
+              </a:solidFill>
+            </a:endParaRPr>
+          </a:p>
+        </p:txBody>
+      </p:sp>
+    </p:spTree>
+    <p:extLst>
+      <p:ext uri="{BB962C8B-B14F-4D97-AF65-F5344CB8AC3E}">
+        <p14:creationId xmlns:p14="http://schemas.microsoft.com/office/powerpoint/2010/main" val="674272117"/>
+      </p:ext>
+    </p:extLst>
+  </p:cSld>
+  <p:clrMapOvr>
+    <a:masterClrMapping/>
+  </p:clrMapOvr>
+</p:sld>
+</file>
+
+<file path=ppt/slides/slide10.xml><?xml version="1.0" encoding="utf-8"?>
+<p:sld xmlns:a="http://schemas.openxmlformats.org/drawingml/2006/main" xmlns:r="http://schemas.openxmlformats.org/officeDocument/2006/relationships" xmlns:p="http://schemas.openxmlformats.org/presentationml/2006/main" show="0">
+  <p:cSld>
+    <p:spTree>
+      <p:nvGrpSpPr>
+        <p:cNvPr id="1" name="Shape 323"/>
+        <p:cNvGrpSpPr/>
+        <p:nvPr/>
+      </p:nvGrpSpPr>
+      <p:grpSpPr>
+        <a:xfrm>
+          <a:off x="0" y="0"/>
+          <a:ext cx="0" cy="0"/>
+          <a:chOff x="0" y="0"/>
+          <a:chExt cx="0" cy="0"/>
+        </a:xfrm>
+      </p:grpSpPr>
+      <p:sp>
+        <p:nvSpPr>
+          <p:cNvPr id="324" name="Google Shape;324;p47"/>
+          <p:cNvSpPr txBox="1">
+            <a:spLocks noGrp="1"/>
+          </p:cNvSpPr>
+          <p:nvPr>
+            <p:ph type="title"/>
+          </p:nvPr>
+        </p:nvSpPr>
+        <p:spPr>
+          <a:xfrm>
+            <a:off x="226208" y="1"/>
+            <a:ext cx="8520600" cy="464980"/>
+          </a:xfrm>
+          <a:prstGeom prst="rect">
+            <a:avLst/>
+          </a:prstGeom>
+        </p:spPr>
+        <p:txBody>
+          <a:bodyPr spcFirstLastPara="1" wrap="square" lIns="91425" tIns="91425" rIns="91425" bIns="91425" anchor="t" anchorCtr="0">
+            <a:noAutofit/>
+          </a:bodyPr>
+          <a:lstStyle/>
+          <a:p>
+            <a:pPr marL="0" lvl="0" indent="0" algn="ctr" rtl="0">
+              <a:spcBef>
+                <a:spcPts val="0"/>
+              </a:spcBef>
+              <a:spcAft>
+                <a:spcPts val="0"/>
+              </a:spcAft>
+              <a:buNone/>
+            </a:pPr>
+            <a:r>
+              <a:rPr lang="en-US" dirty="0"/>
+              <a:t>Use </a:t>
+            </a:r>
+            <a:r>
+              <a:rPr lang="en-US" sz="2400" dirty="0"/>
+              <a:t>Assigned</a:t>
+            </a:r>
+            <a:r>
+              <a:rPr lang="en-US" dirty="0"/>
+              <a:t> Seat</a:t>
+            </a:r>
+            <a:endParaRPr dirty="0"/>
+          </a:p>
+        </p:txBody>
+      </p:sp>
+      <p:sp>
+        <p:nvSpPr>
+          <p:cNvPr id="326" name="Google Shape;326;p47"/>
+          <p:cNvSpPr txBox="1">
+            <a:spLocks noGrp="1"/>
+          </p:cNvSpPr>
+          <p:nvPr>
+            <p:ph type="sldNum" idx="12"/>
+          </p:nvPr>
+        </p:nvSpPr>
+        <p:spPr>
+          <a:xfrm>
+            <a:off x="8472458" y="4663217"/>
+            <a:ext cx="548700" cy="393600"/>
+          </a:xfrm>
+          <a:prstGeom prst="rect">
+            <a:avLst/>
+          </a:prstGeom>
+        </p:spPr>
+        <p:txBody>
+          <a:bodyPr spcFirstLastPara="1" wrap="square" lIns="91425" tIns="91425" rIns="91425" bIns="91425" anchor="ctr" anchorCtr="0">
+            <a:noAutofit/>
+          </a:bodyPr>
+          <a:lstStyle/>
+          <a:p>
+            <a:pPr marL="0" lvl="0" indent="0" algn="r" rtl="0">
+              <a:spcBef>
+                <a:spcPts val="0"/>
+              </a:spcBef>
+              <a:spcAft>
+                <a:spcPts val="0"/>
+              </a:spcAft>
+              <a:buNone/>
+            </a:pPr>
+            <a:fld id="{00000000-1234-1234-1234-123412341234}" type="slidenum">
+              <a:rPr lang="en"/>
+              <a:t>10</a:t>
+            </a:fld>
+            <a:endParaRPr/>
+          </a:p>
+        </p:txBody>
+      </p:sp>
+      <p:pic>
+        <p:nvPicPr>
+          <p:cNvPr id="3" name="Picture 2">
+            <a:extLst>
+              <a:ext uri="{FF2B5EF4-FFF2-40B4-BE49-F238E27FC236}">
+                <a16:creationId xmlns:a16="http://schemas.microsoft.com/office/drawing/2014/main" id="{565A4964-E8A9-A46D-F4BE-E7D41C14EF1B}"/>
+              </a:ext>
+            </a:extLst>
+          </p:cNvPr>
+          <p:cNvPicPr>
+            <a:picLocks noChangeAspect="1"/>
+          </p:cNvPicPr>
+          <p:nvPr/>
+        </p:nvPicPr>
+        <p:blipFill>
+          <a:blip r:embed="rId3"/>
+          <a:stretch>
+            <a:fillRect/>
+          </a:stretch>
+        </p:blipFill>
+        <p:spPr>
+          <a:xfrm>
+            <a:off x="0" y="559220"/>
+            <a:ext cx="9144000" cy="4471763"/>
+          </a:xfrm>
+          <a:prstGeom prst="rect">
+            <a:avLst/>
+          </a:prstGeom>
+        </p:spPr>
+      </p:pic>
+    </p:spTree>
+    <p:extLst>
+      <p:ext uri="{BB962C8B-B14F-4D97-AF65-F5344CB8AC3E}">
+        <p14:creationId xmlns:p14="http://schemas.microsoft.com/office/powerpoint/2010/main" val="2495509868"/>
+      </p:ext>
+    </p:extLst>
+  </p:cSld>
+  <p:clrMapOvr>
+    <a:masterClrMapping/>
+  </p:clrMapOvr>
+</p:sld>
+</file>
+
+<file path=ppt/slides/slide11.xml><?xml version="1.0" encoding="utf-8"?>
+<p:sld xmlns:a="http://schemas.openxmlformats.org/drawingml/2006/main" xmlns:r="http://schemas.openxmlformats.org/officeDocument/2006/relationships" xmlns:p="http://schemas.openxmlformats.org/presentationml/2006/main" show="0">
+  <p:cSld>
+    <p:spTree>
+      <p:nvGrpSpPr>
+        <p:cNvPr id="1" name="Shape 323"/>
+        <p:cNvGrpSpPr/>
+        <p:nvPr/>
+      </p:nvGrpSpPr>
+      <p:grpSpPr>
+        <a:xfrm>
+          <a:off x="0" y="0"/>
+          <a:ext cx="0" cy="0"/>
+          <a:chOff x="0" y="0"/>
+          <a:chExt cx="0" cy="0"/>
+        </a:xfrm>
+      </p:grpSpPr>
+      <p:sp>
+        <p:nvSpPr>
+          <p:cNvPr id="324" name="Google Shape;324;p47"/>
+          <p:cNvSpPr txBox="1">
+            <a:spLocks noGrp="1"/>
+          </p:cNvSpPr>
+          <p:nvPr>
+            <p:ph type="title"/>
+          </p:nvPr>
+        </p:nvSpPr>
+        <p:spPr>
+          <a:xfrm>
+            <a:off x="226208" y="1"/>
+            <a:ext cx="8520600" cy="464980"/>
+          </a:xfrm>
+          <a:prstGeom prst="rect">
+            <a:avLst/>
+          </a:prstGeom>
+        </p:spPr>
+        <p:txBody>
+          <a:bodyPr spcFirstLastPara="1" wrap="square" lIns="91425" tIns="91425" rIns="91425" bIns="91425" anchor="t" anchorCtr="0">
+            <a:noAutofit/>
+          </a:bodyPr>
+          <a:lstStyle/>
+          <a:p>
+            <a:pPr marL="0" lvl="0" indent="0" algn="ctr" rtl="0">
+              <a:spcBef>
+                <a:spcPts val="0"/>
+              </a:spcBef>
+              <a:spcAft>
+                <a:spcPts val="0"/>
+              </a:spcAft>
+              <a:buNone/>
+            </a:pPr>
+            <a:r>
+              <a:rPr lang="en-US" dirty="0"/>
+              <a:t>Use </a:t>
+            </a:r>
+            <a:r>
+              <a:rPr lang="en-US" sz="2400" dirty="0"/>
+              <a:t>Assigned</a:t>
+            </a:r>
+            <a:r>
+              <a:rPr lang="en-US" dirty="0"/>
+              <a:t> Seat</a:t>
+            </a:r>
+            <a:endParaRPr dirty="0"/>
+          </a:p>
+        </p:txBody>
+      </p:sp>
+      <p:sp>
+        <p:nvSpPr>
+          <p:cNvPr id="326" name="Google Shape;326;p47"/>
+          <p:cNvSpPr txBox="1">
+            <a:spLocks noGrp="1"/>
+          </p:cNvSpPr>
+          <p:nvPr>
+            <p:ph type="sldNum" idx="12"/>
+          </p:nvPr>
+        </p:nvSpPr>
+        <p:spPr>
+          <a:xfrm>
+            <a:off x="8472458" y="4663217"/>
+            <a:ext cx="548700" cy="393600"/>
+          </a:xfrm>
+          <a:prstGeom prst="rect">
+            <a:avLst/>
+          </a:prstGeom>
+        </p:spPr>
+        <p:txBody>
+          <a:bodyPr spcFirstLastPara="1" wrap="square" lIns="91425" tIns="91425" rIns="91425" bIns="91425" anchor="ctr" anchorCtr="0">
+            <a:noAutofit/>
+          </a:bodyPr>
+          <a:lstStyle/>
+          <a:p>
+            <a:pPr marL="0" lvl="0" indent="0" algn="r" rtl="0">
+              <a:spcBef>
+                <a:spcPts val="0"/>
+              </a:spcBef>
+              <a:spcAft>
+                <a:spcPts val="0"/>
+              </a:spcAft>
+              <a:buNone/>
+            </a:pPr>
+            <a:fld id="{00000000-1234-1234-1234-123412341234}" type="slidenum">
+              <a:rPr lang="en"/>
+              <a:t>11</a:t>
+            </a:fld>
+            <a:endParaRPr/>
+          </a:p>
+        </p:txBody>
+      </p:sp>
+      <p:pic>
+        <p:nvPicPr>
+          <p:cNvPr id="6" name="Picture 5">
+            <a:extLst>
+              <a:ext uri="{FF2B5EF4-FFF2-40B4-BE49-F238E27FC236}">
+                <a16:creationId xmlns:a16="http://schemas.microsoft.com/office/drawing/2014/main" id="{DED32793-7C09-E3A3-94E5-B5D46727A1D0}"/>
+              </a:ext>
+            </a:extLst>
+          </p:cNvPr>
+          <p:cNvPicPr>
+            <a:picLocks noChangeAspect="1"/>
+          </p:cNvPicPr>
+          <p:nvPr/>
+        </p:nvPicPr>
+        <p:blipFill>
+          <a:blip r:embed="rId3"/>
+          <a:stretch>
+            <a:fillRect/>
+          </a:stretch>
+        </p:blipFill>
+        <p:spPr>
+          <a:xfrm>
+            <a:off x="-1" y="551663"/>
+            <a:ext cx="9144001" cy="4591837"/>
+          </a:xfrm>
+          <a:prstGeom prst="rect">
+            <a:avLst/>
+          </a:prstGeom>
+        </p:spPr>
+      </p:pic>
+    </p:spTree>
+    <p:extLst>
+      <p:ext uri="{BB962C8B-B14F-4D97-AF65-F5344CB8AC3E}">
+        <p14:creationId xmlns:p14="http://schemas.microsoft.com/office/powerpoint/2010/main" val="4226348449"/>
+      </p:ext>
+    </p:extLst>
+  </p:cSld>
+  <p:clrMapOvr>
+    <a:masterClrMapping/>
+  </p:clrMapOvr>
+</p:sld>
+</file>
+
+<file path=ppt/slides/slide12.xml><?xml version="1.0" encoding="utf-8"?>
+<p:sld xmlns:a="http://schemas.openxmlformats.org/drawingml/2006/main" xmlns:r="http://schemas.openxmlformats.org/officeDocument/2006/relationships" xmlns:p="http://schemas.openxmlformats.org/presentationml/2006/main" show="0">
+  <p:cSld>
+    <p:spTree>
+      <p:nvGrpSpPr>
+        <p:cNvPr id="1" name="Shape 323"/>
+        <p:cNvGrpSpPr/>
+        <p:nvPr/>
+      </p:nvGrpSpPr>
+      <p:grpSpPr>
+        <a:xfrm>
+          <a:off x="0" y="0"/>
+          <a:ext cx="0" cy="0"/>
+          <a:chOff x="0" y="0"/>
+          <a:chExt cx="0" cy="0"/>
+        </a:xfrm>
+      </p:grpSpPr>
+      <p:sp>
+        <p:nvSpPr>
+          <p:cNvPr id="324" name="Google Shape;324;p47"/>
+          <p:cNvSpPr txBox="1">
+            <a:spLocks noGrp="1"/>
+          </p:cNvSpPr>
+          <p:nvPr>
+            <p:ph type="title"/>
+          </p:nvPr>
+        </p:nvSpPr>
+        <p:spPr>
+          <a:xfrm>
+            <a:off x="226208" y="1"/>
+            <a:ext cx="8520600" cy="464980"/>
+          </a:xfrm>
+          <a:prstGeom prst="rect">
+            <a:avLst/>
+          </a:prstGeom>
+        </p:spPr>
+        <p:txBody>
+          <a:bodyPr spcFirstLastPara="1" wrap="square" lIns="91425" tIns="91425" rIns="91425" bIns="91425" anchor="t" anchorCtr="0">
+            <a:noAutofit/>
+          </a:bodyPr>
+          <a:lstStyle/>
+          <a:p>
+            <a:pPr marL="0" lvl="0" indent="0" algn="ctr" rtl="0">
+              <a:spcBef>
+                <a:spcPts val="0"/>
+              </a:spcBef>
+              <a:spcAft>
+                <a:spcPts val="0"/>
+              </a:spcAft>
+              <a:buNone/>
+            </a:pPr>
+            <a:r>
+              <a:rPr lang="en-US" dirty="0"/>
+              <a:t>Use </a:t>
+            </a:r>
+            <a:r>
+              <a:rPr lang="en-US" sz="2400" dirty="0"/>
+              <a:t>Assigned</a:t>
+            </a:r>
+            <a:r>
+              <a:rPr lang="en-US" dirty="0"/>
+              <a:t> Seat</a:t>
+            </a:r>
+            <a:endParaRPr dirty="0"/>
+          </a:p>
+        </p:txBody>
+      </p:sp>
+      <p:sp>
+        <p:nvSpPr>
+          <p:cNvPr id="326" name="Google Shape;326;p47"/>
+          <p:cNvSpPr txBox="1">
+            <a:spLocks noGrp="1"/>
+          </p:cNvSpPr>
+          <p:nvPr>
+            <p:ph type="sldNum" idx="12"/>
+          </p:nvPr>
+        </p:nvSpPr>
+        <p:spPr>
+          <a:xfrm>
+            <a:off x="8472458" y="4663217"/>
+            <a:ext cx="548700" cy="393600"/>
+          </a:xfrm>
+          <a:prstGeom prst="rect">
+            <a:avLst/>
+          </a:prstGeom>
+        </p:spPr>
+        <p:txBody>
+          <a:bodyPr spcFirstLastPara="1" wrap="square" lIns="91425" tIns="91425" rIns="91425" bIns="91425" anchor="ctr" anchorCtr="0">
+            <a:noAutofit/>
+          </a:bodyPr>
+          <a:lstStyle/>
+          <a:p>
+            <a:pPr marL="0" lvl="0" indent="0" algn="r" rtl="0">
+              <a:spcBef>
+                <a:spcPts val="0"/>
+              </a:spcBef>
+              <a:spcAft>
+                <a:spcPts val="0"/>
+              </a:spcAft>
+              <a:buNone/>
+            </a:pPr>
+            <a:fld id="{00000000-1234-1234-1234-123412341234}" type="slidenum">
+              <a:rPr lang="en"/>
+              <a:t>12</a:t>
+            </a:fld>
+            <a:endParaRPr/>
+          </a:p>
+        </p:txBody>
+      </p:sp>
+      <p:pic>
+        <p:nvPicPr>
+          <p:cNvPr id="3" name="Picture 2">
+            <a:extLst>
+              <a:ext uri="{FF2B5EF4-FFF2-40B4-BE49-F238E27FC236}">
+                <a16:creationId xmlns:a16="http://schemas.microsoft.com/office/drawing/2014/main" id="{92DE4AAC-70FE-A114-5258-F5B22EDDED45}"/>
+              </a:ext>
+            </a:extLst>
+          </p:cNvPr>
+          <p:cNvPicPr>
+            <a:picLocks noChangeAspect="1"/>
+          </p:cNvPicPr>
+          <p:nvPr/>
+        </p:nvPicPr>
+        <p:blipFill>
+          <a:blip r:embed="rId3"/>
+          <a:stretch>
+            <a:fillRect/>
+          </a:stretch>
+        </p:blipFill>
+        <p:spPr>
+          <a:xfrm>
+            <a:off x="0" y="716280"/>
+            <a:ext cx="9144000" cy="4427218"/>
+          </a:xfrm>
+          <a:prstGeom prst="rect">
+            <a:avLst/>
+          </a:prstGeom>
+        </p:spPr>
+      </p:pic>
+    </p:spTree>
+    <p:extLst>
+      <p:ext uri="{BB962C8B-B14F-4D97-AF65-F5344CB8AC3E}">
+        <p14:creationId xmlns:p14="http://schemas.microsoft.com/office/powerpoint/2010/main" val="1976403023"/>
+      </p:ext>
+    </p:extLst>
+  </p:cSld>
+  <p:clrMapOvr>
+    <a:masterClrMapping/>
+  </p:clrMapOvr>
+</p:sld>
+</file>
+
+<file path=ppt/slides/slide13.xml><?xml version="1.0" encoding="utf-8"?>
+<p:sld xmlns:a="http://schemas.openxmlformats.org/drawingml/2006/main" xmlns:r="http://schemas.openxmlformats.org/officeDocument/2006/relationships" xmlns:p="http://schemas.openxmlformats.org/presentationml/2006/main" show="0">
+  <p:cSld>
+    <p:spTree>
+      <p:nvGrpSpPr>
+        <p:cNvPr id="1" name="Shape 323"/>
+        <p:cNvGrpSpPr/>
+        <p:nvPr/>
+      </p:nvGrpSpPr>
+      <p:grpSpPr>
+        <a:xfrm>
+          <a:off x="0" y="0"/>
+          <a:ext cx="0" cy="0"/>
+          <a:chOff x="0" y="0"/>
+          <a:chExt cx="0" cy="0"/>
+        </a:xfrm>
+      </p:grpSpPr>
+      <p:sp>
+        <p:nvSpPr>
+          <p:cNvPr id="324" name="Google Shape;324;p47"/>
+          <p:cNvSpPr txBox="1">
+            <a:spLocks noGrp="1"/>
+          </p:cNvSpPr>
+          <p:nvPr>
+            <p:ph type="title"/>
+          </p:nvPr>
+        </p:nvSpPr>
+        <p:spPr>
+          <a:xfrm>
+            <a:off x="226208" y="1"/>
+            <a:ext cx="8520600" cy="464980"/>
+          </a:xfrm>
+          <a:prstGeom prst="rect">
+            <a:avLst/>
+          </a:prstGeom>
+        </p:spPr>
+        <p:txBody>
+          <a:bodyPr spcFirstLastPara="1" wrap="square" lIns="91425" tIns="91425" rIns="91425" bIns="91425" anchor="t" anchorCtr="0">
+            <a:noAutofit/>
+          </a:bodyPr>
+          <a:lstStyle/>
+          <a:p>
+            <a:pPr marL="0" lvl="0" indent="0" algn="ctr" rtl="0">
+              <a:spcBef>
+                <a:spcPts val="0"/>
+              </a:spcBef>
+              <a:spcAft>
+                <a:spcPts val="0"/>
+              </a:spcAft>
+              <a:buNone/>
+            </a:pPr>
+            <a:r>
+              <a:rPr lang="en-US" dirty="0"/>
+              <a:t>Use </a:t>
+            </a:r>
+            <a:r>
+              <a:rPr lang="en-US" sz="2400" dirty="0"/>
+              <a:t>Assigned</a:t>
+            </a:r>
+            <a:r>
+              <a:rPr lang="en-US" dirty="0"/>
+              <a:t> Seat</a:t>
+            </a:r>
+            <a:endParaRPr dirty="0"/>
+          </a:p>
+        </p:txBody>
+      </p:sp>
+      <p:sp>
+        <p:nvSpPr>
+          <p:cNvPr id="326" name="Google Shape;326;p47"/>
+          <p:cNvSpPr txBox="1">
+            <a:spLocks noGrp="1"/>
+          </p:cNvSpPr>
+          <p:nvPr>
+            <p:ph type="sldNum" idx="12"/>
+          </p:nvPr>
+        </p:nvSpPr>
+        <p:spPr>
+          <a:xfrm>
+            <a:off x="8472458" y="4663217"/>
+            <a:ext cx="548700" cy="393600"/>
+          </a:xfrm>
+          <a:prstGeom prst="rect">
+            <a:avLst/>
+          </a:prstGeom>
+        </p:spPr>
+        <p:txBody>
+          <a:bodyPr spcFirstLastPara="1" wrap="square" lIns="91425" tIns="91425" rIns="91425" bIns="91425" anchor="ctr" anchorCtr="0">
+            <a:noAutofit/>
+          </a:bodyPr>
+          <a:lstStyle/>
+          <a:p>
+            <a:pPr marL="0" lvl="0" indent="0" algn="r" rtl="0">
+              <a:spcBef>
+                <a:spcPts val="0"/>
+              </a:spcBef>
+              <a:spcAft>
+                <a:spcPts val="0"/>
+              </a:spcAft>
+              <a:buNone/>
+            </a:pPr>
+            <a:fld id="{00000000-1234-1234-1234-123412341234}" type="slidenum">
+              <a:rPr lang="en"/>
+              <a:t>13</a:t>
+            </a:fld>
+            <a:endParaRPr/>
+          </a:p>
+        </p:txBody>
+      </p:sp>
+      <p:pic>
+        <p:nvPicPr>
+          <p:cNvPr id="4" name="Picture 3">
+            <a:extLst>
+              <a:ext uri="{FF2B5EF4-FFF2-40B4-BE49-F238E27FC236}">
+                <a16:creationId xmlns:a16="http://schemas.microsoft.com/office/drawing/2014/main" id="{DCD752B9-EFAE-AFC1-7D39-6763B89DE8D3}"/>
+              </a:ext>
+            </a:extLst>
+          </p:cNvPr>
+          <p:cNvPicPr>
+            <a:picLocks noChangeAspect="1"/>
+          </p:cNvPicPr>
+          <p:nvPr/>
+        </p:nvPicPr>
+        <p:blipFill>
+          <a:blip r:embed="rId3"/>
+          <a:stretch>
+            <a:fillRect/>
+          </a:stretch>
+        </p:blipFill>
+        <p:spPr>
+          <a:xfrm>
+            <a:off x="0" y="652130"/>
+            <a:ext cx="9144000" cy="4491369"/>
+          </a:xfrm>
+          <a:prstGeom prst="rect">
+            <a:avLst/>
+          </a:prstGeom>
+        </p:spPr>
+      </p:pic>
+    </p:spTree>
+    <p:extLst>
+      <p:ext uri="{BB962C8B-B14F-4D97-AF65-F5344CB8AC3E}">
+        <p14:creationId xmlns:p14="http://schemas.microsoft.com/office/powerpoint/2010/main" val="3365057756"/>
+      </p:ext>
+    </p:extLst>
+  </p:cSld>
+  <p:clrMapOvr>
+    <a:masterClrMapping/>
+  </p:clrMapOvr>
+</p:sld>
+</file>
+
+<file path=ppt/slides/slide2.xml><?xml version="1.0" encoding="utf-8"?>
+<p:sld xmlns:a="http://schemas.openxmlformats.org/drawingml/2006/main" xmlns:r="http://schemas.openxmlformats.org/officeDocument/2006/relationships" xmlns:p="http://schemas.openxmlformats.org/presentationml/2006/main" show="0">
+  <p:cSld>
+    <p:spTree>
+      <p:nvGrpSpPr>
         <p:cNvPr id="1" name="Shape 323"/>
         <p:cNvGrpSpPr/>
         <p:nvPr/>
@@ -6743,7 +8281,7 @@
             </a:r>
             <a:r>
               <a:rPr lang="en-US" sz="2400" dirty="0"/>
-              <a:t>9</a:t>
+              <a:t>10</a:t>
             </a:r>
             <a:r>
               <a:rPr lang="pl-PL" sz="2400" dirty="0"/>
@@ -6759,7 +8297,7 @@
             </a:r>
             <a:r>
               <a:rPr lang="en-US" sz="2400" dirty="0"/>
-              <a:t>Network Basic</a:t>
+              <a:t>Http1</a:t>
             </a:r>
           </a:p>
           <a:p>
@@ -6772,7 +8310,7 @@
             </a:r>
             <a:r>
               <a:rPr lang="en-US" sz="2400" dirty="0" err="1"/>
-              <a:t>LocalLoopback</a:t>
+              <a:t>HyperTextHype</a:t>
             </a:r>
             <a:endParaRPr sz="2400" dirty="0"/>
           </a:p>
@@ -6814,7 +8352,7 @@
             </a:pPr>
             <a:fld id="{00000000-1234-1234-1234-123412341234}" type="slidenum">
               <a:rPr lang="en"/>
-              <a:t>1</a:t>
+              <a:t>2</a:t>
             </a:fld>
             <a:endParaRPr/>
           </a:p>
@@ -7199,7 +8737,7 @@
             </a:pPr>
             <a:r>
               <a:rPr lang="en-US" sz="2400" dirty="0"/>
-              <a:t>Clone/Pull Unit9 – git hub classroom repo for class activities</a:t>
+              <a:t>Clone/Pull Unit10 – git hub classroom repo for class activities</a:t>
             </a:r>
           </a:p>
         </p:txBody>
@@ -7212,615 +8750,7 @@
 </p:sld>
 </file>
 
-<file path=ppt/slides/slide10.xml><?xml version="1.0" encoding="utf-8"?>
-<p:sld xmlns:a="http://schemas.openxmlformats.org/drawingml/2006/main" xmlns:r="http://schemas.openxmlformats.org/officeDocument/2006/relationships" xmlns:p="http://schemas.openxmlformats.org/presentationml/2006/main" show="0">
-  <p:cSld>
-    <p:spTree>
-      <p:nvGrpSpPr>
-        <p:cNvPr id="1" name="Shape 323"/>
-        <p:cNvGrpSpPr/>
-        <p:nvPr/>
-      </p:nvGrpSpPr>
-      <p:grpSpPr>
-        <a:xfrm>
-          <a:off x="0" y="0"/>
-          <a:ext cx="0" cy="0"/>
-          <a:chOff x="0" y="0"/>
-          <a:chExt cx="0" cy="0"/>
-        </a:xfrm>
-      </p:grpSpPr>
-      <p:sp>
-        <p:nvSpPr>
-          <p:cNvPr id="324" name="Google Shape;324;p47"/>
-          <p:cNvSpPr txBox="1">
-            <a:spLocks noGrp="1"/>
-          </p:cNvSpPr>
-          <p:nvPr>
-            <p:ph type="title"/>
-          </p:nvPr>
-        </p:nvSpPr>
-        <p:spPr>
-          <a:xfrm>
-            <a:off x="226208" y="1"/>
-            <a:ext cx="8520600" cy="464980"/>
-          </a:xfrm>
-          <a:prstGeom prst="rect">
-            <a:avLst/>
-          </a:prstGeom>
-        </p:spPr>
-        <p:txBody>
-          <a:bodyPr spcFirstLastPara="1" wrap="square" lIns="91425" tIns="91425" rIns="91425" bIns="91425" anchor="t" anchorCtr="0">
-            <a:noAutofit/>
-          </a:bodyPr>
-          <a:lstStyle/>
-          <a:p>
-            <a:pPr marL="0" lvl="0" indent="0" algn="ctr" rtl="0">
-              <a:spcBef>
-                <a:spcPts val="0"/>
-              </a:spcBef>
-              <a:spcAft>
-                <a:spcPts val="0"/>
-              </a:spcAft>
-              <a:buNone/>
-            </a:pPr>
-            <a:r>
-              <a:rPr lang="en-US" dirty="0"/>
-              <a:t>Use </a:t>
-            </a:r>
-            <a:r>
-              <a:rPr lang="en-US" sz="2400" dirty="0"/>
-              <a:t>Assigned</a:t>
-            </a:r>
-            <a:r>
-              <a:rPr lang="en-US" dirty="0"/>
-              <a:t> Seat</a:t>
-            </a:r>
-            <a:endParaRPr dirty="0"/>
-          </a:p>
-        </p:txBody>
-      </p:sp>
-      <p:sp>
-        <p:nvSpPr>
-          <p:cNvPr id="326" name="Google Shape;326;p47"/>
-          <p:cNvSpPr txBox="1">
-            <a:spLocks noGrp="1"/>
-          </p:cNvSpPr>
-          <p:nvPr>
-            <p:ph type="sldNum" idx="12"/>
-          </p:nvPr>
-        </p:nvSpPr>
-        <p:spPr>
-          <a:xfrm>
-            <a:off x="8472458" y="4663217"/>
-            <a:ext cx="548700" cy="393600"/>
-          </a:xfrm>
-          <a:prstGeom prst="rect">
-            <a:avLst/>
-          </a:prstGeom>
-        </p:spPr>
-        <p:txBody>
-          <a:bodyPr spcFirstLastPara="1" wrap="square" lIns="91425" tIns="91425" rIns="91425" bIns="91425" anchor="ctr" anchorCtr="0">
-            <a:noAutofit/>
-          </a:bodyPr>
-          <a:lstStyle/>
-          <a:p>
-            <a:pPr marL="0" lvl="0" indent="0" algn="r" rtl="0">
-              <a:spcBef>
-                <a:spcPts val="0"/>
-              </a:spcBef>
-              <a:spcAft>
-                <a:spcPts val="0"/>
-              </a:spcAft>
-              <a:buNone/>
-            </a:pPr>
-            <a:fld id="{00000000-1234-1234-1234-123412341234}" type="slidenum">
-              <a:rPr lang="en"/>
-              <a:t>10</a:t>
-            </a:fld>
-            <a:endParaRPr/>
-          </a:p>
-        </p:txBody>
-      </p:sp>
-      <p:pic>
-        <p:nvPicPr>
-          <p:cNvPr id="3" name="Picture 2">
-            <a:extLst>
-              <a:ext uri="{FF2B5EF4-FFF2-40B4-BE49-F238E27FC236}">
-                <a16:creationId xmlns:a16="http://schemas.microsoft.com/office/drawing/2014/main" id="{565A4964-E8A9-A46D-F4BE-E7D41C14EF1B}"/>
-              </a:ext>
-            </a:extLst>
-          </p:cNvPr>
-          <p:cNvPicPr>
-            <a:picLocks noChangeAspect="1"/>
-          </p:cNvPicPr>
-          <p:nvPr/>
-        </p:nvPicPr>
-        <p:blipFill>
-          <a:blip r:embed="rId3"/>
-          <a:stretch>
-            <a:fillRect/>
-          </a:stretch>
-        </p:blipFill>
-        <p:spPr>
-          <a:xfrm>
-            <a:off x="0" y="559220"/>
-            <a:ext cx="9144000" cy="4471763"/>
-          </a:xfrm>
-          <a:prstGeom prst="rect">
-            <a:avLst/>
-          </a:prstGeom>
-        </p:spPr>
-      </p:pic>
-    </p:spTree>
-    <p:extLst>
-      <p:ext uri="{BB962C8B-B14F-4D97-AF65-F5344CB8AC3E}">
-        <p14:creationId xmlns:p14="http://schemas.microsoft.com/office/powerpoint/2010/main" val="2495509868"/>
-      </p:ext>
-    </p:extLst>
-  </p:cSld>
-  <p:clrMapOvr>
-    <a:masterClrMapping/>
-  </p:clrMapOvr>
-</p:sld>
-</file>
-
-<file path=ppt/slides/slide11.xml><?xml version="1.0" encoding="utf-8"?>
-<p:sld xmlns:a="http://schemas.openxmlformats.org/drawingml/2006/main" xmlns:r="http://schemas.openxmlformats.org/officeDocument/2006/relationships" xmlns:p="http://schemas.openxmlformats.org/presentationml/2006/main" show="0">
-  <p:cSld>
-    <p:spTree>
-      <p:nvGrpSpPr>
-        <p:cNvPr id="1" name="Shape 323"/>
-        <p:cNvGrpSpPr/>
-        <p:nvPr/>
-      </p:nvGrpSpPr>
-      <p:grpSpPr>
-        <a:xfrm>
-          <a:off x="0" y="0"/>
-          <a:ext cx="0" cy="0"/>
-          <a:chOff x="0" y="0"/>
-          <a:chExt cx="0" cy="0"/>
-        </a:xfrm>
-      </p:grpSpPr>
-      <p:sp>
-        <p:nvSpPr>
-          <p:cNvPr id="324" name="Google Shape;324;p47"/>
-          <p:cNvSpPr txBox="1">
-            <a:spLocks noGrp="1"/>
-          </p:cNvSpPr>
-          <p:nvPr>
-            <p:ph type="title"/>
-          </p:nvPr>
-        </p:nvSpPr>
-        <p:spPr>
-          <a:xfrm>
-            <a:off x="226208" y="1"/>
-            <a:ext cx="8520600" cy="464980"/>
-          </a:xfrm>
-          <a:prstGeom prst="rect">
-            <a:avLst/>
-          </a:prstGeom>
-        </p:spPr>
-        <p:txBody>
-          <a:bodyPr spcFirstLastPara="1" wrap="square" lIns="91425" tIns="91425" rIns="91425" bIns="91425" anchor="t" anchorCtr="0">
-            <a:noAutofit/>
-          </a:bodyPr>
-          <a:lstStyle/>
-          <a:p>
-            <a:pPr marL="0" lvl="0" indent="0" algn="ctr" rtl="0">
-              <a:spcBef>
-                <a:spcPts val="0"/>
-              </a:spcBef>
-              <a:spcAft>
-                <a:spcPts val="0"/>
-              </a:spcAft>
-              <a:buNone/>
-            </a:pPr>
-            <a:r>
-              <a:rPr lang="en-US" dirty="0"/>
-              <a:t>Use </a:t>
-            </a:r>
-            <a:r>
-              <a:rPr lang="en-US" sz="2400" dirty="0"/>
-              <a:t>Assigned</a:t>
-            </a:r>
-            <a:r>
-              <a:rPr lang="en-US" dirty="0"/>
-              <a:t> Seat</a:t>
-            </a:r>
-            <a:endParaRPr dirty="0"/>
-          </a:p>
-        </p:txBody>
-      </p:sp>
-      <p:sp>
-        <p:nvSpPr>
-          <p:cNvPr id="326" name="Google Shape;326;p47"/>
-          <p:cNvSpPr txBox="1">
-            <a:spLocks noGrp="1"/>
-          </p:cNvSpPr>
-          <p:nvPr>
-            <p:ph type="sldNum" idx="12"/>
-          </p:nvPr>
-        </p:nvSpPr>
-        <p:spPr>
-          <a:xfrm>
-            <a:off x="8472458" y="4663217"/>
-            <a:ext cx="548700" cy="393600"/>
-          </a:xfrm>
-          <a:prstGeom prst="rect">
-            <a:avLst/>
-          </a:prstGeom>
-        </p:spPr>
-        <p:txBody>
-          <a:bodyPr spcFirstLastPara="1" wrap="square" lIns="91425" tIns="91425" rIns="91425" bIns="91425" anchor="ctr" anchorCtr="0">
-            <a:noAutofit/>
-          </a:bodyPr>
-          <a:lstStyle/>
-          <a:p>
-            <a:pPr marL="0" lvl="0" indent="0" algn="r" rtl="0">
-              <a:spcBef>
-                <a:spcPts val="0"/>
-              </a:spcBef>
-              <a:spcAft>
-                <a:spcPts val="0"/>
-              </a:spcAft>
-              <a:buNone/>
-            </a:pPr>
-            <a:fld id="{00000000-1234-1234-1234-123412341234}" type="slidenum">
-              <a:rPr lang="en"/>
-              <a:t>11</a:t>
-            </a:fld>
-            <a:endParaRPr/>
-          </a:p>
-        </p:txBody>
-      </p:sp>
-      <p:pic>
-        <p:nvPicPr>
-          <p:cNvPr id="6" name="Picture 5">
-            <a:extLst>
-              <a:ext uri="{FF2B5EF4-FFF2-40B4-BE49-F238E27FC236}">
-                <a16:creationId xmlns:a16="http://schemas.microsoft.com/office/drawing/2014/main" id="{DED32793-7C09-E3A3-94E5-B5D46727A1D0}"/>
-              </a:ext>
-            </a:extLst>
-          </p:cNvPr>
-          <p:cNvPicPr>
-            <a:picLocks noChangeAspect="1"/>
-          </p:cNvPicPr>
-          <p:nvPr/>
-        </p:nvPicPr>
-        <p:blipFill>
-          <a:blip r:embed="rId3"/>
-          <a:stretch>
-            <a:fillRect/>
-          </a:stretch>
-        </p:blipFill>
-        <p:spPr>
-          <a:xfrm>
-            <a:off x="-1" y="551663"/>
-            <a:ext cx="9144001" cy="4591837"/>
-          </a:xfrm>
-          <a:prstGeom prst="rect">
-            <a:avLst/>
-          </a:prstGeom>
-        </p:spPr>
-      </p:pic>
-    </p:spTree>
-    <p:extLst>
-      <p:ext uri="{BB962C8B-B14F-4D97-AF65-F5344CB8AC3E}">
-        <p14:creationId xmlns:p14="http://schemas.microsoft.com/office/powerpoint/2010/main" val="4226348449"/>
-      </p:ext>
-    </p:extLst>
-  </p:cSld>
-  <p:clrMapOvr>
-    <a:masterClrMapping/>
-  </p:clrMapOvr>
-</p:sld>
-</file>
-
-<file path=ppt/slides/slide12.xml><?xml version="1.0" encoding="utf-8"?>
-<p:sld xmlns:a="http://schemas.openxmlformats.org/drawingml/2006/main" xmlns:r="http://schemas.openxmlformats.org/officeDocument/2006/relationships" xmlns:p="http://schemas.openxmlformats.org/presentationml/2006/main" show="0">
-  <p:cSld>
-    <p:spTree>
-      <p:nvGrpSpPr>
-        <p:cNvPr id="1" name="Shape 323"/>
-        <p:cNvGrpSpPr/>
-        <p:nvPr/>
-      </p:nvGrpSpPr>
-      <p:grpSpPr>
-        <a:xfrm>
-          <a:off x="0" y="0"/>
-          <a:ext cx="0" cy="0"/>
-          <a:chOff x="0" y="0"/>
-          <a:chExt cx="0" cy="0"/>
-        </a:xfrm>
-      </p:grpSpPr>
-      <p:sp>
-        <p:nvSpPr>
-          <p:cNvPr id="324" name="Google Shape;324;p47"/>
-          <p:cNvSpPr txBox="1">
-            <a:spLocks noGrp="1"/>
-          </p:cNvSpPr>
-          <p:nvPr>
-            <p:ph type="title"/>
-          </p:nvPr>
-        </p:nvSpPr>
-        <p:spPr>
-          <a:xfrm>
-            <a:off x="226208" y="1"/>
-            <a:ext cx="8520600" cy="464980"/>
-          </a:xfrm>
-          <a:prstGeom prst="rect">
-            <a:avLst/>
-          </a:prstGeom>
-        </p:spPr>
-        <p:txBody>
-          <a:bodyPr spcFirstLastPara="1" wrap="square" lIns="91425" tIns="91425" rIns="91425" bIns="91425" anchor="t" anchorCtr="0">
-            <a:noAutofit/>
-          </a:bodyPr>
-          <a:lstStyle/>
-          <a:p>
-            <a:pPr marL="0" lvl="0" indent="0" algn="ctr" rtl="0">
-              <a:spcBef>
-                <a:spcPts val="0"/>
-              </a:spcBef>
-              <a:spcAft>
-                <a:spcPts val="0"/>
-              </a:spcAft>
-              <a:buNone/>
-            </a:pPr>
-            <a:r>
-              <a:rPr lang="en-US" dirty="0"/>
-              <a:t>Use </a:t>
-            </a:r>
-            <a:r>
-              <a:rPr lang="en-US" sz="2400" dirty="0"/>
-              <a:t>Assigned</a:t>
-            </a:r>
-            <a:r>
-              <a:rPr lang="en-US" dirty="0"/>
-              <a:t> Seat</a:t>
-            </a:r>
-            <a:endParaRPr dirty="0"/>
-          </a:p>
-        </p:txBody>
-      </p:sp>
-      <p:sp>
-        <p:nvSpPr>
-          <p:cNvPr id="326" name="Google Shape;326;p47"/>
-          <p:cNvSpPr txBox="1">
-            <a:spLocks noGrp="1"/>
-          </p:cNvSpPr>
-          <p:nvPr>
-            <p:ph type="sldNum" idx="12"/>
-          </p:nvPr>
-        </p:nvSpPr>
-        <p:spPr>
-          <a:xfrm>
-            <a:off x="8472458" y="4663217"/>
-            <a:ext cx="548700" cy="393600"/>
-          </a:xfrm>
-          <a:prstGeom prst="rect">
-            <a:avLst/>
-          </a:prstGeom>
-        </p:spPr>
-        <p:txBody>
-          <a:bodyPr spcFirstLastPara="1" wrap="square" lIns="91425" tIns="91425" rIns="91425" bIns="91425" anchor="ctr" anchorCtr="0">
-            <a:noAutofit/>
-          </a:bodyPr>
-          <a:lstStyle/>
-          <a:p>
-            <a:pPr marL="0" lvl="0" indent="0" algn="r" rtl="0">
-              <a:spcBef>
-                <a:spcPts val="0"/>
-              </a:spcBef>
-              <a:spcAft>
-                <a:spcPts val="0"/>
-              </a:spcAft>
-              <a:buNone/>
-            </a:pPr>
-            <a:fld id="{00000000-1234-1234-1234-123412341234}" type="slidenum">
-              <a:rPr lang="en"/>
-              <a:t>12</a:t>
-            </a:fld>
-            <a:endParaRPr/>
-          </a:p>
-        </p:txBody>
-      </p:sp>
-      <p:pic>
-        <p:nvPicPr>
-          <p:cNvPr id="3" name="Picture 2">
-            <a:extLst>
-              <a:ext uri="{FF2B5EF4-FFF2-40B4-BE49-F238E27FC236}">
-                <a16:creationId xmlns:a16="http://schemas.microsoft.com/office/drawing/2014/main" id="{92DE4AAC-70FE-A114-5258-F5B22EDDED45}"/>
-              </a:ext>
-            </a:extLst>
-          </p:cNvPr>
-          <p:cNvPicPr>
-            <a:picLocks noChangeAspect="1"/>
-          </p:cNvPicPr>
-          <p:nvPr/>
-        </p:nvPicPr>
-        <p:blipFill>
-          <a:blip r:embed="rId3"/>
-          <a:stretch>
-            <a:fillRect/>
-          </a:stretch>
-        </p:blipFill>
-        <p:spPr>
-          <a:xfrm>
-            <a:off x="0" y="716280"/>
-            <a:ext cx="9144000" cy="4427218"/>
-          </a:xfrm>
-          <a:prstGeom prst="rect">
-            <a:avLst/>
-          </a:prstGeom>
-        </p:spPr>
-      </p:pic>
-    </p:spTree>
-    <p:extLst>
-      <p:ext uri="{BB962C8B-B14F-4D97-AF65-F5344CB8AC3E}">
-        <p14:creationId xmlns:p14="http://schemas.microsoft.com/office/powerpoint/2010/main" val="1976403023"/>
-      </p:ext>
-    </p:extLst>
-  </p:cSld>
-  <p:clrMapOvr>
-    <a:masterClrMapping/>
-  </p:clrMapOvr>
-</p:sld>
-</file>
-
-<file path=ppt/slides/slide13.xml><?xml version="1.0" encoding="utf-8"?>
-<p:sld xmlns:a="http://schemas.openxmlformats.org/drawingml/2006/main" xmlns:r="http://schemas.openxmlformats.org/officeDocument/2006/relationships" xmlns:p="http://schemas.openxmlformats.org/presentationml/2006/main" show="0">
-  <p:cSld>
-    <p:spTree>
-      <p:nvGrpSpPr>
-        <p:cNvPr id="1" name="Shape 323"/>
-        <p:cNvGrpSpPr/>
-        <p:nvPr/>
-      </p:nvGrpSpPr>
-      <p:grpSpPr>
-        <a:xfrm>
-          <a:off x="0" y="0"/>
-          <a:ext cx="0" cy="0"/>
-          <a:chOff x="0" y="0"/>
-          <a:chExt cx="0" cy="0"/>
-        </a:xfrm>
-      </p:grpSpPr>
-      <p:sp>
-        <p:nvSpPr>
-          <p:cNvPr id="324" name="Google Shape;324;p47"/>
-          <p:cNvSpPr txBox="1">
-            <a:spLocks noGrp="1"/>
-          </p:cNvSpPr>
-          <p:nvPr>
-            <p:ph type="title"/>
-          </p:nvPr>
-        </p:nvSpPr>
-        <p:spPr>
-          <a:xfrm>
-            <a:off x="226208" y="1"/>
-            <a:ext cx="8520600" cy="464980"/>
-          </a:xfrm>
-          <a:prstGeom prst="rect">
-            <a:avLst/>
-          </a:prstGeom>
-        </p:spPr>
-        <p:txBody>
-          <a:bodyPr spcFirstLastPara="1" wrap="square" lIns="91425" tIns="91425" rIns="91425" bIns="91425" anchor="t" anchorCtr="0">
-            <a:noAutofit/>
-          </a:bodyPr>
-          <a:lstStyle/>
-          <a:p>
-            <a:pPr marL="0" lvl="0" indent="0" algn="ctr" rtl="0">
-              <a:spcBef>
-                <a:spcPts val="0"/>
-              </a:spcBef>
-              <a:spcAft>
-                <a:spcPts val="0"/>
-              </a:spcAft>
-              <a:buNone/>
-            </a:pPr>
-            <a:r>
-              <a:rPr lang="en-US" dirty="0"/>
-              <a:t>Use </a:t>
-            </a:r>
-            <a:r>
-              <a:rPr lang="en-US" sz="2400" dirty="0"/>
-              <a:t>Assigned</a:t>
-            </a:r>
-            <a:r>
-              <a:rPr lang="en-US" dirty="0"/>
-              <a:t> Seat</a:t>
-            </a:r>
-            <a:endParaRPr dirty="0"/>
-          </a:p>
-        </p:txBody>
-      </p:sp>
-      <p:sp>
-        <p:nvSpPr>
-          <p:cNvPr id="326" name="Google Shape;326;p47"/>
-          <p:cNvSpPr txBox="1">
-            <a:spLocks noGrp="1"/>
-          </p:cNvSpPr>
-          <p:nvPr>
-            <p:ph type="sldNum" idx="12"/>
-          </p:nvPr>
-        </p:nvSpPr>
-        <p:spPr>
-          <a:xfrm>
-            <a:off x="8472458" y="4663217"/>
-            <a:ext cx="548700" cy="393600"/>
-          </a:xfrm>
-          <a:prstGeom prst="rect">
-            <a:avLst/>
-          </a:prstGeom>
-        </p:spPr>
-        <p:txBody>
-          <a:bodyPr spcFirstLastPara="1" wrap="square" lIns="91425" tIns="91425" rIns="91425" bIns="91425" anchor="ctr" anchorCtr="0">
-            <a:noAutofit/>
-          </a:bodyPr>
-          <a:lstStyle/>
-          <a:p>
-            <a:pPr marL="0" lvl="0" indent="0" algn="r" rtl="0">
-              <a:spcBef>
-                <a:spcPts val="0"/>
-              </a:spcBef>
-              <a:spcAft>
-                <a:spcPts val="0"/>
-              </a:spcAft>
-              <a:buNone/>
-            </a:pPr>
-            <a:fld id="{00000000-1234-1234-1234-123412341234}" type="slidenum">
-              <a:rPr lang="en"/>
-              <a:t>13</a:t>
-            </a:fld>
-            <a:endParaRPr/>
-          </a:p>
-        </p:txBody>
-      </p:sp>
-      <p:pic>
-        <p:nvPicPr>
-          <p:cNvPr id="4" name="Picture 3">
-            <a:extLst>
-              <a:ext uri="{FF2B5EF4-FFF2-40B4-BE49-F238E27FC236}">
-                <a16:creationId xmlns:a16="http://schemas.microsoft.com/office/drawing/2014/main" id="{DCD752B9-EFAE-AFC1-7D39-6763B89DE8D3}"/>
-              </a:ext>
-            </a:extLst>
-          </p:cNvPr>
-          <p:cNvPicPr>
-            <a:picLocks noChangeAspect="1"/>
-          </p:cNvPicPr>
-          <p:nvPr/>
-        </p:nvPicPr>
-        <p:blipFill>
-          <a:blip r:embed="rId3"/>
-          <a:stretch>
-            <a:fillRect/>
-          </a:stretch>
-        </p:blipFill>
-        <p:spPr>
-          <a:xfrm>
-            <a:off x="0" y="652130"/>
-            <a:ext cx="9144000" cy="4491369"/>
-          </a:xfrm>
-          <a:prstGeom prst="rect">
-            <a:avLst/>
-          </a:prstGeom>
-        </p:spPr>
-      </p:pic>
-    </p:spTree>
-    <p:extLst>
-      <p:ext uri="{BB962C8B-B14F-4D97-AF65-F5344CB8AC3E}">
-        <p14:creationId xmlns:p14="http://schemas.microsoft.com/office/powerpoint/2010/main" val="3365057756"/>
-      </p:ext>
-    </p:extLst>
-  </p:cSld>
-  <p:clrMapOvr>
-    <a:masterClrMapping/>
-  </p:clrMapOvr>
-</p:sld>
-</file>
-
-<file path=ppt/slides/slide2.xml><?xml version="1.0" encoding="utf-8"?>
+<file path=ppt/slides/slide3.xml><?xml version="1.0" encoding="utf-8"?>
 <p:sld xmlns:a="http://schemas.openxmlformats.org/drawingml/2006/main" xmlns:r="http://schemas.openxmlformats.org/officeDocument/2006/relationships" xmlns:p="http://schemas.openxmlformats.org/presentationml/2006/main" show="0">
   <p:cSld>
     <p:spTree>
@@ -8012,7 +8942,7 @@
             </a:pPr>
             <a:fld id="{00000000-1234-1234-1234-123412341234}" type="slidenum">
               <a:rPr lang="en"/>
-              <a:t>2</a:t>
+              <a:t>3</a:t>
             </a:fld>
             <a:endParaRPr/>
           </a:p>
@@ -8417,948 +9347,6 @@
     <p:extLst>
       <p:ext uri="{BB962C8B-B14F-4D97-AF65-F5344CB8AC3E}">
         <p14:creationId xmlns:p14="http://schemas.microsoft.com/office/powerpoint/2010/main" val="1325608804"/>
-      </p:ext>
-    </p:extLst>
-  </p:cSld>
-  <p:clrMapOvr>
-    <a:masterClrMapping/>
-  </p:clrMapOvr>
-</p:sld>
-</file>
-
-<file path=ppt/slides/slide3.xml><?xml version="1.0" encoding="utf-8"?>
-<p:sld xmlns:a="http://schemas.openxmlformats.org/drawingml/2006/main" xmlns:r="http://schemas.openxmlformats.org/officeDocument/2006/relationships" xmlns:p="http://schemas.openxmlformats.org/presentationml/2006/main" show="0">
-  <p:cSld>
-    <p:spTree>
-      <p:nvGrpSpPr>
-        <p:cNvPr id="1" name="Shape 323">
-          <a:extLst>
-            <a:ext uri="{FF2B5EF4-FFF2-40B4-BE49-F238E27FC236}">
-              <a16:creationId xmlns:a16="http://schemas.microsoft.com/office/drawing/2014/main" id="{19512066-5980-8A8B-BE30-C4FB3AC72235}"/>
-            </a:ext>
-          </a:extLst>
-        </p:cNvPr>
-        <p:cNvGrpSpPr/>
-        <p:nvPr/>
-      </p:nvGrpSpPr>
-      <p:grpSpPr>
-        <a:xfrm>
-          <a:off x="0" y="0"/>
-          <a:ext cx="0" cy="0"/>
-          <a:chOff x="0" y="0"/>
-          <a:chExt cx="0" cy="0"/>
-        </a:xfrm>
-      </p:grpSpPr>
-      <p:sp>
-        <p:nvSpPr>
-          <p:cNvPr id="324" name="Google Shape;324;p47">
-            <a:extLst>
-              <a:ext uri="{FF2B5EF4-FFF2-40B4-BE49-F238E27FC236}">
-                <a16:creationId xmlns:a16="http://schemas.microsoft.com/office/drawing/2014/main" id="{CDF56279-13BE-3C44-BBEF-E7DC5D1E88D2}"/>
-              </a:ext>
-            </a:extLst>
-          </p:cNvPr>
-          <p:cNvSpPr txBox="1">
-            <a:spLocks noGrp="1"/>
-          </p:cNvSpPr>
-          <p:nvPr>
-            <p:ph type="title"/>
-          </p:nvPr>
-        </p:nvSpPr>
-        <p:spPr>
-          <a:xfrm>
-            <a:off x="300016" y="269197"/>
-            <a:ext cx="8520600" cy="623700"/>
-          </a:xfrm>
-          <a:prstGeom prst="rect">
-            <a:avLst/>
-          </a:prstGeom>
-        </p:spPr>
-        <p:txBody>
-          <a:bodyPr spcFirstLastPara="1" wrap="square" lIns="91425" tIns="91425" rIns="91425" bIns="91425" anchor="t" anchorCtr="0">
-            <a:noAutofit/>
-          </a:bodyPr>
-          <a:lstStyle/>
-          <a:p>
-            <a:pPr marL="0" lvl="0" indent="0" algn="ctr" rtl="0">
-              <a:spcBef>
-                <a:spcPts val="0"/>
-              </a:spcBef>
-              <a:spcAft>
-                <a:spcPts val="0"/>
-              </a:spcAft>
-              <a:buNone/>
-            </a:pPr>
-            <a:r>
-              <a:rPr lang="en-US" dirty="0"/>
-              <a:t>GCIS – Software Development and Problem Solving</a:t>
-            </a:r>
-            <a:endParaRPr dirty="0"/>
-          </a:p>
-        </p:txBody>
-      </p:sp>
-      <p:sp>
-        <p:nvSpPr>
-          <p:cNvPr id="325" name="Google Shape;325;p47">
-            <a:extLst>
-              <a:ext uri="{FF2B5EF4-FFF2-40B4-BE49-F238E27FC236}">
-                <a16:creationId xmlns:a16="http://schemas.microsoft.com/office/drawing/2014/main" id="{5A9661D1-8430-BF80-279A-41B28CA04273}"/>
-              </a:ext>
-            </a:extLst>
-          </p:cNvPr>
-          <p:cNvSpPr txBox="1">
-            <a:spLocks noGrp="1"/>
-          </p:cNvSpPr>
-          <p:nvPr>
-            <p:ph type="body" idx="1"/>
-          </p:nvPr>
-        </p:nvSpPr>
-        <p:spPr>
-          <a:xfrm>
-            <a:off x="91445" y="1758316"/>
-            <a:ext cx="4000496" cy="1378401"/>
-          </a:xfrm>
-          <a:prstGeom prst="rect">
-            <a:avLst/>
-          </a:prstGeom>
-        </p:spPr>
-        <p:txBody>
-          <a:bodyPr spcFirstLastPara="1" wrap="square" lIns="91425" tIns="91425" rIns="91425" bIns="91425" anchor="ctr" anchorCtr="0">
-            <a:noAutofit/>
-          </a:bodyPr>
-          <a:lstStyle/>
-          <a:p>
-            <a:pPr marL="146050" indent="0">
-              <a:buNone/>
-            </a:pPr>
-            <a:r>
-              <a:rPr lang="en-US" sz="1600" dirty="0">
-                <a:solidFill>
-                  <a:schemeClr val="tx1"/>
-                </a:solidFill>
-              </a:rPr>
-              <a:t>Quiz 9.2: Protocol</a:t>
-            </a:r>
-          </a:p>
-          <a:p>
-            <a:pPr marL="146050" indent="0">
-              <a:buNone/>
-            </a:pPr>
-            <a:r>
-              <a:rPr lang="en-US" sz="1600" dirty="0">
-                <a:solidFill>
-                  <a:schemeClr val="tx1"/>
-                </a:solidFill>
-              </a:rPr>
-              <a:t>Password – </a:t>
-            </a:r>
-            <a:r>
-              <a:rPr lang="en-US" sz="1600" dirty="0" err="1">
-                <a:solidFill>
-                  <a:schemeClr val="tx1"/>
-                </a:solidFill>
-              </a:rPr>
-              <a:t>TokenRingRocks</a:t>
-            </a:r>
-            <a:endParaRPr sz="1600" dirty="0">
-              <a:solidFill>
-                <a:schemeClr val="tx1"/>
-              </a:solidFill>
-            </a:endParaRPr>
-          </a:p>
-        </p:txBody>
-      </p:sp>
-      <p:sp>
-        <p:nvSpPr>
-          <p:cNvPr id="326" name="Google Shape;326;p47">
-            <a:extLst>
-              <a:ext uri="{FF2B5EF4-FFF2-40B4-BE49-F238E27FC236}">
-                <a16:creationId xmlns:a16="http://schemas.microsoft.com/office/drawing/2014/main" id="{8A14E227-935A-FBD8-6BD5-CBCE8D13EE84}"/>
-              </a:ext>
-            </a:extLst>
-          </p:cNvPr>
-          <p:cNvSpPr txBox="1">
-            <a:spLocks noGrp="1"/>
-          </p:cNvSpPr>
-          <p:nvPr>
-            <p:ph type="sldNum" idx="12"/>
-          </p:nvPr>
-        </p:nvSpPr>
-        <p:spPr>
-          <a:xfrm>
-            <a:off x="8472458" y="4663217"/>
-            <a:ext cx="548700" cy="393600"/>
-          </a:xfrm>
-          <a:prstGeom prst="rect">
-            <a:avLst/>
-          </a:prstGeom>
-        </p:spPr>
-        <p:txBody>
-          <a:bodyPr spcFirstLastPara="1" wrap="square" lIns="91425" tIns="91425" rIns="91425" bIns="91425" anchor="ctr" anchorCtr="0">
-            <a:noAutofit/>
-          </a:bodyPr>
-          <a:lstStyle/>
-          <a:p>
-            <a:pPr marL="0" lvl="0" indent="0" algn="r" rtl="0">
-              <a:spcBef>
-                <a:spcPts val="0"/>
-              </a:spcBef>
-              <a:spcAft>
-                <a:spcPts val="0"/>
-              </a:spcAft>
-              <a:buNone/>
-            </a:pPr>
-            <a:fld id="{00000000-1234-1234-1234-123412341234}" type="slidenum">
-              <a:rPr lang="en"/>
-              <a:t>3</a:t>
-            </a:fld>
-            <a:endParaRPr/>
-          </a:p>
-        </p:txBody>
-      </p:sp>
-      <p:sp>
-        <p:nvSpPr>
-          <p:cNvPr id="2" name="TextBox 1">
-            <a:extLst>
-              <a:ext uri="{FF2B5EF4-FFF2-40B4-BE49-F238E27FC236}">
-                <a16:creationId xmlns:a16="http://schemas.microsoft.com/office/drawing/2014/main" id="{AE960589-7B12-D7F7-6452-D45441D8CA95}"/>
-              </a:ext>
-            </a:extLst>
-          </p:cNvPr>
-          <p:cNvSpPr txBox="1"/>
-          <p:nvPr/>
-        </p:nvSpPr>
-        <p:spPr>
-          <a:xfrm>
-            <a:off x="-11684" y="1287037"/>
-            <a:ext cx="9144000" cy="338555"/>
-          </a:xfrm>
-          <a:prstGeom prst="rect">
-            <a:avLst/>
-          </a:prstGeom>
-          <a:solidFill>
-            <a:srgbClr val="FFC000"/>
-          </a:solidFill>
-        </p:spPr>
-        <p:txBody>
-          <a:bodyPr wrap="square" rtlCol="0">
-            <a:spAutoFit/>
-          </a:bodyPr>
-          <a:lstStyle/>
-          <a:p>
-            <a:r>
-              <a:rPr lang="en-US" dirty="0"/>
-              <a:t>Quiz</a:t>
-            </a:r>
-          </a:p>
-        </p:txBody>
-      </p:sp>
-      <p:sp>
-        <p:nvSpPr>
-          <p:cNvPr id="3" name="TextBox 2">
-            <a:extLst>
-              <a:ext uri="{FF2B5EF4-FFF2-40B4-BE49-F238E27FC236}">
-                <a16:creationId xmlns:a16="http://schemas.microsoft.com/office/drawing/2014/main" id="{4FD526CA-3FDB-A5C2-36D9-69A3252D5E9A}"/>
-              </a:ext>
-            </a:extLst>
-          </p:cNvPr>
-          <p:cNvSpPr txBox="1"/>
-          <p:nvPr/>
-        </p:nvSpPr>
-        <p:spPr>
-          <a:xfrm>
-            <a:off x="0" y="3254487"/>
-            <a:ext cx="9144000" cy="307777"/>
-          </a:xfrm>
-          <a:prstGeom prst="rect">
-            <a:avLst/>
-          </a:prstGeom>
-          <a:solidFill>
-            <a:srgbClr val="FFC000"/>
-          </a:solidFill>
-        </p:spPr>
-        <p:txBody>
-          <a:bodyPr wrap="square" rtlCol="0">
-            <a:spAutoFit/>
-          </a:bodyPr>
-          <a:lstStyle/>
-          <a:p>
-            <a:r>
-              <a:rPr lang="en-US" dirty="0"/>
-              <a:t>Next </a:t>
-            </a:r>
-            <a:r>
-              <a:rPr lang="en-US" dirty="0">
-                <a:sym typeface="Wingdings" panose="05000000000000000000" pitchFamily="2" charset="2"/>
-              </a:rPr>
-              <a:t> </a:t>
-            </a:r>
-            <a:endParaRPr lang="en-US" dirty="0"/>
-          </a:p>
-        </p:txBody>
-      </p:sp>
-      <p:sp>
-        <p:nvSpPr>
-          <p:cNvPr id="4" name="Google Shape;325;p47">
-            <a:extLst>
-              <a:ext uri="{FF2B5EF4-FFF2-40B4-BE49-F238E27FC236}">
-                <a16:creationId xmlns:a16="http://schemas.microsoft.com/office/drawing/2014/main" id="{DC50CCB1-5AFE-1F52-8B22-87EB927965B4}"/>
-              </a:ext>
-            </a:extLst>
-          </p:cNvPr>
-          <p:cNvSpPr txBox="1">
-            <a:spLocks/>
-          </p:cNvSpPr>
-          <p:nvPr/>
-        </p:nvSpPr>
-        <p:spPr>
-          <a:xfrm>
-            <a:off x="-5842" y="3562264"/>
-            <a:ext cx="9149842" cy="1494553"/>
-          </a:xfrm>
-          <a:prstGeom prst="rect">
-            <a:avLst/>
-          </a:prstGeom>
-          <a:noFill/>
-          <a:ln>
-            <a:noFill/>
-          </a:ln>
-        </p:spPr>
-        <p:txBody>
-          <a:bodyPr spcFirstLastPara="1" wrap="square" lIns="91425" tIns="91425" rIns="91425" bIns="91425" anchor="ctr" anchorCtr="0">
-            <a:noAutofit/>
-          </a:bodyPr>
-          <a:lstStyle>
-            <a:defPPr marR="0" lvl="0" algn="l" rtl="0">
-              <a:lnSpc>
-                <a:spcPct val="100000"/>
-              </a:lnSpc>
-              <a:spcBef>
-                <a:spcPts val="0"/>
-              </a:spcBef>
-              <a:spcAft>
-                <a:spcPts val="0"/>
-              </a:spcAft>
-            </a:defPPr>
-            <a:lvl1pPr marL="457200" marR="0" lvl="0" indent="-311150" algn="l" rtl="0">
-              <a:lnSpc>
-                <a:spcPct val="115000"/>
-              </a:lnSpc>
-              <a:spcBef>
-                <a:spcPts val="0"/>
-              </a:spcBef>
-              <a:spcAft>
-                <a:spcPts val="0"/>
-              </a:spcAft>
-              <a:buClr>
-                <a:schemeClr val="dk2"/>
-              </a:buClr>
-              <a:buSzPts val="1300"/>
-              <a:buFont typeface="Roboto"/>
-              <a:buChar char="●"/>
-              <a:defRPr sz="1300" b="0" i="0" u="none" strike="noStrike" cap="none">
-                <a:solidFill>
-                  <a:schemeClr val="dk2"/>
-                </a:solidFill>
-                <a:latin typeface="Roboto"/>
-                <a:ea typeface="Roboto"/>
-                <a:cs typeface="Roboto"/>
-                <a:sym typeface="Roboto"/>
-              </a:defRPr>
-            </a:lvl1pPr>
-            <a:lvl2pPr marL="914400" marR="0" lvl="1" indent="-298450" algn="l" rtl="0">
-              <a:lnSpc>
-                <a:spcPct val="115000"/>
-              </a:lnSpc>
-              <a:spcBef>
-                <a:spcPts val="1600"/>
-              </a:spcBef>
-              <a:spcAft>
-                <a:spcPts val="0"/>
-              </a:spcAft>
-              <a:buClr>
-                <a:schemeClr val="dk2"/>
-              </a:buClr>
-              <a:buSzPts val="1100"/>
-              <a:buFont typeface="Roboto"/>
-              <a:buChar char="○"/>
-              <a:defRPr sz="1100" b="0" i="0" u="none" strike="noStrike" cap="none">
-                <a:solidFill>
-                  <a:schemeClr val="dk2"/>
-                </a:solidFill>
-                <a:latin typeface="Roboto"/>
-                <a:ea typeface="Roboto"/>
-                <a:cs typeface="Roboto"/>
-                <a:sym typeface="Roboto"/>
-              </a:defRPr>
-            </a:lvl2pPr>
-            <a:lvl3pPr marL="1371600" marR="0" lvl="2" indent="-298450" algn="l" rtl="0">
-              <a:lnSpc>
-                <a:spcPct val="115000"/>
-              </a:lnSpc>
-              <a:spcBef>
-                <a:spcPts val="1600"/>
-              </a:spcBef>
-              <a:spcAft>
-                <a:spcPts val="0"/>
-              </a:spcAft>
-              <a:buClr>
-                <a:schemeClr val="dk2"/>
-              </a:buClr>
-              <a:buSzPts val="1100"/>
-              <a:buFont typeface="Roboto"/>
-              <a:buChar char="■"/>
-              <a:defRPr sz="1100" b="0" i="0" u="none" strike="noStrike" cap="none">
-                <a:solidFill>
-                  <a:schemeClr val="dk2"/>
-                </a:solidFill>
-                <a:latin typeface="Roboto"/>
-                <a:ea typeface="Roboto"/>
-                <a:cs typeface="Roboto"/>
-                <a:sym typeface="Roboto"/>
-              </a:defRPr>
-            </a:lvl3pPr>
-            <a:lvl4pPr marL="1828800" marR="0" lvl="3" indent="-298450" algn="l" rtl="0">
-              <a:lnSpc>
-                <a:spcPct val="115000"/>
-              </a:lnSpc>
-              <a:spcBef>
-                <a:spcPts val="1600"/>
-              </a:spcBef>
-              <a:spcAft>
-                <a:spcPts val="0"/>
-              </a:spcAft>
-              <a:buClr>
-                <a:schemeClr val="dk2"/>
-              </a:buClr>
-              <a:buSzPts val="1100"/>
-              <a:buFont typeface="Roboto"/>
-              <a:buChar char="●"/>
-              <a:defRPr sz="1100" b="0" i="0" u="none" strike="noStrike" cap="none">
-                <a:solidFill>
-                  <a:schemeClr val="dk2"/>
-                </a:solidFill>
-                <a:latin typeface="Roboto"/>
-                <a:ea typeface="Roboto"/>
-                <a:cs typeface="Roboto"/>
-                <a:sym typeface="Roboto"/>
-              </a:defRPr>
-            </a:lvl4pPr>
-            <a:lvl5pPr marL="2286000" marR="0" lvl="4" indent="-298450" algn="l" rtl="0">
-              <a:lnSpc>
-                <a:spcPct val="115000"/>
-              </a:lnSpc>
-              <a:spcBef>
-                <a:spcPts val="1600"/>
-              </a:spcBef>
-              <a:spcAft>
-                <a:spcPts val="0"/>
-              </a:spcAft>
-              <a:buClr>
-                <a:schemeClr val="dk2"/>
-              </a:buClr>
-              <a:buSzPts val="1100"/>
-              <a:buFont typeface="Roboto"/>
-              <a:buChar char="○"/>
-              <a:defRPr sz="1100" b="0" i="0" u="none" strike="noStrike" cap="none">
-                <a:solidFill>
-                  <a:schemeClr val="dk2"/>
-                </a:solidFill>
-                <a:latin typeface="Roboto"/>
-                <a:ea typeface="Roboto"/>
-                <a:cs typeface="Roboto"/>
-                <a:sym typeface="Roboto"/>
-              </a:defRPr>
-            </a:lvl5pPr>
-            <a:lvl6pPr marL="2743200" marR="0" lvl="5" indent="-298450" algn="l" rtl="0">
-              <a:lnSpc>
-                <a:spcPct val="115000"/>
-              </a:lnSpc>
-              <a:spcBef>
-                <a:spcPts val="1600"/>
-              </a:spcBef>
-              <a:spcAft>
-                <a:spcPts val="0"/>
-              </a:spcAft>
-              <a:buClr>
-                <a:schemeClr val="dk2"/>
-              </a:buClr>
-              <a:buSzPts val="1100"/>
-              <a:buFont typeface="Roboto"/>
-              <a:buChar char="■"/>
-              <a:defRPr sz="1100" b="0" i="0" u="none" strike="noStrike" cap="none">
-                <a:solidFill>
-                  <a:schemeClr val="dk2"/>
-                </a:solidFill>
-                <a:latin typeface="Roboto"/>
-                <a:ea typeface="Roboto"/>
-                <a:cs typeface="Roboto"/>
-                <a:sym typeface="Roboto"/>
-              </a:defRPr>
-            </a:lvl6pPr>
-            <a:lvl7pPr marL="3200400" marR="0" lvl="6" indent="-298450" algn="l" rtl="0">
-              <a:lnSpc>
-                <a:spcPct val="115000"/>
-              </a:lnSpc>
-              <a:spcBef>
-                <a:spcPts val="1600"/>
-              </a:spcBef>
-              <a:spcAft>
-                <a:spcPts val="0"/>
-              </a:spcAft>
-              <a:buClr>
-                <a:schemeClr val="dk2"/>
-              </a:buClr>
-              <a:buSzPts val="1100"/>
-              <a:buFont typeface="Roboto"/>
-              <a:buChar char="●"/>
-              <a:defRPr sz="1100" b="0" i="0" u="none" strike="noStrike" cap="none">
-                <a:solidFill>
-                  <a:schemeClr val="dk2"/>
-                </a:solidFill>
-                <a:latin typeface="Roboto"/>
-                <a:ea typeface="Roboto"/>
-                <a:cs typeface="Roboto"/>
-                <a:sym typeface="Roboto"/>
-              </a:defRPr>
-            </a:lvl7pPr>
-            <a:lvl8pPr marL="3657600" marR="0" lvl="7" indent="-298450" algn="l" rtl="0">
-              <a:lnSpc>
-                <a:spcPct val="115000"/>
-              </a:lnSpc>
-              <a:spcBef>
-                <a:spcPts val="1600"/>
-              </a:spcBef>
-              <a:spcAft>
-                <a:spcPts val="0"/>
-              </a:spcAft>
-              <a:buClr>
-                <a:schemeClr val="dk2"/>
-              </a:buClr>
-              <a:buSzPts val="1100"/>
-              <a:buFont typeface="Roboto"/>
-              <a:buChar char="○"/>
-              <a:defRPr sz="1100" b="0" i="0" u="none" strike="noStrike" cap="none">
-                <a:solidFill>
-                  <a:schemeClr val="dk2"/>
-                </a:solidFill>
-                <a:latin typeface="Roboto"/>
-                <a:ea typeface="Roboto"/>
-                <a:cs typeface="Roboto"/>
-                <a:sym typeface="Roboto"/>
-              </a:defRPr>
-            </a:lvl8pPr>
-            <a:lvl9pPr marL="4114800" marR="0" lvl="8" indent="-298450" algn="l" rtl="0">
-              <a:lnSpc>
-                <a:spcPct val="115000"/>
-              </a:lnSpc>
-              <a:spcBef>
-                <a:spcPts val="1600"/>
-              </a:spcBef>
-              <a:spcAft>
-                <a:spcPts val="1600"/>
-              </a:spcAft>
-              <a:buClr>
-                <a:schemeClr val="dk2"/>
-              </a:buClr>
-              <a:buSzPts val="1100"/>
-              <a:buFont typeface="Roboto"/>
-              <a:buChar char="■"/>
-              <a:defRPr sz="1100" b="0" i="0" u="none" strike="noStrike" cap="none">
-                <a:solidFill>
-                  <a:schemeClr val="dk2"/>
-                </a:solidFill>
-                <a:latin typeface="Roboto"/>
-                <a:ea typeface="Roboto"/>
-                <a:cs typeface="Roboto"/>
-                <a:sym typeface="Roboto"/>
-              </a:defRPr>
-            </a:lvl9pPr>
-          </a:lstStyle>
-          <a:p>
-            <a:pPr marL="0" indent="0">
-              <a:spcAft>
-                <a:spcPts val="1600"/>
-              </a:spcAft>
-              <a:buNone/>
-            </a:pPr>
-            <a:r>
-              <a:rPr lang="en-US" sz="1400" dirty="0"/>
-              <a:t>After completing the Quiz </a:t>
-            </a:r>
-          </a:p>
-          <a:p>
-            <a:pPr marL="342900" indent="-342900">
-              <a:spcAft>
-                <a:spcPts val="1600"/>
-              </a:spcAft>
-            </a:pPr>
-            <a:r>
-              <a:rPr lang="en-US" sz="1200" dirty="0"/>
-              <a:t>Accept GitHub Classroom Assignment for Unit 10</a:t>
-            </a:r>
-          </a:p>
-          <a:p>
-            <a:pPr marL="342900" indent="-342900">
-              <a:spcAft>
-                <a:spcPts val="1600"/>
-              </a:spcAft>
-            </a:pPr>
-            <a:r>
-              <a:rPr lang="en-US" sz="1200"/>
-              <a:t>Clone GitHub </a:t>
-            </a:r>
-            <a:r>
-              <a:rPr lang="en-US" sz="1200" dirty="0"/>
-              <a:t>classroom repo for Unit 10 under </a:t>
-            </a:r>
-            <a:r>
-              <a:rPr lang="en-US" sz="1200" dirty="0" err="1"/>
-              <a:t>softdevII</a:t>
-            </a:r>
-            <a:r>
-              <a:rPr lang="en-US" sz="1200" dirty="0"/>
-              <a:t> folder. Download Starter code from </a:t>
-            </a:r>
-            <a:r>
-              <a:rPr lang="en-US" sz="1200" dirty="0" err="1"/>
-              <a:t>myCourses</a:t>
-            </a:r>
-            <a:r>
-              <a:rPr lang="en-US" sz="1200" dirty="0"/>
-              <a:t> under Alam-&gt;Class Activities</a:t>
-            </a:r>
-            <a:endParaRPr lang="en-US" sz="1200" dirty="0">
-              <a:solidFill>
-                <a:schemeClr val="tx1"/>
-              </a:solidFill>
-            </a:endParaRPr>
-          </a:p>
-        </p:txBody>
-      </p:sp>
-      <p:sp>
-        <p:nvSpPr>
-          <p:cNvPr id="5" name="Google Shape;325;p47">
-            <a:extLst>
-              <a:ext uri="{FF2B5EF4-FFF2-40B4-BE49-F238E27FC236}">
-                <a16:creationId xmlns:a16="http://schemas.microsoft.com/office/drawing/2014/main" id="{7B85466C-6200-EE66-9396-7DECA70CDF53}"/>
-              </a:ext>
-            </a:extLst>
-          </p:cNvPr>
-          <p:cNvSpPr txBox="1">
-            <a:spLocks/>
-          </p:cNvSpPr>
-          <p:nvPr/>
-        </p:nvSpPr>
-        <p:spPr>
-          <a:xfrm>
-            <a:off x="4303618" y="1737005"/>
-            <a:ext cx="4516998" cy="1378400"/>
-          </a:xfrm>
-          <a:prstGeom prst="rect">
-            <a:avLst/>
-          </a:prstGeom>
-          <a:noFill/>
-          <a:ln>
-            <a:noFill/>
-          </a:ln>
-        </p:spPr>
-        <p:txBody>
-          <a:bodyPr spcFirstLastPara="1" wrap="square" lIns="91425" tIns="91425" rIns="91425" bIns="91425" anchor="ctr" anchorCtr="0">
-            <a:noAutofit/>
-          </a:bodyPr>
-          <a:lstStyle>
-            <a:defPPr marR="0" lvl="0" algn="l" rtl="0">
-              <a:lnSpc>
-                <a:spcPct val="100000"/>
-              </a:lnSpc>
-              <a:spcBef>
-                <a:spcPts val="0"/>
-              </a:spcBef>
-              <a:spcAft>
-                <a:spcPts val="0"/>
-              </a:spcAft>
-            </a:defPPr>
-            <a:lvl1pPr marL="457200" marR="0" lvl="0" indent="-311150" algn="l" rtl="0">
-              <a:lnSpc>
-                <a:spcPct val="115000"/>
-              </a:lnSpc>
-              <a:spcBef>
-                <a:spcPts val="0"/>
-              </a:spcBef>
-              <a:spcAft>
-                <a:spcPts val="0"/>
-              </a:spcAft>
-              <a:buClr>
-                <a:schemeClr val="dk2"/>
-              </a:buClr>
-              <a:buSzPts val="1300"/>
-              <a:buFont typeface="Roboto"/>
-              <a:buChar char="●"/>
-              <a:defRPr sz="1300" b="0" i="0" u="none" strike="noStrike" cap="none">
-                <a:solidFill>
-                  <a:schemeClr val="dk2"/>
-                </a:solidFill>
-                <a:latin typeface="Roboto"/>
-                <a:ea typeface="Roboto"/>
-                <a:cs typeface="Roboto"/>
-                <a:sym typeface="Roboto"/>
-              </a:defRPr>
-            </a:lvl1pPr>
-            <a:lvl2pPr marL="914400" marR="0" lvl="1" indent="-298450" algn="l" rtl="0">
-              <a:lnSpc>
-                <a:spcPct val="115000"/>
-              </a:lnSpc>
-              <a:spcBef>
-                <a:spcPts val="1600"/>
-              </a:spcBef>
-              <a:spcAft>
-                <a:spcPts val="0"/>
-              </a:spcAft>
-              <a:buClr>
-                <a:schemeClr val="dk2"/>
-              </a:buClr>
-              <a:buSzPts val="1100"/>
-              <a:buFont typeface="Roboto"/>
-              <a:buChar char="○"/>
-              <a:defRPr sz="1100" b="0" i="0" u="none" strike="noStrike" cap="none">
-                <a:solidFill>
-                  <a:schemeClr val="dk2"/>
-                </a:solidFill>
-                <a:latin typeface="Roboto"/>
-                <a:ea typeface="Roboto"/>
-                <a:cs typeface="Roboto"/>
-                <a:sym typeface="Roboto"/>
-              </a:defRPr>
-            </a:lvl2pPr>
-            <a:lvl3pPr marL="1371600" marR="0" lvl="2" indent="-298450" algn="l" rtl="0">
-              <a:lnSpc>
-                <a:spcPct val="115000"/>
-              </a:lnSpc>
-              <a:spcBef>
-                <a:spcPts val="1600"/>
-              </a:spcBef>
-              <a:spcAft>
-                <a:spcPts val="0"/>
-              </a:spcAft>
-              <a:buClr>
-                <a:schemeClr val="dk2"/>
-              </a:buClr>
-              <a:buSzPts val="1100"/>
-              <a:buFont typeface="Roboto"/>
-              <a:buChar char="■"/>
-              <a:defRPr sz="1100" b="0" i="0" u="none" strike="noStrike" cap="none">
-                <a:solidFill>
-                  <a:schemeClr val="dk2"/>
-                </a:solidFill>
-                <a:latin typeface="Roboto"/>
-                <a:ea typeface="Roboto"/>
-                <a:cs typeface="Roboto"/>
-                <a:sym typeface="Roboto"/>
-              </a:defRPr>
-            </a:lvl3pPr>
-            <a:lvl4pPr marL="1828800" marR="0" lvl="3" indent="-298450" algn="l" rtl="0">
-              <a:lnSpc>
-                <a:spcPct val="115000"/>
-              </a:lnSpc>
-              <a:spcBef>
-                <a:spcPts val="1600"/>
-              </a:spcBef>
-              <a:spcAft>
-                <a:spcPts val="0"/>
-              </a:spcAft>
-              <a:buClr>
-                <a:schemeClr val="dk2"/>
-              </a:buClr>
-              <a:buSzPts val="1100"/>
-              <a:buFont typeface="Roboto"/>
-              <a:buChar char="●"/>
-              <a:defRPr sz="1100" b="0" i="0" u="none" strike="noStrike" cap="none">
-                <a:solidFill>
-                  <a:schemeClr val="dk2"/>
-                </a:solidFill>
-                <a:latin typeface="Roboto"/>
-                <a:ea typeface="Roboto"/>
-                <a:cs typeface="Roboto"/>
-                <a:sym typeface="Roboto"/>
-              </a:defRPr>
-            </a:lvl4pPr>
-            <a:lvl5pPr marL="2286000" marR="0" lvl="4" indent="-298450" algn="l" rtl="0">
-              <a:lnSpc>
-                <a:spcPct val="115000"/>
-              </a:lnSpc>
-              <a:spcBef>
-                <a:spcPts val="1600"/>
-              </a:spcBef>
-              <a:spcAft>
-                <a:spcPts val="0"/>
-              </a:spcAft>
-              <a:buClr>
-                <a:schemeClr val="dk2"/>
-              </a:buClr>
-              <a:buSzPts val="1100"/>
-              <a:buFont typeface="Roboto"/>
-              <a:buChar char="○"/>
-              <a:defRPr sz="1100" b="0" i="0" u="none" strike="noStrike" cap="none">
-                <a:solidFill>
-                  <a:schemeClr val="dk2"/>
-                </a:solidFill>
-                <a:latin typeface="Roboto"/>
-                <a:ea typeface="Roboto"/>
-                <a:cs typeface="Roboto"/>
-                <a:sym typeface="Roboto"/>
-              </a:defRPr>
-            </a:lvl5pPr>
-            <a:lvl6pPr marL="2743200" marR="0" lvl="5" indent="-298450" algn="l" rtl="0">
-              <a:lnSpc>
-                <a:spcPct val="115000"/>
-              </a:lnSpc>
-              <a:spcBef>
-                <a:spcPts val="1600"/>
-              </a:spcBef>
-              <a:spcAft>
-                <a:spcPts val="0"/>
-              </a:spcAft>
-              <a:buClr>
-                <a:schemeClr val="dk2"/>
-              </a:buClr>
-              <a:buSzPts val="1100"/>
-              <a:buFont typeface="Roboto"/>
-              <a:buChar char="■"/>
-              <a:defRPr sz="1100" b="0" i="0" u="none" strike="noStrike" cap="none">
-                <a:solidFill>
-                  <a:schemeClr val="dk2"/>
-                </a:solidFill>
-                <a:latin typeface="Roboto"/>
-                <a:ea typeface="Roboto"/>
-                <a:cs typeface="Roboto"/>
-                <a:sym typeface="Roboto"/>
-              </a:defRPr>
-            </a:lvl6pPr>
-            <a:lvl7pPr marL="3200400" marR="0" lvl="6" indent="-298450" algn="l" rtl="0">
-              <a:lnSpc>
-                <a:spcPct val="115000"/>
-              </a:lnSpc>
-              <a:spcBef>
-                <a:spcPts val="1600"/>
-              </a:spcBef>
-              <a:spcAft>
-                <a:spcPts val="0"/>
-              </a:spcAft>
-              <a:buClr>
-                <a:schemeClr val="dk2"/>
-              </a:buClr>
-              <a:buSzPts val="1100"/>
-              <a:buFont typeface="Roboto"/>
-              <a:buChar char="●"/>
-              <a:defRPr sz="1100" b="0" i="0" u="none" strike="noStrike" cap="none">
-                <a:solidFill>
-                  <a:schemeClr val="dk2"/>
-                </a:solidFill>
-                <a:latin typeface="Roboto"/>
-                <a:ea typeface="Roboto"/>
-                <a:cs typeface="Roboto"/>
-                <a:sym typeface="Roboto"/>
-              </a:defRPr>
-            </a:lvl7pPr>
-            <a:lvl8pPr marL="3657600" marR="0" lvl="7" indent="-298450" algn="l" rtl="0">
-              <a:lnSpc>
-                <a:spcPct val="115000"/>
-              </a:lnSpc>
-              <a:spcBef>
-                <a:spcPts val="1600"/>
-              </a:spcBef>
-              <a:spcAft>
-                <a:spcPts val="0"/>
-              </a:spcAft>
-              <a:buClr>
-                <a:schemeClr val="dk2"/>
-              </a:buClr>
-              <a:buSzPts val="1100"/>
-              <a:buFont typeface="Roboto"/>
-              <a:buChar char="○"/>
-              <a:defRPr sz="1100" b="0" i="0" u="none" strike="noStrike" cap="none">
-                <a:solidFill>
-                  <a:schemeClr val="dk2"/>
-                </a:solidFill>
-                <a:latin typeface="Roboto"/>
-                <a:ea typeface="Roboto"/>
-                <a:cs typeface="Roboto"/>
-                <a:sym typeface="Roboto"/>
-              </a:defRPr>
-            </a:lvl8pPr>
-            <a:lvl9pPr marL="4114800" marR="0" lvl="8" indent="-298450" algn="l" rtl="0">
-              <a:lnSpc>
-                <a:spcPct val="115000"/>
-              </a:lnSpc>
-              <a:spcBef>
-                <a:spcPts val="1600"/>
-              </a:spcBef>
-              <a:spcAft>
-                <a:spcPts val="1600"/>
-              </a:spcAft>
-              <a:buClr>
-                <a:schemeClr val="dk2"/>
-              </a:buClr>
-              <a:buSzPts val="1100"/>
-              <a:buFont typeface="Roboto"/>
-              <a:buChar char="■"/>
-              <a:defRPr sz="1100" b="0" i="0" u="none" strike="noStrike" cap="none">
-                <a:solidFill>
-                  <a:schemeClr val="dk2"/>
-                </a:solidFill>
-                <a:latin typeface="Roboto"/>
-                <a:ea typeface="Roboto"/>
-                <a:cs typeface="Roboto"/>
-                <a:sym typeface="Roboto"/>
-              </a:defRPr>
-            </a:lvl9pPr>
-          </a:lstStyle>
-          <a:p>
-            <a:pPr marL="146050" indent="0">
-              <a:buNone/>
-            </a:pPr>
-            <a:r>
-              <a:rPr lang="en-US" sz="1600" dirty="0">
-                <a:solidFill>
-                  <a:schemeClr val="tx1"/>
-                </a:solidFill>
-              </a:rPr>
-              <a:t>Quiz 9.3 Socket Programming</a:t>
-            </a:r>
-          </a:p>
-          <a:p>
-            <a:pPr marL="146050" indent="0">
-              <a:buNone/>
-            </a:pPr>
-            <a:r>
-              <a:rPr lang="en-US" sz="1600" dirty="0">
-                <a:solidFill>
-                  <a:schemeClr val="tx1"/>
-                </a:solidFill>
-              </a:rPr>
-              <a:t>Password - </a:t>
-            </a:r>
-            <a:r>
-              <a:rPr lang="en-US" sz="1600" dirty="0" err="1">
-                <a:solidFill>
-                  <a:schemeClr val="tx1"/>
-                </a:solidFill>
-              </a:rPr>
-              <a:t>socket_dont_knock_it</a:t>
-            </a:r>
-            <a:endParaRPr lang="en-US" sz="1600" dirty="0">
-              <a:solidFill>
-                <a:schemeClr val="tx1"/>
-              </a:solidFill>
-            </a:endParaRPr>
-          </a:p>
-        </p:txBody>
-      </p:sp>
-    </p:spTree>
-    <p:extLst>
-      <p:ext uri="{BB962C8B-B14F-4D97-AF65-F5344CB8AC3E}">
-        <p14:creationId xmlns:p14="http://schemas.microsoft.com/office/powerpoint/2010/main" val="674272117"/>
       </p:ext>
     </p:extLst>
   </p:cSld>

--- a/Presentation/Announcement.pptx
+++ b/Presentation/Announcement.pptx
@@ -8,8 +8,8 @@
     <p:notesMasterId r:id="rId15"/>
   </p:notesMasterIdLst>
   <p:sldIdLst>
-    <p:sldId id="286" r:id="rId2"/>
-    <p:sldId id="276" r:id="rId3"/>
+    <p:sldId id="276" r:id="rId2"/>
+    <p:sldId id="286" r:id="rId3"/>
     <p:sldId id="288" r:id="rId4"/>
     <p:sldId id="281" r:id="rId5"/>
     <p:sldId id="278" r:id="rId6"/>
@@ -740,13 +740,7 @@
   <p:cSld>
     <p:spTree>
       <p:nvGrpSpPr>
-        <p:cNvPr id="1" name="Shape 320">
-          <a:extLst>
-            <a:ext uri="{FF2B5EF4-FFF2-40B4-BE49-F238E27FC236}">
-              <a16:creationId xmlns:a16="http://schemas.microsoft.com/office/drawing/2014/main" id="{5E82D901-7A14-0382-4365-722182C687A8}"/>
-            </a:ext>
-          </a:extLst>
-        </p:cNvPr>
+        <p:cNvPr id="1" name="Shape 320"/>
         <p:cNvGrpSpPr/>
         <p:nvPr/>
       </p:nvGrpSpPr>
@@ -760,13 +754,7 @@
       </p:grpSpPr>
       <p:sp>
         <p:nvSpPr>
-          <p:cNvPr id="321" name="Google Shape;321;g8f52c9b70a_3_0:notes">
-            <a:extLst>
-              <a:ext uri="{FF2B5EF4-FFF2-40B4-BE49-F238E27FC236}">
-                <a16:creationId xmlns:a16="http://schemas.microsoft.com/office/drawing/2014/main" id="{B8D16220-AF50-7601-71A9-4952749D32CB}"/>
-              </a:ext>
-            </a:extLst>
-          </p:cNvPr>
+          <p:cNvPr id="321" name="Google Shape;321;g8f52c9b70a_3_0:notes"/>
           <p:cNvSpPr>
             <a:spLocks noGrp="1" noRot="1" noChangeAspect="1"/>
           </p:cNvSpPr>
@@ -807,13 +795,7 @@
       </p:sp>
       <p:sp>
         <p:nvSpPr>
-          <p:cNvPr id="322" name="Google Shape;322;g8f52c9b70a_3_0:notes">
-            <a:extLst>
-              <a:ext uri="{FF2B5EF4-FFF2-40B4-BE49-F238E27FC236}">
-                <a16:creationId xmlns:a16="http://schemas.microsoft.com/office/drawing/2014/main" id="{AEA302D2-52D7-97D7-BF6C-781234E92D43}"/>
-              </a:ext>
-            </a:extLst>
-          </p:cNvPr>
+          <p:cNvPr id="322" name="Google Shape;322;g8f52c9b70a_3_0:notes"/>
           <p:cNvSpPr txBox="1">
             <a:spLocks noGrp="1"/>
           </p:cNvSpPr>
@@ -844,11 +826,6 @@
         </p:txBody>
       </p:sp>
     </p:spTree>
-    <p:extLst>
-      <p:ext uri="{BB962C8B-B14F-4D97-AF65-F5344CB8AC3E}">
-        <p14:creationId xmlns:p14="http://schemas.microsoft.com/office/powerpoint/2010/main" val="2483524941"/>
-      </p:ext>
-    </p:extLst>
   </p:cSld>
   <p:clrMapOvr>
     <a:masterClrMapping/>
@@ -1273,7 +1250,13 @@
   <p:cSld>
     <p:spTree>
       <p:nvGrpSpPr>
-        <p:cNvPr id="1" name="Shape 320"/>
+        <p:cNvPr id="1" name="Shape 320">
+          <a:extLst>
+            <a:ext uri="{FF2B5EF4-FFF2-40B4-BE49-F238E27FC236}">
+              <a16:creationId xmlns:a16="http://schemas.microsoft.com/office/drawing/2014/main" id="{5E82D901-7A14-0382-4365-722182C687A8}"/>
+            </a:ext>
+          </a:extLst>
+        </p:cNvPr>
         <p:cNvGrpSpPr/>
         <p:nvPr/>
       </p:nvGrpSpPr>
@@ -1287,7 +1270,13 @@
       </p:grpSpPr>
       <p:sp>
         <p:nvSpPr>
-          <p:cNvPr id="321" name="Google Shape;321;g8f52c9b70a_3_0:notes"/>
+          <p:cNvPr id="321" name="Google Shape;321;g8f52c9b70a_3_0:notes">
+            <a:extLst>
+              <a:ext uri="{FF2B5EF4-FFF2-40B4-BE49-F238E27FC236}">
+                <a16:creationId xmlns:a16="http://schemas.microsoft.com/office/drawing/2014/main" id="{B8D16220-AF50-7601-71A9-4952749D32CB}"/>
+              </a:ext>
+            </a:extLst>
+          </p:cNvPr>
           <p:cNvSpPr>
             <a:spLocks noGrp="1" noRot="1" noChangeAspect="1"/>
           </p:cNvSpPr>
@@ -1328,7 +1317,13 @@
       </p:sp>
       <p:sp>
         <p:nvSpPr>
-          <p:cNvPr id="322" name="Google Shape;322;g8f52c9b70a_3_0:notes"/>
+          <p:cNvPr id="322" name="Google Shape;322;g8f52c9b70a_3_0:notes">
+            <a:extLst>
+              <a:ext uri="{FF2B5EF4-FFF2-40B4-BE49-F238E27FC236}">
+                <a16:creationId xmlns:a16="http://schemas.microsoft.com/office/drawing/2014/main" id="{AEA302D2-52D7-97D7-BF6C-781234E92D43}"/>
+              </a:ext>
+            </a:extLst>
+          </p:cNvPr>
           <p:cNvSpPr txBox="1">
             <a:spLocks noGrp="1"/>
           </p:cNvSpPr>
@@ -1359,6 +1354,11 @@
         </p:txBody>
       </p:sp>
     </p:spTree>
+    <p:extLst>
+      <p:ext uri="{BB962C8B-B14F-4D97-AF65-F5344CB8AC3E}">
+        <p14:creationId xmlns:p14="http://schemas.microsoft.com/office/powerpoint/2010/main" val="2483524941"/>
+      </p:ext>
+    </p:extLst>
   </p:cSld>
   <p:clrMapOvr>
     <a:masterClrMapping/>
@@ -6651,6 +6651,1188 @@
   <p:cSld>
     <p:spTree>
       <p:nvGrpSpPr>
+        <p:cNvPr id="1" name="Shape 323"/>
+        <p:cNvGrpSpPr/>
+        <p:nvPr/>
+      </p:nvGrpSpPr>
+      <p:grpSpPr>
+        <a:xfrm>
+          <a:off x="0" y="0"/>
+          <a:ext cx="0" cy="0"/>
+          <a:chOff x="0" y="0"/>
+          <a:chExt cx="0" cy="0"/>
+        </a:xfrm>
+      </p:grpSpPr>
+      <p:sp>
+        <p:nvSpPr>
+          <p:cNvPr id="324" name="Google Shape;324;p47"/>
+          <p:cNvSpPr txBox="1">
+            <a:spLocks noGrp="1"/>
+          </p:cNvSpPr>
+          <p:nvPr>
+            <p:ph type="title"/>
+          </p:nvPr>
+        </p:nvSpPr>
+        <p:spPr>
+          <a:xfrm>
+            <a:off x="305858" y="273819"/>
+            <a:ext cx="8520600" cy="623700"/>
+          </a:xfrm>
+          <a:prstGeom prst="rect">
+            <a:avLst/>
+          </a:prstGeom>
+        </p:spPr>
+        <p:txBody>
+          <a:bodyPr spcFirstLastPara="1" wrap="square" lIns="91425" tIns="91425" rIns="91425" bIns="91425" anchor="t" anchorCtr="0">
+            <a:noAutofit/>
+          </a:bodyPr>
+          <a:lstStyle/>
+          <a:p>
+            <a:pPr marL="0" lvl="0" indent="0" algn="ctr" rtl="0">
+              <a:spcBef>
+                <a:spcPts val="0"/>
+              </a:spcBef>
+              <a:spcAft>
+                <a:spcPts val="0"/>
+              </a:spcAft>
+              <a:buNone/>
+            </a:pPr>
+            <a:r>
+              <a:rPr lang="en-US" dirty="0"/>
+              <a:t>GCIS – Software Development and Problem Solving</a:t>
+            </a:r>
+            <a:endParaRPr dirty="0"/>
+          </a:p>
+        </p:txBody>
+      </p:sp>
+      <p:sp>
+        <p:nvSpPr>
+          <p:cNvPr id="325" name="Google Shape;325;p47"/>
+          <p:cNvSpPr txBox="1">
+            <a:spLocks noGrp="1"/>
+          </p:cNvSpPr>
+          <p:nvPr>
+            <p:ph type="body" idx="1"/>
+          </p:nvPr>
+        </p:nvSpPr>
+        <p:spPr>
+          <a:xfrm>
+            <a:off x="-5842" y="1721147"/>
+            <a:ext cx="9149842" cy="1226403"/>
+          </a:xfrm>
+          <a:prstGeom prst="rect">
+            <a:avLst/>
+          </a:prstGeom>
+        </p:spPr>
+        <p:txBody>
+          <a:bodyPr spcFirstLastPara="1" wrap="square" lIns="91425" tIns="91425" rIns="91425" bIns="91425" anchor="ctr" anchorCtr="0">
+            <a:noAutofit/>
+          </a:bodyPr>
+          <a:lstStyle/>
+          <a:p>
+            <a:pPr marL="146050" indent="0" algn="ctr">
+              <a:buNone/>
+            </a:pPr>
+            <a:r>
+              <a:rPr lang="en-US" sz="2400" dirty="0"/>
+              <a:t>Take </a:t>
+            </a:r>
+            <a:r>
+              <a:rPr lang="pl-PL" sz="2400" dirty="0"/>
+              <a:t>Quiz </a:t>
+            </a:r>
+            <a:r>
+              <a:rPr lang="en-US" sz="2400" dirty="0"/>
+              <a:t>11</a:t>
+            </a:r>
+            <a:r>
+              <a:rPr lang="pl-PL" sz="2400" dirty="0"/>
+              <a:t>.</a:t>
+            </a:r>
+            <a:r>
+              <a:rPr lang="en-US" sz="2400" dirty="0"/>
+              <a:t>1</a:t>
+            </a:r>
+            <a:r>
+              <a:rPr lang="pl-PL" sz="2400" dirty="0"/>
+              <a:t>: </a:t>
+            </a:r>
+            <a:r>
+              <a:rPr lang="en-US" sz="2400" dirty="0"/>
+              <a:t>Synchronization</a:t>
+            </a:r>
+          </a:p>
+          <a:p>
+            <a:pPr marL="146050" indent="0" algn="ctr">
+              <a:buNone/>
+            </a:pPr>
+            <a:r>
+              <a:rPr lang="en-US" sz="2400" dirty="0"/>
+              <a:t>Password - </a:t>
+            </a:r>
+            <a:r>
+              <a:rPr lang="en-US" sz="2400" dirty="0" err="1"/>
+              <a:t>ImSoInSync</a:t>
+            </a:r>
+            <a:endParaRPr sz="2400" dirty="0"/>
+          </a:p>
+        </p:txBody>
+      </p:sp>
+      <p:sp>
+        <p:nvSpPr>
+          <p:cNvPr id="326" name="Google Shape;326;p47"/>
+          <p:cNvSpPr txBox="1">
+            <a:spLocks noGrp="1"/>
+          </p:cNvSpPr>
+          <p:nvPr>
+            <p:ph type="sldNum" idx="12"/>
+          </p:nvPr>
+        </p:nvSpPr>
+        <p:spPr>
+          <a:xfrm>
+            <a:off x="8472458" y="4663217"/>
+            <a:ext cx="548700" cy="393600"/>
+          </a:xfrm>
+          <a:prstGeom prst="rect">
+            <a:avLst/>
+          </a:prstGeom>
+        </p:spPr>
+        <p:txBody>
+          <a:bodyPr spcFirstLastPara="1" wrap="square" lIns="91425" tIns="91425" rIns="91425" bIns="91425" anchor="ctr" anchorCtr="0">
+            <a:noAutofit/>
+          </a:bodyPr>
+          <a:lstStyle/>
+          <a:p>
+            <a:pPr marL="0" lvl="0" indent="0" algn="r" rtl="0">
+              <a:spcBef>
+                <a:spcPts val="0"/>
+              </a:spcBef>
+              <a:spcAft>
+                <a:spcPts val="0"/>
+              </a:spcAft>
+              <a:buNone/>
+            </a:pPr>
+            <a:fld id="{00000000-1234-1234-1234-123412341234}" type="slidenum">
+              <a:rPr lang="en"/>
+              <a:t>1</a:t>
+            </a:fld>
+            <a:endParaRPr/>
+          </a:p>
+        </p:txBody>
+      </p:sp>
+      <p:sp>
+        <p:nvSpPr>
+          <p:cNvPr id="2" name="TextBox 1">
+            <a:extLst>
+              <a:ext uri="{FF2B5EF4-FFF2-40B4-BE49-F238E27FC236}">
+                <a16:creationId xmlns:a16="http://schemas.microsoft.com/office/drawing/2014/main" id="{DCC33EBB-1C9D-B9A9-88E6-F3466077417F}"/>
+              </a:ext>
+            </a:extLst>
+          </p:cNvPr>
+          <p:cNvSpPr txBox="1"/>
+          <p:nvPr/>
+        </p:nvSpPr>
+        <p:spPr>
+          <a:xfrm>
+            <a:off x="0" y="1277369"/>
+            <a:ext cx="9144000" cy="307777"/>
+          </a:xfrm>
+          <a:prstGeom prst="rect">
+            <a:avLst/>
+          </a:prstGeom>
+          <a:solidFill>
+            <a:srgbClr val="FFC000"/>
+          </a:solidFill>
+        </p:spPr>
+        <p:txBody>
+          <a:bodyPr wrap="square" rtlCol="0">
+            <a:spAutoFit/>
+          </a:bodyPr>
+          <a:lstStyle/>
+          <a:p>
+            <a:r>
+              <a:rPr lang="en-US" dirty="0"/>
+              <a:t>Quiz</a:t>
+            </a:r>
+          </a:p>
+        </p:txBody>
+      </p:sp>
+      <p:sp>
+        <p:nvSpPr>
+          <p:cNvPr id="3" name="TextBox 2">
+            <a:extLst>
+              <a:ext uri="{FF2B5EF4-FFF2-40B4-BE49-F238E27FC236}">
+                <a16:creationId xmlns:a16="http://schemas.microsoft.com/office/drawing/2014/main" id="{64C19922-6A1B-1404-5104-DC43E4C67861}"/>
+              </a:ext>
+            </a:extLst>
+          </p:cNvPr>
+          <p:cNvSpPr txBox="1"/>
+          <p:nvPr/>
+        </p:nvSpPr>
+        <p:spPr>
+          <a:xfrm>
+            <a:off x="-5842" y="3031063"/>
+            <a:ext cx="9144000" cy="307777"/>
+          </a:xfrm>
+          <a:prstGeom prst="rect">
+            <a:avLst/>
+          </a:prstGeom>
+          <a:solidFill>
+            <a:srgbClr val="FFC000"/>
+          </a:solidFill>
+        </p:spPr>
+        <p:txBody>
+          <a:bodyPr wrap="square" rtlCol="0">
+            <a:spAutoFit/>
+          </a:bodyPr>
+          <a:lstStyle/>
+          <a:p>
+            <a:r>
+              <a:rPr lang="en-US" dirty="0"/>
+              <a:t>Next </a:t>
+            </a:r>
+            <a:r>
+              <a:rPr lang="en-US" dirty="0">
+                <a:sym typeface="Wingdings" panose="05000000000000000000" pitchFamily="2" charset="2"/>
+              </a:rPr>
+              <a:t> </a:t>
+            </a:r>
+            <a:endParaRPr lang="en-US" dirty="0"/>
+          </a:p>
+        </p:txBody>
+      </p:sp>
+      <p:sp>
+        <p:nvSpPr>
+          <p:cNvPr id="4" name="Google Shape;325;p47">
+            <a:extLst>
+              <a:ext uri="{FF2B5EF4-FFF2-40B4-BE49-F238E27FC236}">
+                <a16:creationId xmlns:a16="http://schemas.microsoft.com/office/drawing/2014/main" id="{E455EA58-F56D-AF58-E97D-95A77E0AB6CF}"/>
+              </a:ext>
+            </a:extLst>
+          </p:cNvPr>
+          <p:cNvSpPr txBox="1">
+            <a:spLocks/>
+          </p:cNvSpPr>
+          <p:nvPr/>
+        </p:nvSpPr>
+        <p:spPr>
+          <a:xfrm>
+            <a:off x="-5842" y="3422352"/>
+            <a:ext cx="9149842" cy="1721148"/>
+          </a:xfrm>
+          <a:prstGeom prst="rect">
+            <a:avLst/>
+          </a:prstGeom>
+          <a:noFill/>
+          <a:ln>
+            <a:noFill/>
+          </a:ln>
+        </p:spPr>
+        <p:txBody>
+          <a:bodyPr spcFirstLastPara="1" wrap="square" lIns="91425" tIns="91425" rIns="91425" bIns="91425" anchor="ctr" anchorCtr="0">
+            <a:noAutofit/>
+          </a:bodyPr>
+          <a:lstStyle>
+            <a:defPPr marR="0" lvl="0" algn="l" rtl="0">
+              <a:lnSpc>
+                <a:spcPct val="100000"/>
+              </a:lnSpc>
+              <a:spcBef>
+                <a:spcPts val="0"/>
+              </a:spcBef>
+              <a:spcAft>
+                <a:spcPts val="0"/>
+              </a:spcAft>
+            </a:defPPr>
+            <a:lvl1pPr marL="457200" marR="0" lvl="0" indent="-311150" algn="l" rtl="0">
+              <a:lnSpc>
+                <a:spcPct val="115000"/>
+              </a:lnSpc>
+              <a:spcBef>
+                <a:spcPts val="0"/>
+              </a:spcBef>
+              <a:spcAft>
+                <a:spcPts val="0"/>
+              </a:spcAft>
+              <a:buClr>
+                <a:schemeClr val="dk2"/>
+              </a:buClr>
+              <a:buSzPts val="1300"/>
+              <a:buFont typeface="Roboto"/>
+              <a:buChar char="●"/>
+              <a:defRPr sz="1300" b="0" i="0" u="none" strike="noStrike" cap="none">
+                <a:solidFill>
+                  <a:schemeClr val="dk2"/>
+                </a:solidFill>
+                <a:latin typeface="Roboto"/>
+                <a:ea typeface="Roboto"/>
+                <a:cs typeface="Roboto"/>
+                <a:sym typeface="Roboto"/>
+              </a:defRPr>
+            </a:lvl1pPr>
+            <a:lvl2pPr marL="914400" marR="0" lvl="1" indent="-298450" algn="l" rtl="0">
+              <a:lnSpc>
+                <a:spcPct val="115000"/>
+              </a:lnSpc>
+              <a:spcBef>
+                <a:spcPts val="1600"/>
+              </a:spcBef>
+              <a:spcAft>
+                <a:spcPts val="0"/>
+              </a:spcAft>
+              <a:buClr>
+                <a:schemeClr val="dk2"/>
+              </a:buClr>
+              <a:buSzPts val="1100"/>
+              <a:buFont typeface="Roboto"/>
+              <a:buChar char="○"/>
+              <a:defRPr sz="1100" b="0" i="0" u="none" strike="noStrike" cap="none">
+                <a:solidFill>
+                  <a:schemeClr val="dk2"/>
+                </a:solidFill>
+                <a:latin typeface="Roboto"/>
+                <a:ea typeface="Roboto"/>
+                <a:cs typeface="Roboto"/>
+                <a:sym typeface="Roboto"/>
+              </a:defRPr>
+            </a:lvl2pPr>
+            <a:lvl3pPr marL="1371600" marR="0" lvl="2" indent="-298450" algn="l" rtl="0">
+              <a:lnSpc>
+                <a:spcPct val="115000"/>
+              </a:lnSpc>
+              <a:spcBef>
+                <a:spcPts val="1600"/>
+              </a:spcBef>
+              <a:spcAft>
+                <a:spcPts val="0"/>
+              </a:spcAft>
+              <a:buClr>
+                <a:schemeClr val="dk2"/>
+              </a:buClr>
+              <a:buSzPts val="1100"/>
+              <a:buFont typeface="Roboto"/>
+              <a:buChar char="■"/>
+              <a:defRPr sz="1100" b="0" i="0" u="none" strike="noStrike" cap="none">
+                <a:solidFill>
+                  <a:schemeClr val="dk2"/>
+                </a:solidFill>
+                <a:latin typeface="Roboto"/>
+                <a:ea typeface="Roboto"/>
+                <a:cs typeface="Roboto"/>
+                <a:sym typeface="Roboto"/>
+              </a:defRPr>
+            </a:lvl3pPr>
+            <a:lvl4pPr marL="1828800" marR="0" lvl="3" indent="-298450" algn="l" rtl="0">
+              <a:lnSpc>
+                <a:spcPct val="115000"/>
+              </a:lnSpc>
+              <a:spcBef>
+                <a:spcPts val="1600"/>
+              </a:spcBef>
+              <a:spcAft>
+                <a:spcPts val="0"/>
+              </a:spcAft>
+              <a:buClr>
+                <a:schemeClr val="dk2"/>
+              </a:buClr>
+              <a:buSzPts val="1100"/>
+              <a:buFont typeface="Roboto"/>
+              <a:buChar char="●"/>
+              <a:defRPr sz="1100" b="0" i="0" u="none" strike="noStrike" cap="none">
+                <a:solidFill>
+                  <a:schemeClr val="dk2"/>
+                </a:solidFill>
+                <a:latin typeface="Roboto"/>
+                <a:ea typeface="Roboto"/>
+                <a:cs typeface="Roboto"/>
+                <a:sym typeface="Roboto"/>
+              </a:defRPr>
+            </a:lvl4pPr>
+            <a:lvl5pPr marL="2286000" marR="0" lvl="4" indent="-298450" algn="l" rtl="0">
+              <a:lnSpc>
+                <a:spcPct val="115000"/>
+              </a:lnSpc>
+              <a:spcBef>
+                <a:spcPts val="1600"/>
+              </a:spcBef>
+              <a:spcAft>
+                <a:spcPts val="0"/>
+              </a:spcAft>
+              <a:buClr>
+                <a:schemeClr val="dk2"/>
+              </a:buClr>
+              <a:buSzPts val="1100"/>
+              <a:buFont typeface="Roboto"/>
+              <a:buChar char="○"/>
+              <a:defRPr sz="1100" b="0" i="0" u="none" strike="noStrike" cap="none">
+                <a:solidFill>
+                  <a:schemeClr val="dk2"/>
+                </a:solidFill>
+                <a:latin typeface="Roboto"/>
+                <a:ea typeface="Roboto"/>
+                <a:cs typeface="Roboto"/>
+                <a:sym typeface="Roboto"/>
+              </a:defRPr>
+            </a:lvl5pPr>
+            <a:lvl6pPr marL="2743200" marR="0" lvl="5" indent="-298450" algn="l" rtl="0">
+              <a:lnSpc>
+                <a:spcPct val="115000"/>
+              </a:lnSpc>
+              <a:spcBef>
+                <a:spcPts val="1600"/>
+              </a:spcBef>
+              <a:spcAft>
+                <a:spcPts val="0"/>
+              </a:spcAft>
+              <a:buClr>
+                <a:schemeClr val="dk2"/>
+              </a:buClr>
+              <a:buSzPts val="1100"/>
+              <a:buFont typeface="Roboto"/>
+              <a:buChar char="■"/>
+              <a:defRPr sz="1100" b="0" i="0" u="none" strike="noStrike" cap="none">
+                <a:solidFill>
+                  <a:schemeClr val="dk2"/>
+                </a:solidFill>
+                <a:latin typeface="Roboto"/>
+                <a:ea typeface="Roboto"/>
+                <a:cs typeface="Roboto"/>
+                <a:sym typeface="Roboto"/>
+              </a:defRPr>
+            </a:lvl6pPr>
+            <a:lvl7pPr marL="3200400" marR="0" lvl="6" indent="-298450" algn="l" rtl="0">
+              <a:lnSpc>
+                <a:spcPct val="115000"/>
+              </a:lnSpc>
+              <a:spcBef>
+                <a:spcPts val="1600"/>
+              </a:spcBef>
+              <a:spcAft>
+                <a:spcPts val="0"/>
+              </a:spcAft>
+              <a:buClr>
+                <a:schemeClr val="dk2"/>
+              </a:buClr>
+              <a:buSzPts val="1100"/>
+              <a:buFont typeface="Roboto"/>
+              <a:buChar char="●"/>
+              <a:defRPr sz="1100" b="0" i="0" u="none" strike="noStrike" cap="none">
+                <a:solidFill>
+                  <a:schemeClr val="dk2"/>
+                </a:solidFill>
+                <a:latin typeface="Roboto"/>
+                <a:ea typeface="Roboto"/>
+                <a:cs typeface="Roboto"/>
+                <a:sym typeface="Roboto"/>
+              </a:defRPr>
+            </a:lvl7pPr>
+            <a:lvl8pPr marL="3657600" marR="0" lvl="7" indent="-298450" algn="l" rtl="0">
+              <a:lnSpc>
+                <a:spcPct val="115000"/>
+              </a:lnSpc>
+              <a:spcBef>
+                <a:spcPts val="1600"/>
+              </a:spcBef>
+              <a:spcAft>
+                <a:spcPts val="0"/>
+              </a:spcAft>
+              <a:buClr>
+                <a:schemeClr val="dk2"/>
+              </a:buClr>
+              <a:buSzPts val="1100"/>
+              <a:buFont typeface="Roboto"/>
+              <a:buChar char="○"/>
+              <a:defRPr sz="1100" b="0" i="0" u="none" strike="noStrike" cap="none">
+                <a:solidFill>
+                  <a:schemeClr val="dk2"/>
+                </a:solidFill>
+                <a:latin typeface="Roboto"/>
+                <a:ea typeface="Roboto"/>
+                <a:cs typeface="Roboto"/>
+                <a:sym typeface="Roboto"/>
+              </a:defRPr>
+            </a:lvl8pPr>
+            <a:lvl9pPr marL="4114800" marR="0" lvl="8" indent="-298450" algn="l" rtl="0">
+              <a:lnSpc>
+                <a:spcPct val="115000"/>
+              </a:lnSpc>
+              <a:spcBef>
+                <a:spcPts val="1600"/>
+              </a:spcBef>
+              <a:spcAft>
+                <a:spcPts val="1600"/>
+              </a:spcAft>
+              <a:buClr>
+                <a:schemeClr val="dk2"/>
+              </a:buClr>
+              <a:buSzPts val="1100"/>
+              <a:buFont typeface="Roboto"/>
+              <a:buChar char="■"/>
+              <a:defRPr sz="1100" b="0" i="0" u="none" strike="noStrike" cap="none">
+                <a:solidFill>
+                  <a:schemeClr val="dk2"/>
+                </a:solidFill>
+                <a:latin typeface="Roboto"/>
+                <a:ea typeface="Roboto"/>
+                <a:cs typeface="Roboto"/>
+                <a:sym typeface="Roboto"/>
+              </a:defRPr>
+            </a:lvl9pPr>
+          </a:lstStyle>
+          <a:p>
+            <a:pPr marL="0" indent="0">
+              <a:spcAft>
+                <a:spcPts val="1600"/>
+              </a:spcAft>
+              <a:buNone/>
+            </a:pPr>
+            <a:r>
+              <a:rPr lang="en-US" sz="2800" dirty="0"/>
+              <a:t>After completing the Quiz </a:t>
+            </a:r>
+          </a:p>
+          <a:p>
+            <a:pPr marL="342900" indent="-342900">
+              <a:spcAft>
+                <a:spcPts val="1600"/>
+              </a:spcAft>
+            </a:pPr>
+            <a:r>
+              <a:rPr lang="en-US" sz="2400" dirty="0"/>
+              <a:t>Clone/</a:t>
+            </a:r>
+            <a:r>
+              <a:rPr lang="en-US" sz="2400"/>
+              <a:t>Pull Unit11 </a:t>
+            </a:r>
+            <a:r>
+              <a:rPr lang="en-US" sz="2400" dirty="0"/>
+              <a:t>– git hub classroom repo for class activities</a:t>
+            </a:r>
+          </a:p>
+        </p:txBody>
+      </p:sp>
+    </p:spTree>
+  </p:cSld>
+  <p:clrMapOvr>
+    <a:masterClrMapping/>
+  </p:clrMapOvr>
+</p:sld>
+</file>
+
+<file path=ppt/slides/slide10.xml><?xml version="1.0" encoding="utf-8"?>
+<p:sld xmlns:a="http://schemas.openxmlformats.org/drawingml/2006/main" xmlns:r="http://schemas.openxmlformats.org/officeDocument/2006/relationships" xmlns:p="http://schemas.openxmlformats.org/presentationml/2006/main" show="0">
+  <p:cSld>
+    <p:spTree>
+      <p:nvGrpSpPr>
+        <p:cNvPr id="1" name="Shape 323"/>
+        <p:cNvGrpSpPr/>
+        <p:nvPr/>
+      </p:nvGrpSpPr>
+      <p:grpSpPr>
+        <a:xfrm>
+          <a:off x="0" y="0"/>
+          <a:ext cx="0" cy="0"/>
+          <a:chOff x="0" y="0"/>
+          <a:chExt cx="0" cy="0"/>
+        </a:xfrm>
+      </p:grpSpPr>
+      <p:sp>
+        <p:nvSpPr>
+          <p:cNvPr id="324" name="Google Shape;324;p47"/>
+          <p:cNvSpPr txBox="1">
+            <a:spLocks noGrp="1"/>
+          </p:cNvSpPr>
+          <p:nvPr>
+            <p:ph type="title"/>
+          </p:nvPr>
+        </p:nvSpPr>
+        <p:spPr>
+          <a:xfrm>
+            <a:off x="226208" y="1"/>
+            <a:ext cx="8520600" cy="464980"/>
+          </a:xfrm>
+          <a:prstGeom prst="rect">
+            <a:avLst/>
+          </a:prstGeom>
+        </p:spPr>
+        <p:txBody>
+          <a:bodyPr spcFirstLastPara="1" wrap="square" lIns="91425" tIns="91425" rIns="91425" bIns="91425" anchor="t" anchorCtr="0">
+            <a:noAutofit/>
+          </a:bodyPr>
+          <a:lstStyle/>
+          <a:p>
+            <a:pPr marL="0" lvl="0" indent="0" algn="ctr" rtl="0">
+              <a:spcBef>
+                <a:spcPts val="0"/>
+              </a:spcBef>
+              <a:spcAft>
+                <a:spcPts val="0"/>
+              </a:spcAft>
+              <a:buNone/>
+            </a:pPr>
+            <a:r>
+              <a:rPr lang="en-US" dirty="0"/>
+              <a:t>Use </a:t>
+            </a:r>
+            <a:r>
+              <a:rPr lang="en-US" sz="2400" dirty="0"/>
+              <a:t>Assigned</a:t>
+            </a:r>
+            <a:r>
+              <a:rPr lang="en-US" dirty="0"/>
+              <a:t> Seat</a:t>
+            </a:r>
+            <a:endParaRPr dirty="0"/>
+          </a:p>
+        </p:txBody>
+      </p:sp>
+      <p:sp>
+        <p:nvSpPr>
+          <p:cNvPr id="326" name="Google Shape;326;p47"/>
+          <p:cNvSpPr txBox="1">
+            <a:spLocks noGrp="1"/>
+          </p:cNvSpPr>
+          <p:nvPr>
+            <p:ph type="sldNum" idx="12"/>
+          </p:nvPr>
+        </p:nvSpPr>
+        <p:spPr>
+          <a:xfrm>
+            <a:off x="8472458" y="4663217"/>
+            <a:ext cx="548700" cy="393600"/>
+          </a:xfrm>
+          <a:prstGeom prst="rect">
+            <a:avLst/>
+          </a:prstGeom>
+        </p:spPr>
+        <p:txBody>
+          <a:bodyPr spcFirstLastPara="1" wrap="square" lIns="91425" tIns="91425" rIns="91425" bIns="91425" anchor="ctr" anchorCtr="0">
+            <a:noAutofit/>
+          </a:bodyPr>
+          <a:lstStyle/>
+          <a:p>
+            <a:pPr marL="0" lvl="0" indent="0" algn="r" rtl="0">
+              <a:spcBef>
+                <a:spcPts val="0"/>
+              </a:spcBef>
+              <a:spcAft>
+                <a:spcPts val="0"/>
+              </a:spcAft>
+              <a:buNone/>
+            </a:pPr>
+            <a:fld id="{00000000-1234-1234-1234-123412341234}" type="slidenum">
+              <a:rPr lang="en"/>
+              <a:t>10</a:t>
+            </a:fld>
+            <a:endParaRPr/>
+          </a:p>
+        </p:txBody>
+      </p:sp>
+      <p:pic>
+        <p:nvPicPr>
+          <p:cNvPr id="3" name="Picture 2">
+            <a:extLst>
+              <a:ext uri="{FF2B5EF4-FFF2-40B4-BE49-F238E27FC236}">
+                <a16:creationId xmlns:a16="http://schemas.microsoft.com/office/drawing/2014/main" id="{565A4964-E8A9-A46D-F4BE-E7D41C14EF1B}"/>
+              </a:ext>
+            </a:extLst>
+          </p:cNvPr>
+          <p:cNvPicPr>
+            <a:picLocks noChangeAspect="1"/>
+          </p:cNvPicPr>
+          <p:nvPr/>
+        </p:nvPicPr>
+        <p:blipFill>
+          <a:blip r:embed="rId3"/>
+          <a:stretch>
+            <a:fillRect/>
+          </a:stretch>
+        </p:blipFill>
+        <p:spPr>
+          <a:xfrm>
+            <a:off x="0" y="559220"/>
+            <a:ext cx="9144000" cy="4471763"/>
+          </a:xfrm>
+          <a:prstGeom prst="rect">
+            <a:avLst/>
+          </a:prstGeom>
+        </p:spPr>
+      </p:pic>
+    </p:spTree>
+    <p:extLst>
+      <p:ext uri="{BB962C8B-B14F-4D97-AF65-F5344CB8AC3E}">
+        <p14:creationId xmlns:p14="http://schemas.microsoft.com/office/powerpoint/2010/main" val="2495509868"/>
+      </p:ext>
+    </p:extLst>
+  </p:cSld>
+  <p:clrMapOvr>
+    <a:masterClrMapping/>
+  </p:clrMapOvr>
+</p:sld>
+</file>
+
+<file path=ppt/slides/slide11.xml><?xml version="1.0" encoding="utf-8"?>
+<p:sld xmlns:a="http://schemas.openxmlformats.org/drawingml/2006/main" xmlns:r="http://schemas.openxmlformats.org/officeDocument/2006/relationships" xmlns:p="http://schemas.openxmlformats.org/presentationml/2006/main" show="0">
+  <p:cSld>
+    <p:spTree>
+      <p:nvGrpSpPr>
+        <p:cNvPr id="1" name="Shape 323"/>
+        <p:cNvGrpSpPr/>
+        <p:nvPr/>
+      </p:nvGrpSpPr>
+      <p:grpSpPr>
+        <a:xfrm>
+          <a:off x="0" y="0"/>
+          <a:ext cx="0" cy="0"/>
+          <a:chOff x="0" y="0"/>
+          <a:chExt cx="0" cy="0"/>
+        </a:xfrm>
+      </p:grpSpPr>
+      <p:sp>
+        <p:nvSpPr>
+          <p:cNvPr id="324" name="Google Shape;324;p47"/>
+          <p:cNvSpPr txBox="1">
+            <a:spLocks noGrp="1"/>
+          </p:cNvSpPr>
+          <p:nvPr>
+            <p:ph type="title"/>
+          </p:nvPr>
+        </p:nvSpPr>
+        <p:spPr>
+          <a:xfrm>
+            <a:off x="226208" y="1"/>
+            <a:ext cx="8520600" cy="464980"/>
+          </a:xfrm>
+          <a:prstGeom prst="rect">
+            <a:avLst/>
+          </a:prstGeom>
+        </p:spPr>
+        <p:txBody>
+          <a:bodyPr spcFirstLastPara="1" wrap="square" lIns="91425" tIns="91425" rIns="91425" bIns="91425" anchor="t" anchorCtr="0">
+            <a:noAutofit/>
+          </a:bodyPr>
+          <a:lstStyle/>
+          <a:p>
+            <a:pPr marL="0" lvl="0" indent="0" algn="ctr" rtl="0">
+              <a:spcBef>
+                <a:spcPts val="0"/>
+              </a:spcBef>
+              <a:spcAft>
+                <a:spcPts val="0"/>
+              </a:spcAft>
+              <a:buNone/>
+            </a:pPr>
+            <a:r>
+              <a:rPr lang="en-US" dirty="0"/>
+              <a:t>Use </a:t>
+            </a:r>
+            <a:r>
+              <a:rPr lang="en-US" sz="2400" dirty="0"/>
+              <a:t>Assigned</a:t>
+            </a:r>
+            <a:r>
+              <a:rPr lang="en-US" dirty="0"/>
+              <a:t> Seat</a:t>
+            </a:r>
+            <a:endParaRPr dirty="0"/>
+          </a:p>
+        </p:txBody>
+      </p:sp>
+      <p:sp>
+        <p:nvSpPr>
+          <p:cNvPr id="326" name="Google Shape;326;p47"/>
+          <p:cNvSpPr txBox="1">
+            <a:spLocks noGrp="1"/>
+          </p:cNvSpPr>
+          <p:nvPr>
+            <p:ph type="sldNum" idx="12"/>
+          </p:nvPr>
+        </p:nvSpPr>
+        <p:spPr>
+          <a:xfrm>
+            <a:off x="8472458" y="4663217"/>
+            <a:ext cx="548700" cy="393600"/>
+          </a:xfrm>
+          <a:prstGeom prst="rect">
+            <a:avLst/>
+          </a:prstGeom>
+        </p:spPr>
+        <p:txBody>
+          <a:bodyPr spcFirstLastPara="1" wrap="square" lIns="91425" tIns="91425" rIns="91425" bIns="91425" anchor="ctr" anchorCtr="0">
+            <a:noAutofit/>
+          </a:bodyPr>
+          <a:lstStyle/>
+          <a:p>
+            <a:pPr marL="0" lvl="0" indent="0" algn="r" rtl="0">
+              <a:spcBef>
+                <a:spcPts val="0"/>
+              </a:spcBef>
+              <a:spcAft>
+                <a:spcPts val="0"/>
+              </a:spcAft>
+              <a:buNone/>
+            </a:pPr>
+            <a:fld id="{00000000-1234-1234-1234-123412341234}" type="slidenum">
+              <a:rPr lang="en"/>
+              <a:t>11</a:t>
+            </a:fld>
+            <a:endParaRPr/>
+          </a:p>
+        </p:txBody>
+      </p:sp>
+      <p:pic>
+        <p:nvPicPr>
+          <p:cNvPr id="6" name="Picture 5">
+            <a:extLst>
+              <a:ext uri="{FF2B5EF4-FFF2-40B4-BE49-F238E27FC236}">
+                <a16:creationId xmlns:a16="http://schemas.microsoft.com/office/drawing/2014/main" id="{DED32793-7C09-E3A3-94E5-B5D46727A1D0}"/>
+              </a:ext>
+            </a:extLst>
+          </p:cNvPr>
+          <p:cNvPicPr>
+            <a:picLocks noChangeAspect="1"/>
+          </p:cNvPicPr>
+          <p:nvPr/>
+        </p:nvPicPr>
+        <p:blipFill>
+          <a:blip r:embed="rId3"/>
+          <a:stretch>
+            <a:fillRect/>
+          </a:stretch>
+        </p:blipFill>
+        <p:spPr>
+          <a:xfrm>
+            <a:off x="-1" y="551663"/>
+            <a:ext cx="9144001" cy="4591837"/>
+          </a:xfrm>
+          <a:prstGeom prst="rect">
+            <a:avLst/>
+          </a:prstGeom>
+        </p:spPr>
+      </p:pic>
+    </p:spTree>
+    <p:extLst>
+      <p:ext uri="{BB962C8B-B14F-4D97-AF65-F5344CB8AC3E}">
+        <p14:creationId xmlns:p14="http://schemas.microsoft.com/office/powerpoint/2010/main" val="4226348449"/>
+      </p:ext>
+    </p:extLst>
+  </p:cSld>
+  <p:clrMapOvr>
+    <a:masterClrMapping/>
+  </p:clrMapOvr>
+</p:sld>
+</file>
+
+<file path=ppt/slides/slide12.xml><?xml version="1.0" encoding="utf-8"?>
+<p:sld xmlns:a="http://schemas.openxmlformats.org/drawingml/2006/main" xmlns:r="http://schemas.openxmlformats.org/officeDocument/2006/relationships" xmlns:p="http://schemas.openxmlformats.org/presentationml/2006/main" show="0">
+  <p:cSld>
+    <p:spTree>
+      <p:nvGrpSpPr>
+        <p:cNvPr id="1" name="Shape 323"/>
+        <p:cNvGrpSpPr/>
+        <p:nvPr/>
+      </p:nvGrpSpPr>
+      <p:grpSpPr>
+        <a:xfrm>
+          <a:off x="0" y="0"/>
+          <a:ext cx="0" cy="0"/>
+          <a:chOff x="0" y="0"/>
+          <a:chExt cx="0" cy="0"/>
+        </a:xfrm>
+      </p:grpSpPr>
+      <p:sp>
+        <p:nvSpPr>
+          <p:cNvPr id="324" name="Google Shape;324;p47"/>
+          <p:cNvSpPr txBox="1">
+            <a:spLocks noGrp="1"/>
+          </p:cNvSpPr>
+          <p:nvPr>
+            <p:ph type="title"/>
+          </p:nvPr>
+        </p:nvSpPr>
+        <p:spPr>
+          <a:xfrm>
+            <a:off x="226208" y="1"/>
+            <a:ext cx="8520600" cy="464980"/>
+          </a:xfrm>
+          <a:prstGeom prst="rect">
+            <a:avLst/>
+          </a:prstGeom>
+        </p:spPr>
+        <p:txBody>
+          <a:bodyPr spcFirstLastPara="1" wrap="square" lIns="91425" tIns="91425" rIns="91425" bIns="91425" anchor="t" anchorCtr="0">
+            <a:noAutofit/>
+          </a:bodyPr>
+          <a:lstStyle/>
+          <a:p>
+            <a:pPr marL="0" lvl="0" indent="0" algn="ctr" rtl="0">
+              <a:spcBef>
+                <a:spcPts val="0"/>
+              </a:spcBef>
+              <a:spcAft>
+                <a:spcPts val="0"/>
+              </a:spcAft>
+              <a:buNone/>
+            </a:pPr>
+            <a:r>
+              <a:rPr lang="en-US" dirty="0"/>
+              <a:t>Use </a:t>
+            </a:r>
+            <a:r>
+              <a:rPr lang="en-US" sz="2400" dirty="0"/>
+              <a:t>Assigned</a:t>
+            </a:r>
+            <a:r>
+              <a:rPr lang="en-US" dirty="0"/>
+              <a:t> Seat</a:t>
+            </a:r>
+            <a:endParaRPr dirty="0"/>
+          </a:p>
+        </p:txBody>
+      </p:sp>
+      <p:sp>
+        <p:nvSpPr>
+          <p:cNvPr id="326" name="Google Shape;326;p47"/>
+          <p:cNvSpPr txBox="1">
+            <a:spLocks noGrp="1"/>
+          </p:cNvSpPr>
+          <p:nvPr>
+            <p:ph type="sldNum" idx="12"/>
+          </p:nvPr>
+        </p:nvSpPr>
+        <p:spPr>
+          <a:xfrm>
+            <a:off x="8472458" y="4663217"/>
+            <a:ext cx="548700" cy="393600"/>
+          </a:xfrm>
+          <a:prstGeom prst="rect">
+            <a:avLst/>
+          </a:prstGeom>
+        </p:spPr>
+        <p:txBody>
+          <a:bodyPr spcFirstLastPara="1" wrap="square" lIns="91425" tIns="91425" rIns="91425" bIns="91425" anchor="ctr" anchorCtr="0">
+            <a:noAutofit/>
+          </a:bodyPr>
+          <a:lstStyle/>
+          <a:p>
+            <a:pPr marL="0" lvl="0" indent="0" algn="r" rtl="0">
+              <a:spcBef>
+                <a:spcPts val="0"/>
+              </a:spcBef>
+              <a:spcAft>
+                <a:spcPts val="0"/>
+              </a:spcAft>
+              <a:buNone/>
+            </a:pPr>
+            <a:fld id="{00000000-1234-1234-1234-123412341234}" type="slidenum">
+              <a:rPr lang="en"/>
+              <a:t>12</a:t>
+            </a:fld>
+            <a:endParaRPr/>
+          </a:p>
+        </p:txBody>
+      </p:sp>
+      <p:pic>
+        <p:nvPicPr>
+          <p:cNvPr id="3" name="Picture 2">
+            <a:extLst>
+              <a:ext uri="{FF2B5EF4-FFF2-40B4-BE49-F238E27FC236}">
+                <a16:creationId xmlns:a16="http://schemas.microsoft.com/office/drawing/2014/main" id="{92DE4AAC-70FE-A114-5258-F5B22EDDED45}"/>
+              </a:ext>
+            </a:extLst>
+          </p:cNvPr>
+          <p:cNvPicPr>
+            <a:picLocks noChangeAspect="1"/>
+          </p:cNvPicPr>
+          <p:nvPr/>
+        </p:nvPicPr>
+        <p:blipFill>
+          <a:blip r:embed="rId3"/>
+          <a:stretch>
+            <a:fillRect/>
+          </a:stretch>
+        </p:blipFill>
+        <p:spPr>
+          <a:xfrm>
+            <a:off x="0" y="716280"/>
+            <a:ext cx="9144000" cy="4427218"/>
+          </a:xfrm>
+          <a:prstGeom prst="rect">
+            <a:avLst/>
+          </a:prstGeom>
+        </p:spPr>
+      </p:pic>
+    </p:spTree>
+    <p:extLst>
+      <p:ext uri="{BB962C8B-B14F-4D97-AF65-F5344CB8AC3E}">
+        <p14:creationId xmlns:p14="http://schemas.microsoft.com/office/powerpoint/2010/main" val="1976403023"/>
+      </p:ext>
+    </p:extLst>
+  </p:cSld>
+  <p:clrMapOvr>
+    <a:masterClrMapping/>
+  </p:clrMapOvr>
+</p:sld>
+</file>
+
+<file path=ppt/slides/slide13.xml><?xml version="1.0" encoding="utf-8"?>
+<p:sld xmlns:a="http://schemas.openxmlformats.org/drawingml/2006/main" xmlns:r="http://schemas.openxmlformats.org/officeDocument/2006/relationships" xmlns:p="http://schemas.openxmlformats.org/presentationml/2006/main" show="0">
+  <p:cSld>
+    <p:spTree>
+      <p:nvGrpSpPr>
+        <p:cNvPr id="1" name="Shape 323"/>
+        <p:cNvGrpSpPr/>
+        <p:nvPr/>
+      </p:nvGrpSpPr>
+      <p:grpSpPr>
+        <a:xfrm>
+          <a:off x="0" y="0"/>
+          <a:ext cx="0" cy="0"/>
+          <a:chOff x="0" y="0"/>
+          <a:chExt cx="0" cy="0"/>
+        </a:xfrm>
+      </p:grpSpPr>
+      <p:sp>
+        <p:nvSpPr>
+          <p:cNvPr id="324" name="Google Shape;324;p47"/>
+          <p:cNvSpPr txBox="1">
+            <a:spLocks noGrp="1"/>
+          </p:cNvSpPr>
+          <p:nvPr>
+            <p:ph type="title"/>
+          </p:nvPr>
+        </p:nvSpPr>
+        <p:spPr>
+          <a:xfrm>
+            <a:off x="226208" y="1"/>
+            <a:ext cx="8520600" cy="464980"/>
+          </a:xfrm>
+          <a:prstGeom prst="rect">
+            <a:avLst/>
+          </a:prstGeom>
+        </p:spPr>
+        <p:txBody>
+          <a:bodyPr spcFirstLastPara="1" wrap="square" lIns="91425" tIns="91425" rIns="91425" bIns="91425" anchor="t" anchorCtr="0">
+            <a:noAutofit/>
+          </a:bodyPr>
+          <a:lstStyle/>
+          <a:p>
+            <a:pPr marL="0" lvl="0" indent="0" algn="ctr" rtl="0">
+              <a:spcBef>
+                <a:spcPts val="0"/>
+              </a:spcBef>
+              <a:spcAft>
+                <a:spcPts val="0"/>
+              </a:spcAft>
+              <a:buNone/>
+            </a:pPr>
+            <a:r>
+              <a:rPr lang="en-US" dirty="0"/>
+              <a:t>Use </a:t>
+            </a:r>
+            <a:r>
+              <a:rPr lang="en-US" sz="2400" dirty="0"/>
+              <a:t>Assigned</a:t>
+            </a:r>
+            <a:r>
+              <a:rPr lang="en-US" dirty="0"/>
+              <a:t> Seat</a:t>
+            </a:r>
+            <a:endParaRPr dirty="0"/>
+          </a:p>
+        </p:txBody>
+      </p:sp>
+      <p:sp>
+        <p:nvSpPr>
+          <p:cNvPr id="326" name="Google Shape;326;p47"/>
+          <p:cNvSpPr txBox="1">
+            <a:spLocks noGrp="1"/>
+          </p:cNvSpPr>
+          <p:nvPr>
+            <p:ph type="sldNum" idx="12"/>
+          </p:nvPr>
+        </p:nvSpPr>
+        <p:spPr>
+          <a:xfrm>
+            <a:off x="8472458" y="4663217"/>
+            <a:ext cx="548700" cy="393600"/>
+          </a:xfrm>
+          <a:prstGeom prst="rect">
+            <a:avLst/>
+          </a:prstGeom>
+        </p:spPr>
+        <p:txBody>
+          <a:bodyPr spcFirstLastPara="1" wrap="square" lIns="91425" tIns="91425" rIns="91425" bIns="91425" anchor="ctr" anchorCtr="0">
+            <a:noAutofit/>
+          </a:bodyPr>
+          <a:lstStyle/>
+          <a:p>
+            <a:pPr marL="0" lvl="0" indent="0" algn="r" rtl="0">
+              <a:spcBef>
+                <a:spcPts val="0"/>
+              </a:spcBef>
+              <a:spcAft>
+                <a:spcPts val="0"/>
+              </a:spcAft>
+              <a:buNone/>
+            </a:pPr>
+            <a:fld id="{00000000-1234-1234-1234-123412341234}" type="slidenum">
+              <a:rPr lang="en"/>
+              <a:t>13</a:t>
+            </a:fld>
+            <a:endParaRPr/>
+          </a:p>
+        </p:txBody>
+      </p:sp>
+      <p:pic>
+        <p:nvPicPr>
+          <p:cNvPr id="4" name="Picture 3">
+            <a:extLst>
+              <a:ext uri="{FF2B5EF4-FFF2-40B4-BE49-F238E27FC236}">
+                <a16:creationId xmlns:a16="http://schemas.microsoft.com/office/drawing/2014/main" id="{DCD752B9-EFAE-AFC1-7D39-6763B89DE8D3}"/>
+              </a:ext>
+            </a:extLst>
+          </p:cNvPr>
+          <p:cNvPicPr>
+            <a:picLocks noChangeAspect="1"/>
+          </p:cNvPicPr>
+          <p:nvPr/>
+        </p:nvPicPr>
+        <p:blipFill>
+          <a:blip r:embed="rId3"/>
+          <a:stretch>
+            <a:fillRect/>
+          </a:stretch>
+        </p:blipFill>
+        <p:spPr>
+          <a:xfrm>
+            <a:off x="0" y="652130"/>
+            <a:ext cx="9144000" cy="4491369"/>
+          </a:xfrm>
+          <a:prstGeom prst="rect">
+            <a:avLst/>
+          </a:prstGeom>
+        </p:spPr>
+      </p:pic>
+    </p:spTree>
+    <p:extLst>
+      <p:ext uri="{BB962C8B-B14F-4D97-AF65-F5344CB8AC3E}">
+        <p14:creationId xmlns:p14="http://schemas.microsoft.com/office/powerpoint/2010/main" val="3365057756"/>
+      </p:ext>
+    </p:extLst>
+  </p:cSld>
+  <p:clrMapOvr>
+    <a:masterClrMapping/>
+  </p:clrMapOvr>
+</p:sld>
+</file>
+
+<file path=ppt/slides/slide2.xml><?xml version="1.0" encoding="utf-8"?>
+<p:sld xmlns:a="http://schemas.openxmlformats.org/drawingml/2006/main" xmlns:r="http://schemas.openxmlformats.org/officeDocument/2006/relationships" xmlns:p="http://schemas.openxmlformats.org/presentationml/2006/main" show="0">
+  <p:cSld>
+    <p:spTree>
+      <p:nvGrpSpPr>
         <p:cNvPr id="1" name="Shape 323">
           <a:extLst>
             <a:ext uri="{FF2B5EF4-FFF2-40B4-BE49-F238E27FC236}">
@@ -6830,7 +8012,7 @@
             </a:pPr>
             <a:fld id="{00000000-1234-1234-1234-123412341234}" type="slidenum">
               <a:rPr lang="en"/>
-              <a:t>1</a:t>
+              <a:t>2</a:t>
             </a:fld>
             <a:endParaRPr/>
           </a:p>
@@ -7569,1180 +8751,6 @@
         <p14:creationId xmlns:p14="http://schemas.microsoft.com/office/powerpoint/2010/main" val="674272117"/>
       </p:ext>
     </p:extLst>
-  </p:cSld>
-  <p:clrMapOvr>
-    <a:masterClrMapping/>
-  </p:clrMapOvr>
-</p:sld>
-</file>
-
-<file path=ppt/slides/slide10.xml><?xml version="1.0" encoding="utf-8"?>
-<p:sld xmlns:a="http://schemas.openxmlformats.org/drawingml/2006/main" xmlns:r="http://schemas.openxmlformats.org/officeDocument/2006/relationships" xmlns:p="http://schemas.openxmlformats.org/presentationml/2006/main" show="0">
-  <p:cSld>
-    <p:spTree>
-      <p:nvGrpSpPr>
-        <p:cNvPr id="1" name="Shape 323"/>
-        <p:cNvGrpSpPr/>
-        <p:nvPr/>
-      </p:nvGrpSpPr>
-      <p:grpSpPr>
-        <a:xfrm>
-          <a:off x="0" y="0"/>
-          <a:ext cx="0" cy="0"/>
-          <a:chOff x="0" y="0"/>
-          <a:chExt cx="0" cy="0"/>
-        </a:xfrm>
-      </p:grpSpPr>
-      <p:sp>
-        <p:nvSpPr>
-          <p:cNvPr id="324" name="Google Shape;324;p47"/>
-          <p:cNvSpPr txBox="1">
-            <a:spLocks noGrp="1"/>
-          </p:cNvSpPr>
-          <p:nvPr>
-            <p:ph type="title"/>
-          </p:nvPr>
-        </p:nvSpPr>
-        <p:spPr>
-          <a:xfrm>
-            <a:off x="226208" y="1"/>
-            <a:ext cx="8520600" cy="464980"/>
-          </a:xfrm>
-          <a:prstGeom prst="rect">
-            <a:avLst/>
-          </a:prstGeom>
-        </p:spPr>
-        <p:txBody>
-          <a:bodyPr spcFirstLastPara="1" wrap="square" lIns="91425" tIns="91425" rIns="91425" bIns="91425" anchor="t" anchorCtr="0">
-            <a:noAutofit/>
-          </a:bodyPr>
-          <a:lstStyle/>
-          <a:p>
-            <a:pPr marL="0" lvl="0" indent="0" algn="ctr" rtl="0">
-              <a:spcBef>
-                <a:spcPts val="0"/>
-              </a:spcBef>
-              <a:spcAft>
-                <a:spcPts val="0"/>
-              </a:spcAft>
-              <a:buNone/>
-            </a:pPr>
-            <a:r>
-              <a:rPr lang="en-US" dirty="0"/>
-              <a:t>Use </a:t>
-            </a:r>
-            <a:r>
-              <a:rPr lang="en-US" sz="2400" dirty="0"/>
-              <a:t>Assigned</a:t>
-            </a:r>
-            <a:r>
-              <a:rPr lang="en-US" dirty="0"/>
-              <a:t> Seat</a:t>
-            </a:r>
-            <a:endParaRPr dirty="0"/>
-          </a:p>
-        </p:txBody>
-      </p:sp>
-      <p:sp>
-        <p:nvSpPr>
-          <p:cNvPr id="326" name="Google Shape;326;p47"/>
-          <p:cNvSpPr txBox="1">
-            <a:spLocks noGrp="1"/>
-          </p:cNvSpPr>
-          <p:nvPr>
-            <p:ph type="sldNum" idx="12"/>
-          </p:nvPr>
-        </p:nvSpPr>
-        <p:spPr>
-          <a:xfrm>
-            <a:off x="8472458" y="4663217"/>
-            <a:ext cx="548700" cy="393600"/>
-          </a:xfrm>
-          <a:prstGeom prst="rect">
-            <a:avLst/>
-          </a:prstGeom>
-        </p:spPr>
-        <p:txBody>
-          <a:bodyPr spcFirstLastPara="1" wrap="square" lIns="91425" tIns="91425" rIns="91425" bIns="91425" anchor="ctr" anchorCtr="0">
-            <a:noAutofit/>
-          </a:bodyPr>
-          <a:lstStyle/>
-          <a:p>
-            <a:pPr marL="0" lvl="0" indent="0" algn="r" rtl="0">
-              <a:spcBef>
-                <a:spcPts val="0"/>
-              </a:spcBef>
-              <a:spcAft>
-                <a:spcPts val="0"/>
-              </a:spcAft>
-              <a:buNone/>
-            </a:pPr>
-            <a:fld id="{00000000-1234-1234-1234-123412341234}" type="slidenum">
-              <a:rPr lang="en"/>
-              <a:t>10</a:t>
-            </a:fld>
-            <a:endParaRPr/>
-          </a:p>
-        </p:txBody>
-      </p:sp>
-      <p:pic>
-        <p:nvPicPr>
-          <p:cNvPr id="3" name="Picture 2">
-            <a:extLst>
-              <a:ext uri="{FF2B5EF4-FFF2-40B4-BE49-F238E27FC236}">
-                <a16:creationId xmlns:a16="http://schemas.microsoft.com/office/drawing/2014/main" id="{565A4964-E8A9-A46D-F4BE-E7D41C14EF1B}"/>
-              </a:ext>
-            </a:extLst>
-          </p:cNvPr>
-          <p:cNvPicPr>
-            <a:picLocks noChangeAspect="1"/>
-          </p:cNvPicPr>
-          <p:nvPr/>
-        </p:nvPicPr>
-        <p:blipFill>
-          <a:blip r:embed="rId3"/>
-          <a:stretch>
-            <a:fillRect/>
-          </a:stretch>
-        </p:blipFill>
-        <p:spPr>
-          <a:xfrm>
-            <a:off x="0" y="559220"/>
-            <a:ext cx="9144000" cy="4471763"/>
-          </a:xfrm>
-          <a:prstGeom prst="rect">
-            <a:avLst/>
-          </a:prstGeom>
-        </p:spPr>
-      </p:pic>
-    </p:spTree>
-    <p:extLst>
-      <p:ext uri="{BB962C8B-B14F-4D97-AF65-F5344CB8AC3E}">
-        <p14:creationId xmlns:p14="http://schemas.microsoft.com/office/powerpoint/2010/main" val="2495509868"/>
-      </p:ext>
-    </p:extLst>
-  </p:cSld>
-  <p:clrMapOvr>
-    <a:masterClrMapping/>
-  </p:clrMapOvr>
-</p:sld>
-</file>
-
-<file path=ppt/slides/slide11.xml><?xml version="1.0" encoding="utf-8"?>
-<p:sld xmlns:a="http://schemas.openxmlformats.org/drawingml/2006/main" xmlns:r="http://schemas.openxmlformats.org/officeDocument/2006/relationships" xmlns:p="http://schemas.openxmlformats.org/presentationml/2006/main" show="0">
-  <p:cSld>
-    <p:spTree>
-      <p:nvGrpSpPr>
-        <p:cNvPr id="1" name="Shape 323"/>
-        <p:cNvGrpSpPr/>
-        <p:nvPr/>
-      </p:nvGrpSpPr>
-      <p:grpSpPr>
-        <a:xfrm>
-          <a:off x="0" y="0"/>
-          <a:ext cx="0" cy="0"/>
-          <a:chOff x="0" y="0"/>
-          <a:chExt cx="0" cy="0"/>
-        </a:xfrm>
-      </p:grpSpPr>
-      <p:sp>
-        <p:nvSpPr>
-          <p:cNvPr id="324" name="Google Shape;324;p47"/>
-          <p:cNvSpPr txBox="1">
-            <a:spLocks noGrp="1"/>
-          </p:cNvSpPr>
-          <p:nvPr>
-            <p:ph type="title"/>
-          </p:nvPr>
-        </p:nvSpPr>
-        <p:spPr>
-          <a:xfrm>
-            <a:off x="226208" y="1"/>
-            <a:ext cx="8520600" cy="464980"/>
-          </a:xfrm>
-          <a:prstGeom prst="rect">
-            <a:avLst/>
-          </a:prstGeom>
-        </p:spPr>
-        <p:txBody>
-          <a:bodyPr spcFirstLastPara="1" wrap="square" lIns="91425" tIns="91425" rIns="91425" bIns="91425" anchor="t" anchorCtr="0">
-            <a:noAutofit/>
-          </a:bodyPr>
-          <a:lstStyle/>
-          <a:p>
-            <a:pPr marL="0" lvl="0" indent="0" algn="ctr" rtl="0">
-              <a:spcBef>
-                <a:spcPts val="0"/>
-              </a:spcBef>
-              <a:spcAft>
-                <a:spcPts val="0"/>
-              </a:spcAft>
-              <a:buNone/>
-            </a:pPr>
-            <a:r>
-              <a:rPr lang="en-US" dirty="0"/>
-              <a:t>Use </a:t>
-            </a:r>
-            <a:r>
-              <a:rPr lang="en-US" sz="2400" dirty="0"/>
-              <a:t>Assigned</a:t>
-            </a:r>
-            <a:r>
-              <a:rPr lang="en-US" dirty="0"/>
-              <a:t> Seat</a:t>
-            </a:r>
-            <a:endParaRPr dirty="0"/>
-          </a:p>
-        </p:txBody>
-      </p:sp>
-      <p:sp>
-        <p:nvSpPr>
-          <p:cNvPr id="326" name="Google Shape;326;p47"/>
-          <p:cNvSpPr txBox="1">
-            <a:spLocks noGrp="1"/>
-          </p:cNvSpPr>
-          <p:nvPr>
-            <p:ph type="sldNum" idx="12"/>
-          </p:nvPr>
-        </p:nvSpPr>
-        <p:spPr>
-          <a:xfrm>
-            <a:off x="8472458" y="4663217"/>
-            <a:ext cx="548700" cy="393600"/>
-          </a:xfrm>
-          <a:prstGeom prst="rect">
-            <a:avLst/>
-          </a:prstGeom>
-        </p:spPr>
-        <p:txBody>
-          <a:bodyPr spcFirstLastPara="1" wrap="square" lIns="91425" tIns="91425" rIns="91425" bIns="91425" anchor="ctr" anchorCtr="0">
-            <a:noAutofit/>
-          </a:bodyPr>
-          <a:lstStyle/>
-          <a:p>
-            <a:pPr marL="0" lvl="0" indent="0" algn="r" rtl="0">
-              <a:spcBef>
-                <a:spcPts val="0"/>
-              </a:spcBef>
-              <a:spcAft>
-                <a:spcPts val="0"/>
-              </a:spcAft>
-              <a:buNone/>
-            </a:pPr>
-            <a:fld id="{00000000-1234-1234-1234-123412341234}" type="slidenum">
-              <a:rPr lang="en"/>
-              <a:t>11</a:t>
-            </a:fld>
-            <a:endParaRPr/>
-          </a:p>
-        </p:txBody>
-      </p:sp>
-      <p:pic>
-        <p:nvPicPr>
-          <p:cNvPr id="6" name="Picture 5">
-            <a:extLst>
-              <a:ext uri="{FF2B5EF4-FFF2-40B4-BE49-F238E27FC236}">
-                <a16:creationId xmlns:a16="http://schemas.microsoft.com/office/drawing/2014/main" id="{DED32793-7C09-E3A3-94E5-B5D46727A1D0}"/>
-              </a:ext>
-            </a:extLst>
-          </p:cNvPr>
-          <p:cNvPicPr>
-            <a:picLocks noChangeAspect="1"/>
-          </p:cNvPicPr>
-          <p:nvPr/>
-        </p:nvPicPr>
-        <p:blipFill>
-          <a:blip r:embed="rId3"/>
-          <a:stretch>
-            <a:fillRect/>
-          </a:stretch>
-        </p:blipFill>
-        <p:spPr>
-          <a:xfrm>
-            <a:off x="-1" y="551663"/>
-            <a:ext cx="9144001" cy="4591837"/>
-          </a:xfrm>
-          <a:prstGeom prst="rect">
-            <a:avLst/>
-          </a:prstGeom>
-        </p:spPr>
-      </p:pic>
-    </p:spTree>
-    <p:extLst>
-      <p:ext uri="{BB962C8B-B14F-4D97-AF65-F5344CB8AC3E}">
-        <p14:creationId xmlns:p14="http://schemas.microsoft.com/office/powerpoint/2010/main" val="4226348449"/>
-      </p:ext>
-    </p:extLst>
-  </p:cSld>
-  <p:clrMapOvr>
-    <a:masterClrMapping/>
-  </p:clrMapOvr>
-</p:sld>
-</file>
-
-<file path=ppt/slides/slide12.xml><?xml version="1.0" encoding="utf-8"?>
-<p:sld xmlns:a="http://schemas.openxmlformats.org/drawingml/2006/main" xmlns:r="http://schemas.openxmlformats.org/officeDocument/2006/relationships" xmlns:p="http://schemas.openxmlformats.org/presentationml/2006/main" show="0">
-  <p:cSld>
-    <p:spTree>
-      <p:nvGrpSpPr>
-        <p:cNvPr id="1" name="Shape 323"/>
-        <p:cNvGrpSpPr/>
-        <p:nvPr/>
-      </p:nvGrpSpPr>
-      <p:grpSpPr>
-        <a:xfrm>
-          <a:off x="0" y="0"/>
-          <a:ext cx="0" cy="0"/>
-          <a:chOff x="0" y="0"/>
-          <a:chExt cx="0" cy="0"/>
-        </a:xfrm>
-      </p:grpSpPr>
-      <p:sp>
-        <p:nvSpPr>
-          <p:cNvPr id="324" name="Google Shape;324;p47"/>
-          <p:cNvSpPr txBox="1">
-            <a:spLocks noGrp="1"/>
-          </p:cNvSpPr>
-          <p:nvPr>
-            <p:ph type="title"/>
-          </p:nvPr>
-        </p:nvSpPr>
-        <p:spPr>
-          <a:xfrm>
-            <a:off x="226208" y="1"/>
-            <a:ext cx="8520600" cy="464980"/>
-          </a:xfrm>
-          <a:prstGeom prst="rect">
-            <a:avLst/>
-          </a:prstGeom>
-        </p:spPr>
-        <p:txBody>
-          <a:bodyPr spcFirstLastPara="1" wrap="square" lIns="91425" tIns="91425" rIns="91425" bIns="91425" anchor="t" anchorCtr="0">
-            <a:noAutofit/>
-          </a:bodyPr>
-          <a:lstStyle/>
-          <a:p>
-            <a:pPr marL="0" lvl="0" indent="0" algn="ctr" rtl="0">
-              <a:spcBef>
-                <a:spcPts val="0"/>
-              </a:spcBef>
-              <a:spcAft>
-                <a:spcPts val="0"/>
-              </a:spcAft>
-              <a:buNone/>
-            </a:pPr>
-            <a:r>
-              <a:rPr lang="en-US" dirty="0"/>
-              <a:t>Use </a:t>
-            </a:r>
-            <a:r>
-              <a:rPr lang="en-US" sz="2400" dirty="0"/>
-              <a:t>Assigned</a:t>
-            </a:r>
-            <a:r>
-              <a:rPr lang="en-US" dirty="0"/>
-              <a:t> Seat</a:t>
-            </a:r>
-            <a:endParaRPr dirty="0"/>
-          </a:p>
-        </p:txBody>
-      </p:sp>
-      <p:sp>
-        <p:nvSpPr>
-          <p:cNvPr id="326" name="Google Shape;326;p47"/>
-          <p:cNvSpPr txBox="1">
-            <a:spLocks noGrp="1"/>
-          </p:cNvSpPr>
-          <p:nvPr>
-            <p:ph type="sldNum" idx="12"/>
-          </p:nvPr>
-        </p:nvSpPr>
-        <p:spPr>
-          <a:xfrm>
-            <a:off x="8472458" y="4663217"/>
-            <a:ext cx="548700" cy="393600"/>
-          </a:xfrm>
-          <a:prstGeom prst="rect">
-            <a:avLst/>
-          </a:prstGeom>
-        </p:spPr>
-        <p:txBody>
-          <a:bodyPr spcFirstLastPara="1" wrap="square" lIns="91425" tIns="91425" rIns="91425" bIns="91425" anchor="ctr" anchorCtr="0">
-            <a:noAutofit/>
-          </a:bodyPr>
-          <a:lstStyle/>
-          <a:p>
-            <a:pPr marL="0" lvl="0" indent="0" algn="r" rtl="0">
-              <a:spcBef>
-                <a:spcPts val="0"/>
-              </a:spcBef>
-              <a:spcAft>
-                <a:spcPts val="0"/>
-              </a:spcAft>
-              <a:buNone/>
-            </a:pPr>
-            <a:fld id="{00000000-1234-1234-1234-123412341234}" type="slidenum">
-              <a:rPr lang="en"/>
-              <a:t>12</a:t>
-            </a:fld>
-            <a:endParaRPr/>
-          </a:p>
-        </p:txBody>
-      </p:sp>
-      <p:pic>
-        <p:nvPicPr>
-          <p:cNvPr id="3" name="Picture 2">
-            <a:extLst>
-              <a:ext uri="{FF2B5EF4-FFF2-40B4-BE49-F238E27FC236}">
-                <a16:creationId xmlns:a16="http://schemas.microsoft.com/office/drawing/2014/main" id="{92DE4AAC-70FE-A114-5258-F5B22EDDED45}"/>
-              </a:ext>
-            </a:extLst>
-          </p:cNvPr>
-          <p:cNvPicPr>
-            <a:picLocks noChangeAspect="1"/>
-          </p:cNvPicPr>
-          <p:nvPr/>
-        </p:nvPicPr>
-        <p:blipFill>
-          <a:blip r:embed="rId3"/>
-          <a:stretch>
-            <a:fillRect/>
-          </a:stretch>
-        </p:blipFill>
-        <p:spPr>
-          <a:xfrm>
-            <a:off x="0" y="716280"/>
-            <a:ext cx="9144000" cy="4427218"/>
-          </a:xfrm>
-          <a:prstGeom prst="rect">
-            <a:avLst/>
-          </a:prstGeom>
-        </p:spPr>
-      </p:pic>
-    </p:spTree>
-    <p:extLst>
-      <p:ext uri="{BB962C8B-B14F-4D97-AF65-F5344CB8AC3E}">
-        <p14:creationId xmlns:p14="http://schemas.microsoft.com/office/powerpoint/2010/main" val="1976403023"/>
-      </p:ext>
-    </p:extLst>
-  </p:cSld>
-  <p:clrMapOvr>
-    <a:masterClrMapping/>
-  </p:clrMapOvr>
-</p:sld>
-</file>
-
-<file path=ppt/slides/slide13.xml><?xml version="1.0" encoding="utf-8"?>
-<p:sld xmlns:a="http://schemas.openxmlformats.org/drawingml/2006/main" xmlns:r="http://schemas.openxmlformats.org/officeDocument/2006/relationships" xmlns:p="http://schemas.openxmlformats.org/presentationml/2006/main" show="0">
-  <p:cSld>
-    <p:spTree>
-      <p:nvGrpSpPr>
-        <p:cNvPr id="1" name="Shape 323"/>
-        <p:cNvGrpSpPr/>
-        <p:nvPr/>
-      </p:nvGrpSpPr>
-      <p:grpSpPr>
-        <a:xfrm>
-          <a:off x="0" y="0"/>
-          <a:ext cx="0" cy="0"/>
-          <a:chOff x="0" y="0"/>
-          <a:chExt cx="0" cy="0"/>
-        </a:xfrm>
-      </p:grpSpPr>
-      <p:sp>
-        <p:nvSpPr>
-          <p:cNvPr id="324" name="Google Shape;324;p47"/>
-          <p:cNvSpPr txBox="1">
-            <a:spLocks noGrp="1"/>
-          </p:cNvSpPr>
-          <p:nvPr>
-            <p:ph type="title"/>
-          </p:nvPr>
-        </p:nvSpPr>
-        <p:spPr>
-          <a:xfrm>
-            <a:off x="226208" y="1"/>
-            <a:ext cx="8520600" cy="464980"/>
-          </a:xfrm>
-          <a:prstGeom prst="rect">
-            <a:avLst/>
-          </a:prstGeom>
-        </p:spPr>
-        <p:txBody>
-          <a:bodyPr spcFirstLastPara="1" wrap="square" lIns="91425" tIns="91425" rIns="91425" bIns="91425" anchor="t" anchorCtr="0">
-            <a:noAutofit/>
-          </a:bodyPr>
-          <a:lstStyle/>
-          <a:p>
-            <a:pPr marL="0" lvl="0" indent="0" algn="ctr" rtl="0">
-              <a:spcBef>
-                <a:spcPts val="0"/>
-              </a:spcBef>
-              <a:spcAft>
-                <a:spcPts val="0"/>
-              </a:spcAft>
-              <a:buNone/>
-            </a:pPr>
-            <a:r>
-              <a:rPr lang="en-US" dirty="0"/>
-              <a:t>Use </a:t>
-            </a:r>
-            <a:r>
-              <a:rPr lang="en-US" sz="2400" dirty="0"/>
-              <a:t>Assigned</a:t>
-            </a:r>
-            <a:r>
-              <a:rPr lang="en-US" dirty="0"/>
-              <a:t> Seat</a:t>
-            </a:r>
-            <a:endParaRPr dirty="0"/>
-          </a:p>
-        </p:txBody>
-      </p:sp>
-      <p:sp>
-        <p:nvSpPr>
-          <p:cNvPr id="326" name="Google Shape;326;p47"/>
-          <p:cNvSpPr txBox="1">
-            <a:spLocks noGrp="1"/>
-          </p:cNvSpPr>
-          <p:nvPr>
-            <p:ph type="sldNum" idx="12"/>
-          </p:nvPr>
-        </p:nvSpPr>
-        <p:spPr>
-          <a:xfrm>
-            <a:off x="8472458" y="4663217"/>
-            <a:ext cx="548700" cy="393600"/>
-          </a:xfrm>
-          <a:prstGeom prst="rect">
-            <a:avLst/>
-          </a:prstGeom>
-        </p:spPr>
-        <p:txBody>
-          <a:bodyPr spcFirstLastPara="1" wrap="square" lIns="91425" tIns="91425" rIns="91425" bIns="91425" anchor="ctr" anchorCtr="0">
-            <a:noAutofit/>
-          </a:bodyPr>
-          <a:lstStyle/>
-          <a:p>
-            <a:pPr marL="0" lvl="0" indent="0" algn="r" rtl="0">
-              <a:spcBef>
-                <a:spcPts val="0"/>
-              </a:spcBef>
-              <a:spcAft>
-                <a:spcPts val="0"/>
-              </a:spcAft>
-              <a:buNone/>
-            </a:pPr>
-            <a:fld id="{00000000-1234-1234-1234-123412341234}" type="slidenum">
-              <a:rPr lang="en"/>
-              <a:t>13</a:t>
-            </a:fld>
-            <a:endParaRPr/>
-          </a:p>
-        </p:txBody>
-      </p:sp>
-      <p:pic>
-        <p:nvPicPr>
-          <p:cNvPr id="4" name="Picture 3">
-            <a:extLst>
-              <a:ext uri="{FF2B5EF4-FFF2-40B4-BE49-F238E27FC236}">
-                <a16:creationId xmlns:a16="http://schemas.microsoft.com/office/drawing/2014/main" id="{DCD752B9-EFAE-AFC1-7D39-6763B89DE8D3}"/>
-              </a:ext>
-            </a:extLst>
-          </p:cNvPr>
-          <p:cNvPicPr>
-            <a:picLocks noChangeAspect="1"/>
-          </p:cNvPicPr>
-          <p:nvPr/>
-        </p:nvPicPr>
-        <p:blipFill>
-          <a:blip r:embed="rId3"/>
-          <a:stretch>
-            <a:fillRect/>
-          </a:stretch>
-        </p:blipFill>
-        <p:spPr>
-          <a:xfrm>
-            <a:off x="0" y="652130"/>
-            <a:ext cx="9144000" cy="4491369"/>
-          </a:xfrm>
-          <a:prstGeom prst="rect">
-            <a:avLst/>
-          </a:prstGeom>
-        </p:spPr>
-      </p:pic>
-    </p:spTree>
-    <p:extLst>
-      <p:ext uri="{BB962C8B-B14F-4D97-AF65-F5344CB8AC3E}">
-        <p14:creationId xmlns:p14="http://schemas.microsoft.com/office/powerpoint/2010/main" val="3365057756"/>
-      </p:ext>
-    </p:extLst>
-  </p:cSld>
-  <p:clrMapOvr>
-    <a:masterClrMapping/>
-  </p:clrMapOvr>
-</p:sld>
-</file>
-
-<file path=ppt/slides/slide2.xml><?xml version="1.0" encoding="utf-8"?>
-<p:sld xmlns:a="http://schemas.openxmlformats.org/drawingml/2006/main" xmlns:r="http://schemas.openxmlformats.org/officeDocument/2006/relationships" xmlns:p="http://schemas.openxmlformats.org/presentationml/2006/main" show="0">
-  <p:cSld>
-    <p:spTree>
-      <p:nvGrpSpPr>
-        <p:cNvPr id="1" name="Shape 323"/>
-        <p:cNvGrpSpPr/>
-        <p:nvPr/>
-      </p:nvGrpSpPr>
-      <p:grpSpPr>
-        <a:xfrm>
-          <a:off x="0" y="0"/>
-          <a:ext cx="0" cy="0"/>
-          <a:chOff x="0" y="0"/>
-          <a:chExt cx="0" cy="0"/>
-        </a:xfrm>
-      </p:grpSpPr>
-      <p:sp>
-        <p:nvSpPr>
-          <p:cNvPr id="324" name="Google Shape;324;p47"/>
-          <p:cNvSpPr txBox="1">
-            <a:spLocks noGrp="1"/>
-          </p:cNvSpPr>
-          <p:nvPr>
-            <p:ph type="title"/>
-          </p:nvPr>
-        </p:nvSpPr>
-        <p:spPr>
-          <a:xfrm>
-            <a:off x="305858" y="273819"/>
-            <a:ext cx="8520600" cy="623700"/>
-          </a:xfrm>
-          <a:prstGeom prst="rect">
-            <a:avLst/>
-          </a:prstGeom>
-        </p:spPr>
-        <p:txBody>
-          <a:bodyPr spcFirstLastPara="1" wrap="square" lIns="91425" tIns="91425" rIns="91425" bIns="91425" anchor="t" anchorCtr="0">
-            <a:noAutofit/>
-          </a:bodyPr>
-          <a:lstStyle/>
-          <a:p>
-            <a:pPr marL="0" lvl="0" indent="0" algn="ctr" rtl="0">
-              <a:spcBef>
-                <a:spcPts val="0"/>
-              </a:spcBef>
-              <a:spcAft>
-                <a:spcPts val="0"/>
-              </a:spcAft>
-              <a:buNone/>
-            </a:pPr>
-            <a:r>
-              <a:rPr lang="en-US" dirty="0"/>
-              <a:t>GCIS – Software Development and Problem Solving</a:t>
-            </a:r>
-            <a:endParaRPr dirty="0"/>
-          </a:p>
-        </p:txBody>
-      </p:sp>
-      <p:sp>
-        <p:nvSpPr>
-          <p:cNvPr id="325" name="Google Shape;325;p47"/>
-          <p:cNvSpPr txBox="1">
-            <a:spLocks noGrp="1"/>
-          </p:cNvSpPr>
-          <p:nvPr>
-            <p:ph type="body" idx="1"/>
-          </p:nvPr>
-        </p:nvSpPr>
-        <p:spPr>
-          <a:xfrm>
-            <a:off x="-5842" y="1721147"/>
-            <a:ext cx="9149842" cy="1226403"/>
-          </a:xfrm>
-          <a:prstGeom prst="rect">
-            <a:avLst/>
-          </a:prstGeom>
-        </p:spPr>
-        <p:txBody>
-          <a:bodyPr spcFirstLastPara="1" wrap="square" lIns="91425" tIns="91425" rIns="91425" bIns="91425" anchor="ctr" anchorCtr="0">
-            <a:noAutofit/>
-          </a:bodyPr>
-          <a:lstStyle/>
-          <a:p>
-            <a:pPr marL="146050" indent="0" algn="ctr">
-              <a:buNone/>
-            </a:pPr>
-            <a:r>
-              <a:rPr lang="en-US" sz="2400" dirty="0"/>
-              <a:t>Take </a:t>
-            </a:r>
-            <a:r>
-              <a:rPr lang="pl-PL" sz="2400" dirty="0"/>
-              <a:t>Quiz </a:t>
-            </a:r>
-            <a:r>
-              <a:rPr lang="en-US" sz="2400" dirty="0"/>
-              <a:t>10</a:t>
-            </a:r>
-            <a:r>
-              <a:rPr lang="pl-PL" sz="2400" dirty="0"/>
-              <a:t>.</a:t>
-            </a:r>
-            <a:r>
-              <a:rPr lang="en-US" sz="2400" dirty="0"/>
-              <a:t>1</a:t>
-            </a:r>
-            <a:r>
-              <a:rPr lang="pl-PL" sz="2400" dirty="0"/>
-              <a:t>: </a:t>
-            </a:r>
-            <a:r>
-              <a:rPr lang="en-US" sz="2400" dirty="0"/>
-              <a:t>Http1</a:t>
-            </a:r>
-          </a:p>
-          <a:p>
-            <a:pPr marL="146050" indent="0" algn="ctr">
-              <a:buNone/>
-            </a:pPr>
-            <a:r>
-              <a:rPr lang="en-US" sz="2400" dirty="0"/>
-              <a:t>Password - </a:t>
-            </a:r>
-            <a:r>
-              <a:rPr lang="en-US" sz="2400" dirty="0" err="1"/>
-              <a:t>HyperTextHype</a:t>
-            </a:r>
-            <a:endParaRPr sz="2400" dirty="0"/>
-          </a:p>
-        </p:txBody>
-      </p:sp>
-      <p:sp>
-        <p:nvSpPr>
-          <p:cNvPr id="326" name="Google Shape;326;p47"/>
-          <p:cNvSpPr txBox="1">
-            <a:spLocks noGrp="1"/>
-          </p:cNvSpPr>
-          <p:nvPr>
-            <p:ph type="sldNum" idx="12"/>
-          </p:nvPr>
-        </p:nvSpPr>
-        <p:spPr>
-          <a:xfrm>
-            <a:off x="8472458" y="4663217"/>
-            <a:ext cx="548700" cy="393600"/>
-          </a:xfrm>
-          <a:prstGeom prst="rect">
-            <a:avLst/>
-          </a:prstGeom>
-        </p:spPr>
-        <p:txBody>
-          <a:bodyPr spcFirstLastPara="1" wrap="square" lIns="91425" tIns="91425" rIns="91425" bIns="91425" anchor="ctr" anchorCtr="0">
-            <a:noAutofit/>
-          </a:bodyPr>
-          <a:lstStyle/>
-          <a:p>
-            <a:pPr marL="0" lvl="0" indent="0" algn="r" rtl="0">
-              <a:spcBef>
-                <a:spcPts val="0"/>
-              </a:spcBef>
-              <a:spcAft>
-                <a:spcPts val="0"/>
-              </a:spcAft>
-              <a:buNone/>
-            </a:pPr>
-            <a:fld id="{00000000-1234-1234-1234-123412341234}" type="slidenum">
-              <a:rPr lang="en"/>
-              <a:t>2</a:t>
-            </a:fld>
-            <a:endParaRPr/>
-          </a:p>
-        </p:txBody>
-      </p:sp>
-      <p:sp>
-        <p:nvSpPr>
-          <p:cNvPr id="2" name="TextBox 1">
-            <a:extLst>
-              <a:ext uri="{FF2B5EF4-FFF2-40B4-BE49-F238E27FC236}">
-                <a16:creationId xmlns:a16="http://schemas.microsoft.com/office/drawing/2014/main" id="{DCC33EBB-1C9D-B9A9-88E6-F3466077417F}"/>
-              </a:ext>
-            </a:extLst>
-          </p:cNvPr>
-          <p:cNvSpPr txBox="1"/>
-          <p:nvPr/>
-        </p:nvSpPr>
-        <p:spPr>
-          <a:xfrm>
-            <a:off x="0" y="1277369"/>
-            <a:ext cx="9144000" cy="307777"/>
-          </a:xfrm>
-          <a:prstGeom prst="rect">
-            <a:avLst/>
-          </a:prstGeom>
-          <a:solidFill>
-            <a:srgbClr val="FFC000"/>
-          </a:solidFill>
-        </p:spPr>
-        <p:txBody>
-          <a:bodyPr wrap="square" rtlCol="0">
-            <a:spAutoFit/>
-          </a:bodyPr>
-          <a:lstStyle/>
-          <a:p>
-            <a:r>
-              <a:rPr lang="en-US" dirty="0"/>
-              <a:t>Quiz</a:t>
-            </a:r>
-          </a:p>
-        </p:txBody>
-      </p:sp>
-      <p:sp>
-        <p:nvSpPr>
-          <p:cNvPr id="3" name="TextBox 2">
-            <a:extLst>
-              <a:ext uri="{FF2B5EF4-FFF2-40B4-BE49-F238E27FC236}">
-                <a16:creationId xmlns:a16="http://schemas.microsoft.com/office/drawing/2014/main" id="{64C19922-6A1B-1404-5104-DC43E4C67861}"/>
-              </a:ext>
-            </a:extLst>
-          </p:cNvPr>
-          <p:cNvSpPr txBox="1"/>
-          <p:nvPr/>
-        </p:nvSpPr>
-        <p:spPr>
-          <a:xfrm>
-            <a:off x="-5842" y="3031063"/>
-            <a:ext cx="9144000" cy="307777"/>
-          </a:xfrm>
-          <a:prstGeom prst="rect">
-            <a:avLst/>
-          </a:prstGeom>
-          <a:solidFill>
-            <a:srgbClr val="FFC000"/>
-          </a:solidFill>
-        </p:spPr>
-        <p:txBody>
-          <a:bodyPr wrap="square" rtlCol="0">
-            <a:spAutoFit/>
-          </a:bodyPr>
-          <a:lstStyle/>
-          <a:p>
-            <a:r>
-              <a:rPr lang="en-US" dirty="0"/>
-              <a:t>Next </a:t>
-            </a:r>
-            <a:r>
-              <a:rPr lang="en-US" dirty="0">
-                <a:sym typeface="Wingdings" panose="05000000000000000000" pitchFamily="2" charset="2"/>
-              </a:rPr>
-              <a:t> </a:t>
-            </a:r>
-            <a:endParaRPr lang="en-US" dirty="0"/>
-          </a:p>
-        </p:txBody>
-      </p:sp>
-      <p:sp>
-        <p:nvSpPr>
-          <p:cNvPr id="4" name="Google Shape;325;p47">
-            <a:extLst>
-              <a:ext uri="{FF2B5EF4-FFF2-40B4-BE49-F238E27FC236}">
-                <a16:creationId xmlns:a16="http://schemas.microsoft.com/office/drawing/2014/main" id="{E455EA58-F56D-AF58-E97D-95A77E0AB6CF}"/>
-              </a:ext>
-            </a:extLst>
-          </p:cNvPr>
-          <p:cNvSpPr txBox="1">
-            <a:spLocks/>
-          </p:cNvSpPr>
-          <p:nvPr/>
-        </p:nvSpPr>
-        <p:spPr>
-          <a:xfrm>
-            <a:off x="-5842" y="3422352"/>
-            <a:ext cx="9149842" cy="1721148"/>
-          </a:xfrm>
-          <a:prstGeom prst="rect">
-            <a:avLst/>
-          </a:prstGeom>
-          <a:noFill/>
-          <a:ln>
-            <a:noFill/>
-          </a:ln>
-        </p:spPr>
-        <p:txBody>
-          <a:bodyPr spcFirstLastPara="1" wrap="square" lIns="91425" tIns="91425" rIns="91425" bIns="91425" anchor="ctr" anchorCtr="0">
-            <a:noAutofit/>
-          </a:bodyPr>
-          <a:lstStyle>
-            <a:defPPr marR="0" lvl="0" algn="l" rtl="0">
-              <a:lnSpc>
-                <a:spcPct val="100000"/>
-              </a:lnSpc>
-              <a:spcBef>
-                <a:spcPts val="0"/>
-              </a:spcBef>
-              <a:spcAft>
-                <a:spcPts val="0"/>
-              </a:spcAft>
-            </a:defPPr>
-            <a:lvl1pPr marL="457200" marR="0" lvl="0" indent="-311150" algn="l" rtl="0">
-              <a:lnSpc>
-                <a:spcPct val="115000"/>
-              </a:lnSpc>
-              <a:spcBef>
-                <a:spcPts val="0"/>
-              </a:spcBef>
-              <a:spcAft>
-                <a:spcPts val="0"/>
-              </a:spcAft>
-              <a:buClr>
-                <a:schemeClr val="dk2"/>
-              </a:buClr>
-              <a:buSzPts val="1300"/>
-              <a:buFont typeface="Roboto"/>
-              <a:buChar char="●"/>
-              <a:defRPr sz="1300" b="0" i="0" u="none" strike="noStrike" cap="none">
-                <a:solidFill>
-                  <a:schemeClr val="dk2"/>
-                </a:solidFill>
-                <a:latin typeface="Roboto"/>
-                <a:ea typeface="Roboto"/>
-                <a:cs typeface="Roboto"/>
-                <a:sym typeface="Roboto"/>
-              </a:defRPr>
-            </a:lvl1pPr>
-            <a:lvl2pPr marL="914400" marR="0" lvl="1" indent="-298450" algn="l" rtl="0">
-              <a:lnSpc>
-                <a:spcPct val="115000"/>
-              </a:lnSpc>
-              <a:spcBef>
-                <a:spcPts val="1600"/>
-              </a:spcBef>
-              <a:spcAft>
-                <a:spcPts val="0"/>
-              </a:spcAft>
-              <a:buClr>
-                <a:schemeClr val="dk2"/>
-              </a:buClr>
-              <a:buSzPts val="1100"/>
-              <a:buFont typeface="Roboto"/>
-              <a:buChar char="○"/>
-              <a:defRPr sz="1100" b="0" i="0" u="none" strike="noStrike" cap="none">
-                <a:solidFill>
-                  <a:schemeClr val="dk2"/>
-                </a:solidFill>
-                <a:latin typeface="Roboto"/>
-                <a:ea typeface="Roboto"/>
-                <a:cs typeface="Roboto"/>
-                <a:sym typeface="Roboto"/>
-              </a:defRPr>
-            </a:lvl2pPr>
-            <a:lvl3pPr marL="1371600" marR="0" lvl="2" indent="-298450" algn="l" rtl="0">
-              <a:lnSpc>
-                <a:spcPct val="115000"/>
-              </a:lnSpc>
-              <a:spcBef>
-                <a:spcPts val="1600"/>
-              </a:spcBef>
-              <a:spcAft>
-                <a:spcPts val="0"/>
-              </a:spcAft>
-              <a:buClr>
-                <a:schemeClr val="dk2"/>
-              </a:buClr>
-              <a:buSzPts val="1100"/>
-              <a:buFont typeface="Roboto"/>
-              <a:buChar char="■"/>
-              <a:defRPr sz="1100" b="0" i="0" u="none" strike="noStrike" cap="none">
-                <a:solidFill>
-                  <a:schemeClr val="dk2"/>
-                </a:solidFill>
-                <a:latin typeface="Roboto"/>
-                <a:ea typeface="Roboto"/>
-                <a:cs typeface="Roboto"/>
-                <a:sym typeface="Roboto"/>
-              </a:defRPr>
-            </a:lvl3pPr>
-            <a:lvl4pPr marL="1828800" marR="0" lvl="3" indent="-298450" algn="l" rtl="0">
-              <a:lnSpc>
-                <a:spcPct val="115000"/>
-              </a:lnSpc>
-              <a:spcBef>
-                <a:spcPts val="1600"/>
-              </a:spcBef>
-              <a:spcAft>
-                <a:spcPts val="0"/>
-              </a:spcAft>
-              <a:buClr>
-                <a:schemeClr val="dk2"/>
-              </a:buClr>
-              <a:buSzPts val="1100"/>
-              <a:buFont typeface="Roboto"/>
-              <a:buChar char="●"/>
-              <a:defRPr sz="1100" b="0" i="0" u="none" strike="noStrike" cap="none">
-                <a:solidFill>
-                  <a:schemeClr val="dk2"/>
-                </a:solidFill>
-                <a:latin typeface="Roboto"/>
-                <a:ea typeface="Roboto"/>
-                <a:cs typeface="Roboto"/>
-                <a:sym typeface="Roboto"/>
-              </a:defRPr>
-            </a:lvl4pPr>
-            <a:lvl5pPr marL="2286000" marR="0" lvl="4" indent="-298450" algn="l" rtl="0">
-              <a:lnSpc>
-                <a:spcPct val="115000"/>
-              </a:lnSpc>
-              <a:spcBef>
-                <a:spcPts val="1600"/>
-              </a:spcBef>
-              <a:spcAft>
-                <a:spcPts val="0"/>
-              </a:spcAft>
-              <a:buClr>
-                <a:schemeClr val="dk2"/>
-              </a:buClr>
-              <a:buSzPts val="1100"/>
-              <a:buFont typeface="Roboto"/>
-              <a:buChar char="○"/>
-              <a:defRPr sz="1100" b="0" i="0" u="none" strike="noStrike" cap="none">
-                <a:solidFill>
-                  <a:schemeClr val="dk2"/>
-                </a:solidFill>
-                <a:latin typeface="Roboto"/>
-                <a:ea typeface="Roboto"/>
-                <a:cs typeface="Roboto"/>
-                <a:sym typeface="Roboto"/>
-              </a:defRPr>
-            </a:lvl5pPr>
-            <a:lvl6pPr marL="2743200" marR="0" lvl="5" indent="-298450" algn="l" rtl="0">
-              <a:lnSpc>
-                <a:spcPct val="115000"/>
-              </a:lnSpc>
-              <a:spcBef>
-                <a:spcPts val="1600"/>
-              </a:spcBef>
-              <a:spcAft>
-                <a:spcPts val="0"/>
-              </a:spcAft>
-              <a:buClr>
-                <a:schemeClr val="dk2"/>
-              </a:buClr>
-              <a:buSzPts val="1100"/>
-              <a:buFont typeface="Roboto"/>
-              <a:buChar char="■"/>
-              <a:defRPr sz="1100" b="0" i="0" u="none" strike="noStrike" cap="none">
-                <a:solidFill>
-                  <a:schemeClr val="dk2"/>
-                </a:solidFill>
-                <a:latin typeface="Roboto"/>
-                <a:ea typeface="Roboto"/>
-                <a:cs typeface="Roboto"/>
-                <a:sym typeface="Roboto"/>
-              </a:defRPr>
-            </a:lvl6pPr>
-            <a:lvl7pPr marL="3200400" marR="0" lvl="6" indent="-298450" algn="l" rtl="0">
-              <a:lnSpc>
-                <a:spcPct val="115000"/>
-              </a:lnSpc>
-              <a:spcBef>
-                <a:spcPts val="1600"/>
-              </a:spcBef>
-              <a:spcAft>
-                <a:spcPts val="0"/>
-              </a:spcAft>
-              <a:buClr>
-                <a:schemeClr val="dk2"/>
-              </a:buClr>
-              <a:buSzPts val="1100"/>
-              <a:buFont typeface="Roboto"/>
-              <a:buChar char="●"/>
-              <a:defRPr sz="1100" b="0" i="0" u="none" strike="noStrike" cap="none">
-                <a:solidFill>
-                  <a:schemeClr val="dk2"/>
-                </a:solidFill>
-                <a:latin typeface="Roboto"/>
-                <a:ea typeface="Roboto"/>
-                <a:cs typeface="Roboto"/>
-                <a:sym typeface="Roboto"/>
-              </a:defRPr>
-            </a:lvl7pPr>
-            <a:lvl8pPr marL="3657600" marR="0" lvl="7" indent="-298450" algn="l" rtl="0">
-              <a:lnSpc>
-                <a:spcPct val="115000"/>
-              </a:lnSpc>
-              <a:spcBef>
-                <a:spcPts val="1600"/>
-              </a:spcBef>
-              <a:spcAft>
-                <a:spcPts val="0"/>
-              </a:spcAft>
-              <a:buClr>
-                <a:schemeClr val="dk2"/>
-              </a:buClr>
-              <a:buSzPts val="1100"/>
-              <a:buFont typeface="Roboto"/>
-              <a:buChar char="○"/>
-              <a:defRPr sz="1100" b="0" i="0" u="none" strike="noStrike" cap="none">
-                <a:solidFill>
-                  <a:schemeClr val="dk2"/>
-                </a:solidFill>
-                <a:latin typeface="Roboto"/>
-                <a:ea typeface="Roboto"/>
-                <a:cs typeface="Roboto"/>
-                <a:sym typeface="Roboto"/>
-              </a:defRPr>
-            </a:lvl8pPr>
-            <a:lvl9pPr marL="4114800" marR="0" lvl="8" indent="-298450" algn="l" rtl="0">
-              <a:lnSpc>
-                <a:spcPct val="115000"/>
-              </a:lnSpc>
-              <a:spcBef>
-                <a:spcPts val="1600"/>
-              </a:spcBef>
-              <a:spcAft>
-                <a:spcPts val="1600"/>
-              </a:spcAft>
-              <a:buClr>
-                <a:schemeClr val="dk2"/>
-              </a:buClr>
-              <a:buSzPts val="1100"/>
-              <a:buFont typeface="Roboto"/>
-              <a:buChar char="■"/>
-              <a:defRPr sz="1100" b="0" i="0" u="none" strike="noStrike" cap="none">
-                <a:solidFill>
-                  <a:schemeClr val="dk2"/>
-                </a:solidFill>
-                <a:latin typeface="Roboto"/>
-                <a:ea typeface="Roboto"/>
-                <a:cs typeface="Roboto"/>
-                <a:sym typeface="Roboto"/>
-              </a:defRPr>
-            </a:lvl9pPr>
-          </a:lstStyle>
-          <a:p>
-            <a:pPr marL="0" indent="0">
-              <a:spcAft>
-                <a:spcPts val="1600"/>
-              </a:spcAft>
-              <a:buNone/>
-            </a:pPr>
-            <a:r>
-              <a:rPr lang="en-US" sz="2800" dirty="0"/>
-              <a:t>After completing the Quiz </a:t>
-            </a:r>
-          </a:p>
-          <a:p>
-            <a:pPr marL="342900" indent="-342900">
-              <a:spcAft>
-                <a:spcPts val="1600"/>
-              </a:spcAft>
-            </a:pPr>
-            <a:r>
-              <a:rPr lang="en-US" sz="2400" dirty="0"/>
-              <a:t>Clone/Pull Unit10 – git hub classroom repo for class activities</a:t>
-            </a:r>
-          </a:p>
-        </p:txBody>
-      </p:sp>
-    </p:spTree>
   </p:cSld>
   <p:clrMapOvr>
     <a:masterClrMapping/>

--- a/Presentation/Announcement.pptx
+++ b/Presentation/Announcement.pptx
@@ -8,11 +8,11 @@
     <p:notesMasterId r:id="rId15"/>
   </p:notesMasterIdLst>
   <p:sldIdLst>
-    <p:sldId id="276" r:id="rId2"/>
-    <p:sldId id="286" r:id="rId3"/>
-    <p:sldId id="288" r:id="rId4"/>
-    <p:sldId id="281" r:id="rId5"/>
-    <p:sldId id="278" r:id="rId6"/>
+    <p:sldId id="278" r:id="rId2"/>
+    <p:sldId id="276" r:id="rId3"/>
+    <p:sldId id="286" r:id="rId4"/>
+    <p:sldId id="288" r:id="rId5"/>
+    <p:sldId id="281" r:id="rId6"/>
     <p:sldId id="287" r:id="rId7"/>
     <p:sldId id="285" r:id="rId8"/>
     <p:sldId id="284" r:id="rId9"/>
@@ -826,6 +826,11 @@
         </p:txBody>
       </p:sp>
     </p:spTree>
+    <p:extLst>
+      <p:ext uri="{BB962C8B-B14F-4D97-AF65-F5344CB8AC3E}">
+        <p14:creationId xmlns:p14="http://schemas.microsoft.com/office/powerpoint/2010/main" val="4097390636"/>
+      </p:ext>
+    </p:extLst>
   </p:cSld>
   <p:clrMapOvr>
     <a:masterClrMapping/>
@@ -1250,6 +1255,104 @@
   <p:cSld>
     <p:spTree>
       <p:nvGrpSpPr>
+        <p:cNvPr id="1" name="Shape 320"/>
+        <p:cNvGrpSpPr/>
+        <p:nvPr/>
+      </p:nvGrpSpPr>
+      <p:grpSpPr>
+        <a:xfrm>
+          <a:off x="0" y="0"/>
+          <a:ext cx="0" cy="0"/>
+          <a:chOff x="0" y="0"/>
+          <a:chExt cx="0" cy="0"/>
+        </a:xfrm>
+      </p:grpSpPr>
+      <p:sp>
+        <p:nvSpPr>
+          <p:cNvPr id="321" name="Google Shape;321;g8f52c9b70a_3_0:notes"/>
+          <p:cNvSpPr>
+            <a:spLocks noGrp="1" noRot="1" noChangeAspect="1"/>
+          </p:cNvSpPr>
+          <p:nvPr>
+            <p:ph type="sldImg" idx="2"/>
+          </p:nvPr>
+        </p:nvSpPr>
+        <p:spPr>
+          <a:xfrm>
+            <a:off x="406400" y="696913"/>
+            <a:ext cx="6197600" cy="3486150"/>
+          </a:xfrm>
+          <a:custGeom>
+            <a:avLst/>
+            <a:gdLst/>
+            <a:ahLst/>
+            <a:cxnLst/>
+            <a:rect l="l" t="t" r="r" b="b"/>
+            <a:pathLst>
+              <a:path w="120000" h="120000" extrusionOk="0">
+                <a:moveTo>
+                  <a:pt x="0" y="0"/>
+                </a:moveTo>
+                <a:lnTo>
+                  <a:pt x="120000" y="0"/>
+                </a:lnTo>
+                <a:lnTo>
+                  <a:pt x="120000" y="120000"/>
+                </a:lnTo>
+                <a:lnTo>
+                  <a:pt x="0" y="120000"/>
+                </a:lnTo>
+                <a:close/>
+              </a:path>
+            </a:pathLst>
+          </a:custGeom>
+        </p:spPr>
+      </p:sp>
+      <p:sp>
+        <p:nvSpPr>
+          <p:cNvPr id="322" name="Google Shape;322;g8f52c9b70a_3_0:notes"/>
+          <p:cNvSpPr txBox="1">
+            <a:spLocks noGrp="1"/>
+          </p:cNvSpPr>
+          <p:nvPr>
+            <p:ph type="body" idx="1"/>
+          </p:nvPr>
+        </p:nvSpPr>
+        <p:spPr>
+          <a:xfrm>
+            <a:off x="701040" y="4415790"/>
+            <a:ext cx="5608320" cy="4183380"/>
+          </a:xfrm>
+          <a:prstGeom prst="rect">
+            <a:avLst/>
+          </a:prstGeom>
+        </p:spPr>
+        <p:txBody>
+          <a:bodyPr spcFirstLastPara="1" wrap="square" lIns="93162" tIns="93162" rIns="93162" bIns="93162" anchor="t" anchorCtr="0">
+            <a:noAutofit/>
+          </a:bodyPr>
+          <a:lstStyle/>
+          <a:p>
+            <a:pPr marL="0" indent="0">
+              <a:buNone/>
+            </a:pPr>
+            <a:endParaRPr/>
+          </a:p>
+        </p:txBody>
+      </p:sp>
+    </p:spTree>
+  </p:cSld>
+  <p:clrMapOvr>
+    <a:masterClrMapping/>
+  </p:clrMapOvr>
+</p:notes>
+</file>
+
+<file path=ppt/notesSlides/notesSlide3.xml><?xml version="1.0" encoding="utf-8"?>
+<p:notes xmlns:a="http://schemas.openxmlformats.org/drawingml/2006/main" xmlns:r="http://schemas.openxmlformats.org/officeDocument/2006/relationships" xmlns:p="http://schemas.openxmlformats.org/presentationml/2006/main" showMasterSp="0" showMasterPhAnim="0">
+  <p:cSld>
+    <p:spTree>
+      <p:nvGrpSpPr>
         <p:cNvPr id="1" name="Shape 320">
           <a:extLst>
             <a:ext uri="{FF2B5EF4-FFF2-40B4-BE49-F238E27FC236}">
@@ -1366,7 +1469,7 @@
 </p:notes>
 </file>
 
-<file path=ppt/notesSlides/notesSlide3.xml><?xml version="1.0" encoding="utf-8"?>
+<file path=ppt/notesSlides/notesSlide4.xml><?xml version="1.0" encoding="utf-8"?>
 <p:notes xmlns:a="http://schemas.openxmlformats.org/drawingml/2006/main" xmlns:r="http://schemas.openxmlformats.org/officeDocument/2006/relationships" xmlns:p="http://schemas.openxmlformats.org/presentationml/2006/main" showMasterSp="0" showMasterPhAnim="0">
   <p:cSld>
     <p:spTree>
@@ -1487,109 +1590,6 @@
 </p:notes>
 </file>
 
-<file path=ppt/notesSlides/notesSlide4.xml><?xml version="1.0" encoding="utf-8"?>
-<p:notes xmlns:a="http://schemas.openxmlformats.org/drawingml/2006/main" xmlns:r="http://schemas.openxmlformats.org/officeDocument/2006/relationships" xmlns:p="http://schemas.openxmlformats.org/presentationml/2006/main" showMasterSp="0" showMasterPhAnim="0">
-  <p:cSld>
-    <p:spTree>
-      <p:nvGrpSpPr>
-        <p:cNvPr id="1" name="Shape 320"/>
-        <p:cNvGrpSpPr/>
-        <p:nvPr/>
-      </p:nvGrpSpPr>
-      <p:grpSpPr>
-        <a:xfrm>
-          <a:off x="0" y="0"/>
-          <a:ext cx="0" cy="0"/>
-          <a:chOff x="0" y="0"/>
-          <a:chExt cx="0" cy="0"/>
-        </a:xfrm>
-      </p:grpSpPr>
-      <p:sp>
-        <p:nvSpPr>
-          <p:cNvPr id="321" name="Google Shape;321;g8f52c9b70a_3_0:notes"/>
-          <p:cNvSpPr>
-            <a:spLocks noGrp="1" noRot="1" noChangeAspect="1"/>
-          </p:cNvSpPr>
-          <p:nvPr>
-            <p:ph type="sldImg" idx="2"/>
-          </p:nvPr>
-        </p:nvSpPr>
-        <p:spPr>
-          <a:xfrm>
-            <a:off x="406400" y="696913"/>
-            <a:ext cx="6197600" cy="3486150"/>
-          </a:xfrm>
-          <a:custGeom>
-            <a:avLst/>
-            <a:gdLst/>
-            <a:ahLst/>
-            <a:cxnLst/>
-            <a:rect l="l" t="t" r="r" b="b"/>
-            <a:pathLst>
-              <a:path w="120000" h="120000" extrusionOk="0">
-                <a:moveTo>
-                  <a:pt x="0" y="0"/>
-                </a:moveTo>
-                <a:lnTo>
-                  <a:pt x="120000" y="0"/>
-                </a:lnTo>
-                <a:lnTo>
-                  <a:pt x="120000" y="120000"/>
-                </a:lnTo>
-                <a:lnTo>
-                  <a:pt x="0" y="120000"/>
-                </a:lnTo>
-                <a:close/>
-              </a:path>
-            </a:pathLst>
-          </a:custGeom>
-        </p:spPr>
-      </p:sp>
-      <p:sp>
-        <p:nvSpPr>
-          <p:cNvPr id="322" name="Google Shape;322;g8f52c9b70a_3_0:notes"/>
-          <p:cNvSpPr txBox="1">
-            <a:spLocks noGrp="1"/>
-          </p:cNvSpPr>
-          <p:nvPr>
-            <p:ph type="body" idx="1"/>
-          </p:nvPr>
-        </p:nvSpPr>
-        <p:spPr>
-          <a:xfrm>
-            <a:off x="701040" y="4415790"/>
-            <a:ext cx="5608320" cy="4183380"/>
-          </a:xfrm>
-          <a:prstGeom prst="rect">
-            <a:avLst/>
-          </a:prstGeom>
-        </p:spPr>
-        <p:txBody>
-          <a:bodyPr spcFirstLastPara="1" wrap="square" lIns="93162" tIns="93162" rIns="93162" bIns="93162" anchor="t" anchorCtr="0">
-            <a:noAutofit/>
-          </a:bodyPr>
-          <a:lstStyle/>
-          <a:p>
-            <a:pPr marL="0" indent="0">
-              <a:buNone/>
-            </a:pPr>
-            <a:endParaRPr/>
-          </a:p>
-        </p:txBody>
-      </p:sp>
-    </p:spTree>
-    <p:extLst>
-      <p:ext uri="{BB962C8B-B14F-4D97-AF65-F5344CB8AC3E}">
-        <p14:creationId xmlns:p14="http://schemas.microsoft.com/office/powerpoint/2010/main" val="2158134825"/>
-      </p:ext>
-    </p:extLst>
-  </p:cSld>
-  <p:clrMapOvr>
-    <a:masterClrMapping/>
-  </p:clrMapOvr>
-</p:notes>
-</file>
-
 <file path=ppt/notesSlides/notesSlide5.xml><?xml version="1.0" encoding="utf-8"?>
 <p:notes xmlns:a="http://schemas.openxmlformats.org/drawingml/2006/main" xmlns:r="http://schemas.openxmlformats.org/officeDocument/2006/relationships" xmlns:p="http://schemas.openxmlformats.org/presentationml/2006/main" showMasterSp="0" showMasterPhAnim="0">
   <p:cSld>
@@ -1683,7 +1683,7 @@
     </p:spTree>
     <p:extLst>
       <p:ext uri="{BB962C8B-B14F-4D97-AF65-F5344CB8AC3E}">
-        <p14:creationId xmlns:p14="http://schemas.microsoft.com/office/powerpoint/2010/main" val="4097390636"/>
+        <p14:creationId xmlns:p14="http://schemas.microsoft.com/office/powerpoint/2010/main" val="2158134825"/>
       </p:ext>
     </p:extLst>
   </p:cSld>
@@ -6675,6 +6675,1193 @@
         </p:nvSpPr>
         <p:spPr>
           <a:xfrm>
+            <a:off x="314621" y="235914"/>
+            <a:ext cx="8520600" cy="623700"/>
+          </a:xfrm>
+          <a:prstGeom prst="rect">
+            <a:avLst/>
+          </a:prstGeom>
+        </p:spPr>
+        <p:txBody>
+          <a:bodyPr spcFirstLastPara="1" wrap="square" lIns="91425" tIns="91425" rIns="91425" bIns="91425" anchor="t" anchorCtr="0">
+            <a:noAutofit/>
+          </a:bodyPr>
+          <a:lstStyle/>
+          <a:p>
+            <a:pPr marL="0" lvl="0" indent="0" algn="ctr" rtl="0">
+              <a:spcBef>
+                <a:spcPts val="0"/>
+              </a:spcBef>
+              <a:spcAft>
+                <a:spcPts val="0"/>
+              </a:spcAft>
+              <a:buNone/>
+            </a:pPr>
+            <a:r>
+              <a:rPr lang="en-US" dirty="0"/>
+              <a:t>GCIS – Software Development and Problem Solving</a:t>
+            </a:r>
+            <a:endParaRPr dirty="0"/>
+          </a:p>
+        </p:txBody>
+      </p:sp>
+      <p:sp>
+        <p:nvSpPr>
+          <p:cNvPr id="325" name="Google Shape;325;p47"/>
+          <p:cNvSpPr txBox="1">
+            <a:spLocks noGrp="1"/>
+          </p:cNvSpPr>
+          <p:nvPr>
+            <p:ph type="body" idx="1"/>
+          </p:nvPr>
+        </p:nvSpPr>
+        <p:spPr>
+          <a:xfrm>
+            <a:off x="0" y="1608922"/>
+            <a:ext cx="9149842" cy="1226403"/>
+          </a:xfrm>
+          <a:prstGeom prst="rect">
+            <a:avLst/>
+          </a:prstGeom>
+        </p:spPr>
+        <p:txBody>
+          <a:bodyPr spcFirstLastPara="1" wrap="square" lIns="91425" tIns="91425" rIns="91425" bIns="91425" anchor="ctr" anchorCtr="0">
+            <a:noAutofit/>
+          </a:bodyPr>
+          <a:lstStyle/>
+          <a:p>
+            <a:pPr marL="146050" indent="0" algn="ctr">
+              <a:buNone/>
+            </a:pPr>
+            <a:r>
+              <a:rPr lang="en-US" sz="2400" dirty="0"/>
+              <a:t>Take Quiz – Midterm Exam 3</a:t>
+            </a:r>
+          </a:p>
+          <a:p>
+            <a:pPr marL="146050" indent="0" algn="ctr">
+              <a:buNone/>
+            </a:pPr>
+            <a:r>
+              <a:rPr lang="en-US" sz="3200" b="1" dirty="0">
+                <a:solidFill>
+                  <a:schemeClr val="tx1"/>
+                </a:solidFill>
+              </a:rPr>
+              <a:t>Password - </a:t>
+            </a:r>
+            <a:r>
+              <a:rPr lang="en-US" sz="3200" b="1" dirty="0" err="1">
+                <a:solidFill>
+                  <a:schemeClr val="tx1"/>
+                </a:solidFill>
+              </a:rPr>
+              <a:t>NetworkingThreads</a:t>
+            </a:r>
+            <a:endParaRPr sz="3200" b="1" dirty="0">
+              <a:solidFill>
+                <a:schemeClr val="tx1"/>
+              </a:solidFill>
+              <a:highlight>
+                <a:srgbClr val="FFFF00"/>
+              </a:highlight>
+            </a:endParaRPr>
+          </a:p>
+        </p:txBody>
+      </p:sp>
+      <p:sp>
+        <p:nvSpPr>
+          <p:cNvPr id="326" name="Google Shape;326;p47"/>
+          <p:cNvSpPr txBox="1">
+            <a:spLocks noGrp="1"/>
+          </p:cNvSpPr>
+          <p:nvPr>
+            <p:ph type="sldNum" idx="12"/>
+          </p:nvPr>
+        </p:nvSpPr>
+        <p:spPr>
+          <a:xfrm>
+            <a:off x="8472458" y="4663217"/>
+            <a:ext cx="548700" cy="393600"/>
+          </a:xfrm>
+          <a:prstGeom prst="rect">
+            <a:avLst/>
+          </a:prstGeom>
+        </p:spPr>
+        <p:txBody>
+          <a:bodyPr spcFirstLastPara="1" wrap="square" lIns="91425" tIns="91425" rIns="91425" bIns="91425" anchor="ctr" anchorCtr="0">
+            <a:noAutofit/>
+          </a:bodyPr>
+          <a:lstStyle/>
+          <a:p>
+            <a:pPr marL="0" lvl="0" indent="0" algn="r" rtl="0">
+              <a:spcBef>
+                <a:spcPts val="0"/>
+              </a:spcBef>
+              <a:spcAft>
+                <a:spcPts val="0"/>
+              </a:spcAft>
+              <a:buNone/>
+            </a:pPr>
+            <a:fld id="{00000000-1234-1234-1234-123412341234}" type="slidenum">
+              <a:rPr lang="en"/>
+              <a:t>1</a:t>
+            </a:fld>
+            <a:endParaRPr/>
+          </a:p>
+        </p:txBody>
+      </p:sp>
+      <p:sp>
+        <p:nvSpPr>
+          <p:cNvPr id="2" name="TextBox 1">
+            <a:extLst>
+              <a:ext uri="{FF2B5EF4-FFF2-40B4-BE49-F238E27FC236}">
+                <a16:creationId xmlns:a16="http://schemas.microsoft.com/office/drawing/2014/main" id="{DCC33EBB-1C9D-B9A9-88E6-F3466077417F}"/>
+              </a:ext>
+            </a:extLst>
+          </p:cNvPr>
+          <p:cNvSpPr txBox="1"/>
+          <p:nvPr/>
+        </p:nvSpPr>
+        <p:spPr>
+          <a:xfrm>
+            <a:off x="-5842" y="1277369"/>
+            <a:ext cx="9144000" cy="307777"/>
+          </a:xfrm>
+          <a:prstGeom prst="rect">
+            <a:avLst/>
+          </a:prstGeom>
+          <a:solidFill>
+            <a:srgbClr val="FFC000"/>
+          </a:solidFill>
+        </p:spPr>
+        <p:txBody>
+          <a:bodyPr wrap="square" rtlCol="0">
+            <a:spAutoFit/>
+          </a:bodyPr>
+          <a:lstStyle/>
+          <a:p>
+            <a:pPr algn="ctr"/>
+            <a:r>
+              <a:rPr lang="en-US" b="1" dirty="0"/>
+              <a:t>Midterm Exam 3 - Written</a:t>
+            </a:r>
+          </a:p>
+        </p:txBody>
+      </p:sp>
+      <p:sp>
+        <p:nvSpPr>
+          <p:cNvPr id="3" name="TextBox 2">
+            <a:extLst>
+              <a:ext uri="{FF2B5EF4-FFF2-40B4-BE49-F238E27FC236}">
+                <a16:creationId xmlns:a16="http://schemas.microsoft.com/office/drawing/2014/main" id="{25A19346-2F9F-0DB9-0B08-CF872EB1D563}"/>
+              </a:ext>
+            </a:extLst>
+          </p:cNvPr>
+          <p:cNvSpPr txBox="1"/>
+          <p:nvPr/>
+        </p:nvSpPr>
+        <p:spPr>
+          <a:xfrm>
+            <a:off x="0" y="2886770"/>
+            <a:ext cx="9144000" cy="307777"/>
+          </a:xfrm>
+          <a:prstGeom prst="rect">
+            <a:avLst/>
+          </a:prstGeom>
+          <a:solidFill>
+            <a:srgbClr val="FFC000"/>
+          </a:solidFill>
+        </p:spPr>
+        <p:txBody>
+          <a:bodyPr wrap="square" rtlCol="0">
+            <a:spAutoFit/>
+          </a:bodyPr>
+          <a:lstStyle/>
+          <a:p>
+            <a:r>
+              <a:rPr lang="en-US" dirty="0"/>
+              <a:t>Practicum</a:t>
+            </a:r>
+          </a:p>
+        </p:txBody>
+      </p:sp>
+      <p:sp>
+        <p:nvSpPr>
+          <p:cNvPr id="4" name="Google Shape;325;p47">
+            <a:extLst>
+              <a:ext uri="{FF2B5EF4-FFF2-40B4-BE49-F238E27FC236}">
+                <a16:creationId xmlns:a16="http://schemas.microsoft.com/office/drawing/2014/main" id="{11D0E6FB-E344-369B-CE83-B3CF5834F823}"/>
+              </a:ext>
+            </a:extLst>
+          </p:cNvPr>
+          <p:cNvSpPr txBox="1">
+            <a:spLocks/>
+          </p:cNvSpPr>
+          <p:nvPr/>
+        </p:nvSpPr>
+        <p:spPr>
+          <a:xfrm>
+            <a:off x="122842" y="3424963"/>
+            <a:ext cx="8478300" cy="1435054"/>
+          </a:xfrm>
+          <a:prstGeom prst="rect">
+            <a:avLst/>
+          </a:prstGeom>
+          <a:noFill/>
+          <a:ln>
+            <a:noFill/>
+          </a:ln>
+        </p:spPr>
+        <p:txBody>
+          <a:bodyPr spcFirstLastPara="1" wrap="square" lIns="91425" tIns="91425" rIns="91425" bIns="91425" anchor="ctr" anchorCtr="0">
+            <a:noAutofit/>
+          </a:bodyPr>
+          <a:lstStyle>
+            <a:defPPr marR="0" lvl="0" algn="l" rtl="0">
+              <a:lnSpc>
+                <a:spcPct val="100000"/>
+              </a:lnSpc>
+              <a:spcBef>
+                <a:spcPts val="0"/>
+              </a:spcBef>
+              <a:spcAft>
+                <a:spcPts val="0"/>
+              </a:spcAft>
+            </a:defPPr>
+            <a:lvl1pPr marL="457200" marR="0" lvl="0" indent="-311150" algn="l" rtl="0">
+              <a:lnSpc>
+                <a:spcPct val="115000"/>
+              </a:lnSpc>
+              <a:spcBef>
+                <a:spcPts val="0"/>
+              </a:spcBef>
+              <a:spcAft>
+                <a:spcPts val="0"/>
+              </a:spcAft>
+              <a:buClr>
+                <a:schemeClr val="dk2"/>
+              </a:buClr>
+              <a:buSzPts val="1300"/>
+              <a:buFont typeface="Roboto"/>
+              <a:buChar char="●"/>
+              <a:defRPr sz="1300" b="0" i="0" u="none" strike="noStrike" cap="none">
+                <a:solidFill>
+                  <a:schemeClr val="dk2"/>
+                </a:solidFill>
+                <a:latin typeface="Roboto"/>
+                <a:ea typeface="Roboto"/>
+                <a:cs typeface="Roboto"/>
+                <a:sym typeface="Roboto"/>
+              </a:defRPr>
+            </a:lvl1pPr>
+            <a:lvl2pPr marL="914400" marR="0" lvl="1" indent="-298450" algn="l" rtl="0">
+              <a:lnSpc>
+                <a:spcPct val="115000"/>
+              </a:lnSpc>
+              <a:spcBef>
+                <a:spcPts val="1600"/>
+              </a:spcBef>
+              <a:spcAft>
+                <a:spcPts val="0"/>
+              </a:spcAft>
+              <a:buClr>
+                <a:schemeClr val="dk2"/>
+              </a:buClr>
+              <a:buSzPts val="1100"/>
+              <a:buFont typeface="Roboto"/>
+              <a:buChar char="○"/>
+              <a:defRPr sz="1100" b="0" i="0" u="none" strike="noStrike" cap="none">
+                <a:solidFill>
+                  <a:schemeClr val="dk2"/>
+                </a:solidFill>
+                <a:latin typeface="Roboto"/>
+                <a:ea typeface="Roboto"/>
+                <a:cs typeface="Roboto"/>
+                <a:sym typeface="Roboto"/>
+              </a:defRPr>
+            </a:lvl2pPr>
+            <a:lvl3pPr marL="1371600" marR="0" lvl="2" indent="-298450" algn="l" rtl="0">
+              <a:lnSpc>
+                <a:spcPct val="115000"/>
+              </a:lnSpc>
+              <a:spcBef>
+                <a:spcPts val="1600"/>
+              </a:spcBef>
+              <a:spcAft>
+                <a:spcPts val="0"/>
+              </a:spcAft>
+              <a:buClr>
+                <a:schemeClr val="dk2"/>
+              </a:buClr>
+              <a:buSzPts val="1100"/>
+              <a:buFont typeface="Roboto"/>
+              <a:buChar char="■"/>
+              <a:defRPr sz="1100" b="0" i="0" u="none" strike="noStrike" cap="none">
+                <a:solidFill>
+                  <a:schemeClr val="dk2"/>
+                </a:solidFill>
+                <a:latin typeface="Roboto"/>
+                <a:ea typeface="Roboto"/>
+                <a:cs typeface="Roboto"/>
+                <a:sym typeface="Roboto"/>
+              </a:defRPr>
+            </a:lvl3pPr>
+            <a:lvl4pPr marL="1828800" marR="0" lvl="3" indent="-298450" algn="l" rtl="0">
+              <a:lnSpc>
+                <a:spcPct val="115000"/>
+              </a:lnSpc>
+              <a:spcBef>
+                <a:spcPts val="1600"/>
+              </a:spcBef>
+              <a:spcAft>
+                <a:spcPts val="0"/>
+              </a:spcAft>
+              <a:buClr>
+                <a:schemeClr val="dk2"/>
+              </a:buClr>
+              <a:buSzPts val="1100"/>
+              <a:buFont typeface="Roboto"/>
+              <a:buChar char="●"/>
+              <a:defRPr sz="1100" b="0" i="0" u="none" strike="noStrike" cap="none">
+                <a:solidFill>
+                  <a:schemeClr val="dk2"/>
+                </a:solidFill>
+                <a:latin typeface="Roboto"/>
+                <a:ea typeface="Roboto"/>
+                <a:cs typeface="Roboto"/>
+                <a:sym typeface="Roboto"/>
+              </a:defRPr>
+            </a:lvl4pPr>
+            <a:lvl5pPr marL="2286000" marR="0" lvl="4" indent="-298450" algn="l" rtl="0">
+              <a:lnSpc>
+                <a:spcPct val="115000"/>
+              </a:lnSpc>
+              <a:spcBef>
+                <a:spcPts val="1600"/>
+              </a:spcBef>
+              <a:spcAft>
+                <a:spcPts val="0"/>
+              </a:spcAft>
+              <a:buClr>
+                <a:schemeClr val="dk2"/>
+              </a:buClr>
+              <a:buSzPts val="1100"/>
+              <a:buFont typeface="Roboto"/>
+              <a:buChar char="○"/>
+              <a:defRPr sz="1100" b="0" i="0" u="none" strike="noStrike" cap="none">
+                <a:solidFill>
+                  <a:schemeClr val="dk2"/>
+                </a:solidFill>
+                <a:latin typeface="Roboto"/>
+                <a:ea typeface="Roboto"/>
+                <a:cs typeface="Roboto"/>
+                <a:sym typeface="Roboto"/>
+              </a:defRPr>
+            </a:lvl5pPr>
+            <a:lvl6pPr marL="2743200" marR="0" lvl="5" indent="-298450" algn="l" rtl="0">
+              <a:lnSpc>
+                <a:spcPct val="115000"/>
+              </a:lnSpc>
+              <a:spcBef>
+                <a:spcPts val="1600"/>
+              </a:spcBef>
+              <a:spcAft>
+                <a:spcPts val="0"/>
+              </a:spcAft>
+              <a:buClr>
+                <a:schemeClr val="dk2"/>
+              </a:buClr>
+              <a:buSzPts val="1100"/>
+              <a:buFont typeface="Roboto"/>
+              <a:buChar char="■"/>
+              <a:defRPr sz="1100" b="0" i="0" u="none" strike="noStrike" cap="none">
+                <a:solidFill>
+                  <a:schemeClr val="dk2"/>
+                </a:solidFill>
+                <a:latin typeface="Roboto"/>
+                <a:ea typeface="Roboto"/>
+                <a:cs typeface="Roboto"/>
+                <a:sym typeface="Roboto"/>
+              </a:defRPr>
+            </a:lvl6pPr>
+            <a:lvl7pPr marL="3200400" marR="0" lvl="6" indent="-298450" algn="l" rtl="0">
+              <a:lnSpc>
+                <a:spcPct val="115000"/>
+              </a:lnSpc>
+              <a:spcBef>
+                <a:spcPts val="1600"/>
+              </a:spcBef>
+              <a:spcAft>
+                <a:spcPts val="0"/>
+              </a:spcAft>
+              <a:buClr>
+                <a:schemeClr val="dk2"/>
+              </a:buClr>
+              <a:buSzPts val="1100"/>
+              <a:buFont typeface="Roboto"/>
+              <a:buChar char="●"/>
+              <a:defRPr sz="1100" b="0" i="0" u="none" strike="noStrike" cap="none">
+                <a:solidFill>
+                  <a:schemeClr val="dk2"/>
+                </a:solidFill>
+                <a:latin typeface="Roboto"/>
+                <a:ea typeface="Roboto"/>
+                <a:cs typeface="Roboto"/>
+                <a:sym typeface="Roboto"/>
+              </a:defRPr>
+            </a:lvl7pPr>
+            <a:lvl8pPr marL="3657600" marR="0" lvl="7" indent="-298450" algn="l" rtl="0">
+              <a:lnSpc>
+                <a:spcPct val="115000"/>
+              </a:lnSpc>
+              <a:spcBef>
+                <a:spcPts val="1600"/>
+              </a:spcBef>
+              <a:spcAft>
+                <a:spcPts val="0"/>
+              </a:spcAft>
+              <a:buClr>
+                <a:schemeClr val="dk2"/>
+              </a:buClr>
+              <a:buSzPts val="1100"/>
+              <a:buFont typeface="Roboto"/>
+              <a:buChar char="○"/>
+              <a:defRPr sz="1100" b="0" i="0" u="none" strike="noStrike" cap="none">
+                <a:solidFill>
+                  <a:schemeClr val="dk2"/>
+                </a:solidFill>
+                <a:latin typeface="Roboto"/>
+                <a:ea typeface="Roboto"/>
+                <a:cs typeface="Roboto"/>
+                <a:sym typeface="Roboto"/>
+              </a:defRPr>
+            </a:lvl8pPr>
+            <a:lvl9pPr marL="4114800" marR="0" lvl="8" indent="-298450" algn="l" rtl="0">
+              <a:lnSpc>
+                <a:spcPct val="115000"/>
+              </a:lnSpc>
+              <a:spcBef>
+                <a:spcPts val="1600"/>
+              </a:spcBef>
+              <a:spcAft>
+                <a:spcPts val="1600"/>
+              </a:spcAft>
+              <a:buClr>
+                <a:schemeClr val="dk2"/>
+              </a:buClr>
+              <a:buSzPts val="1100"/>
+              <a:buFont typeface="Roboto"/>
+              <a:buChar char="■"/>
+              <a:defRPr sz="1100" b="0" i="0" u="none" strike="noStrike" cap="none">
+                <a:solidFill>
+                  <a:schemeClr val="dk2"/>
+                </a:solidFill>
+                <a:latin typeface="Roboto"/>
+                <a:ea typeface="Roboto"/>
+                <a:cs typeface="Roboto"/>
+                <a:sym typeface="Roboto"/>
+              </a:defRPr>
+            </a:lvl9pPr>
+          </a:lstStyle>
+          <a:p>
+            <a:pPr marL="342900" indent="-342900">
+              <a:spcAft>
+                <a:spcPts val="1600"/>
+              </a:spcAft>
+            </a:pPr>
+            <a:r>
+              <a:rPr lang="en-US" sz="1600" dirty="0"/>
+              <a:t>Accept assignment Mid Exam 3 under Instructor -&gt; Alam -&gt; Exam and </a:t>
+            </a:r>
+            <a:r>
+              <a:rPr lang="en-US" sz="1600" dirty="0">
+                <a:solidFill>
+                  <a:schemeClr val="tx1"/>
+                </a:solidFill>
+              </a:rPr>
+              <a:t>Clone the repository for </a:t>
+            </a:r>
+            <a:r>
+              <a:rPr lang="en-US" sz="1600" dirty="0"/>
+              <a:t>Mid Exam 3</a:t>
+            </a:r>
+          </a:p>
+          <a:p>
+            <a:pPr marL="342900" indent="-342900">
+              <a:spcAft>
+                <a:spcPts val="1600"/>
+              </a:spcAft>
+            </a:pPr>
+            <a:r>
+              <a:rPr lang="en-US" sz="1600" dirty="0">
+                <a:solidFill>
+                  <a:schemeClr val="tx1"/>
+                </a:solidFill>
+              </a:rPr>
+              <a:t>Auto Commit is enabled for your repository. </a:t>
+            </a:r>
+            <a:r>
+              <a:rPr lang="en-US" sz="1600" b="1" dirty="0">
+                <a:solidFill>
+                  <a:schemeClr val="tx1"/>
+                </a:solidFill>
+              </a:rPr>
+              <a:t>DO NOT disable it. Disable code completion/co-pilot. Reach out to instructor or TA if you need help.</a:t>
+            </a:r>
+          </a:p>
+        </p:txBody>
+      </p:sp>
+    </p:spTree>
+    <p:extLst>
+      <p:ext uri="{BB962C8B-B14F-4D97-AF65-F5344CB8AC3E}">
+        <p14:creationId xmlns:p14="http://schemas.microsoft.com/office/powerpoint/2010/main" val="943055912"/>
+      </p:ext>
+    </p:extLst>
+  </p:cSld>
+  <p:clrMapOvr>
+    <a:masterClrMapping/>
+  </p:clrMapOvr>
+</p:sld>
+</file>
+
+<file path=ppt/slides/slide10.xml><?xml version="1.0" encoding="utf-8"?>
+<p:sld xmlns:a="http://schemas.openxmlformats.org/drawingml/2006/main" xmlns:r="http://schemas.openxmlformats.org/officeDocument/2006/relationships" xmlns:p="http://schemas.openxmlformats.org/presentationml/2006/main" show="0">
+  <p:cSld>
+    <p:spTree>
+      <p:nvGrpSpPr>
+        <p:cNvPr id="1" name="Shape 323"/>
+        <p:cNvGrpSpPr/>
+        <p:nvPr/>
+      </p:nvGrpSpPr>
+      <p:grpSpPr>
+        <a:xfrm>
+          <a:off x="0" y="0"/>
+          <a:ext cx="0" cy="0"/>
+          <a:chOff x="0" y="0"/>
+          <a:chExt cx="0" cy="0"/>
+        </a:xfrm>
+      </p:grpSpPr>
+      <p:sp>
+        <p:nvSpPr>
+          <p:cNvPr id="324" name="Google Shape;324;p47"/>
+          <p:cNvSpPr txBox="1">
+            <a:spLocks noGrp="1"/>
+          </p:cNvSpPr>
+          <p:nvPr>
+            <p:ph type="title"/>
+          </p:nvPr>
+        </p:nvSpPr>
+        <p:spPr>
+          <a:xfrm>
+            <a:off x="226208" y="1"/>
+            <a:ext cx="8520600" cy="464980"/>
+          </a:xfrm>
+          <a:prstGeom prst="rect">
+            <a:avLst/>
+          </a:prstGeom>
+        </p:spPr>
+        <p:txBody>
+          <a:bodyPr spcFirstLastPara="1" wrap="square" lIns="91425" tIns="91425" rIns="91425" bIns="91425" anchor="t" anchorCtr="0">
+            <a:noAutofit/>
+          </a:bodyPr>
+          <a:lstStyle/>
+          <a:p>
+            <a:pPr marL="0" lvl="0" indent="0" algn="ctr" rtl="0">
+              <a:spcBef>
+                <a:spcPts val="0"/>
+              </a:spcBef>
+              <a:spcAft>
+                <a:spcPts val="0"/>
+              </a:spcAft>
+              <a:buNone/>
+            </a:pPr>
+            <a:r>
+              <a:rPr lang="en-US" dirty="0"/>
+              <a:t>Use </a:t>
+            </a:r>
+            <a:r>
+              <a:rPr lang="en-US" sz="2400" dirty="0"/>
+              <a:t>Assigned</a:t>
+            </a:r>
+            <a:r>
+              <a:rPr lang="en-US" dirty="0"/>
+              <a:t> Seat</a:t>
+            </a:r>
+            <a:endParaRPr dirty="0"/>
+          </a:p>
+        </p:txBody>
+      </p:sp>
+      <p:sp>
+        <p:nvSpPr>
+          <p:cNvPr id="326" name="Google Shape;326;p47"/>
+          <p:cNvSpPr txBox="1">
+            <a:spLocks noGrp="1"/>
+          </p:cNvSpPr>
+          <p:nvPr>
+            <p:ph type="sldNum" idx="12"/>
+          </p:nvPr>
+        </p:nvSpPr>
+        <p:spPr>
+          <a:xfrm>
+            <a:off x="8472458" y="4663217"/>
+            <a:ext cx="548700" cy="393600"/>
+          </a:xfrm>
+          <a:prstGeom prst="rect">
+            <a:avLst/>
+          </a:prstGeom>
+        </p:spPr>
+        <p:txBody>
+          <a:bodyPr spcFirstLastPara="1" wrap="square" lIns="91425" tIns="91425" rIns="91425" bIns="91425" anchor="ctr" anchorCtr="0">
+            <a:noAutofit/>
+          </a:bodyPr>
+          <a:lstStyle/>
+          <a:p>
+            <a:pPr marL="0" lvl="0" indent="0" algn="r" rtl="0">
+              <a:spcBef>
+                <a:spcPts val="0"/>
+              </a:spcBef>
+              <a:spcAft>
+                <a:spcPts val="0"/>
+              </a:spcAft>
+              <a:buNone/>
+            </a:pPr>
+            <a:fld id="{00000000-1234-1234-1234-123412341234}" type="slidenum">
+              <a:rPr lang="en"/>
+              <a:t>10</a:t>
+            </a:fld>
+            <a:endParaRPr/>
+          </a:p>
+        </p:txBody>
+      </p:sp>
+      <p:pic>
+        <p:nvPicPr>
+          <p:cNvPr id="3" name="Picture 2">
+            <a:extLst>
+              <a:ext uri="{FF2B5EF4-FFF2-40B4-BE49-F238E27FC236}">
+                <a16:creationId xmlns:a16="http://schemas.microsoft.com/office/drawing/2014/main" id="{565A4964-E8A9-A46D-F4BE-E7D41C14EF1B}"/>
+              </a:ext>
+            </a:extLst>
+          </p:cNvPr>
+          <p:cNvPicPr>
+            <a:picLocks noChangeAspect="1"/>
+          </p:cNvPicPr>
+          <p:nvPr/>
+        </p:nvPicPr>
+        <p:blipFill>
+          <a:blip r:embed="rId3"/>
+          <a:stretch>
+            <a:fillRect/>
+          </a:stretch>
+        </p:blipFill>
+        <p:spPr>
+          <a:xfrm>
+            <a:off x="0" y="559220"/>
+            <a:ext cx="9144000" cy="4471763"/>
+          </a:xfrm>
+          <a:prstGeom prst="rect">
+            <a:avLst/>
+          </a:prstGeom>
+        </p:spPr>
+      </p:pic>
+    </p:spTree>
+    <p:extLst>
+      <p:ext uri="{BB962C8B-B14F-4D97-AF65-F5344CB8AC3E}">
+        <p14:creationId xmlns:p14="http://schemas.microsoft.com/office/powerpoint/2010/main" val="2495509868"/>
+      </p:ext>
+    </p:extLst>
+  </p:cSld>
+  <p:clrMapOvr>
+    <a:masterClrMapping/>
+  </p:clrMapOvr>
+</p:sld>
+</file>
+
+<file path=ppt/slides/slide11.xml><?xml version="1.0" encoding="utf-8"?>
+<p:sld xmlns:a="http://schemas.openxmlformats.org/drawingml/2006/main" xmlns:r="http://schemas.openxmlformats.org/officeDocument/2006/relationships" xmlns:p="http://schemas.openxmlformats.org/presentationml/2006/main" show="0">
+  <p:cSld>
+    <p:spTree>
+      <p:nvGrpSpPr>
+        <p:cNvPr id="1" name="Shape 323"/>
+        <p:cNvGrpSpPr/>
+        <p:nvPr/>
+      </p:nvGrpSpPr>
+      <p:grpSpPr>
+        <a:xfrm>
+          <a:off x="0" y="0"/>
+          <a:ext cx="0" cy="0"/>
+          <a:chOff x="0" y="0"/>
+          <a:chExt cx="0" cy="0"/>
+        </a:xfrm>
+      </p:grpSpPr>
+      <p:sp>
+        <p:nvSpPr>
+          <p:cNvPr id="324" name="Google Shape;324;p47"/>
+          <p:cNvSpPr txBox="1">
+            <a:spLocks noGrp="1"/>
+          </p:cNvSpPr>
+          <p:nvPr>
+            <p:ph type="title"/>
+          </p:nvPr>
+        </p:nvSpPr>
+        <p:spPr>
+          <a:xfrm>
+            <a:off x="226208" y="1"/>
+            <a:ext cx="8520600" cy="464980"/>
+          </a:xfrm>
+          <a:prstGeom prst="rect">
+            <a:avLst/>
+          </a:prstGeom>
+        </p:spPr>
+        <p:txBody>
+          <a:bodyPr spcFirstLastPara="1" wrap="square" lIns="91425" tIns="91425" rIns="91425" bIns="91425" anchor="t" anchorCtr="0">
+            <a:noAutofit/>
+          </a:bodyPr>
+          <a:lstStyle/>
+          <a:p>
+            <a:pPr marL="0" lvl="0" indent="0" algn="ctr" rtl="0">
+              <a:spcBef>
+                <a:spcPts val="0"/>
+              </a:spcBef>
+              <a:spcAft>
+                <a:spcPts val="0"/>
+              </a:spcAft>
+              <a:buNone/>
+            </a:pPr>
+            <a:r>
+              <a:rPr lang="en-US" dirty="0"/>
+              <a:t>Use </a:t>
+            </a:r>
+            <a:r>
+              <a:rPr lang="en-US" sz="2400" dirty="0"/>
+              <a:t>Assigned</a:t>
+            </a:r>
+            <a:r>
+              <a:rPr lang="en-US" dirty="0"/>
+              <a:t> Seat</a:t>
+            </a:r>
+            <a:endParaRPr dirty="0"/>
+          </a:p>
+        </p:txBody>
+      </p:sp>
+      <p:sp>
+        <p:nvSpPr>
+          <p:cNvPr id="326" name="Google Shape;326;p47"/>
+          <p:cNvSpPr txBox="1">
+            <a:spLocks noGrp="1"/>
+          </p:cNvSpPr>
+          <p:nvPr>
+            <p:ph type="sldNum" idx="12"/>
+          </p:nvPr>
+        </p:nvSpPr>
+        <p:spPr>
+          <a:xfrm>
+            <a:off x="8472458" y="4663217"/>
+            <a:ext cx="548700" cy="393600"/>
+          </a:xfrm>
+          <a:prstGeom prst="rect">
+            <a:avLst/>
+          </a:prstGeom>
+        </p:spPr>
+        <p:txBody>
+          <a:bodyPr spcFirstLastPara="1" wrap="square" lIns="91425" tIns="91425" rIns="91425" bIns="91425" anchor="ctr" anchorCtr="0">
+            <a:noAutofit/>
+          </a:bodyPr>
+          <a:lstStyle/>
+          <a:p>
+            <a:pPr marL="0" lvl="0" indent="0" algn="r" rtl="0">
+              <a:spcBef>
+                <a:spcPts val="0"/>
+              </a:spcBef>
+              <a:spcAft>
+                <a:spcPts val="0"/>
+              </a:spcAft>
+              <a:buNone/>
+            </a:pPr>
+            <a:fld id="{00000000-1234-1234-1234-123412341234}" type="slidenum">
+              <a:rPr lang="en"/>
+              <a:t>11</a:t>
+            </a:fld>
+            <a:endParaRPr/>
+          </a:p>
+        </p:txBody>
+      </p:sp>
+      <p:pic>
+        <p:nvPicPr>
+          <p:cNvPr id="6" name="Picture 5">
+            <a:extLst>
+              <a:ext uri="{FF2B5EF4-FFF2-40B4-BE49-F238E27FC236}">
+                <a16:creationId xmlns:a16="http://schemas.microsoft.com/office/drawing/2014/main" id="{DED32793-7C09-E3A3-94E5-B5D46727A1D0}"/>
+              </a:ext>
+            </a:extLst>
+          </p:cNvPr>
+          <p:cNvPicPr>
+            <a:picLocks noChangeAspect="1"/>
+          </p:cNvPicPr>
+          <p:nvPr/>
+        </p:nvPicPr>
+        <p:blipFill>
+          <a:blip r:embed="rId3"/>
+          <a:stretch>
+            <a:fillRect/>
+          </a:stretch>
+        </p:blipFill>
+        <p:spPr>
+          <a:xfrm>
+            <a:off x="-1" y="551663"/>
+            <a:ext cx="9144001" cy="4591837"/>
+          </a:xfrm>
+          <a:prstGeom prst="rect">
+            <a:avLst/>
+          </a:prstGeom>
+        </p:spPr>
+      </p:pic>
+    </p:spTree>
+    <p:extLst>
+      <p:ext uri="{BB962C8B-B14F-4D97-AF65-F5344CB8AC3E}">
+        <p14:creationId xmlns:p14="http://schemas.microsoft.com/office/powerpoint/2010/main" val="4226348449"/>
+      </p:ext>
+    </p:extLst>
+  </p:cSld>
+  <p:clrMapOvr>
+    <a:masterClrMapping/>
+  </p:clrMapOvr>
+</p:sld>
+</file>
+
+<file path=ppt/slides/slide12.xml><?xml version="1.0" encoding="utf-8"?>
+<p:sld xmlns:a="http://schemas.openxmlformats.org/drawingml/2006/main" xmlns:r="http://schemas.openxmlformats.org/officeDocument/2006/relationships" xmlns:p="http://schemas.openxmlformats.org/presentationml/2006/main" show="0">
+  <p:cSld>
+    <p:spTree>
+      <p:nvGrpSpPr>
+        <p:cNvPr id="1" name="Shape 323"/>
+        <p:cNvGrpSpPr/>
+        <p:nvPr/>
+      </p:nvGrpSpPr>
+      <p:grpSpPr>
+        <a:xfrm>
+          <a:off x="0" y="0"/>
+          <a:ext cx="0" cy="0"/>
+          <a:chOff x="0" y="0"/>
+          <a:chExt cx="0" cy="0"/>
+        </a:xfrm>
+      </p:grpSpPr>
+      <p:sp>
+        <p:nvSpPr>
+          <p:cNvPr id="324" name="Google Shape;324;p47"/>
+          <p:cNvSpPr txBox="1">
+            <a:spLocks noGrp="1"/>
+          </p:cNvSpPr>
+          <p:nvPr>
+            <p:ph type="title"/>
+          </p:nvPr>
+        </p:nvSpPr>
+        <p:spPr>
+          <a:xfrm>
+            <a:off x="226208" y="1"/>
+            <a:ext cx="8520600" cy="464980"/>
+          </a:xfrm>
+          <a:prstGeom prst="rect">
+            <a:avLst/>
+          </a:prstGeom>
+        </p:spPr>
+        <p:txBody>
+          <a:bodyPr spcFirstLastPara="1" wrap="square" lIns="91425" tIns="91425" rIns="91425" bIns="91425" anchor="t" anchorCtr="0">
+            <a:noAutofit/>
+          </a:bodyPr>
+          <a:lstStyle/>
+          <a:p>
+            <a:pPr marL="0" lvl="0" indent="0" algn="ctr" rtl="0">
+              <a:spcBef>
+                <a:spcPts val="0"/>
+              </a:spcBef>
+              <a:spcAft>
+                <a:spcPts val="0"/>
+              </a:spcAft>
+              <a:buNone/>
+            </a:pPr>
+            <a:r>
+              <a:rPr lang="en-US" dirty="0"/>
+              <a:t>Use </a:t>
+            </a:r>
+            <a:r>
+              <a:rPr lang="en-US" sz="2400" dirty="0"/>
+              <a:t>Assigned</a:t>
+            </a:r>
+            <a:r>
+              <a:rPr lang="en-US" dirty="0"/>
+              <a:t> Seat</a:t>
+            </a:r>
+            <a:endParaRPr dirty="0"/>
+          </a:p>
+        </p:txBody>
+      </p:sp>
+      <p:sp>
+        <p:nvSpPr>
+          <p:cNvPr id="326" name="Google Shape;326;p47"/>
+          <p:cNvSpPr txBox="1">
+            <a:spLocks noGrp="1"/>
+          </p:cNvSpPr>
+          <p:nvPr>
+            <p:ph type="sldNum" idx="12"/>
+          </p:nvPr>
+        </p:nvSpPr>
+        <p:spPr>
+          <a:xfrm>
+            <a:off x="8472458" y="4663217"/>
+            <a:ext cx="548700" cy="393600"/>
+          </a:xfrm>
+          <a:prstGeom prst="rect">
+            <a:avLst/>
+          </a:prstGeom>
+        </p:spPr>
+        <p:txBody>
+          <a:bodyPr spcFirstLastPara="1" wrap="square" lIns="91425" tIns="91425" rIns="91425" bIns="91425" anchor="ctr" anchorCtr="0">
+            <a:noAutofit/>
+          </a:bodyPr>
+          <a:lstStyle/>
+          <a:p>
+            <a:pPr marL="0" lvl="0" indent="0" algn="r" rtl="0">
+              <a:spcBef>
+                <a:spcPts val="0"/>
+              </a:spcBef>
+              <a:spcAft>
+                <a:spcPts val="0"/>
+              </a:spcAft>
+              <a:buNone/>
+            </a:pPr>
+            <a:fld id="{00000000-1234-1234-1234-123412341234}" type="slidenum">
+              <a:rPr lang="en"/>
+              <a:t>12</a:t>
+            </a:fld>
+            <a:endParaRPr/>
+          </a:p>
+        </p:txBody>
+      </p:sp>
+      <p:pic>
+        <p:nvPicPr>
+          <p:cNvPr id="3" name="Picture 2">
+            <a:extLst>
+              <a:ext uri="{FF2B5EF4-FFF2-40B4-BE49-F238E27FC236}">
+                <a16:creationId xmlns:a16="http://schemas.microsoft.com/office/drawing/2014/main" id="{92DE4AAC-70FE-A114-5258-F5B22EDDED45}"/>
+              </a:ext>
+            </a:extLst>
+          </p:cNvPr>
+          <p:cNvPicPr>
+            <a:picLocks noChangeAspect="1"/>
+          </p:cNvPicPr>
+          <p:nvPr/>
+        </p:nvPicPr>
+        <p:blipFill>
+          <a:blip r:embed="rId3"/>
+          <a:stretch>
+            <a:fillRect/>
+          </a:stretch>
+        </p:blipFill>
+        <p:spPr>
+          <a:xfrm>
+            <a:off x="0" y="716280"/>
+            <a:ext cx="9144000" cy="4427218"/>
+          </a:xfrm>
+          <a:prstGeom prst="rect">
+            <a:avLst/>
+          </a:prstGeom>
+        </p:spPr>
+      </p:pic>
+    </p:spTree>
+    <p:extLst>
+      <p:ext uri="{BB962C8B-B14F-4D97-AF65-F5344CB8AC3E}">
+        <p14:creationId xmlns:p14="http://schemas.microsoft.com/office/powerpoint/2010/main" val="1976403023"/>
+      </p:ext>
+    </p:extLst>
+  </p:cSld>
+  <p:clrMapOvr>
+    <a:masterClrMapping/>
+  </p:clrMapOvr>
+</p:sld>
+</file>
+
+<file path=ppt/slides/slide13.xml><?xml version="1.0" encoding="utf-8"?>
+<p:sld xmlns:a="http://schemas.openxmlformats.org/drawingml/2006/main" xmlns:r="http://schemas.openxmlformats.org/officeDocument/2006/relationships" xmlns:p="http://schemas.openxmlformats.org/presentationml/2006/main" show="0">
+  <p:cSld>
+    <p:spTree>
+      <p:nvGrpSpPr>
+        <p:cNvPr id="1" name="Shape 323"/>
+        <p:cNvGrpSpPr/>
+        <p:nvPr/>
+      </p:nvGrpSpPr>
+      <p:grpSpPr>
+        <a:xfrm>
+          <a:off x="0" y="0"/>
+          <a:ext cx="0" cy="0"/>
+          <a:chOff x="0" y="0"/>
+          <a:chExt cx="0" cy="0"/>
+        </a:xfrm>
+      </p:grpSpPr>
+      <p:sp>
+        <p:nvSpPr>
+          <p:cNvPr id="324" name="Google Shape;324;p47"/>
+          <p:cNvSpPr txBox="1">
+            <a:spLocks noGrp="1"/>
+          </p:cNvSpPr>
+          <p:nvPr>
+            <p:ph type="title"/>
+          </p:nvPr>
+        </p:nvSpPr>
+        <p:spPr>
+          <a:xfrm>
+            <a:off x="226208" y="1"/>
+            <a:ext cx="8520600" cy="464980"/>
+          </a:xfrm>
+          <a:prstGeom prst="rect">
+            <a:avLst/>
+          </a:prstGeom>
+        </p:spPr>
+        <p:txBody>
+          <a:bodyPr spcFirstLastPara="1" wrap="square" lIns="91425" tIns="91425" rIns="91425" bIns="91425" anchor="t" anchorCtr="0">
+            <a:noAutofit/>
+          </a:bodyPr>
+          <a:lstStyle/>
+          <a:p>
+            <a:pPr marL="0" lvl="0" indent="0" algn="ctr" rtl="0">
+              <a:spcBef>
+                <a:spcPts val="0"/>
+              </a:spcBef>
+              <a:spcAft>
+                <a:spcPts val="0"/>
+              </a:spcAft>
+              <a:buNone/>
+            </a:pPr>
+            <a:r>
+              <a:rPr lang="en-US" dirty="0"/>
+              <a:t>Use </a:t>
+            </a:r>
+            <a:r>
+              <a:rPr lang="en-US" sz="2400" dirty="0"/>
+              <a:t>Assigned</a:t>
+            </a:r>
+            <a:r>
+              <a:rPr lang="en-US" dirty="0"/>
+              <a:t> Seat</a:t>
+            </a:r>
+            <a:endParaRPr dirty="0"/>
+          </a:p>
+        </p:txBody>
+      </p:sp>
+      <p:sp>
+        <p:nvSpPr>
+          <p:cNvPr id="326" name="Google Shape;326;p47"/>
+          <p:cNvSpPr txBox="1">
+            <a:spLocks noGrp="1"/>
+          </p:cNvSpPr>
+          <p:nvPr>
+            <p:ph type="sldNum" idx="12"/>
+          </p:nvPr>
+        </p:nvSpPr>
+        <p:spPr>
+          <a:xfrm>
+            <a:off x="8472458" y="4663217"/>
+            <a:ext cx="548700" cy="393600"/>
+          </a:xfrm>
+          <a:prstGeom prst="rect">
+            <a:avLst/>
+          </a:prstGeom>
+        </p:spPr>
+        <p:txBody>
+          <a:bodyPr spcFirstLastPara="1" wrap="square" lIns="91425" tIns="91425" rIns="91425" bIns="91425" anchor="ctr" anchorCtr="0">
+            <a:noAutofit/>
+          </a:bodyPr>
+          <a:lstStyle/>
+          <a:p>
+            <a:pPr marL="0" lvl="0" indent="0" algn="r" rtl="0">
+              <a:spcBef>
+                <a:spcPts val="0"/>
+              </a:spcBef>
+              <a:spcAft>
+                <a:spcPts val="0"/>
+              </a:spcAft>
+              <a:buNone/>
+            </a:pPr>
+            <a:fld id="{00000000-1234-1234-1234-123412341234}" type="slidenum">
+              <a:rPr lang="en"/>
+              <a:t>13</a:t>
+            </a:fld>
+            <a:endParaRPr/>
+          </a:p>
+        </p:txBody>
+      </p:sp>
+      <p:pic>
+        <p:nvPicPr>
+          <p:cNvPr id="4" name="Picture 3">
+            <a:extLst>
+              <a:ext uri="{FF2B5EF4-FFF2-40B4-BE49-F238E27FC236}">
+                <a16:creationId xmlns:a16="http://schemas.microsoft.com/office/drawing/2014/main" id="{DCD752B9-EFAE-AFC1-7D39-6763B89DE8D3}"/>
+              </a:ext>
+            </a:extLst>
+          </p:cNvPr>
+          <p:cNvPicPr>
+            <a:picLocks noChangeAspect="1"/>
+          </p:cNvPicPr>
+          <p:nvPr/>
+        </p:nvPicPr>
+        <p:blipFill>
+          <a:blip r:embed="rId3"/>
+          <a:stretch>
+            <a:fillRect/>
+          </a:stretch>
+        </p:blipFill>
+        <p:spPr>
+          <a:xfrm>
+            <a:off x="0" y="652130"/>
+            <a:ext cx="9144000" cy="4491369"/>
+          </a:xfrm>
+          <a:prstGeom prst="rect">
+            <a:avLst/>
+          </a:prstGeom>
+        </p:spPr>
+      </p:pic>
+    </p:spTree>
+    <p:extLst>
+      <p:ext uri="{BB962C8B-B14F-4D97-AF65-F5344CB8AC3E}">
+        <p14:creationId xmlns:p14="http://schemas.microsoft.com/office/powerpoint/2010/main" val="3365057756"/>
+      </p:ext>
+    </p:extLst>
+  </p:cSld>
+  <p:clrMapOvr>
+    <a:masterClrMapping/>
+  </p:clrMapOvr>
+</p:sld>
+</file>
+
+<file path=ppt/slides/slide2.xml><?xml version="1.0" encoding="utf-8"?>
+<p:sld xmlns:a="http://schemas.openxmlformats.org/drawingml/2006/main" xmlns:r="http://schemas.openxmlformats.org/officeDocument/2006/relationships" xmlns:p="http://schemas.openxmlformats.org/presentationml/2006/main" show="0">
+  <p:cSld>
+    <p:spTree>
+      <p:nvGrpSpPr>
+        <p:cNvPr id="1" name="Shape 323"/>
+        <p:cNvGrpSpPr/>
+        <p:nvPr/>
+      </p:nvGrpSpPr>
+      <p:grpSpPr>
+        <a:xfrm>
+          <a:off x="0" y="0"/>
+          <a:ext cx="0" cy="0"/>
+          <a:chOff x="0" y="0"/>
+          <a:chExt cx="0" cy="0"/>
+        </a:xfrm>
+      </p:grpSpPr>
+      <p:sp>
+        <p:nvSpPr>
+          <p:cNvPr id="324" name="Google Shape;324;p47"/>
+          <p:cNvSpPr txBox="1">
+            <a:spLocks noGrp="1"/>
+          </p:cNvSpPr>
+          <p:nvPr>
+            <p:ph type="title"/>
+          </p:nvPr>
+        </p:nvSpPr>
+        <p:spPr>
+          <a:xfrm>
             <a:off x="305858" y="273819"/>
             <a:ext cx="8520600" cy="623700"/>
           </a:xfrm>
@@ -6814,7 +8001,7 @@
             </a:pPr>
             <a:fld id="{00000000-1234-1234-1234-123412341234}" type="slidenum">
               <a:rPr lang="en"/>
-              <a:t>1</a:t>
+              <a:t>2</a:t>
             </a:fld>
             <a:endParaRPr/>
           </a:p>
@@ -7220,615 +8407,7 @@
 </p:sld>
 </file>
 
-<file path=ppt/slides/slide10.xml><?xml version="1.0" encoding="utf-8"?>
-<p:sld xmlns:a="http://schemas.openxmlformats.org/drawingml/2006/main" xmlns:r="http://schemas.openxmlformats.org/officeDocument/2006/relationships" xmlns:p="http://schemas.openxmlformats.org/presentationml/2006/main" show="0">
-  <p:cSld>
-    <p:spTree>
-      <p:nvGrpSpPr>
-        <p:cNvPr id="1" name="Shape 323"/>
-        <p:cNvGrpSpPr/>
-        <p:nvPr/>
-      </p:nvGrpSpPr>
-      <p:grpSpPr>
-        <a:xfrm>
-          <a:off x="0" y="0"/>
-          <a:ext cx="0" cy="0"/>
-          <a:chOff x="0" y="0"/>
-          <a:chExt cx="0" cy="0"/>
-        </a:xfrm>
-      </p:grpSpPr>
-      <p:sp>
-        <p:nvSpPr>
-          <p:cNvPr id="324" name="Google Shape;324;p47"/>
-          <p:cNvSpPr txBox="1">
-            <a:spLocks noGrp="1"/>
-          </p:cNvSpPr>
-          <p:nvPr>
-            <p:ph type="title"/>
-          </p:nvPr>
-        </p:nvSpPr>
-        <p:spPr>
-          <a:xfrm>
-            <a:off x="226208" y="1"/>
-            <a:ext cx="8520600" cy="464980"/>
-          </a:xfrm>
-          <a:prstGeom prst="rect">
-            <a:avLst/>
-          </a:prstGeom>
-        </p:spPr>
-        <p:txBody>
-          <a:bodyPr spcFirstLastPara="1" wrap="square" lIns="91425" tIns="91425" rIns="91425" bIns="91425" anchor="t" anchorCtr="0">
-            <a:noAutofit/>
-          </a:bodyPr>
-          <a:lstStyle/>
-          <a:p>
-            <a:pPr marL="0" lvl="0" indent="0" algn="ctr" rtl="0">
-              <a:spcBef>
-                <a:spcPts val="0"/>
-              </a:spcBef>
-              <a:spcAft>
-                <a:spcPts val="0"/>
-              </a:spcAft>
-              <a:buNone/>
-            </a:pPr>
-            <a:r>
-              <a:rPr lang="en-US" dirty="0"/>
-              <a:t>Use </a:t>
-            </a:r>
-            <a:r>
-              <a:rPr lang="en-US" sz="2400" dirty="0"/>
-              <a:t>Assigned</a:t>
-            </a:r>
-            <a:r>
-              <a:rPr lang="en-US" dirty="0"/>
-              <a:t> Seat</a:t>
-            </a:r>
-            <a:endParaRPr dirty="0"/>
-          </a:p>
-        </p:txBody>
-      </p:sp>
-      <p:sp>
-        <p:nvSpPr>
-          <p:cNvPr id="326" name="Google Shape;326;p47"/>
-          <p:cNvSpPr txBox="1">
-            <a:spLocks noGrp="1"/>
-          </p:cNvSpPr>
-          <p:nvPr>
-            <p:ph type="sldNum" idx="12"/>
-          </p:nvPr>
-        </p:nvSpPr>
-        <p:spPr>
-          <a:xfrm>
-            <a:off x="8472458" y="4663217"/>
-            <a:ext cx="548700" cy="393600"/>
-          </a:xfrm>
-          <a:prstGeom prst="rect">
-            <a:avLst/>
-          </a:prstGeom>
-        </p:spPr>
-        <p:txBody>
-          <a:bodyPr spcFirstLastPara="1" wrap="square" lIns="91425" tIns="91425" rIns="91425" bIns="91425" anchor="ctr" anchorCtr="0">
-            <a:noAutofit/>
-          </a:bodyPr>
-          <a:lstStyle/>
-          <a:p>
-            <a:pPr marL="0" lvl="0" indent="0" algn="r" rtl="0">
-              <a:spcBef>
-                <a:spcPts val="0"/>
-              </a:spcBef>
-              <a:spcAft>
-                <a:spcPts val="0"/>
-              </a:spcAft>
-              <a:buNone/>
-            </a:pPr>
-            <a:fld id="{00000000-1234-1234-1234-123412341234}" type="slidenum">
-              <a:rPr lang="en"/>
-              <a:t>10</a:t>
-            </a:fld>
-            <a:endParaRPr/>
-          </a:p>
-        </p:txBody>
-      </p:sp>
-      <p:pic>
-        <p:nvPicPr>
-          <p:cNvPr id="3" name="Picture 2">
-            <a:extLst>
-              <a:ext uri="{FF2B5EF4-FFF2-40B4-BE49-F238E27FC236}">
-                <a16:creationId xmlns:a16="http://schemas.microsoft.com/office/drawing/2014/main" id="{565A4964-E8A9-A46D-F4BE-E7D41C14EF1B}"/>
-              </a:ext>
-            </a:extLst>
-          </p:cNvPr>
-          <p:cNvPicPr>
-            <a:picLocks noChangeAspect="1"/>
-          </p:cNvPicPr>
-          <p:nvPr/>
-        </p:nvPicPr>
-        <p:blipFill>
-          <a:blip r:embed="rId3"/>
-          <a:stretch>
-            <a:fillRect/>
-          </a:stretch>
-        </p:blipFill>
-        <p:spPr>
-          <a:xfrm>
-            <a:off x="0" y="559220"/>
-            <a:ext cx="9144000" cy="4471763"/>
-          </a:xfrm>
-          <a:prstGeom prst="rect">
-            <a:avLst/>
-          </a:prstGeom>
-        </p:spPr>
-      </p:pic>
-    </p:spTree>
-    <p:extLst>
-      <p:ext uri="{BB962C8B-B14F-4D97-AF65-F5344CB8AC3E}">
-        <p14:creationId xmlns:p14="http://schemas.microsoft.com/office/powerpoint/2010/main" val="2495509868"/>
-      </p:ext>
-    </p:extLst>
-  </p:cSld>
-  <p:clrMapOvr>
-    <a:masterClrMapping/>
-  </p:clrMapOvr>
-</p:sld>
-</file>
-
-<file path=ppt/slides/slide11.xml><?xml version="1.0" encoding="utf-8"?>
-<p:sld xmlns:a="http://schemas.openxmlformats.org/drawingml/2006/main" xmlns:r="http://schemas.openxmlformats.org/officeDocument/2006/relationships" xmlns:p="http://schemas.openxmlformats.org/presentationml/2006/main" show="0">
-  <p:cSld>
-    <p:spTree>
-      <p:nvGrpSpPr>
-        <p:cNvPr id="1" name="Shape 323"/>
-        <p:cNvGrpSpPr/>
-        <p:nvPr/>
-      </p:nvGrpSpPr>
-      <p:grpSpPr>
-        <a:xfrm>
-          <a:off x="0" y="0"/>
-          <a:ext cx="0" cy="0"/>
-          <a:chOff x="0" y="0"/>
-          <a:chExt cx="0" cy="0"/>
-        </a:xfrm>
-      </p:grpSpPr>
-      <p:sp>
-        <p:nvSpPr>
-          <p:cNvPr id="324" name="Google Shape;324;p47"/>
-          <p:cNvSpPr txBox="1">
-            <a:spLocks noGrp="1"/>
-          </p:cNvSpPr>
-          <p:nvPr>
-            <p:ph type="title"/>
-          </p:nvPr>
-        </p:nvSpPr>
-        <p:spPr>
-          <a:xfrm>
-            <a:off x="226208" y="1"/>
-            <a:ext cx="8520600" cy="464980"/>
-          </a:xfrm>
-          <a:prstGeom prst="rect">
-            <a:avLst/>
-          </a:prstGeom>
-        </p:spPr>
-        <p:txBody>
-          <a:bodyPr spcFirstLastPara="1" wrap="square" lIns="91425" tIns="91425" rIns="91425" bIns="91425" anchor="t" anchorCtr="0">
-            <a:noAutofit/>
-          </a:bodyPr>
-          <a:lstStyle/>
-          <a:p>
-            <a:pPr marL="0" lvl="0" indent="0" algn="ctr" rtl="0">
-              <a:spcBef>
-                <a:spcPts val="0"/>
-              </a:spcBef>
-              <a:spcAft>
-                <a:spcPts val="0"/>
-              </a:spcAft>
-              <a:buNone/>
-            </a:pPr>
-            <a:r>
-              <a:rPr lang="en-US" dirty="0"/>
-              <a:t>Use </a:t>
-            </a:r>
-            <a:r>
-              <a:rPr lang="en-US" sz="2400" dirty="0"/>
-              <a:t>Assigned</a:t>
-            </a:r>
-            <a:r>
-              <a:rPr lang="en-US" dirty="0"/>
-              <a:t> Seat</a:t>
-            </a:r>
-            <a:endParaRPr dirty="0"/>
-          </a:p>
-        </p:txBody>
-      </p:sp>
-      <p:sp>
-        <p:nvSpPr>
-          <p:cNvPr id="326" name="Google Shape;326;p47"/>
-          <p:cNvSpPr txBox="1">
-            <a:spLocks noGrp="1"/>
-          </p:cNvSpPr>
-          <p:nvPr>
-            <p:ph type="sldNum" idx="12"/>
-          </p:nvPr>
-        </p:nvSpPr>
-        <p:spPr>
-          <a:xfrm>
-            <a:off x="8472458" y="4663217"/>
-            <a:ext cx="548700" cy="393600"/>
-          </a:xfrm>
-          <a:prstGeom prst="rect">
-            <a:avLst/>
-          </a:prstGeom>
-        </p:spPr>
-        <p:txBody>
-          <a:bodyPr spcFirstLastPara="1" wrap="square" lIns="91425" tIns="91425" rIns="91425" bIns="91425" anchor="ctr" anchorCtr="0">
-            <a:noAutofit/>
-          </a:bodyPr>
-          <a:lstStyle/>
-          <a:p>
-            <a:pPr marL="0" lvl="0" indent="0" algn="r" rtl="0">
-              <a:spcBef>
-                <a:spcPts val="0"/>
-              </a:spcBef>
-              <a:spcAft>
-                <a:spcPts val="0"/>
-              </a:spcAft>
-              <a:buNone/>
-            </a:pPr>
-            <a:fld id="{00000000-1234-1234-1234-123412341234}" type="slidenum">
-              <a:rPr lang="en"/>
-              <a:t>11</a:t>
-            </a:fld>
-            <a:endParaRPr/>
-          </a:p>
-        </p:txBody>
-      </p:sp>
-      <p:pic>
-        <p:nvPicPr>
-          <p:cNvPr id="6" name="Picture 5">
-            <a:extLst>
-              <a:ext uri="{FF2B5EF4-FFF2-40B4-BE49-F238E27FC236}">
-                <a16:creationId xmlns:a16="http://schemas.microsoft.com/office/drawing/2014/main" id="{DED32793-7C09-E3A3-94E5-B5D46727A1D0}"/>
-              </a:ext>
-            </a:extLst>
-          </p:cNvPr>
-          <p:cNvPicPr>
-            <a:picLocks noChangeAspect="1"/>
-          </p:cNvPicPr>
-          <p:nvPr/>
-        </p:nvPicPr>
-        <p:blipFill>
-          <a:blip r:embed="rId3"/>
-          <a:stretch>
-            <a:fillRect/>
-          </a:stretch>
-        </p:blipFill>
-        <p:spPr>
-          <a:xfrm>
-            <a:off x="-1" y="551663"/>
-            <a:ext cx="9144001" cy="4591837"/>
-          </a:xfrm>
-          <a:prstGeom prst="rect">
-            <a:avLst/>
-          </a:prstGeom>
-        </p:spPr>
-      </p:pic>
-    </p:spTree>
-    <p:extLst>
-      <p:ext uri="{BB962C8B-B14F-4D97-AF65-F5344CB8AC3E}">
-        <p14:creationId xmlns:p14="http://schemas.microsoft.com/office/powerpoint/2010/main" val="4226348449"/>
-      </p:ext>
-    </p:extLst>
-  </p:cSld>
-  <p:clrMapOvr>
-    <a:masterClrMapping/>
-  </p:clrMapOvr>
-</p:sld>
-</file>
-
-<file path=ppt/slides/slide12.xml><?xml version="1.0" encoding="utf-8"?>
-<p:sld xmlns:a="http://schemas.openxmlformats.org/drawingml/2006/main" xmlns:r="http://schemas.openxmlformats.org/officeDocument/2006/relationships" xmlns:p="http://schemas.openxmlformats.org/presentationml/2006/main" show="0">
-  <p:cSld>
-    <p:spTree>
-      <p:nvGrpSpPr>
-        <p:cNvPr id="1" name="Shape 323"/>
-        <p:cNvGrpSpPr/>
-        <p:nvPr/>
-      </p:nvGrpSpPr>
-      <p:grpSpPr>
-        <a:xfrm>
-          <a:off x="0" y="0"/>
-          <a:ext cx="0" cy="0"/>
-          <a:chOff x="0" y="0"/>
-          <a:chExt cx="0" cy="0"/>
-        </a:xfrm>
-      </p:grpSpPr>
-      <p:sp>
-        <p:nvSpPr>
-          <p:cNvPr id="324" name="Google Shape;324;p47"/>
-          <p:cNvSpPr txBox="1">
-            <a:spLocks noGrp="1"/>
-          </p:cNvSpPr>
-          <p:nvPr>
-            <p:ph type="title"/>
-          </p:nvPr>
-        </p:nvSpPr>
-        <p:spPr>
-          <a:xfrm>
-            <a:off x="226208" y="1"/>
-            <a:ext cx="8520600" cy="464980"/>
-          </a:xfrm>
-          <a:prstGeom prst="rect">
-            <a:avLst/>
-          </a:prstGeom>
-        </p:spPr>
-        <p:txBody>
-          <a:bodyPr spcFirstLastPara="1" wrap="square" lIns="91425" tIns="91425" rIns="91425" bIns="91425" anchor="t" anchorCtr="0">
-            <a:noAutofit/>
-          </a:bodyPr>
-          <a:lstStyle/>
-          <a:p>
-            <a:pPr marL="0" lvl="0" indent="0" algn="ctr" rtl="0">
-              <a:spcBef>
-                <a:spcPts val="0"/>
-              </a:spcBef>
-              <a:spcAft>
-                <a:spcPts val="0"/>
-              </a:spcAft>
-              <a:buNone/>
-            </a:pPr>
-            <a:r>
-              <a:rPr lang="en-US" dirty="0"/>
-              <a:t>Use </a:t>
-            </a:r>
-            <a:r>
-              <a:rPr lang="en-US" sz="2400" dirty="0"/>
-              <a:t>Assigned</a:t>
-            </a:r>
-            <a:r>
-              <a:rPr lang="en-US" dirty="0"/>
-              <a:t> Seat</a:t>
-            </a:r>
-            <a:endParaRPr dirty="0"/>
-          </a:p>
-        </p:txBody>
-      </p:sp>
-      <p:sp>
-        <p:nvSpPr>
-          <p:cNvPr id="326" name="Google Shape;326;p47"/>
-          <p:cNvSpPr txBox="1">
-            <a:spLocks noGrp="1"/>
-          </p:cNvSpPr>
-          <p:nvPr>
-            <p:ph type="sldNum" idx="12"/>
-          </p:nvPr>
-        </p:nvSpPr>
-        <p:spPr>
-          <a:xfrm>
-            <a:off x="8472458" y="4663217"/>
-            <a:ext cx="548700" cy="393600"/>
-          </a:xfrm>
-          <a:prstGeom prst="rect">
-            <a:avLst/>
-          </a:prstGeom>
-        </p:spPr>
-        <p:txBody>
-          <a:bodyPr spcFirstLastPara="1" wrap="square" lIns="91425" tIns="91425" rIns="91425" bIns="91425" anchor="ctr" anchorCtr="0">
-            <a:noAutofit/>
-          </a:bodyPr>
-          <a:lstStyle/>
-          <a:p>
-            <a:pPr marL="0" lvl="0" indent="0" algn="r" rtl="0">
-              <a:spcBef>
-                <a:spcPts val="0"/>
-              </a:spcBef>
-              <a:spcAft>
-                <a:spcPts val="0"/>
-              </a:spcAft>
-              <a:buNone/>
-            </a:pPr>
-            <a:fld id="{00000000-1234-1234-1234-123412341234}" type="slidenum">
-              <a:rPr lang="en"/>
-              <a:t>12</a:t>
-            </a:fld>
-            <a:endParaRPr/>
-          </a:p>
-        </p:txBody>
-      </p:sp>
-      <p:pic>
-        <p:nvPicPr>
-          <p:cNvPr id="3" name="Picture 2">
-            <a:extLst>
-              <a:ext uri="{FF2B5EF4-FFF2-40B4-BE49-F238E27FC236}">
-                <a16:creationId xmlns:a16="http://schemas.microsoft.com/office/drawing/2014/main" id="{92DE4AAC-70FE-A114-5258-F5B22EDDED45}"/>
-              </a:ext>
-            </a:extLst>
-          </p:cNvPr>
-          <p:cNvPicPr>
-            <a:picLocks noChangeAspect="1"/>
-          </p:cNvPicPr>
-          <p:nvPr/>
-        </p:nvPicPr>
-        <p:blipFill>
-          <a:blip r:embed="rId3"/>
-          <a:stretch>
-            <a:fillRect/>
-          </a:stretch>
-        </p:blipFill>
-        <p:spPr>
-          <a:xfrm>
-            <a:off x="0" y="716280"/>
-            <a:ext cx="9144000" cy="4427218"/>
-          </a:xfrm>
-          <a:prstGeom prst="rect">
-            <a:avLst/>
-          </a:prstGeom>
-        </p:spPr>
-      </p:pic>
-    </p:spTree>
-    <p:extLst>
-      <p:ext uri="{BB962C8B-B14F-4D97-AF65-F5344CB8AC3E}">
-        <p14:creationId xmlns:p14="http://schemas.microsoft.com/office/powerpoint/2010/main" val="1976403023"/>
-      </p:ext>
-    </p:extLst>
-  </p:cSld>
-  <p:clrMapOvr>
-    <a:masterClrMapping/>
-  </p:clrMapOvr>
-</p:sld>
-</file>
-
-<file path=ppt/slides/slide13.xml><?xml version="1.0" encoding="utf-8"?>
-<p:sld xmlns:a="http://schemas.openxmlformats.org/drawingml/2006/main" xmlns:r="http://schemas.openxmlformats.org/officeDocument/2006/relationships" xmlns:p="http://schemas.openxmlformats.org/presentationml/2006/main" show="0">
-  <p:cSld>
-    <p:spTree>
-      <p:nvGrpSpPr>
-        <p:cNvPr id="1" name="Shape 323"/>
-        <p:cNvGrpSpPr/>
-        <p:nvPr/>
-      </p:nvGrpSpPr>
-      <p:grpSpPr>
-        <a:xfrm>
-          <a:off x="0" y="0"/>
-          <a:ext cx="0" cy="0"/>
-          <a:chOff x="0" y="0"/>
-          <a:chExt cx="0" cy="0"/>
-        </a:xfrm>
-      </p:grpSpPr>
-      <p:sp>
-        <p:nvSpPr>
-          <p:cNvPr id="324" name="Google Shape;324;p47"/>
-          <p:cNvSpPr txBox="1">
-            <a:spLocks noGrp="1"/>
-          </p:cNvSpPr>
-          <p:nvPr>
-            <p:ph type="title"/>
-          </p:nvPr>
-        </p:nvSpPr>
-        <p:spPr>
-          <a:xfrm>
-            <a:off x="226208" y="1"/>
-            <a:ext cx="8520600" cy="464980"/>
-          </a:xfrm>
-          <a:prstGeom prst="rect">
-            <a:avLst/>
-          </a:prstGeom>
-        </p:spPr>
-        <p:txBody>
-          <a:bodyPr spcFirstLastPara="1" wrap="square" lIns="91425" tIns="91425" rIns="91425" bIns="91425" anchor="t" anchorCtr="0">
-            <a:noAutofit/>
-          </a:bodyPr>
-          <a:lstStyle/>
-          <a:p>
-            <a:pPr marL="0" lvl="0" indent="0" algn="ctr" rtl="0">
-              <a:spcBef>
-                <a:spcPts val="0"/>
-              </a:spcBef>
-              <a:spcAft>
-                <a:spcPts val="0"/>
-              </a:spcAft>
-              <a:buNone/>
-            </a:pPr>
-            <a:r>
-              <a:rPr lang="en-US" dirty="0"/>
-              <a:t>Use </a:t>
-            </a:r>
-            <a:r>
-              <a:rPr lang="en-US" sz="2400" dirty="0"/>
-              <a:t>Assigned</a:t>
-            </a:r>
-            <a:r>
-              <a:rPr lang="en-US" dirty="0"/>
-              <a:t> Seat</a:t>
-            </a:r>
-            <a:endParaRPr dirty="0"/>
-          </a:p>
-        </p:txBody>
-      </p:sp>
-      <p:sp>
-        <p:nvSpPr>
-          <p:cNvPr id="326" name="Google Shape;326;p47"/>
-          <p:cNvSpPr txBox="1">
-            <a:spLocks noGrp="1"/>
-          </p:cNvSpPr>
-          <p:nvPr>
-            <p:ph type="sldNum" idx="12"/>
-          </p:nvPr>
-        </p:nvSpPr>
-        <p:spPr>
-          <a:xfrm>
-            <a:off x="8472458" y="4663217"/>
-            <a:ext cx="548700" cy="393600"/>
-          </a:xfrm>
-          <a:prstGeom prst="rect">
-            <a:avLst/>
-          </a:prstGeom>
-        </p:spPr>
-        <p:txBody>
-          <a:bodyPr spcFirstLastPara="1" wrap="square" lIns="91425" tIns="91425" rIns="91425" bIns="91425" anchor="ctr" anchorCtr="0">
-            <a:noAutofit/>
-          </a:bodyPr>
-          <a:lstStyle/>
-          <a:p>
-            <a:pPr marL="0" lvl="0" indent="0" algn="r" rtl="0">
-              <a:spcBef>
-                <a:spcPts val="0"/>
-              </a:spcBef>
-              <a:spcAft>
-                <a:spcPts val="0"/>
-              </a:spcAft>
-              <a:buNone/>
-            </a:pPr>
-            <a:fld id="{00000000-1234-1234-1234-123412341234}" type="slidenum">
-              <a:rPr lang="en"/>
-              <a:t>13</a:t>
-            </a:fld>
-            <a:endParaRPr/>
-          </a:p>
-        </p:txBody>
-      </p:sp>
-      <p:pic>
-        <p:nvPicPr>
-          <p:cNvPr id="4" name="Picture 3">
-            <a:extLst>
-              <a:ext uri="{FF2B5EF4-FFF2-40B4-BE49-F238E27FC236}">
-                <a16:creationId xmlns:a16="http://schemas.microsoft.com/office/drawing/2014/main" id="{DCD752B9-EFAE-AFC1-7D39-6763B89DE8D3}"/>
-              </a:ext>
-            </a:extLst>
-          </p:cNvPr>
-          <p:cNvPicPr>
-            <a:picLocks noChangeAspect="1"/>
-          </p:cNvPicPr>
-          <p:nvPr/>
-        </p:nvPicPr>
-        <p:blipFill>
-          <a:blip r:embed="rId3"/>
-          <a:stretch>
-            <a:fillRect/>
-          </a:stretch>
-        </p:blipFill>
-        <p:spPr>
-          <a:xfrm>
-            <a:off x="0" y="652130"/>
-            <a:ext cx="9144000" cy="4491369"/>
-          </a:xfrm>
-          <a:prstGeom prst="rect">
-            <a:avLst/>
-          </a:prstGeom>
-        </p:spPr>
-      </p:pic>
-    </p:spTree>
-    <p:extLst>
-      <p:ext uri="{BB962C8B-B14F-4D97-AF65-F5344CB8AC3E}">
-        <p14:creationId xmlns:p14="http://schemas.microsoft.com/office/powerpoint/2010/main" val="3365057756"/>
-      </p:ext>
-    </p:extLst>
-  </p:cSld>
-  <p:clrMapOvr>
-    <a:masterClrMapping/>
-  </p:clrMapOvr>
-</p:sld>
-</file>
-
-<file path=ppt/slides/slide2.xml><?xml version="1.0" encoding="utf-8"?>
+<file path=ppt/slides/slide3.xml><?xml version="1.0" encoding="utf-8"?>
 <p:sld xmlns:a="http://schemas.openxmlformats.org/drawingml/2006/main" xmlns:r="http://schemas.openxmlformats.org/officeDocument/2006/relationships" xmlns:p="http://schemas.openxmlformats.org/presentationml/2006/main" show="0">
   <p:cSld>
     <p:spTree>
@@ -8012,7 +8591,7 @@
             </a:pPr>
             <a:fld id="{00000000-1234-1234-1234-123412341234}" type="slidenum">
               <a:rPr lang="en"/>
-              <a:t>2</a:t>
+              <a:t>3</a:t>
             </a:fld>
             <a:endParaRPr/>
           </a:p>
@@ -8758,7 +9337,7 @@
 </p:sld>
 </file>
 
-<file path=ppt/slides/slide3.xml><?xml version="1.0" encoding="utf-8"?>
+<file path=ppt/slides/slide4.xml><?xml version="1.0" encoding="utf-8"?>
 <p:sld xmlns:a="http://schemas.openxmlformats.org/drawingml/2006/main" xmlns:r="http://schemas.openxmlformats.org/officeDocument/2006/relationships" xmlns:p="http://schemas.openxmlformats.org/presentationml/2006/main" show="0">
   <p:cSld>
     <p:spTree>
@@ -8950,7 +9529,7 @@
             </a:pPr>
             <a:fld id="{00000000-1234-1234-1234-123412341234}" type="slidenum">
               <a:rPr lang="en"/>
-              <a:t>3</a:t>
+              <a:t>4</a:t>
             </a:fld>
             <a:endParaRPr/>
           </a:p>
@@ -9364,7 +9943,7 @@
 </p:sld>
 </file>
 
-<file path=ppt/slides/slide4.xml><?xml version="1.0" encoding="utf-8"?>
+<file path=ppt/slides/slide5.xml><?xml version="1.0" encoding="utf-8"?>
 <p:sld xmlns:a="http://schemas.openxmlformats.org/drawingml/2006/main" xmlns:r="http://schemas.openxmlformats.org/officeDocument/2006/relationships" xmlns:p="http://schemas.openxmlformats.org/presentationml/2006/main" show="0">
   <p:cSld>
     <p:spTree>
@@ -9459,7 +10038,7 @@
             </a:pPr>
             <a:fld id="{00000000-1234-1234-1234-123412341234}" type="slidenum">
               <a:rPr lang="en"/>
-              <a:t>4</a:t>
+              <a:t>5</a:t>
             </a:fld>
             <a:endParaRPr/>
           </a:p>
@@ -9923,579 +10502,6 @@
     <p:extLst>
       <p:ext uri="{BB962C8B-B14F-4D97-AF65-F5344CB8AC3E}">
         <p14:creationId xmlns:p14="http://schemas.microsoft.com/office/powerpoint/2010/main" val="604294447"/>
-      </p:ext>
-    </p:extLst>
-  </p:cSld>
-  <p:clrMapOvr>
-    <a:masterClrMapping/>
-  </p:clrMapOvr>
-</p:sld>
-</file>
-
-<file path=ppt/slides/slide5.xml><?xml version="1.0" encoding="utf-8"?>
-<p:sld xmlns:a="http://schemas.openxmlformats.org/drawingml/2006/main" xmlns:r="http://schemas.openxmlformats.org/officeDocument/2006/relationships" xmlns:p="http://schemas.openxmlformats.org/presentationml/2006/main" show="0">
-  <p:cSld>
-    <p:spTree>
-      <p:nvGrpSpPr>
-        <p:cNvPr id="1" name="Shape 323"/>
-        <p:cNvGrpSpPr/>
-        <p:nvPr/>
-      </p:nvGrpSpPr>
-      <p:grpSpPr>
-        <a:xfrm>
-          <a:off x="0" y="0"/>
-          <a:ext cx="0" cy="0"/>
-          <a:chOff x="0" y="0"/>
-          <a:chExt cx="0" cy="0"/>
-        </a:xfrm>
-      </p:grpSpPr>
-      <p:sp>
-        <p:nvSpPr>
-          <p:cNvPr id="324" name="Google Shape;324;p47"/>
-          <p:cNvSpPr txBox="1">
-            <a:spLocks noGrp="1"/>
-          </p:cNvSpPr>
-          <p:nvPr>
-            <p:ph type="title"/>
-          </p:nvPr>
-        </p:nvSpPr>
-        <p:spPr>
-          <a:xfrm>
-            <a:off x="314621" y="235914"/>
-            <a:ext cx="8520600" cy="623700"/>
-          </a:xfrm>
-          <a:prstGeom prst="rect">
-            <a:avLst/>
-          </a:prstGeom>
-        </p:spPr>
-        <p:txBody>
-          <a:bodyPr spcFirstLastPara="1" wrap="square" lIns="91425" tIns="91425" rIns="91425" bIns="91425" anchor="t" anchorCtr="0">
-            <a:noAutofit/>
-          </a:bodyPr>
-          <a:lstStyle/>
-          <a:p>
-            <a:pPr marL="0" lvl="0" indent="0" algn="ctr" rtl="0">
-              <a:spcBef>
-                <a:spcPts val="0"/>
-              </a:spcBef>
-              <a:spcAft>
-                <a:spcPts val="0"/>
-              </a:spcAft>
-              <a:buNone/>
-            </a:pPr>
-            <a:r>
-              <a:rPr lang="en-US" dirty="0"/>
-              <a:t>GCIS – Software Development and Problem Solving</a:t>
-            </a:r>
-            <a:endParaRPr dirty="0"/>
-          </a:p>
-        </p:txBody>
-      </p:sp>
-      <p:sp>
-        <p:nvSpPr>
-          <p:cNvPr id="325" name="Google Shape;325;p47"/>
-          <p:cNvSpPr txBox="1">
-            <a:spLocks noGrp="1"/>
-          </p:cNvSpPr>
-          <p:nvPr>
-            <p:ph type="body" idx="1"/>
-          </p:nvPr>
-        </p:nvSpPr>
-        <p:spPr>
-          <a:xfrm>
-            <a:off x="0" y="1856257"/>
-            <a:ext cx="9149842" cy="1226403"/>
-          </a:xfrm>
-          <a:prstGeom prst="rect">
-            <a:avLst/>
-          </a:prstGeom>
-        </p:spPr>
-        <p:txBody>
-          <a:bodyPr spcFirstLastPara="1" wrap="square" lIns="91425" tIns="91425" rIns="91425" bIns="91425" anchor="ctr" anchorCtr="0">
-            <a:noAutofit/>
-          </a:bodyPr>
-          <a:lstStyle/>
-          <a:p>
-            <a:pPr marL="146050" indent="0" algn="ctr">
-              <a:buNone/>
-            </a:pPr>
-            <a:r>
-              <a:rPr lang="en-US" sz="2400" dirty="0"/>
-              <a:t>Take Quiz – Midterm Exam 2</a:t>
-            </a:r>
-          </a:p>
-          <a:p>
-            <a:pPr marL="146050" indent="0" algn="ctr">
-              <a:buNone/>
-            </a:pPr>
-            <a:r>
-              <a:rPr lang="en-US" sz="3200" b="1" dirty="0">
-                <a:solidFill>
-                  <a:schemeClr val="tx1"/>
-                </a:solidFill>
-              </a:rPr>
-              <a:t>Password -</a:t>
-            </a:r>
-            <a:r>
-              <a:rPr lang="en-US" sz="3200" b="1">
-                <a:solidFill>
-                  <a:schemeClr val="tx1"/>
-                </a:solidFill>
-              </a:rPr>
-              <a:t>CompareIterators</a:t>
-            </a:r>
-            <a:endParaRPr sz="3200" b="1" dirty="0">
-              <a:solidFill>
-                <a:schemeClr val="tx1"/>
-              </a:solidFill>
-              <a:highlight>
-                <a:srgbClr val="FFFF00"/>
-              </a:highlight>
-            </a:endParaRPr>
-          </a:p>
-        </p:txBody>
-      </p:sp>
-      <p:sp>
-        <p:nvSpPr>
-          <p:cNvPr id="326" name="Google Shape;326;p47"/>
-          <p:cNvSpPr txBox="1">
-            <a:spLocks noGrp="1"/>
-          </p:cNvSpPr>
-          <p:nvPr>
-            <p:ph type="sldNum" idx="12"/>
-          </p:nvPr>
-        </p:nvSpPr>
-        <p:spPr>
-          <a:xfrm>
-            <a:off x="8472458" y="4663217"/>
-            <a:ext cx="548700" cy="393600"/>
-          </a:xfrm>
-          <a:prstGeom prst="rect">
-            <a:avLst/>
-          </a:prstGeom>
-        </p:spPr>
-        <p:txBody>
-          <a:bodyPr spcFirstLastPara="1" wrap="square" lIns="91425" tIns="91425" rIns="91425" bIns="91425" anchor="ctr" anchorCtr="0">
-            <a:noAutofit/>
-          </a:bodyPr>
-          <a:lstStyle/>
-          <a:p>
-            <a:pPr marL="0" lvl="0" indent="0" algn="r" rtl="0">
-              <a:spcBef>
-                <a:spcPts val="0"/>
-              </a:spcBef>
-              <a:spcAft>
-                <a:spcPts val="0"/>
-              </a:spcAft>
-              <a:buNone/>
-            </a:pPr>
-            <a:fld id="{00000000-1234-1234-1234-123412341234}" type="slidenum">
-              <a:rPr lang="en"/>
-              <a:t>5</a:t>
-            </a:fld>
-            <a:endParaRPr/>
-          </a:p>
-        </p:txBody>
-      </p:sp>
-      <p:sp>
-        <p:nvSpPr>
-          <p:cNvPr id="2" name="TextBox 1">
-            <a:extLst>
-              <a:ext uri="{FF2B5EF4-FFF2-40B4-BE49-F238E27FC236}">
-                <a16:creationId xmlns:a16="http://schemas.microsoft.com/office/drawing/2014/main" id="{DCC33EBB-1C9D-B9A9-88E6-F3466077417F}"/>
-              </a:ext>
-            </a:extLst>
-          </p:cNvPr>
-          <p:cNvSpPr txBox="1"/>
-          <p:nvPr/>
-        </p:nvSpPr>
-        <p:spPr>
-          <a:xfrm>
-            <a:off x="-5842" y="1277369"/>
-            <a:ext cx="9144000" cy="307777"/>
-          </a:xfrm>
-          <a:prstGeom prst="rect">
-            <a:avLst/>
-          </a:prstGeom>
-          <a:solidFill>
-            <a:srgbClr val="FFC000"/>
-          </a:solidFill>
-        </p:spPr>
-        <p:txBody>
-          <a:bodyPr wrap="square" rtlCol="0">
-            <a:spAutoFit/>
-          </a:bodyPr>
-          <a:lstStyle/>
-          <a:p>
-            <a:pPr algn="ctr"/>
-            <a:r>
-              <a:rPr lang="en-US" b="1" dirty="0"/>
-              <a:t>Midterm Exam 2 - Written</a:t>
-            </a:r>
-          </a:p>
-        </p:txBody>
-      </p:sp>
-      <p:sp>
-        <p:nvSpPr>
-          <p:cNvPr id="3" name="TextBox 2">
-            <a:extLst>
-              <a:ext uri="{FF2B5EF4-FFF2-40B4-BE49-F238E27FC236}">
-                <a16:creationId xmlns:a16="http://schemas.microsoft.com/office/drawing/2014/main" id="{25A19346-2F9F-0DB9-0B08-CF872EB1D563}"/>
-              </a:ext>
-            </a:extLst>
-          </p:cNvPr>
-          <p:cNvSpPr txBox="1"/>
-          <p:nvPr/>
-        </p:nvSpPr>
-        <p:spPr>
-          <a:xfrm>
-            <a:off x="0" y="3313985"/>
-            <a:ext cx="9144000" cy="307777"/>
-          </a:xfrm>
-          <a:prstGeom prst="rect">
-            <a:avLst/>
-          </a:prstGeom>
-          <a:solidFill>
-            <a:srgbClr val="FFC000"/>
-          </a:solidFill>
-        </p:spPr>
-        <p:txBody>
-          <a:bodyPr wrap="square" rtlCol="0">
-            <a:spAutoFit/>
-          </a:bodyPr>
-          <a:lstStyle/>
-          <a:p>
-            <a:r>
-              <a:rPr lang="en-US" dirty="0"/>
-              <a:t>Practicum</a:t>
-            </a:r>
-          </a:p>
-        </p:txBody>
-      </p:sp>
-      <p:sp>
-        <p:nvSpPr>
-          <p:cNvPr id="4" name="Google Shape;325;p47">
-            <a:extLst>
-              <a:ext uri="{FF2B5EF4-FFF2-40B4-BE49-F238E27FC236}">
-                <a16:creationId xmlns:a16="http://schemas.microsoft.com/office/drawing/2014/main" id="{11D0E6FB-E344-369B-CE83-B3CF5834F823}"/>
-              </a:ext>
-            </a:extLst>
-          </p:cNvPr>
-          <p:cNvSpPr txBox="1">
-            <a:spLocks/>
-          </p:cNvSpPr>
-          <p:nvPr/>
-        </p:nvSpPr>
-        <p:spPr>
-          <a:xfrm>
-            <a:off x="122842" y="3621762"/>
-            <a:ext cx="8478300" cy="1435054"/>
-          </a:xfrm>
-          <a:prstGeom prst="rect">
-            <a:avLst/>
-          </a:prstGeom>
-          <a:noFill/>
-          <a:ln>
-            <a:noFill/>
-          </a:ln>
-        </p:spPr>
-        <p:txBody>
-          <a:bodyPr spcFirstLastPara="1" wrap="square" lIns="91425" tIns="91425" rIns="91425" bIns="91425" anchor="ctr" anchorCtr="0">
-            <a:noAutofit/>
-          </a:bodyPr>
-          <a:lstStyle>
-            <a:defPPr marR="0" lvl="0" algn="l" rtl="0">
-              <a:lnSpc>
-                <a:spcPct val="100000"/>
-              </a:lnSpc>
-              <a:spcBef>
-                <a:spcPts val="0"/>
-              </a:spcBef>
-              <a:spcAft>
-                <a:spcPts val="0"/>
-              </a:spcAft>
-            </a:defPPr>
-            <a:lvl1pPr marL="457200" marR="0" lvl="0" indent="-311150" algn="l" rtl="0">
-              <a:lnSpc>
-                <a:spcPct val="115000"/>
-              </a:lnSpc>
-              <a:spcBef>
-                <a:spcPts val="0"/>
-              </a:spcBef>
-              <a:spcAft>
-                <a:spcPts val="0"/>
-              </a:spcAft>
-              <a:buClr>
-                <a:schemeClr val="dk2"/>
-              </a:buClr>
-              <a:buSzPts val="1300"/>
-              <a:buFont typeface="Roboto"/>
-              <a:buChar char="●"/>
-              <a:defRPr sz="1300" b="0" i="0" u="none" strike="noStrike" cap="none">
-                <a:solidFill>
-                  <a:schemeClr val="dk2"/>
-                </a:solidFill>
-                <a:latin typeface="Roboto"/>
-                <a:ea typeface="Roboto"/>
-                <a:cs typeface="Roboto"/>
-                <a:sym typeface="Roboto"/>
-              </a:defRPr>
-            </a:lvl1pPr>
-            <a:lvl2pPr marL="914400" marR="0" lvl="1" indent="-298450" algn="l" rtl="0">
-              <a:lnSpc>
-                <a:spcPct val="115000"/>
-              </a:lnSpc>
-              <a:spcBef>
-                <a:spcPts val="1600"/>
-              </a:spcBef>
-              <a:spcAft>
-                <a:spcPts val="0"/>
-              </a:spcAft>
-              <a:buClr>
-                <a:schemeClr val="dk2"/>
-              </a:buClr>
-              <a:buSzPts val="1100"/>
-              <a:buFont typeface="Roboto"/>
-              <a:buChar char="○"/>
-              <a:defRPr sz="1100" b="0" i="0" u="none" strike="noStrike" cap="none">
-                <a:solidFill>
-                  <a:schemeClr val="dk2"/>
-                </a:solidFill>
-                <a:latin typeface="Roboto"/>
-                <a:ea typeface="Roboto"/>
-                <a:cs typeface="Roboto"/>
-                <a:sym typeface="Roboto"/>
-              </a:defRPr>
-            </a:lvl2pPr>
-            <a:lvl3pPr marL="1371600" marR="0" lvl="2" indent="-298450" algn="l" rtl="0">
-              <a:lnSpc>
-                <a:spcPct val="115000"/>
-              </a:lnSpc>
-              <a:spcBef>
-                <a:spcPts val="1600"/>
-              </a:spcBef>
-              <a:spcAft>
-                <a:spcPts val="0"/>
-              </a:spcAft>
-              <a:buClr>
-                <a:schemeClr val="dk2"/>
-              </a:buClr>
-              <a:buSzPts val="1100"/>
-              <a:buFont typeface="Roboto"/>
-              <a:buChar char="■"/>
-              <a:defRPr sz="1100" b="0" i="0" u="none" strike="noStrike" cap="none">
-                <a:solidFill>
-                  <a:schemeClr val="dk2"/>
-                </a:solidFill>
-                <a:latin typeface="Roboto"/>
-                <a:ea typeface="Roboto"/>
-                <a:cs typeface="Roboto"/>
-                <a:sym typeface="Roboto"/>
-              </a:defRPr>
-            </a:lvl3pPr>
-            <a:lvl4pPr marL="1828800" marR="0" lvl="3" indent="-298450" algn="l" rtl="0">
-              <a:lnSpc>
-                <a:spcPct val="115000"/>
-              </a:lnSpc>
-              <a:spcBef>
-                <a:spcPts val="1600"/>
-              </a:spcBef>
-              <a:spcAft>
-                <a:spcPts val="0"/>
-              </a:spcAft>
-              <a:buClr>
-                <a:schemeClr val="dk2"/>
-              </a:buClr>
-              <a:buSzPts val="1100"/>
-              <a:buFont typeface="Roboto"/>
-              <a:buChar char="●"/>
-              <a:defRPr sz="1100" b="0" i="0" u="none" strike="noStrike" cap="none">
-                <a:solidFill>
-                  <a:schemeClr val="dk2"/>
-                </a:solidFill>
-                <a:latin typeface="Roboto"/>
-                <a:ea typeface="Roboto"/>
-                <a:cs typeface="Roboto"/>
-                <a:sym typeface="Roboto"/>
-              </a:defRPr>
-            </a:lvl4pPr>
-            <a:lvl5pPr marL="2286000" marR="0" lvl="4" indent="-298450" algn="l" rtl="0">
-              <a:lnSpc>
-                <a:spcPct val="115000"/>
-              </a:lnSpc>
-              <a:spcBef>
-                <a:spcPts val="1600"/>
-              </a:spcBef>
-              <a:spcAft>
-                <a:spcPts val="0"/>
-              </a:spcAft>
-              <a:buClr>
-                <a:schemeClr val="dk2"/>
-              </a:buClr>
-              <a:buSzPts val="1100"/>
-              <a:buFont typeface="Roboto"/>
-              <a:buChar char="○"/>
-              <a:defRPr sz="1100" b="0" i="0" u="none" strike="noStrike" cap="none">
-                <a:solidFill>
-                  <a:schemeClr val="dk2"/>
-                </a:solidFill>
-                <a:latin typeface="Roboto"/>
-                <a:ea typeface="Roboto"/>
-                <a:cs typeface="Roboto"/>
-                <a:sym typeface="Roboto"/>
-              </a:defRPr>
-            </a:lvl5pPr>
-            <a:lvl6pPr marL="2743200" marR="0" lvl="5" indent="-298450" algn="l" rtl="0">
-              <a:lnSpc>
-                <a:spcPct val="115000"/>
-              </a:lnSpc>
-              <a:spcBef>
-                <a:spcPts val="1600"/>
-              </a:spcBef>
-              <a:spcAft>
-                <a:spcPts val="0"/>
-              </a:spcAft>
-              <a:buClr>
-                <a:schemeClr val="dk2"/>
-              </a:buClr>
-              <a:buSzPts val="1100"/>
-              <a:buFont typeface="Roboto"/>
-              <a:buChar char="■"/>
-              <a:defRPr sz="1100" b="0" i="0" u="none" strike="noStrike" cap="none">
-                <a:solidFill>
-                  <a:schemeClr val="dk2"/>
-                </a:solidFill>
-                <a:latin typeface="Roboto"/>
-                <a:ea typeface="Roboto"/>
-                <a:cs typeface="Roboto"/>
-                <a:sym typeface="Roboto"/>
-              </a:defRPr>
-            </a:lvl6pPr>
-            <a:lvl7pPr marL="3200400" marR="0" lvl="6" indent="-298450" algn="l" rtl="0">
-              <a:lnSpc>
-                <a:spcPct val="115000"/>
-              </a:lnSpc>
-              <a:spcBef>
-                <a:spcPts val="1600"/>
-              </a:spcBef>
-              <a:spcAft>
-                <a:spcPts val="0"/>
-              </a:spcAft>
-              <a:buClr>
-                <a:schemeClr val="dk2"/>
-              </a:buClr>
-              <a:buSzPts val="1100"/>
-              <a:buFont typeface="Roboto"/>
-              <a:buChar char="●"/>
-              <a:defRPr sz="1100" b="0" i="0" u="none" strike="noStrike" cap="none">
-                <a:solidFill>
-                  <a:schemeClr val="dk2"/>
-                </a:solidFill>
-                <a:latin typeface="Roboto"/>
-                <a:ea typeface="Roboto"/>
-                <a:cs typeface="Roboto"/>
-                <a:sym typeface="Roboto"/>
-              </a:defRPr>
-            </a:lvl7pPr>
-            <a:lvl8pPr marL="3657600" marR="0" lvl="7" indent="-298450" algn="l" rtl="0">
-              <a:lnSpc>
-                <a:spcPct val="115000"/>
-              </a:lnSpc>
-              <a:spcBef>
-                <a:spcPts val="1600"/>
-              </a:spcBef>
-              <a:spcAft>
-                <a:spcPts val="0"/>
-              </a:spcAft>
-              <a:buClr>
-                <a:schemeClr val="dk2"/>
-              </a:buClr>
-              <a:buSzPts val="1100"/>
-              <a:buFont typeface="Roboto"/>
-              <a:buChar char="○"/>
-              <a:defRPr sz="1100" b="0" i="0" u="none" strike="noStrike" cap="none">
-                <a:solidFill>
-                  <a:schemeClr val="dk2"/>
-                </a:solidFill>
-                <a:latin typeface="Roboto"/>
-                <a:ea typeface="Roboto"/>
-                <a:cs typeface="Roboto"/>
-                <a:sym typeface="Roboto"/>
-              </a:defRPr>
-            </a:lvl8pPr>
-            <a:lvl9pPr marL="4114800" marR="0" lvl="8" indent="-298450" algn="l" rtl="0">
-              <a:lnSpc>
-                <a:spcPct val="115000"/>
-              </a:lnSpc>
-              <a:spcBef>
-                <a:spcPts val="1600"/>
-              </a:spcBef>
-              <a:spcAft>
-                <a:spcPts val="1600"/>
-              </a:spcAft>
-              <a:buClr>
-                <a:schemeClr val="dk2"/>
-              </a:buClr>
-              <a:buSzPts val="1100"/>
-              <a:buFont typeface="Roboto"/>
-              <a:buChar char="■"/>
-              <a:defRPr sz="1100" b="0" i="0" u="none" strike="noStrike" cap="none">
-                <a:solidFill>
-                  <a:schemeClr val="dk2"/>
-                </a:solidFill>
-                <a:latin typeface="Roboto"/>
-                <a:ea typeface="Roboto"/>
-                <a:cs typeface="Roboto"/>
-                <a:sym typeface="Roboto"/>
-              </a:defRPr>
-            </a:lvl9pPr>
-          </a:lstStyle>
-          <a:p>
-            <a:pPr marL="342900" indent="-342900">
-              <a:spcAft>
-                <a:spcPts val="1600"/>
-              </a:spcAft>
-            </a:pPr>
-            <a:r>
-              <a:rPr lang="en-US" sz="1600" dirty="0"/>
-              <a:t>Accept assignment Mid Exam 2 under Instructor -&gt; Alam -&gt; Exam</a:t>
-            </a:r>
-            <a:endParaRPr lang="en-US" sz="1600" dirty="0">
-              <a:solidFill>
-                <a:schemeClr val="tx1"/>
-              </a:solidFill>
-            </a:endParaRPr>
-          </a:p>
-          <a:p>
-            <a:pPr marL="342900" indent="-342900">
-              <a:spcAft>
-                <a:spcPts val="1600"/>
-              </a:spcAft>
-            </a:pPr>
-            <a:r>
-              <a:rPr lang="en-US" sz="1600" dirty="0">
-                <a:solidFill>
-                  <a:schemeClr val="tx1"/>
-                </a:solidFill>
-              </a:rPr>
-              <a:t>Clone the repository for </a:t>
-            </a:r>
-            <a:r>
-              <a:rPr lang="en-US" sz="1600" dirty="0"/>
-              <a:t>Mid Exam 2 </a:t>
-            </a:r>
-            <a:endParaRPr lang="en-US" sz="1600" dirty="0">
-              <a:solidFill>
-                <a:schemeClr val="tx1"/>
-              </a:solidFill>
-            </a:endParaRPr>
-          </a:p>
-        </p:txBody>
-      </p:sp>
-    </p:spTree>
-    <p:extLst>
-      <p:ext uri="{BB962C8B-B14F-4D97-AF65-F5344CB8AC3E}">
-        <p14:creationId xmlns:p14="http://schemas.microsoft.com/office/powerpoint/2010/main" val="943055912"/>
       </p:ext>
     </p:extLst>
   </p:cSld>

--- a/Presentation/Announcement.pptx
+++ b/Presentation/Announcement.pptx
@@ -8,8 +8,8 @@
     <p:notesMasterId r:id="rId15"/>
   </p:notesMasterIdLst>
   <p:sldIdLst>
-    <p:sldId id="278" r:id="rId2"/>
-    <p:sldId id="276" r:id="rId3"/>
+    <p:sldId id="276" r:id="rId2"/>
+    <p:sldId id="278" r:id="rId3"/>
     <p:sldId id="286" r:id="rId4"/>
     <p:sldId id="288" r:id="rId5"/>
     <p:sldId id="281" r:id="rId6"/>
@@ -826,11 +826,6 @@
         </p:txBody>
       </p:sp>
     </p:spTree>
-    <p:extLst>
-      <p:ext uri="{BB962C8B-B14F-4D97-AF65-F5344CB8AC3E}">
-        <p14:creationId xmlns:p14="http://schemas.microsoft.com/office/powerpoint/2010/main" val="4097390636"/>
-      </p:ext>
-    </p:extLst>
   </p:cSld>
   <p:clrMapOvr>
     <a:masterClrMapping/>
@@ -1341,6 +1336,11 @@
         </p:txBody>
       </p:sp>
     </p:spTree>
+    <p:extLst>
+      <p:ext uri="{BB962C8B-B14F-4D97-AF65-F5344CB8AC3E}">
+        <p14:creationId xmlns:p14="http://schemas.microsoft.com/office/powerpoint/2010/main" val="4097390636"/>
+      </p:ext>
+    </p:extLst>
   </p:cSld>
   <p:clrMapOvr>
     <a:masterClrMapping/>
@@ -6675,1193 +6675,6 @@
         </p:nvSpPr>
         <p:spPr>
           <a:xfrm>
-            <a:off x="314621" y="235914"/>
-            <a:ext cx="8520600" cy="623700"/>
-          </a:xfrm>
-          <a:prstGeom prst="rect">
-            <a:avLst/>
-          </a:prstGeom>
-        </p:spPr>
-        <p:txBody>
-          <a:bodyPr spcFirstLastPara="1" wrap="square" lIns="91425" tIns="91425" rIns="91425" bIns="91425" anchor="t" anchorCtr="0">
-            <a:noAutofit/>
-          </a:bodyPr>
-          <a:lstStyle/>
-          <a:p>
-            <a:pPr marL="0" lvl="0" indent="0" algn="ctr" rtl="0">
-              <a:spcBef>
-                <a:spcPts val="0"/>
-              </a:spcBef>
-              <a:spcAft>
-                <a:spcPts val="0"/>
-              </a:spcAft>
-              <a:buNone/>
-            </a:pPr>
-            <a:r>
-              <a:rPr lang="en-US" dirty="0"/>
-              <a:t>GCIS – Software Development and Problem Solving</a:t>
-            </a:r>
-            <a:endParaRPr dirty="0"/>
-          </a:p>
-        </p:txBody>
-      </p:sp>
-      <p:sp>
-        <p:nvSpPr>
-          <p:cNvPr id="325" name="Google Shape;325;p47"/>
-          <p:cNvSpPr txBox="1">
-            <a:spLocks noGrp="1"/>
-          </p:cNvSpPr>
-          <p:nvPr>
-            <p:ph type="body" idx="1"/>
-          </p:nvPr>
-        </p:nvSpPr>
-        <p:spPr>
-          <a:xfrm>
-            <a:off x="0" y="1608922"/>
-            <a:ext cx="9149842" cy="1226403"/>
-          </a:xfrm>
-          <a:prstGeom prst="rect">
-            <a:avLst/>
-          </a:prstGeom>
-        </p:spPr>
-        <p:txBody>
-          <a:bodyPr spcFirstLastPara="1" wrap="square" lIns="91425" tIns="91425" rIns="91425" bIns="91425" anchor="ctr" anchorCtr="0">
-            <a:noAutofit/>
-          </a:bodyPr>
-          <a:lstStyle/>
-          <a:p>
-            <a:pPr marL="146050" indent="0" algn="ctr">
-              <a:buNone/>
-            </a:pPr>
-            <a:r>
-              <a:rPr lang="en-US" sz="2400" dirty="0"/>
-              <a:t>Take Quiz – Midterm Exam 3</a:t>
-            </a:r>
-          </a:p>
-          <a:p>
-            <a:pPr marL="146050" indent="0" algn="ctr">
-              <a:buNone/>
-            </a:pPr>
-            <a:r>
-              <a:rPr lang="en-US" sz="3200" b="1" dirty="0">
-                <a:solidFill>
-                  <a:schemeClr val="tx1"/>
-                </a:solidFill>
-              </a:rPr>
-              <a:t>Password - </a:t>
-            </a:r>
-            <a:r>
-              <a:rPr lang="en-US" sz="3200" b="1" dirty="0" err="1">
-                <a:solidFill>
-                  <a:schemeClr val="tx1"/>
-                </a:solidFill>
-              </a:rPr>
-              <a:t>NetworkingThreads</a:t>
-            </a:r>
-            <a:endParaRPr sz="3200" b="1" dirty="0">
-              <a:solidFill>
-                <a:schemeClr val="tx1"/>
-              </a:solidFill>
-              <a:highlight>
-                <a:srgbClr val="FFFF00"/>
-              </a:highlight>
-            </a:endParaRPr>
-          </a:p>
-        </p:txBody>
-      </p:sp>
-      <p:sp>
-        <p:nvSpPr>
-          <p:cNvPr id="326" name="Google Shape;326;p47"/>
-          <p:cNvSpPr txBox="1">
-            <a:spLocks noGrp="1"/>
-          </p:cNvSpPr>
-          <p:nvPr>
-            <p:ph type="sldNum" idx="12"/>
-          </p:nvPr>
-        </p:nvSpPr>
-        <p:spPr>
-          <a:xfrm>
-            <a:off x="8472458" y="4663217"/>
-            <a:ext cx="548700" cy="393600"/>
-          </a:xfrm>
-          <a:prstGeom prst="rect">
-            <a:avLst/>
-          </a:prstGeom>
-        </p:spPr>
-        <p:txBody>
-          <a:bodyPr spcFirstLastPara="1" wrap="square" lIns="91425" tIns="91425" rIns="91425" bIns="91425" anchor="ctr" anchorCtr="0">
-            <a:noAutofit/>
-          </a:bodyPr>
-          <a:lstStyle/>
-          <a:p>
-            <a:pPr marL="0" lvl="0" indent="0" algn="r" rtl="0">
-              <a:spcBef>
-                <a:spcPts val="0"/>
-              </a:spcBef>
-              <a:spcAft>
-                <a:spcPts val="0"/>
-              </a:spcAft>
-              <a:buNone/>
-            </a:pPr>
-            <a:fld id="{00000000-1234-1234-1234-123412341234}" type="slidenum">
-              <a:rPr lang="en"/>
-              <a:t>1</a:t>
-            </a:fld>
-            <a:endParaRPr/>
-          </a:p>
-        </p:txBody>
-      </p:sp>
-      <p:sp>
-        <p:nvSpPr>
-          <p:cNvPr id="2" name="TextBox 1">
-            <a:extLst>
-              <a:ext uri="{FF2B5EF4-FFF2-40B4-BE49-F238E27FC236}">
-                <a16:creationId xmlns:a16="http://schemas.microsoft.com/office/drawing/2014/main" id="{DCC33EBB-1C9D-B9A9-88E6-F3466077417F}"/>
-              </a:ext>
-            </a:extLst>
-          </p:cNvPr>
-          <p:cNvSpPr txBox="1"/>
-          <p:nvPr/>
-        </p:nvSpPr>
-        <p:spPr>
-          <a:xfrm>
-            <a:off x="-5842" y="1277369"/>
-            <a:ext cx="9144000" cy="307777"/>
-          </a:xfrm>
-          <a:prstGeom prst="rect">
-            <a:avLst/>
-          </a:prstGeom>
-          <a:solidFill>
-            <a:srgbClr val="FFC000"/>
-          </a:solidFill>
-        </p:spPr>
-        <p:txBody>
-          <a:bodyPr wrap="square" rtlCol="0">
-            <a:spAutoFit/>
-          </a:bodyPr>
-          <a:lstStyle/>
-          <a:p>
-            <a:pPr algn="ctr"/>
-            <a:r>
-              <a:rPr lang="en-US" b="1" dirty="0"/>
-              <a:t>Midterm Exam 3 - Written</a:t>
-            </a:r>
-          </a:p>
-        </p:txBody>
-      </p:sp>
-      <p:sp>
-        <p:nvSpPr>
-          <p:cNvPr id="3" name="TextBox 2">
-            <a:extLst>
-              <a:ext uri="{FF2B5EF4-FFF2-40B4-BE49-F238E27FC236}">
-                <a16:creationId xmlns:a16="http://schemas.microsoft.com/office/drawing/2014/main" id="{25A19346-2F9F-0DB9-0B08-CF872EB1D563}"/>
-              </a:ext>
-            </a:extLst>
-          </p:cNvPr>
-          <p:cNvSpPr txBox="1"/>
-          <p:nvPr/>
-        </p:nvSpPr>
-        <p:spPr>
-          <a:xfrm>
-            <a:off x="0" y="2886770"/>
-            <a:ext cx="9144000" cy="307777"/>
-          </a:xfrm>
-          <a:prstGeom prst="rect">
-            <a:avLst/>
-          </a:prstGeom>
-          <a:solidFill>
-            <a:srgbClr val="FFC000"/>
-          </a:solidFill>
-        </p:spPr>
-        <p:txBody>
-          <a:bodyPr wrap="square" rtlCol="0">
-            <a:spAutoFit/>
-          </a:bodyPr>
-          <a:lstStyle/>
-          <a:p>
-            <a:r>
-              <a:rPr lang="en-US" dirty="0"/>
-              <a:t>Practicum</a:t>
-            </a:r>
-          </a:p>
-        </p:txBody>
-      </p:sp>
-      <p:sp>
-        <p:nvSpPr>
-          <p:cNvPr id="4" name="Google Shape;325;p47">
-            <a:extLst>
-              <a:ext uri="{FF2B5EF4-FFF2-40B4-BE49-F238E27FC236}">
-                <a16:creationId xmlns:a16="http://schemas.microsoft.com/office/drawing/2014/main" id="{11D0E6FB-E344-369B-CE83-B3CF5834F823}"/>
-              </a:ext>
-            </a:extLst>
-          </p:cNvPr>
-          <p:cNvSpPr txBox="1">
-            <a:spLocks/>
-          </p:cNvSpPr>
-          <p:nvPr/>
-        </p:nvSpPr>
-        <p:spPr>
-          <a:xfrm>
-            <a:off x="122842" y="3424963"/>
-            <a:ext cx="8478300" cy="1435054"/>
-          </a:xfrm>
-          <a:prstGeom prst="rect">
-            <a:avLst/>
-          </a:prstGeom>
-          <a:noFill/>
-          <a:ln>
-            <a:noFill/>
-          </a:ln>
-        </p:spPr>
-        <p:txBody>
-          <a:bodyPr spcFirstLastPara="1" wrap="square" lIns="91425" tIns="91425" rIns="91425" bIns="91425" anchor="ctr" anchorCtr="0">
-            <a:noAutofit/>
-          </a:bodyPr>
-          <a:lstStyle>
-            <a:defPPr marR="0" lvl="0" algn="l" rtl="0">
-              <a:lnSpc>
-                <a:spcPct val="100000"/>
-              </a:lnSpc>
-              <a:spcBef>
-                <a:spcPts val="0"/>
-              </a:spcBef>
-              <a:spcAft>
-                <a:spcPts val="0"/>
-              </a:spcAft>
-            </a:defPPr>
-            <a:lvl1pPr marL="457200" marR="0" lvl="0" indent="-311150" algn="l" rtl="0">
-              <a:lnSpc>
-                <a:spcPct val="115000"/>
-              </a:lnSpc>
-              <a:spcBef>
-                <a:spcPts val="0"/>
-              </a:spcBef>
-              <a:spcAft>
-                <a:spcPts val="0"/>
-              </a:spcAft>
-              <a:buClr>
-                <a:schemeClr val="dk2"/>
-              </a:buClr>
-              <a:buSzPts val="1300"/>
-              <a:buFont typeface="Roboto"/>
-              <a:buChar char="●"/>
-              <a:defRPr sz="1300" b="0" i="0" u="none" strike="noStrike" cap="none">
-                <a:solidFill>
-                  <a:schemeClr val="dk2"/>
-                </a:solidFill>
-                <a:latin typeface="Roboto"/>
-                <a:ea typeface="Roboto"/>
-                <a:cs typeface="Roboto"/>
-                <a:sym typeface="Roboto"/>
-              </a:defRPr>
-            </a:lvl1pPr>
-            <a:lvl2pPr marL="914400" marR="0" lvl="1" indent="-298450" algn="l" rtl="0">
-              <a:lnSpc>
-                <a:spcPct val="115000"/>
-              </a:lnSpc>
-              <a:spcBef>
-                <a:spcPts val="1600"/>
-              </a:spcBef>
-              <a:spcAft>
-                <a:spcPts val="0"/>
-              </a:spcAft>
-              <a:buClr>
-                <a:schemeClr val="dk2"/>
-              </a:buClr>
-              <a:buSzPts val="1100"/>
-              <a:buFont typeface="Roboto"/>
-              <a:buChar char="○"/>
-              <a:defRPr sz="1100" b="0" i="0" u="none" strike="noStrike" cap="none">
-                <a:solidFill>
-                  <a:schemeClr val="dk2"/>
-                </a:solidFill>
-                <a:latin typeface="Roboto"/>
-                <a:ea typeface="Roboto"/>
-                <a:cs typeface="Roboto"/>
-                <a:sym typeface="Roboto"/>
-              </a:defRPr>
-            </a:lvl2pPr>
-            <a:lvl3pPr marL="1371600" marR="0" lvl="2" indent="-298450" algn="l" rtl="0">
-              <a:lnSpc>
-                <a:spcPct val="115000"/>
-              </a:lnSpc>
-              <a:spcBef>
-                <a:spcPts val="1600"/>
-              </a:spcBef>
-              <a:spcAft>
-                <a:spcPts val="0"/>
-              </a:spcAft>
-              <a:buClr>
-                <a:schemeClr val="dk2"/>
-              </a:buClr>
-              <a:buSzPts val="1100"/>
-              <a:buFont typeface="Roboto"/>
-              <a:buChar char="■"/>
-              <a:defRPr sz="1100" b="0" i="0" u="none" strike="noStrike" cap="none">
-                <a:solidFill>
-                  <a:schemeClr val="dk2"/>
-                </a:solidFill>
-                <a:latin typeface="Roboto"/>
-                <a:ea typeface="Roboto"/>
-                <a:cs typeface="Roboto"/>
-                <a:sym typeface="Roboto"/>
-              </a:defRPr>
-            </a:lvl3pPr>
-            <a:lvl4pPr marL="1828800" marR="0" lvl="3" indent="-298450" algn="l" rtl="0">
-              <a:lnSpc>
-                <a:spcPct val="115000"/>
-              </a:lnSpc>
-              <a:spcBef>
-                <a:spcPts val="1600"/>
-              </a:spcBef>
-              <a:spcAft>
-                <a:spcPts val="0"/>
-              </a:spcAft>
-              <a:buClr>
-                <a:schemeClr val="dk2"/>
-              </a:buClr>
-              <a:buSzPts val="1100"/>
-              <a:buFont typeface="Roboto"/>
-              <a:buChar char="●"/>
-              <a:defRPr sz="1100" b="0" i="0" u="none" strike="noStrike" cap="none">
-                <a:solidFill>
-                  <a:schemeClr val="dk2"/>
-                </a:solidFill>
-                <a:latin typeface="Roboto"/>
-                <a:ea typeface="Roboto"/>
-                <a:cs typeface="Roboto"/>
-                <a:sym typeface="Roboto"/>
-              </a:defRPr>
-            </a:lvl4pPr>
-            <a:lvl5pPr marL="2286000" marR="0" lvl="4" indent="-298450" algn="l" rtl="0">
-              <a:lnSpc>
-                <a:spcPct val="115000"/>
-              </a:lnSpc>
-              <a:spcBef>
-                <a:spcPts val="1600"/>
-              </a:spcBef>
-              <a:spcAft>
-                <a:spcPts val="0"/>
-              </a:spcAft>
-              <a:buClr>
-                <a:schemeClr val="dk2"/>
-              </a:buClr>
-              <a:buSzPts val="1100"/>
-              <a:buFont typeface="Roboto"/>
-              <a:buChar char="○"/>
-              <a:defRPr sz="1100" b="0" i="0" u="none" strike="noStrike" cap="none">
-                <a:solidFill>
-                  <a:schemeClr val="dk2"/>
-                </a:solidFill>
-                <a:latin typeface="Roboto"/>
-                <a:ea typeface="Roboto"/>
-                <a:cs typeface="Roboto"/>
-                <a:sym typeface="Roboto"/>
-              </a:defRPr>
-            </a:lvl5pPr>
-            <a:lvl6pPr marL="2743200" marR="0" lvl="5" indent="-298450" algn="l" rtl="0">
-              <a:lnSpc>
-                <a:spcPct val="115000"/>
-              </a:lnSpc>
-              <a:spcBef>
-                <a:spcPts val="1600"/>
-              </a:spcBef>
-              <a:spcAft>
-                <a:spcPts val="0"/>
-              </a:spcAft>
-              <a:buClr>
-                <a:schemeClr val="dk2"/>
-              </a:buClr>
-              <a:buSzPts val="1100"/>
-              <a:buFont typeface="Roboto"/>
-              <a:buChar char="■"/>
-              <a:defRPr sz="1100" b="0" i="0" u="none" strike="noStrike" cap="none">
-                <a:solidFill>
-                  <a:schemeClr val="dk2"/>
-                </a:solidFill>
-                <a:latin typeface="Roboto"/>
-                <a:ea typeface="Roboto"/>
-                <a:cs typeface="Roboto"/>
-                <a:sym typeface="Roboto"/>
-              </a:defRPr>
-            </a:lvl6pPr>
-            <a:lvl7pPr marL="3200400" marR="0" lvl="6" indent="-298450" algn="l" rtl="0">
-              <a:lnSpc>
-                <a:spcPct val="115000"/>
-              </a:lnSpc>
-              <a:spcBef>
-                <a:spcPts val="1600"/>
-              </a:spcBef>
-              <a:spcAft>
-                <a:spcPts val="0"/>
-              </a:spcAft>
-              <a:buClr>
-                <a:schemeClr val="dk2"/>
-              </a:buClr>
-              <a:buSzPts val="1100"/>
-              <a:buFont typeface="Roboto"/>
-              <a:buChar char="●"/>
-              <a:defRPr sz="1100" b="0" i="0" u="none" strike="noStrike" cap="none">
-                <a:solidFill>
-                  <a:schemeClr val="dk2"/>
-                </a:solidFill>
-                <a:latin typeface="Roboto"/>
-                <a:ea typeface="Roboto"/>
-                <a:cs typeface="Roboto"/>
-                <a:sym typeface="Roboto"/>
-              </a:defRPr>
-            </a:lvl7pPr>
-            <a:lvl8pPr marL="3657600" marR="0" lvl="7" indent="-298450" algn="l" rtl="0">
-              <a:lnSpc>
-                <a:spcPct val="115000"/>
-              </a:lnSpc>
-              <a:spcBef>
-                <a:spcPts val="1600"/>
-              </a:spcBef>
-              <a:spcAft>
-                <a:spcPts val="0"/>
-              </a:spcAft>
-              <a:buClr>
-                <a:schemeClr val="dk2"/>
-              </a:buClr>
-              <a:buSzPts val="1100"/>
-              <a:buFont typeface="Roboto"/>
-              <a:buChar char="○"/>
-              <a:defRPr sz="1100" b="0" i="0" u="none" strike="noStrike" cap="none">
-                <a:solidFill>
-                  <a:schemeClr val="dk2"/>
-                </a:solidFill>
-                <a:latin typeface="Roboto"/>
-                <a:ea typeface="Roboto"/>
-                <a:cs typeface="Roboto"/>
-                <a:sym typeface="Roboto"/>
-              </a:defRPr>
-            </a:lvl8pPr>
-            <a:lvl9pPr marL="4114800" marR="0" lvl="8" indent="-298450" algn="l" rtl="0">
-              <a:lnSpc>
-                <a:spcPct val="115000"/>
-              </a:lnSpc>
-              <a:spcBef>
-                <a:spcPts val="1600"/>
-              </a:spcBef>
-              <a:spcAft>
-                <a:spcPts val="1600"/>
-              </a:spcAft>
-              <a:buClr>
-                <a:schemeClr val="dk2"/>
-              </a:buClr>
-              <a:buSzPts val="1100"/>
-              <a:buFont typeface="Roboto"/>
-              <a:buChar char="■"/>
-              <a:defRPr sz="1100" b="0" i="0" u="none" strike="noStrike" cap="none">
-                <a:solidFill>
-                  <a:schemeClr val="dk2"/>
-                </a:solidFill>
-                <a:latin typeface="Roboto"/>
-                <a:ea typeface="Roboto"/>
-                <a:cs typeface="Roboto"/>
-                <a:sym typeface="Roboto"/>
-              </a:defRPr>
-            </a:lvl9pPr>
-          </a:lstStyle>
-          <a:p>
-            <a:pPr marL="342900" indent="-342900">
-              <a:spcAft>
-                <a:spcPts val="1600"/>
-              </a:spcAft>
-            </a:pPr>
-            <a:r>
-              <a:rPr lang="en-US" sz="1600" dirty="0"/>
-              <a:t>Accept assignment Mid Exam 3 under Instructor -&gt; Alam -&gt; Exam and </a:t>
-            </a:r>
-            <a:r>
-              <a:rPr lang="en-US" sz="1600" dirty="0">
-                <a:solidFill>
-                  <a:schemeClr val="tx1"/>
-                </a:solidFill>
-              </a:rPr>
-              <a:t>Clone the repository for </a:t>
-            </a:r>
-            <a:r>
-              <a:rPr lang="en-US" sz="1600" dirty="0"/>
-              <a:t>Mid Exam 3</a:t>
-            </a:r>
-          </a:p>
-          <a:p>
-            <a:pPr marL="342900" indent="-342900">
-              <a:spcAft>
-                <a:spcPts val="1600"/>
-              </a:spcAft>
-            </a:pPr>
-            <a:r>
-              <a:rPr lang="en-US" sz="1600" dirty="0">
-                <a:solidFill>
-                  <a:schemeClr val="tx1"/>
-                </a:solidFill>
-              </a:rPr>
-              <a:t>Auto Commit is enabled for your repository. </a:t>
-            </a:r>
-            <a:r>
-              <a:rPr lang="en-US" sz="1600" b="1" dirty="0">
-                <a:solidFill>
-                  <a:schemeClr val="tx1"/>
-                </a:solidFill>
-              </a:rPr>
-              <a:t>DO NOT disable it. Disable code completion/co-pilot. Reach out to instructor or TA if you need help.</a:t>
-            </a:r>
-          </a:p>
-        </p:txBody>
-      </p:sp>
-    </p:spTree>
-    <p:extLst>
-      <p:ext uri="{BB962C8B-B14F-4D97-AF65-F5344CB8AC3E}">
-        <p14:creationId xmlns:p14="http://schemas.microsoft.com/office/powerpoint/2010/main" val="943055912"/>
-      </p:ext>
-    </p:extLst>
-  </p:cSld>
-  <p:clrMapOvr>
-    <a:masterClrMapping/>
-  </p:clrMapOvr>
-</p:sld>
-</file>
-
-<file path=ppt/slides/slide10.xml><?xml version="1.0" encoding="utf-8"?>
-<p:sld xmlns:a="http://schemas.openxmlformats.org/drawingml/2006/main" xmlns:r="http://schemas.openxmlformats.org/officeDocument/2006/relationships" xmlns:p="http://schemas.openxmlformats.org/presentationml/2006/main" show="0">
-  <p:cSld>
-    <p:spTree>
-      <p:nvGrpSpPr>
-        <p:cNvPr id="1" name="Shape 323"/>
-        <p:cNvGrpSpPr/>
-        <p:nvPr/>
-      </p:nvGrpSpPr>
-      <p:grpSpPr>
-        <a:xfrm>
-          <a:off x="0" y="0"/>
-          <a:ext cx="0" cy="0"/>
-          <a:chOff x="0" y="0"/>
-          <a:chExt cx="0" cy="0"/>
-        </a:xfrm>
-      </p:grpSpPr>
-      <p:sp>
-        <p:nvSpPr>
-          <p:cNvPr id="324" name="Google Shape;324;p47"/>
-          <p:cNvSpPr txBox="1">
-            <a:spLocks noGrp="1"/>
-          </p:cNvSpPr>
-          <p:nvPr>
-            <p:ph type="title"/>
-          </p:nvPr>
-        </p:nvSpPr>
-        <p:spPr>
-          <a:xfrm>
-            <a:off x="226208" y="1"/>
-            <a:ext cx="8520600" cy="464980"/>
-          </a:xfrm>
-          <a:prstGeom prst="rect">
-            <a:avLst/>
-          </a:prstGeom>
-        </p:spPr>
-        <p:txBody>
-          <a:bodyPr spcFirstLastPara="1" wrap="square" lIns="91425" tIns="91425" rIns="91425" bIns="91425" anchor="t" anchorCtr="0">
-            <a:noAutofit/>
-          </a:bodyPr>
-          <a:lstStyle/>
-          <a:p>
-            <a:pPr marL="0" lvl="0" indent="0" algn="ctr" rtl="0">
-              <a:spcBef>
-                <a:spcPts val="0"/>
-              </a:spcBef>
-              <a:spcAft>
-                <a:spcPts val="0"/>
-              </a:spcAft>
-              <a:buNone/>
-            </a:pPr>
-            <a:r>
-              <a:rPr lang="en-US" dirty="0"/>
-              <a:t>Use </a:t>
-            </a:r>
-            <a:r>
-              <a:rPr lang="en-US" sz="2400" dirty="0"/>
-              <a:t>Assigned</a:t>
-            </a:r>
-            <a:r>
-              <a:rPr lang="en-US" dirty="0"/>
-              <a:t> Seat</a:t>
-            </a:r>
-            <a:endParaRPr dirty="0"/>
-          </a:p>
-        </p:txBody>
-      </p:sp>
-      <p:sp>
-        <p:nvSpPr>
-          <p:cNvPr id="326" name="Google Shape;326;p47"/>
-          <p:cNvSpPr txBox="1">
-            <a:spLocks noGrp="1"/>
-          </p:cNvSpPr>
-          <p:nvPr>
-            <p:ph type="sldNum" idx="12"/>
-          </p:nvPr>
-        </p:nvSpPr>
-        <p:spPr>
-          <a:xfrm>
-            <a:off x="8472458" y="4663217"/>
-            <a:ext cx="548700" cy="393600"/>
-          </a:xfrm>
-          <a:prstGeom prst="rect">
-            <a:avLst/>
-          </a:prstGeom>
-        </p:spPr>
-        <p:txBody>
-          <a:bodyPr spcFirstLastPara="1" wrap="square" lIns="91425" tIns="91425" rIns="91425" bIns="91425" anchor="ctr" anchorCtr="0">
-            <a:noAutofit/>
-          </a:bodyPr>
-          <a:lstStyle/>
-          <a:p>
-            <a:pPr marL="0" lvl="0" indent="0" algn="r" rtl="0">
-              <a:spcBef>
-                <a:spcPts val="0"/>
-              </a:spcBef>
-              <a:spcAft>
-                <a:spcPts val="0"/>
-              </a:spcAft>
-              <a:buNone/>
-            </a:pPr>
-            <a:fld id="{00000000-1234-1234-1234-123412341234}" type="slidenum">
-              <a:rPr lang="en"/>
-              <a:t>10</a:t>
-            </a:fld>
-            <a:endParaRPr/>
-          </a:p>
-        </p:txBody>
-      </p:sp>
-      <p:pic>
-        <p:nvPicPr>
-          <p:cNvPr id="3" name="Picture 2">
-            <a:extLst>
-              <a:ext uri="{FF2B5EF4-FFF2-40B4-BE49-F238E27FC236}">
-                <a16:creationId xmlns:a16="http://schemas.microsoft.com/office/drawing/2014/main" id="{565A4964-E8A9-A46D-F4BE-E7D41C14EF1B}"/>
-              </a:ext>
-            </a:extLst>
-          </p:cNvPr>
-          <p:cNvPicPr>
-            <a:picLocks noChangeAspect="1"/>
-          </p:cNvPicPr>
-          <p:nvPr/>
-        </p:nvPicPr>
-        <p:blipFill>
-          <a:blip r:embed="rId3"/>
-          <a:stretch>
-            <a:fillRect/>
-          </a:stretch>
-        </p:blipFill>
-        <p:spPr>
-          <a:xfrm>
-            <a:off x="0" y="559220"/>
-            <a:ext cx="9144000" cy="4471763"/>
-          </a:xfrm>
-          <a:prstGeom prst="rect">
-            <a:avLst/>
-          </a:prstGeom>
-        </p:spPr>
-      </p:pic>
-    </p:spTree>
-    <p:extLst>
-      <p:ext uri="{BB962C8B-B14F-4D97-AF65-F5344CB8AC3E}">
-        <p14:creationId xmlns:p14="http://schemas.microsoft.com/office/powerpoint/2010/main" val="2495509868"/>
-      </p:ext>
-    </p:extLst>
-  </p:cSld>
-  <p:clrMapOvr>
-    <a:masterClrMapping/>
-  </p:clrMapOvr>
-</p:sld>
-</file>
-
-<file path=ppt/slides/slide11.xml><?xml version="1.0" encoding="utf-8"?>
-<p:sld xmlns:a="http://schemas.openxmlformats.org/drawingml/2006/main" xmlns:r="http://schemas.openxmlformats.org/officeDocument/2006/relationships" xmlns:p="http://schemas.openxmlformats.org/presentationml/2006/main" show="0">
-  <p:cSld>
-    <p:spTree>
-      <p:nvGrpSpPr>
-        <p:cNvPr id="1" name="Shape 323"/>
-        <p:cNvGrpSpPr/>
-        <p:nvPr/>
-      </p:nvGrpSpPr>
-      <p:grpSpPr>
-        <a:xfrm>
-          <a:off x="0" y="0"/>
-          <a:ext cx="0" cy="0"/>
-          <a:chOff x="0" y="0"/>
-          <a:chExt cx="0" cy="0"/>
-        </a:xfrm>
-      </p:grpSpPr>
-      <p:sp>
-        <p:nvSpPr>
-          <p:cNvPr id="324" name="Google Shape;324;p47"/>
-          <p:cNvSpPr txBox="1">
-            <a:spLocks noGrp="1"/>
-          </p:cNvSpPr>
-          <p:nvPr>
-            <p:ph type="title"/>
-          </p:nvPr>
-        </p:nvSpPr>
-        <p:spPr>
-          <a:xfrm>
-            <a:off x="226208" y="1"/>
-            <a:ext cx="8520600" cy="464980"/>
-          </a:xfrm>
-          <a:prstGeom prst="rect">
-            <a:avLst/>
-          </a:prstGeom>
-        </p:spPr>
-        <p:txBody>
-          <a:bodyPr spcFirstLastPara="1" wrap="square" lIns="91425" tIns="91425" rIns="91425" bIns="91425" anchor="t" anchorCtr="0">
-            <a:noAutofit/>
-          </a:bodyPr>
-          <a:lstStyle/>
-          <a:p>
-            <a:pPr marL="0" lvl="0" indent="0" algn="ctr" rtl="0">
-              <a:spcBef>
-                <a:spcPts val="0"/>
-              </a:spcBef>
-              <a:spcAft>
-                <a:spcPts val="0"/>
-              </a:spcAft>
-              <a:buNone/>
-            </a:pPr>
-            <a:r>
-              <a:rPr lang="en-US" dirty="0"/>
-              <a:t>Use </a:t>
-            </a:r>
-            <a:r>
-              <a:rPr lang="en-US" sz="2400" dirty="0"/>
-              <a:t>Assigned</a:t>
-            </a:r>
-            <a:r>
-              <a:rPr lang="en-US" dirty="0"/>
-              <a:t> Seat</a:t>
-            </a:r>
-            <a:endParaRPr dirty="0"/>
-          </a:p>
-        </p:txBody>
-      </p:sp>
-      <p:sp>
-        <p:nvSpPr>
-          <p:cNvPr id="326" name="Google Shape;326;p47"/>
-          <p:cNvSpPr txBox="1">
-            <a:spLocks noGrp="1"/>
-          </p:cNvSpPr>
-          <p:nvPr>
-            <p:ph type="sldNum" idx="12"/>
-          </p:nvPr>
-        </p:nvSpPr>
-        <p:spPr>
-          <a:xfrm>
-            <a:off x="8472458" y="4663217"/>
-            <a:ext cx="548700" cy="393600"/>
-          </a:xfrm>
-          <a:prstGeom prst="rect">
-            <a:avLst/>
-          </a:prstGeom>
-        </p:spPr>
-        <p:txBody>
-          <a:bodyPr spcFirstLastPara="1" wrap="square" lIns="91425" tIns="91425" rIns="91425" bIns="91425" anchor="ctr" anchorCtr="0">
-            <a:noAutofit/>
-          </a:bodyPr>
-          <a:lstStyle/>
-          <a:p>
-            <a:pPr marL="0" lvl="0" indent="0" algn="r" rtl="0">
-              <a:spcBef>
-                <a:spcPts val="0"/>
-              </a:spcBef>
-              <a:spcAft>
-                <a:spcPts val="0"/>
-              </a:spcAft>
-              <a:buNone/>
-            </a:pPr>
-            <a:fld id="{00000000-1234-1234-1234-123412341234}" type="slidenum">
-              <a:rPr lang="en"/>
-              <a:t>11</a:t>
-            </a:fld>
-            <a:endParaRPr/>
-          </a:p>
-        </p:txBody>
-      </p:sp>
-      <p:pic>
-        <p:nvPicPr>
-          <p:cNvPr id="6" name="Picture 5">
-            <a:extLst>
-              <a:ext uri="{FF2B5EF4-FFF2-40B4-BE49-F238E27FC236}">
-                <a16:creationId xmlns:a16="http://schemas.microsoft.com/office/drawing/2014/main" id="{DED32793-7C09-E3A3-94E5-B5D46727A1D0}"/>
-              </a:ext>
-            </a:extLst>
-          </p:cNvPr>
-          <p:cNvPicPr>
-            <a:picLocks noChangeAspect="1"/>
-          </p:cNvPicPr>
-          <p:nvPr/>
-        </p:nvPicPr>
-        <p:blipFill>
-          <a:blip r:embed="rId3"/>
-          <a:stretch>
-            <a:fillRect/>
-          </a:stretch>
-        </p:blipFill>
-        <p:spPr>
-          <a:xfrm>
-            <a:off x="-1" y="551663"/>
-            <a:ext cx="9144001" cy="4591837"/>
-          </a:xfrm>
-          <a:prstGeom prst="rect">
-            <a:avLst/>
-          </a:prstGeom>
-        </p:spPr>
-      </p:pic>
-    </p:spTree>
-    <p:extLst>
-      <p:ext uri="{BB962C8B-B14F-4D97-AF65-F5344CB8AC3E}">
-        <p14:creationId xmlns:p14="http://schemas.microsoft.com/office/powerpoint/2010/main" val="4226348449"/>
-      </p:ext>
-    </p:extLst>
-  </p:cSld>
-  <p:clrMapOvr>
-    <a:masterClrMapping/>
-  </p:clrMapOvr>
-</p:sld>
-</file>
-
-<file path=ppt/slides/slide12.xml><?xml version="1.0" encoding="utf-8"?>
-<p:sld xmlns:a="http://schemas.openxmlformats.org/drawingml/2006/main" xmlns:r="http://schemas.openxmlformats.org/officeDocument/2006/relationships" xmlns:p="http://schemas.openxmlformats.org/presentationml/2006/main" show="0">
-  <p:cSld>
-    <p:spTree>
-      <p:nvGrpSpPr>
-        <p:cNvPr id="1" name="Shape 323"/>
-        <p:cNvGrpSpPr/>
-        <p:nvPr/>
-      </p:nvGrpSpPr>
-      <p:grpSpPr>
-        <a:xfrm>
-          <a:off x="0" y="0"/>
-          <a:ext cx="0" cy="0"/>
-          <a:chOff x="0" y="0"/>
-          <a:chExt cx="0" cy="0"/>
-        </a:xfrm>
-      </p:grpSpPr>
-      <p:sp>
-        <p:nvSpPr>
-          <p:cNvPr id="324" name="Google Shape;324;p47"/>
-          <p:cNvSpPr txBox="1">
-            <a:spLocks noGrp="1"/>
-          </p:cNvSpPr>
-          <p:nvPr>
-            <p:ph type="title"/>
-          </p:nvPr>
-        </p:nvSpPr>
-        <p:spPr>
-          <a:xfrm>
-            <a:off x="226208" y="1"/>
-            <a:ext cx="8520600" cy="464980"/>
-          </a:xfrm>
-          <a:prstGeom prst="rect">
-            <a:avLst/>
-          </a:prstGeom>
-        </p:spPr>
-        <p:txBody>
-          <a:bodyPr spcFirstLastPara="1" wrap="square" lIns="91425" tIns="91425" rIns="91425" bIns="91425" anchor="t" anchorCtr="0">
-            <a:noAutofit/>
-          </a:bodyPr>
-          <a:lstStyle/>
-          <a:p>
-            <a:pPr marL="0" lvl="0" indent="0" algn="ctr" rtl="0">
-              <a:spcBef>
-                <a:spcPts val="0"/>
-              </a:spcBef>
-              <a:spcAft>
-                <a:spcPts val="0"/>
-              </a:spcAft>
-              <a:buNone/>
-            </a:pPr>
-            <a:r>
-              <a:rPr lang="en-US" dirty="0"/>
-              <a:t>Use </a:t>
-            </a:r>
-            <a:r>
-              <a:rPr lang="en-US" sz="2400" dirty="0"/>
-              <a:t>Assigned</a:t>
-            </a:r>
-            <a:r>
-              <a:rPr lang="en-US" dirty="0"/>
-              <a:t> Seat</a:t>
-            </a:r>
-            <a:endParaRPr dirty="0"/>
-          </a:p>
-        </p:txBody>
-      </p:sp>
-      <p:sp>
-        <p:nvSpPr>
-          <p:cNvPr id="326" name="Google Shape;326;p47"/>
-          <p:cNvSpPr txBox="1">
-            <a:spLocks noGrp="1"/>
-          </p:cNvSpPr>
-          <p:nvPr>
-            <p:ph type="sldNum" idx="12"/>
-          </p:nvPr>
-        </p:nvSpPr>
-        <p:spPr>
-          <a:xfrm>
-            <a:off x="8472458" y="4663217"/>
-            <a:ext cx="548700" cy="393600"/>
-          </a:xfrm>
-          <a:prstGeom prst="rect">
-            <a:avLst/>
-          </a:prstGeom>
-        </p:spPr>
-        <p:txBody>
-          <a:bodyPr spcFirstLastPara="1" wrap="square" lIns="91425" tIns="91425" rIns="91425" bIns="91425" anchor="ctr" anchorCtr="0">
-            <a:noAutofit/>
-          </a:bodyPr>
-          <a:lstStyle/>
-          <a:p>
-            <a:pPr marL="0" lvl="0" indent="0" algn="r" rtl="0">
-              <a:spcBef>
-                <a:spcPts val="0"/>
-              </a:spcBef>
-              <a:spcAft>
-                <a:spcPts val="0"/>
-              </a:spcAft>
-              <a:buNone/>
-            </a:pPr>
-            <a:fld id="{00000000-1234-1234-1234-123412341234}" type="slidenum">
-              <a:rPr lang="en"/>
-              <a:t>12</a:t>
-            </a:fld>
-            <a:endParaRPr/>
-          </a:p>
-        </p:txBody>
-      </p:sp>
-      <p:pic>
-        <p:nvPicPr>
-          <p:cNvPr id="3" name="Picture 2">
-            <a:extLst>
-              <a:ext uri="{FF2B5EF4-FFF2-40B4-BE49-F238E27FC236}">
-                <a16:creationId xmlns:a16="http://schemas.microsoft.com/office/drawing/2014/main" id="{92DE4AAC-70FE-A114-5258-F5B22EDDED45}"/>
-              </a:ext>
-            </a:extLst>
-          </p:cNvPr>
-          <p:cNvPicPr>
-            <a:picLocks noChangeAspect="1"/>
-          </p:cNvPicPr>
-          <p:nvPr/>
-        </p:nvPicPr>
-        <p:blipFill>
-          <a:blip r:embed="rId3"/>
-          <a:stretch>
-            <a:fillRect/>
-          </a:stretch>
-        </p:blipFill>
-        <p:spPr>
-          <a:xfrm>
-            <a:off x="0" y="716280"/>
-            <a:ext cx="9144000" cy="4427218"/>
-          </a:xfrm>
-          <a:prstGeom prst="rect">
-            <a:avLst/>
-          </a:prstGeom>
-        </p:spPr>
-      </p:pic>
-    </p:spTree>
-    <p:extLst>
-      <p:ext uri="{BB962C8B-B14F-4D97-AF65-F5344CB8AC3E}">
-        <p14:creationId xmlns:p14="http://schemas.microsoft.com/office/powerpoint/2010/main" val="1976403023"/>
-      </p:ext>
-    </p:extLst>
-  </p:cSld>
-  <p:clrMapOvr>
-    <a:masterClrMapping/>
-  </p:clrMapOvr>
-</p:sld>
-</file>
-
-<file path=ppt/slides/slide13.xml><?xml version="1.0" encoding="utf-8"?>
-<p:sld xmlns:a="http://schemas.openxmlformats.org/drawingml/2006/main" xmlns:r="http://schemas.openxmlformats.org/officeDocument/2006/relationships" xmlns:p="http://schemas.openxmlformats.org/presentationml/2006/main" show="0">
-  <p:cSld>
-    <p:spTree>
-      <p:nvGrpSpPr>
-        <p:cNvPr id="1" name="Shape 323"/>
-        <p:cNvGrpSpPr/>
-        <p:nvPr/>
-      </p:nvGrpSpPr>
-      <p:grpSpPr>
-        <a:xfrm>
-          <a:off x="0" y="0"/>
-          <a:ext cx="0" cy="0"/>
-          <a:chOff x="0" y="0"/>
-          <a:chExt cx="0" cy="0"/>
-        </a:xfrm>
-      </p:grpSpPr>
-      <p:sp>
-        <p:nvSpPr>
-          <p:cNvPr id="324" name="Google Shape;324;p47"/>
-          <p:cNvSpPr txBox="1">
-            <a:spLocks noGrp="1"/>
-          </p:cNvSpPr>
-          <p:nvPr>
-            <p:ph type="title"/>
-          </p:nvPr>
-        </p:nvSpPr>
-        <p:spPr>
-          <a:xfrm>
-            <a:off x="226208" y="1"/>
-            <a:ext cx="8520600" cy="464980"/>
-          </a:xfrm>
-          <a:prstGeom prst="rect">
-            <a:avLst/>
-          </a:prstGeom>
-        </p:spPr>
-        <p:txBody>
-          <a:bodyPr spcFirstLastPara="1" wrap="square" lIns="91425" tIns="91425" rIns="91425" bIns="91425" anchor="t" anchorCtr="0">
-            <a:noAutofit/>
-          </a:bodyPr>
-          <a:lstStyle/>
-          <a:p>
-            <a:pPr marL="0" lvl="0" indent="0" algn="ctr" rtl="0">
-              <a:spcBef>
-                <a:spcPts val="0"/>
-              </a:spcBef>
-              <a:spcAft>
-                <a:spcPts val="0"/>
-              </a:spcAft>
-              <a:buNone/>
-            </a:pPr>
-            <a:r>
-              <a:rPr lang="en-US" dirty="0"/>
-              <a:t>Use </a:t>
-            </a:r>
-            <a:r>
-              <a:rPr lang="en-US" sz="2400" dirty="0"/>
-              <a:t>Assigned</a:t>
-            </a:r>
-            <a:r>
-              <a:rPr lang="en-US" dirty="0"/>
-              <a:t> Seat</a:t>
-            </a:r>
-            <a:endParaRPr dirty="0"/>
-          </a:p>
-        </p:txBody>
-      </p:sp>
-      <p:sp>
-        <p:nvSpPr>
-          <p:cNvPr id="326" name="Google Shape;326;p47"/>
-          <p:cNvSpPr txBox="1">
-            <a:spLocks noGrp="1"/>
-          </p:cNvSpPr>
-          <p:nvPr>
-            <p:ph type="sldNum" idx="12"/>
-          </p:nvPr>
-        </p:nvSpPr>
-        <p:spPr>
-          <a:xfrm>
-            <a:off x="8472458" y="4663217"/>
-            <a:ext cx="548700" cy="393600"/>
-          </a:xfrm>
-          <a:prstGeom prst="rect">
-            <a:avLst/>
-          </a:prstGeom>
-        </p:spPr>
-        <p:txBody>
-          <a:bodyPr spcFirstLastPara="1" wrap="square" lIns="91425" tIns="91425" rIns="91425" bIns="91425" anchor="ctr" anchorCtr="0">
-            <a:noAutofit/>
-          </a:bodyPr>
-          <a:lstStyle/>
-          <a:p>
-            <a:pPr marL="0" lvl="0" indent="0" algn="r" rtl="0">
-              <a:spcBef>
-                <a:spcPts val="0"/>
-              </a:spcBef>
-              <a:spcAft>
-                <a:spcPts val="0"/>
-              </a:spcAft>
-              <a:buNone/>
-            </a:pPr>
-            <a:fld id="{00000000-1234-1234-1234-123412341234}" type="slidenum">
-              <a:rPr lang="en"/>
-              <a:t>13</a:t>
-            </a:fld>
-            <a:endParaRPr/>
-          </a:p>
-        </p:txBody>
-      </p:sp>
-      <p:pic>
-        <p:nvPicPr>
-          <p:cNvPr id="4" name="Picture 3">
-            <a:extLst>
-              <a:ext uri="{FF2B5EF4-FFF2-40B4-BE49-F238E27FC236}">
-                <a16:creationId xmlns:a16="http://schemas.microsoft.com/office/drawing/2014/main" id="{DCD752B9-EFAE-AFC1-7D39-6763B89DE8D3}"/>
-              </a:ext>
-            </a:extLst>
-          </p:cNvPr>
-          <p:cNvPicPr>
-            <a:picLocks noChangeAspect="1"/>
-          </p:cNvPicPr>
-          <p:nvPr/>
-        </p:nvPicPr>
-        <p:blipFill>
-          <a:blip r:embed="rId3"/>
-          <a:stretch>
-            <a:fillRect/>
-          </a:stretch>
-        </p:blipFill>
-        <p:spPr>
-          <a:xfrm>
-            <a:off x="0" y="652130"/>
-            <a:ext cx="9144000" cy="4491369"/>
-          </a:xfrm>
-          <a:prstGeom prst="rect">
-            <a:avLst/>
-          </a:prstGeom>
-        </p:spPr>
-      </p:pic>
-    </p:spTree>
-    <p:extLst>
-      <p:ext uri="{BB962C8B-B14F-4D97-AF65-F5344CB8AC3E}">
-        <p14:creationId xmlns:p14="http://schemas.microsoft.com/office/powerpoint/2010/main" val="3365057756"/>
-      </p:ext>
-    </p:extLst>
-  </p:cSld>
-  <p:clrMapOvr>
-    <a:masterClrMapping/>
-  </p:clrMapOvr>
-</p:sld>
-</file>
-
-<file path=ppt/slides/slide2.xml><?xml version="1.0" encoding="utf-8"?>
-<p:sld xmlns:a="http://schemas.openxmlformats.org/drawingml/2006/main" xmlns:r="http://schemas.openxmlformats.org/officeDocument/2006/relationships" xmlns:p="http://schemas.openxmlformats.org/presentationml/2006/main" show="0">
-  <p:cSld>
-    <p:spTree>
-      <p:nvGrpSpPr>
-        <p:cNvPr id="1" name="Shape 323"/>
-        <p:cNvGrpSpPr/>
-        <p:nvPr/>
-      </p:nvGrpSpPr>
-      <p:grpSpPr>
-        <a:xfrm>
-          <a:off x="0" y="0"/>
-          <a:ext cx="0" cy="0"/>
-          <a:chOff x="0" y="0"/>
-          <a:chExt cx="0" cy="0"/>
-        </a:xfrm>
-      </p:grpSpPr>
-      <p:sp>
-        <p:nvSpPr>
-          <p:cNvPr id="324" name="Google Shape;324;p47"/>
-          <p:cNvSpPr txBox="1">
-            <a:spLocks noGrp="1"/>
-          </p:cNvSpPr>
-          <p:nvPr>
-            <p:ph type="title"/>
-          </p:nvPr>
-        </p:nvSpPr>
-        <p:spPr>
-          <a:xfrm>
             <a:off x="305858" y="273819"/>
             <a:ext cx="8520600" cy="623700"/>
           </a:xfrm>
@@ -7938,15 +6751,15 @@
             </a:r>
             <a:r>
               <a:rPr lang="en-US" sz="2400" dirty="0"/>
-              <a:t>1</a:t>
+              <a:t>2</a:t>
             </a:r>
             <a:r>
               <a:rPr lang="pl-PL" sz="2400" dirty="0"/>
-              <a:t>: </a:t>
+              <a:t>:</a:t>
             </a:r>
             <a:r>
               <a:rPr lang="en-US" sz="2400" dirty="0"/>
-              <a:t>Synchronization</a:t>
+              <a:t>Wait/Signal/Deadlock</a:t>
             </a:r>
           </a:p>
           <a:p>
@@ -7959,7 +6772,7 @@
             </a:r>
             <a:r>
               <a:rPr lang="en-US" sz="2400" dirty="0" err="1"/>
-              <a:t>ImSoInSync</a:t>
+              <a:t>WaitingForDreadlocks</a:t>
             </a:r>
             <a:endParaRPr sz="2400" dirty="0"/>
           </a:p>
@@ -8001,7 +6814,7 @@
             </a:pPr>
             <a:fld id="{00000000-1234-1234-1234-123412341234}" type="slidenum">
               <a:rPr lang="en"/>
-              <a:t>2</a:t>
+              <a:t>1</a:t>
             </a:fld>
             <a:endParaRPr/>
           </a:p>
@@ -8386,20 +7199,1199 @@
             </a:pPr>
             <a:r>
               <a:rPr lang="en-US" sz="2400" dirty="0"/>
-              <a:t>Clone/</a:t>
-            </a:r>
-            <a:r>
-              <a:rPr lang="en-US" sz="2400"/>
-              <a:t>Pull Unit11 </a:t>
-            </a:r>
-            <a:r>
-              <a:rPr lang="en-US" sz="2400" dirty="0"/>
-              <a:t>– git hub classroom repo for class activities</a:t>
+              <a:t>Clone/Pull Unit12 – git hub classroom repo for class activities</a:t>
             </a:r>
           </a:p>
         </p:txBody>
       </p:sp>
     </p:spTree>
+  </p:cSld>
+  <p:clrMapOvr>
+    <a:masterClrMapping/>
+  </p:clrMapOvr>
+</p:sld>
+</file>
+
+<file path=ppt/slides/slide10.xml><?xml version="1.0" encoding="utf-8"?>
+<p:sld xmlns:a="http://schemas.openxmlformats.org/drawingml/2006/main" xmlns:r="http://schemas.openxmlformats.org/officeDocument/2006/relationships" xmlns:p="http://schemas.openxmlformats.org/presentationml/2006/main" show="0">
+  <p:cSld>
+    <p:spTree>
+      <p:nvGrpSpPr>
+        <p:cNvPr id="1" name="Shape 323"/>
+        <p:cNvGrpSpPr/>
+        <p:nvPr/>
+      </p:nvGrpSpPr>
+      <p:grpSpPr>
+        <a:xfrm>
+          <a:off x="0" y="0"/>
+          <a:ext cx="0" cy="0"/>
+          <a:chOff x="0" y="0"/>
+          <a:chExt cx="0" cy="0"/>
+        </a:xfrm>
+      </p:grpSpPr>
+      <p:sp>
+        <p:nvSpPr>
+          <p:cNvPr id="324" name="Google Shape;324;p47"/>
+          <p:cNvSpPr txBox="1">
+            <a:spLocks noGrp="1"/>
+          </p:cNvSpPr>
+          <p:nvPr>
+            <p:ph type="title"/>
+          </p:nvPr>
+        </p:nvSpPr>
+        <p:spPr>
+          <a:xfrm>
+            <a:off x="226208" y="1"/>
+            <a:ext cx="8520600" cy="464980"/>
+          </a:xfrm>
+          <a:prstGeom prst="rect">
+            <a:avLst/>
+          </a:prstGeom>
+        </p:spPr>
+        <p:txBody>
+          <a:bodyPr spcFirstLastPara="1" wrap="square" lIns="91425" tIns="91425" rIns="91425" bIns="91425" anchor="t" anchorCtr="0">
+            <a:noAutofit/>
+          </a:bodyPr>
+          <a:lstStyle/>
+          <a:p>
+            <a:pPr marL="0" lvl="0" indent="0" algn="ctr" rtl="0">
+              <a:spcBef>
+                <a:spcPts val="0"/>
+              </a:spcBef>
+              <a:spcAft>
+                <a:spcPts val="0"/>
+              </a:spcAft>
+              <a:buNone/>
+            </a:pPr>
+            <a:r>
+              <a:rPr lang="en-US" dirty="0"/>
+              <a:t>Use </a:t>
+            </a:r>
+            <a:r>
+              <a:rPr lang="en-US" sz="2400" dirty="0"/>
+              <a:t>Assigned</a:t>
+            </a:r>
+            <a:r>
+              <a:rPr lang="en-US" dirty="0"/>
+              <a:t> Seat</a:t>
+            </a:r>
+            <a:endParaRPr dirty="0"/>
+          </a:p>
+        </p:txBody>
+      </p:sp>
+      <p:sp>
+        <p:nvSpPr>
+          <p:cNvPr id="326" name="Google Shape;326;p47"/>
+          <p:cNvSpPr txBox="1">
+            <a:spLocks noGrp="1"/>
+          </p:cNvSpPr>
+          <p:nvPr>
+            <p:ph type="sldNum" idx="12"/>
+          </p:nvPr>
+        </p:nvSpPr>
+        <p:spPr>
+          <a:xfrm>
+            <a:off x="8472458" y="4663217"/>
+            <a:ext cx="548700" cy="393600"/>
+          </a:xfrm>
+          <a:prstGeom prst="rect">
+            <a:avLst/>
+          </a:prstGeom>
+        </p:spPr>
+        <p:txBody>
+          <a:bodyPr spcFirstLastPara="1" wrap="square" lIns="91425" tIns="91425" rIns="91425" bIns="91425" anchor="ctr" anchorCtr="0">
+            <a:noAutofit/>
+          </a:bodyPr>
+          <a:lstStyle/>
+          <a:p>
+            <a:pPr marL="0" lvl="0" indent="0" algn="r" rtl="0">
+              <a:spcBef>
+                <a:spcPts val="0"/>
+              </a:spcBef>
+              <a:spcAft>
+                <a:spcPts val="0"/>
+              </a:spcAft>
+              <a:buNone/>
+            </a:pPr>
+            <a:fld id="{00000000-1234-1234-1234-123412341234}" type="slidenum">
+              <a:rPr lang="en"/>
+              <a:t>10</a:t>
+            </a:fld>
+            <a:endParaRPr/>
+          </a:p>
+        </p:txBody>
+      </p:sp>
+      <p:pic>
+        <p:nvPicPr>
+          <p:cNvPr id="3" name="Picture 2">
+            <a:extLst>
+              <a:ext uri="{FF2B5EF4-FFF2-40B4-BE49-F238E27FC236}">
+                <a16:creationId xmlns:a16="http://schemas.microsoft.com/office/drawing/2014/main" id="{565A4964-E8A9-A46D-F4BE-E7D41C14EF1B}"/>
+              </a:ext>
+            </a:extLst>
+          </p:cNvPr>
+          <p:cNvPicPr>
+            <a:picLocks noChangeAspect="1"/>
+          </p:cNvPicPr>
+          <p:nvPr/>
+        </p:nvPicPr>
+        <p:blipFill>
+          <a:blip r:embed="rId3"/>
+          <a:stretch>
+            <a:fillRect/>
+          </a:stretch>
+        </p:blipFill>
+        <p:spPr>
+          <a:xfrm>
+            <a:off x="0" y="559220"/>
+            <a:ext cx="9144000" cy="4471763"/>
+          </a:xfrm>
+          <a:prstGeom prst="rect">
+            <a:avLst/>
+          </a:prstGeom>
+        </p:spPr>
+      </p:pic>
+    </p:spTree>
+    <p:extLst>
+      <p:ext uri="{BB962C8B-B14F-4D97-AF65-F5344CB8AC3E}">
+        <p14:creationId xmlns:p14="http://schemas.microsoft.com/office/powerpoint/2010/main" val="2495509868"/>
+      </p:ext>
+    </p:extLst>
+  </p:cSld>
+  <p:clrMapOvr>
+    <a:masterClrMapping/>
+  </p:clrMapOvr>
+</p:sld>
+</file>
+
+<file path=ppt/slides/slide11.xml><?xml version="1.0" encoding="utf-8"?>
+<p:sld xmlns:a="http://schemas.openxmlformats.org/drawingml/2006/main" xmlns:r="http://schemas.openxmlformats.org/officeDocument/2006/relationships" xmlns:p="http://schemas.openxmlformats.org/presentationml/2006/main" show="0">
+  <p:cSld>
+    <p:spTree>
+      <p:nvGrpSpPr>
+        <p:cNvPr id="1" name="Shape 323"/>
+        <p:cNvGrpSpPr/>
+        <p:nvPr/>
+      </p:nvGrpSpPr>
+      <p:grpSpPr>
+        <a:xfrm>
+          <a:off x="0" y="0"/>
+          <a:ext cx="0" cy="0"/>
+          <a:chOff x="0" y="0"/>
+          <a:chExt cx="0" cy="0"/>
+        </a:xfrm>
+      </p:grpSpPr>
+      <p:sp>
+        <p:nvSpPr>
+          <p:cNvPr id="324" name="Google Shape;324;p47"/>
+          <p:cNvSpPr txBox="1">
+            <a:spLocks noGrp="1"/>
+          </p:cNvSpPr>
+          <p:nvPr>
+            <p:ph type="title"/>
+          </p:nvPr>
+        </p:nvSpPr>
+        <p:spPr>
+          <a:xfrm>
+            <a:off x="226208" y="1"/>
+            <a:ext cx="8520600" cy="464980"/>
+          </a:xfrm>
+          <a:prstGeom prst="rect">
+            <a:avLst/>
+          </a:prstGeom>
+        </p:spPr>
+        <p:txBody>
+          <a:bodyPr spcFirstLastPara="1" wrap="square" lIns="91425" tIns="91425" rIns="91425" bIns="91425" anchor="t" anchorCtr="0">
+            <a:noAutofit/>
+          </a:bodyPr>
+          <a:lstStyle/>
+          <a:p>
+            <a:pPr marL="0" lvl="0" indent="0" algn="ctr" rtl="0">
+              <a:spcBef>
+                <a:spcPts val="0"/>
+              </a:spcBef>
+              <a:spcAft>
+                <a:spcPts val="0"/>
+              </a:spcAft>
+              <a:buNone/>
+            </a:pPr>
+            <a:r>
+              <a:rPr lang="en-US" dirty="0"/>
+              <a:t>Use </a:t>
+            </a:r>
+            <a:r>
+              <a:rPr lang="en-US" sz="2400" dirty="0"/>
+              <a:t>Assigned</a:t>
+            </a:r>
+            <a:r>
+              <a:rPr lang="en-US" dirty="0"/>
+              <a:t> Seat</a:t>
+            </a:r>
+            <a:endParaRPr dirty="0"/>
+          </a:p>
+        </p:txBody>
+      </p:sp>
+      <p:sp>
+        <p:nvSpPr>
+          <p:cNvPr id="326" name="Google Shape;326;p47"/>
+          <p:cNvSpPr txBox="1">
+            <a:spLocks noGrp="1"/>
+          </p:cNvSpPr>
+          <p:nvPr>
+            <p:ph type="sldNum" idx="12"/>
+          </p:nvPr>
+        </p:nvSpPr>
+        <p:spPr>
+          <a:xfrm>
+            <a:off x="8472458" y="4663217"/>
+            <a:ext cx="548700" cy="393600"/>
+          </a:xfrm>
+          <a:prstGeom prst="rect">
+            <a:avLst/>
+          </a:prstGeom>
+        </p:spPr>
+        <p:txBody>
+          <a:bodyPr spcFirstLastPara="1" wrap="square" lIns="91425" tIns="91425" rIns="91425" bIns="91425" anchor="ctr" anchorCtr="0">
+            <a:noAutofit/>
+          </a:bodyPr>
+          <a:lstStyle/>
+          <a:p>
+            <a:pPr marL="0" lvl="0" indent="0" algn="r" rtl="0">
+              <a:spcBef>
+                <a:spcPts val="0"/>
+              </a:spcBef>
+              <a:spcAft>
+                <a:spcPts val="0"/>
+              </a:spcAft>
+              <a:buNone/>
+            </a:pPr>
+            <a:fld id="{00000000-1234-1234-1234-123412341234}" type="slidenum">
+              <a:rPr lang="en"/>
+              <a:t>11</a:t>
+            </a:fld>
+            <a:endParaRPr/>
+          </a:p>
+        </p:txBody>
+      </p:sp>
+      <p:pic>
+        <p:nvPicPr>
+          <p:cNvPr id="6" name="Picture 5">
+            <a:extLst>
+              <a:ext uri="{FF2B5EF4-FFF2-40B4-BE49-F238E27FC236}">
+                <a16:creationId xmlns:a16="http://schemas.microsoft.com/office/drawing/2014/main" id="{DED32793-7C09-E3A3-94E5-B5D46727A1D0}"/>
+              </a:ext>
+            </a:extLst>
+          </p:cNvPr>
+          <p:cNvPicPr>
+            <a:picLocks noChangeAspect="1"/>
+          </p:cNvPicPr>
+          <p:nvPr/>
+        </p:nvPicPr>
+        <p:blipFill>
+          <a:blip r:embed="rId3"/>
+          <a:stretch>
+            <a:fillRect/>
+          </a:stretch>
+        </p:blipFill>
+        <p:spPr>
+          <a:xfrm>
+            <a:off x="-1" y="551663"/>
+            <a:ext cx="9144001" cy="4591837"/>
+          </a:xfrm>
+          <a:prstGeom prst="rect">
+            <a:avLst/>
+          </a:prstGeom>
+        </p:spPr>
+      </p:pic>
+    </p:spTree>
+    <p:extLst>
+      <p:ext uri="{BB962C8B-B14F-4D97-AF65-F5344CB8AC3E}">
+        <p14:creationId xmlns:p14="http://schemas.microsoft.com/office/powerpoint/2010/main" val="4226348449"/>
+      </p:ext>
+    </p:extLst>
+  </p:cSld>
+  <p:clrMapOvr>
+    <a:masterClrMapping/>
+  </p:clrMapOvr>
+</p:sld>
+</file>
+
+<file path=ppt/slides/slide12.xml><?xml version="1.0" encoding="utf-8"?>
+<p:sld xmlns:a="http://schemas.openxmlformats.org/drawingml/2006/main" xmlns:r="http://schemas.openxmlformats.org/officeDocument/2006/relationships" xmlns:p="http://schemas.openxmlformats.org/presentationml/2006/main" show="0">
+  <p:cSld>
+    <p:spTree>
+      <p:nvGrpSpPr>
+        <p:cNvPr id="1" name="Shape 323"/>
+        <p:cNvGrpSpPr/>
+        <p:nvPr/>
+      </p:nvGrpSpPr>
+      <p:grpSpPr>
+        <a:xfrm>
+          <a:off x="0" y="0"/>
+          <a:ext cx="0" cy="0"/>
+          <a:chOff x="0" y="0"/>
+          <a:chExt cx="0" cy="0"/>
+        </a:xfrm>
+      </p:grpSpPr>
+      <p:sp>
+        <p:nvSpPr>
+          <p:cNvPr id="324" name="Google Shape;324;p47"/>
+          <p:cNvSpPr txBox="1">
+            <a:spLocks noGrp="1"/>
+          </p:cNvSpPr>
+          <p:nvPr>
+            <p:ph type="title"/>
+          </p:nvPr>
+        </p:nvSpPr>
+        <p:spPr>
+          <a:xfrm>
+            <a:off x="226208" y="1"/>
+            <a:ext cx="8520600" cy="464980"/>
+          </a:xfrm>
+          <a:prstGeom prst="rect">
+            <a:avLst/>
+          </a:prstGeom>
+        </p:spPr>
+        <p:txBody>
+          <a:bodyPr spcFirstLastPara="1" wrap="square" lIns="91425" tIns="91425" rIns="91425" bIns="91425" anchor="t" anchorCtr="0">
+            <a:noAutofit/>
+          </a:bodyPr>
+          <a:lstStyle/>
+          <a:p>
+            <a:pPr marL="0" lvl="0" indent="0" algn="ctr" rtl="0">
+              <a:spcBef>
+                <a:spcPts val="0"/>
+              </a:spcBef>
+              <a:spcAft>
+                <a:spcPts val="0"/>
+              </a:spcAft>
+              <a:buNone/>
+            </a:pPr>
+            <a:r>
+              <a:rPr lang="en-US" dirty="0"/>
+              <a:t>Use </a:t>
+            </a:r>
+            <a:r>
+              <a:rPr lang="en-US" sz="2400" dirty="0"/>
+              <a:t>Assigned</a:t>
+            </a:r>
+            <a:r>
+              <a:rPr lang="en-US" dirty="0"/>
+              <a:t> Seat</a:t>
+            </a:r>
+            <a:endParaRPr dirty="0"/>
+          </a:p>
+        </p:txBody>
+      </p:sp>
+      <p:sp>
+        <p:nvSpPr>
+          <p:cNvPr id="326" name="Google Shape;326;p47"/>
+          <p:cNvSpPr txBox="1">
+            <a:spLocks noGrp="1"/>
+          </p:cNvSpPr>
+          <p:nvPr>
+            <p:ph type="sldNum" idx="12"/>
+          </p:nvPr>
+        </p:nvSpPr>
+        <p:spPr>
+          <a:xfrm>
+            <a:off x="8472458" y="4663217"/>
+            <a:ext cx="548700" cy="393600"/>
+          </a:xfrm>
+          <a:prstGeom prst="rect">
+            <a:avLst/>
+          </a:prstGeom>
+        </p:spPr>
+        <p:txBody>
+          <a:bodyPr spcFirstLastPara="1" wrap="square" lIns="91425" tIns="91425" rIns="91425" bIns="91425" anchor="ctr" anchorCtr="0">
+            <a:noAutofit/>
+          </a:bodyPr>
+          <a:lstStyle/>
+          <a:p>
+            <a:pPr marL="0" lvl="0" indent="0" algn="r" rtl="0">
+              <a:spcBef>
+                <a:spcPts val="0"/>
+              </a:spcBef>
+              <a:spcAft>
+                <a:spcPts val="0"/>
+              </a:spcAft>
+              <a:buNone/>
+            </a:pPr>
+            <a:fld id="{00000000-1234-1234-1234-123412341234}" type="slidenum">
+              <a:rPr lang="en"/>
+              <a:t>12</a:t>
+            </a:fld>
+            <a:endParaRPr/>
+          </a:p>
+        </p:txBody>
+      </p:sp>
+      <p:pic>
+        <p:nvPicPr>
+          <p:cNvPr id="3" name="Picture 2">
+            <a:extLst>
+              <a:ext uri="{FF2B5EF4-FFF2-40B4-BE49-F238E27FC236}">
+                <a16:creationId xmlns:a16="http://schemas.microsoft.com/office/drawing/2014/main" id="{92DE4AAC-70FE-A114-5258-F5B22EDDED45}"/>
+              </a:ext>
+            </a:extLst>
+          </p:cNvPr>
+          <p:cNvPicPr>
+            <a:picLocks noChangeAspect="1"/>
+          </p:cNvPicPr>
+          <p:nvPr/>
+        </p:nvPicPr>
+        <p:blipFill>
+          <a:blip r:embed="rId3"/>
+          <a:stretch>
+            <a:fillRect/>
+          </a:stretch>
+        </p:blipFill>
+        <p:spPr>
+          <a:xfrm>
+            <a:off x="0" y="716280"/>
+            <a:ext cx="9144000" cy="4427218"/>
+          </a:xfrm>
+          <a:prstGeom prst="rect">
+            <a:avLst/>
+          </a:prstGeom>
+        </p:spPr>
+      </p:pic>
+    </p:spTree>
+    <p:extLst>
+      <p:ext uri="{BB962C8B-B14F-4D97-AF65-F5344CB8AC3E}">
+        <p14:creationId xmlns:p14="http://schemas.microsoft.com/office/powerpoint/2010/main" val="1976403023"/>
+      </p:ext>
+    </p:extLst>
+  </p:cSld>
+  <p:clrMapOvr>
+    <a:masterClrMapping/>
+  </p:clrMapOvr>
+</p:sld>
+</file>
+
+<file path=ppt/slides/slide13.xml><?xml version="1.0" encoding="utf-8"?>
+<p:sld xmlns:a="http://schemas.openxmlformats.org/drawingml/2006/main" xmlns:r="http://schemas.openxmlformats.org/officeDocument/2006/relationships" xmlns:p="http://schemas.openxmlformats.org/presentationml/2006/main" show="0">
+  <p:cSld>
+    <p:spTree>
+      <p:nvGrpSpPr>
+        <p:cNvPr id="1" name="Shape 323"/>
+        <p:cNvGrpSpPr/>
+        <p:nvPr/>
+      </p:nvGrpSpPr>
+      <p:grpSpPr>
+        <a:xfrm>
+          <a:off x="0" y="0"/>
+          <a:ext cx="0" cy="0"/>
+          <a:chOff x="0" y="0"/>
+          <a:chExt cx="0" cy="0"/>
+        </a:xfrm>
+      </p:grpSpPr>
+      <p:sp>
+        <p:nvSpPr>
+          <p:cNvPr id="324" name="Google Shape;324;p47"/>
+          <p:cNvSpPr txBox="1">
+            <a:spLocks noGrp="1"/>
+          </p:cNvSpPr>
+          <p:nvPr>
+            <p:ph type="title"/>
+          </p:nvPr>
+        </p:nvSpPr>
+        <p:spPr>
+          <a:xfrm>
+            <a:off x="226208" y="1"/>
+            <a:ext cx="8520600" cy="464980"/>
+          </a:xfrm>
+          <a:prstGeom prst="rect">
+            <a:avLst/>
+          </a:prstGeom>
+        </p:spPr>
+        <p:txBody>
+          <a:bodyPr spcFirstLastPara="1" wrap="square" lIns="91425" tIns="91425" rIns="91425" bIns="91425" anchor="t" anchorCtr="0">
+            <a:noAutofit/>
+          </a:bodyPr>
+          <a:lstStyle/>
+          <a:p>
+            <a:pPr marL="0" lvl="0" indent="0" algn="ctr" rtl="0">
+              <a:spcBef>
+                <a:spcPts val="0"/>
+              </a:spcBef>
+              <a:spcAft>
+                <a:spcPts val="0"/>
+              </a:spcAft>
+              <a:buNone/>
+            </a:pPr>
+            <a:r>
+              <a:rPr lang="en-US" dirty="0"/>
+              <a:t>Use </a:t>
+            </a:r>
+            <a:r>
+              <a:rPr lang="en-US" sz="2400" dirty="0"/>
+              <a:t>Assigned</a:t>
+            </a:r>
+            <a:r>
+              <a:rPr lang="en-US" dirty="0"/>
+              <a:t> Seat</a:t>
+            </a:r>
+            <a:endParaRPr dirty="0"/>
+          </a:p>
+        </p:txBody>
+      </p:sp>
+      <p:sp>
+        <p:nvSpPr>
+          <p:cNvPr id="326" name="Google Shape;326;p47"/>
+          <p:cNvSpPr txBox="1">
+            <a:spLocks noGrp="1"/>
+          </p:cNvSpPr>
+          <p:nvPr>
+            <p:ph type="sldNum" idx="12"/>
+          </p:nvPr>
+        </p:nvSpPr>
+        <p:spPr>
+          <a:xfrm>
+            <a:off x="8472458" y="4663217"/>
+            <a:ext cx="548700" cy="393600"/>
+          </a:xfrm>
+          <a:prstGeom prst="rect">
+            <a:avLst/>
+          </a:prstGeom>
+        </p:spPr>
+        <p:txBody>
+          <a:bodyPr spcFirstLastPara="1" wrap="square" lIns="91425" tIns="91425" rIns="91425" bIns="91425" anchor="ctr" anchorCtr="0">
+            <a:noAutofit/>
+          </a:bodyPr>
+          <a:lstStyle/>
+          <a:p>
+            <a:pPr marL="0" lvl="0" indent="0" algn="r" rtl="0">
+              <a:spcBef>
+                <a:spcPts val="0"/>
+              </a:spcBef>
+              <a:spcAft>
+                <a:spcPts val="0"/>
+              </a:spcAft>
+              <a:buNone/>
+            </a:pPr>
+            <a:fld id="{00000000-1234-1234-1234-123412341234}" type="slidenum">
+              <a:rPr lang="en"/>
+              <a:t>13</a:t>
+            </a:fld>
+            <a:endParaRPr/>
+          </a:p>
+        </p:txBody>
+      </p:sp>
+      <p:pic>
+        <p:nvPicPr>
+          <p:cNvPr id="4" name="Picture 3">
+            <a:extLst>
+              <a:ext uri="{FF2B5EF4-FFF2-40B4-BE49-F238E27FC236}">
+                <a16:creationId xmlns:a16="http://schemas.microsoft.com/office/drawing/2014/main" id="{DCD752B9-EFAE-AFC1-7D39-6763B89DE8D3}"/>
+              </a:ext>
+            </a:extLst>
+          </p:cNvPr>
+          <p:cNvPicPr>
+            <a:picLocks noChangeAspect="1"/>
+          </p:cNvPicPr>
+          <p:nvPr/>
+        </p:nvPicPr>
+        <p:blipFill>
+          <a:blip r:embed="rId3"/>
+          <a:stretch>
+            <a:fillRect/>
+          </a:stretch>
+        </p:blipFill>
+        <p:spPr>
+          <a:xfrm>
+            <a:off x="0" y="652130"/>
+            <a:ext cx="9144000" cy="4491369"/>
+          </a:xfrm>
+          <a:prstGeom prst="rect">
+            <a:avLst/>
+          </a:prstGeom>
+        </p:spPr>
+      </p:pic>
+    </p:spTree>
+    <p:extLst>
+      <p:ext uri="{BB962C8B-B14F-4D97-AF65-F5344CB8AC3E}">
+        <p14:creationId xmlns:p14="http://schemas.microsoft.com/office/powerpoint/2010/main" val="3365057756"/>
+      </p:ext>
+    </p:extLst>
+  </p:cSld>
+  <p:clrMapOvr>
+    <a:masterClrMapping/>
+  </p:clrMapOvr>
+</p:sld>
+</file>
+
+<file path=ppt/slides/slide2.xml><?xml version="1.0" encoding="utf-8"?>
+<p:sld xmlns:a="http://schemas.openxmlformats.org/drawingml/2006/main" xmlns:r="http://schemas.openxmlformats.org/officeDocument/2006/relationships" xmlns:p="http://schemas.openxmlformats.org/presentationml/2006/main" show="0">
+  <p:cSld>
+    <p:spTree>
+      <p:nvGrpSpPr>
+        <p:cNvPr id="1" name="Shape 323"/>
+        <p:cNvGrpSpPr/>
+        <p:nvPr/>
+      </p:nvGrpSpPr>
+      <p:grpSpPr>
+        <a:xfrm>
+          <a:off x="0" y="0"/>
+          <a:ext cx="0" cy="0"/>
+          <a:chOff x="0" y="0"/>
+          <a:chExt cx="0" cy="0"/>
+        </a:xfrm>
+      </p:grpSpPr>
+      <p:sp>
+        <p:nvSpPr>
+          <p:cNvPr id="324" name="Google Shape;324;p47"/>
+          <p:cNvSpPr txBox="1">
+            <a:spLocks noGrp="1"/>
+          </p:cNvSpPr>
+          <p:nvPr>
+            <p:ph type="title"/>
+          </p:nvPr>
+        </p:nvSpPr>
+        <p:spPr>
+          <a:xfrm>
+            <a:off x="314621" y="235914"/>
+            <a:ext cx="8520600" cy="623700"/>
+          </a:xfrm>
+          <a:prstGeom prst="rect">
+            <a:avLst/>
+          </a:prstGeom>
+        </p:spPr>
+        <p:txBody>
+          <a:bodyPr spcFirstLastPara="1" wrap="square" lIns="91425" tIns="91425" rIns="91425" bIns="91425" anchor="t" anchorCtr="0">
+            <a:noAutofit/>
+          </a:bodyPr>
+          <a:lstStyle/>
+          <a:p>
+            <a:pPr marL="0" lvl="0" indent="0" algn="ctr" rtl="0">
+              <a:spcBef>
+                <a:spcPts val="0"/>
+              </a:spcBef>
+              <a:spcAft>
+                <a:spcPts val="0"/>
+              </a:spcAft>
+              <a:buNone/>
+            </a:pPr>
+            <a:r>
+              <a:rPr lang="en-US" dirty="0"/>
+              <a:t>GCIS – Software Development and Problem Solving</a:t>
+            </a:r>
+            <a:endParaRPr dirty="0"/>
+          </a:p>
+        </p:txBody>
+      </p:sp>
+      <p:sp>
+        <p:nvSpPr>
+          <p:cNvPr id="325" name="Google Shape;325;p47"/>
+          <p:cNvSpPr txBox="1">
+            <a:spLocks noGrp="1"/>
+          </p:cNvSpPr>
+          <p:nvPr>
+            <p:ph type="body" idx="1"/>
+          </p:nvPr>
+        </p:nvSpPr>
+        <p:spPr>
+          <a:xfrm>
+            <a:off x="0" y="1608922"/>
+            <a:ext cx="9149842" cy="1226403"/>
+          </a:xfrm>
+          <a:prstGeom prst="rect">
+            <a:avLst/>
+          </a:prstGeom>
+        </p:spPr>
+        <p:txBody>
+          <a:bodyPr spcFirstLastPara="1" wrap="square" lIns="91425" tIns="91425" rIns="91425" bIns="91425" anchor="ctr" anchorCtr="0">
+            <a:noAutofit/>
+          </a:bodyPr>
+          <a:lstStyle/>
+          <a:p>
+            <a:pPr marL="146050" indent="0" algn="ctr">
+              <a:buNone/>
+            </a:pPr>
+            <a:r>
+              <a:rPr lang="en-US" sz="2400" dirty="0"/>
+              <a:t>Take Quiz – Midterm Exam 3</a:t>
+            </a:r>
+          </a:p>
+          <a:p>
+            <a:pPr marL="146050" indent="0" algn="ctr">
+              <a:buNone/>
+            </a:pPr>
+            <a:r>
+              <a:rPr lang="en-US" sz="3200" b="1" dirty="0">
+                <a:solidFill>
+                  <a:schemeClr val="tx1"/>
+                </a:solidFill>
+              </a:rPr>
+              <a:t>Password - </a:t>
+            </a:r>
+            <a:r>
+              <a:rPr lang="en-US" sz="3200" b="1" dirty="0" err="1">
+                <a:solidFill>
+                  <a:schemeClr val="tx1"/>
+                </a:solidFill>
+              </a:rPr>
+              <a:t>NetworkingThreads</a:t>
+            </a:r>
+            <a:endParaRPr sz="3200" b="1" dirty="0">
+              <a:solidFill>
+                <a:schemeClr val="tx1"/>
+              </a:solidFill>
+              <a:highlight>
+                <a:srgbClr val="FFFF00"/>
+              </a:highlight>
+            </a:endParaRPr>
+          </a:p>
+        </p:txBody>
+      </p:sp>
+      <p:sp>
+        <p:nvSpPr>
+          <p:cNvPr id="326" name="Google Shape;326;p47"/>
+          <p:cNvSpPr txBox="1">
+            <a:spLocks noGrp="1"/>
+          </p:cNvSpPr>
+          <p:nvPr>
+            <p:ph type="sldNum" idx="12"/>
+          </p:nvPr>
+        </p:nvSpPr>
+        <p:spPr>
+          <a:xfrm>
+            <a:off x="8472458" y="4663217"/>
+            <a:ext cx="548700" cy="393600"/>
+          </a:xfrm>
+          <a:prstGeom prst="rect">
+            <a:avLst/>
+          </a:prstGeom>
+        </p:spPr>
+        <p:txBody>
+          <a:bodyPr spcFirstLastPara="1" wrap="square" lIns="91425" tIns="91425" rIns="91425" bIns="91425" anchor="ctr" anchorCtr="0">
+            <a:noAutofit/>
+          </a:bodyPr>
+          <a:lstStyle/>
+          <a:p>
+            <a:pPr marL="0" lvl="0" indent="0" algn="r" rtl="0">
+              <a:spcBef>
+                <a:spcPts val="0"/>
+              </a:spcBef>
+              <a:spcAft>
+                <a:spcPts val="0"/>
+              </a:spcAft>
+              <a:buNone/>
+            </a:pPr>
+            <a:fld id="{00000000-1234-1234-1234-123412341234}" type="slidenum">
+              <a:rPr lang="en"/>
+              <a:t>2</a:t>
+            </a:fld>
+            <a:endParaRPr/>
+          </a:p>
+        </p:txBody>
+      </p:sp>
+      <p:sp>
+        <p:nvSpPr>
+          <p:cNvPr id="2" name="TextBox 1">
+            <a:extLst>
+              <a:ext uri="{FF2B5EF4-FFF2-40B4-BE49-F238E27FC236}">
+                <a16:creationId xmlns:a16="http://schemas.microsoft.com/office/drawing/2014/main" id="{DCC33EBB-1C9D-B9A9-88E6-F3466077417F}"/>
+              </a:ext>
+            </a:extLst>
+          </p:cNvPr>
+          <p:cNvSpPr txBox="1"/>
+          <p:nvPr/>
+        </p:nvSpPr>
+        <p:spPr>
+          <a:xfrm>
+            <a:off x="-5842" y="1277369"/>
+            <a:ext cx="9144000" cy="307777"/>
+          </a:xfrm>
+          <a:prstGeom prst="rect">
+            <a:avLst/>
+          </a:prstGeom>
+          <a:solidFill>
+            <a:srgbClr val="FFC000"/>
+          </a:solidFill>
+        </p:spPr>
+        <p:txBody>
+          <a:bodyPr wrap="square" rtlCol="0">
+            <a:spAutoFit/>
+          </a:bodyPr>
+          <a:lstStyle/>
+          <a:p>
+            <a:pPr algn="ctr"/>
+            <a:r>
+              <a:rPr lang="en-US" b="1" dirty="0"/>
+              <a:t>Midterm Exam 3 - Written</a:t>
+            </a:r>
+          </a:p>
+        </p:txBody>
+      </p:sp>
+      <p:sp>
+        <p:nvSpPr>
+          <p:cNvPr id="3" name="TextBox 2">
+            <a:extLst>
+              <a:ext uri="{FF2B5EF4-FFF2-40B4-BE49-F238E27FC236}">
+                <a16:creationId xmlns:a16="http://schemas.microsoft.com/office/drawing/2014/main" id="{25A19346-2F9F-0DB9-0B08-CF872EB1D563}"/>
+              </a:ext>
+            </a:extLst>
+          </p:cNvPr>
+          <p:cNvSpPr txBox="1"/>
+          <p:nvPr/>
+        </p:nvSpPr>
+        <p:spPr>
+          <a:xfrm>
+            <a:off x="0" y="2886770"/>
+            <a:ext cx="9144000" cy="307777"/>
+          </a:xfrm>
+          <a:prstGeom prst="rect">
+            <a:avLst/>
+          </a:prstGeom>
+          <a:solidFill>
+            <a:srgbClr val="FFC000"/>
+          </a:solidFill>
+        </p:spPr>
+        <p:txBody>
+          <a:bodyPr wrap="square" rtlCol="0">
+            <a:spAutoFit/>
+          </a:bodyPr>
+          <a:lstStyle/>
+          <a:p>
+            <a:r>
+              <a:rPr lang="en-US" dirty="0"/>
+              <a:t>Practicum</a:t>
+            </a:r>
+          </a:p>
+        </p:txBody>
+      </p:sp>
+      <p:sp>
+        <p:nvSpPr>
+          <p:cNvPr id="4" name="Google Shape;325;p47">
+            <a:extLst>
+              <a:ext uri="{FF2B5EF4-FFF2-40B4-BE49-F238E27FC236}">
+                <a16:creationId xmlns:a16="http://schemas.microsoft.com/office/drawing/2014/main" id="{11D0E6FB-E344-369B-CE83-B3CF5834F823}"/>
+              </a:ext>
+            </a:extLst>
+          </p:cNvPr>
+          <p:cNvSpPr txBox="1">
+            <a:spLocks/>
+          </p:cNvSpPr>
+          <p:nvPr/>
+        </p:nvSpPr>
+        <p:spPr>
+          <a:xfrm>
+            <a:off x="122842" y="3424963"/>
+            <a:ext cx="8478300" cy="1435054"/>
+          </a:xfrm>
+          <a:prstGeom prst="rect">
+            <a:avLst/>
+          </a:prstGeom>
+          <a:noFill/>
+          <a:ln>
+            <a:noFill/>
+          </a:ln>
+        </p:spPr>
+        <p:txBody>
+          <a:bodyPr spcFirstLastPara="1" wrap="square" lIns="91425" tIns="91425" rIns="91425" bIns="91425" anchor="ctr" anchorCtr="0">
+            <a:noAutofit/>
+          </a:bodyPr>
+          <a:lstStyle>
+            <a:defPPr marR="0" lvl="0" algn="l" rtl="0">
+              <a:lnSpc>
+                <a:spcPct val="100000"/>
+              </a:lnSpc>
+              <a:spcBef>
+                <a:spcPts val="0"/>
+              </a:spcBef>
+              <a:spcAft>
+                <a:spcPts val="0"/>
+              </a:spcAft>
+            </a:defPPr>
+            <a:lvl1pPr marL="457200" marR="0" lvl="0" indent="-311150" algn="l" rtl="0">
+              <a:lnSpc>
+                <a:spcPct val="115000"/>
+              </a:lnSpc>
+              <a:spcBef>
+                <a:spcPts val="0"/>
+              </a:spcBef>
+              <a:spcAft>
+                <a:spcPts val="0"/>
+              </a:spcAft>
+              <a:buClr>
+                <a:schemeClr val="dk2"/>
+              </a:buClr>
+              <a:buSzPts val="1300"/>
+              <a:buFont typeface="Roboto"/>
+              <a:buChar char="●"/>
+              <a:defRPr sz="1300" b="0" i="0" u="none" strike="noStrike" cap="none">
+                <a:solidFill>
+                  <a:schemeClr val="dk2"/>
+                </a:solidFill>
+                <a:latin typeface="Roboto"/>
+                <a:ea typeface="Roboto"/>
+                <a:cs typeface="Roboto"/>
+                <a:sym typeface="Roboto"/>
+              </a:defRPr>
+            </a:lvl1pPr>
+            <a:lvl2pPr marL="914400" marR="0" lvl="1" indent="-298450" algn="l" rtl="0">
+              <a:lnSpc>
+                <a:spcPct val="115000"/>
+              </a:lnSpc>
+              <a:spcBef>
+                <a:spcPts val="1600"/>
+              </a:spcBef>
+              <a:spcAft>
+                <a:spcPts val="0"/>
+              </a:spcAft>
+              <a:buClr>
+                <a:schemeClr val="dk2"/>
+              </a:buClr>
+              <a:buSzPts val="1100"/>
+              <a:buFont typeface="Roboto"/>
+              <a:buChar char="○"/>
+              <a:defRPr sz="1100" b="0" i="0" u="none" strike="noStrike" cap="none">
+                <a:solidFill>
+                  <a:schemeClr val="dk2"/>
+                </a:solidFill>
+                <a:latin typeface="Roboto"/>
+                <a:ea typeface="Roboto"/>
+                <a:cs typeface="Roboto"/>
+                <a:sym typeface="Roboto"/>
+              </a:defRPr>
+            </a:lvl2pPr>
+            <a:lvl3pPr marL="1371600" marR="0" lvl="2" indent="-298450" algn="l" rtl="0">
+              <a:lnSpc>
+                <a:spcPct val="115000"/>
+              </a:lnSpc>
+              <a:spcBef>
+                <a:spcPts val="1600"/>
+              </a:spcBef>
+              <a:spcAft>
+                <a:spcPts val="0"/>
+              </a:spcAft>
+              <a:buClr>
+                <a:schemeClr val="dk2"/>
+              </a:buClr>
+              <a:buSzPts val="1100"/>
+              <a:buFont typeface="Roboto"/>
+              <a:buChar char="■"/>
+              <a:defRPr sz="1100" b="0" i="0" u="none" strike="noStrike" cap="none">
+                <a:solidFill>
+                  <a:schemeClr val="dk2"/>
+                </a:solidFill>
+                <a:latin typeface="Roboto"/>
+                <a:ea typeface="Roboto"/>
+                <a:cs typeface="Roboto"/>
+                <a:sym typeface="Roboto"/>
+              </a:defRPr>
+            </a:lvl3pPr>
+            <a:lvl4pPr marL="1828800" marR="0" lvl="3" indent="-298450" algn="l" rtl="0">
+              <a:lnSpc>
+                <a:spcPct val="115000"/>
+              </a:lnSpc>
+              <a:spcBef>
+                <a:spcPts val="1600"/>
+              </a:spcBef>
+              <a:spcAft>
+                <a:spcPts val="0"/>
+              </a:spcAft>
+              <a:buClr>
+                <a:schemeClr val="dk2"/>
+              </a:buClr>
+              <a:buSzPts val="1100"/>
+              <a:buFont typeface="Roboto"/>
+              <a:buChar char="●"/>
+              <a:defRPr sz="1100" b="0" i="0" u="none" strike="noStrike" cap="none">
+                <a:solidFill>
+                  <a:schemeClr val="dk2"/>
+                </a:solidFill>
+                <a:latin typeface="Roboto"/>
+                <a:ea typeface="Roboto"/>
+                <a:cs typeface="Roboto"/>
+                <a:sym typeface="Roboto"/>
+              </a:defRPr>
+            </a:lvl4pPr>
+            <a:lvl5pPr marL="2286000" marR="0" lvl="4" indent="-298450" algn="l" rtl="0">
+              <a:lnSpc>
+                <a:spcPct val="115000"/>
+              </a:lnSpc>
+              <a:spcBef>
+                <a:spcPts val="1600"/>
+              </a:spcBef>
+              <a:spcAft>
+                <a:spcPts val="0"/>
+              </a:spcAft>
+              <a:buClr>
+                <a:schemeClr val="dk2"/>
+              </a:buClr>
+              <a:buSzPts val="1100"/>
+              <a:buFont typeface="Roboto"/>
+              <a:buChar char="○"/>
+              <a:defRPr sz="1100" b="0" i="0" u="none" strike="noStrike" cap="none">
+                <a:solidFill>
+                  <a:schemeClr val="dk2"/>
+                </a:solidFill>
+                <a:latin typeface="Roboto"/>
+                <a:ea typeface="Roboto"/>
+                <a:cs typeface="Roboto"/>
+                <a:sym typeface="Roboto"/>
+              </a:defRPr>
+            </a:lvl5pPr>
+            <a:lvl6pPr marL="2743200" marR="0" lvl="5" indent="-298450" algn="l" rtl="0">
+              <a:lnSpc>
+                <a:spcPct val="115000"/>
+              </a:lnSpc>
+              <a:spcBef>
+                <a:spcPts val="1600"/>
+              </a:spcBef>
+              <a:spcAft>
+                <a:spcPts val="0"/>
+              </a:spcAft>
+              <a:buClr>
+                <a:schemeClr val="dk2"/>
+              </a:buClr>
+              <a:buSzPts val="1100"/>
+              <a:buFont typeface="Roboto"/>
+              <a:buChar char="■"/>
+              <a:defRPr sz="1100" b="0" i="0" u="none" strike="noStrike" cap="none">
+                <a:solidFill>
+                  <a:schemeClr val="dk2"/>
+                </a:solidFill>
+                <a:latin typeface="Roboto"/>
+                <a:ea typeface="Roboto"/>
+                <a:cs typeface="Roboto"/>
+                <a:sym typeface="Roboto"/>
+              </a:defRPr>
+            </a:lvl6pPr>
+            <a:lvl7pPr marL="3200400" marR="0" lvl="6" indent="-298450" algn="l" rtl="0">
+              <a:lnSpc>
+                <a:spcPct val="115000"/>
+              </a:lnSpc>
+              <a:spcBef>
+                <a:spcPts val="1600"/>
+              </a:spcBef>
+              <a:spcAft>
+                <a:spcPts val="0"/>
+              </a:spcAft>
+              <a:buClr>
+                <a:schemeClr val="dk2"/>
+              </a:buClr>
+              <a:buSzPts val="1100"/>
+              <a:buFont typeface="Roboto"/>
+              <a:buChar char="●"/>
+              <a:defRPr sz="1100" b="0" i="0" u="none" strike="noStrike" cap="none">
+                <a:solidFill>
+                  <a:schemeClr val="dk2"/>
+                </a:solidFill>
+                <a:latin typeface="Roboto"/>
+                <a:ea typeface="Roboto"/>
+                <a:cs typeface="Roboto"/>
+                <a:sym typeface="Roboto"/>
+              </a:defRPr>
+            </a:lvl7pPr>
+            <a:lvl8pPr marL="3657600" marR="0" lvl="7" indent="-298450" algn="l" rtl="0">
+              <a:lnSpc>
+                <a:spcPct val="115000"/>
+              </a:lnSpc>
+              <a:spcBef>
+                <a:spcPts val="1600"/>
+              </a:spcBef>
+              <a:spcAft>
+                <a:spcPts val="0"/>
+              </a:spcAft>
+              <a:buClr>
+                <a:schemeClr val="dk2"/>
+              </a:buClr>
+              <a:buSzPts val="1100"/>
+              <a:buFont typeface="Roboto"/>
+              <a:buChar char="○"/>
+              <a:defRPr sz="1100" b="0" i="0" u="none" strike="noStrike" cap="none">
+                <a:solidFill>
+                  <a:schemeClr val="dk2"/>
+                </a:solidFill>
+                <a:latin typeface="Roboto"/>
+                <a:ea typeface="Roboto"/>
+                <a:cs typeface="Roboto"/>
+                <a:sym typeface="Roboto"/>
+              </a:defRPr>
+            </a:lvl8pPr>
+            <a:lvl9pPr marL="4114800" marR="0" lvl="8" indent="-298450" algn="l" rtl="0">
+              <a:lnSpc>
+                <a:spcPct val="115000"/>
+              </a:lnSpc>
+              <a:spcBef>
+                <a:spcPts val="1600"/>
+              </a:spcBef>
+              <a:spcAft>
+                <a:spcPts val="1600"/>
+              </a:spcAft>
+              <a:buClr>
+                <a:schemeClr val="dk2"/>
+              </a:buClr>
+              <a:buSzPts val="1100"/>
+              <a:buFont typeface="Roboto"/>
+              <a:buChar char="■"/>
+              <a:defRPr sz="1100" b="0" i="0" u="none" strike="noStrike" cap="none">
+                <a:solidFill>
+                  <a:schemeClr val="dk2"/>
+                </a:solidFill>
+                <a:latin typeface="Roboto"/>
+                <a:ea typeface="Roboto"/>
+                <a:cs typeface="Roboto"/>
+                <a:sym typeface="Roboto"/>
+              </a:defRPr>
+            </a:lvl9pPr>
+          </a:lstStyle>
+          <a:p>
+            <a:pPr marL="342900" indent="-342900">
+              <a:spcAft>
+                <a:spcPts val="1600"/>
+              </a:spcAft>
+            </a:pPr>
+            <a:r>
+              <a:rPr lang="en-US" sz="1600" dirty="0"/>
+              <a:t>Accept assignment Mid Exam 3 under Instructor -&gt; Alam -&gt; Exam and </a:t>
+            </a:r>
+            <a:r>
+              <a:rPr lang="en-US" sz="1600" dirty="0">
+                <a:solidFill>
+                  <a:schemeClr val="tx1"/>
+                </a:solidFill>
+              </a:rPr>
+              <a:t>Clone the repository for </a:t>
+            </a:r>
+            <a:r>
+              <a:rPr lang="en-US" sz="1600" dirty="0"/>
+              <a:t>Mid Exam 3</a:t>
+            </a:r>
+          </a:p>
+          <a:p>
+            <a:pPr marL="342900" indent="-342900">
+              <a:spcAft>
+                <a:spcPts val="1600"/>
+              </a:spcAft>
+            </a:pPr>
+            <a:r>
+              <a:rPr lang="en-US" sz="1600" dirty="0">
+                <a:solidFill>
+                  <a:schemeClr val="tx1"/>
+                </a:solidFill>
+              </a:rPr>
+              <a:t>Auto Commit is enabled for your repository. </a:t>
+            </a:r>
+            <a:r>
+              <a:rPr lang="en-US" sz="1600" b="1" dirty="0">
+                <a:solidFill>
+                  <a:schemeClr val="tx1"/>
+                </a:solidFill>
+              </a:rPr>
+              <a:t>DO NOT disable it. Disable code completion/co-pilot. Reach out to instructor or TA if you need help.</a:t>
+            </a:r>
+          </a:p>
+        </p:txBody>
+      </p:sp>
+    </p:spTree>
+    <p:extLst>
+      <p:ext uri="{BB962C8B-B14F-4D97-AF65-F5344CB8AC3E}">
+        <p14:creationId xmlns:p14="http://schemas.microsoft.com/office/powerpoint/2010/main" val="943055912"/>
+      </p:ext>
+    </p:extLst>
   </p:cSld>
   <p:clrMapOvr>
     <a:masterClrMapping/>

--- a/Presentation/Announcement.pptx
+++ b/Presentation/Announcement.pptx
@@ -8,12 +8,12 @@
     <p:notesMasterId r:id="rId15"/>
   </p:notesMasterIdLst>
   <p:sldIdLst>
-    <p:sldId id="276" r:id="rId2"/>
-    <p:sldId id="278" r:id="rId3"/>
-    <p:sldId id="286" r:id="rId4"/>
-    <p:sldId id="288" r:id="rId5"/>
-    <p:sldId id="281" r:id="rId6"/>
-    <p:sldId id="287" r:id="rId7"/>
+    <p:sldId id="287" r:id="rId2"/>
+    <p:sldId id="276" r:id="rId3"/>
+    <p:sldId id="278" r:id="rId4"/>
+    <p:sldId id="286" r:id="rId5"/>
+    <p:sldId id="288" r:id="rId6"/>
+    <p:sldId id="281" r:id="rId7"/>
     <p:sldId id="285" r:id="rId8"/>
     <p:sldId id="284" r:id="rId9"/>
     <p:sldId id="277" r:id="rId10"/>
@@ -740,7 +740,13 @@
   <p:cSld>
     <p:spTree>
       <p:nvGrpSpPr>
-        <p:cNvPr id="1" name="Shape 320"/>
+        <p:cNvPr id="1" name="Shape 320">
+          <a:extLst>
+            <a:ext uri="{FF2B5EF4-FFF2-40B4-BE49-F238E27FC236}">
+              <a16:creationId xmlns:a16="http://schemas.microsoft.com/office/drawing/2014/main" id="{AF38A373-9ECB-533B-3DE6-D15673FB0A5D}"/>
+            </a:ext>
+          </a:extLst>
+        </p:cNvPr>
         <p:cNvGrpSpPr/>
         <p:nvPr/>
       </p:nvGrpSpPr>
@@ -754,7 +760,13 @@
       </p:grpSpPr>
       <p:sp>
         <p:nvSpPr>
-          <p:cNvPr id="321" name="Google Shape;321;g8f52c9b70a_3_0:notes"/>
+          <p:cNvPr id="321" name="Google Shape;321;g8f52c9b70a_3_0:notes">
+            <a:extLst>
+              <a:ext uri="{FF2B5EF4-FFF2-40B4-BE49-F238E27FC236}">
+                <a16:creationId xmlns:a16="http://schemas.microsoft.com/office/drawing/2014/main" id="{E31AA3A3-F4DD-22BC-FF74-3E11975D4EE6}"/>
+              </a:ext>
+            </a:extLst>
+          </p:cNvPr>
           <p:cNvSpPr>
             <a:spLocks noGrp="1" noRot="1" noChangeAspect="1"/>
           </p:cNvSpPr>
@@ -795,7 +807,13 @@
       </p:sp>
       <p:sp>
         <p:nvSpPr>
-          <p:cNvPr id="322" name="Google Shape;322;g8f52c9b70a_3_0:notes"/>
+          <p:cNvPr id="322" name="Google Shape;322;g8f52c9b70a_3_0:notes">
+            <a:extLst>
+              <a:ext uri="{FF2B5EF4-FFF2-40B4-BE49-F238E27FC236}">
+                <a16:creationId xmlns:a16="http://schemas.microsoft.com/office/drawing/2014/main" id="{E134EAC7-0101-665A-63A7-A233E5D3458C}"/>
+              </a:ext>
+            </a:extLst>
+          </p:cNvPr>
           <p:cNvSpPr txBox="1">
             <a:spLocks noGrp="1"/>
           </p:cNvSpPr>
@@ -826,6 +844,11 @@
         </p:txBody>
       </p:sp>
     </p:spTree>
+    <p:extLst>
+      <p:ext uri="{BB962C8B-B14F-4D97-AF65-F5344CB8AC3E}">
+        <p14:creationId xmlns:p14="http://schemas.microsoft.com/office/powerpoint/2010/main" val="1738943008"/>
+      </p:ext>
+    </p:extLst>
   </p:cSld>
   <p:clrMapOvr>
     <a:masterClrMapping/>
@@ -1336,6 +1359,104 @@
         </p:txBody>
       </p:sp>
     </p:spTree>
+  </p:cSld>
+  <p:clrMapOvr>
+    <a:masterClrMapping/>
+  </p:clrMapOvr>
+</p:notes>
+</file>
+
+<file path=ppt/notesSlides/notesSlide3.xml><?xml version="1.0" encoding="utf-8"?>
+<p:notes xmlns:a="http://schemas.openxmlformats.org/drawingml/2006/main" xmlns:r="http://schemas.openxmlformats.org/officeDocument/2006/relationships" xmlns:p="http://schemas.openxmlformats.org/presentationml/2006/main" showMasterSp="0" showMasterPhAnim="0">
+  <p:cSld>
+    <p:spTree>
+      <p:nvGrpSpPr>
+        <p:cNvPr id="1" name="Shape 320"/>
+        <p:cNvGrpSpPr/>
+        <p:nvPr/>
+      </p:nvGrpSpPr>
+      <p:grpSpPr>
+        <a:xfrm>
+          <a:off x="0" y="0"/>
+          <a:ext cx="0" cy="0"/>
+          <a:chOff x="0" y="0"/>
+          <a:chExt cx="0" cy="0"/>
+        </a:xfrm>
+      </p:grpSpPr>
+      <p:sp>
+        <p:nvSpPr>
+          <p:cNvPr id="321" name="Google Shape;321;g8f52c9b70a_3_0:notes"/>
+          <p:cNvSpPr>
+            <a:spLocks noGrp="1" noRot="1" noChangeAspect="1"/>
+          </p:cNvSpPr>
+          <p:nvPr>
+            <p:ph type="sldImg" idx="2"/>
+          </p:nvPr>
+        </p:nvSpPr>
+        <p:spPr>
+          <a:xfrm>
+            <a:off x="406400" y="696913"/>
+            <a:ext cx="6197600" cy="3486150"/>
+          </a:xfrm>
+          <a:custGeom>
+            <a:avLst/>
+            <a:gdLst/>
+            <a:ahLst/>
+            <a:cxnLst/>
+            <a:rect l="l" t="t" r="r" b="b"/>
+            <a:pathLst>
+              <a:path w="120000" h="120000" extrusionOk="0">
+                <a:moveTo>
+                  <a:pt x="0" y="0"/>
+                </a:moveTo>
+                <a:lnTo>
+                  <a:pt x="120000" y="0"/>
+                </a:lnTo>
+                <a:lnTo>
+                  <a:pt x="120000" y="120000"/>
+                </a:lnTo>
+                <a:lnTo>
+                  <a:pt x="0" y="120000"/>
+                </a:lnTo>
+                <a:close/>
+              </a:path>
+            </a:pathLst>
+          </a:custGeom>
+        </p:spPr>
+      </p:sp>
+      <p:sp>
+        <p:nvSpPr>
+          <p:cNvPr id="322" name="Google Shape;322;g8f52c9b70a_3_0:notes"/>
+          <p:cNvSpPr txBox="1">
+            <a:spLocks noGrp="1"/>
+          </p:cNvSpPr>
+          <p:nvPr>
+            <p:ph type="body" idx="1"/>
+          </p:nvPr>
+        </p:nvSpPr>
+        <p:spPr>
+          <a:xfrm>
+            <a:off x="701040" y="4415790"/>
+            <a:ext cx="5608320" cy="4183380"/>
+          </a:xfrm>
+          <a:prstGeom prst="rect">
+            <a:avLst/>
+          </a:prstGeom>
+        </p:spPr>
+        <p:txBody>
+          <a:bodyPr spcFirstLastPara="1" wrap="square" lIns="93162" tIns="93162" rIns="93162" bIns="93162" anchor="t" anchorCtr="0">
+            <a:noAutofit/>
+          </a:bodyPr>
+          <a:lstStyle/>
+          <a:p>
+            <a:pPr marL="0" indent="0">
+              <a:buNone/>
+            </a:pPr>
+            <a:endParaRPr/>
+          </a:p>
+        </p:txBody>
+      </p:sp>
+    </p:spTree>
     <p:extLst>
       <p:ext uri="{BB962C8B-B14F-4D97-AF65-F5344CB8AC3E}">
         <p14:creationId xmlns:p14="http://schemas.microsoft.com/office/powerpoint/2010/main" val="4097390636"/>
@@ -1348,7 +1469,7 @@
 </p:notes>
 </file>
 
-<file path=ppt/notesSlides/notesSlide3.xml><?xml version="1.0" encoding="utf-8"?>
+<file path=ppt/notesSlides/notesSlide4.xml><?xml version="1.0" encoding="utf-8"?>
 <p:notes xmlns:a="http://schemas.openxmlformats.org/drawingml/2006/main" xmlns:r="http://schemas.openxmlformats.org/officeDocument/2006/relationships" xmlns:p="http://schemas.openxmlformats.org/presentationml/2006/main" showMasterSp="0" showMasterPhAnim="0">
   <p:cSld>
     <p:spTree>
@@ -1469,7 +1590,7 @@
 </p:notes>
 </file>
 
-<file path=ppt/notesSlides/notesSlide4.xml><?xml version="1.0" encoding="utf-8"?>
+<file path=ppt/notesSlides/notesSlide5.xml><?xml version="1.0" encoding="utf-8"?>
 <p:notes xmlns:a="http://schemas.openxmlformats.org/drawingml/2006/main" xmlns:r="http://schemas.openxmlformats.org/officeDocument/2006/relationships" xmlns:p="http://schemas.openxmlformats.org/presentationml/2006/main" showMasterSp="0" showMasterPhAnim="0">
   <p:cSld>
     <p:spTree>
@@ -1590,7 +1711,7 @@
 </p:notes>
 </file>
 
-<file path=ppt/notesSlides/notesSlide5.xml><?xml version="1.0" encoding="utf-8"?>
+<file path=ppt/notesSlides/notesSlide6.xml><?xml version="1.0" encoding="utf-8"?>
 <p:notes xmlns:a="http://schemas.openxmlformats.org/drawingml/2006/main" xmlns:r="http://schemas.openxmlformats.org/officeDocument/2006/relationships" xmlns:p="http://schemas.openxmlformats.org/presentationml/2006/main" showMasterSp="0" showMasterPhAnim="0">
   <p:cSld>
     <p:spTree>
@@ -1684,127 +1805,6 @@
     <p:extLst>
       <p:ext uri="{BB962C8B-B14F-4D97-AF65-F5344CB8AC3E}">
         <p14:creationId xmlns:p14="http://schemas.microsoft.com/office/powerpoint/2010/main" val="2158134825"/>
-      </p:ext>
-    </p:extLst>
-  </p:cSld>
-  <p:clrMapOvr>
-    <a:masterClrMapping/>
-  </p:clrMapOvr>
-</p:notes>
-</file>
-
-<file path=ppt/notesSlides/notesSlide6.xml><?xml version="1.0" encoding="utf-8"?>
-<p:notes xmlns:a="http://schemas.openxmlformats.org/drawingml/2006/main" xmlns:r="http://schemas.openxmlformats.org/officeDocument/2006/relationships" xmlns:p="http://schemas.openxmlformats.org/presentationml/2006/main" showMasterSp="0" showMasterPhAnim="0">
-  <p:cSld>
-    <p:spTree>
-      <p:nvGrpSpPr>
-        <p:cNvPr id="1" name="Shape 320">
-          <a:extLst>
-            <a:ext uri="{FF2B5EF4-FFF2-40B4-BE49-F238E27FC236}">
-              <a16:creationId xmlns:a16="http://schemas.microsoft.com/office/drawing/2014/main" id="{AF38A373-9ECB-533B-3DE6-D15673FB0A5D}"/>
-            </a:ext>
-          </a:extLst>
-        </p:cNvPr>
-        <p:cNvGrpSpPr/>
-        <p:nvPr/>
-      </p:nvGrpSpPr>
-      <p:grpSpPr>
-        <a:xfrm>
-          <a:off x="0" y="0"/>
-          <a:ext cx="0" cy="0"/>
-          <a:chOff x="0" y="0"/>
-          <a:chExt cx="0" cy="0"/>
-        </a:xfrm>
-      </p:grpSpPr>
-      <p:sp>
-        <p:nvSpPr>
-          <p:cNvPr id="321" name="Google Shape;321;g8f52c9b70a_3_0:notes">
-            <a:extLst>
-              <a:ext uri="{FF2B5EF4-FFF2-40B4-BE49-F238E27FC236}">
-                <a16:creationId xmlns:a16="http://schemas.microsoft.com/office/drawing/2014/main" id="{E31AA3A3-F4DD-22BC-FF74-3E11975D4EE6}"/>
-              </a:ext>
-            </a:extLst>
-          </p:cNvPr>
-          <p:cNvSpPr>
-            <a:spLocks noGrp="1" noRot="1" noChangeAspect="1"/>
-          </p:cNvSpPr>
-          <p:nvPr>
-            <p:ph type="sldImg" idx="2"/>
-          </p:nvPr>
-        </p:nvSpPr>
-        <p:spPr>
-          <a:xfrm>
-            <a:off x="406400" y="696913"/>
-            <a:ext cx="6197600" cy="3486150"/>
-          </a:xfrm>
-          <a:custGeom>
-            <a:avLst/>
-            <a:gdLst/>
-            <a:ahLst/>
-            <a:cxnLst/>
-            <a:rect l="l" t="t" r="r" b="b"/>
-            <a:pathLst>
-              <a:path w="120000" h="120000" extrusionOk="0">
-                <a:moveTo>
-                  <a:pt x="0" y="0"/>
-                </a:moveTo>
-                <a:lnTo>
-                  <a:pt x="120000" y="0"/>
-                </a:lnTo>
-                <a:lnTo>
-                  <a:pt x="120000" y="120000"/>
-                </a:lnTo>
-                <a:lnTo>
-                  <a:pt x="0" y="120000"/>
-                </a:lnTo>
-                <a:close/>
-              </a:path>
-            </a:pathLst>
-          </a:custGeom>
-        </p:spPr>
-      </p:sp>
-      <p:sp>
-        <p:nvSpPr>
-          <p:cNvPr id="322" name="Google Shape;322;g8f52c9b70a_3_0:notes">
-            <a:extLst>
-              <a:ext uri="{FF2B5EF4-FFF2-40B4-BE49-F238E27FC236}">
-                <a16:creationId xmlns:a16="http://schemas.microsoft.com/office/drawing/2014/main" id="{E134EAC7-0101-665A-63A7-A233E5D3458C}"/>
-              </a:ext>
-            </a:extLst>
-          </p:cNvPr>
-          <p:cNvSpPr txBox="1">
-            <a:spLocks noGrp="1"/>
-          </p:cNvSpPr>
-          <p:nvPr>
-            <p:ph type="body" idx="1"/>
-          </p:nvPr>
-        </p:nvSpPr>
-        <p:spPr>
-          <a:xfrm>
-            <a:off x="701040" y="4415790"/>
-            <a:ext cx="5608320" cy="4183380"/>
-          </a:xfrm>
-          <a:prstGeom prst="rect">
-            <a:avLst/>
-          </a:prstGeom>
-        </p:spPr>
-        <p:txBody>
-          <a:bodyPr spcFirstLastPara="1" wrap="square" lIns="93162" tIns="93162" rIns="93162" bIns="93162" anchor="t" anchorCtr="0">
-            <a:noAutofit/>
-          </a:bodyPr>
-          <a:lstStyle/>
-          <a:p>
-            <a:pPr marL="0" indent="0">
-              <a:buNone/>
-            </a:pPr>
-            <a:endParaRPr/>
-          </a:p>
-        </p:txBody>
-      </p:sp>
-    </p:spTree>
-    <p:extLst>
-      <p:ext uri="{BB962C8B-B14F-4D97-AF65-F5344CB8AC3E}">
-        <p14:creationId xmlns:p14="http://schemas.microsoft.com/office/powerpoint/2010/main" val="1738943008"/>
       </p:ext>
     </p:extLst>
   </p:cSld>
@@ -6651,6 +6651,1540 @@
   <p:cSld>
     <p:spTree>
       <p:nvGrpSpPr>
+        <p:cNvPr id="1" name="Shape 323">
+          <a:extLst>
+            <a:ext uri="{FF2B5EF4-FFF2-40B4-BE49-F238E27FC236}">
+              <a16:creationId xmlns:a16="http://schemas.microsoft.com/office/drawing/2014/main" id="{1AC6523E-CC83-B7B9-B47C-949A9C7203D8}"/>
+            </a:ext>
+          </a:extLst>
+        </p:cNvPr>
+        <p:cNvGrpSpPr/>
+        <p:nvPr/>
+      </p:nvGrpSpPr>
+      <p:grpSpPr>
+        <a:xfrm>
+          <a:off x="0" y="0"/>
+          <a:ext cx="0" cy="0"/>
+          <a:chOff x="0" y="0"/>
+          <a:chExt cx="0" cy="0"/>
+        </a:xfrm>
+      </p:grpSpPr>
+      <p:sp>
+        <p:nvSpPr>
+          <p:cNvPr id="324" name="Google Shape;324;p47">
+            <a:extLst>
+              <a:ext uri="{FF2B5EF4-FFF2-40B4-BE49-F238E27FC236}">
+                <a16:creationId xmlns:a16="http://schemas.microsoft.com/office/drawing/2014/main" id="{72CBC233-9E04-A188-2584-2CE1B0FE8F31}"/>
+              </a:ext>
+            </a:extLst>
+          </p:cNvPr>
+          <p:cNvSpPr txBox="1">
+            <a:spLocks noGrp="1"/>
+          </p:cNvSpPr>
+          <p:nvPr>
+            <p:ph type="title"/>
+          </p:nvPr>
+        </p:nvSpPr>
+        <p:spPr>
+          <a:xfrm>
+            <a:off x="300016" y="269197"/>
+            <a:ext cx="8520600" cy="623700"/>
+          </a:xfrm>
+          <a:prstGeom prst="rect">
+            <a:avLst/>
+          </a:prstGeom>
+        </p:spPr>
+        <p:txBody>
+          <a:bodyPr spcFirstLastPara="1" wrap="square" lIns="91425" tIns="91425" rIns="91425" bIns="91425" anchor="t" anchorCtr="0">
+            <a:noAutofit/>
+          </a:bodyPr>
+          <a:lstStyle/>
+          <a:p>
+            <a:pPr marL="0" lvl="0" indent="0" algn="ctr" rtl="0">
+              <a:spcBef>
+                <a:spcPts val="0"/>
+              </a:spcBef>
+              <a:spcAft>
+                <a:spcPts val="0"/>
+              </a:spcAft>
+              <a:buNone/>
+            </a:pPr>
+            <a:r>
+              <a:rPr lang="en-US" dirty="0"/>
+              <a:t>GCIS – Software Development and Problem Solving</a:t>
+            </a:r>
+            <a:endParaRPr dirty="0"/>
+          </a:p>
+        </p:txBody>
+      </p:sp>
+      <p:sp>
+        <p:nvSpPr>
+          <p:cNvPr id="325" name="Google Shape;325;p47">
+            <a:extLst>
+              <a:ext uri="{FF2B5EF4-FFF2-40B4-BE49-F238E27FC236}">
+                <a16:creationId xmlns:a16="http://schemas.microsoft.com/office/drawing/2014/main" id="{E665F298-5025-E429-9EE6-CD009824AD88}"/>
+              </a:ext>
+            </a:extLst>
+          </p:cNvPr>
+          <p:cNvSpPr txBox="1">
+            <a:spLocks noGrp="1"/>
+          </p:cNvSpPr>
+          <p:nvPr>
+            <p:ph type="body" idx="1"/>
+          </p:nvPr>
+        </p:nvSpPr>
+        <p:spPr>
+          <a:xfrm>
+            <a:off x="91444" y="1758316"/>
+            <a:ext cx="4271627" cy="1113193"/>
+          </a:xfrm>
+          <a:prstGeom prst="rect">
+            <a:avLst/>
+          </a:prstGeom>
+        </p:spPr>
+        <p:txBody>
+          <a:bodyPr spcFirstLastPara="1" wrap="square" lIns="91425" tIns="91425" rIns="91425" bIns="91425" anchor="ctr" anchorCtr="0">
+            <a:noAutofit/>
+          </a:bodyPr>
+          <a:lstStyle/>
+          <a:p>
+            <a:pPr marL="146050" indent="0">
+              <a:buNone/>
+            </a:pPr>
+            <a:r>
+              <a:rPr lang="en-US" sz="2000" dirty="0"/>
+              <a:t>Take Quiz 11.3: Threads Review</a:t>
+            </a:r>
+          </a:p>
+          <a:p>
+            <a:pPr marL="146050" indent="0">
+              <a:buNone/>
+            </a:pPr>
+            <a:r>
+              <a:rPr lang="en-US" sz="2000" dirty="0">
+                <a:solidFill>
+                  <a:schemeClr val="tx1"/>
+                </a:solidFill>
+              </a:rPr>
+              <a:t>Password –</a:t>
+            </a:r>
+            <a:r>
+              <a:rPr lang="en-US" sz="2000" dirty="0" err="1">
+                <a:solidFill>
+                  <a:schemeClr val="tx1"/>
+                </a:solidFill>
+              </a:rPr>
+              <a:t>BewareTheThreadBear</a:t>
+            </a:r>
+            <a:endParaRPr sz="2000" dirty="0">
+              <a:solidFill>
+                <a:schemeClr val="tx1"/>
+              </a:solidFill>
+            </a:endParaRPr>
+          </a:p>
+        </p:txBody>
+      </p:sp>
+      <p:sp>
+        <p:nvSpPr>
+          <p:cNvPr id="326" name="Google Shape;326;p47">
+            <a:extLst>
+              <a:ext uri="{FF2B5EF4-FFF2-40B4-BE49-F238E27FC236}">
+                <a16:creationId xmlns:a16="http://schemas.microsoft.com/office/drawing/2014/main" id="{06900A1A-D8D4-052D-4D61-A00A33A0490B}"/>
+              </a:ext>
+            </a:extLst>
+          </p:cNvPr>
+          <p:cNvSpPr txBox="1">
+            <a:spLocks noGrp="1"/>
+          </p:cNvSpPr>
+          <p:nvPr>
+            <p:ph type="sldNum" idx="12"/>
+          </p:nvPr>
+        </p:nvSpPr>
+        <p:spPr>
+          <a:xfrm>
+            <a:off x="8472458" y="4663217"/>
+            <a:ext cx="548700" cy="393600"/>
+          </a:xfrm>
+          <a:prstGeom prst="rect">
+            <a:avLst/>
+          </a:prstGeom>
+        </p:spPr>
+        <p:txBody>
+          <a:bodyPr spcFirstLastPara="1" wrap="square" lIns="91425" tIns="91425" rIns="91425" bIns="91425" anchor="ctr" anchorCtr="0">
+            <a:noAutofit/>
+          </a:bodyPr>
+          <a:lstStyle/>
+          <a:p>
+            <a:pPr marL="0" lvl="0" indent="0" algn="r" rtl="0">
+              <a:spcBef>
+                <a:spcPts val="0"/>
+              </a:spcBef>
+              <a:spcAft>
+                <a:spcPts val="0"/>
+              </a:spcAft>
+              <a:buNone/>
+            </a:pPr>
+            <a:fld id="{00000000-1234-1234-1234-123412341234}" type="slidenum">
+              <a:rPr lang="en"/>
+              <a:t>1</a:t>
+            </a:fld>
+            <a:endParaRPr/>
+          </a:p>
+        </p:txBody>
+      </p:sp>
+      <p:sp>
+        <p:nvSpPr>
+          <p:cNvPr id="2" name="TextBox 1">
+            <a:extLst>
+              <a:ext uri="{FF2B5EF4-FFF2-40B4-BE49-F238E27FC236}">
+                <a16:creationId xmlns:a16="http://schemas.microsoft.com/office/drawing/2014/main" id="{D97E7EBF-24E3-825A-A968-FA4B0D04DF1F}"/>
+              </a:ext>
+            </a:extLst>
+          </p:cNvPr>
+          <p:cNvSpPr txBox="1"/>
+          <p:nvPr/>
+        </p:nvSpPr>
+        <p:spPr>
+          <a:xfrm>
+            <a:off x="-11684" y="1287037"/>
+            <a:ext cx="9144000" cy="338555"/>
+          </a:xfrm>
+          <a:prstGeom prst="rect">
+            <a:avLst/>
+          </a:prstGeom>
+          <a:solidFill>
+            <a:srgbClr val="FFC000"/>
+          </a:solidFill>
+        </p:spPr>
+        <p:txBody>
+          <a:bodyPr wrap="square" rtlCol="0">
+            <a:spAutoFit/>
+          </a:bodyPr>
+          <a:lstStyle/>
+          <a:p>
+            <a:r>
+              <a:rPr lang="en-US" dirty="0"/>
+              <a:t>Quiz</a:t>
+            </a:r>
+          </a:p>
+        </p:txBody>
+      </p:sp>
+      <p:sp>
+        <p:nvSpPr>
+          <p:cNvPr id="3" name="TextBox 2">
+            <a:extLst>
+              <a:ext uri="{FF2B5EF4-FFF2-40B4-BE49-F238E27FC236}">
+                <a16:creationId xmlns:a16="http://schemas.microsoft.com/office/drawing/2014/main" id="{4823F795-9329-8722-EA48-35E2E42958B6}"/>
+              </a:ext>
+            </a:extLst>
+          </p:cNvPr>
+          <p:cNvSpPr txBox="1"/>
+          <p:nvPr/>
+        </p:nvSpPr>
+        <p:spPr>
+          <a:xfrm>
+            <a:off x="-5842" y="3168849"/>
+            <a:ext cx="9144000" cy="307777"/>
+          </a:xfrm>
+          <a:prstGeom prst="rect">
+            <a:avLst/>
+          </a:prstGeom>
+          <a:solidFill>
+            <a:srgbClr val="FFC000"/>
+          </a:solidFill>
+        </p:spPr>
+        <p:txBody>
+          <a:bodyPr wrap="square" rtlCol="0">
+            <a:spAutoFit/>
+          </a:bodyPr>
+          <a:lstStyle/>
+          <a:p>
+            <a:r>
+              <a:rPr lang="en-US" dirty="0"/>
+              <a:t>Next </a:t>
+            </a:r>
+            <a:r>
+              <a:rPr lang="en-US" dirty="0">
+                <a:sym typeface="Wingdings" panose="05000000000000000000" pitchFamily="2" charset="2"/>
+              </a:rPr>
+              <a:t> </a:t>
+            </a:r>
+            <a:endParaRPr lang="en-US" dirty="0"/>
+          </a:p>
+        </p:txBody>
+      </p:sp>
+      <p:sp>
+        <p:nvSpPr>
+          <p:cNvPr id="4" name="Google Shape;325;p47">
+            <a:extLst>
+              <a:ext uri="{FF2B5EF4-FFF2-40B4-BE49-F238E27FC236}">
+                <a16:creationId xmlns:a16="http://schemas.microsoft.com/office/drawing/2014/main" id="{0AF88843-F54E-EF33-F5A4-A1A3C1D40E0E}"/>
+              </a:ext>
+            </a:extLst>
+          </p:cNvPr>
+          <p:cNvSpPr txBox="1">
+            <a:spLocks/>
+          </p:cNvSpPr>
+          <p:nvPr/>
+        </p:nvSpPr>
+        <p:spPr>
+          <a:xfrm>
+            <a:off x="-5842" y="3527388"/>
+            <a:ext cx="9149842" cy="1529429"/>
+          </a:xfrm>
+          <a:prstGeom prst="rect">
+            <a:avLst/>
+          </a:prstGeom>
+          <a:noFill/>
+          <a:ln>
+            <a:noFill/>
+          </a:ln>
+        </p:spPr>
+        <p:txBody>
+          <a:bodyPr spcFirstLastPara="1" wrap="square" lIns="91425" tIns="91425" rIns="91425" bIns="91425" anchor="ctr" anchorCtr="0">
+            <a:noAutofit/>
+          </a:bodyPr>
+          <a:lstStyle>
+            <a:defPPr marR="0" lvl="0" algn="l" rtl="0">
+              <a:lnSpc>
+                <a:spcPct val="100000"/>
+              </a:lnSpc>
+              <a:spcBef>
+                <a:spcPts val="0"/>
+              </a:spcBef>
+              <a:spcAft>
+                <a:spcPts val="0"/>
+              </a:spcAft>
+            </a:defPPr>
+            <a:lvl1pPr marL="457200" marR="0" lvl="0" indent="-311150" algn="l" rtl="0">
+              <a:lnSpc>
+                <a:spcPct val="115000"/>
+              </a:lnSpc>
+              <a:spcBef>
+                <a:spcPts val="0"/>
+              </a:spcBef>
+              <a:spcAft>
+                <a:spcPts val="0"/>
+              </a:spcAft>
+              <a:buClr>
+                <a:schemeClr val="dk2"/>
+              </a:buClr>
+              <a:buSzPts val="1300"/>
+              <a:buFont typeface="Roboto"/>
+              <a:buChar char="●"/>
+              <a:defRPr sz="1300" b="0" i="0" u="none" strike="noStrike" cap="none">
+                <a:solidFill>
+                  <a:schemeClr val="dk2"/>
+                </a:solidFill>
+                <a:latin typeface="Roboto"/>
+                <a:ea typeface="Roboto"/>
+                <a:cs typeface="Roboto"/>
+                <a:sym typeface="Roboto"/>
+              </a:defRPr>
+            </a:lvl1pPr>
+            <a:lvl2pPr marL="914400" marR="0" lvl="1" indent="-298450" algn="l" rtl="0">
+              <a:lnSpc>
+                <a:spcPct val="115000"/>
+              </a:lnSpc>
+              <a:spcBef>
+                <a:spcPts val="1600"/>
+              </a:spcBef>
+              <a:spcAft>
+                <a:spcPts val="0"/>
+              </a:spcAft>
+              <a:buClr>
+                <a:schemeClr val="dk2"/>
+              </a:buClr>
+              <a:buSzPts val="1100"/>
+              <a:buFont typeface="Roboto"/>
+              <a:buChar char="○"/>
+              <a:defRPr sz="1100" b="0" i="0" u="none" strike="noStrike" cap="none">
+                <a:solidFill>
+                  <a:schemeClr val="dk2"/>
+                </a:solidFill>
+                <a:latin typeface="Roboto"/>
+                <a:ea typeface="Roboto"/>
+                <a:cs typeface="Roboto"/>
+                <a:sym typeface="Roboto"/>
+              </a:defRPr>
+            </a:lvl2pPr>
+            <a:lvl3pPr marL="1371600" marR="0" lvl="2" indent="-298450" algn="l" rtl="0">
+              <a:lnSpc>
+                <a:spcPct val="115000"/>
+              </a:lnSpc>
+              <a:spcBef>
+                <a:spcPts val="1600"/>
+              </a:spcBef>
+              <a:spcAft>
+                <a:spcPts val="0"/>
+              </a:spcAft>
+              <a:buClr>
+                <a:schemeClr val="dk2"/>
+              </a:buClr>
+              <a:buSzPts val="1100"/>
+              <a:buFont typeface="Roboto"/>
+              <a:buChar char="■"/>
+              <a:defRPr sz="1100" b="0" i="0" u="none" strike="noStrike" cap="none">
+                <a:solidFill>
+                  <a:schemeClr val="dk2"/>
+                </a:solidFill>
+                <a:latin typeface="Roboto"/>
+                <a:ea typeface="Roboto"/>
+                <a:cs typeface="Roboto"/>
+                <a:sym typeface="Roboto"/>
+              </a:defRPr>
+            </a:lvl3pPr>
+            <a:lvl4pPr marL="1828800" marR="0" lvl="3" indent="-298450" algn="l" rtl="0">
+              <a:lnSpc>
+                <a:spcPct val="115000"/>
+              </a:lnSpc>
+              <a:spcBef>
+                <a:spcPts val="1600"/>
+              </a:spcBef>
+              <a:spcAft>
+                <a:spcPts val="0"/>
+              </a:spcAft>
+              <a:buClr>
+                <a:schemeClr val="dk2"/>
+              </a:buClr>
+              <a:buSzPts val="1100"/>
+              <a:buFont typeface="Roboto"/>
+              <a:buChar char="●"/>
+              <a:defRPr sz="1100" b="0" i="0" u="none" strike="noStrike" cap="none">
+                <a:solidFill>
+                  <a:schemeClr val="dk2"/>
+                </a:solidFill>
+                <a:latin typeface="Roboto"/>
+                <a:ea typeface="Roboto"/>
+                <a:cs typeface="Roboto"/>
+                <a:sym typeface="Roboto"/>
+              </a:defRPr>
+            </a:lvl4pPr>
+            <a:lvl5pPr marL="2286000" marR="0" lvl="4" indent="-298450" algn="l" rtl="0">
+              <a:lnSpc>
+                <a:spcPct val="115000"/>
+              </a:lnSpc>
+              <a:spcBef>
+                <a:spcPts val="1600"/>
+              </a:spcBef>
+              <a:spcAft>
+                <a:spcPts val="0"/>
+              </a:spcAft>
+              <a:buClr>
+                <a:schemeClr val="dk2"/>
+              </a:buClr>
+              <a:buSzPts val="1100"/>
+              <a:buFont typeface="Roboto"/>
+              <a:buChar char="○"/>
+              <a:defRPr sz="1100" b="0" i="0" u="none" strike="noStrike" cap="none">
+                <a:solidFill>
+                  <a:schemeClr val="dk2"/>
+                </a:solidFill>
+                <a:latin typeface="Roboto"/>
+                <a:ea typeface="Roboto"/>
+                <a:cs typeface="Roboto"/>
+                <a:sym typeface="Roboto"/>
+              </a:defRPr>
+            </a:lvl5pPr>
+            <a:lvl6pPr marL="2743200" marR="0" lvl="5" indent="-298450" algn="l" rtl="0">
+              <a:lnSpc>
+                <a:spcPct val="115000"/>
+              </a:lnSpc>
+              <a:spcBef>
+                <a:spcPts val="1600"/>
+              </a:spcBef>
+              <a:spcAft>
+                <a:spcPts val="0"/>
+              </a:spcAft>
+              <a:buClr>
+                <a:schemeClr val="dk2"/>
+              </a:buClr>
+              <a:buSzPts val="1100"/>
+              <a:buFont typeface="Roboto"/>
+              <a:buChar char="■"/>
+              <a:defRPr sz="1100" b="0" i="0" u="none" strike="noStrike" cap="none">
+                <a:solidFill>
+                  <a:schemeClr val="dk2"/>
+                </a:solidFill>
+                <a:latin typeface="Roboto"/>
+                <a:ea typeface="Roboto"/>
+                <a:cs typeface="Roboto"/>
+                <a:sym typeface="Roboto"/>
+              </a:defRPr>
+            </a:lvl6pPr>
+            <a:lvl7pPr marL="3200400" marR="0" lvl="6" indent="-298450" algn="l" rtl="0">
+              <a:lnSpc>
+                <a:spcPct val="115000"/>
+              </a:lnSpc>
+              <a:spcBef>
+                <a:spcPts val="1600"/>
+              </a:spcBef>
+              <a:spcAft>
+                <a:spcPts val="0"/>
+              </a:spcAft>
+              <a:buClr>
+                <a:schemeClr val="dk2"/>
+              </a:buClr>
+              <a:buSzPts val="1100"/>
+              <a:buFont typeface="Roboto"/>
+              <a:buChar char="●"/>
+              <a:defRPr sz="1100" b="0" i="0" u="none" strike="noStrike" cap="none">
+                <a:solidFill>
+                  <a:schemeClr val="dk2"/>
+                </a:solidFill>
+                <a:latin typeface="Roboto"/>
+                <a:ea typeface="Roboto"/>
+                <a:cs typeface="Roboto"/>
+                <a:sym typeface="Roboto"/>
+              </a:defRPr>
+            </a:lvl7pPr>
+            <a:lvl8pPr marL="3657600" marR="0" lvl="7" indent="-298450" algn="l" rtl="0">
+              <a:lnSpc>
+                <a:spcPct val="115000"/>
+              </a:lnSpc>
+              <a:spcBef>
+                <a:spcPts val="1600"/>
+              </a:spcBef>
+              <a:spcAft>
+                <a:spcPts val="0"/>
+              </a:spcAft>
+              <a:buClr>
+                <a:schemeClr val="dk2"/>
+              </a:buClr>
+              <a:buSzPts val="1100"/>
+              <a:buFont typeface="Roboto"/>
+              <a:buChar char="○"/>
+              <a:defRPr sz="1100" b="0" i="0" u="none" strike="noStrike" cap="none">
+                <a:solidFill>
+                  <a:schemeClr val="dk2"/>
+                </a:solidFill>
+                <a:latin typeface="Roboto"/>
+                <a:ea typeface="Roboto"/>
+                <a:cs typeface="Roboto"/>
+                <a:sym typeface="Roboto"/>
+              </a:defRPr>
+            </a:lvl8pPr>
+            <a:lvl9pPr marL="4114800" marR="0" lvl="8" indent="-298450" algn="l" rtl="0">
+              <a:lnSpc>
+                <a:spcPct val="115000"/>
+              </a:lnSpc>
+              <a:spcBef>
+                <a:spcPts val="1600"/>
+              </a:spcBef>
+              <a:spcAft>
+                <a:spcPts val="1600"/>
+              </a:spcAft>
+              <a:buClr>
+                <a:schemeClr val="dk2"/>
+              </a:buClr>
+              <a:buSzPts val="1100"/>
+              <a:buFont typeface="Roboto"/>
+              <a:buChar char="■"/>
+              <a:defRPr sz="1100" b="0" i="0" u="none" strike="noStrike" cap="none">
+                <a:solidFill>
+                  <a:schemeClr val="dk2"/>
+                </a:solidFill>
+                <a:latin typeface="Roboto"/>
+                <a:ea typeface="Roboto"/>
+                <a:cs typeface="Roboto"/>
+                <a:sym typeface="Roboto"/>
+              </a:defRPr>
+            </a:lvl9pPr>
+          </a:lstStyle>
+          <a:p>
+            <a:pPr marL="0" indent="0">
+              <a:spcAft>
+                <a:spcPts val="1600"/>
+              </a:spcAft>
+              <a:buNone/>
+            </a:pPr>
+            <a:r>
+              <a:rPr lang="en-US" sz="2000" dirty="0"/>
+              <a:t>After completing the Quiz </a:t>
+            </a:r>
+          </a:p>
+          <a:p>
+            <a:pPr marL="342900" indent="-342900">
+              <a:spcAft>
+                <a:spcPts val="1600"/>
+              </a:spcAft>
+            </a:pPr>
+            <a:r>
+              <a:rPr lang="en-US" sz="1800" dirty="0"/>
+              <a:t>Clone/Pull GitHub Classroom Assignment for Unit 12, if not done already.</a:t>
+            </a:r>
+          </a:p>
+          <a:p>
+            <a:pPr marL="342900" indent="-342900">
+              <a:spcAft>
+                <a:spcPts val="1600"/>
+              </a:spcAft>
+            </a:pPr>
+            <a:r>
+              <a:rPr lang="en-US" sz="1800" dirty="0">
+                <a:solidFill>
+                  <a:schemeClr val="tx1"/>
+                </a:solidFill>
+              </a:rPr>
+              <a:t>Download Day 01 for this unit code from </a:t>
+            </a:r>
+            <a:r>
+              <a:rPr lang="en-US" sz="1800" dirty="0" err="1">
+                <a:solidFill>
+                  <a:schemeClr val="tx1"/>
+                </a:solidFill>
+              </a:rPr>
+              <a:t>myCourses</a:t>
+            </a:r>
+            <a:r>
+              <a:rPr lang="en-US" sz="1800" dirty="0">
+                <a:solidFill>
+                  <a:schemeClr val="tx1"/>
+                </a:solidFill>
+              </a:rPr>
+              <a:t> if needed</a:t>
+            </a:r>
+          </a:p>
+        </p:txBody>
+      </p:sp>
+      <p:sp>
+        <p:nvSpPr>
+          <p:cNvPr id="5" name="Google Shape;325;p47">
+            <a:extLst>
+              <a:ext uri="{FF2B5EF4-FFF2-40B4-BE49-F238E27FC236}">
+                <a16:creationId xmlns:a16="http://schemas.microsoft.com/office/drawing/2014/main" id="{10D23636-E122-E0ED-219C-67DCAA8D64BE}"/>
+              </a:ext>
+            </a:extLst>
+          </p:cNvPr>
+          <p:cNvSpPr txBox="1">
+            <a:spLocks/>
+          </p:cNvSpPr>
+          <p:nvPr/>
+        </p:nvSpPr>
+        <p:spPr>
+          <a:xfrm>
+            <a:off x="4303618" y="1844958"/>
+            <a:ext cx="4516998" cy="893015"/>
+          </a:xfrm>
+          <a:prstGeom prst="rect">
+            <a:avLst/>
+          </a:prstGeom>
+          <a:noFill/>
+          <a:ln>
+            <a:noFill/>
+          </a:ln>
+        </p:spPr>
+        <p:txBody>
+          <a:bodyPr spcFirstLastPara="1" wrap="square" lIns="91425" tIns="91425" rIns="91425" bIns="91425" anchor="ctr" anchorCtr="0">
+            <a:noAutofit/>
+          </a:bodyPr>
+          <a:lstStyle>
+            <a:defPPr marR="0" lvl="0" algn="l" rtl="0">
+              <a:lnSpc>
+                <a:spcPct val="100000"/>
+              </a:lnSpc>
+              <a:spcBef>
+                <a:spcPts val="0"/>
+              </a:spcBef>
+              <a:spcAft>
+                <a:spcPts val="0"/>
+              </a:spcAft>
+            </a:defPPr>
+            <a:lvl1pPr marL="457200" marR="0" lvl="0" indent="-311150" algn="l" rtl="0">
+              <a:lnSpc>
+                <a:spcPct val="115000"/>
+              </a:lnSpc>
+              <a:spcBef>
+                <a:spcPts val="0"/>
+              </a:spcBef>
+              <a:spcAft>
+                <a:spcPts val="0"/>
+              </a:spcAft>
+              <a:buClr>
+                <a:schemeClr val="dk2"/>
+              </a:buClr>
+              <a:buSzPts val="1300"/>
+              <a:buFont typeface="Roboto"/>
+              <a:buChar char="●"/>
+              <a:defRPr sz="1300" b="0" i="0" u="none" strike="noStrike" cap="none">
+                <a:solidFill>
+                  <a:schemeClr val="dk2"/>
+                </a:solidFill>
+                <a:latin typeface="Roboto"/>
+                <a:ea typeface="Roboto"/>
+                <a:cs typeface="Roboto"/>
+                <a:sym typeface="Roboto"/>
+              </a:defRPr>
+            </a:lvl1pPr>
+            <a:lvl2pPr marL="914400" marR="0" lvl="1" indent="-298450" algn="l" rtl="0">
+              <a:lnSpc>
+                <a:spcPct val="115000"/>
+              </a:lnSpc>
+              <a:spcBef>
+                <a:spcPts val="1600"/>
+              </a:spcBef>
+              <a:spcAft>
+                <a:spcPts val="0"/>
+              </a:spcAft>
+              <a:buClr>
+                <a:schemeClr val="dk2"/>
+              </a:buClr>
+              <a:buSzPts val="1100"/>
+              <a:buFont typeface="Roboto"/>
+              <a:buChar char="○"/>
+              <a:defRPr sz="1100" b="0" i="0" u="none" strike="noStrike" cap="none">
+                <a:solidFill>
+                  <a:schemeClr val="dk2"/>
+                </a:solidFill>
+                <a:latin typeface="Roboto"/>
+                <a:ea typeface="Roboto"/>
+                <a:cs typeface="Roboto"/>
+                <a:sym typeface="Roboto"/>
+              </a:defRPr>
+            </a:lvl2pPr>
+            <a:lvl3pPr marL="1371600" marR="0" lvl="2" indent="-298450" algn="l" rtl="0">
+              <a:lnSpc>
+                <a:spcPct val="115000"/>
+              </a:lnSpc>
+              <a:spcBef>
+                <a:spcPts val="1600"/>
+              </a:spcBef>
+              <a:spcAft>
+                <a:spcPts val="0"/>
+              </a:spcAft>
+              <a:buClr>
+                <a:schemeClr val="dk2"/>
+              </a:buClr>
+              <a:buSzPts val="1100"/>
+              <a:buFont typeface="Roboto"/>
+              <a:buChar char="■"/>
+              <a:defRPr sz="1100" b="0" i="0" u="none" strike="noStrike" cap="none">
+                <a:solidFill>
+                  <a:schemeClr val="dk2"/>
+                </a:solidFill>
+                <a:latin typeface="Roboto"/>
+                <a:ea typeface="Roboto"/>
+                <a:cs typeface="Roboto"/>
+                <a:sym typeface="Roboto"/>
+              </a:defRPr>
+            </a:lvl3pPr>
+            <a:lvl4pPr marL="1828800" marR="0" lvl="3" indent="-298450" algn="l" rtl="0">
+              <a:lnSpc>
+                <a:spcPct val="115000"/>
+              </a:lnSpc>
+              <a:spcBef>
+                <a:spcPts val="1600"/>
+              </a:spcBef>
+              <a:spcAft>
+                <a:spcPts val="0"/>
+              </a:spcAft>
+              <a:buClr>
+                <a:schemeClr val="dk2"/>
+              </a:buClr>
+              <a:buSzPts val="1100"/>
+              <a:buFont typeface="Roboto"/>
+              <a:buChar char="●"/>
+              <a:defRPr sz="1100" b="0" i="0" u="none" strike="noStrike" cap="none">
+                <a:solidFill>
+                  <a:schemeClr val="dk2"/>
+                </a:solidFill>
+                <a:latin typeface="Roboto"/>
+                <a:ea typeface="Roboto"/>
+                <a:cs typeface="Roboto"/>
+                <a:sym typeface="Roboto"/>
+              </a:defRPr>
+            </a:lvl4pPr>
+            <a:lvl5pPr marL="2286000" marR="0" lvl="4" indent="-298450" algn="l" rtl="0">
+              <a:lnSpc>
+                <a:spcPct val="115000"/>
+              </a:lnSpc>
+              <a:spcBef>
+                <a:spcPts val="1600"/>
+              </a:spcBef>
+              <a:spcAft>
+                <a:spcPts val="0"/>
+              </a:spcAft>
+              <a:buClr>
+                <a:schemeClr val="dk2"/>
+              </a:buClr>
+              <a:buSzPts val="1100"/>
+              <a:buFont typeface="Roboto"/>
+              <a:buChar char="○"/>
+              <a:defRPr sz="1100" b="0" i="0" u="none" strike="noStrike" cap="none">
+                <a:solidFill>
+                  <a:schemeClr val="dk2"/>
+                </a:solidFill>
+                <a:latin typeface="Roboto"/>
+                <a:ea typeface="Roboto"/>
+                <a:cs typeface="Roboto"/>
+                <a:sym typeface="Roboto"/>
+              </a:defRPr>
+            </a:lvl5pPr>
+            <a:lvl6pPr marL="2743200" marR="0" lvl="5" indent="-298450" algn="l" rtl="0">
+              <a:lnSpc>
+                <a:spcPct val="115000"/>
+              </a:lnSpc>
+              <a:spcBef>
+                <a:spcPts val="1600"/>
+              </a:spcBef>
+              <a:spcAft>
+                <a:spcPts val="0"/>
+              </a:spcAft>
+              <a:buClr>
+                <a:schemeClr val="dk2"/>
+              </a:buClr>
+              <a:buSzPts val="1100"/>
+              <a:buFont typeface="Roboto"/>
+              <a:buChar char="■"/>
+              <a:defRPr sz="1100" b="0" i="0" u="none" strike="noStrike" cap="none">
+                <a:solidFill>
+                  <a:schemeClr val="dk2"/>
+                </a:solidFill>
+                <a:latin typeface="Roboto"/>
+                <a:ea typeface="Roboto"/>
+                <a:cs typeface="Roboto"/>
+                <a:sym typeface="Roboto"/>
+              </a:defRPr>
+            </a:lvl6pPr>
+            <a:lvl7pPr marL="3200400" marR="0" lvl="6" indent="-298450" algn="l" rtl="0">
+              <a:lnSpc>
+                <a:spcPct val="115000"/>
+              </a:lnSpc>
+              <a:spcBef>
+                <a:spcPts val="1600"/>
+              </a:spcBef>
+              <a:spcAft>
+                <a:spcPts val="0"/>
+              </a:spcAft>
+              <a:buClr>
+                <a:schemeClr val="dk2"/>
+              </a:buClr>
+              <a:buSzPts val="1100"/>
+              <a:buFont typeface="Roboto"/>
+              <a:buChar char="●"/>
+              <a:defRPr sz="1100" b="0" i="0" u="none" strike="noStrike" cap="none">
+                <a:solidFill>
+                  <a:schemeClr val="dk2"/>
+                </a:solidFill>
+                <a:latin typeface="Roboto"/>
+                <a:ea typeface="Roboto"/>
+                <a:cs typeface="Roboto"/>
+                <a:sym typeface="Roboto"/>
+              </a:defRPr>
+            </a:lvl7pPr>
+            <a:lvl8pPr marL="3657600" marR="0" lvl="7" indent="-298450" algn="l" rtl="0">
+              <a:lnSpc>
+                <a:spcPct val="115000"/>
+              </a:lnSpc>
+              <a:spcBef>
+                <a:spcPts val="1600"/>
+              </a:spcBef>
+              <a:spcAft>
+                <a:spcPts val="0"/>
+              </a:spcAft>
+              <a:buClr>
+                <a:schemeClr val="dk2"/>
+              </a:buClr>
+              <a:buSzPts val="1100"/>
+              <a:buFont typeface="Roboto"/>
+              <a:buChar char="○"/>
+              <a:defRPr sz="1100" b="0" i="0" u="none" strike="noStrike" cap="none">
+                <a:solidFill>
+                  <a:schemeClr val="dk2"/>
+                </a:solidFill>
+                <a:latin typeface="Roboto"/>
+                <a:ea typeface="Roboto"/>
+                <a:cs typeface="Roboto"/>
+                <a:sym typeface="Roboto"/>
+              </a:defRPr>
+            </a:lvl8pPr>
+            <a:lvl9pPr marL="4114800" marR="0" lvl="8" indent="-298450" algn="l" rtl="0">
+              <a:lnSpc>
+                <a:spcPct val="115000"/>
+              </a:lnSpc>
+              <a:spcBef>
+                <a:spcPts val="1600"/>
+              </a:spcBef>
+              <a:spcAft>
+                <a:spcPts val="1600"/>
+              </a:spcAft>
+              <a:buClr>
+                <a:schemeClr val="dk2"/>
+              </a:buClr>
+              <a:buSzPts val="1100"/>
+              <a:buFont typeface="Roboto"/>
+              <a:buChar char="■"/>
+              <a:defRPr sz="1100" b="0" i="0" u="none" strike="noStrike" cap="none">
+                <a:solidFill>
+                  <a:schemeClr val="dk2"/>
+                </a:solidFill>
+                <a:latin typeface="Roboto"/>
+                <a:ea typeface="Roboto"/>
+                <a:cs typeface="Roboto"/>
+                <a:sym typeface="Roboto"/>
+              </a:defRPr>
+            </a:lvl9pPr>
+          </a:lstStyle>
+          <a:p>
+            <a:r>
+              <a:rPr lang="en-US" sz="2000" dirty="0"/>
+              <a:t>Quiz 12.1 Graphs</a:t>
+            </a:r>
+          </a:p>
+          <a:p>
+            <a:pPr marL="146050" indent="0">
+              <a:buNone/>
+            </a:pPr>
+            <a:r>
+              <a:rPr lang="en-US" sz="2000" dirty="0">
+                <a:solidFill>
+                  <a:schemeClr val="tx1"/>
+                </a:solidFill>
+              </a:rPr>
+              <a:t>Password - </a:t>
+            </a:r>
+            <a:r>
+              <a:rPr lang="en-US" sz="2000" dirty="0" err="1">
+                <a:solidFill>
+                  <a:schemeClr val="tx1"/>
+                </a:solidFill>
+              </a:rPr>
+              <a:t>getConnected</a:t>
+            </a:r>
+            <a:endParaRPr lang="en-US" sz="2000" dirty="0">
+              <a:solidFill>
+                <a:schemeClr val="tx1"/>
+              </a:solidFill>
+            </a:endParaRPr>
+          </a:p>
+        </p:txBody>
+      </p:sp>
+    </p:spTree>
+    <p:extLst>
+      <p:ext uri="{BB962C8B-B14F-4D97-AF65-F5344CB8AC3E}">
+        <p14:creationId xmlns:p14="http://schemas.microsoft.com/office/powerpoint/2010/main" val="1835810010"/>
+      </p:ext>
+    </p:extLst>
+  </p:cSld>
+  <p:clrMapOvr>
+    <a:masterClrMapping/>
+  </p:clrMapOvr>
+</p:sld>
+</file>
+
+<file path=ppt/slides/slide10.xml><?xml version="1.0" encoding="utf-8"?>
+<p:sld xmlns:a="http://schemas.openxmlformats.org/drawingml/2006/main" xmlns:r="http://schemas.openxmlformats.org/officeDocument/2006/relationships" xmlns:p="http://schemas.openxmlformats.org/presentationml/2006/main" show="0">
+  <p:cSld>
+    <p:spTree>
+      <p:nvGrpSpPr>
+        <p:cNvPr id="1" name="Shape 323"/>
+        <p:cNvGrpSpPr/>
+        <p:nvPr/>
+      </p:nvGrpSpPr>
+      <p:grpSpPr>
+        <a:xfrm>
+          <a:off x="0" y="0"/>
+          <a:ext cx="0" cy="0"/>
+          <a:chOff x="0" y="0"/>
+          <a:chExt cx="0" cy="0"/>
+        </a:xfrm>
+      </p:grpSpPr>
+      <p:sp>
+        <p:nvSpPr>
+          <p:cNvPr id="324" name="Google Shape;324;p47"/>
+          <p:cNvSpPr txBox="1">
+            <a:spLocks noGrp="1"/>
+          </p:cNvSpPr>
+          <p:nvPr>
+            <p:ph type="title"/>
+          </p:nvPr>
+        </p:nvSpPr>
+        <p:spPr>
+          <a:xfrm>
+            <a:off x="226208" y="1"/>
+            <a:ext cx="8520600" cy="464980"/>
+          </a:xfrm>
+          <a:prstGeom prst="rect">
+            <a:avLst/>
+          </a:prstGeom>
+        </p:spPr>
+        <p:txBody>
+          <a:bodyPr spcFirstLastPara="1" wrap="square" lIns="91425" tIns="91425" rIns="91425" bIns="91425" anchor="t" anchorCtr="0">
+            <a:noAutofit/>
+          </a:bodyPr>
+          <a:lstStyle/>
+          <a:p>
+            <a:pPr marL="0" lvl="0" indent="0" algn="ctr" rtl="0">
+              <a:spcBef>
+                <a:spcPts val="0"/>
+              </a:spcBef>
+              <a:spcAft>
+                <a:spcPts val="0"/>
+              </a:spcAft>
+              <a:buNone/>
+            </a:pPr>
+            <a:r>
+              <a:rPr lang="en-US" dirty="0"/>
+              <a:t>Use </a:t>
+            </a:r>
+            <a:r>
+              <a:rPr lang="en-US" sz="2400" dirty="0"/>
+              <a:t>Assigned</a:t>
+            </a:r>
+            <a:r>
+              <a:rPr lang="en-US" dirty="0"/>
+              <a:t> Seat</a:t>
+            </a:r>
+            <a:endParaRPr dirty="0"/>
+          </a:p>
+        </p:txBody>
+      </p:sp>
+      <p:sp>
+        <p:nvSpPr>
+          <p:cNvPr id="326" name="Google Shape;326;p47"/>
+          <p:cNvSpPr txBox="1">
+            <a:spLocks noGrp="1"/>
+          </p:cNvSpPr>
+          <p:nvPr>
+            <p:ph type="sldNum" idx="12"/>
+          </p:nvPr>
+        </p:nvSpPr>
+        <p:spPr>
+          <a:xfrm>
+            <a:off x="8472458" y="4663217"/>
+            <a:ext cx="548700" cy="393600"/>
+          </a:xfrm>
+          <a:prstGeom prst="rect">
+            <a:avLst/>
+          </a:prstGeom>
+        </p:spPr>
+        <p:txBody>
+          <a:bodyPr spcFirstLastPara="1" wrap="square" lIns="91425" tIns="91425" rIns="91425" bIns="91425" anchor="ctr" anchorCtr="0">
+            <a:noAutofit/>
+          </a:bodyPr>
+          <a:lstStyle/>
+          <a:p>
+            <a:pPr marL="0" lvl="0" indent="0" algn="r" rtl="0">
+              <a:spcBef>
+                <a:spcPts val="0"/>
+              </a:spcBef>
+              <a:spcAft>
+                <a:spcPts val="0"/>
+              </a:spcAft>
+              <a:buNone/>
+            </a:pPr>
+            <a:fld id="{00000000-1234-1234-1234-123412341234}" type="slidenum">
+              <a:rPr lang="en"/>
+              <a:t>10</a:t>
+            </a:fld>
+            <a:endParaRPr/>
+          </a:p>
+        </p:txBody>
+      </p:sp>
+      <p:pic>
+        <p:nvPicPr>
+          <p:cNvPr id="3" name="Picture 2">
+            <a:extLst>
+              <a:ext uri="{FF2B5EF4-FFF2-40B4-BE49-F238E27FC236}">
+                <a16:creationId xmlns:a16="http://schemas.microsoft.com/office/drawing/2014/main" id="{565A4964-E8A9-A46D-F4BE-E7D41C14EF1B}"/>
+              </a:ext>
+            </a:extLst>
+          </p:cNvPr>
+          <p:cNvPicPr>
+            <a:picLocks noChangeAspect="1"/>
+          </p:cNvPicPr>
+          <p:nvPr/>
+        </p:nvPicPr>
+        <p:blipFill>
+          <a:blip r:embed="rId3"/>
+          <a:stretch>
+            <a:fillRect/>
+          </a:stretch>
+        </p:blipFill>
+        <p:spPr>
+          <a:xfrm>
+            <a:off x="0" y="559220"/>
+            <a:ext cx="9144000" cy="4471763"/>
+          </a:xfrm>
+          <a:prstGeom prst="rect">
+            <a:avLst/>
+          </a:prstGeom>
+        </p:spPr>
+      </p:pic>
+    </p:spTree>
+    <p:extLst>
+      <p:ext uri="{BB962C8B-B14F-4D97-AF65-F5344CB8AC3E}">
+        <p14:creationId xmlns:p14="http://schemas.microsoft.com/office/powerpoint/2010/main" val="2495509868"/>
+      </p:ext>
+    </p:extLst>
+  </p:cSld>
+  <p:clrMapOvr>
+    <a:masterClrMapping/>
+  </p:clrMapOvr>
+</p:sld>
+</file>
+
+<file path=ppt/slides/slide11.xml><?xml version="1.0" encoding="utf-8"?>
+<p:sld xmlns:a="http://schemas.openxmlformats.org/drawingml/2006/main" xmlns:r="http://schemas.openxmlformats.org/officeDocument/2006/relationships" xmlns:p="http://schemas.openxmlformats.org/presentationml/2006/main" show="0">
+  <p:cSld>
+    <p:spTree>
+      <p:nvGrpSpPr>
+        <p:cNvPr id="1" name="Shape 323"/>
+        <p:cNvGrpSpPr/>
+        <p:nvPr/>
+      </p:nvGrpSpPr>
+      <p:grpSpPr>
+        <a:xfrm>
+          <a:off x="0" y="0"/>
+          <a:ext cx="0" cy="0"/>
+          <a:chOff x="0" y="0"/>
+          <a:chExt cx="0" cy="0"/>
+        </a:xfrm>
+      </p:grpSpPr>
+      <p:sp>
+        <p:nvSpPr>
+          <p:cNvPr id="324" name="Google Shape;324;p47"/>
+          <p:cNvSpPr txBox="1">
+            <a:spLocks noGrp="1"/>
+          </p:cNvSpPr>
+          <p:nvPr>
+            <p:ph type="title"/>
+          </p:nvPr>
+        </p:nvSpPr>
+        <p:spPr>
+          <a:xfrm>
+            <a:off x="226208" y="1"/>
+            <a:ext cx="8520600" cy="464980"/>
+          </a:xfrm>
+          <a:prstGeom prst="rect">
+            <a:avLst/>
+          </a:prstGeom>
+        </p:spPr>
+        <p:txBody>
+          <a:bodyPr spcFirstLastPara="1" wrap="square" lIns="91425" tIns="91425" rIns="91425" bIns="91425" anchor="t" anchorCtr="0">
+            <a:noAutofit/>
+          </a:bodyPr>
+          <a:lstStyle/>
+          <a:p>
+            <a:pPr marL="0" lvl="0" indent="0" algn="ctr" rtl="0">
+              <a:spcBef>
+                <a:spcPts val="0"/>
+              </a:spcBef>
+              <a:spcAft>
+                <a:spcPts val="0"/>
+              </a:spcAft>
+              <a:buNone/>
+            </a:pPr>
+            <a:r>
+              <a:rPr lang="en-US" dirty="0"/>
+              <a:t>Use </a:t>
+            </a:r>
+            <a:r>
+              <a:rPr lang="en-US" sz="2400" dirty="0"/>
+              <a:t>Assigned</a:t>
+            </a:r>
+            <a:r>
+              <a:rPr lang="en-US" dirty="0"/>
+              <a:t> Seat</a:t>
+            </a:r>
+            <a:endParaRPr dirty="0"/>
+          </a:p>
+        </p:txBody>
+      </p:sp>
+      <p:sp>
+        <p:nvSpPr>
+          <p:cNvPr id="326" name="Google Shape;326;p47"/>
+          <p:cNvSpPr txBox="1">
+            <a:spLocks noGrp="1"/>
+          </p:cNvSpPr>
+          <p:nvPr>
+            <p:ph type="sldNum" idx="12"/>
+          </p:nvPr>
+        </p:nvSpPr>
+        <p:spPr>
+          <a:xfrm>
+            <a:off x="8472458" y="4663217"/>
+            <a:ext cx="548700" cy="393600"/>
+          </a:xfrm>
+          <a:prstGeom prst="rect">
+            <a:avLst/>
+          </a:prstGeom>
+        </p:spPr>
+        <p:txBody>
+          <a:bodyPr spcFirstLastPara="1" wrap="square" lIns="91425" tIns="91425" rIns="91425" bIns="91425" anchor="ctr" anchorCtr="0">
+            <a:noAutofit/>
+          </a:bodyPr>
+          <a:lstStyle/>
+          <a:p>
+            <a:pPr marL="0" lvl="0" indent="0" algn="r" rtl="0">
+              <a:spcBef>
+                <a:spcPts val="0"/>
+              </a:spcBef>
+              <a:spcAft>
+                <a:spcPts val="0"/>
+              </a:spcAft>
+              <a:buNone/>
+            </a:pPr>
+            <a:fld id="{00000000-1234-1234-1234-123412341234}" type="slidenum">
+              <a:rPr lang="en"/>
+              <a:t>11</a:t>
+            </a:fld>
+            <a:endParaRPr/>
+          </a:p>
+        </p:txBody>
+      </p:sp>
+      <p:pic>
+        <p:nvPicPr>
+          <p:cNvPr id="6" name="Picture 5">
+            <a:extLst>
+              <a:ext uri="{FF2B5EF4-FFF2-40B4-BE49-F238E27FC236}">
+                <a16:creationId xmlns:a16="http://schemas.microsoft.com/office/drawing/2014/main" id="{DED32793-7C09-E3A3-94E5-B5D46727A1D0}"/>
+              </a:ext>
+            </a:extLst>
+          </p:cNvPr>
+          <p:cNvPicPr>
+            <a:picLocks noChangeAspect="1"/>
+          </p:cNvPicPr>
+          <p:nvPr/>
+        </p:nvPicPr>
+        <p:blipFill>
+          <a:blip r:embed="rId3"/>
+          <a:stretch>
+            <a:fillRect/>
+          </a:stretch>
+        </p:blipFill>
+        <p:spPr>
+          <a:xfrm>
+            <a:off x="-1" y="551663"/>
+            <a:ext cx="9144001" cy="4591837"/>
+          </a:xfrm>
+          <a:prstGeom prst="rect">
+            <a:avLst/>
+          </a:prstGeom>
+        </p:spPr>
+      </p:pic>
+    </p:spTree>
+    <p:extLst>
+      <p:ext uri="{BB962C8B-B14F-4D97-AF65-F5344CB8AC3E}">
+        <p14:creationId xmlns:p14="http://schemas.microsoft.com/office/powerpoint/2010/main" val="4226348449"/>
+      </p:ext>
+    </p:extLst>
+  </p:cSld>
+  <p:clrMapOvr>
+    <a:masterClrMapping/>
+  </p:clrMapOvr>
+</p:sld>
+</file>
+
+<file path=ppt/slides/slide12.xml><?xml version="1.0" encoding="utf-8"?>
+<p:sld xmlns:a="http://schemas.openxmlformats.org/drawingml/2006/main" xmlns:r="http://schemas.openxmlformats.org/officeDocument/2006/relationships" xmlns:p="http://schemas.openxmlformats.org/presentationml/2006/main" show="0">
+  <p:cSld>
+    <p:spTree>
+      <p:nvGrpSpPr>
+        <p:cNvPr id="1" name="Shape 323"/>
+        <p:cNvGrpSpPr/>
+        <p:nvPr/>
+      </p:nvGrpSpPr>
+      <p:grpSpPr>
+        <a:xfrm>
+          <a:off x="0" y="0"/>
+          <a:ext cx="0" cy="0"/>
+          <a:chOff x="0" y="0"/>
+          <a:chExt cx="0" cy="0"/>
+        </a:xfrm>
+      </p:grpSpPr>
+      <p:sp>
+        <p:nvSpPr>
+          <p:cNvPr id="324" name="Google Shape;324;p47"/>
+          <p:cNvSpPr txBox="1">
+            <a:spLocks noGrp="1"/>
+          </p:cNvSpPr>
+          <p:nvPr>
+            <p:ph type="title"/>
+          </p:nvPr>
+        </p:nvSpPr>
+        <p:spPr>
+          <a:xfrm>
+            <a:off x="226208" y="1"/>
+            <a:ext cx="8520600" cy="464980"/>
+          </a:xfrm>
+          <a:prstGeom prst="rect">
+            <a:avLst/>
+          </a:prstGeom>
+        </p:spPr>
+        <p:txBody>
+          <a:bodyPr spcFirstLastPara="1" wrap="square" lIns="91425" tIns="91425" rIns="91425" bIns="91425" anchor="t" anchorCtr="0">
+            <a:noAutofit/>
+          </a:bodyPr>
+          <a:lstStyle/>
+          <a:p>
+            <a:pPr marL="0" lvl="0" indent="0" algn="ctr" rtl="0">
+              <a:spcBef>
+                <a:spcPts val="0"/>
+              </a:spcBef>
+              <a:spcAft>
+                <a:spcPts val="0"/>
+              </a:spcAft>
+              <a:buNone/>
+            </a:pPr>
+            <a:r>
+              <a:rPr lang="en-US" dirty="0"/>
+              <a:t>Use </a:t>
+            </a:r>
+            <a:r>
+              <a:rPr lang="en-US" sz="2400" dirty="0"/>
+              <a:t>Assigned</a:t>
+            </a:r>
+            <a:r>
+              <a:rPr lang="en-US" dirty="0"/>
+              <a:t> Seat</a:t>
+            </a:r>
+            <a:endParaRPr dirty="0"/>
+          </a:p>
+        </p:txBody>
+      </p:sp>
+      <p:sp>
+        <p:nvSpPr>
+          <p:cNvPr id="326" name="Google Shape;326;p47"/>
+          <p:cNvSpPr txBox="1">
+            <a:spLocks noGrp="1"/>
+          </p:cNvSpPr>
+          <p:nvPr>
+            <p:ph type="sldNum" idx="12"/>
+          </p:nvPr>
+        </p:nvSpPr>
+        <p:spPr>
+          <a:xfrm>
+            <a:off x="8472458" y="4663217"/>
+            <a:ext cx="548700" cy="393600"/>
+          </a:xfrm>
+          <a:prstGeom prst="rect">
+            <a:avLst/>
+          </a:prstGeom>
+        </p:spPr>
+        <p:txBody>
+          <a:bodyPr spcFirstLastPara="1" wrap="square" lIns="91425" tIns="91425" rIns="91425" bIns="91425" anchor="ctr" anchorCtr="0">
+            <a:noAutofit/>
+          </a:bodyPr>
+          <a:lstStyle/>
+          <a:p>
+            <a:pPr marL="0" lvl="0" indent="0" algn="r" rtl="0">
+              <a:spcBef>
+                <a:spcPts val="0"/>
+              </a:spcBef>
+              <a:spcAft>
+                <a:spcPts val="0"/>
+              </a:spcAft>
+              <a:buNone/>
+            </a:pPr>
+            <a:fld id="{00000000-1234-1234-1234-123412341234}" type="slidenum">
+              <a:rPr lang="en"/>
+              <a:t>12</a:t>
+            </a:fld>
+            <a:endParaRPr/>
+          </a:p>
+        </p:txBody>
+      </p:sp>
+      <p:pic>
+        <p:nvPicPr>
+          <p:cNvPr id="3" name="Picture 2">
+            <a:extLst>
+              <a:ext uri="{FF2B5EF4-FFF2-40B4-BE49-F238E27FC236}">
+                <a16:creationId xmlns:a16="http://schemas.microsoft.com/office/drawing/2014/main" id="{92DE4AAC-70FE-A114-5258-F5B22EDDED45}"/>
+              </a:ext>
+            </a:extLst>
+          </p:cNvPr>
+          <p:cNvPicPr>
+            <a:picLocks noChangeAspect="1"/>
+          </p:cNvPicPr>
+          <p:nvPr/>
+        </p:nvPicPr>
+        <p:blipFill>
+          <a:blip r:embed="rId3"/>
+          <a:stretch>
+            <a:fillRect/>
+          </a:stretch>
+        </p:blipFill>
+        <p:spPr>
+          <a:xfrm>
+            <a:off x="0" y="716280"/>
+            <a:ext cx="9144000" cy="4427218"/>
+          </a:xfrm>
+          <a:prstGeom prst="rect">
+            <a:avLst/>
+          </a:prstGeom>
+        </p:spPr>
+      </p:pic>
+    </p:spTree>
+    <p:extLst>
+      <p:ext uri="{BB962C8B-B14F-4D97-AF65-F5344CB8AC3E}">
+        <p14:creationId xmlns:p14="http://schemas.microsoft.com/office/powerpoint/2010/main" val="1976403023"/>
+      </p:ext>
+    </p:extLst>
+  </p:cSld>
+  <p:clrMapOvr>
+    <a:masterClrMapping/>
+  </p:clrMapOvr>
+</p:sld>
+</file>
+
+<file path=ppt/slides/slide13.xml><?xml version="1.0" encoding="utf-8"?>
+<p:sld xmlns:a="http://schemas.openxmlformats.org/drawingml/2006/main" xmlns:r="http://schemas.openxmlformats.org/officeDocument/2006/relationships" xmlns:p="http://schemas.openxmlformats.org/presentationml/2006/main" show="0">
+  <p:cSld>
+    <p:spTree>
+      <p:nvGrpSpPr>
+        <p:cNvPr id="1" name="Shape 323"/>
+        <p:cNvGrpSpPr/>
+        <p:nvPr/>
+      </p:nvGrpSpPr>
+      <p:grpSpPr>
+        <a:xfrm>
+          <a:off x="0" y="0"/>
+          <a:ext cx="0" cy="0"/>
+          <a:chOff x="0" y="0"/>
+          <a:chExt cx="0" cy="0"/>
+        </a:xfrm>
+      </p:grpSpPr>
+      <p:sp>
+        <p:nvSpPr>
+          <p:cNvPr id="324" name="Google Shape;324;p47"/>
+          <p:cNvSpPr txBox="1">
+            <a:spLocks noGrp="1"/>
+          </p:cNvSpPr>
+          <p:nvPr>
+            <p:ph type="title"/>
+          </p:nvPr>
+        </p:nvSpPr>
+        <p:spPr>
+          <a:xfrm>
+            <a:off x="226208" y="1"/>
+            <a:ext cx="8520600" cy="464980"/>
+          </a:xfrm>
+          <a:prstGeom prst="rect">
+            <a:avLst/>
+          </a:prstGeom>
+        </p:spPr>
+        <p:txBody>
+          <a:bodyPr spcFirstLastPara="1" wrap="square" lIns="91425" tIns="91425" rIns="91425" bIns="91425" anchor="t" anchorCtr="0">
+            <a:noAutofit/>
+          </a:bodyPr>
+          <a:lstStyle/>
+          <a:p>
+            <a:pPr marL="0" lvl="0" indent="0" algn="ctr" rtl="0">
+              <a:spcBef>
+                <a:spcPts val="0"/>
+              </a:spcBef>
+              <a:spcAft>
+                <a:spcPts val="0"/>
+              </a:spcAft>
+              <a:buNone/>
+            </a:pPr>
+            <a:r>
+              <a:rPr lang="en-US" dirty="0"/>
+              <a:t>Use </a:t>
+            </a:r>
+            <a:r>
+              <a:rPr lang="en-US" sz="2400" dirty="0"/>
+              <a:t>Assigned</a:t>
+            </a:r>
+            <a:r>
+              <a:rPr lang="en-US" dirty="0"/>
+              <a:t> Seat</a:t>
+            </a:r>
+            <a:endParaRPr dirty="0"/>
+          </a:p>
+        </p:txBody>
+      </p:sp>
+      <p:sp>
+        <p:nvSpPr>
+          <p:cNvPr id="326" name="Google Shape;326;p47"/>
+          <p:cNvSpPr txBox="1">
+            <a:spLocks noGrp="1"/>
+          </p:cNvSpPr>
+          <p:nvPr>
+            <p:ph type="sldNum" idx="12"/>
+          </p:nvPr>
+        </p:nvSpPr>
+        <p:spPr>
+          <a:xfrm>
+            <a:off x="8472458" y="4663217"/>
+            <a:ext cx="548700" cy="393600"/>
+          </a:xfrm>
+          <a:prstGeom prst="rect">
+            <a:avLst/>
+          </a:prstGeom>
+        </p:spPr>
+        <p:txBody>
+          <a:bodyPr spcFirstLastPara="1" wrap="square" lIns="91425" tIns="91425" rIns="91425" bIns="91425" anchor="ctr" anchorCtr="0">
+            <a:noAutofit/>
+          </a:bodyPr>
+          <a:lstStyle/>
+          <a:p>
+            <a:pPr marL="0" lvl="0" indent="0" algn="r" rtl="0">
+              <a:spcBef>
+                <a:spcPts val="0"/>
+              </a:spcBef>
+              <a:spcAft>
+                <a:spcPts val="0"/>
+              </a:spcAft>
+              <a:buNone/>
+            </a:pPr>
+            <a:fld id="{00000000-1234-1234-1234-123412341234}" type="slidenum">
+              <a:rPr lang="en"/>
+              <a:t>13</a:t>
+            </a:fld>
+            <a:endParaRPr/>
+          </a:p>
+        </p:txBody>
+      </p:sp>
+      <p:pic>
+        <p:nvPicPr>
+          <p:cNvPr id="4" name="Picture 3">
+            <a:extLst>
+              <a:ext uri="{FF2B5EF4-FFF2-40B4-BE49-F238E27FC236}">
+                <a16:creationId xmlns:a16="http://schemas.microsoft.com/office/drawing/2014/main" id="{DCD752B9-EFAE-AFC1-7D39-6763B89DE8D3}"/>
+              </a:ext>
+            </a:extLst>
+          </p:cNvPr>
+          <p:cNvPicPr>
+            <a:picLocks noChangeAspect="1"/>
+          </p:cNvPicPr>
+          <p:nvPr/>
+        </p:nvPicPr>
+        <p:blipFill>
+          <a:blip r:embed="rId3"/>
+          <a:stretch>
+            <a:fillRect/>
+          </a:stretch>
+        </p:blipFill>
+        <p:spPr>
+          <a:xfrm>
+            <a:off x="0" y="652130"/>
+            <a:ext cx="9144000" cy="4491369"/>
+          </a:xfrm>
+          <a:prstGeom prst="rect">
+            <a:avLst/>
+          </a:prstGeom>
+        </p:spPr>
+      </p:pic>
+    </p:spTree>
+    <p:extLst>
+      <p:ext uri="{BB962C8B-B14F-4D97-AF65-F5344CB8AC3E}">
+        <p14:creationId xmlns:p14="http://schemas.microsoft.com/office/powerpoint/2010/main" val="3365057756"/>
+      </p:ext>
+    </p:extLst>
+  </p:cSld>
+  <p:clrMapOvr>
+    <a:masterClrMapping/>
+  </p:clrMapOvr>
+</p:sld>
+</file>
+
+<file path=ppt/slides/slide2.xml><?xml version="1.0" encoding="utf-8"?>
+<p:sld xmlns:a="http://schemas.openxmlformats.org/drawingml/2006/main" xmlns:r="http://schemas.openxmlformats.org/officeDocument/2006/relationships" xmlns:p="http://schemas.openxmlformats.org/presentationml/2006/main" show="0">
+  <p:cSld>
+    <p:spTree>
+      <p:nvGrpSpPr>
         <p:cNvPr id="1" name="Shape 323"/>
         <p:cNvGrpSpPr/>
         <p:nvPr/>
@@ -6814,7 +8348,7 @@
             </a:pPr>
             <a:fld id="{00000000-1234-1234-1234-123412341234}" type="slidenum">
               <a:rPr lang="en"/>
-              <a:t>1</a:t>
+              <a:t>2</a:t>
             </a:fld>
             <a:endParaRPr/>
           </a:p>
@@ -7212,615 +8746,7 @@
 </p:sld>
 </file>
 
-<file path=ppt/slides/slide10.xml><?xml version="1.0" encoding="utf-8"?>
-<p:sld xmlns:a="http://schemas.openxmlformats.org/drawingml/2006/main" xmlns:r="http://schemas.openxmlformats.org/officeDocument/2006/relationships" xmlns:p="http://schemas.openxmlformats.org/presentationml/2006/main" show="0">
-  <p:cSld>
-    <p:spTree>
-      <p:nvGrpSpPr>
-        <p:cNvPr id="1" name="Shape 323"/>
-        <p:cNvGrpSpPr/>
-        <p:nvPr/>
-      </p:nvGrpSpPr>
-      <p:grpSpPr>
-        <a:xfrm>
-          <a:off x="0" y="0"/>
-          <a:ext cx="0" cy="0"/>
-          <a:chOff x="0" y="0"/>
-          <a:chExt cx="0" cy="0"/>
-        </a:xfrm>
-      </p:grpSpPr>
-      <p:sp>
-        <p:nvSpPr>
-          <p:cNvPr id="324" name="Google Shape;324;p47"/>
-          <p:cNvSpPr txBox="1">
-            <a:spLocks noGrp="1"/>
-          </p:cNvSpPr>
-          <p:nvPr>
-            <p:ph type="title"/>
-          </p:nvPr>
-        </p:nvSpPr>
-        <p:spPr>
-          <a:xfrm>
-            <a:off x="226208" y="1"/>
-            <a:ext cx="8520600" cy="464980"/>
-          </a:xfrm>
-          <a:prstGeom prst="rect">
-            <a:avLst/>
-          </a:prstGeom>
-        </p:spPr>
-        <p:txBody>
-          <a:bodyPr spcFirstLastPara="1" wrap="square" lIns="91425" tIns="91425" rIns="91425" bIns="91425" anchor="t" anchorCtr="0">
-            <a:noAutofit/>
-          </a:bodyPr>
-          <a:lstStyle/>
-          <a:p>
-            <a:pPr marL="0" lvl="0" indent="0" algn="ctr" rtl="0">
-              <a:spcBef>
-                <a:spcPts val="0"/>
-              </a:spcBef>
-              <a:spcAft>
-                <a:spcPts val="0"/>
-              </a:spcAft>
-              <a:buNone/>
-            </a:pPr>
-            <a:r>
-              <a:rPr lang="en-US" dirty="0"/>
-              <a:t>Use </a:t>
-            </a:r>
-            <a:r>
-              <a:rPr lang="en-US" sz="2400" dirty="0"/>
-              <a:t>Assigned</a:t>
-            </a:r>
-            <a:r>
-              <a:rPr lang="en-US" dirty="0"/>
-              <a:t> Seat</a:t>
-            </a:r>
-            <a:endParaRPr dirty="0"/>
-          </a:p>
-        </p:txBody>
-      </p:sp>
-      <p:sp>
-        <p:nvSpPr>
-          <p:cNvPr id="326" name="Google Shape;326;p47"/>
-          <p:cNvSpPr txBox="1">
-            <a:spLocks noGrp="1"/>
-          </p:cNvSpPr>
-          <p:nvPr>
-            <p:ph type="sldNum" idx="12"/>
-          </p:nvPr>
-        </p:nvSpPr>
-        <p:spPr>
-          <a:xfrm>
-            <a:off x="8472458" y="4663217"/>
-            <a:ext cx="548700" cy="393600"/>
-          </a:xfrm>
-          <a:prstGeom prst="rect">
-            <a:avLst/>
-          </a:prstGeom>
-        </p:spPr>
-        <p:txBody>
-          <a:bodyPr spcFirstLastPara="1" wrap="square" lIns="91425" tIns="91425" rIns="91425" bIns="91425" anchor="ctr" anchorCtr="0">
-            <a:noAutofit/>
-          </a:bodyPr>
-          <a:lstStyle/>
-          <a:p>
-            <a:pPr marL="0" lvl="0" indent="0" algn="r" rtl="0">
-              <a:spcBef>
-                <a:spcPts val="0"/>
-              </a:spcBef>
-              <a:spcAft>
-                <a:spcPts val="0"/>
-              </a:spcAft>
-              <a:buNone/>
-            </a:pPr>
-            <a:fld id="{00000000-1234-1234-1234-123412341234}" type="slidenum">
-              <a:rPr lang="en"/>
-              <a:t>10</a:t>
-            </a:fld>
-            <a:endParaRPr/>
-          </a:p>
-        </p:txBody>
-      </p:sp>
-      <p:pic>
-        <p:nvPicPr>
-          <p:cNvPr id="3" name="Picture 2">
-            <a:extLst>
-              <a:ext uri="{FF2B5EF4-FFF2-40B4-BE49-F238E27FC236}">
-                <a16:creationId xmlns:a16="http://schemas.microsoft.com/office/drawing/2014/main" id="{565A4964-E8A9-A46D-F4BE-E7D41C14EF1B}"/>
-              </a:ext>
-            </a:extLst>
-          </p:cNvPr>
-          <p:cNvPicPr>
-            <a:picLocks noChangeAspect="1"/>
-          </p:cNvPicPr>
-          <p:nvPr/>
-        </p:nvPicPr>
-        <p:blipFill>
-          <a:blip r:embed="rId3"/>
-          <a:stretch>
-            <a:fillRect/>
-          </a:stretch>
-        </p:blipFill>
-        <p:spPr>
-          <a:xfrm>
-            <a:off x="0" y="559220"/>
-            <a:ext cx="9144000" cy="4471763"/>
-          </a:xfrm>
-          <a:prstGeom prst="rect">
-            <a:avLst/>
-          </a:prstGeom>
-        </p:spPr>
-      </p:pic>
-    </p:spTree>
-    <p:extLst>
-      <p:ext uri="{BB962C8B-B14F-4D97-AF65-F5344CB8AC3E}">
-        <p14:creationId xmlns:p14="http://schemas.microsoft.com/office/powerpoint/2010/main" val="2495509868"/>
-      </p:ext>
-    </p:extLst>
-  </p:cSld>
-  <p:clrMapOvr>
-    <a:masterClrMapping/>
-  </p:clrMapOvr>
-</p:sld>
-</file>
-
-<file path=ppt/slides/slide11.xml><?xml version="1.0" encoding="utf-8"?>
-<p:sld xmlns:a="http://schemas.openxmlformats.org/drawingml/2006/main" xmlns:r="http://schemas.openxmlformats.org/officeDocument/2006/relationships" xmlns:p="http://schemas.openxmlformats.org/presentationml/2006/main" show="0">
-  <p:cSld>
-    <p:spTree>
-      <p:nvGrpSpPr>
-        <p:cNvPr id="1" name="Shape 323"/>
-        <p:cNvGrpSpPr/>
-        <p:nvPr/>
-      </p:nvGrpSpPr>
-      <p:grpSpPr>
-        <a:xfrm>
-          <a:off x="0" y="0"/>
-          <a:ext cx="0" cy="0"/>
-          <a:chOff x="0" y="0"/>
-          <a:chExt cx="0" cy="0"/>
-        </a:xfrm>
-      </p:grpSpPr>
-      <p:sp>
-        <p:nvSpPr>
-          <p:cNvPr id="324" name="Google Shape;324;p47"/>
-          <p:cNvSpPr txBox="1">
-            <a:spLocks noGrp="1"/>
-          </p:cNvSpPr>
-          <p:nvPr>
-            <p:ph type="title"/>
-          </p:nvPr>
-        </p:nvSpPr>
-        <p:spPr>
-          <a:xfrm>
-            <a:off x="226208" y="1"/>
-            <a:ext cx="8520600" cy="464980"/>
-          </a:xfrm>
-          <a:prstGeom prst="rect">
-            <a:avLst/>
-          </a:prstGeom>
-        </p:spPr>
-        <p:txBody>
-          <a:bodyPr spcFirstLastPara="1" wrap="square" lIns="91425" tIns="91425" rIns="91425" bIns="91425" anchor="t" anchorCtr="0">
-            <a:noAutofit/>
-          </a:bodyPr>
-          <a:lstStyle/>
-          <a:p>
-            <a:pPr marL="0" lvl="0" indent="0" algn="ctr" rtl="0">
-              <a:spcBef>
-                <a:spcPts val="0"/>
-              </a:spcBef>
-              <a:spcAft>
-                <a:spcPts val="0"/>
-              </a:spcAft>
-              <a:buNone/>
-            </a:pPr>
-            <a:r>
-              <a:rPr lang="en-US" dirty="0"/>
-              <a:t>Use </a:t>
-            </a:r>
-            <a:r>
-              <a:rPr lang="en-US" sz="2400" dirty="0"/>
-              <a:t>Assigned</a:t>
-            </a:r>
-            <a:r>
-              <a:rPr lang="en-US" dirty="0"/>
-              <a:t> Seat</a:t>
-            </a:r>
-            <a:endParaRPr dirty="0"/>
-          </a:p>
-        </p:txBody>
-      </p:sp>
-      <p:sp>
-        <p:nvSpPr>
-          <p:cNvPr id="326" name="Google Shape;326;p47"/>
-          <p:cNvSpPr txBox="1">
-            <a:spLocks noGrp="1"/>
-          </p:cNvSpPr>
-          <p:nvPr>
-            <p:ph type="sldNum" idx="12"/>
-          </p:nvPr>
-        </p:nvSpPr>
-        <p:spPr>
-          <a:xfrm>
-            <a:off x="8472458" y="4663217"/>
-            <a:ext cx="548700" cy="393600"/>
-          </a:xfrm>
-          <a:prstGeom prst="rect">
-            <a:avLst/>
-          </a:prstGeom>
-        </p:spPr>
-        <p:txBody>
-          <a:bodyPr spcFirstLastPara="1" wrap="square" lIns="91425" tIns="91425" rIns="91425" bIns="91425" anchor="ctr" anchorCtr="0">
-            <a:noAutofit/>
-          </a:bodyPr>
-          <a:lstStyle/>
-          <a:p>
-            <a:pPr marL="0" lvl="0" indent="0" algn="r" rtl="0">
-              <a:spcBef>
-                <a:spcPts val="0"/>
-              </a:spcBef>
-              <a:spcAft>
-                <a:spcPts val="0"/>
-              </a:spcAft>
-              <a:buNone/>
-            </a:pPr>
-            <a:fld id="{00000000-1234-1234-1234-123412341234}" type="slidenum">
-              <a:rPr lang="en"/>
-              <a:t>11</a:t>
-            </a:fld>
-            <a:endParaRPr/>
-          </a:p>
-        </p:txBody>
-      </p:sp>
-      <p:pic>
-        <p:nvPicPr>
-          <p:cNvPr id="6" name="Picture 5">
-            <a:extLst>
-              <a:ext uri="{FF2B5EF4-FFF2-40B4-BE49-F238E27FC236}">
-                <a16:creationId xmlns:a16="http://schemas.microsoft.com/office/drawing/2014/main" id="{DED32793-7C09-E3A3-94E5-B5D46727A1D0}"/>
-              </a:ext>
-            </a:extLst>
-          </p:cNvPr>
-          <p:cNvPicPr>
-            <a:picLocks noChangeAspect="1"/>
-          </p:cNvPicPr>
-          <p:nvPr/>
-        </p:nvPicPr>
-        <p:blipFill>
-          <a:blip r:embed="rId3"/>
-          <a:stretch>
-            <a:fillRect/>
-          </a:stretch>
-        </p:blipFill>
-        <p:spPr>
-          <a:xfrm>
-            <a:off x="-1" y="551663"/>
-            <a:ext cx="9144001" cy="4591837"/>
-          </a:xfrm>
-          <a:prstGeom prst="rect">
-            <a:avLst/>
-          </a:prstGeom>
-        </p:spPr>
-      </p:pic>
-    </p:spTree>
-    <p:extLst>
-      <p:ext uri="{BB962C8B-B14F-4D97-AF65-F5344CB8AC3E}">
-        <p14:creationId xmlns:p14="http://schemas.microsoft.com/office/powerpoint/2010/main" val="4226348449"/>
-      </p:ext>
-    </p:extLst>
-  </p:cSld>
-  <p:clrMapOvr>
-    <a:masterClrMapping/>
-  </p:clrMapOvr>
-</p:sld>
-</file>
-
-<file path=ppt/slides/slide12.xml><?xml version="1.0" encoding="utf-8"?>
-<p:sld xmlns:a="http://schemas.openxmlformats.org/drawingml/2006/main" xmlns:r="http://schemas.openxmlformats.org/officeDocument/2006/relationships" xmlns:p="http://schemas.openxmlformats.org/presentationml/2006/main" show="0">
-  <p:cSld>
-    <p:spTree>
-      <p:nvGrpSpPr>
-        <p:cNvPr id="1" name="Shape 323"/>
-        <p:cNvGrpSpPr/>
-        <p:nvPr/>
-      </p:nvGrpSpPr>
-      <p:grpSpPr>
-        <a:xfrm>
-          <a:off x="0" y="0"/>
-          <a:ext cx="0" cy="0"/>
-          <a:chOff x="0" y="0"/>
-          <a:chExt cx="0" cy="0"/>
-        </a:xfrm>
-      </p:grpSpPr>
-      <p:sp>
-        <p:nvSpPr>
-          <p:cNvPr id="324" name="Google Shape;324;p47"/>
-          <p:cNvSpPr txBox="1">
-            <a:spLocks noGrp="1"/>
-          </p:cNvSpPr>
-          <p:nvPr>
-            <p:ph type="title"/>
-          </p:nvPr>
-        </p:nvSpPr>
-        <p:spPr>
-          <a:xfrm>
-            <a:off x="226208" y="1"/>
-            <a:ext cx="8520600" cy="464980"/>
-          </a:xfrm>
-          <a:prstGeom prst="rect">
-            <a:avLst/>
-          </a:prstGeom>
-        </p:spPr>
-        <p:txBody>
-          <a:bodyPr spcFirstLastPara="1" wrap="square" lIns="91425" tIns="91425" rIns="91425" bIns="91425" anchor="t" anchorCtr="0">
-            <a:noAutofit/>
-          </a:bodyPr>
-          <a:lstStyle/>
-          <a:p>
-            <a:pPr marL="0" lvl="0" indent="0" algn="ctr" rtl="0">
-              <a:spcBef>
-                <a:spcPts val="0"/>
-              </a:spcBef>
-              <a:spcAft>
-                <a:spcPts val="0"/>
-              </a:spcAft>
-              <a:buNone/>
-            </a:pPr>
-            <a:r>
-              <a:rPr lang="en-US" dirty="0"/>
-              <a:t>Use </a:t>
-            </a:r>
-            <a:r>
-              <a:rPr lang="en-US" sz="2400" dirty="0"/>
-              <a:t>Assigned</a:t>
-            </a:r>
-            <a:r>
-              <a:rPr lang="en-US" dirty="0"/>
-              <a:t> Seat</a:t>
-            </a:r>
-            <a:endParaRPr dirty="0"/>
-          </a:p>
-        </p:txBody>
-      </p:sp>
-      <p:sp>
-        <p:nvSpPr>
-          <p:cNvPr id="326" name="Google Shape;326;p47"/>
-          <p:cNvSpPr txBox="1">
-            <a:spLocks noGrp="1"/>
-          </p:cNvSpPr>
-          <p:nvPr>
-            <p:ph type="sldNum" idx="12"/>
-          </p:nvPr>
-        </p:nvSpPr>
-        <p:spPr>
-          <a:xfrm>
-            <a:off x="8472458" y="4663217"/>
-            <a:ext cx="548700" cy="393600"/>
-          </a:xfrm>
-          <a:prstGeom prst="rect">
-            <a:avLst/>
-          </a:prstGeom>
-        </p:spPr>
-        <p:txBody>
-          <a:bodyPr spcFirstLastPara="1" wrap="square" lIns="91425" tIns="91425" rIns="91425" bIns="91425" anchor="ctr" anchorCtr="0">
-            <a:noAutofit/>
-          </a:bodyPr>
-          <a:lstStyle/>
-          <a:p>
-            <a:pPr marL="0" lvl="0" indent="0" algn="r" rtl="0">
-              <a:spcBef>
-                <a:spcPts val="0"/>
-              </a:spcBef>
-              <a:spcAft>
-                <a:spcPts val="0"/>
-              </a:spcAft>
-              <a:buNone/>
-            </a:pPr>
-            <a:fld id="{00000000-1234-1234-1234-123412341234}" type="slidenum">
-              <a:rPr lang="en"/>
-              <a:t>12</a:t>
-            </a:fld>
-            <a:endParaRPr/>
-          </a:p>
-        </p:txBody>
-      </p:sp>
-      <p:pic>
-        <p:nvPicPr>
-          <p:cNvPr id="3" name="Picture 2">
-            <a:extLst>
-              <a:ext uri="{FF2B5EF4-FFF2-40B4-BE49-F238E27FC236}">
-                <a16:creationId xmlns:a16="http://schemas.microsoft.com/office/drawing/2014/main" id="{92DE4AAC-70FE-A114-5258-F5B22EDDED45}"/>
-              </a:ext>
-            </a:extLst>
-          </p:cNvPr>
-          <p:cNvPicPr>
-            <a:picLocks noChangeAspect="1"/>
-          </p:cNvPicPr>
-          <p:nvPr/>
-        </p:nvPicPr>
-        <p:blipFill>
-          <a:blip r:embed="rId3"/>
-          <a:stretch>
-            <a:fillRect/>
-          </a:stretch>
-        </p:blipFill>
-        <p:spPr>
-          <a:xfrm>
-            <a:off x="0" y="716280"/>
-            <a:ext cx="9144000" cy="4427218"/>
-          </a:xfrm>
-          <a:prstGeom prst="rect">
-            <a:avLst/>
-          </a:prstGeom>
-        </p:spPr>
-      </p:pic>
-    </p:spTree>
-    <p:extLst>
-      <p:ext uri="{BB962C8B-B14F-4D97-AF65-F5344CB8AC3E}">
-        <p14:creationId xmlns:p14="http://schemas.microsoft.com/office/powerpoint/2010/main" val="1976403023"/>
-      </p:ext>
-    </p:extLst>
-  </p:cSld>
-  <p:clrMapOvr>
-    <a:masterClrMapping/>
-  </p:clrMapOvr>
-</p:sld>
-</file>
-
-<file path=ppt/slides/slide13.xml><?xml version="1.0" encoding="utf-8"?>
-<p:sld xmlns:a="http://schemas.openxmlformats.org/drawingml/2006/main" xmlns:r="http://schemas.openxmlformats.org/officeDocument/2006/relationships" xmlns:p="http://schemas.openxmlformats.org/presentationml/2006/main" show="0">
-  <p:cSld>
-    <p:spTree>
-      <p:nvGrpSpPr>
-        <p:cNvPr id="1" name="Shape 323"/>
-        <p:cNvGrpSpPr/>
-        <p:nvPr/>
-      </p:nvGrpSpPr>
-      <p:grpSpPr>
-        <a:xfrm>
-          <a:off x="0" y="0"/>
-          <a:ext cx="0" cy="0"/>
-          <a:chOff x="0" y="0"/>
-          <a:chExt cx="0" cy="0"/>
-        </a:xfrm>
-      </p:grpSpPr>
-      <p:sp>
-        <p:nvSpPr>
-          <p:cNvPr id="324" name="Google Shape;324;p47"/>
-          <p:cNvSpPr txBox="1">
-            <a:spLocks noGrp="1"/>
-          </p:cNvSpPr>
-          <p:nvPr>
-            <p:ph type="title"/>
-          </p:nvPr>
-        </p:nvSpPr>
-        <p:spPr>
-          <a:xfrm>
-            <a:off x="226208" y="1"/>
-            <a:ext cx="8520600" cy="464980"/>
-          </a:xfrm>
-          <a:prstGeom prst="rect">
-            <a:avLst/>
-          </a:prstGeom>
-        </p:spPr>
-        <p:txBody>
-          <a:bodyPr spcFirstLastPara="1" wrap="square" lIns="91425" tIns="91425" rIns="91425" bIns="91425" anchor="t" anchorCtr="0">
-            <a:noAutofit/>
-          </a:bodyPr>
-          <a:lstStyle/>
-          <a:p>
-            <a:pPr marL="0" lvl="0" indent="0" algn="ctr" rtl="0">
-              <a:spcBef>
-                <a:spcPts val="0"/>
-              </a:spcBef>
-              <a:spcAft>
-                <a:spcPts val="0"/>
-              </a:spcAft>
-              <a:buNone/>
-            </a:pPr>
-            <a:r>
-              <a:rPr lang="en-US" dirty="0"/>
-              <a:t>Use </a:t>
-            </a:r>
-            <a:r>
-              <a:rPr lang="en-US" sz="2400" dirty="0"/>
-              <a:t>Assigned</a:t>
-            </a:r>
-            <a:r>
-              <a:rPr lang="en-US" dirty="0"/>
-              <a:t> Seat</a:t>
-            </a:r>
-            <a:endParaRPr dirty="0"/>
-          </a:p>
-        </p:txBody>
-      </p:sp>
-      <p:sp>
-        <p:nvSpPr>
-          <p:cNvPr id="326" name="Google Shape;326;p47"/>
-          <p:cNvSpPr txBox="1">
-            <a:spLocks noGrp="1"/>
-          </p:cNvSpPr>
-          <p:nvPr>
-            <p:ph type="sldNum" idx="12"/>
-          </p:nvPr>
-        </p:nvSpPr>
-        <p:spPr>
-          <a:xfrm>
-            <a:off x="8472458" y="4663217"/>
-            <a:ext cx="548700" cy="393600"/>
-          </a:xfrm>
-          <a:prstGeom prst="rect">
-            <a:avLst/>
-          </a:prstGeom>
-        </p:spPr>
-        <p:txBody>
-          <a:bodyPr spcFirstLastPara="1" wrap="square" lIns="91425" tIns="91425" rIns="91425" bIns="91425" anchor="ctr" anchorCtr="0">
-            <a:noAutofit/>
-          </a:bodyPr>
-          <a:lstStyle/>
-          <a:p>
-            <a:pPr marL="0" lvl="0" indent="0" algn="r" rtl="0">
-              <a:spcBef>
-                <a:spcPts val="0"/>
-              </a:spcBef>
-              <a:spcAft>
-                <a:spcPts val="0"/>
-              </a:spcAft>
-              <a:buNone/>
-            </a:pPr>
-            <a:fld id="{00000000-1234-1234-1234-123412341234}" type="slidenum">
-              <a:rPr lang="en"/>
-              <a:t>13</a:t>
-            </a:fld>
-            <a:endParaRPr/>
-          </a:p>
-        </p:txBody>
-      </p:sp>
-      <p:pic>
-        <p:nvPicPr>
-          <p:cNvPr id="4" name="Picture 3">
-            <a:extLst>
-              <a:ext uri="{FF2B5EF4-FFF2-40B4-BE49-F238E27FC236}">
-                <a16:creationId xmlns:a16="http://schemas.microsoft.com/office/drawing/2014/main" id="{DCD752B9-EFAE-AFC1-7D39-6763B89DE8D3}"/>
-              </a:ext>
-            </a:extLst>
-          </p:cNvPr>
-          <p:cNvPicPr>
-            <a:picLocks noChangeAspect="1"/>
-          </p:cNvPicPr>
-          <p:nvPr/>
-        </p:nvPicPr>
-        <p:blipFill>
-          <a:blip r:embed="rId3"/>
-          <a:stretch>
-            <a:fillRect/>
-          </a:stretch>
-        </p:blipFill>
-        <p:spPr>
-          <a:xfrm>
-            <a:off x="0" y="652130"/>
-            <a:ext cx="9144000" cy="4491369"/>
-          </a:xfrm>
-          <a:prstGeom prst="rect">
-            <a:avLst/>
-          </a:prstGeom>
-        </p:spPr>
-      </p:pic>
-    </p:spTree>
-    <p:extLst>
-      <p:ext uri="{BB962C8B-B14F-4D97-AF65-F5344CB8AC3E}">
-        <p14:creationId xmlns:p14="http://schemas.microsoft.com/office/powerpoint/2010/main" val="3365057756"/>
-      </p:ext>
-    </p:extLst>
-  </p:cSld>
-  <p:clrMapOvr>
-    <a:masterClrMapping/>
-  </p:clrMapOvr>
-</p:sld>
-</file>
-
-<file path=ppt/slides/slide2.xml><?xml version="1.0" encoding="utf-8"?>
+<file path=ppt/slides/slide3.xml><?xml version="1.0" encoding="utf-8"?>
 <p:sld xmlns:a="http://schemas.openxmlformats.org/drawingml/2006/main" xmlns:r="http://schemas.openxmlformats.org/officeDocument/2006/relationships" xmlns:p="http://schemas.openxmlformats.org/presentationml/2006/main" show="0">
   <p:cSld>
     <p:spTree>
@@ -7979,7 +8905,7 @@
             </a:pPr>
             <a:fld id="{00000000-1234-1234-1234-123412341234}" type="slidenum">
               <a:rPr lang="en"/>
-              <a:t>2</a:t>
+              <a:t>3</a:t>
             </a:fld>
             <a:endParaRPr/>
           </a:p>
@@ -8399,7 +9325,7 @@
 </p:sld>
 </file>
 
-<file path=ppt/slides/slide3.xml><?xml version="1.0" encoding="utf-8"?>
+<file path=ppt/slides/slide4.xml><?xml version="1.0" encoding="utf-8"?>
 <p:sld xmlns:a="http://schemas.openxmlformats.org/drawingml/2006/main" xmlns:r="http://schemas.openxmlformats.org/officeDocument/2006/relationships" xmlns:p="http://schemas.openxmlformats.org/presentationml/2006/main" show="0">
   <p:cSld>
     <p:spTree>
@@ -8583,7 +9509,7 @@
             </a:pPr>
             <a:fld id="{00000000-1234-1234-1234-123412341234}" type="slidenum">
               <a:rPr lang="en"/>
-              <a:t>3</a:t>
+              <a:t>4</a:t>
             </a:fld>
             <a:endParaRPr/>
           </a:p>
@@ -9329,7 +10255,7 @@
 </p:sld>
 </file>
 
-<file path=ppt/slides/slide4.xml><?xml version="1.0" encoding="utf-8"?>
+<file path=ppt/slides/slide5.xml><?xml version="1.0" encoding="utf-8"?>
 <p:sld xmlns:a="http://schemas.openxmlformats.org/drawingml/2006/main" xmlns:r="http://schemas.openxmlformats.org/officeDocument/2006/relationships" xmlns:p="http://schemas.openxmlformats.org/presentationml/2006/main" show="0">
   <p:cSld>
     <p:spTree>
@@ -9521,7 +10447,7 @@
             </a:pPr>
             <a:fld id="{00000000-1234-1234-1234-123412341234}" type="slidenum">
               <a:rPr lang="en"/>
-              <a:t>4</a:t>
+              <a:t>5</a:t>
             </a:fld>
             <a:endParaRPr/>
           </a:p>
@@ -9935,7 +10861,7 @@
 </p:sld>
 </file>
 
-<file path=ppt/slides/slide5.xml><?xml version="1.0" encoding="utf-8"?>
+<file path=ppt/slides/slide6.xml><?xml version="1.0" encoding="utf-8"?>
 <p:sld xmlns:a="http://schemas.openxmlformats.org/drawingml/2006/main" xmlns:r="http://schemas.openxmlformats.org/officeDocument/2006/relationships" xmlns:p="http://schemas.openxmlformats.org/presentationml/2006/main" show="0">
   <p:cSld>
     <p:spTree>
@@ -10030,7 +10956,7 @@
             </a:pPr>
             <a:fld id="{00000000-1234-1234-1234-123412341234}" type="slidenum">
               <a:rPr lang="en"/>
-              <a:t>5</a:t>
+              <a:t>6</a:t>
             </a:fld>
             <a:endParaRPr/>
           </a:p>
@@ -10494,917 +11420,6 @@
     <p:extLst>
       <p:ext uri="{BB962C8B-B14F-4D97-AF65-F5344CB8AC3E}">
         <p14:creationId xmlns:p14="http://schemas.microsoft.com/office/powerpoint/2010/main" val="604294447"/>
-      </p:ext>
-    </p:extLst>
-  </p:cSld>
-  <p:clrMapOvr>
-    <a:masterClrMapping/>
-  </p:clrMapOvr>
-</p:sld>
-</file>
-
-<file path=ppt/slides/slide6.xml><?xml version="1.0" encoding="utf-8"?>
-<p:sld xmlns:a="http://schemas.openxmlformats.org/drawingml/2006/main" xmlns:r="http://schemas.openxmlformats.org/officeDocument/2006/relationships" xmlns:p="http://schemas.openxmlformats.org/presentationml/2006/main" show="0">
-  <p:cSld>
-    <p:spTree>
-      <p:nvGrpSpPr>
-        <p:cNvPr id="1" name="Shape 323">
-          <a:extLst>
-            <a:ext uri="{FF2B5EF4-FFF2-40B4-BE49-F238E27FC236}">
-              <a16:creationId xmlns:a16="http://schemas.microsoft.com/office/drawing/2014/main" id="{1AC6523E-CC83-B7B9-B47C-949A9C7203D8}"/>
-            </a:ext>
-          </a:extLst>
-        </p:cNvPr>
-        <p:cNvGrpSpPr/>
-        <p:nvPr/>
-      </p:nvGrpSpPr>
-      <p:grpSpPr>
-        <a:xfrm>
-          <a:off x="0" y="0"/>
-          <a:ext cx="0" cy="0"/>
-          <a:chOff x="0" y="0"/>
-          <a:chExt cx="0" cy="0"/>
-        </a:xfrm>
-      </p:grpSpPr>
-      <p:sp>
-        <p:nvSpPr>
-          <p:cNvPr id="324" name="Google Shape;324;p47">
-            <a:extLst>
-              <a:ext uri="{FF2B5EF4-FFF2-40B4-BE49-F238E27FC236}">
-                <a16:creationId xmlns:a16="http://schemas.microsoft.com/office/drawing/2014/main" id="{72CBC233-9E04-A188-2584-2CE1B0FE8F31}"/>
-              </a:ext>
-            </a:extLst>
-          </p:cNvPr>
-          <p:cNvSpPr txBox="1">
-            <a:spLocks noGrp="1"/>
-          </p:cNvSpPr>
-          <p:nvPr>
-            <p:ph type="title"/>
-          </p:nvPr>
-        </p:nvSpPr>
-        <p:spPr>
-          <a:xfrm>
-            <a:off x="300016" y="269197"/>
-            <a:ext cx="8520600" cy="623700"/>
-          </a:xfrm>
-          <a:prstGeom prst="rect">
-            <a:avLst/>
-          </a:prstGeom>
-        </p:spPr>
-        <p:txBody>
-          <a:bodyPr spcFirstLastPara="1" wrap="square" lIns="91425" tIns="91425" rIns="91425" bIns="91425" anchor="t" anchorCtr="0">
-            <a:noAutofit/>
-          </a:bodyPr>
-          <a:lstStyle/>
-          <a:p>
-            <a:pPr marL="0" lvl="0" indent="0" algn="ctr" rtl="0">
-              <a:spcBef>
-                <a:spcPts val="0"/>
-              </a:spcBef>
-              <a:spcAft>
-                <a:spcPts val="0"/>
-              </a:spcAft>
-              <a:buNone/>
-            </a:pPr>
-            <a:r>
-              <a:rPr lang="en-US" dirty="0"/>
-              <a:t>GCIS – Software Development and Problem Solving</a:t>
-            </a:r>
-            <a:endParaRPr dirty="0"/>
-          </a:p>
-        </p:txBody>
-      </p:sp>
-      <p:sp>
-        <p:nvSpPr>
-          <p:cNvPr id="325" name="Google Shape;325;p47">
-            <a:extLst>
-              <a:ext uri="{FF2B5EF4-FFF2-40B4-BE49-F238E27FC236}">
-                <a16:creationId xmlns:a16="http://schemas.microsoft.com/office/drawing/2014/main" id="{E665F298-5025-E429-9EE6-CD009824AD88}"/>
-              </a:ext>
-            </a:extLst>
-          </p:cNvPr>
-          <p:cNvSpPr txBox="1">
-            <a:spLocks noGrp="1"/>
-          </p:cNvSpPr>
-          <p:nvPr>
-            <p:ph type="body" idx="1"/>
-          </p:nvPr>
-        </p:nvSpPr>
-        <p:spPr>
-          <a:xfrm>
-            <a:off x="91444" y="1758316"/>
-            <a:ext cx="4271627" cy="1113193"/>
-          </a:xfrm>
-          <a:prstGeom prst="rect">
-            <a:avLst/>
-          </a:prstGeom>
-        </p:spPr>
-        <p:txBody>
-          <a:bodyPr spcFirstLastPara="1" wrap="square" lIns="91425" tIns="91425" rIns="91425" bIns="91425" anchor="ctr" anchorCtr="0">
-            <a:noAutofit/>
-          </a:bodyPr>
-          <a:lstStyle/>
-          <a:p>
-            <a:pPr marL="146050" indent="0">
-              <a:buNone/>
-            </a:pPr>
-            <a:r>
-              <a:rPr lang="en-US" sz="2000" dirty="0"/>
-              <a:t>Take Quiz 12.3: Choose data structure</a:t>
-            </a:r>
-          </a:p>
-          <a:p>
-            <a:pPr marL="146050" indent="0">
-              <a:buNone/>
-            </a:pPr>
-            <a:r>
-              <a:rPr lang="en-US" sz="2000" dirty="0">
-                <a:solidFill>
-                  <a:schemeClr val="tx1"/>
-                </a:solidFill>
-              </a:rPr>
-              <a:t>Password – </a:t>
-            </a:r>
-            <a:r>
-              <a:rPr lang="en-US" sz="2000" dirty="0" err="1">
-                <a:solidFill>
-                  <a:schemeClr val="tx1"/>
-                </a:solidFill>
-              </a:rPr>
-              <a:t>StackEmUp</a:t>
-            </a:r>
-            <a:endParaRPr sz="2000" dirty="0">
-              <a:solidFill>
-                <a:schemeClr val="tx1"/>
-              </a:solidFill>
-            </a:endParaRPr>
-          </a:p>
-        </p:txBody>
-      </p:sp>
-      <p:sp>
-        <p:nvSpPr>
-          <p:cNvPr id="326" name="Google Shape;326;p47">
-            <a:extLst>
-              <a:ext uri="{FF2B5EF4-FFF2-40B4-BE49-F238E27FC236}">
-                <a16:creationId xmlns:a16="http://schemas.microsoft.com/office/drawing/2014/main" id="{06900A1A-D8D4-052D-4D61-A00A33A0490B}"/>
-              </a:ext>
-            </a:extLst>
-          </p:cNvPr>
-          <p:cNvSpPr txBox="1">
-            <a:spLocks noGrp="1"/>
-          </p:cNvSpPr>
-          <p:nvPr>
-            <p:ph type="sldNum" idx="12"/>
-          </p:nvPr>
-        </p:nvSpPr>
-        <p:spPr>
-          <a:xfrm>
-            <a:off x="8472458" y="4663217"/>
-            <a:ext cx="548700" cy="393600"/>
-          </a:xfrm>
-          <a:prstGeom prst="rect">
-            <a:avLst/>
-          </a:prstGeom>
-        </p:spPr>
-        <p:txBody>
-          <a:bodyPr spcFirstLastPara="1" wrap="square" lIns="91425" tIns="91425" rIns="91425" bIns="91425" anchor="ctr" anchorCtr="0">
-            <a:noAutofit/>
-          </a:bodyPr>
-          <a:lstStyle/>
-          <a:p>
-            <a:pPr marL="0" lvl="0" indent="0" algn="r" rtl="0">
-              <a:spcBef>
-                <a:spcPts val="0"/>
-              </a:spcBef>
-              <a:spcAft>
-                <a:spcPts val="0"/>
-              </a:spcAft>
-              <a:buNone/>
-            </a:pPr>
-            <a:fld id="{00000000-1234-1234-1234-123412341234}" type="slidenum">
-              <a:rPr lang="en"/>
-              <a:t>6</a:t>
-            </a:fld>
-            <a:endParaRPr/>
-          </a:p>
-        </p:txBody>
-      </p:sp>
-      <p:sp>
-        <p:nvSpPr>
-          <p:cNvPr id="2" name="TextBox 1">
-            <a:extLst>
-              <a:ext uri="{FF2B5EF4-FFF2-40B4-BE49-F238E27FC236}">
-                <a16:creationId xmlns:a16="http://schemas.microsoft.com/office/drawing/2014/main" id="{D97E7EBF-24E3-825A-A968-FA4B0D04DF1F}"/>
-              </a:ext>
-            </a:extLst>
-          </p:cNvPr>
-          <p:cNvSpPr txBox="1"/>
-          <p:nvPr/>
-        </p:nvSpPr>
-        <p:spPr>
-          <a:xfrm>
-            <a:off x="-11684" y="1287037"/>
-            <a:ext cx="9144000" cy="338555"/>
-          </a:xfrm>
-          <a:prstGeom prst="rect">
-            <a:avLst/>
-          </a:prstGeom>
-          <a:solidFill>
-            <a:srgbClr val="FFC000"/>
-          </a:solidFill>
-        </p:spPr>
-        <p:txBody>
-          <a:bodyPr wrap="square" rtlCol="0">
-            <a:spAutoFit/>
-          </a:bodyPr>
-          <a:lstStyle/>
-          <a:p>
-            <a:r>
-              <a:rPr lang="en-US" dirty="0"/>
-              <a:t>Quiz</a:t>
-            </a:r>
-          </a:p>
-        </p:txBody>
-      </p:sp>
-      <p:sp>
-        <p:nvSpPr>
-          <p:cNvPr id="3" name="TextBox 2">
-            <a:extLst>
-              <a:ext uri="{FF2B5EF4-FFF2-40B4-BE49-F238E27FC236}">
-                <a16:creationId xmlns:a16="http://schemas.microsoft.com/office/drawing/2014/main" id="{4823F795-9329-8722-EA48-35E2E42958B6}"/>
-              </a:ext>
-            </a:extLst>
-          </p:cNvPr>
-          <p:cNvSpPr txBox="1"/>
-          <p:nvPr/>
-        </p:nvSpPr>
-        <p:spPr>
-          <a:xfrm>
-            <a:off x="-5842" y="3168849"/>
-            <a:ext cx="9144000" cy="307777"/>
-          </a:xfrm>
-          <a:prstGeom prst="rect">
-            <a:avLst/>
-          </a:prstGeom>
-          <a:solidFill>
-            <a:srgbClr val="FFC000"/>
-          </a:solidFill>
-        </p:spPr>
-        <p:txBody>
-          <a:bodyPr wrap="square" rtlCol="0">
-            <a:spAutoFit/>
-          </a:bodyPr>
-          <a:lstStyle/>
-          <a:p>
-            <a:r>
-              <a:rPr lang="en-US" dirty="0"/>
-              <a:t>Next </a:t>
-            </a:r>
-            <a:r>
-              <a:rPr lang="en-US" dirty="0">
-                <a:sym typeface="Wingdings" panose="05000000000000000000" pitchFamily="2" charset="2"/>
-              </a:rPr>
-              <a:t> </a:t>
-            </a:r>
-            <a:endParaRPr lang="en-US" dirty="0"/>
-          </a:p>
-        </p:txBody>
-      </p:sp>
-      <p:sp>
-        <p:nvSpPr>
-          <p:cNvPr id="4" name="Google Shape;325;p47">
-            <a:extLst>
-              <a:ext uri="{FF2B5EF4-FFF2-40B4-BE49-F238E27FC236}">
-                <a16:creationId xmlns:a16="http://schemas.microsoft.com/office/drawing/2014/main" id="{0AF88843-F54E-EF33-F5A4-A1A3C1D40E0E}"/>
-              </a:ext>
-            </a:extLst>
-          </p:cNvPr>
-          <p:cNvSpPr txBox="1">
-            <a:spLocks/>
-          </p:cNvSpPr>
-          <p:nvPr/>
-        </p:nvSpPr>
-        <p:spPr>
-          <a:xfrm>
-            <a:off x="-5842" y="3527388"/>
-            <a:ext cx="9149842" cy="1529429"/>
-          </a:xfrm>
-          <a:prstGeom prst="rect">
-            <a:avLst/>
-          </a:prstGeom>
-          <a:noFill/>
-          <a:ln>
-            <a:noFill/>
-          </a:ln>
-        </p:spPr>
-        <p:txBody>
-          <a:bodyPr spcFirstLastPara="1" wrap="square" lIns="91425" tIns="91425" rIns="91425" bIns="91425" anchor="ctr" anchorCtr="0">
-            <a:noAutofit/>
-          </a:bodyPr>
-          <a:lstStyle>
-            <a:defPPr marR="0" lvl="0" algn="l" rtl="0">
-              <a:lnSpc>
-                <a:spcPct val="100000"/>
-              </a:lnSpc>
-              <a:spcBef>
-                <a:spcPts val="0"/>
-              </a:spcBef>
-              <a:spcAft>
-                <a:spcPts val="0"/>
-              </a:spcAft>
-            </a:defPPr>
-            <a:lvl1pPr marL="457200" marR="0" lvl="0" indent="-311150" algn="l" rtl="0">
-              <a:lnSpc>
-                <a:spcPct val="115000"/>
-              </a:lnSpc>
-              <a:spcBef>
-                <a:spcPts val="0"/>
-              </a:spcBef>
-              <a:spcAft>
-                <a:spcPts val="0"/>
-              </a:spcAft>
-              <a:buClr>
-                <a:schemeClr val="dk2"/>
-              </a:buClr>
-              <a:buSzPts val="1300"/>
-              <a:buFont typeface="Roboto"/>
-              <a:buChar char="●"/>
-              <a:defRPr sz="1300" b="0" i="0" u="none" strike="noStrike" cap="none">
-                <a:solidFill>
-                  <a:schemeClr val="dk2"/>
-                </a:solidFill>
-                <a:latin typeface="Roboto"/>
-                <a:ea typeface="Roboto"/>
-                <a:cs typeface="Roboto"/>
-                <a:sym typeface="Roboto"/>
-              </a:defRPr>
-            </a:lvl1pPr>
-            <a:lvl2pPr marL="914400" marR="0" lvl="1" indent="-298450" algn="l" rtl="0">
-              <a:lnSpc>
-                <a:spcPct val="115000"/>
-              </a:lnSpc>
-              <a:spcBef>
-                <a:spcPts val="1600"/>
-              </a:spcBef>
-              <a:spcAft>
-                <a:spcPts val="0"/>
-              </a:spcAft>
-              <a:buClr>
-                <a:schemeClr val="dk2"/>
-              </a:buClr>
-              <a:buSzPts val="1100"/>
-              <a:buFont typeface="Roboto"/>
-              <a:buChar char="○"/>
-              <a:defRPr sz="1100" b="0" i="0" u="none" strike="noStrike" cap="none">
-                <a:solidFill>
-                  <a:schemeClr val="dk2"/>
-                </a:solidFill>
-                <a:latin typeface="Roboto"/>
-                <a:ea typeface="Roboto"/>
-                <a:cs typeface="Roboto"/>
-                <a:sym typeface="Roboto"/>
-              </a:defRPr>
-            </a:lvl2pPr>
-            <a:lvl3pPr marL="1371600" marR="0" lvl="2" indent="-298450" algn="l" rtl="0">
-              <a:lnSpc>
-                <a:spcPct val="115000"/>
-              </a:lnSpc>
-              <a:spcBef>
-                <a:spcPts val="1600"/>
-              </a:spcBef>
-              <a:spcAft>
-                <a:spcPts val="0"/>
-              </a:spcAft>
-              <a:buClr>
-                <a:schemeClr val="dk2"/>
-              </a:buClr>
-              <a:buSzPts val="1100"/>
-              <a:buFont typeface="Roboto"/>
-              <a:buChar char="■"/>
-              <a:defRPr sz="1100" b="0" i="0" u="none" strike="noStrike" cap="none">
-                <a:solidFill>
-                  <a:schemeClr val="dk2"/>
-                </a:solidFill>
-                <a:latin typeface="Roboto"/>
-                <a:ea typeface="Roboto"/>
-                <a:cs typeface="Roboto"/>
-                <a:sym typeface="Roboto"/>
-              </a:defRPr>
-            </a:lvl3pPr>
-            <a:lvl4pPr marL="1828800" marR="0" lvl="3" indent="-298450" algn="l" rtl="0">
-              <a:lnSpc>
-                <a:spcPct val="115000"/>
-              </a:lnSpc>
-              <a:spcBef>
-                <a:spcPts val="1600"/>
-              </a:spcBef>
-              <a:spcAft>
-                <a:spcPts val="0"/>
-              </a:spcAft>
-              <a:buClr>
-                <a:schemeClr val="dk2"/>
-              </a:buClr>
-              <a:buSzPts val="1100"/>
-              <a:buFont typeface="Roboto"/>
-              <a:buChar char="●"/>
-              <a:defRPr sz="1100" b="0" i="0" u="none" strike="noStrike" cap="none">
-                <a:solidFill>
-                  <a:schemeClr val="dk2"/>
-                </a:solidFill>
-                <a:latin typeface="Roboto"/>
-                <a:ea typeface="Roboto"/>
-                <a:cs typeface="Roboto"/>
-                <a:sym typeface="Roboto"/>
-              </a:defRPr>
-            </a:lvl4pPr>
-            <a:lvl5pPr marL="2286000" marR="0" lvl="4" indent="-298450" algn="l" rtl="0">
-              <a:lnSpc>
-                <a:spcPct val="115000"/>
-              </a:lnSpc>
-              <a:spcBef>
-                <a:spcPts val="1600"/>
-              </a:spcBef>
-              <a:spcAft>
-                <a:spcPts val="0"/>
-              </a:spcAft>
-              <a:buClr>
-                <a:schemeClr val="dk2"/>
-              </a:buClr>
-              <a:buSzPts val="1100"/>
-              <a:buFont typeface="Roboto"/>
-              <a:buChar char="○"/>
-              <a:defRPr sz="1100" b="0" i="0" u="none" strike="noStrike" cap="none">
-                <a:solidFill>
-                  <a:schemeClr val="dk2"/>
-                </a:solidFill>
-                <a:latin typeface="Roboto"/>
-                <a:ea typeface="Roboto"/>
-                <a:cs typeface="Roboto"/>
-                <a:sym typeface="Roboto"/>
-              </a:defRPr>
-            </a:lvl5pPr>
-            <a:lvl6pPr marL="2743200" marR="0" lvl="5" indent="-298450" algn="l" rtl="0">
-              <a:lnSpc>
-                <a:spcPct val="115000"/>
-              </a:lnSpc>
-              <a:spcBef>
-                <a:spcPts val="1600"/>
-              </a:spcBef>
-              <a:spcAft>
-                <a:spcPts val="0"/>
-              </a:spcAft>
-              <a:buClr>
-                <a:schemeClr val="dk2"/>
-              </a:buClr>
-              <a:buSzPts val="1100"/>
-              <a:buFont typeface="Roboto"/>
-              <a:buChar char="■"/>
-              <a:defRPr sz="1100" b="0" i="0" u="none" strike="noStrike" cap="none">
-                <a:solidFill>
-                  <a:schemeClr val="dk2"/>
-                </a:solidFill>
-                <a:latin typeface="Roboto"/>
-                <a:ea typeface="Roboto"/>
-                <a:cs typeface="Roboto"/>
-                <a:sym typeface="Roboto"/>
-              </a:defRPr>
-            </a:lvl6pPr>
-            <a:lvl7pPr marL="3200400" marR="0" lvl="6" indent="-298450" algn="l" rtl="0">
-              <a:lnSpc>
-                <a:spcPct val="115000"/>
-              </a:lnSpc>
-              <a:spcBef>
-                <a:spcPts val="1600"/>
-              </a:spcBef>
-              <a:spcAft>
-                <a:spcPts val="0"/>
-              </a:spcAft>
-              <a:buClr>
-                <a:schemeClr val="dk2"/>
-              </a:buClr>
-              <a:buSzPts val="1100"/>
-              <a:buFont typeface="Roboto"/>
-              <a:buChar char="●"/>
-              <a:defRPr sz="1100" b="0" i="0" u="none" strike="noStrike" cap="none">
-                <a:solidFill>
-                  <a:schemeClr val="dk2"/>
-                </a:solidFill>
-                <a:latin typeface="Roboto"/>
-                <a:ea typeface="Roboto"/>
-                <a:cs typeface="Roboto"/>
-                <a:sym typeface="Roboto"/>
-              </a:defRPr>
-            </a:lvl7pPr>
-            <a:lvl8pPr marL="3657600" marR="0" lvl="7" indent="-298450" algn="l" rtl="0">
-              <a:lnSpc>
-                <a:spcPct val="115000"/>
-              </a:lnSpc>
-              <a:spcBef>
-                <a:spcPts val="1600"/>
-              </a:spcBef>
-              <a:spcAft>
-                <a:spcPts val="0"/>
-              </a:spcAft>
-              <a:buClr>
-                <a:schemeClr val="dk2"/>
-              </a:buClr>
-              <a:buSzPts val="1100"/>
-              <a:buFont typeface="Roboto"/>
-              <a:buChar char="○"/>
-              <a:defRPr sz="1100" b="0" i="0" u="none" strike="noStrike" cap="none">
-                <a:solidFill>
-                  <a:schemeClr val="dk2"/>
-                </a:solidFill>
-                <a:latin typeface="Roboto"/>
-                <a:ea typeface="Roboto"/>
-                <a:cs typeface="Roboto"/>
-                <a:sym typeface="Roboto"/>
-              </a:defRPr>
-            </a:lvl8pPr>
-            <a:lvl9pPr marL="4114800" marR="0" lvl="8" indent="-298450" algn="l" rtl="0">
-              <a:lnSpc>
-                <a:spcPct val="115000"/>
-              </a:lnSpc>
-              <a:spcBef>
-                <a:spcPts val="1600"/>
-              </a:spcBef>
-              <a:spcAft>
-                <a:spcPts val="1600"/>
-              </a:spcAft>
-              <a:buClr>
-                <a:schemeClr val="dk2"/>
-              </a:buClr>
-              <a:buSzPts val="1100"/>
-              <a:buFont typeface="Roboto"/>
-              <a:buChar char="■"/>
-              <a:defRPr sz="1100" b="0" i="0" u="none" strike="noStrike" cap="none">
-                <a:solidFill>
-                  <a:schemeClr val="dk2"/>
-                </a:solidFill>
-                <a:latin typeface="Roboto"/>
-                <a:ea typeface="Roboto"/>
-                <a:cs typeface="Roboto"/>
-                <a:sym typeface="Roboto"/>
-              </a:defRPr>
-            </a:lvl9pPr>
-          </a:lstStyle>
-          <a:p>
-            <a:pPr marL="0" indent="0">
-              <a:spcAft>
-                <a:spcPts val="1600"/>
-              </a:spcAft>
-              <a:buNone/>
-            </a:pPr>
-            <a:r>
-              <a:rPr lang="en-US" sz="2000" dirty="0"/>
-              <a:t>After completing the Quiz </a:t>
-            </a:r>
-          </a:p>
-          <a:p>
-            <a:pPr marL="342900" indent="-342900">
-              <a:spcAft>
-                <a:spcPts val="1600"/>
-              </a:spcAft>
-            </a:pPr>
-            <a:r>
-              <a:rPr lang="en-US" sz="1800" dirty="0"/>
-              <a:t>Accept GitHub Classroom Assignment for Unit 12, if not done already.</a:t>
-            </a:r>
-          </a:p>
-          <a:p>
-            <a:pPr marL="342900" indent="-342900">
-              <a:spcAft>
-                <a:spcPts val="1600"/>
-              </a:spcAft>
-            </a:pPr>
-            <a:r>
-              <a:rPr lang="en-US" sz="1800" dirty="0"/>
-              <a:t>Clone/pull GitHub classroom repo for Unit 12 under softdev1 folder</a:t>
-            </a:r>
-            <a:endParaRPr lang="en-US" sz="1800" dirty="0">
-              <a:solidFill>
-                <a:schemeClr val="tx1"/>
-              </a:solidFill>
-            </a:endParaRPr>
-          </a:p>
-        </p:txBody>
-      </p:sp>
-      <p:sp>
-        <p:nvSpPr>
-          <p:cNvPr id="5" name="Google Shape;325;p47">
-            <a:extLst>
-              <a:ext uri="{FF2B5EF4-FFF2-40B4-BE49-F238E27FC236}">
-                <a16:creationId xmlns:a16="http://schemas.microsoft.com/office/drawing/2014/main" id="{10D23636-E122-E0ED-219C-67DCAA8D64BE}"/>
-              </a:ext>
-            </a:extLst>
-          </p:cNvPr>
-          <p:cNvSpPr txBox="1">
-            <a:spLocks/>
-          </p:cNvSpPr>
-          <p:nvPr/>
-        </p:nvSpPr>
-        <p:spPr>
-          <a:xfrm>
-            <a:off x="4303618" y="1844958"/>
-            <a:ext cx="4516998" cy="893015"/>
-          </a:xfrm>
-          <a:prstGeom prst="rect">
-            <a:avLst/>
-          </a:prstGeom>
-          <a:noFill/>
-          <a:ln>
-            <a:noFill/>
-          </a:ln>
-        </p:spPr>
-        <p:txBody>
-          <a:bodyPr spcFirstLastPara="1" wrap="square" lIns="91425" tIns="91425" rIns="91425" bIns="91425" anchor="ctr" anchorCtr="0">
-            <a:noAutofit/>
-          </a:bodyPr>
-          <a:lstStyle>
-            <a:defPPr marR="0" lvl="0" algn="l" rtl="0">
-              <a:lnSpc>
-                <a:spcPct val="100000"/>
-              </a:lnSpc>
-              <a:spcBef>
-                <a:spcPts val="0"/>
-              </a:spcBef>
-              <a:spcAft>
-                <a:spcPts val="0"/>
-              </a:spcAft>
-            </a:defPPr>
-            <a:lvl1pPr marL="457200" marR="0" lvl="0" indent="-311150" algn="l" rtl="0">
-              <a:lnSpc>
-                <a:spcPct val="115000"/>
-              </a:lnSpc>
-              <a:spcBef>
-                <a:spcPts val="0"/>
-              </a:spcBef>
-              <a:spcAft>
-                <a:spcPts val="0"/>
-              </a:spcAft>
-              <a:buClr>
-                <a:schemeClr val="dk2"/>
-              </a:buClr>
-              <a:buSzPts val="1300"/>
-              <a:buFont typeface="Roboto"/>
-              <a:buChar char="●"/>
-              <a:defRPr sz="1300" b="0" i="0" u="none" strike="noStrike" cap="none">
-                <a:solidFill>
-                  <a:schemeClr val="dk2"/>
-                </a:solidFill>
-                <a:latin typeface="Roboto"/>
-                <a:ea typeface="Roboto"/>
-                <a:cs typeface="Roboto"/>
-                <a:sym typeface="Roboto"/>
-              </a:defRPr>
-            </a:lvl1pPr>
-            <a:lvl2pPr marL="914400" marR="0" lvl="1" indent="-298450" algn="l" rtl="0">
-              <a:lnSpc>
-                <a:spcPct val="115000"/>
-              </a:lnSpc>
-              <a:spcBef>
-                <a:spcPts val="1600"/>
-              </a:spcBef>
-              <a:spcAft>
-                <a:spcPts val="0"/>
-              </a:spcAft>
-              <a:buClr>
-                <a:schemeClr val="dk2"/>
-              </a:buClr>
-              <a:buSzPts val="1100"/>
-              <a:buFont typeface="Roboto"/>
-              <a:buChar char="○"/>
-              <a:defRPr sz="1100" b="0" i="0" u="none" strike="noStrike" cap="none">
-                <a:solidFill>
-                  <a:schemeClr val="dk2"/>
-                </a:solidFill>
-                <a:latin typeface="Roboto"/>
-                <a:ea typeface="Roboto"/>
-                <a:cs typeface="Roboto"/>
-                <a:sym typeface="Roboto"/>
-              </a:defRPr>
-            </a:lvl2pPr>
-            <a:lvl3pPr marL="1371600" marR="0" lvl="2" indent="-298450" algn="l" rtl="0">
-              <a:lnSpc>
-                <a:spcPct val="115000"/>
-              </a:lnSpc>
-              <a:spcBef>
-                <a:spcPts val="1600"/>
-              </a:spcBef>
-              <a:spcAft>
-                <a:spcPts val="0"/>
-              </a:spcAft>
-              <a:buClr>
-                <a:schemeClr val="dk2"/>
-              </a:buClr>
-              <a:buSzPts val="1100"/>
-              <a:buFont typeface="Roboto"/>
-              <a:buChar char="■"/>
-              <a:defRPr sz="1100" b="0" i="0" u="none" strike="noStrike" cap="none">
-                <a:solidFill>
-                  <a:schemeClr val="dk2"/>
-                </a:solidFill>
-                <a:latin typeface="Roboto"/>
-                <a:ea typeface="Roboto"/>
-                <a:cs typeface="Roboto"/>
-                <a:sym typeface="Roboto"/>
-              </a:defRPr>
-            </a:lvl3pPr>
-            <a:lvl4pPr marL="1828800" marR="0" lvl="3" indent="-298450" algn="l" rtl="0">
-              <a:lnSpc>
-                <a:spcPct val="115000"/>
-              </a:lnSpc>
-              <a:spcBef>
-                <a:spcPts val="1600"/>
-              </a:spcBef>
-              <a:spcAft>
-                <a:spcPts val="0"/>
-              </a:spcAft>
-              <a:buClr>
-                <a:schemeClr val="dk2"/>
-              </a:buClr>
-              <a:buSzPts val="1100"/>
-              <a:buFont typeface="Roboto"/>
-              <a:buChar char="●"/>
-              <a:defRPr sz="1100" b="0" i="0" u="none" strike="noStrike" cap="none">
-                <a:solidFill>
-                  <a:schemeClr val="dk2"/>
-                </a:solidFill>
-                <a:latin typeface="Roboto"/>
-                <a:ea typeface="Roboto"/>
-                <a:cs typeface="Roboto"/>
-                <a:sym typeface="Roboto"/>
-              </a:defRPr>
-            </a:lvl4pPr>
-            <a:lvl5pPr marL="2286000" marR="0" lvl="4" indent="-298450" algn="l" rtl="0">
-              <a:lnSpc>
-                <a:spcPct val="115000"/>
-              </a:lnSpc>
-              <a:spcBef>
-                <a:spcPts val="1600"/>
-              </a:spcBef>
-              <a:spcAft>
-                <a:spcPts val="0"/>
-              </a:spcAft>
-              <a:buClr>
-                <a:schemeClr val="dk2"/>
-              </a:buClr>
-              <a:buSzPts val="1100"/>
-              <a:buFont typeface="Roboto"/>
-              <a:buChar char="○"/>
-              <a:defRPr sz="1100" b="0" i="0" u="none" strike="noStrike" cap="none">
-                <a:solidFill>
-                  <a:schemeClr val="dk2"/>
-                </a:solidFill>
-                <a:latin typeface="Roboto"/>
-                <a:ea typeface="Roboto"/>
-                <a:cs typeface="Roboto"/>
-                <a:sym typeface="Roboto"/>
-              </a:defRPr>
-            </a:lvl5pPr>
-            <a:lvl6pPr marL="2743200" marR="0" lvl="5" indent="-298450" algn="l" rtl="0">
-              <a:lnSpc>
-                <a:spcPct val="115000"/>
-              </a:lnSpc>
-              <a:spcBef>
-                <a:spcPts val="1600"/>
-              </a:spcBef>
-              <a:spcAft>
-                <a:spcPts val="0"/>
-              </a:spcAft>
-              <a:buClr>
-                <a:schemeClr val="dk2"/>
-              </a:buClr>
-              <a:buSzPts val="1100"/>
-              <a:buFont typeface="Roboto"/>
-              <a:buChar char="■"/>
-              <a:defRPr sz="1100" b="0" i="0" u="none" strike="noStrike" cap="none">
-                <a:solidFill>
-                  <a:schemeClr val="dk2"/>
-                </a:solidFill>
-                <a:latin typeface="Roboto"/>
-                <a:ea typeface="Roboto"/>
-                <a:cs typeface="Roboto"/>
-                <a:sym typeface="Roboto"/>
-              </a:defRPr>
-            </a:lvl6pPr>
-            <a:lvl7pPr marL="3200400" marR="0" lvl="6" indent="-298450" algn="l" rtl="0">
-              <a:lnSpc>
-                <a:spcPct val="115000"/>
-              </a:lnSpc>
-              <a:spcBef>
-                <a:spcPts val="1600"/>
-              </a:spcBef>
-              <a:spcAft>
-                <a:spcPts val="0"/>
-              </a:spcAft>
-              <a:buClr>
-                <a:schemeClr val="dk2"/>
-              </a:buClr>
-              <a:buSzPts val="1100"/>
-              <a:buFont typeface="Roboto"/>
-              <a:buChar char="●"/>
-              <a:defRPr sz="1100" b="0" i="0" u="none" strike="noStrike" cap="none">
-                <a:solidFill>
-                  <a:schemeClr val="dk2"/>
-                </a:solidFill>
-                <a:latin typeface="Roboto"/>
-                <a:ea typeface="Roboto"/>
-                <a:cs typeface="Roboto"/>
-                <a:sym typeface="Roboto"/>
-              </a:defRPr>
-            </a:lvl7pPr>
-            <a:lvl8pPr marL="3657600" marR="0" lvl="7" indent="-298450" algn="l" rtl="0">
-              <a:lnSpc>
-                <a:spcPct val="115000"/>
-              </a:lnSpc>
-              <a:spcBef>
-                <a:spcPts val="1600"/>
-              </a:spcBef>
-              <a:spcAft>
-                <a:spcPts val="0"/>
-              </a:spcAft>
-              <a:buClr>
-                <a:schemeClr val="dk2"/>
-              </a:buClr>
-              <a:buSzPts val="1100"/>
-              <a:buFont typeface="Roboto"/>
-              <a:buChar char="○"/>
-              <a:defRPr sz="1100" b="0" i="0" u="none" strike="noStrike" cap="none">
-                <a:solidFill>
-                  <a:schemeClr val="dk2"/>
-                </a:solidFill>
-                <a:latin typeface="Roboto"/>
-                <a:ea typeface="Roboto"/>
-                <a:cs typeface="Roboto"/>
-                <a:sym typeface="Roboto"/>
-              </a:defRPr>
-            </a:lvl8pPr>
-            <a:lvl9pPr marL="4114800" marR="0" lvl="8" indent="-298450" algn="l" rtl="0">
-              <a:lnSpc>
-                <a:spcPct val="115000"/>
-              </a:lnSpc>
-              <a:spcBef>
-                <a:spcPts val="1600"/>
-              </a:spcBef>
-              <a:spcAft>
-                <a:spcPts val="1600"/>
-              </a:spcAft>
-              <a:buClr>
-                <a:schemeClr val="dk2"/>
-              </a:buClr>
-              <a:buSzPts val="1100"/>
-              <a:buFont typeface="Roboto"/>
-              <a:buChar char="■"/>
-              <a:defRPr sz="1100" b="0" i="0" u="none" strike="noStrike" cap="none">
-                <a:solidFill>
-                  <a:schemeClr val="dk2"/>
-                </a:solidFill>
-                <a:latin typeface="Roboto"/>
-                <a:ea typeface="Roboto"/>
-                <a:cs typeface="Roboto"/>
-                <a:sym typeface="Roboto"/>
-              </a:defRPr>
-            </a:lvl9pPr>
-          </a:lstStyle>
-          <a:p>
-            <a:r>
-              <a:rPr lang="en-US" sz="2000" dirty="0"/>
-              <a:t>Quiz 12.2 Queues</a:t>
-            </a:r>
-          </a:p>
-          <a:p>
-            <a:pPr marL="146050" indent="0">
-              <a:buNone/>
-            </a:pPr>
-            <a:r>
-              <a:rPr lang="en-US" sz="2000" dirty="0">
-                <a:solidFill>
-                  <a:schemeClr val="tx1"/>
-                </a:solidFill>
-              </a:rPr>
-              <a:t>Password - </a:t>
-            </a:r>
-            <a:r>
-              <a:rPr lang="en-US" sz="2000" dirty="0" err="1">
-                <a:solidFill>
-                  <a:schemeClr val="tx1"/>
-                </a:solidFill>
-              </a:rPr>
-              <a:t>queue_not_cue</a:t>
-            </a:r>
-            <a:endParaRPr lang="en-US" sz="2000" dirty="0">
-              <a:solidFill>
-                <a:schemeClr val="tx1"/>
-              </a:solidFill>
-            </a:endParaRPr>
-          </a:p>
-        </p:txBody>
-      </p:sp>
-    </p:spTree>
-    <p:extLst>
-      <p:ext uri="{BB962C8B-B14F-4D97-AF65-F5344CB8AC3E}">
-        <p14:creationId xmlns:p14="http://schemas.microsoft.com/office/powerpoint/2010/main" val="1835810010"/>
       </p:ext>
     </p:extLst>
   </p:cSld>

--- a/Presentation/Announcement.pptx
+++ b/Presentation/Announcement.pptx
@@ -7211,7 +7211,15 @@
             </a:pPr>
             <a:r>
               <a:rPr lang="en-US" sz="1800" dirty="0"/>
-              <a:t>Clone/Pull GitHub Classroom Assignment for Unit 12, if not done already.</a:t>
+              <a:t>Clone/Pull GitHub Classroom Assignment for </a:t>
+            </a:r>
+            <a:r>
+              <a:rPr lang="en-US" sz="1800"/>
+              <a:t>Unit 13, </a:t>
+            </a:r>
+            <a:r>
+              <a:rPr lang="en-US" sz="1800" dirty="0"/>
+              <a:t>if not done already.</a:t>
             </a:r>
           </a:p>
           <a:p>
@@ -8277,7 +8285,7 @@
             </a:r>
             <a:r>
               <a:rPr lang="en-US" sz="2400" dirty="0"/>
-              <a:t>11</a:t>
+              <a:t>12</a:t>
             </a:r>
             <a:r>
               <a:rPr lang="pl-PL" sz="2400" dirty="0"/>
@@ -8285,7 +8293,7 @@
             </a:r>
             <a:r>
               <a:rPr lang="en-US" sz="2400" dirty="0"/>
-              <a:t>2</a:t>
+              <a:t>3</a:t>
             </a:r>
             <a:r>
               <a:rPr lang="pl-PL" sz="2400" dirty="0"/>
@@ -8293,7 +8301,7 @@
             </a:r>
             <a:r>
               <a:rPr lang="en-US" sz="2400" dirty="0"/>
-              <a:t>Wait/Signal/Deadlock</a:t>
+              <a:t>Depth First Search</a:t>
             </a:r>
           </a:p>
           <a:p>
@@ -8306,7 +8314,7 @@
             </a:r>
             <a:r>
               <a:rPr lang="en-US" sz="2400" dirty="0" err="1"/>
-              <a:t>WaitingForDreadlocks</a:t>
+              <a:t>DepthPerception</a:t>
             </a:r>
             <a:endParaRPr sz="2400" dirty="0"/>
           </a:p>

--- a/Presentation/Announcement.pptx
+++ b/Presentation/Announcement.pptx
@@ -6753,7 +6753,7 @@
             </a:pPr>
             <a:r>
               <a:rPr lang="en-US" sz="2000" dirty="0"/>
-              <a:t>Take Quiz 11.3: Threads Review</a:t>
+              <a:t>Take Quiz 13.1: Greedy Algorithm</a:t>
             </a:r>
           </a:p>
           <a:p>
@@ -6774,7 +6774,7 @@
                   <a:schemeClr val="tx1"/>
                 </a:solidFill>
               </a:rPr>
-              <a:t>BewareTheThreadBear</a:t>
+              <a:t>PotOfGreedyAlgorithm</a:t>
             </a:r>
             <a:endParaRPr sz="2000" dirty="0">
               <a:solidFill>
@@ -7211,46 +7211,7 @@
             </a:pPr>
             <a:r>
               <a:rPr lang="en-US" sz="1800" dirty="0"/>
-              <a:t>Clone/Pull GitHub Classroom Assignment for </a:t>
-            </a:r>
-            <a:r>
-              <a:rPr lang="en-US" sz="1800"/>
-              <a:t>Unit 13, </a:t>
-            </a:r>
-            <a:r>
-              <a:rPr lang="en-US" sz="1800" dirty="0"/>
-              <a:t>if not done already.</a:t>
-            </a:r>
-          </a:p>
-          <a:p>
-            <a:pPr marL="342900" indent="-342900">
-              <a:spcAft>
-                <a:spcPts val="1600"/>
-              </a:spcAft>
-            </a:pPr>
-            <a:r>
-              <a:rPr lang="en-US" sz="1800" dirty="0">
-                <a:solidFill>
-                  <a:schemeClr val="tx1"/>
-                </a:solidFill>
-              </a:rPr>
-              <a:t>Download Day 01 for this unit code from </a:t>
-            </a:r>
-            <a:r>
-              <a:rPr lang="en-US" sz="1800" dirty="0" err="1">
-                <a:solidFill>
-                  <a:schemeClr val="tx1"/>
-                </a:solidFill>
-              </a:rPr>
-              <a:t>myCourses</a:t>
-            </a:r>
-            <a:r>
-              <a:rPr lang="en-US" sz="1800" dirty="0">
-                <a:solidFill>
-                  <a:schemeClr val="tx1"/>
-                </a:solidFill>
-              </a:rPr>
-              <a:t> if needed</a:t>
+              <a:t>Clone/Pull GitHub Classroom Assignment for Unit 13, if not done already.</a:t>
             </a:r>
           </a:p>
         </p:txBody>
@@ -7271,8 +7232,8 @@
         </p:nvSpPr>
         <p:spPr>
           <a:xfrm>
-            <a:off x="4303618" y="1844958"/>
-            <a:ext cx="4516998" cy="893015"/>
+            <a:off x="4705488" y="1844958"/>
+            <a:ext cx="4115127" cy="893015"/>
           </a:xfrm>
           <a:prstGeom prst="rect">
             <a:avLst/>
@@ -7534,9 +7495,12 @@
             </a:lvl9pPr>
           </a:lstStyle>
           <a:p>
+            <a:pPr marL="146050" indent="0">
+              <a:buNone/>
+            </a:pPr>
             <a:r>
               <a:rPr lang="en-US" sz="2000" dirty="0"/>
-              <a:t>Quiz 12.1 Graphs</a:t>
+              <a:t>Quiz 13.2 Dijkstra Algorithm</a:t>
             </a:r>
           </a:p>
           <a:p>
@@ -7557,7 +7521,7 @@
                   <a:schemeClr val="tx1"/>
                 </a:solidFill>
               </a:rPr>
-              <a:t>getConnected</a:t>
+              <a:t>cantSpellDijkstra</a:t>
             </a:r>
             <a:endParaRPr lang="en-US" sz="2000" dirty="0">
               <a:solidFill>

--- a/Presentation/Announcement.pptx
+++ b/Presentation/Announcement.pptx
@@ -8,8 +8,8 @@
     <p:notesMasterId r:id="rId15"/>
   </p:notesMasterIdLst>
   <p:sldIdLst>
-    <p:sldId id="287" r:id="rId2"/>
-    <p:sldId id="276" r:id="rId3"/>
+    <p:sldId id="276" r:id="rId2"/>
+    <p:sldId id="287" r:id="rId3"/>
     <p:sldId id="278" r:id="rId4"/>
     <p:sldId id="286" r:id="rId5"/>
     <p:sldId id="288" r:id="rId6"/>
@@ -740,13 +740,7 @@
   <p:cSld>
     <p:spTree>
       <p:nvGrpSpPr>
-        <p:cNvPr id="1" name="Shape 320">
-          <a:extLst>
-            <a:ext uri="{FF2B5EF4-FFF2-40B4-BE49-F238E27FC236}">
-              <a16:creationId xmlns:a16="http://schemas.microsoft.com/office/drawing/2014/main" id="{AF38A373-9ECB-533B-3DE6-D15673FB0A5D}"/>
-            </a:ext>
-          </a:extLst>
-        </p:cNvPr>
+        <p:cNvPr id="1" name="Shape 320"/>
         <p:cNvGrpSpPr/>
         <p:nvPr/>
       </p:nvGrpSpPr>
@@ -760,13 +754,7 @@
       </p:grpSpPr>
       <p:sp>
         <p:nvSpPr>
-          <p:cNvPr id="321" name="Google Shape;321;g8f52c9b70a_3_0:notes">
-            <a:extLst>
-              <a:ext uri="{FF2B5EF4-FFF2-40B4-BE49-F238E27FC236}">
-                <a16:creationId xmlns:a16="http://schemas.microsoft.com/office/drawing/2014/main" id="{E31AA3A3-F4DD-22BC-FF74-3E11975D4EE6}"/>
-              </a:ext>
-            </a:extLst>
-          </p:cNvPr>
+          <p:cNvPr id="321" name="Google Shape;321;g8f52c9b70a_3_0:notes"/>
           <p:cNvSpPr>
             <a:spLocks noGrp="1" noRot="1" noChangeAspect="1"/>
           </p:cNvSpPr>
@@ -807,13 +795,7 @@
       </p:sp>
       <p:sp>
         <p:nvSpPr>
-          <p:cNvPr id="322" name="Google Shape;322;g8f52c9b70a_3_0:notes">
-            <a:extLst>
-              <a:ext uri="{FF2B5EF4-FFF2-40B4-BE49-F238E27FC236}">
-                <a16:creationId xmlns:a16="http://schemas.microsoft.com/office/drawing/2014/main" id="{E134EAC7-0101-665A-63A7-A233E5D3458C}"/>
-              </a:ext>
-            </a:extLst>
-          </p:cNvPr>
+          <p:cNvPr id="322" name="Google Shape;322;g8f52c9b70a_3_0:notes"/>
           <p:cNvSpPr txBox="1">
             <a:spLocks noGrp="1"/>
           </p:cNvSpPr>
@@ -844,11 +826,6 @@
         </p:txBody>
       </p:sp>
     </p:spTree>
-    <p:extLst>
-      <p:ext uri="{BB962C8B-B14F-4D97-AF65-F5344CB8AC3E}">
-        <p14:creationId xmlns:p14="http://schemas.microsoft.com/office/powerpoint/2010/main" val="1738943008"/>
-      </p:ext>
-    </p:extLst>
   </p:cSld>
   <p:clrMapOvr>
     <a:masterClrMapping/>
@@ -1273,7 +1250,13 @@
   <p:cSld>
     <p:spTree>
       <p:nvGrpSpPr>
-        <p:cNvPr id="1" name="Shape 320"/>
+        <p:cNvPr id="1" name="Shape 320">
+          <a:extLst>
+            <a:ext uri="{FF2B5EF4-FFF2-40B4-BE49-F238E27FC236}">
+              <a16:creationId xmlns:a16="http://schemas.microsoft.com/office/drawing/2014/main" id="{AF38A373-9ECB-533B-3DE6-D15673FB0A5D}"/>
+            </a:ext>
+          </a:extLst>
+        </p:cNvPr>
         <p:cNvGrpSpPr/>
         <p:nvPr/>
       </p:nvGrpSpPr>
@@ -1287,7 +1270,13 @@
       </p:grpSpPr>
       <p:sp>
         <p:nvSpPr>
-          <p:cNvPr id="321" name="Google Shape;321;g8f52c9b70a_3_0:notes"/>
+          <p:cNvPr id="321" name="Google Shape;321;g8f52c9b70a_3_0:notes">
+            <a:extLst>
+              <a:ext uri="{FF2B5EF4-FFF2-40B4-BE49-F238E27FC236}">
+                <a16:creationId xmlns:a16="http://schemas.microsoft.com/office/drawing/2014/main" id="{E31AA3A3-F4DD-22BC-FF74-3E11975D4EE6}"/>
+              </a:ext>
+            </a:extLst>
+          </p:cNvPr>
           <p:cNvSpPr>
             <a:spLocks noGrp="1" noRot="1" noChangeAspect="1"/>
           </p:cNvSpPr>
@@ -1328,7 +1317,13 @@
       </p:sp>
       <p:sp>
         <p:nvSpPr>
-          <p:cNvPr id="322" name="Google Shape;322;g8f52c9b70a_3_0:notes"/>
+          <p:cNvPr id="322" name="Google Shape;322;g8f52c9b70a_3_0:notes">
+            <a:extLst>
+              <a:ext uri="{FF2B5EF4-FFF2-40B4-BE49-F238E27FC236}">
+                <a16:creationId xmlns:a16="http://schemas.microsoft.com/office/drawing/2014/main" id="{E134EAC7-0101-665A-63A7-A233E5D3458C}"/>
+              </a:ext>
+            </a:extLst>
+          </p:cNvPr>
           <p:cNvSpPr txBox="1">
             <a:spLocks noGrp="1"/>
           </p:cNvSpPr>
@@ -1359,6 +1354,11 @@
         </p:txBody>
       </p:sp>
     </p:spTree>
+    <p:extLst>
+      <p:ext uri="{BB962C8B-B14F-4D97-AF65-F5344CB8AC3E}">
+        <p14:creationId xmlns:p14="http://schemas.microsoft.com/office/powerpoint/2010/main" val="1738943008"/>
+      </p:ext>
+    </p:extLst>
   </p:cSld>
   <p:clrMapOvr>
     <a:masterClrMapping/>
@@ -6651,6 +6651,1189 @@
   <p:cSld>
     <p:spTree>
       <p:nvGrpSpPr>
+        <p:cNvPr id="1" name="Shape 323"/>
+        <p:cNvGrpSpPr/>
+        <p:nvPr/>
+      </p:nvGrpSpPr>
+      <p:grpSpPr>
+        <a:xfrm>
+          <a:off x="0" y="0"/>
+          <a:ext cx="0" cy="0"/>
+          <a:chOff x="0" y="0"/>
+          <a:chExt cx="0" cy="0"/>
+        </a:xfrm>
+      </p:grpSpPr>
+      <p:sp>
+        <p:nvSpPr>
+          <p:cNvPr id="324" name="Google Shape;324;p47"/>
+          <p:cNvSpPr txBox="1">
+            <a:spLocks noGrp="1"/>
+          </p:cNvSpPr>
+          <p:nvPr>
+            <p:ph type="title"/>
+          </p:nvPr>
+        </p:nvSpPr>
+        <p:spPr>
+          <a:xfrm>
+            <a:off x="305858" y="273819"/>
+            <a:ext cx="8520600" cy="623700"/>
+          </a:xfrm>
+          <a:prstGeom prst="rect">
+            <a:avLst/>
+          </a:prstGeom>
+        </p:spPr>
+        <p:txBody>
+          <a:bodyPr spcFirstLastPara="1" wrap="square" lIns="91425" tIns="91425" rIns="91425" bIns="91425" anchor="t" anchorCtr="0">
+            <a:noAutofit/>
+          </a:bodyPr>
+          <a:lstStyle/>
+          <a:p>
+            <a:pPr marL="0" lvl="0" indent="0" algn="ctr" rtl="0">
+              <a:spcBef>
+                <a:spcPts val="0"/>
+              </a:spcBef>
+              <a:spcAft>
+                <a:spcPts val="0"/>
+              </a:spcAft>
+              <a:buNone/>
+            </a:pPr>
+            <a:r>
+              <a:rPr lang="en-US" dirty="0"/>
+              <a:t>GCIS – Software Development and Problem Solving</a:t>
+            </a:r>
+            <a:endParaRPr dirty="0"/>
+          </a:p>
+        </p:txBody>
+      </p:sp>
+      <p:sp>
+        <p:nvSpPr>
+          <p:cNvPr id="325" name="Google Shape;325;p47"/>
+          <p:cNvSpPr txBox="1">
+            <a:spLocks noGrp="1"/>
+          </p:cNvSpPr>
+          <p:nvPr>
+            <p:ph type="body" idx="1"/>
+          </p:nvPr>
+        </p:nvSpPr>
+        <p:spPr>
+          <a:xfrm>
+            <a:off x="-5842" y="1721147"/>
+            <a:ext cx="9149842" cy="1226403"/>
+          </a:xfrm>
+          <a:prstGeom prst="rect">
+            <a:avLst/>
+          </a:prstGeom>
+        </p:spPr>
+        <p:txBody>
+          <a:bodyPr spcFirstLastPara="1" wrap="square" lIns="91425" tIns="91425" rIns="91425" bIns="91425" anchor="ctr" anchorCtr="0">
+            <a:noAutofit/>
+          </a:bodyPr>
+          <a:lstStyle/>
+          <a:p>
+            <a:pPr marL="146050" indent="0" algn="ctr">
+              <a:buNone/>
+            </a:pPr>
+            <a:r>
+              <a:rPr lang="en-US" sz="2400" dirty="0"/>
+              <a:t>Take </a:t>
+            </a:r>
+            <a:r>
+              <a:rPr lang="pl-PL" sz="2400" dirty="0"/>
+              <a:t>Quiz </a:t>
+            </a:r>
+            <a:r>
+              <a:rPr lang="en-US" sz="2400" dirty="0"/>
+              <a:t>13</a:t>
+            </a:r>
+            <a:r>
+              <a:rPr lang="pl-PL" sz="2400" dirty="0"/>
+              <a:t>.</a:t>
+            </a:r>
+            <a:r>
+              <a:rPr lang="en-US" sz="2400" dirty="0"/>
+              <a:t>3</a:t>
+            </a:r>
+            <a:r>
+              <a:rPr lang="pl-PL" sz="2400" dirty="0"/>
+              <a:t>:</a:t>
+            </a:r>
+            <a:r>
+              <a:rPr lang="en-US" sz="2400" dirty="0"/>
+              <a:t> </a:t>
+            </a:r>
+            <a:r>
+              <a:rPr lang="en-US" sz="2400" dirty="0" err="1"/>
+              <a:t>BackTracking</a:t>
+            </a:r>
+            <a:endParaRPr lang="en-US" sz="2400" dirty="0"/>
+          </a:p>
+          <a:p>
+            <a:pPr marL="146050" indent="0" algn="ctr">
+              <a:buNone/>
+            </a:pPr>
+            <a:r>
+              <a:rPr lang="en-US" sz="2400" dirty="0"/>
+              <a:t>Password - </a:t>
+            </a:r>
+            <a:r>
+              <a:rPr lang="en-US" sz="2400" dirty="0" err="1"/>
+              <a:t>backTotheFuture</a:t>
+            </a:r>
+            <a:r>
+              <a:rPr lang="en-US" sz="2400"/>
+              <a:t>!!</a:t>
+            </a:r>
+            <a:endParaRPr sz="2400" dirty="0"/>
+          </a:p>
+        </p:txBody>
+      </p:sp>
+      <p:sp>
+        <p:nvSpPr>
+          <p:cNvPr id="326" name="Google Shape;326;p47"/>
+          <p:cNvSpPr txBox="1">
+            <a:spLocks noGrp="1"/>
+          </p:cNvSpPr>
+          <p:nvPr>
+            <p:ph type="sldNum" idx="12"/>
+          </p:nvPr>
+        </p:nvSpPr>
+        <p:spPr>
+          <a:xfrm>
+            <a:off x="8472458" y="4663217"/>
+            <a:ext cx="548700" cy="393600"/>
+          </a:xfrm>
+          <a:prstGeom prst="rect">
+            <a:avLst/>
+          </a:prstGeom>
+        </p:spPr>
+        <p:txBody>
+          <a:bodyPr spcFirstLastPara="1" wrap="square" lIns="91425" tIns="91425" rIns="91425" bIns="91425" anchor="ctr" anchorCtr="0">
+            <a:noAutofit/>
+          </a:bodyPr>
+          <a:lstStyle/>
+          <a:p>
+            <a:pPr marL="0" lvl="0" indent="0" algn="r" rtl="0">
+              <a:spcBef>
+                <a:spcPts val="0"/>
+              </a:spcBef>
+              <a:spcAft>
+                <a:spcPts val="0"/>
+              </a:spcAft>
+              <a:buNone/>
+            </a:pPr>
+            <a:fld id="{00000000-1234-1234-1234-123412341234}" type="slidenum">
+              <a:rPr lang="en"/>
+              <a:t>1</a:t>
+            </a:fld>
+            <a:endParaRPr/>
+          </a:p>
+        </p:txBody>
+      </p:sp>
+      <p:sp>
+        <p:nvSpPr>
+          <p:cNvPr id="2" name="TextBox 1">
+            <a:extLst>
+              <a:ext uri="{FF2B5EF4-FFF2-40B4-BE49-F238E27FC236}">
+                <a16:creationId xmlns:a16="http://schemas.microsoft.com/office/drawing/2014/main" id="{DCC33EBB-1C9D-B9A9-88E6-F3466077417F}"/>
+              </a:ext>
+            </a:extLst>
+          </p:cNvPr>
+          <p:cNvSpPr txBox="1"/>
+          <p:nvPr/>
+        </p:nvSpPr>
+        <p:spPr>
+          <a:xfrm>
+            <a:off x="0" y="1277369"/>
+            <a:ext cx="9144000" cy="307777"/>
+          </a:xfrm>
+          <a:prstGeom prst="rect">
+            <a:avLst/>
+          </a:prstGeom>
+          <a:solidFill>
+            <a:srgbClr val="FFC000"/>
+          </a:solidFill>
+        </p:spPr>
+        <p:txBody>
+          <a:bodyPr wrap="square" rtlCol="0">
+            <a:spAutoFit/>
+          </a:bodyPr>
+          <a:lstStyle/>
+          <a:p>
+            <a:r>
+              <a:rPr lang="en-US" dirty="0"/>
+              <a:t>Quiz</a:t>
+            </a:r>
+          </a:p>
+        </p:txBody>
+      </p:sp>
+      <p:sp>
+        <p:nvSpPr>
+          <p:cNvPr id="3" name="TextBox 2">
+            <a:extLst>
+              <a:ext uri="{FF2B5EF4-FFF2-40B4-BE49-F238E27FC236}">
+                <a16:creationId xmlns:a16="http://schemas.microsoft.com/office/drawing/2014/main" id="{64C19922-6A1B-1404-5104-DC43E4C67861}"/>
+              </a:ext>
+            </a:extLst>
+          </p:cNvPr>
+          <p:cNvSpPr txBox="1"/>
+          <p:nvPr/>
+        </p:nvSpPr>
+        <p:spPr>
+          <a:xfrm>
+            <a:off x="-5842" y="3031063"/>
+            <a:ext cx="9144000" cy="307777"/>
+          </a:xfrm>
+          <a:prstGeom prst="rect">
+            <a:avLst/>
+          </a:prstGeom>
+          <a:solidFill>
+            <a:srgbClr val="FFC000"/>
+          </a:solidFill>
+        </p:spPr>
+        <p:txBody>
+          <a:bodyPr wrap="square" rtlCol="0">
+            <a:spAutoFit/>
+          </a:bodyPr>
+          <a:lstStyle/>
+          <a:p>
+            <a:r>
+              <a:rPr lang="en-US" dirty="0"/>
+              <a:t>Next </a:t>
+            </a:r>
+            <a:r>
+              <a:rPr lang="en-US" dirty="0">
+                <a:sym typeface="Wingdings" panose="05000000000000000000" pitchFamily="2" charset="2"/>
+              </a:rPr>
+              <a:t> </a:t>
+            </a:r>
+            <a:endParaRPr lang="en-US" dirty="0"/>
+          </a:p>
+        </p:txBody>
+      </p:sp>
+      <p:sp>
+        <p:nvSpPr>
+          <p:cNvPr id="4" name="Google Shape;325;p47">
+            <a:extLst>
+              <a:ext uri="{FF2B5EF4-FFF2-40B4-BE49-F238E27FC236}">
+                <a16:creationId xmlns:a16="http://schemas.microsoft.com/office/drawing/2014/main" id="{E455EA58-F56D-AF58-E97D-95A77E0AB6CF}"/>
+              </a:ext>
+            </a:extLst>
+          </p:cNvPr>
+          <p:cNvSpPr txBox="1">
+            <a:spLocks/>
+          </p:cNvSpPr>
+          <p:nvPr/>
+        </p:nvSpPr>
+        <p:spPr>
+          <a:xfrm>
+            <a:off x="-5842" y="3422352"/>
+            <a:ext cx="9149842" cy="1721148"/>
+          </a:xfrm>
+          <a:prstGeom prst="rect">
+            <a:avLst/>
+          </a:prstGeom>
+          <a:noFill/>
+          <a:ln>
+            <a:noFill/>
+          </a:ln>
+        </p:spPr>
+        <p:txBody>
+          <a:bodyPr spcFirstLastPara="1" wrap="square" lIns="91425" tIns="91425" rIns="91425" bIns="91425" anchor="ctr" anchorCtr="0">
+            <a:noAutofit/>
+          </a:bodyPr>
+          <a:lstStyle>
+            <a:defPPr marR="0" lvl="0" algn="l" rtl="0">
+              <a:lnSpc>
+                <a:spcPct val="100000"/>
+              </a:lnSpc>
+              <a:spcBef>
+                <a:spcPts val="0"/>
+              </a:spcBef>
+              <a:spcAft>
+                <a:spcPts val="0"/>
+              </a:spcAft>
+            </a:defPPr>
+            <a:lvl1pPr marL="457200" marR="0" lvl="0" indent="-311150" algn="l" rtl="0">
+              <a:lnSpc>
+                <a:spcPct val="115000"/>
+              </a:lnSpc>
+              <a:spcBef>
+                <a:spcPts val="0"/>
+              </a:spcBef>
+              <a:spcAft>
+                <a:spcPts val="0"/>
+              </a:spcAft>
+              <a:buClr>
+                <a:schemeClr val="dk2"/>
+              </a:buClr>
+              <a:buSzPts val="1300"/>
+              <a:buFont typeface="Roboto"/>
+              <a:buChar char="●"/>
+              <a:defRPr sz="1300" b="0" i="0" u="none" strike="noStrike" cap="none">
+                <a:solidFill>
+                  <a:schemeClr val="dk2"/>
+                </a:solidFill>
+                <a:latin typeface="Roboto"/>
+                <a:ea typeface="Roboto"/>
+                <a:cs typeface="Roboto"/>
+                <a:sym typeface="Roboto"/>
+              </a:defRPr>
+            </a:lvl1pPr>
+            <a:lvl2pPr marL="914400" marR="0" lvl="1" indent="-298450" algn="l" rtl="0">
+              <a:lnSpc>
+                <a:spcPct val="115000"/>
+              </a:lnSpc>
+              <a:spcBef>
+                <a:spcPts val="1600"/>
+              </a:spcBef>
+              <a:spcAft>
+                <a:spcPts val="0"/>
+              </a:spcAft>
+              <a:buClr>
+                <a:schemeClr val="dk2"/>
+              </a:buClr>
+              <a:buSzPts val="1100"/>
+              <a:buFont typeface="Roboto"/>
+              <a:buChar char="○"/>
+              <a:defRPr sz="1100" b="0" i="0" u="none" strike="noStrike" cap="none">
+                <a:solidFill>
+                  <a:schemeClr val="dk2"/>
+                </a:solidFill>
+                <a:latin typeface="Roboto"/>
+                <a:ea typeface="Roboto"/>
+                <a:cs typeface="Roboto"/>
+                <a:sym typeface="Roboto"/>
+              </a:defRPr>
+            </a:lvl2pPr>
+            <a:lvl3pPr marL="1371600" marR="0" lvl="2" indent="-298450" algn="l" rtl="0">
+              <a:lnSpc>
+                <a:spcPct val="115000"/>
+              </a:lnSpc>
+              <a:spcBef>
+                <a:spcPts val="1600"/>
+              </a:spcBef>
+              <a:spcAft>
+                <a:spcPts val="0"/>
+              </a:spcAft>
+              <a:buClr>
+                <a:schemeClr val="dk2"/>
+              </a:buClr>
+              <a:buSzPts val="1100"/>
+              <a:buFont typeface="Roboto"/>
+              <a:buChar char="■"/>
+              <a:defRPr sz="1100" b="0" i="0" u="none" strike="noStrike" cap="none">
+                <a:solidFill>
+                  <a:schemeClr val="dk2"/>
+                </a:solidFill>
+                <a:latin typeface="Roboto"/>
+                <a:ea typeface="Roboto"/>
+                <a:cs typeface="Roboto"/>
+                <a:sym typeface="Roboto"/>
+              </a:defRPr>
+            </a:lvl3pPr>
+            <a:lvl4pPr marL="1828800" marR="0" lvl="3" indent="-298450" algn="l" rtl="0">
+              <a:lnSpc>
+                <a:spcPct val="115000"/>
+              </a:lnSpc>
+              <a:spcBef>
+                <a:spcPts val="1600"/>
+              </a:spcBef>
+              <a:spcAft>
+                <a:spcPts val="0"/>
+              </a:spcAft>
+              <a:buClr>
+                <a:schemeClr val="dk2"/>
+              </a:buClr>
+              <a:buSzPts val="1100"/>
+              <a:buFont typeface="Roboto"/>
+              <a:buChar char="●"/>
+              <a:defRPr sz="1100" b="0" i="0" u="none" strike="noStrike" cap="none">
+                <a:solidFill>
+                  <a:schemeClr val="dk2"/>
+                </a:solidFill>
+                <a:latin typeface="Roboto"/>
+                <a:ea typeface="Roboto"/>
+                <a:cs typeface="Roboto"/>
+                <a:sym typeface="Roboto"/>
+              </a:defRPr>
+            </a:lvl4pPr>
+            <a:lvl5pPr marL="2286000" marR="0" lvl="4" indent="-298450" algn="l" rtl="0">
+              <a:lnSpc>
+                <a:spcPct val="115000"/>
+              </a:lnSpc>
+              <a:spcBef>
+                <a:spcPts val="1600"/>
+              </a:spcBef>
+              <a:spcAft>
+                <a:spcPts val="0"/>
+              </a:spcAft>
+              <a:buClr>
+                <a:schemeClr val="dk2"/>
+              </a:buClr>
+              <a:buSzPts val="1100"/>
+              <a:buFont typeface="Roboto"/>
+              <a:buChar char="○"/>
+              <a:defRPr sz="1100" b="0" i="0" u="none" strike="noStrike" cap="none">
+                <a:solidFill>
+                  <a:schemeClr val="dk2"/>
+                </a:solidFill>
+                <a:latin typeface="Roboto"/>
+                <a:ea typeface="Roboto"/>
+                <a:cs typeface="Roboto"/>
+                <a:sym typeface="Roboto"/>
+              </a:defRPr>
+            </a:lvl5pPr>
+            <a:lvl6pPr marL="2743200" marR="0" lvl="5" indent="-298450" algn="l" rtl="0">
+              <a:lnSpc>
+                <a:spcPct val="115000"/>
+              </a:lnSpc>
+              <a:spcBef>
+                <a:spcPts val="1600"/>
+              </a:spcBef>
+              <a:spcAft>
+                <a:spcPts val="0"/>
+              </a:spcAft>
+              <a:buClr>
+                <a:schemeClr val="dk2"/>
+              </a:buClr>
+              <a:buSzPts val="1100"/>
+              <a:buFont typeface="Roboto"/>
+              <a:buChar char="■"/>
+              <a:defRPr sz="1100" b="0" i="0" u="none" strike="noStrike" cap="none">
+                <a:solidFill>
+                  <a:schemeClr val="dk2"/>
+                </a:solidFill>
+                <a:latin typeface="Roboto"/>
+                <a:ea typeface="Roboto"/>
+                <a:cs typeface="Roboto"/>
+                <a:sym typeface="Roboto"/>
+              </a:defRPr>
+            </a:lvl6pPr>
+            <a:lvl7pPr marL="3200400" marR="0" lvl="6" indent="-298450" algn="l" rtl="0">
+              <a:lnSpc>
+                <a:spcPct val="115000"/>
+              </a:lnSpc>
+              <a:spcBef>
+                <a:spcPts val="1600"/>
+              </a:spcBef>
+              <a:spcAft>
+                <a:spcPts val="0"/>
+              </a:spcAft>
+              <a:buClr>
+                <a:schemeClr val="dk2"/>
+              </a:buClr>
+              <a:buSzPts val="1100"/>
+              <a:buFont typeface="Roboto"/>
+              <a:buChar char="●"/>
+              <a:defRPr sz="1100" b="0" i="0" u="none" strike="noStrike" cap="none">
+                <a:solidFill>
+                  <a:schemeClr val="dk2"/>
+                </a:solidFill>
+                <a:latin typeface="Roboto"/>
+                <a:ea typeface="Roboto"/>
+                <a:cs typeface="Roboto"/>
+                <a:sym typeface="Roboto"/>
+              </a:defRPr>
+            </a:lvl7pPr>
+            <a:lvl8pPr marL="3657600" marR="0" lvl="7" indent="-298450" algn="l" rtl="0">
+              <a:lnSpc>
+                <a:spcPct val="115000"/>
+              </a:lnSpc>
+              <a:spcBef>
+                <a:spcPts val="1600"/>
+              </a:spcBef>
+              <a:spcAft>
+                <a:spcPts val="0"/>
+              </a:spcAft>
+              <a:buClr>
+                <a:schemeClr val="dk2"/>
+              </a:buClr>
+              <a:buSzPts val="1100"/>
+              <a:buFont typeface="Roboto"/>
+              <a:buChar char="○"/>
+              <a:defRPr sz="1100" b="0" i="0" u="none" strike="noStrike" cap="none">
+                <a:solidFill>
+                  <a:schemeClr val="dk2"/>
+                </a:solidFill>
+                <a:latin typeface="Roboto"/>
+                <a:ea typeface="Roboto"/>
+                <a:cs typeface="Roboto"/>
+                <a:sym typeface="Roboto"/>
+              </a:defRPr>
+            </a:lvl8pPr>
+            <a:lvl9pPr marL="4114800" marR="0" lvl="8" indent="-298450" algn="l" rtl="0">
+              <a:lnSpc>
+                <a:spcPct val="115000"/>
+              </a:lnSpc>
+              <a:spcBef>
+                <a:spcPts val="1600"/>
+              </a:spcBef>
+              <a:spcAft>
+                <a:spcPts val="1600"/>
+              </a:spcAft>
+              <a:buClr>
+                <a:schemeClr val="dk2"/>
+              </a:buClr>
+              <a:buSzPts val="1100"/>
+              <a:buFont typeface="Roboto"/>
+              <a:buChar char="■"/>
+              <a:defRPr sz="1100" b="0" i="0" u="none" strike="noStrike" cap="none">
+                <a:solidFill>
+                  <a:schemeClr val="dk2"/>
+                </a:solidFill>
+                <a:latin typeface="Roboto"/>
+                <a:ea typeface="Roboto"/>
+                <a:cs typeface="Roboto"/>
+                <a:sym typeface="Roboto"/>
+              </a:defRPr>
+            </a:lvl9pPr>
+          </a:lstStyle>
+          <a:p>
+            <a:pPr marL="0" indent="0">
+              <a:spcAft>
+                <a:spcPts val="1600"/>
+              </a:spcAft>
+              <a:buNone/>
+            </a:pPr>
+            <a:r>
+              <a:rPr lang="en-US" sz="2800" dirty="0"/>
+              <a:t>After completing the Quiz </a:t>
+            </a:r>
+          </a:p>
+          <a:p>
+            <a:pPr marL="342900" indent="-342900">
+              <a:spcAft>
+                <a:spcPts val="1600"/>
+              </a:spcAft>
+            </a:pPr>
+            <a:r>
+              <a:rPr lang="en-US" sz="2400" dirty="0"/>
+              <a:t>Clone/Pull Unit12 – git hub classroom repo for class activities</a:t>
+            </a:r>
+          </a:p>
+        </p:txBody>
+      </p:sp>
+    </p:spTree>
+  </p:cSld>
+  <p:clrMapOvr>
+    <a:masterClrMapping/>
+  </p:clrMapOvr>
+</p:sld>
+</file>
+
+<file path=ppt/slides/slide10.xml><?xml version="1.0" encoding="utf-8"?>
+<p:sld xmlns:a="http://schemas.openxmlformats.org/drawingml/2006/main" xmlns:r="http://schemas.openxmlformats.org/officeDocument/2006/relationships" xmlns:p="http://schemas.openxmlformats.org/presentationml/2006/main" show="0">
+  <p:cSld>
+    <p:spTree>
+      <p:nvGrpSpPr>
+        <p:cNvPr id="1" name="Shape 323"/>
+        <p:cNvGrpSpPr/>
+        <p:nvPr/>
+      </p:nvGrpSpPr>
+      <p:grpSpPr>
+        <a:xfrm>
+          <a:off x="0" y="0"/>
+          <a:ext cx="0" cy="0"/>
+          <a:chOff x="0" y="0"/>
+          <a:chExt cx="0" cy="0"/>
+        </a:xfrm>
+      </p:grpSpPr>
+      <p:sp>
+        <p:nvSpPr>
+          <p:cNvPr id="324" name="Google Shape;324;p47"/>
+          <p:cNvSpPr txBox="1">
+            <a:spLocks noGrp="1"/>
+          </p:cNvSpPr>
+          <p:nvPr>
+            <p:ph type="title"/>
+          </p:nvPr>
+        </p:nvSpPr>
+        <p:spPr>
+          <a:xfrm>
+            <a:off x="226208" y="1"/>
+            <a:ext cx="8520600" cy="464980"/>
+          </a:xfrm>
+          <a:prstGeom prst="rect">
+            <a:avLst/>
+          </a:prstGeom>
+        </p:spPr>
+        <p:txBody>
+          <a:bodyPr spcFirstLastPara="1" wrap="square" lIns="91425" tIns="91425" rIns="91425" bIns="91425" anchor="t" anchorCtr="0">
+            <a:noAutofit/>
+          </a:bodyPr>
+          <a:lstStyle/>
+          <a:p>
+            <a:pPr marL="0" lvl="0" indent="0" algn="ctr" rtl="0">
+              <a:spcBef>
+                <a:spcPts val="0"/>
+              </a:spcBef>
+              <a:spcAft>
+                <a:spcPts val="0"/>
+              </a:spcAft>
+              <a:buNone/>
+            </a:pPr>
+            <a:r>
+              <a:rPr lang="en-US" dirty="0"/>
+              <a:t>Use </a:t>
+            </a:r>
+            <a:r>
+              <a:rPr lang="en-US" sz="2400" dirty="0"/>
+              <a:t>Assigned</a:t>
+            </a:r>
+            <a:r>
+              <a:rPr lang="en-US" dirty="0"/>
+              <a:t> Seat</a:t>
+            </a:r>
+            <a:endParaRPr dirty="0"/>
+          </a:p>
+        </p:txBody>
+      </p:sp>
+      <p:sp>
+        <p:nvSpPr>
+          <p:cNvPr id="326" name="Google Shape;326;p47"/>
+          <p:cNvSpPr txBox="1">
+            <a:spLocks noGrp="1"/>
+          </p:cNvSpPr>
+          <p:nvPr>
+            <p:ph type="sldNum" idx="12"/>
+          </p:nvPr>
+        </p:nvSpPr>
+        <p:spPr>
+          <a:xfrm>
+            <a:off x="8472458" y="4663217"/>
+            <a:ext cx="548700" cy="393600"/>
+          </a:xfrm>
+          <a:prstGeom prst="rect">
+            <a:avLst/>
+          </a:prstGeom>
+        </p:spPr>
+        <p:txBody>
+          <a:bodyPr spcFirstLastPara="1" wrap="square" lIns="91425" tIns="91425" rIns="91425" bIns="91425" anchor="ctr" anchorCtr="0">
+            <a:noAutofit/>
+          </a:bodyPr>
+          <a:lstStyle/>
+          <a:p>
+            <a:pPr marL="0" lvl="0" indent="0" algn="r" rtl="0">
+              <a:spcBef>
+                <a:spcPts val="0"/>
+              </a:spcBef>
+              <a:spcAft>
+                <a:spcPts val="0"/>
+              </a:spcAft>
+              <a:buNone/>
+            </a:pPr>
+            <a:fld id="{00000000-1234-1234-1234-123412341234}" type="slidenum">
+              <a:rPr lang="en"/>
+              <a:t>10</a:t>
+            </a:fld>
+            <a:endParaRPr/>
+          </a:p>
+        </p:txBody>
+      </p:sp>
+      <p:pic>
+        <p:nvPicPr>
+          <p:cNvPr id="3" name="Picture 2">
+            <a:extLst>
+              <a:ext uri="{FF2B5EF4-FFF2-40B4-BE49-F238E27FC236}">
+                <a16:creationId xmlns:a16="http://schemas.microsoft.com/office/drawing/2014/main" id="{565A4964-E8A9-A46D-F4BE-E7D41C14EF1B}"/>
+              </a:ext>
+            </a:extLst>
+          </p:cNvPr>
+          <p:cNvPicPr>
+            <a:picLocks noChangeAspect="1"/>
+          </p:cNvPicPr>
+          <p:nvPr/>
+        </p:nvPicPr>
+        <p:blipFill>
+          <a:blip r:embed="rId3"/>
+          <a:stretch>
+            <a:fillRect/>
+          </a:stretch>
+        </p:blipFill>
+        <p:spPr>
+          <a:xfrm>
+            <a:off x="0" y="559220"/>
+            <a:ext cx="9144000" cy="4471763"/>
+          </a:xfrm>
+          <a:prstGeom prst="rect">
+            <a:avLst/>
+          </a:prstGeom>
+        </p:spPr>
+      </p:pic>
+    </p:spTree>
+    <p:extLst>
+      <p:ext uri="{BB962C8B-B14F-4D97-AF65-F5344CB8AC3E}">
+        <p14:creationId xmlns:p14="http://schemas.microsoft.com/office/powerpoint/2010/main" val="2495509868"/>
+      </p:ext>
+    </p:extLst>
+  </p:cSld>
+  <p:clrMapOvr>
+    <a:masterClrMapping/>
+  </p:clrMapOvr>
+</p:sld>
+</file>
+
+<file path=ppt/slides/slide11.xml><?xml version="1.0" encoding="utf-8"?>
+<p:sld xmlns:a="http://schemas.openxmlformats.org/drawingml/2006/main" xmlns:r="http://schemas.openxmlformats.org/officeDocument/2006/relationships" xmlns:p="http://schemas.openxmlformats.org/presentationml/2006/main" show="0">
+  <p:cSld>
+    <p:spTree>
+      <p:nvGrpSpPr>
+        <p:cNvPr id="1" name="Shape 323"/>
+        <p:cNvGrpSpPr/>
+        <p:nvPr/>
+      </p:nvGrpSpPr>
+      <p:grpSpPr>
+        <a:xfrm>
+          <a:off x="0" y="0"/>
+          <a:ext cx="0" cy="0"/>
+          <a:chOff x="0" y="0"/>
+          <a:chExt cx="0" cy="0"/>
+        </a:xfrm>
+      </p:grpSpPr>
+      <p:sp>
+        <p:nvSpPr>
+          <p:cNvPr id="324" name="Google Shape;324;p47"/>
+          <p:cNvSpPr txBox="1">
+            <a:spLocks noGrp="1"/>
+          </p:cNvSpPr>
+          <p:nvPr>
+            <p:ph type="title"/>
+          </p:nvPr>
+        </p:nvSpPr>
+        <p:spPr>
+          <a:xfrm>
+            <a:off x="226208" y="1"/>
+            <a:ext cx="8520600" cy="464980"/>
+          </a:xfrm>
+          <a:prstGeom prst="rect">
+            <a:avLst/>
+          </a:prstGeom>
+        </p:spPr>
+        <p:txBody>
+          <a:bodyPr spcFirstLastPara="1" wrap="square" lIns="91425" tIns="91425" rIns="91425" bIns="91425" anchor="t" anchorCtr="0">
+            <a:noAutofit/>
+          </a:bodyPr>
+          <a:lstStyle/>
+          <a:p>
+            <a:pPr marL="0" lvl="0" indent="0" algn="ctr" rtl="0">
+              <a:spcBef>
+                <a:spcPts val="0"/>
+              </a:spcBef>
+              <a:spcAft>
+                <a:spcPts val="0"/>
+              </a:spcAft>
+              <a:buNone/>
+            </a:pPr>
+            <a:r>
+              <a:rPr lang="en-US" dirty="0"/>
+              <a:t>Use </a:t>
+            </a:r>
+            <a:r>
+              <a:rPr lang="en-US" sz="2400" dirty="0"/>
+              <a:t>Assigned</a:t>
+            </a:r>
+            <a:r>
+              <a:rPr lang="en-US" dirty="0"/>
+              <a:t> Seat</a:t>
+            </a:r>
+            <a:endParaRPr dirty="0"/>
+          </a:p>
+        </p:txBody>
+      </p:sp>
+      <p:sp>
+        <p:nvSpPr>
+          <p:cNvPr id="326" name="Google Shape;326;p47"/>
+          <p:cNvSpPr txBox="1">
+            <a:spLocks noGrp="1"/>
+          </p:cNvSpPr>
+          <p:nvPr>
+            <p:ph type="sldNum" idx="12"/>
+          </p:nvPr>
+        </p:nvSpPr>
+        <p:spPr>
+          <a:xfrm>
+            <a:off x="8472458" y="4663217"/>
+            <a:ext cx="548700" cy="393600"/>
+          </a:xfrm>
+          <a:prstGeom prst="rect">
+            <a:avLst/>
+          </a:prstGeom>
+        </p:spPr>
+        <p:txBody>
+          <a:bodyPr spcFirstLastPara="1" wrap="square" lIns="91425" tIns="91425" rIns="91425" bIns="91425" anchor="ctr" anchorCtr="0">
+            <a:noAutofit/>
+          </a:bodyPr>
+          <a:lstStyle/>
+          <a:p>
+            <a:pPr marL="0" lvl="0" indent="0" algn="r" rtl="0">
+              <a:spcBef>
+                <a:spcPts val="0"/>
+              </a:spcBef>
+              <a:spcAft>
+                <a:spcPts val="0"/>
+              </a:spcAft>
+              <a:buNone/>
+            </a:pPr>
+            <a:fld id="{00000000-1234-1234-1234-123412341234}" type="slidenum">
+              <a:rPr lang="en"/>
+              <a:t>11</a:t>
+            </a:fld>
+            <a:endParaRPr/>
+          </a:p>
+        </p:txBody>
+      </p:sp>
+      <p:pic>
+        <p:nvPicPr>
+          <p:cNvPr id="6" name="Picture 5">
+            <a:extLst>
+              <a:ext uri="{FF2B5EF4-FFF2-40B4-BE49-F238E27FC236}">
+                <a16:creationId xmlns:a16="http://schemas.microsoft.com/office/drawing/2014/main" id="{DED32793-7C09-E3A3-94E5-B5D46727A1D0}"/>
+              </a:ext>
+            </a:extLst>
+          </p:cNvPr>
+          <p:cNvPicPr>
+            <a:picLocks noChangeAspect="1"/>
+          </p:cNvPicPr>
+          <p:nvPr/>
+        </p:nvPicPr>
+        <p:blipFill>
+          <a:blip r:embed="rId3"/>
+          <a:stretch>
+            <a:fillRect/>
+          </a:stretch>
+        </p:blipFill>
+        <p:spPr>
+          <a:xfrm>
+            <a:off x="-1" y="551663"/>
+            <a:ext cx="9144001" cy="4591837"/>
+          </a:xfrm>
+          <a:prstGeom prst="rect">
+            <a:avLst/>
+          </a:prstGeom>
+        </p:spPr>
+      </p:pic>
+    </p:spTree>
+    <p:extLst>
+      <p:ext uri="{BB962C8B-B14F-4D97-AF65-F5344CB8AC3E}">
+        <p14:creationId xmlns:p14="http://schemas.microsoft.com/office/powerpoint/2010/main" val="4226348449"/>
+      </p:ext>
+    </p:extLst>
+  </p:cSld>
+  <p:clrMapOvr>
+    <a:masterClrMapping/>
+  </p:clrMapOvr>
+</p:sld>
+</file>
+
+<file path=ppt/slides/slide12.xml><?xml version="1.0" encoding="utf-8"?>
+<p:sld xmlns:a="http://schemas.openxmlformats.org/drawingml/2006/main" xmlns:r="http://schemas.openxmlformats.org/officeDocument/2006/relationships" xmlns:p="http://schemas.openxmlformats.org/presentationml/2006/main" show="0">
+  <p:cSld>
+    <p:spTree>
+      <p:nvGrpSpPr>
+        <p:cNvPr id="1" name="Shape 323"/>
+        <p:cNvGrpSpPr/>
+        <p:nvPr/>
+      </p:nvGrpSpPr>
+      <p:grpSpPr>
+        <a:xfrm>
+          <a:off x="0" y="0"/>
+          <a:ext cx="0" cy="0"/>
+          <a:chOff x="0" y="0"/>
+          <a:chExt cx="0" cy="0"/>
+        </a:xfrm>
+      </p:grpSpPr>
+      <p:sp>
+        <p:nvSpPr>
+          <p:cNvPr id="324" name="Google Shape;324;p47"/>
+          <p:cNvSpPr txBox="1">
+            <a:spLocks noGrp="1"/>
+          </p:cNvSpPr>
+          <p:nvPr>
+            <p:ph type="title"/>
+          </p:nvPr>
+        </p:nvSpPr>
+        <p:spPr>
+          <a:xfrm>
+            <a:off x="226208" y="1"/>
+            <a:ext cx="8520600" cy="464980"/>
+          </a:xfrm>
+          <a:prstGeom prst="rect">
+            <a:avLst/>
+          </a:prstGeom>
+        </p:spPr>
+        <p:txBody>
+          <a:bodyPr spcFirstLastPara="1" wrap="square" lIns="91425" tIns="91425" rIns="91425" bIns="91425" anchor="t" anchorCtr="0">
+            <a:noAutofit/>
+          </a:bodyPr>
+          <a:lstStyle/>
+          <a:p>
+            <a:pPr marL="0" lvl="0" indent="0" algn="ctr" rtl="0">
+              <a:spcBef>
+                <a:spcPts val="0"/>
+              </a:spcBef>
+              <a:spcAft>
+                <a:spcPts val="0"/>
+              </a:spcAft>
+              <a:buNone/>
+            </a:pPr>
+            <a:r>
+              <a:rPr lang="en-US" dirty="0"/>
+              <a:t>Use </a:t>
+            </a:r>
+            <a:r>
+              <a:rPr lang="en-US" sz="2400" dirty="0"/>
+              <a:t>Assigned</a:t>
+            </a:r>
+            <a:r>
+              <a:rPr lang="en-US" dirty="0"/>
+              <a:t> Seat</a:t>
+            </a:r>
+            <a:endParaRPr dirty="0"/>
+          </a:p>
+        </p:txBody>
+      </p:sp>
+      <p:sp>
+        <p:nvSpPr>
+          <p:cNvPr id="326" name="Google Shape;326;p47"/>
+          <p:cNvSpPr txBox="1">
+            <a:spLocks noGrp="1"/>
+          </p:cNvSpPr>
+          <p:nvPr>
+            <p:ph type="sldNum" idx="12"/>
+          </p:nvPr>
+        </p:nvSpPr>
+        <p:spPr>
+          <a:xfrm>
+            <a:off x="8472458" y="4663217"/>
+            <a:ext cx="548700" cy="393600"/>
+          </a:xfrm>
+          <a:prstGeom prst="rect">
+            <a:avLst/>
+          </a:prstGeom>
+        </p:spPr>
+        <p:txBody>
+          <a:bodyPr spcFirstLastPara="1" wrap="square" lIns="91425" tIns="91425" rIns="91425" bIns="91425" anchor="ctr" anchorCtr="0">
+            <a:noAutofit/>
+          </a:bodyPr>
+          <a:lstStyle/>
+          <a:p>
+            <a:pPr marL="0" lvl="0" indent="0" algn="r" rtl="0">
+              <a:spcBef>
+                <a:spcPts val="0"/>
+              </a:spcBef>
+              <a:spcAft>
+                <a:spcPts val="0"/>
+              </a:spcAft>
+              <a:buNone/>
+            </a:pPr>
+            <a:fld id="{00000000-1234-1234-1234-123412341234}" type="slidenum">
+              <a:rPr lang="en"/>
+              <a:t>12</a:t>
+            </a:fld>
+            <a:endParaRPr/>
+          </a:p>
+        </p:txBody>
+      </p:sp>
+      <p:pic>
+        <p:nvPicPr>
+          <p:cNvPr id="3" name="Picture 2">
+            <a:extLst>
+              <a:ext uri="{FF2B5EF4-FFF2-40B4-BE49-F238E27FC236}">
+                <a16:creationId xmlns:a16="http://schemas.microsoft.com/office/drawing/2014/main" id="{92DE4AAC-70FE-A114-5258-F5B22EDDED45}"/>
+              </a:ext>
+            </a:extLst>
+          </p:cNvPr>
+          <p:cNvPicPr>
+            <a:picLocks noChangeAspect="1"/>
+          </p:cNvPicPr>
+          <p:nvPr/>
+        </p:nvPicPr>
+        <p:blipFill>
+          <a:blip r:embed="rId3"/>
+          <a:stretch>
+            <a:fillRect/>
+          </a:stretch>
+        </p:blipFill>
+        <p:spPr>
+          <a:xfrm>
+            <a:off x="0" y="716280"/>
+            <a:ext cx="9144000" cy="4427218"/>
+          </a:xfrm>
+          <a:prstGeom prst="rect">
+            <a:avLst/>
+          </a:prstGeom>
+        </p:spPr>
+      </p:pic>
+    </p:spTree>
+    <p:extLst>
+      <p:ext uri="{BB962C8B-B14F-4D97-AF65-F5344CB8AC3E}">
+        <p14:creationId xmlns:p14="http://schemas.microsoft.com/office/powerpoint/2010/main" val="1976403023"/>
+      </p:ext>
+    </p:extLst>
+  </p:cSld>
+  <p:clrMapOvr>
+    <a:masterClrMapping/>
+  </p:clrMapOvr>
+</p:sld>
+</file>
+
+<file path=ppt/slides/slide13.xml><?xml version="1.0" encoding="utf-8"?>
+<p:sld xmlns:a="http://schemas.openxmlformats.org/drawingml/2006/main" xmlns:r="http://schemas.openxmlformats.org/officeDocument/2006/relationships" xmlns:p="http://schemas.openxmlformats.org/presentationml/2006/main" show="0">
+  <p:cSld>
+    <p:spTree>
+      <p:nvGrpSpPr>
+        <p:cNvPr id="1" name="Shape 323"/>
+        <p:cNvGrpSpPr/>
+        <p:nvPr/>
+      </p:nvGrpSpPr>
+      <p:grpSpPr>
+        <a:xfrm>
+          <a:off x="0" y="0"/>
+          <a:ext cx="0" cy="0"/>
+          <a:chOff x="0" y="0"/>
+          <a:chExt cx="0" cy="0"/>
+        </a:xfrm>
+      </p:grpSpPr>
+      <p:sp>
+        <p:nvSpPr>
+          <p:cNvPr id="324" name="Google Shape;324;p47"/>
+          <p:cNvSpPr txBox="1">
+            <a:spLocks noGrp="1"/>
+          </p:cNvSpPr>
+          <p:nvPr>
+            <p:ph type="title"/>
+          </p:nvPr>
+        </p:nvSpPr>
+        <p:spPr>
+          <a:xfrm>
+            <a:off x="226208" y="1"/>
+            <a:ext cx="8520600" cy="464980"/>
+          </a:xfrm>
+          <a:prstGeom prst="rect">
+            <a:avLst/>
+          </a:prstGeom>
+        </p:spPr>
+        <p:txBody>
+          <a:bodyPr spcFirstLastPara="1" wrap="square" lIns="91425" tIns="91425" rIns="91425" bIns="91425" anchor="t" anchorCtr="0">
+            <a:noAutofit/>
+          </a:bodyPr>
+          <a:lstStyle/>
+          <a:p>
+            <a:pPr marL="0" lvl="0" indent="0" algn="ctr" rtl="0">
+              <a:spcBef>
+                <a:spcPts val="0"/>
+              </a:spcBef>
+              <a:spcAft>
+                <a:spcPts val="0"/>
+              </a:spcAft>
+              <a:buNone/>
+            </a:pPr>
+            <a:r>
+              <a:rPr lang="en-US" dirty="0"/>
+              <a:t>Use </a:t>
+            </a:r>
+            <a:r>
+              <a:rPr lang="en-US" sz="2400" dirty="0"/>
+              <a:t>Assigned</a:t>
+            </a:r>
+            <a:r>
+              <a:rPr lang="en-US" dirty="0"/>
+              <a:t> Seat</a:t>
+            </a:r>
+            <a:endParaRPr dirty="0"/>
+          </a:p>
+        </p:txBody>
+      </p:sp>
+      <p:sp>
+        <p:nvSpPr>
+          <p:cNvPr id="326" name="Google Shape;326;p47"/>
+          <p:cNvSpPr txBox="1">
+            <a:spLocks noGrp="1"/>
+          </p:cNvSpPr>
+          <p:nvPr>
+            <p:ph type="sldNum" idx="12"/>
+          </p:nvPr>
+        </p:nvSpPr>
+        <p:spPr>
+          <a:xfrm>
+            <a:off x="8472458" y="4663217"/>
+            <a:ext cx="548700" cy="393600"/>
+          </a:xfrm>
+          <a:prstGeom prst="rect">
+            <a:avLst/>
+          </a:prstGeom>
+        </p:spPr>
+        <p:txBody>
+          <a:bodyPr spcFirstLastPara="1" wrap="square" lIns="91425" tIns="91425" rIns="91425" bIns="91425" anchor="ctr" anchorCtr="0">
+            <a:noAutofit/>
+          </a:bodyPr>
+          <a:lstStyle/>
+          <a:p>
+            <a:pPr marL="0" lvl="0" indent="0" algn="r" rtl="0">
+              <a:spcBef>
+                <a:spcPts val="0"/>
+              </a:spcBef>
+              <a:spcAft>
+                <a:spcPts val="0"/>
+              </a:spcAft>
+              <a:buNone/>
+            </a:pPr>
+            <a:fld id="{00000000-1234-1234-1234-123412341234}" type="slidenum">
+              <a:rPr lang="en"/>
+              <a:t>13</a:t>
+            </a:fld>
+            <a:endParaRPr/>
+          </a:p>
+        </p:txBody>
+      </p:sp>
+      <p:pic>
+        <p:nvPicPr>
+          <p:cNvPr id="4" name="Picture 3">
+            <a:extLst>
+              <a:ext uri="{FF2B5EF4-FFF2-40B4-BE49-F238E27FC236}">
+                <a16:creationId xmlns:a16="http://schemas.microsoft.com/office/drawing/2014/main" id="{DCD752B9-EFAE-AFC1-7D39-6763B89DE8D3}"/>
+              </a:ext>
+            </a:extLst>
+          </p:cNvPr>
+          <p:cNvPicPr>
+            <a:picLocks noChangeAspect="1"/>
+          </p:cNvPicPr>
+          <p:nvPr/>
+        </p:nvPicPr>
+        <p:blipFill>
+          <a:blip r:embed="rId3"/>
+          <a:stretch>
+            <a:fillRect/>
+          </a:stretch>
+        </p:blipFill>
+        <p:spPr>
+          <a:xfrm>
+            <a:off x="0" y="652130"/>
+            <a:ext cx="9144000" cy="4491369"/>
+          </a:xfrm>
+          <a:prstGeom prst="rect">
+            <a:avLst/>
+          </a:prstGeom>
+        </p:spPr>
+      </p:pic>
+    </p:spTree>
+    <p:extLst>
+      <p:ext uri="{BB962C8B-B14F-4D97-AF65-F5344CB8AC3E}">
+        <p14:creationId xmlns:p14="http://schemas.microsoft.com/office/powerpoint/2010/main" val="3365057756"/>
+      </p:ext>
+    </p:extLst>
+  </p:cSld>
+  <p:clrMapOvr>
+    <a:masterClrMapping/>
+  </p:clrMapOvr>
+</p:sld>
+</file>
+
+<file path=ppt/slides/slide2.xml><?xml version="1.0" encoding="utf-8"?>
+<p:sld xmlns:a="http://schemas.openxmlformats.org/drawingml/2006/main" xmlns:r="http://schemas.openxmlformats.org/officeDocument/2006/relationships" xmlns:p="http://schemas.openxmlformats.org/presentationml/2006/main" show="0">
+  <p:cSld>
+    <p:spTree>
+      <p:nvGrpSpPr>
         <p:cNvPr id="1" name="Shape 323">
           <a:extLst>
             <a:ext uri="{FF2B5EF4-FFF2-40B4-BE49-F238E27FC236}">
@@ -6826,7 +8009,7 @@
             </a:pPr>
             <a:fld id="{00000000-1234-1234-1234-123412341234}" type="slidenum">
               <a:rPr lang="en"/>
-              <a:t>1</a:t>
+              <a:t>2</a:t>
             </a:fld>
             <a:endParaRPr/>
           </a:p>
@@ -7537,1180 +8720,6 @@
         <p14:creationId xmlns:p14="http://schemas.microsoft.com/office/powerpoint/2010/main" val="1835810010"/>
       </p:ext>
     </p:extLst>
-  </p:cSld>
-  <p:clrMapOvr>
-    <a:masterClrMapping/>
-  </p:clrMapOvr>
-</p:sld>
-</file>
-
-<file path=ppt/slides/slide10.xml><?xml version="1.0" encoding="utf-8"?>
-<p:sld xmlns:a="http://schemas.openxmlformats.org/drawingml/2006/main" xmlns:r="http://schemas.openxmlformats.org/officeDocument/2006/relationships" xmlns:p="http://schemas.openxmlformats.org/presentationml/2006/main" show="0">
-  <p:cSld>
-    <p:spTree>
-      <p:nvGrpSpPr>
-        <p:cNvPr id="1" name="Shape 323"/>
-        <p:cNvGrpSpPr/>
-        <p:nvPr/>
-      </p:nvGrpSpPr>
-      <p:grpSpPr>
-        <a:xfrm>
-          <a:off x="0" y="0"/>
-          <a:ext cx="0" cy="0"/>
-          <a:chOff x="0" y="0"/>
-          <a:chExt cx="0" cy="0"/>
-        </a:xfrm>
-      </p:grpSpPr>
-      <p:sp>
-        <p:nvSpPr>
-          <p:cNvPr id="324" name="Google Shape;324;p47"/>
-          <p:cNvSpPr txBox="1">
-            <a:spLocks noGrp="1"/>
-          </p:cNvSpPr>
-          <p:nvPr>
-            <p:ph type="title"/>
-          </p:nvPr>
-        </p:nvSpPr>
-        <p:spPr>
-          <a:xfrm>
-            <a:off x="226208" y="1"/>
-            <a:ext cx="8520600" cy="464980"/>
-          </a:xfrm>
-          <a:prstGeom prst="rect">
-            <a:avLst/>
-          </a:prstGeom>
-        </p:spPr>
-        <p:txBody>
-          <a:bodyPr spcFirstLastPara="1" wrap="square" lIns="91425" tIns="91425" rIns="91425" bIns="91425" anchor="t" anchorCtr="0">
-            <a:noAutofit/>
-          </a:bodyPr>
-          <a:lstStyle/>
-          <a:p>
-            <a:pPr marL="0" lvl="0" indent="0" algn="ctr" rtl="0">
-              <a:spcBef>
-                <a:spcPts val="0"/>
-              </a:spcBef>
-              <a:spcAft>
-                <a:spcPts val="0"/>
-              </a:spcAft>
-              <a:buNone/>
-            </a:pPr>
-            <a:r>
-              <a:rPr lang="en-US" dirty="0"/>
-              <a:t>Use </a:t>
-            </a:r>
-            <a:r>
-              <a:rPr lang="en-US" sz="2400" dirty="0"/>
-              <a:t>Assigned</a:t>
-            </a:r>
-            <a:r>
-              <a:rPr lang="en-US" dirty="0"/>
-              <a:t> Seat</a:t>
-            </a:r>
-            <a:endParaRPr dirty="0"/>
-          </a:p>
-        </p:txBody>
-      </p:sp>
-      <p:sp>
-        <p:nvSpPr>
-          <p:cNvPr id="326" name="Google Shape;326;p47"/>
-          <p:cNvSpPr txBox="1">
-            <a:spLocks noGrp="1"/>
-          </p:cNvSpPr>
-          <p:nvPr>
-            <p:ph type="sldNum" idx="12"/>
-          </p:nvPr>
-        </p:nvSpPr>
-        <p:spPr>
-          <a:xfrm>
-            <a:off x="8472458" y="4663217"/>
-            <a:ext cx="548700" cy="393600"/>
-          </a:xfrm>
-          <a:prstGeom prst="rect">
-            <a:avLst/>
-          </a:prstGeom>
-        </p:spPr>
-        <p:txBody>
-          <a:bodyPr spcFirstLastPara="1" wrap="square" lIns="91425" tIns="91425" rIns="91425" bIns="91425" anchor="ctr" anchorCtr="0">
-            <a:noAutofit/>
-          </a:bodyPr>
-          <a:lstStyle/>
-          <a:p>
-            <a:pPr marL="0" lvl="0" indent="0" algn="r" rtl="0">
-              <a:spcBef>
-                <a:spcPts val="0"/>
-              </a:spcBef>
-              <a:spcAft>
-                <a:spcPts val="0"/>
-              </a:spcAft>
-              <a:buNone/>
-            </a:pPr>
-            <a:fld id="{00000000-1234-1234-1234-123412341234}" type="slidenum">
-              <a:rPr lang="en"/>
-              <a:t>10</a:t>
-            </a:fld>
-            <a:endParaRPr/>
-          </a:p>
-        </p:txBody>
-      </p:sp>
-      <p:pic>
-        <p:nvPicPr>
-          <p:cNvPr id="3" name="Picture 2">
-            <a:extLst>
-              <a:ext uri="{FF2B5EF4-FFF2-40B4-BE49-F238E27FC236}">
-                <a16:creationId xmlns:a16="http://schemas.microsoft.com/office/drawing/2014/main" id="{565A4964-E8A9-A46D-F4BE-E7D41C14EF1B}"/>
-              </a:ext>
-            </a:extLst>
-          </p:cNvPr>
-          <p:cNvPicPr>
-            <a:picLocks noChangeAspect="1"/>
-          </p:cNvPicPr>
-          <p:nvPr/>
-        </p:nvPicPr>
-        <p:blipFill>
-          <a:blip r:embed="rId3"/>
-          <a:stretch>
-            <a:fillRect/>
-          </a:stretch>
-        </p:blipFill>
-        <p:spPr>
-          <a:xfrm>
-            <a:off x="0" y="559220"/>
-            <a:ext cx="9144000" cy="4471763"/>
-          </a:xfrm>
-          <a:prstGeom prst="rect">
-            <a:avLst/>
-          </a:prstGeom>
-        </p:spPr>
-      </p:pic>
-    </p:spTree>
-    <p:extLst>
-      <p:ext uri="{BB962C8B-B14F-4D97-AF65-F5344CB8AC3E}">
-        <p14:creationId xmlns:p14="http://schemas.microsoft.com/office/powerpoint/2010/main" val="2495509868"/>
-      </p:ext>
-    </p:extLst>
-  </p:cSld>
-  <p:clrMapOvr>
-    <a:masterClrMapping/>
-  </p:clrMapOvr>
-</p:sld>
-</file>
-
-<file path=ppt/slides/slide11.xml><?xml version="1.0" encoding="utf-8"?>
-<p:sld xmlns:a="http://schemas.openxmlformats.org/drawingml/2006/main" xmlns:r="http://schemas.openxmlformats.org/officeDocument/2006/relationships" xmlns:p="http://schemas.openxmlformats.org/presentationml/2006/main" show="0">
-  <p:cSld>
-    <p:spTree>
-      <p:nvGrpSpPr>
-        <p:cNvPr id="1" name="Shape 323"/>
-        <p:cNvGrpSpPr/>
-        <p:nvPr/>
-      </p:nvGrpSpPr>
-      <p:grpSpPr>
-        <a:xfrm>
-          <a:off x="0" y="0"/>
-          <a:ext cx="0" cy="0"/>
-          <a:chOff x="0" y="0"/>
-          <a:chExt cx="0" cy="0"/>
-        </a:xfrm>
-      </p:grpSpPr>
-      <p:sp>
-        <p:nvSpPr>
-          <p:cNvPr id="324" name="Google Shape;324;p47"/>
-          <p:cNvSpPr txBox="1">
-            <a:spLocks noGrp="1"/>
-          </p:cNvSpPr>
-          <p:nvPr>
-            <p:ph type="title"/>
-          </p:nvPr>
-        </p:nvSpPr>
-        <p:spPr>
-          <a:xfrm>
-            <a:off x="226208" y="1"/>
-            <a:ext cx="8520600" cy="464980"/>
-          </a:xfrm>
-          <a:prstGeom prst="rect">
-            <a:avLst/>
-          </a:prstGeom>
-        </p:spPr>
-        <p:txBody>
-          <a:bodyPr spcFirstLastPara="1" wrap="square" lIns="91425" tIns="91425" rIns="91425" bIns="91425" anchor="t" anchorCtr="0">
-            <a:noAutofit/>
-          </a:bodyPr>
-          <a:lstStyle/>
-          <a:p>
-            <a:pPr marL="0" lvl="0" indent="0" algn="ctr" rtl="0">
-              <a:spcBef>
-                <a:spcPts val="0"/>
-              </a:spcBef>
-              <a:spcAft>
-                <a:spcPts val="0"/>
-              </a:spcAft>
-              <a:buNone/>
-            </a:pPr>
-            <a:r>
-              <a:rPr lang="en-US" dirty="0"/>
-              <a:t>Use </a:t>
-            </a:r>
-            <a:r>
-              <a:rPr lang="en-US" sz="2400" dirty="0"/>
-              <a:t>Assigned</a:t>
-            </a:r>
-            <a:r>
-              <a:rPr lang="en-US" dirty="0"/>
-              <a:t> Seat</a:t>
-            </a:r>
-            <a:endParaRPr dirty="0"/>
-          </a:p>
-        </p:txBody>
-      </p:sp>
-      <p:sp>
-        <p:nvSpPr>
-          <p:cNvPr id="326" name="Google Shape;326;p47"/>
-          <p:cNvSpPr txBox="1">
-            <a:spLocks noGrp="1"/>
-          </p:cNvSpPr>
-          <p:nvPr>
-            <p:ph type="sldNum" idx="12"/>
-          </p:nvPr>
-        </p:nvSpPr>
-        <p:spPr>
-          <a:xfrm>
-            <a:off x="8472458" y="4663217"/>
-            <a:ext cx="548700" cy="393600"/>
-          </a:xfrm>
-          <a:prstGeom prst="rect">
-            <a:avLst/>
-          </a:prstGeom>
-        </p:spPr>
-        <p:txBody>
-          <a:bodyPr spcFirstLastPara="1" wrap="square" lIns="91425" tIns="91425" rIns="91425" bIns="91425" anchor="ctr" anchorCtr="0">
-            <a:noAutofit/>
-          </a:bodyPr>
-          <a:lstStyle/>
-          <a:p>
-            <a:pPr marL="0" lvl="0" indent="0" algn="r" rtl="0">
-              <a:spcBef>
-                <a:spcPts val="0"/>
-              </a:spcBef>
-              <a:spcAft>
-                <a:spcPts val="0"/>
-              </a:spcAft>
-              <a:buNone/>
-            </a:pPr>
-            <a:fld id="{00000000-1234-1234-1234-123412341234}" type="slidenum">
-              <a:rPr lang="en"/>
-              <a:t>11</a:t>
-            </a:fld>
-            <a:endParaRPr/>
-          </a:p>
-        </p:txBody>
-      </p:sp>
-      <p:pic>
-        <p:nvPicPr>
-          <p:cNvPr id="6" name="Picture 5">
-            <a:extLst>
-              <a:ext uri="{FF2B5EF4-FFF2-40B4-BE49-F238E27FC236}">
-                <a16:creationId xmlns:a16="http://schemas.microsoft.com/office/drawing/2014/main" id="{DED32793-7C09-E3A3-94E5-B5D46727A1D0}"/>
-              </a:ext>
-            </a:extLst>
-          </p:cNvPr>
-          <p:cNvPicPr>
-            <a:picLocks noChangeAspect="1"/>
-          </p:cNvPicPr>
-          <p:nvPr/>
-        </p:nvPicPr>
-        <p:blipFill>
-          <a:blip r:embed="rId3"/>
-          <a:stretch>
-            <a:fillRect/>
-          </a:stretch>
-        </p:blipFill>
-        <p:spPr>
-          <a:xfrm>
-            <a:off x="-1" y="551663"/>
-            <a:ext cx="9144001" cy="4591837"/>
-          </a:xfrm>
-          <a:prstGeom prst="rect">
-            <a:avLst/>
-          </a:prstGeom>
-        </p:spPr>
-      </p:pic>
-    </p:spTree>
-    <p:extLst>
-      <p:ext uri="{BB962C8B-B14F-4D97-AF65-F5344CB8AC3E}">
-        <p14:creationId xmlns:p14="http://schemas.microsoft.com/office/powerpoint/2010/main" val="4226348449"/>
-      </p:ext>
-    </p:extLst>
-  </p:cSld>
-  <p:clrMapOvr>
-    <a:masterClrMapping/>
-  </p:clrMapOvr>
-</p:sld>
-</file>
-
-<file path=ppt/slides/slide12.xml><?xml version="1.0" encoding="utf-8"?>
-<p:sld xmlns:a="http://schemas.openxmlformats.org/drawingml/2006/main" xmlns:r="http://schemas.openxmlformats.org/officeDocument/2006/relationships" xmlns:p="http://schemas.openxmlformats.org/presentationml/2006/main" show="0">
-  <p:cSld>
-    <p:spTree>
-      <p:nvGrpSpPr>
-        <p:cNvPr id="1" name="Shape 323"/>
-        <p:cNvGrpSpPr/>
-        <p:nvPr/>
-      </p:nvGrpSpPr>
-      <p:grpSpPr>
-        <a:xfrm>
-          <a:off x="0" y="0"/>
-          <a:ext cx="0" cy="0"/>
-          <a:chOff x="0" y="0"/>
-          <a:chExt cx="0" cy="0"/>
-        </a:xfrm>
-      </p:grpSpPr>
-      <p:sp>
-        <p:nvSpPr>
-          <p:cNvPr id="324" name="Google Shape;324;p47"/>
-          <p:cNvSpPr txBox="1">
-            <a:spLocks noGrp="1"/>
-          </p:cNvSpPr>
-          <p:nvPr>
-            <p:ph type="title"/>
-          </p:nvPr>
-        </p:nvSpPr>
-        <p:spPr>
-          <a:xfrm>
-            <a:off x="226208" y="1"/>
-            <a:ext cx="8520600" cy="464980"/>
-          </a:xfrm>
-          <a:prstGeom prst="rect">
-            <a:avLst/>
-          </a:prstGeom>
-        </p:spPr>
-        <p:txBody>
-          <a:bodyPr spcFirstLastPara="1" wrap="square" lIns="91425" tIns="91425" rIns="91425" bIns="91425" anchor="t" anchorCtr="0">
-            <a:noAutofit/>
-          </a:bodyPr>
-          <a:lstStyle/>
-          <a:p>
-            <a:pPr marL="0" lvl="0" indent="0" algn="ctr" rtl="0">
-              <a:spcBef>
-                <a:spcPts val="0"/>
-              </a:spcBef>
-              <a:spcAft>
-                <a:spcPts val="0"/>
-              </a:spcAft>
-              <a:buNone/>
-            </a:pPr>
-            <a:r>
-              <a:rPr lang="en-US" dirty="0"/>
-              <a:t>Use </a:t>
-            </a:r>
-            <a:r>
-              <a:rPr lang="en-US" sz="2400" dirty="0"/>
-              <a:t>Assigned</a:t>
-            </a:r>
-            <a:r>
-              <a:rPr lang="en-US" dirty="0"/>
-              <a:t> Seat</a:t>
-            </a:r>
-            <a:endParaRPr dirty="0"/>
-          </a:p>
-        </p:txBody>
-      </p:sp>
-      <p:sp>
-        <p:nvSpPr>
-          <p:cNvPr id="326" name="Google Shape;326;p47"/>
-          <p:cNvSpPr txBox="1">
-            <a:spLocks noGrp="1"/>
-          </p:cNvSpPr>
-          <p:nvPr>
-            <p:ph type="sldNum" idx="12"/>
-          </p:nvPr>
-        </p:nvSpPr>
-        <p:spPr>
-          <a:xfrm>
-            <a:off x="8472458" y="4663217"/>
-            <a:ext cx="548700" cy="393600"/>
-          </a:xfrm>
-          <a:prstGeom prst="rect">
-            <a:avLst/>
-          </a:prstGeom>
-        </p:spPr>
-        <p:txBody>
-          <a:bodyPr spcFirstLastPara="1" wrap="square" lIns="91425" tIns="91425" rIns="91425" bIns="91425" anchor="ctr" anchorCtr="0">
-            <a:noAutofit/>
-          </a:bodyPr>
-          <a:lstStyle/>
-          <a:p>
-            <a:pPr marL="0" lvl="0" indent="0" algn="r" rtl="0">
-              <a:spcBef>
-                <a:spcPts val="0"/>
-              </a:spcBef>
-              <a:spcAft>
-                <a:spcPts val="0"/>
-              </a:spcAft>
-              <a:buNone/>
-            </a:pPr>
-            <a:fld id="{00000000-1234-1234-1234-123412341234}" type="slidenum">
-              <a:rPr lang="en"/>
-              <a:t>12</a:t>
-            </a:fld>
-            <a:endParaRPr/>
-          </a:p>
-        </p:txBody>
-      </p:sp>
-      <p:pic>
-        <p:nvPicPr>
-          <p:cNvPr id="3" name="Picture 2">
-            <a:extLst>
-              <a:ext uri="{FF2B5EF4-FFF2-40B4-BE49-F238E27FC236}">
-                <a16:creationId xmlns:a16="http://schemas.microsoft.com/office/drawing/2014/main" id="{92DE4AAC-70FE-A114-5258-F5B22EDDED45}"/>
-              </a:ext>
-            </a:extLst>
-          </p:cNvPr>
-          <p:cNvPicPr>
-            <a:picLocks noChangeAspect="1"/>
-          </p:cNvPicPr>
-          <p:nvPr/>
-        </p:nvPicPr>
-        <p:blipFill>
-          <a:blip r:embed="rId3"/>
-          <a:stretch>
-            <a:fillRect/>
-          </a:stretch>
-        </p:blipFill>
-        <p:spPr>
-          <a:xfrm>
-            <a:off x="0" y="716280"/>
-            <a:ext cx="9144000" cy="4427218"/>
-          </a:xfrm>
-          <a:prstGeom prst="rect">
-            <a:avLst/>
-          </a:prstGeom>
-        </p:spPr>
-      </p:pic>
-    </p:spTree>
-    <p:extLst>
-      <p:ext uri="{BB962C8B-B14F-4D97-AF65-F5344CB8AC3E}">
-        <p14:creationId xmlns:p14="http://schemas.microsoft.com/office/powerpoint/2010/main" val="1976403023"/>
-      </p:ext>
-    </p:extLst>
-  </p:cSld>
-  <p:clrMapOvr>
-    <a:masterClrMapping/>
-  </p:clrMapOvr>
-</p:sld>
-</file>
-
-<file path=ppt/slides/slide13.xml><?xml version="1.0" encoding="utf-8"?>
-<p:sld xmlns:a="http://schemas.openxmlformats.org/drawingml/2006/main" xmlns:r="http://schemas.openxmlformats.org/officeDocument/2006/relationships" xmlns:p="http://schemas.openxmlformats.org/presentationml/2006/main" show="0">
-  <p:cSld>
-    <p:spTree>
-      <p:nvGrpSpPr>
-        <p:cNvPr id="1" name="Shape 323"/>
-        <p:cNvGrpSpPr/>
-        <p:nvPr/>
-      </p:nvGrpSpPr>
-      <p:grpSpPr>
-        <a:xfrm>
-          <a:off x="0" y="0"/>
-          <a:ext cx="0" cy="0"/>
-          <a:chOff x="0" y="0"/>
-          <a:chExt cx="0" cy="0"/>
-        </a:xfrm>
-      </p:grpSpPr>
-      <p:sp>
-        <p:nvSpPr>
-          <p:cNvPr id="324" name="Google Shape;324;p47"/>
-          <p:cNvSpPr txBox="1">
-            <a:spLocks noGrp="1"/>
-          </p:cNvSpPr>
-          <p:nvPr>
-            <p:ph type="title"/>
-          </p:nvPr>
-        </p:nvSpPr>
-        <p:spPr>
-          <a:xfrm>
-            <a:off x="226208" y="1"/>
-            <a:ext cx="8520600" cy="464980"/>
-          </a:xfrm>
-          <a:prstGeom prst="rect">
-            <a:avLst/>
-          </a:prstGeom>
-        </p:spPr>
-        <p:txBody>
-          <a:bodyPr spcFirstLastPara="1" wrap="square" lIns="91425" tIns="91425" rIns="91425" bIns="91425" anchor="t" anchorCtr="0">
-            <a:noAutofit/>
-          </a:bodyPr>
-          <a:lstStyle/>
-          <a:p>
-            <a:pPr marL="0" lvl="0" indent="0" algn="ctr" rtl="0">
-              <a:spcBef>
-                <a:spcPts val="0"/>
-              </a:spcBef>
-              <a:spcAft>
-                <a:spcPts val="0"/>
-              </a:spcAft>
-              <a:buNone/>
-            </a:pPr>
-            <a:r>
-              <a:rPr lang="en-US" dirty="0"/>
-              <a:t>Use </a:t>
-            </a:r>
-            <a:r>
-              <a:rPr lang="en-US" sz="2400" dirty="0"/>
-              <a:t>Assigned</a:t>
-            </a:r>
-            <a:r>
-              <a:rPr lang="en-US" dirty="0"/>
-              <a:t> Seat</a:t>
-            </a:r>
-            <a:endParaRPr dirty="0"/>
-          </a:p>
-        </p:txBody>
-      </p:sp>
-      <p:sp>
-        <p:nvSpPr>
-          <p:cNvPr id="326" name="Google Shape;326;p47"/>
-          <p:cNvSpPr txBox="1">
-            <a:spLocks noGrp="1"/>
-          </p:cNvSpPr>
-          <p:nvPr>
-            <p:ph type="sldNum" idx="12"/>
-          </p:nvPr>
-        </p:nvSpPr>
-        <p:spPr>
-          <a:xfrm>
-            <a:off x="8472458" y="4663217"/>
-            <a:ext cx="548700" cy="393600"/>
-          </a:xfrm>
-          <a:prstGeom prst="rect">
-            <a:avLst/>
-          </a:prstGeom>
-        </p:spPr>
-        <p:txBody>
-          <a:bodyPr spcFirstLastPara="1" wrap="square" lIns="91425" tIns="91425" rIns="91425" bIns="91425" anchor="ctr" anchorCtr="0">
-            <a:noAutofit/>
-          </a:bodyPr>
-          <a:lstStyle/>
-          <a:p>
-            <a:pPr marL="0" lvl="0" indent="0" algn="r" rtl="0">
-              <a:spcBef>
-                <a:spcPts val="0"/>
-              </a:spcBef>
-              <a:spcAft>
-                <a:spcPts val="0"/>
-              </a:spcAft>
-              <a:buNone/>
-            </a:pPr>
-            <a:fld id="{00000000-1234-1234-1234-123412341234}" type="slidenum">
-              <a:rPr lang="en"/>
-              <a:t>13</a:t>
-            </a:fld>
-            <a:endParaRPr/>
-          </a:p>
-        </p:txBody>
-      </p:sp>
-      <p:pic>
-        <p:nvPicPr>
-          <p:cNvPr id="4" name="Picture 3">
-            <a:extLst>
-              <a:ext uri="{FF2B5EF4-FFF2-40B4-BE49-F238E27FC236}">
-                <a16:creationId xmlns:a16="http://schemas.microsoft.com/office/drawing/2014/main" id="{DCD752B9-EFAE-AFC1-7D39-6763B89DE8D3}"/>
-              </a:ext>
-            </a:extLst>
-          </p:cNvPr>
-          <p:cNvPicPr>
-            <a:picLocks noChangeAspect="1"/>
-          </p:cNvPicPr>
-          <p:nvPr/>
-        </p:nvPicPr>
-        <p:blipFill>
-          <a:blip r:embed="rId3"/>
-          <a:stretch>
-            <a:fillRect/>
-          </a:stretch>
-        </p:blipFill>
-        <p:spPr>
-          <a:xfrm>
-            <a:off x="0" y="652130"/>
-            <a:ext cx="9144000" cy="4491369"/>
-          </a:xfrm>
-          <a:prstGeom prst="rect">
-            <a:avLst/>
-          </a:prstGeom>
-        </p:spPr>
-      </p:pic>
-    </p:spTree>
-    <p:extLst>
-      <p:ext uri="{BB962C8B-B14F-4D97-AF65-F5344CB8AC3E}">
-        <p14:creationId xmlns:p14="http://schemas.microsoft.com/office/powerpoint/2010/main" val="3365057756"/>
-      </p:ext>
-    </p:extLst>
-  </p:cSld>
-  <p:clrMapOvr>
-    <a:masterClrMapping/>
-  </p:clrMapOvr>
-</p:sld>
-</file>
-
-<file path=ppt/slides/slide2.xml><?xml version="1.0" encoding="utf-8"?>
-<p:sld xmlns:a="http://schemas.openxmlformats.org/drawingml/2006/main" xmlns:r="http://schemas.openxmlformats.org/officeDocument/2006/relationships" xmlns:p="http://schemas.openxmlformats.org/presentationml/2006/main" show="0">
-  <p:cSld>
-    <p:spTree>
-      <p:nvGrpSpPr>
-        <p:cNvPr id="1" name="Shape 323"/>
-        <p:cNvGrpSpPr/>
-        <p:nvPr/>
-      </p:nvGrpSpPr>
-      <p:grpSpPr>
-        <a:xfrm>
-          <a:off x="0" y="0"/>
-          <a:ext cx="0" cy="0"/>
-          <a:chOff x="0" y="0"/>
-          <a:chExt cx="0" cy="0"/>
-        </a:xfrm>
-      </p:grpSpPr>
-      <p:sp>
-        <p:nvSpPr>
-          <p:cNvPr id="324" name="Google Shape;324;p47"/>
-          <p:cNvSpPr txBox="1">
-            <a:spLocks noGrp="1"/>
-          </p:cNvSpPr>
-          <p:nvPr>
-            <p:ph type="title"/>
-          </p:nvPr>
-        </p:nvSpPr>
-        <p:spPr>
-          <a:xfrm>
-            <a:off x="305858" y="273819"/>
-            <a:ext cx="8520600" cy="623700"/>
-          </a:xfrm>
-          <a:prstGeom prst="rect">
-            <a:avLst/>
-          </a:prstGeom>
-        </p:spPr>
-        <p:txBody>
-          <a:bodyPr spcFirstLastPara="1" wrap="square" lIns="91425" tIns="91425" rIns="91425" bIns="91425" anchor="t" anchorCtr="0">
-            <a:noAutofit/>
-          </a:bodyPr>
-          <a:lstStyle/>
-          <a:p>
-            <a:pPr marL="0" lvl="0" indent="0" algn="ctr" rtl="0">
-              <a:spcBef>
-                <a:spcPts val="0"/>
-              </a:spcBef>
-              <a:spcAft>
-                <a:spcPts val="0"/>
-              </a:spcAft>
-              <a:buNone/>
-            </a:pPr>
-            <a:r>
-              <a:rPr lang="en-US" dirty="0"/>
-              <a:t>GCIS – Software Development and Problem Solving</a:t>
-            </a:r>
-            <a:endParaRPr dirty="0"/>
-          </a:p>
-        </p:txBody>
-      </p:sp>
-      <p:sp>
-        <p:nvSpPr>
-          <p:cNvPr id="325" name="Google Shape;325;p47"/>
-          <p:cNvSpPr txBox="1">
-            <a:spLocks noGrp="1"/>
-          </p:cNvSpPr>
-          <p:nvPr>
-            <p:ph type="body" idx="1"/>
-          </p:nvPr>
-        </p:nvSpPr>
-        <p:spPr>
-          <a:xfrm>
-            <a:off x="-5842" y="1721147"/>
-            <a:ext cx="9149842" cy="1226403"/>
-          </a:xfrm>
-          <a:prstGeom prst="rect">
-            <a:avLst/>
-          </a:prstGeom>
-        </p:spPr>
-        <p:txBody>
-          <a:bodyPr spcFirstLastPara="1" wrap="square" lIns="91425" tIns="91425" rIns="91425" bIns="91425" anchor="ctr" anchorCtr="0">
-            <a:noAutofit/>
-          </a:bodyPr>
-          <a:lstStyle/>
-          <a:p>
-            <a:pPr marL="146050" indent="0" algn="ctr">
-              <a:buNone/>
-            </a:pPr>
-            <a:r>
-              <a:rPr lang="en-US" sz="2400" dirty="0"/>
-              <a:t>Take </a:t>
-            </a:r>
-            <a:r>
-              <a:rPr lang="pl-PL" sz="2400" dirty="0"/>
-              <a:t>Quiz </a:t>
-            </a:r>
-            <a:r>
-              <a:rPr lang="en-US" sz="2400" dirty="0"/>
-              <a:t>12</a:t>
-            </a:r>
-            <a:r>
-              <a:rPr lang="pl-PL" sz="2400" dirty="0"/>
-              <a:t>.</a:t>
-            </a:r>
-            <a:r>
-              <a:rPr lang="en-US" sz="2400" dirty="0"/>
-              <a:t>3</a:t>
-            </a:r>
-            <a:r>
-              <a:rPr lang="pl-PL" sz="2400" dirty="0"/>
-              <a:t>:</a:t>
-            </a:r>
-            <a:r>
-              <a:rPr lang="en-US" sz="2400" dirty="0"/>
-              <a:t>Depth First Search</a:t>
-            </a:r>
-          </a:p>
-          <a:p>
-            <a:pPr marL="146050" indent="0" algn="ctr">
-              <a:buNone/>
-            </a:pPr>
-            <a:r>
-              <a:rPr lang="en-US" sz="2400" dirty="0"/>
-              <a:t>Password - </a:t>
-            </a:r>
-            <a:r>
-              <a:rPr lang="en-US" sz="2400" dirty="0" err="1"/>
-              <a:t>DepthPerception</a:t>
-            </a:r>
-            <a:endParaRPr sz="2400" dirty="0"/>
-          </a:p>
-        </p:txBody>
-      </p:sp>
-      <p:sp>
-        <p:nvSpPr>
-          <p:cNvPr id="326" name="Google Shape;326;p47"/>
-          <p:cNvSpPr txBox="1">
-            <a:spLocks noGrp="1"/>
-          </p:cNvSpPr>
-          <p:nvPr>
-            <p:ph type="sldNum" idx="12"/>
-          </p:nvPr>
-        </p:nvSpPr>
-        <p:spPr>
-          <a:xfrm>
-            <a:off x="8472458" y="4663217"/>
-            <a:ext cx="548700" cy="393600"/>
-          </a:xfrm>
-          <a:prstGeom prst="rect">
-            <a:avLst/>
-          </a:prstGeom>
-        </p:spPr>
-        <p:txBody>
-          <a:bodyPr spcFirstLastPara="1" wrap="square" lIns="91425" tIns="91425" rIns="91425" bIns="91425" anchor="ctr" anchorCtr="0">
-            <a:noAutofit/>
-          </a:bodyPr>
-          <a:lstStyle/>
-          <a:p>
-            <a:pPr marL="0" lvl="0" indent="0" algn="r" rtl="0">
-              <a:spcBef>
-                <a:spcPts val="0"/>
-              </a:spcBef>
-              <a:spcAft>
-                <a:spcPts val="0"/>
-              </a:spcAft>
-              <a:buNone/>
-            </a:pPr>
-            <a:fld id="{00000000-1234-1234-1234-123412341234}" type="slidenum">
-              <a:rPr lang="en"/>
-              <a:t>2</a:t>
-            </a:fld>
-            <a:endParaRPr/>
-          </a:p>
-        </p:txBody>
-      </p:sp>
-      <p:sp>
-        <p:nvSpPr>
-          <p:cNvPr id="2" name="TextBox 1">
-            <a:extLst>
-              <a:ext uri="{FF2B5EF4-FFF2-40B4-BE49-F238E27FC236}">
-                <a16:creationId xmlns:a16="http://schemas.microsoft.com/office/drawing/2014/main" id="{DCC33EBB-1C9D-B9A9-88E6-F3466077417F}"/>
-              </a:ext>
-            </a:extLst>
-          </p:cNvPr>
-          <p:cNvSpPr txBox="1"/>
-          <p:nvPr/>
-        </p:nvSpPr>
-        <p:spPr>
-          <a:xfrm>
-            <a:off x="0" y="1277369"/>
-            <a:ext cx="9144000" cy="307777"/>
-          </a:xfrm>
-          <a:prstGeom prst="rect">
-            <a:avLst/>
-          </a:prstGeom>
-          <a:solidFill>
-            <a:srgbClr val="FFC000"/>
-          </a:solidFill>
-        </p:spPr>
-        <p:txBody>
-          <a:bodyPr wrap="square" rtlCol="0">
-            <a:spAutoFit/>
-          </a:bodyPr>
-          <a:lstStyle/>
-          <a:p>
-            <a:r>
-              <a:rPr lang="en-US" dirty="0"/>
-              <a:t>Quiz</a:t>
-            </a:r>
-          </a:p>
-        </p:txBody>
-      </p:sp>
-      <p:sp>
-        <p:nvSpPr>
-          <p:cNvPr id="3" name="TextBox 2">
-            <a:extLst>
-              <a:ext uri="{FF2B5EF4-FFF2-40B4-BE49-F238E27FC236}">
-                <a16:creationId xmlns:a16="http://schemas.microsoft.com/office/drawing/2014/main" id="{64C19922-6A1B-1404-5104-DC43E4C67861}"/>
-              </a:ext>
-            </a:extLst>
-          </p:cNvPr>
-          <p:cNvSpPr txBox="1"/>
-          <p:nvPr/>
-        </p:nvSpPr>
-        <p:spPr>
-          <a:xfrm>
-            <a:off x="-5842" y="3031063"/>
-            <a:ext cx="9144000" cy="307777"/>
-          </a:xfrm>
-          <a:prstGeom prst="rect">
-            <a:avLst/>
-          </a:prstGeom>
-          <a:solidFill>
-            <a:srgbClr val="FFC000"/>
-          </a:solidFill>
-        </p:spPr>
-        <p:txBody>
-          <a:bodyPr wrap="square" rtlCol="0">
-            <a:spAutoFit/>
-          </a:bodyPr>
-          <a:lstStyle/>
-          <a:p>
-            <a:r>
-              <a:rPr lang="en-US" dirty="0"/>
-              <a:t>Next </a:t>
-            </a:r>
-            <a:r>
-              <a:rPr lang="en-US" dirty="0">
-                <a:sym typeface="Wingdings" panose="05000000000000000000" pitchFamily="2" charset="2"/>
-              </a:rPr>
-              <a:t> </a:t>
-            </a:r>
-            <a:endParaRPr lang="en-US" dirty="0"/>
-          </a:p>
-        </p:txBody>
-      </p:sp>
-      <p:sp>
-        <p:nvSpPr>
-          <p:cNvPr id="4" name="Google Shape;325;p47">
-            <a:extLst>
-              <a:ext uri="{FF2B5EF4-FFF2-40B4-BE49-F238E27FC236}">
-                <a16:creationId xmlns:a16="http://schemas.microsoft.com/office/drawing/2014/main" id="{E455EA58-F56D-AF58-E97D-95A77E0AB6CF}"/>
-              </a:ext>
-            </a:extLst>
-          </p:cNvPr>
-          <p:cNvSpPr txBox="1">
-            <a:spLocks/>
-          </p:cNvSpPr>
-          <p:nvPr/>
-        </p:nvSpPr>
-        <p:spPr>
-          <a:xfrm>
-            <a:off x="-5842" y="3422352"/>
-            <a:ext cx="9149842" cy="1721148"/>
-          </a:xfrm>
-          <a:prstGeom prst="rect">
-            <a:avLst/>
-          </a:prstGeom>
-          <a:noFill/>
-          <a:ln>
-            <a:noFill/>
-          </a:ln>
-        </p:spPr>
-        <p:txBody>
-          <a:bodyPr spcFirstLastPara="1" wrap="square" lIns="91425" tIns="91425" rIns="91425" bIns="91425" anchor="ctr" anchorCtr="0">
-            <a:noAutofit/>
-          </a:bodyPr>
-          <a:lstStyle>
-            <a:defPPr marR="0" lvl="0" algn="l" rtl="0">
-              <a:lnSpc>
-                <a:spcPct val="100000"/>
-              </a:lnSpc>
-              <a:spcBef>
-                <a:spcPts val="0"/>
-              </a:spcBef>
-              <a:spcAft>
-                <a:spcPts val="0"/>
-              </a:spcAft>
-            </a:defPPr>
-            <a:lvl1pPr marL="457200" marR="0" lvl="0" indent="-311150" algn="l" rtl="0">
-              <a:lnSpc>
-                <a:spcPct val="115000"/>
-              </a:lnSpc>
-              <a:spcBef>
-                <a:spcPts val="0"/>
-              </a:spcBef>
-              <a:spcAft>
-                <a:spcPts val="0"/>
-              </a:spcAft>
-              <a:buClr>
-                <a:schemeClr val="dk2"/>
-              </a:buClr>
-              <a:buSzPts val="1300"/>
-              <a:buFont typeface="Roboto"/>
-              <a:buChar char="●"/>
-              <a:defRPr sz="1300" b="0" i="0" u="none" strike="noStrike" cap="none">
-                <a:solidFill>
-                  <a:schemeClr val="dk2"/>
-                </a:solidFill>
-                <a:latin typeface="Roboto"/>
-                <a:ea typeface="Roboto"/>
-                <a:cs typeface="Roboto"/>
-                <a:sym typeface="Roboto"/>
-              </a:defRPr>
-            </a:lvl1pPr>
-            <a:lvl2pPr marL="914400" marR="0" lvl="1" indent="-298450" algn="l" rtl="0">
-              <a:lnSpc>
-                <a:spcPct val="115000"/>
-              </a:lnSpc>
-              <a:spcBef>
-                <a:spcPts val="1600"/>
-              </a:spcBef>
-              <a:spcAft>
-                <a:spcPts val="0"/>
-              </a:spcAft>
-              <a:buClr>
-                <a:schemeClr val="dk2"/>
-              </a:buClr>
-              <a:buSzPts val="1100"/>
-              <a:buFont typeface="Roboto"/>
-              <a:buChar char="○"/>
-              <a:defRPr sz="1100" b="0" i="0" u="none" strike="noStrike" cap="none">
-                <a:solidFill>
-                  <a:schemeClr val="dk2"/>
-                </a:solidFill>
-                <a:latin typeface="Roboto"/>
-                <a:ea typeface="Roboto"/>
-                <a:cs typeface="Roboto"/>
-                <a:sym typeface="Roboto"/>
-              </a:defRPr>
-            </a:lvl2pPr>
-            <a:lvl3pPr marL="1371600" marR="0" lvl="2" indent="-298450" algn="l" rtl="0">
-              <a:lnSpc>
-                <a:spcPct val="115000"/>
-              </a:lnSpc>
-              <a:spcBef>
-                <a:spcPts val="1600"/>
-              </a:spcBef>
-              <a:spcAft>
-                <a:spcPts val="0"/>
-              </a:spcAft>
-              <a:buClr>
-                <a:schemeClr val="dk2"/>
-              </a:buClr>
-              <a:buSzPts val="1100"/>
-              <a:buFont typeface="Roboto"/>
-              <a:buChar char="■"/>
-              <a:defRPr sz="1100" b="0" i="0" u="none" strike="noStrike" cap="none">
-                <a:solidFill>
-                  <a:schemeClr val="dk2"/>
-                </a:solidFill>
-                <a:latin typeface="Roboto"/>
-                <a:ea typeface="Roboto"/>
-                <a:cs typeface="Roboto"/>
-                <a:sym typeface="Roboto"/>
-              </a:defRPr>
-            </a:lvl3pPr>
-            <a:lvl4pPr marL="1828800" marR="0" lvl="3" indent="-298450" algn="l" rtl="0">
-              <a:lnSpc>
-                <a:spcPct val="115000"/>
-              </a:lnSpc>
-              <a:spcBef>
-                <a:spcPts val="1600"/>
-              </a:spcBef>
-              <a:spcAft>
-                <a:spcPts val="0"/>
-              </a:spcAft>
-              <a:buClr>
-                <a:schemeClr val="dk2"/>
-              </a:buClr>
-              <a:buSzPts val="1100"/>
-              <a:buFont typeface="Roboto"/>
-              <a:buChar char="●"/>
-              <a:defRPr sz="1100" b="0" i="0" u="none" strike="noStrike" cap="none">
-                <a:solidFill>
-                  <a:schemeClr val="dk2"/>
-                </a:solidFill>
-                <a:latin typeface="Roboto"/>
-                <a:ea typeface="Roboto"/>
-                <a:cs typeface="Roboto"/>
-                <a:sym typeface="Roboto"/>
-              </a:defRPr>
-            </a:lvl4pPr>
-            <a:lvl5pPr marL="2286000" marR="0" lvl="4" indent="-298450" algn="l" rtl="0">
-              <a:lnSpc>
-                <a:spcPct val="115000"/>
-              </a:lnSpc>
-              <a:spcBef>
-                <a:spcPts val="1600"/>
-              </a:spcBef>
-              <a:spcAft>
-                <a:spcPts val="0"/>
-              </a:spcAft>
-              <a:buClr>
-                <a:schemeClr val="dk2"/>
-              </a:buClr>
-              <a:buSzPts val="1100"/>
-              <a:buFont typeface="Roboto"/>
-              <a:buChar char="○"/>
-              <a:defRPr sz="1100" b="0" i="0" u="none" strike="noStrike" cap="none">
-                <a:solidFill>
-                  <a:schemeClr val="dk2"/>
-                </a:solidFill>
-                <a:latin typeface="Roboto"/>
-                <a:ea typeface="Roboto"/>
-                <a:cs typeface="Roboto"/>
-                <a:sym typeface="Roboto"/>
-              </a:defRPr>
-            </a:lvl5pPr>
-            <a:lvl6pPr marL="2743200" marR="0" lvl="5" indent="-298450" algn="l" rtl="0">
-              <a:lnSpc>
-                <a:spcPct val="115000"/>
-              </a:lnSpc>
-              <a:spcBef>
-                <a:spcPts val="1600"/>
-              </a:spcBef>
-              <a:spcAft>
-                <a:spcPts val="0"/>
-              </a:spcAft>
-              <a:buClr>
-                <a:schemeClr val="dk2"/>
-              </a:buClr>
-              <a:buSzPts val="1100"/>
-              <a:buFont typeface="Roboto"/>
-              <a:buChar char="■"/>
-              <a:defRPr sz="1100" b="0" i="0" u="none" strike="noStrike" cap="none">
-                <a:solidFill>
-                  <a:schemeClr val="dk2"/>
-                </a:solidFill>
-                <a:latin typeface="Roboto"/>
-                <a:ea typeface="Roboto"/>
-                <a:cs typeface="Roboto"/>
-                <a:sym typeface="Roboto"/>
-              </a:defRPr>
-            </a:lvl6pPr>
-            <a:lvl7pPr marL="3200400" marR="0" lvl="6" indent="-298450" algn="l" rtl="0">
-              <a:lnSpc>
-                <a:spcPct val="115000"/>
-              </a:lnSpc>
-              <a:spcBef>
-                <a:spcPts val="1600"/>
-              </a:spcBef>
-              <a:spcAft>
-                <a:spcPts val="0"/>
-              </a:spcAft>
-              <a:buClr>
-                <a:schemeClr val="dk2"/>
-              </a:buClr>
-              <a:buSzPts val="1100"/>
-              <a:buFont typeface="Roboto"/>
-              <a:buChar char="●"/>
-              <a:defRPr sz="1100" b="0" i="0" u="none" strike="noStrike" cap="none">
-                <a:solidFill>
-                  <a:schemeClr val="dk2"/>
-                </a:solidFill>
-                <a:latin typeface="Roboto"/>
-                <a:ea typeface="Roboto"/>
-                <a:cs typeface="Roboto"/>
-                <a:sym typeface="Roboto"/>
-              </a:defRPr>
-            </a:lvl7pPr>
-            <a:lvl8pPr marL="3657600" marR="0" lvl="7" indent="-298450" algn="l" rtl="0">
-              <a:lnSpc>
-                <a:spcPct val="115000"/>
-              </a:lnSpc>
-              <a:spcBef>
-                <a:spcPts val="1600"/>
-              </a:spcBef>
-              <a:spcAft>
-                <a:spcPts val="0"/>
-              </a:spcAft>
-              <a:buClr>
-                <a:schemeClr val="dk2"/>
-              </a:buClr>
-              <a:buSzPts val="1100"/>
-              <a:buFont typeface="Roboto"/>
-              <a:buChar char="○"/>
-              <a:defRPr sz="1100" b="0" i="0" u="none" strike="noStrike" cap="none">
-                <a:solidFill>
-                  <a:schemeClr val="dk2"/>
-                </a:solidFill>
-                <a:latin typeface="Roboto"/>
-                <a:ea typeface="Roboto"/>
-                <a:cs typeface="Roboto"/>
-                <a:sym typeface="Roboto"/>
-              </a:defRPr>
-            </a:lvl8pPr>
-            <a:lvl9pPr marL="4114800" marR="0" lvl="8" indent="-298450" algn="l" rtl="0">
-              <a:lnSpc>
-                <a:spcPct val="115000"/>
-              </a:lnSpc>
-              <a:spcBef>
-                <a:spcPts val="1600"/>
-              </a:spcBef>
-              <a:spcAft>
-                <a:spcPts val="1600"/>
-              </a:spcAft>
-              <a:buClr>
-                <a:schemeClr val="dk2"/>
-              </a:buClr>
-              <a:buSzPts val="1100"/>
-              <a:buFont typeface="Roboto"/>
-              <a:buChar char="■"/>
-              <a:defRPr sz="1100" b="0" i="0" u="none" strike="noStrike" cap="none">
-                <a:solidFill>
-                  <a:schemeClr val="dk2"/>
-                </a:solidFill>
-                <a:latin typeface="Roboto"/>
-                <a:ea typeface="Roboto"/>
-                <a:cs typeface="Roboto"/>
-                <a:sym typeface="Roboto"/>
-              </a:defRPr>
-            </a:lvl9pPr>
-          </a:lstStyle>
-          <a:p>
-            <a:pPr marL="0" indent="0">
-              <a:spcAft>
-                <a:spcPts val="1600"/>
-              </a:spcAft>
-              <a:buNone/>
-            </a:pPr>
-            <a:r>
-              <a:rPr lang="en-US" sz="2800" dirty="0"/>
-              <a:t>After completing the Quiz </a:t>
-            </a:r>
-          </a:p>
-          <a:p>
-            <a:pPr marL="342900" indent="-342900">
-              <a:spcAft>
-                <a:spcPts val="1600"/>
-              </a:spcAft>
-            </a:pPr>
-            <a:r>
-              <a:rPr lang="en-US" sz="2400" dirty="0"/>
-              <a:t>Clone/Pull Unit12 – git hub classroom repo for class activities</a:t>
-            </a:r>
-          </a:p>
-        </p:txBody>
-      </p:sp>
-    </p:spTree>
   </p:cSld>
   <p:clrMapOvr>
     <a:masterClrMapping/>

--- a/Presentation/Announcement.pptx
+++ b/Presentation/Announcement.pptx
@@ -8,9 +8,9 @@
     <p:notesMasterId r:id="rId15"/>
   </p:notesMasterIdLst>
   <p:sldIdLst>
-    <p:sldId id="276" r:id="rId2"/>
-    <p:sldId id="287" r:id="rId3"/>
-    <p:sldId id="278" r:id="rId4"/>
+    <p:sldId id="278" r:id="rId2"/>
+    <p:sldId id="276" r:id="rId3"/>
+    <p:sldId id="287" r:id="rId4"/>
     <p:sldId id="286" r:id="rId5"/>
     <p:sldId id="288" r:id="rId6"/>
     <p:sldId id="281" r:id="rId7"/>
@@ -826,6 +826,11 @@
         </p:txBody>
       </p:sp>
     </p:spTree>
+    <p:extLst>
+      <p:ext uri="{BB962C8B-B14F-4D97-AF65-F5344CB8AC3E}">
+        <p14:creationId xmlns:p14="http://schemas.microsoft.com/office/powerpoint/2010/main" val="4097390636"/>
+      </p:ext>
+    </p:extLst>
   </p:cSld>
   <p:clrMapOvr>
     <a:masterClrMapping/>
@@ -1250,6 +1255,104 @@
   <p:cSld>
     <p:spTree>
       <p:nvGrpSpPr>
+        <p:cNvPr id="1" name="Shape 320"/>
+        <p:cNvGrpSpPr/>
+        <p:nvPr/>
+      </p:nvGrpSpPr>
+      <p:grpSpPr>
+        <a:xfrm>
+          <a:off x="0" y="0"/>
+          <a:ext cx="0" cy="0"/>
+          <a:chOff x="0" y="0"/>
+          <a:chExt cx="0" cy="0"/>
+        </a:xfrm>
+      </p:grpSpPr>
+      <p:sp>
+        <p:nvSpPr>
+          <p:cNvPr id="321" name="Google Shape;321;g8f52c9b70a_3_0:notes"/>
+          <p:cNvSpPr>
+            <a:spLocks noGrp="1" noRot="1" noChangeAspect="1"/>
+          </p:cNvSpPr>
+          <p:nvPr>
+            <p:ph type="sldImg" idx="2"/>
+          </p:nvPr>
+        </p:nvSpPr>
+        <p:spPr>
+          <a:xfrm>
+            <a:off x="406400" y="696913"/>
+            <a:ext cx="6197600" cy="3486150"/>
+          </a:xfrm>
+          <a:custGeom>
+            <a:avLst/>
+            <a:gdLst/>
+            <a:ahLst/>
+            <a:cxnLst/>
+            <a:rect l="l" t="t" r="r" b="b"/>
+            <a:pathLst>
+              <a:path w="120000" h="120000" extrusionOk="0">
+                <a:moveTo>
+                  <a:pt x="0" y="0"/>
+                </a:moveTo>
+                <a:lnTo>
+                  <a:pt x="120000" y="0"/>
+                </a:lnTo>
+                <a:lnTo>
+                  <a:pt x="120000" y="120000"/>
+                </a:lnTo>
+                <a:lnTo>
+                  <a:pt x="0" y="120000"/>
+                </a:lnTo>
+                <a:close/>
+              </a:path>
+            </a:pathLst>
+          </a:custGeom>
+        </p:spPr>
+      </p:sp>
+      <p:sp>
+        <p:nvSpPr>
+          <p:cNvPr id="322" name="Google Shape;322;g8f52c9b70a_3_0:notes"/>
+          <p:cNvSpPr txBox="1">
+            <a:spLocks noGrp="1"/>
+          </p:cNvSpPr>
+          <p:nvPr>
+            <p:ph type="body" idx="1"/>
+          </p:nvPr>
+        </p:nvSpPr>
+        <p:spPr>
+          <a:xfrm>
+            <a:off x="701040" y="4415790"/>
+            <a:ext cx="5608320" cy="4183380"/>
+          </a:xfrm>
+          <a:prstGeom prst="rect">
+            <a:avLst/>
+          </a:prstGeom>
+        </p:spPr>
+        <p:txBody>
+          <a:bodyPr spcFirstLastPara="1" wrap="square" lIns="93162" tIns="93162" rIns="93162" bIns="93162" anchor="t" anchorCtr="0">
+            <a:noAutofit/>
+          </a:bodyPr>
+          <a:lstStyle/>
+          <a:p>
+            <a:pPr marL="0" indent="0">
+              <a:buNone/>
+            </a:pPr>
+            <a:endParaRPr/>
+          </a:p>
+        </p:txBody>
+      </p:sp>
+    </p:spTree>
+  </p:cSld>
+  <p:clrMapOvr>
+    <a:masterClrMapping/>
+  </p:clrMapOvr>
+</p:notes>
+</file>
+
+<file path=ppt/notesSlides/notesSlide3.xml><?xml version="1.0" encoding="utf-8"?>
+<p:notes xmlns:a="http://schemas.openxmlformats.org/drawingml/2006/main" xmlns:r="http://schemas.openxmlformats.org/officeDocument/2006/relationships" xmlns:p="http://schemas.openxmlformats.org/presentationml/2006/main" showMasterSp="0" showMasterPhAnim="0">
+  <p:cSld>
+    <p:spTree>
+      <p:nvGrpSpPr>
         <p:cNvPr id="1" name="Shape 320">
           <a:extLst>
             <a:ext uri="{FF2B5EF4-FFF2-40B4-BE49-F238E27FC236}">
@@ -1357,109 +1460,6 @@
     <p:extLst>
       <p:ext uri="{BB962C8B-B14F-4D97-AF65-F5344CB8AC3E}">
         <p14:creationId xmlns:p14="http://schemas.microsoft.com/office/powerpoint/2010/main" val="1738943008"/>
-      </p:ext>
-    </p:extLst>
-  </p:cSld>
-  <p:clrMapOvr>
-    <a:masterClrMapping/>
-  </p:clrMapOvr>
-</p:notes>
-</file>
-
-<file path=ppt/notesSlides/notesSlide3.xml><?xml version="1.0" encoding="utf-8"?>
-<p:notes xmlns:a="http://schemas.openxmlformats.org/drawingml/2006/main" xmlns:r="http://schemas.openxmlformats.org/officeDocument/2006/relationships" xmlns:p="http://schemas.openxmlformats.org/presentationml/2006/main" showMasterSp="0" showMasterPhAnim="0">
-  <p:cSld>
-    <p:spTree>
-      <p:nvGrpSpPr>
-        <p:cNvPr id="1" name="Shape 320"/>
-        <p:cNvGrpSpPr/>
-        <p:nvPr/>
-      </p:nvGrpSpPr>
-      <p:grpSpPr>
-        <a:xfrm>
-          <a:off x="0" y="0"/>
-          <a:ext cx="0" cy="0"/>
-          <a:chOff x="0" y="0"/>
-          <a:chExt cx="0" cy="0"/>
-        </a:xfrm>
-      </p:grpSpPr>
-      <p:sp>
-        <p:nvSpPr>
-          <p:cNvPr id="321" name="Google Shape;321;g8f52c9b70a_3_0:notes"/>
-          <p:cNvSpPr>
-            <a:spLocks noGrp="1" noRot="1" noChangeAspect="1"/>
-          </p:cNvSpPr>
-          <p:nvPr>
-            <p:ph type="sldImg" idx="2"/>
-          </p:nvPr>
-        </p:nvSpPr>
-        <p:spPr>
-          <a:xfrm>
-            <a:off x="406400" y="696913"/>
-            <a:ext cx="6197600" cy="3486150"/>
-          </a:xfrm>
-          <a:custGeom>
-            <a:avLst/>
-            <a:gdLst/>
-            <a:ahLst/>
-            <a:cxnLst/>
-            <a:rect l="l" t="t" r="r" b="b"/>
-            <a:pathLst>
-              <a:path w="120000" h="120000" extrusionOk="0">
-                <a:moveTo>
-                  <a:pt x="0" y="0"/>
-                </a:moveTo>
-                <a:lnTo>
-                  <a:pt x="120000" y="0"/>
-                </a:lnTo>
-                <a:lnTo>
-                  <a:pt x="120000" y="120000"/>
-                </a:lnTo>
-                <a:lnTo>
-                  <a:pt x="0" y="120000"/>
-                </a:lnTo>
-                <a:close/>
-              </a:path>
-            </a:pathLst>
-          </a:custGeom>
-        </p:spPr>
-      </p:sp>
-      <p:sp>
-        <p:nvSpPr>
-          <p:cNvPr id="322" name="Google Shape;322;g8f52c9b70a_3_0:notes"/>
-          <p:cNvSpPr txBox="1">
-            <a:spLocks noGrp="1"/>
-          </p:cNvSpPr>
-          <p:nvPr>
-            <p:ph type="body" idx="1"/>
-          </p:nvPr>
-        </p:nvSpPr>
-        <p:spPr>
-          <a:xfrm>
-            <a:off x="701040" y="4415790"/>
-            <a:ext cx="5608320" cy="4183380"/>
-          </a:xfrm>
-          <a:prstGeom prst="rect">
-            <a:avLst/>
-          </a:prstGeom>
-        </p:spPr>
-        <p:txBody>
-          <a:bodyPr spcFirstLastPara="1" wrap="square" lIns="93162" tIns="93162" rIns="93162" bIns="93162" anchor="t" anchorCtr="0">
-            <a:noAutofit/>
-          </a:bodyPr>
-          <a:lstStyle/>
-          <a:p>
-            <a:pPr marL="0" indent="0">
-              <a:buNone/>
-            </a:pPr>
-            <a:endParaRPr/>
-          </a:p>
-        </p:txBody>
-      </p:sp>
-    </p:spTree>
-    <p:extLst>
-      <p:ext uri="{BB962C8B-B14F-4D97-AF65-F5344CB8AC3E}">
-        <p14:creationId xmlns:p14="http://schemas.microsoft.com/office/powerpoint/2010/main" val="4097390636"/>
       </p:ext>
     </p:extLst>
   </p:cSld>
@@ -6675,6 +6675,1193 @@
         </p:nvSpPr>
         <p:spPr>
           <a:xfrm>
+            <a:off x="314621" y="235914"/>
+            <a:ext cx="8520600" cy="623700"/>
+          </a:xfrm>
+          <a:prstGeom prst="rect">
+            <a:avLst/>
+          </a:prstGeom>
+        </p:spPr>
+        <p:txBody>
+          <a:bodyPr spcFirstLastPara="1" wrap="square" lIns="91425" tIns="91425" rIns="91425" bIns="91425" anchor="t" anchorCtr="0">
+            <a:noAutofit/>
+          </a:bodyPr>
+          <a:lstStyle/>
+          <a:p>
+            <a:pPr marL="0" lvl="0" indent="0" algn="ctr" rtl="0">
+              <a:spcBef>
+                <a:spcPts val="0"/>
+              </a:spcBef>
+              <a:spcAft>
+                <a:spcPts val="0"/>
+              </a:spcAft>
+              <a:buNone/>
+            </a:pPr>
+            <a:r>
+              <a:rPr lang="en-US" dirty="0"/>
+              <a:t>GCIS – Software Development and Problem Solving</a:t>
+            </a:r>
+            <a:endParaRPr dirty="0"/>
+          </a:p>
+        </p:txBody>
+      </p:sp>
+      <p:sp>
+        <p:nvSpPr>
+          <p:cNvPr id="325" name="Google Shape;325;p47"/>
+          <p:cNvSpPr txBox="1">
+            <a:spLocks noGrp="1"/>
+          </p:cNvSpPr>
+          <p:nvPr>
+            <p:ph type="body" idx="1"/>
+          </p:nvPr>
+        </p:nvSpPr>
+        <p:spPr>
+          <a:xfrm>
+            <a:off x="0" y="1608922"/>
+            <a:ext cx="9149842" cy="1226403"/>
+          </a:xfrm>
+          <a:prstGeom prst="rect">
+            <a:avLst/>
+          </a:prstGeom>
+        </p:spPr>
+        <p:txBody>
+          <a:bodyPr spcFirstLastPara="1" wrap="square" lIns="91425" tIns="91425" rIns="91425" bIns="91425" anchor="ctr" anchorCtr="0">
+            <a:noAutofit/>
+          </a:bodyPr>
+          <a:lstStyle/>
+          <a:p>
+            <a:pPr marL="146050" indent="0" algn="ctr">
+              <a:buNone/>
+            </a:pPr>
+            <a:r>
+              <a:rPr lang="en-US" sz="2400" dirty="0"/>
+              <a:t>Take Quiz – Final Exam</a:t>
+            </a:r>
+          </a:p>
+          <a:p>
+            <a:pPr marL="146050" indent="0" algn="ctr">
+              <a:buNone/>
+            </a:pPr>
+            <a:r>
+              <a:rPr lang="en-US" sz="3200" b="1" dirty="0">
+                <a:solidFill>
+                  <a:schemeClr val="tx1"/>
+                </a:solidFill>
+              </a:rPr>
+              <a:t>Password -</a:t>
+            </a:r>
+            <a:r>
+              <a:rPr lang="en-US" sz="3200" b="1" dirty="0" err="1">
+                <a:solidFill>
+                  <a:schemeClr val="tx1"/>
+                </a:solidFill>
+              </a:rPr>
+              <a:t>EndOfJava</a:t>
+            </a:r>
+            <a:endParaRPr sz="3200" b="1" dirty="0">
+              <a:solidFill>
+                <a:schemeClr val="tx1"/>
+              </a:solidFill>
+              <a:highlight>
+                <a:srgbClr val="FFFF00"/>
+              </a:highlight>
+            </a:endParaRPr>
+          </a:p>
+        </p:txBody>
+      </p:sp>
+      <p:sp>
+        <p:nvSpPr>
+          <p:cNvPr id="326" name="Google Shape;326;p47"/>
+          <p:cNvSpPr txBox="1">
+            <a:spLocks noGrp="1"/>
+          </p:cNvSpPr>
+          <p:nvPr>
+            <p:ph type="sldNum" idx="12"/>
+          </p:nvPr>
+        </p:nvSpPr>
+        <p:spPr>
+          <a:xfrm>
+            <a:off x="8472458" y="4663217"/>
+            <a:ext cx="548700" cy="393600"/>
+          </a:xfrm>
+          <a:prstGeom prst="rect">
+            <a:avLst/>
+          </a:prstGeom>
+        </p:spPr>
+        <p:txBody>
+          <a:bodyPr spcFirstLastPara="1" wrap="square" lIns="91425" tIns="91425" rIns="91425" bIns="91425" anchor="ctr" anchorCtr="0">
+            <a:noAutofit/>
+          </a:bodyPr>
+          <a:lstStyle/>
+          <a:p>
+            <a:pPr marL="0" lvl="0" indent="0" algn="r" rtl="0">
+              <a:spcBef>
+                <a:spcPts val="0"/>
+              </a:spcBef>
+              <a:spcAft>
+                <a:spcPts val="0"/>
+              </a:spcAft>
+              <a:buNone/>
+            </a:pPr>
+            <a:fld id="{00000000-1234-1234-1234-123412341234}" type="slidenum">
+              <a:rPr lang="en"/>
+              <a:t>1</a:t>
+            </a:fld>
+            <a:endParaRPr/>
+          </a:p>
+        </p:txBody>
+      </p:sp>
+      <p:sp>
+        <p:nvSpPr>
+          <p:cNvPr id="2" name="TextBox 1">
+            <a:extLst>
+              <a:ext uri="{FF2B5EF4-FFF2-40B4-BE49-F238E27FC236}">
+                <a16:creationId xmlns:a16="http://schemas.microsoft.com/office/drawing/2014/main" id="{DCC33EBB-1C9D-B9A9-88E6-F3466077417F}"/>
+              </a:ext>
+            </a:extLst>
+          </p:cNvPr>
+          <p:cNvSpPr txBox="1"/>
+          <p:nvPr/>
+        </p:nvSpPr>
+        <p:spPr>
+          <a:xfrm>
+            <a:off x="-5842" y="1277369"/>
+            <a:ext cx="9144000" cy="307777"/>
+          </a:xfrm>
+          <a:prstGeom prst="rect">
+            <a:avLst/>
+          </a:prstGeom>
+          <a:solidFill>
+            <a:srgbClr val="FFC000"/>
+          </a:solidFill>
+        </p:spPr>
+        <p:txBody>
+          <a:bodyPr wrap="square" rtlCol="0">
+            <a:spAutoFit/>
+          </a:bodyPr>
+          <a:lstStyle/>
+          <a:p>
+            <a:pPr algn="ctr"/>
+            <a:r>
+              <a:rPr lang="en-US" b="1" dirty="0"/>
+              <a:t>Final Exam - Written</a:t>
+            </a:r>
+          </a:p>
+        </p:txBody>
+      </p:sp>
+      <p:sp>
+        <p:nvSpPr>
+          <p:cNvPr id="3" name="TextBox 2">
+            <a:extLst>
+              <a:ext uri="{FF2B5EF4-FFF2-40B4-BE49-F238E27FC236}">
+                <a16:creationId xmlns:a16="http://schemas.microsoft.com/office/drawing/2014/main" id="{25A19346-2F9F-0DB9-0B08-CF872EB1D563}"/>
+              </a:ext>
+            </a:extLst>
+          </p:cNvPr>
+          <p:cNvSpPr txBox="1"/>
+          <p:nvPr/>
+        </p:nvSpPr>
+        <p:spPr>
+          <a:xfrm>
+            <a:off x="0" y="2886770"/>
+            <a:ext cx="9144000" cy="307777"/>
+          </a:xfrm>
+          <a:prstGeom prst="rect">
+            <a:avLst/>
+          </a:prstGeom>
+          <a:solidFill>
+            <a:srgbClr val="FFC000"/>
+          </a:solidFill>
+        </p:spPr>
+        <p:txBody>
+          <a:bodyPr wrap="square" rtlCol="0">
+            <a:spAutoFit/>
+          </a:bodyPr>
+          <a:lstStyle/>
+          <a:p>
+            <a:r>
+              <a:rPr lang="en-US" dirty="0"/>
+              <a:t>Practicum</a:t>
+            </a:r>
+          </a:p>
+        </p:txBody>
+      </p:sp>
+      <p:sp>
+        <p:nvSpPr>
+          <p:cNvPr id="4" name="Google Shape;325;p47">
+            <a:extLst>
+              <a:ext uri="{FF2B5EF4-FFF2-40B4-BE49-F238E27FC236}">
+                <a16:creationId xmlns:a16="http://schemas.microsoft.com/office/drawing/2014/main" id="{11D0E6FB-E344-369B-CE83-B3CF5834F823}"/>
+              </a:ext>
+            </a:extLst>
+          </p:cNvPr>
+          <p:cNvSpPr txBox="1">
+            <a:spLocks/>
+          </p:cNvSpPr>
+          <p:nvPr/>
+        </p:nvSpPr>
+        <p:spPr>
+          <a:xfrm>
+            <a:off x="122842" y="3424963"/>
+            <a:ext cx="8478300" cy="1435054"/>
+          </a:xfrm>
+          <a:prstGeom prst="rect">
+            <a:avLst/>
+          </a:prstGeom>
+          <a:noFill/>
+          <a:ln>
+            <a:noFill/>
+          </a:ln>
+        </p:spPr>
+        <p:txBody>
+          <a:bodyPr spcFirstLastPara="1" wrap="square" lIns="91425" tIns="91425" rIns="91425" bIns="91425" anchor="ctr" anchorCtr="0">
+            <a:noAutofit/>
+          </a:bodyPr>
+          <a:lstStyle>
+            <a:defPPr marR="0" lvl="0" algn="l" rtl="0">
+              <a:lnSpc>
+                <a:spcPct val="100000"/>
+              </a:lnSpc>
+              <a:spcBef>
+                <a:spcPts val="0"/>
+              </a:spcBef>
+              <a:spcAft>
+                <a:spcPts val="0"/>
+              </a:spcAft>
+            </a:defPPr>
+            <a:lvl1pPr marL="457200" marR="0" lvl="0" indent="-311150" algn="l" rtl="0">
+              <a:lnSpc>
+                <a:spcPct val="115000"/>
+              </a:lnSpc>
+              <a:spcBef>
+                <a:spcPts val="0"/>
+              </a:spcBef>
+              <a:spcAft>
+                <a:spcPts val="0"/>
+              </a:spcAft>
+              <a:buClr>
+                <a:schemeClr val="dk2"/>
+              </a:buClr>
+              <a:buSzPts val="1300"/>
+              <a:buFont typeface="Roboto"/>
+              <a:buChar char="●"/>
+              <a:defRPr sz="1300" b="0" i="0" u="none" strike="noStrike" cap="none">
+                <a:solidFill>
+                  <a:schemeClr val="dk2"/>
+                </a:solidFill>
+                <a:latin typeface="Roboto"/>
+                <a:ea typeface="Roboto"/>
+                <a:cs typeface="Roboto"/>
+                <a:sym typeface="Roboto"/>
+              </a:defRPr>
+            </a:lvl1pPr>
+            <a:lvl2pPr marL="914400" marR="0" lvl="1" indent="-298450" algn="l" rtl="0">
+              <a:lnSpc>
+                <a:spcPct val="115000"/>
+              </a:lnSpc>
+              <a:spcBef>
+                <a:spcPts val="1600"/>
+              </a:spcBef>
+              <a:spcAft>
+                <a:spcPts val="0"/>
+              </a:spcAft>
+              <a:buClr>
+                <a:schemeClr val="dk2"/>
+              </a:buClr>
+              <a:buSzPts val="1100"/>
+              <a:buFont typeface="Roboto"/>
+              <a:buChar char="○"/>
+              <a:defRPr sz="1100" b="0" i="0" u="none" strike="noStrike" cap="none">
+                <a:solidFill>
+                  <a:schemeClr val="dk2"/>
+                </a:solidFill>
+                <a:latin typeface="Roboto"/>
+                <a:ea typeface="Roboto"/>
+                <a:cs typeface="Roboto"/>
+                <a:sym typeface="Roboto"/>
+              </a:defRPr>
+            </a:lvl2pPr>
+            <a:lvl3pPr marL="1371600" marR="0" lvl="2" indent="-298450" algn="l" rtl="0">
+              <a:lnSpc>
+                <a:spcPct val="115000"/>
+              </a:lnSpc>
+              <a:spcBef>
+                <a:spcPts val="1600"/>
+              </a:spcBef>
+              <a:spcAft>
+                <a:spcPts val="0"/>
+              </a:spcAft>
+              <a:buClr>
+                <a:schemeClr val="dk2"/>
+              </a:buClr>
+              <a:buSzPts val="1100"/>
+              <a:buFont typeface="Roboto"/>
+              <a:buChar char="■"/>
+              <a:defRPr sz="1100" b="0" i="0" u="none" strike="noStrike" cap="none">
+                <a:solidFill>
+                  <a:schemeClr val="dk2"/>
+                </a:solidFill>
+                <a:latin typeface="Roboto"/>
+                <a:ea typeface="Roboto"/>
+                <a:cs typeface="Roboto"/>
+                <a:sym typeface="Roboto"/>
+              </a:defRPr>
+            </a:lvl3pPr>
+            <a:lvl4pPr marL="1828800" marR="0" lvl="3" indent="-298450" algn="l" rtl="0">
+              <a:lnSpc>
+                <a:spcPct val="115000"/>
+              </a:lnSpc>
+              <a:spcBef>
+                <a:spcPts val="1600"/>
+              </a:spcBef>
+              <a:spcAft>
+                <a:spcPts val="0"/>
+              </a:spcAft>
+              <a:buClr>
+                <a:schemeClr val="dk2"/>
+              </a:buClr>
+              <a:buSzPts val="1100"/>
+              <a:buFont typeface="Roboto"/>
+              <a:buChar char="●"/>
+              <a:defRPr sz="1100" b="0" i="0" u="none" strike="noStrike" cap="none">
+                <a:solidFill>
+                  <a:schemeClr val="dk2"/>
+                </a:solidFill>
+                <a:latin typeface="Roboto"/>
+                <a:ea typeface="Roboto"/>
+                <a:cs typeface="Roboto"/>
+                <a:sym typeface="Roboto"/>
+              </a:defRPr>
+            </a:lvl4pPr>
+            <a:lvl5pPr marL="2286000" marR="0" lvl="4" indent="-298450" algn="l" rtl="0">
+              <a:lnSpc>
+                <a:spcPct val="115000"/>
+              </a:lnSpc>
+              <a:spcBef>
+                <a:spcPts val="1600"/>
+              </a:spcBef>
+              <a:spcAft>
+                <a:spcPts val="0"/>
+              </a:spcAft>
+              <a:buClr>
+                <a:schemeClr val="dk2"/>
+              </a:buClr>
+              <a:buSzPts val="1100"/>
+              <a:buFont typeface="Roboto"/>
+              <a:buChar char="○"/>
+              <a:defRPr sz="1100" b="0" i="0" u="none" strike="noStrike" cap="none">
+                <a:solidFill>
+                  <a:schemeClr val="dk2"/>
+                </a:solidFill>
+                <a:latin typeface="Roboto"/>
+                <a:ea typeface="Roboto"/>
+                <a:cs typeface="Roboto"/>
+                <a:sym typeface="Roboto"/>
+              </a:defRPr>
+            </a:lvl5pPr>
+            <a:lvl6pPr marL="2743200" marR="0" lvl="5" indent="-298450" algn="l" rtl="0">
+              <a:lnSpc>
+                <a:spcPct val="115000"/>
+              </a:lnSpc>
+              <a:spcBef>
+                <a:spcPts val="1600"/>
+              </a:spcBef>
+              <a:spcAft>
+                <a:spcPts val="0"/>
+              </a:spcAft>
+              <a:buClr>
+                <a:schemeClr val="dk2"/>
+              </a:buClr>
+              <a:buSzPts val="1100"/>
+              <a:buFont typeface="Roboto"/>
+              <a:buChar char="■"/>
+              <a:defRPr sz="1100" b="0" i="0" u="none" strike="noStrike" cap="none">
+                <a:solidFill>
+                  <a:schemeClr val="dk2"/>
+                </a:solidFill>
+                <a:latin typeface="Roboto"/>
+                <a:ea typeface="Roboto"/>
+                <a:cs typeface="Roboto"/>
+                <a:sym typeface="Roboto"/>
+              </a:defRPr>
+            </a:lvl6pPr>
+            <a:lvl7pPr marL="3200400" marR="0" lvl="6" indent="-298450" algn="l" rtl="0">
+              <a:lnSpc>
+                <a:spcPct val="115000"/>
+              </a:lnSpc>
+              <a:spcBef>
+                <a:spcPts val="1600"/>
+              </a:spcBef>
+              <a:spcAft>
+                <a:spcPts val="0"/>
+              </a:spcAft>
+              <a:buClr>
+                <a:schemeClr val="dk2"/>
+              </a:buClr>
+              <a:buSzPts val="1100"/>
+              <a:buFont typeface="Roboto"/>
+              <a:buChar char="●"/>
+              <a:defRPr sz="1100" b="0" i="0" u="none" strike="noStrike" cap="none">
+                <a:solidFill>
+                  <a:schemeClr val="dk2"/>
+                </a:solidFill>
+                <a:latin typeface="Roboto"/>
+                <a:ea typeface="Roboto"/>
+                <a:cs typeface="Roboto"/>
+                <a:sym typeface="Roboto"/>
+              </a:defRPr>
+            </a:lvl7pPr>
+            <a:lvl8pPr marL="3657600" marR="0" lvl="7" indent="-298450" algn="l" rtl="0">
+              <a:lnSpc>
+                <a:spcPct val="115000"/>
+              </a:lnSpc>
+              <a:spcBef>
+                <a:spcPts val="1600"/>
+              </a:spcBef>
+              <a:spcAft>
+                <a:spcPts val="0"/>
+              </a:spcAft>
+              <a:buClr>
+                <a:schemeClr val="dk2"/>
+              </a:buClr>
+              <a:buSzPts val="1100"/>
+              <a:buFont typeface="Roboto"/>
+              <a:buChar char="○"/>
+              <a:defRPr sz="1100" b="0" i="0" u="none" strike="noStrike" cap="none">
+                <a:solidFill>
+                  <a:schemeClr val="dk2"/>
+                </a:solidFill>
+                <a:latin typeface="Roboto"/>
+                <a:ea typeface="Roboto"/>
+                <a:cs typeface="Roboto"/>
+                <a:sym typeface="Roboto"/>
+              </a:defRPr>
+            </a:lvl8pPr>
+            <a:lvl9pPr marL="4114800" marR="0" lvl="8" indent="-298450" algn="l" rtl="0">
+              <a:lnSpc>
+                <a:spcPct val="115000"/>
+              </a:lnSpc>
+              <a:spcBef>
+                <a:spcPts val="1600"/>
+              </a:spcBef>
+              <a:spcAft>
+                <a:spcPts val="1600"/>
+              </a:spcAft>
+              <a:buClr>
+                <a:schemeClr val="dk2"/>
+              </a:buClr>
+              <a:buSzPts val="1100"/>
+              <a:buFont typeface="Roboto"/>
+              <a:buChar char="■"/>
+              <a:defRPr sz="1100" b="0" i="0" u="none" strike="noStrike" cap="none">
+                <a:solidFill>
+                  <a:schemeClr val="dk2"/>
+                </a:solidFill>
+                <a:latin typeface="Roboto"/>
+                <a:ea typeface="Roboto"/>
+                <a:cs typeface="Roboto"/>
+                <a:sym typeface="Roboto"/>
+              </a:defRPr>
+            </a:lvl9pPr>
+          </a:lstStyle>
+          <a:p>
+            <a:pPr marL="342900" indent="-342900">
+              <a:spcAft>
+                <a:spcPts val="1600"/>
+              </a:spcAft>
+            </a:pPr>
+            <a:r>
+              <a:rPr lang="en-US" sz="1600" dirty="0"/>
+              <a:t>Accept assignment Final Exam under Instructor -&gt; Alam -&gt; Exam and </a:t>
+            </a:r>
+            <a:r>
+              <a:rPr lang="en-US" sz="1600" dirty="0">
+                <a:solidFill>
+                  <a:schemeClr val="tx1"/>
+                </a:solidFill>
+              </a:rPr>
+              <a:t>Clone the repository for </a:t>
+            </a:r>
+            <a:r>
+              <a:rPr lang="en-US" sz="1600" dirty="0"/>
+              <a:t>Final Exam</a:t>
+            </a:r>
+          </a:p>
+          <a:p>
+            <a:pPr marL="342900" indent="-342900">
+              <a:spcAft>
+                <a:spcPts val="1600"/>
+              </a:spcAft>
+            </a:pPr>
+            <a:r>
+              <a:rPr lang="en-US" sz="1600" dirty="0">
+                <a:solidFill>
+                  <a:schemeClr val="tx1"/>
+                </a:solidFill>
+              </a:rPr>
+              <a:t>Auto Commit is enabled for your repository. </a:t>
+            </a:r>
+            <a:r>
+              <a:rPr lang="en-US" sz="1600" b="1" dirty="0">
+                <a:solidFill>
+                  <a:schemeClr val="tx1"/>
+                </a:solidFill>
+              </a:rPr>
+              <a:t>DO NOT disable it. Disable code completion/co-pilot. Reach out to instructor or TA if you need help.</a:t>
+            </a:r>
+          </a:p>
+        </p:txBody>
+      </p:sp>
+    </p:spTree>
+    <p:extLst>
+      <p:ext uri="{BB962C8B-B14F-4D97-AF65-F5344CB8AC3E}">
+        <p14:creationId xmlns:p14="http://schemas.microsoft.com/office/powerpoint/2010/main" val="943055912"/>
+      </p:ext>
+    </p:extLst>
+  </p:cSld>
+  <p:clrMapOvr>
+    <a:masterClrMapping/>
+  </p:clrMapOvr>
+</p:sld>
+</file>
+
+<file path=ppt/slides/slide10.xml><?xml version="1.0" encoding="utf-8"?>
+<p:sld xmlns:a="http://schemas.openxmlformats.org/drawingml/2006/main" xmlns:r="http://schemas.openxmlformats.org/officeDocument/2006/relationships" xmlns:p="http://schemas.openxmlformats.org/presentationml/2006/main" show="0">
+  <p:cSld>
+    <p:spTree>
+      <p:nvGrpSpPr>
+        <p:cNvPr id="1" name="Shape 323"/>
+        <p:cNvGrpSpPr/>
+        <p:nvPr/>
+      </p:nvGrpSpPr>
+      <p:grpSpPr>
+        <a:xfrm>
+          <a:off x="0" y="0"/>
+          <a:ext cx="0" cy="0"/>
+          <a:chOff x="0" y="0"/>
+          <a:chExt cx="0" cy="0"/>
+        </a:xfrm>
+      </p:grpSpPr>
+      <p:sp>
+        <p:nvSpPr>
+          <p:cNvPr id="324" name="Google Shape;324;p47"/>
+          <p:cNvSpPr txBox="1">
+            <a:spLocks noGrp="1"/>
+          </p:cNvSpPr>
+          <p:nvPr>
+            <p:ph type="title"/>
+          </p:nvPr>
+        </p:nvSpPr>
+        <p:spPr>
+          <a:xfrm>
+            <a:off x="226208" y="1"/>
+            <a:ext cx="8520600" cy="464980"/>
+          </a:xfrm>
+          <a:prstGeom prst="rect">
+            <a:avLst/>
+          </a:prstGeom>
+        </p:spPr>
+        <p:txBody>
+          <a:bodyPr spcFirstLastPara="1" wrap="square" lIns="91425" tIns="91425" rIns="91425" bIns="91425" anchor="t" anchorCtr="0">
+            <a:noAutofit/>
+          </a:bodyPr>
+          <a:lstStyle/>
+          <a:p>
+            <a:pPr marL="0" lvl="0" indent="0" algn="ctr" rtl="0">
+              <a:spcBef>
+                <a:spcPts val="0"/>
+              </a:spcBef>
+              <a:spcAft>
+                <a:spcPts val="0"/>
+              </a:spcAft>
+              <a:buNone/>
+            </a:pPr>
+            <a:r>
+              <a:rPr lang="en-US" dirty="0"/>
+              <a:t>Use </a:t>
+            </a:r>
+            <a:r>
+              <a:rPr lang="en-US" sz="2400" dirty="0"/>
+              <a:t>Assigned</a:t>
+            </a:r>
+            <a:r>
+              <a:rPr lang="en-US" dirty="0"/>
+              <a:t> Seat</a:t>
+            </a:r>
+            <a:endParaRPr dirty="0"/>
+          </a:p>
+        </p:txBody>
+      </p:sp>
+      <p:sp>
+        <p:nvSpPr>
+          <p:cNvPr id="326" name="Google Shape;326;p47"/>
+          <p:cNvSpPr txBox="1">
+            <a:spLocks noGrp="1"/>
+          </p:cNvSpPr>
+          <p:nvPr>
+            <p:ph type="sldNum" idx="12"/>
+          </p:nvPr>
+        </p:nvSpPr>
+        <p:spPr>
+          <a:xfrm>
+            <a:off x="8472458" y="4663217"/>
+            <a:ext cx="548700" cy="393600"/>
+          </a:xfrm>
+          <a:prstGeom prst="rect">
+            <a:avLst/>
+          </a:prstGeom>
+        </p:spPr>
+        <p:txBody>
+          <a:bodyPr spcFirstLastPara="1" wrap="square" lIns="91425" tIns="91425" rIns="91425" bIns="91425" anchor="ctr" anchorCtr="0">
+            <a:noAutofit/>
+          </a:bodyPr>
+          <a:lstStyle/>
+          <a:p>
+            <a:pPr marL="0" lvl="0" indent="0" algn="r" rtl="0">
+              <a:spcBef>
+                <a:spcPts val="0"/>
+              </a:spcBef>
+              <a:spcAft>
+                <a:spcPts val="0"/>
+              </a:spcAft>
+              <a:buNone/>
+            </a:pPr>
+            <a:fld id="{00000000-1234-1234-1234-123412341234}" type="slidenum">
+              <a:rPr lang="en"/>
+              <a:t>10</a:t>
+            </a:fld>
+            <a:endParaRPr/>
+          </a:p>
+        </p:txBody>
+      </p:sp>
+      <p:pic>
+        <p:nvPicPr>
+          <p:cNvPr id="3" name="Picture 2">
+            <a:extLst>
+              <a:ext uri="{FF2B5EF4-FFF2-40B4-BE49-F238E27FC236}">
+                <a16:creationId xmlns:a16="http://schemas.microsoft.com/office/drawing/2014/main" id="{565A4964-E8A9-A46D-F4BE-E7D41C14EF1B}"/>
+              </a:ext>
+            </a:extLst>
+          </p:cNvPr>
+          <p:cNvPicPr>
+            <a:picLocks noChangeAspect="1"/>
+          </p:cNvPicPr>
+          <p:nvPr/>
+        </p:nvPicPr>
+        <p:blipFill>
+          <a:blip r:embed="rId3"/>
+          <a:stretch>
+            <a:fillRect/>
+          </a:stretch>
+        </p:blipFill>
+        <p:spPr>
+          <a:xfrm>
+            <a:off x="0" y="559220"/>
+            <a:ext cx="9144000" cy="4471763"/>
+          </a:xfrm>
+          <a:prstGeom prst="rect">
+            <a:avLst/>
+          </a:prstGeom>
+        </p:spPr>
+      </p:pic>
+    </p:spTree>
+    <p:extLst>
+      <p:ext uri="{BB962C8B-B14F-4D97-AF65-F5344CB8AC3E}">
+        <p14:creationId xmlns:p14="http://schemas.microsoft.com/office/powerpoint/2010/main" val="2495509868"/>
+      </p:ext>
+    </p:extLst>
+  </p:cSld>
+  <p:clrMapOvr>
+    <a:masterClrMapping/>
+  </p:clrMapOvr>
+</p:sld>
+</file>
+
+<file path=ppt/slides/slide11.xml><?xml version="1.0" encoding="utf-8"?>
+<p:sld xmlns:a="http://schemas.openxmlformats.org/drawingml/2006/main" xmlns:r="http://schemas.openxmlformats.org/officeDocument/2006/relationships" xmlns:p="http://schemas.openxmlformats.org/presentationml/2006/main" show="0">
+  <p:cSld>
+    <p:spTree>
+      <p:nvGrpSpPr>
+        <p:cNvPr id="1" name="Shape 323"/>
+        <p:cNvGrpSpPr/>
+        <p:nvPr/>
+      </p:nvGrpSpPr>
+      <p:grpSpPr>
+        <a:xfrm>
+          <a:off x="0" y="0"/>
+          <a:ext cx="0" cy="0"/>
+          <a:chOff x="0" y="0"/>
+          <a:chExt cx="0" cy="0"/>
+        </a:xfrm>
+      </p:grpSpPr>
+      <p:sp>
+        <p:nvSpPr>
+          <p:cNvPr id="324" name="Google Shape;324;p47"/>
+          <p:cNvSpPr txBox="1">
+            <a:spLocks noGrp="1"/>
+          </p:cNvSpPr>
+          <p:nvPr>
+            <p:ph type="title"/>
+          </p:nvPr>
+        </p:nvSpPr>
+        <p:spPr>
+          <a:xfrm>
+            <a:off x="226208" y="1"/>
+            <a:ext cx="8520600" cy="464980"/>
+          </a:xfrm>
+          <a:prstGeom prst="rect">
+            <a:avLst/>
+          </a:prstGeom>
+        </p:spPr>
+        <p:txBody>
+          <a:bodyPr spcFirstLastPara="1" wrap="square" lIns="91425" tIns="91425" rIns="91425" bIns="91425" anchor="t" anchorCtr="0">
+            <a:noAutofit/>
+          </a:bodyPr>
+          <a:lstStyle/>
+          <a:p>
+            <a:pPr marL="0" lvl="0" indent="0" algn="ctr" rtl="0">
+              <a:spcBef>
+                <a:spcPts val="0"/>
+              </a:spcBef>
+              <a:spcAft>
+                <a:spcPts val="0"/>
+              </a:spcAft>
+              <a:buNone/>
+            </a:pPr>
+            <a:r>
+              <a:rPr lang="en-US" dirty="0"/>
+              <a:t>Use </a:t>
+            </a:r>
+            <a:r>
+              <a:rPr lang="en-US" sz="2400" dirty="0"/>
+              <a:t>Assigned</a:t>
+            </a:r>
+            <a:r>
+              <a:rPr lang="en-US" dirty="0"/>
+              <a:t> Seat</a:t>
+            </a:r>
+            <a:endParaRPr dirty="0"/>
+          </a:p>
+        </p:txBody>
+      </p:sp>
+      <p:sp>
+        <p:nvSpPr>
+          <p:cNvPr id="326" name="Google Shape;326;p47"/>
+          <p:cNvSpPr txBox="1">
+            <a:spLocks noGrp="1"/>
+          </p:cNvSpPr>
+          <p:nvPr>
+            <p:ph type="sldNum" idx="12"/>
+          </p:nvPr>
+        </p:nvSpPr>
+        <p:spPr>
+          <a:xfrm>
+            <a:off x="8472458" y="4663217"/>
+            <a:ext cx="548700" cy="393600"/>
+          </a:xfrm>
+          <a:prstGeom prst="rect">
+            <a:avLst/>
+          </a:prstGeom>
+        </p:spPr>
+        <p:txBody>
+          <a:bodyPr spcFirstLastPara="1" wrap="square" lIns="91425" tIns="91425" rIns="91425" bIns="91425" anchor="ctr" anchorCtr="0">
+            <a:noAutofit/>
+          </a:bodyPr>
+          <a:lstStyle/>
+          <a:p>
+            <a:pPr marL="0" lvl="0" indent="0" algn="r" rtl="0">
+              <a:spcBef>
+                <a:spcPts val="0"/>
+              </a:spcBef>
+              <a:spcAft>
+                <a:spcPts val="0"/>
+              </a:spcAft>
+              <a:buNone/>
+            </a:pPr>
+            <a:fld id="{00000000-1234-1234-1234-123412341234}" type="slidenum">
+              <a:rPr lang="en"/>
+              <a:t>11</a:t>
+            </a:fld>
+            <a:endParaRPr/>
+          </a:p>
+        </p:txBody>
+      </p:sp>
+      <p:pic>
+        <p:nvPicPr>
+          <p:cNvPr id="6" name="Picture 5">
+            <a:extLst>
+              <a:ext uri="{FF2B5EF4-FFF2-40B4-BE49-F238E27FC236}">
+                <a16:creationId xmlns:a16="http://schemas.microsoft.com/office/drawing/2014/main" id="{DED32793-7C09-E3A3-94E5-B5D46727A1D0}"/>
+              </a:ext>
+            </a:extLst>
+          </p:cNvPr>
+          <p:cNvPicPr>
+            <a:picLocks noChangeAspect="1"/>
+          </p:cNvPicPr>
+          <p:nvPr/>
+        </p:nvPicPr>
+        <p:blipFill>
+          <a:blip r:embed="rId3"/>
+          <a:stretch>
+            <a:fillRect/>
+          </a:stretch>
+        </p:blipFill>
+        <p:spPr>
+          <a:xfrm>
+            <a:off x="-1" y="551663"/>
+            <a:ext cx="9144001" cy="4591837"/>
+          </a:xfrm>
+          <a:prstGeom prst="rect">
+            <a:avLst/>
+          </a:prstGeom>
+        </p:spPr>
+      </p:pic>
+    </p:spTree>
+    <p:extLst>
+      <p:ext uri="{BB962C8B-B14F-4D97-AF65-F5344CB8AC3E}">
+        <p14:creationId xmlns:p14="http://schemas.microsoft.com/office/powerpoint/2010/main" val="4226348449"/>
+      </p:ext>
+    </p:extLst>
+  </p:cSld>
+  <p:clrMapOvr>
+    <a:masterClrMapping/>
+  </p:clrMapOvr>
+</p:sld>
+</file>
+
+<file path=ppt/slides/slide12.xml><?xml version="1.0" encoding="utf-8"?>
+<p:sld xmlns:a="http://schemas.openxmlformats.org/drawingml/2006/main" xmlns:r="http://schemas.openxmlformats.org/officeDocument/2006/relationships" xmlns:p="http://schemas.openxmlformats.org/presentationml/2006/main" show="0">
+  <p:cSld>
+    <p:spTree>
+      <p:nvGrpSpPr>
+        <p:cNvPr id="1" name="Shape 323"/>
+        <p:cNvGrpSpPr/>
+        <p:nvPr/>
+      </p:nvGrpSpPr>
+      <p:grpSpPr>
+        <a:xfrm>
+          <a:off x="0" y="0"/>
+          <a:ext cx="0" cy="0"/>
+          <a:chOff x="0" y="0"/>
+          <a:chExt cx="0" cy="0"/>
+        </a:xfrm>
+      </p:grpSpPr>
+      <p:sp>
+        <p:nvSpPr>
+          <p:cNvPr id="324" name="Google Shape;324;p47"/>
+          <p:cNvSpPr txBox="1">
+            <a:spLocks noGrp="1"/>
+          </p:cNvSpPr>
+          <p:nvPr>
+            <p:ph type="title"/>
+          </p:nvPr>
+        </p:nvSpPr>
+        <p:spPr>
+          <a:xfrm>
+            <a:off x="226208" y="1"/>
+            <a:ext cx="8520600" cy="464980"/>
+          </a:xfrm>
+          <a:prstGeom prst="rect">
+            <a:avLst/>
+          </a:prstGeom>
+        </p:spPr>
+        <p:txBody>
+          <a:bodyPr spcFirstLastPara="1" wrap="square" lIns="91425" tIns="91425" rIns="91425" bIns="91425" anchor="t" anchorCtr="0">
+            <a:noAutofit/>
+          </a:bodyPr>
+          <a:lstStyle/>
+          <a:p>
+            <a:pPr marL="0" lvl="0" indent="0" algn="ctr" rtl="0">
+              <a:spcBef>
+                <a:spcPts val="0"/>
+              </a:spcBef>
+              <a:spcAft>
+                <a:spcPts val="0"/>
+              </a:spcAft>
+              <a:buNone/>
+            </a:pPr>
+            <a:r>
+              <a:rPr lang="en-US" dirty="0"/>
+              <a:t>Use </a:t>
+            </a:r>
+            <a:r>
+              <a:rPr lang="en-US" sz="2400" dirty="0"/>
+              <a:t>Assigned</a:t>
+            </a:r>
+            <a:r>
+              <a:rPr lang="en-US" dirty="0"/>
+              <a:t> Seat</a:t>
+            </a:r>
+            <a:endParaRPr dirty="0"/>
+          </a:p>
+        </p:txBody>
+      </p:sp>
+      <p:sp>
+        <p:nvSpPr>
+          <p:cNvPr id="326" name="Google Shape;326;p47"/>
+          <p:cNvSpPr txBox="1">
+            <a:spLocks noGrp="1"/>
+          </p:cNvSpPr>
+          <p:nvPr>
+            <p:ph type="sldNum" idx="12"/>
+          </p:nvPr>
+        </p:nvSpPr>
+        <p:spPr>
+          <a:xfrm>
+            <a:off x="8472458" y="4663217"/>
+            <a:ext cx="548700" cy="393600"/>
+          </a:xfrm>
+          <a:prstGeom prst="rect">
+            <a:avLst/>
+          </a:prstGeom>
+        </p:spPr>
+        <p:txBody>
+          <a:bodyPr spcFirstLastPara="1" wrap="square" lIns="91425" tIns="91425" rIns="91425" bIns="91425" anchor="ctr" anchorCtr="0">
+            <a:noAutofit/>
+          </a:bodyPr>
+          <a:lstStyle/>
+          <a:p>
+            <a:pPr marL="0" lvl="0" indent="0" algn="r" rtl="0">
+              <a:spcBef>
+                <a:spcPts val="0"/>
+              </a:spcBef>
+              <a:spcAft>
+                <a:spcPts val="0"/>
+              </a:spcAft>
+              <a:buNone/>
+            </a:pPr>
+            <a:fld id="{00000000-1234-1234-1234-123412341234}" type="slidenum">
+              <a:rPr lang="en"/>
+              <a:t>12</a:t>
+            </a:fld>
+            <a:endParaRPr/>
+          </a:p>
+        </p:txBody>
+      </p:sp>
+      <p:pic>
+        <p:nvPicPr>
+          <p:cNvPr id="3" name="Picture 2">
+            <a:extLst>
+              <a:ext uri="{FF2B5EF4-FFF2-40B4-BE49-F238E27FC236}">
+                <a16:creationId xmlns:a16="http://schemas.microsoft.com/office/drawing/2014/main" id="{92DE4AAC-70FE-A114-5258-F5B22EDDED45}"/>
+              </a:ext>
+            </a:extLst>
+          </p:cNvPr>
+          <p:cNvPicPr>
+            <a:picLocks noChangeAspect="1"/>
+          </p:cNvPicPr>
+          <p:nvPr/>
+        </p:nvPicPr>
+        <p:blipFill>
+          <a:blip r:embed="rId3"/>
+          <a:stretch>
+            <a:fillRect/>
+          </a:stretch>
+        </p:blipFill>
+        <p:spPr>
+          <a:xfrm>
+            <a:off x="0" y="716280"/>
+            <a:ext cx="9144000" cy="4427218"/>
+          </a:xfrm>
+          <a:prstGeom prst="rect">
+            <a:avLst/>
+          </a:prstGeom>
+        </p:spPr>
+      </p:pic>
+    </p:spTree>
+    <p:extLst>
+      <p:ext uri="{BB962C8B-B14F-4D97-AF65-F5344CB8AC3E}">
+        <p14:creationId xmlns:p14="http://schemas.microsoft.com/office/powerpoint/2010/main" val="1976403023"/>
+      </p:ext>
+    </p:extLst>
+  </p:cSld>
+  <p:clrMapOvr>
+    <a:masterClrMapping/>
+  </p:clrMapOvr>
+</p:sld>
+</file>
+
+<file path=ppt/slides/slide13.xml><?xml version="1.0" encoding="utf-8"?>
+<p:sld xmlns:a="http://schemas.openxmlformats.org/drawingml/2006/main" xmlns:r="http://schemas.openxmlformats.org/officeDocument/2006/relationships" xmlns:p="http://schemas.openxmlformats.org/presentationml/2006/main" show="0">
+  <p:cSld>
+    <p:spTree>
+      <p:nvGrpSpPr>
+        <p:cNvPr id="1" name="Shape 323"/>
+        <p:cNvGrpSpPr/>
+        <p:nvPr/>
+      </p:nvGrpSpPr>
+      <p:grpSpPr>
+        <a:xfrm>
+          <a:off x="0" y="0"/>
+          <a:ext cx="0" cy="0"/>
+          <a:chOff x="0" y="0"/>
+          <a:chExt cx="0" cy="0"/>
+        </a:xfrm>
+      </p:grpSpPr>
+      <p:sp>
+        <p:nvSpPr>
+          <p:cNvPr id="324" name="Google Shape;324;p47"/>
+          <p:cNvSpPr txBox="1">
+            <a:spLocks noGrp="1"/>
+          </p:cNvSpPr>
+          <p:nvPr>
+            <p:ph type="title"/>
+          </p:nvPr>
+        </p:nvSpPr>
+        <p:spPr>
+          <a:xfrm>
+            <a:off x="226208" y="1"/>
+            <a:ext cx="8520600" cy="464980"/>
+          </a:xfrm>
+          <a:prstGeom prst="rect">
+            <a:avLst/>
+          </a:prstGeom>
+        </p:spPr>
+        <p:txBody>
+          <a:bodyPr spcFirstLastPara="1" wrap="square" lIns="91425" tIns="91425" rIns="91425" bIns="91425" anchor="t" anchorCtr="0">
+            <a:noAutofit/>
+          </a:bodyPr>
+          <a:lstStyle/>
+          <a:p>
+            <a:pPr marL="0" lvl="0" indent="0" algn="ctr" rtl="0">
+              <a:spcBef>
+                <a:spcPts val="0"/>
+              </a:spcBef>
+              <a:spcAft>
+                <a:spcPts val="0"/>
+              </a:spcAft>
+              <a:buNone/>
+            </a:pPr>
+            <a:r>
+              <a:rPr lang="en-US" dirty="0"/>
+              <a:t>Use </a:t>
+            </a:r>
+            <a:r>
+              <a:rPr lang="en-US" sz="2400" dirty="0"/>
+              <a:t>Assigned</a:t>
+            </a:r>
+            <a:r>
+              <a:rPr lang="en-US" dirty="0"/>
+              <a:t> Seat</a:t>
+            </a:r>
+            <a:endParaRPr dirty="0"/>
+          </a:p>
+        </p:txBody>
+      </p:sp>
+      <p:sp>
+        <p:nvSpPr>
+          <p:cNvPr id="326" name="Google Shape;326;p47"/>
+          <p:cNvSpPr txBox="1">
+            <a:spLocks noGrp="1"/>
+          </p:cNvSpPr>
+          <p:nvPr>
+            <p:ph type="sldNum" idx="12"/>
+          </p:nvPr>
+        </p:nvSpPr>
+        <p:spPr>
+          <a:xfrm>
+            <a:off x="8472458" y="4663217"/>
+            <a:ext cx="548700" cy="393600"/>
+          </a:xfrm>
+          <a:prstGeom prst="rect">
+            <a:avLst/>
+          </a:prstGeom>
+        </p:spPr>
+        <p:txBody>
+          <a:bodyPr spcFirstLastPara="1" wrap="square" lIns="91425" tIns="91425" rIns="91425" bIns="91425" anchor="ctr" anchorCtr="0">
+            <a:noAutofit/>
+          </a:bodyPr>
+          <a:lstStyle/>
+          <a:p>
+            <a:pPr marL="0" lvl="0" indent="0" algn="r" rtl="0">
+              <a:spcBef>
+                <a:spcPts val="0"/>
+              </a:spcBef>
+              <a:spcAft>
+                <a:spcPts val="0"/>
+              </a:spcAft>
+              <a:buNone/>
+            </a:pPr>
+            <a:fld id="{00000000-1234-1234-1234-123412341234}" type="slidenum">
+              <a:rPr lang="en"/>
+              <a:t>13</a:t>
+            </a:fld>
+            <a:endParaRPr/>
+          </a:p>
+        </p:txBody>
+      </p:sp>
+      <p:pic>
+        <p:nvPicPr>
+          <p:cNvPr id="4" name="Picture 3">
+            <a:extLst>
+              <a:ext uri="{FF2B5EF4-FFF2-40B4-BE49-F238E27FC236}">
+                <a16:creationId xmlns:a16="http://schemas.microsoft.com/office/drawing/2014/main" id="{DCD752B9-EFAE-AFC1-7D39-6763B89DE8D3}"/>
+              </a:ext>
+            </a:extLst>
+          </p:cNvPr>
+          <p:cNvPicPr>
+            <a:picLocks noChangeAspect="1"/>
+          </p:cNvPicPr>
+          <p:nvPr/>
+        </p:nvPicPr>
+        <p:blipFill>
+          <a:blip r:embed="rId3"/>
+          <a:stretch>
+            <a:fillRect/>
+          </a:stretch>
+        </p:blipFill>
+        <p:spPr>
+          <a:xfrm>
+            <a:off x="0" y="652130"/>
+            <a:ext cx="9144000" cy="4491369"/>
+          </a:xfrm>
+          <a:prstGeom prst="rect">
+            <a:avLst/>
+          </a:prstGeom>
+        </p:spPr>
+      </p:pic>
+    </p:spTree>
+    <p:extLst>
+      <p:ext uri="{BB962C8B-B14F-4D97-AF65-F5344CB8AC3E}">
+        <p14:creationId xmlns:p14="http://schemas.microsoft.com/office/powerpoint/2010/main" val="3365057756"/>
+      </p:ext>
+    </p:extLst>
+  </p:cSld>
+  <p:clrMapOvr>
+    <a:masterClrMapping/>
+  </p:clrMapOvr>
+</p:sld>
+</file>
+
+<file path=ppt/slides/slide2.xml><?xml version="1.0" encoding="utf-8"?>
+<p:sld xmlns:a="http://schemas.openxmlformats.org/drawingml/2006/main" xmlns:r="http://schemas.openxmlformats.org/officeDocument/2006/relationships" xmlns:p="http://schemas.openxmlformats.org/presentationml/2006/main" show="0">
+  <p:cSld>
+    <p:spTree>
+      <p:nvGrpSpPr>
+        <p:cNvPr id="1" name="Shape 323"/>
+        <p:cNvGrpSpPr/>
+        <p:nvPr/>
+      </p:nvGrpSpPr>
+      <p:grpSpPr>
+        <a:xfrm>
+          <a:off x="0" y="0"/>
+          <a:ext cx="0" cy="0"/>
+          <a:chOff x="0" y="0"/>
+          <a:chExt cx="0" cy="0"/>
+        </a:xfrm>
+      </p:grpSpPr>
+      <p:sp>
+        <p:nvSpPr>
+          <p:cNvPr id="324" name="Google Shape;324;p47"/>
+          <p:cNvSpPr txBox="1">
+            <a:spLocks noGrp="1"/>
+          </p:cNvSpPr>
+          <p:nvPr>
+            <p:ph type="title"/>
+          </p:nvPr>
+        </p:nvSpPr>
+        <p:spPr>
+          <a:xfrm>
             <a:off x="305858" y="273819"/>
             <a:ext cx="8520600" cy="623700"/>
           </a:xfrm>
@@ -6823,7 +8010,7 @@
             </a:pPr>
             <a:fld id="{00000000-1234-1234-1234-123412341234}" type="slidenum">
               <a:rPr lang="en"/>
-              <a:t>1</a:t>
+              <a:t>2</a:t>
             </a:fld>
             <a:endParaRPr/>
           </a:p>
@@ -7221,615 +8408,7 @@
 </p:sld>
 </file>
 
-<file path=ppt/slides/slide10.xml><?xml version="1.0" encoding="utf-8"?>
-<p:sld xmlns:a="http://schemas.openxmlformats.org/drawingml/2006/main" xmlns:r="http://schemas.openxmlformats.org/officeDocument/2006/relationships" xmlns:p="http://schemas.openxmlformats.org/presentationml/2006/main" show="0">
-  <p:cSld>
-    <p:spTree>
-      <p:nvGrpSpPr>
-        <p:cNvPr id="1" name="Shape 323"/>
-        <p:cNvGrpSpPr/>
-        <p:nvPr/>
-      </p:nvGrpSpPr>
-      <p:grpSpPr>
-        <a:xfrm>
-          <a:off x="0" y="0"/>
-          <a:ext cx="0" cy="0"/>
-          <a:chOff x="0" y="0"/>
-          <a:chExt cx="0" cy="0"/>
-        </a:xfrm>
-      </p:grpSpPr>
-      <p:sp>
-        <p:nvSpPr>
-          <p:cNvPr id="324" name="Google Shape;324;p47"/>
-          <p:cNvSpPr txBox="1">
-            <a:spLocks noGrp="1"/>
-          </p:cNvSpPr>
-          <p:nvPr>
-            <p:ph type="title"/>
-          </p:nvPr>
-        </p:nvSpPr>
-        <p:spPr>
-          <a:xfrm>
-            <a:off x="226208" y="1"/>
-            <a:ext cx="8520600" cy="464980"/>
-          </a:xfrm>
-          <a:prstGeom prst="rect">
-            <a:avLst/>
-          </a:prstGeom>
-        </p:spPr>
-        <p:txBody>
-          <a:bodyPr spcFirstLastPara="1" wrap="square" lIns="91425" tIns="91425" rIns="91425" bIns="91425" anchor="t" anchorCtr="0">
-            <a:noAutofit/>
-          </a:bodyPr>
-          <a:lstStyle/>
-          <a:p>
-            <a:pPr marL="0" lvl="0" indent="0" algn="ctr" rtl="0">
-              <a:spcBef>
-                <a:spcPts val="0"/>
-              </a:spcBef>
-              <a:spcAft>
-                <a:spcPts val="0"/>
-              </a:spcAft>
-              <a:buNone/>
-            </a:pPr>
-            <a:r>
-              <a:rPr lang="en-US" dirty="0"/>
-              <a:t>Use </a:t>
-            </a:r>
-            <a:r>
-              <a:rPr lang="en-US" sz="2400" dirty="0"/>
-              <a:t>Assigned</a:t>
-            </a:r>
-            <a:r>
-              <a:rPr lang="en-US" dirty="0"/>
-              <a:t> Seat</a:t>
-            </a:r>
-            <a:endParaRPr dirty="0"/>
-          </a:p>
-        </p:txBody>
-      </p:sp>
-      <p:sp>
-        <p:nvSpPr>
-          <p:cNvPr id="326" name="Google Shape;326;p47"/>
-          <p:cNvSpPr txBox="1">
-            <a:spLocks noGrp="1"/>
-          </p:cNvSpPr>
-          <p:nvPr>
-            <p:ph type="sldNum" idx="12"/>
-          </p:nvPr>
-        </p:nvSpPr>
-        <p:spPr>
-          <a:xfrm>
-            <a:off x="8472458" y="4663217"/>
-            <a:ext cx="548700" cy="393600"/>
-          </a:xfrm>
-          <a:prstGeom prst="rect">
-            <a:avLst/>
-          </a:prstGeom>
-        </p:spPr>
-        <p:txBody>
-          <a:bodyPr spcFirstLastPara="1" wrap="square" lIns="91425" tIns="91425" rIns="91425" bIns="91425" anchor="ctr" anchorCtr="0">
-            <a:noAutofit/>
-          </a:bodyPr>
-          <a:lstStyle/>
-          <a:p>
-            <a:pPr marL="0" lvl="0" indent="0" algn="r" rtl="0">
-              <a:spcBef>
-                <a:spcPts val="0"/>
-              </a:spcBef>
-              <a:spcAft>
-                <a:spcPts val="0"/>
-              </a:spcAft>
-              <a:buNone/>
-            </a:pPr>
-            <a:fld id="{00000000-1234-1234-1234-123412341234}" type="slidenum">
-              <a:rPr lang="en"/>
-              <a:t>10</a:t>
-            </a:fld>
-            <a:endParaRPr/>
-          </a:p>
-        </p:txBody>
-      </p:sp>
-      <p:pic>
-        <p:nvPicPr>
-          <p:cNvPr id="3" name="Picture 2">
-            <a:extLst>
-              <a:ext uri="{FF2B5EF4-FFF2-40B4-BE49-F238E27FC236}">
-                <a16:creationId xmlns:a16="http://schemas.microsoft.com/office/drawing/2014/main" id="{565A4964-E8A9-A46D-F4BE-E7D41C14EF1B}"/>
-              </a:ext>
-            </a:extLst>
-          </p:cNvPr>
-          <p:cNvPicPr>
-            <a:picLocks noChangeAspect="1"/>
-          </p:cNvPicPr>
-          <p:nvPr/>
-        </p:nvPicPr>
-        <p:blipFill>
-          <a:blip r:embed="rId3"/>
-          <a:stretch>
-            <a:fillRect/>
-          </a:stretch>
-        </p:blipFill>
-        <p:spPr>
-          <a:xfrm>
-            <a:off x="0" y="559220"/>
-            <a:ext cx="9144000" cy="4471763"/>
-          </a:xfrm>
-          <a:prstGeom prst="rect">
-            <a:avLst/>
-          </a:prstGeom>
-        </p:spPr>
-      </p:pic>
-    </p:spTree>
-    <p:extLst>
-      <p:ext uri="{BB962C8B-B14F-4D97-AF65-F5344CB8AC3E}">
-        <p14:creationId xmlns:p14="http://schemas.microsoft.com/office/powerpoint/2010/main" val="2495509868"/>
-      </p:ext>
-    </p:extLst>
-  </p:cSld>
-  <p:clrMapOvr>
-    <a:masterClrMapping/>
-  </p:clrMapOvr>
-</p:sld>
-</file>
-
-<file path=ppt/slides/slide11.xml><?xml version="1.0" encoding="utf-8"?>
-<p:sld xmlns:a="http://schemas.openxmlformats.org/drawingml/2006/main" xmlns:r="http://schemas.openxmlformats.org/officeDocument/2006/relationships" xmlns:p="http://schemas.openxmlformats.org/presentationml/2006/main" show="0">
-  <p:cSld>
-    <p:spTree>
-      <p:nvGrpSpPr>
-        <p:cNvPr id="1" name="Shape 323"/>
-        <p:cNvGrpSpPr/>
-        <p:nvPr/>
-      </p:nvGrpSpPr>
-      <p:grpSpPr>
-        <a:xfrm>
-          <a:off x="0" y="0"/>
-          <a:ext cx="0" cy="0"/>
-          <a:chOff x="0" y="0"/>
-          <a:chExt cx="0" cy="0"/>
-        </a:xfrm>
-      </p:grpSpPr>
-      <p:sp>
-        <p:nvSpPr>
-          <p:cNvPr id="324" name="Google Shape;324;p47"/>
-          <p:cNvSpPr txBox="1">
-            <a:spLocks noGrp="1"/>
-          </p:cNvSpPr>
-          <p:nvPr>
-            <p:ph type="title"/>
-          </p:nvPr>
-        </p:nvSpPr>
-        <p:spPr>
-          <a:xfrm>
-            <a:off x="226208" y="1"/>
-            <a:ext cx="8520600" cy="464980"/>
-          </a:xfrm>
-          <a:prstGeom prst="rect">
-            <a:avLst/>
-          </a:prstGeom>
-        </p:spPr>
-        <p:txBody>
-          <a:bodyPr spcFirstLastPara="1" wrap="square" lIns="91425" tIns="91425" rIns="91425" bIns="91425" anchor="t" anchorCtr="0">
-            <a:noAutofit/>
-          </a:bodyPr>
-          <a:lstStyle/>
-          <a:p>
-            <a:pPr marL="0" lvl="0" indent="0" algn="ctr" rtl="0">
-              <a:spcBef>
-                <a:spcPts val="0"/>
-              </a:spcBef>
-              <a:spcAft>
-                <a:spcPts val="0"/>
-              </a:spcAft>
-              <a:buNone/>
-            </a:pPr>
-            <a:r>
-              <a:rPr lang="en-US" dirty="0"/>
-              <a:t>Use </a:t>
-            </a:r>
-            <a:r>
-              <a:rPr lang="en-US" sz="2400" dirty="0"/>
-              <a:t>Assigned</a:t>
-            </a:r>
-            <a:r>
-              <a:rPr lang="en-US" dirty="0"/>
-              <a:t> Seat</a:t>
-            </a:r>
-            <a:endParaRPr dirty="0"/>
-          </a:p>
-        </p:txBody>
-      </p:sp>
-      <p:sp>
-        <p:nvSpPr>
-          <p:cNvPr id="326" name="Google Shape;326;p47"/>
-          <p:cNvSpPr txBox="1">
-            <a:spLocks noGrp="1"/>
-          </p:cNvSpPr>
-          <p:nvPr>
-            <p:ph type="sldNum" idx="12"/>
-          </p:nvPr>
-        </p:nvSpPr>
-        <p:spPr>
-          <a:xfrm>
-            <a:off x="8472458" y="4663217"/>
-            <a:ext cx="548700" cy="393600"/>
-          </a:xfrm>
-          <a:prstGeom prst="rect">
-            <a:avLst/>
-          </a:prstGeom>
-        </p:spPr>
-        <p:txBody>
-          <a:bodyPr spcFirstLastPara="1" wrap="square" lIns="91425" tIns="91425" rIns="91425" bIns="91425" anchor="ctr" anchorCtr="0">
-            <a:noAutofit/>
-          </a:bodyPr>
-          <a:lstStyle/>
-          <a:p>
-            <a:pPr marL="0" lvl="0" indent="0" algn="r" rtl="0">
-              <a:spcBef>
-                <a:spcPts val="0"/>
-              </a:spcBef>
-              <a:spcAft>
-                <a:spcPts val="0"/>
-              </a:spcAft>
-              <a:buNone/>
-            </a:pPr>
-            <a:fld id="{00000000-1234-1234-1234-123412341234}" type="slidenum">
-              <a:rPr lang="en"/>
-              <a:t>11</a:t>
-            </a:fld>
-            <a:endParaRPr/>
-          </a:p>
-        </p:txBody>
-      </p:sp>
-      <p:pic>
-        <p:nvPicPr>
-          <p:cNvPr id="6" name="Picture 5">
-            <a:extLst>
-              <a:ext uri="{FF2B5EF4-FFF2-40B4-BE49-F238E27FC236}">
-                <a16:creationId xmlns:a16="http://schemas.microsoft.com/office/drawing/2014/main" id="{DED32793-7C09-E3A3-94E5-B5D46727A1D0}"/>
-              </a:ext>
-            </a:extLst>
-          </p:cNvPr>
-          <p:cNvPicPr>
-            <a:picLocks noChangeAspect="1"/>
-          </p:cNvPicPr>
-          <p:nvPr/>
-        </p:nvPicPr>
-        <p:blipFill>
-          <a:blip r:embed="rId3"/>
-          <a:stretch>
-            <a:fillRect/>
-          </a:stretch>
-        </p:blipFill>
-        <p:spPr>
-          <a:xfrm>
-            <a:off x="-1" y="551663"/>
-            <a:ext cx="9144001" cy="4591837"/>
-          </a:xfrm>
-          <a:prstGeom prst="rect">
-            <a:avLst/>
-          </a:prstGeom>
-        </p:spPr>
-      </p:pic>
-    </p:spTree>
-    <p:extLst>
-      <p:ext uri="{BB962C8B-B14F-4D97-AF65-F5344CB8AC3E}">
-        <p14:creationId xmlns:p14="http://schemas.microsoft.com/office/powerpoint/2010/main" val="4226348449"/>
-      </p:ext>
-    </p:extLst>
-  </p:cSld>
-  <p:clrMapOvr>
-    <a:masterClrMapping/>
-  </p:clrMapOvr>
-</p:sld>
-</file>
-
-<file path=ppt/slides/slide12.xml><?xml version="1.0" encoding="utf-8"?>
-<p:sld xmlns:a="http://schemas.openxmlformats.org/drawingml/2006/main" xmlns:r="http://schemas.openxmlformats.org/officeDocument/2006/relationships" xmlns:p="http://schemas.openxmlformats.org/presentationml/2006/main" show="0">
-  <p:cSld>
-    <p:spTree>
-      <p:nvGrpSpPr>
-        <p:cNvPr id="1" name="Shape 323"/>
-        <p:cNvGrpSpPr/>
-        <p:nvPr/>
-      </p:nvGrpSpPr>
-      <p:grpSpPr>
-        <a:xfrm>
-          <a:off x="0" y="0"/>
-          <a:ext cx="0" cy="0"/>
-          <a:chOff x="0" y="0"/>
-          <a:chExt cx="0" cy="0"/>
-        </a:xfrm>
-      </p:grpSpPr>
-      <p:sp>
-        <p:nvSpPr>
-          <p:cNvPr id="324" name="Google Shape;324;p47"/>
-          <p:cNvSpPr txBox="1">
-            <a:spLocks noGrp="1"/>
-          </p:cNvSpPr>
-          <p:nvPr>
-            <p:ph type="title"/>
-          </p:nvPr>
-        </p:nvSpPr>
-        <p:spPr>
-          <a:xfrm>
-            <a:off x="226208" y="1"/>
-            <a:ext cx="8520600" cy="464980"/>
-          </a:xfrm>
-          <a:prstGeom prst="rect">
-            <a:avLst/>
-          </a:prstGeom>
-        </p:spPr>
-        <p:txBody>
-          <a:bodyPr spcFirstLastPara="1" wrap="square" lIns="91425" tIns="91425" rIns="91425" bIns="91425" anchor="t" anchorCtr="0">
-            <a:noAutofit/>
-          </a:bodyPr>
-          <a:lstStyle/>
-          <a:p>
-            <a:pPr marL="0" lvl="0" indent="0" algn="ctr" rtl="0">
-              <a:spcBef>
-                <a:spcPts val="0"/>
-              </a:spcBef>
-              <a:spcAft>
-                <a:spcPts val="0"/>
-              </a:spcAft>
-              <a:buNone/>
-            </a:pPr>
-            <a:r>
-              <a:rPr lang="en-US" dirty="0"/>
-              <a:t>Use </a:t>
-            </a:r>
-            <a:r>
-              <a:rPr lang="en-US" sz="2400" dirty="0"/>
-              <a:t>Assigned</a:t>
-            </a:r>
-            <a:r>
-              <a:rPr lang="en-US" dirty="0"/>
-              <a:t> Seat</a:t>
-            </a:r>
-            <a:endParaRPr dirty="0"/>
-          </a:p>
-        </p:txBody>
-      </p:sp>
-      <p:sp>
-        <p:nvSpPr>
-          <p:cNvPr id="326" name="Google Shape;326;p47"/>
-          <p:cNvSpPr txBox="1">
-            <a:spLocks noGrp="1"/>
-          </p:cNvSpPr>
-          <p:nvPr>
-            <p:ph type="sldNum" idx="12"/>
-          </p:nvPr>
-        </p:nvSpPr>
-        <p:spPr>
-          <a:xfrm>
-            <a:off x="8472458" y="4663217"/>
-            <a:ext cx="548700" cy="393600"/>
-          </a:xfrm>
-          <a:prstGeom prst="rect">
-            <a:avLst/>
-          </a:prstGeom>
-        </p:spPr>
-        <p:txBody>
-          <a:bodyPr spcFirstLastPara="1" wrap="square" lIns="91425" tIns="91425" rIns="91425" bIns="91425" anchor="ctr" anchorCtr="0">
-            <a:noAutofit/>
-          </a:bodyPr>
-          <a:lstStyle/>
-          <a:p>
-            <a:pPr marL="0" lvl="0" indent="0" algn="r" rtl="0">
-              <a:spcBef>
-                <a:spcPts val="0"/>
-              </a:spcBef>
-              <a:spcAft>
-                <a:spcPts val="0"/>
-              </a:spcAft>
-              <a:buNone/>
-            </a:pPr>
-            <a:fld id="{00000000-1234-1234-1234-123412341234}" type="slidenum">
-              <a:rPr lang="en"/>
-              <a:t>12</a:t>
-            </a:fld>
-            <a:endParaRPr/>
-          </a:p>
-        </p:txBody>
-      </p:sp>
-      <p:pic>
-        <p:nvPicPr>
-          <p:cNvPr id="3" name="Picture 2">
-            <a:extLst>
-              <a:ext uri="{FF2B5EF4-FFF2-40B4-BE49-F238E27FC236}">
-                <a16:creationId xmlns:a16="http://schemas.microsoft.com/office/drawing/2014/main" id="{92DE4AAC-70FE-A114-5258-F5B22EDDED45}"/>
-              </a:ext>
-            </a:extLst>
-          </p:cNvPr>
-          <p:cNvPicPr>
-            <a:picLocks noChangeAspect="1"/>
-          </p:cNvPicPr>
-          <p:nvPr/>
-        </p:nvPicPr>
-        <p:blipFill>
-          <a:blip r:embed="rId3"/>
-          <a:stretch>
-            <a:fillRect/>
-          </a:stretch>
-        </p:blipFill>
-        <p:spPr>
-          <a:xfrm>
-            <a:off x="0" y="716280"/>
-            <a:ext cx="9144000" cy="4427218"/>
-          </a:xfrm>
-          <a:prstGeom prst="rect">
-            <a:avLst/>
-          </a:prstGeom>
-        </p:spPr>
-      </p:pic>
-    </p:spTree>
-    <p:extLst>
-      <p:ext uri="{BB962C8B-B14F-4D97-AF65-F5344CB8AC3E}">
-        <p14:creationId xmlns:p14="http://schemas.microsoft.com/office/powerpoint/2010/main" val="1976403023"/>
-      </p:ext>
-    </p:extLst>
-  </p:cSld>
-  <p:clrMapOvr>
-    <a:masterClrMapping/>
-  </p:clrMapOvr>
-</p:sld>
-</file>
-
-<file path=ppt/slides/slide13.xml><?xml version="1.0" encoding="utf-8"?>
-<p:sld xmlns:a="http://schemas.openxmlformats.org/drawingml/2006/main" xmlns:r="http://schemas.openxmlformats.org/officeDocument/2006/relationships" xmlns:p="http://schemas.openxmlformats.org/presentationml/2006/main" show="0">
-  <p:cSld>
-    <p:spTree>
-      <p:nvGrpSpPr>
-        <p:cNvPr id="1" name="Shape 323"/>
-        <p:cNvGrpSpPr/>
-        <p:nvPr/>
-      </p:nvGrpSpPr>
-      <p:grpSpPr>
-        <a:xfrm>
-          <a:off x="0" y="0"/>
-          <a:ext cx="0" cy="0"/>
-          <a:chOff x="0" y="0"/>
-          <a:chExt cx="0" cy="0"/>
-        </a:xfrm>
-      </p:grpSpPr>
-      <p:sp>
-        <p:nvSpPr>
-          <p:cNvPr id="324" name="Google Shape;324;p47"/>
-          <p:cNvSpPr txBox="1">
-            <a:spLocks noGrp="1"/>
-          </p:cNvSpPr>
-          <p:nvPr>
-            <p:ph type="title"/>
-          </p:nvPr>
-        </p:nvSpPr>
-        <p:spPr>
-          <a:xfrm>
-            <a:off x="226208" y="1"/>
-            <a:ext cx="8520600" cy="464980"/>
-          </a:xfrm>
-          <a:prstGeom prst="rect">
-            <a:avLst/>
-          </a:prstGeom>
-        </p:spPr>
-        <p:txBody>
-          <a:bodyPr spcFirstLastPara="1" wrap="square" lIns="91425" tIns="91425" rIns="91425" bIns="91425" anchor="t" anchorCtr="0">
-            <a:noAutofit/>
-          </a:bodyPr>
-          <a:lstStyle/>
-          <a:p>
-            <a:pPr marL="0" lvl="0" indent="0" algn="ctr" rtl="0">
-              <a:spcBef>
-                <a:spcPts val="0"/>
-              </a:spcBef>
-              <a:spcAft>
-                <a:spcPts val="0"/>
-              </a:spcAft>
-              <a:buNone/>
-            </a:pPr>
-            <a:r>
-              <a:rPr lang="en-US" dirty="0"/>
-              <a:t>Use </a:t>
-            </a:r>
-            <a:r>
-              <a:rPr lang="en-US" sz="2400" dirty="0"/>
-              <a:t>Assigned</a:t>
-            </a:r>
-            <a:r>
-              <a:rPr lang="en-US" dirty="0"/>
-              <a:t> Seat</a:t>
-            </a:r>
-            <a:endParaRPr dirty="0"/>
-          </a:p>
-        </p:txBody>
-      </p:sp>
-      <p:sp>
-        <p:nvSpPr>
-          <p:cNvPr id="326" name="Google Shape;326;p47"/>
-          <p:cNvSpPr txBox="1">
-            <a:spLocks noGrp="1"/>
-          </p:cNvSpPr>
-          <p:nvPr>
-            <p:ph type="sldNum" idx="12"/>
-          </p:nvPr>
-        </p:nvSpPr>
-        <p:spPr>
-          <a:xfrm>
-            <a:off x="8472458" y="4663217"/>
-            <a:ext cx="548700" cy="393600"/>
-          </a:xfrm>
-          <a:prstGeom prst="rect">
-            <a:avLst/>
-          </a:prstGeom>
-        </p:spPr>
-        <p:txBody>
-          <a:bodyPr spcFirstLastPara="1" wrap="square" lIns="91425" tIns="91425" rIns="91425" bIns="91425" anchor="ctr" anchorCtr="0">
-            <a:noAutofit/>
-          </a:bodyPr>
-          <a:lstStyle/>
-          <a:p>
-            <a:pPr marL="0" lvl="0" indent="0" algn="r" rtl="0">
-              <a:spcBef>
-                <a:spcPts val="0"/>
-              </a:spcBef>
-              <a:spcAft>
-                <a:spcPts val="0"/>
-              </a:spcAft>
-              <a:buNone/>
-            </a:pPr>
-            <a:fld id="{00000000-1234-1234-1234-123412341234}" type="slidenum">
-              <a:rPr lang="en"/>
-              <a:t>13</a:t>
-            </a:fld>
-            <a:endParaRPr/>
-          </a:p>
-        </p:txBody>
-      </p:sp>
-      <p:pic>
-        <p:nvPicPr>
-          <p:cNvPr id="4" name="Picture 3">
-            <a:extLst>
-              <a:ext uri="{FF2B5EF4-FFF2-40B4-BE49-F238E27FC236}">
-                <a16:creationId xmlns:a16="http://schemas.microsoft.com/office/drawing/2014/main" id="{DCD752B9-EFAE-AFC1-7D39-6763B89DE8D3}"/>
-              </a:ext>
-            </a:extLst>
-          </p:cNvPr>
-          <p:cNvPicPr>
-            <a:picLocks noChangeAspect="1"/>
-          </p:cNvPicPr>
-          <p:nvPr/>
-        </p:nvPicPr>
-        <p:blipFill>
-          <a:blip r:embed="rId3"/>
-          <a:stretch>
-            <a:fillRect/>
-          </a:stretch>
-        </p:blipFill>
-        <p:spPr>
-          <a:xfrm>
-            <a:off x="0" y="652130"/>
-            <a:ext cx="9144000" cy="4491369"/>
-          </a:xfrm>
-          <a:prstGeom prst="rect">
-            <a:avLst/>
-          </a:prstGeom>
-        </p:spPr>
-      </p:pic>
-    </p:spTree>
-    <p:extLst>
-      <p:ext uri="{BB962C8B-B14F-4D97-AF65-F5344CB8AC3E}">
-        <p14:creationId xmlns:p14="http://schemas.microsoft.com/office/powerpoint/2010/main" val="3365057756"/>
-      </p:ext>
-    </p:extLst>
-  </p:cSld>
-  <p:clrMapOvr>
-    <a:masterClrMapping/>
-  </p:clrMapOvr>
-</p:sld>
-</file>
-
-<file path=ppt/slides/slide2.xml><?xml version="1.0" encoding="utf-8"?>
+<file path=ppt/slides/slide3.xml><?xml version="1.0" encoding="utf-8"?>
 <p:sld xmlns:a="http://schemas.openxmlformats.org/drawingml/2006/main" xmlns:r="http://schemas.openxmlformats.org/officeDocument/2006/relationships" xmlns:p="http://schemas.openxmlformats.org/presentationml/2006/main" show="0">
   <p:cSld>
     <p:spTree>
@@ -8009,7 +8588,7 @@
             </a:pPr>
             <a:fld id="{00000000-1234-1234-1234-123412341234}" type="slidenum">
               <a:rPr lang="en"/>
-              <a:t>2</a:t>
+              <a:t>3</a:t>
             </a:fld>
             <a:endParaRPr/>
           </a:p>
@@ -8718,585 +9297,6 @@
     <p:extLst>
       <p:ext uri="{BB962C8B-B14F-4D97-AF65-F5344CB8AC3E}">
         <p14:creationId xmlns:p14="http://schemas.microsoft.com/office/powerpoint/2010/main" val="1835810010"/>
-      </p:ext>
-    </p:extLst>
-  </p:cSld>
-  <p:clrMapOvr>
-    <a:masterClrMapping/>
-  </p:clrMapOvr>
-</p:sld>
-</file>
-
-<file path=ppt/slides/slide3.xml><?xml version="1.0" encoding="utf-8"?>
-<p:sld xmlns:a="http://schemas.openxmlformats.org/drawingml/2006/main" xmlns:r="http://schemas.openxmlformats.org/officeDocument/2006/relationships" xmlns:p="http://schemas.openxmlformats.org/presentationml/2006/main" show="0">
-  <p:cSld>
-    <p:spTree>
-      <p:nvGrpSpPr>
-        <p:cNvPr id="1" name="Shape 323"/>
-        <p:cNvGrpSpPr/>
-        <p:nvPr/>
-      </p:nvGrpSpPr>
-      <p:grpSpPr>
-        <a:xfrm>
-          <a:off x="0" y="0"/>
-          <a:ext cx="0" cy="0"/>
-          <a:chOff x="0" y="0"/>
-          <a:chExt cx="0" cy="0"/>
-        </a:xfrm>
-      </p:grpSpPr>
-      <p:sp>
-        <p:nvSpPr>
-          <p:cNvPr id="324" name="Google Shape;324;p47"/>
-          <p:cNvSpPr txBox="1">
-            <a:spLocks noGrp="1"/>
-          </p:cNvSpPr>
-          <p:nvPr>
-            <p:ph type="title"/>
-          </p:nvPr>
-        </p:nvSpPr>
-        <p:spPr>
-          <a:xfrm>
-            <a:off x="314621" y="235914"/>
-            <a:ext cx="8520600" cy="623700"/>
-          </a:xfrm>
-          <a:prstGeom prst="rect">
-            <a:avLst/>
-          </a:prstGeom>
-        </p:spPr>
-        <p:txBody>
-          <a:bodyPr spcFirstLastPara="1" wrap="square" lIns="91425" tIns="91425" rIns="91425" bIns="91425" anchor="t" anchorCtr="0">
-            <a:noAutofit/>
-          </a:bodyPr>
-          <a:lstStyle/>
-          <a:p>
-            <a:pPr marL="0" lvl="0" indent="0" algn="ctr" rtl="0">
-              <a:spcBef>
-                <a:spcPts val="0"/>
-              </a:spcBef>
-              <a:spcAft>
-                <a:spcPts val="0"/>
-              </a:spcAft>
-              <a:buNone/>
-            </a:pPr>
-            <a:r>
-              <a:rPr lang="en-US" dirty="0"/>
-              <a:t>GCIS – Software Development and Problem Solving</a:t>
-            </a:r>
-            <a:endParaRPr dirty="0"/>
-          </a:p>
-        </p:txBody>
-      </p:sp>
-      <p:sp>
-        <p:nvSpPr>
-          <p:cNvPr id="325" name="Google Shape;325;p47"/>
-          <p:cNvSpPr txBox="1">
-            <a:spLocks noGrp="1"/>
-          </p:cNvSpPr>
-          <p:nvPr>
-            <p:ph type="body" idx="1"/>
-          </p:nvPr>
-        </p:nvSpPr>
-        <p:spPr>
-          <a:xfrm>
-            <a:off x="0" y="1608922"/>
-            <a:ext cx="9149842" cy="1226403"/>
-          </a:xfrm>
-          <a:prstGeom prst="rect">
-            <a:avLst/>
-          </a:prstGeom>
-        </p:spPr>
-        <p:txBody>
-          <a:bodyPr spcFirstLastPara="1" wrap="square" lIns="91425" tIns="91425" rIns="91425" bIns="91425" anchor="ctr" anchorCtr="0">
-            <a:noAutofit/>
-          </a:bodyPr>
-          <a:lstStyle/>
-          <a:p>
-            <a:pPr marL="146050" indent="0" algn="ctr">
-              <a:buNone/>
-            </a:pPr>
-            <a:r>
-              <a:rPr lang="en-US" sz="2400" dirty="0"/>
-              <a:t>Take Quiz – Midterm Exam 3</a:t>
-            </a:r>
-          </a:p>
-          <a:p>
-            <a:pPr marL="146050" indent="0" algn="ctr">
-              <a:buNone/>
-            </a:pPr>
-            <a:r>
-              <a:rPr lang="en-US" sz="3200" b="1" dirty="0">
-                <a:solidFill>
-                  <a:schemeClr val="tx1"/>
-                </a:solidFill>
-              </a:rPr>
-              <a:t>Password - </a:t>
-            </a:r>
-            <a:r>
-              <a:rPr lang="en-US" sz="3200" b="1" dirty="0" err="1">
-                <a:solidFill>
-                  <a:schemeClr val="tx1"/>
-                </a:solidFill>
-              </a:rPr>
-              <a:t>NetworkingThreads</a:t>
-            </a:r>
-            <a:endParaRPr sz="3200" b="1" dirty="0">
-              <a:solidFill>
-                <a:schemeClr val="tx1"/>
-              </a:solidFill>
-              <a:highlight>
-                <a:srgbClr val="FFFF00"/>
-              </a:highlight>
-            </a:endParaRPr>
-          </a:p>
-        </p:txBody>
-      </p:sp>
-      <p:sp>
-        <p:nvSpPr>
-          <p:cNvPr id="326" name="Google Shape;326;p47"/>
-          <p:cNvSpPr txBox="1">
-            <a:spLocks noGrp="1"/>
-          </p:cNvSpPr>
-          <p:nvPr>
-            <p:ph type="sldNum" idx="12"/>
-          </p:nvPr>
-        </p:nvSpPr>
-        <p:spPr>
-          <a:xfrm>
-            <a:off x="8472458" y="4663217"/>
-            <a:ext cx="548700" cy="393600"/>
-          </a:xfrm>
-          <a:prstGeom prst="rect">
-            <a:avLst/>
-          </a:prstGeom>
-        </p:spPr>
-        <p:txBody>
-          <a:bodyPr spcFirstLastPara="1" wrap="square" lIns="91425" tIns="91425" rIns="91425" bIns="91425" anchor="ctr" anchorCtr="0">
-            <a:noAutofit/>
-          </a:bodyPr>
-          <a:lstStyle/>
-          <a:p>
-            <a:pPr marL="0" lvl="0" indent="0" algn="r" rtl="0">
-              <a:spcBef>
-                <a:spcPts val="0"/>
-              </a:spcBef>
-              <a:spcAft>
-                <a:spcPts val="0"/>
-              </a:spcAft>
-              <a:buNone/>
-            </a:pPr>
-            <a:fld id="{00000000-1234-1234-1234-123412341234}" type="slidenum">
-              <a:rPr lang="en"/>
-              <a:t>3</a:t>
-            </a:fld>
-            <a:endParaRPr/>
-          </a:p>
-        </p:txBody>
-      </p:sp>
-      <p:sp>
-        <p:nvSpPr>
-          <p:cNvPr id="2" name="TextBox 1">
-            <a:extLst>
-              <a:ext uri="{FF2B5EF4-FFF2-40B4-BE49-F238E27FC236}">
-                <a16:creationId xmlns:a16="http://schemas.microsoft.com/office/drawing/2014/main" id="{DCC33EBB-1C9D-B9A9-88E6-F3466077417F}"/>
-              </a:ext>
-            </a:extLst>
-          </p:cNvPr>
-          <p:cNvSpPr txBox="1"/>
-          <p:nvPr/>
-        </p:nvSpPr>
-        <p:spPr>
-          <a:xfrm>
-            <a:off x="-5842" y="1277369"/>
-            <a:ext cx="9144000" cy="307777"/>
-          </a:xfrm>
-          <a:prstGeom prst="rect">
-            <a:avLst/>
-          </a:prstGeom>
-          <a:solidFill>
-            <a:srgbClr val="FFC000"/>
-          </a:solidFill>
-        </p:spPr>
-        <p:txBody>
-          <a:bodyPr wrap="square" rtlCol="0">
-            <a:spAutoFit/>
-          </a:bodyPr>
-          <a:lstStyle/>
-          <a:p>
-            <a:pPr algn="ctr"/>
-            <a:r>
-              <a:rPr lang="en-US" b="1" dirty="0"/>
-              <a:t>Midterm Exam 3 - Written</a:t>
-            </a:r>
-          </a:p>
-        </p:txBody>
-      </p:sp>
-      <p:sp>
-        <p:nvSpPr>
-          <p:cNvPr id="3" name="TextBox 2">
-            <a:extLst>
-              <a:ext uri="{FF2B5EF4-FFF2-40B4-BE49-F238E27FC236}">
-                <a16:creationId xmlns:a16="http://schemas.microsoft.com/office/drawing/2014/main" id="{25A19346-2F9F-0DB9-0B08-CF872EB1D563}"/>
-              </a:ext>
-            </a:extLst>
-          </p:cNvPr>
-          <p:cNvSpPr txBox="1"/>
-          <p:nvPr/>
-        </p:nvSpPr>
-        <p:spPr>
-          <a:xfrm>
-            <a:off x="0" y="2886770"/>
-            <a:ext cx="9144000" cy="307777"/>
-          </a:xfrm>
-          <a:prstGeom prst="rect">
-            <a:avLst/>
-          </a:prstGeom>
-          <a:solidFill>
-            <a:srgbClr val="FFC000"/>
-          </a:solidFill>
-        </p:spPr>
-        <p:txBody>
-          <a:bodyPr wrap="square" rtlCol="0">
-            <a:spAutoFit/>
-          </a:bodyPr>
-          <a:lstStyle/>
-          <a:p>
-            <a:r>
-              <a:rPr lang="en-US" dirty="0"/>
-              <a:t>Practicum</a:t>
-            </a:r>
-          </a:p>
-        </p:txBody>
-      </p:sp>
-      <p:sp>
-        <p:nvSpPr>
-          <p:cNvPr id="4" name="Google Shape;325;p47">
-            <a:extLst>
-              <a:ext uri="{FF2B5EF4-FFF2-40B4-BE49-F238E27FC236}">
-                <a16:creationId xmlns:a16="http://schemas.microsoft.com/office/drawing/2014/main" id="{11D0E6FB-E344-369B-CE83-B3CF5834F823}"/>
-              </a:ext>
-            </a:extLst>
-          </p:cNvPr>
-          <p:cNvSpPr txBox="1">
-            <a:spLocks/>
-          </p:cNvSpPr>
-          <p:nvPr/>
-        </p:nvSpPr>
-        <p:spPr>
-          <a:xfrm>
-            <a:off x="122842" y="3424963"/>
-            <a:ext cx="8478300" cy="1435054"/>
-          </a:xfrm>
-          <a:prstGeom prst="rect">
-            <a:avLst/>
-          </a:prstGeom>
-          <a:noFill/>
-          <a:ln>
-            <a:noFill/>
-          </a:ln>
-        </p:spPr>
-        <p:txBody>
-          <a:bodyPr spcFirstLastPara="1" wrap="square" lIns="91425" tIns="91425" rIns="91425" bIns="91425" anchor="ctr" anchorCtr="0">
-            <a:noAutofit/>
-          </a:bodyPr>
-          <a:lstStyle>
-            <a:defPPr marR="0" lvl="0" algn="l" rtl="0">
-              <a:lnSpc>
-                <a:spcPct val="100000"/>
-              </a:lnSpc>
-              <a:spcBef>
-                <a:spcPts val="0"/>
-              </a:spcBef>
-              <a:spcAft>
-                <a:spcPts val="0"/>
-              </a:spcAft>
-            </a:defPPr>
-            <a:lvl1pPr marL="457200" marR="0" lvl="0" indent="-311150" algn="l" rtl="0">
-              <a:lnSpc>
-                <a:spcPct val="115000"/>
-              </a:lnSpc>
-              <a:spcBef>
-                <a:spcPts val="0"/>
-              </a:spcBef>
-              <a:spcAft>
-                <a:spcPts val="0"/>
-              </a:spcAft>
-              <a:buClr>
-                <a:schemeClr val="dk2"/>
-              </a:buClr>
-              <a:buSzPts val="1300"/>
-              <a:buFont typeface="Roboto"/>
-              <a:buChar char="●"/>
-              <a:defRPr sz="1300" b="0" i="0" u="none" strike="noStrike" cap="none">
-                <a:solidFill>
-                  <a:schemeClr val="dk2"/>
-                </a:solidFill>
-                <a:latin typeface="Roboto"/>
-                <a:ea typeface="Roboto"/>
-                <a:cs typeface="Roboto"/>
-                <a:sym typeface="Roboto"/>
-              </a:defRPr>
-            </a:lvl1pPr>
-            <a:lvl2pPr marL="914400" marR="0" lvl="1" indent="-298450" algn="l" rtl="0">
-              <a:lnSpc>
-                <a:spcPct val="115000"/>
-              </a:lnSpc>
-              <a:spcBef>
-                <a:spcPts val="1600"/>
-              </a:spcBef>
-              <a:spcAft>
-                <a:spcPts val="0"/>
-              </a:spcAft>
-              <a:buClr>
-                <a:schemeClr val="dk2"/>
-              </a:buClr>
-              <a:buSzPts val="1100"/>
-              <a:buFont typeface="Roboto"/>
-              <a:buChar char="○"/>
-              <a:defRPr sz="1100" b="0" i="0" u="none" strike="noStrike" cap="none">
-                <a:solidFill>
-                  <a:schemeClr val="dk2"/>
-                </a:solidFill>
-                <a:latin typeface="Roboto"/>
-                <a:ea typeface="Roboto"/>
-                <a:cs typeface="Roboto"/>
-                <a:sym typeface="Roboto"/>
-              </a:defRPr>
-            </a:lvl2pPr>
-            <a:lvl3pPr marL="1371600" marR="0" lvl="2" indent="-298450" algn="l" rtl="0">
-              <a:lnSpc>
-                <a:spcPct val="115000"/>
-              </a:lnSpc>
-              <a:spcBef>
-                <a:spcPts val="1600"/>
-              </a:spcBef>
-              <a:spcAft>
-                <a:spcPts val="0"/>
-              </a:spcAft>
-              <a:buClr>
-                <a:schemeClr val="dk2"/>
-              </a:buClr>
-              <a:buSzPts val="1100"/>
-              <a:buFont typeface="Roboto"/>
-              <a:buChar char="■"/>
-              <a:defRPr sz="1100" b="0" i="0" u="none" strike="noStrike" cap="none">
-                <a:solidFill>
-                  <a:schemeClr val="dk2"/>
-                </a:solidFill>
-                <a:latin typeface="Roboto"/>
-                <a:ea typeface="Roboto"/>
-                <a:cs typeface="Roboto"/>
-                <a:sym typeface="Roboto"/>
-              </a:defRPr>
-            </a:lvl3pPr>
-            <a:lvl4pPr marL="1828800" marR="0" lvl="3" indent="-298450" algn="l" rtl="0">
-              <a:lnSpc>
-                <a:spcPct val="115000"/>
-              </a:lnSpc>
-              <a:spcBef>
-                <a:spcPts val="1600"/>
-              </a:spcBef>
-              <a:spcAft>
-                <a:spcPts val="0"/>
-              </a:spcAft>
-              <a:buClr>
-                <a:schemeClr val="dk2"/>
-              </a:buClr>
-              <a:buSzPts val="1100"/>
-              <a:buFont typeface="Roboto"/>
-              <a:buChar char="●"/>
-              <a:defRPr sz="1100" b="0" i="0" u="none" strike="noStrike" cap="none">
-                <a:solidFill>
-                  <a:schemeClr val="dk2"/>
-                </a:solidFill>
-                <a:latin typeface="Roboto"/>
-                <a:ea typeface="Roboto"/>
-                <a:cs typeface="Roboto"/>
-                <a:sym typeface="Roboto"/>
-              </a:defRPr>
-            </a:lvl4pPr>
-            <a:lvl5pPr marL="2286000" marR="0" lvl="4" indent="-298450" algn="l" rtl="0">
-              <a:lnSpc>
-                <a:spcPct val="115000"/>
-              </a:lnSpc>
-              <a:spcBef>
-                <a:spcPts val="1600"/>
-              </a:spcBef>
-              <a:spcAft>
-                <a:spcPts val="0"/>
-              </a:spcAft>
-              <a:buClr>
-                <a:schemeClr val="dk2"/>
-              </a:buClr>
-              <a:buSzPts val="1100"/>
-              <a:buFont typeface="Roboto"/>
-              <a:buChar char="○"/>
-              <a:defRPr sz="1100" b="0" i="0" u="none" strike="noStrike" cap="none">
-                <a:solidFill>
-                  <a:schemeClr val="dk2"/>
-                </a:solidFill>
-                <a:latin typeface="Roboto"/>
-                <a:ea typeface="Roboto"/>
-                <a:cs typeface="Roboto"/>
-                <a:sym typeface="Roboto"/>
-              </a:defRPr>
-            </a:lvl5pPr>
-            <a:lvl6pPr marL="2743200" marR="0" lvl="5" indent="-298450" algn="l" rtl="0">
-              <a:lnSpc>
-                <a:spcPct val="115000"/>
-              </a:lnSpc>
-              <a:spcBef>
-                <a:spcPts val="1600"/>
-              </a:spcBef>
-              <a:spcAft>
-                <a:spcPts val="0"/>
-              </a:spcAft>
-              <a:buClr>
-                <a:schemeClr val="dk2"/>
-              </a:buClr>
-              <a:buSzPts val="1100"/>
-              <a:buFont typeface="Roboto"/>
-              <a:buChar char="■"/>
-              <a:defRPr sz="1100" b="0" i="0" u="none" strike="noStrike" cap="none">
-                <a:solidFill>
-                  <a:schemeClr val="dk2"/>
-                </a:solidFill>
-                <a:latin typeface="Roboto"/>
-                <a:ea typeface="Roboto"/>
-                <a:cs typeface="Roboto"/>
-                <a:sym typeface="Roboto"/>
-              </a:defRPr>
-            </a:lvl6pPr>
-            <a:lvl7pPr marL="3200400" marR="0" lvl="6" indent="-298450" algn="l" rtl="0">
-              <a:lnSpc>
-                <a:spcPct val="115000"/>
-              </a:lnSpc>
-              <a:spcBef>
-                <a:spcPts val="1600"/>
-              </a:spcBef>
-              <a:spcAft>
-                <a:spcPts val="0"/>
-              </a:spcAft>
-              <a:buClr>
-                <a:schemeClr val="dk2"/>
-              </a:buClr>
-              <a:buSzPts val="1100"/>
-              <a:buFont typeface="Roboto"/>
-              <a:buChar char="●"/>
-              <a:defRPr sz="1100" b="0" i="0" u="none" strike="noStrike" cap="none">
-                <a:solidFill>
-                  <a:schemeClr val="dk2"/>
-                </a:solidFill>
-                <a:latin typeface="Roboto"/>
-                <a:ea typeface="Roboto"/>
-                <a:cs typeface="Roboto"/>
-                <a:sym typeface="Roboto"/>
-              </a:defRPr>
-            </a:lvl7pPr>
-            <a:lvl8pPr marL="3657600" marR="0" lvl="7" indent="-298450" algn="l" rtl="0">
-              <a:lnSpc>
-                <a:spcPct val="115000"/>
-              </a:lnSpc>
-              <a:spcBef>
-                <a:spcPts val="1600"/>
-              </a:spcBef>
-              <a:spcAft>
-                <a:spcPts val="0"/>
-              </a:spcAft>
-              <a:buClr>
-                <a:schemeClr val="dk2"/>
-              </a:buClr>
-              <a:buSzPts val="1100"/>
-              <a:buFont typeface="Roboto"/>
-              <a:buChar char="○"/>
-              <a:defRPr sz="1100" b="0" i="0" u="none" strike="noStrike" cap="none">
-                <a:solidFill>
-                  <a:schemeClr val="dk2"/>
-                </a:solidFill>
-                <a:latin typeface="Roboto"/>
-                <a:ea typeface="Roboto"/>
-                <a:cs typeface="Roboto"/>
-                <a:sym typeface="Roboto"/>
-              </a:defRPr>
-            </a:lvl8pPr>
-            <a:lvl9pPr marL="4114800" marR="0" lvl="8" indent="-298450" algn="l" rtl="0">
-              <a:lnSpc>
-                <a:spcPct val="115000"/>
-              </a:lnSpc>
-              <a:spcBef>
-                <a:spcPts val="1600"/>
-              </a:spcBef>
-              <a:spcAft>
-                <a:spcPts val="1600"/>
-              </a:spcAft>
-              <a:buClr>
-                <a:schemeClr val="dk2"/>
-              </a:buClr>
-              <a:buSzPts val="1100"/>
-              <a:buFont typeface="Roboto"/>
-              <a:buChar char="■"/>
-              <a:defRPr sz="1100" b="0" i="0" u="none" strike="noStrike" cap="none">
-                <a:solidFill>
-                  <a:schemeClr val="dk2"/>
-                </a:solidFill>
-                <a:latin typeface="Roboto"/>
-                <a:ea typeface="Roboto"/>
-                <a:cs typeface="Roboto"/>
-                <a:sym typeface="Roboto"/>
-              </a:defRPr>
-            </a:lvl9pPr>
-          </a:lstStyle>
-          <a:p>
-            <a:pPr marL="342900" indent="-342900">
-              <a:spcAft>
-                <a:spcPts val="1600"/>
-              </a:spcAft>
-            </a:pPr>
-            <a:r>
-              <a:rPr lang="en-US" sz="1600" dirty="0"/>
-              <a:t>Accept assignment Mid Exam 3 under Instructor -&gt; Alam -&gt; Exam and </a:t>
-            </a:r>
-            <a:r>
-              <a:rPr lang="en-US" sz="1600" dirty="0">
-                <a:solidFill>
-                  <a:schemeClr val="tx1"/>
-                </a:solidFill>
-              </a:rPr>
-              <a:t>Clone the repository for </a:t>
-            </a:r>
-            <a:r>
-              <a:rPr lang="en-US" sz="1600" dirty="0"/>
-              <a:t>Mid Exam 3</a:t>
-            </a:r>
-          </a:p>
-          <a:p>
-            <a:pPr marL="342900" indent="-342900">
-              <a:spcAft>
-                <a:spcPts val="1600"/>
-              </a:spcAft>
-            </a:pPr>
-            <a:r>
-              <a:rPr lang="en-US" sz="1600" dirty="0">
-                <a:solidFill>
-                  <a:schemeClr val="tx1"/>
-                </a:solidFill>
-              </a:rPr>
-              <a:t>Auto Commit is enabled for your repository. </a:t>
-            </a:r>
-            <a:r>
-              <a:rPr lang="en-US" sz="1600" b="1" dirty="0">
-                <a:solidFill>
-                  <a:schemeClr val="tx1"/>
-                </a:solidFill>
-              </a:rPr>
-              <a:t>DO NOT disable it. Disable code completion/co-pilot. Reach out to instructor or TA if you need help.</a:t>
-            </a:r>
-          </a:p>
-        </p:txBody>
-      </p:sp>
-    </p:spTree>
-    <p:extLst>
-      <p:ext uri="{BB962C8B-B14F-4D97-AF65-F5344CB8AC3E}">
-        <p14:creationId xmlns:p14="http://schemas.microsoft.com/office/powerpoint/2010/main" val="943055912"/>
       </p:ext>
     </p:extLst>
   </p:cSld>
